--- a/embedded/BeagleBone/BeagleBoneBlue.pptx
+++ b/embedded/BeagleBone/BeagleBoneBlue.pptx
@@ -1,128 +1,233 @@
 
 <file path=ppt/presentation.xml><?xml version="1.0" encoding="utf-8"?>
-<p:presentation xmlns:a="http://schemas.openxmlformats.org/drawingml/2006/main" xmlns:r="http://schemas.openxmlformats.org/officeDocument/2006/relationships" xmlns:p="http://schemas.openxmlformats.org/presentationml/2006/main" saveSubsetFonts="1">
+<p:presentation xmlns:p="http://schemas.openxmlformats.org/presentationml/2006/main" xmlns:mc="http://schemas.openxmlformats.org/markup-compatibility/2006" xmlns:p14="http://schemas.microsoft.com/office/powerpoint/2010/main" xmlns:p15="http://schemas.microsoft.com/office/powerpoint/2012/main" xmlns:r="http://schemas.openxmlformats.org/officeDocument/2006/relationships" xmlns:a="http://schemas.openxmlformats.org/drawingml/2006/main">
   <p:sldMasterIdLst>
-    <p:sldMasterId id="2147483648" r:id="rId1"/>
+    <p:sldMasterId id="2147483648" r:id="rId5"/>
   </p:sldMasterIdLst>
   <p:sldIdLst>
-    <p:sldId id="256" r:id="rId2"/>
-    <p:sldId id="263" r:id="rId3"/>
-    <p:sldId id="258" r:id="rId4"/>
-    <p:sldId id="264" r:id="rId5"/>
-    <p:sldId id="257" r:id="rId6"/>
-    <p:sldId id="259" r:id="rId7"/>
-    <p:sldId id="261" r:id="rId8"/>
-    <p:sldId id="265" r:id="rId9"/>
-    <p:sldId id="262" r:id="rId10"/>
-    <p:sldId id="260" r:id="rId11"/>
+    <p:sldId id="256" r:id="rId6"/>
+    <p:sldId id="263" r:id="rId7"/>
+    <p:sldId id="258" r:id="rId8"/>
+    <p:sldId id="266" r:id="rId9"/>
+    <p:sldId id="267" r:id="rId10"/>
+    <p:sldId id="264" r:id="rId11"/>
+    <p:sldId id="257" r:id="rId12"/>
+    <p:sldId id="259" r:id="rId13"/>
+    <p:sldId id="268" r:id="rId14"/>
+    <p:sldId id="261" r:id="rId15"/>
+    <p:sldId id="265" r:id="rId16"/>
+    <p:sldId id="262" r:id="rId17"/>
+    <p:sldId id="260" r:id="rId18"/>
+    <p:sldId id="269" r:id="rId19"/>
+    <p:sldId id="270" r:id="rId20"/>
   </p:sldIdLst>
   <p:sldSz cx="12192000" cy="6858000"/>
   <p:notesSz cx="6858000" cy="9144000"/>
   <p:defaultTextStyle>
-    <a:defPPr>
-      <a:defRPr lang="en-US"/>
-    </a:defPPr>
-    <a:lvl1pPr marL="0" algn="l" defTabSz="914400" rtl="0" eaLnBrk="1" latinLnBrk="0" hangingPunct="1">
-      <a:defRPr sz="1800" kern="1200">
+    <a:lvl1pPr marL="0" marR="0" indent="0" algn="l" defTabSz="914400">
+      <a:lnSpc>
+        <a:spcPct val="100000"/>
+      </a:lnSpc>
+      <a:spcBef>
+        <a:spcPts val="0"/>
+      </a:spcBef>
+      <a:spcAft>
+        <a:spcPts val="0"/>
+      </a:spcAft>
+      <a:buNone/>
+      <a:tabLst/>
+      <a:defRPr lang="en-us" sz="1800" b="0" i="0" u="none" strike="noStrike" kern="1" cap="none" spc="0" baseline="0">
         <a:solidFill>
           <a:schemeClr val="tx1"/>
         </a:solidFill>
-        <a:latin typeface="+mn-lt"/>
-        <a:ea typeface="+mn-ea"/>
-        <a:cs typeface="+mn-cs"/>
+        <a:effectLst/>
+        <a:latin typeface="Calibri" pitchFamily="2" charset="0"/>
+        <a:ea typeface="Calibri" pitchFamily="2" charset="0"/>
+        <a:cs typeface="Calibri" pitchFamily="2" charset="0"/>
       </a:defRPr>
     </a:lvl1pPr>
-    <a:lvl2pPr marL="457200" algn="l" defTabSz="914400" rtl="0" eaLnBrk="1" latinLnBrk="0" hangingPunct="1">
-      <a:defRPr sz="1800" kern="1200">
+    <a:lvl2pPr marL="457200" marR="0" indent="0" algn="l" defTabSz="914400">
+      <a:lnSpc>
+        <a:spcPct val="100000"/>
+      </a:lnSpc>
+      <a:spcBef>
+        <a:spcPts val="0"/>
+      </a:spcBef>
+      <a:spcAft>
+        <a:spcPts val="0"/>
+      </a:spcAft>
+      <a:buNone/>
+      <a:tabLst/>
+      <a:defRPr lang="en-us" sz="1800" b="0" i="0" u="none" strike="noStrike" kern="1" cap="none" spc="0" baseline="0">
         <a:solidFill>
           <a:schemeClr val="tx1"/>
         </a:solidFill>
-        <a:latin typeface="+mn-lt"/>
-        <a:ea typeface="+mn-ea"/>
-        <a:cs typeface="+mn-cs"/>
+        <a:effectLst/>
+        <a:latin typeface="Calibri" pitchFamily="2" charset="0"/>
+        <a:ea typeface="Calibri" pitchFamily="2" charset="0"/>
+        <a:cs typeface="Calibri" pitchFamily="2" charset="0"/>
       </a:defRPr>
     </a:lvl2pPr>
-    <a:lvl3pPr marL="914400" algn="l" defTabSz="914400" rtl="0" eaLnBrk="1" latinLnBrk="0" hangingPunct="1">
-      <a:defRPr sz="1800" kern="1200">
+    <a:lvl3pPr marL="914400" marR="0" indent="0" algn="l" defTabSz="914400">
+      <a:lnSpc>
+        <a:spcPct val="100000"/>
+      </a:lnSpc>
+      <a:spcBef>
+        <a:spcPts val="0"/>
+      </a:spcBef>
+      <a:spcAft>
+        <a:spcPts val="0"/>
+      </a:spcAft>
+      <a:buNone/>
+      <a:tabLst/>
+      <a:defRPr lang="en-us" sz="1800" b="0" i="0" u="none" strike="noStrike" kern="1" cap="none" spc="0" baseline="0">
         <a:solidFill>
           <a:schemeClr val="tx1"/>
         </a:solidFill>
-        <a:latin typeface="+mn-lt"/>
-        <a:ea typeface="+mn-ea"/>
-        <a:cs typeface="+mn-cs"/>
+        <a:effectLst/>
+        <a:latin typeface="Calibri" pitchFamily="2" charset="0"/>
+        <a:ea typeface="Calibri" pitchFamily="2" charset="0"/>
+        <a:cs typeface="Calibri" pitchFamily="2" charset="0"/>
       </a:defRPr>
     </a:lvl3pPr>
-    <a:lvl4pPr marL="1371600" algn="l" defTabSz="914400" rtl="0" eaLnBrk="1" latinLnBrk="0" hangingPunct="1">
-      <a:defRPr sz="1800" kern="1200">
+    <a:lvl4pPr marL="1371600" marR="0" indent="0" algn="l" defTabSz="914400">
+      <a:lnSpc>
+        <a:spcPct val="100000"/>
+      </a:lnSpc>
+      <a:spcBef>
+        <a:spcPts val="0"/>
+      </a:spcBef>
+      <a:spcAft>
+        <a:spcPts val="0"/>
+      </a:spcAft>
+      <a:buNone/>
+      <a:tabLst/>
+      <a:defRPr lang="en-us" sz="1800" b="0" i="0" u="none" strike="noStrike" kern="1" cap="none" spc="0" baseline="0">
         <a:solidFill>
           <a:schemeClr val="tx1"/>
         </a:solidFill>
-        <a:latin typeface="+mn-lt"/>
-        <a:ea typeface="+mn-ea"/>
-        <a:cs typeface="+mn-cs"/>
+        <a:effectLst/>
+        <a:latin typeface="Calibri" pitchFamily="2" charset="0"/>
+        <a:ea typeface="Calibri" pitchFamily="2" charset="0"/>
+        <a:cs typeface="Calibri" pitchFamily="2" charset="0"/>
       </a:defRPr>
     </a:lvl4pPr>
-    <a:lvl5pPr marL="1828800" algn="l" defTabSz="914400" rtl="0" eaLnBrk="1" latinLnBrk="0" hangingPunct="1">
-      <a:defRPr sz="1800" kern="1200">
+    <a:lvl5pPr marL="1828800" marR="0" indent="0" algn="l" defTabSz="914400">
+      <a:lnSpc>
+        <a:spcPct val="100000"/>
+      </a:lnSpc>
+      <a:spcBef>
+        <a:spcPts val="0"/>
+      </a:spcBef>
+      <a:spcAft>
+        <a:spcPts val="0"/>
+      </a:spcAft>
+      <a:buNone/>
+      <a:tabLst/>
+      <a:defRPr lang="en-us" sz="1800" b="0" i="0" u="none" strike="noStrike" kern="1" cap="none" spc="0" baseline="0">
         <a:solidFill>
           <a:schemeClr val="tx1"/>
         </a:solidFill>
-        <a:latin typeface="+mn-lt"/>
-        <a:ea typeface="+mn-ea"/>
-        <a:cs typeface="+mn-cs"/>
+        <a:effectLst/>
+        <a:latin typeface="Calibri" pitchFamily="2" charset="0"/>
+        <a:ea typeface="Calibri" pitchFamily="2" charset="0"/>
+        <a:cs typeface="Calibri" pitchFamily="2" charset="0"/>
       </a:defRPr>
     </a:lvl5pPr>
-    <a:lvl6pPr marL="2286000" algn="l" defTabSz="914400" rtl="0" eaLnBrk="1" latinLnBrk="0" hangingPunct="1">
-      <a:defRPr sz="1800" kern="1200">
+    <a:lvl6pPr marL="2286000" marR="0" indent="0" algn="l" defTabSz="914400">
+      <a:lnSpc>
+        <a:spcPct val="100000"/>
+      </a:lnSpc>
+      <a:spcBef>
+        <a:spcPts val="0"/>
+      </a:spcBef>
+      <a:spcAft>
+        <a:spcPts val="0"/>
+      </a:spcAft>
+      <a:buNone/>
+      <a:tabLst/>
+      <a:defRPr lang="en-us" sz="1800" b="0" i="0" u="none" strike="noStrike" kern="1" cap="none" spc="0" baseline="0">
         <a:solidFill>
           <a:schemeClr val="tx1"/>
         </a:solidFill>
-        <a:latin typeface="+mn-lt"/>
-        <a:ea typeface="+mn-ea"/>
-        <a:cs typeface="+mn-cs"/>
+        <a:effectLst/>
+        <a:latin typeface="Calibri" pitchFamily="2" charset="0"/>
+        <a:ea typeface="Calibri" pitchFamily="2" charset="0"/>
+        <a:cs typeface="Calibri" pitchFamily="2" charset="0"/>
       </a:defRPr>
     </a:lvl6pPr>
-    <a:lvl7pPr marL="2743200" algn="l" defTabSz="914400" rtl="0" eaLnBrk="1" latinLnBrk="0" hangingPunct="1">
-      <a:defRPr sz="1800" kern="1200">
+    <a:lvl7pPr marL="2743200" marR="0" indent="0" algn="l" defTabSz="914400">
+      <a:lnSpc>
+        <a:spcPct val="100000"/>
+      </a:lnSpc>
+      <a:spcBef>
+        <a:spcPts val="0"/>
+      </a:spcBef>
+      <a:spcAft>
+        <a:spcPts val="0"/>
+      </a:spcAft>
+      <a:buNone/>
+      <a:tabLst/>
+      <a:defRPr lang="en-us" sz="1800" b="0" i="0" u="none" strike="noStrike" kern="1" cap="none" spc="0" baseline="0">
         <a:solidFill>
           <a:schemeClr val="tx1"/>
         </a:solidFill>
-        <a:latin typeface="+mn-lt"/>
-        <a:ea typeface="+mn-ea"/>
-        <a:cs typeface="+mn-cs"/>
+        <a:effectLst/>
+        <a:latin typeface="Calibri" pitchFamily="2" charset="0"/>
+        <a:ea typeface="Calibri" pitchFamily="2" charset="0"/>
+        <a:cs typeface="Calibri" pitchFamily="2" charset="0"/>
       </a:defRPr>
     </a:lvl7pPr>
-    <a:lvl8pPr marL="3200400" algn="l" defTabSz="914400" rtl="0" eaLnBrk="1" latinLnBrk="0" hangingPunct="1">
-      <a:defRPr sz="1800" kern="1200">
+    <a:lvl8pPr marL="3200400" marR="0" indent="0" algn="l" defTabSz="914400">
+      <a:lnSpc>
+        <a:spcPct val="100000"/>
+      </a:lnSpc>
+      <a:spcBef>
+        <a:spcPts val="0"/>
+      </a:spcBef>
+      <a:spcAft>
+        <a:spcPts val="0"/>
+      </a:spcAft>
+      <a:buNone/>
+      <a:tabLst/>
+      <a:defRPr lang="en-us" sz="1800" b="0" i="0" u="none" strike="noStrike" kern="1" cap="none" spc="0" baseline="0">
         <a:solidFill>
           <a:schemeClr val="tx1"/>
         </a:solidFill>
-        <a:latin typeface="+mn-lt"/>
-        <a:ea typeface="+mn-ea"/>
-        <a:cs typeface="+mn-cs"/>
+        <a:effectLst/>
+        <a:latin typeface="Calibri" pitchFamily="2" charset="0"/>
+        <a:ea typeface="Calibri" pitchFamily="2" charset="0"/>
+        <a:cs typeface="Calibri" pitchFamily="2" charset="0"/>
       </a:defRPr>
     </a:lvl8pPr>
-    <a:lvl9pPr marL="3657600" algn="l" defTabSz="914400" rtl="0" eaLnBrk="1" latinLnBrk="0" hangingPunct="1">
-      <a:defRPr sz="1800" kern="1200">
+    <a:lvl9pPr marL="3657600" marR="0" indent="0" algn="l" defTabSz="914400">
+      <a:lnSpc>
+        <a:spcPct val="100000"/>
+      </a:lnSpc>
+      <a:spcBef>
+        <a:spcPts val="0"/>
+      </a:spcBef>
+      <a:spcAft>
+        <a:spcPts val="0"/>
+      </a:spcAft>
+      <a:buNone/>
+      <a:tabLst/>
+      <a:defRPr lang="en-us" sz="1800" b="0" i="0" u="none" strike="noStrike" kern="1" cap="none" spc="0" baseline="0">
         <a:solidFill>
           <a:schemeClr val="tx1"/>
         </a:solidFill>
-        <a:latin typeface="+mn-lt"/>
-        <a:ea typeface="+mn-ea"/>
-        <a:cs typeface="+mn-cs"/>
+        <a:effectLst/>
+        <a:latin typeface="Calibri" pitchFamily="2" charset="0"/>
+        <a:ea typeface="Calibri" pitchFamily="2" charset="0"/>
+        <a:cs typeface="Calibri" pitchFamily="2" charset="0"/>
       </a:defRPr>
     </a:lvl9pPr>
   </p:defaultTextStyle>
-  <p:extLst>
-    <p:ext uri="{EFAFB233-063F-42B5-8137-9DF3F51BA10A}">
-      <p15:sldGuideLst xmlns:p15="http://schemas.microsoft.com/office/powerpoint/2012/main"/>
-    </p:ext>
-  </p:extLst>
 </p:presentation>
 </file>
 
 <file path=ppt/slideLayouts/slideLayout1.xml><?xml version="1.0" encoding="utf-8"?>
-<p:sldLayout xmlns:a="http://schemas.openxmlformats.org/drawingml/2006/main" xmlns:r="http://schemas.openxmlformats.org/officeDocument/2006/relationships" xmlns:p="http://schemas.openxmlformats.org/presentationml/2006/main" type="title" preserve="1">
+<p:sldLayout xmlns:p="http://schemas.openxmlformats.org/presentationml/2006/main" xmlns:mc="http://schemas.openxmlformats.org/markup-compatibility/2006" xmlns:p14="http://schemas.microsoft.com/office/powerpoint/2010/main" xmlns:p15="http://schemas.microsoft.com/office/powerpoint/2012/main" xmlns:r="http://schemas.openxmlformats.org/officeDocument/2006/relationships" xmlns:a="http://schemas.openxmlformats.org/drawingml/2006/main" type="title" preserve="1">
   <p:cSld name="Title Slide">
     <p:spTree>
       <p:nvGrpSpPr>
@@ -142,7 +247,12 @@
         <p:nvSpPr>
           <p:cNvPr id="2" name="Title 1"/>
           <p:cNvSpPr>
-            <a:spLocks noGrp="1"/>
+            <a:spLocks noGrp="1" noChangeArrowheads="1"/>
+            <a:extLst>
+              <a:ext uri="smNativeData">
+                <pr:smNativeData xmlns:pr="smNativeData" xmlns="smNativeData" val="SMDATA_15_FLquaRMAAAAlAAAAZAAAAA0AAAAAkAAAAEgAAACQAAAASAAAAAAAAAACAAAAAAAAAAEAAABQAAAAAAAAAAAA4D8AAAAAAADgPwAAAAAAAOA/AAAAAAAA4D8AAAAAAADgPwAAAAAAAOA/AAAAAAAA4D8AAAAAAADgPwAAAAAAAOA/AAAAAAAA4D8CAAAAjAAAAAAAAAAAAAAAW5vVDP///wgAAAAAAAAAAAAAAAAAAAAAAAAAAAAAAAAAAAAAZAAAAAEAAABAAAAAAAAAAAAAAAAAAAAAAAAAAAAAAAAAAAAAAAAAAAAAAAAAAAAAAAAAAAAAAAAAAAAAAAAAAAAAAAAAAAAAAAAAAAAAAAAAAAAAAAAAAAAAAAAAAAAAFAAAADwAAAAAAAAAAAAAAAAAAAkUAAAAAQAAABQAAAAUAAAAFAAAAAEAAAAAAAAAZAAAAGQAAAAAAAAAZAAAAGQAAAAVAAAAYAAAAAAAAAAAAAAADwAAACADAAAAAAAAAAAAAAEAAACgMgAAVgcAAKr4//8BAAAAf39/AAEAAABkAAAAAAAAABQAAABAHwAAAAAAACYAAAAAAAAAwOD//wAAAAAmAAAAZAAAABYAAABMAAAAAAAAAAAAAAAEAAAAAAAAAAEAAADn5uYKAAAAACgAAAAoAAAAZAAAAGQAAAAAAAAAzMzMAAAAAABQAAAAUAAAAGQAAABkAAAAAAAAABcAAAAUAAAAAAAAAAAAAAD/fwAA/38AAAAAAAAJAAAABAAAAF8AYAAeAAAAaAAAAAAAAAAAAAAAAAAAAAAAAAAAAAAAECcAABAnAAAAAAAAAAAAAAAAAAAAAAAAAAAAAAAAAAAAAAAAAAAAABQAAAAAAAAAwMD/AAAAAABkAAAAMgAAAAAAAABkAAAAAAAAAH9/fwAKAAAAIgAAABgAAAAAAAAAAAAAAAAAAAAAAAAAAAAAAAAAAAAkAAAAJAAAAAAAAAAHAAAAAAAAAAAAAAAAAAAAAAAAAAAAAAAAAAAAf39/ACUAAABYAAAAAAAAAAAAAAAAAAAAAAAAAAAAAAAAAAAAAAAAAAAAAAAAAAAAAAAAAAAAAAA/AAAAAAAAAKCGAQAAAAAAAAAAAAAAAAAMAAAAAQAAAAAAAAAAAAAAAAAAAB8AAABUAAAAAAAABQAAAAEAAAAAAAAAAAAAAAAAAAAAAAAAAAAAAAAAAAAAAAAAAAAAAAJ/f38AAAAAA8zMzADAwP8Af39/AAAAAAAAAAAAAAAAAAAAAAAAAAAAIQAAABgAAAAUAAAAYAkAAOgGAACgQQAAmBUAABAAAAAmAAAACAAAAIGAAAAAAAAA"/>
+              </a:ext>
+            </a:extLst>
           </p:cNvSpPr>
           <p:nvPr>
             <p:ph type="ctrTitle"/>
@@ -150,23 +260,52 @@
         </p:nvSpPr>
         <p:spPr>
           <a:xfrm>
-            <a:off x="1524000" y="1122363"/>
+            <a:off x="1524000" y="1122680"/>
             <a:ext cx="9144000" cy="2387600"/>
           </a:xfrm>
         </p:spPr>
         <p:txBody>
-          <a:bodyPr anchor="b"/>
+          <a:bodyPr vert="horz" wrap="square" lIns="91440" tIns="45720" rIns="91440" bIns="45720" numCol="1" spcCol="215900" anchor="b">
+            <a:prstTxWarp prst="textNoShape">
+              <a:avLst/>
+            </a:prstTxWarp>
+          </a:bodyPr>
           <a:lstStyle>
             <a:lvl1pPr algn="ctr">
-              <a:defRPr sz="6000"/>
+              <a:defRPr lang="en-us" sz="6000" cap="none"/>
             </a:lvl1pPr>
+            <a:lvl2pPr>
+              <a:defRPr lang="en-us"/>
+            </a:lvl2pPr>
+            <a:lvl3pPr>
+              <a:defRPr lang="en-us"/>
+            </a:lvl3pPr>
+            <a:lvl4pPr>
+              <a:defRPr lang="en-us"/>
+            </a:lvl4pPr>
+            <a:lvl5pPr>
+              <a:defRPr lang="en-us"/>
+            </a:lvl5pPr>
+            <a:lvl6pPr>
+              <a:defRPr lang="en-us"/>
+            </a:lvl6pPr>
+            <a:lvl7pPr>
+              <a:defRPr lang="en-us"/>
+            </a:lvl7pPr>
+            <a:lvl8pPr>
+              <a:defRPr lang="en-us"/>
+            </a:lvl8pPr>
+            <a:lvl9pPr>
+              <a:defRPr lang="en-us"/>
+            </a:lvl9pPr>
           </a:lstStyle>
           <a:p>
-            <a:r>
-              <a:rPr lang="en-US" smtClean="0"/>
+            <a:pPr>
+              <a:defRPr lang="en-us"/>
+            </a:pPr>
+            <a:r>
               <a:t>Click to edit Master title style</a:t>
             </a:r>
-            <a:endParaRPr lang="en-US"/>
           </a:p>
         </p:txBody>
       </p:sp>
@@ -174,7 +313,12 @@
         <p:nvSpPr>
           <p:cNvPr id="3" name="Subtitle 2"/>
           <p:cNvSpPr>
-            <a:spLocks noGrp="1"/>
+            <a:spLocks noGrp="1" noChangeArrowheads="1"/>
+            <a:extLst>
+              <a:ext uri="smNativeData">
+                <pr:smNativeData xmlns:pr="smNativeData" xmlns="smNativeData" val="SMDATA_15_FLquaRMAAAAlAAAAZAAAAA0AAAAAkAAAAEgAAACQAAAASAAAAAAAAAAAAAAAAAAAAAEAAABQAAAAAAAAAAAA4D8AAAAAAADgPwAAAAAAAOA/AAAAAAAA4D8AAAAAAADgPwAAAAAAAOA/AAAAAAAA4D8AAAAAAADgPwAAAAAAAOA/AAAAAAAA4D8CAAAAjAAAAAAAAAAAAAAAW5vVDP///wgAAAAAAAAAAAAAAAAAAAAAAAAAAAAAAAAAAAAAZAAAAAEAAABAAAAAAAAAAAAAAAAAAAAAAAAAAAAAAAAAAAAAAAAAAAAAAAAAAAAAAAAAAAAAAAAAAAAAAAAAAAAAAAAAAAAAAAAAAAAAAAAAAAAAAAAAAAAAAAAAAAAAFAAAADwAAAAAAAAAAAAAAAAAAAkUAAAAAQAAABQAAAAUAAAAFAAAAAEAAAAAAAAAZAAAAGQAAAAAAAAAZAAAAGQAAAAVAAAAYAAAAAAAAAAAAAAADwAAACADAAAAAAAAAAAAAAEAAACgMgAAVgcAAKr4//8BAAAAf39/AAEAAABkAAAAAAAAABQAAABAHwAAAAAAACYAAAAAAAAAwOD//wAAAAAmAAAAZAAAABYAAABMAAAAAAAAAAAAAAAEAAAAAAAAAAEAAADn5uYKAAAAACgAAAAoAAAAZAAAAGQAAAAAAAAAzMzMAAAAAABQAAAAUAAAAGQAAABkAAAAAAAAABcAAAAUAAAAAAAAAAAAAAD/fwAA/38AAAAAAAAJAAAABAAAAGxpY2keAAAAaAAAAAAAAAAAAAAAAAAAAAAAAAAAAAAAECcAABAnAAAAAAAAAAAAAAAAAAAAAAAAAAAAAAAAAAAAAAAAAAAAABQAAAAAAAAAwMD/AAAAAABkAAAAMgAAAAAAAABkAAAAAAAAAH9/fwAKAAAAIgAAABgAAAAAAAAAAAAAAAAAAAAAAAAAAAAAAAAAAAAkAAAAJAAAAAAAAAAHAAAAAAAAAAAAAAAAAAAAAAAAAAAAAAAAAAAAf39/ACUAAABYAAAAAAAAAAAAAAAAAAAAAAAAAAAAAAAAAAAAAAAAAAAAAAAAAAAAAAAAAAAAAAA/AAAAAAAAAKCGAQAAAAAAAAAAAAAAAAAMAAAAAQAAAAAAAAAAAAAAAAAAAB8AAABUAAAAAAAABQAAAAEAAAAAAAAAAAAAAAAAAAAAAAAAAAAAAAAAAAAAAAAAAAAAAAJ/f38AAAAAA8zMzADAwP8Af39/AAAAAAAAAAAAAAAAAAAAAAAAAAAAIQAAABgAAAAUAAAAYAkAACkWAACgQQAAWCAAABAAAAAmAAAACAAAAAGAAAAAAAAA"/>
+              </a:ext>
+            </a:extLst>
           </p:cNvSpPr>
           <p:nvPr>
             <p:ph type="subTitle" idx="1"/>
@@ -182,8 +326,8 @@
         </p:nvSpPr>
         <p:spPr>
           <a:xfrm>
-            <a:off x="1524000" y="3602038"/>
-            <a:ext cx="9144000" cy="1655762"/>
+            <a:off x="1524000" y="3602355"/>
+            <a:ext cx="9144000" cy="1655445"/>
           </a:xfrm>
         </p:spPr>
         <p:txBody>
@@ -191,47 +335,48 @@
           <a:lstStyle>
             <a:lvl1pPr marL="0" indent="0" algn="ctr">
               <a:buNone/>
-              <a:defRPr sz="2400"/>
+              <a:defRPr lang="en-us" sz="2400" cap="none"/>
             </a:lvl1pPr>
             <a:lvl2pPr marL="457200" indent="0" algn="ctr">
               <a:buNone/>
-              <a:defRPr sz="2000"/>
+              <a:defRPr lang="en-us" sz="2000" cap="none"/>
             </a:lvl2pPr>
             <a:lvl3pPr marL="914400" indent="0" algn="ctr">
               <a:buNone/>
-              <a:defRPr sz="1800"/>
+              <a:defRPr lang="en-us" sz="1800" cap="none"/>
             </a:lvl3pPr>
             <a:lvl4pPr marL="1371600" indent="0" algn="ctr">
               <a:buNone/>
-              <a:defRPr sz="1600"/>
+              <a:defRPr lang="en-us" sz="1600" cap="none"/>
             </a:lvl4pPr>
             <a:lvl5pPr marL="1828800" indent="0" algn="ctr">
               <a:buNone/>
-              <a:defRPr sz="1600"/>
+              <a:defRPr lang="en-us" sz="1600" cap="none"/>
             </a:lvl5pPr>
             <a:lvl6pPr marL="2286000" indent="0" algn="ctr">
               <a:buNone/>
-              <a:defRPr sz="1600"/>
+              <a:defRPr lang="en-us" sz="1600" cap="none"/>
             </a:lvl6pPr>
             <a:lvl7pPr marL="2743200" indent="0" algn="ctr">
               <a:buNone/>
-              <a:defRPr sz="1600"/>
+              <a:defRPr lang="en-us" sz="1600" cap="none"/>
             </a:lvl7pPr>
             <a:lvl8pPr marL="3200400" indent="0" algn="ctr">
               <a:buNone/>
-              <a:defRPr sz="1600"/>
+              <a:defRPr lang="en-us" sz="1600" cap="none"/>
             </a:lvl8pPr>
             <a:lvl9pPr marL="3657600" indent="0" algn="ctr">
               <a:buNone/>
-              <a:defRPr sz="1600"/>
+              <a:defRPr lang="en-us" sz="1600" cap="none"/>
             </a:lvl9pPr>
           </a:lstStyle>
           <a:p>
-            <a:r>
-              <a:rPr lang="en-US" smtClean="0"/>
+            <a:pPr>
+              <a:defRPr lang="en-us"/>
+            </a:pPr>
+            <a:r>
               <a:t>Click to edit Master subtitle style</a:t>
             </a:r>
-            <a:endParaRPr lang="en-US"/>
           </a:p>
         </p:txBody>
       </p:sp>
@@ -239,7 +384,12 @@
         <p:nvSpPr>
           <p:cNvPr id="4" name="Date Placeholder 3"/>
           <p:cNvSpPr>
-            <a:spLocks noGrp="1"/>
+            <a:spLocks noGrp="1" noChangeArrowheads="1"/>
+            <a:extLst>
+              <a:ext uri="smNativeData">
+                <pr:smNativeData xmlns:pr="smNativeData" xmlns="smNativeData" val="SMDATA_15_FLquaRMAAAAlAAAAZAAAAA0AAAAAkAAAAEgAAACQAAAASAAAAAAAAAABAAAAAAAAAAEAAABQAAAAAAAAAAAA4D8AAAAAAADgPwAAAAAAAOA/AAAAAAAA4D8AAAAAAADgPwAAAAAAAOA/AAAAAAAA4D8AAAAAAADgPwAAAAAAAOA/AAAAAAAA4D8CAAAAjAAAAAAAAAAAAAAAW5vVDP///wgAAAAAAAAAAAAAAAAAAAAAAAAAAAAAAAAAAAAAZAAAAAEAAABAAAAAAAAAAAAAAAAAAAAAAAAAAAAAAAAAAAAAAAAAAAAAAAAAAAAAAAAAAAAAAAAAAAAAAAAAAAAAAAAAAAAAAAAAAAAAAAAAAAAAAAAAAAAAAAAAAAAAFAAAADwAAAAAAAAAAAAAAAAAAAkUAAAAAQAAABQAAAAUAAAAFAAAAAEAAAAAAAAAZAAAAGQAAAAAAAAAZAAAAGQAAAAVAAAAYAAAAAAAAAAAAAAADwAAACADAAAAAAAAAAAAAAEAAACgMgAAVgcAAKr4//8BAAAAf39/AAEAAABkAAAAAAAAABQAAABAHwAAAAAAACYAAAAAAAAAwOD//wAAAAAmAAAAZAAAABYAAABMAAAAAAAAAAAAAAAEAAAAAAAAAAEAAADn5uYKAAAAACgAAAAoAAAAZAAAAGQAAAAAAAAAzMzMAAAAAABQAAAAUAAAAGQAAABkAAAAAAAAABcAAAAUAAAAAAAAAAAAAAD/fwAA/38AAAAAAAAJAAAABAAAAF8AYAAeAAAAaAAAAAAAAAAAAAAAAAAAAAAAAAAAAAAAECcAABAnAAAAAAAAAAAAAAAAAAAAAAAAAAAAAAAAAAAAAAAAAAAAABQAAAAAAAAAwMD/AAAAAABkAAAAMgAAAAAAAABkAAAAAAAAAH9/fwAKAAAAIgAAABgAAAAAAAAAAAAAAAAAAAAAAAAAAAAAAAAAAAAkAAAAJAAAAAAAAAAHAAAAAAAAAAAAAAAAAAAAAAAAAAAAAAAAAAAAf39/ACUAAABYAAAAAAAAAAAAAAAAAAAAAAAAAAAAAAAAAAAAAAAAAAAAAAAAAAAAAAAAAAAAAAA/AAAAAAAAAKCGAQAAAAAAAAAAAAAAAAAMAAAAAQAAAAAAAAAAAAAAAAAAAB8AAABUAAAAAAAABQAAAAEAAAAAAAAAAAAAAAAAAAAAAAAAAAAAAAAAAAAAAAAAAAAAAAJ/f38AAAAAA8zMzADAwP8Af39/AAAAAAAAAAAAAAAAAAAAAAAAAAAAIQAAABgAAAAUAAAAKAUAABonAAAIFgAAWSkAABAAAAAmAAAACAAAAAAAAAAAAAAA"/>
+              </a:ext>
+            </a:extLst>
           </p:cNvSpPr>
           <p:nvPr>
             <p:ph type="dt" sz="half" idx="10"/>
@@ -250,11 +400,12 @@
           <a:bodyPr/>
           <a:lstStyle/>
           <a:p>
-            <a:fld id="{77AD5A0D-32F9-42A2-946C-433A90366567}" type="datetimeFigureOut">
-              <a:rPr lang="en-US" smtClean="0"/>
-              <a:t>6/13/2025</a:t>
+            <a:pPr>
+              <a:defRPr lang="en-us"/>
+            </a:pPr>
+            <a:fld id="{30AEBC93-DDDD-FB4A-9316-2B1FF258657E}" type="datetime1">
+              <a:t/>
             </a:fld>
-            <a:endParaRPr lang="en-US"/>
           </a:p>
         </p:txBody>
       </p:sp>
@@ -262,7 +413,12 @@
         <p:nvSpPr>
           <p:cNvPr id="5" name="Footer Placeholder 4"/>
           <p:cNvSpPr>
-            <a:spLocks noGrp="1"/>
+            <a:spLocks noGrp="1" noChangeArrowheads="1"/>
+            <a:extLst>
+              <a:ext uri="smNativeData">
+                <pr:smNativeData xmlns:pr="smNativeData" xmlns="smNativeData" val="SMDATA_15_FLquaRMAAAAlAAAAZAAAAA0AAAAAkAAAAEgAAACQAAAASAAAAAAAAAABAAAAAAAAAAEAAABQAAAAAAAAAAAA4D8AAAAAAADgPwAAAAAAAOA/AAAAAAAA4D8AAAAAAADgPwAAAAAAAOA/AAAAAAAA4D8AAAAAAADgPwAAAAAAAOA/AAAAAAAA4D8CAAAAjAAAAAAAAAAAAAAAW5vVDP///wgAAAAAAAAAAAAAAAAAAAAAAAAAAAAAAAAAAAAAZAAAAAEAAABAAAAAAAAAAAAAAAAAAAAAAAAAAAAAAAAAAAAAAAAAAAAAAAAAAAAAAAAAAAAAAAAAAAAAAAAAAAAAAAAAAAAAAAAAAAAAAAAAAAAAAAAAAAAAAAAAAAAAFAAAADwAAAAAAAAAAAAAAAAAAAkUAAAAAQAAABQAAAAUAAAAFAAAAAEAAAAAAAAAZAAAAGQAAAAAAAAAZAAAAGQAAAAVAAAAYAAAAAAAAAAAAAAADwAAACADAAAAAAAAAAAAAAEAAACgMgAAVgcAAKr4//8BAAAAf39/AAEAAABkAAAAAAAAABQAAABAHwAAAAAAACYAAAAAAAAAwOD//wAAAAAmAAAAZAAAABYAAABMAAAAAAAAAAAAAAAEAAAAAAAAAAEAAADn5uYKAAAAACgAAAAoAAAAZAAAAGQAAAAAAAAAzMzMAAAAAABQAAAAUAAAAGQAAABkAAAAAAAAABcAAAAUAAAAAAAAAAAAAAD/fwAA/38AAAAAAAAJAAAABAAAAKS+1QseAAAAaAAAAAAAAAAAAAAAAAAAAAAAAAAAAAAAECcAABAnAAAAAAAAAAAAAAAAAAAAAAAAAAAAAAAAAAAAAAAAAAAAABQAAAAAAAAAwMD/AAAAAABkAAAAMgAAAAAAAABkAAAAAAAAAH9/fwAKAAAAIgAAABgAAAAAAAAAAAAAAAAAAAAAAAAAAAAAAAAAAAAkAAAAJAAAAAAAAAAHAAAAAAAAAAAAAAAAAAAAAAAAAAAAAAAAAAAAf39/ACUAAABYAAAAAAAAAAAAAAAAAAAAAAAAAAAAAAAAAAAAAAAAAAAAAAAAAAAAAAAAAAAAAAA/AAAAAAAAAKCGAQAAAAAAAAAAAAAAAAAMAAAAAQAAAAAAAAAAAAAAAAAAAB8AAABUAAAAAAAABQAAAAEAAAAAAAAAAAAAAAAAAAAAAAAAAAAAAAAAAAAAAAAAAAAAAAJ/f38AAAAAA8zMzADAwP8Af39/AAAAAAAAAAAAAAAAAAAAAAAAAAAAIQAAABgAAAAUAAAA2BgAABonAAAoMgAAWSkAABAAAAAmAAAACAAAAAAAAAAAAAAA"/>
+              </a:ext>
+            </a:extLst>
           </p:cNvSpPr>
           <p:nvPr>
             <p:ph type="ftr" sz="quarter" idx="11"/>
@@ -273,7 +429,9 @@
           <a:bodyPr/>
           <a:lstStyle/>
           <a:p>
-            <a:endParaRPr lang="en-US"/>
+            <a:pPr>
+              <a:defRPr lang="en-us"/>
+            </a:pPr>
           </a:p>
         </p:txBody>
       </p:sp>
@@ -281,7 +439,12 @@
         <p:nvSpPr>
           <p:cNvPr id="6" name="Slide Number Placeholder 5"/>
           <p:cNvSpPr>
-            <a:spLocks noGrp="1"/>
+            <a:spLocks noGrp="1" noChangeArrowheads="1"/>
+            <a:extLst>
+              <a:ext uri="smNativeData">
+                <pr:smNativeData xmlns:pr="smNativeData" xmlns="smNativeData" val="SMDATA_15_FLquaRMAAAAlAAAAZAAAAA0AAAAAkAAAAEgAAACQAAAASAAAAAAAAAABAAAAAAAAAAEAAABQAAAAAAAAAAAA4D8AAAAAAADgPwAAAAAAAOA/AAAAAAAA4D8AAAAAAADgPwAAAAAAAOA/AAAAAAAA4D8AAAAAAADgPwAAAAAAAOA/AAAAAAAA4D8CAAAAjAAAAAAAAAAAAAAAW5vVDP///wgAAAAAAAAAAAAAAAAAAAAAAAAAAAAAAAAAAAAAZAAAAAEAAABAAAAAAAAAAAAAAAAAAAAAAAAAAAAAAAAAAAAAAAAAAAAAAAAAAAAAAAAAAAAAAAAAAAAAAAAAAAAAAAAAAAAAAAAAAAAAAAAAAAAAAAAAAAAAAAAAAAAAFAAAADwAAAAAAAAAAAAAAAAAAAkUAAAAAQAAABQAAAAUAAAAFAAAAAEAAAAAAAAAZAAAAGQAAAAAAAAAZAAAAGQAAAAVAAAAYAAAAAAAAAAAAAAADwAAACADAAAAAAAAAAAAAAEAAACgMgAAVgcAAKr4//8BAAAAf39/AAEAAABkAAAAAAAAABQAAABAHwAAAAAAACYAAAAAAAAAwOD//wAAAAAmAAAAZAAAABYAAABMAAAAAAAAAAAAAAAEAAAAAAAAAAEAAADn5uYKAAAAACgAAAAoAAAAZAAAAGQAAAAAAAAAzMzMAAAAAABQAAAAUAAAAGQAAABkAAAAAAAAABcAAAAUAAAAAAAAAAAAAAD/fwAA/38AAAAAAAAJAAAABAAAAEwPxw0eAAAAaAAAAAAAAAAAAAAAAAAAAAAAAAAAAAAAECcAABAnAAAAAAAAAAAAAAAAAAAAAAAAAAAAAAAAAAAAAAAAAAAAABQAAAAAAAAAwMD/AAAAAABkAAAAMgAAAAAAAABkAAAAAAAAAH9/fwAKAAAAIgAAABgAAAAAAAAAAAAAAAAAAAAAAAAAAAAAAAAAAAAkAAAAJAAAAAAAAAAHAAAAAAAAAAAAAAAAAAAAAAAAAAAAAAAAAAAAf39/ACUAAABYAAAAAAAAAAAAAAAAAAAAAAAAAAAAAAAAAAAAAAAAAAAAAAAAAAAAAAAAAAAAAAA/AAAAAAAAAKCGAQAAAAAAAAAAAAAAAAAMAAAAAQAAAAAAAAAAAAAAAAAAAB8AAABUAAAAAAAABQAAAAEAAAAAAAAAAAAAAAAAAAAAAAAAAAAAAAAAAAAAAAAAAAAAAAJ/f38AAAAAA8zMzADAwP8Af39/AAAAAAAAAAAAAAAAAAAAAAAAAAAAIQAAABgAAAAUAAAA+DQAABonAADYRQAAWSkAABAAAAAmAAAACAAAAAAAAAAAAAAA"/>
+              </a:ext>
+            </a:extLst>
           </p:cNvSpPr>
           <p:nvPr>
             <p:ph type="sldNum" sz="quarter" idx="12"/>
@@ -292,29 +455,26 @@
           <a:bodyPr/>
           <a:lstStyle/>
           <a:p>
-            <a:fld id="{2AF8EFAC-D507-4007-9634-FDE202E639CC}" type="slidenum">
-              <a:rPr lang="en-US" smtClean="0"/>
-              <a:t>‹#›</a:t>
+            <a:pPr>
+              <a:defRPr lang="en-us"/>
+            </a:pPr>
+            <a:fld id="{30AEB3C2-8CDD-FB45-9316-7A10FD58652F}" type="slidenum">
+              <a:t/>
             </a:fld>
-            <a:endParaRPr lang="en-US"/>
           </a:p>
         </p:txBody>
       </p:sp>
     </p:spTree>
-    <p:extLst>
-      <p:ext uri="{BB962C8B-B14F-4D97-AF65-F5344CB8AC3E}">
-        <p14:creationId xmlns:p14="http://schemas.microsoft.com/office/powerpoint/2010/main" val="3518006496"/>
-      </p:ext>
-    </p:extLst>
   </p:cSld>
   <p:clrMapOvr>
     <a:masterClrMapping/>
   </p:clrMapOvr>
+  <p:hf hdr="0" ftr="0"/>
 </p:sldLayout>
 </file>
 
 <file path=ppt/slideLayouts/slideLayout10.xml><?xml version="1.0" encoding="utf-8"?>
-<p:sldLayout xmlns:a="http://schemas.openxmlformats.org/drawingml/2006/main" xmlns:r="http://schemas.openxmlformats.org/officeDocument/2006/relationships" xmlns:p="http://schemas.openxmlformats.org/presentationml/2006/main" type="vertTx" preserve="1">
+<p:sldLayout xmlns:p="http://schemas.openxmlformats.org/presentationml/2006/main" xmlns:mc="http://schemas.openxmlformats.org/markup-compatibility/2006" xmlns:p14="http://schemas.microsoft.com/office/powerpoint/2010/main" xmlns:p15="http://schemas.microsoft.com/office/powerpoint/2012/main" xmlns:r="http://schemas.openxmlformats.org/officeDocument/2006/relationships" xmlns:a="http://schemas.openxmlformats.org/drawingml/2006/main" type="vertTx" preserve="1">
   <p:cSld name="Title and Vertical Text">
     <p:spTree>
       <p:nvGrpSpPr>
@@ -334,7 +494,12 @@
         <p:nvSpPr>
           <p:cNvPr id="2" name="Title 1"/>
           <p:cNvSpPr>
-            <a:spLocks noGrp="1"/>
+            <a:spLocks noGrp="1" noChangeArrowheads="1"/>
+            <a:extLst>
+              <a:ext uri="smNativeData">
+                <pr:smNativeData xmlns:pr="smNativeData" xmlns="smNativeData" val="SMDATA_15_FLquaRMAAAAlAAAAZAAAAA0AAAAAkAAAAEgAAACQAAAASAAAAAAAAAABAAAAAAAAAAEAAABQAAAAAAAAAAAA4D8AAAAAAADgPwAAAAAAAOA/AAAAAAAA4D8AAAAAAADgPwAAAAAAAOA/AAAAAAAA4D8AAAAAAADgPwAAAAAAAOA/AAAAAAAA4D8CAAAAjAAAAAAAAAAAAAAAW5vVDP///wgAAAAAAAAAAAAAAAAAAAAAAAAAAAAAAAAAAAAAZAAAAAEAAABAAAAAAAAAAAAAAAAAAAAAAAAAAAAAAAAAAAAAAAAAAAAAAAAAAAAAAAAAAAAAAAAAAAAAAAAAAAAAAAAAAAAAAAAAAAAAAAAAAAAAAAAAAAAAAAAAAAAAFAAAADwAAAAAAAAAAAAAAAAAAAkUAAAAAQAAABQAAAAUAAAAFAAAAAEAAAAAAAAAZAAAAGQAAAAAAAAAZAAAAGQAAAAVAAAAYAAAAAAAAAAAAAAADwAAACADAAAAAAAAAAAAAAEAAACgMgAAVgcAAKr4//8BAAAAf39/AAEAAABkAAAAAAAAABQAAABAHwAAAAAAACYAAAAAAAAAwOD//wAAAAAmAAAAZAAAABYAAABMAAAAAAAAAAAAAAAEAAAAAAAAAAEAAADn5uYKAAAAACgAAAAoAAAAZAAAAGQAAAAAAAAAzMzMAAAAAABQAAAAUAAAAGQAAABkAAAAAAAAABcAAAAUAAAAAAAAAAAAAAD/fwAA/38AAAAAAAAJAAAABAAAAAAAAAAeAAAAaAAAAAAAAAAAAAAAAAAAAAAAAAAAAAAAECcAABAnAAAAAAAAAAAAAAAAAAAAAAAAAAAAAAAAAAAAAAAAAAAAABQAAAAAAAAAwMD/AAAAAABkAAAAMgAAAAAAAABkAAAAAAAAAH9/fwAKAAAAIgAAABgAAAAAAAAAAAAAAAAAAAAAAAAAAAAAAAAAAAAkAAAAJAAAAAAAAAAHAAAAAAAAAAAAAAAAAAAAAAAAAAAAAAAAAAAAf39/ACUAAABYAAAAAAAAAAAAAAAAAAAAAAAAAAAAAAAAAAAAAAAAAAAAAAAAAAAAAAAAAAAAAAA/AAAAAAAAAKCGAQAAAAAAAAAAAAAAAAAMAAAAAQAAAAAAAAAAAAAAAAAAAB8AAABUAAAAAAAABQAAAAEAAAAAAAAAAAAAAAAAAAAAAAAAAAAAAAAAAAAAAAAAAAAAAAJ/f38AAAAAA8zMzADAwP8Af39/AAAAAAAAAAAAAAAAAAAAAAAAAAAAIQAAABgAAAAUAAAAKAUAAD8CAADYRQAAZwoAABAAAAAmAAAACAAAAAAAAAAAAAAA"/>
+              </a:ext>
+            </a:extLst>
           </p:cNvSpPr>
           <p:nvPr>
             <p:ph type="title"/>
@@ -345,11 +510,12 @@
           <a:bodyPr/>
           <a:lstStyle/>
           <a:p>
-            <a:r>
-              <a:rPr lang="en-US" smtClean="0"/>
+            <a:pPr>
+              <a:defRPr lang="en-us"/>
+            </a:pPr>
+            <a:r>
               <a:t>Click to edit Master title style</a:t>
             </a:r>
-            <a:endParaRPr lang="en-US"/>
           </a:p>
         </p:txBody>
       </p:sp>
@@ -357,51 +523,64 @@
         <p:nvSpPr>
           <p:cNvPr id="3" name="Vertical Text Placeholder 2"/>
           <p:cNvSpPr>
-            <a:spLocks noGrp="1"/>
-          </p:cNvSpPr>
-          <p:nvPr>
-            <p:ph type="body" orient="vert" idx="1"/>
+            <a:spLocks noGrp="1" noChangeArrowheads="1"/>
+            <a:extLst>
+              <a:ext uri="smNativeData">
+                <pr:smNativeData xmlns:pr="smNativeData" xmlns="smNativeData" val="SMDATA_15_FLquaRMAAAAlAAAAZAAAAA0AAAAAkAAAAEgAAACQAAAASAAAAAAAAAAAAAAAAQAAAAEAAABQAAAAAAAAAAAA4D8AAAAAAADgPwAAAAAAAOA/AAAAAAAA4D8AAAAAAADgPwAAAAAAAOA/AAAAAAAA4D8AAAAAAADgPwAAAAAAAOA/AAAAAAAA4D8CAAAAjAAAAAAAAAAAAAAAW5vVDP///wgAAAAAAAAAAAAAAAAAAAAAAAAAAAAAAAAAAAAAZAAAAAEAAABAAAAAAAAAAAAAAAAAAAAAAAAAAAAAAAAAAAAAAAAAAAAAAAAAAAAAAAAAAAAAAAAAAAAAAAAAAAAAAAAAAAAAAAAAAAAAAAAAAAAAAAAAAAAAAAAAAAAAFAAAADwAAAAAAAAAAAAAAAAAAAkUAAAAAQAAABQAAAAUAAAAFAAAAAEAAAAAAAAAZAAAAGQAAAAAAAAAZAAAAGQAAAAVAAAAYAAAAAAAAAAAAAAADwAAACADAAAAAAAAAAAAAAEAAACgMgAAVgcAAKr4//8BAAAAf39/AAEAAABkAAAAAAAAABQAAABAHwAAAAAAACYAAAAAAAAAwOD//wAAAAAmAAAAZAAAABYAAABMAAAAAAAAAAAAAAAEAAAAAAAAAAEAAADn5uYKAAAAACgAAAAoAAAAZAAAAGQAAAAAAAAAzMzMAAAAAABQAAAAUAAAAGQAAABkAAAAAAAAABcAAAAUAAAAAAAAAAAAAAD/fwAA/38AAAAAAAAJAAAABAAAAAAAAAAeAAAAaAAAAAAAAAAAAAAAAAAAAAAAAAAAAAAAECcAABAnAAAAAAAAAAAAAAAAAAAAAAAAAAAAAAAAAAAAAAAAAAAAABQAAAAAAAAAwMD/AAAAAABkAAAAMgAAAAAAAABkAAAAAAAAAH9/fwAKAAAAIgAAABgAAAAAAAAAAAAAAAAAAAAAAAAAAAAAAAAAAAAkAAAAJAAAAAAAAAAHAAAAAAAAAAAAAAAAAAAAAAAAAAAAAAAAAAAAf39/ACUAAABYAAAAAAAAAAAAAAAAAAAAAAAAAAAAAAAAAAAAAAAAAAAAAAAAAAAAAAAAAAAAAAA/AAAAAAAAAKCGAQAAAAAAAAAAAAAAAAAMAAAAAQAAAAAAAAAAAAAAAAAAAB8AAABUAAAAAAAABQAAAAEAAAAAAAAAAAAAAAAAAAAAAAAAAAAAAAAAAAAAAAAAAAAAAAJ/f38AAAAAA8zMzADAwP8Af39/AAAAAAAAAAAAAAAAAAAAAAAAAAAAIQAAABgAAAAUAAAAKAUAADsLAADYRQAAACYAABAAAAAmAAAACAAAAAIAAAAAAAAA"/>
+              </a:ext>
+            </a:extLst>
+          </p:cNvSpPr>
+          <p:nvPr>
+            <p:ph idx="1"/>
           </p:nvPr>
         </p:nvSpPr>
         <p:spPr/>
         <p:txBody>
-          <a:bodyPr vert="eaVert"/>
-          <a:lstStyle/>
-          <a:p>
-            <a:pPr lvl="0"/>
-            <a:r>
-              <a:rPr lang="en-US" smtClean="0"/>
+          <a:bodyPr vert="vert" wrap="square" lIns="91440" tIns="45720" rIns="91440" bIns="45720" numCol="1" spcCol="215900" anchor="t">
+            <a:prstTxWarp prst="textNoShape">
+              <a:avLst/>
+            </a:prstTxWarp>
+          </a:bodyPr>
+          <a:lstStyle/>
+          <a:p>
+            <a:pPr>
+              <a:defRPr lang="en-us"/>
+            </a:pPr>
+            <a:r>
               <a:t>Click to edit Master text styles</a:t>
             </a:r>
           </a:p>
           <a:p>
-            <a:pPr lvl="1"/>
-            <a:r>
-              <a:rPr lang="en-US" smtClean="0"/>
+            <a:pPr lvl="1">
+              <a:defRPr lang="en-us"/>
+            </a:pPr>
+            <a:r>
               <a:t>Second level</a:t>
             </a:r>
           </a:p>
           <a:p>
-            <a:pPr lvl="2"/>
-            <a:r>
-              <a:rPr lang="en-US" smtClean="0"/>
+            <a:pPr lvl="2">
+              <a:defRPr lang="en-us"/>
+            </a:pPr>
+            <a:r>
               <a:t>Third level</a:t>
             </a:r>
           </a:p>
           <a:p>
-            <a:pPr lvl="3"/>
-            <a:r>
-              <a:rPr lang="en-US" smtClean="0"/>
+            <a:pPr lvl="3">
+              <a:defRPr lang="en-us"/>
+            </a:pPr>
+            <a:r>
               <a:t>Fourth level</a:t>
             </a:r>
           </a:p>
           <a:p>
-            <a:pPr lvl="4"/>
-            <a:r>
-              <a:rPr lang="en-US" smtClean="0"/>
+            <a:pPr lvl="4">
+              <a:defRPr lang="en-us"/>
+            </a:pPr>
+            <a:r>
               <a:t>Fifth level</a:t>
             </a:r>
-            <a:endParaRPr lang="en-US"/>
           </a:p>
         </p:txBody>
       </p:sp>
@@ -409,7 +588,12 @@
         <p:nvSpPr>
           <p:cNvPr id="4" name="Date Placeholder 3"/>
           <p:cNvSpPr>
-            <a:spLocks noGrp="1"/>
+            <a:spLocks noGrp="1" noChangeArrowheads="1"/>
+            <a:extLst>
+              <a:ext uri="smNativeData">
+                <pr:smNativeData xmlns:pr="smNativeData" xmlns="smNativeData" val="SMDATA_15_FLquaRMAAAAlAAAAZAAAAA0AAAAAkAAAAEgAAACQAAAASAAAAAAAAAABAAAAAAAAAAEAAABQAAAAAAAAAAAA4D8AAAAAAADgPwAAAAAAAOA/AAAAAAAA4D8AAAAAAADgPwAAAAAAAOA/AAAAAAAA4D8AAAAAAADgPwAAAAAAAOA/AAAAAAAA4D8CAAAAjAAAAAAAAAAAAAAAW5vVDP///wgAAAAAAAAAAAAAAAAAAAAAAAAAAAAAAAAAAAAAZAAAAAEAAABAAAAAAAAAAAAAAAAAAAAAAAAAAAAAAAAAAAAAAAAAAAAAAAAAAAAAAAAAAAAAAAAAAAAAAAAAAAAAAAAAAAAAAAAAAAAAAAAAAAAAAAAAAAAAAAAAAAAAFAAAADwAAAAAAAAAAAAAAAAAAAkUAAAAAQAAABQAAAAUAAAAFAAAAAEAAAAAAAAAZAAAAGQAAAAAAAAAZAAAAGQAAAAVAAAAYAAAAAAAAAAAAAAADwAAACADAAAAAAAAAAAAAAEAAACgMgAAVgcAAKr4//8BAAAAf39/AAEAAABkAAAAAAAAABQAAABAHwAAAAAAACYAAAAAAAAAwOD//wAAAAAmAAAAZAAAABYAAABMAAAAAAAAAAAAAAAEAAAAAAAAAAEAAADn5uYKAAAAACgAAAAoAAAAZAAAAGQAAAAAAAAAzMzMAAAAAABQAAAAUAAAAGQAAABkAAAAAAAAABcAAAAUAAAAAAAAAAAAAAD/fwAA/38AAAAAAAAJAAAABAAAAAAAAAAeAAAAaAAAAAAAAAAAAAAAAAAAAAAAAAAAAAAAECcAABAnAAAAAAAAAAAAAAAAAAAAAAAAAAAAAAAAAAAAAAAAAAAAABQAAAAAAAAAwMD/AAAAAABkAAAAMgAAAAAAAABkAAAAAAAAAH9/fwAKAAAAIgAAABgAAAAAAAAAAAAAAAAAAAAAAAAAAAAAAAAAAAAkAAAAJAAAAAAAAAAHAAAAAAAAAAAAAAAAAAAAAAAAAAAAAAAAAAAAf39/ACUAAABYAAAAAAAAAAAAAAAAAAAAAAAAAAAAAAAAAAAAAAAAAAAAAAAAAAAAAAAAAAAAAAA/AAAAAAAAAKCGAQAAAAAAAAAAAAAAAAAMAAAAAQAAAAAAAAAAAAAAAAAAAB8AAABUAAAAAAAABQAAAAEAAAAAAAAAAAAAAAAAAAAAAAAAAAAAAAAAAAAAAAAAAAAAAAJ/f38AAAAAA8zMzADAwP8Af39/AAAAAAAAAAAAAAAAAAAAAAAAAAAAIQAAABgAAAAUAAAAKAUAABonAAAIFgAAWSkAABAAAAAmAAAACAAAAAAAAAAAAAAA"/>
+              </a:ext>
+            </a:extLst>
           </p:cNvSpPr>
           <p:nvPr>
             <p:ph type="dt" sz="half" idx="10"/>
@@ -420,11 +604,12 @@
           <a:bodyPr/>
           <a:lstStyle/>
           <a:p>
-            <a:fld id="{77AD5A0D-32F9-42A2-946C-433A90366567}" type="datetimeFigureOut">
-              <a:rPr lang="en-US" smtClean="0"/>
-              <a:t>6/13/2025</a:t>
+            <a:pPr>
+              <a:defRPr lang="en-us"/>
+            </a:pPr>
+            <a:fld id="{30AE8F9D-D3DD-FB79-9316-252CC1586570}" type="datetime1">
+              <a:t>3/4/2026</a:t>
             </a:fld>
-            <a:endParaRPr lang="en-US"/>
           </a:p>
         </p:txBody>
       </p:sp>
@@ -432,7 +617,12 @@
         <p:nvSpPr>
           <p:cNvPr id="5" name="Footer Placeholder 4"/>
           <p:cNvSpPr>
-            <a:spLocks noGrp="1"/>
+            <a:spLocks noGrp="1" noChangeArrowheads="1"/>
+            <a:extLst>
+              <a:ext uri="smNativeData">
+                <pr:smNativeData xmlns:pr="smNativeData" xmlns="smNativeData" val="SMDATA_15_FLquaRMAAAAlAAAAZAAAAA0AAAAAkAAAAEgAAACQAAAASAAAAAAAAAABAAAAAAAAAAEAAABQAAAAAAAAAAAA4D8AAAAAAADgPwAAAAAAAOA/AAAAAAAA4D8AAAAAAADgPwAAAAAAAOA/AAAAAAAA4D8AAAAAAADgPwAAAAAAAOA/AAAAAAAA4D8CAAAAjAAAAAAAAAAAAAAAW5vVDP///wgAAAAAAAAAAAAAAAAAAAAAAAAAAAAAAAAAAAAAZAAAAAEAAABAAAAAAAAAAAAAAAAAAAAAAAAAAAAAAAAAAAAAAAAAAAAAAAAAAAAAAAAAAAAAAAAAAAAAAAAAAAAAAAAAAAAAAAAAAAAAAAAAAAAAAAAAAAAAAAAAAAAAFAAAADwAAAAAAAAAAAAAAAAAAAkUAAAAAQAAABQAAAAUAAAAFAAAAAEAAAAAAAAAZAAAAGQAAAAAAAAAZAAAAGQAAAAVAAAAYAAAAAAAAAAAAAAADwAAACADAAAAAAAAAAAAAAEAAACgMgAAVgcAAKr4//8BAAAAf39/AAEAAABkAAAAAAAAABQAAABAHwAAAAAAACYAAAAAAAAAwOD//wAAAAAmAAAAZAAAABYAAABMAAAAAAAAAAAAAAAEAAAAAAAAAAEAAADn5uYKAAAAACgAAAAoAAAAZAAAAGQAAAAAAAAAzMzMAAAAAABQAAAAUAAAAGQAAABkAAAAAAAAABcAAAAUAAAAAAAAAAAAAAD/fwAA/38AAAAAAAAJAAAABAAAAAAAAAAeAAAAaAAAAAAAAAAAAAAAAAAAAAAAAAAAAAAAECcAABAnAAAAAAAAAAAAAAAAAAAAAAAAAAAAAAAAAAAAAAAAAAAAABQAAAAAAAAAwMD/AAAAAABkAAAAMgAAAAAAAABkAAAAAAAAAH9/fwAKAAAAIgAAABgAAAAAAAAAAAAAAAAAAAAAAAAAAAAAAAAAAAAkAAAAJAAAAAAAAAAHAAAAAAAAAAAAAAAAAAAAAAAAAAAAAAAAAAAAf39/ACUAAABYAAAAAAAAAAAAAAAAAAAAAAAAAAAAAAAAAAAAAAAAAAAAAAAAAAAAAAAAAAAAAAA/AAAAAAAAAKCGAQAAAAAAAAAAAAAAAAAMAAAAAQAAAAAAAAAAAAAAAAAAAB8AAABUAAAAAAAABQAAAAEAAAAAAAAAAAAAAAAAAAAAAAAAAAAAAAAAAAAAAAAAAAAAAAJ/f38AAAAAA8zMzADAwP8Af39/AAAAAAAAAAAAAAAAAAAAAAAAAAAAIQAAABgAAAAUAAAA2BgAABonAAAoMgAAWSkAABAAAAAmAAAACAAAAAAAAAAAAAAA"/>
+              </a:ext>
+            </a:extLst>
           </p:cNvSpPr>
           <p:nvPr>
             <p:ph type="ftr" sz="quarter" idx="11"/>
@@ -443,7 +633,9 @@
           <a:bodyPr/>
           <a:lstStyle/>
           <a:p>
-            <a:endParaRPr lang="en-US"/>
+            <a:pPr>
+              <a:defRPr lang="en-us"/>
+            </a:pPr>
           </a:p>
         </p:txBody>
       </p:sp>
@@ -451,7 +643,12 @@
         <p:nvSpPr>
           <p:cNvPr id="6" name="Slide Number Placeholder 5"/>
           <p:cNvSpPr>
-            <a:spLocks noGrp="1"/>
+            <a:spLocks noGrp="1" noChangeArrowheads="1"/>
+            <a:extLst>
+              <a:ext uri="smNativeData">
+                <pr:smNativeData xmlns:pr="smNativeData" xmlns="smNativeData" val="SMDATA_15_FLquaRMAAAAlAAAAZAAAAA0AAAAAkAAAAEgAAACQAAAASAAAAAAAAAABAAAAAAAAAAEAAABQAAAAAAAAAAAA4D8AAAAAAADgPwAAAAAAAOA/AAAAAAAA4D8AAAAAAADgPwAAAAAAAOA/AAAAAAAA4D8AAAAAAADgPwAAAAAAAOA/AAAAAAAA4D8CAAAAjAAAAAAAAAAAAAAAW5vVDP///wgAAAAAAAAAAAAAAAAAAAAAAAAAAAAAAAAAAAAAZAAAAAEAAABAAAAAAAAAAAAAAAAAAAAAAAAAAAAAAAAAAAAAAAAAAAAAAAAAAAAAAAAAAAAAAAAAAAAAAAAAAAAAAAAAAAAAAAAAAAAAAAAAAAAAAAAAAAAAAAAAAAAAFAAAADwAAAAAAAAAAAAAAAAAAAkUAAAAAQAAABQAAAAUAAAAFAAAAAEAAAAAAAAAZAAAAGQAAAAAAAAAZAAAAGQAAAAVAAAAYAAAAAAAAAAAAAAADwAAACADAAAAAAAAAAAAAAEAAACgMgAAVgcAAKr4//8BAAAAf39/AAEAAABkAAAAAAAAABQAAABAHwAAAAAAACYAAAAAAAAAwOD//wAAAAAmAAAAZAAAABYAAABMAAAAAAAAAAAAAAAEAAAAAAAAAAEAAADn5uYKAAAAACgAAAAoAAAAZAAAAGQAAAAAAAAAzMzMAAAAAABQAAAAUAAAAGQAAABkAAAAAAAAABcAAAAUAAAAAAAAAAAAAAD/fwAA/38AAAAAAAAJAAAABAAAAAAAAAAeAAAAaAAAAAAAAAAAAAAAAAAAAAAAAAAAAAAAECcAABAnAAAAAAAAAAAAAAAAAAAAAAAAAAAAAAAAAAAAAAAAAAAAABQAAAAAAAAAwMD/AAAAAABkAAAAMgAAAAAAAABkAAAAAAAAAH9/fwAKAAAAIgAAABgAAAAAAAAAAAAAAAAAAAAAAAAAAAAAAAAAAAAkAAAAJAAAAAAAAAAHAAAAAAAAAAAAAAAAAAAAAAAAAAAAAAAAAAAAf39/ACUAAABYAAAAAAAAAAAAAAAAAAAAAAAAAAAAAAAAAAAAAAAAAAAAAAAAAAAAAAAAAAAAAAA/AAAAAAAAAKCGAQAAAAAAAAAAAAAAAAAMAAAAAQAAAAAAAAAAAAAAAAAAAB8AAABUAAAAAAAABQAAAAEAAAAAAAAAAAAAAAAAAAAAAAAAAAAAAAAAAAAAAAAAAAAAAAJ/f38AAAAAA8zMzADAwP8Af39/AAAAAAAAAAAAAAAAAAAAAAAAAAAAIQAAABgAAAAUAAAA+DQAABonAADYRQAAWSkAABAAAAAmAAAACAAAAAAAAAAAAAAA"/>
+              </a:ext>
+            </a:extLst>
           </p:cNvSpPr>
           <p:nvPr>
             <p:ph type="sldNum" sz="quarter" idx="12"/>
@@ -462,29 +659,26 @@
           <a:bodyPr/>
           <a:lstStyle/>
           <a:p>
-            <a:fld id="{2AF8EFAC-D507-4007-9634-FDE202E639CC}" type="slidenum">
-              <a:rPr lang="en-US" smtClean="0"/>
+            <a:pPr>
+              <a:defRPr lang="en-us"/>
+            </a:pPr>
+            <a:fld id="{30AEDDF6-B8DD-FB2B-9316-4E7E9358651B}" type="slidenum">
               <a:t>‹#›</a:t>
             </a:fld>
-            <a:endParaRPr lang="en-US"/>
           </a:p>
         </p:txBody>
       </p:sp>
     </p:spTree>
-    <p:extLst>
-      <p:ext uri="{BB962C8B-B14F-4D97-AF65-F5344CB8AC3E}">
-        <p14:creationId xmlns:p14="http://schemas.microsoft.com/office/powerpoint/2010/main" val="1354674824"/>
-      </p:ext>
-    </p:extLst>
   </p:cSld>
   <p:clrMapOvr>
     <a:masterClrMapping/>
   </p:clrMapOvr>
+  <p:hf hdr="0" ftr="0"/>
 </p:sldLayout>
 </file>
 
 <file path=ppt/slideLayouts/slideLayout11.xml><?xml version="1.0" encoding="utf-8"?>
-<p:sldLayout xmlns:a="http://schemas.openxmlformats.org/drawingml/2006/main" xmlns:r="http://schemas.openxmlformats.org/officeDocument/2006/relationships" xmlns:p="http://schemas.openxmlformats.org/presentationml/2006/main" type="vertTitleAndTx" preserve="1">
+<p:sldLayout xmlns:p="http://schemas.openxmlformats.org/presentationml/2006/main" xmlns:mc="http://schemas.openxmlformats.org/markup-compatibility/2006" xmlns:p14="http://schemas.microsoft.com/office/powerpoint/2010/main" xmlns:p15="http://schemas.microsoft.com/office/powerpoint/2012/main" xmlns:r="http://schemas.openxmlformats.org/officeDocument/2006/relationships" xmlns:a="http://schemas.openxmlformats.org/drawingml/2006/main" type="vertTitleAndTx" preserve="1">
   <p:cSld name="Vertical Title and Text">
     <p:spTree>
       <p:nvGrpSpPr>
@@ -504,27 +698,37 @@
         <p:nvSpPr>
           <p:cNvPr id="2" name="Vertical Title 1"/>
           <p:cNvSpPr>
-            <a:spLocks noGrp="1"/>
-          </p:cNvSpPr>
-          <p:nvPr>
-            <p:ph type="title" orient="vert"/>
+            <a:spLocks noGrp="1" noChangeArrowheads="1"/>
+            <a:extLst>
+              <a:ext uri="smNativeData">
+                <pr:smNativeData xmlns:pr="smNativeData" xmlns="smNativeData" val="SMDATA_15_FLquaRMAAAAlAAAAZAAAAA0AAAAAkAAAAEgAAACQAAAASAAAAAAAAAABAAAAAQAAAAEAAABQAAAAAAAAAAAA4D8AAAAAAADgPwAAAAAAAOA/AAAAAAAA4D8AAAAAAADgPwAAAAAAAOA/AAAAAAAA4D8AAAAAAADgPwAAAAAAAOA/AAAAAAAA4D8CAAAAjAAAAAAAAAAAAAAAW5vVDP///wgAAAAAAAAAAAAAAAAAAAAAAAAAAAAAAAAAAAAAZAAAAAEAAABAAAAAAAAAAAAAAAAAAAAAAAAAAAAAAAAAAAAAAAAAAAAAAAAAAAAAAAAAAAAAAAAAAAAAAAAAAAAAAAAAAAAAAAAAAAAAAAAAAAAAAAAAAAAAAAAAAAAAFAAAADwAAAAAAAAAAAAAAAAAAAkUAAAAAQAAABQAAAAUAAAAFAAAAAEAAAAAAAAAZAAAAGQAAAAAAAAAZAAAAGQAAAAVAAAAYAAAAAAAAAAAAAAADwAAACADAAAAAAAAAAAAAAEAAACgMgAAVgcAAKr4//8BAAAAf39/AAEAAABkAAAAAAAAABQAAABAHwAAAAAAACYAAAAAAAAAwOD//wAAAAAmAAAAZAAAABYAAABMAAAAAAAAAAAAAAAEAAAAAAAAAAEAAADn5uYKAAAAACgAAAAoAAAAZAAAAGQAAAAAAAAAzMzMAAAAAABQAAAAUAAAAGQAAABkAAAAAAAAABcAAAAUAAAAAAAAAAAAAAD/fwAA/38AAAAAAAAJAAAABAAAAAAAAAAeAAAAaAAAAAAAAAAAAAAAAAAAAAAAAAAAAAAAECcAABAnAAAAAAAAAAAAAAAAAAAAAAAAAAAAAAAAAAAAAAAAAAAAABQAAAAAAAAAwMD/AAAAAABkAAAAMgAAAAAAAABkAAAAAAAAAH9/fwAKAAAAIgAAABgAAAAAAAAAAAAAAAAAAAAAAAAAAAAAAAAAAAAkAAAAJAAAAAAAAAAHAAAAAAAAAAAAAAAAAAAAAAAAAAAAAAAAAAAAf39/ACUAAABYAAAAAAAAAAAAAAAAAAAAAAAAAAAAAAAAAAAAAAAAAAAAAAAAAAAAAAAAAAAAAAA/AAAAAAAAAKCGAQAAAAAAAAAAAAAAAAAMAAAAAQAAAAAAAAAAAAAAAAAAAB8AAABUAAAAAAAABQAAAAEAAAAAAAAAAAAAAAAAAAAAAAAAAAAAAAAAAAAAAAAAAAAAAAJ/f38AAAAAA8zMzADAwP8Af39/AAAAAAAAAAAAAAAAAAAAAAAAAAAAIQAAABgAAAAUAAAArDUAAD8CAADYRQAAACYAABAAAAAmAAAACAAAAAMAAAAAAAAA"/>
+              </a:ext>
+            </a:extLst>
+          </p:cNvSpPr>
+          <p:nvPr>
+            <p:ph type="title"/>
           </p:nvPr>
         </p:nvSpPr>
         <p:spPr>
           <a:xfrm>
             <a:off x="8724900" y="365125"/>
-            <a:ext cx="2628900" cy="5811838"/>
+            <a:ext cx="2628900" cy="5812155"/>
           </a:xfrm>
         </p:spPr>
         <p:txBody>
-          <a:bodyPr vert="eaVert"/>
-          <a:lstStyle/>
-          <a:p>
-            <a:r>
-              <a:rPr lang="en-US" smtClean="0"/>
+          <a:bodyPr vert="vert" wrap="square" lIns="91440" tIns="45720" rIns="91440" bIns="45720" numCol="1" spcCol="215900" anchor="ctr">
+            <a:prstTxWarp prst="textNoShape">
+              <a:avLst/>
+            </a:prstTxWarp>
+          </a:bodyPr>
+          <a:lstStyle/>
+          <a:p>
+            <a:pPr>
+              <a:defRPr lang="en-us"/>
+            </a:pPr>
+            <a:r>
               <a:t>Click to edit Master title style</a:t>
             </a:r>
-            <a:endParaRPr lang="en-US"/>
           </a:p>
         </p:txBody>
       </p:sp>
@@ -532,56 +736,69 @@
         <p:nvSpPr>
           <p:cNvPr id="3" name="Vertical Text Placeholder 2"/>
           <p:cNvSpPr>
-            <a:spLocks noGrp="1"/>
-          </p:cNvSpPr>
-          <p:nvPr>
-            <p:ph type="body" orient="vert" idx="1"/>
+            <a:spLocks noGrp="1" noChangeArrowheads="1"/>
+            <a:extLst>
+              <a:ext uri="smNativeData">
+                <pr:smNativeData xmlns:pr="smNativeData" xmlns="smNativeData" val="SMDATA_15_FLquaRMAAAAlAAAAZAAAAA0AAAAAkAAAAEgAAACQAAAASAAAAAAAAAAAAAAAAQAAAAEAAABQAAAAAAAAAAAA4D8AAAAAAADgPwAAAAAAAOA/AAAAAAAA4D8AAAAAAADgPwAAAAAAAOA/AAAAAAAA4D8AAAAAAADgPwAAAAAAAOA/AAAAAAAA4D8CAAAAjAAAAAAAAAAAAAAAW5vVDP///wgAAAAAAAAAAAAAAAAAAAAAAAAAAAAAAAAAAAAAZAAAAAEAAABAAAAAAAAAAAAAAAAAAAAAAAAAAAAAAAAAAAAAAAAAAAAAAAAAAAAAAAAAAAAAAAAAAAAAAAAAAAAAAAAAAAAAAAAAAAAAAAAAAAAAAAAAAAAAAAAAAAAAFAAAADwAAAAAAAAAAAAAAAAAAAkUAAAAAQAAABQAAAAUAAAAFAAAAAEAAAAAAAAAZAAAAGQAAAAAAAAAZAAAAGQAAAAVAAAAYAAAAAAAAAAAAAAADwAAACADAAAAAAAAAAAAAAEAAACgMgAAVgcAAKr4//8BAAAAf39/AAEAAABkAAAAAAAAABQAAABAHwAAAAAAACYAAAAAAAAAwOD//wAAAAAmAAAAZAAAABYAAABMAAAAAAAAAAAAAAAEAAAAAAAAAAEAAADn5uYKAAAAACgAAAAoAAAAZAAAAGQAAAAAAAAAzMzMAAAAAABQAAAAUAAAAGQAAABkAAAAAAAAABcAAAAUAAAAAAAAAAAAAAD/fwAA/38AAAAAAAAJAAAABAAAAAAAAAAeAAAAaAAAAAAAAAAAAAAAAAAAAAAAAAAAAAAAECcAABAnAAAAAAAAAAAAAAAAAAAAAAAAAAAAAAAAAAAAAAAAAAAAABQAAAAAAAAAwMD/AAAAAABkAAAAMgAAAAAAAABkAAAAAAAAAH9/fwAKAAAAIgAAABgAAAAAAAAAAAAAAAAAAAAAAAAAAAAAAAAAAAAkAAAAJAAAAAAAAAAHAAAAAAAAAAAAAAAAAAAAAAAAAAAAAAAAAAAAf39/ACUAAABYAAAAAAAAAAAAAAAAAAAAAAAAAAAAAAAAAAAAAAAAAAAAAAAAAAAAAAAAAAAAAAA/AAAAAAAAAKCGAQAAAAAAAAAAAAAAAAAMAAAAAQAAAAAAAAAAAAAAAAAAAB8AAABUAAAAAAAABQAAAAEAAAAAAAAAAAAAAAAAAAAAAAAAAAAAAAAAAAAAAAAAAAAAAAJ/f38AAAAAA8zMzADAwP8Af39/AAAAAAAAAAAAAAAAAAAAAAAAAAAAIQAAABgAAAAUAAAAKAUAAD8CAAC8NAAAACYAABAAAAAmAAAACAAAAAMAAAAAAAAA"/>
+              </a:ext>
+            </a:extLst>
+          </p:cNvSpPr>
+          <p:nvPr>
+            <p:ph idx="1"/>
           </p:nvPr>
         </p:nvSpPr>
         <p:spPr>
           <a:xfrm>
             <a:off x="838200" y="365125"/>
-            <a:ext cx="7734300" cy="5811838"/>
+            <a:ext cx="7734300" cy="5812155"/>
           </a:xfrm>
         </p:spPr>
         <p:txBody>
-          <a:bodyPr vert="eaVert"/>
-          <a:lstStyle/>
-          <a:p>
-            <a:pPr lvl="0"/>
-            <a:r>
-              <a:rPr lang="en-US" smtClean="0"/>
+          <a:bodyPr vert="vert" wrap="square" lIns="91440" tIns="45720" rIns="91440" bIns="45720" numCol="1" spcCol="215900" anchor="t">
+            <a:prstTxWarp prst="textNoShape">
+              <a:avLst/>
+            </a:prstTxWarp>
+          </a:bodyPr>
+          <a:lstStyle/>
+          <a:p>
+            <a:pPr>
+              <a:defRPr lang="en-us"/>
+            </a:pPr>
+            <a:r>
               <a:t>Click to edit Master text styles</a:t>
             </a:r>
           </a:p>
           <a:p>
-            <a:pPr lvl="1"/>
-            <a:r>
-              <a:rPr lang="en-US" smtClean="0"/>
+            <a:pPr lvl="1">
+              <a:defRPr lang="en-us"/>
+            </a:pPr>
+            <a:r>
               <a:t>Second level</a:t>
             </a:r>
           </a:p>
           <a:p>
-            <a:pPr lvl="2"/>
-            <a:r>
-              <a:rPr lang="en-US" smtClean="0"/>
+            <a:pPr lvl="2">
+              <a:defRPr lang="en-us"/>
+            </a:pPr>
+            <a:r>
               <a:t>Third level</a:t>
             </a:r>
           </a:p>
           <a:p>
-            <a:pPr lvl="3"/>
-            <a:r>
-              <a:rPr lang="en-US" smtClean="0"/>
+            <a:pPr lvl="3">
+              <a:defRPr lang="en-us"/>
+            </a:pPr>
+            <a:r>
               <a:t>Fourth level</a:t>
             </a:r>
           </a:p>
           <a:p>
-            <a:pPr lvl="4"/>
-            <a:r>
-              <a:rPr lang="en-US" smtClean="0"/>
+            <a:pPr lvl="4">
+              <a:defRPr lang="en-us"/>
+            </a:pPr>
+            <a:r>
               <a:t>Fifth level</a:t>
             </a:r>
-            <a:endParaRPr lang="en-US"/>
           </a:p>
         </p:txBody>
       </p:sp>
@@ -589,7 +806,12 @@
         <p:nvSpPr>
           <p:cNvPr id="4" name="Date Placeholder 3"/>
           <p:cNvSpPr>
-            <a:spLocks noGrp="1"/>
+            <a:spLocks noGrp="1" noChangeArrowheads="1"/>
+            <a:extLst>
+              <a:ext uri="smNativeData">
+                <pr:smNativeData xmlns:pr="smNativeData" xmlns="smNativeData" val="SMDATA_15_FLquaRMAAAAlAAAAZAAAAA0AAAAAkAAAAEgAAACQAAAASAAAAAAAAAABAAAAAAAAAAEAAABQAAAAAAAAAAAA4D8AAAAAAADgPwAAAAAAAOA/AAAAAAAA4D8AAAAAAADgPwAAAAAAAOA/AAAAAAAA4D8AAAAAAADgPwAAAAAAAOA/AAAAAAAA4D8CAAAAjAAAAAAAAAAAAAAAW5vVDP///wgAAAAAAAAAAAAAAAAAAAAAAAAAAAAAAAAAAAAAZAAAAAEAAABAAAAAAAAAAAAAAAAAAAAAAAAAAAAAAAAAAAAAAAAAAAAAAAAAAAAAAAAAAAAAAAAAAAAAAAAAAAAAAAAAAAAAAAAAAAAAAAAAAAAAAAAAAAAAAAAAAAAAFAAAADwAAAAAAAAAAAAAAAAAAAkUAAAAAQAAABQAAAAUAAAAFAAAAAEAAAAAAAAAZAAAAGQAAAAAAAAAZAAAAGQAAAAVAAAAYAAAAAAAAAAAAAAADwAAACADAAAAAAAAAAAAAAEAAACgMgAAVgcAAKr4//8BAAAAf39/AAEAAABkAAAAAAAAABQAAABAHwAAAAAAACYAAAAAAAAAwOD//wAAAAAmAAAAZAAAABYAAABMAAAAAAAAAAAAAAAEAAAAAAAAAAEAAADn5uYKAAAAACgAAAAoAAAAZAAAAGQAAAAAAAAAzMzMAAAAAABQAAAAUAAAAGQAAABkAAAAAAAAABcAAAAUAAAAAAAAAAAAAAD/fwAA/38AAAAAAAAJAAAABAAAAAAAAAAeAAAAaAAAAAAAAAAAAAAAAAAAAAAAAAAAAAAAECcAABAnAAAAAAAAAAAAAAAAAAAAAAAAAAAAAAAAAAAAAAAAAAAAABQAAAAAAAAAwMD/AAAAAABkAAAAMgAAAAAAAABkAAAAAAAAAH9/fwAKAAAAIgAAABgAAAAAAAAAAAAAAAAAAAAAAAAAAAAAAAAAAAAkAAAAJAAAAAAAAAAHAAAAAAAAAAAAAAAAAAAAAAAAAAAAAAAAAAAAf39/ACUAAABYAAAAAAAAAAAAAAAAAAAAAAAAAAAAAAAAAAAAAAAAAAAAAAAAAAAAAAAAAAAAAAA/AAAAAAAAAKCGAQAAAAAAAAAAAAAAAAAMAAAAAQAAAAAAAAAAAAAAAAAAAB8AAABUAAAAAAAABQAAAAEAAAAAAAAAAAAAAAAAAAAAAAAAAAAAAAAAAAAAAAAAAAAAAAJ/f38AAAAAA8zMzADAwP8Af39/AAAAAAAAAAAAAAAAAAAAAAAAAAAAIQAAABgAAAAUAAAAKAUAABonAAAIFgAAWSkAABAAAAAmAAAACAAAAAAAAAAAAAAA"/>
+              </a:ext>
+            </a:extLst>
           </p:cNvSpPr>
           <p:nvPr>
             <p:ph type="dt" sz="half" idx="10"/>
@@ -600,11 +822,12 @@
           <a:bodyPr/>
           <a:lstStyle/>
           <a:p>
-            <a:fld id="{77AD5A0D-32F9-42A2-946C-433A90366567}" type="datetimeFigureOut">
-              <a:rPr lang="en-US" smtClean="0"/>
-              <a:t>6/13/2025</a:t>
+            <a:pPr>
+              <a:defRPr lang="en-us"/>
+            </a:pPr>
+            <a:fld id="{30AEF476-38DD-FB02-9316-CE57BA58659B}" type="datetime1">
+              <a:t>3/4/2026</a:t>
             </a:fld>
-            <a:endParaRPr lang="en-US"/>
           </a:p>
         </p:txBody>
       </p:sp>
@@ -612,7 +835,12 @@
         <p:nvSpPr>
           <p:cNvPr id="5" name="Footer Placeholder 4"/>
           <p:cNvSpPr>
-            <a:spLocks noGrp="1"/>
+            <a:spLocks noGrp="1" noChangeArrowheads="1"/>
+            <a:extLst>
+              <a:ext uri="smNativeData">
+                <pr:smNativeData xmlns:pr="smNativeData" xmlns="smNativeData" val="SMDATA_15_FLquaRMAAAAlAAAAZAAAAA0AAAAAkAAAAEgAAACQAAAASAAAAAAAAAABAAAAAAAAAAEAAABQAAAAAAAAAAAA4D8AAAAAAADgPwAAAAAAAOA/AAAAAAAA4D8AAAAAAADgPwAAAAAAAOA/AAAAAAAA4D8AAAAAAADgPwAAAAAAAOA/AAAAAAAA4D8CAAAAjAAAAAAAAAAAAAAAW5vVDP///wgAAAAAAAAAAAAAAAAAAAAAAAAAAAAAAAAAAAAAZAAAAAEAAABAAAAAAAAAAAAAAAAAAAAAAAAAAAAAAAAAAAAAAAAAAAAAAAAAAAAAAAAAAAAAAAAAAAAAAAAAAAAAAAAAAAAAAAAAAAAAAAAAAAAAAAAAAAAAAAAAAAAAFAAAADwAAAAAAAAAAAAAAAAAAAkUAAAAAQAAABQAAAAUAAAAFAAAAAEAAAAAAAAAZAAAAGQAAAAAAAAAZAAAAGQAAAAVAAAAYAAAAAAAAAAAAAAADwAAACADAAAAAAAAAAAAAAEAAACgMgAAVgcAAKr4//8BAAAAf39/AAEAAABkAAAAAAAAABQAAABAHwAAAAAAACYAAAAAAAAAwOD//wAAAAAmAAAAZAAAABYAAABMAAAAAAAAAAAAAAAEAAAAAAAAAAEAAADn5uYKAAAAACgAAAAoAAAAZAAAAGQAAAAAAAAAzMzMAAAAAABQAAAAUAAAAGQAAABkAAAAAAAAABcAAAAUAAAAAAAAAAAAAAD/fwAA/38AAAAAAAAJAAAABAAAAAAAAAAeAAAAaAAAAAAAAAAAAAAAAAAAAAAAAAAAAAAAECcAABAnAAAAAAAAAAAAAAAAAAAAAAAAAAAAAAAAAAAAAAAAAAAAABQAAAAAAAAAwMD/AAAAAABkAAAAMgAAAAAAAABkAAAAAAAAAH9/fwAKAAAAIgAAABgAAAAAAAAAAAAAAAAAAAAAAAAAAAAAAAAAAAAkAAAAJAAAAAAAAAAHAAAAAAAAAAAAAAAAAAAAAAAAAAAAAAAAAAAAf39/ACUAAABYAAAAAAAAAAAAAAAAAAAAAAAAAAAAAAAAAAAAAAAAAAAAAAAAAAAAAAAAAAAAAAA/AAAAAAAAAKCGAQAAAAAAAAAAAAAAAAAMAAAAAQAAAAAAAAAAAAAAAAAAAB8AAABUAAAAAAAABQAAAAEAAAAAAAAAAAAAAAAAAAAAAAAAAAAAAAAAAAAAAAAAAAAAAAJ/f38AAAAAA8zMzADAwP8Af39/AAAAAAAAAAAAAAAAAAAAAAAAAAAAIQAAABgAAAAUAAAA2BgAABonAAAoMgAAWSkAABAAAAAmAAAACAAAAAAAAAAAAAAA"/>
+              </a:ext>
+            </a:extLst>
           </p:cNvSpPr>
           <p:nvPr>
             <p:ph type="ftr" sz="quarter" idx="11"/>
@@ -623,7 +851,9 @@
           <a:bodyPr/>
           <a:lstStyle/>
           <a:p>
-            <a:endParaRPr lang="en-US"/>
+            <a:pPr>
+              <a:defRPr lang="en-us"/>
+            </a:pPr>
           </a:p>
         </p:txBody>
       </p:sp>
@@ -631,7 +861,12 @@
         <p:nvSpPr>
           <p:cNvPr id="6" name="Slide Number Placeholder 5"/>
           <p:cNvSpPr>
-            <a:spLocks noGrp="1"/>
+            <a:spLocks noGrp="1" noChangeArrowheads="1"/>
+            <a:extLst>
+              <a:ext uri="smNativeData">
+                <pr:smNativeData xmlns:pr="smNativeData" xmlns="smNativeData" val="SMDATA_15_FLquaRMAAAAlAAAAZAAAAA0AAAAAkAAAAEgAAACQAAAASAAAAAAAAAABAAAAAAAAAAEAAABQAAAAAAAAAAAA4D8AAAAAAADgPwAAAAAAAOA/AAAAAAAA4D8AAAAAAADgPwAAAAAAAOA/AAAAAAAA4D8AAAAAAADgPwAAAAAAAOA/AAAAAAAA4D8CAAAAjAAAAAAAAAAAAAAAW5vVDP///wgAAAAAAAAAAAAAAAAAAAAAAAAAAAAAAAAAAAAAZAAAAAEAAABAAAAAAAAAAAAAAAAAAAAAAAAAAAAAAAAAAAAAAAAAAAAAAAAAAAAAAAAAAAAAAAAAAAAAAAAAAAAAAAAAAAAAAAAAAAAAAAAAAAAAAAAAAAAAAAAAAAAAFAAAADwAAAAAAAAAAAAAAAAAAAkUAAAAAQAAABQAAAAUAAAAFAAAAAEAAAAAAAAAZAAAAGQAAAAAAAAAZAAAAGQAAAAVAAAAYAAAAAAAAAAAAAAADwAAACADAAAAAAAAAAAAAAEAAACgMgAAVgcAAKr4//8BAAAAf39/AAEAAABkAAAAAAAAABQAAABAHwAAAAAAACYAAAAAAAAAwOD//wAAAAAmAAAAZAAAABYAAABMAAAAAAAAAAAAAAAEAAAAAAAAAAEAAADn5uYKAAAAACgAAAAoAAAAZAAAAGQAAAAAAAAAzMzMAAAAAABQAAAAUAAAAGQAAABkAAAAAAAAABcAAAAUAAAAAAAAAAAAAAD/fwAA/38AAAAAAAAJAAAABAAAAAAAAAAeAAAAaAAAAAAAAAAAAAAAAAAAAAAAAAAAAAAAECcAABAnAAAAAAAAAAAAAAAAAAAAAAAAAAAAAAAAAAAAAAAAAAAAABQAAAAAAAAAwMD/AAAAAABkAAAAMgAAAAAAAABkAAAAAAAAAH9/fwAKAAAAIgAAABgAAAAAAAAAAAAAAAAAAAAAAAAAAAAAAAAAAAAkAAAAJAAAAAAAAAAHAAAAAAAAAAAAAAAAAAAAAAAAAAAAAAAAAAAAf39/ACUAAABYAAAAAAAAAAAAAAAAAAAAAAAAAAAAAAAAAAAAAAAAAAAAAAAAAAAAAAAAAAAAAAA/AAAAAAAAAKCGAQAAAAAAAAAAAAAAAAAMAAAAAQAAAAAAAAAAAAAAAAAAAB8AAABUAAAAAAAABQAAAAEAAAAAAAAAAAAAAAAAAAAAAAAAAAAAAAAAAAAAAAAAAAAAAAJ/f38AAAAAA8zMzADAwP8Af39/AAAAAAAAAAAAAAAAAAAAAAAAAAAAIQAAABgAAAAUAAAA+DQAABonAADYRQAAWSkAABAAAAAmAAAACAAAAAAAAAAAAAAA"/>
+              </a:ext>
+            </a:extLst>
           </p:cNvSpPr>
           <p:nvPr>
             <p:ph type="sldNum" sz="quarter" idx="12"/>
@@ -642,29 +877,26 @@
           <a:bodyPr/>
           <a:lstStyle/>
           <a:p>
-            <a:fld id="{2AF8EFAC-D507-4007-9634-FDE202E639CC}" type="slidenum">
-              <a:rPr lang="en-US" smtClean="0"/>
+            <a:pPr>
+              <a:defRPr lang="en-us"/>
+            </a:pPr>
+            <a:fld id="{30AECEC0-8EDD-FB38-9316-786D8058652D}" type="slidenum">
               <a:t>‹#›</a:t>
             </a:fld>
-            <a:endParaRPr lang="en-US"/>
           </a:p>
         </p:txBody>
       </p:sp>
     </p:spTree>
-    <p:extLst>
-      <p:ext uri="{BB962C8B-B14F-4D97-AF65-F5344CB8AC3E}">
-        <p14:creationId xmlns:p14="http://schemas.microsoft.com/office/powerpoint/2010/main" val="560415354"/>
-      </p:ext>
-    </p:extLst>
   </p:cSld>
   <p:clrMapOvr>
     <a:masterClrMapping/>
   </p:clrMapOvr>
+  <p:hf hdr="0" ftr="0"/>
 </p:sldLayout>
 </file>
 
 <file path=ppt/slideLayouts/slideLayout2.xml><?xml version="1.0" encoding="utf-8"?>
-<p:sldLayout xmlns:a="http://schemas.openxmlformats.org/drawingml/2006/main" xmlns:r="http://schemas.openxmlformats.org/officeDocument/2006/relationships" xmlns:p="http://schemas.openxmlformats.org/presentationml/2006/main" type="obj" preserve="1">
+<p:sldLayout xmlns:p="http://schemas.openxmlformats.org/presentationml/2006/main" xmlns:mc="http://schemas.openxmlformats.org/markup-compatibility/2006" xmlns:p14="http://schemas.microsoft.com/office/powerpoint/2010/main" xmlns:p15="http://schemas.microsoft.com/office/powerpoint/2012/main" xmlns:r="http://schemas.openxmlformats.org/officeDocument/2006/relationships" xmlns:a="http://schemas.openxmlformats.org/drawingml/2006/main" type="obj" preserve="1">
   <p:cSld name="Title and Content">
     <p:spTree>
       <p:nvGrpSpPr>
@@ -684,7 +916,12 @@
         <p:nvSpPr>
           <p:cNvPr id="2" name="Title 1"/>
           <p:cNvSpPr>
-            <a:spLocks noGrp="1"/>
+            <a:spLocks noGrp="1" noChangeArrowheads="1"/>
+            <a:extLst>
+              <a:ext uri="smNativeData">
+                <pr:smNativeData xmlns:pr="smNativeData" xmlns="smNativeData" val="SMDATA_15_FLquaRMAAAAlAAAAZAAAAA0AAAAAkAAAAEgAAACQAAAASAAAAAAAAAABAAAAAAAAAAEAAABQAAAAAAAAAAAA4D8AAAAAAADgPwAAAAAAAOA/AAAAAAAA4D8AAAAAAADgPwAAAAAAAOA/AAAAAAAA4D8AAAAAAADgPwAAAAAAAOA/AAAAAAAA4D8CAAAAjAAAAAAAAAAAAAAAW5vVDP///wgAAAAAAAAAAAAAAAAAAAAAAAAAAAAAAAAAAAAAZAAAAAEAAABAAAAAAAAAAAAAAAAAAAAAAAAAAAAAAAAAAAAAAAAAAAAAAAAAAAAAAAAAAAAAAAAAAAAAAAAAAAAAAAAAAAAAAAAAAAAAAAAAAAAAAAAAAAAAAAAAAAAAFAAAADwAAAAAAAAAAAAAAAAAAAkUAAAAAQAAABQAAAAUAAAAFAAAAAEAAAAAAAAAZAAAAGQAAAAAAAAAZAAAAGQAAAAVAAAAYAAAAAAAAAAAAAAADwAAACADAAAAAAAAAAAAAAEAAACgMgAAVgcAAKr4//8BAAAAf39/AAEAAABkAAAAAAAAABQAAABAHwAAAAAAACYAAAAAAAAAwOD//wAAAAAmAAAAZAAAABYAAABMAAAAAAAAAAAAAAAEAAAAAAAAAAEAAADn5uYKAAAAACgAAAAoAAAAZAAAAGQAAAAAAAAAzMzMAAAAAABQAAAAUAAAAGQAAABkAAAAAAAAABcAAAAUAAAAAAAAAAAAAAD/fwAA/38AAAAAAAAJAAAABAAAAGxpY2keAAAAaAAAAAAAAAAAAAAAAAAAAAAAAAAAAAAAECcAABAnAAAAAAAAAAAAAAAAAAAAAAAAAAAAAAAAAAAAAAAAAAAAABQAAAAAAAAAwMD/AAAAAABkAAAAMgAAAAAAAABkAAAAAAAAAH9/fwAKAAAAIgAAABgAAAAAAAAAAAAAAAAAAAAAAAAAAAAAAAAAAAAkAAAAJAAAAAAAAAAHAAAAAAAAAAAAAAAAAAAAAAAAAAAAAAAAAAAAf39/ACUAAABYAAAAAAAAAAAAAAAAAAAAAAAAAAAAAAAAAAAAAAAAAAAAAAAAAAAAAAAAAAAAAAA/AAAAAAAAAKCGAQAAAAAAAAAAAAAAAAAMAAAAAQAAAAAAAAAAAAAAAAAAAB8AAABUAAAAAAAABQAAAAEAAAAAAAAAAAAAAAAAAAAAAAAAAAAAAAAAAAAAAAAAAAAAAAJ/f38AAAAAA8zMzADAwP8Af39/AAAAAAAAAAAAAAAAAAAAAAAAAAAAIQAAABgAAAAUAAAAKAUAAD8CAADYRQAAZwoAABAAAAAmAAAACAAAAAAAAAAAAAAA"/>
+              </a:ext>
+            </a:extLst>
           </p:cNvSpPr>
           <p:nvPr>
             <p:ph type="title"/>
@@ -695,11 +932,12 @@
           <a:bodyPr/>
           <a:lstStyle/>
           <a:p>
-            <a:r>
-              <a:rPr lang="en-US" smtClean="0"/>
+            <a:pPr>
+              <a:defRPr lang="en-us"/>
+            </a:pPr>
+            <a:r>
               <a:t>Click to edit Master title style</a:t>
             </a:r>
-            <a:endParaRPr lang="en-US"/>
           </a:p>
         </p:txBody>
       </p:sp>
@@ -707,7 +945,12 @@
         <p:nvSpPr>
           <p:cNvPr id="3" name="Content Placeholder 2"/>
           <p:cNvSpPr>
-            <a:spLocks noGrp="1"/>
+            <a:spLocks noGrp="1" noChangeArrowheads="1"/>
+            <a:extLst>
+              <a:ext uri="smNativeData">
+                <pr:smNativeData xmlns:pr="smNativeData" xmlns="smNativeData" val="SMDATA_15_FLquaRMAAAAlAAAAZAAAAA0AAAAAkAAAAEgAAACQAAAASAAAAAAAAAAAAAAAAAAAAAEAAABQAAAAAAAAAAAA4D8AAAAAAADgPwAAAAAAAOA/AAAAAAAA4D8AAAAAAADgPwAAAAAAAOA/AAAAAAAA4D8AAAAAAADgPwAAAAAAAOA/AAAAAAAA4D8CAAAAjAAAAAAAAAAAAAAAW5vVDP///wgAAAAAAAAAAAAAAAAAAAAAAAAAAAAAAAAAAAAAZAAAAAEAAABAAAAAAAAAAAAAAAAAAAAAAAAAAAAAAAAAAAAAAAAAAAAAAAAAAAAAAAAAAAAAAAAAAAAAAAAAAAAAAAAAAAAAAAAAAAAAAAAAAAAAAAAAAAAAAAAAAAAAFAAAADwAAAAAAAAAAAAAAAAAAAkUAAAAAQAAABQAAAAUAAAAFAAAAAEAAAAAAAAAZAAAAGQAAAAAAAAAZAAAAGQAAAAVAAAAYAAAAAAAAAAAAAAADwAAACADAAAAAAAAAAAAAAEAAACgMgAAVgcAAKr4//8BAAAAf39/AAEAAABkAAAAAAAAABQAAABAHwAAAAAAACYAAAAAAAAAwOD//wAAAAAmAAAAZAAAABYAAABMAAAAAAAAAAAAAAAEAAAAAAAAAAEAAADn5uYKAAAAACgAAAAoAAAAZAAAAGQAAAAAAAAAzMzMAAAAAABQAAAAUAAAAGQAAABkAAAAAAAAABcAAAAUAAAAAAAAAAAAAAD/fwAA/38AAAAAAAAJAAAABAAAAAAAAAAeAAAAaAAAAAAAAAAAAAAAAAAAAAAAAAAAAAAAECcAABAnAAAAAAAAAAAAAAAAAAAAAAAAAAAAAAAAAAAAAAAAAAAAABQAAAAAAAAAwMD/AAAAAABkAAAAMgAAAAAAAABkAAAAAAAAAH9/fwAKAAAAIgAAABgAAAAAAAAAAAAAAAAAAAAAAAAAAAAAAAAAAAAkAAAAJAAAAAAAAAAHAAAAAAAAAAAAAAAAAAAAAAAAAAAAAAAAAAAAf39/ACUAAABYAAAAAAAAAAAAAAAAAAAAAAAAAAAAAAAAAAAAAAAAAAAAAAAAAAAAAAAAAAAAAAA/AAAAAAAAAKCGAQAAAAAAAAAAAAAAAAAMAAAAAQAAAAAAAAAAAAAAAAAAAB8AAABUAAAAAAAABQAAAAEAAAAAAAAAAAAAAAAAAAAAAAAAAAAAAAAAAAAAAAAAAAAAAAJ/f38AAAAAA8zMzADAwP8Af39/AAAAAAAAAAAAAAAAAAAAAAAAAAAAIQAAABgAAAAUAAAAKAUAADsLAADYRQAAACYAABAAAAAmAAAACAAAAAAAAAAAAAAA"/>
+              </a:ext>
+            </a:extLst>
           </p:cNvSpPr>
           <p:nvPr>
             <p:ph idx="1"/>
@@ -718,40 +961,44 @@
           <a:bodyPr/>
           <a:lstStyle/>
           <a:p>
-            <a:pPr lvl="0"/>
-            <a:r>
-              <a:rPr lang="en-US" smtClean="0"/>
+            <a:pPr>
+              <a:defRPr lang="en-us"/>
+            </a:pPr>
+            <a:r>
               <a:t>Click to edit Master text styles</a:t>
             </a:r>
           </a:p>
           <a:p>
-            <a:pPr lvl="1"/>
-            <a:r>
-              <a:rPr lang="en-US" smtClean="0"/>
+            <a:pPr lvl="1">
+              <a:defRPr lang="en-us"/>
+            </a:pPr>
+            <a:r>
               <a:t>Second level</a:t>
             </a:r>
           </a:p>
           <a:p>
-            <a:pPr lvl="2"/>
-            <a:r>
-              <a:rPr lang="en-US" smtClean="0"/>
+            <a:pPr lvl="2">
+              <a:defRPr lang="en-us"/>
+            </a:pPr>
+            <a:r>
               <a:t>Third level</a:t>
             </a:r>
           </a:p>
           <a:p>
-            <a:pPr lvl="3"/>
-            <a:r>
-              <a:rPr lang="en-US" smtClean="0"/>
+            <a:pPr lvl="3">
+              <a:defRPr lang="en-us"/>
+            </a:pPr>
+            <a:r>
               <a:t>Fourth level</a:t>
             </a:r>
           </a:p>
           <a:p>
-            <a:pPr lvl="4"/>
-            <a:r>
-              <a:rPr lang="en-US" smtClean="0"/>
+            <a:pPr lvl="4">
+              <a:defRPr lang="en-us"/>
+            </a:pPr>
+            <a:r>
               <a:t>Fifth level</a:t>
             </a:r>
-            <a:endParaRPr lang="en-US"/>
           </a:p>
         </p:txBody>
       </p:sp>
@@ -759,7 +1006,12 @@
         <p:nvSpPr>
           <p:cNvPr id="4" name="Date Placeholder 3"/>
           <p:cNvSpPr>
-            <a:spLocks noGrp="1"/>
+            <a:spLocks noGrp="1" noChangeArrowheads="1"/>
+            <a:extLst>
+              <a:ext uri="smNativeData">
+                <pr:smNativeData xmlns:pr="smNativeData" xmlns="smNativeData" val="SMDATA_15_FLquaRMAAAAlAAAAZAAAAA0AAAAAkAAAAEgAAACQAAAASAAAAAAAAAABAAAAAAAAAAEAAABQAAAAAAAAAAAA4D8AAAAAAADgPwAAAAAAAOA/AAAAAAAA4D8AAAAAAADgPwAAAAAAAOA/AAAAAAAA4D8AAAAAAADgPwAAAAAAAOA/AAAAAAAA4D8CAAAAjAAAAAAAAAAAAAAAW5vVDP///wgAAAAAAAAAAAAAAAAAAAAAAAAAAAAAAAAAAAAAZAAAAAEAAABAAAAAAAAAAAAAAAAAAAAAAAAAAAAAAAAAAAAAAAAAAAAAAAAAAAAAAAAAAAAAAAAAAAAAAAAAAAAAAAAAAAAAAAAAAAAAAAAAAAAAAAAAAAAAAAAAAAAAFAAAADwAAAAAAAAAAAAAAAAAAAkUAAAAAQAAABQAAAAUAAAAFAAAAAEAAAAAAAAAZAAAAGQAAAAAAAAAZAAAAGQAAAAVAAAAYAAAAAAAAAAAAAAADwAAACADAAAAAAAAAAAAAAEAAACgMgAAVgcAAKr4//8BAAAAf39/AAEAAABkAAAAAAAAABQAAABAHwAAAAAAACYAAAAAAAAAwOD//wAAAAAmAAAAZAAAABYAAABMAAAAAAAAAAAAAAAEAAAAAAAAAAEAAADn5uYKAAAAACgAAAAoAAAAZAAAAGQAAAAAAAAAzMzMAAAAAABQAAAAUAAAAGQAAABkAAAAAAAAABcAAAAUAAAAAAAAAAAAAAD/fwAA/38AAAAAAAAJAAAABAAAAOBjngseAAAAaAAAAAAAAAAAAAAAAAAAAAAAAAAAAAAAECcAABAnAAAAAAAAAAAAAAAAAAAAAAAAAAAAAAAAAAAAAAAAAAAAABQAAAAAAAAAwMD/AAAAAABkAAAAMgAAAAAAAABkAAAAAAAAAH9/fwAKAAAAIgAAABgAAAAAAAAAAAAAAAAAAAAAAAAAAAAAAAAAAAAkAAAAJAAAAAAAAAAHAAAAAAAAAAAAAAAAAAAAAAAAAAAAAAAAAAAAf39/ACUAAABYAAAAAAAAAAAAAAAAAAAAAAAAAAAAAAAAAAAAAAAAAAAAAAAAAAAAAAAAAAAAAAA/AAAAAAAAAKCGAQAAAAAAAAAAAAAAAAAMAAAAAQAAAAAAAAAAAAAAAAAAAB8AAABUAAAAAAAABQAAAAEAAAAAAAAAAAAAAAAAAAAAAAAAAAAAAAAAAAAAAAAAAAAAAAJ/f38AAAAAA8zMzADAwP8Af39/AAAAAAAAAAAAAAAAAAAAAAAAAAAAIQAAABgAAAAUAAAAKAUAABonAAAIFgAAWSkAABAAAAAmAAAACAAAAAAAAAAAAAAA"/>
+              </a:ext>
+            </a:extLst>
           </p:cNvSpPr>
           <p:nvPr>
             <p:ph type="dt" sz="half" idx="10"/>
@@ -770,11 +1022,12 @@
           <a:bodyPr/>
           <a:lstStyle/>
           <a:p>
-            <a:fld id="{77AD5A0D-32F9-42A2-946C-433A90366567}" type="datetimeFigureOut">
-              <a:rPr lang="en-US" smtClean="0"/>
-              <a:t>6/13/2025</a:t>
+            <a:pPr>
+              <a:defRPr lang="en-us"/>
+            </a:pPr>
+            <a:fld id="{30AE8A82-CCDD-FB7C-9316-3A29C458656F}" type="datetime1">
+              <a:t/>
             </a:fld>
-            <a:endParaRPr lang="en-US"/>
           </a:p>
         </p:txBody>
       </p:sp>
@@ -782,7 +1035,12 @@
         <p:nvSpPr>
           <p:cNvPr id="5" name="Footer Placeholder 4"/>
           <p:cNvSpPr>
-            <a:spLocks noGrp="1"/>
+            <a:spLocks noGrp="1" noChangeArrowheads="1"/>
+            <a:extLst>
+              <a:ext uri="smNativeData">
+                <pr:smNativeData xmlns:pr="smNativeData" xmlns="smNativeData" val="SMDATA_15_FLquaRMAAAAlAAAAZAAAAA0AAAAAkAAAAEgAAACQAAAASAAAAAAAAAABAAAAAAAAAAEAAABQAAAAAAAAAAAA4D8AAAAAAADgPwAAAAAAAOA/AAAAAAAA4D8AAAAAAADgPwAAAAAAAOA/AAAAAAAA4D8AAAAAAADgPwAAAAAAAOA/AAAAAAAA4D8CAAAAjAAAAAAAAAAAAAAAW5vVDP///wgAAAAAAAAAAAAAAAAAAAAAAAAAAAAAAAAAAAAAZAAAAAEAAABAAAAAAAAAAAAAAAAAAAAAAAAAAAAAAAAAAAAAAAAAAAAAAAAAAAAAAAAAAAAAAAAAAAAAAAAAAAAAAAAAAAAAAAAAAAAAAAAAAAAAAAAAAAAAAAAAAAAAFAAAADwAAAAAAAAAAAAAAAAAAAkUAAAAAQAAABQAAAAUAAAAFAAAAAEAAAAAAAAAZAAAAGQAAAAAAAAAZAAAAGQAAAAVAAAAYAAAAAAAAAAAAAAADwAAACADAAAAAAAAAAAAAAEAAACgMgAAVgcAAKr4//8BAAAAf39/AAEAAABkAAAAAAAAABQAAABAHwAAAAAAACYAAAAAAAAAwOD//wAAAAAmAAAAZAAAABYAAABMAAAAAAAAAAAAAAAEAAAAAAAAAAEAAADn5uYKAAAAACgAAAAoAAAAZAAAAGQAAAAAAAAAzMzMAAAAAABQAAAAUAAAAGQAAABkAAAAAAAAABcAAAAUAAAAAAAAAAAAAAD/fwAA/38AAAAAAAAJAAAABAAAAOrv9v8eAAAAaAAAAAAAAAAAAAAAAAAAAAAAAAAAAAAAECcAABAnAAAAAAAAAAAAAAAAAAAAAAAAAAAAAAAAAAAAAAAAAAAAABQAAAAAAAAAwMD/AAAAAABkAAAAMgAAAAAAAABkAAAAAAAAAH9/fwAKAAAAIgAAABgAAAAAAAAAAAAAAAAAAAAAAAAAAAAAAAAAAAAkAAAAJAAAAAAAAAAHAAAAAAAAAAAAAAAAAAAAAAAAAAAAAAAAAAAAf39/ACUAAABYAAAAAAAAAAAAAAAAAAAAAAAAAAAAAAAAAAAAAAAAAAAAAAAAAAAAAAAAAAAAAAA/AAAAAAAAAKCGAQAAAAAAAAAAAAAAAAAMAAAAAQAAAAAAAAAAAAAAAAAAAB8AAABUAAAAAAAABQAAAAEAAAAAAAAAAAAAAAAAAAAAAAAAAAAAAAAAAAAAAAAAAAAAAAJ/f38AAAAAA8zMzADAwP8Af39/AAAAAAAAAAAAAAAAAAAAAAAAAAAAIQAAABgAAAAUAAAA2BgAABonAAAoMgAAWSkAABAAAAAmAAAACAAAAAAAAAAAAAAA"/>
+              </a:ext>
+            </a:extLst>
           </p:cNvSpPr>
           <p:nvPr>
             <p:ph type="ftr" sz="quarter" idx="11"/>
@@ -793,7 +1051,9 @@
           <a:bodyPr/>
           <a:lstStyle/>
           <a:p>
-            <a:endParaRPr lang="en-US"/>
+            <a:pPr>
+              <a:defRPr lang="en-us"/>
+            </a:pPr>
           </a:p>
         </p:txBody>
       </p:sp>
@@ -801,7 +1061,12 @@
         <p:nvSpPr>
           <p:cNvPr id="6" name="Slide Number Placeholder 5"/>
           <p:cNvSpPr>
-            <a:spLocks noGrp="1"/>
+            <a:spLocks noGrp="1" noChangeArrowheads="1"/>
+            <a:extLst>
+              <a:ext uri="smNativeData">
+                <pr:smNativeData xmlns:pr="smNativeData" xmlns="smNativeData" val="SMDATA_15_FLquaRMAAAAlAAAAZAAAAA0AAAAAkAAAAEgAAACQAAAASAAAAAAAAAABAAAAAAAAAAEAAABQAAAAAAAAAAAA4D8AAAAAAADgPwAAAAAAAOA/AAAAAAAA4D8AAAAAAADgPwAAAAAAAOA/AAAAAAAA4D8AAAAAAADgPwAAAAAAAOA/AAAAAAAA4D8CAAAAjAAAAAAAAAAAAAAAW5vVDP///wgAAAAAAAAAAAAAAAAAAAAAAAAAAAAAAAAAAAAAZAAAAAEAAABAAAAAAAAAAAAAAAAAAAAAAAAAAAAAAAAAAAAAAAAAAAAAAAAAAAAAAAAAAAAAAAAAAAAAAAAAAAAAAAAAAAAAAAAAAAAAAAAAAAAAAAAAAAAAAAAAAAAAFAAAADwAAAAAAAAAAAAAAAAAAAkUAAAAAQAAABQAAAAUAAAAFAAAAAEAAAAAAAAAZAAAAGQAAAAAAAAAZAAAAGQAAAAVAAAAYAAAAAAAAAAAAAAADwAAACADAAAAAAAAAAAAAAEAAACgMgAAVgcAAKr4//8BAAAAf39/AAEAAABkAAAAAAAAABQAAABAHwAAAAAAACYAAAAAAAAAwOD//wAAAAAmAAAAZAAAABYAAABMAAAAAAAAAAAAAAAEAAAAAAAAAAEAAADn5uYKAAAAACgAAAAoAAAAZAAAAGQAAAAAAAAAzMzMAAAAAABQAAAAUAAAAGQAAABkAAAAAAAAABcAAAAUAAAAAAAAAAAAAAD/fwAA/38AAAAAAAAJAAAABAAAAKiVygEeAAAAaAAAAAAAAAAAAAAAAAAAAAAAAAAAAAAAECcAABAnAAAAAAAAAAAAAAAAAAAAAAAAAAAAAAAAAAAAAAAAAAAAABQAAAAAAAAAwMD/AAAAAABkAAAAMgAAAAAAAABkAAAAAAAAAH9/fwAKAAAAIgAAABgAAAAAAAAAAAAAAAAAAAAAAAAAAAAAAAAAAAAkAAAAJAAAAAAAAAAHAAAAAAAAAAAAAAAAAAAAAAAAAAAAAAAAAAAAf39/ACUAAABYAAAAAAAAAAAAAAAAAAAAAAAAAAAAAAAAAAAAAAAAAAAAAAAAAAAAAAAAAAAAAAA/AAAAAAAAAKCGAQAAAAAAAAAAAAAAAAAMAAAAAQAAAAAAAAAAAAAAAAAAAB8AAABUAAAAAAAABQAAAAEAAAAAAAAAAAAAAAAAAAAAAAAAAAAAAAAAAAAAAAAAAAAAAAJ/f38AAAAAA8zMzADAwP8Af39/AAAAAAAAAAAAAAAAAAAAAAAAAAAAIQAAABgAAAAUAAAA+DQAABonAADYRQAAWSkAABAAAAAmAAAACAAAAAAAAAAAAAAA"/>
+              </a:ext>
+            </a:extLst>
           </p:cNvSpPr>
           <p:nvPr>
             <p:ph type="sldNum" sz="quarter" idx="12"/>
@@ -812,29 +1077,26 @@
           <a:bodyPr/>
           <a:lstStyle/>
           <a:p>
-            <a:fld id="{2AF8EFAC-D507-4007-9634-FDE202E639CC}" type="slidenum">
-              <a:rPr lang="en-US" smtClean="0"/>
-              <a:t>‹#›</a:t>
+            <a:pPr>
+              <a:defRPr lang="en-us"/>
+            </a:pPr>
+            <a:fld id="{30AE9046-08DD-FB66-9316-FE33DE5865AB}" type="slidenum">
+              <a:t/>
             </a:fld>
-            <a:endParaRPr lang="en-US"/>
           </a:p>
         </p:txBody>
       </p:sp>
     </p:spTree>
-    <p:extLst>
-      <p:ext uri="{BB962C8B-B14F-4D97-AF65-F5344CB8AC3E}">
-        <p14:creationId xmlns:p14="http://schemas.microsoft.com/office/powerpoint/2010/main" val="3498221937"/>
-      </p:ext>
-    </p:extLst>
   </p:cSld>
   <p:clrMapOvr>
     <a:masterClrMapping/>
   </p:clrMapOvr>
+  <p:hf hdr="0" ftr="0"/>
 </p:sldLayout>
 </file>
 
 <file path=ppt/slideLayouts/slideLayout3.xml><?xml version="1.0" encoding="utf-8"?>
-<p:sldLayout xmlns:a="http://schemas.openxmlformats.org/drawingml/2006/main" xmlns:r="http://schemas.openxmlformats.org/officeDocument/2006/relationships" xmlns:p="http://schemas.openxmlformats.org/presentationml/2006/main" type="secHead" preserve="1">
+<p:sldLayout xmlns:p="http://schemas.openxmlformats.org/presentationml/2006/main" xmlns:mc="http://schemas.openxmlformats.org/markup-compatibility/2006" xmlns:p14="http://schemas.microsoft.com/office/powerpoint/2010/main" xmlns:p15="http://schemas.microsoft.com/office/powerpoint/2012/main" xmlns:r="http://schemas.openxmlformats.org/officeDocument/2006/relationships" xmlns:a="http://schemas.openxmlformats.org/drawingml/2006/main" type="secHead" preserve="1">
   <p:cSld name="Section Header">
     <p:spTree>
       <p:nvGrpSpPr>
@@ -854,7 +1116,12 @@
         <p:nvSpPr>
           <p:cNvPr id="2" name="Title 1"/>
           <p:cNvSpPr>
-            <a:spLocks noGrp="1"/>
+            <a:spLocks noGrp="1" noChangeArrowheads="1"/>
+            <a:extLst>
+              <a:ext uri="smNativeData">
+                <pr:smNativeData xmlns:pr="smNativeData" xmlns="smNativeData" val="SMDATA_15_FLquaRMAAAAlAAAAZAAAAA0AAAAAkAAAAEgAAACQAAAASAAAAAAAAAACAAAAAAAAAAEAAABQAAAAAAAAAAAA4D8AAAAAAADgPwAAAAAAAOA/AAAAAAAA4D8AAAAAAADgPwAAAAAAAOA/AAAAAAAA4D8AAAAAAADgPwAAAAAAAOA/AAAAAAAA4D8CAAAAjAAAAAAAAAAAAAAAW5vVDP///wgAAAAAAAAAAAAAAAAAAAAAAAAAAAAAAAAAAAAAZAAAAAEAAABAAAAAAAAAAAAAAAAAAAAAAAAAAAAAAAAAAAAAAAAAAAAAAAAAAAAAAAAAAAAAAAAAAAAAAAAAAAAAAAAAAAAAAAAAAAAAAAAAAAAAAAAAAAAAAAAAAAAAFAAAADwAAAAAAAAAAAAAAAAAAAkUAAAAAQAAABQAAAAUAAAAFAAAAAEAAAAAAAAAZAAAAGQAAAAAAAAAZAAAAGQAAAAVAAAAYAAAAAAAAAAAAAAADwAAACADAAAAAAAAAAAAAAEAAACgMgAAVgcAAKr4//8BAAAAf39/AAEAAABkAAAAAAAAABQAAABAHwAAAAAAACYAAAAAAAAAwOD//wAAAAAmAAAAZAAAABYAAABMAAAAAAAAAAAAAAAEAAAAAAAAAAEAAADn5uYKAAAAACgAAAAoAAAAZAAAAGQAAAAAAAAAzMzMAAAAAABQAAAAUAAAAGQAAABkAAAAAAAAABcAAAAUAAAAAAAAAAAAAAD/fwAA/38AAAAAAAAJAAAABAAAANCtTwIeAAAAaAAAAAAAAAAAAAAAAAAAAAAAAAAAAAAAECcAABAnAAAAAAAAAAAAAAAAAAAAAAAAAAAAAAAAAAAAAAAAAAAAABQAAAAAAAAAwMD/AAAAAABkAAAAMgAAAAAAAABkAAAAAAAAAH9/fwAKAAAAIgAAABgAAAAAAAAAAAAAAAAAAAAAAAAAAAAAAAAAAAAkAAAAJAAAAAAAAAAHAAAAAAAAAAAAAAAAAAAAAAAAAAAAAAAAAAAAf39/ACUAAABYAAAAAAAAAAAAAAAAAAAAAAAAAAAAAAAAAAAAAAAAAAAAAAAAAAAAAAAAAAAAAAA/AAAAAAAAAKCGAQAAAAAAAAAAAAAAAAAMAAAAAQAAAAAAAAAAAAAAAAAAAB8AAABUAAAAAAAABQAAAAEAAAAAAAAAAAAAAAAAAAAAAAAAAAAAAAAAAAAAAAAAAAAAAAJ/f38AAAAAA8zMzADAwP8Af39/AAAAAAAAAAAAAAAAAAAAAAAAAAAAIQAAABgAAAAUAAAAHgUAAIUKAADORQAAERwAABAAAAAmAAAACAAAAIGAAAAAAAAA"/>
+              </a:ext>
+            </a:extLst>
           </p:cNvSpPr>
           <p:nvPr>
             <p:ph type="title"/>
@@ -862,23 +1129,52 @@
         </p:nvSpPr>
         <p:spPr>
           <a:xfrm>
-            <a:off x="831850" y="1709738"/>
-            <a:ext cx="10515600" cy="2852737"/>
+            <a:off x="831850" y="1710055"/>
+            <a:ext cx="10515600" cy="2852420"/>
           </a:xfrm>
         </p:spPr>
         <p:txBody>
-          <a:bodyPr anchor="b"/>
+          <a:bodyPr vert="horz" wrap="square" lIns="91440" tIns="45720" rIns="91440" bIns="45720" numCol="1" spcCol="215900" anchor="b">
+            <a:prstTxWarp prst="textNoShape">
+              <a:avLst/>
+            </a:prstTxWarp>
+          </a:bodyPr>
           <a:lstStyle>
             <a:lvl1pPr>
-              <a:defRPr sz="6000"/>
+              <a:defRPr lang="en-us" sz="6000" cap="none"/>
             </a:lvl1pPr>
+            <a:lvl2pPr>
+              <a:defRPr lang="en-us"/>
+            </a:lvl2pPr>
+            <a:lvl3pPr>
+              <a:defRPr lang="en-us"/>
+            </a:lvl3pPr>
+            <a:lvl4pPr>
+              <a:defRPr lang="en-us"/>
+            </a:lvl4pPr>
+            <a:lvl5pPr>
+              <a:defRPr lang="en-us"/>
+            </a:lvl5pPr>
+            <a:lvl6pPr>
+              <a:defRPr lang="en-us"/>
+            </a:lvl6pPr>
+            <a:lvl7pPr>
+              <a:defRPr lang="en-us"/>
+            </a:lvl7pPr>
+            <a:lvl8pPr>
+              <a:defRPr lang="en-us"/>
+            </a:lvl8pPr>
+            <a:lvl9pPr>
+              <a:defRPr lang="en-us"/>
+            </a:lvl9pPr>
           </a:lstStyle>
           <a:p>
-            <a:r>
-              <a:rPr lang="en-US" smtClean="0"/>
+            <a:pPr>
+              <a:defRPr lang="en-us"/>
+            </a:pPr>
+            <a:r>
               <a:t>Click to edit Master title style</a:t>
             </a:r>
-            <a:endParaRPr lang="en-US"/>
           </a:p>
         </p:txBody>
       </p:sp>
@@ -886,16 +1182,21 @@
         <p:nvSpPr>
           <p:cNvPr id="3" name="Text Placeholder 2"/>
           <p:cNvSpPr>
-            <a:spLocks noGrp="1"/>
-          </p:cNvSpPr>
-          <p:nvPr>
-            <p:ph type="body" idx="1"/>
+            <a:spLocks noGrp="1" noChangeArrowheads="1"/>
+            <a:extLst>
+              <a:ext uri="smNativeData">
+                <pr:smNativeData xmlns:pr="smNativeData" xmlns="smNativeData" val="SMDATA_15_FLquaRMAAAAlAAAAZAAAAA0AAAAAkAAAAEgAAACQAAAASAAAAAAAAAAAAAAAAAAAAAEAAABQAAAAAAAAAAAA4D8AAAAAAADgPwAAAAAAAOA/AAAAAAAA4D8AAAAAAADgPwAAAAAAAOA/AAAAAAAA4D8AAAAAAADgPwAAAAAAAOA/AAAAAAAA4D8CAAAAjAAAAAAAAAAAAAAAW5vVDP///wgAAAAAAAAAAAAAAAAAAAAAAAAAAAAAAAAAAAAAZAAAAAEAAABAAAAAAAAAAAAAAAAAAAAAAAAAAAAAAAAAAAAAAAAAAAAAAAAAAAAAAAAAAAAAAAAAAAAAAAAAAAAAAAAAAAAAAAAAAAAAAAAAAAAAAAAAAAAAAAAAAAAAFAAAADwAAAAAAAAAAAAAAAAAAAkUAAAAAQAAABQAAAAUAAAAFAAAAAEAAAAAAAAAZAAAAGQAAAAAAAAAZAAAAGQAAAAVAAAAYAAAAAAAAAAAAAAADwAAACADAAAAAAAAAAAAAAEAAACgMgAAVgcAAKr4//8BAAAAf39/AAEAAABkAAAAAAAAABQAAABAHwAAAAAAACYAAAAAAAAAwOD//wAAAAAmAAAAZAAAABYAAABMAAAAAAAAAAAAAAAEAAAAAAAAAAEAAADn5uYKAAAAACgAAAAoAAAAZAAAAGQAAAAAAAAAzMzMAAAAAABQAAAAUAAAAGQAAABkAAAAAAAAABcAAAAUAAAAAAAAAAAAAAD/fwAA/38AAAAAAAAJAAAABAAAAOrv9v8eAAAAaAAAAAAAAAAAAAAAAAAAAAAAAAAAAAAAECcAABAnAAAAAAAAAAAAAAAAAAAAAAAAAAAAAAAAAAAAAAAAAAAAABQAAAAAAAAAwMD/AAAAAABkAAAAMgAAAAAAAABkAAAAAAAAAH9/fwAKAAAAIgAAABgAAAAAAAAAAAAAAAAAAAAAAAAAAAAAAAAAAAAkAAAAJAAAAAAAAAAHAAAAAAAAAAAAAAAAAAAAAAAAAAAAAAAAAAAAf39/ACUAAABYAAAAAAAAAAAAAAAAAAAAAAAAAAAAAAAAAAAAAAAAAAAAAAAAAAAAAAAAAAAAAAA/AAAAAAAAAKCGAQAAAAAAAAAAAAAAAAAMAAAAAQAAAAAAAAAAAAAAAAAAAB8AAABUAAAAAAAABQAAAAEAAAAAAAAAAAAAAAAAAAAAAAAAAAAAAAAAAAAAAAAAAAAAAAJ/f38AAAAAA8zMzADAwP8Af39/AAAAAAAAAAAAAAAAAAAAAAAAAAAAIQAAABgAAAAUAAAAHgUAADwcAADORQAAdiUAABAAAAAmAAAACAAAAAGAAAAAAAAA"/>
+              </a:ext>
+            </a:extLst>
+          </p:cNvSpPr>
+          <p:nvPr>
+            <p:ph idx="1"/>
           </p:nvPr>
         </p:nvSpPr>
         <p:spPr>
           <a:xfrm>
-            <a:off x="831850" y="4589463"/>
-            <a:ext cx="10515600" cy="1500187"/>
+            <a:off x="831850" y="4589780"/>
+            <a:ext cx="10515600" cy="1499870"/>
           </a:xfrm>
         </p:spPr>
         <p:txBody>
@@ -903,99 +1204,82 @@
           <a:lstStyle>
             <a:lvl1pPr marL="0" indent="0">
               <a:buNone/>
-              <a:defRPr sz="2400">
+              <a:defRPr lang="en-us" sz="2400" cap="none">
                 <a:solidFill>
-                  <a:schemeClr val="tx1">
-                    <a:tint val="75000"/>
-                  </a:schemeClr>
+                  <a:srgbClr val="8C8C8C"/>
                 </a:solidFill>
               </a:defRPr>
             </a:lvl1pPr>
             <a:lvl2pPr marL="457200" indent="0">
               <a:buNone/>
-              <a:defRPr sz="2000">
+              <a:defRPr lang="en-us" sz="2000" cap="none">
                 <a:solidFill>
-                  <a:schemeClr val="tx1">
-                    <a:tint val="75000"/>
-                  </a:schemeClr>
+                  <a:srgbClr val="8C8C8C"/>
                 </a:solidFill>
               </a:defRPr>
             </a:lvl2pPr>
             <a:lvl3pPr marL="914400" indent="0">
               <a:buNone/>
-              <a:defRPr sz="1800">
+              <a:defRPr lang="en-us" sz="1800" cap="none">
                 <a:solidFill>
-                  <a:schemeClr val="tx1">
-                    <a:tint val="75000"/>
-                  </a:schemeClr>
+                  <a:srgbClr val="8C8C8C"/>
                 </a:solidFill>
               </a:defRPr>
             </a:lvl3pPr>
             <a:lvl4pPr marL="1371600" indent="0">
               <a:buNone/>
-              <a:defRPr sz="1600">
+              <a:defRPr lang="en-us" sz="1600" cap="none">
                 <a:solidFill>
-                  <a:schemeClr val="tx1">
-                    <a:tint val="75000"/>
-                  </a:schemeClr>
+                  <a:srgbClr val="8C8C8C"/>
                 </a:solidFill>
               </a:defRPr>
             </a:lvl4pPr>
             <a:lvl5pPr marL="1828800" indent="0">
               <a:buNone/>
-              <a:defRPr sz="1600">
+              <a:defRPr lang="en-us" sz="1600" cap="none">
                 <a:solidFill>
-                  <a:schemeClr val="tx1">
-                    <a:tint val="75000"/>
-                  </a:schemeClr>
+                  <a:srgbClr val="8C8C8C"/>
                 </a:solidFill>
               </a:defRPr>
             </a:lvl5pPr>
             <a:lvl6pPr marL="2286000" indent="0">
               <a:buNone/>
-              <a:defRPr sz="1600">
+              <a:defRPr lang="en-us" sz="1600" cap="none">
                 <a:solidFill>
-                  <a:schemeClr val="tx1">
-                    <a:tint val="75000"/>
-                  </a:schemeClr>
+                  <a:srgbClr val="8C8C8C"/>
                 </a:solidFill>
               </a:defRPr>
             </a:lvl6pPr>
             <a:lvl7pPr marL="2743200" indent="0">
               <a:buNone/>
-              <a:defRPr sz="1600">
+              <a:defRPr lang="en-us" sz="1600" cap="none">
                 <a:solidFill>
-                  <a:schemeClr val="tx1">
-                    <a:tint val="75000"/>
-                  </a:schemeClr>
+                  <a:srgbClr val="8C8C8C"/>
                 </a:solidFill>
               </a:defRPr>
             </a:lvl7pPr>
             <a:lvl8pPr marL="3200400" indent="0">
               <a:buNone/>
-              <a:defRPr sz="1600">
+              <a:defRPr lang="en-us" sz="1600" cap="none">
                 <a:solidFill>
-                  <a:schemeClr val="tx1">
-                    <a:tint val="75000"/>
-                  </a:schemeClr>
+                  <a:srgbClr val="8C8C8C"/>
                 </a:solidFill>
               </a:defRPr>
             </a:lvl8pPr>
             <a:lvl9pPr marL="3657600" indent="0">
               <a:buNone/>
-              <a:defRPr sz="1600">
+              <a:defRPr lang="en-us" sz="1600" cap="none">
                 <a:solidFill>
-                  <a:schemeClr val="tx1">
-                    <a:tint val="75000"/>
-                  </a:schemeClr>
+                  <a:srgbClr val="8C8C8C"/>
                 </a:solidFill>
               </a:defRPr>
             </a:lvl9pPr>
           </a:lstStyle>
           <a:p>
-            <a:pPr lvl="0"/>
-            <a:r>
-              <a:rPr lang="en-US" smtClean="0"/>
+            <a:pPr>
+              <a:defRPr lang="en-us"/>
+            </a:pPr>
+            <a:r>
               <a:t>Click to edit Master text styles</a:t>
             </a:r>
           </a:p>
@@ -1005,7 +1289,12 @@
         <p:nvSpPr>
           <p:cNvPr id="4" name="Date Placeholder 3"/>
           <p:cNvSpPr>
-            <a:spLocks noGrp="1"/>
+            <a:spLocks noGrp="1" noChangeArrowheads="1"/>
+            <a:extLst>
+              <a:ext uri="smNativeData">
+                <pr:smNativeData xmlns:pr="smNativeData" xmlns="smNativeData" val="SMDATA_15_FLquaRMAAAAlAAAAZAAAAA0AAAAAkAAAAEgAAACQAAAASAAAAAAAAAABAAAAAAAAAAEAAABQAAAAAAAAAAAA4D8AAAAAAADgPwAAAAAAAOA/AAAAAAAA4D8AAAAAAADgPwAAAAAAAOA/AAAAAAAA4D8AAAAAAADgPwAAAAAAAOA/AAAAAAAA4D8CAAAAjAAAAAAAAAAAAAAAW5vVDP///wgAAAAAAAAAAAAAAAAAAAAAAAAAAAAAAAAAAAAAZAAAAAEAAABAAAAAAAAAAAAAAAAAAAAAAAAAAAAAAAAAAAAAAAAAAAAAAAAAAAAAAAAAAAAAAAAAAAAAAAAAAAAAAAAAAAAAAAAAAAAAAAAAAAAAAAAAAAAAAAAAAAAAFAAAADwAAAAAAAAAAAAAAAAAAAkUAAAAAQAAABQAAAAUAAAAFAAAAAEAAAAAAAAAZAAAAGQAAAAAAAAAZAAAAGQAAAAVAAAAYAAAAAAAAAAAAAAADwAAACADAAAAAAAAAAAAAAEAAACgMgAAVgcAAKr4//8BAAAAf39/AAEAAABkAAAAAAAAABQAAABAHwAAAAAAACYAAAAAAAAAwOD//wAAAAAmAAAAZAAAABYAAABMAAAAAAAAAAAAAAAEAAAAAAAAAAEAAADn5uYKAAAAACgAAAAoAAAAZAAAAGQAAAAAAAAAzMzMAAAAAABQAAAAUAAAAGQAAABkAAAAAAAAABcAAAAUAAAAAAAAAAAAAAD/fwAA/38AAAAAAAAJAAAABAAAAOrv9v8eAAAAaAAAAAAAAAAAAAAAAAAAAAAAAAAAAAAAECcAABAnAAAAAAAAAAAAAAAAAAAAAAAAAAAAAAAAAAAAAAAAAAAAABQAAAAAAAAAwMD/AAAAAABkAAAAMgAAAAAAAABkAAAAAAAAAH9/fwAKAAAAIgAAABgAAAAAAAAAAAAAAAAAAAAAAAAAAAAAAAAAAAAkAAAAJAAAAAAAAAAHAAAAAAAAAAAAAAAAAAAAAAAAAAAAAAAAAAAAf39/ACUAAABYAAAAAAAAAAAAAAAAAAAAAAAAAAAAAAAAAAAAAAAAAAAAAAAAAAAAAAAAAAAAAAA/AAAAAAAAAKCGAQAAAAAAAAAAAAAAAAAMAAAAAQAAAAAAAAAAAAAAAAAAAB8AAABUAAAAAAAABQAAAAEAAAAAAAAAAAAAAAAAAAAAAAAAAAAAAAAAAAAAAAAAAAAAAAJ/f38AAAAAA8zMzADAwP8Af39/AAAAAAAAAAAAAAAAAAAAAAAAAAAAIQAAABgAAAAUAAAAKAUAABonAAAIFgAAWSkAABAAAAAmAAAACAAAAAAAAAAAAAAA"/>
+              </a:ext>
+            </a:extLst>
           </p:cNvSpPr>
           <p:nvPr>
             <p:ph type="dt" sz="half" idx="10"/>
@@ -1016,11 +1305,12 @@
           <a:bodyPr/>
           <a:lstStyle/>
           <a:p>
-            <a:fld id="{77AD5A0D-32F9-42A2-946C-433A90366567}" type="datetimeFigureOut">
-              <a:rPr lang="en-US" smtClean="0"/>
-              <a:t>6/13/2025</a:t>
+            <a:pPr>
+              <a:defRPr lang="en-us"/>
+            </a:pPr>
+            <a:fld id="{30AE80C3-8DDD-FB76-9316-7B23CE58652E}" type="datetime1">
+              <a:t>3/4/2026</a:t>
             </a:fld>
-            <a:endParaRPr lang="en-US"/>
           </a:p>
         </p:txBody>
       </p:sp>
@@ -1028,7 +1318,12 @@
         <p:nvSpPr>
           <p:cNvPr id="5" name="Footer Placeholder 4"/>
           <p:cNvSpPr>
-            <a:spLocks noGrp="1"/>
+            <a:spLocks noGrp="1" noChangeArrowheads="1"/>
+            <a:extLst>
+              <a:ext uri="smNativeData">
+                <pr:smNativeData xmlns:pr="smNativeData" xmlns="smNativeData" val="SMDATA_15_FLquaRMAAAAlAAAAZAAAAA0AAAAAkAAAAEgAAACQAAAASAAAAAAAAAABAAAAAAAAAAEAAABQAAAAAAAAAAAA4D8AAAAAAADgPwAAAAAAAOA/AAAAAAAA4D8AAAAAAADgPwAAAAAAAOA/AAAAAAAA4D8AAAAAAADgPwAAAAAAAOA/AAAAAAAA4D8CAAAAjAAAAAAAAAAAAAAAW5vVDP///wgAAAAAAAAAAAAAAAAAAAAAAAAAAAAAAAAAAAAAZAAAAAEAAABAAAAAAAAAAAAAAAAAAAAAAAAAAAAAAAAAAAAAAAAAAAAAAAAAAAAAAAAAAAAAAAAAAAAAAAAAAAAAAAAAAAAAAAAAAAAAAAAAAAAAAAAAAAAAAAAAAAAAFAAAADwAAAAAAAAAAAAAAAAAAAkUAAAAAQAAABQAAAAUAAAAFAAAAAEAAAAAAAAAZAAAAGQAAAAAAAAAZAAAAGQAAAAVAAAAYAAAAAAAAAAAAAAADwAAACADAAAAAAAAAAAAAAEAAACgMgAAVgcAAKr4//8BAAAAf39/AAEAAABkAAAAAAAAABQAAABAHwAAAAAAACYAAAAAAAAAwOD//wAAAAAmAAAAZAAAABYAAABMAAAAAAAAAAAAAAAEAAAAAAAAAAEAAADn5uYKAAAAACgAAAAoAAAAZAAAAGQAAAAAAAAAzMzMAAAAAABQAAAAUAAAAGQAAABkAAAAAAAAABcAAAAUAAAAAAAAAAAAAAD/fwAA/38AAAAAAAAJAAAABAAAAAAAAAAeAAAAaAAAAAAAAAAAAAAAAAAAAAAAAAAAAAAAECcAABAnAAAAAAAAAAAAAAAAAAAAAAAAAAAAAAAAAAAAAAAAAAAAABQAAAAAAAAAwMD/AAAAAABkAAAAMgAAAAAAAABkAAAAAAAAAH9/fwAKAAAAIgAAABgAAAAAAAAAAAAAAAAAAAAAAAAAAAAAAAAAAAAkAAAAJAAAAAAAAAAHAAAAAAAAAAAAAAAAAAAAAAAAAAAAAAAAAAAAf39/ACUAAABYAAAAAAAAAAAAAAAAAAAAAAAAAAAAAAAAAAAAAAAAAAAAAAAAAAAAAAAAAAAAAAA/AAAAAAAAAKCGAQAAAAAAAAAAAAAAAAAMAAAAAQAAAAAAAAAAAAAAAAAAAB8AAABUAAAAAAAABQAAAAEAAAAAAAAAAAAAAAAAAAAAAAAAAAAAAAAAAAAAAAAAAAAAAAJ/f38AAAAAA8zMzADAwP8Af39/AAAAAAAAAAAAAAAAAAAAAAAAAAAAIQAAABgAAAAUAAAA2BgAABonAAAoMgAAWSkAABAAAAAmAAAACAAAAAAAAAAAAAAA"/>
+              </a:ext>
+            </a:extLst>
           </p:cNvSpPr>
           <p:nvPr>
             <p:ph type="ftr" sz="quarter" idx="11"/>
@@ -1039,7 +1334,9 @@
           <a:bodyPr/>
           <a:lstStyle/>
           <a:p>
-            <a:endParaRPr lang="en-US"/>
+            <a:pPr>
+              <a:defRPr lang="en-us"/>
+            </a:pPr>
           </a:p>
         </p:txBody>
       </p:sp>
@@ -1047,7 +1344,12 @@
         <p:nvSpPr>
           <p:cNvPr id="6" name="Slide Number Placeholder 5"/>
           <p:cNvSpPr>
-            <a:spLocks noGrp="1"/>
+            <a:spLocks noGrp="1" noChangeArrowheads="1"/>
+            <a:extLst>
+              <a:ext uri="smNativeData">
+                <pr:smNativeData xmlns:pr="smNativeData" xmlns="smNativeData" val="SMDATA_15_FLquaRMAAAAlAAAAZAAAAA0AAAAAkAAAAEgAAACQAAAASAAAAAAAAAABAAAAAAAAAAEAAABQAAAAAAAAAAAA4D8AAAAAAADgPwAAAAAAAOA/AAAAAAAA4D8AAAAAAADgPwAAAAAAAOA/AAAAAAAA4D8AAAAAAADgPwAAAAAAAOA/AAAAAAAA4D8CAAAAjAAAAAAAAAAAAAAAW5vVDP///wgAAAAAAAAAAAAAAAAAAAAAAAAAAAAAAAAAAAAAZAAAAAEAAABAAAAAAAAAAAAAAAAAAAAAAAAAAAAAAAAAAAAAAAAAAAAAAAAAAAAAAAAAAAAAAAAAAAAAAAAAAAAAAAAAAAAAAAAAAAAAAAAAAAAAAAAAAAAAAAAAAAAAFAAAADwAAAAAAAAAAAAAAAAAAAkUAAAAAQAAABQAAAAUAAAAFAAAAAEAAAAAAAAAZAAAAGQAAAAAAAAAZAAAAGQAAAAVAAAAYAAAAAAAAAAAAAAADwAAACADAAAAAAAAAAAAAAEAAACgMgAAVgcAAKr4//8BAAAAf39/AAEAAABkAAAAAAAAABQAAABAHwAAAAAAACYAAAAAAAAAwOD//wAAAAAmAAAAZAAAABYAAABMAAAAAAAAAAAAAAAEAAAAAAAAAAEAAADn5uYKAAAAACgAAAAoAAAAZAAAAGQAAAAAAAAAzMzMAAAAAABQAAAAUAAAAGQAAABkAAAAAAAAABcAAAAUAAAAAAAAAAAAAAD/fwAA/38AAAAAAAAJAAAABAAAAAAAAAAeAAAAaAAAAAAAAAAAAAAAAAAAAAAAAAAAAAAAECcAABAnAAAAAAAAAAAAAAAAAAAAAAAAAAAAAAAAAAAAAAAAAAAAABQAAAAAAAAAwMD/AAAAAABkAAAAMgAAAAAAAABkAAAAAAAAAH9/fwAKAAAAIgAAABgAAAAAAAAAAAAAAAAAAAAAAAAAAAAAAAAAAAAkAAAAJAAAAAAAAAAHAAAAAAAAAAAAAAAAAAAAAAAAAAAAAAAAAAAAf39/ACUAAABYAAAAAAAAAAAAAAAAAAAAAAAAAAAAAAAAAAAAAAAAAAAAAAAAAAAAAAAAAAAAAAA/AAAAAAAAAKCGAQAAAAAAAAAAAAAAAAAMAAAAAQAAAAAAAAAAAAAAAAAAAB8AAABUAAAAAAAABQAAAAEAAAAAAAAAAAAAAAAAAAAAAAAAAAAAAAAAAAAAAAAAAAAAAAJ/f38AAAAAA8zMzADAwP8Af39/AAAAAAAAAAAAAAAAAAAAAAAAAAAAIQAAABgAAAAUAAAA+DQAABonAADYRQAAWSkAABAAAAAmAAAACAAAAAAAAAAAAAAA"/>
+              </a:ext>
+            </a:extLst>
           </p:cNvSpPr>
           <p:nvPr>
             <p:ph type="sldNum" sz="quarter" idx="12"/>
@@ -1058,29 +1360,26 @@
           <a:bodyPr/>
           <a:lstStyle/>
           <a:p>
-            <a:fld id="{2AF8EFAC-D507-4007-9634-FDE202E639CC}" type="slidenum">
-              <a:rPr lang="en-US" smtClean="0"/>
+            <a:pPr>
+              <a:defRPr lang="en-us"/>
+            </a:pPr>
+            <a:fld id="{30AEF886-C8DD-FB0E-9316-3E5BB658656B}" type="slidenum">
               <a:t>‹#›</a:t>
             </a:fld>
-            <a:endParaRPr lang="en-US"/>
           </a:p>
         </p:txBody>
       </p:sp>
     </p:spTree>
-    <p:extLst>
-      <p:ext uri="{BB962C8B-B14F-4D97-AF65-F5344CB8AC3E}">
-        <p14:creationId xmlns:p14="http://schemas.microsoft.com/office/powerpoint/2010/main" val="963169732"/>
-      </p:ext>
-    </p:extLst>
   </p:cSld>
   <p:clrMapOvr>
     <a:masterClrMapping/>
   </p:clrMapOvr>
+  <p:hf hdr="0" ftr="0"/>
 </p:sldLayout>
 </file>
 
 <file path=ppt/slideLayouts/slideLayout4.xml><?xml version="1.0" encoding="utf-8"?>
-<p:sldLayout xmlns:a="http://schemas.openxmlformats.org/drawingml/2006/main" xmlns:r="http://schemas.openxmlformats.org/officeDocument/2006/relationships" xmlns:p="http://schemas.openxmlformats.org/presentationml/2006/main" type="twoObj" preserve="1">
+<p:sldLayout xmlns:p="http://schemas.openxmlformats.org/presentationml/2006/main" xmlns:mc="http://schemas.openxmlformats.org/markup-compatibility/2006" xmlns:p14="http://schemas.microsoft.com/office/powerpoint/2010/main" xmlns:p15="http://schemas.microsoft.com/office/powerpoint/2012/main" xmlns:r="http://schemas.openxmlformats.org/officeDocument/2006/relationships" xmlns:a="http://schemas.openxmlformats.org/drawingml/2006/main" type="twoObj" preserve="1">
   <p:cSld name="Two Content">
     <p:spTree>
       <p:nvGrpSpPr>
@@ -1100,7 +1399,12 @@
         <p:nvSpPr>
           <p:cNvPr id="2" name="Title 1"/>
           <p:cNvSpPr>
-            <a:spLocks noGrp="1"/>
+            <a:spLocks noGrp="1" noChangeArrowheads="1"/>
+            <a:extLst>
+              <a:ext uri="smNativeData">
+                <pr:smNativeData xmlns:pr="smNativeData" xmlns="smNativeData" val="SMDATA_15_FLquaRMAAAAlAAAAZAAAAA0AAAAAkAAAAEgAAACQAAAASAAAAAAAAAABAAAAAAAAAAEAAABQAAAAAAAAAAAA4D8AAAAAAADgPwAAAAAAAOA/AAAAAAAA4D8AAAAAAADgPwAAAAAAAOA/AAAAAAAA4D8AAAAAAADgPwAAAAAAAOA/AAAAAAAA4D8CAAAAjAAAAAAAAAAAAAAAW5vVDP///wgAAAAAAAAAAAAAAAAAAAAAAAAAAAAAAAAAAAAAZAAAAAEAAABAAAAAAAAAAAAAAAAAAAAAAAAAAAAAAAAAAAAAAAAAAAAAAAAAAAAAAAAAAAAAAAAAAAAAAAAAAAAAAAAAAAAAAAAAAAAAAAAAAAAAAAAAAAAAAAAAAAAAFAAAADwAAAAAAAAAAAAAAAAAAAkUAAAAAQAAABQAAAAUAAAAFAAAAAEAAAAAAAAAZAAAAGQAAAAAAAAAZAAAAGQAAAAVAAAAYAAAAAAAAAAAAAAADwAAACADAAAAAAAAAAAAAAEAAACgMgAAVgcAAKr4//8BAAAAf39/AAEAAABkAAAAAAAAABQAAABAHwAAAAAAACYAAAAAAAAAwOD//wAAAAAmAAAAZAAAABYAAABMAAAAAAAAAAAAAAAEAAAAAAAAAAEAAADn5uYKAAAAACgAAAAoAAAAZAAAAGQAAAAAAAAAzMzMAAAAAABQAAAAUAAAAGQAAABkAAAAAAAAABcAAAAUAAAAAAAAAAAAAAD/fwAA/38AAAAAAAAJAAAABAAAAOrv9v8eAAAAaAAAAAAAAAAAAAAAAAAAAAAAAAAAAAAAECcAABAnAAAAAAAAAAAAAAAAAAAAAAAAAAAAAAAAAAAAAAAAAAAAABQAAAAAAAAAwMD/AAAAAABkAAAAMgAAAAAAAABkAAAAAAAAAH9/fwAKAAAAIgAAABgAAAAAAAAAAAAAAAAAAAAAAAAAAAAAAAAAAAAkAAAAJAAAAAAAAAAHAAAAAAAAAAAAAAAAAAAAAAAAAAAAAAAAAAAAf39/ACUAAABYAAAAAAAAAAAAAAAAAAAAAAAAAAAAAAAAAAAAAAAAAAAAAAAAAAAAAAAAAAAAAAA/AAAAAAAAAKCGAQAAAAAAAAAAAAAAAAAMAAAAAQAAAAAAAAAAAAAAAAAAAB8AAABUAAAAAAAABQAAAAEAAAAAAAAAAAAAAAAAAAAAAAAAAAAAAAAAAAAAAAAAAAAAAAJ/f38AAAAAA8zMzADAwP8Af39/AAAAAAAAAAAAAAAAAAAAAAAAAAAAIQAAABgAAAAUAAAAKAUAAD8CAADYRQAAZwoAABAAAAAmAAAACAAAAAAAAAAAAAAA"/>
+              </a:ext>
+            </a:extLst>
           </p:cNvSpPr>
           <p:nvPr>
             <p:ph type="title"/>
@@ -1111,11 +1415,12 @@
           <a:bodyPr/>
           <a:lstStyle/>
           <a:p>
-            <a:r>
-              <a:rPr lang="en-US" smtClean="0"/>
+            <a:pPr>
+              <a:defRPr lang="en-us"/>
+            </a:pPr>
+            <a:r>
               <a:t>Click to edit Master title style</a:t>
             </a:r>
-            <a:endParaRPr lang="en-US"/>
           </a:p>
         </p:txBody>
       </p:sp>
@@ -1123,56 +1428,65 @@
         <p:nvSpPr>
           <p:cNvPr id="3" name="Content Placeholder 2"/>
           <p:cNvSpPr>
-            <a:spLocks noGrp="1"/>
-          </p:cNvSpPr>
-          <p:nvPr>
-            <p:ph sz="half" idx="1"/>
+            <a:spLocks noGrp="1" noChangeArrowheads="1"/>
+            <a:extLst>
+              <a:ext uri="smNativeData">
+                <pr:smNativeData xmlns:pr="smNativeData" xmlns="smNativeData" val="SMDATA_15_FLquaRMAAAAlAAAAZAAAAA0AAAAAkAAAAEgAAACQAAAASAAAAAAAAAAAAAAAAAAAAAEAAABQAAAAAAAAAAAA4D8AAAAAAADgPwAAAAAAAOA/AAAAAAAA4D8AAAAAAADgPwAAAAAAAOA/AAAAAAAA4D8AAAAAAADgPwAAAAAAAOA/AAAAAAAA4D8CAAAAjAAAAAAAAAAAAAAAW5vVDP///wgAAAAAAAAAAAAAAAAAAAAAAAAAAAAAAAAAAAAAZAAAAAEAAABAAAAAAAAAAAAAAAAAAAAAAAAAAAAAAAAAAAAAAAAAAAAAAAAAAAAAAAAAAAAAAAAAAAAAAAAAAAAAAAAAAAAAAAAAAAAAAAAAAAAAAAAAAAAAAAAAAAAAFAAAADwAAAAAAAAAAAAAAAAAAAkUAAAAAQAAABQAAAAUAAAAFAAAAAEAAAAAAAAAZAAAAGQAAAAAAAAAZAAAAGQAAAAVAAAAYAAAAAAAAAAAAAAADwAAACADAAAAAAAAAAAAAAEAAACgMgAAVgcAAKr4//8BAAAAf39/AAEAAABkAAAAAAAAABQAAABAHwAAAAAAACYAAAAAAAAAwOD//wAAAAAmAAAAZAAAABYAAABMAAAAAAAAAAAAAAAEAAAAAAAAAAEAAADn5uYKAAAAACgAAAAoAAAAZAAAAGQAAAAAAAAAzMzMAAAAAABQAAAAUAAAAGQAAABkAAAAAAAAABcAAAAUAAAAAAAAAAAAAAD/fwAA/38AAAAAAAAJAAAABAAAAOrv9v8eAAAAaAAAAAAAAAAAAAAAAAAAAAAAAAAAAAAAECcAABAnAAAAAAAAAAAAAAAAAAAAAAAAAAAAAAAAAAAAAAAAAAAAABQAAAAAAAAAwMD/AAAAAABkAAAAMgAAAAAAAABkAAAAAAAAAH9/fwAKAAAAIgAAABgAAAAAAAAAAAAAAAAAAAAAAAAAAAAAAAAAAAAkAAAAJAAAAAAAAAAHAAAAAAAAAAAAAAAAAAAAAAAAAAAAAAAAAAAAf39/ACUAAABYAAAAAAAAAAAAAAAAAAAAAAAAAAAAAAAAAAAAAAAAAAAAAAAAAAAAAAAAAAAAAAA/AAAAAAAAAKCGAQAAAAAAAAAAAAAAAAAMAAAAAQAAAAAAAAAAAAAAAAAAAB8AAABUAAAAAAAABQAAAAEAAAAAAAAAAAAAAAAAAAAAAAAAAAAAAAAAAAAAAAAAAAAAAAJ/f38AAAAAA8zMzADAwP8Af39/AAAAAAAAAAAAAAAAAAAAAAAAAAAAIQAAABgAAAAUAAAAKAUAADsLAAAIJQAAACYAABAAAAAmAAAACAAAAAEAAAAAAAAA"/>
+              </a:ext>
+            </a:extLst>
+          </p:cNvSpPr>
+          <p:nvPr>
+            <p:ph idx="1"/>
           </p:nvPr>
         </p:nvSpPr>
         <p:spPr>
           <a:xfrm>
             <a:off x="838200" y="1825625"/>
-            <a:ext cx="5181600" cy="4351338"/>
+            <a:ext cx="5181600" cy="4351655"/>
           </a:xfrm>
         </p:spPr>
         <p:txBody>
           <a:bodyPr/>
           <a:lstStyle/>
           <a:p>
-            <a:pPr lvl="0"/>
-            <a:r>
-              <a:rPr lang="en-US" smtClean="0"/>
+            <a:pPr>
+              <a:defRPr lang="en-us"/>
+            </a:pPr>
+            <a:r>
               <a:t>Click to edit Master text styles</a:t>
             </a:r>
           </a:p>
           <a:p>
-            <a:pPr lvl="1"/>
-            <a:r>
-              <a:rPr lang="en-US" smtClean="0"/>
+            <a:pPr lvl="1">
+              <a:defRPr lang="en-us"/>
+            </a:pPr>
+            <a:r>
               <a:t>Second level</a:t>
             </a:r>
           </a:p>
           <a:p>
-            <a:pPr lvl="2"/>
-            <a:r>
-              <a:rPr lang="en-US" smtClean="0"/>
+            <a:pPr lvl="2">
+              <a:defRPr lang="en-us"/>
+            </a:pPr>
+            <a:r>
               <a:t>Third level</a:t>
             </a:r>
           </a:p>
           <a:p>
-            <a:pPr lvl="3"/>
-            <a:r>
-              <a:rPr lang="en-US" smtClean="0"/>
+            <a:pPr lvl="3">
+              <a:defRPr lang="en-us"/>
+            </a:pPr>
+            <a:r>
               <a:t>Fourth level</a:t>
             </a:r>
           </a:p>
           <a:p>
-            <a:pPr lvl="4"/>
-            <a:r>
-              <a:rPr lang="en-US" smtClean="0"/>
+            <a:pPr lvl="4">
+              <a:defRPr lang="en-us"/>
+            </a:pPr>
+            <a:r>
               <a:t>Fifth level</a:t>
             </a:r>
-            <a:endParaRPr lang="en-US"/>
           </a:p>
         </p:txBody>
       </p:sp>
@@ -1180,56 +1494,65 @@
         <p:nvSpPr>
           <p:cNvPr id="4" name="Content Placeholder 3"/>
           <p:cNvSpPr>
-            <a:spLocks noGrp="1"/>
-          </p:cNvSpPr>
-          <p:nvPr>
-            <p:ph sz="half" idx="2"/>
+            <a:spLocks noGrp="1" noChangeArrowheads="1"/>
+            <a:extLst>
+              <a:ext uri="smNativeData">
+                <pr:smNativeData xmlns:pr="smNativeData" xmlns="smNativeData" val="SMDATA_15_FLquaRMAAAAlAAAAZAAAAA0AAAAAkAAAAEgAAACQAAAASAAAAAAAAAAAAAAAAAAAAAEAAABQAAAAAAAAAAAA4D8AAAAAAADgPwAAAAAAAOA/AAAAAAAA4D8AAAAAAADgPwAAAAAAAOA/AAAAAAAA4D8AAAAAAADgPwAAAAAAAOA/AAAAAAAA4D8CAAAAjAAAAAAAAAAAAAAAW5vVDP///wgAAAAAAAAAAAAAAAAAAAAAAAAAAAAAAAAAAAAAZAAAAAEAAABAAAAAAAAAAAAAAAAAAAAAAAAAAAAAAAAAAAAAAAAAAAAAAAAAAAAAAAAAAAAAAAAAAAAAAAAAAAAAAAAAAAAAAAAAAAAAAAAAAAAAAAAAAAAAAAAAAAAAFAAAADwAAAAAAAAAAAAAAAAAAAkUAAAAAQAAABQAAAAUAAAAFAAAAAEAAAAAAAAAZAAAAGQAAAAAAAAAZAAAAGQAAAAVAAAAYAAAAAAAAAAAAAAADwAAACADAAAAAAAAAAAAAAEAAACgMgAAVgcAAKr4//8BAAAAf39/AAEAAABkAAAAAAAAABQAAABAHwAAAAAAACYAAAAAAAAAwOD//wAAAAAmAAAAZAAAABYAAABMAAAAAAAAAAAAAAAEAAAAAAAAAAEAAADn5uYKAAAAACgAAAAoAAAAZAAAAGQAAAAAAAAAzMzMAAAAAABQAAAAUAAAAGQAAABkAAAAAAAAABcAAAAUAAAAAAAAAAAAAAD/fwAA/38AAAAAAAAJAAAABAAAAAAAAAAeAAAAaAAAAAAAAAAAAAAAAAAAAAAAAAAAAAAAECcAABAnAAAAAAAAAAAAAAAAAAAAAAAAAAAAAAAAAAAAAAAAAAAAABQAAAAAAAAAwMD/AAAAAABkAAAAMgAAAAAAAABkAAAAAAAAAH9/fwAKAAAAIgAAABgAAAAAAAAAAAAAAAAAAAAAAAAAAAAAAAAAAAAkAAAAJAAAAAAAAAAHAAAAAAAAAAAAAAAAAAAAAAAAAAAAAAAAAAAAf39/ACUAAABYAAAAAAAAAAAAAAAAAAAAAAAAAAAAAAAAAAAAAAAAAAAAAAAAAAAAAAAAAAAAAAA/AAAAAAAAAKCGAQAAAAAAAAAAAAAAAAAMAAAAAQAAAAAAAAAAAAAAAAAAAB8AAABUAAAAAAAABQAAAAEAAAAAAAAAAAAAAAAAAAAAAAAAAAAAAAAAAAAAAAAAAAAAAAJ/f38AAAAAA8zMzADAwP8Af39/AAAAAAAAAAAAAAAAAAAAAAAAAAAAIQAAABgAAAAUAAAA+CUAADsLAADYRQAAACYAABAAAAAmAAAACAAAAAEAAAAAAAAA"/>
+              </a:ext>
+            </a:extLst>
+          </p:cNvSpPr>
+          <p:nvPr>
+            <p:ph idx="2"/>
           </p:nvPr>
         </p:nvSpPr>
         <p:spPr>
           <a:xfrm>
             <a:off x="6172200" y="1825625"/>
-            <a:ext cx="5181600" cy="4351338"/>
+            <a:ext cx="5181600" cy="4351655"/>
           </a:xfrm>
         </p:spPr>
         <p:txBody>
           <a:bodyPr/>
           <a:lstStyle/>
           <a:p>
-            <a:pPr lvl="0"/>
-            <a:r>
-              <a:rPr lang="en-US" smtClean="0"/>
+            <a:pPr>
+              <a:defRPr lang="en-us"/>
+            </a:pPr>
+            <a:r>
               <a:t>Click to edit Master text styles</a:t>
             </a:r>
           </a:p>
           <a:p>
-            <a:pPr lvl="1"/>
-            <a:r>
-              <a:rPr lang="en-US" smtClean="0"/>
+            <a:pPr lvl="1">
+              <a:defRPr lang="en-us"/>
+            </a:pPr>
+            <a:r>
               <a:t>Second level</a:t>
             </a:r>
           </a:p>
           <a:p>
-            <a:pPr lvl="2"/>
-            <a:r>
-              <a:rPr lang="en-US" smtClean="0"/>
+            <a:pPr lvl="2">
+              <a:defRPr lang="en-us"/>
+            </a:pPr>
+            <a:r>
               <a:t>Third level</a:t>
             </a:r>
           </a:p>
           <a:p>
-            <a:pPr lvl="3"/>
-            <a:r>
-              <a:rPr lang="en-US" smtClean="0"/>
+            <a:pPr lvl="3">
+              <a:defRPr lang="en-us"/>
+            </a:pPr>
+            <a:r>
               <a:t>Fourth level</a:t>
             </a:r>
           </a:p>
           <a:p>
-            <a:pPr lvl="4"/>
-            <a:r>
-              <a:rPr lang="en-US" smtClean="0"/>
+            <a:pPr lvl="4">
+              <a:defRPr lang="en-us"/>
+            </a:pPr>
+            <a:r>
               <a:t>Fifth level</a:t>
             </a:r>
-            <a:endParaRPr lang="en-US"/>
           </a:p>
         </p:txBody>
       </p:sp>
@@ -1237,7 +1560,12 @@
         <p:nvSpPr>
           <p:cNvPr id="5" name="Date Placeholder 4"/>
           <p:cNvSpPr>
-            <a:spLocks noGrp="1"/>
+            <a:spLocks noGrp="1" noChangeArrowheads="1"/>
+            <a:extLst>
+              <a:ext uri="smNativeData">
+                <pr:smNativeData xmlns:pr="smNativeData" xmlns="smNativeData" val="SMDATA_15_FLquaRMAAAAlAAAAZAAAAA0AAAAAkAAAAEgAAACQAAAASAAAAAAAAAABAAAAAAAAAAEAAABQAAAAAAAAAAAA4D8AAAAAAADgPwAAAAAAAOA/AAAAAAAA4D8AAAAAAADgPwAAAAAAAOA/AAAAAAAA4D8AAAAAAADgPwAAAAAAAOA/AAAAAAAA4D8CAAAAjAAAAAAAAAAAAAAAW5vVDP///wgAAAAAAAAAAAAAAAAAAAAAAAAAAAAAAAAAAAAAZAAAAAEAAABAAAAAAAAAAAAAAAAAAAAAAAAAAAAAAAAAAAAAAAAAAAAAAAAAAAAAAAAAAAAAAAAAAAAAAAAAAAAAAAAAAAAAAAAAAAAAAAAAAAAAAAAAAAAAAAAAAAAAFAAAADwAAAAAAAAAAAAAAAAAAAkUAAAAAQAAABQAAAAUAAAAFAAAAAEAAAAAAAAAZAAAAGQAAAAAAAAAZAAAAGQAAAAVAAAAYAAAAAAAAAAAAAAADwAAACADAAAAAAAAAAAAAAEAAACgMgAAVgcAAKr4//8BAAAAf39/AAEAAABkAAAAAAAAABQAAABAHwAAAAAAACYAAAAAAAAAwOD//wAAAAAmAAAAZAAAABYAAABMAAAAAAAAAAAAAAAEAAAAAAAAAAEAAADn5uYKAAAAACgAAAAoAAAAZAAAAGQAAAAAAAAAzMzMAAAAAABQAAAAUAAAAGQAAABkAAAAAAAAABcAAAAUAAAAAAAAAAAAAAD/fwAA/38AAAAAAAAJAAAABAAAANiNzA0eAAAAaAAAAAAAAAAAAAAAAAAAAAAAAAAAAAAAECcAABAnAAAAAAAAAAAAAAAAAAAAAAAAAAAAAAAAAAAAAAAAAAAAABQAAAAAAAAAwMD/AAAAAABkAAAAMgAAAAAAAABkAAAAAAAAAH9/fwAKAAAAIgAAABgAAAAAAAAAAAAAAAAAAAAAAAAAAAAAAAAAAAAkAAAAJAAAAAAAAAAHAAAAAAAAAAAAAAAAAAAAAAAAAAAAAAAAAAAAf39/ACUAAABYAAAAAAAAAAAAAAAAAAAAAAAAAAAAAAAAAAAAAAAAAAAAAAAAAAAAAAAAAAAAAAA/AAAAAAAAAKCGAQAAAAAAAAAAAAAAAAAMAAAAAQAAAAAAAAAAAAAAAAAAAB8AAABUAAAAAAAABQAAAAEAAAAAAAAAAAAAAAAAAAAAAAAAAAAAAAAAAAAAAAAAAAAAAAJ/f38AAAAAA8zMzADAwP8Af39/AAAAAAAAAAAAAAAAAAAAAAAAAAAAIQAAABgAAAAUAAAAKAUAABonAAAIFgAAWSkAABAAAAAmAAAACAAAAAAAAAAAAAAA"/>
+              </a:ext>
+            </a:extLst>
           </p:cNvSpPr>
           <p:nvPr>
             <p:ph type="dt" sz="half" idx="10"/>
@@ -1248,11 +1576,12 @@
           <a:bodyPr/>
           <a:lstStyle/>
           <a:p>
-            <a:fld id="{77AD5A0D-32F9-42A2-946C-433A90366567}" type="datetimeFigureOut">
-              <a:rPr lang="en-US" smtClean="0"/>
-              <a:t>6/13/2025</a:t>
+            <a:pPr>
+              <a:defRPr lang="en-us"/>
+            </a:pPr>
+            <a:fld id="{30AE893C-72DD-FB7F-9316-842AC75865D1}" type="datetime1">
+              <a:t>3/4/2026</a:t>
             </a:fld>
-            <a:endParaRPr lang="en-US"/>
           </a:p>
         </p:txBody>
       </p:sp>
@@ -1260,7 +1589,12 @@
         <p:nvSpPr>
           <p:cNvPr id="6" name="Footer Placeholder 5"/>
           <p:cNvSpPr>
-            <a:spLocks noGrp="1"/>
+            <a:spLocks noGrp="1" noChangeArrowheads="1"/>
+            <a:extLst>
+              <a:ext uri="smNativeData">
+                <pr:smNativeData xmlns:pr="smNativeData" xmlns="smNativeData" val="SMDATA_15_FLquaRMAAAAlAAAAZAAAAA0AAAAAkAAAAEgAAACQAAAASAAAAAAAAAABAAAAAAAAAAEAAABQAAAAAAAAAAAA4D8AAAAAAADgPwAAAAAAAOA/AAAAAAAA4D8AAAAAAADgPwAAAAAAAOA/AAAAAAAA4D8AAAAAAADgPwAAAAAAAOA/AAAAAAAA4D8CAAAAjAAAAAAAAAAAAAAAW5vVDP///wgAAAAAAAAAAAAAAAAAAAAAAAAAAAAAAAAAAAAAZAAAAAEAAABAAAAAAAAAAAAAAAAAAAAAAAAAAAAAAAAAAAAAAAAAAAAAAAAAAAAAAAAAAAAAAAAAAAAAAAAAAAAAAAAAAAAAAAAAAAAAAAAAAAAAAAAAAAAAAAAAAAAAFAAAADwAAAAAAAAAAAAAAAAAAAkUAAAAAQAAABQAAAAUAAAAFAAAAAEAAAAAAAAAZAAAAGQAAAAAAAAAZAAAAGQAAAAVAAAAYAAAAAAAAAAAAAAADwAAACADAAAAAAAAAAAAAAEAAACgMgAAVgcAAKr4//8BAAAAf39/AAEAAABkAAAAAAAAABQAAABAHwAAAAAAACYAAAAAAAAAwOD//wAAAAAmAAAAZAAAABYAAABMAAAAAAAAAAAAAAAEAAAAAAAAAAEAAADn5uYKAAAAACgAAAAoAAAAZAAAAGQAAAAAAAAAzMzMAAAAAABQAAAAUAAAAGQAAABkAAAAAAAAABcAAAAUAAAAAAAAAAAAAAD/fwAA/38AAAAAAAAJAAAABAAAAAAAAAAeAAAAaAAAAAAAAAAAAAAAAAAAAAAAAAAAAAAAECcAABAnAAAAAAAAAAAAAAAAAAAAAAAAAAAAAAAAAAAAAAAAAAAAABQAAAAAAAAAwMD/AAAAAABkAAAAMgAAAAAAAABkAAAAAAAAAH9/fwAKAAAAIgAAABgAAAAAAAAAAAAAAAAAAAAAAAAAAAAAAAAAAAAkAAAAJAAAAAAAAAAHAAAAAAAAAAAAAAAAAAAAAAAAAAAAAAAAAAAAf39/ACUAAABYAAAAAAAAAAAAAAAAAAAAAAAAAAAAAAAAAAAAAAAAAAAAAAAAAAAAAAAAAAAAAAA/AAAAAAAAAKCGAQAAAAAAAAAAAAAAAAAMAAAAAQAAAAAAAAAAAAAAAAAAAB8AAABUAAAAAAAABQAAAAEAAAAAAAAAAAAAAAAAAAAAAAAAAAAAAAAAAAAAAAAAAAAAAAJ/f38AAAAAA8zMzADAwP8Af39/AAAAAAAAAAAAAAAAAAAAAAAAAAAAIQAAABgAAAAUAAAA2BgAABonAAAoMgAAWSkAABAAAAAmAAAACAAAAAAAAAAAAAAA"/>
+              </a:ext>
+            </a:extLst>
           </p:cNvSpPr>
           <p:nvPr>
             <p:ph type="ftr" sz="quarter" idx="11"/>
@@ -1271,7 +1605,9 @@
           <a:bodyPr/>
           <a:lstStyle/>
           <a:p>
-            <a:endParaRPr lang="en-US"/>
+            <a:pPr>
+              <a:defRPr lang="en-us"/>
+            </a:pPr>
           </a:p>
         </p:txBody>
       </p:sp>
@@ -1279,7 +1615,12 @@
         <p:nvSpPr>
           <p:cNvPr id="7" name="Slide Number Placeholder 6"/>
           <p:cNvSpPr>
-            <a:spLocks noGrp="1"/>
+            <a:spLocks noGrp="1" noChangeArrowheads="1"/>
+            <a:extLst>
+              <a:ext uri="smNativeData">
+                <pr:smNativeData xmlns:pr="smNativeData" xmlns="smNativeData" val="SMDATA_15_FLquaRMAAAAlAAAAZAAAAA0AAAAAkAAAAEgAAACQAAAASAAAAAAAAAABAAAAAAAAAAEAAABQAAAAAAAAAAAA4D8AAAAAAADgPwAAAAAAAOA/AAAAAAAA4D8AAAAAAADgPwAAAAAAAOA/AAAAAAAA4D8AAAAAAADgPwAAAAAAAOA/AAAAAAAA4D8CAAAAjAAAAAAAAAAAAAAAW5vVDP///wgAAAAAAAAAAAAAAAAAAAAAAAAAAAAAAAAAAAAAZAAAAAEAAABAAAAAAAAAAAAAAAAAAAAAAAAAAAAAAAAAAAAAAAAAAAAAAAAAAAAAAAAAAAAAAAAAAAAAAAAAAAAAAAAAAAAAAAAAAAAAAAAAAAAAAAAAAAAAAAAAAAAAFAAAADwAAAAAAAAAAAAAAAAAAAkUAAAAAQAAABQAAAAUAAAAFAAAAAEAAAAAAAAAZAAAAGQAAAAAAAAAZAAAAGQAAAAVAAAAYAAAAAAAAAAAAAAADwAAACADAAAAAAAAAAAAAAEAAACgMgAAVgcAAKr4//8BAAAAf39/AAEAAABkAAAAAAAAABQAAABAHwAAAAAAACYAAAAAAAAAwOD//wAAAAAmAAAAZAAAABYAAABMAAAAAAAAAAAAAAAEAAAAAAAAAAEAAADn5uYKAAAAACgAAAAoAAAAZAAAAGQAAAAAAAAAzMzMAAAAAABQAAAAUAAAAGQAAABkAAAAAAAAABcAAAAUAAAAAAAAAAAAAAD/fwAA/38AAAAAAAAJAAAABAAAAAAAAAAeAAAAaAAAAAAAAAAAAAAAAAAAAAAAAAAAAAAAECcAABAnAAAAAAAAAAAAAAAAAAAAAAAAAAAAAAAAAAAAAAAAAAAAABQAAAAAAAAAwMD/AAAAAABkAAAAMgAAAAAAAABkAAAAAAAAAH9/fwAKAAAAIgAAABgAAAAAAAAAAAAAAAAAAAAAAAAAAAAAAAAAAAAkAAAAJAAAAAAAAAAHAAAAAAAAAAAAAAAAAAAAAAAAAAAAAAAAAAAAf39/ACUAAABYAAAAAAAAAAAAAAAAAAAAAAAAAAAAAAAAAAAAAAAAAAAAAAAAAAAAAAAAAAAAAAA/AAAAAAAAAKCGAQAAAAAAAAAAAAAAAAAMAAAAAQAAAAAAAAAAAAAAAAAAAB8AAABUAAAAAAAABQAAAAEAAAAAAAAAAAAAAAAAAAAAAAAAAAAAAAAAAAAAAAAAAAAAAAJ/f38AAAAAA8zMzADAwP8Af39/AAAAAAAAAAAAAAAAAAAAAAAAAAAAIQAAABgAAAAUAAAA+DQAABonAADYRQAAWSkAABAAAAAmAAAACAAAAAAAAAAAAAAA"/>
+              </a:ext>
+            </a:extLst>
           </p:cNvSpPr>
           <p:nvPr>
             <p:ph type="sldNum" sz="quarter" idx="12"/>
@@ -1290,29 +1631,26 @@
           <a:bodyPr/>
           <a:lstStyle/>
           <a:p>
-            <a:fld id="{2AF8EFAC-D507-4007-9634-FDE202E639CC}" type="slidenum">
-              <a:rPr lang="en-US" smtClean="0"/>
+            <a:pPr>
+              <a:defRPr lang="en-us"/>
+            </a:pPr>
+            <a:fld id="{30AEC90A-44DD-FB3F-9316-B26A875865E7}" type="slidenum">
               <a:t>‹#›</a:t>
             </a:fld>
-            <a:endParaRPr lang="en-US"/>
           </a:p>
         </p:txBody>
       </p:sp>
     </p:spTree>
-    <p:extLst>
-      <p:ext uri="{BB962C8B-B14F-4D97-AF65-F5344CB8AC3E}">
-        <p14:creationId xmlns:p14="http://schemas.microsoft.com/office/powerpoint/2010/main" val="662872005"/>
-      </p:ext>
-    </p:extLst>
   </p:cSld>
   <p:clrMapOvr>
     <a:masterClrMapping/>
   </p:clrMapOvr>
+  <p:hf hdr="0" ftr="0"/>
 </p:sldLayout>
 </file>
 
 <file path=ppt/slideLayouts/slideLayout5.xml><?xml version="1.0" encoding="utf-8"?>
-<p:sldLayout xmlns:a="http://schemas.openxmlformats.org/drawingml/2006/main" xmlns:r="http://schemas.openxmlformats.org/officeDocument/2006/relationships" xmlns:p="http://schemas.openxmlformats.org/presentationml/2006/main" type="twoTxTwoObj" preserve="1">
+<p:sldLayout xmlns:p="http://schemas.openxmlformats.org/presentationml/2006/main" xmlns:mc="http://schemas.openxmlformats.org/markup-compatibility/2006" xmlns:p14="http://schemas.microsoft.com/office/powerpoint/2010/main" xmlns:p15="http://schemas.microsoft.com/office/powerpoint/2012/main" xmlns:r="http://schemas.openxmlformats.org/officeDocument/2006/relationships" xmlns:a="http://schemas.openxmlformats.org/drawingml/2006/main" type="twoTxTwoObj" preserve="1">
   <p:cSld name="Comparison">
     <p:spTree>
       <p:nvGrpSpPr>
@@ -1332,7 +1670,12 @@
         <p:nvSpPr>
           <p:cNvPr id="2" name="Title 1"/>
           <p:cNvSpPr>
-            <a:spLocks noGrp="1"/>
+            <a:spLocks noGrp="1" noChangeArrowheads="1"/>
+            <a:extLst>
+              <a:ext uri="smNativeData">
+                <pr:smNativeData xmlns:pr="smNativeData" xmlns="smNativeData" val="SMDATA_15_FLquaRMAAAAlAAAAZAAAAA0AAAAAkAAAAEgAAACQAAAASAAAAAAAAAABAAAAAAAAAAEAAABQAAAAAAAAAAAA4D8AAAAAAADgPwAAAAAAAOA/AAAAAAAA4D8AAAAAAADgPwAAAAAAAOA/AAAAAAAA4D8AAAAAAADgPwAAAAAAAOA/AAAAAAAA4D8CAAAAjAAAAAAAAAAAAAAAW5vVDP///wgAAAAAAAAAAAAAAAAAAAAAAAAAAAAAAAAAAAAAZAAAAAEAAABAAAAAAAAAAAAAAAAAAAAAAAAAAAAAAAAAAAAAAAAAAAAAAAAAAAAAAAAAAAAAAAAAAAAAAAAAAAAAAAAAAAAAAAAAAAAAAAAAAAAAAAAAAAAAAAAAAAAAFAAAADwAAAAAAAAAAAAAAAAAAAkUAAAAAQAAABQAAAAUAAAAFAAAAAEAAAAAAAAAZAAAAGQAAAAAAAAAZAAAAGQAAAAVAAAAYAAAAAAAAAAAAAAADwAAACADAAAAAAAAAAAAAAEAAACgMgAAVgcAAKr4//8BAAAAf39/AAEAAABkAAAAAAAAABQAAABAHwAAAAAAACYAAAAAAAAAwOD//wAAAAAmAAAAZAAAABYAAABMAAAAAAAAAAAAAAAEAAAAAAAAAAEAAADn5uYKAAAAACgAAAAoAAAAZAAAAGQAAAAAAAAAzMzMAAAAAABQAAAAUAAAAGQAAABkAAAAAAAAABcAAAAUAAAAAAAAAAAAAAD/fwAA/38AAAAAAAAJAAAABAAAAPL1+v8eAAAAaAAAAAAAAAAAAAAAAAAAAAAAAAAAAAAAECcAABAnAAAAAAAAAAAAAAAAAAAAAAAAAAAAAAAAAAAAAAAAAAAAABQAAAAAAAAAwMD/AAAAAABkAAAAMgAAAAAAAABkAAAAAAAAAH9/fwAKAAAAIgAAABgAAAAAAAAAAAAAAAAAAAAAAAAAAAAAAAAAAAAkAAAAJAAAAAAAAAAHAAAAAAAAAAAAAAAAAAAAAAAAAAAAAAAAAAAAf39/ACUAAABYAAAAAAAAAAAAAAAAAAAAAAAAAAAAAAAAAAAAAAAAAAAAAAAAAAAAAAAAAAAAAAA/AAAAAAAAAKCGAQAAAAAAAAAAAAAAAAAMAAAAAQAAAAAAAAAAAAAAAAAAAB8AAABUAAAAAAAABQAAAAEAAAAAAAAAAAAAAAAAAAAAAAAAAAAAAAAAAAAAAAAAAAAAAAJ/f38AAAAAA8zMzADAwP8Af39/AAAAAAAAAAAAAAAAAAAAAAAAAAAAIQAAABgAAAAUAAAAKwUAAD8CAADbRQAAZwoAABAAAAAmAAAACAAAAAEAAAAAAAAA"/>
+              </a:ext>
+            </a:extLst>
           </p:cNvSpPr>
           <p:nvPr>
             <p:ph type="title"/>
@@ -1340,19 +1683,20 @@
         </p:nvSpPr>
         <p:spPr>
           <a:xfrm>
-            <a:off x="839788" y="365125"/>
-            <a:ext cx="10515600" cy="1325563"/>
+            <a:off x="840105" y="365125"/>
+            <a:ext cx="10515600" cy="1325880"/>
           </a:xfrm>
         </p:spPr>
         <p:txBody>
           <a:bodyPr/>
           <a:lstStyle/>
           <a:p>
-            <a:r>
-              <a:rPr lang="en-US" smtClean="0"/>
+            <a:pPr>
+              <a:defRPr lang="en-us"/>
+            </a:pPr>
+            <a:r>
               <a:t>Click to edit Master title style</a:t>
             </a:r>
-            <a:endParaRPr lang="en-US"/>
           </a:p>
         </p:txBody>
       </p:sp>
@@ -1360,62 +1704,72 @@
         <p:nvSpPr>
           <p:cNvPr id="3" name="Text Placeholder 2"/>
           <p:cNvSpPr>
-            <a:spLocks noGrp="1"/>
-          </p:cNvSpPr>
-          <p:nvPr>
-            <p:ph type="body" idx="1"/>
+            <a:spLocks noGrp="1" noChangeArrowheads="1"/>
+            <a:extLst>
+              <a:ext uri="smNativeData">
+                <pr:smNativeData xmlns:pr="smNativeData" xmlns="smNativeData" val="SMDATA_15_FLquaRMAAAAlAAAAZAAAAA0AAAAAkAAAAEgAAACQAAAASAAAAAAAAAACAAAAAAAAAAEAAABQAAAAAAAAAAAA4D8AAAAAAADgPwAAAAAAAOA/AAAAAAAA4D8AAAAAAADgPwAAAAAAAOA/AAAAAAAA4D8AAAAAAADgPwAAAAAAAOA/AAAAAAAA4D8CAAAAjAAAAAAAAAAAAAAAW5vVDP///wgAAAAAAAAAAAAAAAAAAAAAAAAAAAAAAAAAAAAAZAAAAAEAAABAAAAAAAAAAAAAAAAAAAAAAAAAAAAAAAAAAAAAAAAAAAAAAAAAAAAAAAAAAAAAAAAAAAAAAAAAAAAAAAAAAAAAAAAAAAAAAAAAAAAAAAAAAAAAAAAAAAAAFAAAADwAAAAAAAAAAAAAAAAAAAkUAAAAAQAAABQAAAAUAAAAFAAAAAEAAAAAAAAAZAAAAGQAAAAAAAAAZAAAAGQAAAAVAAAAYAAAAAAAAAAAAAAADwAAACADAAAAAAAAAAAAAAEAAACgMgAAVgcAAKr4//8BAAAAf39/AAEAAABkAAAAAAAAABQAAABAHwAAAAAAACYAAAAAAAAAwOD//wAAAAAmAAAAZAAAABYAAABMAAAAAAAAAAAAAAAEAAAAAAAAAAEAAADn5uYKAAAAACgAAAAoAAAAZAAAAGQAAAAAAAAAzMzMAAAAAABQAAAAUAAAAGQAAABkAAAAAAAAABcAAAAUAAAAAAAAAAAAAAD/fwAA/38AAAAAAAAJAAAABAAAAAAAAAAeAAAAaAAAAAAAAAAAAAAAAAAAAAAAAAAAAAAAECcAABAnAAAAAAAAAAAAAAAAAAAAAAAAAAAAAAAAAAAAAAAAAAAAABQAAAAAAAAAwMD/AAAAAABkAAAAMgAAAAAAAABkAAAAAAAAAH9/fwAKAAAAIgAAABgAAAAAAAAAAAAAAAAAAAAAAAAAAAAAAAAAAAAkAAAAJAAAAAAAAAAHAAAAAAAAAAAAAAAAAAAAAAAAAAAAAAAAAAAAf39/ACUAAABYAAAAAAAAAAAAAAAAAAAAAAAAAAAAAAAAAAAAAAAAAAAAAAAAAAAAAAAAAAAAAAA/AAAAAAAAAKCGAQAAAAAAAAAAAAAAAAAMAAAAAQAAAAAAAAAAAAAAAAAAAB8AAABUAAAAAAAABQAAAAEAAAAAAAAAAAAAAAAAAAAAAAAAAAAAAAAAAAAAAAAAAAAAAAJ/f38AAAAAA8zMzADAwP8Af39/AAAAAAAAAAAAAAAAAAAAAAAAAAAAIQAAABgAAAAUAAAAKwUAAFgKAADlJAAAaQ8AABAAAAAmAAAACAAAAIGAAAAAAAAA"/>
+              </a:ext>
+            </a:extLst>
+          </p:cNvSpPr>
+          <p:nvPr>
+            <p:ph idx="1"/>
           </p:nvPr>
         </p:nvSpPr>
         <p:spPr>
           <a:xfrm>
-            <a:off x="839788" y="1681163"/>
-            <a:ext cx="5157787" cy="823912"/>
+            <a:off x="840105" y="1681480"/>
+            <a:ext cx="5157470" cy="823595"/>
           </a:xfrm>
         </p:spPr>
         <p:txBody>
-          <a:bodyPr anchor="b"/>
+          <a:bodyPr vert="horz" wrap="square" lIns="91440" tIns="45720" rIns="91440" bIns="45720" numCol="1" spcCol="215900" anchor="b">
+            <a:prstTxWarp prst="textNoShape">
+              <a:avLst/>
+            </a:prstTxWarp>
+          </a:bodyPr>
           <a:lstStyle>
             <a:lvl1pPr marL="0" indent="0">
               <a:buNone/>
-              <a:defRPr sz="2400" b="1"/>
+              <a:defRPr lang="en-us" sz="2400" b="1" cap="none"/>
             </a:lvl1pPr>
             <a:lvl2pPr marL="457200" indent="0">
               <a:buNone/>
-              <a:defRPr sz="2000" b="1"/>
+              <a:defRPr lang="en-us" sz="2000" b="1" cap="none"/>
             </a:lvl2pPr>
             <a:lvl3pPr marL="914400" indent="0">
               <a:buNone/>
-              <a:defRPr sz="1800" b="1"/>
+              <a:defRPr lang="en-us" sz="1800" b="1" cap="none"/>
             </a:lvl3pPr>
             <a:lvl4pPr marL="1371600" indent="0">
               <a:buNone/>
-              <a:defRPr sz="1600" b="1"/>
+              <a:defRPr lang="en-us" sz="1600" b="1" cap="none"/>
             </a:lvl4pPr>
             <a:lvl5pPr marL="1828800" indent="0">
               <a:buNone/>
-              <a:defRPr sz="1600" b="1"/>
+              <a:defRPr lang="en-us" sz="1600" b="1" cap="none"/>
             </a:lvl5pPr>
             <a:lvl6pPr marL="2286000" indent="0">
               <a:buNone/>
-              <a:defRPr sz="1600" b="1"/>
+              <a:defRPr lang="en-us" sz="1600" b="1" cap="none"/>
             </a:lvl6pPr>
             <a:lvl7pPr marL="2743200" indent="0">
               <a:buNone/>
-              <a:defRPr sz="1600" b="1"/>
+              <a:defRPr lang="en-us" sz="1600" b="1" cap="none"/>
             </a:lvl7pPr>
             <a:lvl8pPr marL="3200400" indent="0">
               <a:buNone/>
-              <a:defRPr sz="1600" b="1"/>
+              <a:defRPr lang="en-us" sz="1600" b="1" cap="none"/>
             </a:lvl8pPr>
             <a:lvl9pPr marL="3657600" indent="0">
               <a:buNone/>
-              <a:defRPr sz="1600" b="1"/>
+              <a:defRPr lang="en-us" sz="1600" b="1" cap="none"/>
             </a:lvl9pPr>
           </a:lstStyle>
           <a:p>
-            <a:pPr lvl="0"/>
-            <a:r>
-              <a:rPr lang="en-US" smtClean="0"/>
+            <a:pPr>
+              <a:defRPr lang="en-us"/>
+            </a:pPr>
+            <a:r>
               <a:t>Click to edit Master text styles</a:t>
             </a:r>
           </a:p>
@@ -1425,56 +1779,65 @@
         <p:nvSpPr>
           <p:cNvPr id="4" name="Content Placeholder 3"/>
           <p:cNvSpPr>
-            <a:spLocks noGrp="1"/>
-          </p:cNvSpPr>
-          <p:nvPr>
-            <p:ph sz="half" idx="2"/>
+            <a:spLocks noGrp="1" noChangeArrowheads="1"/>
+            <a:extLst>
+              <a:ext uri="smNativeData">
+                <pr:smNativeData xmlns:pr="smNativeData" xmlns="smNativeData" val="SMDATA_15_FLquaRMAAAAlAAAAZAAAAA0AAAAAkAAAAEgAAACQAAAASAAAAAAAAAAAAAAAAAAAAAEAAABQAAAAAAAAAAAA4D8AAAAAAADgPwAAAAAAAOA/AAAAAAAA4D8AAAAAAADgPwAAAAAAAOA/AAAAAAAA4D8AAAAAAADgPwAAAAAAAOA/AAAAAAAA4D8CAAAAjAAAAAAAAAAAAAAAW5vVDP///wgAAAAAAAAAAAAAAAAAAAAAAAAAAAAAAAAAAAAAZAAAAAEAAABAAAAAAAAAAAAAAAAAAAAAAAAAAAAAAAAAAAAAAAAAAAAAAAAAAAAAAAAAAAAAAAAAAAAAAAAAAAAAAAAAAAAAAAAAAAAAAAAAAAAAAAAAAAAAAAAAAAAAFAAAADwAAAAAAAAAAAAAAAAAAAkUAAAAAQAAABQAAAAUAAAAFAAAAAEAAAAAAAAAZAAAAGQAAAAAAAAAZAAAAGQAAAAVAAAAYAAAAAAAAAAAAAAADwAAACADAAAAAAAAAAAAAAEAAACgMgAAVgcAAKr4//8BAAAAf39/AAEAAABkAAAAAAAAABQAAABAHwAAAAAAACYAAAAAAAAAwOD//wAAAAAmAAAAZAAAABYAAABMAAAAAAAAAAAAAAAEAAAAAAAAAAEAAADn5uYKAAAAACgAAAAoAAAAZAAAAGQAAAAAAAAAzMzMAAAAAABQAAAAUAAAAGQAAABkAAAAAAAAABcAAAAUAAAAAAAAAAAAAAD/fwAA/38AAAAAAAAJAAAABAAAAAAAAAAeAAAAaAAAAAAAAAAAAAAAAAAAAAAAAAAAAAAAECcAABAnAAAAAAAAAAAAAAAAAAAAAAAAAAAAAAAAAAAAAAAAAAAAABQAAAAAAAAAwMD/AAAAAABkAAAAMgAAAAAAAABkAAAAAAAAAH9/fwAKAAAAIgAAABgAAAAAAAAAAAAAAAAAAAAAAAAAAAAAAAAAAAAkAAAAJAAAAAAAAAAHAAAAAAAAAAAAAAAAAAAAAAAAAAAAAAAAAAAAf39/ACUAAABYAAAAAAAAAAAAAAAAAAAAAAAAAAAAAAAAAAAAAAAAAAAAAAAAAAAAAAAAAAAAAAA/AAAAAAAAAKCGAQAAAAAAAAAAAAAAAAAMAAAAAQAAAAAAAAAAAAAAAAAAAB8AAABUAAAAAAAABQAAAAEAAAAAAAAAAAAAAAAAAAAAAAAAAAAAAAAAAAAAAAAAAAAAAAJ/f38AAAAAA8zMzADAwP8Af39/AAAAAAAAAAAAAAAAAAAAAAAAAAAAIQAAABgAAAAUAAAAKwUAAGkPAADlJAAAFCYAABAAAAAmAAAACAAAAAEAAAAAAAAA"/>
+              </a:ext>
+            </a:extLst>
+          </p:cNvSpPr>
+          <p:nvPr>
+            <p:ph idx="2"/>
           </p:nvPr>
         </p:nvSpPr>
         <p:spPr>
           <a:xfrm>
-            <a:off x="839788" y="2505075"/>
-            <a:ext cx="5157787" cy="3684588"/>
+            <a:off x="840105" y="2505075"/>
+            <a:ext cx="5157470" cy="3684905"/>
           </a:xfrm>
         </p:spPr>
         <p:txBody>
           <a:bodyPr/>
           <a:lstStyle/>
           <a:p>
-            <a:pPr lvl="0"/>
-            <a:r>
-              <a:rPr lang="en-US" smtClean="0"/>
+            <a:pPr>
+              <a:defRPr lang="en-us"/>
+            </a:pPr>
+            <a:r>
               <a:t>Click to edit Master text styles</a:t>
             </a:r>
           </a:p>
           <a:p>
-            <a:pPr lvl="1"/>
-            <a:r>
-              <a:rPr lang="en-US" smtClean="0"/>
+            <a:pPr lvl="1">
+              <a:defRPr lang="en-us"/>
+            </a:pPr>
+            <a:r>
               <a:t>Second level</a:t>
             </a:r>
           </a:p>
           <a:p>
-            <a:pPr lvl="2"/>
-            <a:r>
-              <a:rPr lang="en-US" smtClean="0"/>
+            <a:pPr lvl="2">
+              <a:defRPr lang="en-us"/>
+            </a:pPr>
+            <a:r>
               <a:t>Third level</a:t>
             </a:r>
           </a:p>
           <a:p>
-            <a:pPr lvl="3"/>
-            <a:r>
-              <a:rPr lang="en-US" smtClean="0"/>
+            <a:pPr lvl="3">
+              <a:defRPr lang="en-us"/>
+            </a:pPr>
+            <a:r>
               <a:t>Fourth level</a:t>
             </a:r>
           </a:p>
           <a:p>
-            <a:pPr lvl="4"/>
-            <a:r>
-              <a:rPr lang="en-US" smtClean="0"/>
+            <a:pPr lvl="4">
+              <a:defRPr lang="en-us"/>
+            </a:pPr>
+            <a:r>
               <a:t>Fifth level</a:t>
             </a:r>
-            <a:endParaRPr lang="en-US"/>
           </a:p>
         </p:txBody>
       </p:sp>
@@ -1482,62 +1845,72 @@
         <p:nvSpPr>
           <p:cNvPr id="5" name="Text Placeholder 4"/>
           <p:cNvSpPr>
-            <a:spLocks noGrp="1"/>
-          </p:cNvSpPr>
-          <p:nvPr>
-            <p:ph type="body" sz="quarter" idx="3"/>
+            <a:spLocks noGrp="1" noChangeArrowheads="1"/>
+            <a:extLst>
+              <a:ext uri="smNativeData">
+                <pr:smNativeData xmlns:pr="smNativeData" xmlns="smNativeData" val="SMDATA_15_FLquaRMAAAAlAAAAZAAAAA0AAAAAkAAAAEgAAACQAAAASAAAAAAAAAACAAAAAAAAAAEAAABQAAAAAAAAAAAA4D8AAAAAAADgPwAAAAAAAOA/AAAAAAAA4D8AAAAAAADgPwAAAAAAAOA/AAAAAAAA4D8AAAAAAADgPwAAAAAAAOA/AAAAAAAA4D8CAAAAjAAAAAAAAAAAAAAAW5vVDP///wgAAAAAAAAAAAAAAAAAAAAAAAAAAAAAAAAAAAAAZAAAAAEAAABAAAAAAAAAAAAAAAAAAAAAAAAAAAAAAAAAAAAAAAAAAAAAAAAAAAAAAAAAAAAAAAAAAAAAAAAAAAAAAAAAAAAAAAAAAAAAAAAAAAAAAAAAAAAAAAAAAAAAFAAAADwAAAAAAAAAAAAAAAAAAAkUAAAAAQAAABQAAAAUAAAAFAAAAAEAAAAAAAAAZAAAAGQAAAAAAAAAZAAAAGQAAAAVAAAAYAAAAAAAAAAAAAAADwAAACADAAAAAAAAAAAAAAEAAACgMgAAVgcAAKr4//8BAAAAf39/AAEAAABkAAAAAAAAABQAAABAHwAAAAAAACYAAAAAAAAAwOD//wAAAAAmAAAAZAAAABYAAABMAAAAAAAAAAAAAAAEAAAAAAAAAAEAAADn5uYKAAAAACgAAAAoAAAAZAAAAGQAAAAAAAAAzMzMAAAAAABQAAAAUAAAAGQAAABkAAAAAAAAABcAAAAUAAAAAAAAAAAAAAD/fwAA/38AAAAAAAAJAAAABAAAAJLC8BQeAAAAaAAAAAAAAAAAAAAAAAAAAAAAAAAAAAAAECcAABAnAAAAAAAAAAAAAAAAAAAAAAAAAAAAAAAAAAAAAAAAAAAAABQAAAAAAAAAwMD/AAAAAABkAAAAMgAAAAAAAABkAAAAAAAAAH9/fwAKAAAAIgAAABgAAAAAAAAAAAAAAAAAAAAAAAAAAAAAAAAAAAAkAAAAJAAAAAAAAAAHAAAAAAAAAAAAAAAAAAAAAAAAAAAAAAAAAAAAf39/ACUAAABYAAAAAAAAAAAAAAAAAAAAAAAAAAAAAAAAAAAAAAAAAAAAAAAAAAAAAAAAAAAAAAA/AAAAAAAAAKCGAQAAAAAAAAAAAAAAAAAMAAAAAQAAAAAAAAAAAAAAAAAAAB8AAABUAAAAAAAABQAAAAEAAAAAAAAAAAAAAAAAAAAAAAAAAAAAAAAAAAAAAAAAAAAAAAJ/f38AAAAAA8zMzADAwP8Af39/AAAAAAAAAAAAAAAAAAAAAAAAAAAAIQAAABgAAAAUAAAA+CUAAFgKAADbRQAAaQ8AABAAAAAmAAAACAAAAIGAAAAAAAAA"/>
+              </a:ext>
+            </a:extLst>
+          </p:cNvSpPr>
+          <p:nvPr>
+            <p:ph idx="3"/>
           </p:nvPr>
         </p:nvSpPr>
         <p:spPr>
           <a:xfrm>
-            <a:off x="6172200" y="1681163"/>
-            <a:ext cx="5183188" cy="823912"/>
+            <a:off x="6172200" y="1681480"/>
+            <a:ext cx="5183505" cy="823595"/>
           </a:xfrm>
         </p:spPr>
         <p:txBody>
-          <a:bodyPr anchor="b"/>
+          <a:bodyPr vert="horz" wrap="square" lIns="91440" tIns="45720" rIns="91440" bIns="45720" numCol="1" spcCol="215900" anchor="b">
+            <a:prstTxWarp prst="textNoShape">
+              <a:avLst/>
+            </a:prstTxWarp>
+          </a:bodyPr>
           <a:lstStyle>
             <a:lvl1pPr marL="0" indent="0">
               <a:buNone/>
-              <a:defRPr sz="2400" b="1"/>
+              <a:defRPr lang="en-us" sz="2400" b="1" cap="none"/>
             </a:lvl1pPr>
             <a:lvl2pPr marL="457200" indent="0">
               <a:buNone/>
-              <a:defRPr sz="2000" b="1"/>
+              <a:defRPr lang="en-us" sz="2000" b="1" cap="none"/>
             </a:lvl2pPr>
             <a:lvl3pPr marL="914400" indent="0">
               <a:buNone/>
-              <a:defRPr sz="1800" b="1"/>
+              <a:defRPr lang="en-us" sz="1800" b="1" cap="none"/>
             </a:lvl3pPr>
             <a:lvl4pPr marL="1371600" indent="0">
               <a:buNone/>
-              <a:defRPr sz="1600" b="1"/>
+              <a:defRPr lang="en-us" sz="1600" b="1" cap="none"/>
             </a:lvl4pPr>
             <a:lvl5pPr marL="1828800" indent="0">
               <a:buNone/>
-              <a:defRPr sz="1600" b="1"/>
+              <a:defRPr lang="en-us" sz="1600" b="1" cap="none"/>
             </a:lvl5pPr>
             <a:lvl6pPr marL="2286000" indent="0">
               <a:buNone/>
-              <a:defRPr sz="1600" b="1"/>
+              <a:defRPr lang="en-us" sz="1600" b="1" cap="none"/>
             </a:lvl6pPr>
             <a:lvl7pPr marL="2743200" indent="0">
               <a:buNone/>
-              <a:defRPr sz="1600" b="1"/>
+              <a:defRPr lang="en-us" sz="1600" b="1" cap="none"/>
             </a:lvl7pPr>
             <a:lvl8pPr marL="3200400" indent="0">
               <a:buNone/>
-              <a:defRPr sz="1600" b="1"/>
+              <a:defRPr lang="en-us" sz="1600" b="1" cap="none"/>
             </a:lvl8pPr>
             <a:lvl9pPr marL="3657600" indent="0">
               <a:buNone/>
-              <a:defRPr sz="1600" b="1"/>
+              <a:defRPr lang="en-us" sz="1600" b="1" cap="none"/>
             </a:lvl9pPr>
           </a:lstStyle>
           <a:p>
-            <a:pPr lvl="0"/>
-            <a:r>
-              <a:rPr lang="en-US" smtClean="0"/>
+            <a:pPr>
+              <a:defRPr lang="en-us"/>
+            </a:pPr>
+            <a:r>
               <a:t>Click to edit Master text styles</a:t>
             </a:r>
           </a:p>
@@ -1547,56 +1920,65 @@
         <p:nvSpPr>
           <p:cNvPr id="6" name="Content Placeholder 5"/>
           <p:cNvSpPr>
-            <a:spLocks noGrp="1"/>
-          </p:cNvSpPr>
-          <p:nvPr>
-            <p:ph sz="quarter" idx="4"/>
+            <a:spLocks noGrp="1" noChangeArrowheads="1"/>
+            <a:extLst>
+              <a:ext uri="smNativeData">
+                <pr:smNativeData xmlns:pr="smNativeData" xmlns="smNativeData" val="SMDATA_15_FLquaRMAAAAlAAAAZAAAAA0AAAAAkAAAAEgAAACQAAAASAAAAAAAAAAAAAAAAAAAAAEAAABQAAAAAAAAAAAA4D8AAAAAAADgPwAAAAAAAOA/AAAAAAAA4D8AAAAAAADgPwAAAAAAAOA/AAAAAAAA4D8AAAAAAADgPwAAAAAAAOA/AAAAAAAA4D8CAAAAjAAAAAAAAAAAAAAAW5vVDP///wgAAAAAAAAAAAAAAAAAAAAAAAAAAAAAAAAAAAAAZAAAAAEAAABAAAAAAAAAAAAAAAAAAAAAAAAAAAAAAAAAAAAAAAAAAAAAAAAAAAAAAAAAAAAAAAAAAAAAAAAAAAAAAAAAAAAAAAAAAAAAAAAAAAAAAAAAAAAAAAAAAAAAFAAAADwAAAAAAAAAAAAAAAAAAAkUAAAAAQAAABQAAAAUAAAAFAAAAAEAAAAAAAAAZAAAAGQAAAAAAAAAZAAAAGQAAAAVAAAAYAAAAAAAAAAAAAAADwAAACADAAAAAAAAAAAAAAEAAACgMgAAVgcAAKr4//8BAAAAf39/AAEAAABkAAAAAAAAABQAAABAHwAAAAAAACYAAAAAAAAAwOD//wAAAAAmAAAAZAAAABYAAABMAAAAAAAAAAAAAAAEAAAAAAAAAAEAAADn5uYKAAAAACgAAAAoAAAAZAAAAGQAAAAAAAAAzMzMAAAAAABQAAAAUAAAAGQAAABkAAAAAAAAABcAAAAUAAAAAAAAAAAAAAD/fwAA/38AAAAAAAAJAAAABAAAAPL1+v8eAAAAaAAAAAAAAAAAAAAAAAAAAAAAAAAAAAAAECcAABAnAAAAAAAAAAAAAAAAAAAAAAAAAAAAAAAAAAAAAAAAAAAAABQAAAAAAAAAwMD/AAAAAABkAAAAMgAAAAAAAABkAAAAAAAAAH9/fwAKAAAAIgAAABgAAAAAAAAAAAAAAAAAAAAAAAAAAAAAAAAAAAAkAAAAJAAAAAAAAAAHAAAAAAAAAAAAAAAAAAAAAAAAAAAAAAAAAAAAf39/ACUAAABYAAAAAAAAAAAAAAAAAAAAAAAAAAAAAAAAAAAAAAAAAAAAAAAAAAAAAAAAAAAAAAA/AAAAAAAAAKCGAQAAAAAAAAAAAAAAAAAMAAAAAQAAAAAAAAAAAAAAAAAAAB8AAABUAAAAAAAABQAAAAEAAAAAAAAAAAAAAAAAAAAAAAAAAAAAAAAAAAAAAAAAAAAAAAJ/f38AAAAAA8zMzADAwP8Af39/AAAAAAAAAAAAAAAAAAAAAAAAAAAAIQAAABgAAAAUAAAA+CUAAGkPAADbRQAAFCYAABAAAAAmAAAACAAAAAEAAAAAAAAA"/>
+              </a:ext>
+            </a:extLst>
+          </p:cNvSpPr>
+          <p:nvPr>
+            <p:ph idx="4"/>
           </p:nvPr>
         </p:nvSpPr>
         <p:spPr>
           <a:xfrm>
             <a:off x="6172200" y="2505075"/>
-            <a:ext cx="5183188" cy="3684588"/>
+            <a:ext cx="5183505" cy="3684905"/>
           </a:xfrm>
         </p:spPr>
         <p:txBody>
           <a:bodyPr/>
           <a:lstStyle/>
           <a:p>
-            <a:pPr lvl="0"/>
-            <a:r>
-              <a:rPr lang="en-US" smtClean="0"/>
+            <a:pPr>
+              <a:defRPr lang="en-us"/>
+            </a:pPr>
+            <a:r>
               <a:t>Click to edit Master text styles</a:t>
             </a:r>
           </a:p>
           <a:p>
-            <a:pPr lvl="1"/>
-            <a:r>
-              <a:rPr lang="en-US" smtClean="0"/>
+            <a:pPr lvl="1">
+              <a:defRPr lang="en-us"/>
+            </a:pPr>
+            <a:r>
               <a:t>Second level</a:t>
             </a:r>
           </a:p>
           <a:p>
-            <a:pPr lvl="2"/>
-            <a:r>
-              <a:rPr lang="en-US" smtClean="0"/>
+            <a:pPr lvl="2">
+              <a:defRPr lang="en-us"/>
+            </a:pPr>
+            <a:r>
               <a:t>Third level</a:t>
             </a:r>
           </a:p>
           <a:p>
-            <a:pPr lvl="3"/>
-            <a:r>
-              <a:rPr lang="en-US" smtClean="0"/>
+            <a:pPr lvl="3">
+              <a:defRPr lang="en-us"/>
+            </a:pPr>
+            <a:r>
               <a:t>Fourth level</a:t>
             </a:r>
           </a:p>
           <a:p>
-            <a:pPr lvl="4"/>
-            <a:r>
-              <a:rPr lang="en-US" smtClean="0"/>
+            <a:pPr lvl="4">
+              <a:defRPr lang="en-us"/>
+            </a:pPr>
+            <a:r>
               <a:t>Fifth level</a:t>
             </a:r>
-            <a:endParaRPr lang="en-US"/>
           </a:p>
         </p:txBody>
       </p:sp>
@@ -1604,7 +1986,12 @@
         <p:nvSpPr>
           <p:cNvPr id="7" name="Date Placeholder 6"/>
           <p:cNvSpPr>
-            <a:spLocks noGrp="1"/>
+            <a:spLocks noGrp="1" noChangeArrowheads="1"/>
+            <a:extLst>
+              <a:ext uri="smNativeData">
+                <pr:smNativeData xmlns:pr="smNativeData" xmlns="smNativeData" val="SMDATA_15_FLquaRMAAAAlAAAAZAAAAA0AAAAAkAAAAEgAAACQAAAASAAAAAAAAAABAAAAAAAAAAEAAABQAAAAAAAAAAAA4D8AAAAAAADgPwAAAAAAAOA/AAAAAAAA4D8AAAAAAADgPwAAAAAAAOA/AAAAAAAA4D8AAAAAAADgPwAAAAAAAOA/AAAAAAAA4D8CAAAAjAAAAAAAAAAAAAAAW5vVDP///wgAAAAAAAAAAAAAAAAAAAAAAAAAAAAAAAAAAAAAZAAAAAEAAABAAAAAAAAAAAAAAAAAAAAAAAAAAAAAAAAAAAAAAAAAAAAAAAAAAAAAAAAAAAAAAAAAAAAAAAAAAAAAAAAAAAAAAAAAAAAAAAAAAAAAAAAAAAAAAAAAAAAAFAAAADwAAAAAAAAAAAAAAAAAAAkUAAAAAQAAABQAAAAUAAAAFAAAAAEAAAAAAAAAZAAAAGQAAAAAAAAAZAAAAGQAAAAVAAAAYAAAAAAAAAAAAAAADwAAACADAAAAAAAAAAAAAAEAAACgMgAAVgcAAKr4//8BAAAAf39/AAEAAABkAAAAAAAAABQAAABAHwAAAAAAACYAAAAAAAAAwOD//wAAAAAmAAAAZAAAABYAAABMAAAAAAAAAAAAAAAEAAAAAAAAAAEAAADn5uYKAAAAACgAAAAoAAAAZAAAAGQAAAAAAAAAzMzMAAAAAABQAAAAUAAAAGQAAABkAAAAAAAAABcAAAAUAAAAAAAAAAAAAAD/fwAA/38AAAAAAAAJAAAABAAAAOrv9v8eAAAAaAAAAAAAAAAAAAAAAAAAAAAAAAAAAAAAECcAABAnAAAAAAAAAAAAAAAAAAAAAAAAAAAAAAAAAAAAAAAAAAAAABQAAAAAAAAAwMD/AAAAAABkAAAAMgAAAAAAAABkAAAAAAAAAH9/fwAKAAAAIgAAABgAAAAAAAAAAAAAAAAAAAAAAAAAAAAAAAAAAAAkAAAAJAAAAAAAAAAHAAAAAAAAAAAAAAAAAAAAAAAAAAAAAAAAAAAAf39/ACUAAABYAAAAAAAAAAAAAAAAAAAAAAAAAAAAAAAAAAAAAAAAAAAAAAAAAAAAAAAAAAAAAAA/AAAAAAAAAKCGAQAAAAAAAAAAAAAAAAAMAAAAAQAAAAAAAAAAAAAAAAAAAB8AAABUAAAAAAAABQAAAAEAAAAAAAAAAAAAAAAAAAAAAAAAAAAAAAAAAAAAAAAAAAAAAAJ/f38AAAAAA8zMzADAwP8Af39/AAAAAAAAAAAAAAAAAAAAAAAAAAAAIQAAABgAAAAUAAAAKAUAABonAAAIFgAAWSkAABAAAAAmAAAACAAAAAAAAAAAAAAA"/>
+              </a:ext>
+            </a:extLst>
           </p:cNvSpPr>
           <p:nvPr>
             <p:ph type="dt" sz="half" idx="10"/>
@@ -1615,11 +2002,12 @@
           <a:bodyPr/>
           <a:lstStyle/>
           <a:p>
-            <a:fld id="{77AD5A0D-32F9-42A2-946C-433A90366567}" type="datetimeFigureOut">
-              <a:rPr lang="en-US" smtClean="0"/>
-              <a:t>6/13/2025</a:t>
+            <a:pPr>
+              <a:defRPr lang="en-us"/>
+            </a:pPr>
+            <a:fld id="{30AED2C2-8CDD-FB24-9316-7A719C58652F}" type="datetime1">
+              <a:t>3/4/2026</a:t>
             </a:fld>
-            <a:endParaRPr lang="en-US"/>
           </a:p>
         </p:txBody>
       </p:sp>
@@ -1627,7 +2015,12 @@
         <p:nvSpPr>
           <p:cNvPr id="8" name="Footer Placeholder 7"/>
           <p:cNvSpPr>
-            <a:spLocks noGrp="1"/>
+            <a:spLocks noGrp="1" noChangeArrowheads="1"/>
+            <a:extLst>
+              <a:ext uri="smNativeData">
+                <pr:smNativeData xmlns:pr="smNativeData" xmlns="smNativeData" val="SMDATA_15_FLquaRMAAAAlAAAAZAAAAA0AAAAAkAAAAEgAAACQAAAASAAAAAAAAAABAAAAAAAAAAEAAABQAAAAAAAAAAAA4D8AAAAAAADgPwAAAAAAAOA/AAAAAAAA4D8AAAAAAADgPwAAAAAAAOA/AAAAAAAA4D8AAAAAAADgPwAAAAAAAOA/AAAAAAAA4D8CAAAAjAAAAAAAAAAAAAAAW5vVDP///wgAAAAAAAAAAAAAAAAAAAAAAAAAAAAAAAAAAAAAZAAAAAEAAABAAAAAAAAAAAAAAAAAAAAAAAAAAAAAAAAAAAAAAAAAAAAAAAAAAAAAAAAAAAAAAAAAAAAAAAAAAAAAAAAAAAAAAAAAAAAAAAAAAAAAAAAAAAAAAAAAAAAAFAAAADwAAAAAAAAAAAAAAAAAAAkUAAAAAQAAABQAAAAUAAAAFAAAAAEAAAAAAAAAZAAAAGQAAAAAAAAAZAAAAGQAAAAVAAAAYAAAAAAAAAAAAAAADwAAACADAAAAAAAAAAAAAAEAAACgMgAAVgcAAKr4//8BAAAAf39/AAEAAABkAAAAAAAAABQAAABAHwAAAAAAACYAAAAAAAAAwOD//wAAAAAmAAAAZAAAABYAAABMAAAAAAAAAAAAAAAEAAAAAAAAAAEAAADn5uYKAAAAACgAAAAoAAAAZAAAAGQAAAAAAAAAzMzMAAAAAABQAAAAUAAAAGQAAABkAAAAAAAAABcAAAAUAAAAAAAAAAAAAAD/fwAA/38AAAAAAAAJAAAABAAAAOrv9v8eAAAAaAAAAAAAAAAAAAAAAAAAAAAAAAAAAAAAECcAABAnAAAAAAAAAAAAAAAAAAAAAAAAAAAAAAAAAAAAAAAAAAAAABQAAAAAAAAAwMD/AAAAAABkAAAAMgAAAAAAAABkAAAAAAAAAH9/fwAKAAAAIgAAABgAAAAAAAAAAAAAAAAAAAAAAAAAAAAAAAAAAAAkAAAAJAAAAAAAAAAHAAAAAAAAAAAAAAAAAAAAAAAAAAAAAAAAAAAAf39/ACUAAABYAAAAAAAAAAAAAAAAAAAAAAAAAAAAAAAAAAAAAAAAAAAAAAAAAAAAAAAAAAAAAAA/AAAAAAAAAKCGAQAAAAAAAAAAAAAAAAAMAAAAAQAAAAAAAAAAAAAAAAAAAB8AAABUAAAAAAAABQAAAAEAAAAAAAAAAAAAAAAAAAAAAAAAAAAAAAAAAAAAAAAAAAAAAAJ/f38AAAAAA8zMzADAwP8Af39/AAAAAAAAAAAAAAAAAAAAAAAAAAAAIQAAABgAAAAUAAAA2BgAABonAAAoMgAAWSkAABAAAAAmAAAACAAAAAAAAAAAAAAA"/>
+              </a:ext>
+            </a:extLst>
           </p:cNvSpPr>
           <p:nvPr>
             <p:ph type="ftr" sz="quarter" idx="11"/>
@@ -1638,7 +2031,9 @@
           <a:bodyPr/>
           <a:lstStyle/>
           <a:p>
-            <a:endParaRPr lang="en-US"/>
+            <a:pPr>
+              <a:defRPr lang="en-us"/>
+            </a:pPr>
           </a:p>
         </p:txBody>
       </p:sp>
@@ -1646,7 +2041,12 @@
         <p:nvSpPr>
           <p:cNvPr id="9" name="Slide Number Placeholder 8"/>
           <p:cNvSpPr>
-            <a:spLocks noGrp="1"/>
+            <a:spLocks noGrp="1" noChangeArrowheads="1"/>
+            <a:extLst>
+              <a:ext uri="smNativeData">
+                <pr:smNativeData xmlns:pr="smNativeData" xmlns="smNativeData" val="SMDATA_15_FLquaRMAAAAlAAAAZAAAAA0AAAAAkAAAAEgAAACQAAAASAAAAAAAAAABAAAAAAAAAAEAAABQAAAAAAAAAAAA4D8AAAAAAADgPwAAAAAAAOA/AAAAAAAA4D8AAAAAAADgPwAAAAAAAOA/AAAAAAAA4D8AAAAAAADgPwAAAAAAAOA/AAAAAAAA4D8CAAAAjAAAAAAAAAAAAAAAW5vVDP///wgAAAAAAAAAAAAAAAAAAAAAAAAAAAAAAAAAAAAAZAAAAAEAAABAAAAAAAAAAAAAAAAAAAAAAAAAAAAAAAAAAAAAAAAAAAAAAAAAAAAAAAAAAAAAAAAAAAAAAAAAAAAAAAAAAAAAAAAAAAAAAAAAAAAAAAAAAAAAAAAAAAAAFAAAADwAAAAAAAAAAAAAAAAAAAkUAAAAAQAAABQAAAAUAAAAFAAAAAEAAAAAAAAAZAAAAGQAAAAAAAAAZAAAAGQAAAAVAAAAYAAAAAAAAAAAAAAADwAAACADAAAAAAAAAAAAAAEAAACgMgAAVgcAAKr4//8BAAAAf39/AAEAAABkAAAAAAAAABQAAABAHwAAAAAAACYAAAAAAAAAwOD//wAAAAAmAAAAZAAAABYAAABMAAAAAAAAAAAAAAAEAAAAAAAAAAEAAADn5uYKAAAAACgAAAAoAAAAZAAAAGQAAAAAAAAAzMzMAAAAAABQAAAAUAAAAGQAAABkAAAAAAAAABcAAAAUAAAAAAAAAAAAAAD/fwAA/38AAAAAAAAJAAAABAAAAPL1+v8eAAAAaAAAAAAAAAAAAAAAAAAAAAAAAAAAAAAAECcAABAnAAAAAAAAAAAAAAAAAAAAAAAAAAAAAAAAAAAAAAAAAAAAABQAAAAAAAAAwMD/AAAAAABkAAAAMgAAAAAAAABkAAAAAAAAAH9/fwAKAAAAIgAAABgAAAAAAAAAAAAAAAAAAAAAAAAAAAAAAAAAAAAkAAAAJAAAAAAAAAAHAAAAAAAAAAAAAAAAAAAAAAAAAAAAAAAAAAAAf39/ACUAAABYAAAAAAAAAAAAAAAAAAAAAAAAAAAAAAAAAAAAAAAAAAAAAAAAAAAAAAAAAAAAAAA/AAAAAAAAAKCGAQAAAAAAAAAAAAAAAAAMAAAAAQAAAAAAAAAAAAAAAAAAAB8AAABUAAAAAAAABQAAAAEAAAAAAAAAAAAAAAAAAAAAAAAAAAAAAAAAAAAAAAAAAAAAAAJ/f38AAAAAA8zMzADAwP8Af39/AAAAAAAAAAAAAAAAAAAAAAAAAAAAIQAAABgAAAAUAAAA+DQAABonAADYRQAAWSkAABAAAAAmAAAACAAAAAAAAAAAAAAA"/>
+              </a:ext>
+            </a:extLst>
           </p:cNvSpPr>
           <p:nvPr>
             <p:ph type="sldNum" sz="quarter" idx="12"/>
@@ -1657,29 +2057,26 @@
           <a:bodyPr/>
           <a:lstStyle/>
           <a:p>
-            <a:fld id="{2AF8EFAC-D507-4007-9634-FDE202E639CC}" type="slidenum">
-              <a:rPr lang="en-US" smtClean="0"/>
+            <a:pPr>
+              <a:defRPr lang="en-us"/>
+            </a:pPr>
+            <a:fld id="{30AEABA2-ECDD-FB5D-9316-1A08E558654F}" type="slidenum">
               <a:t>‹#›</a:t>
             </a:fld>
-            <a:endParaRPr lang="en-US"/>
           </a:p>
         </p:txBody>
       </p:sp>
     </p:spTree>
-    <p:extLst>
-      <p:ext uri="{BB962C8B-B14F-4D97-AF65-F5344CB8AC3E}">
-        <p14:creationId xmlns:p14="http://schemas.microsoft.com/office/powerpoint/2010/main" val="3982295903"/>
-      </p:ext>
-    </p:extLst>
   </p:cSld>
   <p:clrMapOvr>
     <a:masterClrMapping/>
   </p:clrMapOvr>
+  <p:hf hdr="0" ftr="0"/>
 </p:sldLayout>
 </file>
 
 <file path=ppt/slideLayouts/slideLayout6.xml><?xml version="1.0" encoding="utf-8"?>
-<p:sldLayout xmlns:a="http://schemas.openxmlformats.org/drawingml/2006/main" xmlns:r="http://schemas.openxmlformats.org/officeDocument/2006/relationships" xmlns:p="http://schemas.openxmlformats.org/presentationml/2006/main" type="titleOnly" preserve="1">
+<p:sldLayout xmlns:p="http://schemas.openxmlformats.org/presentationml/2006/main" xmlns:mc="http://schemas.openxmlformats.org/markup-compatibility/2006" xmlns:p14="http://schemas.microsoft.com/office/powerpoint/2010/main" xmlns:p15="http://schemas.microsoft.com/office/powerpoint/2012/main" xmlns:r="http://schemas.openxmlformats.org/officeDocument/2006/relationships" xmlns:a="http://schemas.openxmlformats.org/drawingml/2006/main" type="titleOnly" preserve="1">
   <p:cSld name="Title Only">
     <p:spTree>
       <p:nvGrpSpPr>
@@ -1699,7 +2096,12 @@
         <p:nvSpPr>
           <p:cNvPr id="2" name="Title 1"/>
           <p:cNvSpPr>
-            <a:spLocks noGrp="1"/>
+            <a:spLocks noGrp="1" noChangeArrowheads="1"/>
+            <a:extLst>
+              <a:ext uri="smNativeData">
+                <pr:smNativeData xmlns:pr="smNativeData" xmlns="smNativeData" val="SMDATA_15_FLquaRMAAAAlAAAAZAAAAA0AAAAAkAAAAEgAAACQAAAASAAAAAAAAAABAAAAAAAAAAEAAABQAAAAAAAAAAAA4D8AAAAAAADgPwAAAAAAAOA/AAAAAAAA4D8AAAAAAADgPwAAAAAAAOA/AAAAAAAA4D8AAAAAAADgPwAAAAAAAOA/AAAAAAAA4D8CAAAAjAAAAAAAAAAAAAAAW5vVDP///wgAAAAAAAAAAAAAAAAAAAAAAAAAAAAAAAAAAAAAZAAAAAEAAABAAAAAAAAAAAAAAAAAAAAAAAAAAAAAAAAAAAAAAAAAAAAAAAAAAAAAAAAAAAAAAAAAAAAAAAAAAAAAAAAAAAAAAAAAAAAAAAAAAAAAAAAAAAAAAAAAAAAAFAAAADwAAAAAAAAAAAAAAAAAAAkUAAAAAQAAABQAAAAUAAAAFAAAAAEAAAAAAAAAZAAAAGQAAAAAAAAAZAAAAGQAAAAVAAAAYAAAAAAAAAAAAAAADwAAACADAAAAAAAAAAAAAAEAAACgMgAAVgcAAKr4//8BAAAAf39/AAEAAABkAAAAAAAAABQAAABAHwAAAAAAACYAAAAAAAAAwOD//wAAAAAmAAAAZAAAABYAAABMAAAAAAAAAAAAAAAEAAAAAAAAAAEAAADn5uYKAAAAACgAAAAoAAAAZAAAAGQAAAAAAAAAzMzMAAAAAABQAAAAUAAAAGQAAABkAAAAAAAAABcAAAAUAAAAAAAAAAAAAAD/fwAA/38AAAAAAAAJAAAABAAAAAAAAAAeAAAAaAAAAAAAAAAAAAAAAAAAAAAAAAAAAAAAECcAABAnAAAAAAAAAAAAAAAAAAAAAAAAAAAAAAAAAAAAAAAAAAAAABQAAAAAAAAAwMD/AAAAAABkAAAAMgAAAAAAAABkAAAAAAAAAH9/fwAKAAAAIgAAABgAAAAAAAAAAAAAAAAAAAAAAAAAAAAAAAAAAAAkAAAAJAAAAAAAAAAHAAAAAAAAAAAAAAAAAAAAAAAAAAAAAAAAAAAAf39/ACUAAABYAAAAAAAAAAAAAAAAAAAAAAAAAAAAAAAAAAAAAAAAAAAAAAAAAAAAAAAAAAAAAAA/AAAAAAAAAKCGAQAAAAAAAAAAAAAAAAAMAAAAAQAAAAAAAAAAAAAAAAAAAB8AAABUAAAAAAAABQAAAAEAAAAAAAAAAAAAAAAAAAAAAAAAAAAAAAAAAAAAAAAAAAAAAAJ/f38AAAAAA8zMzADAwP8Af39/AAAAAAAAAAAAAAAAAAAAAAAAAAAAIQAAABgAAAAUAAAAKAUAAD8CAADYRQAAZwoAABAAAAAmAAAACAAAAAAAAAAAAAAA"/>
+              </a:ext>
+            </a:extLst>
           </p:cNvSpPr>
           <p:nvPr>
             <p:ph type="title"/>
@@ -1710,11 +2112,12 @@
           <a:bodyPr/>
           <a:lstStyle/>
           <a:p>
-            <a:r>
-              <a:rPr lang="en-US" smtClean="0"/>
+            <a:pPr>
+              <a:defRPr lang="en-us"/>
+            </a:pPr>
+            <a:r>
               <a:t>Click to edit Master title style</a:t>
             </a:r>
-            <a:endParaRPr lang="en-US"/>
           </a:p>
         </p:txBody>
       </p:sp>
@@ -1722,7 +2125,12 @@
         <p:nvSpPr>
           <p:cNvPr id="3" name="Date Placeholder 2"/>
           <p:cNvSpPr>
-            <a:spLocks noGrp="1"/>
+            <a:spLocks noGrp="1" noChangeArrowheads="1"/>
+            <a:extLst>
+              <a:ext uri="smNativeData">
+                <pr:smNativeData xmlns:pr="smNativeData" xmlns="smNativeData" val="SMDATA_15_FLquaRMAAAAlAAAAZAAAAA0AAAAAkAAAAEgAAACQAAAASAAAAAAAAAABAAAAAAAAAAEAAABQAAAAAAAAAAAA4D8AAAAAAADgPwAAAAAAAOA/AAAAAAAA4D8AAAAAAADgPwAAAAAAAOA/AAAAAAAA4D8AAAAAAADgPwAAAAAAAOA/AAAAAAAA4D8CAAAAjAAAAAAAAAAAAAAAW5vVDP///wgAAAAAAAAAAAAAAAAAAAAAAAAAAAAAAAAAAAAAZAAAAAEAAABAAAAAAAAAAAAAAAAAAAAAAAAAAAAAAAAAAAAAAAAAAAAAAAAAAAAAAAAAAAAAAAAAAAAAAAAAAAAAAAAAAAAAAAAAAAAAAAAAAAAAAAAAAAAAAAAAAAAAFAAAADwAAAAAAAAAAAAAAAAAAAkUAAAAAQAAABQAAAAUAAAAFAAAAAEAAAAAAAAAZAAAAGQAAAAAAAAAZAAAAGQAAAAVAAAAYAAAAAAAAAAAAAAADwAAACADAAAAAAAAAAAAAAEAAACgMgAAVgcAAKr4//8BAAAAf39/AAEAAABkAAAAAAAAABQAAABAHwAAAAAAACYAAAAAAAAAwOD//wAAAAAmAAAAZAAAABYAAABMAAAAAAAAAAAAAAAEAAAAAAAAAAEAAADn5uYKAAAAACgAAAAoAAAAZAAAAGQAAAAAAAAAzMzMAAAAAABQAAAAUAAAAGQAAABkAAAAAAAAABcAAAAUAAAAAAAAAAAAAAD/fwAA/38AAAAAAAAJAAAABAAAAAAAAAAeAAAAaAAAAAAAAAAAAAAAAAAAAAAAAAAAAAAAECcAABAnAAAAAAAAAAAAAAAAAAAAAAAAAAAAAAAAAAAAAAAAAAAAABQAAAAAAAAAwMD/AAAAAABkAAAAMgAAAAAAAABkAAAAAAAAAH9/fwAKAAAAIgAAABgAAAAAAAAAAAAAAAAAAAAAAAAAAAAAAAAAAAAkAAAAJAAAAAAAAAAHAAAAAAAAAAAAAAAAAAAAAAAAAAAAAAAAAAAAf39/ACUAAABYAAAAAAAAAAAAAAAAAAAAAAAAAAAAAAAAAAAAAAAAAAAAAAAAAAAAAAAAAAAAAAA/AAAAAAAAAKCGAQAAAAAAAAAAAAAAAAAMAAAAAQAAAAAAAAAAAAAAAAAAAB8AAABUAAAAAAAABQAAAAEAAAAAAAAAAAAAAAAAAAAAAAAAAAAAAAAAAAAAAAAAAAAAAAJ/f38AAAAAA8zMzADAwP8Af39/AAAAAAAAAAAAAAAAAAAAAAAAAAAAIQAAABgAAAAUAAAAKAUAABonAAAIFgAAWSkAABAAAAAmAAAACAAAAAAAAAAAAAAA"/>
+              </a:ext>
+            </a:extLst>
           </p:cNvSpPr>
           <p:nvPr>
             <p:ph type="dt" sz="half" idx="10"/>
@@ -1733,11 +2141,12 @@
           <a:bodyPr/>
           <a:lstStyle/>
           <a:p>
-            <a:fld id="{77AD5A0D-32F9-42A2-946C-433A90366567}" type="datetimeFigureOut">
-              <a:rPr lang="en-US" smtClean="0"/>
-              <a:t>6/13/2025</a:t>
+            <a:pPr>
+              <a:defRPr lang="en-us"/>
+            </a:pPr>
+            <a:fld id="{30AEA598-D6DD-FB53-9316-2006EB586575}" type="datetime1">
+              <a:t>3/4/2026</a:t>
             </a:fld>
-            <a:endParaRPr lang="en-US"/>
           </a:p>
         </p:txBody>
       </p:sp>
@@ -1745,7 +2154,12 @@
         <p:nvSpPr>
           <p:cNvPr id="4" name="Footer Placeholder 3"/>
           <p:cNvSpPr>
-            <a:spLocks noGrp="1"/>
+            <a:spLocks noGrp="1" noChangeArrowheads="1"/>
+            <a:extLst>
+              <a:ext uri="smNativeData">
+                <pr:smNativeData xmlns:pr="smNativeData" xmlns="smNativeData" val="SMDATA_15_FLquaRMAAAAlAAAAZAAAAA0AAAAAkAAAAEgAAACQAAAASAAAAAAAAAABAAAAAAAAAAEAAABQAAAAAAAAAAAA4D8AAAAAAADgPwAAAAAAAOA/AAAAAAAA4D8AAAAAAADgPwAAAAAAAOA/AAAAAAAA4D8AAAAAAADgPwAAAAAAAOA/AAAAAAAA4D8CAAAAjAAAAAAAAAAAAAAAW5vVDP///wgAAAAAAAAAAAAAAAAAAAAAAAAAAAAAAAAAAAAAZAAAAAEAAABAAAAAAAAAAAAAAAAAAAAAAAAAAAAAAAAAAAAAAAAAAAAAAAAAAAAAAAAAAAAAAAAAAAAAAAAAAAAAAAAAAAAAAAAAAAAAAAAAAAAAAAAAAAAAAAAAAAAAFAAAADwAAAAAAAAAAAAAAAAAAAkUAAAAAQAAABQAAAAUAAAAFAAAAAEAAAAAAAAAZAAAAGQAAAAAAAAAZAAAAGQAAAAVAAAAYAAAAAAAAAAAAAAADwAAACADAAAAAAAAAAAAAAEAAACgMgAAVgcAAKr4//8BAAAAf39/AAEAAABkAAAAAAAAABQAAABAHwAAAAAAACYAAAAAAAAAwOD//wAAAAAmAAAAZAAAABYAAABMAAAAAAAAAAAAAAAEAAAAAAAAAAEAAADn5uYKAAAAACgAAAAoAAAAZAAAAGQAAAAAAAAAzMzMAAAAAABQAAAAUAAAAGQAAABkAAAAAAAAABcAAAAUAAAAAAAAAAAAAAD/fwAA/38AAAAAAAAJAAAABAAAAPL1+v8eAAAAaAAAAAAAAAAAAAAAAAAAAAAAAAAAAAAAECcAABAnAAAAAAAAAAAAAAAAAAAAAAAAAAAAAAAAAAAAAAAAAAAAABQAAAAAAAAAwMD/AAAAAABkAAAAMgAAAAAAAABkAAAAAAAAAH9/fwAKAAAAIgAAABgAAAAAAAAAAAAAAAAAAAAAAAAAAAAAAAAAAAAkAAAAJAAAAAAAAAAHAAAAAAAAAAAAAAAAAAAAAAAAAAAAAAAAAAAAf39/ACUAAABYAAAAAAAAAAAAAAAAAAAAAAAAAAAAAAAAAAAAAAAAAAAAAAAAAAAAAAAAAAAAAAA/AAAAAAAAAKCGAQAAAAAAAAAAAAAAAAAMAAAAAQAAAAAAAAAAAAAAAAAAAB8AAABUAAAAAAAABQAAAAEAAAAAAAAAAAAAAAAAAAAAAAAAAAAAAAAAAAAAAAAAAAAAAAJ/f38AAAAAA8zMzADAwP8Af39/AAAAAAAAAAAAAAAAAAAAAAAAAAAAIQAAABgAAAAUAAAA2BgAABonAAAoMgAAWSkAABAAAAAmAAAACAAAAAAAAAAAAAAA"/>
+              </a:ext>
+            </a:extLst>
           </p:cNvSpPr>
           <p:nvPr>
             <p:ph type="ftr" sz="quarter" idx="11"/>
@@ -1756,7 +2170,9 @@
           <a:bodyPr/>
           <a:lstStyle/>
           <a:p>
-            <a:endParaRPr lang="en-US"/>
+            <a:pPr>
+              <a:defRPr lang="en-us"/>
+            </a:pPr>
           </a:p>
         </p:txBody>
       </p:sp>
@@ -1764,7 +2180,12 @@
         <p:nvSpPr>
           <p:cNvPr id="5" name="Slide Number Placeholder 4"/>
           <p:cNvSpPr>
-            <a:spLocks noGrp="1"/>
+            <a:spLocks noGrp="1" noChangeArrowheads="1"/>
+            <a:extLst>
+              <a:ext uri="smNativeData">
+                <pr:smNativeData xmlns:pr="smNativeData" xmlns="smNativeData" val="SMDATA_15_FLquaRMAAAAlAAAAZAAAAA0AAAAAkAAAAEgAAACQAAAASAAAAAAAAAABAAAAAAAAAAEAAABQAAAAAAAAAAAA4D8AAAAAAADgPwAAAAAAAOA/AAAAAAAA4D8AAAAAAADgPwAAAAAAAOA/AAAAAAAA4D8AAAAAAADgPwAAAAAAAOA/AAAAAAAA4D8CAAAAjAAAAAAAAAAAAAAAW5vVDP///wgAAAAAAAAAAAAAAAAAAAAAAAAAAAAAAAAAAAAAZAAAAAEAAABAAAAAAAAAAAAAAAAAAAAAAAAAAAAAAAAAAAAAAAAAAAAAAAAAAAAAAAAAAAAAAAAAAAAAAAAAAAAAAAAAAAAAAAAAAAAAAAAAAAAAAAAAAAAAAAAAAAAAFAAAADwAAAAAAAAAAAAAAAAAAAkUAAAAAQAAABQAAAAUAAAAFAAAAAEAAAAAAAAAZAAAAGQAAAAAAAAAZAAAAGQAAAAVAAAAYAAAAAAAAAAAAAAADwAAACADAAAAAAAAAAAAAAEAAACgMgAAVgcAAKr4//8BAAAAf39/AAEAAABkAAAAAAAAABQAAABAHwAAAAAAACYAAAAAAAAAwOD//wAAAAAmAAAAZAAAABYAAABMAAAAAAAAAAAAAAAEAAAAAAAAAAEAAADn5uYKAAAAACgAAAAoAAAAZAAAAGQAAAAAAAAAzMzMAAAAAABQAAAAUAAAAGQAAABkAAAAAAAAABcAAAAUAAAAAAAAAAAAAAD/fwAA/38AAAAAAAAJAAAABAAAAJ/J8f8eAAAAaAAAAAAAAAAAAAAAAAAAAAAAAAAAAAAAECcAABAnAAAAAAAAAAAAAAAAAAAAAAAAAAAAAAAAAAAAAAAAAAAAABQAAAAAAAAAwMD/AAAAAABkAAAAMgAAAAAAAABkAAAAAAAAAH9/fwAKAAAAIgAAABgAAAAAAAAAAAAAAAAAAAAAAAAAAAAAAAAAAAAkAAAAJAAAAAAAAAAHAAAAAAAAAAAAAAAAAAAAAAAAAAAAAAAAAAAAf39/ACUAAABYAAAAAAAAAAAAAAAAAAAAAAAAAAAAAAAAAAAAAAAAAAAAAAAAAAAAAAAAAAAAAAA/AAAAAAAAAKCGAQAAAAAAAAAAAAAAAAAMAAAAAQAAAAAAAAAAAAAAAAAAAB8AAABUAAAAAAAABQAAAAEAAAAAAAAAAAAAAAAAAAAAAAAAAAAAAAAAAAAAAAAAAAAAAAJ/f38AAAAAA8zMzADAwP8Af39/AAAAAAAAAAAAAAAAAAAAAAAAAAAAIQAAABgAAAAUAAAA+DQAABonAADYRQAAWSkAABAAAAAmAAAACAAAAAAAAAAAAAAA"/>
+              </a:ext>
+            </a:extLst>
           </p:cNvSpPr>
           <p:nvPr>
             <p:ph type="sldNum" sz="quarter" idx="12"/>
@@ -1775,29 +2196,26 @@
           <a:bodyPr/>
           <a:lstStyle/>
           <a:p>
-            <a:fld id="{2AF8EFAC-D507-4007-9634-FDE202E639CC}" type="slidenum">
-              <a:rPr lang="en-US" smtClean="0"/>
+            <a:pPr>
+              <a:defRPr lang="en-us"/>
+            </a:pPr>
+            <a:fld id="{30AE9EA6-E8DD-FB68-9316-1E3DD058654B}" type="slidenum">
               <a:t>‹#›</a:t>
             </a:fld>
-            <a:endParaRPr lang="en-US"/>
           </a:p>
         </p:txBody>
       </p:sp>
     </p:spTree>
-    <p:extLst>
-      <p:ext uri="{BB962C8B-B14F-4D97-AF65-F5344CB8AC3E}">
-        <p14:creationId xmlns:p14="http://schemas.microsoft.com/office/powerpoint/2010/main" val="4226124618"/>
-      </p:ext>
-    </p:extLst>
   </p:cSld>
   <p:clrMapOvr>
     <a:masterClrMapping/>
   </p:clrMapOvr>
+  <p:hf hdr="0" ftr="0"/>
 </p:sldLayout>
 </file>
 
 <file path=ppt/slideLayouts/slideLayout7.xml><?xml version="1.0" encoding="utf-8"?>
-<p:sldLayout xmlns:a="http://schemas.openxmlformats.org/drawingml/2006/main" xmlns:r="http://schemas.openxmlformats.org/officeDocument/2006/relationships" xmlns:p="http://schemas.openxmlformats.org/presentationml/2006/main" type="blank" preserve="1">
+<p:sldLayout xmlns:p="http://schemas.openxmlformats.org/presentationml/2006/main" xmlns:mc="http://schemas.openxmlformats.org/markup-compatibility/2006" xmlns:p14="http://schemas.microsoft.com/office/powerpoint/2010/main" xmlns:p15="http://schemas.microsoft.com/office/powerpoint/2012/main" xmlns:r="http://schemas.openxmlformats.org/officeDocument/2006/relationships" xmlns:a="http://schemas.openxmlformats.org/drawingml/2006/main" type="blank" preserve="1">
   <p:cSld name="Blank">
     <p:spTree>
       <p:nvGrpSpPr>
@@ -1817,7 +2235,12 @@
         <p:nvSpPr>
           <p:cNvPr id="2" name="Date Placeholder 1"/>
           <p:cNvSpPr>
-            <a:spLocks noGrp="1"/>
+            <a:spLocks noGrp="1" noChangeArrowheads="1"/>
+            <a:extLst>
+              <a:ext uri="smNativeData">
+                <pr:smNativeData xmlns:pr="smNativeData" xmlns="smNativeData" val="SMDATA_15_FLquaRMAAAAlAAAAZAAAAA0AAAAAkAAAAEgAAACQAAAASAAAAAAAAAABAAAAAAAAAAEAAABQAAAAAAAAAAAA4D8AAAAAAADgPwAAAAAAAOA/AAAAAAAA4D8AAAAAAADgPwAAAAAAAOA/AAAAAAAA4D8AAAAAAADgPwAAAAAAAOA/AAAAAAAA4D8CAAAAjAAAAAAAAAAAAAAAW5vVDP///wgAAAAAAAAAAAAAAAAAAAAAAAAAAAAAAAAAAAAAZAAAAAEAAABAAAAAAAAAAAAAAAAAAAAAAAAAAAAAAAAAAAAAAAAAAAAAAAAAAAAAAAAAAAAAAAAAAAAAAAAAAAAAAAAAAAAAAAAAAAAAAAAAAAAAAAAAAAAAAAAAAAAAFAAAADwAAAAAAAAAAAAAAAAAAAkUAAAAAQAAABQAAAAUAAAAFAAAAAEAAAAAAAAAZAAAAGQAAAAAAAAAZAAAAGQAAAAVAAAAYAAAAAAAAAAAAAAADwAAACADAAAAAAAAAAAAAAEAAACgMgAAVgcAAKr4//8BAAAAf39/AAEAAABkAAAAAAAAABQAAABAHwAAAAAAACYAAAAAAAAAwOD//wAAAAAmAAAAZAAAABYAAABMAAAAAAAAAAAAAAAEAAAAAAAAAAEAAADn5uYKAAAAACgAAAAoAAAAZAAAAGQAAAAAAAAAzMzMAAAAAABQAAAAUAAAAGQAAABkAAAAAAAAABcAAAAUAAAAAAAAAAAAAAD/fwAA/38AAAAAAAAJAAAABAAAAAAAAAAeAAAAaAAAAAAAAAAAAAAAAAAAAAAAAAAAAAAAECcAABAnAAAAAAAAAAAAAAAAAAAAAAAAAAAAAAAAAAAAAAAAAAAAABQAAAAAAAAAwMD/AAAAAABkAAAAMgAAAAAAAABkAAAAAAAAAH9/fwAKAAAAIgAAABgAAAAAAAAAAAAAAAAAAAAAAAAAAAAAAAAAAAAkAAAAJAAAAAAAAAAHAAAAAAAAAAAAAAAAAAAAAAAAAAAAAAAAAAAAf39/ACUAAABYAAAAAAAAAAAAAAAAAAAAAAAAAAAAAAAAAAAAAAAAAAAAAAAAAAAAAAAAAAAAAAA/AAAAAAAAAKCGAQAAAAAAAAAAAAAAAAAMAAAAAQAAAAAAAAAAAAAAAAAAAB8AAABUAAAAAAAABQAAAAEAAAAAAAAAAAAAAAAAAAAAAAAAAAAAAAAAAAAAAAAAAAAAAAJ/f38AAAAAA8zMzADAwP8Af39/AAAAAAAAAAAAAAAAAAAAAAAAAAAAIQAAABgAAAAUAAAAKAUAABonAAAIFgAAWSkAABAAAAAmAAAACAAAAAAAAAAAAAAA"/>
+              </a:ext>
+            </a:extLst>
           </p:cNvSpPr>
           <p:nvPr>
             <p:ph type="dt" sz="half" idx="10"/>
@@ -1828,11 +2251,12 @@
           <a:bodyPr/>
           <a:lstStyle/>
           <a:p>
-            <a:fld id="{77AD5A0D-32F9-42A2-946C-433A90366567}" type="datetimeFigureOut">
-              <a:rPr lang="en-US" smtClean="0"/>
-              <a:t>6/13/2025</a:t>
+            <a:pPr>
+              <a:defRPr lang="en-us"/>
+            </a:pPr>
+            <a:fld id="{30AEBC3F-71DD-FB4A-9316-871FF25865D2}" type="datetime1">
+              <a:t>3/4/2026</a:t>
             </a:fld>
-            <a:endParaRPr lang="en-US"/>
           </a:p>
         </p:txBody>
       </p:sp>
@@ -1840,7 +2264,12 @@
         <p:nvSpPr>
           <p:cNvPr id="3" name="Footer Placeholder 2"/>
           <p:cNvSpPr>
-            <a:spLocks noGrp="1"/>
+            <a:spLocks noGrp="1" noChangeArrowheads="1"/>
+            <a:extLst>
+              <a:ext uri="smNativeData">
+                <pr:smNativeData xmlns:pr="smNativeData" xmlns="smNativeData" val="SMDATA_15_FLquaRMAAAAlAAAAZAAAAA0AAAAAkAAAAEgAAACQAAAASAAAAAAAAAABAAAAAAAAAAEAAABQAAAAAAAAAAAA4D8AAAAAAADgPwAAAAAAAOA/AAAAAAAA4D8AAAAAAADgPwAAAAAAAOA/AAAAAAAA4D8AAAAAAADgPwAAAAAAAOA/AAAAAAAA4D8CAAAAjAAAAAAAAAAAAAAAW5vVDP///wgAAAAAAAAAAAAAAAAAAAAAAAAAAAAAAAAAAAAAZAAAAAEAAABAAAAAAAAAAAAAAAAAAAAAAAAAAAAAAAAAAAAAAAAAAAAAAAAAAAAAAAAAAAAAAAAAAAAAAAAAAAAAAAAAAAAAAAAAAAAAAAAAAAAAAAAAAAAAAAAAAAAAFAAAADwAAAAAAAAAAAAAAAAAAAkUAAAAAQAAABQAAAAUAAAAFAAAAAEAAAAAAAAAZAAAAGQAAAAAAAAAZAAAAGQAAAAVAAAAYAAAAAAAAAAAAAAADwAAACADAAAAAAAAAAAAAAEAAACgMgAAVgcAAKr4//8BAAAAf39/AAEAAABkAAAAAAAAABQAAABAHwAAAAAAACYAAAAAAAAAwOD//wAAAAAmAAAAZAAAABYAAABMAAAAAAAAAAAAAAAEAAAAAAAAAAEAAADn5uYKAAAAACgAAAAoAAAAZAAAAGQAAAAAAAAAzMzMAAAAAABQAAAAUAAAAGQAAABkAAAAAAAAABcAAAAUAAAAAAAAAAAAAAD/fwAA/38AAAAAAAAJAAAABAAAAJ/J8f8eAAAAaAAAAAAAAAAAAAAAAAAAAAAAAAAAAAAAECcAABAnAAAAAAAAAAAAAAAAAAAAAAAAAAAAAAAAAAAAAAAAAAAAABQAAAAAAAAAwMD/AAAAAABkAAAAMgAAAAAAAABkAAAAAAAAAH9/fwAKAAAAIgAAABgAAAAAAAAAAAAAAAAAAAAAAAAAAAAAAAAAAAAkAAAAJAAAAAAAAAAHAAAAAAAAAAAAAAAAAAAAAAAAAAAAAAAAAAAAf39/ACUAAABYAAAAAAAAAAAAAAAAAAAAAAAAAAAAAAAAAAAAAAAAAAAAAAAAAAAAAAAAAAAAAAA/AAAAAAAAAKCGAQAAAAAAAAAAAAAAAAAMAAAAAQAAAAAAAAAAAAAAAAAAAB8AAABUAAAAAAAABQAAAAEAAAAAAAAAAAAAAAAAAAAAAAAAAAAAAAAAAAAAAAAAAAAAAAJ/f38AAAAAA8zMzADAwP8Af39/AAAAAAAAAAAAAAAAAAAAAAAAAAAAIQAAABgAAAAUAAAA2BgAABonAAAoMgAAWSkAABAAAAAmAAAACAAAAAAAAAAAAAAA"/>
+              </a:ext>
+            </a:extLst>
           </p:cNvSpPr>
           <p:nvPr>
             <p:ph type="ftr" sz="quarter" idx="11"/>
@@ -1851,7 +2280,9 @@
           <a:bodyPr/>
           <a:lstStyle/>
           <a:p>
-            <a:endParaRPr lang="en-US"/>
+            <a:pPr>
+              <a:defRPr lang="en-us"/>
+            </a:pPr>
           </a:p>
         </p:txBody>
       </p:sp>
@@ -1859,7 +2290,12 @@
         <p:nvSpPr>
           <p:cNvPr id="4" name="Slide Number Placeholder 3"/>
           <p:cNvSpPr>
-            <a:spLocks noGrp="1"/>
+            <a:spLocks noGrp="1" noChangeArrowheads="1"/>
+            <a:extLst>
+              <a:ext uri="smNativeData">
+                <pr:smNativeData xmlns:pr="smNativeData" xmlns="smNativeData" val="SMDATA_15_FLquaRMAAAAlAAAAZAAAAA0AAAAAkAAAAEgAAACQAAAASAAAAAAAAAABAAAAAAAAAAEAAABQAAAAAAAAAAAA4D8AAAAAAADgPwAAAAAAAOA/AAAAAAAA4D8AAAAAAADgPwAAAAAAAOA/AAAAAAAA4D8AAAAAAADgPwAAAAAAAOA/AAAAAAAA4D8CAAAAjAAAAAAAAAAAAAAAW5vVDP///wgAAAAAAAAAAAAAAAAAAAAAAAAAAAAAAAAAAAAAZAAAAAEAAABAAAAAAAAAAAAAAAAAAAAAAAAAAAAAAAAAAAAAAAAAAAAAAAAAAAAAAAAAAAAAAAAAAAAAAAAAAAAAAAAAAAAAAAAAAAAAAAAAAAAAAAAAAAAAAAAAAAAAFAAAADwAAAAAAAAAAAAAAAAAAAkUAAAAAQAAABQAAAAUAAAAFAAAAAEAAAAAAAAAZAAAAGQAAAAAAAAAZAAAAGQAAAAVAAAAYAAAAAAAAAAAAAAADwAAACADAAAAAAAAAAAAAAEAAACgMgAAVgcAAKr4//8BAAAAf39/AAEAAABkAAAAAAAAABQAAABAHwAAAAAAACYAAAAAAAAAwOD//wAAAAAmAAAAZAAAABYAAABMAAAAAAAAAAAAAAAEAAAAAAAAAAEAAADn5uYKAAAAACgAAAAoAAAAZAAAAGQAAAAAAAAAzMzMAAAAAABQAAAAUAAAAGQAAABkAAAAAAAAABcAAAAUAAAAAAAAAAAAAAD/fwAA/38AAAAAAAAJAAAABAAAAAAAAAAeAAAAaAAAAAAAAAAAAAAAAAAAAAAAAAAAAAAAECcAABAnAAAAAAAAAAAAAAAAAAAAAAAAAAAAAAAAAAAAAAAAAAAAABQAAAAAAAAAwMD/AAAAAABkAAAAMgAAAAAAAABkAAAAAAAAAH9/fwAKAAAAIgAAABgAAAAAAAAAAAAAAAAAAAAAAAAAAAAAAAAAAAAkAAAAJAAAAAAAAAAHAAAAAAAAAAAAAAAAAAAAAAAAAAAAAAAAAAAAf39/ACUAAABYAAAAAAAAAAAAAAAAAAAAAAAAAAAAAAAAAAAAAAAAAAAAAAAAAAAAAAAAAAAAAAA/AAAAAAAAAKCGAQAAAAAAAAAAAAAAAAAMAAAAAQAAAAAAAAAAAAAAAAAAAB8AAABUAAAAAAAABQAAAAEAAAAAAAAAAAAAAAAAAAAAAAAAAAAAAAAAAAAAAAAAAAAAAAJ/f38AAAAAA8zMzADAwP8Af39/AAAAAAAAAAAAAAAAAAAAAAAAAAAAIQAAABgAAAAUAAAA+DQAABonAADYRQAAWSkAABAAAAAmAAAACAAAAAAAAAAAAAAA"/>
+              </a:ext>
+            </a:extLst>
           </p:cNvSpPr>
           <p:nvPr>
             <p:ph type="sldNum" sz="quarter" idx="12"/>
@@ -1870,29 +2306,26 @@
           <a:bodyPr/>
           <a:lstStyle/>
           <a:p>
-            <a:fld id="{2AF8EFAC-D507-4007-9634-FDE202E639CC}" type="slidenum">
-              <a:rPr lang="en-US" smtClean="0"/>
+            <a:pPr>
+              <a:defRPr lang="en-us"/>
+            </a:pPr>
+            <a:fld id="{30AE985E-10DD-FB6E-9316-E63BD65865B3}" type="slidenum">
               <a:t>‹#›</a:t>
             </a:fld>
-            <a:endParaRPr lang="en-US"/>
           </a:p>
         </p:txBody>
       </p:sp>
     </p:spTree>
-    <p:extLst>
-      <p:ext uri="{BB962C8B-B14F-4D97-AF65-F5344CB8AC3E}">
-        <p14:creationId xmlns:p14="http://schemas.microsoft.com/office/powerpoint/2010/main" val="2410274638"/>
-      </p:ext>
-    </p:extLst>
   </p:cSld>
   <p:clrMapOvr>
     <a:masterClrMapping/>
   </p:clrMapOvr>
+  <p:hf hdr="0" ftr="0"/>
 </p:sldLayout>
 </file>
 
 <file path=ppt/slideLayouts/slideLayout8.xml><?xml version="1.0" encoding="utf-8"?>
-<p:sldLayout xmlns:a="http://schemas.openxmlformats.org/drawingml/2006/main" xmlns:r="http://schemas.openxmlformats.org/officeDocument/2006/relationships" xmlns:p="http://schemas.openxmlformats.org/presentationml/2006/main" type="objTx" preserve="1">
+<p:sldLayout xmlns:p="http://schemas.openxmlformats.org/presentationml/2006/main" xmlns:mc="http://schemas.openxmlformats.org/markup-compatibility/2006" xmlns:p14="http://schemas.microsoft.com/office/powerpoint/2010/main" xmlns:p15="http://schemas.microsoft.com/office/powerpoint/2012/main" xmlns:r="http://schemas.openxmlformats.org/officeDocument/2006/relationships" xmlns:a="http://schemas.openxmlformats.org/drawingml/2006/main" type="objTx" preserve="1">
   <p:cSld name="Content with Caption">
     <p:spTree>
       <p:nvGrpSpPr>
@@ -1912,7 +2345,12 @@
         <p:nvSpPr>
           <p:cNvPr id="2" name="Title 1"/>
           <p:cNvSpPr>
-            <a:spLocks noGrp="1"/>
+            <a:spLocks noGrp="1" noChangeArrowheads="1"/>
+            <a:extLst>
+              <a:ext uri="smNativeData">
+                <pr:smNativeData xmlns:pr="smNativeData" xmlns="smNativeData" val="SMDATA_15_FLquaRMAAAAlAAAAZAAAAA0AAAAAkAAAAEgAAACQAAAASAAAAAAAAAACAAAAAAAAAAEAAABQAAAAAAAAAAAA4D8AAAAAAADgPwAAAAAAAOA/AAAAAAAA4D8AAAAAAADgPwAAAAAAAOA/AAAAAAAA4D8AAAAAAADgPwAAAAAAAOA/AAAAAAAA4D8CAAAAjAAAAAAAAAAAAAAAW5vVDP///wgAAAAAAAAAAAAAAAAAAAAAAAAAAAAAAAAAAAAAZAAAAAEAAABAAAAAAAAAAAAAAAAAAAAAAAAAAAAAAAAAAAAAAAAAAAAAAAAAAAAAAAAAAAAAAAAAAAAAAAAAAAAAAAAAAAAAAAAAAAAAAAAAAAAAAAAAAAAAAAAAAAAAFAAAADwAAAAAAAAAAAAAAAAAAAkUAAAAAQAAABQAAAAUAAAAFAAAAAEAAAAAAAAAZAAAAGQAAAAAAAAAZAAAAGQAAAAVAAAAYAAAAAAAAAAAAAAADwAAACADAAAAAAAAAAAAAAEAAACgMgAAVgcAAKr4//8BAAAAf39/AAEAAABkAAAAAAAAABQAAABAHwAAAAAAACYAAAAAAAAAwOD//wAAAAAmAAAAZAAAABYAAABMAAAAAAAAAAAAAAAEAAAAAAAAAAEAAADn5uYKAAAAACgAAAAoAAAAZAAAAGQAAAAAAAAAzMzMAAAAAABQAAAAUAAAAGQAAABkAAAAAAAAABcAAAAUAAAAAAAAAAAAAAD/fwAA/38AAAAAAAAJAAAABAAAAAAAAAAeAAAAaAAAAAAAAAAAAAAAAAAAAAAAAAAAAAAAECcAABAnAAAAAAAAAAAAAAAAAAAAAAAAAAAAAAAAAAAAAAAAAAAAABQAAAAAAAAAwMD/AAAAAABkAAAAMgAAAAAAAABkAAAAAAAAAH9/fwAKAAAAIgAAABgAAAAAAAAAAAAAAAAAAAAAAAAAAAAAAAAAAAAkAAAAJAAAAAAAAAAHAAAAAAAAAAAAAAAAAAAAAAAAAAAAAAAAAAAAf39/ACUAAABYAAAAAAAAAAAAAAAAAAAAAAAAAAAAAAAAAAAAAAAAAAAAAAAAAAAAAAAAAAAAAAA/AAAAAAAAAKCGAQAAAAAAAAAAAAAAAAAMAAAAAQAAAAAAAAAAAAAAAAAAAB8AAABUAAAAAAAABQAAAAEAAAAAAAAAAAAAAAAAAAAAAAAAAAAAAAAAAAAAAAAAAAAAAAJ/f38AAAAAA8zMzADAwP8Af39/AAAAAAAAAAAAAAAAAAAAAAAAAAAAIQAAABgAAAAUAAAAKwUAANACAABbHQAAqAwAABAAAAAmAAAACAAAAIGAAAAAAAAA"/>
+              </a:ext>
+            </a:extLst>
           </p:cNvSpPr>
           <p:nvPr>
             <p:ph type="title"/>
@@ -1920,23 +2358,52 @@
         </p:nvSpPr>
         <p:spPr>
           <a:xfrm>
-            <a:off x="839788" y="457200"/>
-            <a:ext cx="3932237" cy="1600200"/>
+            <a:off x="840105" y="457200"/>
+            <a:ext cx="3931920" cy="1600200"/>
           </a:xfrm>
         </p:spPr>
         <p:txBody>
-          <a:bodyPr anchor="b"/>
+          <a:bodyPr vert="horz" wrap="square" lIns="91440" tIns="45720" rIns="91440" bIns="45720" numCol="1" spcCol="215900" anchor="b">
+            <a:prstTxWarp prst="textNoShape">
+              <a:avLst/>
+            </a:prstTxWarp>
+          </a:bodyPr>
           <a:lstStyle>
             <a:lvl1pPr>
-              <a:defRPr sz="3200"/>
+              <a:defRPr lang="en-us" sz="3200" cap="none"/>
             </a:lvl1pPr>
+            <a:lvl2pPr>
+              <a:defRPr lang="en-us"/>
+            </a:lvl2pPr>
+            <a:lvl3pPr>
+              <a:defRPr lang="en-us"/>
+            </a:lvl3pPr>
+            <a:lvl4pPr>
+              <a:defRPr lang="en-us"/>
+            </a:lvl4pPr>
+            <a:lvl5pPr>
+              <a:defRPr lang="en-us"/>
+            </a:lvl5pPr>
+            <a:lvl6pPr>
+              <a:defRPr lang="en-us"/>
+            </a:lvl6pPr>
+            <a:lvl7pPr>
+              <a:defRPr lang="en-us"/>
+            </a:lvl7pPr>
+            <a:lvl8pPr>
+              <a:defRPr lang="en-us"/>
+            </a:lvl8pPr>
+            <a:lvl9pPr>
+              <a:defRPr lang="en-us"/>
+            </a:lvl9pPr>
           </a:lstStyle>
           <a:p>
-            <a:r>
-              <a:rPr lang="en-US" smtClean="0"/>
+            <a:pPr>
+              <a:defRPr lang="en-us"/>
+            </a:pPr>
+            <a:r>
               <a:t>Click to edit Master title style</a:t>
             </a:r>
-            <a:endParaRPr lang="en-US"/>
           </a:p>
         </p:txBody>
       </p:sp>
@@ -1944,7 +2411,12 @@
         <p:nvSpPr>
           <p:cNvPr id="3" name="Content Placeholder 2"/>
           <p:cNvSpPr>
-            <a:spLocks noGrp="1"/>
+            <a:spLocks noGrp="1" noChangeArrowheads="1"/>
+            <a:extLst>
+              <a:ext uri="smNativeData">
+                <pr:smNativeData xmlns:pr="smNativeData" xmlns="smNativeData" val="SMDATA_15_FLquaRMAAAAlAAAAZAAAAA0AAAAAkAAAAEgAAACQAAAASAAAAAAAAAAAAAAAAAAAAAEAAABQAAAAAAAAAAAA4D8AAAAAAADgPwAAAAAAAOA/AAAAAAAA4D8AAAAAAADgPwAAAAAAAOA/AAAAAAAA4D8AAAAAAADgPwAAAAAAAOA/AAAAAAAA4D8CAAAAjAAAAAAAAAAAAAAAW5vVDP///wgAAAAAAAAAAAAAAAAAAAAAAAAAAAAAAAAAAAAAZAAAAAEAAABAAAAAAAAAAAAAAAAAAAAAAAAAAAAAAAAAAAAAAAAAAAAAAAAAAAAAAAAAAAAAAAAAAAAAAAAAAAAAAAAAAAAAAAAAAAAAAAAAAAAAAAAAAAAAAAAAAAAAFAAAADwAAAAAAAAAAAAAAAAAAAkUAAAAAQAAABQAAAAUAAAAFAAAAAEAAAAAAAAAZAAAAGQAAAAAAAAAZAAAAGQAAAAVAAAAYAAAAAAAAAAAAAAADwAAACADAAAAAAAAAAAAAAEAAACgMgAAVgcAAKr4//8BAAAAf39/AAEAAABkAAAAAAAAABQAAABAHwAAAAAAACYAAAAAAAAAwOD//wAAAAAmAAAAZAAAABYAAABMAAAAAAAAAAAAAAAEAAAAAAAAAAEAAADn5uYKAAAAACgAAAAoAAAAZAAAAGQAAAAAAAAAzMzMAAAAAABQAAAAUAAAAGQAAABkAAAAAAAAABcAAAAUAAAAAAAAAAAAAAD/fwAA/38AAAAAAAAJAAAABAAAAAAAAAAeAAAAaAAAAAAAAAAAAAAAAAAAAAAAAAAAAAAAECcAABAnAAAAAAAAAAAAAAAAAAAAAAAAAAAAAAAAAAAAAAAAAAAAABQAAAAAAAAAwMD/AAAAAABkAAAAMgAAAAAAAABkAAAAAAAAAH9/fwAKAAAAIgAAABgAAAAAAAAAAAAAAAAAAAAAAAAAAAAAAAAAAAAkAAAAJAAAAAAAAAAHAAAAAAAAAAAAAAAAAAAAAAAAAAAAAAAAAAAAf39/ACUAAABYAAAAAAAAAAAAAAAAAAAAAAAAAAAAAAAAAAAAAAAAAAAAAAAAAAAAAAAAAAAAAAA/AAAAAAAAAKCGAQAAAAAAAAAAAAAAAAAMAAAAAQAAAAAAAAAAAAAAAAAAAB8AAABUAAAAAAAABQAAAAEAAAAAAAAAAAAAAAAAAAAAAAAAAAAAAAAAAAAAAAAAAAAAAAJ/f38AAAAAA8zMzADAwP8Af39/AAAAAAAAAAAAAAAAAAAAAAAAAAAAIQAAABgAAAAUAAAA4x8AABMGAADbRQAADiQAABAAAAAmAAAACAAAAAGAAAAAAAAA"/>
+              </a:ext>
+            </a:extLst>
           </p:cNvSpPr>
           <p:nvPr>
             <p:ph idx="1"/>
@@ -1952,7 +2424,7 @@
         </p:nvSpPr>
         <p:spPr>
           <a:xfrm>
-            <a:off x="5183188" y="987425"/>
+            <a:off x="5183505" y="987425"/>
             <a:ext cx="6172200" cy="4873625"/>
           </a:xfrm>
         </p:spPr>
@@ -1960,68 +2432,72 @@
           <a:bodyPr/>
           <a:lstStyle>
             <a:lvl1pPr>
-              <a:defRPr sz="3200"/>
+              <a:defRPr lang="en-us" sz="3200" cap="none"/>
             </a:lvl1pPr>
             <a:lvl2pPr>
-              <a:defRPr sz="2800"/>
+              <a:defRPr lang="en-us" sz="2800" cap="none"/>
             </a:lvl2pPr>
             <a:lvl3pPr>
-              <a:defRPr sz="2400"/>
+              <a:defRPr lang="en-us" sz="2400" cap="none"/>
             </a:lvl3pPr>
             <a:lvl4pPr>
-              <a:defRPr sz="2000"/>
+              <a:defRPr lang="en-us" sz="2000" cap="none"/>
             </a:lvl4pPr>
             <a:lvl5pPr>
-              <a:defRPr sz="2000"/>
+              <a:defRPr lang="en-us" sz="2000" cap="none"/>
             </a:lvl5pPr>
             <a:lvl6pPr>
-              <a:defRPr sz="2000"/>
+              <a:defRPr lang="en-us" sz="2000" cap="none"/>
             </a:lvl6pPr>
             <a:lvl7pPr>
-              <a:defRPr sz="2000"/>
+              <a:defRPr lang="en-us" sz="2000" cap="none"/>
             </a:lvl7pPr>
             <a:lvl8pPr>
-              <a:defRPr sz="2000"/>
+              <a:defRPr lang="en-us" sz="2000" cap="none"/>
             </a:lvl8pPr>
             <a:lvl9pPr>
-              <a:defRPr sz="2000"/>
+              <a:defRPr lang="en-us" sz="2000" cap="none"/>
             </a:lvl9pPr>
           </a:lstStyle>
           <a:p>
-            <a:pPr lvl="0"/>
-            <a:r>
-              <a:rPr lang="en-US" smtClean="0"/>
+            <a:pPr>
+              <a:defRPr lang="en-us"/>
+            </a:pPr>
+            <a:r>
               <a:t>Click to edit Master text styles</a:t>
             </a:r>
           </a:p>
           <a:p>
-            <a:pPr lvl="1"/>
-            <a:r>
-              <a:rPr lang="en-US" smtClean="0"/>
+            <a:pPr lvl="1">
+              <a:defRPr lang="en-us"/>
+            </a:pPr>
+            <a:r>
               <a:t>Second level</a:t>
             </a:r>
           </a:p>
           <a:p>
-            <a:pPr lvl="2"/>
-            <a:r>
-              <a:rPr lang="en-US" smtClean="0"/>
+            <a:pPr lvl="2">
+              <a:defRPr lang="en-us"/>
+            </a:pPr>
+            <a:r>
               <a:t>Third level</a:t>
             </a:r>
           </a:p>
           <a:p>
-            <a:pPr lvl="3"/>
-            <a:r>
-              <a:rPr lang="en-US" smtClean="0"/>
+            <a:pPr lvl="3">
+              <a:defRPr lang="en-us"/>
+            </a:pPr>
+            <a:r>
               <a:t>Fourth level</a:t>
             </a:r>
           </a:p>
           <a:p>
-            <a:pPr lvl="4"/>
-            <a:r>
-              <a:rPr lang="en-US" smtClean="0"/>
+            <a:pPr lvl="4">
+              <a:defRPr lang="en-us"/>
+            </a:pPr>
+            <a:r>
               <a:t>Fifth level</a:t>
             </a:r>
-            <a:endParaRPr lang="en-US"/>
           </a:p>
         </p:txBody>
       </p:sp>
@@ -2029,16 +2505,21 @@
         <p:nvSpPr>
           <p:cNvPr id="4" name="Text Placeholder 3"/>
           <p:cNvSpPr>
-            <a:spLocks noGrp="1"/>
-          </p:cNvSpPr>
-          <p:nvPr>
-            <p:ph type="body" sz="half" idx="2"/>
+            <a:spLocks noGrp="1" noChangeArrowheads="1"/>
+            <a:extLst>
+              <a:ext uri="smNativeData">
+                <pr:smNativeData xmlns:pr="smNativeData" xmlns="smNativeData" val="SMDATA_15_FLquaRMAAAAlAAAAZAAAAA0AAAAAkAAAAEgAAACQAAAASAAAAAAAAAAAAAAAAAAAAAEAAABQAAAAAAAAAAAA4D8AAAAAAADgPwAAAAAAAOA/AAAAAAAA4D8AAAAAAADgPwAAAAAAAOA/AAAAAAAA4D8AAAAAAADgPwAAAAAAAOA/AAAAAAAA4D8CAAAAjAAAAAAAAAAAAAAAW5vVDP///wgAAAAAAAAAAAAAAAAAAAAAAAAAAAAAAAAAAAAAZAAAAAEAAABAAAAAAAAAAAAAAAAAAAAAAAAAAAAAAAAAAAAAAAAAAAAAAAAAAAAAAAAAAAAAAAAAAAAAAAAAAAAAAAAAAAAAAAAAAAAAAAAAAAAAAAAAAAAAAAAAAAAAFAAAADwAAAAAAAAAAAAAAAAAAAkUAAAAAQAAABQAAAAUAAAAFAAAAAEAAAAAAAAAZAAAAGQAAAAAAAAAZAAAAGQAAAAVAAAAYAAAAAAAAAAAAAAADwAAACADAAAAAAAAAAAAAAEAAACgMgAAVgcAAKr4//8BAAAAf39/AAEAAABkAAAAAAAAABQAAABAHwAAAAAAACYAAAAAAAAAwOD//wAAAAAmAAAAZAAAABYAAABMAAAAAAAAAAAAAAAEAAAAAAAAAAEAAADn5uYKAAAAACgAAAAoAAAAZAAAAGQAAAAAAAAAzMzMAAAAAABQAAAAUAAAAGQAAABkAAAAAAAAABcAAAAUAAAAAAAAAAAAAAD/fwAA/38AAAAAAAAJAAAABAAAAAAAAAAeAAAAaAAAAAAAAAAAAAAAAAAAAAAAAAAAAAAAECcAABAnAAAAAAAAAAAAAAAAAAAAAAAAAAAAAAAAAAAAAAAAAAAAABQAAAAAAAAAwMD/AAAAAABkAAAAMgAAAAAAAABkAAAAAAAAAH9/fwAKAAAAIgAAABgAAAAAAAAAAAAAAAAAAAAAAAAAAAAAAAAAAAAkAAAAJAAAAAAAAAAHAAAAAAAAAAAAAAAAAAAAAAAAAAAAAAAAAAAAf39/ACUAAABYAAAAAAAAAAAAAAAAAAAAAAAAAAAAAAAAAAAAAAAAAAAAAAAAAAAAAAAAAAAAAAA/AAAAAAAAAKCGAQAAAAAAAAAAAAAAAAAMAAAAAQAAAAAAAAAAAAAAAAAAAB8AAABUAAAAAAAABQAAAAEAAAAAAAAAAAAAAAAAAAAAAAAAAAAAAAAAAAAAAAAAAAAAAAJ/f38AAAAAA8zMzADAwP8Af39/AAAAAAAAAAAAAAAAAAAAAAAAAAAAIQAAABgAAAAUAAAAKwUAAKgMAABbHQAAGyQAABAAAAAmAAAACAAAAAGAAAAAAAAA"/>
+              </a:ext>
+            </a:extLst>
+          </p:cNvSpPr>
+          <p:nvPr>
+            <p:ph idx="2"/>
           </p:nvPr>
         </p:nvSpPr>
         <p:spPr>
           <a:xfrm>
-            <a:off x="839788" y="2057400"/>
-            <a:ext cx="3932237" cy="3811588"/>
+            <a:off x="840105" y="2057400"/>
+            <a:ext cx="3931920" cy="3811905"/>
           </a:xfrm>
         </p:spPr>
         <p:txBody>
@@ -2046,45 +2527,46 @@
           <a:lstStyle>
             <a:lvl1pPr marL="0" indent="0">
               <a:buNone/>
-              <a:defRPr sz="1600"/>
+              <a:defRPr lang="en-us" sz="1600" cap="none"/>
             </a:lvl1pPr>
             <a:lvl2pPr marL="457200" indent="0">
               <a:buNone/>
-              <a:defRPr sz="1400"/>
+              <a:defRPr lang="en-us" sz="1400" cap="none"/>
             </a:lvl2pPr>
             <a:lvl3pPr marL="914400" indent="0">
               <a:buNone/>
-              <a:defRPr sz="1200"/>
+              <a:defRPr lang="en-us" sz="1200" cap="none"/>
             </a:lvl3pPr>
             <a:lvl4pPr marL="1371600" indent="0">
               <a:buNone/>
-              <a:defRPr sz="1000"/>
+              <a:defRPr lang="en-us" sz="1000" cap="none"/>
             </a:lvl4pPr>
             <a:lvl5pPr marL="1828800" indent="0">
               <a:buNone/>
-              <a:defRPr sz="1000"/>
+              <a:defRPr lang="en-us" sz="1000" cap="none"/>
             </a:lvl5pPr>
             <a:lvl6pPr marL="2286000" indent="0">
               <a:buNone/>
-              <a:defRPr sz="1000"/>
+              <a:defRPr lang="en-us" sz="1000" cap="none"/>
             </a:lvl6pPr>
             <a:lvl7pPr marL="2743200" indent="0">
               <a:buNone/>
-              <a:defRPr sz="1000"/>
+              <a:defRPr lang="en-us" sz="1000" cap="none"/>
             </a:lvl7pPr>
             <a:lvl8pPr marL="3200400" indent="0">
               <a:buNone/>
-              <a:defRPr sz="1000"/>
+              <a:defRPr lang="en-us" sz="1000" cap="none"/>
             </a:lvl8pPr>
             <a:lvl9pPr marL="3657600" indent="0">
               <a:buNone/>
-              <a:defRPr sz="1000"/>
+              <a:defRPr lang="en-us" sz="1000" cap="none"/>
             </a:lvl9pPr>
           </a:lstStyle>
           <a:p>
-            <a:pPr lvl="0"/>
-            <a:r>
-              <a:rPr lang="en-US" smtClean="0"/>
+            <a:pPr>
+              <a:defRPr lang="en-us"/>
+            </a:pPr>
+            <a:r>
               <a:t>Click to edit Master text styles</a:t>
             </a:r>
           </a:p>
@@ -2094,7 +2576,12 @@
         <p:nvSpPr>
           <p:cNvPr id="5" name="Date Placeholder 4"/>
           <p:cNvSpPr>
-            <a:spLocks noGrp="1"/>
+            <a:spLocks noGrp="1" noChangeArrowheads="1"/>
+            <a:extLst>
+              <a:ext uri="smNativeData">
+                <pr:smNativeData xmlns:pr="smNativeData" xmlns="smNativeData" val="SMDATA_15_FLquaRMAAAAlAAAAZAAAAA0AAAAAkAAAAEgAAACQAAAASAAAAAAAAAABAAAAAAAAAAEAAABQAAAAAAAAAAAA4D8AAAAAAADgPwAAAAAAAOA/AAAAAAAA4D8AAAAAAADgPwAAAAAAAOA/AAAAAAAA4D8AAAAAAADgPwAAAAAAAOA/AAAAAAAA4D8CAAAAjAAAAAAAAAAAAAAAW5vVDP///wgAAAAAAAAAAAAAAAAAAAAAAAAAAAAAAAAAAAAAZAAAAAEAAABAAAAAAAAAAAAAAAAAAAAAAAAAAAAAAAAAAAAAAAAAAAAAAAAAAAAAAAAAAAAAAAAAAAAAAAAAAAAAAAAAAAAAAAAAAAAAAAAAAAAAAAAAAAAAAAAAAAAAFAAAADwAAAAAAAAAAAAAAAAAAAkUAAAAAQAAABQAAAAUAAAAFAAAAAEAAAAAAAAAZAAAAGQAAAAAAAAAZAAAAGQAAAAVAAAAYAAAAAAAAAAAAAAADwAAACADAAAAAAAAAAAAAAEAAACgMgAAVgcAAKr4//8BAAAAf39/AAEAAABkAAAAAAAAABQAAABAHwAAAAAAACYAAAAAAAAAwOD//wAAAAAmAAAAZAAAABYAAABMAAAAAAAAAAAAAAAEAAAAAAAAAAEAAADn5uYKAAAAACgAAAAoAAAAZAAAAGQAAAAAAAAAzMzMAAAAAABQAAAAUAAAAGQAAABkAAAAAAAAABcAAAAUAAAAAAAAAAAAAAD/fwAA/38AAAAAAAAJAAAABAAAAAAAAAAeAAAAaAAAAAAAAAAAAAAAAAAAAAAAAAAAAAAAECcAABAnAAAAAAAAAAAAAAAAAAAAAAAAAAAAAAAAAAAAAAAAAAAAABQAAAAAAAAAwMD/AAAAAABkAAAAMgAAAAAAAABkAAAAAAAAAH9/fwAKAAAAIgAAABgAAAAAAAAAAAAAAAAAAAAAAAAAAAAAAAAAAAAkAAAAJAAAAAAAAAAHAAAAAAAAAAAAAAAAAAAAAAAAAAAAAAAAAAAAf39/ACUAAABYAAAAAAAAAAAAAAAAAAAAAAAAAAAAAAAAAAAAAAAAAAAAAAAAAAAAAAAAAAAAAAA/AAAAAAAAAKCGAQAAAAAAAAAAAAAAAAAMAAAAAQAAAAAAAAAAAAAAAAAAAB8AAABUAAAAAAAABQAAAAEAAAAAAAAAAAAAAAAAAAAAAAAAAAAAAAAAAAAAAAAAAAAAAAJ/f38AAAAAA8zMzADAwP8Af39/AAAAAAAAAAAAAAAAAAAAAAAAAAAAIQAAABgAAAAUAAAAKAUAABonAAAIFgAAWSkAABAAAAAmAAAACAAAAAAAAAAAAAAA"/>
+              </a:ext>
+            </a:extLst>
           </p:cNvSpPr>
           <p:nvPr>
             <p:ph type="dt" sz="half" idx="10"/>
@@ -2105,11 +2592,12 @@
           <a:bodyPr/>
           <a:lstStyle/>
           <a:p>
-            <a:fld id="{77AD5A0D-32F9-42A2-946C-433A90366567}" type="datetimeFigureOut">
-              <a:rPr lang="en-US" smtClean="0"/>
-              <a:t>6/13/2025</a:t>
+            <a:pPr>
+              <a:defRPr lang="en-us"/>
+            </a:pPr>
+            <a:fld id="{30AED90E-40DD-FB2F-9316-B67A975865E3}" type="datetime1">
+              <a:t>3/4/2026</a:t>
             </a:fld>
-            <a:endParaRPr lang="en-US"/>
           </a:p>
         </p:txBody>
       </p:sp>
@@ -2117,7 +2605,12 @@
         <p:nvSpPr>
           <p:cNvPr id="6" name="Footer Placeholder 5"/>
           <p:cNvSpPr>
-            <a:spLocks noGrp="1"/>
+            <a:spLocks noGrp="1" noChangeArrowheads="1"/>
+            <a:extLst>
+              <a:ext uri="smNativeData">
+                <pr:smNativeData xmlns:pr="smNativeData" xmlns="smNativeData" val="SMDATA_15_FLquaRMAAAAlAAAAZAAAAA0AAAAAkAAAAEgAAACQAAAASAAAAAAAAAABAAAAAAAAAAEAAABQAAAAAAAAAAAA4D8AAAAAAADgPwAAAAAAAOA/AAAAAAAA4D8AAAAAAADgPwAAAAAAAOA/AAAAAAAA4D8AAAAAAADgPwAAAAAAAOA/AAAAAAAA4D8CAAAAjAAAAAAAAAAAAAAAW5vVDP///wgAAAAAAAAAAAAAAAAAAAAAAAAAAAAAAAAAAAAAZAAAAAEAAABAAAAAAAAAAAAAAAAAAAAAAAAAAAAAAAAAAAAAAAAAAAAAAAAAAAAAAAAAAAAAAAAAAAAAAAAAAAAAAAAAAAAAAAAAAAAAAAAAAAAAAAAAAAAAAAAAAAAAFAAAADwAAAAAAAAAAAAAAAAAAAkUAAAAAQAAABQAAAAUAAAAFAAAAAEAAAAAAAAAZAAAAGQAAAAAAAAAZAAAAGQAAAAVAAAAYAAAAAAAAAAAAAAADwAAACADAAAAAAAAAAAAAAEAAACgMgAAVgcAAKr4//8BAAAAf39/AAEAAABkAAAAAAAAABQAAABAHwAAAAAAACYAAAAAAAAAwOD//wAAAAAmAAAAZAAAABYAAABMAAAAAAAAAAAAAAAEAAAAAAAAAAEAAADn5uYKAAAAACgAAAAoAAAAZAAAAGQAAAAAAAAAzMzMAAAAAABQAAAAUAAAAGQAAABkAAAAAAAAABcAAAAUAAAAAAAAAAAAAAD/fwAA/38AAAAAAAAJAAAABAAAAAAAAAAeAAAAaAAAAAAAAAAAAAAAAAAAAAAAAAAAAAAAECcAABAnAAAAAAAAAAAAAAAAAAAAAAAAAAAAAAAAAAAAAAAAAAAAABQAAAAAAAAAwMD/AAAAAABkAAAAMgAAAAAAAABkAAAAAAAAAH9/fwAKAAAAIgAAABgAAAAAAAAAAAAAAAAAAAAAAAAAAAAAAAAAAAAkAAAAJAAAAAAAAAAHAAAAAAAAAAAAAAAAAAAAAAAAAAAAAAAAAAAAf39/ACUAAABYAAAAAAAAAAAAAAAAAAAAAAAAAAAAAAAAAAAAAAAAAAAAAAAAAAAAAAAAAAAAAAA/AAAAAAAAAKCGAQAAAAAAAAAAAAAAAAAMAAAAAQAAAAAAAAAAAAAAAAAAAB8AAABUAAAAAAAABQAAAAEAAAAAAAAAAAAAAAAAAAAAAAAAAAAAAAAAAAAAAAAAAAAAAAJ/f38AAAAAA8zMzADAwP8Af39/AAAAAAAAAAAAAAAAAAAAAAAAAAAAIQAAABgAAAAUAAAA2BgAABonAAAoMgAAWSkAABAAAAAmAAAACAAAAAAAAAAAAAAA"/>
+              </a:ext>
+            </a:extLst>
           </p:cNvSpPr>
           <p:nvPr>
             <p:ph type="ftr" sz="quarter" idx="11"/>
@@ -2128,7 +2621,9 @@
           <a:bodyPr/>
           <a:lstStyle/>
           <a:p>
-            <a:endParaRPr lang="en-US"/>
+            <a:pPr>
+              <a:defRPr lang="en-us"/>
+            </a:pPr>
           </a:p>
         </p:txBody>
       </p:sp>
@@ -2136,7 +2631,12 @@
         <p:nvSpPr>
           <p:cNvPr id="7" name="Slide Number Placeholder 6"/>
           <p:cNvSpPr>
-            <a:spLocks noGrp="1"/>
+            <a:spLocks noGrp="1" noChangeArrowheads="1"/>
+            <a:extLst>
+              <a:ext uri="smNativeData">
+                <pr:smNativeData xmlns:pr="smNativeData" xmlns="smNativeData" val="SMDATA_15_FLquaRMAAAAlAAAAZAAAAA0AAAAAkAAAAEgAAACQAAAASAAAAAAAAAABAAAAAAAAAAEAAABQAAAAAAAAAAAA4D8AAAAAAADgPwAAAAAAAOA/AAAAAAAA4D8AAAAAAADgPwAAAAAAAOA/AAAAAAAA4D8AAAAAAADgPwAAAAAAAOA/AAAAAAAA4D8CAAAAjAAAAAAAAAAAAAAAW5vVDP///wgAAAAAAAAAAAAAAAAAAAAAAAAAAAAAAAAAAAAAZAAAAAEAAABAAAAAAAAAAAAAAAAAAAAAAAAAAAAAAAAAAAAAAAAAAAAAAAAAAAAAAAAAAAAAAAAAAAAAAAAAAAAAAAAAAAAAAAAAAAAAAAAAAAAAAAAAAAAAAAAAAAAAFAAAADwAAAAAAAAAAAAAAAAAAAkUAAAAAQAAABQAAAAUAAAAFAAAAAEAAAAAAAAAZAAAAGQAAAAAAAAAZAAAAGQAAAAVAAAAYAAAAAAAAAAAAAAADwAAACADAAAAAAAAAAAAAAEAAACgMgAAVgcAAKr4//8BAAAAf39/AAEAAABkAAAAAAAAABQAAABAHwAAAAAAACYAAAAAAAAAwOD//wAAAAAmAAAAZAAAABYAAABMAAAAAAAAAAAAAAAEAAAAAAAAAAEAAADn5uYKAAAAACgAAAAoAAAAZAAAAGQAAAAAAAAAzMzMAAAAAABQAAAAUAAAAGQAAABkAAAAAAAAABcAAAAUAAAAAAAAAAAAAAD/fwAA/38AAAAAAAAJAAAABAAAAAAAAAAeAAAAaAAAAAAAAAAAAAAAAAAAAAAAAAAAAAAAECcAABAnAAAAAAAAAAAAAAAAAAAAAAAAAAAAAAAAAAAAAAAAAAAAABQAAAAAAAAAwMD/AAAAAABkAAAAMgAAAAAAAABkAAAAAAAAAH9/fwAKAAAAIgAAABgAAAAAAAAAAAAAAAAAAAAAAAAAAAAAAAAAAAAkAAAAJAAAAAAAAAAHAAAAAAAAAAAAAAAAAAAAAAAAAAAAAAAAAAAAf39/ACUAAABYAAAAAAAAAAAAAAAAAAAAAAAAAAAAAAAAAAAAAAAAAAAAAAAAAAAAAAAAAAAAAAA/AAAAAAAAAKCGAQAAAAAAAAAAAAAAAAAMAAAAAQAAAAAAAAAAAAAAAAAAAB8AAABUAAAAAAAABQAAAAEAAAAAAAAAAAAAAAAAAAAAAAAAAAAAAAAAAAAAAAAAAAAAAAJ/f38AAAAAA8zMzADAwP8Af39/AAAAAAAAAAAAAAAAAAAAAAAAAAAAIQAAABgAAAAUAAAA+DQAABonAADYRQAAWSkAABAAAAAmAAAACAAAAAAAAAAAAAAA"/>
+              </a:ext>
+            </a:extLst>
           </p:cNvSpPr>
           <p:nvPr>
             <p:ph type="sldNum" sz="quarter" idx="12"/>
@@ -2147,29 +2647,26 @@
           <a:bodyPr/>
           <a:lstStyle/>
           <a:p>
-            <a:fld id="{2AF8EFAC-D507-4007-9634-FDE202E639CC}" type="slidenum">
-              <a:rPr lang="en-US" smtClean="0"/>
+            <a:pPr>
+              <a:defRPr lang="en-us"/>
+            </a:pPr>
+            <a:fld id="{30AE8D22-6CDD-FB7B-9316-9A2EC35865CF}" type="slidenum">
               <a:t>‹#›</a:t>
             </a:fld>
-            <a:endParaRPr lang="en-US"/>
           </a:p>
         </p:txBody>
       </p:sp>
     </p:spTree>
-    <p:extLst>
-      <p:ext uri="{BB962C8B-B14F-4D97-AF65-F5344CB8AC3E}">
-        <p14:creationId xmlns:p14="http://schemas.microsoft.com/office/powerpoint/2010/main" val="1018634423"/>
-      </p:ext>
-    </p:extLst>
   </p:cSld>
   <p:clrMapOvr>
     <a:masterClrMapping/>
   </p:clrMapOvr>
+  <p:hf hdr="0" ftr="0"/>
 </p:sldLayout>
 </file>
 
 <file path=ppt/slideLayouts/slideLayout9.xml><?xml version="1.0" encoding="utf-8"?>
-<p:sldLayout xmlns:a="http://schemas.openxmlformats.org/drawingml/2006/main" xmlns:r="http://schemas.openxmlformats.org/officeDocument/2006/relationships" xmlns:p="http://schemas.openxmlformats.org/presentationml/2006/main" type="picTx" preserve="1">
+<p:sldLayout xmlns:p="http://schemas.openxmlformats.org/presentationml/2006/main" xmlns:mc="http://schemas.openxmlformats.org/markup-compatibility/2006" xmlns:p14="http://schemas.microsoft.com/office/powerpoint/2010/main" xmlns:p15="http://schemas.microsoft.com/office/powerpoint/2012/main" xmlns:r="http://schemas.openxmlformats.org/officeDocument/2006/relationships" xmlns:a="http://schemas.openxmlformats.org/drawingml/2006/main" type="picTx" preserve="1">
   <p:cSld name="Picture with Caption">
     <p:spTree>
       <p:nvGrpSpPr>
@@ -2189,7 +2686,12 @@
         <p:nvSpPr>
           <p:cNvPr id="2" name="Title 1"/>
           <p:cNvSpPr>
-            <a:spLocks noGrp="1"/>
+            <a:spLocks noGrp="1" noChangeArrowheads="1"/>
+            <a:extLst>
+              <a:ext uri="smNativeData">
+                <pr:smNativeData xmlns:pr="smNativeData" xmlns="smNativeData" val="SMDATA_15_FLquaRMAAAAlAAAAZAAAAA0AAAAAkAAAAEgAAACQAAAASAAAAAAAAAACAAAAAAAAAAEAAABQAAAAAAAAAAAA4D8AAAAAAADgPwAAAAAAAOA/AAAAAAAA4D8AAAAAAADgPwAAAAAAAOA/AAAAAAAA4D8AAAAAAADgPwAAAAAAAOA/AAAAAAAA4D8CAAAAjAAAAAAAAAAAAAAAW5vVDP///wgAAAAAAAAAAAAAAAAAAAAAAAAAAAAAAAAAAAAAZAAAAAEAAABAAAAAAAAAAAAAAAAAAAAAAAAAAAAAAAAAAAAAAAAAAAAAAAAAAAAAAAAAAAAAAAAAAAAAAAAAAAAAAAAAAAAAAAAAAAAAAAAAAAAAAAAAAAAAAAAAAAAAFAAAADwAAAAAAAAAAAAAAAAAAAkUAAAAAQAAABQAAAAUAAAAFAAAAAEAAAAAAAAAZAAAAGQAAAAAAAAAZAAAAGQAAAAVAAAAYAAAAAAAAAAAAAAADwAAACADAAAAAAAAAAAAAAEAAACgMgAAVgcAAKr4//8BAAAAf39/AAEAAABkAAAAAAAAABQAAABAHwAAAAAAACYAAAAAAAAAwOD//wAAAAAmAAAAZAAAABYAAABMAAAAAAAAAAAAAAAEAAAAAAAAAAEAAADn5uYKAAAAACgAAAAoAAAAZAAAAGQAAAAAAAAAzMzMAAAAAABQAAAAUAAAAGQAAABkAAAAAAAAABcAAAAUAAAAAAAAAAAAAAD/fwAA/38AAAAAAAAJAAAABAAAAAAAAAAeAAAAaAAAAAAAAAAAAAAAAAAAAAAAAAAAAAAAECcAABAnAAAAAAAAAAAAAAAAAAAAAAAAAAAAAAAAAAAAAAAAAAAAABQAAAAAAAAAwMD/AAAAAABkAAAAMgAAAAAAAABkAAAAAAAAAH9/fwAKAAAAIgAAABgAAAAAAAAAAAAAAAAAAAAAAAAAAAAAAAAAAAAkAAAAJAAAAAAAAAAHAAAAAAAAAAAAAAAAAAAAAAAAAAAAAAAAAAAAf39/ACUAAABYAAAAAAAAAAAAAAAAAAAAAAAAAAAAAAAAAAAAAAAAAAAAAAAAAAAAAAAAAAAAAAA/AAAAAAAAAKCGAQAAAAAAAAAAAAAAAAAMAAAAAQAAAAAAAAAAAAAAAAAAAB8AAABUAAAAAAAABQAAAAEAAAAAAAAAAAAAAAAAAAAAAAAAAAAAAAAAAAAAAAAAAAAAAAJ/f38AAAAAA8zMzADAwP8Af39/AAAAAAAAAAAAAAAAAAAAAAAAAAAAIQAAABgAAAAUAAAAKwUAANACAABbHQAAqAwAABAAAAAmAAAACAAAAIGAAAAAAAAA"/>
+              </a:ext>
+            </a:extLst>
           </p:cNvSpPr>
           <p:nvPr>
             <p:ph type="title"/>
@@ -2197,23 +2699,52 @@
         </p:nvSpPr>
         <p:spPr>
           <a:xfrm>
-            <a:off x="839788" y="457200"/>
-            <a:ext cx="3932237" cy="1600200"/>
+            <a:off x="840105" y="457200"/>
+            <a:ext cx="3931920" cy="1600200"/>
           </a:xfrm>
         </p:spPr>
         <p:txBody>
-          <a:bodyPr anchor="b"/>
+          <a:bodyPr vert="horz" wrap="square" lIns="91440" tIns="45720" rIns="91440" bIns="45720" numCol="1" spcCol="215900" anchor="b">
+            <a:prstTxWarp prst="textNoShape">
+              <a:avLst/>
+            </a:prstTxWarp>
+          </a:bodyPr>
           <a:lstStyle>
             <a:lvl1pPr>
-              <a:defRPr sz="3200"/>
+              <a:defRPr lang="en-us" sz="3200" cap="none"/>
             </a:lvl1pPr>
+            <a:lvl2pPr>
+              <a:defRPr lang="en-us"/>
+            </a:lvl2pPr>
+            <a:lvl3pPr>
+              <a:defRPr lang="en-us"/>
+            </a:lvl3pPr>
+            <a:lvl4pPr>
+              <a:defRPr lang="en-us"/>
+            </a:lvl4pPr>
+            <a:lvl5pPr>
+              <a:defRPr lang="en-us"/>
+            </a:lvl5pPr>
+            <a:lvl6pPr>
+              <a:defRPr lang="en-us"/>
+            </a:lvl6pPr>
+            <a:lvl7pPr>
+              <a:defRPr lang="en-us"/>
+            </a:lvl7pPr>
+            <a:lvl8pPr>
+              <a:defRPr lang="en-us"/>
+            </a:lvl8pPr>
+            <a:lvl9pPr>
+              <a:defRPr lang="en-us"/>
+            </a:lvl9pPr>
           </a:lstStyle>
           <a:p>
-            <a:r>
-              <a:rPr lang="en-US" smtClean="0"/>
+            <a:pPr>
+              <a:defRPr lang="en-us"/>
+            </a:pPr>
+            <a:r>
               <a:t>Click to edit Master title style</a:t>
             </a:r>
-            <a:endParaRPr lang="en-US"/>
           </a:p>
         </p:txBody>
       </p:sp>
@@ -2221,7 +2752,12 @@
         <p:nvSpPr>
           <p:cNvPr id="3" name="Picture Placeholder 2"/>
           <p:cNvSpPr>
-            <a:spLocks noGrp="1"/>
+            <a:spLocks noGrp="1" noChangeArrowheads="1"/>
+            <a:extLst>
+              <a:ext uri="smNativeData">
+                <pr:smNativeData xmlns:pr="smNativeData" xmlns="smNativeData" val="SMDATA_15_FLquaRMAAAAlAAAAZAAAAA0AAAAAkAAAAEgAAACQAAAASAAAAAAAAAAAAAAAAAAAAAEAAABQAAAAAAAAAAAA4D8AAAAAAADgPwAAAAAAAOA/AAAAAAAA4D8AAAAAAADgPwAAAAAAAOA/AAAAAAAA4D8AAAAAAADgPwAAAAAAAOA/AAAAAAAA4D8CAAAAjAAAAAAAAAAAAAAAW5vVDP///wgAAAAAAAAAAAAAAAAAAAAAAAAAAAAAAAAAAAAAZAAAAAEAAABAAAAAAAAAAAAAAAAAAAAAAAAAAAAAAAAAAAAAAAAAAAAAAAAAAAAAAAAAAAAAAAAAAAAAAAAAAAAAAAAAAAAAAAAAAAAAAAAAAAAAAAAAAAAAAAAAAAAAFAAAADwAAAAAAAAAAAAAAAAAAAkUAAAAAQAAABQAAAAUAAAAFAAAAAEAAAAAAAAAZAAAAGQAAAAAAAAAZAAAAGQAAAAVAAAAYAAAAAAAAAAAAAAADwAAACADAAAAAAAAAAAAAAEAAACgMgAAVgcAAKr4//8BAAAAf39/AAEAAABkAAAAAAAAABQAAABAHwAAAAAAACYAAAAAAAAAwOD//wAAAAAmAAAAZAAAABYAAABMAAAAAAAAAAAAAAAEAAAAAAAAAAEAAADn5uYKAAAAACgAAAAoAAAAZAAAAGQAAAAAAAAAzMzMAAAAAABQAAAAUAAAAGQAAABkAAAAAAAAABcAAAAUAAAAAAAAAAAAAAD/fwAA/38AAAAAAAAJAAAABAAAAAAAAAAeAAAAaAAAAAAAAAAAAAAAAAAAAAAAAAAAAAAAECcAABAnAAAAAAAAAAAAAAAAAAAAAAAAAAAAAAAAAAAAAAAAAAAAABQAAAAAAAAAwMD/AAAAAABkAAAAMgAAAAAAAABkAAAAAAAAAH9/fwAKAAAAIgAAABgAAAAAAAAAAAAAAAAAAAAAAAAAAAAAAAAAAAAkAAAAJAAAAAAAAAAHAAAAAAAAAAAAAAAAAAAAAAAAAAAAAAAAAAAAf39/ACUAAABYAAAAAAAAAAAAAAAAAAAAAAAAAAAAAAAAAAAAAAAAAAAAAAAAAAAAAAAAAAAAAAA/AAAAAAAAAKCGAQAAAAAAAAAAAAAAAAAMAAAAAQAAAAAAAAAAAAAAAAAAAB8AAABUAAAAAAAABQAAAAEAAAAAAAAAAAAAAAAAAAAAAAAAAAAAAAAAAAAAAAAAAAAAAAJ/f38AAAAAA8zMzADAwP8Af39/AAAAAAAAAAAAAAAAAAAAAAAAAAAAIQAAABgAAAAUAAAA4x8AABMGAADbRQAADiQAABAAAAAmAAAACAAAAAGAAAAAAAAA"/>
+              </a:ext>
+            </a:extLst>
           </p:cNvSpPr>
           <p:nvPr>
             <p:ph type="pic" idx="1"/>
@@ -2229,7 +2765,7 @@
         </p:nvSpPr>
         <p:spPr>
           <a:xfrm>
-            <a:off x="5183188" y="987425"/>
+            <a:off x="5183505" y="987425"/>
             <a:ext cx="6172200" cy="4873625"/>
           </a:xfrm>
         </p:spPr>
@@ -2238,43 +2774,45 @@
           <a:lstStyle>
             <a:lvl1pPr marL="0" indent="0">
               <a:buNone/>
-              <a:defRPr sz="3200"/>
+              <a:defRPr lang="en-us" sz="3200" cap="none"/>
             </a:lvl1pPr>
             <a:lvl2pPr marL="457200" indent="0">
               <a:buNone/>
-              <a:defRPr sz="2800"/>
+              <a:defRPr lang="en-us" sz="2800" cap="none"/>
             </a:lvl2pPr>
             <a:lvl3pPr marL="914400" indent="0">
               <a:buNone/>
-              <a:defRPr sz="2400"/>
+              <a:defRPr lang="en-us" sz="2400" cap="none"/>
             </a:lvl3pPr>
             <a:lvl4pPr marL="1371600" indent="0">
               <a:buNone/>
-              <a:defRPr sz="2000"/>
+              <a:defRPr lang="en-us" sz="2000" cap="none"/>
             </a:lvl4pPr>
             <a:lvl5pPr marL="1828800" indent="0">
               <a:buNone/>
-              <a:defRPr sz="2000"/>
+              <a:defRPr lang="en-us" sz="2000" cap="none"/>
             </a:lvl5pPr>
             <a:lvl6pPr marL="2286000" indent="0">
               <a:buNone/>
-              <a:defRPr sz="2000"/>
+              <a:defRPr lang="en-us" sz="2000" cap="none"/>
             </a:lvl6pPr>
             <a:lvl7pPr marL="2743200" indent="0">
               <a:buNone/>
-              <a:defRPr sz="2000"/>
+              <a:defRPr lang="en-us" sz="2000" cap="none"/>
             </a:lvl7pPr>
             <a:lvl8pPr marL="3200400" indent="0">
               <a:buNone/>
-              <a:defRPr sz="2000"/>
+              <a:defRPr lang="en-us" sz="2000" cap="none"/>
             </a:lvl8pPr>
             <a:lvl9pPr marL="3657600" indent="0">
               <a:buNone/>
-              <a:defRPr sz="2000"/>
+              <a:defRPr lang="en-us" sz="2000" cap="none"/>
             </a:lvl9pPr>
           </a:lstStyle>
           <a:p>
-            <a:endParaRPr lang="en-US"/>
+            <a:pPr>
+              <a:defRPr lang="en-us"/>
+            </a:pPr>
           </a:p>
         </p:txBody>
       </p:sp>
@@ -2282,16 +2820,21 @@
         <p:nvSpPr>
           <p:cNvPr id="4" name="Text Placeholder 3"/>
           <p:cNvSpPr>
-            <a:spLocks noGrp="1"/>
-          </p:cNvSpPr>
-          <p:nvPr>
-            <p:ph type="body" sz="half" idx="2"/>
+            <a:spLocks noGrp="1" noChangeArrowheads="1"/>
+            <a:extLst>
+              <a:ext uri="smNativeData">
+                <pr:smNativeData xmlns:pr="smNativeData" xmlns="smNativeData" val="SMDATA_15_FLquaRMAAAAlAAAAZAAAAA0AAAAAkAAAAEgAAACQAAAASAAAAAAAAAAAAAAAAAAAAAEAAABQAAAAAAAAAAAA4D8AAAAAAADgPwAAAAAAAOA/AAAAAAAA4D8AAAAAAADgPwAAAAAAAOA/AAAAAAAA4D8AAAAAAADgPwAAAAAAAOA/AAAAAAAA4D8CAAAAjAAAAAAAAAAAAAAAW5vVDP///wgAAAAAAAAAAAAAAAAAAAAAAAAAAAAAAAAAAAAAZAAAAAEAAABAAAAAAAAAAAAAAAAAAAAAAAAAAAAAAAAAAAAAAAAAAAAAAAAAAAAAAAAAAAAAAAAAAAAAAAAAAAAAAAAAAAAAAAAAAAAAAAAAAAAAAAAAAAAAAAAAAAAAFAAAADwAAAAAAAAAAAAAAAAAAAkUAAAAAQAAABQAAAAUAAAAFAAAAAEAAAAAAAAAZAAAAGQAAAAAAAAAZAAAAGQAAAAVAAAAYAAAAAAAAAAAAAAADwAAACADAAAAAAAAAAAAAAEAAACgMgAAVgcAAKr4//8BAAAAf39/AAEAAABkAAAAAAAAABQAAABAHwAAAAAAACYAAAAAAAAAwOD//wAAAAAmAAAAZAAAABYAAABMAAAAAAAAAAAAAAAEAAAAAAAAAAEAAADn5uYKAAAAACgAAAAoAAAAZAAAAGQAAAAAAAAAzMzMAAAAAABQAAAAUAAAAGQAAABkAAAAAAAAABcAAAAUAAAAAAAAAAAAAAD/fwAA/38AAAAAAAAJAAAABAAAAAAAAAAeAAAAaAAAAAAAAAAAAAAAAAAAAAAAAAAAAAAAECcAABAnAAAAAAAAAAAAAAAAAAAAAAAAAAAAAAAAAAAAAAAAAAAAABQAAAAAAAAAwMD/AAAAAABkAAAAMgAAAAAAAABkAAAAAAAAAH9/fwAKAAAAIgAAABgAAAAAAAAAAAAAAAAAAAAAAAAAAAAAAAAAAAAkAAAAJAAAAAAAAAAHAAAAAAAAAAAAAAAAAAAAAAAAAAAAAAAAAAAAf39/ACUAAABYAAAAAAAAAAAAAAAAAAAAAAAAAAAAAAAAAAAAAAAAAAAAAAAAAAAAAAAAAAAAAAA/AAAAAAAAAKCGAQAAAAAAAAAAAAAAAAAMAAAAAQAAAAAAAAAAAAAAAAAAAB8AAABUAAAAAAAABQAAAAEAAAAAAAAAAAAAAAAAAAAAAAAAAAAAAAAAAAAAAAAAAAAAAAJ/f38AAAAAA8zMzADAwP8Af39/AAAAAAAAAAAAAAAAAAAAAAAAAAAAIQAAABgAAAAUAAAAKwUAAKgMAABbHQAAGyQAABAAAAAmAAAACAAAAAGAAAAAAAAA"/>
+              </a:ext>
+            </a:extLst>
+          </p:cNvSpPr>
+          <p:nvPr>
+            <p:ph idx="2"/>
           </p:nvPr>
         </p:nvSpPr>
         <p:spPr>
           <a:xfrm>
-            <a:off x="839788" y="2057400"/>
-            <a:ext cx="3932237" cy="3811588"/>
+            <a:off x="840105" y="2057400"/>
+            <a:ext cx="3931920" cy="3811905"/>
           </a:xfrm>
         </p:spPr>
         <p:txBody>
@@ -2299,45 +2842,46 @@
           <a:lstStyle>
             <a:lvl1pPr marL="0" indent="0">
               <a:buNone/>
-              <a:defRPr sz="1600"/>
+              <a:defRPr lang="en-us" sz="1600" cap="none"/>
             </a:lvl1pPr>
             <a:lvl2pPr marL="457200" indent="0">
               <a:buNone/>
-              <a:defRPr sz="1400"/>
+              <a:defRPr lang="en-us" sz="1400" cap="none"/>
             </a:lvl2pPr>
             <a:lvl3pPr marL="914400" indent="0">
               <a:buNone/>
-              <a:defRPr sz="1200"/>
+              <a:defRPr lang="en-us" sz="1200" cap="none"/>
             </a:lvl3pPr>
             <a:lvl4pPr marL="1371600" indent="0">
               <a:buNone/>
-              <a:defRPr sz="1000"/>
+              <a:defRPr lang="en-us" sz="1000" cap="none"/>
             </a:lvl4pPr>
             <a:lvl5pPr marL="1828800" indent="0">
               <a:buNone/>
-              <a:defRPr sz="1000"/>
+              <a:defRPr lang="en-us" sz="1000" cap="none"/>
             </a:lvl5pPr>
             <a:lvl6pPr marL="2286000" indent="0">
               <a:buNone/>
-              <a:defRPr sz="1000"/>
+              <a:defRPr lang="en-us" sz="1000" cap="none"/>
             </a:lvl6pPr>
             <a:lvl7pPr marL="2743200" indent="0">
               <a:buNone/>
-              <a:defRPr sz="1000"/>
+              <a:defRPr lang="en-us" sz="1000" cap="none"/>
             </a:lvl7pPr>
             <a:lvl8pPr marL="3200400" indent="0">
               <a:buNone/>
-              <a:defRPr sz="1000"/>
+              <a:defRPr lang="en-us" sz="1000" cap="none"/>
             </a:lvl8pPr>
             <a:lvl9pPr marL="3657600" indent="0">
               <a:buNone/>
-              <a:defRPr sz="1000"/>
+              <a:defRPr lang="en-us" sz="1000" cap="none"/>
             </a:lvl9pPr>
           </a:lstStyle>
           <a:p>
-            <a:pPr lvl="0"/>
-            <a:r>
-              <a:rPr lang="en-US" smtClean="0"/>
+            <a:pPr>
+              <a:defRPr lang="en-us"/>
+            </a:pPr>
+            <a:r>
               <a:t>Click to edit Master text styles</a:t>
             </a:r>
           </a:p>
@@ -2347,7 +2891,12 @@
         <p:nvSpPr>
           <p:cNvPr id="5" name="Date Placeholder 4"/>
           <p:cNvSpPr>
-            <a:spLocks noGrp="1"/>
+            <a:spLocks noGrp="1" noChangeArrowheads="1"/>
+            <a:extLst>
+              <a:ext uri="smNativeData">
+                <pr:smNativeData xmlns:pr="smNativeData" xmlns="smNativeData" val="SMDATA_15_FLquaRMAAAAlAAAAZAAAAA0AAAAAkAAAAEgAAACQAAAASAAAAAAAAAABAAAAAAAAAAEAAABQAAAAAAAAAAAA4D8AAAAAAADgPwAAAAAAAOA/AAAAAAAA4D8AAAAAAADgPwAAAAAAAOA/AAAAAAAA4D8AAAAAAADgPwAAAAAAAOA/AAAAAAAA4D8CAAAAjAAAAAAAAAAAAAAAW5vVDP///wgAAAAAAAAAAAAAAAAAAAAAAAAAAAAAAAAAAAAAZAAAAAEAAABAAAAAAAAAAAAAAAAAAAAAAAAAAAAAAAAAAAAAAAAAAAAAAAAAAAAAAAAAAAAAAAAAAAAAAAAAAAAAAAAAAAAAAAAAAAAAAAAAAAAAAAAAAAAAAAAAAAAAFAAAADwAAAAAAAAAAAAAAAAAAAkUAAAAAQAAABQAAAAUAAAAFAAAAAEAAAAAAAAAZAAAAGQAAAAAAAAAZAAAAGQAAAAVAAAAYAAAAAAAAAAAAAAADwAAACADAAAAAAAAAAAAAAEAAACgMgAAVgcAAKr4//8BAAAAf39/AAEAAABkAAAAAAAAABQAAABAHwAAAAAAACYAAAAAAAAAwOD//wAAAAAmAAAAZAAAABYAAABMAAAAAAAAAAAAAAAEAAAAAAAAAAEAAADn5uYKAAAAACgAAAAoAAAAZAAAAGQAAAAAAAAAzMzMAAAAAABQAAAAUAAAAGQAAABkAAAAAAAAABcAAAAUAAAAAAAAAAAAAAD/fwAA/38AAAAAAAAJAAAABAAAAAAAAAAeAAAAaAAAAAAAAAAAAAAAAAAAAAAAAAAAAAAAECcAABAnAAAAAAAAAAAAAAAAAAAAAAAAAAAAAAAAAAAAAAAAAAAAABQAAAAAAAAAwMD/AAAAAABkAAAAMgAAAAAAAABkAAAAAAAAAH9/fwAKAAAAIgAAABgAAAAAAAAAAAAAAAAAAAAAAAAAAAAAAAAAAAAkAAAAJAAAAAAAAAAHAAAAAAAAAAAAAAAAAAAAAAAAAAAAAAAAAAAAf39/ACUAAABYAAAAAAAAAAAAAAAAAAAAAAAAAAAAAAAAAAAAAAAAAAAAAAAAAAAAAAAAAAAAAAA/AAAAAAAAAKCGAQAAAAAAAAAAAAAAAAAMAAAAAQAAAAAAAAAAAAAAAAAAAB8AAABUAAAAAAAABQAAAAEAAAAAAAAAAAAAAAAAAAAAAAAAAAAAAAAAAAAAAAAAAAAAAAJ/f38AAAAAA8zMzADAwP8Af39/AAAAAAAAAAAAAAAAAAAAAAAAAAAAIQAAABgAAAAUAAAAKAUAABonAAAIFgAAWSkAABAAAAAmAAAACAAAAAAAAAAAAAAA"/>
+              </a:ext>
+            </a:extLst>
           </p:cNvSpPr>
           <p:nvPr>
             <p:ph type="dt" sz="half" idx="10"/>
@@ -2358,11 +2907,12 @@
           <a:bodyPr/>
           <a:lstStyle/>
           <a:p>
-            <a:fld id="{77AD5A0D-32F9-42A2-946C-433A90366567}" type="datetimeFigureOut">
-              <a:rPr lang="en-US" smtClean="0"/>
-              <a:t>6/13/2025</a:t>
+            <a:pPr>
+              <a:defRPr lang="en-us"/>
+            </a:pPr>
+            <a:fld id="{30AED7AD-E3DD-FB21-9316-157499586540}" type="datetime1">
+              <a:t>3/4/2026</a:t>
             </a:fld>
-            <a:endParaRPr lang="en-US"/>
           </a:p>
         </p:txBody>
       </p:sp>
@@ -2370,7 +2920,12 @@
         <p:nvSpPr>
           <p:cNvPr id="6" name="Footer Placeholder 5"/>
           <p:cNvSpPr>
-            <a:spLocks noGrp="1"/>
+            <a:spLocks noGrp="1" noChangeArrowheads="1"/>
+            <a:extLst>
+              <a:ext uri="smNativeData">
+                <pr:smNativeData xmlns:pr="smNativeData" xmlns="smNativeData" val="SMDATA_15_FLquaRMAAAAlAAAAZAAAAA0AAAAAkAAAAEgAAACQAAAASAAAAAAAAAABAAAAAAAAAAEAAABQAAAAAAAAAAAA4D8AAAAAAADgPwAAAAAAAOA/AAAAAAAA4D8AAAAAAADgPwAAAAAAAOA/AAAAAAAA4D8AAAAAAADgPwAAAAAAAOA/AAAAAAAA4D8CAAAAjAAAAAAAAAAAAAAAW5vVDP///wgAAAAAAAAAAAAAAAAAAAAAAAAAAAAAAAAAAAAAZAAAAAEAAABAAAAAAAAAAAAAAAAAAAAAAAAAAAAAAAAAAAAAAAAAAAAAAAAAAAAAAAAAAAAAAAAAAAAAAAAAAAAAAAAAAAAAAAAAAAAAAAAAAAAAAAAAAAAAAAAAAAAAFAAAADwAAAAAAAAAAAAAAAAAAAkUAAAAAQAAABQAAAAUAAAAFAAAAAEAAAAAAAAAZAAAAGQAAAAAAAAAZAAAAGQAAAAVAAAAYAAAAAAAAAAAAAAADwAAACADAAAAAAAAAAAAAAEAAACgMgAAVgcAAKr4//8BAAAAf39/AAEAAABkAAAAAAAAABQAAABAHwAAAAAAACYAAAAAAAAAwOD//wAAAAAmAAAAZAAAABYAAABMAAAAAAAAAAAAAAAEAAAAAAAAAAEAAADn5uYKAAAAACgAAAAoAAAAZAAAAGQAAAAAAAAAzMzMAAAAAABQAAAAUAAAAGQAAABkAAAAAAAAABcAAAAUAAAAAAAAAAAAAAD/fwAA/38AAAAAAAAJAAAABAAAAAAAAAAeAAAAaAAAAAAAAAAAAAAAAAAAAAAAAAAAAAAAECcAABAnAAAAAAAAAAAAAAAAAAAAAAAAAAAAAAAAAAAAAAAAAAAAABQAAAAAAAAAwMD/AAAAAABkAAAAMgAAAAAAAABkAAAAAAAAAH9/fwAKAAAAIgAAABgAAAAAAAAAAAAAAAAAAAAAAAAAAAAAAAAAAAAkAAAAJAAAAAAAAAAHAAAAAAAAAAAAAAAAAAAAAAAAAAAAAAAAAAAAf39/ACUAAABYAAAAAAAAAAAAAAAAAAAAAAAAAAAAAAAAAAAAAAAAAAAAAAAAAAAAAAAAAAAAAAA/AAAAAAAAAKCGAQAAAAAAAAAAAAAAAAAMAAAAAQAAAAAAAAAAAAAAAAAAAB8AAABUAAAAAAAABQAAAAEAAAAAAAAAAAAAAAAAAAAAAAAAAAAAAAAAAAAAAAAAAAAAAAJ/f38AAAAAA8zMzADAwP8Af39/AAAAAAAAAAAAAAAAAAAAAAAAAAAAIQAAABgAAAAUAAAA2BgAABonAAAoMgAAWSkAABAAAAAmAAAACAAAAAAAAAAAAAAA"/>
+              </a:ext>
+            </a:extLst>
           </p:cNvSpPr>
           <p:nvPr>
             <p:ph type="ftr" sz="quarter" idx="11"/>
@@ -2381,7 +2936,9 @@
           <a:bodyPr/>
           <a:lstStyle/>
           <a:p>
-            <a:endParaRPr lang="en-US"/>
+            <a:pPr>
+              <a:defRPr lang="en-us"/>
+            </a:pPr>
           </a:p>
         </p:txBody>
       </p:sp>
@@ -2389,7 +2946,12 @@
         <p:nvSpPr>
           <p:cNvPr id="7" name="Slide Number Placeholder 6"/>
           <p:cNvSpPr>
-            <a:spLocks noGrp="1"/>
+            <a:spLocks noGrp="1" noChangeArrowheads="1"/>
+            <a:extLst>
+              <a:ext uri="smNativeData">
+                <pr:smNativeData xmlns:pr="smNativeData" xmlns="smNativeData" val="SMDATA_15_FLquaRMAAAAlAAAAZAAAAA0AAAAAkAAAAEgAAACQAAAASAAAAAAAAAABAAAAAAAAAAEAAABQAAAAAAAAAAAA4D8AAAAAAADgPwAAAAAAAOA/AAAAAAAA4D8AAAAAAADgPwAAAAAAAOA/AAAAAAAA4D8AAAAAAADgPwAAAAAAAOA/AAAAAAAA4D8CAAAAjAAAAAAAAAAAAAAAW5vVDP///wgAAAAAAAAAAAAAAAAAAAAAAAAAAAAAAAAAAAAAZAAAAAEAAABAAAAAAAAAAAAAAAAAAAAAAAAAAAAAAAAAAAAAAAAAAAAAAAAAAAAAAAAAAAAAAAAAAAAAAAAAAAAAAAAAAAAAAAAAAAAAAAAAAAAAAAAAAAAAAAAAAAAAFAAAADwAAAAAAAAAAAAAAAAAAAkUAAAAAQAAABQAAAAUAAAAFAAAAAEAAAAAAAAAZAAAAGQAAAAAAAAAZAAAAGQAAAAVAAAAYAAAAAAAAAAAAAAADwAAACADAAAAAAAAAAAAAAEAAACgMgAAVgcAAKr4//8BAAAAf39/AAEAAABkAAAAAAAAABQAAABAHwAAAAAAACYAAAAAAAAAwOD//wAAAAAmAAAAZAAAABYAAABMAAAAAAAAAAAAAAAEAAAAAAAAAAEAAADn5uYKAAAAACgAAAAoAAAAZAAAAGQAAAAAAAAAzMzMAAAAAABQAAAAUAAAAGQAAABkAAAAAAAAABcAAAAUAAAAAAAAAAAAAAD/fwAA/38AAAAAAAAJAAAABAAAAAAAAAAeAAAAaAAAAAAAAAAAAAAAAAAAAAAAAAAAAAAAECcAABAnAAAAAAAAAAAAAAAAAAAAAAAAAAAAAAAAAAAAAAAAAAAAABQAAAAAAAAAwMD/AAAAAABkAAAAMgAAAAAAAABkAAAAAAAAAH9/fwAKAAAAIgAAABgAAAAAAAAAAAAAAAAAAAAAAAAAAAAAAAAAAAAkAAAAJAAAAAAAAAAHAAAAAAAAAAAAAAAAAAAAAAAAAAAAAAAAAAAAf39/ACUAAABYAAAAAAAAAAAAAAAAAAAAAAAAAAAAAAAAAAAAAAAAAAAAAAAAAAAAAAAAAAAAAAA/AAAAAAAAAKCGAQAAAAAAAAAAAAAAAAAMAAAAAQAAAAAAAAAAAAAAAAAAAB8AAABUAAAAAAAABQAAAAEAAAAAAAAAAAAAAAAAAAAAAAAAAAAAAAAAAAAAAAAAAAAAAAJ/f38AAAAAA8zMzADAwP8Af39/AAAAAAAAAAAAAAAAAAAAAAAAAAAAIQAAABgAAAAUAAAA+DQAABonAADYRQAAWSkAABAAAAAmAAAACAAAAAAAAAAAAAAA"/>
+              </a:ext>
+            </a:extLst>
           </p:cNvSpPr>
           <p:nvPr>
             <p:ph type="sldNum" sz="quarter" idx="12"/>
@@ -2400,34 +2962,34 @@
           <a:bodyPr/>
           <a:lstStyle/>
           <a:p>
-            <a:fld id="{2AF8EFAC-D507-4007-9634-FDE202E639CC}" type="slidenum">
-              <a:rPr lang="en-US" smtClean="0"/>
+            <a:pPr>
+              <a:defRPr lang="en-us"/>
+            </a:pPr>
+            <a:fld id="{30AE834C-02DD-FB75-9316-F420CD5865A1}" type="slidenum">
               <a:t>‹#›</a:t>
             </a:fld>
-            <a:endParaRPr lang="en-US"/>
           </a:p>
         </p:txBody>
       </p:sp>
     </p:spTree>
-    <p:extLst>
-      <p:ext uri="{BB962C8B-B14F-4D97-AF65-F5344CB8AC3E}">
-        <p14:creationId xmlns:p14="http://schemas.microsoft.com/office/powerpoint/2010/main" val="439587946"/>
-      </p:ext>
-    </p:extLst>
   </p:cSld>
   <p:clrMapOvr>
     <a:masterClrMapping/>
   </p:clrMapOvr>
+  <p:hf hdr="0" ftr="0"/>
 </p:sldLayout>
 </file>
 
 <file path=ppt/slideMasters/slideMaster1.xml><?xml version="1.0" encoding="utf-8"?>
-<p:sldMaster xmlns:a="http://schemas.openxmlformats.org/drawingml/2006/main" xmlns:r="http://schemas.openxmlformats.org/officeDocument/2006/relationships" xmlns:p="http://schemas.openxmlformats.org/presentationml/2006/main">
+<p:sldMaster xmlns:p="http://schemas.openxmlformats.org/presentationml/2006/main" xmlns:mc="http://schemas.openxmlformats.org/markup-compatibility/2006" xmlns:p14="http://schemas.microsoft.com/office/powerpoint/2010/main" xmlns:p15="http://schemas.microsoft.com/office/powerpoint/2012/main" xmlns:r="http://schemas.openxmlformats.org/officeDocument/2006/relationships" xmlns:a="http://schemas.openxmlformats.org/drawingml/2006/main">
   <p:cSld>
     <p:bg>
-      <p:bgRef idx="1001">
-        <a:schemeClr val="bg1"/>
-      </p:bgRef>
+      <p:bgPr>
+        <a:solidFill>
+          <a:schemeClr val="bg1"/>
+        </a:solidFill>
+        <a:effectLst/>
+      </p:bgPr>
     </p:bg>
     <p:spTree>
       <p:nvGrpSpPr>
@@ -2447,7 +3009,12 @@
         <p:nvSpPr>
           <p:cNvPr id="2" name="Title Placeholder 1"/>
           <p:cNvSpPr>
-            <a:spLocks noGrp="1"/>
+            <a:spLocks noGrp="1" noChangeArrowheads="1"/>
+            <a:extLst>
+              <a:ext uri="smNativeData">
+                <pr:smNativeData xmlns:pr="smNativeData" xmlns="smNativeData" val="SMDATA_15_FLquaRMAAAAlAAAAZAAAAA0AAAAAkAAAAEgAAACQAAAASAAAAAAAAAABAAAAAAAAAAEAAABQAAAAAAAAAAAA4D8AAAAAAADgPwAAAAAAAOA/AAAAAAAA4D8AAAAAAADgPwAAAAAAAOA/AAAAAAAA4D8AAAAAAADgPwAAAAAAAOA/AAAAAAAA4D8CAAAAjAAAAAAAAAAAAAAA////AP///wgAAAAAAAAAAAAAAAAAAAAAAAAAAAAAAAAAAAAAeAAAAAEAAABAAAAAAAAAAAAAAABaAAAAAAAAAAAAAAAAAAAAAAAAAAAAAAAAAAAAAAAAAAAAAAAAAAAAAAAAAAAAAAAAAAAAAAAAAAAAAAAAAAAAAAAAAAAAAAAAAAAAFAAAADwAAAAAAAAAAAAAAAAAAAAPAAAAAQAAACMAAAAjAAAAIwAAAB4AAAAAAAAAZAAAAGQAAAAAAAAAZAAAAGQAAAAVAAAAYAAAAAAAAAAAAAAADwAAACADAAAAAAAAAAAAAAEAAACgMgAAVgcAAKr4//8BAAAAf39/AAEAAABkAAAAAAAAABQAAABAHwAAAAAAACYAAAAAAAAAwOD//wAAAAAmAAAAZAAAABYAAABMAAAAAAAAAAAAAAAEAAAAAAAAAAEAAADn5uYKAAAAACgAAAAoAAAAZAAAAGQAAAAAAAAAzMzMAAAAAABQAAAAUAAAAGQAAABkAAAAAAAAABcAAAAUAAAAAAAAAAAAAAD/fwAA/38AAAAAAAAJAAAABAAAAC9zbGkeAAAAaAAAAAAAAAAAAAAAAAAAAAAAAAAAAAAAECcAABAnAAAAAAAAAAAAAAAAAAAAAAAAAAAAAAAAAAAAAAAAAAAAABQAAAAAAAAAwMD/AAAAAABkAAAAMgAAAAAAAABkAAAAAAAAAH9/fwAKAAAAIgAAABgAAAAAAAAAAAAAAAAAAAAAAAAAAAAAAAAAAAAkAAAAJAAAAAAAAAAHAAAAAAAAAAAAAAAAAAAAAAAAAAAAAAAAAAAAf39/ACUAAABYAAAAAAAAAAAAAAAAAAAAAAAAAAAAAAAAAAAAAAAAAAAAAAAAAAAAAAAAAAAAAAA/AAAAAAAAAKCGAQAAAAAAAAAAAAAAAAAMAAAAAQAAAAAAAAAAAAAAAAAAAB8AAABUAAAA////AAAAAAEAAAAAAAAAAAAAAAAAAAAAAAAAAAAAAAAAAAAAAAAAAAAAAAB/f38AAAAAA8zMzADAwP8Af39/AAAAAAAAAAAAAAAAAAAAAAAAAAAAIQAAABgAAAAUAAAAKAUAAD8CAADYRQAAZwoAABAAAAAmAAAACAAAAL8vAAAAAAAA"/>
+              </a:ext>
+            </a:extLst>
           </p:cNvSpPr>
           <p:nvPr>
             <p:ph type="title"/>
@@ -2456,23 +3023,26 @@
         <p:spPr>
           <a:xfrm>
             <a:off x="838200" y="365125"/>
-            <a:ext cx="10515600" cy="1325563"/>
+            <a:ext cx="10515600" cy="1325880"/>
           </a:xfrm>
           <a:prstGeom prst="rect">
             <a:avLst/>
           </a:prstGeom>
         </p:spPr>
         <p:txBody>
-          <a:bodyPr vert="horz" lIns="91440" tIns="45720" rIns="91440" bIns="45720" rtlCol="0" anchor="ctr">
-            <a:normAutofit/>
+          <a:bodyPr vert="horz" wrap="square" lIns="91440" tIns="45720" rIns="91440" bIns="45720" numCol="1" spcCol="215900" anchor="ctr">
+            <a:prstTxWarp prst="textNoShape">
+              <a:avLst/>
+            </a:prstTxWarp>
           </a:bodyPr>
           <a:lstStyle/>
           <a:p>
-            <a:r>
-              <a:rPr lang="en-US" smtClean="0"/>
+            <a:pPr>
+              <a:defRPr lang="en-us"/>
+            </a:pPr>
+            <a:r>
               <a:t>Click to edit Master title style</a:t>
             </a:r>
-            <a:endParaRPr lang="en-US"/>
           </a:p>
         </p:txBody>
       </p:sp>
@@ -2480,7 +3050,12 @@
         <p:nvSpPr>
           <p:cNvPr id="3" name="Text Placeholder 2"/>
           <p:cNvSpPr>
-            <a:spLocks noGrp="1"/>
+            <a:spLocks noGrp="1" noChangeArrowheads="1"/>
+            <a:extLst>
+              <a:ext uri="smNativeData">
+                <pr:smNativeData xmlns:pr="smNativeData" xmlns="smNativeData" val="SMDATA_15_FLquaRMAAAAlAAAAZAAAAA0AAAAAkAAAAEgAAACQAAAASAAAAAAAAAAAAAAAAAAAAAEAAABQAAAAAAAAAAAA4D8AAAAAAADgPwAAAAAAAOA/AAAAAAAA4D8AAAAAAADgPwAAAAAAAOA/AAAAAAAA4D8AAAAAAADgPwAAAAAAAOA/AAAAAAAA4D8CAAAAjAAAAAAAAAAAAAAA////AP///wgAAAAAAAAAAAAAAAAAAAAAAAAAAAAAAAAAAAAAeAAAAAEAAABAAAAAAAAAAAAAAABaAAAAAAAAAAAAAAAAAAAAAAAAAAAAAAAAAAAAAAAAAAAAAAAAAAAAAAAAAAAAAAAAAAAAAAAAAAAAAAAAAAAAAAAAAAAAAAAAAAAAFAAAADwAAAAAAAAAAAAAAAAAAAAPAAAAAQAAACMAAAAjAAAAIwAAAB4AAAAAAAAAZAAAAGQAAAAAAAAAZAAAAGQAAAAVAAAAYAAAAAAAAAAAAAAADwAAACADAAAAAAAAAAAAAAEAAACgMgAAVgcAAKr4//8BAAAAf39/AAEAAABkAAAAAAAAABQAAABAHwAAAAAAACYAAAAAAAAAwOD//wAAAAAmAAAAZAAAABYAAABMAAAAAAAAAAAAAAAEAAAAAAAAAAEAAADn5uYKAAAAACgAAAAoAAAAZAAAAGQAAAAAAAAAzMzMAAAAAABQAAAAUAAAAGQAAABkAAAAAAAAABcAAAAUAAAAAAAAAAAAAAD/fwAA/38AAAAAAAAJAAAABAAAAPz///8eAAAAaAAAAAAAAAAAAAAAAAAAAAAAAAAAAAAAECcAABAnAAAAAAAAAAAAAAAAAAAAAAAAAAAAAAAAAAAAAAAAAAAAABQAAAAAAAAAwMD/AAAAAABkAAAAMgAAAAAAAABkAAAAAAAAAH9/fwAKAAAAIgAAABgAAAAAAAAAAAAAAAAAAAAAAAAAAAAAAAAAAAAkAAAAJAAAAAAAAAAHAAAAAAAAAAAAAAAAAAAAAAAAAAAAAAAAAAAAf39/ACUAAABYAAAAAAAAAAAAAAAAAAAAAAAAAAAAAAAAAAAAAAAAAAAAAAAAAAAAAAAAAAAAAAA/AAAAAAAAAKCGAQAAAAAAAAAAAAAAAAAMAAAAAQAAAAAAAAAAAAAAAAAAAB8AAABUAAAA////AAAAAAEAAAAAAAAAAAAAAAAAAAAAAAAAAAAAAAAAAAAAAAAAAAAAAAB/f38AAAAAA8zMzADAwP8Af39/AAAAAAAAAAAAAAAAAAAAAAAAAAAAIQAAABgAAAAUAAAAKAUAADsLAADYRQAAACYAABAAAAAmAAAACAAAAD8vAAAAAAAA"/>
+              </a:ext>
+            </a:extLst>
           </p:cNvSpPr>
           <p:nvPr>
             <p:ph type="body" idx="1"/>
@@ -2489,52 +3064,58 @@
         <p:spPr>
           <a:xfrm>
             <a:off x="838200" y="1825625"/>
-            <a:ext cx="10515600" cy="4351338"/>
+            <a:ext cx="10515600" cy="4351655"/>
           </a:xfrm>
           <a:prstGeom prst="rect">
             <a:avLst/>
           </a:prstGeom>
         </p:spPr>
         <p:txBody>
-          <a:bodyPr vert="horz" lIns="91440" tIns="45720" rIns="91440" bIns="45720" rtlCol="0">
-            <a:normAutofit/>
+          <a:bodyPr vert="horz" wrap="square" lIns="91440" tIns="45720" rIns="91440" bIns="45720" numCol="1" spcCol="215900" anchor="t">
+            <a:prstTxWarp prst="textNoShape">
+              <a:avLst/>
+            </a:prstTxWarp>
           </a:bodyPr>
           <a:lstStyle/>
           <a:p>
-            <a:pPr lvl="0"/>
-            <a:r>
-              <a:rPr lang="en-US" smtClean="0"/>
+            <a:pPr>
+              <a:defRPr lang="en-us"/>
+            </a:pPr>
+            <a:r>
               <a:t>Click to edit Master text styles</a:t>
             </a:r>
           </a:p>
           <a:p>
-            <a:pPr lvl="1"/>
-            <a:r>
-              <a:rPr lang="en-US" smtClean="0"/>
+            <a:pPr lvl="1">
+              <a:defRPr lang="en-us"/>
+            </a:pPr>
+            <a:r>
               <a:t>Second level</a:t>
             </a:r>
           </a:p>
           <a:p>
-            <a:pPr lvl="2"/>
-            <a:r>
-              <a:rPr lang="en-US" smtClean="0"/>
+            <a:pPr lvl="2">
+              <a:defRPr lang="en-us"/>
+            </a:pPr>
+            <a:r>
               <a:t>Third level</a:t>
             </a:r>
           </a:p>
           <a:p>
-            <a:pPr lvl="3"/>
-            <a:r>
-              <a:rPr lang="en-US" smtClean="0"/>
+            <a:pPr lvl="3">
+              <a:defRPr lang="en-us"/>
+            </a:pPr>
+            <a:r>
               <a:t>Fourth level</a:t>
             </a:r>
           </a:p>
           <a:p>
-            <a:pPr lvl="4"/>
-            <a:r>
-              <a:rPr lang="en-US" smtClean="0"/>
+            <a:pPr lvl="4">
+              <a:defRPr lang="en-us"/>
+            </a:pPr>
+            <a:r>
               <a:t>Fifth level</a:t>
             </a:r>
-            <a:endParaRPr lang="en-US"/>
           </a:p>
         </p:txBody>
       </p:sp>
@@ -2542,7 +3123,12 @@
         <p:nvSpPr>
           <p:cNvPr id="4" name="Date Placeholder 3"/>
           <p:cNvSpPr>
-            <a:spLocks noGrp="1"/>
+            <a:spLocks noGrp="1" noChangeArrowheads="1"/>
+            <a:extLst>
+              <a:ext uri="smNativeData">
+                <pr:smNativeData xmlns:pr="smNativeData" xmlns="smNativeData" val="SMDATA_15_FLquaRMAAAAlAAAAZAAAAA0AAAAAkAAAAEgAAACQAAAASAAAAAAAAAABAAAAAAAAAAEAAABQAAAAAAAAAAAA4D8AAAAAAADgPwAAAAAAAOA/AAAAAAAA4D8AAAAAAADgPwAAAAAAAOA/AAAAAAAA4D8AAAAAAADgPwAAAAAAAOA/AAAAAAAA4D8CAAAAjAAAAAAAAAAAAAAA////AP///wgAAAAAAAAAAAAAAAAAAAAAAAAAAAAAAAAAAAAAeAAAAAEAAABAAAAAAAAAAAAAAABaAAAAAAAAAAAAAAAAAAAAAAAAAAAAAAAAAAAAAAAAAAAAAAAAAAAAAAAAAAAAAAAAAAAAAAAAAAAAAAAAAAAAAAAAAAAAAAAAAAAAFAAAADwAAAAAAAAAAAAAAAAAAAAPAAAAAQAAACMAAAAjAAAAIwAAAB4AAAAAAAAAZAAAAGQAAAAAAAAAZAAAAGQAAAAVAAAAYAAAAAAAAAAAAAAADwAAACADAAAAAAAAAAAAAAEAAACgMgAAVgcAAKr4//8BAAAAf39/AAEAAABkAAAAAAAAABQAAABAHwAAAAAAACYAAAAAAAAAwOD//wAAAAAmAAAAZAAAABYAAABMAAAAAAAAAAAAAAAEAAAAAAAAAAEAAADn5uYKAAAAACgAAAAoAAAAZAAAAGQAAAAAAAAAzMzMAAAAAABQAAAAUAAAAGQAAABkAAAAAAAAABcAAAAUAAAAAAAAAAAAAAD/fwAA/38AAAAAAAAJAAAABAAAAPz///8eAAAAaAAAAAAAAAAAAAAAAAAAAAAAAAAAAAAAECcAABAnAAAAAAAAAAAAAAAAAAAAAAAAAAAAAAAAAAAAAAAAAAAAABQAAAAAAAAAwMD/AAAAAABkAAAAMgAAAAAAAABkAAAAAAAAAH9/fwAKAAAAIgAAABgAAAAAAAAAAAAAAAAAAAAAAAAAAAAAAAAAAAAkAAAAJAAAAAAAAAAHAAAAAAAAAAAAAAAAAAAAAAAAAAAAAAAAAAAAf39/ACUAAABYAAAAAAAAAAAAAAAAAAAAAAAAAAAAAAAAAAAAAAAAAAAAAAAAAAAAAAAAAAAAAAA/AAAAAAAAAKCGAQAAAAAAAAAAAAAAAAAMAAAAAQAAAAAAAAAAAAAAAAAAAB8AAABUAAAA////AAAAAAEAAAAAAAAAAAAAAAAAAAAAAAAAAAAAAAAAAAAAAAAAAAAAAAB/f38AAAAAA8zMzADAwP8Af39/AAAAAAAAAAAAAAAAAAAAAAAAAAAAIQAAABgAAAAUAAAAKAUAABonAAAIFgAAWSkAABAAAAAmAAAACAAAAL+PAAAAAAAA"/>
+              </a:ext>
+            </a:extLst>
           </p:cNvSpPr>
           <p:nvPr>
             <p:ph type="dt" sz="half" idx="2"/>
@@ -2558,24 +3144,51 @@
           </a:prstGeom>
         </p:spPr>
         <p:txBody>
-          <a:bodyPr vert="horz" lIns="91440" tIns="45720" rIns="91440" bIns="45720" rtlCol="0" anchor="ctr"/>
+          <a:bodyPr vert="horz" wrap="square" lIns="91440" tIns="45720" rIns="91440" bIns="45720" numCol="1" spcCol="215900" anchor="ctr">
+            <a:prstTxWarp prst="textNoShape">
+              <a:avLst/>
+            </a:prstTxWarp>
+          </a:bodyPr>
           <a:lstStyle>
             <a:lvl1pPr algn="l">
-              <a:defRPr sz="1200">
+              <a:defRPr lang="en-us" sz="1200" cap="none">
                 <a:solidFill>
-                  <a:schemeClr val="tx1">
-                    <a:tint val="75000"/>
-                  </a:schemeClr>
+                  <a:srgbClr val="8C8C8C"/>
                 </a:solidFill>
               </a:defRPr>
             </a:lvl1pPr>
+            <a:lvl2pPr>
+              <a:defRPr lang="en-us"/>
+            </a:lvl2pPr>
+            <a:lvl3pPr>
+              <a:defRPr lang="en-us"/>
+            </a:lvl3pPr>
+            <a:lvl4pPr>
+              <a:defRPr lang="en-us"/>
+            </a:lvl4pPr>
+            <a:lvl5pPr>
+              <a:defRPr lang="en-us"/>
+            </a:lvl5pPr>
+            <a:lvl6pPr>
+              <a:defRPr lang="en-us"/>
+            </a:lvl6pPr>
+            <a:lvl7pPr>
+              <a:defRPr lang="en-us"/>
+            </a:lvl7pPr>
+            <a:lvl8pPr>
+              <a:defRPr lang="en-us"/>
+            </a:lvl8pPr>
+            <a:lvl9pPr>
+              <a:defRPr lang="en-us"/>
+            </a:lvl9pPr>
           </a:lstStyle>
           <a:p>
-            <a:fld id="{77AD5A0D-32F9-42A2-946C-433A90366567}" type="datetimeFigureOut">
-              <a:rPr lang="en-US" smtClean="0"/>
-              <a:t>6/13/2025</a:t>
+            <a:pPr>
+              <a:defRPr lang="en-us"/>
+            </a:pPr>
+            <a:fld id="{30AEB9DD-93DD-FB4F-9316-651AF7586530}" type="datetime1">
+              <a:t/>
             </a:fld>
-            <a:endParaRPr lang="en-US"/>
           </a:p>
         </p:txBody>
       </p:sp>
@@ -2583,7 +3196,12 @@
         <p:nvSpPr>
           <p:cNvPr id="5" name="Footer Placeholder 4"/>
           <p:cNvSpPr>
-            <a:spLocks noGrp="1"/>
+            <a:spLocks noGrp="1" noChangeArrowheads="1"/>
+            <a:extLst>
+              <a:ext uri="smNativeData">
+                <pr:smNativeData xmlns:pr="smNativeData" xmlns="smNativeData" val="SMDATA_15_FLquaRMAAAAlAAAAZAAAAA0AAAAAkAAAAEgAAACQAAAASAAAAAAAAAABAAAAAAAAAAEAAABQAAAAAAAAAAAA4D8AAAAAAADgPwAAAAAAAOA/AAAAAAAA4D8AAAAAAADgPwAAAAAAAOA/AAAAAAAA4D8AAAAAAADgPwAAAAAAAOA/AAAAAAAA4D8CAAAAjAAAAAAAAAAAAAAA////AP///wgAAAAAAAAAAAAAAAAAAAAAAAAAAAAAAAAAAAAAeAAAAAEAAABAAAAAAAAAAAAAAABaAAAAAAAAAAAAAAAAAAAAAAAAAAAAAAAAAAAAAAAAAAAAAAAAAAAAAAAAAAAAAAAAAAAAAAAAAAAAAAAAAAAAAAAAAAAAAAAAAAAAFAAAADwAAAAAAAAAAAAAAAAAAAAPAAAAAQAAACMAAAAjAAAAIwAAAB4AAAAAAAAAZAAAAGQAAAAAAAAAZAAAAGQAAAAVAAAAYAAAAAAAAAAAAAAADwAAACADAAAAAAAAAAAAAAEAAACgMgAAVgcAAKr4//8BAAAAf39/AAEAAABkAAAAAAAAABQAAABAHwAAAAAAACYAAAAAAAAAwOD//wAAAAAmAAAAZAAAABYAAABMAAAAAAAAAAAAAAAEAAAAAAAAAAEAAADn5uYKAAAAACgAAAAoAAAAZAAAAGQAAAAAAAAAzMzMAAAAAABQAAAAUAAAAGQAAABkAAAAAAAAABcAAAAUAAAAAAAAAAAAAAD/fwAA/38AAAAAAAAJAAAABAAAAGxpY2keAAAAaAAAAAAAAAAAAAAAAAAAAAAAAAAAAAAAECcAABAnAAAAAAAAAAAAAAAAAAAAAAAAAAAAAAAAAAAAAAAAAAAAABQAAAAAAAAAwMD/AAAAAABkAAAAMgAAAAAAAABkAAAAAAAAAH9/fwAKAAAAIgAAABgAAAAAAAAAAAAAAAAAAAAAAAAAAAAAAAAAAAAkAAAAJAAAAAAAAAAHAAAAAAAAAAAAAAAAAAAAAAAAAAAAAAAAAAAAf39/ACUAAABYAAAAAAAAAAAAAAAAAAAAAAAAAAAAAAAAAAAAAAAAAAAAAAAAAAAAAAAAAAAAAAA/AAAAAAAAAKCGAQAAAAAAAAAAAAAAAAAMAAAAAQAAAAAAAAAAAAAAAAAAAB8AAABUAAAA////AAAAAAEAAAAAAAAAAAAAAAAAAAAAAAAAAAAAAAAAAAAAAAAAAAAAAAB/f38AAAAAA8zMzADAwP8Af39/AAAAAAAAAAAAAAAAAAAAAAAAAAAAIQAAABgAAAAUAAAA2BgAABonAAAoMgAAWSkAABAAAAAmAAAACAAAAL+PAAAAAAAA"/>
+              </a:ext>
+            </a:extLst>
           </p:cNvSpPr>
           <p:nvPr>
             <p:ph type="ftr" sz="quarter" idx="3"/>
@@ -2599,20 +3217,48 @@
           </a:prstGeom>
         </p:spPr>
         <p:txBody>
-          <a:bodyPr vert="horz" lIns="91440" tIns="45720" rIns="91440" bIns="45720" rtlCol="0" anchor="ctr"/>
+          <a:bodyPr vert="horz" wrap="square" lIns="91440" tIns="45720" rIns="91440" bIns="45720" numCol="1" spcCol="215900" anchor="ctr">
+            <a:prstTxWarp prst="textNoShape">
+              <a:avLst/>
+            </a:prstTxWarp>
+          </a:bodyPr>
           <a:lstStyle>
             <a:lvl1pPr algn="ctr">
-              <a:defRPr sz="1200">
+              <a:defRPr lang="en-us" sz="1200" cap="none">
                 <a:solidFill>
-                  <a:schemeClr val="tx1">
-                    <a:tint val="75000"/>
-                  </a:schemeClr>
+                  <a:srgbClr val="8C8C8C"/>
                 </a:solidFill>
               </a:defRPr>
             </a:lvl1pPr>
+            <a:lvl2pPr>
+              <a:defRPr lang="en-us"/>
+            </a:lvl2pPr>
+            <a:lvl3pPr>
+              <a:defRPr lang="en-us"/>
+            </a:lvl3pPr>
+            <a:lvl4pPr>
+              <a:defRPr lang="en-us"/>
+            </a:lvl4pPr>
+            <a:lvl5pPr>
+              <a:defRPr lang="en-us"/>
+            </a:lvl5pPr>
+            <a:lvl6pPr>
+              <a:defRPr lang="en-us"/>
+            </a:lvl6pPr>
+            <a:lvl7pPr>
+              <a:defRPr lang="en-us"/>
+            </a:lvl7pPr>
+            <a:lvl8pPr>
+              <a:defRPr lang="en-us"/>
+            </a:lvl8pPr>
+            <a:lvl9pPr>
+              <a:defRPr lang="en-us"/>
+            </a:lvl9pPr>
           </a:lstStyle>
           <a:p>
-            <a:endParaRPr lang="en-US"/>
+            <a:pPr>
+              <a:defRPr lang="en-us"/>
+            </a:pPr>
           </a:p>
         </p:txBody>
       </p:sp>
@@ -2620,7 +3266,12 @@
         <p:nvSpPr>
           <p:cNvPr id="6" name="Slide Number Placeholder 5"/>
           <p:cNvSpPr>
-            <a:spLocks noGrp="1"/>
+            <a:spLocks noGrp="1" noChangeArrowheads="1"/>
+            <a:extLst>
+              <a:ext uri="smNativeData">
+                <pr:smNativeData xmlns:pr="smNativeData" xmlns="smNativeData" val="SMDATA_15_FLquaRMAAAAlAAAAZAAAAA0AAAAAkAAAAEgAAACQAAAASAAAAAAAAAABAAAAAAAAAAEAAABQAAAAAAAAAAAA4D8AAAAAAADgPwAAAAAAAOA/AAAAAAAA4D8AAAAAAADgPwAAAAAAAOA/AAAAAAAA4D8AAAAAAADgPwAAAAAAAOA/AAAAAAAA4D8CAAAAjAAAAAAAAAAAAAAA////AP///wgAAAAAAAAAAAAAAAAAAAAAAAAAAAAAAAAAAAAAeAAAAAEAAABAAAAAAAAAAAAAAABaAAAAAAAAAAAAAAAAAAAAAAAAAAAAAAAAAAAAAAAAAAAAAAAAAAAAAAAAAAAAAAAAAAAAAAAAAAAAAAAAAAAAAAAAAAAAAAAAAAAAFAAAADwAAAAAAAAAAAAAAAAAAAAPAAAAAQAAACMAAAAjAAAAIwAAAB4AAAAAAAAAZAAAAGQAAAAAAAAAZAAAAGQAAAAVAAAAYAAAAAAAAAAAAAAADwAAACADAAAAAAAAAAAAAAEAAACgMgAAVgcAAKr4//8BAAAAf39/AAEAAABkAAAAAAAAABQAAABAHwAAAAAAACYAAAAAAAAAwOD//wAAAAAmAAAAZAAAABYAAABMAAAAAAAAAAAAAAAEAAAAAAAAAAEAAADn5uYKAAAAACgAAAAoAAAAZAAAAGQAAAAAAAAAzMzMAAAAAABQAAAAUAAAAGQAAABkAAAAAAAAABcAAAAUAAAAAAAAAAAAAAD/fwAA/38AAAAAAAAJAAAABAAAAPz///8eAAAAaAAAAAAAAAAAAAAAAAAAAAAAAAAAAAAAECcAABAnAAAAAAAAAAAAAAAAAAAAAAAAAAAAAAAAAAAAAAAAAAAAABQAAAAAAAAAwMD/AAAAAABkAAAAMgAAAAAAAABkAAAAAAAAAH9/fwAKAAAAIgAAABgAAAAAAAAAAAAAAAAAAAAAAAAAAAAAAAAAAAAkAAAAJAAAAAAAAAAHAAAAAAAAAAAAAAAAAAAAAAAAAAAAAAAAAAAAf39/ACUAAABYAAAAAAAAAAAAAAAAAAAAAAAAAAAAAAAAAAAAAAAAAAAAAAAAAAAAAAAAAAAAAAA/AAAAAAAAAKCGAQAAAAAAAAAAAAAAAAAMAAAAAQAAAAAAAAAAAAAAAAAAAB8AAABUAAAA////AAAAAAEAAAAAAAAAAAAAAAAAAAAAAAAAAAAAAAAAAAAAAAAAAAAAAAB/f38AAAAAA8zMzADAwP8Af39/AAAAAAAAAAAAAAAAAAAAAAAAAAAAIQAAABgAAAAUAAAA+DQAABonAADYRQAAWSkAABAAAAAmAAAACAAAAL+PAAAAAAAA"/>
+              </a:ext>
+            </a:extLst>
           </p:cNvSpPr>
           <p:nvPr>
             <p:ph type="sldNum" sz="quarter" idx="4"/>
@@ -2636,33 +3287,55 @@
           </a:prstGeom>
         </p:spPr>
         <p:txBody>
-          <a:bodyPr vert="horz" lIns="91440" tIns="45720" rIns="91440" bIns="45720" rtlCol="0" anchor="ctr"/>
+          <a:bodyPr vert="horz" wrap="square" lIns="91440" tIns="45720" rIns="91440" bIns="45720" numCol="1" spcCol="215900" anchor="ctr">
+            <a:prstTxWarp prst="textNoShape">
+              <a:avLst/>
+            </a:prstTxWarp>
+          </a:bodyPr>
           <a:lstStyle>
             <a:lvl1pPr algn="r">
-              <a:defRPr sz="1200">
+              <a:defRPr lang="en-us" sz="1200" cap="none">
                 <a:solidFill>
-                  <a:schemeClr val="tx1">
-                    <a:tint val="75000"/>
-                  </a:schemeClr>
+                  <a:srgbClr val="8C8C8C"/>
                 </a:solidFill>
               </a:defRPr>
             </a:lvl1pPr>
+            <a:lvl2pPr>
+              <a:defRPr lang="en-us"/>
+            </a:lvl2pPr>
+            <a:lvl3pPr>
+              <a:defRPr lang="en-us"/>
+            </a:lvl3pPr>
+            <a:lvl4pPr>
+              <a:defRPr lang="en-us"/>
+            </a:lvl4pPr>
+            <a:lvl5pPr>
+              <a:defRPr lang="en-us"/>
+            </a:lvl5pPr>
+            <a:lvl6pPr>
+              <a:defRPr lang="en-us"/>
+            </a:lvl6pPr>
+            <a:lvl7pPr>
+              <a:defRPr lang="en-us"/>
+            </a:lvl7pPr>
+            <a:lvl8pPr>
+              <a:defRPr lang="en-us"/>
+            </a:lvl8pPr>
+            <a:lvl9pPr>
+              <a:defRPr lang="en-us"/>
+            </a:lvl9pPr>
           </a:lstStyle>
           <a:p>
-            <a:fld id="{2AF8EFAC-D507-4007-9634-FDE202E639CC}" type="slidenum">
-              <a:rPr lang="en-US" smtClean="0"/>
-              <a:t>‹#›</a:t>
+            <a:pPr>
+              <a:defRPr lang="en-us"/>
+            </a:pPr>
+            <a:fld id="{30AEED52-1CDD-FB1B-9316-EA4EA35865BF}" type="slidenum">
+              <a:t/>
             </a:fld>
-            <a:endParaRPr lang="en-US"/>
           </a:p>
         </p:txBody>
       </p:sp>
     </p:spTree>
-    <p:extLst>
-      <p:ext uri="{BB962C8B-B14F-4D97-AF65-F5344CB8AC3E}">
-        <p14:creationId xmlns:p14="http://schemas.microsoft.com/office/powerpoint/2010/main" val="1153837713"/>
-      </p:ext>
-    </p:extLst>
   </p:cSld>
   <p:clrMap bg1="lt1" tx1="dk1" bg2="lt2" tx2="dk2" accent1="accent1" accent2="accent2" accent3="accent3" accent4="accent4" accent5="accent5" accent6="accent6" hlink="hlink" folHlink="folHlink"/>
   <p:sldLayoutIdLst>
@@ -2678,282 +3351,632 @@
     <p:sldLayoutId id="2147483658" r:id="rId10"/>
     <p:sldLayoutId id="2147483659" r:id="rId11"/>
   </p:sldLayoutIdLst>
+  <p:hf hdr="0" ftr="0"/>
   <p:txStyles>
     <p:titleStyle>
-      <a:lvl1pPr algn="l" defTabSz="914400" rtl="0" eaLnBrk="1" latinLnBrk="0" hangingPunct="1">
+      <a:lvl1pPr marL="0" marR="0" indent="0" algn="l" defTabSz="914400">
         <a:lnSpc>
           <a:spcPct val="90000"/>
         </a:lnSpc>
         <a:spcBef>
-          <a:spcPct val="0"/>
+          <a:spcPts val="0"/>
         </a:spcBef>
+        <a:spcAft>
+          <a:spcPts val="0"/>
+        </a:spcAft>
         <a:buNone/>
-        <a:defRPr sz="4400" kern="1200">
+        <a:tabLst/>
+        <a:defRPr lang="en-us" sz="4400" b="0" i="0" u="none" strike="noStrike" kern="1" cap="none" spc="0" baseline="0">
           <a:solidFill>
             <a:schemeClr val="tx1"/>
           </a:solidFill>
-          <a:latin typeface="+mj-lt"/>
-          <a:ea typeface="+mj-ea"/>
-          <a:cs typeface="+mj-cs"/>
+          <a:effectLst/>
+          <a:latin typeface="Calibri Light" pitchFamily="2" charset="0"/>
+          <a:ea typeface="Calibri Light" pitchFamily="2" charset="0"/>
+          <a:cs typeface="Calibri Light" pitchFamily="2" charset="0"/>
         </a:defRPr>
       </a:lvl1pPr>
+      <a:lvl2pPr marL="457200" marR="0" indent="0" algn="l" defTabSz="914400">
+        <a:lnSpc>
+          <a:spcPct val="100000"/>
+        </a:lnSpc>
+        <a:spcBef>
+          <a:spcPts val="0"/>
+        </a:spcBef>
+        <a:spcAft>
+          <a:spcPts val="0"/>
+        </a:spcAft>
+        <a:buNone/>
+        <a:tabLst/>
+        <a:defRPr lang="en-us" sz="1800" b="0" i="0" u="none" strike="noStrike" kern="1" cap="none" spc="0" baseline="0">
+          <a:solidFill>
+            <a:schemeClr val="tx1"/>
+          </a:solidFill>
+          <a:effectLst/>
+          <a:latin typeface="Calibri" pitchFamily="2" charset="0"/>
+          <a:ea typeface="Calibri" pitchFamily="2" charset="0"/>
+          <a:cs typeface="Calibri" pitchFamily="2" charset="0"/>
+        </a:defRPr>
+      </a:lvl2pPr>
+      <a:lvl3pPr marL="914400" marR="0" indent="0" algn="l" defTabSz="914400">
+        <a:lnSpc>
+          <a:spcPct val="100000"/>
+        </a:lnSpc>
+        <a:spcBef>
+          <a:spcPts val="0"/>
+        </a:spcBef>
+        <a:spcAft>
+          <a:spcPts val="0"/>
+        </a:spcAft>
+        <a:buNone/>
+        <a:tabLst/>
+        <a:defRPr lang="en-us" sz="1800" b="0" i="0" u="none" strike="noStrike" kern="1" cap="none" spc="0" baseline="0">
+          <a:solidFill>
+            <a:schemeClr val="tx1"/>
+          </a:solidFill>
+          <a:effectLst/>
+          <a:latin typeface="Calibri" pitchFamily="2" charset="0"/>
+          <a:ea typeface="Calibri" pitchFamily="2" charset="0"/>
+          <a:cs typeface="Calibri" pitchFamily="2" charset="0"/>
+        </a:defRPr>
+      </a:lvl3pPr>
+      <a:lvl4pPr marL="1371600" marR="0" indent="0" algn="l" defTabSz="914400">
+        <a:lnSpc>
+          <a:spcPct val="100000"/>
+        </a:lnSpc>
+        <a:spcBef>
+          <a:spcPts val="0"/>
+        </a:spcBef>
+        <a:spcAft>
+          <a:spcPts val="0"/>
+        </a:spcAft>
+        <a:buNone/>
+        <a:tabLst/>
+        <a:defRPr lang="en-us" sz="1800" b="0" i="0" u="none" strike="noStrike" kern="1" cap="none" spc="0" baseline="0">
+          <a:solidFill>
+            <a:schemeClr val="tx1"/>
+          </a:solidFill>
+          <a:effectLst/>
+          <a:latin typeface="Calibri" pitchFamily="2" charset="0"/>
+          <a:ea typeface="Calibri" pitchFamily="2" charset="0"/>
+          <a:cs typeface="Calibri" pitchFamily="2" charset="0"/>
+        </a:defRPr>
+      </a:lvl4pPr>
+      <a:lvl5pPr marL="1828800" marR="0" indent="0" algn="l" defTabSz="914400">
+        <a:lnSpc>
+          <a:spcPct val="100000"/>
+        </a:lnSpc>
+        <a:spcBef>
+          <a:spcPts val="0"/>
+        </a:spcBef>
+        <a:spcAft>
+          <a:spcPts val="0"/>
+        </a:spcAft>
+        <a:buNone/>
+        <a:tabLst/>
+        <a:defRPr lang="en-us" sz="1800" b="0" i="0" u="none" strike="noStrike" kern="1" cap="none" spc="0" baseline="0">
+          <a:solidFill>
+            <a:schemeClr val="tx1"/>
+          </a:solidFill>
+          <a:effectLst/>
+          <a:latin typeface="Calibri" pitchFamily="2" charset="0"/>
+          <a:ea typeface="Calibri" pitchFamily="2" charset="0"/>
+          <a:cs typeface="Calibri" pitchFamily="2" charset="0"/>
+        </a:defRPr>
+      </a:lvl5pPr>
+      <a:lvl6pPr marL="2286000" marR="0" indent="0" algn="l" defTabSz="914400">
+        <a:lnSpc>
+          <a:spcPct val="100000"/>
+        </a:lnSpc>
+        <a:spcBef>
+          <a:spcPts val="0"/>
+        </a:spcBef>
+        <a:spcAft>
+          <a:spcPts val="0"/>
+        </a:spcAft>
+        <a:buNone/>
+        <a:tabLst/>
+        <a:defRPr lang="en-us" sz="1800" b="0" i="0" u="none" strike="noStrike" kern="1" cap="none" spc="0" baseline="0">
+          <a:solidFill>
+            <a:schemeClr val="tx1"/>
+          </a:solidFill>
+          <a:effectLst/>
+          <a:latin typeface="Calibri" pitchFamily="2" charset="0"/>
+          <a:ea typeface="Calibri" pitchFamily="2" charset="0"/>
+          <a:cs typeface="Calibri" pitchFamily="2" charset="0"/>
+        </a:defRPr>
+      </a:lvl6pPr>
+      <a:lvl7pPr marL="2743200" marR="0" indent="0" algn="l" defTabSz="914400">
+        <a:lnSpc>
+          <a:spcPct val="100000"/>
+        </a:lnSpc>
+        <a:spcBef>
+          <a:spcPts val="0"/>
+        </a:spcBef>
+        <a:spcAft>
+          <a:spcPts val="0"/>
+        </a:spcAft>
+        <a:buNone/>
+        <a:tabLst/>
+        <a:defRPr lang="en-us" sz="1800" b="0" i="0" u="none" strike="noStrike" kern="1" cap="none" spc="0" baseline="0">
+          <a:solidFill>
+            <a:schemeClr val="tx1"/>
+          </a:solidFill>
+          <a:effectLst/>
+          <a:latin typeface="Calibri" pitchFamily="2" charset="0"/>
+          <a:ea typeface="Calibri" pitchFamily="2" charset="0"/>
+          <a:cs typeface="Calibri" pitchFamily="2" charset="0"/>
+        </a:defRPr>
+      </a:lvl7pPr>
+      <a:lvl8pPr marL="3200400" marR="0" indent="0" algn="l" defTabSz="914400">
+        <a:lnSpc>
+          <a:spcPct val="100000"/>
+        </a:lnSpc>
+        <a:spcBef>
+          <a:spcPts val="0"/>
+        </a:spcBef>
+        <a:spcAft>
+          <a:spcPts val="0"/>
+        </a:spcAft>
+        <a:buNone/>
+        <a:tabLst/>
+        <a:defRPr lang="en-us" sz="1800" b="0" i="0" u="none" strike="noStrike" kern="1" cap="none" spc="0" baseline="0">
+          <a:solidFill>
+            <a:schemeClr val="tx1"/>
+          </a:solidFill>
+          <a:effectLst/>
+          <a:latin typeface="Calibri" pitchFamily="2" charset="0"/>
+          <a:ea typeface="Calibri" pitchFamily="2" charset="0"/>
+          <a:cs typeface="Calibri" pitchFamily="2" charset="0"/>
+        </a:defRPr>
+      </a:lvl8pPr>
+      <a:lvl9pPr marL="3657600" marR="0" indent="0" algn="l" defTabSz="914400">
+        <a:lnSpc>
+          <a:spcPct val="100000"/>
+        </a:lnSpc>
+        <a:spcBef>
+          <a:spcPts val="0"/>
+        </a:spcBef>
+        <a:spcAft>
+          <a:spcPts val="0"/>
+        </a:spcAft>
+        <a:buNone/>
+        <a:tabLst/>
+        <a:defRPr lang="en-us" sz="1800" b="0" i="0" u="none" strike="noStrike" kern="1" cap="none" spc="0" baseline="0">
+          <a:solidFill>
+            <a:schemeClr val="tx1"/>
+          </a:solidFill>
+          <a:effectLst/>
+          <a:latin typeface="Calibri" pitchFamily="2" charset="0"/>
+          <a:ea typeface="Calibri" pitchFamily="2" charset="0"/>
+          <a:cs typeface="Calibri" pitchFamily="2" charset="0"/>
+        </a:defRPr>
+      </a:lvl9pPr>
     </p:titleStyle>
     <p:bodyStyle>
-      <a:lvl1pPr marL="228600" indent="-228600" algn="l" defTabSz="914400" rtl="0" eaLnBrk="1" latinLnBrk="0" hangingPunct="1">
+      <a:lvl1pPr marL="228600" marR="0" indent="-228600" algn="l" defTabSz="914400">
         <a:lnSpc>
           <a:spcPct val="90000"/>
         </a:lnSpc>
         <a:spcBef>
           <a:spcPts val="1000"/>
         </a:spcBef>
-        <a:buFont typeface="Arial" panose="020B0604020202020204" pitchFamily="34" charset="0"/>
+        <a:spcAft>
+          <a:spcPts val="0"/>
+        </a:spcAft>
+        <a:buClrTx/>
+        <a:buSzTx/>
+        <a:buFont typeface="Arial" pitchFamily="2" charset="0"/>
         <a:buChar char="•"/>
-        <a:defRPr sz="2800" kern="1200">
+        <a:tabLst/>
+        <a:defRPr lang="en-us" sz="2800" b="0" i="0" u="none" strike="noStrike" kern="1" cap="none" spc="0" baseline="0">
           <a:solidFill>
             <a:schemeClr val="tx1"/>
           </a:solidFill>
-          <a:latin typeface="+mn-lt"/>
-          <a:ea typeface="+mn-ea"/>
-          <a:cs typeface="+mn-cs"/>
+          <a:effectLst/>
+          <a:latin typeface="Calibri" pitchFamily="2" charset="0"/>
+          <a:ea typeface="Calibri" pitchFamily="2" charset="0"/>
+          <a:cs typeface="Calibri" pitchFamily="2" charset="0"/>
         </a:defRPr>
       </a:lvl1pPr>
-      <a:lvl2pPr marL="685800" indent="-228600" algn="l" defTabSz="914400" rtl="0" eaLnBrk="1" latinLnBrk="0" hangingPunct="1">
+      <a:lvl2pPr marL="685800" marR="0" indent="-228600" algn="l" defTabSz="914400">
         <a:lnSpc>
           <a:spcPct val="90000"/>
         </a:lnSpc>
         <a:spcBef>
           <a:spcPts val="500"/>
         </a:spcBef>
-        <a:buFont typeface="Arial" panose="020B0604020202020204" pitchFamily="34" charset="0"/>
+        <a:spcAft>
+          <a:spcPts val="0"/>
+        </a:spcAft>
+        <a:buClrTx/>
+        <a:buSzTx/>
+        <a:buFont typeface="Arial" pitchFamily="2" charset="0"/>
         <a:buChar char="•"/>
-        <a:defRPr sz="2400" kern="1200">
+        <a:tabLst/>
+        <a:defRPr lang="en-us" sz="2400" b="0" i="0" u="none" strike="noStrike" kern="1" cap="none" spc="0" baseline="0">
           <a:solidFill>
             <a:schemeClr val="tx1"/>
           </a:solidFill>
-          <a:latin typeface="+mn-lt"/>
-          <a:ea typeface="+mn-ea"/>
-          <a:cs typeface="+mn-cs"/>
+          <a:effectLst/>
+          <a:latin typeface="Calibri" pitchFamily="2" charset="0"/>
+          <a:ea typeface="Calibri" pitchFamily="2" charset="0"/>
+          <a:cs typeface="Calibri" pitchFamily="2" charset="0"/>
         </a:defRPr>
       </a:lvl2pPr>
-      <a:lvl3pPr marL="1143000" indent="-228600" algn="l" defTabSz="914400" rtl="0" eaLnBrk="1" latinLnBrk="0" hangingPunct="1">
+      <a:lvl3pPr marL="1143000" marR="0" indent="-228600" algn="l" defTabSz="914400">
         <a:lnSpc>
           <a:spcPct val="90000"/>
         </a:lnSpc>
         <a:spcBef>
           <a:spcPts val="500"/>
         </a:spcBef>
-        <a:buFont typeface="Arial" panose="020B0604020202020204" pitchFamily="34" charset="0"/>
+        <a:spcAft>
+          <a:spcPts val="0"/>
+        </a:spcAft>
+        <a:buClrTx/>
+        <a:buSzTx/>
+        <a:buFont typeface="Arial" pitchFamily="2" charset="0"/>
         <a:buChar char="•"/>
-        <a:defRPr sz="2000" kern="1200">
+        <a:tabLst/>
+        <a:defRPr lang="en-us" sz="2000" b="0" i="0" u="none" strike="noStrike" kern="1" cap="none" spc="0" baseline="0">
           <a:solidFill>
             <a:schemeClr val="tx1"/>
           </a:solidFill>
-          <a:latin typeface="+mn-lt"/>
-          <a:ea typeface="+mn-ea"/>
-          <a:cs typeface="+mn-cs"/>
+          <a:effectLst/>
+          <a:latin typeface="Calibri" pitchFamily="2" charset="0"/>
+          <a:ea typeface="Calibri" pitchFamily="2" charset="0"/>
+          <a:cs typeface="Calibri" pitchFamily="2" charset="0"/>
         </a:defRPr>
       </a:lvl3pPr>
-      <a:lvl4pPr marL="1600200" indent="-228600" algn="l" defTabSz="914400" rtl="0" eaLnBrk="1" latinLnBrk="0" hangingPunct="1">
+      <a:lvl4pPr marL="1600200" marR="0" indent="-228600" algn="l" defTabSz="914400">
         <a:lnSpc>
           <a:spcPct val="90000"/>
         </a:lnSpc>
         <a:spcBef>
           <a:spcPts val="500"/>
         </a:spcBef>
-        <a:buFont typeface="Arial" panose="020B0604020202020204" pitchFamily="34" charset="0"/>
+        <a:spcAft>
+          <a:spcPts val="0"/>
+        </a:spcAft>
+        <a:buClrTx/>
+        <a:buSzTx/>
+        <a:buFont typeface="Arial" pitchFamily="2" charset="0"/>
         <a:buChar char="•"/>
-        <a:defRPr sz="1800" kern="1200">
+        <a:tabLst/>
+        <a:defRPr lang="en-us" sz="1800" b="0" i="0" u="none" strike="noStrike" kern="1" cap="none" spc="0" baseline="0">
           <a:solidFill>
             <a:schemeClr val="tx1"/>
           </a:solidFill>
-          <a:latin typeface="+mn-lt"/>
-          <a:ea typeface="+mn-ea"/>
-          <a:cs typeface="+mn-cs"/>
+          <a:effectLst/>
+          <a:latin typeface="Calibri" pitchFamily="2" charset="0"/>
+          <a:ea typeface="Calibri" pitchFamily="2" charset="0"/>
+          <a:cs typeface="Calibri" pitchFamily="2" charset="0"/>
         </a:defRPr>
       </a:lvl4pPr>
-      <a:lvl5pPr marL="2057400" indent="-228600" algn="l" defTabSz="914400" rtl="0" eaLnBrk="1" latinLnBrk="0" hangingPunct="1">
+      <a:lvl5pPr marL="2057400" marR="0" indent="-228600" algn="l" defTabSz="914400">
         <a:lnSpc>
           <a:spcPct val="90000"/>
         </a:lnSpc>
         <a:spcBef>
           <a:spcPts val="500"/>
         </a:spcBef>
-        <a:buFont typeface="Arial" panose="020B0604020202020204" pitchFamily="34" charset="0"/>
+        <a:spcAft>
+          <a:spcPts val="0"/>
+        </a:spcAft>
+        <a:buClrTx/>
+        <a:buSzTx/>
+        <a:buFont typeface="Arial" pitchFamily="2" charset="0"/>
         <a:buChar char="•"/>
-        <a:defRPr sz="1800" kern="1200">
+        <a:tabLst/>
+        <a:defRPr lang="en-us" sz="1800" b="0" i="0" u="none" strike="noStrike" kern="1" cap="none" spc="0" baseline="0">
           <a:solidFill>
             <a:schemeClr val="tx1"/>
           </a:solidFill>
-          <a:latin typeface="+mn-lt"/>
-          <a:ea typeface="+mn-ea"/>
-          <a:cs typeface="+mn-cs"/>
+          <a:effectLst/>
+          <a:latin typeface="Calibri" pitchFamily="2" charset="0"/>
+          <a:ea typeface="Calibri" pitchFamily="2" charset="0"/>
+          <a:cs typeface="Calibri" pitchFamily="2" charset="0"/>
         </a:defRPr>
       </a:lvl5pPr>
-      <a:lvl6pPr marL="2514600" indent="-228600" algn="l" defTabSz="914400" rtl="0" eaLnBrk="1" latinLnBrk="0" hangingPunct="1">
+      <a:lvl6pPr marL="2514600" marR="0" indent="-228600" algn="l" defTabSz="914400">
         <a:lnSpc>
           <a:spcPct val="90000"/>
         </a:lnSpc>
         <a:spcBef>
           <a:spcPts val="500"/>
         </a:spcBef>
-        <a:buFont typeface="Arial" panose="020B0604020202020204" pitchFamily="34" charset="0"/>
+        <a:spcAft>
+          <a:spcPts val="0"/>
+        </a:spcAft>
+        <a:buClrTx/>
+        <a:buSzTx/>
+        <a:buFont typeface="Arial" pitchFamily="2" charset="0"/>
         <a:buChar char="•"/>
-        <a:defRPr sz="1800" kern="1200">
+        <a:tabLst/>
+        <a:defRPr lang="en-us" sz="1800" b="0" i="0" u="none" strike="noStrike" kern="1" cap="none" spc="0" baseline="0">
           <a:solidFill>
             <a:schemeClr val="tx1"/>
           </a:solidFill>
-          <a:latin typeface="+mn-lt"/>
-          <a:ea typeface="+mn-ea"/>
-          <a:cs typeface="+mn-cs"/>
+          <a:effectLst/>
+          <a:latin typeface="Calibri" pitchFamily="2" charset="0"/>
+          <a:ea typeface="Calibri" pitchFamily="2" charset="0"/>
+          <a:cs typeface="Calibri" pitchFamily="2" charset="0"/>
         </a:defRPr>
       </a:lvl6pPr>
-      <a:lvl7pPr marL="2971800" indent="-228600" algn="l" defTabSz="914400" rtl="0" eaLnBrk="1" latinLnBrk="0" hangingPunct="1">
+      <a:lvl7pPr marL="2971800" marR="0" indent="-228600" algn="l" defTabSz="914400">
         <a:lnSpc>
           <a:spcPct val="90000"/>
         </a:lnSpc>
         <a:spcBef>
           <a:spcPts val="500"/>
         </a:spcBef>
-        <a:buFont typeface="Arial" panose="020B0604020202020204" pitchFamily="34" charset="0"/>
+        <a:spcAft>
+          <a:spcPts val="0"/>
+        </a:spcAft>
+        <a:buClrTx/>
+        <a:buSzTx/>
+        <a:buFont typeface="Arial" pitchFamily="2" charset="0"/>
         <a:buChar char="•"/>
-        <a:defRPr sz="1800" kern="1200">
+        <a:tabLst/>
+        <a:defRPr lang="en-us" sz="1800" b="0" i="0" u="none" strike="noStrike" kern="1" cap="none" spc="0" baseline="0">
           <a:solidFill>
             <a:schemeClr val="tx1"/>
           </a:solidFill>
-          <a:latin typeface="+mn-lt"/>
-          <a:ea typeface="+mn-ea"/>
-          <a:cs typeface="+mn-cs"/>
+          <a:effectLst/>
+          <a:latin typeface="Calibri" pitchFamily="2" charset="0"/>
+          <a:ea typeface="Calibri" pitchFamily="2" charset="0"/>
+          <a:cs typeface="Calibri" pitchFamily="2" charset="0"/>
         </a:defRPr>
       </a:lvl7pPr>
-      <a:lvl8pPr marL="3429000" indent="-228600" algn="l" defTabSz="914400" rtl="0" eaLnBrk="1" latinLnBrk="0" hangingPunct="1">
+      <a:lvl8pPr marL="3429000" marR="0" indent="-228600" algn="l" defTabSz="914400">
         <a:lnSpc>
           <a:spcPct val="90000"/>
         </a:lnSpc>
         <a:spcBef>
           <a:spcPts val="500"/>
         </a:spcBef>
-        <a:buFont typeface="Arial" panose="020B0604020202020204" pitchFamily="34" charset="0"/>
+        <a:spcAft>
+          <a:spcPts val="0"/>
+        </a:spcAft>
+        <a:buClrTx/>
+        <a:buSzTx/>
+        <a:buFont typeface="Arial" pitchFamily="2" charset="0"/>
         <a:buChar char="•"/>
-        <a:defRPr sz="1800" kern="1200">
+        <a:tabLst/>
+        <a:defRPr lang="en-us" sz="1800" b="0" i="0" u="none" strike="noStrike" kern="1" cap="none" spc="0" baseline="0">
           <a:solidFill>
             <a:schemeClr val="tx1"/>
           </a:solidFill>
-          <a:latin typeface="+mn-lt"/>
-          <a:ea typeface="+mn-ea"/>
-          <a:cs typeface="+mn-cs"/>
+          <a:effectLst/>
+          <a:latin typeface="Calibri" pitchFamily="2" charset="0"/>
+          <a:ea typeface="Calibri" pitchFamily="2" charset="0"/>
+          <a:cs typeface="Calibri" pitchFamily="2" charset="0"/>
         </a:defRPr>
       </a:lvl8pPr>
-      <a:lvl9pPr marL="3886200" indent="-228600" algn="l" defTabSz="914400" rtl="0" eaLnBrk="1" latinLnBrk="0" hangingPunct="1">
+      <a:lvl9pPr marL="3886200" marR="0" indent="-228600" algn="l" defTabSz="914400">
         <a:lnSpc>
           <a:spcPct val="90000"/>
         </a:lnSpc>
         <a:spcBef>
           <a:spcPts val="500"/>
         </a:spcBef>
-        <a:buFont typeface="Arial" panose="020B0604020202020204" pitchFamily="34" charset="0"/>
+        <a:spcAft>
+          <a:spcPts val="0"/>
+        </a:spcAft>
+        <a:buClrTx/>
+        <a:buSzTx/>
+        <a:buFont typeface="Arial" pitchFamily="2" charset="0"/>
         <a:buChar char="•"/>
-        <a:defRPr sz="1800" kern="1200">
+        <a:tabLst/>
+        <a:defRPr lang="en-us" sz="1800" b="0" i="0" u="none" strike="noStrike" kern="1" cap="none" spc="0" baseline="0">
           <a:solidFill>
             <a:schemeClr val="tx1"/>
           </a:solidFill>
-          <a:latin typeface="+mn-lt"/>
-          <a:ea typeface="+mn-ea"/>
-          <a:cs typeface="+mn-cs"/>
+          <a:effectLst/>
+          <a:latin typeface="Calibri" pitchFamily="2" charset="0"/>
+          <a:ea typeface="Calibri" pitchFamily="2" charset="0"/>
+          <a:cs typeface="Calibri" pitchFamily="2" charset="0"/>
         </a:defRPr>
       </a:lvl9pPr>
     </p:bodyStyle>
     <p:otherStyle>
-      <a:defPPr>
-        <a:defRPr lang="en-US"/>
-      </a:defPPr>
-      <a:lvl1pPr marL="0" algn="l" defTabSz="914400" rtl="0" eaLnBrk="1" latinLnBrk="0" hangingPunct="1">
-        <a:defRPr sz="1800" kern="1200">
+      <a:lvl1pPr marL="0" marR="0" indent="0" algn="l" defTabSz="914400">
+        <a:lnSpc>
+          <a:spcPct val="100000"/>
+        </a:lnSpc>
+        <a:spcBef>
+          <a:spcPts val="0"/>
+        </a:spcBef>
+        <a:spcAft>
+          <a:spcPts val="0"/>
+        </a:spcAft>
+        <a:buNone/>
+        <a:tabLst/>
+        <a:defRPr lang="en-us" sz="1800" b="0" i="0" u="none" strike="noStrike" kern="1" cap="none" spc="0" baseline="0">
           <a:solidFill>
             <a:schemeClr val="tx1"/>
           </a:solidFill>
-          <a:latin typeface="+mn-lt"/>
-          <a:ea typeface="+mn-ea"/>
-          <a:cs typeface="+mn-cs"/>
+          <a:effectLst/>
+          <a:latin typeface="Calibri" pitchFamily="2" charset="0"/>
+          <a:ea typeface="Calibri" pitchFamily="2" charset="0"/>
+          <a:cs typeface="Calibri" pitchFamily="2" charset="0"/>
         </a:defRPr>
       </a:lvl1pPr>
-      <a:lvl2pPr marL="457200" algn="l" defTabSz="914400" rtl="0" eaLnBrk="1" latinLnBrk="0" hangingPunct="1">
-        <a:defRPr sz="1800" kern="1200">
+      <a:lvl2pPr marL="457200" marR="0" indent="0" algn="l" defTabSz="914400">
+        <a:lnSpc>
+          <a:spcPct val="100000"/>
+        </a:lnSpc>
+        <a:spcBef>
+          <a:spcPts val="0"/>
+        </a:spcBef>
+        <a:spcAft>
+          <a:spcPts val="0"/>
+        </a:spcAft>
+        <a:buNone/>
+        <a:tabLst/>
+        <a:defRPr lang="en-us" sz="1800" b="0" i="0" u="none" strike="noStrike" kern="1" cap="none" spc="0" baseline="0">
           <a:solidFill>
             <a:schemeClr val="tx1"/>
           </a:solidFill>
-          <a:latin typeface="+mn-lt"/>
-          <a:ea typeface="+mn-ea"/>
-          <a:cs typeface="+mn-cs"/>
+          <a:effectLst/>
+          <a:latin typeface="Calibri" pitchFamily="2" charset="0"/>
+          <a:ea typeface="Calibri" pitchFamily="2" charset="0"/>
+          <a:cs typeface="Calibri" pitchFamily="2" charset="0"/>
         </a:defRPr>
       </a:lvl2pPr>
-      <a:lvl3pPr marL="914400" algn="l" defTabSz="914400" rtl="0" eaLnBrk="1" latinLnBrk="0" hangingPunct="1">
-        <a:defRPr sz="1800" kern="1200">
+      <a:lvl3pPr marL="914400" marR="0" indent="0" algn="l" defTabSz="914400">
+        <a:lnSpc>
+          <a:spcPct val="100000"/>
+        </a:lnSpc>
+        <a:spcBef>
+          <a:spcPts val="0"/>
+        </a:spcBef>
+        <a:spcAft>
+          <a:spcPts val="0"/>
+        </a:spcAft>
+        <a:buNone/>
+        <a:tabLst/>
+        <a:defRPr lang="en-us" sz="1800" b="0" i="0" u="none" strike="noStrike" kern="1" cap="none" spc="0" baseline="0">
           <a:solidFill>
             <a:schemeClr val="tx1"/>
           </a:solidFill>
-          <a:latin typeface="+mn-lt"/>
-          <a:ea typeface="+mn-ea"/>
-          <a:cs typeface="+mn-cs"/>
+          <a:effectLst/>
+          <a:latin typeface="Calibri" pitchFamily="2" charset="0"/>
+          <a:ea typeface="Calibri" pitchFamily="2" charset="0"/>
+          <a:cs typeface="Calibri" pitchFamily="2" charset="0"/>
         </a:defRPr>
       </a:lvl3pPr>
-      <a:lvl4pPr marL="1371600" algn="l" defTabSz="914400" rtl="0" eaLnBrk="1" latinLnBrk="0" hangingPunct="1">
-        <a:defRPr sz="1800" kern="1200">
+      <a:lvl4pPr marL="1371600" marR="0" indent="0" algn="l" defTabSz="914400">
+        <a:lnSpc>
+          <a:spcPct val="100000"/>
+        </a:lnSpc>
+        <a:spcBef>
+          <a:spcPts val="0"/>
+        </a:spcBef>
+        <a:spcAft>
+          <a:spcPts val="0"/>
+        </a:spcAft>
+        <a:buNone/>
+        <a:tabLst/>
+        <a:defRPr lang="en-us" sz="1800" b="0" i="0" u="none" strike="noStrike" kern="1" cap="none" spc="0" baseline="0">
           <a:solidFill>
             <a:schemeClr val="tx1"/>
           </a:solidFill>
-          <a:latin typeface="+mn-lt"/>
-          <a:ea typeface="+mn-ea"/>
-          <a:cs typeface="+mn-cs"/>
+          <a:effectLst/>
+          <a:latin typeface="Calibri" pitchFamily="2" charset="0"/>
+          <a:ea typeface="Calibri" pitchFamily="2" charset="0"/>
+          <a:cs typeface="Calibri" pitchFamily="2" charset="0"/>
         </a:defRPr>
       </a:lvl4pPr>
-      <a:lvl5pPr marL="1828800" algn="l" defTabSz="914400" rtl="0" eaLnBrk="1" latinLnBrk="0" hangingPunct="1">
-        <a:defRPr sz="1800" kern="1200">
+      <a:lvl5pPr marL="1828800" marR="0" indent="0" algn="l" defTabSz="914400">
+        <a:lnSpc>
+          <a:spcPct val="100000"/>
+        </a:lnSpc>
+        <a:spcBef>
+          <a:spcPts val="0"/>
+        </a:spcBef>
+        <a:spcAft>
+          <a:spcPts val="0"/>
+        </a:spcAft>
+        <a:buNone/>
+        <a:tabLst/>
+        <a:defRPr lang="en-us" sz="1800" b="0" i="0" u="none" strike="noStrike" kern="1" cap="none" spc="0" baseline="0">
           <a:solidFill>
             <a:schemeClr val="tx1"/>
           </a:solidFill>
-          <a:latin typeface="+mn-lt"/>
-          <a:ea typeface="+mn-ea"/>
-          <a:cs typeface="+mn-cs"/>
+          <a:effectLst/>
+          <a:latin typeface="Calibri" pitchFamily="2" charset="0"/>
+          <a:ea typeface="Calibri" pitchFamily="2" charset="0"/>
+          <a:cs typeface="Calibri" pitchFamily="2" charset="0"/>
         </a:defRPr>
       </a:lvl5pPr>
-      <a:lvl6pPr marL="2286000" algn="l" defTabSz="914400" rtl="0" eaLnBrk="1" latinLnBrk="0" hangingPunct="1">
-        <a:defRPr sz="1800" kern="1200">
+      <a:lvl6pPr marL="2286000" marR="0" indent="0" algn="l" defTabSz="914400">
+        <a:lnSpc>
+          <a:spcPct val="100000"/>
+        </a:lnSpc>
+        <a:spcBef>
+          <a:spcPts val="0"/>
+        </a:spcBef>
+        <a:spcAft>
+          <a:spcPts val="0"/>
+        </a:spcAft>
+        <a:buNone/>
+        <a:tabLst/>
+        <a:defRPr lang="en-us" sz="1800" b="0" i="0" u="none" strike="noStrike" kern="1" cap="none" spc="0" baseline="0">
           <a:solidFill>
             <a:schemeClr val="tx1"/>
           </a:solidFill>
-          <a:latin typeface="+mn-lt"/>
-          <a:ea typeface="+mn-ea"/>
-          <a:cs typeface="+mn-cs"/>
+          <a:effectLst/>
+          <a:latin typeface="Calibri" pitchFamily="2" charset="0"/>
+          <a:ea typeface="Calibri" pitchFamily="2" charset="0"/>
+          <a:cs typeface="Calibri" pitchFamily="2" charset="0"/>
         </a:defRPr>
       </a:lvl6pPr>
-      <a:lvl7pPr marL="2743200" algn="l" defTabSz="914400" rtl="0" eaLnBrk="1" latinLnBrk="0" hangingPunct="1">
-        <a:defRPr sz="1800" kern="1200">
+      <a:lvl7pPr marL="2743200" marR="0" indent="0" algn="l" defTabSz="914400">
+        <a:lnSpc>
+          <a:spcPct val="100000"/>
+        </a:lnSpc>
+        <a:spcBef>
+          <a:spcPts val="0"/>
+        </a:spcBef>
+        <a:spcAft>
+          <a:spcPts val="0"/>
+        </a:spcAft>
+        <a:buNone/>
+        <a:tabLst/>
+        <a:defRPr lang="en-us" sz="1800" b="0" i="0" u="none" strike="noStrike" kern="1" cap="none" spc="0" baseline="0">
           <a:solidFill>
             <a:schemeClr val="tx1"/>
           </a:solidFill>
-          <a:latin typeface="+mn-lt"/>
-          <a:ea typeface="+mn-ea"/>
-          <a:cs typeface="+mn-cs"/>
+          <a:effectLst/>
+          <a:latin typeface="Calibri" pitchFamily="2" charset="0"/>
+          <a:ea typeface="Calibri" pitchFamily="2" charset="0"/>
+          <a:cs typeface="Calibri" pitchFamily="2" charset="0"/>
         </a:defRPr>
       </a:lvl7pPr>
-      <a:lvl8pPr marL="3200400" algn="l" defTabSz="914400" rtl="0" eaLnBrk="1" latinLnBrk="0" hangingPunct="1">
-        <a:defRPr sz="1800" kern="1200">
+      <a:lvl8pPr marL="3200400" marR="0" indent="0" algn="l" defTabSz="914400">
+        <a:lnSpc>
+          <a:spcPct val="100000"/>
+        </a:lnSpc>
+        <a:spcBef>
+          <a:spcPts val="0"/>
+        </a:spcBef>
+        <a:spcAft>
+          <a:spcPts val="0"/>
+        </a:spcAft>
+        <a:buNone/>
+        <a:tabLst/>
+        <a:defRPr lang="en-us" sz="1800" b="0" i="0" u="none" strike="noStrike" kern="1" cap="none" spc="0" baseline="0">
           <a:solidFill>
             <a:schemeClr val="tx1"/>
           </a:solidFill>
-          <a:latin typeface="+mn-lt"/>
-          <a:ea typeface="+mn-ea"/>
-          <a:cs typeface="+mn-cs"/>
+          <a:effectLst/>
+          <a:latin typeface="Calibri" pitchFamily="2" charset="0"/>
+          <a:ea typeface="Calibri" pitchFamily="2" charset="0"/>
+          <a:cs typeface="Calibri" pitchFamily="2" charset="0"/>
         </a:defRPr>
       </a:lvl8pPr>
-      <a:lvl9pPr marL="3657600" algn="l" defTabSz="914400" rtl="0" eaLnBrk="1" latinLnBrk="0" hangingPunct="1">
-        <a:defRPr sz="1800" kern="1200">
+      <a:lvl9pPr marL="3657600" marR="0" indent="0" algn="l" defTabSz="914400">
+        <a:lnSpc>
+          <a:spcPct val="100000"/>
+        </a:lnSpc>
+        <a:spcBef>
+          <a:spcPts val="0"/>
+        </a:spcBef>
+        <a:spcAft>
+          <a:spcPts val="0"/>
+        </a:spcAft>
+        <a:buNone/>
+        <a:tabLst/>
+        <a:defRPr lang="en-us" sz="1800" b="0" i="0" u="none" strike="noStrike" kern="1" cap="none" spc="0" baseline="0">
           <a:solidFill>
             <a:schemeClr val="tx1"/>
           </a:solidFill>
-          <a:latin typeface="+mn-lt"/>
-          <a:ea typeface="+mn-ea"/>
-          <a:cs typeface="+mn-cs"/>
+          <a:effectLst/>
+          <a:latin typeface="Calibri" pitchFamily="2" charset="0"/>
+          <a:ea typeface="Calibri" pitchFamily="2" charset="0"/>
+          <a:cs typeface="Calibri" pitchFamily="2" charset="0"/>
         </a:defRPr>
       </a:lvl9pPr>
     </p:otherStyle>
@@ -2962,7 +3985,7 @@
 </file>
 
 <file path=ppt/slides/slide1.xml><?xml version="1.0" encoding="utf-8"?>
-<p:sld xmlns:a="http://schemas.openxmlformats.org/drawingml/2006/main" xmlns:r="http://schemas.openxmlformats.org/officeDocument/2006/relationships" xmlns:p="http://schemas.openxmlformats.org/presentationml/2006/main">
+<p:sld xmlns:p="http://schemas.openxmlformats.org/presentationml/2006/main" xmlns:mc="http://schemas.openxmlformats.org/markup-compatibility/2006" xmlns:p14="http://schemas.microsoft.com/office/powerpoint/2010/main" xmlns:p15="http://schemas.microsoft.com/office/powerpoint/2012/main" xmlns:r="http://schemas.openxmlformats.org/officeDocument/2006/relationships" xmlns:a="http://schemas.openxmlformats.org/drawingml/2006/main" mc:Ignorable="p14">
   <p:cSld>
     <p:spTree>
       <p:nvGrpSpPr>
@@ -2982,7 +4005,12 @@
         <p:nvSpPr>
           <p:cNvPr id="2" name="Title 1"/>
           <p:cNvSpPr>
-            <a:spLocks noGrp="1"/>
+            <a:spLocks noGrp="1" noChangeArrowheads="1"/>
+            <a:extLst>
+              <a:ext uri="smNativeData">
+                <pr:smNativeData xmlns:pr="smNativeData" xmlns="smNativeData" val="SMDATA_15_FLquaRMAAAAlAAAAZAAAAA0AAAAAkAAAAEgAAACQAAAASAAAAAAAAAACAAAAAAAAAAEAAABQAAAAAAAAAAAA4D8AAAAAAADgPwAAAAAAAOA/AAAAAAAA4D8AAAAAAADgPwAAAAAAAOA/AAAAAAAA4D8AAAAAAADgPwAAAAAAAOA/AAAAAAAA4D8CAAAAjAAAAAAAAAAAAAAAW5vVDP///wgAAAAAAAAAAAAAAAAAAAAAAAAAAAAAAAAAAAAAZAAAAAEAAABAAAAAAAAAAAAAAAAAAAAAAAAAAAAAAAAAAAAAAAAAAAAAAAAAAAAAAAAAAAAAAAAAAAAAAAAAAAAAAAAAAAAAAAAAAAAAAAAAAAAAAAAAAAAAAAAAAAAAFAAAADwAAAAAAAAAAAAAAAAAAAkUAAAAAQAAABQAAAAUAAAAFAAAAAEAAAAAAAAAZAAAAGQAAAAAAAAAZAAAAGQAAAAVAAAAYAAAAAAAAAAAAAAADwAAACADAAAAAAAAAAAAAAEAAACgMgAAVgcAAKr4//8BAAAAf39/AAEAAABkAAAAAAAAABQAAABAHwAAAAAAACYAAAAAAAAAwOD//wAAAAAmAAAAZAAAABYAAABMAAAAAAAAAAAAAAAEAAAAAAAAAAEAAADn5uYKAAAAACgAAAAoAAAAZAAAAGQAAAAAAAAAzMzMAAAAAABQAAAAUAAAAGQAAABkAAAAAAAAABcAAAAUAAAAAAAAAAAAAAD/fwAA/38AAAAAAAAJAAAABAAAAAAAAAAeAAAAaAAAAAAAAAAAAAAAAAAAAAAAAAAAAAAAECcAABAnAAAAAAAAAAAAAAAAAAAAAAAAAAAAAAAAAAAAAAAAAAAAABQAAAAAAAAAwMD/AAAAAABkAAAAMgAAAAAAAABkAAAAAAAAAH9/fwAKAAAAIgAAABgAAAAAAAAAAAAAAAAAAAAAAAAAAAAAAAAAAAAkAAAAJAAAAAAAAAAHAAAAAAAAAAAAAAAAAAAAAAAAAAAAAAAAAAAAf39/ACUAAABYAAAAAAAAAAAAAAAAAAAAAAAAAAAAAAAAAAAAAAAAAAAAAAAAAAAAAAAAAAAAAAA/AAAAAAAAAKCGAQAAAAAAAAAAAAAAAAAMAAAAAQAAAAAAAAAAAAAAAAAAAB8AAABUAAAAW5vVBf///wEAAAAAAAAAAAAAAAAAAAAAAAAAAAAAAAAAAAAAAAAAAAAAAAJ/f38A5+bmA8zMzADAwP8Af39/AAAAAAAAAAAAAAAAAAAAAAAAAAAAIQAAABgAAAAUAAAAYAkAAOgGAACgQQAAmBUAABAAAAAmAAAACAAAAAAAAAAAAAAA"/>
+              </a:ext>
+            </a:extLst>
           </p:cNvSpPr>
           <p:nvPr>
             <p:ph type="ctrTitle"/>
@@ -2993,15 +4021,12 @@
           <a:bodyPr/>
           <a:lstStyle/>
           <a:p>
-            <a:r>
-              <a:rPr lang="en-US" dirty="0" err="1" smtClean="0"/>
-              <a:t>BeagleBone</a:t>
-            </a:r>
-            <a:r>
-              <a:rPr lang="en-US" smtClean="0"/>
-              <a:t> Blue</a:t>
-            </a:r>
-            <a:endParaRPr lang="en-US"/>
+            <a:pPr>
+              <a:defRPr lang="en-us"/>
+            </a:pPr>
+            <a:r>
+              <a:t>BeagleBone Blue</a:t>
+            </a:r>
           </a:p>
         </p:txBody>
       </p:sp>
@@ -3009,7 +4034,12 @@
         <p:nvSpPr>
           <p:cNvPr id="3" name="Subtitle 2"/>
           <p:cNvSpPr>
-            <a:spLocks noGrp="1"/>
+            <a:spLocks noGrp="1" noChangeArrowheads="1"/>
+            <a:extLst>
+              <a:ext uri="smNativeData">
+                <pr:smNativeData xmlns:pr="smNativeData" xmlns="smNativeData" val="SMDATA_15_FLquaRMAAAAlAAAAZAAAAA0AAAAAkAAAAEgAAACQAAAASAAAAAAAAAAAAAAAAAAAAAEAAABQAAAAAAAAAAAA4D8AAAAAAADgPwAAAAAAAOA/AAAAAAAA4D8AAAAAAADgPwAAAAAAAOA/AAAAAAAA4D8AAAAAAADgPwAAAAAAAOA/AAAAAAAA4D8CAAAAjAAAAAAAAAAAAAAAW5vVDP///wgAAAAAAAAAAAAAAAAAAAAAAAAAAAAAAAAAAAAAZAAAAAEAAABAAAAAAAAAAAAAAAAAAAAAAAAAAAAAAAAAAAAAAAAAAAAAAAAAAAAAAAAAAAAAAAAAAAAAAAAAAAAAAAAAAAAAAAAAAAAAAAAAAAAAAAAAAAAAAAAAAAAAFAAAADwAAAAAAAAAAAAAAAAAAAkUAAAAAQAAABQAAAAUAAAAFAAAAAEAAAAAAAAAZAAAAGQAAAAAAAAAZAAAAGQAAAAVAAAAYAAAAAAAAAAAAAAADwAAACADAAAAAAAAAAAAAAEAAACgMgAAVgcAAKr4//8BAAAAf39/AAEAAABkAAAAAAAAABQAAABAHwAAAAAAACYAAAAAAAAAwOD//wAAAAAmAAAAZAAAABYAAABMAAAAAAAAAAAAAAAEAAAAAAAAAAEAAADn5uYKAAAAACgAAAAoAAAAZAAAAGQAAAAAAAAAzMzMAAAAAABQAAAAUAAAAGQAAABkAAAAAAAAABcAAAAUAAAAAAAAAAAAAAD/fwAA/38AAAAAAAAJAAAABAAAAAAAAAAeAAAAaAAAAAAAAAAAAAAAAAAAAAAAAAAAAAAAECcAABAnAAAAAAAAAAAAAAAAAAAAAAAAAAAAAAAAAAAAAAAAAAAAABQAAAAAAAAAwMD/AAAAAABkAAAAMgAAAAAAAABkAAAAAAAAAH9/fwAKAAAAIgAAABgAAAAAAAAAAAAAAAAAAAAAAAAAAAAAAAAAAAAkAAAAJAAAAAAAAAAHAAAAAAAAAAAAAAAAAAAAAAAAAAAAAAAAAAAAf39/ACUAAABYAAAAAAAAAAAAAAAAAAAAAAAAAAAAAAAAAAAAAAAAAAAAAAAAAAAAAAAAAAAAAAA/AAAAAAAAAKCGAQAAAAAAAAAAAAAAAAAMAAAAAQAAAAAAAAAAAAAAAAAAAB8AAABUAAAAW5vVBf///wEAAAAAAAAAAAAAAAAAAAAAAAAAAAAAAAAAAAAAAAAAAAAAAAJ/f38A5+bmA8zMzADAwP8Af39/AAAAAAAAAAAAAAAAAAAAAAAAAAAAIQAAABgAAAAUAAAAYAkAACkWAACgQQAAWCAAABAAAAAmAAAACAAAAAAAAAAAAAAA"/>
+              </a:ext>
+            </a:extLst>
           </p:cNvSpPr>
           <p:nvPr>
             <p:ph type="subTitle" idx="1"/>
@@ -3020,25 +4050,29 @@
           <a:bodyPr/>
           <a:lstStyle/>
           <a:p>
-            <a:endParaRPr lang="en-US"/>
+            <a:pPr>
+              <a:defRPr lang="en-us"/>
+            </a:pPr>
           </a:p>
         </p:txBody>
       </p:sp>
     </p:spTree>
-    <p:extLst>
-      <p:ext uri="{BB962C8B-B14F-4D97-AF65-F5344CB8AC3E}">
-        <p14:creationId xmlns:p14="http://schemas.microsoft.com/office/powerpoint/2010/main" val="2997545409"/>
-      </p:ext>
-    </p:extLst>
   </p:cSld>
   <p:clrMapOvr>
     <a:masterClrMapping/>
   </p:clrMapOvr>
+  <p:timing>
+    <p:tnLst>
+      <p:par>
+        <p:cTn id="1" dur="indefinite" restart="never" nodeType="tmRoot"/>
+      </p:par>
+    </p:tnLst>
+  </p:timing>
 </p:sld>
 </file>
 
 <file path=ppt/slides/slide10.xml><?xml version="1.0" encoding="utf-8"?>
-<p:sld xmlns:a="http://schemas.openxmlformats.org/drawingml/2006/main" xmlns:r="http://schemas.openxmlformats.org/officeDocument/2006/relationships" xmlns:p="http://schemas.openxmlformats.org/presentationml/2006/main">
+<p:sld xmlns:p="http://schemas.openxmlformats.org/presentationml/2006/main" xmlns:mc="http://schemas.openxmlformats.org/markup-compatibility/2006" xmlns:p14="http://schemas.microsoft.com/office/powerpoint/2010/main" xmlns:p15="http://schemas.microsoft.com/office/powerpoint/2012/main" xmlns:r="http://schemas.openxmlformats.org/officeDocument/2006/relationships" xmlns:a="http://schemas.openxmlformats.org/drawingml/2006/main" mc:Ignorable="p14">
   <p:cSld>
     <p:spTree>
       <p:nvGrpSpPr>
@@ -3058,7 +4092,12 @@
         <p:nvSpPr>
           <p:cNvPr id="2" name="Title 1"/>
           <p:cNvSpPr>
-            <a:spLocks noGrp="1"/>
+            <a:spLocks noGrp="1" noChangeArrowheads="1"/>
+            <a:extLst>
+              <a:ext uri="smNativeData">
+                <pr:smNativeData xmlns:pr="smNativeData" xmlns="smNativeData" val="SMDATA_15_FLquaRMAAAAlAAAAZAAAAA0AAAAAkAAAAEgAAACQAAAASAAAAAAAAAABAAAAAAAAAAEAAABQAAAAAAAAAAAA4D8AAAAAAADgPwAAAAAAAOA/AAAAAAAA4D8AAAAAAADgPwAAAAAAAOA/AAAAAAAA4D8AAAAAAADgPwAAAAAAAOA/AAAAAAAA4D8CAAAAjAAAAAAAAAAAAAAAW5vVDP///wgAAAAAAAAAAAAAAAAAAAAAAAAAAAAAAAAAAAAAZAAAAAEAAABAAAAAAAAAAAAAAAAAAAAAAAAAAAAAAAAAAAAAAAAAAAAAAAAAAAAAAAAAAAAAAAAAAAAAAAAAAAAAAAAAAAAAAAAAAAAAAAAAAAAAAAAAAAAAAAAAAAAAFAAAADwAAAAAAAAAAAAAAAAAAAkUAAAAAQAAABQAAAAUAAAAFAAAAAEAAAAAAAAAZAAAAGQAAAAAAAAAZAAAAGQAAAAVAAAAYAAAAAAAAAAAAAAADwAAACADAAAAAAAAAAAAAAEAAACgMgAAVgcAAKr4//8BAAAAf39/AAEAAABkAAAAAAAAABQAAABAHwAAAAAAACYAAAAAAAAAwOD//wAAAAAmAAAAZAAAABYAAABMAAAAAAAAAAAAAAAEAAAAAAAAAAEAAADn5uYKAAAAACgAAAAoAAAAZAAAAGQAAAAAAAAAzMzMAAAAAABQAAAAUAAAAGQAAABkAAAAAAAAABcAAAAUAAAAAAAAAAAAAAD/fwAA/38AAAAAAAAJAAAABAAAAAAAAAAeAAAAaAAAAAAAAAAAAAAAAAAAAAAAAAAAAAAAECcAABAnAAAAAAAAAAAAAAAAAAAAAAAAAAAAAAAAAAAAAAAAAAAAABQAAAAAAAAAwMD/AAAAAABkAAAAMgAAAAAAAABkAAAAAAAAAH9/fwAKAAAAIgAAABgAAAAAAAAAAAAAAAAAAAAAAAAAAAAAAAAAAAAkAAAAJAAAAAAAAAAHAAAAAAAAAAAAAAAAAAAAAAAAAAAAAAAAAAAAf39/ACUAAABYAAAAAAAAAAAAAAAAAAAAAAAAAAAAAAAAAAAAAAAAAAAAAAAAAAAAAAAAAAAAAAA/AAAAAAAAAKCGAQAAAAAAAAAAAAAAAAAMAAAAAQAAAAAAAAAAAAAAAAAAAB8AAABUAAAAW5vVBf///wEAAAAAAAAAAAAAAAAAAAAAAAAAAAAAAAAAAAAAAAAAAAAAAAJ/f38A5+bmA8zMzADAwP8Af39/AAAAAAAAAAAAAAAAAAAAAAAAAAAAIQAAABgAAAAUAAAAKAUAAD8CAADYRQAAZwoAABAAAAAmAAAACAAAAAAAAAAAAAAA"/>
+              </a:ext>
+            </a:extLst>
           </p:cNvSpPr>
           <p:nvPr>
             <p:ph type="title"/>
@@ -3069,12 +4108,444 @@
           <a:bodyPr/>
           <a:lstStyle/>
           <a:p>
-            <a:pPr algn="ctr"/>
-            <a:r>
-              <a:rPr lang="en-US" dirty="0" smtClean="0"/>
+            <a:pPr algn="ctr">
+              <a:defRPr lang="en-us"/>
+            </a:pPr>
+            <a:r>
+              <a:t>Updating the OS</a:t>
+            </a:r>
+          </a:p>
+        </p:txBody>
+      </p:sp>
+      <p:sp>
+        <p:nvSpPr>
+          <p:cNvPr id="3" name="Content Placeholder 2"/>
+          <p:cNvSpPr>
+            <a:spLocks noGrp="1" noChangeArrowheads="1"/>
+            <a:extLst>
+              <a:ext uri="smNativeData">
+                <pr:smNativeData xmlns:pr="smNativeData" xmlns="smNativeData" val="SMDATA_15_FLquaRMAAAAlAAAAZAAAAA0AAAAAkAAAAEgAAACQAAAASAAAAAAAAAAAAAAAAAAAAAEAAABQAAAAAAAAAAAA4D8AAAAAAADgPwAAAAAAAOA/AAAAAAAA4D8AAAAAAADgPwAAAAAAAOA/AAAAAAAA4D8AAAAAAADgPwAAAAAAAOA/AAAAAAAA4D8CAAAAjAAAAAAAAAAAAAAAW5vVDP///wgAAAAAAAAAAAAAAAAAAAAAAAAAAAAAAAAAAAAAZAAAAAEAAABAAAAAAAAAAAAAAAAAAAAAAAAAAAAAAAAAAAAAAAAAAAAAAAAAAAAAAAAAAAAAAAAAAAAAAAAAAAAAAAAAAAAAAAAAAAAAAAAAAAAAAAAAAAAAAAAAAAAAFAAAADwAAAAAAAAAAAAAAAAAAAkUAAAAAQAAABQAAAAUAAAAFAAAAAEAAAAAAAAAZAAAAGQAAAAAAAAAZAAAAGQAAAAVAAAAYAAAAAAAAAAAAAAADwAAACADAAAAAAAAAAAAAAEAAACgMgAAVgcAAKr4//8BAAAAf39/AAEAAABkAAAAAAAAABQAAABAHwAAAAAAACYAAAAAAAAAwOD//wAAAAAmAAAAZAAAABYAAABMAAAAAAAAAAAAAAAEAAAAAAAAAAEAAADn5uYKAAAAACgAAAAoAAAAZAAAAGQAAAAAAAAAzMzMAAAAAABQAAAAUAAAAGQAAABkAAAAAAAAABcAAAAUAAAAAAAAAAAAAAD/fwAA/38AAAAAAAAJAAAABAAAAGUAAAAeAAAAaAAAAAAAAAAAAAAAAAAAAAAAAAAAAAAAECcAABAnAAAAAAAAAAAAAAAAAAAAAAAAAAAAAAAAAAAAAAAAAAAAABQAAAAAAAAAwMD/AAAAAABkAAAAMgAAAAAAAABkAAAAAAAAAH9/fwAKAAAAIgAAABgAAAAAAAAAAAAAAAAAAAAAAAAAAAAAAAAAAAAkAAAAJAAAAAAAAAAHAAAAAAAAAAAAAAAAAAAAAAAAAAAAAAAAAAAAf39/ACUAAABYAAAAAAAAAAAAAAAAAAAAAAAAAAAAAAAAAAAAAAAAAAAAAAAAAAAAAAAAAAAAAAA/AAAAAAAAAKCGAQAAAAAAAAAAAAAAAAAMAAAAAQAAAAAAAAAAAAAAAAAAAB8AAABUAAAAW5vVBf///wEAAAAAAAAAAAAAAAAAAAAAAAAAAAAAAAAAAAAAAAAAAAAAAAJ/f38A5+bmA8zMzADAwP8Af39/AAAAAAAAAAAAAAAAAAAAAAAAAAAAIQAAABgAAAAUAAAAKAUAADsLAADYRQAAACYAABAAAAAmAAAACAAAAAAgAAAAAAAA"/>
+              </a:ext>
+            </a:extLst>
+          </p:cNvSpPr>
+          <p:nvPr>
+            <p:ph type="body" idx="1"/>
+          </p:nvPr>
+        </p:nvSpPr>
+        <p:spPr/>
+        <p:txBody>
+          <a:bodyPr vert="horz" wrap="square" lIns="91440" tIns="45720" rIns="91440" bIns="45720" numCol="1" spcCol="215900" anchor="t">
+            <a:prstTxWarp prst="textNoShape">
+              <a:avLst/>
+            </a:prstTxWarp>
+          </a:bodyPr>
+          <a:lstStyle/>
+          <a:p>
+            <a:pPr>
+              <a:defRPr lang="en-us"/>
+            </a:pPr>
+            <a:r>
+              <a:t>BeagleBone Blue has 4GB eMMC (and 512MB DDR3 memory)</a:t>
+            </a:r>
+          </a:p>
+          <a:p>
+            <a:pPr>
+              <a:defRPr lang="en-us"/>
+            </a:pPr>
+            <a:r>
+              <a:t>The SD Card can be used to flash/replace the eMMC</a:t>
+            </a:r>
+          </a:p>
+          <a:p>
+            <a:pPr lvl="1">
+              <a:defRPr lang="en-us"/>
+            </a:pPr>
+            <a:r>
+              <a:t>Use EduMIP version on blue Lexar SD Card</a:t>
+            </a:r>
+          </a:p>
+          <a:p>
+            <a:pPr lvl="1">
+              <a:defRPr lang="en-us"/>
+            </a:pPr>
+            <a:r>
+              <a:t>If the SD Card is a ‘flasher’ version you don’t even need to hold down the flash button.</a:t>
+            </a:r>
+          </a:p>
+          <a:p>
+            <a:pPr lvl="1">
+              <a:defRPr lang="en-us"/>
+            </a:pPr>
+            <a:r>
+              <a:t>If it’s flashing it will cycle LEDs in a cyclon fashion back and forth.</a:t>
+            </a:r>
+          </a:p>
+          <a:p>
+            <a:pPr lvl="2">
+              <a:defRPr lang="en-us"/>
+            </a:pPr>
+            <a:r>
+              <a:t>Once’s it done it will auto-shut itself down (and no more LEDs cycling).</a:t>
+            </a:r>
+          </a:p>
+          <a:p>
+            <a:pPr lvl="1">
+              <a:defRPr lang="en-us"/>
+            </a:pPr>
+            <a:r>
+              <a:t>Take the SD card out (so it doesn’t do it again) and reboot.</a:t>
+            </a:r>
+          </a:p>
+          <a:p>
+            <a:pPr>
+              <a:defRPr lang="en-us"/>
+            </a:pPr>
+            <a:r>
+              <a:t>To create a new flasher SD Card from the current eMMC:</a:t>
+            </a:r>
+          </a:p>
+          <a:p>
+            <a:pPr lvl="1">
+              <a:defRPr lang="en-us"/>
+            </a:pPr>
+            <a:r>
+              <a:rPr lang="en-us" sz="2000" cap="none"/>
+              <a:t>/opt/scripts/tools/eMMC/beaglebone-black-make-microSD-flasher-from-eMMC.sh</a:t>
+            </a:r>
+          </a:p>
+          <a:p>
+            <a:pPr lvl="1">
+              <a:defRPr lang="en-us"/>
+            </a:pPr>
+          </a:p>
+        </p:txBody>
+      </p:sp>
+    </p:spTree>
+  </p:cSld>
+  <p:clrMapOvr>
+    <a:masterClrMapping/>
+  </p:clrMapOvr>
+  <p:timing>
+    <p:tnLst>
+      <p:par>
+        <p:cTn id="1" dur="indefinite" restart="never" nodeType="tmRoot"/>
+      </p:par>
+    </p:tnLst>
+  </p:timing>
+</p:sld>
+</file>
+
+<file path=ppt/slides/slide11.xml><?xml version="1.0" encoding="utf-8"?>
+<p:sld xmlns:p="http://schemas.openxmlformats.org/presentationml/2006/main" xmlns:mc="http://schemas.openxmlformats.org/markup-compatibility/2006" xmlns:p14="http://schemas.microsoft.com/office/powerpoint/2010/main" xmlns:p15="http://schemas.microsoft.com/office/powerpoint/2012/main" xmlns:r="http://schemas.openxmlformats.org/officeDocument/2006/relationships" xmlns:a="http://schemas.openxmlformats.org/drawingml/2006/main" mc:Ignorable="p14">
+  <p:cSld>
+    <p:spTree>
+      <p:nvGrpSpPr>
+        <p:cNvPr id="1" name=""/>
+        <p:cNvGrpSpPr/>
+        <p:nvPr/>
+      </p:nvGrpSpPr>
+      <p:grpSpPr>
+        <a:xfrm>
+          <a:off x="0" y="0"/>
+          <a:ext cx="0" cy="0"/>
+          <a:chOff x="0" y="0"/>
+          <a:chExt cx="0" cy="0"/>
+        </a:xfrm>
+      </p:grpSpPr>
+      <p:sp>
+        <p:nvSpPr>
+          <p:cNvPr id="2" name="Title 1"/>
+          <p:cNvSpPr>
+            <a:spLocks noGrp="1" noChangeArrowheads="1"/>
+            <a:extLst>
+              <a:ext uri="smNativeData">
+                <pr:smNativeData xmlns:pr="smNativeData" xmlns="smNativeData" val="SMDATA_15_FLquaRMAAAAlAAAAZAAAAA0AAAAAkAAAAEgAAACQAAAASAAAAAAAAAABAAAAAAAAAAEAAABQAAAAAAAAAAAA4D8AAAAAAADgPwAAAAAAAOA/AAAAAAAA4D8AAAAAAADgPwAAAAAAAOA/AAAAAAAA4D8AAAAAAADgPwAAAAAAAOA/AAAAAAAA4D8CAAAAjAAAAAAAAAAAAAAAW5vVDP///wgAAAAAAAAAAAAAAAAAAAAAAAAAAAAAAAAAAAAAZAAAAAEAAABAAAAAAAAAAAAAAAAAAAAAAAAAAAAAAAAAAAAAAAAAAAAAAAAAAAAAAAAAAAAAAAAAAAAAAAAAAAAAAAAAAAAAAAAAAAAAAAAAAAAAAAAAAAAAAAAAAAAAFAAAADwAAAAAAAAAAAAAAAAAAAkUAAAAAQAAABQAAAAUAAAAFAAAAAEAAAAAAAAAZAAAAGQAAAAAAAAAZAAAAGQAAAAVAAAAYAAAAAAAAAAAAAAADwAAACADAAAAAAAAAAAAAAEAAACgMgAAVgcAAKr4//8BAAAAf39/AAEAAABkAAAAAAAAABQAAABAHwAAAAAAACYAAAAAAAAAwOD//wAAAAAmAAAAZAAAABYAAABMAAAAAAAAAAAAAAAEAAAAAAAAAAEAAADn5uYKAAAAACgAAAAoAAAAZAAAAGQAAAAAAAAAzMzMAAAAAABQAAAAUAAAAGQAAABkAAAAAAAAABcAAAAUAAAAAAAAAAAAAAD/fwAA/38AAAAAAAAJAAAABAAAAF8AYAAeAAAAaAAAAAAAAAAAAAAAAAAAAAAAAAAAAAAAECcAABAnAAAAAAAAAAAAAAAAAAAAAAAAAAAAAAAAAAAAAAAAAAAAABQAAAAAAAAAwMD/AAAAAABkAAAAMgAAAAAAAABkAAAAAAAAAH9/fwAKAAAAIgAAABgAAAAAAAAAAAAAAAAAAAAAAAAAAAAAAAAAAAAkAAAAJAAAAAAAAAAHAAAAAAAAAAAAAAAAAAAAAAAAAAAAAAAAAAAAf39/ACUAAABYAAAAAAAAAAAAAAAAAAAAAAAAAAAAAAAAAAAAAAAAAAAAAAAAAAAAAAAAAAAAAAA/AAAAAAAAAKCGAQAAAAAAAAAAAAAAAAAMAAAAAQAAAAAAAAAAAAAAAAAAAB8AAABUAAAAW5vVBf///wEAAAAAAAAAAAAAAAAAAAAAAAAAAAAAAAAAAAAAAAAAAAAAAAJ/f38A5+bmA8zMzADAwP8Af39/AAAAAAAAAAAAAAAAAAAAAAAAAAAAIQAAABgAAAAUAAAAKAUAAD8CAADYRQAAZwoAABAAAAAmAAAACAAAAAAAAAAAAAAA"/>
+              </a:ext>
+            </a:extLst>
+          </p:cNvSpPr>
+          <p:nvPr>
+            <p:ph type="title"/>
+          </p:nvPr>
+        </p:nvSpPr>
+        <p:spPr/>
+        <p:txBody>
+          <a:bodyPr/>
+          <a:lstStyle/>
+          <a:p>
+            <a:pPr>
+              <a:defRPr lang="en-us"/>
+            </a:pPr>
+            <a:r>
+              <a:t>Setup OS onto internal Flash memory</a:t>
+            </a:r>
+          </a:p>
+        </p:txBody>
+      </p:sp>
+      <p:sp>
+        <p:nvSpPr>
+          <p:cNvPr id="3" name="Content Placeholder 2"/>
+          <p:cNvSpPr>
+            <a:spLocks noGrp="1" noChangeArrowheads="1"/>
+            <a:extLst>
+              <a:ext uri="smNativeData">
+                <pr:smNativeData xmlns:pr="smNativeData" xmlns="smNativeData" val="SMDATA_15_FLquaRMAAAAlAAAAZAAAAA0AAAAAkAAAAEgAAACQAAAASAAAAAAAAAAAAAAAAAAAAAEAAABQAAAAAAAAAAAA4D8AAAAAAADgPwAAAAAAAOA/AAAAAAAA4D8AAAAAAADgPwAAAAAAAOA/AAAAAAAA4D8AAAAAAADgPwAAAAAAAOA/AAAAAAAA4D8CAAAAjAAAAAAAAAAAAAAAW5vVDP///wgAAAAAAAAAAAAAAAAAAAAAAAAAAAAAAAAAAAAAZAAAAAEAAABAAAAAAAAAAAAAAAAAAAAAAAAAAAAAAAAAAAAAAAAAAAAAAAAAAAAAAAAAAAAAAAAAAAAAAAAAAAAAAAAAAAAAAAAAAAAAAAAAAAAAAAAAAAAAAAAAAAAAFAAAADwAAAAAAAAAAAAAAAAAAAkUAAAAAQAAABQAAAAUAAAAFAAAAAEAAAAAAAAAZAAAAGQAAAAAAAAAZAAAAGQAAAAVAAAAYAAAAAAAAAAAAAAADwAAACADAAAAAAAAAAAAAAEAAACgMgAAVgcAAKr4//8BAAAAf39/AAEAAABkAAAAAAAAABQAAABAHwAAAAAAACYAAAAAAAAAwOD//wAAAAAmAAAAZAAAABYAAABMAAAAAAAAAAAAAAAEAAAAAAAAAAEAAADn5uYKAAAAACgAAAAoAAAAZAAAAGQAAAAAAAAAzMzMAAAAAABQAAAAUAAAAGQAAABkAAAAAAAAABcAAAAUAAAAAAAAAAAAAAD/fwAA/38AAAAAAAAJAAAABAAAAAAAAAAeAAAAaAAAAAAAAAAAAAAAAAAAAAAAAAAAAAAAECcAABAnAAAAAAAAAAAAAAAAAAAAAAAAAAAAAAAAAAAAAAAAAAAAABQAAAAAAAAAwMD/AAAAAABkAAAAMgAAAAAAAABkAAAAAAAAAH9/fwAKAAAAIgAAABgAAAAAAAAAAAAAAAAAAAAAAAAAAAAAAAAAAAAkAAAAJAAAAAAAAAAHAAAAAAAAAAAAAAAAAAAAAAAAAAAAAAAAAAAAf39/ACUAAABYAAAAAAAAAAAAAAAAAAAAAAAAAAAAAAAAAAAAAAAAAAAAAAAAAAAAAAAAAAAAAAA/AAAAAAAAAKCGAQAAAAAAAAAAAAAAAAAMAAAAAQAAAAAAAAAAAAAAAAAAAB8AAABUAAAAW5vVBf///wEAAAAAAAAAAAAAAAAAAAAAAAAAAAAAAAAAAAAAAAAAAAAAAAJ/f38A5+bmA8zMzADAwP8Af39/AAAAAAAAAAAAAAAAAAAAAAAAAAAAIQAAABgAAAAUAAAAKAUAADsLAADYRQAAACYAABAAAAAmAAAACAAAAAAAAAAAAAAA"/>
+              </a:ext>
+            </a:extLst>
+          </p:cNvSpPr>
+          <p:nvPr>
+            <p:ph type="body" idx="1"/>
+          </p:nvPr>
+        </p:nvSpPr>
+        <p:spPr/>
+        <p:txBody>
+          <a:bodyPr/>
+          <a:lstStyle/>
+          <a:p>
+            <a:pPr>
+              <a:defRPr lang="en-us"/>
+            </a:pPr>
+            <a:r>
+              <a:t>Burn ‘flasher’ image onto SD card</a:t>
+            </a:r>
+          </a:p>
+          <a:p>
+            <a:pPr lvl="1">
+              <a:defRPr lang="en-us"/>
+            </a:pPr>
+            <a:r>
+              <a:t>Use EduMIP flasher image to get the ‘libcontrol’ installed correctly.</a:t>
+            </a:r>
+          </a:p>
+          <a:p>
+            <a:pPr lvl="2">
+              <a:defRPr lang="en-us"/>
+            </a:pPr>
+            <a:r>
+              <a:rPr lang="en-us" cap="none">
+                <a:hlinkClick r:id="rId2"/>
+              </a:rPr>
+              <a:t>https://www.renaissancerobotics.com/BeagleboneBlue.html</a:t>
+            </a:r>
+          </a:p>
+          <a:p>
+            <a:pPr>
+              <a:defRPr lang="en-us"/>
+            </a:pPr>
+          </a:p>
+        </p:txBody>
+      </p:sp>
+    </p:spTree>
+  </p:cSld>
+  <p:clrMapOvr>
+    <a:masterClrMapping/>
+  </p:clrMapOvr>
+  <p:timing>
+    <p:tnLst>
+      <p:par>
+        <p:cTn id="1" dur="indefinite" restart="never" nodeType="tmRoot"/>
+      </p:par>
+    </p:tnLst>
+  </p:timing>
+</p:sld>
+</file>
+
+<file path=ppt/slides/slide12.xml><?xml version="1.0" encoding="utf-8"?>
+<p:sld xmlns:p="http://schemas.openxmlformats.org/presentationml/2006/main" xmlns:mc="http://schemas.openxmlformats.org/markup-compatibility/2006" xmlns:p14="http://schemas.microsoft.com/office/powerpoint/2010/main" xmlns:p15="http://schemas.microsoft.com/office/powerpoint/2012/main" xmlns:r="http://schemas.openxmlformats.org/officeDocument/2006/relationships" xmlns:a="http://schemas.openxmlformats.org/drawingml/2006/main" mc:Ignorable="p14">
+  <p:cSld>
+    <p:spTree>
+      <p:nvGrpSpPr>
+        <p:cNvPr id="1" name=""/>
+        <p:cNvGrpSpPr/>
+        <p:nvPr/>
+      </p:nvGrpSpPr>
+      <p:grpSpPr>
+        <a:xfrm>
+          <a:off x="0" y="0"/>
+          <a:ext cx="0" cy="0"/>
+          <a:chOff x="0" y="0"/>
+          <a:chExt cx="0" cy="0"/>
+        </a:xfrm>
+      </p:grpSpPr>
+      <p:sp>
+        <p:nvSpPr>
+          <p:cNvPr id="2" name="Title 1"/>
+          <p:cNvSpPr>
+            <a:spLocks noGrp="1" noChangeArrowheads="1"/>
+            <a:extLst>
+              <a:ext uri="smNativeData">
+                <pr:smNativeData xmlns:pr="smNativeData" xmlns="smNativeData" val="SMDATA_15_FLquaRMAAAAlAAAAZAAAAA0AAAAAkAAAAEgAAACQAAAASAAAAAAAAAABAAAAAAAAAAEAAABQAAAAAAAAAAAA4D8AAAAAAADgPwAAAAAAAOA/AAAAAAAA4D8AAAAAAADgPwAAAAAAAOA/AAAAAAAA4D8AAAAAAADgPwAAAAAAAOA/AAAAAAAA4D8CAAAAjAAAAAAAAAAAAAAAW5vVDP///wgAAAAAAAAAAAAAAAAAAAAAAAAAAAAAAAAAAAAAZAAAAAEAAABAAAAAAAAAAAAAAAAAAAAAAAAAAAAAAAAAAAAAAAAAAAAAAAAAAAAAAAAAAAAAAAAAAAAAAAAAAAAAAAAAAAAAAAAAAAAAAAAAAAAAAAAAAAAAAAAAAAAAFAAAADwAAAAAAAAAAAAAAAAAAAkUAAAAAQAAABQAAAAUAAAAFAAAAAEAAAAAAAAAZAAAAGQAAAAAAAAAZAAAAGQAAAAVAAAAYAAAAAAAAAAAAAAADwAAACADAAAAAAAAAAAAAAEAAACgMgAAVgcAAKr4//8BAAAAf39/AAEAAABkAAAAAAAAABQAAABAHwAAAAAAACYAAAAAAAAAwOD//wAAAAAmAAAAZAAAABYAAABMAAAAAAAAAAAAAAAEAAAAAAAAAAEAAADn5uYKAAAAACgAAAAoAAAAZAAAAGQAAAAAAAAAzMzMAAAAAABQAAAAUAAAAGQAAABkAAAAAAAAABcAAAAUAAAAAAAAAAAAAAD/fwAA/38AAAAAAAAJAAAABAAAAAAAAAAeAAAAaAAAAAAAAAAAAAAAAAAAAAAAAAAAAAAAECcAABAnAAAAAAAAAAAAAAAAAAAAAAAAAAAAAAAAAAAAAAAAAAAAABQAAAAAAAAAwMD/AAAAAABkAAAAMgAAAAAAAABkAAAAAAAAAH9/fwAKAAAAIgAAABgAAAAAAAAAAAAAAAAAAAAAAAAAAAAAAAAAAAAkAAAAJAAAAAAAAAAHAAAAAAAAAAAAAAAAAAAAAAAAAAAAAAAAAAAAf39/ACUAAABYAAAAAAAAAAAAAAAAAAAAAAAAAAAAAAAAAAAAAAAAAAAAAAAAAAAAAAAAAAAAAAA/AAAAAAAAAKCGAQAAAAAAAAAAAAAAAAAMAAAAAQAAAAAAAAAAAAAAAAAAAB8AAABUAAAAW5vVBf///wEAAAAAAAAAAAAAAAAAAAAAAAAAAAAAAAAAAAAAAAAAAAAAAAJ/f38A5+bmA8zMzADAwP8Af39/AAAAAAAAAAAAAAAAAAAAAAAAAAAAIQAAABgAAAAUAAAAKAUAAD8CAADYRQAAZwoAABAAAAAmAAAACAAAAAAAAAAAAAAA"/>
+              </a:ext>
+            </a:extLst>
+          </p:cNvSpPr>
+          <p:nvPr>
+            <p:ph type="title"/>
+          </p:nvPr>
+        </p:nvSpPr>
+        <p:spPr/>
+        <p:txBody>
+          <a:bodyPr/>
+          <a:lstStyle/>
+          <a:p>
+            <a:pPr algn="ctr">
+              <a:defRPr lang="en-us"/>
+            </a:pPr>
+            <a:r>
+              <a:t>USB Camera</a:t>
+            </a:r>
+          </a:p>
+        </p:txBody>
+      </p:sp>
+      <p:sp>
+        <p:nvSpPr>
+          <p:cNvPr id="3" name="Content Placeholder 2"/>
+          <p:cNvSpPr>
+            <a:spLocks noGrp="1" noChangeArrowheads="1"/>
+            <a:extLst>
+              <a:ext uri="smNativeData">
+                <pr:smNativeData xmlns:pr="smNativeData" xmlns="smNativeData" val="SMDATA_15_FLquaRMAAAAlAAAAZAAAAA0AAAAAkAAAAEgAAACQAAAASAAAAAAAAAAAAAAAAAAAAAEAAABQAAAAAAAAAAAA4D8AAAAAAADgPwAAAAAAAOA/AAAAAAAA4D8AAAAAAADgPwAAAAAAAOA/AAAAAAAA4D8AAAAAAADgPwAAAAAAAOA/AAAAAAAA4D8CAAAAjAAAAAAAAAAAAAAAW5vVDP///wgAAAAAAAAAAAAAAAAAAAAAAAAAAAAAAAAAAAAAZAAAAAEAAABAAAAAAAAAAAAAAAAAAAAAAAAAAAAAAAAAAAAAAAAAAAAAAAAAAAAAAAAAAAAAAAAAAAAAAAAAAAAAAAAAAAAAAAAAAAAAAAAAAAAAAAAAAAAAAAAAAAAAFAAAADwAAAAAAAAAAAAAAAAAAAkUAAAAAQAAABQAAAAUAAAAFAAAAAEAAAAAAAAAZAAAAGQAAAAAAAAAZAAAAGQAAAAVAAAAYAAAAAAAAAAAAAAADwAAACADAAAAAAAAAAAAAAEAAACgMgAAVgcAAKr4//8BAAAAf39/AAEAAABkAAAAAAAAABQAAABAHwAAAAAAACYAAAAAAAAAwOD//wAAAAAmAAAAZAAAABYAAABMAAAAAAAAAAAAAAAEAAAAAAAAAAEAAADn5uYKAAAAACgAAAAoAAAAZAAAAGQAAAAAAAAAzMzMAAAAAABQAAAAUAAAAGQAAABkAAAAAAAAABcAAAAUAAAAAAAAAAAAAAD/fwAA/38AAAAAAAAJAAAABAAAAGOVQsIeAAAAaAAAAAAAAAAAAAAAAAAAAAAAAAAAAAAAECcAABAnAAAAAAAAAAAAAAAAAAAAAAAAAAAAAAAAAAAAAAAAAAAAABQAAAAAAAAAwMD/AAAAAABkAAAAMgAAAAAAAABkAAAAAAAAAH9/fwAKAAAAIgAAABgAAAAAAAAAAAAAAAAAAAAAAAAAAAAAAAAAAAAkAAAAJAAAAAAAAAAHAAAAAAAAAAAAAAAAAAAAAAAAAAAAAAAAAAAAf39/ACUAAABYAAAAAAAAAAAAAAAAAAAAAAAAAAAAAAAAAAAAAAAAAAAAAAAAAAAAAAAAAAAAAAA/AAAAAAAAAKCGAQAAAAAAAAAAAAAAAAAMAAAAAQAAAAAAAAAAAAAAAAAAAB8AAABUAAAAW5vVBf///wEAAAAAAAAAAAAAAAAAAAAAAAAAAAAAAAAAAAAAAAAAAAAAAAJ/f38A5+bmA8zMzADAwP8Af39/AAAAAAAAAAAAAAAAAAAAAAAAAAAAIQAAABgAAAAUAAAAKAUAADsLAADYRQAAACYAABAAAAAmAAAACAAAAAAAAAAAAAAA"/>
+              </a:ext>
+            </a:extLst>
+          </p:cNvSpPr>
+          <p:nvPr>
+            <p:ph type="body" idx="1"/>
+          </p:nvPr>
+        </p:nvSpPr>
+        <p:spPr/>
+        <p:txBody>
+          <a:bodyPr/>
+          <a:lstStyle/>
+          <a:p>
+            <a:pPr>
+              <a:defRPr lang="en-us"/>
+            </a:pPr>
+            <a:r>
+              <a:rPr lang="en-us" cap="none">
+                <a:hlinkClick r:id="rId2"/>
+              </a:rPr>
+              <a:t>https://subscription.packtpub.com/book/hardware-and-creative/9781788293136/5/05lvl1sec28/connecting-your-usb-camera-to-your-beaglebone-blue-and-viewing-the-images</a:t>
+            </a:r>
+          </a:p>
+          <a:p>
+            <a:pPr>
+              <a:defRPr lang="en-us"/>
+            </a:pPr>
+            <a:r>
+              <a:t>Check if camera is present:</a:t>
+            </a:r>
+          </a:p>
+          <a:p>
+            <a:pPr lvl="1">
+              <a:defRPr lang="en-us"/>
+            </a:pPr>
+            <a:r>
+              <a:t>lsusb</a:t>
+            </a:r>
+          </a:p>
+          <a:p>
+            <a:pPr lvl="1">
+              <a:defRPr lang="en-us"/>
+            </a:pPr>
+            <a:r>
+              <a:t>cd /dev; ls video*</a:t>
+            </a:r>
+          </a:p>
+          <a:p>
+            <a:pPr lvl="2">
+              <a:defRPr lang="en-us"/>
+            </a:pPr>
+            <a:r>
+              <a:t>It should show up as video0 or similar</a:t>
+            </a:r>
+          </a:p>
+          <a:p>
+            <a:pPr>
+              <a:defRPr lang="en-us"/>
+            </a:pPr>
+            <a:r>
+              <a:t>Compatible cameras:</a:t>
+            </a:r>
+          </a:p>
+          <a:p>
+            <a:pPr lvl="1">
+              <a:defRPr lang="en-us"/>
+            </a:pPr>
+            <a:r>
+              <a:t>Logitech C270: 720p</a:t>
+            </a:r>
+          </a:p>
+          <a:p>
+            <a:pPr lvl="1">
+              <a:defRPr lang="en-us"/>
+            </a:pPr>
+            <a:r>
+              <a:t>Logitech C310: 720p</a:t>
+            </a:r>
+          </a:p>
+          <a:p>
+            <a:pPr lvl="1">
+              <a:defRPr lang="en-us"/>
+            </a:pPr>
+          </a:p>
+        </p:txBody>
+      </p:sp>
+    </p:spTree>
+  </p:cSld>
+  <p:clrMapOvr>
+    <a:masterClrMapping/>
+  </p:clrMapOvr>
+  <p:timing>
+    <p:tnLst>
+      <p:par>
+        <p:cTn id="1" dur="indefinite" restart="never" nodeType="tmRoot"/>
+      </p:par>
+    </p:tnLst>
+  </p:timing>
+</p:sld>
+</file>
+
+<file path=ppt/slides/slide13.xml><?xml version="1.0" encoding="utf-8"?>
+<p:sld xmlns:p="http://schemas.openxmlformats.org/presentationml/2006/main" xmlns:mc="http://schemas.openxmlformats.org/markup-compatibility/2006" xmlns:p14="http://schemas.microsoft.com/office/powerpoint/2010/main" xmlns:p15="http://schemas.microsoft.com/office/powerpoint/2012/main" xmlns:r="http://schemas.openxmlformats.org/officeDocument/2006/relationships" xmlns:a="http://schemas.openxmlformats.org/drawingml/2006/main" mc:Ignorable="p14">
+  <p:cSld>
+    <p:spTree>
+      <p:nvGrpSpPr>
+        <p:cNvPr id="1" name=""/>
+        <p:cNvGrpSpPr/>
+        <p:nvPr/>
+      </p:nvGrpSpPr>
+      <p:grpSpPr>
+        <a:xfrm>
+          <a:off x="0" y="0"/>
+          <a:ext cx="0" cy="0"/>
+          <a:chOff x="0" y="0"/>
+          <a:chExt cx="0" cy="0"/>
+        </a:xfrm>
+      </p:grpSpPr>
+      <p:sp>
+        <p:nvSpPr>
+          <p:cNvPr id="2" name="Title 1"/>
+          <p:cNvSpPr>
+            <a:spLocks noGrp="1" noChangeArrowheads="1"/>
+            <a:extLst>
+              <a:ext uri="smNativeData">
+                <pr:smNativeData xmlns:pr="smNativeData" xmlns="smNativeData" val="SMDATA_15_FLquaRMAAAAlAAAAZAAAAA0AAAAAkAAAAEgAAACQAAAASAAAAAAAAAABAAAAAAAAAAEAAABQAAAAAAAAAAAA4D8AAAAAAADgPwAAAAAAAOA/AAAAAAAA4D8AAAAAAADgPwAAAAAAAOA/AAAAAAAA4D8AAAAAAADgPwAAAAAAAOA/AAAAAAAA4D8CAAAAjAAAAAAAAAAAAAAAW5vVDP///wgAAAAAAAAAAAAAAAAAAAAAAAAAAAAAAAAAAAAAZAAAAAEAAABAAAAAAAAAAAAAAAAAAAAAAAAAAAAAAAAAAAAAAAAAAAAAAAAAAAAAAAAAAAAAAAAAAAAAAAAAAAAAAAAAAAAAAAAAAAAAAAAAAAAAAAAAAAAAAAAAAAAAFAAAADwAAAAAAAAAAAAAAAAAAAkUAAAAAQAAABQAAAAUAAAAFAAAAAEAAAAAAAAAZAAAAGQAAAAAAAAAZAAAAGQAAAAVAAAAYAAAAAAAAAAAAAAADwAAACADAAAAAAAAAAAAAAEAAACgMgAAVgcAAKr4//8BAAAAf39/AAEAAABkAAAAAAAAABQAAABAHwAAAAAAACYAAAAAAAAAwOD//wAAAAAmAAAAZAAAABYAAABMAAAAAAAAAAAAAAAEAAAAAAAAAAEAAADn5uYKAAAAACgAAAAoAAAAZAAAAGQAAAAAAAAAzMzMAAAAAABQAAAAUAAAAGQAAABkAAAAAAAAABcAAAAUAAAAAAAAAAAAAAD/fwAA/38AAAAAAAAJAAAABAAAAF8AYAAeAAAAaAAAAAAAAAAAAAAAAAAAAAAAAAAAAAAAECcAABAnAAAAAAAAAAAAAAAAAAAAAAAAAAAAAAAAAAAAAAAAAAAAABQAAAAAAAAAwMD/AAAAAABkAAAAMgAAAAAAAABkAAAAAAAAAH9/fwAKAAAAIgAAABgAAAAAAAAAAAAAAAAAAAAAAAAAAAAAAAAAAAAkAAAAJAAAAAAAAAAHAAAAAAAAAAAAAAAAAAAAAAAAAAAAAAAAAAAAf39/ACUAAABYAAAAAAAAAAAAAAAAAAAAAAAAAAAAAAAAAAAAAAAAAAAAAAAAAAAAAAAAAAAAAAA/AAAAAAAAAKCGAQAAAAAAAAAAAAAAAAAMAAAAAQAAAAAAAAAAAAAAAAAAAB8AAABUAAAAW5vVBf///wEAAAAAAAAAAAAAAAAAAAAAAAAAAAAAAAAAAAAAAAAAAAAAAAJ/f38A5+bmA8zMzADAwP8Af39/AAAAAAAAAAAAAAAAAAAAAAAAAAAAIQAAABgAAAAUAAAAKAUAAD8CAADYRQAAZwoAABAAAAAmAAAACAAAAAAAAAAAAAAA"/>
+              </a:ext>
+            </a:extLst>
+          </p:cNvSpPr>
+          <p:nvPr>
+            <p:ph type="title"/>
+          </p:nvPr>
+        </p:nvSpPr>
+        <p:spPr/>
+        <p:txBody>
+          <a:bodyPr/>
+          <a:lstStyle/>
+          <a:p>
+            <a:pPr algn="ctr">
+              <a:defRPr lang="en-us"/>
+            </a:pPr>
+            <a:r>
               <a:t>Wireless Controller</a:t>
             </a:r>
-            <a:endParaRPr lang="en-US" dirty="0"/>
           </a:p>
         </p:txBody>
       </p:sp>
@@ -3082,99 +4553,95 @@
         <p:nvSpPr>
           <p:cNvPr id="3" name="Content Placeholder 2"/>
           <p:cNvSpPr>
-            <a:spLocks noGrp="1"/>
-          </p:cNvSpPr>
-          <p:nvPr>
-            <p:ph idx="1"/>
+            <a:spLocks noGrp="1" noChangeArrowheads="1"/>
+            <a:extLst>
+              <a:ext uri="smNativeData">
+                <pr:smNativeData xmlns:pr="smNativeData" xmlns="smNativeData" val="SMDATA_15_FLquaRMAAAAlAAAAZAAAAA0AAAAAkAAAAEgAAACQAAAASAAAAAAAAAAAAAAAAAAAAAEAAABQAAAAAAAAAAAA4D8AAAAAAADgPwAAAAAAAOA/AAAAAAAA4D8AAAAAAADgPwAAAAAAAOA/AAAAAAAA4D8AAAAAAADgPwAAAAAAAOA/AAAAAAAA4D8CAAAAjAAAAAAAAAAAAAAAW5vVDP///wgAAAAAAAAAAAAAAAAAAAAAAAAAAAAAAAAAAAAAZAAAAAEAAABAAAAAAAAAAAAAAAAAAAAAAAAAAAAAAAAAAAAAAAAAAAAAAAAAAAAAAAAAAAAAAAAAAAAAAAAAAAAAAAAAAAAAAAAAAAAAAAAAAAAAAAAAAAAAAAAAAAAAFAAAADwAAAAAAAAAAAAAAAAAAAkUAAAAAQAAABQAAAAUAAAAFAAAAAEAAAAAAAAAZAAAAGQAAAAAAAAAZAAAAGQAAAAVAAAAYAAAAAAAAAAAAAAADwAAACADAAAAAAAAAAAAAAEAAACgMgAAVgcAAKr4//8BAAAAf39/AAEAAABkAAAAAAAAABQAAABAHwAAAAAAACYAAAAAAAAAwOD//wAAAAAmAAAAZAAAABYAAABMAAAAAAAAAAAAAAAEAAAAAAAAAAEAAADn5uYKAAAAACgAAAAoAAAAZAAAAGQAAAAAAAAAzMzMAAAAAABQAAAAUAAAAGQAAABkAAAAAAAAABcAAAAUAAAAAAAAAAAAAAD/fwAA/38AAAAAAAAJAAAABAAAAAEAAAAeAAAAaAAAAAAAAAAAAAAAAAAAAAAAAAAAAAAAECcAABAnAAAAAAAAAAAAAAAAAAAAAAAAAAAAAAAAAAAAAAAAAAAAABQAAAAAAAAAwMD/AAAAAABkAAAAMgAAAAAAAABkAAAAAAAAAH9/fwAKAAAAIgAAABgAAAAAAAAAAAAAAAAAAAAAAAAAAAAAAAAAAAAkAAAAJAAAAAAAAAAHAAAAAAAAAAAAAAAAAAAAAAAAAAAAAAAAAAAAf39/ACUAAABYAAAAAAAAAAAAAAAAAAAAAAAAAAAAAAAAAAAAAAAAAAAAAAAAAAAAAAAAAAAAAAA/AAAAAAAAAKCGAQAAAAAAAAAAAAAAAAAMAAAAAQAAAAAAAAAAAAAAAAAAAB8AAABUAAAAW5vVBf///wEAAAAAAAAAAAAAAAAAAAAAAAAAAAAAAAAAAAAAAAAAAAAAAAJ/f38A5+bmA8zMzADAwP8Af39/AAAAAAAAAAAAAAAAAAAAAAAAAAAAIQAAABgAAAAUAAAAKAUAAE8QAADYRQAA/yUAABAAAAAmAAAACAAAAAEgAAAAAAAA"/>
+              </a:ext>
+            </a:extLst>
+          </p:cNvSpPr>
+          <p:nvPr>
+            <p:ph type="body" idx="1"/>
           </p:nvPr>
         </p:nvSpPr>
         <p:spPr>
           <a:xfrm>
-            <a:off x="838200" y="2651207"/>
-            <a:ext cx="10515600" cy="3525755"/>
+            <a:off x="838200" y="2651125"/>
+            <a:ext cx="10515600" cy="3525520"/>
           </a:xfrm>
         </p:spPr>
         <p:txBody>
-          <a:bodyPr/>
-          <a:lstStyle/>
-          <a:p>
-            <a:r>
-              <a:rPr lang="en-US" dirty="0"/>
-              <a:t>Works with </a:t>
-            </a:r>
-            <a:r>
-              <a:rPr lang="en-US" dirty="0" smtClean="0"/>
-              <a:t>\joes_robot_control\JoystickToRobotTmp.py</a:t>
-            </a:r>
-            <a:endParaRPr lang="en-US" dirty="0"/>
-          </a:p>
-          <a:p>
-            <a:r>
-              <a:rPr lang="en-US" dirty="0" smtClean="0"/>
+          <a:bodyPr vert="horz" wrap="square" lIns="91440" tIns="45720" rIns="91440" bIns="45720" numCol="1" spcCol="215900" anchor="t">
+            <a:prstTxWarp prst="textNoShape">
+              <a:avLst/>
+            </a:prstTxWarp>
+          </a:bodyPr>
+          <a:lstStyle/>
+          <a:p>
+            <a:pPr>
+              <a:spcBef>
+                <a:spcPts val="920"/>
+              </a:spcBef>
+              <a:defRPr lang="en-us" sz="2575" cap="none"/>
+            </a:pPr>
+            <a:r>
+              <a:t>Works with embedded\librobotcontrol_arm\joes_robot_control\JoystickToRobotTmp.py</a:t>
+            </a:r>
+          </a:p>
+          <a:p>
+            <a:pPr>
+              <a:spcBef>
+                <a:spcPts val="920"/>
+              </a:spcBef>
+              <a:defRPr lang="en-us" sz="2575" cap="none"/>
+            </a:pPr>
+            <a:r>
               <a:t>To install driver:</a:t>
             </a:r>
           </a:p>
           <a:p>
-            <a:pPr lvl="1"/>
-            <a:r>
-              <a:rPr lang="en-US" dirty="0" smtClean="0"/>
-              <a:t>pip3 install </a:t>
-            </a:r>
-            <a:r>
-              <a:rPr lang="en-US" dirty="0" err="1" smtClean="0"/>
-              <a:t>evdev</a:t>
-            </a:r>
-            <a:endParaRPr lang="en-US" dirty="0" smtClean="0"/>
-          </a:p>
-          <a:p>
-            <a:pPr lvl="2"/>
-            <a:r>
-              <a:rPr lang="en-US" dirty="0" smtClean="0"/>
-              <a:t>Really need </a:t>
-            </a:r>
-            <a:r>
-              <a:rPr lang="en-US" dirty="0" err="1" smtClean="0"/>
-              <a:t>sudo</a:t>
-            </a:r>
-            <a:r>
-              <a:rPr lang="en-US" dirty="0" smtClean="0"/>
-              <a:t> pip3 install </a:t>
-            </a:r>
-            <a:r>
-              <a:rPr lang="en-US" dirty="0" err="1" smtClean="0"/>
-              <a:t>evdev</a:t>
-            </a:r>
-            <a:r>
-              <a:rPr lang="en-US" dirty="0"/>
-              <a:t> </a:t>
-            </a:r>
-            <a:r>
-              <a:rPr lang="en-US" dirty="0" smtClean="0"/>
-              <a:t> - it requires </a:t>
-            </a:r>
-            <a:r>
-              <a:rPr lang="en-US" dirty="0" err="1" smtClean="0"/>
-              <a:t>sudo</a:t>
-            </a:r>
-            <a:r>
-              <a:rPr lang="en-US" dirty="0" smtClean="0"/>
-              <a:t> anyways to access /dev/input/event1</a:t>
-            </a:r>
-          </a:p>
-          <a:p>
-            <a:r>
-              <a:rPr lang="en-US" dirty="0" smtClean="0"/>
-              <a:t>No battery, needs to be plugged into </a:t>
-            </a:r>
-            <a:r>
-              <a:rPr lang="en-US" dirty="0" err="1" smtClean="0"/>
-              <a:t>microUSB</a:t>
-            </a:r>
-            <a:r>
-              <a:rPr lang="en-US" dirty="0" smtClean="0"/>
-              <a:t>!</a:t>
-            </a:r>
-            <a:endParaRPr lang="en-US" dirty="0"/>
+            <a:pPr lvl="1">
+              <a:spcBef>
+                <a:spcPts val="460"/>
+              </a:spcBef>
+              <a:defRPr lang="en-us" sz="2210" cap="none"/>
+            </a:pPr>
+            <a:r>
+              <a:t>pip3 install evdev</a:t>
+            </a:r>
+          </a:p>
+          <a:p>
+            <a:pPr lvl="2">
+              <a:spcBef>
+                <a:spcPts val="460"/>
+              </a:spcBef>
+              <a:defRPr lang="en-us" sz="1840" cap="none"/>
+            </a:pPr>
+            <a:r>
+              <a:t>Really need sudo pip3 install evdev  - it requires sudo anyways to access /dev/input/event1</a:t>
+            </a:r>
+          </a:p>
+          <a:p>
+            <a:pPr>
+              <a:spcBef>
+                <a:spcPts val="920"/>
+              </a:spcBef>
+              <a:defRPr lang="en-us" sz="2575" cap="none"/>
+            </a:pPr>
+            <a:r>
+              <a:t>Controller has NO BATTERY, needs to be plugged into microUSB!</a:t>
+            </a:r>
+          </a:p>
+          <a:p>
+            <a:pPr lvl="1">
+              <a:spcBef>
+                <a:spcPts val="460"/>
+              </a:spcBef>
+              <a:defRPr lang="en-us" sz="2210" cap="none"/>
+            </a:pPr>
+            <a:r>
+              <a:t>ALSO do NOT plug controller into computer USB port, because then controller gives input to the PC (and not wirelessly).</a:t>
+            </a:r>
           </a:p>
         </p:txBody>
       </p:sp>
@@ -3183,6 +4650,11 @@
           <p:cNvPr id="4" name="Picture 3"/>
           <p:cNvPicPr>
             <a:picLocks noChangeAspect="1"/>
+            <a:extLst>
+              <a:ext uri="smNativeData">
+                <pr:smNativeData xmlns:pr="smNativeData" xmlns="smNativeData" val="SMDATA_17_FLquaRMAAAAlAAAAEQAAAC0AAAAAkAAAAEgAAACQAAAASAAAAAAAAAAAAAAAAAAAAAEAAABQAAAAAAAAAAAA4D8AAAAAAADgPwAAAAAAAOA/AAAAAAAA4D8AAAAAAADgPwAAAAAAAOA/AAAAAAAA4D8AAAAAAADgPwAAAAAAAOA/AAAAAAAA4D8CAAAAjAAAAAAAAAAAAAAAW5vVDP///wgAAAAAAAAAAAAAAAAAAAAAAAAAAAAAAAAAAAAAZAAAAAEAAABAAAAAAAAAAAAAAAAAAAAAAAAAAAAAAAAAAAAAAAAAAAAAAAAAAAAAAAAAAAAAAAAAAAAAAAAAAAAAAAAAAAAAAAAAAAAAAAAAAAAAAAAAAAAAAAAAAAAAFAAAADwAAAAAAAAAAAAAAAAAAAkUAAAAAQAAABQAAAAUAAAAFAAAAAEAAAAAAAAAZAAAAGQAAAAAAAAAZAAAAGQAAAAVAAAAYAAAAAAAAAAAAAAADwAAACADAAAAAAAAAAAAAAEAAACgMgAAVgcAAKr4//8BAAAAf39/AAEAAABkAAAAAAAAABQAAABAHwAAAAAAACYAAAAAAAAAwOD//wAAAAAmAAAAZAAAABYAAABMAAAAAAAAAAAAAAAEAAAAAAAAAAEAAADn5uYKAAAAACgAAAAoAAAAZAAAAGQAAAAAAAAAzMzMAAAAAABQAAAAUAAAAGQAAABkAAAAAAAAAAcAAAA4AAAAAAAAAAAAAAAAAAAA////AAAAAAAAAAAAAAAAAAAAAAAAAAAAAAAAAAAAAABkAAAAZAAAAAAAAAAjAAAABAAAAGQAAAAXAAAAFAAAAAAAAAAAAAAA/38AAP9/AAAAAAAACQAAAAQAAAAKAAAAHgAAAGgAAAAAAAAAAAAAAAAAAAAAAAAAAAAAABAnAAAQJwAAAAAAAAAAAAAAAAAAAAAAAAAAAAAAAAAAAAAAAAAAAAAUAAAAAAAAAMDA/wAAAAAAZAAAADIAAAAAAAAAZAAAAAAAAAB/f38ACgAAACIAAAAYAAAAAAAAAAAAAAAAAAAAAAAAAAAAAAAAAAAAJAAAACQAAAAAAAAABwAAAAAAAAAAAAAAAAAAAAAAAAAAAAAAAAAAAH9/fwAlAAAAWAAAAAAAAAAAAAAAAAAAAAAAAAAAAAAAAAAAAAAAAAAAAAAAAAAAAAAAAAAAAAAAPwAAAAAAAACghgEAAAAAAAAAAAAAAAAADAAAAAEAAAAAAAAAAAAAAAAAAAAfAAAAVAAAAFub1QX///8BAAAAAAAAAAAAAAAAAAAAAAAAAAAAAAAAAAAAAAAAAAAAAAACf39/AOfm5gPMzMwAwMD/AH9/fwAAAAAAAAAAAAAAAAD///8AAAAAACEAAAAYAAAAFAAAADsfAAAaCQAAqigAAE8QAAAQAAAAJgAAAAgAAAD//////////w=="/>
+              </a:ext>
+            </a:extLst>
           </p:cNvPicPr>
           <p:nvPr/>
         </p:nvPicPr>
@@ -3194,29 +4666,384 @@
         </p:blipFill>
         <p:spPr>
           <a:xfrm>
-            <a:off x="5076574" y="1479633"/>
+            <a:off x="5076825" y="1479550"/>
             <a:ext cx="1533525" cy="1171575"/>
           </a:xfrm>
           <a:prstGeom prst="rect">
             <a:avLst/>
           </a:prstGeom>
+          <a:noFill/>
+          <a:ln>
+            <a:noFill/>
+          </a:ln>
+          <a:effectLst/>
         </p:spPr>
       </p:pic>
     </p:spTree>
-    <p:extLst>
-      <p:ext uri="{BB962C8B-B14F-4D97-AF65-F5344CB8AC3E}">
-        <p14:creationId xmlns:p14="http://schemas.microsoft.com/office/powerpoint/2010/main" val="2929099703"/>
-      </p:ext>
-    </p:extLst>
   </p:cSld>
   <p:clrMapOvr>
     <a:masterClrMapping/>
   </p:clrMapOvr>
+  <p:timing>
+    <p:tnLst>
+      <p:par>
+        <p:cTn id="1" dur="indefinite" restart="never" nodeType="tmRoot"/>
+      </p:par>
+    </p:tnLst>
+  </p:timing>
+</p:sld>
+</file>
+
+<file path=ppt/slides/slide14.xml><?xml version="1.0" encoding="utf-8"?>
+<p:sld xmlns:p="http://schemas.openxmlformats.org/presentationml/2006/main" xmlns:mc="http://schemas.openxmlformats.org/markup-compatibility/2006" xmlns:p14="http://schemas.microsoft.com/office/powerpoint/2010/main" xmlns:p15="http://schemas.microsoft.com/office/powerpoint/2012/main" xmlns:r="http://schemas.openxmlformats.org/officeDocument/2006/relationships" xmlns:a="http://schemas.openxmlformats.org/drawingml/2006/main" mc:Ignorable="p14">
+  <p:cSld>
+    <p:spTree>
+      <p:nvGrpSpPr>
+        <p:cNvPr id="1" name=""/>
+        <p:cNvGrpSpPr/>
+        <p:nvPr/>
+      </p:nvGrpSpPr>
+      <p:grpSpPr>
+        <a:xfrm>
+          <a:off x="0" y="0"/>
+          <a:ext cx="0" cy="0"/>
+          <a:chOff x="0" y="0"/>
+          <a:chExt cx="0" cy="0"/>
+        </a:xfrm>
+      </p:grpSpPr>
+      <p:sp>
+        <p:nvSpPr>
+          <p:cNvPr id="2" name="Title 1"/>
+          <p:cNvSpPr>
+            <a:spLocks noGrp="1" noChangeArrowheads="1"/>
+            <a:extLst>
+              <a:ext uri="smNativeData">
+                <pr:smNativeData xmlns:pr="smNativeData" xmlns="smNativeData" val="SMDATA_15_FLquaRMAAAAlAAAAZAAAAA0AAAAAkAAAAEgAAACQAAAASAAAAAAAAAABAAAAAAAAAAEAAABQAAAAAAAAAAAA4D8AAAAAAADgPwAAAAAAAOA/AAAAAAAA4D8AAAAAAADgPwAAAAAAAOA/AAAAAAAA4D8AAAAAAADgPwAAAAAAAOA/AAAAAAAA4D8CAAAAjAAAAAAAAAAAAAAAW5vVDP///wgAAAAAAAAAAAAAAAAAAAAAAAAAAAAAAAAAAAAAZAAAAAEAAABAAAAAAAAAAAAAAAAAAAAAAAAAAAAAAAAAAAAAAAAAAAAAAAAAAAAAAAAAAAAAAAAAAAAAAAAAAAAAAAAAAAAAAAAAAAAAAAAAAAAAAAAAAAAAAAAAAAAAFAAAADwAAAAAAAAAAAAAAAAAAAkUAAAAAQAAABQAAAAUAAAAFAAAAAEAAAAAAAAAZAAAAGQAAAAAAAAAZAAAAGQAAAAVAAAAYAAAAAAAAAAAAAAADwAAACADAAAAAAAAAAAAAAEAAACgMgAAVgcAAKr4//8BAAAAf39/AAEAAABkAAAAAAAAABQAAABAHwAAAAAAACYAAAAAAAAAwOD//wAAAAAmAAAAZAAAABYAAABMAAAAAAAAAAAAAAAEAAAAAAAAAAEAAADn5uYKAAAAACgAAAAoAAAAZAAAAGQAAAAAAAAAzMzMAAAAAABQAAAAUAAAAGQAAABkAAAAAAAAABcAAAAUAAAAAAAAAAAAAAD/fwAA/38AAAAAAAAJAAAABAAAAAAAAAAeAAAAaAAAAAAAAAAAAAAAAAAAAAAAAAAAAAAAECcAABAnAAAAAAAAAAAAAAAAAAAAAAAAAAAAAAAAAAAAAAAAAAAAABQAAAAAAAAAwMD/AAAAAABkAAAAMgAAAAAAAABkAAAAAAAAAH9/fwAKAAAAIgAAABgAAAAAAAAAAAAAAAAAAAAAAAAAAAAAAAAAAAAkAAAAJAAAAAAAAAAHAAAAAAAAAAAAAAAAAAAAAAAAAAAAAAAAAAAAf39/ACUAAABYAAAAAAAAAAAAAAAAAAAAAAAAAAAAAAAAAAAAAAAAAAAAAAAAAAAAAAAAAAAAAAA/AAAAAAAAAKCGAQAAAAAAAAAAAAAAAAAMAAAAAQAAAAAAAAAAAAAAAAAAAB8AAABUAAAAW5vVBf///wEAAAAAAAAAAAAAAAAAAAAAAAAAAAAAAAAAAAAAAAAAAAAAAAJ/f38A5+bmA8zMzADAwP8Af39/AAAAAAAAAAAAAAAAAAAAAAAAAAAAIQAAABgAAAAUAAAAKAUAAD8CAADYRQAAZwoAABAAAAAmAAAACAAAAAAAAAAAAAAA"/>
+              </a:ext>
+            </a:extLst>
+          </p:cNvSpPr>
+          <p:nvPr>
+            <p:ph type="title"/>
+          </p:nvPr>
+        </p:nvSpPr>
+        <p:spPr/>
+        <p:txBody>
+          <a:bodyPr/>
+          <a:lstStyle/>
+          <a:p>
+            <a:pPr>
+              <a:defRPr lang="en-us"/>
+            </a:pPr>
+            <a:r>
+              <a:t>Using Bluetooth controller</a:t>
+            </a:r>
+          </a:p>
+        </p:txBody>
+      </p:sp>
+      <p:sp>
+        <p:nvSpPr>
+          <p:cNvPr id="3" name="Content Placeholder 2"/>
+          <p:cNvSpPr>
+            <a:spLocks noGrp="1" noChangeArrowheads="1"/>
+            <a:extLst>
+              <a:ext uri="smNativeData">
+                <pr:smNativeData xmlns:pr="smNativeData" xmlns="smNativeData" val="SMDATA_15_FLquaRMAAAAlAAAAZAAAAA0AAAAAkAAAAEgAAACQAAAASAAAAAAAAAAAAAAAAAAAAAEAAABQAAAAAAAAAAAA4D8AAAAAAADgPwAAAAAAAOA/AAAAAAAA4D8AAAAAAADgPwAAAAAAAOA/AAAAAAAA4D8AAAAAAADgPwAAAAAAAOA/AAAAAAAA4D8CAAAAjAAAAAAAAAAAAAAAW5vVDP///wgAAAAAAAAAAAAAAAAAAAAAAAAAAAAAAAAAAAAAZAAAAAEAAABAAAAAAAAAAAAAAAAAAAAAAAAAAAAAAAAAAAAAAAAAAAAAAAAAAAAAAAAAAAAAAAAAAAAAAAAAAAAAAAAAAAAAAAAAAAAAAAAAAAAAAAAAAAAAAAAAAAAAFAAAADwAAAAAAAAAAAAAAAAAAAkUAAAAAQAAABQAAAAUAAAAFAAAAAEAAAAAAAAAZAAAAGQAAAAAAAAAZAAAAGQAAAAVAAAAYAAAAAAAAAAAAAAADwAAACADAAAAAAAAAAAAAAEAAACgMgAAVgcAAKr4//8BAAAAf39/AAEAAABkAAAAAAAAABQAAABAHwAAAAAAACYAAAAAAAAAwOD//wAAAAAmAAAAZAAAABYAAABMAAAAAAAAAAAAAAAEAAAAAAAAAAEAAADn5uYKAAAAACgAAAAoAAAAZAAAAGQAAAAAAAAAzMzMAAAAAABQAAAAUAAAAGQAAABkAAAAAAAAABcAAAAUAAAAAAAAAAAAAAD/fwAA/38AAAAAAAAJAAAABAAAAA+TLsAeAAAAaAAAAAAAAAAAAAAAAAAAAAAAAAAAAAAAECcAABAnAAAAAAAAAAAAAAAAAAAAAAAAAAAAAAAAAAAAAAAAAAAAABQAAAAAAAAAwMD/AAAAAABkAAAAMgAAAAAAAABkAAAAAAAAAH9/fwAKAAAAIgAAABgAAAAAAAAAAAAAAAAAAAAAAAAAAAAAAAAAAAAkAAAAJAAAAAAAAAAHAAAAAAAAAAAAAAAAAAAAAAAAAAAAAAAAAAAAf39/ACUAAABYAAAAAAAAAAAAAAAAAAAAAAAAAAAAAAAAAAAAAAAAAAAAAAAAAAAAAAAAAAAAAAA/AAAAAAAAAKCGAQAAAAAAAAAAAAAAAAAMAAAAAQAAAAAAAAAAAAAAAAAAAB8AAABUAAAAW5vVBf///wEAAAAAAAAAAAAAAAAAAAAAAAAAAAAAAAAAAAAAAAAAAAAAAAJ/f38A5+bmA8zMzADAwP8Af39/AAAAAAAAAAAAAAAAAAAAAAAAAAAAIQAAABgAAAAUAAAAKAUAADsLAADYRQAAACYAABAAAAAmAAAACAAAAAAgAAAAAAAA"/>
+              </a:ext>
+            </a:extLst>
+          </p:cNvSpPr>
+          <p:nvPr>
+            <p:ph type="body" idx="1"/>
+          </p:nvPr>
+        </p:nvSpPr>
+        <p:spPr/>
+        <p:txBody>
+          <a:bodyPr vert="horz" wrap="square" lIns="91440" tIns="45720" rIns="91440" bIns="45720" numCol="1" spcCol="215900" anchor="t">
+            <a:prstTxWarp prst="textNoShape">
+              <a:avLst/>
+            </a:prstTxWarp>
+          </a:bodyPr>
+          <a:lstStyle/>
+          <a:p>
+            <a:pPr>
+              <a:lnSpc>
+                <a:spcPct val="80000"/>
+              </a:lnSpc>
+              <a:spcBef>
+                <a:spcPts val="920"/>
+              </a:spcBef>
+              <a:defRPr lang="en-us" sz="2575" cap="none"/>
+            </a:pPr>
+            <a:r>
+              <a:t>sudo bluetoothctl</a:t>
+            </a:r>
+          </a:p>
+          <a:p>
+            <a:pPr lvl="1">
+              <a:lnSpc>
+                <a:spcPct val="80000"/>
+              </a:lnSpc>
+              <a:spcBef>
+                <a:spcPts val="460"/>
+              </a:spcBef>
+              <a:defRPr lang="en-us" sz="2210" cap="none"/>
+            </a:pPr>
+            <a:r>
+              <a:t>power on</a:t>
+            </a:r>
+          </a:p>
+          <a:p>
+            <a:pPr lvl="1">
+              <a:lnSpc>
+                <a:spcPct val="80000"/>
+              </a:lnSpc>
+              <a:spcBef>
+                <a:spcPts val="460"/>
+              </a:spcBef>
+              <a:defRPr lang="en-us" sz="2210" cap="none"/>
+            </a:pPr>
+            <a:r>
+              <a:t>agent on</a:t>
+            </a:r>
+          </a:p>
+          <a:p>
+            <a:pPr lvl="1">
+              <a:lnSpc>
+                <a:spcPct val="80000"/>
+              </a:lnSpc>
+              <a:spcBef>
+                <a:spcPts val="460"/>
+              </a:spcBef>
+              <a:defRPr lang="en-us" sz="2210" cap="none"/>
+            </a:pPr>
+            <a:r>
+              <a:t>default-agent</a:t>
+            </a:r>
+          </a:p>
+          <a:p>
+            <a:pPr lvl="1">
+              <a:lnSpc>
+                <a:spcPct val="80000"/>
+              </a:lnSpc>
+              <a:spcBef>
+                <a:spcPts val="460"/>
+              </a:spcBef>
+              <a:defRPr lang="en-us" sz="2210" cap="none"/>
+            </a:pPr>
+            <a:r>
+              <a:t>scan on</a:t>
+            </a:r>
+          </a:p>
+          <a:p>
+            <a:pPr lvl="1">
+              <a:lnSpc>
+                <a:spcPct val="80000"/>
+              </a:lnSpc>
+              <a:spcBef>
+                <a:spcPts val="460"/>
+              </a:spcBef>
+              <a:defRPr lang="en-us" sz="2210" cap="none"/>
+            </a:pPr>
+            <a:r>
+              <a:t>pair XX:XX:XX:XX:XX:XX</a:t>
+            </a:r>
+          </a:p>
+          <a:p>
+            <a:pPr lvl="1">
+              <a:lnSpc>
+                <a:spcPct val="80000"/>
+              </a:lnSpc>
+              <a:spcBef>
+                <a:spcPts val="460"/>
+              </a:spcBef>
+              <a:defRPr lang="en-us" sz="2210" cap="none"/>
+            </a:pPr>
+            <a:r>
+              <a:t>trust XX:XX:XX:XX:XX:XX</a:t>
+            </a:r>
+          </a:p>
+          <a:p>
+            <a:pPr lvl="1">
+              <a:lnSpc>
+                <a:spcPct val="80000"/>
+              </a:lnSpc>
+              <a:spcBef>
+                <a:spcPts val="460"/>
+              </a:spcBef>
+              <a:defRPr lang="en-us" sz="2210" cap="none"/>
+            </a:pPr>
+            <a:r>
+              <a:t>connect</a:t>
+            </a:r>
+          </a:p>
+          <a:p>
+            <a:pPr lvl="1">
+              <a:lnSpc>
+                <a:spcPct val="80000"/>
+              </a:lnSpc>
+              <a:spcBef>
+                <a:spcPts val="460"/>
+              </a:spcBef>
+              <a:defRPr lang="en-us" sz="2210" cap="none"/>
+            </a:pPr>
+            <a:r>
+              <a:t>quit</a:t>
+            </a:r>
+          </a:p>
+          <a:p>
+            <a:pPr>
+              <a:lnSpc>
+                <a:spcPct val="80000"/>
+              </a:lnSpc>
+              <a:spcBef>
+                <a:spcPts val="920"/>
+              </a:spcBef>
+              <a:defRPr lang="en-us" sz="2575" cap="none"/>
+            </a:pPr>
+            <a:r>
+              <a:t>*Difficult to find which device is which, never got this to work</a:t>
+            </a:r>
+          </a:p>
+          <a:p>
+            <a:pPr>
+              <a:lnSpc>
+                <a:spcPct val="80000"/>
+              </a:lnSpc>
+              <a:spcBef>
+                <a:spcPts val="920"/>
+              </a:spcBef>
+              <a:defRPr lang="en-us" sz="2575" cap="none"/>
+            </a:pPr>
+            <a:r>
+              <a:t>It does work on Pi, though: \embedded\RaspberryPi\GameControllerRobot\8bitdo_controller\</a:t>
+            </a:r>
+          </a:p>
+        </p:txBody>
+      </p:sp>
+    </p:spTree>
+  </p:cSld>
+  <p:clrMapOvr>
+    <a:masterClrMapping/>
+  </p:clrMapOvr>
+  <p:timing>
+    <p:tnLst>
+      <p:par>
+        <p:cTn id="1" dur="indefinite" restart="never" nodeType="tmRoot"/>
+      </p:par>
+    </p:tnLst>
+  </p:timing>
+</p:sld>
+</file>
+
+<file path=ppt/slides/slide15.xml><?xml version="1.0" encoding="utf-8"?>
+<p:sld xmlns:p="http://schemas.openxmlformats.org/presentationml/2006/main" xmlns:mc="http://schemas.openxmlformats.org/markup-compatibility/2006" xmlns:p14="http://schemas.microsoft.com/office/powerpoint/2010/main" xmlns:p15="http://schemas.microsoft.com/office/powerpoint/2012/main" xmlns:r="http://schemas.openxmlformats.org/officeDocument/2006/relationships" xmlns:a="http://schemas.openxmlformats.org/drawingml/2006/main" mc:Ignorable="p14">
+  <p:cSld>
+    <p:spTree>
+      <p:nvGrpSpPr>
+        <p:cNvPr id="1" name=""/>
+        <p:cNvGrpSpPr/>
+        <p:nvPr/>
+      </p:nvGrpSpPr>
+      <p:grpSpPr>
+        <a:xfrm>
+          <a:off x="0" y="0"/>
+          <a:ext cx="0" cy="0"/>
+          <a:chOff x="0" y="0"/>
+          <a:chExt cx="0" cy="0"/>
+        </a:xfrm>
+      </p:grpSpPr>
+      <p:sp>
+        <p:nvSpPr>
+          <p:cNvPr id="2" name="SlideTitle1"/>
+          <p:cNvSpPr>
+            <a:spLocks noGrp="1" noChangeArrowheads="1"/>
+            <a:extLst>
+              <a:ext uri="smNativeData">
+                <pr:smNativeData xmlns:pr="smNativeData" xmlns="smNativeData" val="SMDATA_15_FLquaRMAAAAlAAAAZAAAAA0AAAAAkAAAAEgAAACQAAAASAAAAAAAAAABAAAAAAAAAAEAAABQAAAAAAAAAAAA4D8AAAAAAADgPwAAAAAAAOA/AAAAAAAA4D8AAAAAAADgPwAAAAAAAOA/AAAAAAAA4D8AAAAAAADgPwAAAAAAAOA/AAAAAAAA4D8CAAAAjAAAAAAAAAAAAAAAW5vVDP///wgAAAAAAAAAAAAAAAAAAAAAAAAAAAAAAAAAAAAAZAAAAAEAAABAAAAAAAAAAAAAAAAAAAAAAAAAAAAAAAAAAAAAAAAAAAAAAAAAAAAAAAAAAAAAAAAAAAAAAAAAAAAAAAAAAAAAAAAAAAAAAAAAAAAAAAAAAAAAAAAAAAAAFAAAADwAAAAAAAAAAAAAAAAAAAkUAAAAAQAAABQAAAAUAAAAFAAAAAEAAAAAAAAAZAAAAGQAAAAAAAAAZAAAAGQAAAAVAAAAYAAAAAAAAAAAAAAADwAAACADAAAAAAAAAAAAAAEAAACgMgAAVgcAAKr4//8BAAAAf39/AAEAAABkAAAAAAAAABQAAABAHwAAAAAAACYAAAAAAAAAwOD//wAAAAAmAAAAZAAAABYAAABMAAAAAAAAAAAAAAAEAAAAAAAAAAEAAADn5uYKAAAAACgAAAAoAAAAZAAAAGQAAAAAAAAAzMzMAAAAAABQAAAAUAAAAGQAAABkAAAAAAAAABcAAAAUAAAAAAAAAAAAAAD/fwAA/38AAAAAAAAJAAAABAAAAAAAAAAeAAAAaAAAAAAAAAAAAAAAAAAAAAAAAAAAAAAAECcAABAnAAAAAAAAAAAAAAAAAAAAAAAAAAAAAAAAAAAAAAAAAAAAABQAAAAAAAAAwMD/AAAAAABkAAAAMgAAAAAAAABkAAAAAAAAAH9/fwAKAAAAIgAAABgAAAAAAAAAAAAAAAAAAAAAAAAAAAAAAAAAAAAkAAAAJAAAAAAAAAAHAAAAAAAAAAAAAAAAAAAAAAAAAAAAAAAAAAAAf39/ACUAAABYAAAAAAAAAAAAAAAAAAAAAAAAAAAAAAAAAAAAAAAAAAAAAAAAAAAAAAAAAAAAAAA/AAAAAAAAAKCGAQAAAAAAAAAAAAAAAAAMAAAAAQAAAAAAAAAAAAAAAAAAAB8AAABUAAAAW5vVBf///wEAAAAAAAAAAAAAAAAAAAAAAAAAAAAAAAAAAAAAAAAAAAAAAAJ/f38A5+bmA8zMzADAwP8Af39/AAAAAAAAAAAAAAAAAAAAAAAAAAAAIQAAABgAAAAUAAAAKAUAAD8CAADYRQAAZwoAAAAAAAAmAAAACAAAAAEAAAAAAAAA"/>
+              </a:ext>
+            </a:extLst>
+          </p:cNvSpPr>
+          <p:nvPr>
+            <p:ph type="title"/>
+          </p:nvPr>
+        </p:nvSpPr>
+        <p:spPr>
+          <a:xfrm>
+            <a:off x="838200" y="365125"/>
+            <a:ext cx="10515600" cy="1325880"/>
+          </a:xfrm>
+        </p:spPr>
+        <p:txBody>
+          <a:bodyPr/>
+          <a:lstStyle/>
+          <a:p>
+            <a:pPr algn="ctr">
+              <a:defRPr lang="en-us"/>
+            </a:pPr>
+            <a:r>
+              <a:t>Mecanum Wheel Control Principle</a:t>
+            </a:r>
+          </a:p>
+          <a:p>
+            <a:pPr algn="ctr">
+              <a:defRPr lang="en-us"/>
+            </a:pPr>
+            <a:r>
+              <a:t>wheels should be in an 'X' from above</a:t>
+            </a:r>
+          </a:p>
+        </p:txBody>
+      </p:sp>
+      <p:pic>
+        <p:nvPicPr>
+          <p:cNvPr id="3" name="Picture1"/>
+          <p:cNvPicPr>
+            <a:picLocks noChangeAspect="1"/>
+            <a:extLst>
+              <a:ext uri="smNativeData">
+                <pr:smNativeData xmlns:pr="smNativeData" xmlns="smNativeData" val="SMDATA_17_FLquaRMAAAAlAAAAEQAAAC8BAAAAkAAAAEgAAACQAAAASAAAAAAAAAAAAAAAAAAAAAEAAABQAAAAAAAAAAAA4D8AAAAAAADgPwAAAAAAAOA/AAAAAAAA4D8AAAAAAADgPwAAAAAAAOA/AAAAAAAA4D8AAAAAAADgPwAAAAAAAOA/AAAAAAAA4D8CAAAAjAAAAAAAAAAAAAAAW5vVDP///wgAAAAAAAAAAAAAAAAAAAAAAAAAAAAAAAAAAAAAZAAAAAEAAABAAAAAAAAAAAAAAAAAAAAAAAAAAAAAAAAAAAAAAAAAAAAAAAAAAAAAAAAAAAAAAAAAAAAAAAAAAAAAAAAAAAAAAAAAAAAAAAAAAAAAAAAAAAAAAAAAAAAAFAAAADwAAAAAAAAAAAAAAAAAAAkUAAAAAQAAABQAAAAUAAAAFAAAAAEAAAAAAAAAZAAAAGQAAAAAAAAAZAAAAGQAAAAVAAAAYAAAAAAAAAAAAAAADwAAACADAAAAAAAAAAAAAAEAAACgMgAAVgcAAKr4//8BAAAAf39/AAEAAABkAAAAAAAAABQAAABAHwAAAAAAACYAAAAAAAAAwOD//wAAAAAmAAAAZAAAABYAAABMAAAAAAAAAAAAAAAEAAAAAAAAAAEAAADn5uYKAAAAACgAAAAoAAAAZAAAAGQAAAAAAAAAzMzMAAAAAABQAAAAUAAAAGQAAABkAAAAAAAAAAcAAAA4AAAAAAAAAAAAAAAAAAAA////AAAAAAAAAAAAAAAAAAAAAAAAAAAAAAAAAAAAAABkAAAAZAAAAAAAAAAjAAAABAAAAGQAAAAXAAAAFAAAAAAAAAAAAAAA/38AAP9/AAAAAAAACQAAAAQAAADuAAAAHgAAAGgAAAAAAAAAAAAAAAAAAAAAAAAAAAAAABAnAAAQJwAAAAAAAAAAAAAAAAAAAAAAAAAAAAAAAAAAAAAAAAAAAAAUAAAAAAAAAMDA/wAAAAAAZAAAADIAAAAAAAAAZAAAAAAAAAB/f38ACgAAACIAAAAYAAAAAAAAAAAAAAAAAAAAAAAAAAAAAAAAAAAAJAAAACQAAAAAAAAABwAAAAAAAAAAAAAAAAAAAAAAAAAAAAAAAAAAAH9/fwAlAAAAWAAAAAAAAAAAAAAAAAAAAAAAAAAAAAAAAAAAAAAAAAAAAAAAAAAAAAAAAAAAAAAAPwAAAAAAAACghgEAAAAAAAAAAAAAAAAADAAAAAEAAAAAAAAAAAAAAAAAAAAfAAAAVAAAAFub1QX///8BAAAAAAAAAAAAAAAAAAAAAAAAAAAAAAAAAAAAAAAAAAAAAAACf39/AOfm5gPMzMwAwMD/AH9/fwAAAAAAAAAAAAAAAAD///8AAAAAACEAAAAYAAAAFAAAAIEQAAByCgAAzToAAF8pAAAAAAAAJgAAAAgAAAD//////////w=="/>
+              </a:ext>
+            </a:extLst>
+          </p:cNvPicPr>
+          <p:nvPr/>
+        </p:nvPicPr>
+        <p:blipFill>
+          <a:blip r:embed="rId2"/>
+          <a:stretch>
+            <a:fillRect/>
+          </a:stretch>
+        </p:blipFill>
+        <p:spPr>
+          <a:xfrm>
+            <a:off x="2682875" y="1697990"/>
+            <a:ext cx="6875780" cy="5027295"/>
+          </a:xfrm>
+          <a:prstGeom prst="rect">
+            <a:avLst/>
+          </a:prstGeom>
+          <a:noFill/>
+          <a:ln>
+            <a:noFill/>
+          </a:ln>
+          <a:effectLst/>
+        </p:spPr>
+      </p:pic>
+    </p:spTree>
+  </p:cSld>
+  <p:clrMapOvr>
+    <a:masterClrMapping/>
+  </p:clrMapOvr>
+  <p:timing>
+    <p:tnLst>
+      <p:par>
+        <p:cTn id="1" dur="indefinite" restart="never" nodeType="tmRoot"/>
+      </p:par>
+    </p:tnLst>
+  </p:timing>
 </p:sld>
 </file>
 
 <file path=ppt/slides/slide2.xml><?xml version="1.0" encoding="utf-8"?>
-<p:sld xmlns:a="http://schemas.openxmlformats.org/drawingml/2006/main" xmlns:r="http://schemas.openxmlformats.org/officeDocument/2006/relationships" xmlns:p="http://schemas.openxmlformats.org/presentationml/2006/main">
+<p:sld xmlns:p="http://schemas.openxmlformats.org/presentationml/2006/main" xmlns:mc="http://schemas.openxmlformats.org/markup-compatibility/2006" xmlns:p14="http://schemas.microsoft.com/office/powerpoint/2010/main" xmlns:p15="http://schemas.microsoft.com/office/powerpoint/2012/main" xmlns:r="http://schemas.openxmlformats.org/officeDocument/2006/relationships" xmlns:a="http://schemas.openxmlformats.org/drawingml/2006/main" mc:Ignorable="p14">
   <p:cSld>
     <p:spTree>
       <p:nvGrpSpPr>
@@ -3234,60 +5061,55 @@
       </p:grpSpPr>
       <p:pic>
         <p:nvPicPr>
-          <p:cNvPr id="1026" name="Picture 2" descr="https://static.electronicsweekly.com/wp-content/uploads/2017/03/14115552/22mar17BeagleBone-Blue-Mouser.jpg"/>
+          <p:cNvPr id="2" name="Picture 2" descr="https://static.electronicsweekly.com/wp-content/uploads/2017/03/14115552/22mar17BeagleBone-Blue-Mouser.jpg"/>
           <p:cNvPicPr>
-            <a:picLocks noChangeAspect="1" noChangeArrowheads="1"/>
+            <a:picLocks noChangeAspect="1"/>
+            <a:extLst>
+              <a:ext uri="smNativeData">
+                <pr:smNativeData xmlns:pr="smNativeData" xmlns="smNativeData" val="SMDATA_17_FLquaRMAAAAlAAAAEQAAAC0AAAAAkAAAAEgAAACQAAAASAAAAAAAAAAAAAAAAAAAAAEAAABQAAAAAAAAAAAA4D8AAAAAAADgPwAAAAAAAOA/AAAAAAAA4D8AAAAAAADgPwAAAAAAAOA/AAAAAAAA4D8AAAAAAADgPwAAAAAAAOA/AAAAAAAA4D8CAAAAjAAAAAAAAAAAAAAAW5vVDP///wgAAAAAAAAAAAAAAAAAAAAAAAAAAAAAAAAAAAAAZAAAAAEAAABAAAAAAAAAAAAAAAAAAAAAAAAAAAAAAAAAAAAAAAAAAAAAAAAAAAAAAAAAAAAAAAAAAAAAAAAAAAAAAAAAAAAAAAAAAAAAAAAAAAAAAAAAAAAAAAAAAAAAFAAAADwAAAAAAAAAAAAAAAAAAAkUAAAAAQAAABQAAAAUAAAAFAAAAAEAAAAAAAAAZAAAAGQAAAAAAAAAZAAAAGQAAAAVAAAAYAAAAAAAAAAAAAAADwAAACADAAAAAAAAAAAAAAEAAACgMgAAVgcAAKr4//8BAAAAf39/AAEAAABkAAAAAAAAABQAAABAHwAAAAAAACYAAAAAAAAAwOD//wAAAAAmAAAAZAAAABYAAABMAAAAAAAAAAAAAAAEAAAAAAAAAAEAAADn5uYKAAAAACgAAAAoAAAAZAAAAGQAAAAAAAAAzMzMAAAAAABQAAAAUAAAAGQAAABkAAAAAAAAAAcAAAA4AAAAAAAAAAAAAAAAAAAA////AAAAAAAAAAAAAAAAAAAAAAAAAAAAAAAAAAAAAABkAAAAZAAAAAAAAAAjAAAABAAAAGQAAAAXAAAAFAAAAAAAAAAAAAAA/38AAP9/AAAAAAAACQAAAAQAAAD///8AHgAAAGgAAAAAAAAAAAAAAAAAAAAAAAAAAAAAABAnAAAQJwAAAAAAAAAAAAAAAAAAAAAAAAAAAAAAAAAAAAAAAAAAAAAUAAAAAAAAAMDA/wAAAAAAZAAAADIAAAAAAAAAZAAAAAAAAAB/f38ACgAAACIAAAAYAAAAAAAAAAAAAAAAAAAAAAAAAAAAAAAAAAAAJAAAACQAAAAAAAAABwAAAAAAAAAAAAAAAAAAAAAAAAAAAAAAAAAAAH9/fwAlAAAAWAAAAAAAAAAAAAAAAAAAAAAAAAAAAAAAAAAAAAAAAAAAAAAAAAAAAAAAAAAAAAAAPwAAAAAAAACghgEAAAAAAAAAAAAAAAAADAAAAAEAAAAAAAAAAAAAAAAAAAAfAAAAVAAAAFub1QX///8BAAAAAAAAAAAAAAAAAAAAAAAAAAAAAAAAAAAAAAAAAAAAAAACf39/AOfm5gPMzMwAwMD/AH9/fwAAAAAAAAAAAAAAAAD///8AAAAAACEAAAAYAAAAFAAAAB0IAAB9AAAAQUAAAOIpAAAQAAAAJgAAAAgAAAD//////////w=="/>
+              </a:ext>
+            </a:extLst>
           </p:cNvPicPr>
           <p:nvPr/>
         </p:nvPicPr>
         <p:blipFill>
-          <a:blip r:embed="rId2">
-            <a:extLst>
-              <a:ext uri="{28A0092B-C50C-407E-A947-70E740481C1C}">
-                <a14:useLocalDpi xmlns:a14="http://schemas.microsoft.com/office/drawing/2010/main" val="0"/>
-              </a:ext>
-            </a:extLst>
-          </a:blip>
-          <a:srcRect/>
+          <a:blip r:embed="rId2"/>
           <a:stretch>
             <a:fillRect/>
           </a:stretch>
         </p:blipFill>
-        <p:spPr bwMode="auto">
+        <p:spPr>
           <a:xfrm>
-            <a:off x="1318846" y="79524"/>
-            <a:ext cx="9126416" cy="6728726"/>
+            <a:off x="1318895" y="79375"/>
+            <a:ext cx="9126220" cy="6729095"/>
           </a:xfrm>
           <a:prstGeom prst="rect">
             <a:avLst/>
           </a:prstGeom>
           <a:noFill/>
-          <a:extLst>
-            <a:ext uri="{909E8E84-426E-40DD-AFC4-6F175D3DCCD1}">
-              <a14:hiddenFill xmlns:a14="http://schemas.microsoft.com/office/drawing/2010/main">
-                <a:solidFill>
-                  <a:srgbClr val="FFFFFF"/>
-                </a:solidFill>
-              </a14:hiddenFill>
-            </a:ext>
-          </a:extLst>
+          <a:ln>
+            <a:noFill/>
+          </a:ln>
+          <a:effectLst/>
         </p:spPr>
       </p:pic>
     </p:spTree>
-    <p:extLst>
-      <p:ext uri="{BB962C8B-B14F-4D97-AF65-F5344CB8AC3E}">
-        <p14:creationId xmlns:p14="http://schemas.microsoft.com/office/powerpoint/2010/main" val="3518981287"/>
-      </p:ext>
-    </p:extLst>
   </p:cSld>
   <p:clrMapOvr>
     <a:masterClrMapping/>
   </p:clrMapOvr>
+  <p:timing>
+    <p:tnLst>
+      <p:par>
+        <p:cTn id="1" dur="indefinite" restart="never" nodeType="tmRoot"/>
+      </p:par>
+    </p:tnLst>
+  </p:timing>
 </p:sld>
 </file>
 
 <file path=ppt/slides/slide3.xml><?xml version="1.0" encoding="utf-8"?>
-<p:sld xmlns:a="http://schemas.openxmlformats.org/drawingml/2006/main" xmlns:r="http://schemas.openxmlformats.org/officeDocument/2006/relationships" xmlns:p="http://schemas.openxmlformats.org/presentationml/2006/main">
+<p:sld xmlns:p="http://schemas.openxmlformats.org/presentationml/2006/main" xmlns:mc="http://schemas.openxmlformats.org/markup-compatibility/2006" xmlns:p14="http://schemas.microsoft.com/office/powerpoint/2010/main" xmlns:p15="http://schemas.microsoft.com/office/powerpoint/2012/main" xmlns:r="http://schemas.openxmlformats.org/officeDocument/2006/relationships" xmlns:a="http://schemas.openxmlformats.org/drawingml/2006/main" mc:Ignorable="p14">
   <p:cSld>
     <p:spTree>
       <p:nvGrpSpPr>
@@ -3307,7 +5129,12 @@
         <p:nvSpPr>
           <p:cNvPr id="2" name="Title 1"/>
           <p:cNvSpPr>
-            <a:spLocks noGrp="1"/>
+            <a:spLocks noGrp="1" noChangeArrowheads="1"/>
+            <a:extLst>
+              <a:ext uri="smNativeData">
+                <pr:smNativeData xmlns:pr="smNativeData" xmlns="smNativeData" val="SMDATA_15_FLquaRMAAAAlAAAAZAAAAA0AAAAAkAAAAEgAAACQAAAASAAAAAAAAAABAAAAAAAAAAEAAABQAAAAAAAAAAAA4D8AAAAAAADgPwAAAAAAAOA/AAAAAAAA4D8AAAAAAADgPwAAAAAAAOA/AAAAAAAA4D8AAAAAAADgPwAAAAAAAOA/AAAAAAAA4D8CAAAAjAAAAAAAAAAAAAAAW5vVDP///wgAAAAAAAAAAAAAAAAAAAAAAAAAAAAAAAAAAAAAZAAAAAEAAABAAAAAAAAAAAAAAAAAAAAAAAAAAAAAAAAAAAAAAAAAAAAAAAAAAAAAAAAAAAAAAAAAAAAAAAAAAAAAAAAAAAAAAAAAAAAAAAAAAAAAAAAAAAAAAAAAAAAAFAAAADwAAAAAAAAAAAAAAAAAAAkUAAAAAQAAABQAAAAUAAAAFAAAAAEAAAAAAAAAZAAAAGQAAAAAAAAAZAAAAGQAAAAVAAAAYAAAAAAAAAAAAAAADwAAACADAAAAAAAAAAAAAAEAAACgMgAAVgcAAKr4//8BAAAAf39/AAEAAABkAAAAAAAAABQAAABAHwAAAAAAACYAAAAAAAAAwOD//wAAAAAmAAAAZAAAABYAAABMAAAAAAAAAAAAAAAEAAAAAAAAAAEAAADn5uYKAAAAACgAAAAoAAAAZAAAAGQAAAAAAAAAzMzMAAAAAABQAAAAUAAAAGQAAABkAAAAAAAAABcAAAAUAAAAAAAAAAAAAAD/fwAA/38AAAAAAAAJAAAABAAAAF8AYAAeAAAAaAAAAAAAAAAAAAAAAAAAAAAAAAAAAAAAECcAABAnAAAAAAAAAAAAAAAAAAAAAAAAAAAAAAAAAAAAAAAAAAAAABQAAAAAAAAAwMD/AAAAAABkAAAAMgAAAAAAAABkAAAAAAAAAH9/fwAKAAAAIgAAABgAAAAAAAAAAAAAAAAAAAAAAAAAAAAAAAAAAAAkAAAAJAAAAAAAAAAHAAAAAAAAAAAAAAAAAAAAAAAAAAAAAAAAAAAAf39/ACUAAABYAAAAAAAAAAAAAAAAAAAAAAAAAAAAAAAAAAAAAAAAAAAAAAAAAAAAAAAAAAAAAAA/AAAAAAAAAKCGAQAAAAAAAAAAAAAAAAAMAAAAAQAAAAAAAAAAAAAAAAAAAB8AAABUAAAAW5vVBf///wEAAAAAAAAAAAAAAAAAAAAAAAAAAAAAAAAAAAAAAAAAAAAAAAJ/f38A5+bmA8zMzADAwP8Af39/AAAAAAAAAAAAAAAAAAAAAAAAAAAAIQAAABgAAAAUAAAAKAUAAD8CAADYRQAAZwoAABAAAAAmAAAACAAAAAAAAAAAAAAA"/>
+              </a:ext>
+            </a:extLst>
           </p:cNvSpPr>
           <p:nvPr>
             <p:ph type="title"/>
@@ -3318,12 +5145,12 @@
           <a:bodyPr/>
           <a:lstStyle/>
           <a:p>
-            <a:pPr algn="ctr"/>
-            <a:r>
-              <a:rPr lang="en-US" dirty="0" smtClean="0"/>
+            <a:pPr algn="ctr">
+              <a:defRPr lang="en-us"/>
+            </a:pPr>
+            <a:r>
               <a:t>Power</a:t>
             </a:r>
-            <a:endParaRPr lang="en-US" dirty="0"/>
           </a:p>
         </p:txBody>
       </p:sp>
@@ -3331,10 +5158,15 @@
         <p:nvSpPr>
           <p:cNvPr id="3" name="Content Placeholder 2"/>
           <p:cNvSpPr>
-            <a:spLocks noGrp="1"/>
-          </p:cNvSpPr>
-          <p:nvPr>
-            <p:ph idx="1"/>
+            <a:spLocks noGrp="1" noChangeArrowheads="1"/>
+            <a:extLst>
+              <a:ext uri="smNativeData">
+                <pr:smNativeData xmlns:pr="smNativeData" xmlns="smNativeData" val="SMDATA_15_FLquaRMAAAAlAAAAZAAAAA0AAAAAkAAAAEgAAACQAAAASAAAAAAAAAAAAAAAAAAAAAEAAABQAAAAAAAAAAAA4D8AAAAAAADgPwAAAAAAAOA/AAAAAAAA4D8AAAAAAADgPwAAAAAAAOA/AAAAAAAA4D8AAAAAAADgPwAAAAAAAOA/AAAAAAAA4D8CAAAAjAAAAAAAAAAAAAAAW5vVDP///wgAAAAAAAAAAAAAAAAAAAAAAAAAAAAAAAAAAAAAZAAAAAEAAABAAAAAAAAAAAAAAAAAAAAAAAAAAAAAAAAAAAAAAAAAAAAAAAAAAAAAAAAAAAAAAAAAAAAAAAAAAAAAAAAAAAAAAAAAAAAAAAAAAAAAAAAAAAAAAAAAAAAAFAAAADwAAAAAAAAAAAAAAAAAAAkUAAAAAQAAABQAAAAUAAAAFAAAAAEAAAAAAAAAZAAAAGQAAAAAAAAAZAAAAGQAAAAVAAAAYAAAAAAAAAAAAAAADwAAACADAAAAAAAAAAAAAAEAAACgMgAAVgcAAKr4//8BAAAAf39/AAEAAABkAAAAAAAAABQAAABAHwAAAAAAACYAAAAAAAAAwOD//wAAAAAmAAAAZAAAABYAAABMAAAAAAAAAAAAAAAEAAAAAAAAAAEAAADn5uYKAAAAACgAAAAoAAAAZAAAAGQAAAAAAAAAzMzMAAAAAABQAAAAUAAAAGQAAABkAAAAAAAAABcAAAAUAAAAAAAAAAAAAAD/fwAA/38AAAAAAAAJAAAABAAAAF8AYAAeAAAAaAAAAAAAAAAAAAAAAAAAAAAAAAAAAAAAECcAABAnAAAAAAAAAAAAAAAAAAAAAAAAAAAAAAAAAAAAAAAAAAAAABQAAAAAAAAAwMD/AAAAAABkAAAAMgAAAAAAAABkAAAAAAAAAH9/fwAKAAAAIgAAABgAAAAAAAAAAAAAAAAAAAAAAAAAAAAAAAAAAAAkAAAAJAAAAAAAAAAHAAAAAAAAAAAAAAAAAAAAAAAAAAAAAAAAAAAAf39/ACUAAABYAAAAAAAAAAAAAAAAAAAAAAAAAAAAAAAAAAAAAAAAAAAAAAAAAAAAAAAAAAAAAAA/AAAAAAAAAKCGAQAAAAAAAAAAAAAAAAAMAAAAAQAAAAAAAAAAAAAAAAAAAB8AAABUAAAAW5vVBf///wEAAAAAAAAAAAAAAAAAAAAAAAAAAAAAAAAAAAAAAAAAAAAAAAJ/f38A5+bmA8zMzADAwP8Af39/AAAAAAAAAAAAAAAAAAAAAAAAAAAAIQAAABgAAAAUAAAAKAUAADsLAADYRQAAACYAABAAAAAmAAAACAAAAAAAAAAAAAAA"/>
+              </a:ext>
+            </a:extLst>
+          </p:cNvSpPr>
+          <p:nvPr>
+            <p:ph type="body" idx="1"/>
           </p:nvPr>
         </p:nvSpPr>
         <p:spPr/>
@@ -3342,37 +5174,56 @@
           <a:bodyPr/>
           <a:lstStyle/>
           <a:p>
-            <a:r>
-              <a:rPr lang="en-US" dirty="0" smtClean="0"/>
-              <a:t>A/C </a:t>
-            </a:r>
-            <a:r>
-              <a:rPr lang="en-US" dirty="0" err="1" smtClean="0"/>
-              <a:t>outler</a:t>
-            </a:r>
-            <a:r>
-              <a:rPr lang="en-US" dirty="0" smtClean="0"/>
-              <a:t> power: 12V supply **BUT motors will be weak and servos will barely move if at all!!</a:t>
-            </a:r>
-          </a:p>
-          <a:p>
-            <a:pPr lvl="1"/>
-            <a:r>
-              <a:rPr lang="en-US" sz="2000" dirty="0" smtClean="0"/>
+            <a:pPr>
+              <a:defRPr lang="en-us"/>
+            </a:pPr>
+            <a:r>
+              <a:t>A/C outler power: 12V supply **BUT motors will be weak and servos will barely move if at all!!</a:t>
+            </a:r>
+          </a:p>
+          <a:p>
+            <a:pPr lvl="1">
+              <a:defRPr lang="en-us"/>
+            </a:pPr>
+            <a:r>
+              <a:rPr lang="en-us" sz="2000" cap="none"/>
               <a:t>but good for installing packages (usually takes a long time, battery could run out)</a:t>
             </a:r>
-          </a:p>
-          <a:p>
-            <a:r>
-              <a:rPr lang="en-US" dirty="0" smtClean="0"/>
+            <a:endParaRPr lang="en-us" sz="2000" cap="none"/>
+          </a:p>
+          <a:p>
+            <a:pPr>
+              <a:defRPr lang="en-us"/>
+            </a:pPr>
+            <a:r>
+              <a:t>Can also power w/microUSB port hidden on bottom of board</a:t>
+            </a:r>
+          </a:p>
+          <a:p>
+            <a:pPr lvl="1">
+              <a:defRPr lang="en-us"/>
+            </a:pPr>
+            <a:r>
+              <a:t>But, again, not enough power.</a:t>
+            </a:r>
+          </a:p>
+          <a:p>
+            <a:pPr>
+              <a:defRPr lang="en-us"/>
+            </a:pPr>
+            <a:r>
               <a:t>Better connection: to 2S 7.4V battery using this connector:</a:t>
             </a:r>
           </a:p>
           <a:p>
-            <a:endParaRPr lang="en-US" dirty="0" smtClean="0"/>
-          </a:p>
-          <a:p>
-            <a:endParaRPr lang="en-US" dirty="0"/>
+            <a:pPr>
+              <a:defRPr lang="en-us"/>
+            </a:pPr>
+          </a:p>
+          <a:p>
+            <a:pPr>
+              <a:defRPr lang="en-us"/>
+            </a:pPr>
           </a:p>
         </p:txBody>
       </p:sp>
@@ -3381,6 +5232,11 @@
           <p:cNvPr id="4" name="Picture 3"/>
           <p:cNvPicPr>
             <a:picLocks noChangeAspect="1"/>
+            <a:extLst>
+              <a:ext uri="smNativeData">
+                <pr:smNativeData xmlns:pr="smNativeData" xmlns="smNativeData" val="SMDATA_17_FLquaRMAAAAlAAAAEQAAAC0AAAAAkAAAAEgAAACQAAAASAAAAAAAAAAAAAAAAAAAAAEAAABQAAAAAAAAAAAA4D8AAAAAAADgPwAAAAAAAOA/AAAAAAAA4D8AAAAAAADgPwAAAAAAAOA/AAAAAAAA4D8AAAAAAADgPwAAAAAAAOA/AAAAAAAA4D8CAAAAjAAAAAAAAAAAAAAAW5vVDP///wgAAAAAAAAAAAAAAAAAAAAAAAAAAAAAAAAAAAAAZAAAAAEAAABAAAAAAAAAAAAAAAAAAAAAAAAAAAAAAAAAAAAAAAAAAAAAAAAAAAAAAAAAAAAAAAAAAAAAAAAAAAAAAAAAAAAAAAAAAAAAAAAAAAAAAAAAAAAAAAAAAAAAFAAAADwAAAAAAAAAAAAAAAAAAAkUAAAAAQAAABQAAAAUAAAAFAAAAAEAAAAAAAAAZAAAAGQAAAAAAAAAZAAAAGQAAAAVAAAAYAAAAAAAAAAAAAAADwAAACADAAAAAAAAAAAAAAEAAACgMgAAVgcAAKr4//8BAAAAf39/AAEAAABkAAAAAAAAABQAAABAHwAAAAAAACYAAAAAAAAAwOD//wAAAAAmAAAAZAAAABYAAABMAAAAAAAAAAAAAAAEAAAAAAAAAAEAAADn5uYKAAAAACgAAAAoAAAAZAAAAGQAAAAAAAAAzMzMAAAAAABQAAAAUAAAAGQAAABkAAAAAAAAAAcAAAA4AAAAAAAAAAAAAAAAAAAA////AAAAAAAAAAAAAAAAAAAAAAAAAAAAAAAAAAAAAABkAAAAZAAAAAAAAAAjAAAABAAAAGQAAAAXAAAAFAAAAAAAAAAAAAAA/38AAP9/AAAAAAAACQAAAAQAAAAAAAAAHgAAAGgAAAAAAAAAAAAAAAAAAAAAAAAAAAAAABAnAAAQJwAAAAAAAAAAAAAAAAAAAAAAAAAAAAAAAAAAAAAAAAAAAAAUAAAAAAAAAMDA/wAAAAAAZAAAADIAAAAAAAAAZAAAAAAAAAB/f38ACgAAACIAAAAYAAAAAAAAAAAAAAAAAAAAAAAAAAAAAAAAAAAAJAAAACQAAAAAAAAABwAAAAAAAAAAAAAAAAAAAAAAAAAAAAAAAAAAAH9/fwAlAAAAWAAAAAAAAAAAAAAAAAAAAAAAAAAAAAAAAAAAAAAAAAAAAAAAAAAAAAAAAAAAAAAAPwAAAAAAAACghgEAAAAAAAAAAAAAAAAADAAAAAEAAAAAAAAAAAAAAAAAAAAfAAAAVAAAAFub1QX///8BAAAAAAAAAAAAAAAAAAAAAAAAAAAAAAAAAAAAAAAAAAAAAAACf39/AOfm5gPMzMwAwMD/AH9/fwAAAAAAAAAAAAAAAAD///8AAAAAACEAAAAYAAAAFAAAAA0QAADTGgAA0iIAAHsdAAAQAAAAJgAAAAgAAAD//////////w=="/>
+              </a:ext>
+            </a:extLst>
           </p:cNvPicPr>
           <p:nvPr/>
         </p:nvPicPr>
@@ -3392,29 +5248,36 @@
         </p:blipFill>
         <p:spPr>
           <a:xfrm>
-            <a:off x="4094999" y="3630529"/>
-            <a:ext cx="3051216" cy="432134"/>
+            <a:off x="2609215" y="4360545"/>
+            <a:ext cx="3051175" cy="431800"/>
           </a:xfrm>
           <a:prstGeom prst="rect">
             <a:avLst/>
           </a:prstGeom>
+          <a:noFill/>
+          <a:ln>
+            <a:noFill/>
+          </a:ln>
+          <a:effectLst/>
         </p:spPr>
       </p:pic>
     </p:spTree>
-    <p:extLst>
-      <p:ext uri="{BB962C8B-B14F-4D97-AF65-F5344CB8AC3E}">
-        <p14:creationId xmlns:p14="http://schemas.microsoft.com/office/powerpoint/2010/main" val="2974212941"/>
-      </p:ext>
-    </p:extLst>
   </p:cSld>
   <p:clrMapOvr>
     <a:masterClrMapping/>
   </p:clrMapOvr>
+  <p:timing>
+    <p:tnLst>
+      <p:par>
+        <p:cTn id="1" dur="indefinite" restart="never" nodeType="tmRoot"/>
+      </p:par>
+    </p:tnLst>
+  </p:timing>
 </p:sld>
 </file>
 
 <file path=ppt/slides/slide4.xml><?xml version="1.0" encoding="utf-8"?>
-<p:sld xmlns:a="http://schemas.openxmlformats.org/drawingml/2006/main" xmlns:r="http://schemas.openxmlformats.org/officeDocument/2006/relationships" xmlns:p="http://schemas.openxmlformats.org/presentationml/2006/main">
+<p:sld xmlns:p="http://schemas.openxmlformats.org/presentationml/2006/main" xmlns:mc="http://schemas.openxmlformats.org/markup-compatibility/2006" xmlns:p14="http://schemas.microsoft.com/office/powerpoint/2010/main" xmlns:p15="http://schemas.microsoft.com/office/powerpoint/2012/main" xmlns:r="http://schemas.openxmlformats.org/officeDocument/2006/relationships" xmlns:a="http://schemas.openxmlformats.org/drawingml/2006/main" mc:Ignorable="p14">
   <p:cSld>
     <p:spTree>
       <p:nvGrpSpPr>
@@ -3434,7 +5297,12 @@
         <p:nvSpPr>
           <p:cNvPr id="2" name="Title 1"/>
           <p:cNvSpPr>
-            <a:spLocks noGrp="1"/>
+            <a:spLocks noGrp="1" noChangeArrowheads="1"/>
+            <a:extLst>
+              <a:ext uri="smNativeData">
+                <pr:smNativeData xmlns:pr="smNativeData" xmlns="smNativeData" val="SMDATA_15_FLquaRMAAAAlAAAAZAAAAA0AAAAAkAAAAEgAAACQAAAASAAAAAAAAAABAAAAAAAAAAEAAABQAAAAAAAAAAAA4D8AAAAAAADgPwAAAAAAAOA/AAAAAAAA4D8AAAAAAADgPwAAAAAAAOA/AAAAAAAA4D8AAAAAAADgPwAAAAAAAOA/AAAAAAAA4D8CAAAAjAAAAAAAAAAAAAAAW5vVDP///wgAAAAAAAAAAAAAAAAAAAAAAAAAAAAAAAAAAAAAZAAAAAEAAABAAAAAAAAAAAAAAAAAAAAAAAAAAAAAAAAAAAAAAAAAAAAAAAAAAAAAAAAAAAAAAAAAAAAAAAAAAAAAAAAAAAAAAAAAAAAAAAAAAAAAAAAAAAAAAAAAAAAAFAAAADwAAAAAAAAAAAAAAAAAAAkUAAAAAQAAABQAAAAUAAAAFAAAAAEAAAAAAAAAZAAAAGQAAAAAAAAAZAAAAGQAAAAVAAAAYAAAAAAAAAAAAAAADwAAACADAAAAAAAAAAAAAAEAAACgMgAAVgcAAKr4//8BAAAAf39/AAEAAABkAAAAAAAAABQAAABAHwAAAAAAACYAAAAAAAAAwOD//wAAAAAmAAAAZAAAABYAAABMAAAAAAAAAAAAAAAEAAAAAAAAAAEAAADn5uYKAAAAACgAAAAoAAAAZAAAAGQAAAAAAAAAzMzMAAAAAABQAAAAUAAAAGQAAABkAAAAAAAAABcAAAAUAAAAAAAAAAAAAAD/fwAA/38AAAAAAAAJAAAABAAAAF8AYAAeAAAAaAAAAAAAAAAAAAAAAAAAAAAAAAAAAAAAECcAABAnAAAAAAAAAAAAAAAAAAAAAAAAAAAAAAAAAAAAAAAAAAAAABQAAAAAAAAAwMD/AAAAAABkAAAAMgAAAAAAAABkAAAAAAAAAH9/fwAKAAAAIgAAABgAAAAAAAAAAAAAAAAAAAAAAAAAAAAAAAAAAAAkAAAAJAAAAAAAAAAHAAAAAAAAAAAAAAAAAAAAAAAAAAAAAAAAAAAAf39/ACUAAABYAAAAAAAAAAAAAAAAAAAAAAAAAAAAAAAAAAAAAAAAAAAAAAAAAAAAAAAAAAAAAAA/AAAAAAAAAKCGAQAAAAAAAAAAAAAAAAAMAAAAAQAAAAAAAAAAAAAAAAAAAB8AAABUAAAAW5vVBf///wEAAAAAAAAAAAAAAAAAAAAAAAAAAAAAAAAAAAAAAAAAAAAAAAJ/f38A5+bmA8zMzADAwP8Af39/AAAAAAAAAAAAAAAAAAAAAAAAAAAAIQAAABgAAAAUAAAAKAUAAD8CAADYRQAAZwoAABAAAAAmAAAACAAAAAAAAAAAAAAA"/>
+              </a:ext>
+            </a:extLst>
           </p:cNvSpPr>
           <p:nvPr>
             <p:ph type="title"/>
@@ -3445,144 +5313,64 @@
           <a:bodyPr/>
           <a:lstStyle/>
           <a:p>
-            <a:r>
-              <a:rPr lang="en-US" dirty="0" smtClean="0"/>
-              <a:t>Connecting to </a:t>
-            </a:r>
-            <a:r>
-              <a:rPr lang="en-US" dirty="0" err="1" smtClean="0"/>
-              <a:t>BeagleBone</a:t>
-            </a:r>
-            <a:r>
-              <a:rPr lang="en-US" dirty="0" smtClean="0"/>
-              <a:t> terminal</a:t>
-            </a:r>
-            <a:endParaRPr lang="en-US" dirty="0"/>
-          </a:p>
-        </p:txBody>
-      </p:sp>
-      <p:sp>
-        <p:nvSpPr>
-          <p:cNvPr id="3" name="Content Placeholder 2"/>
-          <p:cNvSpPr>
-            <a:spLocks noGrp="1"/>
-          </p:cNvSpPr>
-          <p:nvPr>
-            <p:ph idx="1"/>
-          </p:nvPr>
-        </p:nvSpPr>
-        <p:spPr/>
-        <p:txBody>
-          <a:bodyPr/>
-          <a:lstStyle/>
-          <a:p>
-            <a:r>
-              <a:rPr lang="en-US" dirty="0" smtClean="0"/>
-              <a:t>Connect to the </a:t>
-            </a:r>
-            <a:r>
-              <a:rPr lang="en-US" dirty="0" err="1" smtClean="0"/>
-              <a:t>BeagleBone’s</a:t>
-            </a:r>
-            <a:r>
-              <a:rPr lang="en-US" dirty="0" smtClean="0"/>
-              <a:t> </a:t>
-            </a:r>
-            <a:r>
-              <a:rPr lang="en-US" dirty="0" err="1" smtClean="0"/>
-              <a:t>WiFi</a:t>
-            </a:r>
-            <a:r>
-              <a:rPr lang="en-US" dirty="0" smtClean="0"/>
-              <a:t> service</a:t>
-            </a:r>
-          </a:p>
-          <a:p>
-            <a:pPr lvl="1"/>
-            <a:r>
-              <a:rPr lang="en-US" dirty="0" smtClean="0"/>
-              <a:t>Password: </a:t>
-            </a:r>
-            <a:r>
-              <a:rPr lang="en-US" dirty="0" err="1" smtClean="0"/>
-              <a:t>BeagleBone</a:t>
-            </a:r>
-            <a:endParaRPr lang="en-US" dirty="0" smtClean="0"/>
-          </a:p>
-          <a:p>
-            <a:pPr lvl="1"/>
-            <a:r>
-              <a:rPr lang="en-US" dirty="0" smtClean="0"/>
-              <a:t>SSH into 192.168.8.1</a:t>
-            </a:r>
-          </a:p>
-          <a:p>
-            <a:pPr lvl="2"/>
-            <a:r>
-              <a:rPr lang="en-US" dirty="0" smtClean="0"/>
-              <a:t>If connecting thru serial cable it’s 192.168.7.2</a:t>
-            </a:r>
-          </a:p>
-          <a:p>
-            <a:pPr lvl="2"/>
-            <a:r>
-              <a:rPr lang="en-US" dirty="0" smtClean="0"/>
-              <a:t>If connecting from Linux/Mac it’s 192.168.6.2</a:t>
-            </a:r>
-          </a:p>
-          <a:p>
-            <a:pPr lvl="1"/>
-            <a:r>
-              <a:rPr lang="en-US" dirty="0" smtClean="0"/>
-              <a:t>If in browser, can also go to 192.168.8.1 to bring up terminal thru HTTP.</a:t>
-            </a:r>
-          </a:p>
-          <a:p>
-            <a:r>
-              <a:rPr lang="en-US" dirty="0" smtClean="0"/>
-              <a:t>If you connect to two different </a:t>
-            </a:r>
-            <a:r>
-              <a:rPr lang="en-US" dirty="0" err="1" smtClean="0"/>
-              <a:t>BeagleBones</a:t>
-            </a:r>
-            <a:r>
-              <a:rPr lang="en-US" dirty="0" smtClean="0"/>
-              <a:t> it gives ‘Remote Host Identification has changed’ error. To fix:</a:t>
-            </a:r>
-          </a:p>
-          <a:p>
-            <a:pPr lvl="1"/>
-            <a:r>
-              <a:rPr lang="en-US" dirty="0" err="1"/>
-              <a:t>ssh-keygen</a:t>
-            </a:r>
-            <a:r>
-              <a:rPr lang="en-US" dirty="0"/>
-              <a:t> -R 192.168.8.1</a:t>
-            </a:r>
-            <a:endParaRPr lang="en-US" dirty="0" smtClean="0"/>
-          </a:p>
-          <a:p>
-            <a:endParaRPr lang="en-US" dirty="0"/>
-          </a:p>
-        </p:txBody>
-      </p:sp>
+            <a:pPr>
+              <a:defRPr lang="en-us"/>
+            </a:pPr>
+            <a:r>
+              <a:t>microUSB port on bottom of board</a:t>
+            </a:r>
+          </a:p>
+        </p:txBody>
+      </p:sp>
+      <p:pic>
+        <p:nvPicPr>
+          <p:cNvPr id="3" name="Picture 2" descr="https://static4.arrow.com/-/media/arrow/images/1200-x-675/0/0417-beaglebone-blue-main.jpg"/>
+          <p:cNvPicPr>
+            <a:picLocks noGrp="1" noChangeArrowheads="1" noChangeAspect="1"/>
+            <a:extLst>
+              <a:ext uri="smNativeData">
+                <pr:smNativeData xmlns:pr="smNativeData" xmlns="smNativeData" val="SMDATA_17_FLquaRMAAAAlAAAAEQAAAC0AAAAAkAAAAEgAAACQAAAASAAAAAAAAAAAAAAAAAAAAAEAAABQAAAAAAAAAAAA4D8AAAAAAADgPwAAAAAAAOA/AAAAAAAA4D8AAAAAAADgPwAAAAAAAOA/AAAAAAAA4D8AAAAAAADgPwAAAAAAAOA/AAAAAAAA4D8CAAAAjAAAAAAAAAAAAAAAW5vVDP///wgAAAAAAAAAAAAAAAAAAAAAAAAAAAAAAAAAAAAAZAAAAAEAAABAAAAAAAAAAAAAAAAAAAAAAAAAAAAAAAAAAAAAAAAAAAAAAAAAAAAAAAAAAAAAAAAAAAAAAAAAAAAAAAAAAAAAAAAAAAAAAAAAAAAAAAAAAAAAAAAAAAAAFAAAADwAAAAAAAAAAAAAAAAAAAkUAAAAAQAAABQAAAAUAAAAFAAAAAEAAAAAAAAAZAAAAGQAAAAAAAAAZAAAAGQAAAAVAAAAYAAAAAAAAAAAAAAADwAAACADAAAAAAAAAAAAAAEAAACgMgAAVgcAAKr4//8BAAAAf39/AAEAAABkAAAAAAAAABQAAABAHwAAAAAAACYAAAAAAAAAwOD//wAAAAAmAAAAZAAAABYAAABMAAAAAAAAAAAAAAAEAAAAAAAAAAEAAADn5uYKAAAAACgAAAAoAAAAZAAAAGQAAAAAAAAAzMzMAAAAAABQAAAAUAAAAGQAAABkAAAAAAAAAAcAAAA4AAAAAAAAAAAAAAAAAAAA////AAAAAAAAAAAAAAAAAAAAAAAAAAAAAAAAAAAAAABkAAAAZAAAAAAAAAAjAAAABAAAAGQAAAAXAAAAFAAAAAAAAAAAAAAA/38AAP9/AAAAAAAACQAAAAQAAADz////HgAAAGgAAAAAAAAAAAAAAAAAAAAAAAAAAAAAABAnAAAQJwAAAAAAAAAAAAAAAAAAAAAAAAAAAAAAAAAAAAAAAAAAAAAUAAAAAAAAAMDA/wAAAAAAZAAAADIAAAAAAAAAZAAAAAAAAAB/f38ACgAAACIAAAAYAAAAAAAAAAAAAAAAAAAAAAAAAAAAAAAAAAAAJAAAACQAAAAAAAAABwAAAAAAAAAAAAAAAAAAAAAAAAAAAAAAAAAAAH9/fwAlAAAAWAAAAAAAAAAAAAAAAAAAAAAAAAAAAAAAAAAAAAAAAAAAAAAAAAAAAAAAAAAAAAAAPwAAAAAAAACghgEAAAAAAAAAAAAAAAAADAAAAAEAAAAAAAAAAAAAAAAAAAAfAAAAVAAAAFub1QX///8BAAAAAAAAAAAAAAAAAAAAAAAAAAAAAAAAAAAAAAAAAAAAAAACf39/AOfm5gPMzMwAwMD/AH9/fwAAAAAAAAAAAAAAAAD///8AAAAAACEAAAAYAAAAFAAAALUNAAA7CwAASz0AAAAmAAAQAAAAJgAAAAgAAAABgQAAfwAAAA=="/>
+              </a:ext>
+            </a:extLst>
+          </p:cNvPicPr>
+          <p:nvPr>
+            <p:ph type="pic" idx="1"/>
+          </p:nvPr>
+        </p:nvPicPr>
+        <p:blipFill>
+          <a:blip r:embed="rId2"/>
+          <a:stretch>
+            <a:fillRect/>
+          </a:stretch>
+        </p:blipFill>
+        <p:spPr>
+          <a:xfrm>
+            <a:off x="2228215" y="1825625"/>
+            <a:ext cx="7735570" cy="4351655"/>
+          </a:xfrm>
+          <a:prstGeom prst="rect">
+            <a:avLst/>
+          </a:prstGeom>
+          <a:noFill/>
+        </p:spPr>
+      </p:pic>
     </p:spTree>
-    <p:extLst>
-      <p:ext uri="{BB962C8B-B14F-4D97-AF65-F5344CB8AC3E}">
-        <p14:creationId xmlns:p14="http://schemas.microsoft.com/office/powerpoint/2010/main" val="2040524957"/>
-      </p:ext>
-    </p:extLst>
   </p:cSld>
   <p:clrMapOvr>
     <a:masterClrMapping/>
   </p:clrMapOvr>
+  <p:timing>
+    <p:tnLst>
+      <p:par>
+        <p:cTn id="1" dur="indefinite" restart="never" nodeType="tmRoot"/>
+      </p:par>
+    </p:tnLst>
+  </p:timing>
 </p:sld>
 </file>
 
 <file path=ppt/slides/slide5.xml><?xml version="1.0" encoding="utf-8"?>
-<p:sld xmlns:a="http://schemas.openxmlformats.org/drawingml/2006/main" xmlns:r="http://schemas.openxmlformats.org/officeDocument/2006/relationships" xmlns:p="http://schemas.openxmlformats.org/presentationml/2006/main">
+<p:sld xmlns:p="http://schemas.openxmlformats.org/presentationml/2006/main" xmlns:mc="http://schemas.openxmlformats.org/markup-compatibility/2006" xmlns:p14="http://schemas.microsoft.com/office/powerpoint/2010/main" xmlns:p15="http://schemas.microsoft.com/office/powerpoint/2012/main" xmlns:r="http://schemas.openxmlformats.org/officeDocument/2006/relationships" xmlns:a="http://schemas.openxmlformats.org/drawingml/2006/main" mc:Ignorable="p14">
   <p:cSld>
     <p:spTree>
       <p:nvGrpSpPr>
@@ -3598,11 +5386,48 @@
           <a:chExt cx="0" cy="0"/>
         </a:xfrm>
       </p:grpSpPr>
-      <p:sp>
-        <p:nvSpPr>
-          <p:cNvPr id="2" name="Title 1"/>
-          <p:cNvSpPr>
-            <a:spLocks noGrp="1"/>
+      <p:pic>
+        <p:nvPicPr>
+          <p:cNvPr id="2" name="Picture 2" descr="https://www.mathworks.com/help/examples/beagleboneblue/win64/xxbeagleboneblue_spi.png"/>
+          <p:cNvPicPr>
+            <a:picLocks noGrp="1" noChangeArrowheads="1" noChangeAspect="1"/>
+            <a:extLst>
+              <a:ext uri="smNativeData">
+                <pr:smNativeData xmlns:pr="smNativeData" xmlns="smNativeData" val="SMDATA_17_FLquaRMAAAAlAAAAEQAAAC0AAAAAkAAAAEgAAACQAAAASAAAAAAAAAAAAAAAAAAAAAEAAABQAAAAAAAAAAAA4D8AAAAAAADgPwAAAAAAAOA/AAAAAAAA4D8AAAAAAADgPwAAAAAAAOA/AAAAAAAA4D8AAAAAAADgPwAAAAAAAOA/AAAAAAAA4D8CAAAAjAAAAAAAAAAAAAAAW5vVDP///wgAAAAAAAAAAAAAAAAAAAAAAAAAAAAAAAAAAAAAZAAAAAEAAABAAAAAAAAAAAAAAAAAAAAAAAAAAAAAAAAAAAAAAAAAAAAAAAAAAAAAAAAAAAAAAAAAAAAAAAAAAAAAAAAAAAAAAAAAAAAAAAAAAAAAAAAAAAAAAAAAAAAAFAAAADwAAAAAAAAAAAAAAAAAAAkUAAAAAQAAABQAAAAUAAAAFAAAAAEAAAAAAAAAZAAAAGQAAAAAAAAAZAAAAGQAAAAVAAAAYAAAAAAAAAAAAAAADwAAACADAAAAAAAAAAAAAAEAAACgMgAAVgcAAKr4//8BAAAAf39/AAEAAABkAAAAAAAAABQAAABAHwAAAAAAACYAAAAAAAAAwOD//wAAAAAmAAAAZAAAABYAAABMAAAAAAAAAAAAAAAEAAAAAAAAAAEAAADn5uYKAAAAACgAAAAoAAAAZAAAAGQAAAAAAAAAzMzMAAAAAABQAAAAUAAAAGQAAABkAAAAAAAAAAcAAAA4AAAAAAAAAAAAAAAAAAAA////AAAAAAAAAAAAAAAAAAAAAAAAAAAAAAAAAAAAAABkAAAAZAAAAAAAAAAjAAAABAAAAGQAAAAXAAAAFAAAAAAAAAAAAAAA/38AAP9/AAAAAAAACQAAAAQAAADgqGkCHgAAAGgAAAAAAAAAAAAAAAAAAAAAAAAAAAAAABAnAAAQJwAAAAAAAAAAAAAAAAAAAAAAAAAAAAAAAAAAAAAAAAAAAAAUAAAAAAAAAMDA/wAAAAAAZAAAADIAAAAAAAAAZAAAAAAAAAB/f38ACgAAACIAAAAYAAAAAAAAAAAAAAAAAAAAAAAAAAAAAAAAAAAAJAAAACQAAAAAAAAABwAAAAAAAAAAAAAAAAAAAAAAAAAAAAAAAAAAAH9/fwAlAAAAWAAAAAAAAAAAAAAAAAAAAAAAAAAAAAAAAAAAAAAAAAAAAAAAAAAAAAAAAAAAAAAAPwAAAAAAAACghgEAAAAAAAAAAAAAAAAADAAAAAEAAAAAAAAAAAAAAAAAAAAfAAAAVAAAAFub1QX///8BAAAAAAAAAAAAAAAAAAAAAAAAAAAAAAAAAAAAAAAAAAAAAAACf39/AOfm5gPMzMwAwMD/AH9/fwAAAAAAAAAAAAAAAAD///8AAAAAACEAAAAYAAAAFAAAABAQAABpBQAAZz8AAPcqAAAQAAAAJgAAAAgAAAABgQAAfwAAAA=="/>
+              </a:ext>
+            </a:extLst>
+          </p:cNvPicPr>
+          <p:nvPr>
+            <p:ph type="pic" idx="1"/>
+          </p:nvPr>
+        </p:nvPicPr>
+        <p:blipFill>
+          <a:blip r:embed="rId2"/>
+          <a:stretch>
+            <a:fillRect/>
+          </a:stretch>
+        </p:blipFill>
+        <p:spPr>
+          <a:xfrm>
+            <a:off x="2611120" y="879475"/>
+            <a:ext cx="7695565" cy="6104890"/>
+          </a:xfrm>
+          <a:prstGeom prst="rect">
+            <a:avLst/>
+          </a:prstGeom>
+          <a:noFill/>
+        </p:spPr>
+      </p:pic>
+      <p:sp>
+        <p:nvSpPr>
+          <p:cNvPr id="3" name="Title 1"/>
+          <p:cNvSpPr>
+            <a:spLocks noGrp="1" noChangeArrowheads="1"/>
+            <a:extLst>
+              <a:ext uri="smNativeData">
+                <pr:smNativeData xmlns:pr="smNativeData" xmlns="smNativeData" val="SMDATA_15_FLquaRMAAAAlAAAAZAAAAA0AAAAAkAAAAEgAAACQAAAASAAAAAAAAAABAAAAAAAAAAEAAABQAAAAAAAAAAAA4D8AAAAAAADgPwAAAAAAAOA/AAAAAAAA4D8AAAAAAADgPwAAAAAAAOA/AAAAAAAA4D8AAAAAAADgPwAAAAAAAOA/AAAAAAAA4D8CAAAAjAAAAAAAAAAAAAAAW5vVDP///wgAAAAAAAAAAAAAAAAAAAAAAAAAAAAAAAAAAAAAZAAAAAEAAABAAAAAAAAAAAAAAAAAAAAAAAAAAAAAAAAAAAAAAAAAAAAAAAAAAAAAAAAAAAAAAAAAAAAAAAAAAAAAAAAAAAAAAAAAAAAAAAAAAAAAAAAAAAAAAAAAAAAAFAAAADwAAAAAAAAAAAAAAAAAAAkUAAAAAQAAABQAAAAUAAAAFAAAAAEAAAAAAAAAZAAAAGQAAAAAAAAAZAAAAGQAAAAVAAAAYAAAAAAAAAAAAAAADwAAACADAAAAAAAAAAAAAAEAAACgMgAAVgcAAKr4//8BAAAAf39/AAEAAABkAAAAAAAAABQAAABAHwAAAAAAACYAAAAAAAAAwOD//wAAAAAmAAAAZAAAABYAAABMAAAAAAAAAAAAAAAEAAAAAAAAAAEAAADn5uYKAAAAACgAAAAoAAAAZAAAAGQAAAAAAAAAzMzMAAAAAABQAAAAUAAAAGQAAABkAAAAAAAAABcAAAAUAAAAAAAAAAAAAAD/fwAA/38AAAAAAAAJAAAABAAAAF8AYAAeAAAAaAAAAAAAAAAAAAAAAAAAAAAAAAAAAAAAECcAABAnAAAAAAAAAAAAAAAAAAAAAAAAAAAAAAAAAAAAAAAAAAAAABQAAAAAAAAAwMD/AAAAAABkAAAAMgAAAAAAAABkAAAAAAAAAH9/fwAKAAAAIgAAABgAAAAAAAAAAAAAAAAAAAAAAAAAAAAAAAAAAAAkAAAAJAAAAAAAAAAHAAAAAAAAAAAAAAAAAAAAAAAAAAAAAAAAAAAAf39/ACUAAABYAAAAAAAAAAAAAAAAAAAAAAAAAAAAAAAAAAAAAAAAAAAAAAAAAAAAAAAAAAAAAAA/AAAAAAAAAKCGAQAAAAAAAAAAAAAAAAAMAAAAAQAAAAAAAAAAAAAAAAAAAB8AAABUAAAAW5vVBf///wEAAAAAAAAAAAAAAAAAAAAAAAAAAAAAAAAAAAAAAAAAAAAAAAJ/f38A5+bmA8zMzADAwP8Af39/AAAAAAAAAAAAAAAAAAAAAAAAAAAAIQAAABgAAAAUAAAAKAUAAD8CAADYRQAAZwoAABAAAAAmAAAACAAAAAAAAAAAAAAA"/>
+              </a:ext>
+            </a:extLst>
           </p:cNvSpPr>
           <p:nvPr>
             <p:ph type="title"/>
@@ -3613,219 +5438,32 @@
           <a:bodyPr/>
           <a:lstStyle/>
           <a:p>
-            <a:pPr algn="ctr"/>
-            <a:r>
-              <a:rPr lang="en-US" dirty="0" smtClean="0"/>
-              <a:t>Connecting</a:t>
-            </a:r>
-            <a:endParaRPr lang="en-US" dirty="0"/>
-          </a:p>
-        </p:txBody>
-      </p:sp>
-      <p:sp>
-        <p:nvSpPr>
-          <p:cNvPr id="3" name="Content Placeholder 2"/>
-          <p:cNvSpPr>
-            <a:spLocks noGrp="1"/>
-          </p:cNvSpPr>
-          <p:nvPr>
-            <p:ph idx="1"/>
-          </p:nvPr>
-        </p:nvSpPr>
-        <p:spPr/>
-        <p:txBody>
-          <a:bodyPr/>
-          <a:lstStyle/>
-          <a:p>
-            <a:r>
-              <a:rPr lang="en-US" dirty="0" smtClean="0"/>
-              <a:t> </a:t>
-            </a:r>
-            <a:r>
-              <a:rPr lang="en-US" dirty="0" err="1" smtClean="0"/>
-              <a:t>BeagleBone</a:t>
-            </a:r>
-            <a:r>
-              <a:rPr lang="en-US" dirty="0" smtClean="0"/>
-              <a:t> has two </a:t>
-            </a:r>
-            <a:r>
-              <a:rPr lang="en-US" dirty="0" err="1" smtClean="0"/>
-              <a:t>Wifi</a:t>
-            </a:r>
-            <a:r>
-              <a:rPr lang="en-US" dirty="0" smtClean="0"/>
-              <a:t> adapters, one is used as </a:t>
-            </a:r>
-            <a:r>
-              <a:rPr lang="en-US" dirty="0" err="1" smtClean="0"/>
-              <a:t>WiFi</a:t>
-            </a:r>
-            <a:r>
-              <a:rPr lang="en-US" dirty="0" smtClean="0"/>
-              <a:t> server named something like BeagleBone-CB0B</a:t>
-            </a:r>
-          </a:p>
-          <a:p>
-            <a:pPr lvl="1"/>
-            <a:r>
-              <a:rPr lang="en-US" dirty="0" smtClean="0"/>
-              <a:t>SSH into 192.168.8.1  username: </a:t>
-            </a:r>
-            <a:r>
-              <a:rPr lang="en-US" dirty="0" err="1" smtClean="0"/>
-              <a:t>debian</a:t>
-            </a:r>
-            <a:r>
-              <a:rPr lang="en-US" dirty="0" smtClean="0"/>
-              <a:t>  password: </a:t>
-            </a:r>
-            <a:r>
-              <a:rPr lang="en-US" dirty="0" err="1" smtClean="0"/>
-              <a:t>temppwd</a:t>
-            </a:r>
-            <a:r>
-              <a:rPr lang="en-US" dirty="0" smtClean="0"/>
-              <a:t> / blick77</a:t>
-            </a:r>
-          </a:p>
-          <a:p>
-            <a:pPr lvl="2"/>
-            <a:r>
-              <a:rPr lang="en-US" dirty="0"/>
-              <a:t>Thru serial </a:t>
-            </a:r>
-            <a:r>
-              <a:rPr lang="en-US" dirty="0" smtClean="0"/>
-              <a:t>cable: 192.168.7.2 (on Mac 192.168.6.2)</a:t>
-            </a:r>
-          </a:p>
-          <a:p>
-            <a:pPr lvl="2"/>
-            <a:r>
-              <a:rPr lang="en-US" dirty="0" smtClean="0"/>
-              <a:t>You can open AS MANY SSH connections as you want!</a:t>
-            </a:r>
-          </a:p>
-          <a:p>
-            <a:r>
-              <a:rPr lang="en-US" dirty="0" smtClean="0"/>
-              <a:t>Copy files using SCP: </a:t>
-            </a:r>
-            <a:r>
-              <a:rPr lang="en-US" dirty="0" err="1" smtClean="0"/>
-              <a:t>scp</a:t>
-            </a:r>
-            <a:r>
-              <a:rPr lang="en-US" dirty="0" smtClean="0"/>
-              <a:t> 192.168.8.1:/home/</a:t>
-            </a:r>
-            <a:r>
-              <a:rPr lang="en-US" dirty="0" err="1" smtClean="0"/>
-              <a:t>debian</a:t>
-            </a:r>
-            <a:r>
-              <a:rPr lang="en-US" dirty="0" smtClean="0"/>
-              <a:t>/</a:t>
-            </a:r>
-            <a:r>
-              <a:rPr lang="en-US" dirty="0" err="1" smtClean="0"/>
-              <a:t>etc</a:t>
-            </a:r>
-            <a:r>
-              <a:rPr lang="en-US" dirty="0" smtClean="0"/>
-              <a:t>…</a:t>
-            </a:r>
-          </a:p>
-          <a:p>
-            <a:pPr lvl="1"/>
-            <a:r>
-              <a:rPr lang="en-US" dirty="0" smtClean="0"/>
-              <a:t>'Remote </a:t>
-            </a:r>
-            <a:r>
-              <a:rPr lang="en-US" dirty="0"/>
-              <a:t>Host Identification has changed' </a:t>
-            </a:r>
-            <a:r>
-              <a:rPr lang="en-US" dirty="0" smtClean="0"/>
-              <a:t>error - delete old key and try again (caused by multiple </a:t>
-            </a:r>
-            <a:r>
-              <a:rPr lang="en-US" dirty="0" err="1" smtClean="0"/>
-              <a:t>BeagleBones</a:t>
-            </a:r>
-            <a:r>
-              <a:rPr lang="en-US" dirty="0" smtClean="0"/>
-              <a:t> with same ID):</a:t>
-            </a:r>
-          </a:p>
-          <a:p>
-            <a:pPr lvl="2"/>
-            <a:r>
-              <a:rPr lang="en-US" dirty="0" err="1">
-                <a:solidFill>
-                  <a:srgbClr val="FF0000"/>
-                </a:solidFill>
-              </a:rPr>
-              <a:t>ssh-keygen</a:t>
-            </a:r>
-            <a:r>
-              <a:rPr lang="en-US" dirty="0">
-                <a:solidFill>
-                  <a:srgbClr val="FF0000"/>
-                </a:solidFill>
-              </a:rPr>
-              <a:t> -R </a:t>
-            </a:r>
-            <a:r>
-              <a:rPr lang="en-US" dirty="0" smtClean="0">
-                <a:solidFill>
-                  <a:srgbClr val="FF0000"/>
-                </a:solidFill>
-              </a:rPr>
-              <a:t>192.168.8.1</a:t>
-            </a:r>
-          </a:p>
-          <a:p>
-            <a:r>
-              <a:rPr lang="en-US" dirty="0" smtClean="0">
-                <a:hlinkClick r:id="rId2"/>
-              </a:rPr>
-              <a:t>http://192.168.8.1</a:t>
-            </a:r>
-            <a:r>
-              <a:rPr lang="en-US" dirty="0" smtClean="0"/>
-              <a:t> to use Cloud9 web interface</a:t>
-            </a:r>
-          </a:p>
-          <a:p>
-            <a:endParaRPr lang="en-US" dirty="0" smtClean="0"/>
-          </a:p>
-          <a:p>
-            <a:endParaRPr lang="en-US" dirty="0" smtClean="0"/>
-          </a:p>
-          <a:p>
-            <a:pPr lvl="2"/>
-            <a:endParaRPr lang="en-US" dirty="0"/>
+            <a:pPr>
+              <a:defRPr lang="en-us"/>
+            </a:pPr>
+            <a:r>
+              <a:t>Connector pins</a:t>
+            </a:r>
           </a:p>
         </p:txBody>
       </p:sp>
     </p:spTree>
-    <p:extLst>
-      <p:ext uri="{BB962C8B-B14F-4D97-AF65-F5344CB8AC3E}">
-        <p14:creationId xmlns:p14="http://schemas.microsoft.com/office/powerpoint/2010/main" val="1728732196"/>
-      </p:ext>
-    </p:extLst>
   </p:cSld>
   <p:clrMapOvr>
     <a:masterClrMapping/>
   </p:clrMapOvr>
+  <p:timing>
+    <p:tnLst>
+      <p:par>
+        <p:cTn id="1" dur="indefinite" restart="never" nodeType="tmRoot"/>
+      </p:par>
+    </p:tnLst>
+  </p:timing>
 </p:sld>
 </file>
 
 <file path=ppt/slides/slide6.xml><?xml version="1.0" encoding="utf-8"?>
-<p:sld xmlns:a="http://schemas.openxmlformats.org/drawingml/2006/main" xmlns:r="http://schemas.openxmlformats.org/officeDocument/2006/relationships" xmlns:p="http://schemas.openxmlformats.org/presentationml/2006/main">
+<p:sld xmlns:p="http://schemas.openxmlformats.org/presentationml/2006/main" xmlns:mc="http://schemas.openxmlformats.org/markup-compatibility/2006" xmlns:p14="http://schemas.microsoft.com/office/powerpoint/2010/main" xmlns:p15="http://schemas.microsoft.com/office/powerpoint/2012/main" xmlns:r="http://schemas.openxmlformats.org/officeDocument/2006/relationships" xmlns:a="http://schemas.openxmlformats.org/drawingml/2006/main" mc:Ignorable="p14">
   <p:cSld>
     <p:spTree>
       <p:nvGrpSpPr>
@@ -3845,7 +5483,12 @@
         <p:nvSpPr>
           <p:cNvPr id="2" name="Title 1"/>
           <p:cNvSpPr>
-            <a:spLocks noGrp="1"/>
+            <a:spLocks noGrp="1" noChangeArrowheads="1"/>
+            <a:extLst>
+              <a:ext uri="smNativeData">
+                <pr:smNativeData xmlns:pr="smNativeData" xmlns="smNativeData" val="SMDATA_15_FLquaRMAAAAlAAAAZAAAAA0AAAAAkAAAAEgAAACQAAAASAAAAAAAAAABAAAAAAAAAAEAAABQAAAAAAAAAAAA4D8AAAAAAADgPwAAAAAAAOA/AAAAAAAA4D8AAAAAAADgPwAAAAAAAOA/AAAAAAAA4D8AAAAAAADgPwAAAAAAAOA/AAAAAAAA4D8CAAAAjAAAAAAAAAAAAAAAW5vVDP///wgAAAAAAAAAAAAAAAAAAAAAAAAAAAAAAAAAAAAAZAAAAAEAAABAAAAAAAAAAAAAAAAAAAAAAAAAAAAAAAAAAAAAAAAAAAAAAAAAAAAAAAAAAAAAAAAAAAAAAAAAAAAAAAAAAAAAAAAAAAAAAAAAAAAAAAAAAAAAAAAAAAAAFAAAADwAAAAAAAAAAAAAAAAAAAkUAAAAAQAAABQAAAAUAAAAFAAAAAEAAAAAAAAAZAAAAGQAAAAAAAAAZAAAAGQAAAAVAAAAYAAAAAAAAAAAAAAADwAAACADAAAAAAAAAAAAAAEAAACgMgAAVgcAAKr4//8BAAAAf39/AAEAAABkAAAAAAAAABQAAABAHwAAAAAAACYAAAAAAAAAwOD//wAAAAAmAAAAZAAAABYAAABMAAAAAAAAAAAAAAAEAAAAAAAAAAEAAADn5uYKAAAAACgAAAAoAAAAZAAAAGQAAAAAAAAAzMzMAAAAAABQAAAAUAAAAGQAAABkAAAAAAAAABcAAAAUAAAAAAAAAAAAAAD/fwAA/38AAAAAAAAJAAAABAAAAF8AYAAeAAAAaAAAAAAAAAAAAAAAAAAAAAAAAAAAAAAAECcAABAnAAAAAAAAAAAAAAAAAAAAAAAAAAAAAAAAAAAAAAAAAAAAABQAAAAAAAAAwMD/AAAAAABkAAAAMgAAAAAAAABkAAAAAAAAAH9/fwAKAAAAIgAAABgAAAAAAAAAAAAAAAAAAAAAAAAAAAAAAAAAAAAkAAAAJAAAAAAAAAAHAAAAAAAAAAAAAAAAAAAAAAAAAAAAAAAAAAAAf39/ACUAAABYAAAAAAAAAAAAAAAAAAAAAAAAAAAAAAAAAAAAAAAAAAAAAAAAAAAAAAAAAAAAAAA/AAAAAAAAAKCGAQAAAAAAAAAAAAAAAAAMAAAAAQAAAAAAAAAAAAAAAAAAAB8AAABUAAAAW5vVBf///wEAAAAAAAAAAAAAAAAAAAAAAAAAAAAAAAAAAAAAAAAAAAAAAAJ/f38A5+bmA8zMzADAwP8Af39/AAAAAAAAAAAAAAAAAAAAAAAAAAAAIQAAABgAAAAUAAAAKAUAAD8CAADYRQAAZwoAABAAAAAmAAAACAAAAAAAAAAAAAAA"/>
+              </a:ext>
+            </a:extLst>
           </p:cNvSpPr>
           <p:nvPr>
             <p:ph type="title"/>
@@ -3856,20 +5499,12 @@
           <a:bodyPr/>
           <a:lstStyle/>
           <a:p>
-            <a:pPr algn="ctr"/>
-            <a:r>
-              <a:rPr lang="en-US" dirty="0" smtClean="0"/>
-              <a:t>Dual </a:t>
-            </a:r>
-            <a:r>
-              <a:rPr lang="en-US" dirty="0" err="1" smtClean="0"/>
-              <a:t>WiFi</a:t>
-            </a:r>
-            <a:r>
-              <a:rPr lang="en-US" dirty="0" smtClean="0"/>
-              <a:t> adapters</a:t>
-            </a:r>
-            <a:endParaRPr lang="en-US" dirty="0"/>
+            <a:pPr>
+              <a:defRPr lang="en-us"/>
+            </a:pPr>
+            <a:r>
+              <a:t>Connecting to BeagleBone terminal</a:t>
+            </a:r>
           </a:p>
         </p:txBody>
       </p:sp>
@@ -3877,173 +5512,117 @@
         <p:nvSpPr>
           <p:cNvPr id="3" name="Content Placeholder 2"/>
           <p:cNvSpPr>
-            <a:spLocks noGrp="1"/>
-          </p:cNvSpPr>
-          <p:nvPr>
-            <p:ph idx="1"/>
+            <a:spLocks noGrp="1" noChangeArrowheads="1"/>
+            <a:extLst>
+              <a:ext uri="smNativeData">
+                <pr:smNativeData xmlns:pr="smNativeData" xmlns="smNativeData" val="SMDATA_15_FLquaRMAAAAlAAAAZAAAAA0AAAAAkAAAAEgAAACQAAAASAAAAAAAAAAAAAAAAAAAAAEAAABQAAAAAAAAAAAA4D8AAAAAAADgPwAAAAAAAOA/AAAAAAAA4D8AAAAAAADgPwAAAAAAAOA/AAAAAAAA4D8AAAAAAADgPwAAAAAAAOA/AAAAAAAA4D8CAAAAjAAAAAAAAAAAAAAAW5vVDP///wgAAAAAAAAAAAAAAAAAAAAAAAAAAAAAAAAAAAAAZAAAAAEAAABAAAAAAAAAAAAAAAAAAAAAAAAAAAAAAAAAAAAAAAAAAAAAAAAAAAAAAAAAAAAAAAAAAAAAAAAAAAAAAAAAAAAAAAAAAAAAAAAAAAAAAAAAAAAAAAAAAAAAFAAAADwAAAAAAAAAAAAAAAAAAAkUAAAAAQAAABQAAAAUAAAAFAAAAAEAAAAAAAAAZAAAAGQAAAAAAAAAZAAAAGQAAAAVAAAAYAAAAAAAAAAAAAAADwAAACADAAAAAAAAAAAAAAEAAACgMgAAVgcAAKr4//8BAAAAf39/AAEAAABkAAAAAAAAABQAAABAHwAAAAAAACYAAAAAAAAAwOD//wAAAAAmAAAAZAAAABYAAABMAAAAAAAAAAAAAAAEAAAAAAAAAAEAAADn5uYKAAAAACgAAAAoAAAAZAAAAGQAAAAAAAAAzMzMAAAAAABQAAAAUAAAAGQAAABkAAAAAAAAABcAAAAUAAAAAAAAAAAAAAD/fwAA/38AAAAAAAAJAAAABAAAAF8AYAAeAAAAaAAAAAAAAAAAAAAAAAAAAAAAAAAAAAAAECcAABAnAAAAAAAAAAAAAAAAAAAAAAAAAAAAAAAAAAAAAAAAAAAAABQAAAAAAAAAwMD/AAAAAABkAAAAMgAAAAAAAABkAAAAAAAAAH9/fwAKAAAAIgAAABgAAAAAAAAAAAAAAAAAAAAAAAAAAAAAAAAAAAAkAAAAJAAAAAAAAAAHAAAAAAAAAAAAAAAAAAAAAAAAAAAAAAAAAAAAf39/ACUAAABYAAAAAAAAAAAAAAAAAAAAAAAAAAAAAAAAAAAAAAAAAAAAAAAAAAAAAAAAAAAAAAA/AAAAAAAAAKCGAQAAAAAAAAAAAAAAAAAMAAAAAQAAAAAAAAAAAAAAAAAAAB8AAABUAAAAW5vVBf///wEAAAAAAAAAAAAAAAAAAAAAAAAAAAAAAAAAAAAAAAAAAAAAAAJ/f38A5+bmA8zMzADAwP8Af39/AAAAAAAAAAAAAAAAAAAAAAAAAAAAIQAAABgAAAAUAAAAKAUAADsLAADYRQAAACYAABAAAAAmAAAACAAAAAAAAAAAAAAA"/>
+              </a:ext>
+            </a:extLst>
+          </p:cNvSpPr>
+          <p:nvPr>
+            <p:ph type="body" idx="1"/>
           </p:nvPr>
         </p:nvSpPr>
         <p:spPr/>
         <p:txBody>
-          <a:bodyPr>
-            <a:normAutofit lnSpcReduction="10000"/>
-          </a:bodyPr>
-          <a:lstStyle/>
-          <a:p>
-            <a:r>
-              <a:rPr lang="en-US" dirty="0" smtClean="0"/>
-              <a:t>Acts as </a:t>
-            </a:r>
-            <a:r>
-              <a:rPr lang="en-US" dirty="0" err="1" smtClean="0"/>
-              <a:t>WiFi</a:t>
-            </a:r>
-            <a:r>
-              <a:rPr lang="en-US" dirty="0" smtClean="0"/>
-              <a:t> server as well as can connect to internet</a:t>
-            </a:r>
-          </a:p>
-          <a:p>
-            <a:r>
-              <a:rPr lang="en-US" dirty="0" smtClean="0"/>
-              <a:t>Use </a:t>
-            </a:r>
-            <a:r>
-              <a:rPr lang="en-US" dirty="0" err="1" smtClean="0"/>
-              <a:t>connmanctl</a:t>
-            </a:r>
-            <a:r>
-              <a:rPr lang="en-US" dirty="0" smtClean="0"/>
-              <a:t> to setup </a:t>
-            </a:r>
-            <a:r>
-              <a:rPr lang="en-US" dirty="0" err="1" smtClean="0"/>
-              <a:t>WiFi</a:t>
-            </a:r>
-            <a:r>
-              <a:rPr lang="en-US" dirty="0" smtClean="0"/>
-              <a:t>, in console type these commands:</a:t>
-            </a:r>
-          </a:p>
-          <a:p>
-            <a:pPr lvl="1"/>
-            <a:r>
-              <a:rPr lang="en-US" dirty="0"/>
-              <a:t>enable </a:t>
-            </a:r>
-            <a:r>
-              <a:rPr lang="en-US" dirty="0" err="1"/>
-              <a:t>wifi</a:t>
-            </a:r>
-            <a:endParaRPr lang="en-US" dirty="0"/>
-          </a:p>
-          <a:p>
-            <a:pPr lvl="1"/>
-            <a:r>
-              <a:rPr lang="en-US" dirty="0"/>
-              <a:t>tether </a:t>
-            </a:r>
-            <a:r>
-              <a:rPr lang="en-US" dirty="0" err="1"/>
-              <a:t>wifi</a:t>
-            </a:r>
-            <a:r>
-              <a:rPr lang="en-US" dirty="0"/>
-              <a:t> disable</a:t>
-            </a:r>
-          </a:p>
-          <a:p>
-            <a:pPr lvl="1"/>
-            <a:r>
-              <a:rPr lang="en-US" dirty="0"/>
-              <a:t>agent on</a:t>
-            </a:r>
-          </a:p>
-          <a:p>
-            <a:pPr lvl="1"/>
-            <a:r>
-              <a:rPr lang="en-US" dirty="0"/>
-              <a:t>scan </a:t>
-            </a:r>
-            <a:r>
-              <a:rPr lang="en-US" dirty="0" err="1"/>
-              <a:t>wifi</a:t>
-            </a:r>
-            <a:r>
-              <a:rPr lang="en-US" dirty="0"/>
-              <a:t>   (*need to wait until these come back with response)</a:t>
-            </a:r>
-          </a:p>
-          <a:p>
-            <a:pPr lvl="1"/>
-            <a:r>
-              <a:rPr lang="en-US" dirty="0"/>
-              <a:t>services</a:t>
-            </a:r>
-          </a:p>
-          <a:p>
-            <a:pPr lvl="1"/>
-            <a:r>
-              <a:rPr lang="en-US" dirty="0"/>
-              <a:t>connect </a:t>
-            </a:r>
-            <a:r>
-              <a:rPr lang="en-US" dirty="0" err="1"/>
-              <a:t>wifi_XXX</a:t>
-            </a:r>
-            <a:endParaRPr lang="en-US" dirty="0"/>
-          </a:p>
-          <a:p>
-            <a:pPr lvl="1"/>
-            <a:r>
-              <a:rPr lang="en-US" dirty="0"/>
-              <a:t>e</a:t>
-            </a:r>
-            <a:r>
-              <a:rPr lang="en-US" dirty="0" smtClean="0"/>
-              <a:t>xit</a:t>
-            </a:r>
-          </a:p>
-          <a:p>
-            <a:pPr lvl="1"/>
-            <a:r>
-              <a:rPr lang="en-US" dirty="0" smtClean="0"/>
-              <a:t>*might take some seconds to actually connect. ping doesn’t work, so just try </a:t>
-            </a:r>
-            <a:r>
-              <a:rPr lang="en-US" dirty="0" err="1" smtClean="0"/>
-              <a:t>sudo</a:t>
-            </a:r>
-            <a:r>
-              <a:rPr lang="en-US" dirty="0" smtClean="0"/>
-              <a:t> apt update.</a:t>
-            </a:r>
-            <a:endParaRPr lang="en-US" dirty="0"/>
-          </a:p>
-          <a:p>
-            <a:pPr lvl="1"/>
-            <a:endParaRPr lang="en-US" dirty="0" smtClean="0"/>
-          </a:p>
-          <a:p>
-            <a:endParaRPr lang="en-US" dirty="0"/>
+          <a:bodyPr/>
+          <a:lstStyle/>
+          <a:p>
+            <a:pPr>
+              <a:defRPr lang="en-us"/>
+            </a:pPr>
+            <a:r>
+              <a:t>Connect to the BeagleBone’s WiFi service</a:t>
+            </a:r>
+          </a:p>
+          <a:p>
+            <a:pPr lvl="1">
+              <a:defRPr lang="en-us"/>
+            </a:pPr>
+            <a:r>
+              <a:t>Password: BeagleBone</a:t>
+            </a:r>
+          </a:p>
+          <a:p>
+            <a:pPr lvl="1">
+              <a:defRPr lang="en-us"/>
+            </a:pPr>
+            <a:r>
+              <a:t>SSH into 192.168.8.1</a:t>
+            </a:r>
+          </a:p>
+          <a:p>
+            <a:pPr lvl="2">
+              <a:defRPr lang="en-us"/>
+            </a:pPr>
+            <a:r>
+              <a:t>ssh debian@192.168.8.1  pass blick77  (or use Putty)</a:t>
+            </a:r>
+          </a:p>
+          <a:p>
+            <a:pPr lvl="2">
+              <a:defRPr lang="en-us"/>
+            </a:pPr>
+            <a:r>
+              <a:t>If connecting thru serial cable it’s 192.168.7.2</a:t>
+            </a:r>
+          </a:p>
+          <a:p>
+            <a:pPr lvl="2">
+              <a:defRPr lang="en-us"/>
+            </a:pPr>
+            <a:r>
+              <a:t>If connecting from Linux/Mac it’s 192.168.6.2</a:t>
+            </a:r>
+          </a:p>
+          <a:p>
+            <a:pPr lvl="1">
+              <a:defRPr lang="en-us"/>
+            </a:pPr>
+            <a:r>
+              <a:t>If in browser, can also go to 192.168.8.1 to bring up UI terminal thru HTTP</a:t>
+            </a:r>
+          </a:p>
+          <a:p>
+            <a:pPr>
+              <a:defRPr lang="en-us"/>
+            </a:pPr>
+            <a:r>
+              <a:t>If you connect to two different BeagleBones it gives ‘Remote Host Identification has changed’ error. To fix:</a:t>
+            </a:r>
+          </a:p>
+          <a:p>
+            <a:pPr lvl="1">
+              <a:defRPr lang="en-us"/>
+            </a:pPr>
+            <a:r>
+              <a:t>ssh-keygen -R 192.168.8.1</a:t>
+            </a:r>
+          </a:p>
+          <a:p>
+            <a:pPr>
+              <a:defRPr lang="en-us"/>
+            </a:pPr>
           </a:p>
         </p:txBody>
       </p:sp>
     </p:spTree>
-    <p:extLst>
-      <p:ext uri="{BB962C8B-B14F-4D97-AF65-F5344CB8AC3E}">
-        <p14:creationId xmlns:p14="http://schemas.microsoft.com/office/powerpoint/2010/main" val="1290615148"/>
-      </p:ext>
-    </p:extLst>
   </p:cSld>
   <p:clrMapOvr>
     <a:masterClrMapping/>
   </p:clrMapOvr>
+  <p:timing>
+    <p:tnLst>
+      <p:par>
+        <p:cTn id="1" dur="indefinite" restart="never" nodeType="tmRoot"/>
+      </p:par>
+    </p:tnLst>
+  </p:timing>
 </p:sld>
 </file>
 
 <file path=ppt/slides/slide7.xml><?xml version="1.0" encoding="utf-8"?>
-<p:sld xmlns:a="http://schemas.openxmlformats.org/drawingml/2006/main" xmlns:r="http://schemas.openxmlformats.org/officeDocument/2006/relationships" xmlns:p="http://schemas.openxmlformats.org/presentationml/2006/main">
+<p:sld xmlns:p="http://schemas.openxmlformats.org/presentationml/2006/main" xmlns:mc="http://schemas.openxmlformats.org/markup-compatibility/2006" xmlns:p14="http://schemas.microsoft.com/office/powerpoint/2010/main" xmlns:p15="http://schemas.microsoft.com/office/powerpoint/2012/main" xmlns:r="http://schemas.openxmlformats.org/officeDocument/2006/relationships" xmlns:a="http://schemas.openxmlformats.org/drawingml/2006/main" mc:Ignorable="p14">
   <p:cSld>
     <p:spTree>
       <p:nvGrpSpPr>
@@ -4063,7 +5642,12 @@
         <p:nvSpPr>
           <p:cNvPr id="2" name="Title 1"/>
           <p:cNvSpPr>
-            <a:spLocks noGrp="1"/>
+            <a:spLocks noGrp="1" noChangeArrowheads="1"/>
+            <a:extLst>
+              <a:ext uri="smNativeData">
+                <pr:smNativeData xmlns:pr="smNativeData" xmlns="smNativeData" val="SMDATA_15_FLquaRMAAAAlAAAAZAAAAA0AAAAAkAAAAEgAAACQAAAASAAAAAAAAAABAAAAAAAAAAEAAABQAAAAAAAAAAAA4D8AAAAAAADgPwAAAAAAAOA/AAAAAAAA4D8AAAAAAADgPwAAAAAAAOA/AAAAAAAA4D8AAAAAAADgPwAAAAAAAOA/AAAAAAAA4D8CAAAAjAAAAAAAAAAAAAAAW5vVDP///wgAAAAAAAAAAAAAAAAAAAAAAAAAAAAAAAAAAAAAZAAAAAEAAABAAAAAAAAAAAAAAAAAAAAAAAAAAAAAAAAAAAAAAAAAAAAAAAAAAAAAAAAAAAAAAAAAAAAAAAAAAAAAAAAAAAAAAAAAAAAAAAAAAAAAAAAAAAAAAAAAAAAAFAAAADwAAAAAAAAAAAAAAAAAAAkUAAAAAQAAABQAAAAUAAAAFAAAAAEAAAAAAAAAZAAAAGQAAAAAAAAAZAAAAGQAAAAVAAAAYAAAAAAAAAAAAAAADwAAACADAAAAAAAAAAAAAAEAAACgMgAAVgcAAKr4//8BAAAAf39/AAEAAABkAAAAAAAAABQAAABAHwAAAAAAACYAAAAAAAAAwOD//wAAAAAmAAAAZAAAABYAAABMAAAAAAAAAAAAAAAEAAAAAAAAAAEAAADn5uYKAAAAACgAAAAoAAAAZAAAAGQAAAAAAAAAzMzMAAAAAABQAAAAUAAAAGQAAABkAAAAAAAAABcAAAAUAAAAAAAAAAAAAAD/fwAA/38AAAAAAAAJAAAABAAAAF8AYAAeAAAAaAAAAAAAAAAAAAAAAAAAAAAAAAAAAAAAECcAABAnAAAAAAAAAAAAAAAAAAAAAAAAAAAAAAAAAAAAAAAAAAAAABQAAAAAAAAAwMD/AAAAAABkAAAAMgAAAAAAAABkAAAAAAAAAH9/fwAKAAAAIgAAABgAAAAAAAAAAAAAAAAAAAAAAAAAAAAAAAAAAAAkAAAAJAAAAAAAAAAHAAAAAAAAAAAAAAAAAAAAAAAAAAAAAAAAAAAAf39/ACUAAABYAAAAAAAAAAAAAAAAAAAAAAAAAAAAAAAAAAAAAAAAAAAAAAAAAAAAAAAAAAAAAAA/AAAAAAAAAKCGAQAAAAAAAAAAAAAAAAAMAAAAAQAAAAAAAAAAAAAAAAAAAB8AAABUAAAAW5vVBf///wEAAAAAAAAAAAAAAAAAAAAAAAAAAAAAAAAAAAAAAAAAAAAAAAJ/f38A5+bmA8zMzADAwP8Af39/AAAAAAAAAAAAAAAAAAAAAAAAAAAAIQAAABgAAAAUAAAAKAUAAD8CAADYRQAAZwoAABAAAAAmAAAACAAAAAAAAAAAAAAA"/>
+              </a:ext>
+            </a:extLst>
           </p:cNvSpPr>
           <p:nvPr>
             <p:ph type="title"/>
@@ -4074,12 +5658,12 @@
           <a:bodyPr/>
           <a:lstStyle/>
           <a:p>
-            <a:pPr algn="ctr"/>
-            <a:r>
-              <a:rPr lang="en-US" dirty="0" smtClean="0"/>
-              <a:t>Updating the OS</a:t>
-            </a:r>
-            <a:endParaRPr lang="en-US" dirty="0"/>
+            <a:pPr algn="ctr">
+              <a:defRPr lang="en-us"/>
+            </a:pPr>
+            <a:r>
+              <a:t>Connecting</a:t>
+            </a:r>
           </a:p>
         </p:txBody>
       </p:sp>
@@ -4087,145 +5671,135 @@
         <p:nvSpPr>
           <p:cNvPr id="3" name="Content Placeholder 2"/>
           <p:cNvSpPr>
-            <a:spLocks noGrp="1"/>
-          </p:cNvSpPr>
-          <p:nvPr>
-            <p:ph idx="1"/>
+            <a:spLocks noGrp="1" noChangeArrowheads="1"/>
+            <a:extLst>
+              <a:ext uri="smNativeData">
+                <pr:smNativeData xmlns:pr="smNativeData" xmlns="smNativeData" val="SMDATA_15_FLquaRMAAAAlAAAAZAAAAA0AAAAAkAAAAEgAAACQAAAASAAAAAAAAAAAAAAAAAAAAAEAAABQAAAAAAAAAAAA4D8AAAAAAADgPwAAAAAAAOA/AAAAAAAA4D8AAAAAAADgPwAAAAAAAOA/AAAAAAAA4D8AAAAAAADgPwAAAAAAAOA/AAAAAAAA4D8CAAAAjAAAAAAAAAAAAAAAW5vVDP///wgAAAAAAAAAAAAAAAAAAAAAAAAAAAAAAAAAAAAAZAAAAAEAAABAAAAAAAAAAAAAAAAAAAAAAAAAAAAAAAAAAAAAAAAAAAAAAAAAAAAAAAAAAAAAAAAAAAAAAAAAAAAAAAAAAAAAAAAAAAAAAAAAAAAAAAAAAAAAAAAAAAAAFAAAADwAAAAAAAAAAAAAAAAAAAkUAAAAAQAAABQAAAAUAAAAFAAAAAEAAAAAAAAAZAAAAGQAAAAAAAAAZAAAAGQAAAAVAAAAYAAAAAAAAAAAAAAADwAAACADAAAAAAAAAAAAAAEAAACgMgAAVgcAAKr4//8BAAAAf39/AAEAAABkAAAAAAAAABQAAABAHwAAAAAAACYAAAAAAAAAwOD//wAAAAAmAAAAZAAAABYAAABMAAAAAAAAAAAAAAAEAAAAAAAAAAEAAADn5uYKAAAAACgAAAAoAAAAZAAAAGQAAAAAAAAAzMzMAAAAAABQAAAAUAAAAGQAAABkAAAAAAAAABcAAAAUAAAAAAAAAAAAAAD/fwAA/38AAAAAAAAJAAAABAAAAF8AYAAeAAAAaAAAAAAAAAAAAAAAAAAAAAAAAAAAAAAAECcAABAnAAAAAAAAAAAAAAAAAAAAAAAAAAAAAAAAAAAAAAAAAAAAABQAAAAAAAAAwMD/AAAAAABkAAAAMgAAAAAAAABkAAAAAAAAAH9/fwAKAAAAIgAAABgAAAAAAAAAAAAAAAAAAAAAAAAAAAAAAAAAAAAkAAAAJAAAAAAAAAAHAAAAAAAAAAAAAAAAAAAAAAAAAAAAAAAAAAAAf39/ACUAAABYAAAAAAAAAAAAAAAAAAAAAAAAAAAAAAAAAAAAAAAAAAAAAAAAAAAAAAAAAAAAAAA/AAAAAAAAAKCGAQAAAAAAAAAAAAAAAAAMAAAAAQAAAAAAAAAAAAAAAAAAAB8AAABUAAAAW5vVBf///wEAAAAAAAAAAAAAAAAAAAAAAAAAAAAAAAAAAAAAAAAAAAAAAAJ/f38A5+bmA8zMzADAwP8Af39/AAAAAAAAAAAAAAAAAAAAAAAAAAAAIQAAABgAAAAUAAAAKAUAADsLAADYRQAAACYAABAAAAAmAAAACAAAAAAAAAAAAAAA"/>
+              </a:ext>
+            </a:extLst>
+          </p:cNvSpPr>
+          <p:nvPr>
+            <p:ph type="body" idx="1"/>
           </p:nvPr>
         </p:nvSpPr>
         <p:spPr/>
         <p:txBody>
-          <a:bodyPr>
-            <a:normAutofit/>
-          </a:bodyPr>
-          <a:lstStyle/>
-          <a:p>
-            <a:r>
-              <a:rPr lang="en-US" dirty="0" err="1" smtClean="0"/>
-              <a:t>BeagleBone</a:t>
-            </a:r>
-            <a:r>
-              <a:rPr lang="en-US" dirty="0" smtClean="0"/>
-              <a:t> Blue has 4GB </a:t>
-            </a:r>
-            <a:r>
-              <a:rPr lang="en-US" dirty="0" err="1" smtClean="0"/>
-              <a:t>eMMC</a:t>
-            </a:r>
-            <a:r>
-              <a:rPr lang="en-US" dirty="0" smtClean="0"/>
-              <a:t> (and 512MB DDR3 memory)</a:t>
-            </a:r>
-          </a:p>
-          <a:p>
-            <a:r>
-              <a:rPr lang="en-US" dirty="0" smtClean="0"/>
-              <a:t>The SD Card can be used to flash/replace the </a:t>
-            </a:r>
-            <a:r>
-              <a:rPr lang="en-US" dirty="0" err="1" smtClean="0"/>
-              <a:t>eMMC</a:t>
-            </a:r>
-            <a:endParaRPr lang="en-US" dirty="0" smtClean="0"/>
-          </a:p>
-          <a:p>
-            <a:pPr lvl="1"/>
-            <a:r>
-              <a:rPr lang="en-US" dirty="0" smtClean="0"/>
-              <a:t>Use </a:t>
-            </a:r>
-            <a:r>
-              <a:rPr lang="en-US" dirty="0" err="1" smtClean="0"/>
-              <a:t>EduMIP</a:t>
-            </a:r>
-            <a:r>
-              <a:rPr lang="en-US" dirty="0" smtClean="0"/>
-              <a:t> version on blue Lexar SD Card</a:t>
-            </a:r>
-          </a:p>
-          <a:p>
-            <a:pPr lvl="1"/>
-            <a:r>
-              <a:rPr lang="en-US" dirty="0" smtClean="0"/>
-              <a:t>If the SD Card is a ‘flasher’ version you don’t even need to hold down the flash button.</a:t>
-            </a:r>
-          </a:p>
-          <a:p>
-            <a:pPr lvl="1"/>
-            <a:r>
-              <a:rPr lang="en-US" dirty="0" smtClean="0"/>
-              <a:t>If it’s flashing it will cycle LEDs in a </a:t>
-            </a:r>
-            <a:r>
-              <a:rPr lang="en-US" dirty="0" err="1" smtClean="0"/>
-              <a:t>cyclon</a:t>
-            </a:r>
-            <a:r>
-              <a:rPr lang="en-US" dirty="0" smtClean="0"/>
-              <a:t> fashion back and forth.</a:t>
-            </a:r>
-          </a:p>
-          <a:p>
-            <a:pPr lvl="2"/>
-            <a:r>
-              <a:rPr lang="en-US" dirty="0" err="1" smtClean="0"/>
-              <a:t>Once’s</a:t>
-            </a:r>
-            <a:r>
-              <a:rPr lang="en-US" dirty="0" smtClean="0"/>
-              <a:t> it done it will auto-shut itself down (and no more LEDs cycling).</a:t>
-            </a:r>
-          </a:p>
-          <a:p>
-            <a:pPr lvl="1"/>
-            <a:r>
-              <a:rPr lang="en-US" dirty="0" smtClean="0"/>
-              <a:t>Take the SD card out (so it doesn’t do it again) and reboot.</a:t>
-            </a:r>
-          </a:p>
-          <a:p>
-            <a:r>
-              <a:rPr lang="en-US" dirty="0" smtClean="0"/>
-              <a:t>To create a new flasher SD Card from the current </a:t>
-            </a:r>
-            <a:r>
-              <a:rPr lang="en-US" dirty="0" err="1" smtClean="0"/>
-              <a:t>eMMC</a:t>
-            </a:r>
-            <a:r>
-              <a:rPr lang="en-US" dirty="0" smtClean="0"/>
-              <a:t>:</a:t>
-            </a:r>
-          </a:p>
-          <a:p>
-            <a:pPr lvl="1"/>
-            <a:r>
-              <a:rPr lang="en-US" sz="2000" dirty="0"/>
-              <a:t>/opt/scripts/tools/eMMC/beaglebone-black-make-microSD-flasher-from-eMMC.sh</a:t>
-            </a:r>
-            <a:endParaRPr lang="en-US" dirty="0" smtClean="0"/>
-          </a:p>
-          <a:p>
-            <a:pPr lvl="1"/>
-            <a:endParaRPr lang="en-US" dirty="0"/>
+          <a:bodyPr/>
+          <a:lstStyle/>
+          <a:p>
+            <a:pPr>
+              <a:defRPr lang="en-us"/>
+            </a:pPr>
+            <a:r>
+              <a:t> BeagleBone has two Wifi adapters, one is used as WiFi server named something like BeagleBone-CB0B</a:t>
+            </a:r>
+          </a:p>
+          <a:p>
+            <a:pPr lvl="1">
+              <a:defRPr lang="en-us"/>
+            </a:pPr>
+            <a:r>
+              <a:t>SSH into 192.168.8.1  username: debian  password: temppwd / blick77</a:t>
+            </a:r>
+          </a:p>
+          <a:p>
+            <a:pPr lvl="2">
+              <a:defRPr lang="en-us"/>
+            </a:pPr>
+            <a:r>
+              <a:t>Thru serial cable: 192.168.7.2 (on Mac 192.168.6.2)</a:t>
+            </a:r>
+          </a:p>
+          <a:p>
+            <a:pPr lvl="2">
+              <a:defRPr lang="en-us"/>
+            </a:pPr>
+            <a:r>
+              <a:t>You can open AS MANY SSH connections as you want!</a:t>
+            </a:r>
+          </a:p>
+          <a:p>
+            <a:pPr>
+              <a:defRPr lang="en-us"/>
+            </a:pPr>
+            <a:r>
+              <a:t>Copy files using SCP: scp 192.168.8.1:/home/debian/etc…</a:t>
+            </a:r>
+          </a:p>
+          <a:p>
+            <a:pPr lvl="1">
+              <a:defRPr lang="en-us"/>
+            </a:pPr>
+            <a:r>
+              <a:t>'Remote Host Identification has changed' error - delete old key and try again (caused by multiple BeagleBones with same ID):</a:t>
+            </a:r>
+          </a:p>
+          <a:p>
+            <a:pPr lvl="2">
+              <a:defRPr lang="en-us"/>
+            </a:pPr>
+            <a:r>
+              <a:rPr lang="en-us" cap="none">
+                <a:solidFill>
+                  <a:srgbClr val="FF0000"/>
+                </a:solidFill>
+              </a:rPr>
+              <a:t>ssh-keygen -R 192.168.8.1</a:t>
+            </a:r>
+            <a:endParaRPr lang="en-us" cap="none">
+              <a:solidFill>
+                <a:srgbClr val="FF0000"/>
+              </a:solidFill>
+            </a:endParaRPr>
+          </a:p>
+          <a:p>
+            <a:pPr>
+              <a:defRPr lang="en-us"/>
+            </a:pPr>
+            <a:r>
+              <a:rPr lang="en-us" cap="none">
+                <a:hlinkClick r:id="rId2"/>
+              </a:rPr>
+              <a:t>http://192.168.8.1</a:t>
+            </a:r>
+            <a:r>
+              <a:t> to use Cloud9 web interface</a:t>
+            </a:r>
+          </a:p>
+          <a:p>
+            <a:pPr>
+              <a:defRPr lang="en-us"/>
+            </a:pPr>
+          </a:p>
+          <a:p>
+            <a:pPr>
+              <a:defRPr lang="en-us"/>
+            </a:pPr>
+          </a:p>
+          <a:p>
+            <a:pPr lvl="2">
+              <a:defRPr lang="en-us"/>
+            </a:pPr>
           </a:p>
         </p:txBody>
       </p:sp>
     </p:spTree>
-    <p:extLst>
-      <p:ext uri="{BB962C8B-B14F-4D97-AF65-F5344CB8AC3E}">
-        <p14:creationId xmlns:p14="http://schemas.microsoft.com/office/powerpoint/2010/main" val="540204118"/>
-      </p:ext>
-    </p:extLst>
   </p:cSld>
   <p:clrMapOvr>
     <a:masterClrMapping/>
   </p:clrMapOvr>
+  <p:timing>
+    <p:tnLst>
+      <p:par>
+        <p:cTn id="1" dur="indefinite" restart="never" nodeType="tmRoot"/>
+      </p:par>
+    </p:tnLst>
+  </p:timing>
 </p:sld>
 </file>
 
 <file path=ppt/slides/slide8.xml><?xml version="1.0" encoding="utf-8"?>
-<p:sld xmlns:a="http://schemas.openxmlformats.org/drawingml/2006/main" xmlns:r="http://schemas.openxmlformats.org/officeDocument/2006/relationships" xmlns:p="http://schemas.openxmlformats.org/presentationml/2006/main">
+<p:sld xmlns:p="http://schemas.openxmlformats.org/presentationml/2006/main" xmlns:mc="http://schemas.openxmlformats.org/markup-compatibility/2006" xmlns:p14="http://schemas.microsoft.com/office/powerpoint/2010/main" xmlns:p15="http://schemas.microsoft.com/office/powerpoint/2012/main" xmlns:r="http://schemas.openxmlformats.org/officeDocument/2006/relationships" xmlns:a="http://schemas.openxmlformats.org/drawingml/2006/main" mc:Ignorable="p14">
   <p:cSld>
     <p:spTree>
       <p:nvGrpSpPr>
@@ -4245,7 +5819,12 @@
         <p:nvSpPr>
           <p:cNvPr id="2" name="Title 1"/>
           <p:cNvSpPr>
-            <a:spLocks noGrp="1"/>
+            <a:spLocks noGrp="1" noChangeArrowheads="1"/>
+            <a:extLst>
+              <a:ext uri="smNativeData">
+                <pr:smNativeData xmlns:pr="smNativeData" xmlns="smNativeData" val="SMDATA_15_FLquaRMAAAAlAAAAZAAAAA0AAAAAkAAAAEgAAACQAAAASAAAAAAAAAABAAAAAAAAAAEAAABQAAAAAAAAAAAA4D8AAAAAAADgPwAAAAAAAOA/AAAAAAAA4D8AAAAAAADgPwAAAAAAAOA/AAAAAAAA4D8AAAAAAADgPwAAAAAAAOA/AAAAAAAA4D8CAAAAjAAAAAAAAAAAAAAAW5vVDP///wgAAAAAAAAAAAAAAAAAAAAAAAAAAAAAAAAAAAAAZAAAAAEAAABAAAAAAAAAAAAAAAAAAAAAAAAAAAAAAAAAAAAAAAAAAAAAAAAAAAAAAAAAAAAAAAAAAAAAAAAAAAAAAAAAAAAAAAAAAAAAAAAAAAAAAAAAAAAAAAAAAAAAFAAAADwAAAAAAAAAAAAAAAAAAAkUAAAAAQAAABQAAAAUAAAAFAAAAAEAAAAAAAAAZAAAAGQAAAAAAAAAZAAAAGQAAAAVAAAAYAAAAAAAAAAAAAAADwAAACADAAAAAAAAAAAAAAEAAACgMgAAVgcAAKr4//8BAAAAf39/AAEAAABkAAAAAAAAABQAAABAHwAAAAAAACYAAAAAAAAAwOD//wAAAAAmAAAAZAAAABYAAABMAAAAAAAAAAAAAAAEAAAAAAAAAAEAAADn5uYKAAAAACgAAAAoAAAAZAAAAGQAAAAAAAAAzMzMAAAAAABQAAAAUAAAAGQAAABkAAAAAAAAABcAAAAUAAAAAAAAAAAAAAD/fwAA/38AAAAAAAAJAAAABAAAAF8AYAAeAAAAaAAAAAAAAAAAAAAAAAAAAAAAAAAAAAAAECcAABAnAAAAAAAAAAAAAAAAAAAAAAAAAAAAAAAAAAAAAAAAAAAAABQAAAAAAAAAwMD/AAAAAABkAAAAMgAAAAAAAABkAAAAAAAAAH9/fwAKAAAAIgAAABgAAAAAAAAAAAAAAAAAAAAAAAAAAAAAAAAAAAAkAAAAJAAAAAAAAAAHAAAAAAAAAAAAAAAAAAAAAAAAAAAAAAAAAAAAf39/ACUAAABYAAAAAAAAAAAAAAAAAAAAAAAAAAAAAAAAAAAAAAAAAAAAAAAAAAAAAAAAAAAAAAA/AAAAAAAAAKCGAQAAAAAAAAAAAAAAAAAMAAAAAQAAAAAAAAAAAAAAAAAAAB8AAABUAAAAW5vVBf///wEAAAAAAAAAAAAAAAAAAAAAAAAAAAAAAAAAAAAAAAAAAAAAAAJ/f38A5+bmA8zMzADAwP8Af39/AAAAAAAAAAAAAAAAAAAAAAAAAAAAIQAAABgAAAAUAAAAKAUAAD8CAADYRQAAZwoAABAAAAAmAAAACAAAAAAAAAAAAAAA"/>
+              </a:ext>
+            </a:extLst>
           </p:cNvSpPr>
           <p:nvPr>
             <p:ph type="title"/>
@@ -4256,11 +5835,12 @@
           <a:bodyPr/>
           <a:lstStyle/>
           <a:p>
-            <a:r>
-              <a:rPr lang="en-US" dirty="0" smtClean="0"/>
-              <a:t>Setup OS onto internal Flash memory</a:t>
-            </a:r>
-            <a:endParaRPr lang="en-US" dirty="0"/>
+            <a:pPr algn="ctr">
+              <a:defRPr lang="en-us"/>
+            </a:pPr>
+            <a:r>
+              <a:t>Dual WiFi adapters: connect one to internet</a:t>
+            </a:r>
           </a:p>
         </p:txBody>
       </p:sp>
@@ -4268,81 +5848,170 @@
         <p:nvSpPr>
           <p:cNvPr id="3" name="Content Placeholder 2"/>
           <p:cNvSpPr>
-            <a:spLocks noGrp="1"/>
-          </p:cNvSpPr>
-          <p:nvPr>
-            <p:ph idx="1"/>
+            <a:spLocks noGrp="1" noChangeArrowheads="1"/>
+            <a:extLst>
+              <a:ext uri="smNativeData">
+                <pr:smNativeData xmlns:pr="smNativeData" xmlns="smNativeData" val="SMDATA_15_FLquaRMAAAAlAAAAZAAAAA0AAAAAkAAAAEgAAACQAAAASAAAAAAAAAAAAAAAAAAAAAEAAABQAAAAAAAAAAAA4D8AAAAAAADgPwAAAAAAAOA/AAAAAAAA4D8AAAAAAADgPwAAAAAAAOA/AAAAAAAA4D8AAAAAAADgPwAAAAAAAOA/AAAAAAAA4D8CAAAAjAAAAAAAAAAAAAAAW5vVDP///wgAAAAAAAAAAAAAAAAAAAAAAAAAAAAAAAAAAAAAZAAAAAEAAABAAAAAAAAAAAAAAAAAAAAAAAAAAAAAAAAAAAAAAAAAAAAAAAAAAAAAAAAAAAAAAAAAAAAAAAAAAAAAAAAAAAAAAAAAAAAAAAAAAAAAAAAAAAAAAAAAAAAAFAAAADwAAAAAAAAAAAAAAAAAAAkUAAAAAQAAABQAAAAUAAAAFAAAAAEAAAAAAAAAZAAAAGQAAAAAAAAAZAAAAGQAAAAVAAAAYAAAAAAAAAAAAAAADwAAACADAAAAAAAAAAAAAAEAAACgMgAAVgcAAKr4//8BAAAAf39/AAEAAABkAAAAAAAAABQAAABAHwAAAAAAACYAAAAAAAAAwOD//wAAAAAmAAAAZAAAABYAAABMAAAAAAAAAAAAAAAEAAAAAAAAAAEAAADn5uYKAAAAACgAAAAoAAAAZAAAAGQAAAAAAAAAzMzMAAAAAABQAAAAUAAAAGQAAABkAAAAAAAAABcAAAAUAAAAAAAAAAAAAAD/fwAA/38AAAAAAAAJAAAABAAAAAAAAAAeAAAAaAAAAAAAAAAAAAAAAAAAAAAAAAAAAAAAECcAABAnAAAAAAAAAAAAAAAAAAAAAAAAAAAAAAAAAAAAAAAAAAAAABQAAAAAAAAAwMD/AAAAAABkAAAAMgAAAAAAAABkAAAAAAAAAH9/fwAKAAAAIgAAABgAAAAAAAAAAAAAAAAAAAAAAAAAAAAAAAAAAAAkAAAAJAAAAAAAAAAHAAAAAAAAAAAAAAAAAAAAAAAAAAAAAAAAAAAAf39/ACUAAABYAAAAAAAAAAAAAAAAAAAAAAAAAAAAAAAAAAAAAAAAAAAAAAAAAAAAAAAAAAAAAAA/AAAAAAAAAKCGAQAAAAAAAAAAAAAAAAAMAAAAAQAAAAAAAAAAAAAAAAAAAB8AAABUAAAAW5vVBf///wEAAAAAAAAAAAAAAAAAAAAAAAAAAAAAAAAAAAAAAAAAAAAAAAJ/f38A5+bmA8zMzADAwP8Af39/AAAAAAAAAAAAAAAAAAAAAAAAAAAAIQAAABgAAAAUAAAAKAUAADsLAADYRQAAACYAABAAAAAmAAAACAAAAAAgAAAAAAAA"/>
+              </a:ext>
+            </a:extLst>
+          </p:cNvSpPr>
+          <p:nvPr>
+            <p:ph type="body" idx="1"/>
           </p:nvPr>
         </p:nvSpPr>
         <p:spPr/>
         <p:txBody>
-          <a:bodyPr/>
-          <a:lstStyle/>
-          <a:p>
-            <a:r>
-              <a:rPr lang="en-US" dirty="0" smtClean="0"/>
-              <a:t>Burn ‘flasher’ image onto SD card</a:t>
-            </a:r>
-          </a:p>
-          <a:p>
-            <a:pPr lvl="1"/>
-            <a:r>
-              <a:rPr lang="en-US" dirty="0" smtClean="0"/>
-              <a:t>Use </a:t>
-            </a:r>
-            <a:r>
-              <a:rPr lang="en-US" dirty="0" err="1" smtClean="0"/>
-              <a:t>EduMIP</a:t>
-            </a:r>
-            <a:r>
-              <a:rPr lang="en-US" dirty="0" smtClean="0"/>
-              <a:t> flasher image to get the ‘</a:t>
-            </a:r>
-            <a:r>
-              <a:rPr lang="en-US" dirty="0" err="1" smtClean="0"/>
-              <a:t>libcontrol</a:t>
-            </a:r>
-            <a:r>
-              <a:rPr lang="en-US" dirty="0" smtClean="0"/>
-              <a:t>’ installed correctly.</a:t>
-            </a:r>
-          </a:p>
-          <a:p>
-            <a:pPr lvl="2"/>
-            <a:r>
-              <a:rPr lang="en-US">
-                <a:hlinkClick r:id="rId2"/>
-              </a:rPr>
-              <a:t>https://</a:t>
-            </a:r>
-            <a:r>
-              <a:rPr lang="en-US" smtClean="0">
-                <a:hlinkClick r:id="rId2"/>
-              </a:rPr>
-              <a:t>www.renaissancerobotics.com/BeagleboneBlue.html</a:t>
-            </a:r>
-            <a:endParaRPr lang="en-US" smtClean="0"/>
-          </a:p>
-          <a:p>
-            <a:endParaRPr lang="en-US" dirty="0"/>
+          <a:bodyPr vert="horz" wrap="square" lIns="91440" tIns="45720" rIns="91440" bIns="45720" numCol="1" spcCol="215900" anchor="t">
+            <a:prstTxWarp prst="textNoShape">
+              <a:avLst/>
+            </a:prstTxWarp>
+          </a:bodyPr>
+          <a:lstStyle/>
+          <a:p>
+            <a:pPr>
+              <a:lnSpc>
+                <a:spcPct val="80000"/>
+              </a:lnSpc>
+              <a:defRPr lang="en-us"/>
+            </a:pPr>
+            <a:r>
+              <a:t>Acts as WiFi server as well as can connect to internet</a:t>
+            </a:r>
+          </a:p>
+          <a:p>
+            <a:pPr>
+              <a:lnSpc>
+                <a:spcPct val="80000"/>
+              </a:lnSpc>
+              <a:defRPr lang="en-us"/>
+            </a:pPr>
+            <a:r>
+              <a:t>Use connmanctl to setup WiFi, in console type these commands:</a:t>
+            </a:r>
+          </a:p>
+          <a:p>
+            <a:pPr lvl="1">
+              <a:lnSpc>
+                <a:spcPct val="80000"/>
+              </a:lnSpc>
+              <a:defRPr lang="en-us"/>
+            </a:pPr>
+            <a:r>
+              <a:t>enable wifi</a:t>
+            </a:r>
+          </a:p>
+          <a:p>
+            <a:pPr lvl="1">
+              <a:lnSpc>
+                <a:spcPct val="80000"/>
+              </a:lnSpc>
+              <a:defRPr lang="en-us"/>
+            </a:pPr>
+            <a:r>
+              <a:t>tether wifi disable</a:t>
+            </a:r>
+          </a:p>
+          <a:p>
+            <a:pPr lvl="1">
+              <a:lnSpc>
+                <a:spcPct val="80000"/>
+              </a:lnSpc>
+              <a:defRPr lang="en-us"/>
+            </a:pPr>
+            <a:r>
+              <a:t>agent on</a:t>
+            </a:r>
+          </a:p>
+          <a:p>
+            <a:pPr lvl="1">
+              <a:lnSpc>
+                <a:spcPct val="80000"/>
+              </a:lnSpc>
+              <a:defRPr lang="en-us"/>
+            </a:pPr>
+            <a:r>
+              <a:t>scan wifi   (*need to wait until these come back with response)</a:t>
+            </a:r>
+          </a:p>
+          <a:p>
+            <a:pPr lvl="1">
+              <a:lnSpc>
+                <a:spcPct val="80000"/>
+              </a:lnSpc>
+              <a:defRPr lang="en-us"/>
+            </a:pPr>
+            <a:r>
+              <a:t>services</a:t>
+            </a:r>
+          </a:p>
+          <a:p>
+            <a:pPr lvl="1">
+              <a:lnSpc>
+                <a:spcPct val="80000"/>
+              </a:lnSpc>
+              <a:defRPr lang="en-us"/>
+            </a:pPr>
+            <a:r>
+              <a:t>connect wifi_XXX</a:t>
+            </a:r>
+          </a:p>
+          <a:p>
+            <a:pPr lvl="1">
+              <a:lnSpc>
+                <a:spcPct val="80000"/>
+              </a:lnSpc>
+              <a:defRPr lang="en-us"/>
+            </a:pPr>
+            <a:r>
+              <a:t>exit</a:t>
+            </a:r>
+          </a:p>
+          <a:p>
+            <a:pPr lvl="1">
+              <a:lnSpc>
+                <a:spcPct val="80000"/>
+              </a:lnSpc>
+              <a:defRPr lang="en-us"/>
+            </a:pPr>
+            <a:r>
+              <a:t>*might take some seconds to actually connect. ping doesn’t work, so just try sudo apt update.</a:t>
+            </a:r>
+          </a:p>
+          <a:p>
+            <a:pPr lvl="1">
+              <a:lnSpc>
+                <a:spcPct val="80000"/>
+              </a:lnSpc>
+              <a:defRPr lang="en-us"/>
+            </a:pPr>
+          </a:p>
+          <a:p>
+            <a:pPr>
+              <a:lnSpc>
+                <a:spcPct val="80000"/>
+              </a:lnSpc>
+              <a:defRPr lang="en-us"/>
+            </a:pPr>
           </a:p>
         </p:txBody>
       </p:sp>
     </p:spTree>
-    <p:extLst>
-      <p:ext uri="{BB962C8B-B14F-4D97-AF65-F5344CB8AC3E}">
-        <p14:creationId xmlns:p14="http://schemas.microsoft.com/office/powerpoint/2010/main" val="2261323476"/>
-      </p:ext>
-    </p:extLst>
   </p:cSld>
   <p:clrMapOvr>
     <a:masterClrMapping/>
   </p:clrMapOvr>
+  <p:timing>
+    <p:tnLst>
+      <p:par>
+        <p:cTn id="1" dur="indefinite" restart="never" nodeType="tmRoot"/>
+      </p:par>
+    </p:tnLst>
+  </p:timing>
 </p:sld>
 </file>
 
 <file path=ppt/slides/slide9.xml><?xml version="1.0" encoding="utf-8"?>
-<p:sld xmlns:a="http://schemas.openxmlformats.org/drawingml/2006/main" xmlns:r="http://schemas.openxmlformats.org/officeDocument/2006/relationships" xmlns:p="http://schemas.openxmlformats.org/presentationml/2006/main">
+<p:sld xmlns:p="http://schemas.openxmlformats.org/presentationml/2006/main" xmlns:mc="http://schemas.openxmlformats.org/markup-compatibility/2006" xmlns:p14="http://schemas.microsoft.com/office/powerpoint/2010/main" xmlns:p15="http://schemas.microsoft.com/office/powerpoint/2012/main" xmlns:r="http://schemas.openxmlformats.org/officeDocument/2006/relationships" xmlns:a="http://schemas.openxmlformats.org/drawingml/2006/main" mc:Ignorable="p14">
   <p:cSld>
     <p:spTree>
       <p:nvGrpSpPr>
@@ -4362,7 +6031,12 @@
         <p:nvSpPr>
           <p:cNvPr id="2" name="Title 1"/>
           <p:cNvSpPr>
-            <a:spLocks noGrp="1"/>
+            <a:spLocks noGrp="1" noChangeArrowheads="1"/>
+            <a:extLst>
+              <a:ext uri="smNativeData">
+                <pr:smNativeData xmlns:pr="smNativeData" xmlns="smNativeData" val="SMDATA_15_FLquaRMAAAAlAAAAZAAAAA0AAAAAkAAAAEgAAACQAAAASAAAAAAAAAABAAAAAAAAAAEAAABQAAAAAAAAAAAA4D8AAAAAAADgPwAAAAAAAOA/AAAAAAAA4D8AAAAAAADgPwAAAAAAAOA/AAAAAAAA4D8AAAAAAADgPwAAAAAAAOA/AAAAAAAA4D8CAAAAjAAAAAAAAAAAAAAAW5vVDP///wgAAAAAAAAAAAAAAAAAAAAAAAAAAAAAAAAAAAAAZAAAAAEAAABAAAAAAAAAAAAAAAAAAAAAAAAAAAAAAAAAAAAAAAAAAAAAAAAAAAAAAAAAAAAAAAAAAAAAAAAAAAAAAAAAAAAAAAAAAAAAAAAAAAAAAAAAAAAAAAAAAAAAFAAAADwAAAAAAAAAAAAAAAAAAAkUAAAAAQAAABQAAAAUAAAAFAAAAAEAAAAAAAAAZAAAAGQAAAAAAAAAZAAAAGQAAAAVAAAAYAAAAAAAAAAAAAAADwAAACADAAAAAAAAAAAAAAEAAACgMgAAVgcAAKr4//8BAAAAf39/AAEAAABkAAAAAAAAABQAAABAHwAAAAAAACYAAAAAAAAAwOD//wAAAAAmAAAAZAAAABYAAABMAAAAAAAAAAAAAAAEAAAAAAAAAAEAAADn5uYKAAAAACgAAAAoAAAAZAAAAGQAAAAAAAAAzMzMAAAAAABQAAAAUAAAAGQAAABkAAAAAAAAABcAAAAUAAAAAAAAAAAAAAD/fwAA/38AAAAAAAAJAAAABAAAAF8AYAAeAAAAaAAAAAAAAAAAAAAAAAAAAAAAAAAAAAAAECcAABAnAAAAAAAAAAAAAAAAAAAAAAAAAAAAAAAAAAAAAAAAAAAAABQAAAAAAAAAwMD/AAAAAABkAAAAMgAAAAAAAABkAAAAAAAAAH9/fwAKAAAAIgAAABgAAAAAAAAAAAAAAAAAAAAAAAAAAAAAAAAAAAAkAAAAJAAAAAAAAAAHAAAAAAAAAAAAAAAAAAAAAAAAAAAAAAAAAAAAf39/ACUAAABYAAAAAAAAAAAAAAAAAAAAAAAAAAAAAAAAAAAAAAAAAAAAAAAAAAAAAAAAAAAAAAA/AAAAAAAAAKCGAQAAAAAAAAAAAAAAAAAMAAAAAQAAAAAAAAAAAAAAAAAAAB8AAABUAAAAW5vVBf///wEAAAAAAAAAAAAAAAAAAAAAAAAAAAAAAAAAAAAAAAAAAAAAAAJ/f38A5+bmA8zMzADAwP8Af39/AAAAAAAAAAAAAAAAAAAAAAAAAAAAIQAAABgAAAAUAAAAKAUAAD8CAADYRQAAZwoAABAAAAAmAAAACAAAAAAgAAAAAAAA"/>
+              </a:ext>
+            </a:extLst>
           </p:cNvSpPr>
           <p:nvPr>
             <p:ph type="title"/>
@@ -4370,15 +6044,24 @@
         </p:nvSpPr>
         <p:spPr/>
         <p:txBody>
-          <a:bodyPr/>
-          <a:lstStyle/>
-          <a:p>
-            <a:pPr algn="ctr"/>
-            <a:r>
-              <a:rPr lang="en-US" dirty="0" smtClean="0"/>
-              <a:t>USB Camera</a:t>
-            </a:r>
-            <a:endParaRPr lang="en-US" dirty="0"/>
+          <a:bodyPr vert="horz" wrap="square" lIns="91440" tIns="45720" rIns="91440" bIns="45720" numCol="1" spcCol="215900" anchor="ctr">
+            <a:prstTxWarp prst="textNoShape">
+              <a:avLst/>
+            </a:prstTxWarp>
+          </a:bodyPr>
+          <a:lstStyle/>
+          <a:p>
+            <a:pPr>
+              <a:defRPr lang="en-us"/>
+            </a:pPr>
+            <a:r>
+              <a:t>Testing motors and servos</a:t>
+            </a:r>
+            <a:br/>
+            <a:r>
+              <a:rPr lang="en-us" sz="3200" cap="none"/>
+              <a:t>https://old.beagleboard.org/static/librobotcontrol/</a:t>
+            </a:r>
           </a:p>
         </p:txBody>
       </p:sp>
@@ -4386,112 +6069,269 @@
         <p:nvSpPr>
           <p:cNvPr id="3" name="Content Placeholder 2"/>
           <p:cNvSpPr>
-            <a:spLocks noGrp="1"/>
-          </p:cNvSpPr>
-          <p:nvPr>
-            <p:ph idx="1"/>
+            <a:spLocks noGrp="1" noChangeArrowheads="1"/>
+            <a:extLst>
+              <a:ext uri="smNativeData">
+                <pr:smNativeData xmlns:pr="smNativeData" xmlns="smNativeData" val="SMDATA_15_FLquaRMAAAAlAAAAZAAAAA0AAAAAkAAAAEgAAACQAAAASAAAAAAAAAAAAAAAAAAAAAEAAABQAAAAAAAAAAAA4D8AAAAAAADgPwAAAAAAAOA/AAAAAAAA4D8AAAAAAADgPwAAAAAAAOA/AAAAAAAA4D8AAAAAAADgPwAAAAAAAOA/AAAAAAAA4D8CAAAAjAAAAAAAAAAAAAAAW5vVDP///wgAAAAAAAAAAAAAAAAAAAAAAAAAAAAAAAAAAAAAZAAAAAEAAABAAAAAAAAAAAAAAAAAAAAAAAAAAAAAAAAAAAAAAAAAAAAAAAAAAAAAAAAAAAAAAAAAAAAAAAAAAAAAAAAAAAAAAAAAAAAAAAAAAAAAAAAAAAAAAAAAAAAAFAAAADwAAAAAAAAAAAAAAAAAAAkUAAAAAQAAABQAAAAUAAAAFAAAAAEAAAAAAAAAZAAAAGQAAAAAAAAAZAAAAGQAAAAVAAAAYAAAAAAAAAAAAAAADwAAACADAAAAAAAAAAAAAAEAAACgMgAAVgcAAKr4//8BAAAAf39/AAEAAABkAAAAAAAAABQAAABAHwAAAAAAACYAAAAAAAAAwOD//wAAAAAmAAAAZAAAABYAAABMAAAAAAAAAAAAAAAEAAAAAAAAAAEAAADn5uYKAAAAACgAAAAoAAAAZAAAAGQAAAAAAAAAzMzMAAAAAABQAAAAUAAAAGQAAABkAAAAAAAAABcAAAAUAAAAAAAAAAAAAAD/fwAA/38AAAAAAAAJAAAABAAAAAAAAAAeAAAAaAAAAAAAAAAAAAAAAAAAAAAAAAAAAAAAECcAABAnAAAAAAAAAAAAAAAAAAAAAAAAAAAAAAAAAAAAAAAAAAAAABQAAAAAAAAAwMD/AAAAAABkAAAAMgAAAAAAAABkAAAAAAAAAH9/fwAKAAAAIgAAABgAAAAAAAAAAAAAAAAAAAAAAAAAAAAAAAAAAAAkAAAAJAAAAAAAAAAHAAAAAAAAAAAAAAAAAAAAAAAAAAAAAAAAAAAAf39/ACUAAABYAAAAAAAAAAAAAAAAAAAAAAAAAAAAAAAAAAAAAAAAAAAAAAAAAAAAAAAAAAAAAAA/AAAAAAAAAKCGAQAAAAAAAAAAAAAAAAAMAAAAAQAAAAAAAAAAAAAAAAAAAB8AAABUAAAAW5vVBf///wEAAAAAAAAAAAAAAAAAAAAAAAAAAAAAAAAAAAAAAAAAAAAAAAJ/f38A5+bmA8zMzADAwP8Af39/AAAAAAAAAAAAAAAAAAAAAAAAAAAAIQAAABgAAAAUAAAAKAUAADsLAADYRQAAACYAABAAAAAmAAAACAAAAAAgAAAAAAAA"/>
+              </a:ext>
+            </a:extLst>
+          </p:cNvSpPr>
+          <p:nvPr>
+            <p:ph type="body" idx="1"/>
           </p:nvPr>
         </p:nvSpPr>
         <p:spPr/>
         <p:txBody>
-          <a:bodyPr/>
-          <a:lstStyle/>
-          <a:p>
-            <a:r>
-              <a:rPr lang="en-US" dirty="0">
-                <a:hlinkClick r:id="rId2"/>
-              </a:rPr>
-              <a:t>https://</a:t>
-            </a:r>
-            <a:r>
-              <a:rPr lang="en-US" dirty="0" smtClean="0">
-                <a:hlinkClick r:id="rId2"/>
-              </a:rPr>
-              <a:t>subscription.packtpub.com/book/hardware-and-creative/9781788293136/5/05lvl1sec28/connecting-your-usb-camera-to-your-beaglebone-blue-and-viewing-the-images</a:t>
-            </a:r>
-            <a:endParaRPr lang="en-US" dirty="0" smtClean="0"/>
-          </a:p>
-          <a:p>
-            <a:r>
-              <a:rPr lang="en-US" dirty="0" smtClean="0"/>
-              <a:t>Check if camera is present:</a:t>
-            </a:r>
-          </a:p>
-          <a:p>
-            <a:pPr lvl="1"/>
-            <a:r>
-              <a:rPr lang="en-US" dirty="0" err="1" smtClean="0"/>
-              <a:t>lsusb</a:t>
-            </a:r>
-            <a:endParaRPr lang="en-US" dirty="0" smtClean="0"/>
-          </a:p>
-          <a:p>
-            <a:pPr lvl="1"/>
-            <a:r>
-              <a:rPr lang="en-US" dirty="0" smtClean="0"/>
-              <a:t>cd /dev; ls video*</a:t>
-            </a:r>
-          </a:p>
-          <a:p>
-            <a:pPr lvl="2"/>
-            <a:r>
-              <a:rPr lang="en-US" dirty="0" smtClean="0"/>
-              <a:t>It should show up as video0 or similar</a:t>
-            </a:r>
-          </a:p>
-          <a:p>
-            <a:r>
-              <a:rPr lang="en-US" dirty="0" smtClean="0"/>
-              <a:t>Compatible cameras:</a:t>
-            </a:r>
-          </a:p>
-          <a:p>
-            <a:pPr lvl="1"/>
-            <a:r>
-              <a:rPr lang="en-US" dirty="0"/>
-              <a:t>Logitech C270: </a:t>
-            </a:r>
-            <a:r>
-              <a:rPr lang="en-US" dirty="0" smtClean="0"/>
-              <a:t>720p</a:t>
-            </a:r>
-          </a:p>
-          <a:p>
-            <a:pPr lvl="1"/>
-            <a:r>
-              <a:rPr lang="en-US" dirty="0"/>
-              <a:t>Logitech C310: 720p</a:t>
-            </a:r>
-            <a:endParaRPr lang="en-US" dirty="0" smtClean="0"/>
-          </a:p>
-          <a:p>
-            <a:pPr lvl="1"/>
-            <a:endParaRPr lang="en-US" dirty="0"/>
+          <a:bodyPr vert="horz" wrap="square" lIns="91440" tIns="45720" rIns="91440" bIns="45720" numCol="1" spcCol="215900" anchor="t">
+            <a:prstTxWarp prst="textNoShape">
+              <a:avLst/>
+            </a:prstTxWarp>
+          </a:bodyPr>
+          <a:lstStyle/>
+          <a:p>
+            <a:pPr>
+              <a:lnSpc>
+                <a:spcPct val="70000"/>
+              </a:lnSpc>
+              <a:spcBef>
+                <a:spcPts val="850"/>
+              </a:spcBef>
+              <a:defRPr lang="en-us" sz="2380" cap="none"/>
+            </a:pPr>
+            <a:r>
+              <a:t>rc_test_motors</a:t>
+            </a:r>
+          </a:p>
+          <a:p>
+            <a:pPr lvl="1">
+              <a:lnSpc>
+                <a:spcPct val="70000"/>
+              </a:lnSpc>
+              <a:spcBef>
+                <a:spcPts val="425"/>
+              </a:spcBef>
+              <a:defRPr lang="en-us" sz="2040" cap="none"/>
+            </a:pPr>
+            <a:r>
+              <a:t>-d 0.0 to 1.0  duty cycle</a:t>
+            </a:r>
+          </a:p>
+          <a:p>
+            <a:pPr lvl="1">
+              <a:lnSpc>
+                <a:spcPct val="70000"/>
+              </a:lnSpc>
+              <a:spcBef>
+                <a:spcPts val="425"/>
+              </a:spcBef>
+              <a:defRPr lang="en-us" sz="2040" cap="none"/>
+            </a:pPr>
+            <a:r>
+              <a:t>-m 1 to 4 to specify motor (otherwise all 4 motors)</a:t>
+            </a:r>
+          </a:p>
+          <a:p>
+            <a:pPr lvl="1">
+              <a:lnSpc>
+                <a:spcPct val="70000"/>
+              </a:lnSpc>
+              <a:spcBef>
+                <a:spcPts val="425"/>
+              </a:spcBef>
+              <a:defRPr lang="en-us" sz="2040" cap="none"/>
+            </a:pPr>
+            <a:r>
+              <a:t>-s  sweep motors back and forth at duty cycle to better test them</a:t>
+            </a:r>
+          </a:p>
+          <a:p>
+            <a:pPr lvl="1">
+              <a:lnSpc>
+                <a:spcPct val="70000"/>
+              </a:lnSpc>
+              <a:spcBef>
+                <a:spcPts val="425"/>
+              </a:spcBef>
+              <a:defRPr lang="en-us" sz="2040" cap="none"/>
+            </a:pPr>
+            <a:r>
+              <a:t>-b  enable motor break</a:t>
+            </a:r>
+          </a:p>
+          <a:p>
+            <a:pPr lvl="1">
+              <a:lnSpc>
+                <a:spcPct val="70000"/>
+              </a:lnSpc>
+              <a:spcBef>
+                <a:spcPts val="425"/>
+              </a:spcBef>
+              <a:defRPr lang="en-us" sz="2040" cap="none"/>
+            </a:pPr>
+            <a:r>
+              <a:t>-F  custom frequency</a:t>
+            </a:r>
+          </a:p>
+          <a:p>
+            <a:pPr lvl="1">
+              <a:lnSpc>
+                <a:spcPct val="70000"/>
+              </a:lnSpc>
+              <a:spcBef>
+                <a:spcPts val="425"/>
+              </a:spcBef>
+              <a:defRPr lang="en-us" sz="2040" cap="none"/>
+            </a:pPr>
+            <a:r>
+              <a:t>-f  enable free spin function</a:t>
+            </a:r>
+          </a:p>
+          <a:p>
+            <a:pPr>
+              <a:lnSpc>
+                <a:spcPct val="70000"/>
+              </a:lnSpc>
+              <a:spcBef>
+                <a:spcPts val="850"/>
+              </a:spcBef>
+              <a:defRPr lang="en-us" sz="2380" cap="none"/>
+            </a:pPr>
+            <a:r>
+              <a:t>rc_test_servos</a:t>
+            </a:r>
+          </a:p>
+          <a:p>
+            <a:pPr lvl="1">
+              <a:lnSpc>
+                <a:spcPct val="70000"/>
+              </a:lnSpc>
+              <a:spcBef>
+                <a:spcPts val="425"/>
+              </a:spcBef>
+              <a:defRPr lang="en-us" sz="2040" cap="none"/>
+            </a:pPr>
+            <a:r>
+              <a:t>-c 1 to 8 to specify which servo</a:t>
+            </a:r>
+          </a:p>
+          <a:p>
+            <a:pPr lvl="1">
+              <a:lnSpc>
+                <a:spcPct val="70000"/>
+              </a:lnSpc>
+              <a:spcBef>
+                <a:spcPts val="425"/>
+              </a:spcBef>
+              <a:defRPr lang="en-us" sz="2040" cap="none"/>
+            </a:pPr>
+            <a:r>
+              <a:t>-p -1.5 to 1.5  specify position</a:t>
+            </a:r>
+          </a:p>
+          <a:p>
+            <a:pPr lvl="1">
+              <a:lnSpc>
+                <a:spcPct val="70000"/>
+              </a:lnSpc>
+              <a:spcBef>
+                <a:spcPts val="425"/>
+              </a:spcBef>
+              <a:defRPr lang="en-us" sz="2040" cap="none"/>
+            </a:pPr>
+            <a:r>
+              <a:t>-s 0.0 to 1.5  sweep servo back and forth to test</a:t>
+            </a:r>
+          </a:p>
+          <a:p>
+            <a:pPr lvl="1">
+              <a:lnSpc>
+                <a:spcPct val="70000"/>
+              </a:lnSpc>
+              <a:spcBef>
+                <a:spcPts val="425"/>
+              </a:spcBef>
+              <a:defRPr lang="en-us" sz="2040" cap="none"/>
+            </a:pPr>
+            <a:r>
+              <a:t>-r  use DSM radio channel to control servo  *How to hookup DSM radio??</a:t>
+            </a:r>
+          </a:p>
+          <a:p>
+            <a:pPr lvl="1">
+              <a:lnSpc>
+                <a:spcPct val="70000"/>
+              </a:lnSpc>
+              <a:spcBef>
+                <a:spcPts val="425"/>
+              </a:spcBef>
+              <a:defRPr lang="en-us" sz="2040" cap="none"/>
+            </a:pPr>
+            <a:r>
+              <a:t>-f  specify pulse frequency</a:t>
+            </a:r>
+          </a:p>
+          <a:p>
+            <a:pPr lvl="1">
+              <a:lnSpc>
+                <a:spcPct val="70000"/>
+              </a:lnSpc>
+              <a:spcBef>
+                <a:spcPts val="425"/>
+              </a:spcBef>
+              <a:defRPr lang="en-us" sz="2040" cap="none"/>
+            </a:pPr>
+            <a:r>
+              <a:t>-s  send pulse width in microseconds</a:t>
+            </a:r>
+          </a:p>
+          <a:p>
+            <a:pPr lvl="1">
+              <a:lnSpc>
+                <a:spcPct val="70000"/>
+              </a:lnSpc>
+              <a:spcBef>
+                <a:spcPts val="425"/>
+              </a:spcBef>
+              <a:defRPr lang="en-us" sz="2040" cap="none"/>
+            </a:pPr>
+          </a:p>
+          <a:p>
+            <a:pPr lvl="1">
+              <a:lnSpc>
+                <a:spcPct val="70000"/>
+              </a:lnSpc>
+              <a:spcBef>
+                <a:spcPts val="425"/>
+              </a:spcBef>
+              <a:defRPr lang="en-us" sz="2040" cap="none"/>
+            </a:pPr>
           </a:p>
         </p:txBody>
       </p:sp>
     </p:spTree>
-    <p:extLst>
-      <p:ext uri="{BB962C8B-B14F-4D97-AF65-F5344CB8AC3E}">
-        <p14:creationId xmlns:p14="http://schemas.microsoft.com/office/powerpoint/2010/main" val="1878681324"/>
-      </p:ext>
-    </p:extLst>
   </p:cSld>
   <p:clrMapOvr>
     <a:masterClrMapping/>
   </p:clrMapOvr>
+  <p:timing>
+    <p:tnLst>
+      <p:par>
+        <p:cTn id="1" dur="indefinite" restart="never" nodeType="tmRoot"/>
+      </p:par>
+    </p:tnLst>
+  </p:timing>
 </p:sld>
 </file>
 
 <file path=ppt/theme/theme1.xml><?xml version="1.0" encoding="utf-8"?>
-<a:theme xmlns:a="http://schemas.openxmlformats.org/drawingml/2006/main" name="Office Theme">
+<a:theme xmlns:a="http://schemas.openxmlformats.org/drawingml/2006/main" name="Presentation">
   <a:themeElements>
-    <a:clrScheme name="Office">
+    <a:clrScheme name="Presentation 1">
       <a:dk1>
-        <a:sysClr val="windowText" lastClr="000000"/>
+        <a:srgbClr val="000000"/>
       </a:dk1>
       <a:lt1>
-        <a:sysClr val="window" lastClr="FFFFFF"/>
+        <a:srgbClr val="FFFFFF"/>
       </a:lt1>
       <a:dk2>
         <a:srgbClr val="44546A"/>
@@ -4524,76 +6364,16 @@
         <a:srgbClr val="954F72"/>
       </a:folHlink>
     </a:clrScheme>
-    <a:fontScheme name="Office">
+    <a:fontScheme name="Presentation">
       <a:majorFont>
-        <a:latin typeface="Calibri Light" panose="020F0302020204030204"/>
-        <a:ea typeface=""/>
-        <a:cs typeface=""/>
-        <a:font script="Jpan" typeface="ＭＳ Ｐゴシック"/>
-        <a:font script="Hang" typeface="맑은 고딕"/>
-        <a:font script="Hans" typeface="宋体"/>
-        <a:font script="Hant" typeface="新細明體"/>
-        <a:font script="Arab" typeface="Times New Roman"/>
-        <a:font script="Hebr" typeface="Times New Roman"/>
-        <a:font script="Thai" typeface="Angsana New"/>
-        <a:font script="Ethi" typeface="Nyala"/>
-        <a:font script="Beng" typeface="Vrinda"/>
-        <a:font script="Gujr" typeface="Shruti"/>
-        <a:font script="Khmr" typeface="MoolBoran"/>
-        <a:font script="Knda" typeface="Tunga"/>
-        <a:font script="Guru" typeface="Raavi"/>
-        <a:font script="Cans" typeface="Euphemia"/>
-        <a:font script="Cher" typeface="Plantagenet Cherokee"/>
-        <a:font script="Yiii" typeface="Microsoft Yi Baiti"/>
-        <a:font script="Tibt" typeface="Microsoft Himalaya"/>
-        <a:font script="Thaa" typeface="MV Boli"/>
-        <a:font script="Deva" typeface="Mangal"/>
-        <a:font script="Telu" typeface="Gautami"/>
-        <a:font script="Taml" typeface="Latha"/>
-        <a:font script="Syrc" typeface="Estrangelo Edessa"/>
-        <a:font script="Orya" typeface="Kalinga"/>
-        <a:font script="Mlym" typeface="Kartika"/>
-        <a:font script="Laoo" typeface="DokChampa"/>
-        <a:font script="Sinh" typeface="Iskoola Pota"/>
-        <a:font script="Mong" typeface="Mongolian Baiti"/>
-        <a:font script="Viet" typeface="Times New Roman"/>
-        <a:font script="Uigh" typeface="Microsoft Uighur"/>
-        <a:font script="Geor" typeface="Sylfaen"/>
+        <a:latin typeface="Calibri Light"/>
+        <a:ea typeface="Calibri Light"/>
+        <a:cs typeface="Calibri Light"/>
       </a:majorFont>
       <a:minorFont>
-        <a:latin typeface="Calibri" panose="020F0502020204030204"/>
-        <a:ea typeface=""/>
-        <a:cs typeface=""/>
-        <a:font script="Jpan" typeface="ＭＳ Ｐゴシック"/>
-        <a:font script="Hang" typeface="맑은 고딕"/>
-        <a:font script="Hans" typeface="宋体"/>
-        <a:font script="Hant" typeface="新細明體"/>
-        <a:font script="Arab" typeface="Arial"/>
-        <a:font script="Hebr" typeface="Arial"/>
-        <a:font script="Thai" typeface="Cordia New"/>
-        <a:font script="Ethi" typeface="Nyala"/>
-        <a:font script="Beng" typeface="Vrinda"/>
-        <a:font script="Gujr" typeface="Shruti"/>
-        <a:font script="Khmr" typeface="DaunPenh"/>
-        <a:font script="Knda" typeface="Tunga"/>
-        <a:font script="Guru" typeface="Raavi"/>
-        <a:font script="Cans" typeface="Euphemia"/>
-        <a:font script="Cher" typeface="Plantagenet Cherokee"/>
-        <a:font script="Yiii" typeface="Microsoft Yi Baiti"/>
-        <a:font script="Tibt" typeface="Microsoft Himalaya"/>
-        <a:font script="Thaa" typeface="MV Boli"/>
-        <a:font script="Deva" typeface="Mangal"/>
-        <a:font script="Telu" typeface="Gautami"/>
-        <a:font script="Taml" typeface="Latha"/>
-        <a:font script="Syrc" typeface="Estrangelo Edessa"/>
-        <a:font script="Orya" typeface="Kalinga"/>
-        <a:font script="Mlym" typeface="Kartika"/>
-        <a:font script="Laoo" typeface="DokChampa"/>
-        <a:font script="Sinh" typeface="Iskoola Pota"/>
-        <a:font script="Mong" typeface="Mongolian Baiti"/>
-        <a:font script="Viet" typeface="Arial"/>
-        <a:font script="Uigh" typeface="Microsoft Uighur"/>
-        <a:font script="Geor" typeface="Sylfaen"/>
+        <a:latin typeface="Calibri"/>
+        <a:ea typeface="Calibri"/>
+        <a:cs typeface="Calibri"/>
       </a:minorFont>
     </a:fontScheme>
     <a:fmtScheme name="Office">
@@ -4605,141 +6385,236 @@
           <a:gsLst>
             <a:gs pos="0">
               <a:schemeClr val="phClr">
-                <a:lumMod val="110000"/>
-                <a:satMod val="105000"/>
-                <a:tint val="67000"/>
+                <a:tint val="50000"/>
+                <a:satMod val="300000"/>
               </a:schemeClr>
             </a:gs>
-            <a:gs pos="50000">
+            <a:gs pos="35000">
               <a:schemeClr val="phClr">
-                <a:lumMod val="105000"/>
-                <a:satMod val="103000"/>
-                <a:tint val="73000"/>
+                <a:tint val="37000"/>
+                <a:satMod val="300000"/>
               </a:schemeClr>
             </a:gs>
             <a:gs pos="100000">
               <a:schemeClr val="phClr">
-                <a:lumMod val="105000"/>
-                <a:satMod val="109000"/>
-                <a:tint val="81000"/>
+                <a:tint val="15000"/>
+                <a:satMod val="350000"/>
               </a:schemeClr>
             </a:gs>
           </a:gsLst>
-          <a:lin ang="5400000" scaled="0"/>
+          <a:lin ang="16200000" scaled="1"/>
         </a:gradFill>
         <a:gradFill rotWithShape="1">
           <a:gsLst>
             <a:gs pos="0">
               <a:schemeClr val="phClr">
-                <a:satMod val="103000"/>
-                <a:lumMod val="102000"/>
-                <a:tint val="94000"/>
+                <a:shade val="51000"/>
+                <a:satMod val="130000"/>
               </a:schemeClr>
             </a:gs>
-            <a:gs pos="50000">
+            <a:gs pos="80000">
               <a:schemeClr val="phClr">
-                <a:satMod val="110000"/>
-                <a:lumMod val="100000"/>
-                <a:shade val="100000"/>
+                <a:shade val="93000"/>
+                <a:satMod val="130000"/>
               </a:schemeClr>
             </a:gs>
             <a:gs pos="100000">
               <a:schemeClr val="phClr">
-                <a:lumMod val="99000"/>
-                <a:satMod val="120000"/>
-                <a:shade val="78000"/>
+                <a:shade val="94000"/>
+                <a:satMod val="135000"/>
               </a:schemeClr>
             </a:gs>
           </a:gsLst>
-          <a:lin ang="5400000" scaled="0"/>
+          <a:lin ang="16200000" scaled="0"/>
         </a:gradFill>
       </a:fillStyleLst>
       <a:lnStyleLst>
-        <a:ln w="6350" cap="flat" cmpd="sng" algn="ctr">
+        <a:ln w="9525" cap="flat" cmpd="sng" algn="ctr">
+          <a:solidFill>
+            <a:schemeClr val="phClr">
+              <a:shade val="95000"/>
+              <a:satMod val="105000"/>
+            </a:schemeClr>
+          </a:solidFill>
+          <a:prstDash val="solid"/>
+        </a:ln>
+        <a:ln w="25400" cap="flat" cmpd="sng" algn="ctr">
           <a:solidFill>
             <a:schemeClr val="phClr"/>
           </a:solidFill>
           <a:prstDash val="solid"/>
-          <a:miter lim="800000"/>
         </a:ln>
-        <a:ln w="12700" cap="flat" cmpd="sng" algn="ctr">
+        <a:ln w="38100" cap="flat" cmpd="sng" algn="ctr">
           <a:solidFill>
             <a:schemeClr val="phClr"/>
           </a:solidFill>
           <a:prstDash val="solid"/>
-          <a:miter lim="800000"/>
-        </a:ln>
-        <a:ln w="19050" cap="flat" cmpd="sng" algn="ctr">
-          <a:solidFill>
-            <a:schemeClr val="phClr"/>
-          </a:solidFill>
-          <a:prstDash val="solid"/>
-          <a:miter lim="800000"/>
         </a:ln>
       </a:lnStyleLst>
       <a:effectStyleLst>
         <a:effectStyle>
-          <a:effectLst/>
-        </a:effectStyle>
-        <a:effectStyle>
-          <a:effectLst/>
+          <a:effectLst>
+            <a:outerShdw blurRad="40000" dist="20000" dir="5400000" rotWithShape="0">
+              <a:srgbClr val="000000">
+                <a:alpha val="38000"/>
+              </a:srgbClr>
+            </a:outerShdw>
+          </a:effectLst>
         </a:effectStyle>
         <a:effectStyle>
           <a:effectLst>
-            <a:outerShdw blurRad="57150" dist="19050" dir="5400000" algn="ctr" rotWithShape="0">
+            <a:outerShdw blurRad="40000" dist="23000" dir="5400000" rotWithShape="0">
               <a:srgbClr val="000000">
-                <a:alpha val="63000"/>
+                <a:alpha val="35000"/>
               </a:srgbClr>
             </a:outerShdw>
           </a:effectLst>
+        </a:effectStyle>
+        <a:effectStyle>
+          <a:effectLst>
+            <a:outerShdw blurRad="40000" dist="23000" dir="5400000" rotWithShape="0">
+              <a:srgbClr val="000000">
+                <a:alpha val="35000"/>
+              </a:srgbClr>
+            </a:outerShdw>
+          </a:effectLst>
+          <a:scene3d>
+            <a:camera prst="orthographicFront">
+              <a:rot lat="0" lon="0" rev="0"/>
+            </a:camera>
+            <a:lightRig rig="threePt" dir="t">
+              <a:rot lat="0" lon="0" rev="1200000"/>
+            </a:lightRig>
+          </a:scene3d>
+          <a:sp3d>
+            <a:bevelT w="63500" h="25400"/>
+          </a:sp3d>
         </a:effectStyle>
       </a:effectStyleLst>
       <a:bgFillStyleLst>
         <a:solidFill>
           <a:schemeClr val="phClr"/>
         </a:solidFill>
-        <a:solidFill>
-          <a:schemeClr val="phClr">
-            <a:tint val="95000"/>
-            <a:satMod val="170000"/>
-          </a:schemeClr>
-        </a:solidFill>
         <a:gradFill rotWithShape="1">
           <a:gsLst>
             <a:gs pos="0">
               <a:schemeClr val="phClr">
-                <a:tint val="93000"/>
-                <a:satMod val="150000"/>
-                <a:shade val="98000"/>
-                <a:lumMod val="102000"/>
+                <a:tint val="40000"/>
+                <a:satMod val="350000"/>
               </a:schemeClr>
             </a:gs>
-            <a:gs pos="50000">
+            <a:gs pos="40000">
               <a:schemeClr val="phClr">
-                <a:tint val="98000"/>
-                <a:satMod val="130000"/>
-                <a:shade val="90000"/>
-                <a:lumMod val="103000"/>
+                <a:tint val="45000"/>
+                <a:shade val="99000"/>
+                <a:satMod val="350000"/>
               </a:schemeClr>
             </a:gs>
             <a:gs pos="100000">
               <a:schemeClr val="phClr">
-                <a:shade val="63000"/>
-                <a:satMod val="120000"/>
+                <a:shade val="20000"/>
+                <a:satMod val="255000"/>
               </a:schemeClr>
             </a:gs>
           </a:gsLst>
-          <a:lin ang="5400000" scaled="0"/>
+          <a:path path="circle">
+            <a:fillToRect l="50000" t="-80000" r="50000" b="180000"/>
+          </a:path>
+        </a:gradFill>
+        <a:gradFill rotWithShape="1">
+          <a:gsLst>
+            <a:gs pos="0">
+              <a:schemeClr val="phClr">
+                <a:tint val="80000"/>
+                <a:satMod val="300000"/>
+              </a:schemeClr>
+            </a:gs>
+            <a:gs pos="100000">
+              <a:schemeClr val="phClr">
+                <a:shade val="30000"/>
+                <a:satMod val="200000"/>
+              </a:schemeClr>
+            </a:gs>
+          </a:gsLst>
+          <a:path path="circle">
+            <a:fillToRect l="50000" t="50000" r="50000" b="50000"/>
+          </a:path>
         </a:gradFill>
       </a:bgFillStyleLst>
     </a:fmtScheme>
   </a:themeElements>
-  <a:objectDefaults/>
-  <a:extraClrSchemeLst/>
-  <a:extLst>
-    <a:ext uri="{05A4C25C-085E-4340-85A3-A5531E510DB2}">
-      <thm15:themeFamily xmlns:thm15="http://schemas.microsoft.com/office/thememl/2012/main" name="Office Theme" id="{62F939B6-93AF-4DB8-9C6B-D6C7DFDC589F}" vid="{4A3C46E8-61CC-4603-A589-7422A47A8E4A}"/>
-    </a:ext>
-  </a:extLst>
+  <a:objectDefaults>
+    <a:spDef>
+      <a:spPr/>
+      <a:bodyPr>
+        <a:prstTxWarp prst="textNoShape">
+          <a:avLst/>
+        </a:prstTxWarp>
+        <a:noAutofit/>
+      </a:bodyPr>
+      <a:lstStyle>
+        <a:defPPr>
+          <a:defRPr/>
+        </a:defPPr>
+      </a:lstStyle>
+      <a:style>
+        <a:lnRef idx="0">
+          <a:schemeClr val="accent1"/>
+        </a:lnRef>
+        <a:fillRef idx="0">
+          <a:schemeClr val="accent1"/>
+        </a:fillRef>
+        <a:effectRef idx="0">
+          <a:schemeClr val="accent1"/>
+        </a:effectRef>
+        <a:fontRef idx="minor">
+          <a:schemeClr val="lt1"/>
+        </a:fontRef>
+      </a:style>
+    </a:spDef>
+  </a:objectDefaults>
+  <a:extraClrSchemeLst>
+    <a:extraClrScheme>
+      <a:clrScheme name="Presentation 1">
+        <a:dk1>
+          <a:srgbClr val="000000"/>
+        </a:dk1>
+        <a:lt1>
+          <a:srgbClr val="FFFFFF"/>
+        </a:lt1>
+        <a:dk2>
+          <a:srgbClr val="44546A"/>
+        </a:dk2>
+        <a:lt2>
+          <a:srgbClr val="E7E6E6"/>
+        </a:lt2>
+        <a:accent1>
+          <a:srgbClr val="5B9BD5"/>
+        </a:accent1>
+        <a:accent2>
+          <a:srgbClr val="ED7D31"/>
+        </a:accent2>
+        <a:accent3>
+          <a:srgbClr val="A5A5A5"/>
+        </a:accent3>
+        <a:accent4>
+          <a:srgbClr val="FFC000"/>
+        </a:accent4>
+        <a:accent5>
+          <a:srgbClr val="4472C4"/>
+        </a:accent5>
+        <a:accent6>
+          <a:srgbClr val="70AD47"/>
+        </a:accent6>
+        <a:hlink>
+          <a:srgbClr val="0563C1"/>
+        </a:hlink>
+        <a:folHlink>
+          <a:srgbClr val="954F72"/>
+        </a:folHlink>
+      </a:clrScheme>
+      <a:clrMap bg1="lt1" tx1="dk1" bg2="lt2" tx2="dk2" accent1="accent1" accent2="accent2" accent3="accent3" accent4="accent4" accent5="accent5" accent6="accent6" hlink="hlink" folHlink="folHlink"/>
+    </a:extraClrScheme>
+  </a:extraClrSchemeLst>
 </a:theme>
 </file>
--- a/embedded/BeagleBone/BeagleBoneBlue.pptx
+++ b/embedded/BeagleBone/BeagleBoneBlue.pptx
@@ -1,25 +1,26 @@
 
 <file path=ppt/presentation.xml><?xml version="1.0" encoding="utf-8"?>
-<p:presentation xmlns:p="http://schemas.openxmlformats.org/presentationml/2006/main" xmlns:mc="http://schemas.openxmlformats.org/markup-compatibility/2006" xmlns:p14="http://schemas.microsoft.com/office/powerpoint/2010/main" xmlns:p15="http://schemas.microsoft.com/office/powerpoint/2012/main" xmlns:r="http://schemas.openxmlformats.org/officeDocument/2006/relationships" xmlns:a="http://schemas.openxmlformats.org/drawingml/2006/main">
+<p:presentation xmlns:a="http://schemas.openxmlformats.org/drawingml/2006/main" xmlns:r="http://schemas.openxmlformats.org/officeDocument/2006/relationships" xmlns:p="http://schemas.openxmlformats.org/presentationml/2006/main">
   <p:sldMasterIdLst>
-    <p:sldMasterId id="2147483648" r:id="rId5"/>
+    <p:sldMasterId id="2147483648" r:id="rId1"/>
   </p:sldMasterIdLst>
   <p:sldIdLst>
-    <p:sldId id="256" r:id="rId6"/>
-    <p:sldId id="263" r:id="rId7"/>
-    <p:sldId id="258" r:id="rId8"/>
-    <p:sldId id="266" r:id="rId9"/>
-    <p:sldId id="267" r:id="rId10"/>
-    <p:sldId id="264" r:id="rId11"/>
-    <p:sldId id="257" r:id="rId12"/>
-    <p:sldId id="259" r:id="rId13"/>
-    <p:sldId id="268" r:id="rId14"/>
-    <p:sldId id="261" r:id="rId15"/>
-    <p:sldId id="265" r:id="rId16"/>
-    <p:sldId id="262" r:id="rId17"/>
-    <p:sldId id="260" r:id="rId18"/>
-    <p:sldId id="269" r:id="rId19"/>
-    <p:sldId id="270" r:id="rId20"/>
+    <p:sldId id="256" r:id="rId2"/>
+    <p:sldId id="263" r:id="rId3"/>
+    <p:sldId id="258" r:id="rId4"/>
+    <p:sldId id="266" r:id="rId5"/>
+    <p:sldId id="267" r:id="rId6"/>
+    <p:sldId id="264" r:id="rId7"/>
+    <p:sldId id="257" r:id="rId8"/>
+    <p:sldId id="259" r:id="rId9"/>
+    <p:sldId id="268" r:id="rId10"/>
+    <p:sldId id="271" r:id="rId11"/>
+    <p:sldId id="261" r:id="rId12"/>
+    <p:sldId id="265" r:id="rId13"/>
+    <p:sldId id="262" r:id="rId14"/>
+    <p:sldId id="260" r:id="rId15"/>
+    <p:sldId id="269" r:id="rId16"/>
+    <p:sldId id="270" r:id="rId17"/>
   </p:sldIdLst>
   <p:sldSz cx="12192000" cy="6858000"/>
   <p:notesSz cx="6858000" cy="9144000"/>
@@ -36,7 +37,7 @@
       </a:spcAft>
       <a:buNone/>
       <a:tabLst/>
-      <a:defRPr lang="en-us" sz="1800" b="0" i="0" u="none" strike="noStrike" kern="1" cap="none" spc="0" baseline="0">
+      <a:defRPr lang="en-US" sz="1800" b="0" i="0" u="none" strike="noStrike" kern="1" cap="none" spc="0" baseline="0">
         <a:solidFill>
           <a:schemeClr val="tx1"/>
         </a:solidFill>
@@ -58,7 +59,7 @@
       </a:spcAft>
       <a:buNone/>
       <a:tabLst/>
-      <a:defRPr lang="en-us" sz="1800" b="0" i="0" u="none" strike="noStrike" kern="1" cap="none" spc="0" baseline="0">
+      <a:defRPr lang="en-US" sz="1800" b="0" i="0" u="none" strike="noStrike" kern="1" cap="none" spc="0" baseline="0">
         <a:solidFill>
           <a:schemeClr val="tx1"/>
         </a:solidFill>
@@ -80,7 +81,7 @@
       </a:spcAft>
       <a:buNone/>
       <a:tabLst/>
-      <a:defRPr lang="en-us" sz="1800" b="0" i="0" u="none" strike="noStrike" kern="1" cap="none" spc="0" baseline="0">
+      <a:defRPr lang="en-US" sz="1800" b="0" i="0" u="none" strike="noStrike" kern="1" cap="none" spc="0" baseline="0">
         <a:solidFill>
           <a:schemeClr val="tx1"/>
         </a:solidFill>
@@ -102,7 +103,7 @@
       </a:spcAft>
       <a:buNone/>
       <a:tabLst/>
-      <a:defRPr lang="en-us" sz="1800" b="0" i="0" u="none" strike="noStrike" kern="1" cap="none" spc="0" baseline="0">
+      <a:defRPr lang="en-US" sz="1800" b="0" i="0" u="none" strike="noStrike" kern="1" cap="none" spc="0" baseline="0">
         <a:solidFill>
           <a:schemeClr val="tx1"/>
         </a:solidFill>
@@ -124,7 +125,7 @@
       </a:spcAft>
       <a:buNone/>
       <a:tabLst/>
-      <a:defRPr lang="en-us" sz="1800" b="0" i="0" u="none" strike="noStrike" kern="1" cap="none" spc="0" baseline="0">
+      <a:defRPr lang="en-US" sz="1800" b="0" i="0" u="none" strike="noStrike" kern="1" cap="none" spc="0" baseline="0">
         <a:solidFill>
           <a:schemeClr val="tx1"/>
         </a:solidFill>
@@ -146,7 +147,7 @@
       </a:spcAft>
       <a:buNone/>
       <a:tabLst/>
-      <a:defRPr lang="en-us" sz="1800" b="0" i="0" u="none" strike="noStrike" kern="1" cap="none" spc="0" baseline="0">
+      <a:defRPr lang="en-US" sz="1800" b="0" i="0" u="none" strike="noStrike" kern="1" cap="none" spc="0" baseline="0">
         <a:solidFill>
           <a:schemeClr val="tx1"/>
         </a:solidFill>
@@ -168,7 +169,7 @@
       </a:spcAft>
       <a:buNone/>
       <a:tabLst/>
-      <a:defRPr lang="en-us" sz="1800" b="0" i="0" u="none" strike="noStrike" kern="1" cap="none" spc="0" baseline="0">
+      <a:defRPr lang="en-US" sz="1800" b="0" i="0" u="none" strike="noStrike" kern="1" cap="none" spc="0" baseline="0">
         <a:solidFill>
           <a:schemeClr val="tx1"/>
         </a:solidFill>
@@ -190,7 +191,7 @@
       </a:spcAft>
       <a:buNone/>
       <a:tabLst/>
-      <a:defRPr lang="en-us" sz="1800" b="0" i="0" u="none" strike="noStrike" kern="1" cap="none" spc="0" baseline="0">
+      <a:defRPr lang="en-US" sz="1800" b="0" i="0" u="none" strike="noStrike" kern="1" cap="none" spc="0" baseline="0">
         <a:solidFill>
           <a:schemeClr val="tx1"/>
         </a:solidFill>
@@ -212,7 +213,7 @@
       </a:spcAft>
       <a:buNone/>
       <a:tabLst/>
-      <a:defRPr lang="en-us" sz="1800" b="0" i="0" u="none" strike="noStrike" kern="1" cap="none" spc="0" baseline="0">
+      <a:defRPr lang="en-US" sz="1800" b="0" i="0" u="none" strike="noStrike" kern="1" cap="none" spc="0" baseline="0">
         <a:solidFill>
           <a:schemeClr val="tx1"/>
         </a:solidFill>
@@ -223,11 +224,19 @@
       </a:defRPr>
     </a:lvl9pPr>
   </p:defaultTextStyle>
+  <p:extLst>
+    <p:ext uri="{EFAFB233-063F-42B5-8137-9DF3F51BA10A}">
+      <p15:sldGuideLst xmlns:p15="http://schemas.microsoft.com/office/powerpoint/2012/main"/>
+    </p:ext>
+    <p:ext uri="{2D200454-40CA-4A62-9FC3-DE9A4176ACB9}">
+      <p15:notesGuideLst xmlns:p15="http://schemas.microsoft.com/office/powerpoint/2012/main"/>
+    </p:ext>
+  </p:extLst>
 </p:presentation>
 </file>
 
 <file path=ppt/slideLayouts/slideLayout1.xml><?xml version="1.0" encoding="utf-8"?>
-<p:sldLayout xmlns:p="http://schemas.openxmlformats.org/presentationml/2006/main" xmlns:mc="http://schemas.openxmlformats.org/markup-compatibility/2006" xmlns:p14="http://schemas.microsoft.com/office/powerpoint/2010/main" xmlns:p15="http://schemas.microsoft.com/office/powerpoint/2012/main" xmlns:r="http://schemas.openxmlformats.org/officeDocument/2006/relationships" xmlns:a="http://schemas.openxmlformats.org/drawingml/2006/main" type="title" preserve="1">
+<p:sldLayout xmlns:a="http://schemas.openxmlformats.org/drawingml/2006/main" xmlns:r="http://schemas.openxmlformats.org/officeDocument/2006/relationships" xmlns:p="http://schemas.openxmlformats.org/presentationml/2006/main" type="title" preserve="1">
   <p:cSld name="Title Slide">
     <p:spTree>
       <p:nvGrpSpPr>
@@ -250,7 +259,7 @@
             <a:spLocks noGrp="1" noChangeArrowheads="1"/>
             <a:extLst>
               <a:ext uri="smNativeData">
-                <pr:smNativeData xmlns:pr="smNativeData" xmlns="smNativeData" val="SMDATA_15_FLquaRMAAAAlAAAAZAAAAA0AAAAAkAAAAEgAAACQAAAASAAAAAAAAAACAAAAAAAAAAEAAABQAAAAAAAAAAAA4D8AAAAAAADgPwAAAAAAAOA/AAAAAAAA4D8AAAAAAADgPwAAAAAAAOA/AAAAAAAA4D8AAAAAAADgPwAAAAAAAOA/AAAAAAAA4D8CAAAAjAAAAAAAAAAAAAAAW5vVDP///wgAAAAAAAAAAAAAAAAAAAAAAAAAAAAAAAAAAAAAZAAAAAEAAABAAAAAAAAAAAAAAAAAAAAAAAAAAAAAAAAAAAAAAAAAAAAAAAAAAAAAAAAAAAAAAAAAAAAAAAAAAAAAAAAAAAAAAAAAAAAAAAAAAAAAAAAAAAAAAAAAAAAAFAAAADwAAAAAAAAAAAAAAAAAAAkUAAAAAQAAABQAAAAUAAAAFAAAAAEAAAAAAAAAZAAAAGQAAAAAAAAAZAAAAGQAAAAVAAAAYAAAAAAAAAAAAAAADwAAACADAAAAAAAAAAAAAAEAAACgMgAAVgcAAKr4//8BAAAAf39/AAEAAABkAAAAAAAAABQAAABAHwAAAAAAACYAAAAAAAAAwOD//wAAAAAmAAAAZAAAABYAAABMAAAAAAAAAAAAAAAEAAAAAAAAAAEAAADn5uYKAAAAACgAAAAoAAAAZAAAAGQAAAAAAAAAzMzMAAAAAABQAAAAUAAAAGQAAABkAAAAAAAAABcAAAAUAAAAAAAAAAAAAAD/fwAA/38AAAAAAAAJAAAABAAAAF8AYAAeAAAAaAAAAAAAAAAAAAAAAAAAAAAAAAAAAAAAECcAABAnAAAAAAAAAAAAAAAAAAAAAAAAAAAAAAAAAAAAAAAAAAAAABQAAAAAAAAAwMD/AAAAAABkAAAAMgAAAAAAAABkAAAAAAAAAH9/fwAKAAAAIgAAABgAAAAAAAAAAAAAAAAAAAAAAAAAAAAAAAAAAAAkAAAAJAAAAAAAAAAHAAAAAAAAAAAAAAAAAAAAAAAAAAAAAAAAAAAAf39/ACUAAABYAAAAAAAAAAAAAAAAAAAAAAAAAAAAAAAAAAAAAAAAAAAAAAAAAAAAAAAAAAAAAAA/AAAAAAAAAKCGAQAAAAAAAAAAAAAAAAAMAAAAAQAAAAAAAAAAAAAAAAAAAB8AAABUAAAAAAAABQAAAAEAAAAAAAAAAAAAAAAAAAAAAAAAAAAAAAAAAAAAAAAAAAAAAAJ/f38AAAAAA8zMzADAwP8Af39/AAAAAAAAAAAAAAAAAAAAAAAAAAAAIQAAABgAAAAUAAAAYAkAAOgGAACgQQAAmBUAABAAAAAmAAAACAAAAIGAAAAAAAAA"/>
+                <pr:smNativeData xmlns="smNativeData" xmlns:pr="smNativeData" xmlns:p15="http://schemas.microsoft.com/office/powerpoint/2012/main" xmlns:p14="http://schemas.microsoft.com/office/powerpoint/2010/main" xmlns:mc="http://schemas.openxmlformats.org/markup-compatibility/2006" val="SMDATA_15_FLquaRMAAAAlAAAAZAAAAA0AAAAAkAAAAEgAAACQAAAASAAAAAAAAAACAAAAAAAAAAEAAABQAAAAAAAAAAAA4D8AAAAAAADgPwAAAAAAAOA/AAAAAAAA4D8AAAAAAADgPwAAAAAAAOA/AAAAAAAA4D8AAAAAAADgPwAAAAAAAOA/AAAAAAAA4D8CAAAAjAAAAAAAAAAAAAAAW5vVDP///wgAAAAAAAAAAAAAAAAAAAAAAAAAAAAAAAAAAAAAZAAAAAEAAABAAAAAAAAAAAAAAAAAAAAAAAAAAAAAAAAAAAAAAAAAAAAAAAAAAAAAAAAAAAAAAAAAAAAAAAAAAAAAAAAAAAAAAAAAAAAAAAAAAAAAAAAAAAAAAAAAAAAAFAAAADwAAAAAAAAAAAAAAAAAAAkUAAAAAQAAABQAAAAUAAAAFAAAAAEAAAAAAAAAZAAAAGQAAAAAAAAAZAAAAGQAAAAVAAAAYAAAAAAAAAAAAAAADwAAACADAAAAAAAAAAAAAAEAAACgMgAAVgcAAKr4//8BAAAAf39/AAEAAABkAAAAAAAAABQAAABAHwAAAAAAACYAAAAAAAAAwOD//wAAAAAmAAAAZAAAABYAAABMAAAAAAAAAAAAAAAEAAAAAAAAAAEAAADn5uYKAAAAACgAAAAoAAAAZAAAAGQAAAAAAAAAzMzMAAAAAABQAAAAUAAAAGQAAABkAAAAAAAAABcAAAAUAAAAAAAAAAAAAAD/fwAA/38AAAAAAAAJAAAABAAAAF8AYAAeAAAAaAAAAAAAAAAAAAAAAAAAAAAAAAAAAAAAECcAABAnAAAAAAAAAAAAAAAAAAAAAAAAAAAAAAAAAAAAAAAAAAAAABQAAAAAAAAAwMD/AAAAAABkAAAAMgAAAAAAAABkAAAAAAAAAH9/fwAKAAAAIgAAABgAAAAAAAAAAAAAAAAAAAAAAAAAAAAAAAAAAAAkAAAAJAAAAAAAAAAHAAAAAAAAAAAAAAAAAAAAAAAAAAAAAAAAAAAAf39/ACUAAABYAAAAAAAAAAAAAAAAAAAAAAAAAAAAAAAAAAAAAAAAAAAAAAAAAAAAAAAAAAAAAAA/AAAAAAAAAKCGAQAAAAAAAAAAAAAAAAAMAAAAAQAAAAAAAAAAAAAAAAAAAB8AAABUAAAAAAAABQAAAAEAAAAAAAAAAAAAAAAAAAAAAAAAAAAAAAAAAAAAAAAAAAAAAAJ/f38AAAAAA8zMzADAwP8Af39/AAAAAAAAAAAAAAAAAAAAAAAAAAAAIQAAABgAAAAUAAAAYAkAAOgGAACgQQAAmBUAABAAAAAmAAAACAAAAIGAAAAAAAAA"/>
               </a:ext>
             </a:extLst>
           </p:cNvSpPr>
@@ -272,36 +281,36 @@
           </a:bodyPr>
           <a:lstStyle>
             <a:lvl1pPr algn="ctr">
-              <a:defRPr lang="en-us" sz="6000" cap="none"/>
+              <a:defRPr lang="en-US" sz="6000" cap="none"/>
             </a:lvl1pPr>
             <a:lvl2pPr>
-              <a:defRPr lang="en-us"/>
+              <a:defRPr lang="en-US"/>
             </a:lvl2pPr>
             <a:lvl3pPr>
-              <a:defRPr lang="en-us"/>
+              <a:defRPr lang="en-US"/>
             </a:lvl3pPr>
             <a:lvl4pPr>
-              <a:defRPr lang="en-us"/>
+              <a:defRPr lang="en-US"/>
             </a:lvl4pPr>
             <a:lvl5pPr>
-              <a:defRPr lang="en-us"/>
+              <a:defRPr lang="en-US"/>
             </a:lvl5pPr>
             <a:lvl6pPr>
-              <a:defRPr lang="en-us"/>
+              <a:defRPr lang="en-US"/>
             </a:lvl6pPr>
             <a:lvl7pPr>
-              <a:defRPr lang="en-us"/>
+              <a:defRPr lang="en-US"/>
             </a:lvl7pPr>
             <a:lvl8pPr>
-              <a:defRPr lang="en-us"/>
+              <a:defRPr lang="en-US"/>
             </a:lvl8pPr>
             <a:lvl9pPr>
-              <a:defRPr lang="en-us"/>
+              <a:defRPr lang="en-US"/>
             </a:lvl9pPr>
           </a:lstStyle>
           <a:p>
             <a:pPr>
-              <a:defRPr lang="en-us"/>
+              <a:defRPr lang="en-US"/>
             </a:pPr>
             <a:r>
               <a:t>Click to edit Master title style</a:t>
@@ -316,7 +325,7 @@
             <a:spLocks noGrp="1" noChangeArrowheads="1"/>
             <a:extLst>
               <a:ext uri="smNativeData">
-                <pr:smNativeData xmlns:pr="smNativeData" xmlns="smNativeData" val="SMDATA_15_FLquaRMAAAAlAAAAZAAAAA0AAAAAkAAAAEgAAACQAAAASAAAAAAAAAAAAAAAAAAAAAEAAABQAAAAAAAAAAAA4D8AAAAAAADgPwAAAAAAAOA/AAAAAAAA4D8AAAAAAADgPwAAAAAAAOA/AAAAAAAA4D8AAAAAAADgPwAAAAAAAOA/AAAAAAAA4D8CAAAAjAAAAAAAAAAAAAAAW5vVDP///wgAAAAAAAAAAAAAAAAAAAAAAAAAAAAAAAAAAAAAZAAAAAEAAABAAAAAAAAAAAAAAAAAAAAAAAAAAAAAAAAAAAAAAAAAAAAAAAAAAAAAAAAAAAAAAAAAAAAAAAAAAAAAAAAAAAAAAAAAAAAAAAAAAAAAAAAAAAAAAAAAAAAAFAAAADwAAAAAAAAAAAAAAAAAAAkUAAAAAQAAABQAAAAUAAAAFAAAAAEAAAAAAAAAZAAAAGQAAAAAAAAAZAAAAGQAAAAVAAAAYAAAAAAAAAAAAAAADwAAACADAAAAAAAAAAAAAAEAAACgMgAAVgcAAKr4//8BAAAAf39/AAEAAABkAAAAAAAAABQAAABAHwAAAAAAACYAAAAAAAAAwOD//wAAAAAmAAAAZAAAABYAAABMAAAAAAAAAAAAAAAEAAAAAAAAAAEAAADn5uYKAAAAACgAAAAoAAAAZAAAAGQAAAAAAAAAzMzMAAAAAABQAAAAUAAAAGQAAABkAAAAAAAAABcAAAAUAAAAAAAAAAAAAAD/fwAA/38AAAAAAAAJAAAABAAAAGxpY2keAAAAaAAAAAAAAAAAAAAAAAAAAAAAAAAAAAAAECcAABAnAAAAAAAAAAAAAAAAAAAAAAAAAAAAAAAAAAAAAAAAAAAAABQAAAAAAAAAwMD/AAAAAABkAAAAMgAAAAAAAABkAAAAAAAAAH9/fwAKAAAAIgAAABgAAAAAAAAAAAAAAAAAAAAAAAAAAAAAAAAAAAAkAAAAJAAAAAAAAAAHAAAAAAAAAAAAAAAAAAAAAAAAAAAAAAAAAAAAf39/ACUAAABYAAAAAAAAAAAAAAAAAAAAAAAAAAAAAAAAAAAAAAAAAAAAAAAAAAAAAAAAAAAAAAA/AAAAAAAAAKCGAQAAAAAAAAAAAAAAAAAMAAAAAQAAAAAAAAAAAAAAAAAAAB8AAABUAAAAAAAABQAAAAEAAAAAAAAAAAAAAAAAAAAAAAAAAAAAAAAAAAAAAAAAAAAAAAJ/f38AAAAAA8zMzADAwP8Af39/AAAAAAAAAAAAAAAAAAAAAAAAAAAAIQAAABgAAAAUAAAAYAkAACkWAACgQQAAWCAAABAAAAAmAAAACAAAAAGAAAAAAAAA"/>
+                <pr:smNativeData xmlns="smNativeData" xmlns:pr="smNativeData" xmlns:p15="http://schemas.microsoft.com/office/powerpoint/2012/main" xmlns:p14="http://schemas.microsoft.com/office/powerpoint/2010/main" xmlns:mc="http://schemas.openxmlformats.org/markup-compatibility/2006" val="SMDATA_15_FLquaRMAAAAlAAAAZAAAAA0AAAAAkAAAAEgAAACQAAAASAAAAAAAAAAAAAAAAAAAAAEAAABQAAAAAAAAAAAA4D8AAAAAAADgPwAAAAAAAOA/AAAAAAAA4D8AAAAAAADgPwAAAAAAAOA/AAAAAAAA4D8AAAAAAADgPwAAAAAAAOA/AAAAAAAA4D8CAAAAjAAAAAAAAAAAAAAAW5vVDP///wgAAAAAAAAAAAAAAAAAAAAAAAAAAAAAAAAAAAAAZAAAAAEAAABAAAAAAAAAAAAAAAAAAAAAAAAAAAAAAAAAAAAAAAAAAAAAAAAAAAAAAAAAAAAAAAAAAAAAAAAAAAAAAAAAAAAAAAAAAAAAAAAAAAAAAAAAAAAAAAAAAAAAFAAAADwAAAAAAAAAAAAAAAAAAAkUAAAAAQAAABQAAAAUAAAAFAAAAAEAAAAAAAAAZAAAAGQAAAAAAAAAZAAAAGQAAAAVAAAAYAAAAAAAAAAAAAAADwAAACADAAAAAAAAAAAAAAEAAACgMgAAVgcAAKr4//8BAAAAf39/AAEAAABkAAAAAAAAABQAAABAHwAAAAAAACYAAAAAAAAAwOD//wAAAAAmAAAAZAAAABYAAABMAAAAAAAAAAAAAAAEAAAAAAAAAAEAAADn5uYKAAAAACgAAAAoAAAAZAAAAGQAAAAAAAAAzMzMAAAAAABQAAAAUAAAAGQAAABkAAAAAAAAABcAAAAUAAAAAAAAAAAAAAD/fwAA/38AAAAAAAAJAAAABAAAAGxpY2keAAAAaAAAAAAAAAAAAAAAAAAAAAAAAAAAAAAAECcAABAnAAAAAAAAAAAAAAAAAAAAAAAAAAAAAAAAAAAAAAAAAAAAABQAAAAAAAAAwMD/AAAAAABkAAAAMgAAAAAAAABkAAAAAAAAAH9/fwAKAAAAIgAAABgAAAAAAAAAAAAAAAAAAAAAAAAAAAAAAAAAAAAkAAAAJAAAAAAAAAAHAAAAAAAAAAAAAAAAAAAAAAAAAAAAAAAAAAAAf39/ACUAAABYAAAAAAAAAAAAAAAAAAAAAAAAAAAAAAAAAAAAAAAAAAAAAAAAAAAAAAAAAAAAAAA/AAAAAAAAAKCGAQAAAAAAAAAAAAAAAAAMAAAAAQAAAAAAAAAAAAAAAAAAAB8AAABUAAAAAAAABQAAAAEAAAAAAAAAAAAAAAAAAAAAAAAAAAAAAAAAAAAAAAAAAAAAAAJ/f38AAAAAA8zMzADAwP8Af39/AAAAAAAAAAAAAAAAAAAAAAAAAAAAIQAAABgAAAAUAAAAYAkAACkWAACgQQAAWCAAABAAAAAmAAAACAAAAAGAAAAAAAAA"/>
               </a:ext>
             </a:extLst>
           </p:cNvSpPr>
@@ -335,44 +344,44 @@
           <a:lstStyle>
             <a:lvl1pPr marL="0" indent="0" algn="ctr">
               <a:buNone/>
-              <a:defRPr lang="en-us" sz="2400" cap="none"/>
+              <a:defRPr lang="en-US" sz="2400" cap="none"/>
             </a:lvl1pPr>
             <a:lvl2pPr marL="457200" indent="0" algn="ctr">
               <a:buNone/>
-              <a:defRPr lang="en-us" sz="2000" cap="none"/>
+              <a:defRPr lang="en-US" sz="2000" cap="none"/>
             </a:lvl2pPr>
             <a:lvl3pPr marL="914400" indent="0" algn="ctr">
               <a:buNone/>
-              <a:defRPr lang="en-us" sz="1800" cap="none"/>
+              <a:defRPr lang="en-US" sz="1800" cap="none"/>
             </a:lvl3pPr>
             <a:lvl4pPr marL="1371600" indent="0" algn="ctr">
               <a:buNone/>
-              <a:defRPr lang="en-us" sz="1600" cap="none"/>
+              <a:defRPr lang="en-US" sz="1600" cap="none"/>
             </a:lvl4pPr>
             <a:lvl5pPr marL="1828800" indent="0" algn="ctr">
               <a:buNone/>
-              <a:defRPr lang="en-us" sz="1600" cap="none"/>
+              <a:defRPr lang="en-US" sz="1600" cap="none"/>
             </a:lvl5pPr>
             <a:lvl6pPr marL="2286000" indent="0" algn="ctr">
               <a:buNone/>
-              <a:defRPr lang="en-us" sz="1600" cap="none"/>
+              <a:defRPr lang="en-US" sz="1600" cap="none"/>
             </a:lvl6pPr>
             <a:lvl7pPr marL="2743200" indent="0" algn="ctr">
               <a:buNone/>
-              <a:defRPr lang="en-us" sz="1600" cap="none"/>
+              <a:defRPr lang="en-US" sz="1600" cap="none"/>
             </a:lvl7pPr>
             <a:lvl8pPr marL="3200400" indent="0" algn="ctr">
               <a:buNone/>
-              <a:defRPr lang="en-us" sz="1600" cap="none"/>
+              <a:defRPr lang="en-US" sz="1600" cap="none"/>
             </a:lvl8pPr>
             <a:lvl9pPr marL="3657600" indent="0" algn="ctr">
               <a:buNone/>
-              <a:defRPr lang="en-us" sz="1600" cap="none"/>
+              <a:defRPr lang="en-US" sz="1600" cap="none"/>
             </a:lvl9pPr>
           </a:lstStyle>
           <a:p>
             <a:pPr>
-              <a:defRPr lang="en-us"/>
+              <a:defRPr lang="en-US"/>
             </a:pPr>
             <a:r>
               <a:t>Click to edit Master subtitle style</a:t>
@@ -387,7 +396,7 @@
             <a:spLocks noGrp="1" noChangeArrowheads="1"/>
             <a:extLst>
               <a:ext uri="smNativeData">
-                <pr:smNativeData xmlns:pr="smNativeData" xmlns="smNativeData" val="SMDATA_15_FLquaRMAAAAlAAAAZAAAAA0AAAAAkAAAAEgAAACQAAAASAAAAAAAAAABAAAAAAAAAAEAAABQAAAAAAAAAAAA4D8AAAAAAADgPwAAAAAAAOA/AAAAAAAA4D8AAAAAAADgPwAAAAAAAOA/AAAAAAAA4D8AAAAAAADgPwAAAAAAAOA/AAAAAAAA4D8CAAAAjAAAAAAAAAAAAAAAW5vVDP///wgAAAAAAAAAAAAAAAAAAAAAAAAAAAAAAAAAAAAAZAAAAAEAAABAAAAAAAAAAAAAAAAAAAAAAAAAAAAAAAAAAAAAAAAAAAAAAAAAAAAAAAAAAAAAAAAAAAAAAAAAAAAAAAAAAAAAAAAAAAAAAAAAAAAAAAAAAAAAAAAAAAAAFAAAADwAAAAAAAAAAAAAAAAAAAkUAAAAAQAAABQAAAAUAAAAFAAAAAEAAAAAAAAAZAAAAGQAAAAAAAAAZAAAAGQAAAAVAAAAYAAAAAAAAAAAAAAADwAAACADAAAAAAAAAAAAAAEAAACgMgAAVgcAAKr4//8BAAAAf39/AAEAAABkAAAAAAAAABQAAABAHwAAAAAAACYAAAAAAAAAwOD//wAAAAAmAAAAZAAAABYAAABMAAAAAAAAAAAAAAAEAAAAAAAAAAEAAADn5uYKAAAAACgAAAAoAAAAZAAAAGQAAAAAAAAAzMzMAAAAAABQAAAAUAAAAGQAAABkAAAAAAAAABcAAAAUAAAAAAAAAAAAAAD/fwAA/38AAAAAAAAJAAAABAAAAF8AYAAeAAAAaAAAAAAAAAAAAAAAAAAAAAAAAAAAAAAAECcAABAnAAAAAAAAAAAAAAAAAAAAAAAAAAAAAAAAAAAAAAAAAAAAABQAAAAAAAAAwMD/AAAAAABkAAAAMgAAAAAAAABkAAAAAAAAAH9/fwAKAAAAIgAAABgAAAAAAAAAAAAAAAAAAAAAAAAAAAAAAAAAAAAkAAAAJAAAAAAAAAAHAAAAAAAAAAAAAAAAAAAAAAAAAAAAAAAAAAAAf39/ACUAAABYAAAAAAAAAAAAAAAAAAAAAAAAAAAAAAAAAAAAAAAAAAAAAAAAAAAAAAAAAAAAAAA/AAAAAAAAAKCGAQAAAAAAAAAAAAAAAAAMAAAAAQAAAAAAAAAAAAAAAAAAAB8AAABUAAAAAAAABQAAAAEAAAAAAAAAAAAAAAAAAAAAAAAAAAAAAAAAAAAAAAAAAAAAAAJ/f38AAAAAA8zMzADAwP8Af39/AAAAAAAAAAAAAAAAAAAAAAAAAAAAIQAAABgAAAAUAAAAKAUAABonAAAIFgAAWSkAABAAAAAmAAAACAAAAAAAAAAAAAAA"/>
+                <pr:smNativeData xmlns="smNativeData" xmlns:pr="smNativeData" xmlns:p15="http://schemas.microsoft.com/office/powerpoint/2012/main" xmlns:p14="http://schemas.microsoft.com/office/powerpoint/2010/main" xmlns:mc="http://schemas.openxmlformats.org/markup-compatibility/2006" val="SMDATA_15_FLquaRMAAAAlAAAAZAAAAA0AAAAAkAAAAEgAAACQAAAASAAAAAAAAAABAAAAAAAAAAEAAABQAAAAAAAAAAAA4D8AAAAAAADgPwAAAAAAAOA/AAAAAAAA4D8AAAAAAADgPwAAAAAAAOA/AAAAAAAA4D8AAAAAAADgPwAAAAAAAOA/AAAAAAAA4D8CAAAAjAAAAAAAAAAAAAAAW5vVDP///wgAAAAAAAAAAAAAAAAAAAAAAAAAAAAAAAAAAAAAZAAAAAEAAABAAAAAAAAAAAAAAAAAAAAAAAAAAAAAAAAAAAAAAAAAAAAAAAAAAAAAAAAAAAAAAAAAAAAAAAAAAAAAAAAAAAAAAAAAAAAAAAAAAAAAAAAAAAAAAAAAAAAAFAAAADwAAAAAAAAAAAAAAAAAAAkUAAAAAQAAABQAAAAUAAAAFAAAAAEAAAAAAAAAZAAAAGQAAAAAAAAAZAAAAGQAAAAVAAAAYAAAAAAAAAAAAAAADwAAACADAAAAAAAAAAAAAAEAAACgMgAAVgcAAKr4//8BAAAAf39/AAEAAABkAAAAAAAAABQAAABAHwAAAAAAACYAAAAAAAAAwOD//wAAAAAmAAAAZAAAABYAAABMAAAAAAAAAAAAAAAEAAAAAAAAAAEAAADn5uYKAAAAACgAAAAoAAAAZAAAAGQAAAAAAAAAzMzMAAAAAABQAAAAUAAAAGQAAABkAAAAAAAAABcAAAAUAAAAAAAAAAAAAAD/fwAA/38AAAAAAAAJAAAABAAAAF8AYAAeAAAAaAAAAAAAAAAAAAAAAAAAAAAAAAAAAAAAECcAABAnAAAAAAAAAAAAAAAAAAAAAAAAAAAAAAAAAAAAAAAAAAAAABQAAAAAAAAAwMD/AAAAAABkAAAAMgAAAAAAAABkAAAAAAAAAH9/fwAKAAAAIgAAABgAAAAAAAAAAAAAAAAAAAAAAAAAAAAAAAAAAAAkAAAAJAAAAAAAAAAHAAAAAAAAAAAAAAAAAAAAAAAAAAAAAAAAAAAAf39/ACUAAABYAAAAAAAAAAAAAAAAAAAAAAAAAAAAAAAAAAAAAAAAAAAAAAAAAAAAAAAAAAAAAAA/AAAAAAAAAKCGAQAAAAAAAAAAAAAAAAAMAAAAAQAAAAAAAAAAAAAAAAAAAB8AAABUAAAAAAAABQAAAAEAAAAAAAAAAAAAAAAAAAAAAAAAAAAAAAAAAAAAAAAAAAAAAAJ/f38AAAAAA8zMzADAwP8Af39/AAAAAAAAAAAAAAAAAAAAAAAAAAAAIQAAABgAAAAUAAAAKAUAABonAAAIFgAAWSkAABAAAAAmAAAACAAAAAAAAAAAAAAA"/>
               </a:ext>
             </a:extLst>
           </p:cNvSpPr>
@@ -401,11 +410,12 @@
           <a:lstStyle/>
           <a:p>
             <a:pPr>
-              <a:defRPr lang="en-us"/>
+              <a:defRPr lang="en-US"/>
             </a:pPr>
             <a:fld id="{30AEBC93-DDDD-FB4A-9316-2B1FF258657E}" type="datetime1">
-              <a:t/>
+              <a:t>4/21/2026</a:t>
             </a:fld>
+            <a:endParaRPr/>
           </a:p>
         </p:txBody>
       </p:sp>
@@ -416,7 +426,7 @@
             <a:spLocks noGrp="1" noChangeArrowheads="1"/>
             <a:extLst>
               <a:ext uri="smNativeData">
-                <pr:smNativeData xmlns:pr="smNativeData" xmlns="smNativeData" val="SMDATA_15_FLquaRMAAAAlAAAAZAAAAA0AAAAAkAAAAEgAAACQAAAASAAAAAAAAAABAAAAAAAAAAEAAABQAAAAAAAAAAAA4D8AAAAAAADgPwAAAAAAAOA/AAAAAAAA4D8AAAAAAADgPwAAAAAAAOA/AAAAAAAA4D8AAAAAAADgPwAAAAAAAOA/AAAAAAAA4D8CAAAAjAAAAAAAAAAAAAAAW5vVDP///wgAAAAAAAAAAAAAAAAAAAAAAAAAAAAAAAAAAAAAZAAAAAEAAABAAAAAAAAAAAAAAAAAAAAAAAAAAAAAAAAAAAAAAAAAAAAAAAAAAAAAAAAAAAAAAAAAAAAAAAAAAAAAAAAAAAAAAAAAAAAAAAAAAAAAAAAAAAAAAAAAAAAAFAAAADwAAAAAAAAAAAAAAAAAAAkUAAAAAQAAABQAAAAUAAAAFAAAAAEAAAAAAAAAZAAAAGQAAAAAAAAAZAAAAGQAAAAVAAAAYAAAAAAAAAAAAAAADwAAACADAAAAAAAAAAAAAAEAAACgMgAAVgcAAKr4//8BAAAAf39/AAEAAABkAAAAAAAAABQAAABAHwAAAAAAACYAAAAAAAAAwOD//wAAAAAmAAAAZAAAABYAAABMAAAAAAAAAAAAAAAEAAAAAAAAAAEAAADn5uYKAAAAACgAAAAoAAAAZAAAAGQAAAAAAAAAzMzMAAAAAABQAAAAUAAAAGQAAABkAAAAAAAAABcAAAAUAAAAAAAAAAAAAAD/fwAA/38AAAAAAAAJAAAABAAAAKS+1QseAAAAaAAAAAAAAAAAAAAAAAAAAAAAAAAAAAAAECcAABAnAAAAAAAAAAAAAAAAAAAAAAAAAAAAAAAAAAAAAAAAAAAAABQAAAAAAAAAwMD/AAAAAABkAAAAMgAAAAAAAABkAAAAAAAAAH9/fwAKAAAAIgAAABgAAAAAAAAAAAAAAAAAAAAAAAAAAAAAAAAAAAAkAAAAJAAAAAAAAAAHAAAAAAAAAAAAAAAAAAAAAAAAAAAAAAAAAAAAf39/ACUAAABYAAAAAAAAAAAAAAAAAAAAAAAAAAAAAAAAAAAAAAAAAAAAAAAAAAAAAAAAAAAAAAA/AAAAAAAAAKCGAQAAAAAAAAAAAAAAAAAMAAAAAQAAAAAAAAAAAAAAAAAAAB8AAABUAAAAAAAABQAAAAEAAAAAAAAAAAAAAAAAAAAAAAAAAAAAAAAAAAAAAAAAAAAAAAJ/f38AAAAAA8zMzADAwP8Af39/AAAAAAAAAAAAAAAAAAAAAAAAAAAAIQAAABgAAAAUAAAA2BgAABonAAAoMgAAWSkAABAAAAAmAAAACAAAAAAAAAAAAAAA"/>
+                <pr:smNativeData xmlns="smNativeData" xmlns:pr="smNativeData" xmlns:p15="http://schemas.microsoft.com/office/powerpoint/2012/main" xmlns:p14="http://schemas.microsoft.com/office/powerpoint/2010/main" xmlns:mc="http://schemas.openxmlformats.org/markup-compatibility/2006" val="SMDATA_15_FLquaRMAAAAlAAAAZAAAAA0AAAAAkAAAAEgAAACQAAAASAAAAAAAAAABAAAAAAAAAAEAAABQAAAAAAAAAAAA4D8AAAAAAADgPwAAAAAAAOA/AAAAAAAA4D8AAAAAAADgPwAAAAAAAOA/AAAAAAAA4D8AAAAAAADgPwAAAAAAAOA/AAAAAAAA4D8CAAAAjAAAAAAAAAAAAAAAW5vVDP///wgAAAAAAAAAAAAAAAAAAAAAAAAAAAAAAAAAAAAAZAAAAAEAAABAAAAAAAAAAAAAAAAAAAAAAAAAAAAAAAAAAAAAAAAAAAAAAAAAAAAAAAAAAAAAAAAAAAAAAAAAAAAAAAAAAAAAAAAAAAAAAAAAAAAAAAAAAAAAAAAAAAAAFAAAADwAAAAAAAAAAAAAAAAAAAkUAAAAAQAAABQAAAAUAAAAFAAAAAEAAAAAAAAAZAAAAGQAAAAAAAAAZAAAAGQAAAAVAAAAYAAAAAAAAAAAAAAADwAAACADAAAAAAAAAAAAAAEAAACgMgAAVgcAAKr4//8BAAAAf39/AAEAAABkAAAAAAAAABQAAABAHwAAAAAAACYAAAAAAAAAwOD//wAAAAAmAAAAZAAAABYAAABMAAAAAAAAAAAAAAAEAAAAAAAAAAEAAADn5uYKAAAAACgAAAAoAAAAZAAAAGQAAAAAAAAAzMzMAAAAAABQAAAAUAAAAGQAAABkAAAAAAAAABcAAAAUAAAAAAAAAAAAAAD/fwAA/38AAAAAAAAJAAAABAAAAKS+1QseAAAAaAAAAAAAAAAAAAAAAAAAAAAAAAAAAAAAECcAABAnAAAAAAAAAAAAAAAAAAAAAAAAAAAAAAAAAAAAAAAAAAAAABQAAAAAAAAAwMD/AAAAAABkAAAAMgAAAAAAAABkAAAAAAAAAH9/fwAKAAAAIgAAABgAAAAAAAAAAAAAAAAAAAAAAAAAAAAAAAAAAAAkAAAAJAAAAAAAAAAHAAAAAAAAAAAAAAAAAAAAAAAAAAAAAAAAAAAAf39/ACUAAABYAAAAAAAAAAAAAAAAAAAAAAAAAAAAAAAAAAAAAAAAAAAAAAAAAAAAAAAAAAAAAAA/AAAAAAAAAKCGAQAAAAAAAAAAAAAAAAAMAAAAAQAAAAAAAAAAAAAAAAAAAB8AAABUAAAAAAAABQAAAAEAAAAAAAAAAAAAAAAAAAAAAAAAAAAAAAAAAAAAAAAAAAAAAAJ/f38AAAAAA8zMzADAwP8Af39/AAAAAAAAAAAAAAAAAAAAAAAAAAAAIQAAABgAAAAUAAAA2BgAABonAAAoMgAAWSkAABAAAAAmAAAACAAAAAAAAAAAAAAA"/>
               </a:ext>
             </a:extLst>
           </p:cNvSpPr>
@@ -430,8 +440,9 @@
           <a:lstStyle/>
           <a:p>
             <a:pPr>
-              <a:defRPr lang="en-us"/>
-            </a:pPr>
+              <a:defRPr lang="en-US"/>
+            </a:pPr>
+            <a:endParaRPr/>
           </a:p>
         </p:txBody>
       </p:sp>
@@ -442,7 +453,7 @@
             <a:spLocks noGrp="1" noChangeArrowheads="1"/>
             <a:extLst>
               <a:ext uri="smNativeData">
-                <pr:smNativeData xmlns:pr="smNativeData" xmlns="smNativeData" val="SMDATA_15_FLquaRMAAAAlAAAAZAAAAA0AAAAAkAAAAEgAAACQAAAASAAAAAAAAAABAAAAAAAAAAEAAABQAAAAAAAAAAAA4D8AAAAAAADgPwAAAAAAAOA/AAAAAAAA4D8AAAAAAADgPwAAAAAAAOA/AAAAAAAA4D8AAAAAAADgPwAAAAAAAOA/AAAAAAAA4D8CAAAAjAAAAAAAAAAAAAAAW5vVDP///wgAAAAAAAAAAAAAAAAAAAAAAAAAAAAAAAAAAAAAZAAAAAEAAABAAAAAAAAAAAAAAAAAAAAAAAAAAAAAAAAAAAAAAAAAAAAAAAAAAAAAAAAAAAAAAAAAAAAAAAAAAAAAAAAAAAAAAAAAAAAAAAAAAAAAAAAAAAAAAAAAAAAAFAAAADwAAAAAAAAAAAAAAAAAAAkUAAAAAQAAABQAAAAUAAAAFAAAAAEAAAAAAAAAZAAAAGQAAAAAAAAAZAAAAGQAAAAVAAAAYAAAAAAAAAAAAAAADwAAACADAAAAAAAAAAAAAAEAAACgMgAAVgcAAKr4//8BAAAAf39/AAEAAABkAAAAAAAAABQAAABAHwAAAAAAACYAAAAAAAAAwOD//wAAAAAmAAAAZAAAABYAAABMAAAAAAAAAAAAAAAEAAAAAAAAAAEAAADn5uYKAAAAACgAAAAoAAAAZAAAAGQAAAAAAAAAzMzMAAAAAABQAAAAUAAAAGQAAABkAAAAAAAAABcAAAAUAAAAAAAAAAAAAAD/fwAA/38AAAAAAAAJAAAABAAAAEwPxw0eAAAAaAAAAAAAAAAAAAAAAAAAAAAAAAAAAAAAECcAABAnAAAAAAAAAAAAAAAAAAAAAAAAAAAAAAAAAAAAAAAAAAAAABQAAAAAAAAAwMD/AAAAAABkAAAAMgAAAAAAAABkAAAAAAAAAH9/fwAKAAAAIgAAABgAAAAAAAAAAAAAAAAAAAAAAAAAAAAAAAAAAAAkAAAAJAAAAAAAAAAHAAAAAAAAAAAAAAAAAAAAAAAAAAAAAAAAAAAAf39/ACUAAABYAAAAAAAAAAAAAAAAAAAAAAAAAAAAAAAAAAAAAAAAAAAAAAAAAAAAAAAAAAAAAAA/AAAAAAAAAKCGAQAAAAAAAAAAAAAAAAAMAAAAAQAAAAAAAAAAAAAAAAAAAB8AAABUAAAAAAAABQAAAAEAAAAAAAAAAAAAAAAAAAAAAAAAAAAAAAAAAAAAAAAAAAAAAAJ/f38AAAAAA8zMzADAwP8Af39/AAAAAAAAAAAAAAAAAAAAAAAAAAAAIQAAABgAAAAUAAAA+DQAABonAADYRQAAWSkAABAAAAAmAAAACAAAAAAAAAAAAAAA"/>
+                <pr:smNativeData xmlns="smNativeData" xmlns:pr="smNativeData" xmlns:p15="http://schemas.microsoft.com/office/powerpoint/2012/main" xmlns:p14="http://schemas.microsoft.com/office/powerpoint/2010/main" xmlns:mc="http://schemas.openxmlformats.org/markup-compatibility/2006" val="SMDATA_15_FLquaRMAAAAlAAAAZAAAAA0AAAAAkAAAAEgAAACQAAAASAAAAAAAAAABAAAAAAAAAAEAAABQAAAAAAAAAAAA4D8AAAAAAADgPwAAAAAAAOA/AAAAAAAA4D8AAAAAAADgPwAAAAAAAOA/AAAAAAAA4D8AAAAAAADgPwAAAAAAAOA/AAAAAAAA4D8CAAAAjAAAAAAAAAAAAAAAW5vVDP///wgAAAAAAAAAAAAAAAAAAAAAAAAAAAAAAAAAAAAAZAAAAAEAAABAAAAAAAAAAAAAAAAAAAAAAAAAAAAAAAAAAAAAAAAAAAAAAAAAAAAAAAAAAAAAAAAAAAAAAAAAAAAAAAAAAAAAAAAAAAAAAAAAAAAAAAAAAAAAAAAAAAAAFAAAADwAAAAAAAAAAAAAAAAAAAkUAAAAAQAAABQAAAAUAAAAFAAAAAEAAAAAAAAAZAAAAGQAAAAAAAAAZAAAAGQAAAAVAAAAYAAAAAAAAAAAAAAADwAAACADAAAAAAAAAAAAAAEAAACgMgAAVgcAAKr4//8BAAAAf39/AAEAAABkAAAAAAAAABQAAABAHwAAAAAAACYAAAAAAAAAwOD//wAAAAAmAAAAZAAAABYAAABMAAAAAAAAAAAAAAAEAAAAAAAAAAEAAADn5uYKAAAAACgAAAAoAAAAZAAAAGQAAAAAAAAAzMzMAAAAAABQAAAAUAAAAGQAAABkAAAAAAAAABcAAAAUAAAAAAAAAAAAAAD/fwAA/38AAAAAAAAJAAAABAAAAEwPxw0eAAAAaAAAAAAAAAAAAAAAAAAAAAAAAAAAAAAAECcAABAnAAAAAAAAAAAAAAAAAAAAAAAAAAAAAAAAAAAAAAAAAAAAABQAAAAAAAAAwMD/AAAAAABkAAAAMgAAAAAAAABkAAAAAAAAAH9/fwAKAAAAIgAAABgAAAAAAAAAAAAAAAAAAAAAAAAAAAAAAAAAAAAkAAAAJAAAAAAAAAAHAAAAAAAAAAAAAAAAAAAAAAAAAAAAAAAAAAAAf39/ACUAAABYAAAAAAAAAAAAAAAAAAAAAAAAAAAAAAAAAAAAAAAAAAAAAAAAAAAAAAAAAAAAAAA/AAAAAAAAAKCGAQAAAAAAAAAAAAAAAAAMAAAAAQAAAAAAAAAAAAAAAAAAAB8AAABUAAAAAAAABQAAAAEAAAAAAAAAAAAAAAAAAAAAAAAAAAAAAAAAAAAAAAAAAAAAAAJ/f38AAAAAA8zMzADAwP8Af39/AAAAAAAAAAAAAAAAAAAAAAAAAAAAIQAAABgAAAAUAAAA+DQAABonAADYRQAAWSkAABAAAAAmAAAACAAAAAAAAAAAAAAA"/>
               </a:ext>
             </a:extLst>
           </p:cNvSpPr>
@@ -456,11 +467,12 @@
           <a:lstStyle/>
           <a:p>
             <a:pPr>
-              <a:defRPr lang="en-us"/>
+              <a:defRPr lang="en-US"/>
             </a:pPr>
             <a:fld id="{30AEB3C2-8CDD-FB45-9316-7A10FD58652F}" type="slidenum">
-              <a:t/>
+              <a:t>‹#›</a:t>
             </a:fld>
+            <a:endParaRPr/>
           </a:p>
         </p:txBody>
       </p:sp>
@@ -474,7 +486,7 @@
 </file>
 
 <file path=ppt/slideLayouts/slideLayout10.xml><?xml version="1.0" encoding="utf-8"?>
-<p:sldLayout xmlns:p="http://schemas.openxmlformats.org/presentationml/2006/main" xmlns:mc="http://schemas.openxmlformats.org/markup-compatibility/2006" xmlns:p14="http://schemas.microsoft.com/office/powerpoint/2010/main" xmlns:p15="http://schemas.microsoft.com/office/powerpoint/2012/main" xmlns:r="http://schemas.openxmlformats.org/officeDocument/2006/relationships" xmlns:a="http://schemas.openxmlformats.org/drawingml/2006/main" type="vertTx" preserve="1">
+<p:sldLayout xmlns:a="http://schemas.openxmlformats.org/drawingml/2006/main" xmlns:r="http://schemas.openxmlformats.org/officeDocument/2006/relationships" xmlns:p="http://schemas.openxmlformats.org/presentationml/2006/main" type="vertTx" preserve="1">
   <p:cSld name="Title and Vertical Text">
     <p:spTree>
       <p:nvGrpSpPr>
@@ -497,7 +509,7 @@
             <a:spLocks noGrp="1" noChangeArrowheads="1"/>
             <a:extLst>
               <a:ext uri="smNativeData">
-                <pr:smNativeData xmlns:pr="smNativeData" xmlns="smNativeData" val="SMDATA_15_FLquaRMAAAAlAAAAZAAAAA0AAAAAkAAAAEgAAACQAAAASAAAAAAAAAABAAAAAAAAAAEAAABQAAAAAAAAAAAA4D8AAAAAAADgPwAAAAAAAOA/AAAAAAAA4D8AAAAAAADgPwAAAAAAAOA/AAAAAAAA4D8AAAAAAADgPwAAAAAAAOA/AAAAAAAA4D8CAAAAjAAAAAAAAAAAAAAAW5vVDP///wgAAAAAAAAAAAAAAAAAAAAAAAAAAAAAAAAAAAAAZAAAAAEAAABAAAAAAAAAAAAAAAAAAAAAAAAAAAAAAAAAAAAAAAAAAAAAAAAAAAAAAAAAAAAAAAAAAAAAAAAAAAAAAAAAAAAAAAAAAAAAAAAAAAAAAAAAAAAAAAAAAAAAFAAAADwAAAAAAAAAAAAAAAAAAAkUAAAAAQAAABQAAAAUAAAAFAAAAAEAAAAAAAAAZAAAAGQAAAAAAAAAZAAAAGQAAAAVAAAAYAAAAAAAAAAAAAAADwAAACADAAAAAAAAAAAAAAEAAACgMgAAVgcAAKr4//8BAAAAf39/AAEAAABkAAAAAAAAABQAAABAHwAAAAAAACYAAAAAAAAAwOD//wAAAAAmAAAAZAAAABYAAABMAAAAAAAAAAAAAAAEAAAAAAAAAAEAAADn5uYKAAAAACgAAAAoAAAAZAAAAGQAAAAAAAAAzMzMAAAAAABQAAAAUAAAAGQAAABkAAAAAAAAABcAAAAUAAAAAAAAAAAAAAD/fwAA/38AAAAAAAAJAAAABAAAAAAAAAAeAAAAaAAAAAAAAAAAAAAAAAAAAAAAAAAAAAAAECcAABAnAAAAAAAAAAAAAAAAAAAAAAAAAAAAAAAAAAAAAAAAAAAAABQAAAAAAAAAwMD/AAAAAABkAAAAMgAAAAAAAABkAAAAAAAAAH9/fwAKAAAAIgAAABgAAAAAAAAAAAAAAAAAAAAAAAAAAAAAAAAAAAAkAAAAJAAAAAAAAAAHAAAAAAAAAAAAAAAAAAAAAAAAAAAAAAAAAAAAf39/ACUAAABYAAAAAAAAAAAAAAAAAAAAAAAAAAAAAAAAAAAAAAAAAAAAAAAAAAAAAAAAAAAAAAA/AAAAAAAAAKCGAQAAAAAAAAAAAAAAAAAMAAAAAQAAAAAAAAAAAAAAAAAAAB8AAABUAAAAAAAABQAAAAEAAAAAAAAAAAAAAAAAAAAAAAAAAAAAAAAAAAAAAAAAAAAAAAJ/f38AAAAAA8zMzADAwP8Af39/AAAAAAAAAAAAAAAAAAAAAAAAAAAAIQAAABgAAAAUAAAAKAUAAD8CAADYRQAAZwoAABAAAAAmAAAACAAAAAAAAAAAAAAA"/>
+                <pr:smNativeData xmlns="smNativeData" xmlns:pr="smNativeData" xmlns:p15="http://schemas.microsoft.com/office/powerpoint/2012/main" xmlns:p14="http://schemas.microsoft.com/office/powerpoint/2010/main" xmlns:mc="http://schemas.openxmlformats.org/markup-compatibility/2006" val="SMDATA_15_FLquaRMAAAAlAAAAZAAAAA0AAAAAkAAAAEgAAACQAAAASAAAAAAAAAABAAAAAAAAAAEAAABQAAAAAAAAAAAA4D8AAAAAAADgPwAAAAAAAOA/AAAAAAAA4D8AAAAAAADgPwAAAAAAAOA/AAAAAAAA4D8AAAAAAADgPwAAAAAAAOA/AAAAAAAA4D8CAAAAjAAAAAAAAAAAAAAAW5vVDP///wgAAAAAAAAAAAAAAAAAAAAAAAAAAAAAAAAAAAAAZAAAAAEAAABAAAAAAAAAAAAAAAAAAAAAAAAAAAAAAAAAAAAAAAAAAAAAAAAAAAAAAAAAAAAAAAAAAAAAAAAAAAAAAAAAAAAAAAAAAAAAAAAAAAAAAAAAAAAAAAAAAAAAFAAAADwAAAAAAAAAAAAAAAAAAAkUAAAAAQAAABQAAAAUAAAAFAAAAAEAAAAAAAAAZAAAAGQAAAAAAAAAZAAAAGQAAAAVAAAAYAAAAAAAAAAAAAAADwAAACADAAAAAAAAAAAAAAEAAACgMgAAVgcAAKr4//8BAAAAf39/AAEAAABkAAAAAAAAABQAAABAHwAAAAAAACYAAAAAAAAAwOD//wAAAAAmAAAAZAAAABYAAABMAAAAAAAAAAAAAAAEAAAAAAAAAAEAAADn5uYKAAAAACgAAAAoAAAAZAAAAGQAAAAAAAAAzMzMAAAAAABQAAAAUAAAAGQAAABkAAAAAAAAABcAAAAUAAAAAAAAAAAAAAD/fwAA/38AAAAAAAAJAAAABAAAAAAAAAAeAAAAaAAAAAAAAAAAAAAAAAAAAAAAAAAAAAAAECcAABAnAAAAAAAAAAAAAAAAAAAAAAAAAAAAAAAAAAAAAAAAAAAAABQAAAAAAAAAwMD/AAAAAABkAAAAMgAAAAAAAABkAAAAAAAAAH9/fwAKAAAAIgAAABgAAAAAAAAAAAAAAAAAAAAAAAAAAAAAAAAAAAAkAAAAJAAAAAAAAAAHAAAAAAAAAAAAAAAAAAAAAAAAAAAAAAAAAAAAf39/ACUAAABYAAAAAAAAAAAAAAAAAAAAAAAAAAAAAAAAAAAAAAAAAAAAAAAAAAAAAAAAAAAAAAA/AAAAAAAAAKCGAQAAAAAAAAAAAAAAAAAMAAAAAQAAAAAAAAAAAAAAAAAAAB8AAABUAAAAAAAABQAAAAEAAAAAAAAAAAAAAAAAAAAAAAAAAAAAAAAAAAAAAAAAAAAAAAJ/f38AAAAAA8zMzADAwP8Af39/AAAAAAAAAAAAAAAAAAAAAAAAAAAAIQAAABgAAAAUAAAAKAUAAD8CAADYRQAAZwoAABAAAAAmAAAACAAAAAAAAAAAAAAA"/>
               </a:ext>
             </a:extLst>
           </p:cNvSpPr>
@@ -511,7 +523,7 @@
           <a:lstStyle/>
           <a:p>
             <a:pPr>
-              <a:defRPr lang="en-us"/>
+              <a:defRPr lang="en-US"/>
             </a:pPr>
             <a:r>
               <a:t>Click to edit Master title style</a:t>
@@ -526,7 +538,7 @@
             <a:spLocks noGrp="1" noChangeArrowheads="1"/>
             <a:extLst>
               <a:ext uri="smNativeData">
-                <pr:smNativeData xmlns:pr="smNativeData" xmlns="smNativeData" val="SMDATA_15_FLquaRMAAAAlAAAAZAAAAA0AAAAAkAAAAEgAAACQAAAASAAAAAAAAAAAAAAAAQAAAAEAAABQAAAAAAAAAAAA4D8AAAAAAADgPwAAAAAAAOA/AAAAAAAA4D8AAAAAAADgPwAAAAAAAOA/AAAAAAAA4D8AAAAAAADgPwAAAAAAAOA/AAAAAAAA4D8CAAAAjAAAAAAAAAAAAAAAW5vVDP///wgAAAAAAAAAAAAAAAAAAAAAAAAAAAAAAAAAAAAAZAAAAAEAAABAAAAAAAAAAAAAAAAAAAAAAAAAAAAAAAAAAAAAAAAAAAAAAAAAAAAAAAAAAAAAAAAAAAAAAAAAAAAAAAAAAAAAAAAAAAAAAAAAAAAAAAAAAAAAAAAAAAAAFAAAADwAAAAAAAAAAAAAAAAAAAkUAAAAAQAAABQAAAAUAAAAFAAAAAEAAAAAAAAAZAAAAGQAAAAAAAAAZAAAAGQAAAAVAAAAYAAAAAAAAAAAAAAADwAAACADAAAAAAAAAAAAAAEAAACgMgAAVgcAAKr4//8BAAAAf39/AAEAAABkAAAAAAAAABQAAABAHwAAAAAAACYAAAAAAAAAwOD//wAAAAAmAAAAZAAAABYAAABMAAAAAAAAAAAAAAAEAAAAAAAAAAEAAADn5uYKAAAAACgAAAAoAAAAZAAAAGQAAAAAAAAAzMzMAAAAAABQAAAAUAAAAGQAAABkAAAAAAAAABcAAAAUAAAAAAAAAAAAAAD/fwAA/38AAAAAAAAJAAAABAAAAAAAAAAeAAAAaAAAAAAAAAAAAAAAAAAAAAAAAAAAAAAAECcAABAnAAAAAAAAAAAAAAAAAAAAAAAAAAAAAAAAAAAAAAAAAAAAABQAAAAAAAAAwMD/AAAAAABkAAAAMgAAAAAAAABkAAAAAAAAAH9/fwAKAAAAIgAAABgAAAAAAAAAAAAAAAAAAAAAAAAAAAAAAAAAAAAkAAAAJAAAAAAAAAAHAAAAAAAAAAAAAAAAAAAAAAAAAAAAAAAAAAAAf39/ACUAAABYAAAAAAAAAAAAAAAAAAAAAAAAAAAAAAAAAAAAAAAAAAAAAAAAAAAAAAAAAAAAAAA/AAAAAAAAAKCGAQAAAAAAAAAAAAAAAAAMAAAAAQAAAAAAAAAAAAAAAAAAAB8AAABUAAAAAAAABQAAAAEAAAAAAAAAAAAAAAAAAAAAAAAAAAAAAAAAAAAAAAAAAAAAAAJ/f38AAAAAA8zMzADAwP8Af39/AAAAAAAAAAAAAAAAAAAAAAAAAAAAIQAAABgAAAAUAAAAKAUAADsLAADYRQAAACYAABAAAAAmAAAACAAAAAIAAAAAAAAA"/>
+                <pr:smNativeData xmlns="smNativeData" xmlns:pr="smNativeData" xmlns:p15="http://schemas.microsoft.com/office/powerpoint/2012/main" xmlns:p14="http://schemas.microsoft.com/office/powerpoint/2010/main" xmlns:mc="http://schemas.openxmlformats.org/markup-compatibility/2006" val="SMDATA_15_FLquaRMAAAAlAAAAZAAAAA0AAAAAkAAAAEgAAACQAAAASAAAAAAAAAAAAAAAAQAAAAEAAABQAAAAAAAAAAAA4D8AAAAAAADgPwAAAAAAAOA/AAAAAAAA4D8AAAAAAADgPwAAAAAAAOA/AAAAAAAA4D8AAAAAAADgPwAAAAAAAOA/AAAAAAAA4D8CAAAAjAAAAAAAAAAAAAAAW5vVDP///wgAAAAAAAAAAAAAAAAAAAAAAAAAAAAAAAAAAAAAZAAAAAEAAABAAAAAAAAAAAAAAAAAAAAAAAAAAAAAAAAAAAAAAAAAAAAAAAAAAAAAAAAAAAAAAAAAAAAAAAAAAAAAAAAAAAAAAAAAAAAAAAAAAAAAAAAAAAAAAAAAAAAAFAAAADwAAAAAAAAAAAAAAAAAAAkUAAAAAQAAABQAAAAUAAAAFAAAAAEAAAAAAAAAZAAAAGQAAAAAAAAAZAAAAGQAAAAVAAAAYAAAAAAAAAAAAAAADwAAACADAAAAAAAAAAAAAAEAAACgMgAAVgcAAKr4//8BAAAAf39/AAEAAABkAAAAAAAAABQAAABAHwAAAAAAACYAAAAAAAAAwOD//wAAAAAmAAAAZAAAABYAAABMAAAAAAAAAAAAAAAEAAAAAAAAAAEAAADn5uYKAAAAACgAAAAoAAAAZAAAAGQAAAAAAAAAzMzMAAAAAABQAAAAUAAAAGQAAABkAAAAAAAAABcAAAAUAAAAAAAAAAAAAAD/fwAA/38AAAAAAAAJAAAABAAAAAAAAAAeAAAAaAAAAAAAAAAAAAAAAAAAAAAAAAAAAAAAECcAABAnAAAAAAAAAAAAAAAAAAAAAAAAAAAAAAAAAAAAAAAAAAAAABQAAAAAAAAAwMD/AAAAAABkAAAAMgAAAAAAAABkAAAAAAAAAH9/fwAKAAAAIgAAABgAAAAAAAAAAAAAAAAAAAAAAAAAAAAAAAAAAAAkAAAAJAAAAAAAAAAHAAAAAAAAAAAAAAAAAAAAAAAAAAAAAAAAAAAAf39/ACUAAABYAAAAAAAAAAAAAAAAAAAAAAAAAAAAAAAAAAAAAAAAAAAAAAAAAAAAAAAAAAAAAAA/AAAAAAAAAKCGAQAAAAAAAAAAAAAAAAAMAAAAAQAAAAAAAAAAAAAAAAAAAB8AAABUAAAAAAAABQAAAAEAAAAAAAAAAAAAAAAAAAAAAAAAAAAAAAAAAAAAAAAAAAAAAAJ/f38AAAAAA8zMzADAwP8Af39/AAAAAAAAAAAAAAAAAAAAAAAAAAAAIQAAABgAAAAUAAAAKAUAADsLAADYRQAAACYAABAAAAAmAAAACAAAAAIAAAAAAAAA"/>
               </a:ext>
             </a:extLst>
           </p:cNvSpPr>
@@ -544,7 +556,7 @@
           <a:lstStyle/>
           <a:p>
             <a:pPr>
-              <a:defRPr lang="en-us"/>
+              <a:defRPr lang="en-US"/>
             </a:pPr>
             <a:r>
               <a:t>Click to edit Master text styles</a:t>
@@ -552,7 +564,7 @@
           </a:p>
           <a:p>
             <a:pPr lvl="1">
-              <a:defRPr lang="en-us"/>
+              <a:defRPr lang="en-US"/>
             </a:pPr>
             <a:r>
               <a:t>Second level</a:t>
@@ -560,7 +572,7 @@
           </a:p>
           <a:p>
             <a:pPr lvl="2">
-              <a:defRPr lang="en-us"/>
+              <a:defRPr lang="en-US"/>
             </a:pPr>
             <a:r>
               <a:t>Third level</a:t>
@@ -568,7 +580,7 @@
           </a:p>
           <a:p>
             <a:pPr lvl="3">
-              <a:defRPr lang="en-us"/>
+              <a:defRPr lang="en-US"/>
             </a:pPr>
             <a:r>
               <a:t>Fourth level</a:t>
@@ -576,7 +588,7 @@
           </a:p>
           <a:p>
             <a:pPr lvl="4">
-              <a:defRPr lang="en-us"/>
+              <a:defRPr lang="en-US"/>
             </a:pPr>
             <a:r>
               <a:t>Fifth level</a:t>
@@ -591,7 +603,7 @@
             <a:spLocks noGrp="1" noChangeArrowheads="1"/>
             <a:extLst>
               <a:ext uri="smNativeData">
-                <pr:smNativeData xmlns:pr="smNativeData" xmlns="smNativeData" val="SMDATA_15_FLquaRMAAAAlAAAAZAAAAA0AAAAAkAAAAEgAAACQAAAASAAAAAAAAAABAAAAAAAAAAEAAABQAAAAAAAAAAAA4D8AAAAAAADgPwAAAAAAAOA/AAAAAAAA4D8AAAAAAADgPwAAAAAAAOA/AAAAAAAA4D8AAAAAAADgPwAAAAAAAOA/AAAAAAAA4D8CAAAAjAAAAAAAAAAAAAAAW5vVDP///wgAAAAAAAAAAAAAAAAAAAAAAAAAAAAAAAAAAAAAZAAAAAEAAABAAAAAAAAAAAAAAAAAAAAAAAAAAAAAAAAAAAAAAAAAAAAAAAAAAAAAAAAAAAAAAAAAAAAAAAAAAAAAAAAAAAAAAAAAAAAAAAAAAAAAAAAAAAAAAAAAAAAAFAAAADwAAAAAAAAAAAAAAAAAAAkUAAAAAQAAABQAAAAUAAAAFAAAAAEAAAAAAAAAZAAAAGQAAAAAAAAAZAAAAGQAAAAVAAAAYAAAAAAAAAAAAAAADwAAACADAAAAAAAAAAAAAAEAAACgMgAAVgcAAKr4//8BAAAAf39/AAEAAABkAAAAAAAAABQAAABAHwAAAAAAACYAAAAAAAAAwOD//wAAAAAmAAAAZAAAABYAAABMAAAAAAAAAAAAAAAEAAAAAAAAAAEAAADn5uYKAAAAACgAAAAoAAAAZAAAAGQAAAAAAAAAzMzMAAAAAABQAAAAUAAAAGQAAABkAAAAAAAAABcAAAAUAAAAAAAAAAAAAAD/fwAA/38AAAAAAAAJAAAABAAAAAAAAAAeAAAAaAAAAAAAAAAAAAAAAAAAAAAAAAAAAAAAECcAABAnAAAAAAAAAAAAAAAAAAAAAAAAAAAAAAAAAAAAAAAAAAAAABQAAAAAAAAAwMD/AAAAAABkAAAAMgAAAAAAAABkAAAAAAAAAH9/fwAKAAAAIgAAABgAAAAAAAAAAAAAAAAAAAAAAAAAAAAAAAAAAAAkAAAAJAAAAAAAAAAHAAAAAAAAAAAAAAAAAAAAAAAAAAAAAAAAAAAAf39/ACUAAABYAAAAAAAAAAAAAAAAAAAAAAAAAAAAAAAAAAAAAAAAAAAAAAAAAAAAAAAAAAAAAAA/AAAAAAAAAKCGAQAAAAAAAAAAAAAAAAAMAAAAAQAAAAAAAAAAAAAAAAAAAB8AAABUAAAAAAAABQAAAAEAAAAAAAAAAAAAAAAAAAAAAAAAAAAAAAAAAAAAAAAAAAAAAAJ/f38AAAAAA8zMzADAwP8Af39/AAAAAAAAAAAAAAAAAAAAAAAAAAAAIQAAABgAAAAUAAAAKAUAABonAAAIFgAAWSkAABAAAAAmAAAACAAAAAAAAAAAAAAA"/>
+                <pr:smNativeData xmlns="smNativeData" xmlns:pr="smNativeData" xmlns:p15="http://schemas.microsoft.com/office/powerpoint/2012/main" xmlns:p14="http://schemas.microsoft.com/office/powerpoint/2010/main" xmlns:mc="http://schemas.openxmlformats.org/markup-compatibility/2006" val="SMDATA_15_FLquaRMAAAAlAAAAZAAAAA0AAAAAkAAAAEgAAACQAAAASAAAAAAAAAABAAAAAAAAAAEAAABQAAAAAAAAAAAA4D8AAAAAAADgPwAAAAAAAOA/AAAAAAAA4D8AAAAAAADgPwAAAAAAAOA/AAAAAAAA4D8AAAAAAADgPwAAAAAAAOA/AAAAAAAA4D8CAAAAjAAAAAAAAAAAAAAAW5vVDP///wgAAAAAAAAAAAAAAAAAAAAAAAAAAAAAAAAAAAAAZAAAAAEAAABAAAAAAAAAAAAAAAAAAAAAAAAAAAAAAAAAAAAAAAAAAAAAAAAAAAAAAAAAAAAAAAAAAAAAAAAAAAAAAAAAAAAAAAAAAAAAAAAAAAAAAAAAAAAAAAAAAAAAFAAAADwAAAAAAAAAAAAAAAAAAAkUAAAAAQAAABQAAAAUAAAAFAAAAAEAAAAAAAAAZAAAAGQAAAAAAAAAZAAAAGQAAAAVAAAAYAAAAAAAAAAAAAAADwAAACADAAAAAAAAAAAAAAEAAACgMgAAVgcAAKr4//8BAAAAf39/AAEAAABkAAAAAAAAABQAAABAHwAAAAAAACYAAAAAAAAAwOD//wAAAAAmAAAAZAAAABYAAABMAAAAAAAAAAAAAAAEAAAAAAAAAAEAAADn5uYKAAAAACgAAAAoAAAAZAAAAGQAAAAAAAAAzMzMAAAAAABQAAAAUAAAAGQAAABkAAAAAAAAABcAAAAUAAAAAAAAAAAAAAD/fwAA/38AAAAAAAAJAAAABAAAAAAAAAAeAAAAaAAAAAAAAAAAAAAAAAAAAAAAAAAAAAAAECcAABAnAAAAAAAAAAAAAAAAAAAAAAAAAAAAAAAAAAAAAAAAAAAAABQAAAAAAAAAwMD/AAAAAABkAAAAMgAAAAAAAABkAAAAAAAAAH9/fwAKAAAAIgAAABgAAAAAAAAAAAAAAAAAAAAAAAAAAAAAAAAAAAAkAAAAJAAAAAAAAAAHAAAAAAAAAAAAAAAAAAAAAAAAAAAAAAAAAAAAf39/ACUAAABYAAAAAAAAAAAAAAAAAAAAAAAAAAAAAAAAAAAAAAAAAAAAAAAAAAAAAAAAAAAAAAA/AAAAAAAAAKCGAQAAAAAAAAAAAAAAAAAMAAAAAQAAAAAAAAAAAAAAAAAAAB8AAABUAAAAAAAABQAAAAEAAAAAAAAAAAAAAAAAAAAAAAAAAAAAAAAAAAAAAAAAAAAAAAJ/f38AAAAAA8zMzADAwP8Af39/AAAAAAAAAAAAAAAAAAAAAAAAAAAAIQAAABgAAAAUAAAAKAUAABonAAAIFgAAWSkAABAAAAAmAAAACAAAAAAAAAAAAAAA"/>
               </a:ext>
             </a:extLst>
           </p:cNvSpPr>
@@ -605,11 +617,12 @@
           <a:lstStyle/>
           <a:p>
             <a:pPr>
-              <a:defRPr lang="en-us"/>
+              <a:defRPr lang="en-US"/>
             </a:pPr>
             <a:fld id="{30AE8F9D-D3DD-FB79-9316-252CC1586570}" type="datetime1">
-              <a:t>3/4/2026</a:t>
+              <a:t>4/21/2026</a:t>
             </a:fld>
+            <a:endParaRPr/>
           </a:p>
         </p:txBody>
       </p:sp>
@@ -620,7 +633,7 @@
             <a:spLocks noGrp="1" noChangeArrowheads="1"/>
             <a:extLst>
               <a:ext uri="smNativeData">
-                <pr:smNativeData xmlns:pr="smNativeData" xmlns="smNativeData" val="SMDATA_15_FLquaRMAAAAlAAAAZAAAAA0AAAAAkAAAAEgAAACQAAAASAAAAAAAAAABAAAAAAAAAAEAAABQAAAAAAAAAAAA4D8AAAAAAADgPwAAAAAAAOA/AAAAAAAA4D8AAAAAAADgPwAAAAAAAOA/AAAAAAAA4D8AAAAAAADgPwAAAAAAAOA/AAAAAAAA4D8CAAAAjAAAAAAAAAAAAAAAW5vVDP///wgAAAAAAAAAAAAAAAAAAAAAAAAAAAAAAAAAAAAAZAAAAAEAAABAAAAAAAAAAAAAAAAAAAAAAAAAAAAAAAAAAAAAAAAAAAAAAAAAAAAAAAAAAAAAAAAAAAAAAAAAAAAAAAAAAAAAAAAAAAAAAAAAAAAAAAAAAAAAAAAAAAAAFAAAADwAAAAAAAAAAAAAAAAAAAkUAAAAAQAAABQAAAAUAAAAFAAAAAEAAAAAAAAAZAAAAGQAAAAAAAAAZAAAAGQAAAAVAAAAYAAAAAAAAAAAAAAADwAAACADAAAAAAAAAAAAAAEAAACgMgAAVgcAAKr4//8BAAAAf39/AAEAAABkAAAAAAAAABQAAABAHwAAAAAAACYAAAAAAAAAwOD//wAAAAAmAAAAZAAAABYAAABMAAAAAAAAAAAAAAAEAAAAAAAAAAEAAADn5uYKAAAAACgAAAAoAAAAZAAAAGQAAAAAAAAAzMzMAAAAAABQAAAAUAAAAGQAAABkAAAAAAAAABcAAAAUAAAAAAAAAAAAAAD/fwAA/38AAAAAAAAJAAAABAAAAAAAAAAeAAAAaAAAAAAAAAAAAAAAAAAAAAAAAAAAAAAAECcAABAnAAAAAAAAAAAAAAAAAAAAAAAAAAAAAAAAAAAAAAAAAAAAABQAAAAAAAAAwMD/AAAAAABkAAAAMgAAAAAAAABkAAAAAAAAAH9/fwAKAAAAIgAAABgAAAAAAAAAAAAAAAAAAAAAAAAAAAAAAAAAAAAkAAAAJAAAAAAAAAAHAAAAAAAAAAAAAAAAAAAAAAAAAAAAAAAAAAAAf39/ACUAAABYAAAAAAAAAAAAAAAAAAAAAAAAAAAAAAAAAAAAAAAAAAAAAAAAAAAAAAAAAAAAAAA/AAAAAAAAAKCGAQAAAAAAAAAAAAAAAAAMAAAAAQAAAAAAAAAAAAAAAAAAAB8AAABUAAAAAAAABQAAAAEAAAAAAAAAAAAAAAAAAAAAAAAAAAAAAAAAAAAAAAAAAAAAAAJ/f38AAAAAA8zMzADAwP8Af39/AAAAAAAAAAAAAAAAAAAAAAAAAAAAIQAAABgAAAAUAAAA2BgAABonAAAoMgAAWSkAABAAAAAmAAAACAAAAAAAAAAAAAAA"/>
+                <pr:smNativeData xmlns="smNativeData" xmlns:pr="smNativeData" xmlns:p15="http://schemas.microsoft.com/office/powerpoint/2012/main" xmlns:p14="http://schemas.microsoft.com/office/powerpoint/2010/main" xmlns:mc="http://schemas.openxmlformats.org/markup-compatibility/2006" val="SMDATA_15_FLquaRMAAAAlAAAAZAAAAA0AAAAAkAAAAEgAAACQAAAASAAAAAAAAAABAAAAAAAAAAEAAABQAAAAAAAAAAAA4D8AAAAAAADgPwAAAAAAAOA/AAAAAAAA4D8AAAAAAADgPwAAAAAAAOA/AAAAAAAA4D8AAAAAAADgPwAAAAAAAOA/AAAAAAAA4D8CAAAAjAAAAAAAAAAAAAAAW5vVDP///wgAAAAAAAAAAAAAAAAAAAAAAAAAAAAAAAAAAAAAZAAAAAEAAABAAAAAAAAAAAAAAAAAAAAAAAAAAAAAAAAAAAAAAAAAAAAAAAAAAAAAAAAAAAAAAAAAAAAAAAAAAAAAAAAAAAAAAAAAAAAAAAAAAAAAAAAAAAAAAAAAAAAAFAAAADwAAAAAAAAAAAAAAAAAAAkUAAAAAQAAABQAAAAUAAAAFAAAAAEAAAAAAAAAZAAAAGQAAAAAAAAAZAAAAGQAAAAVAAAAYAAAAAAAAAAAAAAADwAAACADAAAAAAAAAAAAAAEAAACgMgAAVgcAAKr4//8BAAAAf39/AAEAAABkAAAAAAAAABQAAABAHwAAAAAAACYAAAAAAAAAwOD//wAAAAAmAAAAZAAAABYAAABMAAAAAAAAAAAAAAAEAAAAAAAAAAEAAADn5uYKAAAAACgAAAAoAAAAZAAAAGQAAAAAAAAAzMzMAAAAAABQAAAAUAAAAGQAAABkAAAAAAAAABcAAAAUAAAAAAAAAAAAAAD/fwAA/38AAAAAAAAJAAAABAAAAAAAAAAeAAAAaAAAAAAAAAAAAAAAAAAAAAAAAAAAAAAAECcAABAnAAAAAAAAAAAAAAAAAAAAAAAAAAAAAAAAAAAAAAAAAAAAABQAAAAAAAAAwMD/AAAAAABkAAAAMgAAAAAAAABkAAAAAAAAAH9/fwAKAAAAIgAAABgAAAAAAAAAAAAAAAAAAAAAAAAAAAAAAAAAAAAkAAAAJAAAAAAAAAAHAAAAAAAAAAAAAAAAAAAAAAAAAAAAAAAAAAAAf39/ACUAAABYAAAAAAAAAAAAAAAAAAAAAAAAAAAAAAAAAAAAAAAAAAAAAAAAAAAAAAAAAAAAAAA/AAAAAAAAAKCGAQAAAAAAAAAAAAAAAAAMAAAAAQAAAAAAAAAAAAAAAAAAAB8AAABUAAAAAAAABQAAAAEAAAAAAAAAAAAAAAAAAAAAAAAAAAAAAAAAAAAAAAAAAAAAAAJ/f38AAAAAA8zMzADAwP8Af39/AAAAAAAAAAAAAAAAAAAAAAAAAAAAIQAAABgAAAAUAAAA2BgAABonAAAoMgAAWSkAABAAAAAmAAAACAAAAAAAAAAAAAAA"/>
               </a:ext>
             </a:extLst>
           </p:cNvSpPr>
@@ -634,8 +647,9 @@
           <a:lstStyle/>
           <a:p>
             <a:pPr>
-              <a:defRPr lang="en-us"/>
-            </a:pPr>
+              <a:defRPr lang="en-US"/>
+            </a:pPr>
+            <a:endParaRPr/>
           </a:p>
         </p:txBody>
       </p:sp>
@@ -646,7 +660,7 @@
             <a:spLocks noGrp="1" noChangeArrowheads="1"/>
             <a:extLst>
               <a:ext uri="smNativeData">
-                <pr:smNativeData xmlns:pr="smNativeData" xmlns="smNativeData" val="SMDATA_15_FLquaRMAAAAlAAAAZAAAAA0AAAAAkAAAAEgAAACQAAAASAAAAAAAAAABAAAAAAAAAAEAAABQAAAAAAAAAAAA4D8AAAAAAADgPwAAAAAAAOA/AAAAAAAA4D8AAAAAAADgPwAAAAAAAOA/AAAAAAAA4D8AAAAAAADgPwAAAAAAAOA/AAAAAAAA4D8CAAAAjAAAAAAAAAAAAAAAW5vVDP///wgAAAAAAAAAAAAAAAAAAAAAAAAAAAAAAAAAAAAAZAAAAAEAAABAAAAAAAAAAAAAAAAAAAAAAAAAAAAAAAAAAAAAAAAAAAAAAAAAAAAAAAAAAAAAAAAAAAAAAAAAAAAAAAAAAAAAAAAAAAAAAAAAAAAAAAAAAAAAAAAAAAAAFAAAADwAAAAAAAAAAAAAAAAAAAkUAAAAAQAAABQAAAAUAAAAFAAAAAEAAAAAAAAAZAAAAGQAAAAAAAAAZAAAAGQAAAAVAAAAYAAAAAAAAAAAAAAADwAAACADAAAAAAAAAAAAAAEAAACgMgAAVgcAAKr4//8BAAAAf39/AAEAAABkAAAAAAAAABQAAABAHwAAAAAAACYAAAAAAAAAwOD//wAAAAAmAAAAZAAAABYAAABMAAAAAAAAAAAAAAAEAAAAAAAAAAEAAADn5uYKAAAAACgAAAAoAAAAZAAAAGQAAAAAAAAAzMzMAAAAAABQAAAAUAAAAGQAAABkAAAAAAAAABcAAAAUAAAAAAAAAAAAAAD/fwAA/38AAAAAAAAJAAAABAAAAAAAAAAeAAAAaAAAAAAAAAAAAAAAAAAAAAAAAAAAAAAAECcAABAnAAAAAAAAAAAAAAAAAAAAAAAAAAAAAAAAAAAAAAAAAAAAABQAAAAAAAAAwMD/AAAAAABkAAAAMgAAAAAAAABkAAAAAAAAAH9/fwAKAAAAIgAAABgAAAAAAAAAAAAAAAAAAAAAAAAAAAAAAAAAAAAkAAAAJAAAAAAAAAAHAAAAAAAAAAAAAAAAAAAAAAAAAAAAAAAAAAAAf39/ACUAAABYAAAAAAAAAAAAAAAAAAAAAAAAAAAAAAAAAAAAAAAAAAAAAAAAAAAAAAAAAAAAAAA/AAAAAAAAAKCGAQAAAAAAAAAAAAAAAAAMAAAAAQAAAAAAAAAAAAAAAAAAAB8AAABUAAAAAAAABQAAAAEAAAAAAAAAAAAAAAAAAAAAAAAAAAAAAAAAAAAAAAAAAAAAAAJ/f38AAAAAA8zMzADAwP8Af39/AAAAAAAAAAAAAAAAAAAAAAAAAAAAIQAAABgAAAAUAAAA+DQAABonAADYRQAAWSkAABAAAAAmAAAACAAAAAAAAAAAAAAA"/>
+                <pr:smNativeData xmlns="smNativeData" xmlns:pr="smNativeData" xmlns:p15="http://schemas.microsoft.com/office/powerpoint/2012/main" xmlns:p14="http://schemas.microsoft.com/office/powerpoint/2010/main" xmlns:mc="http://schemas.openxmlformats.org/markup-compatibility/2006" val="SMDATA_15_FLquaRMAAAAlAAAAZAAAAA0AAAAAkAAAAEgAAACQAAAASAAAAAAAAAABAAAAAAAAAAEAAABQAAAAAAAAAAAA4D8AAAAAAADgPwAAAAAAAOA/AAAAAAAA4D8AAAAAAADgPwAAAAAAAOA/AAAAAAAA4D8AAAAAAADgPwAAAAAAAOA/AAAAAAAA4D8CAAAAjAAAAAAAAAAAAAAAW5vVDP///wgAAAAAAAAAAAAAAAAAAAAAAAAAAAAAAAAAAAAAZAAAAAEAAABAAAAAAAAAAAAAAAAAAAAAAAAAAAAAAAAAAAAAAAAAAAAAAAAAAAAAAAAAAAAAAAAAAAAAAAAAAAAAAAAAAAAAAAAAAAAAAAAAAAAAAAAAAAAAAAAAAAAAFAAAADwAAAAAAAAAAAAAAAAAAAkUAAAAAQAAABQAAAAUAAAAFAAAAAEAAAAAAAAAZAAAAGQAAAAAAAAAZAAAAGQAAAAVAAAAYAAAAAAAAAAAAAAADwAAACADAAAAAAAAAAAAAAEAAACgMgAAVgcAAKr4//8BAAAAf39/AAEAAABkAAAAAAAAABQAAABAHwAAAAAAACYAAAAAAAAAwOD//wAAAAAmAAAAZAAAABYAAABMAAAAAAAAAAAAAAAEAAAAAAAAAAEAAADn5uYKAAAAACgAAAAoAAAAZAAAAGQAAAAAAAAAzMzMAAAAAABQAAAAUAAAAGQAAABkAAAAAAAAABcAAAAUAAAAAAAAAAAAAAD/fwAA/38AAAAAAAAJAAAABAAAAAAAAAAeAAAAaAAAAAAAAAAAAAAAAAAAAAAAAAAAAAAAECcAABAnAAAAAAAAAAAAAAAAAAAAAAAAAAAAAAAAAAAAAAAAAAAAABQAAAAAAAAAwMD/AAAAAABkAAAAMgAAAAAAAABkAAAAAAAAAH9/fwAKAAAAIgAAABgAAAAAAAAAAAAAAAAAAAAAAAAAAAAAAAAAAAAkAAAAJAAAAAAAAAAHAAAAAAAAAAAAAAAAAAAAAAAAAAAAAAAAAAAAf39/ACUAAABYAAAAAAAAAAAAAAAAAAAAAAAAAAAAAAAAAAAAAAAAAAAAAAAAAAAAAAAAAAAAAAA/AAAAAAAAAKCGAQAAAAAAAAAAAAAAAAAMAAAAAQAAAAAAAAAAAAAAAAAAAB8AAABUAAAAAAAABQAAAAEAAAAAAAAAAAAAAAAAAAAAAAAAAAAAAAAAAAAAAAAAAAAAAAJ/f38AAAAAA8zMzADAwP8Af39/AAAAAAAAAAAAAAAAAAAAAAAAAAAAIQAAABgAAAAUAAAA+DQAABonAADYRQAAWSkAABAAAAAmAAAACAAAAAAAAAAAAAAA"/>
               </a:ext>
             </a:extLst>
           </p:cNvSpPr>
@@ -660,11 +674,12 @@
           <a:lstStyle/>
           <a:p>
             <a:pPr>
-              <a:defRPr lang="en-us"/>
+              <a:defRPr lang="en-US"/>
             </a:pPr>
             <a:fld id="{30AEDDF6-B8DD-FB2B-9316-4E7E9358651B}" type="slidenum">
               <a:t>‹#›</a:t>
             </a:fld>
+            <a:endParaRPr/>
           </a:p>
         </p:txBody>
       </p:sp>
@@ -678,7 +693,7 @@
 </file>
 
 <file path=ppt/slideLayouts/slideLayout11.xml><?xml version="1.0" encoding="utf-8"?>
-<p:sldLayout xmlns:p="http://schemas.openxmlformats.org/presentationml/2006/main" xmlns:mc="http://schemas.openxmlformats.org/markup-compatibility/2006" xmlns:p14="http://schemas.microsoft.com/office/powerpoint/2010/main" xmlns:p15="http://schemas.microsoft.com/office/powerpoint/2012/main" xmlns:r="http://schemas.openxmlformats.org/officeDocument/2006/relationships" xmlns:a="http://schemas.openxmlformats.org/drawingml/2006/main" type="vertTitleAndTx" preserve="1">
+<p:sldLayout xmlns:a="http://schemas.openxmlformats.org/drawingml/2006/main" xmlns:r="http://schemas.openxmlformats.org/officeDocument/2006/relationships" xmlns:p="http://schemas.openxmlformats.org/presentationml/2006/main" type="vertTitleAndTx" preserve="1">
   <p:cSld name="Vertical Title and Text">
     <p:spTree>
       <p:nvGrpSpPr>
@@ -701,7 +716,7 @@
             <a:spLocks noGrp="1" noChangeArrowheads="1"/>
             <a:extLst>
               <a:ext uri="smNativeData">
-                <pr:smNativeData xmlns:pr="smNativeData" xmlns="smNativeData" val="SMDATA_15_FLquaRMAAAAlAAAAZAAAAA0AAAAAkAAAAEgAAACQAAAASAAAAAAAAAABAAAAAQAAAAEAAABQAAAAAAAAAAAA4D8AAAAAAADgPwAAAAAAAOA/AAAAAAAA4D8AAAAAAADgPwAAAAAAAOA/AAAAAAAA4D8AAAAAAADgPwAAAAAAAOA/AAAAAAAA4D8CAAAAjAAAAAAAAAAAAAAAW5vVDP///wgAAAAAAAAAAAAAAAAAAAAAAAAAAAAAAAAAAAAAZAAAAAEAAABAAAAAAAAAAAAAAAAAAAAAAAAAAAAAAAAAAAAAAAAAAAAAAAAAAAAAAAAAAAAAAAAAAAAAAAAAAAAAAAAAAAAAAAAAAAAAAAAAAAAAAAAAAAAAAAAAAAAAFAAAADwAAAAAAAAAAAAAAAAAAAkUAAAAAQAAABQAAAAUAAAAFAAAAAEAAAAAAAAAZAAAAGQAAAAAAAAAZAAAAGQAAAAVAAAAYAAAAAAAAAAAAAAADwAAACADAAAAAAAAAAAAAAEAAACgMgAAVgcAAKr4//8BAAAAf39/AAEAAABkAAAAAAAAABQAAABAHwAAAAAAACYAAAAAAAAAwOD//wAAAAAmAAAAZAAAABYAAABMAAAAAAAAAAAAAAAEAAAAAAAAAAEAAADn5uYKAAAAACgAAAAoAAAAZAAAAGQAAAAAAAAAzMzMAAAAAABQAAAAUAAAAGQAAABkAAAAAAAAABcAAAAUAAAAAAAAAAAAAAD/fwAA/38AAAAAAAAJAAAABAAAAAAAAAAeAAAAaAAAAAAAAAAAAAAAAAAAAAAAAAAAAAAAECcAABAnAAAAAAAAAAAAAAAAAAAAAAAAAAAAAAAAAAAAAAAAAAAAABQAAAAAAAAAwMD/AAAAAABkAAAAMgAAAAAAAABkAAAAAAAAAH9/fwAKAAAAIgAAABgAAAAAAAAAAAAAAAAAAAAAAAAAAAAAAAAAAAAkAAAAJAAAAAAAAAAHAAAAAAAAAAAAAAAAAAAAAAAAAAAAAAAAAAAAf39/ACUAAABYAAAAAAAAAAAAAAAAAAAAAAAAAAAAAAAAAAAAAAAAAAAAAAAAAAAAAAAAAAAAAAA/AAAAAAAAAKCGAQAAAAAAAAAAAAAAAAAMAAAAAQAAAAAAAAAAAAAAAAAAAB8AAABUAAAAAAAABQAAAAEAAAAAAAAAAAAAAAAAAAAAAAAAAAAAAAAAAAAAAAAAAAAAAAJ/f38AAAAAA8zMzADAwP8Af39/AAAAAAAAAAAAAAAAAAAAAAAAAAAAIQAAABgAAAAUAAAArDUAAD8CAADYRQAAACYAABAAAAAmAAAACAAAAAMAAAAAAAAA"/>
+                <pr:smNativeData xmlns="smNativeData" xmlns:pr="smNativeData" xmlns:p15="http://schemas.microsoft.com/office/powerpoint/2012/main" xmlns:p14="http://schemas.microsoft.com/office/powerpoint/2010/main" xmlns:mc="http://schemas.openxmlformats.org/markup-compatibility/2006" val="SMDATA_15_FLquaRMAAAAlAAAAZAAAAA0AAAAAkAAAAEgAAACQAAAASAAAAAAAAAABAAAAAQAAAAEAAABQAAAAAAAAAAAA4D8AAAAAAADgPwAAAAAAAOA/AAAAAAAA4D8AAAAAAADgPwAAAAAAAOA/AAAAAAAA4D8AAAAAAADgPwAAAAAAAOA/AAAAAAAA4D8CAAAAjAAAAAAAAAAAAAAAW5vVDP///wgAAAAAAAAAAAAAAAAAAAAAAAAAAAAAAAAAAAAAZAAAAAEAAABAAAAAAAAAAAAAAAAAAAAAAAAAAAAAAAAAAAAAAAAAAAAAAAAAAAAAAAAAAAAAAAAAAAAAAAAAAAAAAAAAAAAAAAAAAAAAAAAAAAAAAAAAAAAAAAAAAAAAFAAAADwAAAAAAAAAAAAAAAAAAAkUAAAAAQAAABQAAAAUAAAAFAAAAAEAAAAAAAAAZAAAAGQAAAAAAAAAZAAAAGQAAAAVAAAAYAAAAAAAAAAAAAAADwAAACADAAAAAAAAAAAAAAEAAACgMgAAVgcAAKr4//8BAAAAf39/AAEAAABkAAAAAAAAABQAAABAHwAAAAAAACYAAAAAAAAAwOD//wAAAAAmAAAAZAAAABYAAABMAAAAAAAAAAAAAAAEAAAAAAAAAAEAAADn5uYKAAAAACgAAAAoAAAAZAAAAGQAAAAAAAAAzMzMAAAAAABQAAAAUAAAAGQAAABkAAAAAAAAABcAAAAUAAAAAAAAAAAAAAD/fwAA/38AAAAAAAAJAAAABAAAAAAAAAAeAAAAaAAAAAAAAAAAAAAAAAAAAAAAAAAAAAAAECcAABAnAAAAAAAAAAAAAAAAAAAAAAAAAAAAAAAAAAAAAAAAAAAAABQAAAAAAAAAwMD/AAAAAABkAAAAMgAAAAAAAABkAAAAAAAAAH9/fwAKAAAAIgAAABgAAAAAAAAAAAAAAAAAAAAAAAAAAAAAAAAAAAAkAAAAJAAAAAAAAAAHAAAAAAAAAAAAAAAAAAAAAAAAAAAAAAAAAAAAf39/ACUAAABYAAAAAAAAAAAAAAAAAAAAAAAAAAAAAAAAAAAAAAAAAAAAAAAAAAAAAAAAAAAAAAA/AAAAAAAAAKCGAQAAAAAAAAAAAAAAAAAMAAAAAQAAAAAAAAAAAAAAAAAAAB8AAABUAAAAAAAABQAAAAEAAAAAAAAAAAAAAAAAAAAAAAAAAAAAAAAAAAAAAAAAAAAAAAJ/f38AAAAAA8zMzADAwP8Af39/AAAAAAAAAAAAAAAAAAAAAAAAAAAAIQAAABgAAAAUAAAArDUAAD8CAADYRQAAACYAABAAAAAmAAAACAAAAAMAAAAAAAAA"/>
               </a:ext>
             </a:extLst>
           </p:cNvSpPr>
@@ -724,7 +739,7 @@
           <a:lstStyle/>
           <a:p>
             <a:pPr>
-              <a:defRPr lang="en-us"/>
+              <a:defRPr lang="en-US"/>
             </a:pPr>
             <a:r>
               <a:t>Click to edit Master title style</a:t>
@@ -739,7 +754,7 @@
             <a:spLocks noGrp="1" noChangeArrowheads="1"/>
             <a:extLst>
               <a:ext uri="smNativeData">
-                <pr:smNativeData xmlns:pr="smNativeData" xmlns="smNativeData" val="SMDATA_15_FLquaRMAAAAlAAAAZAAAAA0AAAAAkAAAAEgAAACQAAAASAAAAAAAAAAAAAAAAQAAAAEAAABQAAAAAAAAAAAA4D8AAAAAAADgPwAAAAAAAOA/AAAAAAAA4D8AAAAAAADgPwAAAAAAAOA/AAAAAAAA4D8AAAAAAADgPwAAAAAAAOA/AAAAAAAA4D8CAAAAjAAAAAAAAAAAAAAAW5vVDP///wgAAAAAAAAAAAAAAAAAAAAAAAAAAAAAAAAAAAAAZAAAAAEAAABAAAAAAAAAAAAAAAAAAAAAAAAAAAAAAAAAAAAAAAAAAAAAAAAAAAAAAAAAAAAAAAAAAAAAAAAAAAAAAAAAAAAAAAAAAAAAAAAAAAAAAAAAAAAAAAAAAAAAFAAAADwAAAAAAAAAAAAAAAAAAAkUAAAAAQAAABQAAAAUAAAAFAAAAAEAAAAAAAAAZAAAAGQAAAAAAAAAZAAAAGQAAAAVAAAAYAAAAAAAAAAAAAAADwAAACADAAAAAAAAAAAAAAEAAACgMgAAVgcAAKr4//8BAAAAf39/AAEAAABkAAAAAAAAABQAAABAHwAAAAAAACYAAAAAAAAAwOD//wAAAAAmAAAAZAAAABYAAABMAAAAAAAAAAAAAAAEAAAAAAAAAAEAAADn5uYKAAAAACgAAAAoAAAAZAAAAGQAAAAAAAAAzMzMAAAAAABQAAAAUAAAAGQAAABkAAAAAAAAABcAAAAUAAAAAAAAAAAAAAD/fwAA/38AAAAAAAAJAAAABAAAAAAAAAAeAAAAaAAAAAAAAAAAAAAAAAAAAAAAAAAAAAAAECcAABAnAAAAAAAAAAAAAAAAAAAAAAAAAAAAAAAAAAAAAAAAAAAAABQAAAAAAAAAwMD/AAAAAABkAAAAMgAAAAAAAABkAAAAAAAAAH9/fwAKAAAAIgAAABgAAAAAAAAAAAAAAAAAAAAAAAAAAAAAAAAAAAAkAAAAJAAAAAAAAAAHAAAAAAAAAAAAAAAAAAAAAAAAAAAAAAAAAAAAf39/ACUAAABYAAAAAAAAAAAAAAAAAAAAAAAAAAAAAAAAAAAAAAAAAAAAAAAAAAAAAAAAAAAAAAA/AAAAAAAAAKCGAQAAAAAAAAAAAAAAAAAMAAAAAQAAAAAAAAAAAAAAAAAAAB8AAABUAAAAAAAABQAAAAEAAAAAAAAAAAAAAAAAAAAAAAAAAAAAAAAAAAAAAAAAAAAAAAJ/f38AAAAAA8zMzADAwP8Af39/AAAAAAAAAAAAAAAAAAAAAAAAAAAAIQAAABgAAAAUAAAAKAUAAD8CAAC8NAAAACYAABAAAAAmAAAACAAAAAMAAAAAAAAA"/>
+                <pr:smNativeData xmlns="smNativeData" xmlns:pr="smNativeData" xmlns:p15="http://schemas.microsoft.com/office/powerpoint/2012/main" xmlns:p14="http://schemas.microsoft.com/office/powerpoint/2010/main" xmlns:mc="http://schemas.openxmlformats.org/markup-compatibility/2006" val="SMDATA_15_FLquaRMAAAAlAAAAZAAAAA0AAAAAkAAAAEgAAACQAAAASAAAAAAAAAAAAAAAAQAAAAEAAABQAAAAAAAAAAAA4D8AAAAAAADgPwAAAAAAAOA/AAAAAAAA4D8AAAAAAADgPwAAAAAAAOA/AAAAAAAA4D8AAAAAAADgPwAAAAAAAOA/AAAAAAAA4D8CAAAAjAAAAAAAAAAAAAAAW5vVDP///wgAAAAAAAAAAAAAAAAAAAAAAAAAAAAAAAAAAAAAZAAAAAEAAABAAAAAAAAAAAAAAAAAAAAAAAAAAAAAAAAAAAAAAAAAAAAAAAAAAAAAAAAAAAAAAAAAAAAAAAAAAAAAAAAAAAAAAAAAAAAAAAAAAAAAAAAAAAAAAAAAAAAAFAAAADwAAAAAAAAAAAAAAAAAAAkUAAAAAQAAABQAAAAUAAAAFAAAAAEAAAAAAAAAZAAAAGQAAAAAAAAAZAAAAGQAAAAVAAAAYAAAAAAAAAAAAAAADwAAACADAAAAAAAAAAAAAAEAAACgMgAAVgcAAKr4//8BAAAAf39/AAEAAABkAAAAAAAAABQAAABAHwAAAAAAACYAAAAAAAAAwOD//wAAAAAmAAAAZAAAABYAAABMAAAAAAAAAAAAAAAEAAAAAAAAAAEAAADn5uYKAAAAACgAAAAoAAAAZAAAAGQAAAAAAAAAzMzMAAAAAABQAAAAUAAAAGQAAABkAAAAAAAAABcAAAAUAAAAAAAAAAAAAAD/fwAA/38AAAAAAAAJAAAABAAAAAAAAAAeAAAAaAAAAAAAAAAAAAAAAAAAAAAAAAAAAAAAECcAABAnAAAAAAAAAAAAAAAAAAAAAAAAAAAAAAAAAAAAAAAAAAAAABQAAAAAAAAAwMD/AAAAAABkAAAAMgAAAAAAAABkAAAAAAAAAH9/fwAKAAAAIgAAABgAAAAAAAAAAAAAAAAAAAAAAAAAAAAAAAAAAAAkAAAAJAAAAAAAAAAHAAAAAAAAAAAAAAAAAAAAAAAAAAAAAAAAAAAAf39/ACUAAABYAAAAAAAAAAAAAAAAAAAAAAAAAAAAAAAAAAAAAAAAAAAAAAAAAAAAAAAAAAAAAAA/AAAAAAAAAKCGAQAAAAAAAAAAAAAAAAAMAAAAAQAAAAAAAAAAAAAAAAAAAB8AAABUAAAAAAAABQAAAAEAAAAAAAAAAAAAAAAAAAAAAAAAAAAAAAAAAAAAAAAAAAAAAAJ/f38AAAAAA8zMzADAwP8Af39/AAAAAAAAAAAAAAAAAAAAAAAAAAAAIQAAABgAAAAUAAAAKAUAAD8CAAC8NAAAACYAABAAAAAmAAAACAAAAAMAAAAAAAAA"/>
               </a:ext>
             </a:extLst>
           </p:cNvSpPr>
@@ -762,7 +777,7 @@
           <a:lstStyle/>
           <a:p>
             <a:pPr>
-              <a:defRPr lang="en-us"/>
+              <a:defRPr lang="en-US"/>
             </a:pPr>
             <a:r>
               <a:t>Click to edit Master text styles</a:t>
@@ -770,7 +785,7 @@
           </a:p>
           <a:p>
             <a:pPr lvl="1">
-              <a:defRPr lang="en-us"/>
+              <a:defRPr lang="en-US"/>
             </a:pPr>
             <a:r>
               <a:t>Second level</a:t>
@@ -778,7 +793,7 @@
           </a:p>
           <a:p>
             <a:pPr lvl="2">
-              <a:defRPr lang="en-us"/>
+              <a:defRPr lang="en-US"/>
             </a:pPr>
             <a:r>
               <a:t>Third level</a:t>
@@ -786,7 +801,7 @@
           </a:p>
           <a:p>
             <a:pPr lvl="3">
-              <a:defRPr lang="en-us"/>
+              <a:defRPr lang="en-US"/>
             </a:pPr>
             <a:r>
               <a:t>Fourth level</a:t>
@@ -794,7 +809,7 @@
           </a:p>
           <a:p>
             <a:pPr lvl="4">
-              <a:defRPr lang="en-us"/>
+              <a:defRPr lang="en-US"/>
             </a:pPr>
             <a:r>
               <a:t>Fifth level</a:t>
@@ -809,7 +824,7 @@
             <a:spLocks noGrp="1" noChangeArrowheads="1"/>
             <a:extLst>
               <a:ext uri="smNativeData">
-                <pr:smNativeData xmlns:pr="smNativeData" xmlns="smNativeData" val="SMDATA_15_FLquaRMAAAAlAAAAZAAAAA0AAAAAkAAAAEgAAACQAAAASAAAAAAAAAABAAAAAAAAAAEAAABQAAAAAAAAAAAA4D8AAAAAAADgPwAAAAAAAOA/AAAAAAAA4D8AAAAAAADgPwAAAAAAAOA/AAAAAAAA4D8AAAAAAADgPwAAAAAAAOA/AAAAAAAA4D8CAAAAjAAAAAAAAAAAAAAAW5vVDP///wgAAAAAAAAAAAAAAAAAAAAAAAAAAAAAAAAAAAAAZAAAAAEAAABAAAAAAAAAAAAAAAAAAAAAAAAAAAAAAAAAAAAAAAAAAAAAAAAAAAAAAAAAAAAAAAAAAAAAAAAAAAAAAAAAAAAAAAAAAAAAAAAAAAAAAAAAAAAAAAAAAAAAFAAAADwAAAAAAAAAAAAAAAAAAAkUAAAAAQAAABQAAAAUAAAAFAAAAAEAAAAAAAAAZAAAAGQAAAAAAAAAZAAAAGQAAAAVAAAAYAAAAAAAAAAAAAAADwAAACADAAAAAAAAAAAAAAEAAACgMgAAVgcAAKr4//8BAAAAf39/AAEAAABkAAAAAAAAABQAAABAHwAAAAAAACYAAAAAAAAAwOD//wAAAAAmAAAAZAAAABYAAABMAAAAAAAAAAAAAAAEAAAAAAAAAAEAAADn5uYKAAAAACgAAAAoAAAAZAAAAGQAAAAAAAAAzMzMAAAAAABQAAAAUAAAAGQAAABkAAAAAAAAABcAAAAUAAAAAAAAAAAAAAD/fwAA/38AAAAAAAAJAAAABAAAAAAAAAAeAAAAaAAAAAAAAAAAAAAAAAAAAAAAAAAAAAAAECcAABAnAAAAAAAAAAAAAAAAAAAAAAAAAAAAAAAAAAAAAAAAAAAAABQAAAAAAAAAwMD/AAAAAABkAAAAMgAAAAAAAABkAAAAAAAAAH9/fwAKAAAAIgAAABgAAAAAAAAAAAAAAAAAAAAAAAAAAAAAAAAAAAAkAAAAJAAAAAAAAAAHAAAAAAAAAAAAAAAAAAAAAAAAAAAAAAAAAAAAf39/ACUAAABYAAAAAAAAAAAAAAAAAAAAAAAAAAAAAAAAAAAAAAAAAAAAAAAAAAAAAAAAAAAAAAA/AAAAAAAAAKCGAQAAAAAAAAAAAAAAAAAMAAAAAQAAAAAAAAAAAAAAAAAAAB8AAABUAAAAAAAABQAAAAEAAAAAAAAAAAAAAAAAAAAAAAAAAAAAAAAAAAAAAAAAAAAAAAJ/f38AAAAAA8zMzADAwP8Af39/AAAAAAAAAAAAAAAAAAAAAAAAAAAAIQAAABgAAAAUAAAAKAUAABonAAAIFgAAWSkAABAAAAAmAAAACAAAAAAAAAAAAAAA"/>
+                <pr:smNativeData xmlns="smNativeData" xmlns:pr="smNativeData" xmlns:p15="http://schemas.microsoft.com/office/powerpoint/2012/main" xmlns:p14="http://schemas.microsoft.com/office/powerpoint/2010/main" xmlns:mc="http://schemas.openxmlformats.org/markup-compatibility/2006" val="SMDATA_15_FLquaRMAAAAlAAAAZAAAAA0AAAAAkAAAAEgAAACQAAAASAAAAAAAAAABAAAAAAAAAAEAAABQAAAAAAAAAAAA4D8AAAAAAADgPwAAAAAAAOA/AAAAAAAA4D8AAAAAAADgPwAAAAAAAOA/AAAAAAAA4D8AAAAAAADgPwAAAAAAAOA/AAAAAAAA4D8CAAAAjAAAAAAAAAAAAAAAW5vVDP///wgAAAAAAAAAAAAAAAAAAAAAAAAAAAAAAAAAAAAAZAAAAAEAAABAAAAAAAAAAAAAAAAAAAAAAAAAAAAAAAAAAAAAAAAAAAAAAAAAAAAAAAAAAAAAAAAAAAAAAAAAAAAAAAAAAAAAAAAAAAAAAAAAAAAAAAAAAAAAAAAAAAAAFAAAADwAAAAAAAAAAAAAAAAAAAkUAAAAAQAAABQAAAAUAAAAFAAAAAEAAAAAAAAAZAAAAGQAAAAAAAAAZAAAAGQAAAAVAAAAYAAAAAAAAAAAAAAADwAAACADAAAAAAAAAAAAAAEAAACgMgAAVgcAAKr4//8BAAAAf39/AAEAAABkAAAAAAAAABQAAABAHwAAAAAAACYAAAAAAAAAwOD//wAAAAAmAAAAZAAAABYAAABMAAAAAAAAAAAAAAAEAAAAAAAAAAEAAADn5uYKAAAAACgAAAAoAAAAZAAAAGQAAAAAAAAAzMzMAAAAAABQAAAAUAAAAGQAAABkAAAAAAAAABcAAAAUAAAAAAAAAAAAAAD/fwAA/38AAAAAAAAJAAAABAAAAAAAAAAeAAAAaAAAAAAAAAAAAAAAAAAAAAAAAAAAAAAAECcAABAnAAAAAAAAAAAAAAAAAAAAAAAAAAAAAAAAAAAAAAAAAAAAABQAAAAAAAAAwMD/AAAAAABkAAAAMgAAAAAAAABkAAAAAAAAAH9/fwAKAAAAIgAAABgAAAAAAAAAAAAAAAAAAAAAAAAAAAAAAAAAAAAkAAAAJAAAAAAAAAAHAAAAAAAAAAAAAAAAAAAAAAAAAAAAAAAAAAAAf39/ACUAAABYAAAAAAAAAAAAAAAAAAAAAAAAAAAAAAAAAAAAAAAAAAAAAAAAAAAAAAAAAAAAAAA/AAAAAAAAAKCGAQAAAAAAAAAAAAAAAAAMAAAAAQAAAAAAAAAAAAAAAAAAAB8AAABUAAAAAAAABQAAAAEAAAAAAAAAAAAAAAAAAAAAAAAAAAAAAAAAAAAAAAAAAAAAAAJ/f38AAAAAA8zMzADAwP8Af39/AAAAAAAAAAAAAAAAAAAAAAAAAAAAIQAAABgAAAAUAAAAKAUAABonAAAIFgAAWSkAABAAAAAmAAAACAAAAAAAAAAAAAAA"/>
               </a:ext>
             </a:extLst>
           </p:cNvSpPr>
@@ -823,11 +838,12 @@
           <a:lstStyle/>
           <a:p>
             <a:pPr>
-              <a:defRPr lang="en-us"/>
+              <a:defRPr lang="en-US"/>
             </a:pPr>
             <a:fld id="{30AEF476-38DD-FB02-9316-CE57BA58659B}" type="datetime1">
-              <a:t>3/4/2026</a:t>
+              <a:t>4/21/2026</a:t>
             </a:fld>
+            <a:endParaRPr/>
           </a:p>
         </p:txBody>
       </p:sp>
@@ -838,7 +854,7 @@
             <a:spLocks noGrp="1" noChangeArrowheads="1"/>
             <a:extLst>
               <a:ext uri="smNativeData">
-                <pr:smNativeData xmlns:pr="smNativeData" xmlns="smNativeData" val="SMDATA_15_FLquaRMAAAAlAAAAZAAAAA0AAAAAkAAAAEgAAACQAAAASAAAAAAAAAABAAAAAAAAAAEAAABQAAAAAAAAAAAA4D8AAAAAAADgPwAAAAAAAOA/AAAAAAAA4D8AAAAAAADgPwAAAAAAAOA/AAAAAAAA4D8AAAAAAADgPwAAAAAAAOA/AAAAAAAA4D8CAAAAjAAAAAAAAAAAAAAAW5vVDP///wgAAAAAAAAAAAAAAAAAAAAAAAAAAAAAAAAAAAAAZAAAAAEAAABAAAAAAAAAAAAAAAAAAAAAAAAAAAAAAAAAAAAAAAAAAAAAAAAAAAAAAAAAAAAAAAAAAAAAAAAAAAAAAAAAAAAAAAAAAAAAAAAAAAAAAAAAAAAAAAAAAAAAFAAAADwAAAAAAAAAAAAAAAAAAAkUAAAAAQAAABQAAAAUAAAAFAAAAAEAAAAAAAAAZAAAAGQAAAAAAAAAZAAAAGQAAAAVAAAAYAAAAAAAAAAAAAAADwAAACADAAAAAAAAAAAAAAEAAACgMgAAVgcAAKr4//8BAAAAf39/AAEAAABkAAAAAAAAABQAAABAHwAAAAAAACYAAAAAAAAAwOD//wAAAAAmAAAAZAAAABYAAABMAAAAAAAAAAAAAAAEAAAAAAAAAAEAAADn5uYKAAAAACgAAAAoAAAAZAAAAGQAAAAAAAAAzMzMAAAAAABQAAAAUAAAAGQAAABkAAAAAAAAABcAAAAUAAAAAAAAAAAAAAD/fwAA/38AAAAAAAAJAAAABAAAAAAAAAAeAAAAaAAAAAAAAAAAAAAAAAAAAAAAAAAAAAAAECcAABAnAAAAAAAAAAAAAAAAAAAAAAAAAAAAAAAAAAAAAAAAAAAAABQAAAAAAAAAwMD/AAAAAABkAAAAMgAAAAAAAABkAAAAAAAAAH9/fwAKAAAAIgAAABgAAAAAAAAAAAAAAAAAAAAAAAAAAAAAAAAAAAAkAAAAJAAAAAAAAAAHAAAAAAAAAAAAAAAAAAAAAAAAAAAAAAAAAAAAf39/ACUAAABYAAAAAAAAAAAAAAAAAAAAAAAAAAAAAAAAAAAAAAAAAAAAAAAAAAAAAAAAAAAAAAA/AAAAAAAAAKCGAQAAAAAAAAAAAAAAAAAMAAAAAQAAAAAAAAAAAAAAAAAAAB8AAABUAAAAAAAABQAAAAEAAAAAAAAAAAAAAAAAAAAAAAAAAAAAAAAAAAAAAAAAAAAAAAJ/f38AAAAAA8zMzADAwP8Af39/AAAAAAAAAAAAAAAAAAAAAAAAAAAAIQAAABgAAAAUAAAA2BgAABonAAAoMgAAWSkAABAAAAAmAAAACAAAAAAAAAAAAAAA"/>
+                <pr:smNativeData xmlns="smNativeData" xmlns:pr="smNativeData" xmlns:p15="http://schemas.microsoft.com/office/powerpoint/2012/main" xmlns:p14="http://schemas.microsoft.com/office/powerpoint/2010/main" xmlns:mc="http://schemas.openxmlformats.org/markup-compatibility/2006" val="SMDATA_15_FLquaRMAAAAlAAAAZAAAAA0AAAAAkAAAAEgAAACQAAAASAAAAAAAAAABAAAAAAAAAAEAAABQAAAAAAAAAAAA4D8AAAAAAADgPwAAAAAAAOA/AAAAAAAA4D8AAAAAAADgPwAAAAAAAOA/AAAAAAAA4D8AAAAAAADgPwAAAAAAAOA/AAAAAAAA4D8CAAAAjAAAAAAAAAAAAAAAW5vVDP///wgAAAAAAAAAAAAAAAAAAAAAAAAAAAAAAAAAAAAAZAAAAAEAAABAAAAAAAAAAAAAAAAAAAAAAAAAAAAAAAAAAAAAAAAAAAAAAAAAAAAAAAAAAAAAAAAAAAAAAAAAAAAAAAAAAAAAAAAAAAAAAAAAAAAAAAAAAAAAAAAAAAAAFAAAADwAAAAAAAAAAAAAAAAAAAkUAAAAAQAAABQAAAAUAAAAFAAAAAEAAAAAAAAAZAAAAGQAAAAAAAAAZAAAAGQAAAAVAAAAYAAAAAAAAAAAAAAADwAAACADAAAAAAAAAAAAAAEAAACgMgAAVgcAAKr4//8BAAAAf39/AAEAAABkAAAAAAAAABQAAABAHwAAAAAAACYAAAAAAAAAwOD//wAAAAAmAAAAZAAAABYAAABMAAAAAAAAAAAAAAAEAAAAAAAAAAEAAADn5uYKAAAAACgAAAAoAAAAZAAAAGQAAAAAAAAAzMzMAAAAAABQAAAAUAAAAGQAAABkAAAAAAAAABcAAAAUAAAAAAAAAAAAAAD/fwAA/38AAAAAAAAJAAAABAAAAAAAAAAeAAAAaAAAAAAAAAAAAAAAAAAAAAAAAAAAAAAAECcAABAnAAAAAAAAAAAAAAAAAAAAAAAAAAAAAAAAAAAAAAAAAAAAABQAAAAAAAAAwMD/AAAAAABkAAAAMgAAAAAAAABkAAAAAAAAAH9/fwAKAAAAIgAAABgAAAAAAAAAAAAAAAAAAAAAAAAAAAAAAAAAAAAkAAAAJAAAAAAAAAAHAAAAAAAAAAAAAAAAAAAAAAAAAAAAAAAAAAAAf39/ACUAAABYAAAAAAAAAAAAAAAAAAAAAAAAAAAAAAAAAAAAAAAAAAAAAAAAAAAAAAAAAAAAAAA/AAAAAAAAAKCGAQAAAAAAAAAAAAAAAAAMAAAAAQAAAAAAAAAAAAAAAAAAAB8AAABUAAAAAAAABQAAAAEAAAAAAAAAAAAAAAAAAAAAAAAAAAAAAAAAAAAAAAAAAAAAAAJ/f38AAAAAA8zMzADAwP8Af39/AAAAAAAAAAAAAAAAAAAAAAAAAAAAIQAAABgAAAAUAAAA2BgAABonAAAoMgAAWSkAABAAAAAmAAAACAAAAAAAAAAAAAAA"/>
               </a:ext>
             </a:extLst>
           </p:cNvSpPr>
@@ -852,8 +868,9 @@
           <a:lstStyle/>
           <a:p>
             <a:pPr>
-              <a:defRPr lang="en-us"/>
-            </a:pPr>
+              <a:defRPr lang="en-US"/>
+            </a:pPr>
+            <a:endParaRPr/>
           </a:p>
         </p:txBody>
       </p:sp>
@@ -864,7 +881,7 @@
             <a:spLocks noGrp="1" noChangeArrowheads="1"/>
             <a:extLst>
               <a:ext uri="smNativeData">
-                <pr:smNativeData xmlns:pr="smNativeData" xmlns="smNativeData" val="SMDATA_15_FLquaRMAAAAlAAAAZAAAAA0AAAAAkAAAAEgAAACQAAAASAAAAAAAAAABAAAAAAAAAAEAAABQAAAAAAAAAAAA4D8AAAAAAADgPwAAAAAAAOA/AAAAAAAA4D8AAAAAAADgPwAAAAAAAOA/AAAAAAAA4D8AAAAAAADgPwAAAAAAAOA/AAAAAAAA4D8CAAAAjAAAAAAAAAAAAAAAW5vVDP///wgAAAAAAAAAAAAAAAAAAAAAAAAAAAAAAAAAAAAAZAAAAAEAAABAAAAAAAAAAAAAAAAAAAAAAAAAAAAAAAAAAAAAAAAAAAAAAAAAAAAAAAAAAAAAAAAAAAAAAAAAAAAAAAAAAAAAAAAAAAAAAAAAAAAAAAAAAAAAAAAAAAAAFAAAADwAAAAAAAAAAAAAAAAAAAkUAAAAAQAAABQAAAAUAAAAFAAAAAEAAAAAAAAAZAAAAGQAAAAAAAAAZAAAAGQAAAAVAAAAYAAAAAAAAAAAAAAADwAAACADAAAAAAAAAAAAAAEAAACgMgAAVgcAAKr4//8BAAAAf39/AAEAAABkAAAAAAAAABQAAABAHwAAAAAAACYAAAAAAAAAwOD//wAAAAAmAAAAZAAAABYAAABMAAAAAAAAAAAAAAAEAAAAAAAAAAEAAADn5uYKAAAAACgAAAAoAAAAZAAAAGQAAAAAAAAAzMzMAAAAAABQAAAAUAAAAGQAAABkAAAAAAAAABcAAAAUAAAAAAAAAAAAAAD/fwAA/38AAAAAAAAJAAAABAAAAAAAAAAeAAAAaAAAAAAAAAAAAAAAAAAAAAAAAAAAAAAAECcAABAnAAAAAAAAAAAAAAAAAAAAAAAAAAAAAAAAAAAAAAAAAAAAABQAAAAAAAAAwMD/AAAAAABkAAAAMgAAAAAAAABkAAAAAAAAAH9/fwAKAAAAIgAAABgAAAAAAAAAAAAAAAAAAAAAAAAAAAAAAAAAAAAkAAAAJAAAAAAAAAAHAAAAAAAAAAAAAAAAAAAAAAAAAAAAAAAAAAAAf39/ACUAAABYAAAAAAAAAAAAAAAAAAAAAAAAAAAAAAAAAAAAAAAAAAAAAAAAAAAAAAAAAAAAAAA/AAAAAAAAAKCGAQAAAAAAAAAAAAAAAAAMAAAAAQAAAAAAAAAAAAAAAAAAAB8AAABUAAAAAAAABQAAAAEAAAAAAAAAAAAAAAAAAAAAAAAAAAAAAAAAAAAAAAAAAAAAAAJ/f38AAAAAA8zMzADAwP8Af39/AAAAAAAAAAAAAAAAAAAAAAAAAAAAIQAAABgAAAAUAAAA+DQAABonAADYRQAAWSkAABAAAAAmAAAACAAAAAAAAAAAAAAA"/>
+                <pr:smNativeData xmlns="smNativeData" xmlns:pr="smNativeData" xmlns:p15="http://schemas.microsoft.com/office/powerpoint/2012/main" xmlns:p14="http://schemas.microsoft.com/office/powerpoint/2010/main" xmlns:mc="http://schemas.openxmlformats.org/markup-compatibility/2006" val="SMDATA_15_FLquaRMAAAAlAAAAZAAAAA0AAAAAkAAAAEgAAACQAAAASAAAAAAAAAABAAAAAAAAAAEAAABQAAAAAAAAAAAA4D8AAAAAAADgPwAAAAAAAOA/AAAAAAAA4D8AAAAAAADgPwAAAAAAAOA/AAAAAAAA4D8AAAAAAADgPwAAAAAAAOA/AAAAAAAA4D8CAAAAjAAAAAAAAAAAAAAAW5vVDP///wgAAAAAAAAAAAAAAAAAAAAAAAAAAAAAAAAAAAAAZAAAAAEAAABAAAAAAAAAAAAAAAAAAAAAAAAAAAAAAAAAAAAAAAAAAAAAAAAAAAAAAAAAAAAAAAAAAAAAAAAAAAAAAAAAAAAAAAAAAAAAAAAAAAAAAAAAAAAAAAAAAAAAFAAAADwAAAAAAAAAAAAAAAAAAAkUAAAAAQAAABQAAAAUAAAAFAAAAAEAAAAAAAAAZAAAAGQAAAAAAAAAZAAAAGQAAAAVAAAAYAAAAAAAAAAAAAAADwAAACADAAAAAAAAAAAAAAEAAACgMgAAVgcAAKr4//8BAAAAf39/AAEAAABkAAAAAAAAABQAAABAHwAAAAAAACYAAAAAAAAAwOD//wAAAAAmAAAAZAAAABYAAABMAAAAAAAAAAAAAAAEAAAAAAAAAAEAAADn5uYKAAAAACgAAAAoAAAAZAAAAGQAAAAAAAAAzMzMAAAAAABQAAAAUAAAAGQAAABkAAAAAAAAABcAAAAUAAAAAAAAAAAAAAD/fwAA/38AAAAAAAAJAAAABAAAAAAAAAAeAAAAaAAAAAAAAAAAAAAAAAAAAAAAAAAAAAAAECcAABAnAAAAAAAAAAAAAAAAAAAAAAAAAAAAAAAAAAAAAAAAAAAAABQAAAAAAAAAwMD/AAAAAABkAAAAMgAAAAAAAABkAAAAAAAAAH9/fwAKAAAAIgAAABgAAAAAAAAAAAAAAAAAAAAAAAAAAAAAAAAAAAAkAAAAJAAAAAAAAAAHAAAAAAAAAAAAAAAAAAAAAAAAAAAAAAAAAAAAf39/ACUAAABYAAAAAAAAAAAAAAAAAAAAAAAAAAAAAAAAAAAAAAAAAAAAAAAAAAAAAAAAAAAAAAA/AAAAAAAAAKCGAQAAAAAAAAAAAAAAAAAMAAAAAQAAAAAAAAAAAAAAAAAAAB8AAABUAAAAAAAABQAAAAEAAAAAAAAAAAAAAAAAAAAAAAAAAAAAAAAAAAAAAAAAAAAAAAJ/f38AAAAAA8zMzADAwP8Af39/AAAAAAAAAAAAAAAAAAAAAAAAAAAAIQAAABgAAAAUAAAA+DQAABonAADYRQAAWSkAABAAAAAmAAAACAAAAAAAAAAAAAAA"/>
               </a:ext>
             </a:extLst>
           </p:cNvSpPr>
@@ -878,11 +895,12 @@
           <a:lstStyle/>
           <a:p>
             <a:pPr>
-              <a:defRPr lang="en-us"/>
+              <a:defRPr lang="en-US"/>
             </a:pPr>
             <a:fld id="{30AECEC0-8EDD-FB38-9316-786D8058652D}" type="slidenum">
               <a:t>‹#›</a:t>
             </a:fld>
+            <a:endParaRPr/>
           </a:p>
         </p:txBody>
       </p:sp>
@@ -896,7 +914,7 @@
 </file>
 
 <file path=ppt/slideLayouts/slideLayout2.xml><?xml version="1.0" encoding="utf-8"?>
-<p:sldLayout xmlns:p="http://schemas.openxmlformats.org/presentationml/2006/main" xmlns:mc="http://schemas.openxmlformats.org/markup-compatibility/2006" xmlns:p14="http://schemas.microsoft.com/office/powerpoint/2010/main" xmlns:p15="http://schemas.microsoft.com/office/powerpoint/2012/main" xmlns:r="http://schemas.openxmlformats.org/officeDocument/2006/relationships" xmlns:a="http://schemas.openxmlformats.org/drawingml/2006/main" type="obj" preserve="1">
+<p:sldLayout xmlns:a="http://schemas.openxmlformats.org/drawingml/2006/main" xmlns:r="http://schemas.openxmlformats.org/officeDocument/2006/relationships" xmlns:p="http://schemas.openxmlformats.org/presentationml/2006/main" type="obj" preserve="1">
   <p:cSld name="Title and Content">
     <p:spTree>
       <p:nvGrpSpPr>
@@ -919,7 +937,7 @@
             <a:spLocks noGrp="1" noChangeArrowheads="1"/>
             <a:extLst>
               <a:ext uri="smNativeData">
-                <pr:smNativeData xmlns:pr="smNativeData" xmlns="smNativeData" val="SMDATA_15_FLquaRMAAAAlAAAAZAAAAA0AAAAAkAAAAEgAAACQAAAASAAAAAAAAAABAAAAAAAAAAEAAABQAAAAAAAAAAAA4D8AAAAAAADgPwAAAAAAAOA/AAAAAAAA4D8AAAAAAADgPwAAAAAAAOA/AAAAAAAA4D8AAAAAAADgPwAAAAAAAOA/AAAAAAAA4D8CAAAAjAAAAAAAAAAAAAAAW5vVDP///wgAAAAAAAAAAAAAAAAAAAAAAAAAAAAAAAAAAAAAZAAAAAEAAABAAAAAAAAAAAAAAAAAAAAAAAAAAAAAAAAAAAAAAAAAAAAAAAAAAAAAAAAAAAAAAAAAAAAAAAAAAAAAAAAAAAAAAAAAAAAAAAAAAAAAAAAAAAAAAAAAAAAAFAAAADwAAAAAAAAAAAAAAAAAAAkUAAAAAQAAABQAAAAUAAAAFAAAAAEAAAAAAAAAZAAAAGQAAAAAAAAAZAAAAGQAAAAVAAAAYAAAAAAAAAAAAAAADwAAACADAAAAAAAAAAAAAAEAAACgMgAAVgcAAKr4//8BAAAAf39/AAEAAABkAAAAAAAAABQAAABAHwAAAAAAACYAAAAAAAAAwOD//wAAAAAmAAAAZAAAABYAAABMAAAAAAAAAAAAAAAEAAAAAAAAAAEAAADn5uYKAAAAACgAAAAoAAAAZAAAAGQAAAAAAAAAzMzMAAAAAABQAAAAUAAAAGQAAABkAAAAAAAAABcAAAAUAAAAAAAAAAAAAAD/fwAA/38AAAAAAAAJAAAABAAAAGxpY2keAAAAaAAAAAAAAAAAAAAAAAAAAAAAAAAAAAAAECcAABAnAAAAAAAAAAAAAAAAAAAAAAAAAAAAAAAAAAAAAAAAAAAAABQAAAAAAAAAwMD/AAAAAABkAAAAMgAAAAAAAABkAAAAAAAAAH9/fwAKAAAAIgAAABgAAAAAAAAAAAAAAAAAAAAAAAAAAAAAAAAAAAAkAAAAJAAAAAAAAAAHAAAAAAAAAAAAAAAAAAAAAAAAAAAAAAAAAAAAf39/ACUAAABYAAAAAAAAAAAAAAAAAAAAAAAAAAAAAAAAAAAAAAAAAAAAAAAAAAAAAAAAAAAAAAA/AAAAAAAAAKCGAQAAAAAAAAAAAAAAAAAMAAAAAQAAAAAAAAAAAAAAAAAAAB8AAABUAAAAAAAABQAAAAEAAAAAAAAAAAAAAAAAAAAAAAAAAAAAAAAAAAAAAAAAAAAAAAJ/f38AAAAAA8zMzADAwP8Af39/AAAAAAAAAAAAAAAAAAAAAAAAAAAAIQAAABgAAAAUAAAAKAUAAD8CAADYRQAAZwoAABAAAAAmAAAACAAAAAAAAAAAAAAA"/>
+                <pr:smNativeData xmlns="smNativeData" xmlns:pr="smNativeData" xmlns:p15="http://schemas.microsoft.com/office/powerpoint/2012/main" xmlns:p14="http://schemas.microsoft.com/office/powerpoint/2010/main" xmlns:mc="http://schemas.openxmlformats.org/markup-compatibility/2006" val="SMDATA_15_FLquaRMAAAAlAAAAZAAAAA0AAAAAkAAAAEgAAACQAAAASAAAAAAAAAABAAAAAAAAAAEAAABQAAAAAAAAAAAA4D8AAAAAAADgPwAAAAAAAOA/AAAAAAAA4D8AAAAAAADgPwAAAAAAAOA/AAAAAAAA4D8AAAAAAADgPwAAAAAAAOA/AAAAAAAA4D8CAAAAjAAAAAAAAAAAAAAAW5vVDP///wgAAAAAAAAAAAAAAAAAAAAAAAAAAAAAAAAAAAAAZAAAAAEAAABAAAAAAAAAAAAAAAAAAAAAAAAAAAAAAAAAAAAAAAAAAAAAAAAAAAAAAAAAAAAAAAAAAAAAAAAAAAAAAAAAAAAAAAAAAAAAAAAAAAAAAAAAAAAAAAAAAAAAFAAAADwAAAAAAAAAAAAAAAAAAAkUAAAAAQAAABQAAAAUAAAAFAAAAAEAAAAAAAAAZAAAAGQAAAAAAAAAZAAAAGQAAAAVAAAAYAAAAAAAAAAAAAAADwAAACADAAAAAAAAAAAAAAEAAACgMgAAVgcAAKr4//8BAAAAf39/AAEAAABkAAAAAAAAABQAAABAHwAAAAAAACYAAAAAAAAAwOD//wAAAAAmAAAAZAAAABYAAABMAAAAAAAAAAAAAAAEAAAAAAAAAAEAAADn5uYKAAAAACgAAAAoAAAAZAAAAGQAAAAAAAAAzMzMAAAAAABQAAAAUAAAAGQAAABkAAAAAAAAABcAAAAUAAAAAAAAAAAAAAD/fwAA/38AAAAAAAAJAAAABAAAAGxpY2keAAAAaAAAAAAAAAAAAAAAAAAAAAAAAAAAAAAAECcAABAnAAAAAAAAAAAAAAAAAAAAAAAAAAAAAAAAAAAAAAAAAAAAABQAAAAAAAAAwMD/AAAAAABkAAAAMgAAAAAAAABkAAAAAAAAAH9/fwAKAAAAIgAAABgAAAAAAAAAAAAAAAAAAAAAAAAAAAAAAAAAAAAkAAAAJAAAAAAAAAAHAAAAAAAAAAAAAAAAAAAAAAAAAAAAAAAAAAAAf39/ACUAAABYAAAAAAAAAAAAAAAAAAAAAAAAAAAAAAAAAAAAAAAAAAAAAAAAAAAAAAAAAAAAAAA/AAAAAAAAAKCGAQAAAAAAAAAAAAAAAAAMAAAAAQAAAAAAAAAAAAAAAAAAAB8AAABUAAAAAAAABQAAAAEAAAAAAAAAAAAAAAAAAAAAAAAAAAAAAAAAAAAAAAAAAAAAAAJ/f38AAAAAA8zMzADAwP8Af39/AAAAAAAAAAAAAAAAAAAAAAAAAAAAIQAAABgAAAAUAAAAKAUAAD8CAADYRQAAZwoAABAAAAAmAAAACAAAAAAAAAAAAAAA"/>
               </a:ext>
             </a:extLst>
           </p:cNvSpPr>
@@ -933,7 +951,7 @@
           <a:lstStyle/>
           <a:p>
             <a:pPr>
-              <a:defRPr lang="en-us"/>
+              <a:defRPr lang="en-US"/>
             </a:pPr>
             <a:r>
               <a:t>Click to edit Master title style</a:t>
@@ -948,7 +966,7 @@
             <a:spLocks noGrp="1" noChangeArrowheads="1"/>
             <a:extLst>
               <a:ext uri="smNativeData">
-                <pr:smNativeData xmlns:pr="smNativeData" xmlns="smNativeData" val="SMDATA_15_FLquaRMAAAAlAAAAZAAAAA0AAAAAkAAAAEgAAACQAAAASAAAAAAAAAAAAAAAAAAAAAEAAABQAAAAAAAAAAAA4D8AAAAAAADgPwAAAAAAAOA/AAAAAAAA4D8AAAAAAADgPwAAAAAAAOA/AAAAAAAA4D8AAAAAAADgPwAAAAAAAOA/AAAAAAAA4D8CAAAAjAAAAAAAAAAAAAAAW5vVDP///wgAAAAAAAAAAAAAAAAAAAAAAAAAAAAAAAAAAAAAZAAAAAEAAABAAAAAAAAAAAAAAAAAAAAAAAAAAAAAAAAAAAAAAAAAAAAAAAAAAAAAAAAAAAAAAAAAAAAAAAAAAAAAAAAAAAAAAAAAAAAAAAAAAAAAAAAAAAAAAAAAAAAAFAAAADwAAAAAAAAAAAAAAAAAAAkUAAAAAQAAABQAAAAUAAAAFAAAAAEAAAAAAAAAZAAAAGQAAAAAAAAAZAAAAGQAAAAVAAAAYAAAAAAAAAAAAAAADwAAACADAAAAAAAAAAAAAAEAAACgMgAAVgcAAKr4//8BAAAAf39/AAEAAABkAAAAAAAAABQAAABAHwAAAAAAACYAAAAAAAAAwOD//wAAAAAmAAAAZAAAABYAAABMAAAAAAAAAAAAAAAEAAAAAAAAAAEAAADn5uYKAAAAACgAAAAoAAAAZAAAAGQAAAAAAAAAzMzMAAAAAABQAAAAUAAAAGQAAABkAAAAAAAAABcAAAAUAAAAAAAAAAAAAAD/fwAA/38AAAAAAAAJAAAABAAAAAAAAAAeAAAAaAAAAAAAAAAAAAAAAAAAAAAAAAAAAAAAECcAABAnAAAAAAAAAAAAAAAAAAAAAAAAAAAAAAAAAAAAAAAAAAAAABQAAAAAAAAAwMD/AAAAAABkAAAAMgAAAAAAAABkAAAAAAAAAH9/fwAKAAAAIgAAABgAAAAAAAAAAAAAAAAAAAAAAAAAAAAAAAAAAAAkAAAAJAAAAAAAAAAHAAAAAAAAAAAAAAAAAAAAAAAAAAAAAAAAAAAAf39/ACUAAABYAAAAAAAAAAAAAAAAAAAAAAAAAAAAAAAAAAAAAAAAAAAAAAAAAAAAAAAAAAAAAAA/AAAAAAAAAKCGAQAAAAAAAAAAAAAAAAAMAAAAAQAAAAAAAAAAAAAAAAAAAB8AAABUAAAAAAAABQAAAAEAAAAAAAAAAAAAAAAAAAAAAAAAAAAAAAAAAAAAAAAAAAAAAAJ/f38AAAAAA8zMzADAwP8Af39/AAAAAAAAAAAAAAAAAAAAAAAAAAAAIQAAABgAAAAUAAAAKAUAADsLAADYRQAAACYAABAAAAAmAAAACAAAAAAAAAAAAAAA"/>
+                <pr:smNativeData xmlns="smNativeData" xmlns:pr="smNativeData" xmlns:p15="http://schemas.microsoft.com/office/powerpoint/2012/main" xmlns:p14="http://schemas.microsoft.com/office/powerpoint/2010/main" xmlns:mc="http://schemas.openxmlformats.org/markup-compatibility/2006" val="SMDATA_15_FLquaRMAAAAlAAAAZAAAAA0AAAAAkAAAAEgAAACQAAAASAAAAAAAAAAAAAAAAAAAAAEAAABQAAAAAAAAAAAA4D8AAAAAAADgPwAAAAAAAOA/AAAAAAAA4D8AAAAAAADgPwAAAAAAAOA/AAAAAAAA4D8AAAAAAADgPwAAAAAAAOA/AAAAAAAA4D8CAAAAjAAAAAAAAAAAAAAAW5vVDP///wgAAAAAAAAAAAAAAAAAAAAAAAAAAAAAAAAAAAAAZAAAAAEAAABAAAAAAAAAAAAAAAAAAAAAAAAAAAAAAAAAAAAAAAAAAAAAAAAAAAAAAAAAAAAAAAAAAAAAAAAAAAAAAAAAAAAAAAAAAAAAAAAAAAAAAAAAAAAAAAAAAAAAFAAAADwAAAAAAAAAAAAAAAAAAAkUAAAAAQAAABQAAAAUAAAAFAAAAAEAAAAAAAAAZAAAAGQAAAAAAAAAZAAAAGQAAAAVAAAAYAAAAAAAAAAAAAAADwAAACADAAAAAAAAAAAAAAEAAACgMgAAVgcAAKr4//8BAAAAf39/AAEAAABkAAAAAAAAABQAAABAHwAAAAAAACYAAAAAAAAAwOD//wAAAAAmAAAAZAAAABYAAABMAAAAAAAAAAAAAAAEAAAAAAAAAAEAAADn5uYKAAAAACgAAAAoAAAAZAAAAGQAAAAAAAAAzMzMAAAAAABQAAAAUAAAAGQAAABkAAAAAAAAABcAAAAUAAAAAAAAAAAAAAD/fwAA/38AAAAAAAAJAAAABAAAAAAAAAAeAAAAaAAAAAAAAAAAAAAAAAAAAAAAAAAAAAAAECcAABAnAAAAAAAAAAAAAAAAAAAAAAAAAAAAAAAAAAAAAAAAAAAAABQAAAAAAAAAwMD/AAAAAABkAAAAMgAAAAAAAABkAAAAAAAAAH9/fwAKAAAAIgAAABgAAAAAAAAAAAAAAAAAAAAAAAAAAAAAAAAAAAAkAAAAJAAAAAAAAAAHAAAAAAAAAAAAAAAAAAAAAAAAAAAAAAAAAAAAf39/ACUAAABYAAAAAAAAAAAAAAAAAAAAAAAAAAAAAAAAAAAAAAAAAAAAAAAAAAAAAAAAAAAAAAA/AAAAAAAAAKCGAQAAAAAAAAAAAAAAAAAMAAAAAQAAAAAAAAAAAAAAAAAAAB8AAABUAAAAAAAABQAAAAEAAAAAAAAAAAAAAAAAAAAAAAAAAAAAAAAAAAAAAAAAAAAAAAJ/f38AAAAAA8zMzADAwP8Af39/AAAAAAAAAAAAAAAAAAAAAAAAAAAAIQAAABgAAAAUAAAAKAUAADsLAADYRQAAACYAABAAAAAmAAAACAAAAAAAAAAAAAAA"/>
               </a:ext>
             </a:extLst>
           </p:cNvSpPr>
@@ -962,7 +980,7 @@
           <a:lstStyle/>
           <a:p>
             <a:pPr>
-              <a:defRPr lang="en-us"/>
+              <a:defRPr lang="en-US"/>
             </a:pPr>
             <a:r>
               <a:t>Click to edit Master text styles</a:t>
@@ -970,7 +988,7 @@
           </a:p>
           <a:p>
             <a:pPr lvl="1">
-              <a:defRPr lang="en-us"/>
+              <a:defRPr lang="en-US"/>
             </a:pPr>
             <a:r>
               <a:t>Second level</a:t>
@@ -978,7 +996,7 @@
           </a:p>
           <a:p>
             <a:pPr lvl="2">
-              <a:defRPr lang="en-us"/>
+              <a:defRPr lang="en-US"/>
             </a:pPr>
             <a:r>
               <a:t>Third level</a:t>
@@ -986,7 +1004,7 @@
           </a:p>
           <a:p>
             <a:pPr lvl="3">
-              <a:defRPr lang="en-us"/>
+              <a:defRPr lang="en-US"/>
             </a:pPr>
             <a:r>
               <a:t>Fourth level</a:t>
@@ -994,7 +1012,7 @@
           </a:p>
           <a:p>
             <a:pPr lvl="4">
-              <a:defRPr lang="en-us"/>
+              <a:defRPr lang="en-US"/>
             </a:pPr>
             <a:r>
               <a:t>Fifth level</a:t>
@@ -1009,7 +1027,7 @@
             <a:spLocks noGrp="1" noChangeArrowheads="1"/>
             <a:extLst>
               <a:ext uri="smNativeData">
-                <pr:smNativeData xmlns:pr="smNativeData" xmlns="smNativeData" val="SMDATA_15_FLquaRMAAAAlAAAAZAAAAA0AAAAAkAAAAEgAAACQAAAASAAAAAAAAAABAAAAAAAAAAEAAABQAAAAAAAAAAAA4D8AAAAAAADgPwAAAAAAAOA/AAAAAAAA4D8AAAAAAADgPwAAAAAAAOA/AAAAAAAA4D8AAAAAAADgPwAAAAAAAOA/AAAAAAAA4D8CAAAAjAAAAAAAAAAAAAAAW5vVDP///wgAAAAAAAAAAAAAAAAAAAAAAAAAAAAAAAAAAAAAZAAAAAEAAABAAAAAAAAAAAAAAAAAAAAAAAAAAAAAAAAAAAAAAAAAAAAAAAAAAAAAAAAAAAAAAAAAAAAAAAAAAAAAAAAAAAAAAAAAAAAAAAAAAAAAAAAAAAAAAAAAAAAAFAAAADwAAAAAAAAAAAAAAAAAAAkUAAAAAQAAABQAAAAUAAAAFAAAAAEAAAAAAAAAZAAAAGQAAAAAAAAAZAAAAGQAAAAVAAAAYAAAAAAAAAAAAAAADwAAACADAAAAAAAAAAAAAAEAAACgMgAAVgcAAKr4//8BAAAAf39/AAEAAABkAAAAAAAAABQAAABAHwAAAAAAACYAAAAAAAAAwOD//wAAAAAmAAAAZAAAABYAAABMAAAAAAAAAAAAAAAEAAAAAAAAAAEAAADn5uYKAAAAACgAAAAoAAAAZAAAAGQAAAAAAAAAzMzMAAAAAABQAAAAUAAAAGQAAABkAAAAAAAAABcAAAAUAAAAAAAAAAAAAAD/fwAA/38AAAAAAAAJAAAABAAAAOBjngseAAAAaAAAAAAAAAAAAAAAAAAAAAAAAAAAAAAAECcAABAnAAAAAAAAAAAAAAAAAAAAAAAAAAAAAAAAAAAAAAAAAAAAABQAAAAAAAAAwMD/AAAAAABkAAAAMgAAAAAAAABkAAAAAAAAAH9/fwAKAAAAIgAAABgAAAAAAAAAAAAAAAAAAAAAAAAAAAAAAAAAAAAkAAAAJAAAAAAAAAAHAAAAAAAAAAAAAAAAAAAAAAAAAAAAAAAAAAAAf39/ACUAAABYAAAAAAAAAAAAAAAAAAAAAAAAAAAAAAAAAAAAAAAAAAAAAAAAAAAAAAAAAAAAAAA/AAAAAAAAAKCGAQAAAAAAAAAAAAAAAAAMAAAAAQAAAAAAAAAAAAAAAAAAAB8AAABUAAAAAAAABQAAAAEAAAAAAAAAAAAAAAAAAAAAAAAAAAAAAAAAAAAAAAAAAAAAAAJ/f38AAAAAA8zMzADAwP8Af39/AAAAAAAAAAAAAAAAAAAAAAAAAAAAIQAAABgAAAAUAAAAKAUAABonAAAIFgAAWSkAABAAAAAmAAAACAAAAAAAAAAAAAAA"/>
+                <pr:smNativeData xmlns="smNativeData" xmlns:pr="smNativeData" xmlns:p15="http://schemas.microsoft.com/office/powerpoint/2012/main" xmlns:p14="http://schemas.microsoft.com/office/powerpoint/2010/main" xmlns:mc="http://schemas.openxmlformats.org/markup-compatibility/2006" val="SMDATA_15_FLquaRMAAAAlAAAAZAAAAA0AAAAAkAAAAEgAAACQAAAASAAAAAAAAAABAAAAAAAAAAEAAABQAAAAAAAAAAAA4D8AAAAAAADgPwAAAAAAAOA/AAAAAAAA4D8AAAAAAADgPwAAAAAAAOA/AAAAAAAA4D8AAAAAAADgPwAAAAAAAOA/AAAAAAAA4D8CAAAAjAAAAAAAAAAAAAAAW5vVDP///wgAAAAAAAAAAAAAAAAAAAAAAAAAAAAAAAAAAAAAZAAAAAEAAABAAAAAAAAAAAAAAAAAAAAAAAAAAAAAAAAAAAAAAAAAAAAAAAAAAAAAAAAAAAAAAAAAAAAAAAAAAAAAAAAAAAAAAAAAAAAAAAAAAAAAAAAAAAAAAAAAAAAAFAAAADwAAAAAAAAAAAAAAAAAAAkUAAAAAQAAABQAAAAUAAAAFAAAAAEAAAAAAAAAZAAAAGQAAAAAAAAAZAAAAGQAAAAVAAAAYAAAAAAAAAAAAAAADwAAACADAAAAAAAAAAAAAAEAAACgMgAAVgcAAKr4//8BAAAAf39/AAEAAABkAAAAAAAAABQAAABAHwAAAAAAACYAAAAAAAAAwOD//wAAAAAmAAAAZAAAABYAAABMAAAAAAAAAAAAAAAEAAAAAAAAAAEAAADn5uYKAAAAACgAAAAoAAAAZAAAAGQAAAAAAAAAzMzMAAAAAABQAAAAUAAAAGQAAABkAAAAAAAAABcAAAAUAAAAAAAAAAAAAAD/fwAA/38AAAAAAAAJAAAABAAAAOBjngseAAAAaAAAAAAAAAAAAAAAAAAAAAAAAAAAAAAAECcAABAnAAAAAAAAAAAAAAAAAAAAAAAAAAAAAAAAAAAAAAAAAAAAABQAAAAAAAAAwMD/AAAAAABkAAAAMgAAAAAAAABkAAAAAAAAAH9/fwAKAAAAIgAAABgAAAAAAAAAAAAAAAAAAAAAAAAAAAAAAAAAAAAkAAAAJAAAAAAAAAAHAAAAAAAAAAAAAAAAAAAAAAAAAAAAAAAAAAAAf39/ACUAAABYAAAAAAAAAAAAAAAAAAAAAAAAAAAAAAAAAAAAAAAAAAAAAAAAAAAAAAAAAAAAAAA/AAAAAAAAAKCGAQAAAAAAAAAAAAAAAAAMAAAAAQAAAAAAAAAAAAAAAAAAAB8AAABUAAAAAAAABQAAAAEAAAAAAAAAAAAAAAAAAAAAAAAAAAAAAAAAAAAAAAAAAAAAAAJ/f38AAAAAA8zMzADAwP8Af39/AAAAAAAAAAAAAAAAAAAAAAAAAAAAIQAAABgAAAAUAAAAKAUAABonAAAIFgAAWSkAABAAAAAmAAAACAAAAAAAAAAAAAAA"/>
               </a:ext>
             </a:extLst>
           </p:cNvSpPr>
@@ -1023,11 +1041,12 @@
           <a:lstStyle/>
           <a:p>
             <a:pPr>
-              <a:defRPr lang="en-us"/>
+              <a:defRPr lang="en-US"/>
             </a:pPr>
             <a:fld id="{30AE8A82-CCDD-FB7C-9316-3A29C458656F}" type="datetime1">
-              <a:t/>
+              <a:t>4/21/2026</a:t>
             </a:fld>
+            <a:endParaRPr/>
           </a:p>
         </p:txBody>
       </p:sp>
@@ -1038,7 +1057,7 @@
             <a:spLocks noGrp="1" noChangeArrowheads="1"/>
             <a:extLst>
               <a:ext uri="smNativeData">
-                <pr:smNativeData xmlns:pr="smNativeData" xmlns="smNativeData" val="SMDATA_15_FLquaRMAAAAlAAAAZAAAAA0AAAAAkAAAAEgAAACQAAAASAAAAAAAAAABAAAAAAAAAAEAAABQAAAAAAAAAAAA4D8AAAAAAADgPwAAAAAAAOA/AAAAAAAA4D8AAAAAAADgPwAAAAAAAOA/AAAAAAAA4D8AAAAAAADgPwAAAAAAAOA/AAAAAAAA4D8CAAAAjAAAAAAAAAAAAAAAW5vVDP///wgAAAAAAAAAAAAAAAAAAAAAAAAAAAAAAAAAAAAAZAAAAAEAAABAAAAAAAAAAAAAAAAAAAAAAAAAAAAAAAAAAAAAAAAAAAAAAAAAAAAAAAAAAAAAAAAAAAAAAAAAAAAAAAAAAAAAAAAAAAAAAAAAAAAAAAAAAAAAAAAAAAAAFAAAADwAAAAAAAAAAAAAAAAAAAkUAAAAAQAAABQAAAAUAAAAFAAAAAEAAAAAAAAAZAAAAGQAAAAAAAAAZAAAAGQAAAAVAAAAYAAAAAAAAAAAAAAADwAAACADAAAAAAAAAAAAAAEAAACgMgAAVgcAAKr4//8BAAAAf39/AAEAAABkAAAAAAAAABQAAABAHwAAAAAAACYAAAAAAAAAwOD//wAAAAAmAAAAZAAAABYAAABMAAAAAAAAAAAAAAAEAAAAAAAAAAEAAADn5uYKAAAAACgAAAAoAAAAZAAAAGQAAAAAAAAAzMzMAAAAAABQAAAAUAAAAGQAAABkAAAAAAAAABcAAAAUAAAAAAAAAAAAAAD/fwAA/38AAAAAAAAJAAAABAAAAOrv9v8eAAAAaAAAAAAAAAAAAAAAAAAAAAAAAAAAAAAAECcAABAnAAAAAAAAAAAAAAAAAAAAAAAAAAAAAAAAAAAAAAAAAAAAABQAAAAAAAAAwMD/AAAAAABkAAAAMgAAAAAAAABkAAAAAAAAAH9/fwAKAAAAIgAAABgAAAAAAAAAAAAAAAAAAAAAAAAAAAAAAAAAAAAkAAAAJAAAAAAAAAAHAAAAAAAAAAAAAAAAAAAAAAAAAAAAAAAAAAAAf39/ACUAAABYAAAAAAAAAAAAAAAAAAAAAAAAAAAAAAAAAAAAAAAAAAAAAAAAAAAAAAAAAAAAAAA/AAAAAAAAAKCGAQAAAAAAAAAAAAAAAAAMAAAAAQAAAAAAAAAAAAAAAAAAAB8AAABUAAAAAAAABQAAAAEAAAAAAAAAAAAAAAAAAAAAAAAAAAAAAAAAAAAAAAAAAAAAAAJ/f38AAAAAA8zMzADAwP8Af39/AAAAAAAAAAAAAAAAAAAAAAAAAAAAIQAAABgAAAAUAAAA2BgAABonAAAoMgAAWSkAABAAAAAmAAAACAAAAAAAAAAAAAAA"/>
+                <pr:smNativeData xmlns="smNativeData" xmlns:pr="smNativeData" xmlns:p15="http://schemas.microsoft.com/office/powerpoint/2012/main" xmlns:p14="http://schemas.microsoft.com/office/powerpoint/2010/main" xmlns:mc="http://schemas.openxmlformats.org/markup-compatibility/2006" val="SMDATA_15_FLquaRMAAAAlAAAAZAAAAA0AAAAAkAAAAEgAAACQAAAASAAAAAAAAAABAAAAAAAAAAEAAABQAAAAAAAAAAAA4D8AAAAAAADgPwAAAAAAAOA/AAAAAAAA4D8AAAAAAADgPwAAAAAAAOA/AAAAAAAA4D8AAAAAAADgPwAAAAAAAOA/AAAAAAAA4D8CAAAAjAAAAAAAAAAAAAAAW5vVDP///wgAAAAAAAAAAAAAAAAAAAAAAAAAAAAAAAAAAAAAZAAAAAEAAABAAAAAAAAAAAAAAAAAAAAAAAAAAAAAAAAAAAAAAAAAAAAAAAAAAAAAAAAAAAAAAAAAAAAAAAAAAAAAAAAAAAAAAAAAAAAAAAAAAAAAAAAAAAAAAAAAAAAAFAAAADwAAAAAAAAAAAAAAAAAAAkUAAAAAQAAABQAAAAUAAAAFAAAAAEAAAAAAAAAZAAAAGQAAAAAAAAAZAAAAGQAAAAVAAAAYAAAAAAAAAAAAAAADwAAACADAAAAAAAAAAAAAAEAAACgMgAAVgcAAKr4//8BAAAAf39/AAEAAABkAAAAAAAAABQAAABAHwAAAAAAACYAAAAAAAAAwOD//wAAAAAmAAAAZAAAABYAAABMAAAAAAAAAAAAAAAEAAAAAAAAAAEAAADn5uYKAAAAACgAAAAoAAAAZAAAAGQAAAAAAAAAzMzMAAAAAABQAAAAUAAAAGQAAABkAAAAAAAAABcAAAAUAAAAAAAAAAAAAAD/fwAA/38AAAAAAAAJAAAABAAAAOrv9v8eAAAAaAAAAAAAAAAAAAAAAAAAAAAAAAAAAAAAECcAABAnAAAAAAAAAAAAAAAAAAAAAAAAAAAAAAAAAAAAAAAAAAAAABQAAAAAAAAAwMD/AAAAAABkAAAAMgAAAAAAAABkAAAAAAAAAH9/fwAKAAAAIgAAABgAAAAAAAAAAAAAAAAAAAAAAAAAAAAAAAAAAAAkAAAAJAAAAAAAAAAHAAAAAAAAAAAAAAAAAAAAAAAAAAAAAAAAAAAAf39/ACUAAABYAAAAAAAAAAAAAAAAAAAAAAAAAAAAAAAAAAAAAAAAAAAAAAAAAAAAAAAAAAAAAAA/AAAAAAAAAKCGAQAAAAAAAAAAAAAAAAAMAAAAAQAAAAAAAAAAAAAAAAAAAB8AAABUAAAAAAAABQAAAAEAAAAAAAAAAAAAAAAAAAAAAAAAAAAAAAAAAAAAAAAAAAAAAAJ/f38AAAAAA8zMzADAwP8Af39/AAAAAAAAAAAAAAAAAAAAAAAAAAAAIQAAABgAAAAUAAAA2BgAABonAAAoMgAAWSkAABAAAAAmAAAACAAAAAAAAAAAAAAA"/>
               </a:ext>
             </a:extLst>
           </p:cNvSpPr>
@@ -1052,8 +1071,9 @@
           <a:lstStyle/>
           <a:p>
             <a:pPr>
-              <a:defRPr lang="en-us"/>
-            </a:pPr>
+              <a:defRPr lang="en-US"/>
+            </a:pPr>
+            <a:endParaRPr/>
           </a:p>
         </p:txBody>
       </p:sp>
@@ -1064,7 +1084,7 @@
             <a:spLocks noGrp="1" noChangeArrowheads="1"/>
             <a:extLst>
               <a:ext uri="smNativeData">
-                <pr:smNativeData xmlns:pr="smNativeData" xmlns="smNativeData" val="SMDATA_15_FLquaRMAAAAlAAAAZAAAAA0AAAAAkAAAAEgAAACQAAAASAAAAAAAAAABAAAAAAAAAAEAAABQAAAAAAAAAAAA4D8AAAAAAADgPwAAAAAAAOA/AAAAAAAA4D8AAAAAAADgPwAAAAAAAOA/AAAAAAAA4D8AAAAAAADgPwAAAAAAAOA/AAAAAAAA4D8CAAAAjAAAAAAAAAAAAAAAW5vVDP///wgAAAAAAAAAAAAAAAAAAAAAAAAAAAAAAAAAAAAAZAAAAAEAAABAAAAAAAAAAAAAAAAAAAAAAAAAAAAAAAAAAAAAAAAAAAAAAAAAAAAAAAAAAAAAAAAAAAAAAAAAAAAAAAAAAAAAAAAAAAAAAAAAAAAAAAAAAAAAAAAAAAAAFAAAADwAAAAAAAAAAAAAAAAAAAkUAAAAAQAAABQAAAAUAAAAFAAAAAEAAAAAAAAAZAAAAGQAAAAAAAAAZAAAAGQAAAAVAAAAYAAAAAAAAAAAAAAADwAAACADAAAAAAAAAAAAAAEAAACgMgAAVgcAAKr4//8BAAAAf39/AAEAAABkAAAAAAAAABQAAABAHwAAAAAAACYAAAAAAAAAwOD//wAAAAAmAAAAZAAAABYAAABMAAAAAAAAAAAAAAAEAAAAAAAAAAEAAADn5uYKAAAAACgAAAAoAAAAZAAAAGQAAAAAAAAAzMzMAAAAAABQAAAAUAAAAGQAAABkAAAAAAAAABcAAAAUAAAAAAAAAAAAAAD/fwAA/38AAAAAAAAJAAAABAAAAKiVygEeAAAAaAAAAAAAAAAAAAAAAAAAAAAAAAAAAAAAECcAABAnAAAAAAAAAAAAAAAAAAAAAAAAAAAAAAAAAAAAAAAAAAAAABQAAAAAAAAAwMD/AAAAAABkAAAAMgAAAAAAAABkAAAAAAAAAH9/fwAKAAAAIgAAABgAAAAAAAAAAAAAAAAAAAAAAAAAAAAAAAAAAAAkAAAAJAAAAAAAAAAHAAAAAAAAAAAAAAAAAAAAAAAAAAAAAAAAAAAAf39/ACUAAABYAAAAAAAAAAAAAAAAAAAAAAAAAAAAAAAAAAAAAAAAAAAAAAAAAAAAAAAAAAAAAAA/AAAAAAAAAKCGAQAAAAAAAAAAAAAAAAAMAAAAAQAAAAAAAAAAAAAAAAAAAB8AAABUAAAAAAAABQAAAAEAAAAAAAAAAAAAAAAAAAAAAAAAAAAAAAAAAAAAAAAAAAAAAAJ/f38AAAAAA8zMzADAwP8Af39/AAAAAAAAAAAAAAAAAAAAAAAAAAAAIQAAABgAAAAUAAAA+DQAABonAADYRQAAWSkAABAAAAAmAAAACAAAAAAAAAAAAAAA"/>
+                <pr:smNativeData xmlns="smNativeData" xmlns:pr="smNativeData" xmlns:p15="http://schemas.microsoft.com/office/powerpoint/2012/main" xmlns:p14="http://schemas.microsoft.com/office/powerpoint/2010/main" xmlns:mc="http://schemas.openxmlformats.org/markup-compatibility/2006" val="SMDATA_15_FLquaRMAAAAlAAAAZAAAAA0AAAAAkAAAAEgAAACQAAAASAAAAAAAAAABAAAAAAAAAAEAAABQAAAAAAAAAAAA4D8AAAAAAADgPwAAAAAAAOA/AAAAAAAA4D8AAAAAAADgPwAAAAAAAOA/AAAAAAAA4D8AAAAAAADgPwAAAAAAAOA/AAAAAAAA4D8CAAAAjAAAAAAAAAAAAAAAW5vVDP///wgAAAAAAAAAAAAAAAAAAAAAAAAAAAAAAAAAAAAAZAAAAAEAAABAAAAAAAAAAAAAAAAAAAAAAAAAAAAAAAAAAAAAAAAAAAAAAAAAAAAAAAAAAAAAAAAAAAAAAAAAAAAAAAAAAAAAAAAAAAAAAAAAAAAAAAAAAAAAAAAAAAAAFAAAADwAAAAAAAAAAAAAAAAAAAkUAAAAAQAAABQAAAAUAAAAFAAAAAEAAAAAAAAAZAAAAGQAAAAAAAAAZAAAAGQAAAAVAAAAYAAAAAAAAAAAAAAADwAAACADAAAAAAAAAAAAAAEAAACgMgAAVgcAAKr4//8BAAAAf39/AAEAAABkAAAAAAAAABQAAABAHwAAAAAAACYAAAAAAAAAwOD//wAAAAAmAAAAZAAAABYAAABMAAAAAAAAAAAAAAAEAAAAAAAAAAEAAADn5uYKAAAAACgAAAAoAAAAZAAAAGQAAAAAAAAAzMzMAAAAAABQAAAAUAAAAGQAAABkAAAAAAAAABcAAAAUAAAAAAAAAAAAAAD/fwAA/38AAAAAAAAJAAAABAAAAKiVygEeAAAAaAAAAAAAAAAAAAAAAAAAAAAAAAAAAAAAECcAABAnAAAAAAAAAAAAAAAAAAAAAAAAAAAAAAAAAAAAAAAAAAAAABQAAAAAAAAAwMD/AAAAAABkAAAAMgAAAAAAAABkAAAAAAAAAH9/fwAKAAAAIgAAABgAAAAAAAAAAAAAAAAAAAAAAAAAAAAAAAAAAAAkAAAAJAAAAAAAAAAHAAAAAAAAAAAAAAAAAAAAAAAAAAAAAAAAAAAAf39/ACUAAABYAAAAAAAAAAAAAAAAAAAAAAAAAAAAAAAAAAAAAAAAAAAAAAAAAAAAAAAAAAAAAAA/AAAAAAAAAKCGAQAAAAAAAAAAAAAAAAAMAAAAAQAAAAAAAAAAAAAAAAAAAB8AAABUAAAAAAAABQAAAAEAAAAAAAAAAAAAAAAAAAAAAAAAAAAAAAAAAAAAAAAAAAAAAAJ/f38AAAAAA8zMzADAwP8Af39/AAAAAAAAAAAAAAAAAAAAAAAAAAAAIQAAABgAAAAUAAAA+DQAABonAADYRQAAWSkAABAAAAAmAAAACAAAAAAAAAAAAAAA"/>
               </a:ext>
             </a:extLst>
           </p:cNvSpPr>
@@ -1078,11 +1098,12 @@
           <a:lstStyle/>
           <a:p>
             <a:pPr>
-              <a:defRPr lang="en-us"/>
+              <a:defRPr lang="en-US"/>
             </a:pPr>
             <a:fld id="{30AE9046-08DD-FB66-9316-FE33DE5865AB}" type="slidenum">
-              <a:t/>
+              <a:t>‹#›</a:t>
             </a:fld>
+            <a:endParaRPr/>
           </a:p>
         </p:txBody>
       </p:sp>
@@ -1096,7 +1117,7 @@
 </file>
 
 <file path=ppt/slideLayouts/slideLayout3.xml><?xml version="1.0" encoding="utf-8"?>
-<p:sldLayout xmlns:p="http://schemas.openxmlformats.org/presentationml/2006/main" xmlns:mc="http://schemas.openxmlformats.org/markup-compatibility/2006" xmlns:p14="http://schemas.microsoft.com/office/powerpoint/2010/main" xmlns:p15="http://schemas.microsoft.com/office/powerpoint/2012/main" xmlns:r="http://schemas.openxmlformats.org/officeDocument/2006/relationships" xmlns:a="http://schemas.openxmlformats.org/drawingml/2006/main" type="secHead" preserve="1">
+<p:sldLayout xmlns:a="http://schemas.openxmlformats.org/drawingml/2006/main" xmlns:r="http://schemas.openxmlformats.org/officeDocument/2006/relationships" xmlns:p="http://schemas.openxmlformats.org/presentationml/2006/main" type="secHead" preserve="1">
   <p:cSld name="Section Header">
     <p:spTree>
       <p:nvGrpSpPr>
@@ -1119,7 +1140,7 @@
             <a:spLocks noGrp="1" noChangeArrowheads="1"/>
             <a:extLst>
               <a:ext uri="smNativeData">
-                <pr:smNativeData xmlns:pr="smNativeData" xmlns="smNativeData" val="SMDATA_15_FLquaRMAAAAlAAAAZAAAAA0AAAAAkAAAAEgAAACQAAAASAAAAAAAAAACAAAAAAAAAAEAAABQAAAAAAAAAAAA4D8AAAAAAADgPwAAAAAAAOA/AAAAAAAA4D8AAAAAAADgPwAAAAAAAOA/AAAAAAAA4D8AAAAAAADgPwAAAAAAAOA/AAAAAAAA4D8CAAAAjAAAAAAAAAAAAAAAW5vVDP///wgAAAAAAAAAAAAAAAAAAAAAAAAAAAAAAAAAAAAAZAAAAAEAAABAAAAAAAAAAAAAAAAAAAAAAAAAAAAAAAAAAAAAAAAAAAAAAAAAAAAAAAAAAAAAAAAAAAAAAAAAAAAAAAAAAAAAAAAAAAAAAAAAAAAAAAAAAAAAAAAAAAAAFAAAADwAAAAAAAAAAAAAAAAAAAkUAAAAAQAAABQAAAAUAAAAFAAAAAEAAAAAAAAAZAAAAGQAAAAAAAAAZAAAAGQAAAAVAAAAYAAAAAAAAAAAAAAADwAAACADAAAAAAAAAAAAAAEAAACgMgAAVgcAAKr4//8BAAAAf39/AAEAAABkAAAAAAAAABQAAABAHwAAAAAAACYAAAAAAAAAwOD//wAAAAAmAAAAZAAAABYAAABMAAAAAAAAAAAAAAAEAAAAAAAAAAEAAADn5uYKAAAAACgAAAAoAAAAZAAAAGQAAAAAAAAAzMzMAAAAAABQAAAAUAAAAGQAAABkAAAAAAAAABcAAAAUAAAAAAAAAAAAAAD/fwAA/38AAAAAAAAJAAAABAAAANCtTwIeAAAAaAAAAAAAAAAAAAAAAAAAAAAAAAAAAAAAECcAABAnAAAAAAAAAAAAAAAAAAAAAAAAAAAAAAAAAAAAAAAAAAAAABQAAAAAAAAAwMD/AAAAAABkAAAAMgAAAAAAAABkAAAAAAAAAH9/fwAKAAAAIgAAABgAAAAAAAAAAAAAAAAAAAAAAAAAAAAAAAAAAAAkAAAAJAAAAAAAAAAHAAAAAAAAAAAAAAAAAAAAAAAAAAAAAAAAAAAAf39/ACUAAABYAAAAAAAAAAAAAAAAAAAAAAAAAAAAAAAAAAAAAAAAAAAAAAAAAAAAAAAAAAAAAAA/AAAAAAAAAKCGAQAAAAAAAAAAAAAAAAAMAAAAAQAAAAAAAAAAAAAAAAAAAB8AAABUAAAAAAAABQAAAAEAAAAAAAAAAAAAAAAAAAAAAAAAAAAAAAAAAAAAAAAAAAAAAAJ/f38AAAAAA8zMzADAwP8Af39/AAAAAAAAAAAAAAAAAAAAAAAAAAAAIQAAABgAAAAUAAAAHgUAAIUKAADORQAAERwAABAAAAAmAAAACAAAAIGAAAAAAAAA"/>
+                <pr:smNativeData xmlns="smNativeData" xmlns:pr="smNativeData" xmlns:p15="http://schemas.microsoft.com/office/powerpoint/2012/main" xmlns:p14="http://schemas.microsoft.com/office/powerpoint/2010/main" xmlns:mc="http://schemas.openxmlformats.org/markup-compatibility/2006" val="SMDATA_15_FLquaRMAAAAlAAAAZAAAAA0AAAAAkAAAAEgAAACQAAAASAAAAAAAAAACAAAAAAAAAAEAAABQAAAAAAAAAAAA4D8AAAAAAADgPwAAAAAAAOA/AAAAAAAA4D8AAAAAAADgPwAAAAAAAOA/AAAAAAAA4D8AAAAAAADgPwAAAAAAAOA/AAAAAAAA4D8CAAAAjAAAAAAAAAAAAAAAW5vVDP///wgAAAAAAAAAAAAAAAAAAAAAAAAAAAAAAAAAAAAAZAAAAAEAAABAAAAAAAAAAAAAAAAAAAAAAAAAAAAAAAAAAAAAAAAAAAAAAAAAAAAAAAAAAAAAAAAAAAAAAAAAAAAAAAAAAAAAAAAAAAAAAAAAAAAAAAAAAAAAAAAAAAAAFAAAADwAAAAAAAAAAAAAAAAAAAkUAAAAAQAAABQAAAAUAAAAFAAAAAEAAAAAAAAAZAAAAGQAAAAAAAAAZAAAAGQAAAAVAAAAYAAAAAAAAAAAAAAADwAAACADAAAAAAAAAAAAAAEAAACgMgAAVgcAAKr4//8BAAAAf39/AAEAAABkAAAAAAAAABQAAABAHwAAAAAAACYAAAAAAAAAwOD//wAAAAAmAAAAZAAAABYAAABMAAAAAAAAAAAAAAAEAAAAAAAAAAEAAADn5uYKAAAAACgAAAAoAAAAZAAAAGQAAAAAAAAAzMzMAAAAAABQAAAAUAAAAGQAAABkAAAAAAAAABcAAAAUAAAAAAAAAAAAAAD/fwAA/38AAAAAAAAJAAAABAAAANCtTwIeAAAAaAAAAAAAAAAAAAAAAAAAAAAAAAAAAAAAECcAABAnAAAAAAAAAAAAAAAAAAAAAAAAAAAAAAAAAAAAAAAAAAAAABQAAAAAAAAAwMD/AAAAAABkAAAAMgAAAAAAAABkAAAAAAAAAH9/fwAKAAAAIgAAABgAAAAAAAAAAAAAAAAAAAAAAAAAAAAAAAAAAAAkAAAAJAAAAAAAAAAHAAAAAAAAAAAAAAAAAAAAAAAAAAAAAAAAAAAAf39/ACUAAABYAAAAAAAAAAAAAAAAAAAAAAAAAAAAAAAAAAAAAAAAAAAAAAAAAAAAAAAAAAAAAAA/AAAAAAAAAKCGAQAAAAAAAAAAAAAAAAAMAAAAAQAAAAAAAAAAAAAAAAAAAB8AAABUAAAAAAAABQAAAAEAAAAAAAAAAAAAAAAAAAAAAAAAAAAAAAAAAAAAAAAAAAAAAAJ/f38AAAAAA8zMzADAwP8Af39/AAAAAAAAAAAAAAAAAAAAAAAAAAAAIQAAABgAAAAUAAAAHgUAAIUKAADORQAAERwAABAAAAAmAAAACAAAAIGAAAAAAAAA"/>
               </a:ext>
             </a:extLst>
           </p:cNvSpPr>
@@ -1141,36 +1162,36 @@
           </a:bodyPr>
           <a:lstStyle>
             <a:lvl1pPr>
-              <a:defRPr lang="en-us" sz="6000" cap="none"/>
+              <a:defRPr lang="en-US" sz="6000" cap="none"/>
             </a:lvl1pPr>
             <a:lvl2pPr>
-              <a:defRPr lang="en-us"/>
+              <a:defRPr lang="en-US"/>
             </a:lvl2pPr>
             <a:lvl3pPr>
-              <a:defRPr lang="en-us"/>
+              <a:defRPr lang="en-US"/>
             </a:lvl3pPr>
             <a:lvl4pPr>
-              <a:defRPr lang="en-us"/>
+              <a:defRPr lang="en-US"/>
             </a:lvl4pPr>
             <a:lvl5pPr>
-              <a:defRPr lang="en-us"/>
+              <a:defRPr lang="en-US"/>
             </a:lvl5pPr>
             <a:lvl6pPr>
-              <a:defRPr lang="en-us"/>
+              <a:defRPr lang="en-US"/>
             </a:lvl6pPr>
             <a:lvl7pPr>
-              <a:defRPr lang="en-us"/>
+              <a:defRPr lang="en-US"/>
             </a:lvl7pPr>
             <a:lvl8pPr>
-              <a:defRPr lang="en-us"/>
+              <a:defRPr lang="en-US"/>
             </a:lvl8pPr>
             <a:lvl9pPr>
-              <a:defRPr lang="en-us"/>
+              <a:defRPr lang="en-US"/>
             </a:lvl9pPr>
           </a:lstStyle>
           <a:p>
             <a:pPr>
-              <a:defRPr lang="en-us"/>
+              <a:defRPr lang="en-US"/>
             </a:pPr>
             <a:r>
               <a:t>Click to edit Master title style</a:t>
@@ -1185,7 +1206,7 @@
             <a:spLocks noGrp="1" noChangeArrowheads="1"/>
             <a:extLst>
               <a:ext uri="smNativeData">
-                <pr:smNativeData xmlns:pr="smNativeData" xmlns="smNativeData" val="SMDATA_15_FLquaRMAAAAlAAAAZAAAAA0AAAAAkAAAAEgAAACQAAAASAAAAAAAAAAAAAAAAAAAAAEAAABQAAAAAAAAAAAA4D8AAAAAAADgPwAAAAAAAOA/AAAAAAAA4D8AAAAAAADgPwAAAAAAAOA/AAAAAAAA4D8AAAAAAADgPwAAAAAAAOA/AAAAAAAA4D8CAAAAjAAAAAAAAAAAAAAAW5vVDP///wgAAAAAAAAAAAAAAAAAAAAAAAAAAAAAAAAAAAAAZAAAAAEAAABAAAAAAAAAAAAAAAAAAAAAAAAAAAAAAAAAAAAAAAAAAAAAAAAAAAAAAAAAAAAAAAAAAAAAAAAAAAAAAAAAAAAAAAAAAAAAAAAAAAAAAAAAAAAAAAAAAAAAFAAAADwAAAAAAAAAAAAAAAAAAAkUAAAAAQAAABQAAAAUAAAAFAAAAAEAAAAAAAAAZAAAAGQAAAAAAAAAZAAAAGQAAAAVAAAAYAAAAAAAAAAAAAAADwAAACADAAAAAAAAAAAAAAEAAACgMgAAVgcAAKr4//8BAAAAf39/AAEAAABkAAAAAAAAABQAAABAHwAAAAAAACYAAAAAAAAAwOD//wAAAAAmAAAAZAAAABYAAABMAAAAAAAAAAAAAAAEAAAAAAAAAAEAAADn5uYKAAAAACgAAAAoAAAAZAAAAGQAAAAAAAAAzMzMAAAAAABQAAAAUAAAAGQAAABkAAAAAAAAABcAAAAUAAAAAAAAAAAAAAD/fwAA/38AAAAAAAAJAAAABAAAAOrv9v8eAAAAaAAAAAAAAAAAAAAAAAAAAAAAAAAAAAAAECcAABAnAAAAAAAAAAAAAAAAAAAAAAAAAAAAAAAAAAAAAAAAAAAAABQAAAAAAAAAwMD/AAAAAABkAAAAMgAAAAAAAABkAAAAAAAAAH9/fwAKAAAAIgAAABgAAAAAAAAAAAAAAAAAAAAAAAAAAAAAAAAAAAAkAAAAJAAAAAAAAAAHAAAAAAAAAAAAAAAAAAAAAAAAAAAAAAAAAAAAf39/ACUAAABYAAAAAAAAAAAAAAAAAAAAAAAAAAAAAAAAAAAAAAAAAAAAAAAAAAAAAAAAAAAAAAA/AAAAAAAAAKCGAQAAAAAAAAAAAAAAAAAMAAAAAQAAAAAAAAAAAAAAAAAAAB8AAABUAAAAAAAABQAAAAEAAAAAAAAAAAAAAAAAAAAAAAAAAAAAAAAAAAAAAAAAAAAAAAJ/f38AAAAAA8zMzADAwP8Af39/AAAAAAAAAAAAAAAAAAAAAAAAAAAAIQAAABgAAAAUAAAAHgUAADwcAADORQAAdiUAABAAAAAmAAAACAAAAAGAAAAAAAAA"/>
+                <pr:smNativeData xmlns="smNativeData" xmlns:pr="smNativeData" xmlns:p15="http://schemas.microsoft.com/office/powerpoint/2012/main" xmlns:p14="http://schemas.microsoft.com/office/powerpoint/2010/main" xmlns:mc="http://schemas.openxmlformats.org/markup-compatibility/2006" val="SMDATA_15_FLquaRMAAAAlAAAAZAAAAA0AAAAAkAAAAEgAAACQAAAASAAAAAAAAAAAAAAAAAAAAAEAAABQAAAAAAAAAAAA4D8AAAAAAADgPwAAAAAAAOA/AAAAAAAA4D8AAAAAAADgPwAAAAAAAOA/AAAAAAAA4D8AAAAAAADgPwAAAAAAAOA/AAAAAAAA4D8CAAAAjAAAAAAAAAAAAAAAW5vVDP///wgAAAAAAAAAAAAAAAAAAAAAAAAAAAAAAAAAAAAAZAAAAAEAAABAAAAAAAAAAAAAAAAAAAAAAAAAAAAAAAAAAAAAAAAAAAAAAAAAAAAAAAAAAAAAAAAAAAAAAAAAAAAAAAAAAAAAAAAAAAAAAAAAAAAAAAAAAAAAAAAAAAAAFAAAADwAAAAAAAAAAAAAAAAAAAkUAAAAAQAAABQAAAAUAAAAFAAAAAEAAAAAAAAAZAAAAGQAAAAAAAAAZAAAAGQAAAAVAAAAYAAAAAAAAAAAAAAADwAAACADAAAAAAAAAAAAAAEAAACgMgAAVgcAAKr4//8BAAAAf39/AAEAAABkAAAAAAAAABQAAABAHwAAAAAAACYAAAAAAAAAwOD//wAAAAAmAAAAZAAAABYAAABMAAAAAAAAAAAAAAAEAAAAAAAAAAEAAADn5uYKAAAAACgAAAAoAAAAZAAAAGQAAAAAAAAAzMzMAAAAAABQAAAAUAAAAGQAAABkAAAAAAAAABcAAAAUAAAAAAAAAAAAAAD/fwAA/38AAAAAAAAJAAAABAAAAOrv9v8eAAAAaAAAAAAAAAAAAAAAAAAAAAAAAAAAAAAAECcAABAnAAAAAAAAAAAAAAAAAAAAAAAAAAAAAAAAAAAAAAAAAAAAABQAAAAAAAAAwMD/AAAAAABkAAAAMgAAAAAAAABkAAAAAAAAAH9/fwAKAAAAIgAAABgAAAAAAAAAAAAAAAAAAAAAAAAAAAAAAAAAAAAkAAAAJAAAAAAAAAAHAAAAAAAAAAAAAAAAAAAAAAAAAAAAAAAAAAAAf39/ACUAAABYAAAAAAAAAAAAAAAAAAAAAAAAAAAAAAAAAAAAAAAAAAAAAAAAAAAAAAAAAAAAAAA/AAAAAAAAAKCGAQAAAAAAAAAAAAAAAAAMAAAAAQAAAAAAAAAAAAAAAAAAAB8AAABUAAAAAAAABQAAAAEAAAAAAAAAAAAAAAAAAAAAAAAAAAAAAAAAAAAAAAAAAAAAAAJ/f38AAAAAA8zMzADAwP8Af39/AAAAAAAAAAAAAAAAAAAAAAAAAAAAIQAAABgAAAAUAAAAHgUAADwcAADORQAAdiUAABAAAAAmAAAACAAAAAGAAAAAAAAA"/>
               </a:ext>
             </a:extLst>
           </p:cNvSpPr>
@@ -1204,7 +1225,7 @@
           <a:lstStyle>
             <a:lvl1pPr marL="0" indent="0">
               <a:buNone/>
-              <a:defRPr lang="en-us" sz="2400" cap="none">
+              <a:defRPr lang="en-US" sz="2400" cap="none">
                 <a:solidFill>
                   <a:srgbClr val="8C8C8C"/>
                 </a:solidFill>
@@ -1212,7 +1233,7 @@
             </a:lvl1pPr>
             <a:lvl2pPr marL="457200" indent="0">
               <a:buNone/>
-              <a:defRPr lang="en-us" sz="2000" cap="none">
+              <a:defRPr lang="en-US" sz="2000" cap="none">
                 <a:solidFill>
                   <a:srgbClr val="8C8C8C"/>
                 </a:solidFill>
@@ -1220,7 +1241,7 @@
             </a:lvl2pPr>
             <a:lvl3pPr marL="914400" indent="0">
               <a:buNone/>
-              <a:defRPr lang="en-us" sz="1800" cap="none">
+              <a:defRPr lang="en-US" sz="1800" cap="none">
                 <a:solidFill>
                   <a:srgbClr val="8C8C8C"/>
                 </a:solidFill>
@@ -1228,7 +1249,7 @@
             </a:lvl3pPr>
             <a:lvl4pPr marL="1371600" indent="0">
               <a:buNone/>
-              <a:defRPr lang="en-us" sz="1600" cap="none">
+              <a:defRPr lang="en-US" sz="1600" cap="none">
                 <a:solidFill>
                   <a:srgbClr val="8C8C8C"/>
                 </a:solidFill>
@@ -1236,7 +1257,7 @@
             </a:lvl4pPr>
             <a:lvl5pPr marL="1828800" indent="0">
               <a:buNone/>
-              <a:defRPr lang="en-us" sz="1600" cap="none">
+              <a:defRPr lang="en-US" sz="1600" cap="none">
                 <a:solidFill>
                   <a:srgbClr val="8C8C8C"/>
                 </a:solidFill>
@@ -1244,7 +1265,7 @@
             </a:lvl5pPr>
             <a:lvl6pPr marL="2286000" indent="0">
               <a:buNone/>
-              <a:defRPr lang="en-us" sz="1600" cap="none">
+              <a:defRPr lang="en-US" sz="1600" cap="none">
                 <a:solidFill>
                   <a:srgbClr val="8C8C8C"/>
                 </a:solidFill>
@@ -1252,7 +1273,7 @@
             </a:lvl6pPr>
             <a:lvl7pPr marL="2743200" indent="0">
               <a:buNone/>
-              <a:defRPr lang="en-us" sz="1600" cap="none">
+              <a:defRPr lang="en-US" sz="1600" cap="none">
                 <a:solidFill>
                   <a:srgbClr val="8C8C8C"/>
                 </a:solidFill>
@@ -1260,7 +1281,7 @@
             </a:lvl7pPr>
             <a:lvl8pPr marL="3200400" indent="0">
               <a:buNone/>
-              <a:defRPr lang="en-us" sz="1600" cap="none">
+              <a:defRPr lang="en-US" sz="1600" cap="none">
                 <a:solidFill>
                   <a:srgbClr val="8C8C8C"/>
                 </a:solidFill>
@@ -1268,7 +1289,7 @@
             </a:lvl8pPr>
             <a:lvl9pPr marL="3657600" indent="0">
               <a:buNone/>
-              <a:defRPr lang="en-us" sz="1600" cap="none">
+              <a:defRPr lang="en-US" sz="1600" cap="none">
                 <a:solidFill>
                   <a:srgbClr val="8C8C8C"/>
                 </a:solidFill>
@@ -1277,7 +1298,7 @@
           </a:lstStyle>
           <a:p>
             <a:pPr>
-              <a:defRPr lang="en-us"/>
+              <a:defRPr lang="en-US"/>
             </a:pPr>
             <a:r>
               <a:t>Click to edit Master text styles</a:t>
@@ -1292,7 +1313,7 @@
             <a:spLocks noGrp="1" noChangeArrowheads="1"/>
             <a:extLst>
               <a:ext uri="smNativeData">
-                <pr:smNativeData xmlns:pr="smNativeData" xmlns="smNativeData" val="SMDATA_15_FLquaRMAAAAlAAAAZAAAAA0AAAAAkAAAAEgAAACQAAAASAAAAAAAAAABAAAAAAAAAAEAAABQAAAAAAAAAAAA4D8AAAAAAADgPwAAAAAAAOA/AAAAAAAA4D8AAAAAAADgPwAAAAAAAOA/AAAAAAAA4D8AAAAAAADgPwAAAAAAAOA/AAAAAAAA4D8CAAAAjAAAAAAAAAAAAAAAW5vVDP///wgAAAAAAAAAAAAAAAAAAAAAAAAAAAAAAAAAAAAAZAAAAAEAAABAAAAAAAAAAAAAAAAAAAAAAAAAAAAAAAAAAAAAAAAAAAAAAAAAAAAAAAAAAAAAAAAAAAAAAAAAAAAAAAAAAAAAAAAAAAAAAAAAAAAAAAAAAAAAAAAAAAAAFAAAADwAAAAAAAAAAAAAAAAAAAkUAAAAAQAAABQAAAAUAAAAFAAAAAEAAAAAAAAAZAAAAGQAAAAAAAAAZAAAAGQAAAAVAAAAYAAAAAAAAAAAAAAADwAAACADAAAAAAAAAAAAAAEAAACgMgAAVgcAAKr4//8BAAAAf39/AAEAAABkAAAAAAAAABQAAABAHwAAAAAAACYAAAAAAAAAwOD//wAAAAAmAAAAZAAAABYAAABMAAAAAAAAAAAAAAAEAAAAAAAAAAEAAADn5uYKAAAAACgAAAAoAAAAZAAAAGQAAAAAAAAAzMzMAAAAAABQAAAAUAAAAGQAAABkAAAAAAAAABcAAAAUAAAAAAAAAAAAAAD/fwAA/38AAAAAAAAJAAAABAAAAOrv9v8eAAAAaAAAAAAAAAAAAAAAAAAAAAAAAAAAAAAAECcAABAnAAAAAAAAAAAAAAAAAAAAAAAAAAAAAAAAAAAAAAAAAAAAABQAAAAAAAAAwMD/AAAAAABkAAAAMgAAAAAAAABkAAAAAAAAAH9/fwAKAAAAIgAAABgAAAAAAAAAAAAAAAAAAAAAAAAAAAAAAAAAAAAkAAAAJAAAAAAAAAAHAAAAAAAAAAAAAAAAAAAAAAAAAAAAAAAAAAAAf39/ACUAAABYAAAAAAAAAAAAAAAAAAAAAAAAAAAAAAAAAAAAAAAAAAAAAAAAAAAAAAAAAAAAAAA/AAAAAAAAAKCGAQAAAAAAAAAAAAAAAAAMAAAAAQAAAAAAAAAAAAAAAAAAAB8AAABUAAAAAAAABQAAAAEAAAAAAAAAAAAAAAAAAAAAAAAAAAAAAAAAAAAAAAAAAAAAAAJ/f38AAAAAA8zMzADAwP8Af39/AAAAAAAAAAAAAAAAAAAAAAAAAAAAIQAAABgAAAAUAAAAKAUAABonAAAIFgAAWSkAABAAAAAmAAAACAAAAAAAAAAAAAAA"/>
+                <pr:smNativeData xmlns="smNativeData" xmlns:pr="smNativeData" xmlns:p15="http://schemas.microsoft.com/office/powerpoint/2012/main" xmlns:p14="http://schemas.microsoft.com/office/powerpoint/2010/main" xmlns:mc="http://schemas.openxmlformats.org/markup-compatibility/2006" val="SMDATA_15_FLquaRMAAAAlAAAAZAAAAA0AAAAAkAAAAEgAAACQAAAASAAAAAAAAAABAAAAAAAAAAEAAABQAAAAAAAAAAAA4D8AAAAAAADgPwAAAAAAAOA/AAAAAAAA4D8AAAAAAADgPwAAAAAAAOA/AAAAAAAA4D8AAAAAAADgPwAAAAAAAOA/AAAAAAAA4D8CAAAAjAAAAAAAAAAAAAAAW5vVDP///wgAAAAAAAAAAAAAAAAAAAAAAAAAAAAAAAAAAAAAZAAAAAEAAABAAAAAAAAAAAAAAAAAAAAAAAAAAAAAAAAAAAAAAAAAAAAAAAAAAAAAAAAAAAAAAAAAAAAAAAAAAAAAAAAAAAAAAAAAAAAAAAAAAAAAAAAAAAAAAAAAAAAAFAAAADwAAAAAAAAAAAAAAAAAAAkUAAAAAQAAABQAAAAUAAAAFAAAAAEAAAAAAAAAZAAAAGQAAAAAAAAAZAAAAGQAAAAVAAAAYAAAAAAAAAAAAAAADwAAACADAAAAAAAAAAAAAAEAAACgMgAAVgcAAKr4//8BAAAAf39/AAEAAABkAAAAAAAAABQAAABAHwAAAAAAACYAAAAAAAAAwOD//wAAAAAmAAAAZAAAABYAAABMAAAAAAAAAAAAAAAEAAAAAAAAAAEAAADn5uYKAAAAACgAAAAoAAAAZAAAAGQAAAAAAAAAzMzMAAAAAABQAAAAUAAAAGQAAABkAAAAAAAAABcAAAAUAAAAAAAAAAAAAAD/fwAA/38AAAAAAAAJAAAABAAAAOrv9v8eAAAAaAAAAAAAAAAAAAAAAAAAAAAAAAAAAAAAECcAABAnAAAAAAAAAAAAAAAAAAAAAAAAAAAAAAAAAAAAAAAAAAAAABQAAAAAAAAAwMD/AAAAAABkAAAAMgAAAAAAAABkAAAAAAAAAH9/fwAKAAAAIgAAABgAAAAAAAAAAAAAAAAAAAAAAAAAAAAAAAAAAAAkAAAAJAAAAAAAAAAHAAAAAAAAAAAAAAAAAAAAAAAAAAAAAAAAAAAAf39/ACUAAABYAAAAAAAAAAAAAAAAAAAAAAAAAAAAAAAAAAAAAAAAAAAAAAAAAAAAAAAAAAAAAAA/AAAAAAAAAKCGAQAAAAAAAAAAAAAAAAAMAAAAAQAAAAAAAAAAAAAAAAAAAB8AAABUAAAAAAAABQAAAAEAAAAAAAAAAAAAAAAAAAAAAAAAAAAAAAAAAAAAAAAAAAAAAAJ/f38AAAAAA8zMzADAwP8Af39/AAAAAAAAAAAAAAAAAAAAAAAAAAAAIQAAABgAAAAUAAAAKAUAABonAAAIFgAAWSkAABAAAAAmAAAACAAAAAAAAAAAAAAA"/>
               </a:ext>
             </a:extLst>
           </p:cNvSpPr>
@@ -1306,11 +1327,12 @@
           <a:lstStyle/>
           <a:p>
             <a:pPr>
-              <a:defRPr lang="en-us"/>
+              <a:defRPr lang="en-US"/>
             </a:pPr>
             <a:fld id="{30AE80C3-8DDD-FB76-9316-7B23CE58652E}" type="datetime1">
-              <a:t>3/4/2026</a:t>
+              <a:t>4/21/2026</a:t>
             </a:fld>
+            <a:endParaRPr/>
           </a:p>
         </p:txBody>
       </p:sp>
@@ -1321,7 +1343,7 @@
             <a:spLocks noGrp="1" noChangeArrowheads="1"/>
             <a:extLst>
               <a:ext uri="smNativeData">
-                <pr:smNativeData xmlns:pr="smNativeData" xmlns="smNativeData" val="SMDATA_15_FLquaRMAAAAlAAAAZAAAAA0AAAAAkAAAAEgAAACQAAAASAAAAAAAAAABAAAAAAAAAAEAAABQAAAAAAAAAAAA4D8AAAAAAADgPwAAAAAAAOA/AAAAAAAA4D8AAAAAAADgPwAAAAAAAOA/AAAAAAAA4D8AAAAAAADgPwAAAAAAAOA/AAAAAAAA4D8CAAAAjAAAAAAAAAAAAAAAW5vVDP///wgAAAAAAAAAAAAAAAAAAAAAAAAAAAAAAAAAAAAAZAAAAAEAAABAAAAAAAAAAAAAAAAAAAAAAAAAAAAAAAAAAAAAAAAAAAAAAAAAAAAAAAAAAAAAAAAAAAAAAAAAAAAAAAAAAAAAAAAAAAAAAAAAAAAAAAAAAAAAAAAAAAAAFAAAADwAAAAAAAAAAAAAAAAAAAkUAAAAAQAAABQAAAAUAAAAFAAAAAEAAAAAAAAAZAAAAGQAAAAAAAAAZAAAAGQAAAAVAAAAYAAAAAAAAAAAAAAADwAAACADAAAAAAAAAAAAAAEAAACgMgAAVgcAAKr4//8BAAAAf39/AAEAAABkAAAAAAAAABQAAABAHwAAAAAAACYAAAAAAAAAwOD//wAAAAAmAAAAZAAAABYAAABMAAAAAAAAAAAAAAAEAAAAAAAAAAEAAADn5uYKAAAAACgAAAAoAAAAZAAAAGQAAAAAAAAAzMzMAAAAAABQAAAAUAAAAGQAAABkAAAAAAAAABcAAAAUAAAAAAAAAAAAAAD/fwAA/38AAAAAAAAJAAAABAAAAAAAAAAeAAAAaAAAAAAAAAAAAAAAAAAAAAAAAAAAAAAAECcAABAnAAAAAAAAAAAAAAAAAAAAAAAAAAAAAAAAAAAAAAAAAAAAABQAAAAAAAAAwMD/AAAAAABkAAAAMgAAAAAAAABkAAAAAAAAAH9/fwAKAAAAIgAAABgAAAAAAAAAAAAAAAAAAAAAAAAAAAAAAAAAAAAkAAAAJAAAAAAAAAAHAAAAAAAAAAAAAAAAAAAAAAAAAAAAAAAAAAAAf39/ACUAAABYAAAAAAAAAAAAAAAAAAAAAAAAAAAAAAAAAAAAAAAAAAAAAAAAAAAAAAAAAAAAAAA/AAAAAAAAAKCGAQAAAAAAAAAAAAAAAAAMAAAAAQAAAAAAAAAAAAAAAAAAAB8AAABUAAAAAAAABQAAAAEAAAAAAAAAAAAAAAAAAAAAAAAAAAAAAAAAAAAAAAAAAAAAAAJ/f38AAAAAA8zMzADAwP8Af39/AAAAAAAAAAAAAAAAAAAAAAAAAAAAIQAAABgAAAAUAAAA2BgAABonAAAoMgAAWSkAABAAAAAmAAAACAAAAAAAAAAAAAAA"/>
+                <pr:smNativeData xmlns="smNativeData" xmlns:pr="smNativeData" xmlns:p15="http://schemas.microsoft.com/office/powerpoint/2012/main" xmlns:p14="http://schemas.microsoft.com/office/powerpoint/2010/main" xmlns:mc="http://schemas.openxmlformats.org/markup-compatibility/2006" val="SMDATA_15_FLquaRMAAAAlAAAAZAAAAA0AAAAAkAAAAEgAAACQAAAASAAAAAAAAAABAAAAAAAAAAEAAABQAAAAAAAAAAAA4D8AAAAAAADgPwAAAAAAAOA/AAAAAAAA4D8AAAAAAADgPwAAAAAAAOA/AAAAAAAA4D8AAAAAAADgPwAAAAAAAOA/AAAAAAAA4D8CAAAAjAAAAAAAAAAAAAAAW5vVDP///wgAAAAAAAAAAAAAAAAAAAAAAAAAAAAAAAAAAAAAZAAAAAEAAABAAAAAAAAAAAAAAAAAAAAAAAAAAAAAAAAAAAAAAAAAAAAAAAAAAAAAAAAAAAAAAAAAAAAAAAAAAAAAAAAAAAAAAAAAAAAAAAAAAAAAAAAAAAAAAAAAAAAAFAAAADwAAAAAAAAAAAAAAAAAAAkUAAAAAQAAABQAAAAUAAAAFAAAAAEAAAAAAAAAZAAAAGQAAAAAAAAAZAAAAGQAAAAVAAAAYAAAAAAAAAAAAAAADwAAACADAAAAAAAAAAAAAAEAAACgMgAAVgcAAKr4//8BAAAAf39/AAEAAABkAAAAAAAAABQAAABAHwAAAAAAACYAAAAAAAAAwOD//wAAAAAmAAAAZAAAABYAAABMAAAAAAAAAAAAAAAEAAAAAAAAAAEAAADn5uYKAAAAACgAAAAoAAAAZAAAAGQAAAAAAAAAzMzMAAAAAABQAAAAUAAAAGQAAABkAAAAAAAAABcAAAAUAAAAAAAAAAAAAAD/fwAA/38AAAAAAAAJAAAABAAAAAAAAAAeAAAAaAAAAAAAAAAAAAAAAAAAAAAAAAAAAAAAECcAABAnAAAAAAAAAAAAAAAAAAAAAAAAAAAAAAAAAAAAAAAAAAAAABQAAAAAAAAAwMD/AAAAAABkAAAAMgAAAAAAAABkAAAAAAAAAH9/fwAKAAAAIgAAABgAAAAAAAAAAAAAAAAAAAAAAAAAAAAAAAAAAAAkAAAAJAAAAAAAAAAHAAAAAAAAAAAAAAAAAAAAAAAAAAAAAAAAAAAAf39/ACUAAABYAAAAAAAAAAAAAAAAAAAAAAAAAAAAAAAAAAAAAAAAAAAAAAAAAAAAAAAAAAAAAAA/AAAAAAAAAKCGAQAAAAAAAAAAAAAAAAAMAAAAAQAAAAAAAAAAAAAAAAAAAB8AAABUAAAAAAAABQAAAAEAAAAAAAAAAAAAAAAAAAAAAAAAAAAAAAAAAAAAAAAAAAAAAAJ/f38AAAAAA8zMzADAwP8Af39/AAAAAAAAAAAAAAAAAAAAAAAAAAAAIQAAABgAAAAUAAAA2BgAABonAAAoMgAAWSkAABAAAAAmAAAACAAAAAAAAAAAAAAA"/>
               </a:ext>
             </a:extLst>
           </p:cNvSpPr>
@@ -1335,8 +1357,9 @@
           <a:lstStyle/>
           <a:p>
             <a:pPr>
-              <a:defRPr lang="en-us"/>
-            </a:pPr>
+              <a:defRPr lang="en-US"/>
+            </a:pPr>
+            <a:endParaRPr/>
           </a:p>
         </p:txBody>
       </p:sp>
@@ -1347,7 +1370,7 @@
             <a:spLocks noGrp="1" noChangeArrowheads="1"/>
             <a:extLst>
               <a:ext uri="smNativeData">
-                <pr:smNativeData xmlns:pr="smNativeData" xmlns="smNativeData" val="SMDATA_15_FLquaRMAAAAlAAAAZAAAAA0AAAAAkAAAAEgAAACQAAAASAAAAAAAAAABAAAAAAAAAAEAAABQAAAAAAAAAAAA4D8AAAAAAADgPwAAAAAAAOA/AAAAAAAA4D8AAAAAAADgPwAAAAAAAOA/AAAAAAAA4D8AAAAAAADgPwAAAAAAAOA/AAAAAAAA4D8CAAAAjAAAAAAAAAAAAAAAW5vVDP///wgAAAAAAAAAAAAAAAAAAAAAAAAAAAAAAAAAAAAAZAAAAAEAAABAAAAAAAAAAAAAAAAAAAAAAAAAAAAAAAAAAAAAAAAAAAAAAAAAAAAAAAAAAAAAAAAAAAAAAAAAAAAAAAAAAAAAAAAAAAAAAAAAAAAAAAAAAAAAAAAAAAAAFAAAADwAAAAAAAAAAAAAAAAAAAkUAAAAAQAAABQAAAAUAAAAFAAAAAEAAAAAAAAAZAAAAGQAAAAAAAAAZAAAAGQAAAAVAAAAYAAAAAAAAAAAAAAADwAAACADAAAAAAAAAAAAAAEAAACgMgAAVgcAAKr4//8BAAAAf39/AAEAAABkAAAAAAAAABQAAABAHwAAAAAAACYAAAAAAAAAwOD//wAAAAAmAAAAZAAAABYAAABMAAAAAAAAAAAAAAAEAAAAAAAAAAEAAADn5uYKAAAAACgAAAAoAAAAZAAAAGQAAAAAAAAAzMzMAAAAAABQAAAAUAAAAGQAAABkAAAAAAAAABcAAAAUAAAAAAAAAAAAAAD/fwAA/38AAAAAAAAJAAAABAAAAAAAAAAeAAAAaAAAAAAAAAAAAAAAAAAAAAAAAAAAAAAAECcAABAnAAAAAAAAAAAAAAAAAAAAAAAAAAAAAAAAAAAAAAAAAAAAABQAAAAAAAAAwMD/AAAAAABkAAAAMgAAAAAAAABkAAAAAAAAAH9/fwAKAAAAIgAAABgAAAAAAAAAAAAAAAAAAAAAAAAAAAAAAAAAAAAkAAAAJAAAAAAAAAAHAAAAAAAAAAAAAAAAAAAAAAAAAAAAAAAAAAAAf39/ACUAAABYAAAAAAAAAAAAAAAAAAAAAAAAAAAAAAAAAAAAAAAAAAAAAAAAAAAAAAAAAAAAAAA/AAAAAAAAAKCGAQAAAAAAAAAAAAAAAAAMAAAAAQAAAAAAAAAAAAAAAAAAAB8AAABUAAAAAAAABQAAAAEAAAAAAAAAAAAAAAAAAAAAAAAAAAAAAAAAAAAAAAAAAAAAAAJ/f38AAAAAA8zMzADAwP8Af39/AAAAAAAAAAAAAAAAAAAAAAAAAAAAIQAAABgAAAAUAAAA+DQAABonAADYRQAAWSkAABAAAAAmAAAACAAAAAAAAAAAAAAA"/>
+                <pr:smNativeData xmlns="smNativeData" xmlns:pr="smNativeData" xmlns:p15="http://schemas.microsoft.com/office/powerpoint/2012/main" xmlns:p14="http://schemas.microsoft.com/office/powerpoint/2010/main" xmlns:mc="http://schemas.openxmlformats.org/markup-compatibility/2006" val="SMDATA_15_FLquaRMAAAAlAAAAZAAAAA0AAAAAkAAAAEgAAACQAAAASAAAAAAAAAABAAAAAAAAAAEAAABQAAAAAAAAAAAA4D8AAAAAAADgPwAAAAAAAOA/AAAAAAAA4D8AAAAAAADgPwAAAAAAAOA/AAAAAAAA4D8AAAAAAADgPwAAAAAAAOA/AAAAAAAA4D8CAAAAjAAAAAAAAAAAAAAAW5vVDP///wgAAAAAAAAAAAAAAAAAAAAAAAAAAAAAAAAAAAAAZAAAAAEAAABAAAAAAAAAAAAAAAAAAAAAAAAAAAAAAAAAAAAAAAAAAAAAAAAAAAAAAAAAAAAAAAAAAAAAAAAAAAAAAAAAAAAAAAAAAAAAAAAAAAAAAAAAAAAAAAAAAAAAFAAAADwAAAAAAAAAAAAAAAAAAAkUAAAAAQAAABQAAAAUAAAAFAAAAAEAAAAAAAAAZAAAAGQAAAAAAAAAZAAAAGQAAAAVAAAAYAAAAAAAAAAAAAAADwAAACADAAAAAAAAAAAAAAEAAACgMgAAVgcAAKr4//8BAAAAf39/AAEAAABkAAAAAAAAABQAAABAHwAAAAAAACYAAAAAAAAAwOD//wAAAAAmAAAAZAAAABYAAABMAAAAAAAAAAAAAAAEAAAAAAAAAAEAAADn5uYKAAAAACgAAAAoAAAAZAAAAGQAAAAAAAAAzMzMAAAAAABQAAAAUAAAAGQAAABkAAAAAAAAABcAAAAUAAAAAAAAAAAAAAD/fwAA/38AAAAAAAAJAAAABAAAAAAAAAAeAAAAaAAAAAAAAAAAAAAAAAAAAAAAAAAAAAAAECcAABAnAAAAAAAAAAAAAAAAAAAAAAAAAAAAAAAAAAAAAAAAAAAAABQAAAAAAAAAwMD/AAAAAABkAAAAMgAAAAAAAABkAAAAAAAAAH9/fwAKAAAAIgAAABgAAAAAAAAAAAAAAAAAAAAAAAAAAAAAAAAAAAAkAAAAJAAAAAAAAAAHAAAAAAAAAAAAAAAAAAAAAAAAAAAAAAAAAAAAf39/ACUAAABYAAAAAAAAAAAAAAAAAAAAAAAAAAAAAAAAAAAAAAAAAAAAAAAAAAAAAAAAAAAAAAA/AAAAAAAAAKCGAQAAAAAAAAAAAAAAAAAMAAAAAQAAAAAAAAAAAAAAAAAAAB8AAABUAAAAAAAABQAAAAEAAAAAAAAAAAAAAAAAAAAAAAAAAAAAAAAAAAAAAAAAAAAAAAJ/f38AAAAAA8zMzADAwP8Af39/AAAAAAAAAAAAAAAAAAAAAAAAAAAAIQAAABgAAAAUAAAA+DQAABonAADYRQAAWSkAABAAAAAmAAAACAAAAAAAAAAAAAAA"/>
               </a:ext>
             </a:extLst>
           </p:cNvSpPr>
@@ -1361,11 +1384,12 @@
           <a:lstStyle/>
           <a:p>
             <a:pPr>
-              <a:defRPr lang="en-us"/>
+              <a:defRPr lang="en-US"/>
             </a:pPr>
             <a:fld id="{30AEF886-C8DD-FB0E-9316-3E5BB658656B}" type="slidenum">
               <a:t>‹#›</a:t>
             </a:fld>
+            <a:endParaRPr/>
           </a:p>
         </p:txBody>
       </p:sp>
@@ -1379,7 +1403,7 @@
 </file>
 
 <file path=ppt/slideLayouts/slideLayout4.xml><?xml version="1.0" encoding="utf-8"?>
-<p:sldLayout xmlns:p="http://schemas.openxmlformats.org/presentationml/2006/main" xmlns:mc="http://schemas.openxmlformats.org/markup-compatibility/2006" xmlns:p14="http://schemas.microsoft.com/office/powerpoint/2010/main" xmlns:p15="http://schemas.microsoft.com/office/powerpoint/2012/main" xmlns:r="http://schemas.openxmlformats.org/officeDocument/2006/relationships" xmlns:a="http://schemas.openxmlformats.org/drawingml/2006/main" type="twoObj" preserve="1">
+<p:sldLayout xmlns:a="http://schemas.openxmlformats.org/drawingml/2006/main" xmlns:r="http://schemas.openxmlformats.org/officeDocument/2006/relationships" xmlns:p="http://schemas.openxmlformats.org/presentationml/2006/main" type="twoObj" preserve="1">
   <p:cSld name="Two Content">
     <p:spTree>
       <p:nvGrpSpPr>
@@ -1402,7 +1426,7 @@
             <a:spLocks noGrp="1" noChangeArrowheads="1"/>
             <a:extLst>
               <a:ext uri="smNativeData">
-                <pr:smNativeData xmlns:pr="smNativeData" xmlns="smNativeData" val="SMDATA_15_FLquaRMAAAAlAAAAZAAAAA0AAAAAkAAAAEgAAACQAAAASAAAAAAAAAABAAAAAAAAAAEAAABQAAAAAAAAAAAA4D8AAAAAAADgPwAAAAAAAOA/AAAAAAAA4D8AAAAAAADgPwAAAAAAAOA/AAAAAAAA4D8AAAAAAADgPwAAAAAAAOA/AAAAAAAA4D8CAAAAjAAAAAAAAAAAAAAAW5vVDP///wgAAAAAAAAAAAAAAAAAAAAAAAAAAAAAAAAAAAAAZAAAAAEAAABAAAAAAAAAAAAAAAAAAAAAAAAAAAAAAAAAAAAAAAAAAAAAAAAAAAAAAAAAAAAAAAAAAAAAAAAAAAAAAAAAAAAAAAAAAAAAAAAAAAAAAAAAAAAAAAAAAAAAFAAAADwAAAAAAAAAAAAAAAAAAAkUAAAAAQAAABQAAAAUAAAAFAAAAAEAAAAAAAAAZAAAAGQAAAAAAAAAZAAAAGQAAAAVAAAAYAAAAAAAAAAAAAAADwAAACADAAAAAAAAAAAAAAEAAACgMgAAVgcAAKr4//8BAAAAf39/AAEAAABkAAAAAAAAABQAAABAHwAAAAAAACYAAAAAAAAAwOD//wAAAAAmAAAAZAAAABYAAABMAAAAAAAAAAAAAAAEAAAAAAAAAAEAAADn5uYKAAAAACgAAAAoAAAAZAAAAGQAAAAAAAAAzMzMAAAAAABQAAAAUAAAAGQAAABkAAAAAAAAABcAAAAUAAAAAAAAAAAAAAD/fwAA/38AAAAAAAAJAAAABAAAAOrv9v8eAAAAaAAAAAAAAAAAAAAAAAAAAAAAAAAAAAAAECcAABAnAAAAAAAAAAAAAAAAAAAAAAAAAAAAAAAAAAAAAAAAAAAAABQAAAAAAAAAwMD/AAAAAABkAAAAMgAAAAAAAABkAAAAAAAAAH9/fwAKAAAAIgAAABgAAAAAAAAAAAAAAAAAAAAAAAAAAAAAAAAAAAAkAAAAJAAAAAAAAAAHAAAAAAAAAAAAAAAAAAAAAAAAAAAAAAAAAAAAf39/ACUAAABYAAAAAAAAAAAAAAAAAAAAAAAAAAAAAAAAAAAAAAAAAAAAAAAAAAAAAAAAAAAAAAA/AAAAAAAAAKCGAQAAAAAAAAAAAAAAAAAMAAAAAQAAAAAAAAAAAAAAAAAAAB8AAABUAAAAAAAABQAAAAEAAAAAAAAAAAAAAAAAAAAAAAAAAAAAAAAAAAAAAAAAAAAAAAJ/f38AAAAAA8zMzADAwP8Af39/AAAAAAAAAAAAAAAAAAAAAAAAAAAAIQAAABgAAAAUAAAAKAUAAD8CAADYRQAAZwoAABAAAAAmAAAACAAAAAAAAAAAAAAA"/>
+                <pr:smNativeData xmlns="smNativeData" xmlns:pr="smNativeData" xmlns:p15="http://schemas.microsoft.com/office/powerpoint/2012/main" xmlns:p14="http://schemas.microsoft.com/office/powerpoint/2010/main" xmlns:mc="http://schemas.openxmlformats.org/markup-compatibility/2006" val="SMDATA_15_FLquaRMAAAAlAAAAZAAAAA0AAAAAkAAAAEgAAACQAAAASAAAAAAAAAABAAAAAAAAAAEAAABQAAAAAAAAAAAA4D8AAAAAAADgPwAAAAAAAOA/AAAAAAAA4D8AAAAAAADgPwAAAAAAAOA/AAAAAAAA4D8AAAAAAADgPwAAAAAAAOA/AAAAAAAA4D8CAAAAjAAAAAAAAAAAAAAAW5vVDP///wgAAAAAAAAAAAAAAAAAAAAAAAAAAAAAAAAAAAAAZAAAAAEAAABAAAAAAAAAAAAAAAAAAAAAAAAAAAAAAAAAAAAAAAAAAAAAAAAAAAAAAAAAAAAAAAAAAAAAAAAAAAAAAAAAAAAAAAAAAAAAAAAAAAAAAAAAAAAAAAAAAAAAFAAAADwAAAAAAAAAAAAAAAAAAAkUAAAAAQAAABQAAAAUAAAAFAAAAAEAAAAAAAAAZAAAAGQAAAAAAAAAZAAAAGQAAAAVAAAAYAAAAAAAAAAAAAAADwAAACADAAAAAAAAAAAAAAEAAACgMgAAVgcAAKr4//8BAAAAf39/AAEAAABkAAAAAAAAABQAAABAHwAAAAAAACYAAAAAAAAAwOD//wAAAAAmAAAAZAAAABYAAABMAAAAAAAAAAAAAAAEAAAAAAAAAAEAAADn5uYKAAAAACgAAAAoAAAAZAAAAGQAAAAAAAAAzMzMAAAAAABQAAAAUAAAAGQAAABkAAAAAAAAABcAAAAUAAAAAAAAAAAAAAD/fwAA/38AAAAAAAAJAAAABAAAAOrv9v8eAAAAaAAAAAAAAAAAAAAAAAAAAAAAAAAAAAAAECcAABAnAAAAAAAAAAAAAAAAAAAAAAAAAAAAAAAAAAAAAAAAAAAAABQAAAAAAAAAwMD/AAAAAABkAAAAMgAAAAAAAABkAAAAAAAAAH9/fwAKAAAAIgAAABgAAAAAAAAAAAAAAAAAAAAAAAAAAAAAAAAAAAAkAAAAJAAAAAAAAAAHAAAAAAAAAAAAAAAAAAAAAAAAAAAAAAAAAAAAf39/ACUAAABYAAAAAAAAAAAAAAAAAAAAAAAAAAAAAAAAAAAAAAAAAAAAAAAAAAAAAAAAAAAAAAA/AAAAAAAAAKCGAQAAAAAAAAAAAAAAAAAMAAAAAQAAAAAAAAAAAAAAAAAAAB8AAABUAAAAAAAABQAAAAEAAAAAAAAAAAAAAAAAAAAAAAAAAAAAAAAAAAAAAAAAAAAAAAJ/f38AAAAAA8zMzADAwP8Af39/AAAAAAAAAAAAAAAAAAAAAAAAAAAAIQAAABgAAAAUAAAAKAUAAD8CAADYRQAAZwoAABAAAAAmAAAACAAAAAAAAAAAAAAA"/>
               </a:ext>
             </a:extLst>
           </p:cNvSpPr>
@@ -1416,7 +1440,7 @@
           <a:lstStyle/>
           <a:p>
             <a:pPr>
-              <a:defRPr lang="en-us"/>
+              <a:defRPr lang="en-US"/>
             </a:pPr>
             <a:r>
               <a:t>Click to edit Master title style</a:t>
@@ -1431,7 +1455,7 @@
             <a:spLocks noGrp="1" noChangeArrowheads="1"/>
             <a:extLst>
               <a:ext uri="smNativeData">
-                <pr:smNativeData xmlns:pr="smNativeData" xmlns="smNativeData" val="SMDATA_15_FLquaRMAAAAlAAAAZAAAAA0AAAAAkAAAAEgAAACQAAAASAAAAAAAAAAAAAAAAAAAAAEAAABQAAAAAAAAAAAA4D8AAAAAAADgPwAAAAAAAOA/AAAAAAAA4D8AAAAAAADgPwAAAAAAAOA/AAAAAAAA4D8AAAAAAADgPwAAAAAAAOA/AAAAAAAA4D8CAAAAjAAAAAAAAAAAAAAAW5vVDP///wgAAAAAAAAAAAAAAAAAAAAAAAAAAAAAAAAAAAAAZAAAAAEAAABAAAAAAAAAAAAAAAAAAAAAAAAAAAAAAAAAAAAAAAAAAAAAAAAAAAAAAAAAAAAAAAAAAAAAAAAAAAAAAAAAAAAAAAAAAAAAAAAAAAAAAAAAAAAAAAAAAAAAFAAAADwAAAAAAAAAAAAAAAAAAAkUAAAAAQAAABQAAAAUAAAAFAAAAAEAAAAAAAAAZAAAAGQAAAAAAAAAZAAAAGQAAAAVAAAAYAAAAAAAAAAAAAAADwAAACADAAAAAAAAAAAAAAEAAACgMgAAVgcAAKr4//8BAAAAf39/AAEAAABkAAAAAAAAABQAAABAHwAAAAAAACYAAAAAAAAAwOD//wAAAAAmAAAAZAAAABYAAABMAAAAAAAAAAAAAAAEAAAAAAAAAAEAAADn5uYKAAAAACgAAAAoAAAAZAAAAGQAAAAAAAAAzMzMAAAAAABQAAAAUAAAAGQAAABkAAAAAAAAABcAAAAUAAAAAAAAAAAAAAD/fwAA/38AAAAAAAAJAAAABAAAAOrv9v8eAAAAaAAAAAAAAAAAAAAAAAAAAAAAAAAAAAAAECcAABAnAAAAAAAAAAAAAAAAAAAAAAAAAAAAAAAAAAAAAAAAAAAAABQAAAAAAAAAwMD/AAAAAABkAAAAMgAAAAAAAABkAAAAAAAAAH9/fwAKAAAAIgAAABgAAAAAAAAAAAAAAAAAAAAAAAAAAAAAAAAAAAAkAAAAJAAAAAAAAAAHAAAAAAAAAAAAAAAAAAAAAAAAAAAAAAAAAAAAf39/ACUAAABYAAAAAAAAAAAAAAAAAAAAAAAAAAAAAAAAAAAAAAAAAAAAAAAAAAAAAAAAAAAAAAA/AAAAAAAAAKCGAQAAAAAAAAAAAAAAAAAMAAAAAQAAAAAAAAAAAAAAAAAAAB8AAABUAAAAAAAABQAAAAEAAAAAAAAAAAAAAAAAAAAAAAAAAAAAAAAAAAAAAAAAAAAAAAJ/f38AAAAAA8zMzADAwP8Af39/AAAAAAAAAAAAAAAAAAAAAAAAAAAAIQAAABgAAAAUAAAAKAUAADsLAAAIJQAAACYAABAAAAAmAAAACAAAAAEAAAAAAAAA"/>
+                <pr:smNativeData xmlns="smNativeData" xmlns:pr="smNativeData" xmlns:p15="http://schemas.microsoft.com/office/powerpoint/2012/main" xmlns:p14="http://schemas.microsoft.com/office/powerpoint/2010/main" xmlns:mc="http://schemas.openxmlformats.org/markup-compatibility/2006" val="SMDATA_15_FLquaRMAAAAlAAAAZAAAAA0AAAAAkAAAAEgAAACQAAAASAAAAAAAAAAAAAAAAAAAAAEAAABQAAAAAAAAAAAA4D8AAAAAAADgPwAAAAAAAOA/AAAAAAAA4D8AAAAAAADgPwAAAAAAAOA/AAAAAAAA4D8AAAAAAADgPwAAAAAAAOA/AAAAAAAA4D8CAAAAjAAAAAAAAAAAAAAAW5vVDP///wgAAAAAAAAAAAAAAAAAAAAAAAAAAAAAAAAAAAAAZAAAAAEAAABAAAAAAAAAAAAAAAAAAAAAAAAAAAAAAAAAAAAAAAAAAAAAAAAAAAAAAAAAAAAAAAAAAAAAAAAAAAAAAAAAAAAAAAAAAAAAAAAAAAAAAAAAAAAAAAAAAAAAFAAAADwAAAAAAAAAAAAAAAAAAAkUAAAAAQAAABQAAAAUAAAAFAAAAAEAAAAAAAAAZAAAAGQAAAAAAAAAZAAAAGQAAAAVAAAAYAAAAAAAAAAAAAAADwAAACADAAAAAAAAAAAAAAEAAACgMgAAVgcAAKr4//8BAAAAf39/AAEAAABkAAAAAAAAABQAAABAHwAAAAAAACYAAAAAAAAAwOD//wAAAAAmAAAAZAAAABYAAABMAAAAAAAAAAAAAAAEAAAAAAAAAAEAAADn5uYKAAAAACgAAAAoAAAAZAAAAGQAAAAAAAAAzMzMAAAAAABQAAAAUAAAAGQAAABkAAAAAAAAABcAAAAUAAAAAAAAAAAAAAD/fwAA/38AAAAAAAAJAAAABAAAAOrv9v8eAAAAaAAAAAAAAAAAAAAAAAAAAAAAAAAAAAAAECcAABAnAAAAAAAAAAAAAAAAAAAAAAAAAAAAAAAAAAAAAAAAAAAAABQAAAAAAAAAwMD/AAAAAABkAAAAMgAAAAAAAABkAAAAAAAAAH9/fwAKAAAAIgAAABgAAAAAAAAAAAAAAAAAAAAAAAAAAAAAAAAAAAAkAAAAJAAAAAAAAAAHAAAAAAAAAAAAAAAAAAAAAAAAAAAAAAAAAAAAf39/ACUAAABYAAAAAAAAAAAAAAAAAAAAAAAAAAAAAAAAAAAAAAAAAAAAAAAAAAAAAAAAAAAAAAA/AAAAAAAAAKCGAQAAAAAAAAAAAAAAAAAMAAAAAQAAAAAAAAAAAAAAAAAAAB8AAABUAAAAAAAABQAAAAEAAAAAAAAAAAAAAAAAAAAAAAAAAAAAAAAAAAAAAAAAAAAAAAJ/f38AAAAAA8zMzADAwP8Af39/AAAAAAAAAAAAAAAAAAAAAAAAAAAAIQAAABgAAAAUAAAAKAUAADsLAAAIJQAAACYAABAAAAAmAAAACAAAAAEAAAAAAAAA"/>
               </a:ext>
             </a:extLst>
           </p:cNvSpPr>
@@ -1450,7 +1474,7 @@
           <a:lstStyle/>
           <a:p>
             <a:pPr>
-              <a:defRPr lang="en-us"/>
+              <a:defRPr lang="en-US"/>
             </a:pPr>
             <a:r>
               <a:t>Click to edit Master text styles</a:t>
@@ -1458,7 +1482,7 @@
           </a:p>
           <a:p>
             <a:pPr lvl="1">
-              <a:defRPr lang="en-us"/>
+              <a:defRPr lang="en-US"/>
             </a:pPr>
             <a:r>
               <a:t>Second level</a:t>
@@ -1466,7 +1490,7 @@
           </a:p>
           <a:p>
             <a:pPr lvl="2">
-              <a:defRPr lang="en-us"/>
+              <a:defRPr lang="en-US"/>
             </a:pPr>
             <a:r>
               <a:t>Third level</a:t>
@@ -1474,7 +1498,7 @@
           </a:p>
           <a:p>
             <a:pPr lvl="3">
-              <a:defRPr lang="en-us"/>
+              <a:defRPr lang="en-US"/>
             </a:pPr>
             <a:r>
               <a:t>Fourth level</a:t>
@@ -1482,7 +1506,7 @@
           </a:p>
           <a:p>
             <a:pPr lvl="4">
-              <a:defRPr lang="en-us"/>
+              <a:defRPr lang="en-US"/>
             </a:pPr>
             <a:r>
               <a:t>Fifth level</a:t>
@@ -1497,7 +1521,7 @@
             <a:spLocks noGrp="1" noChangeArrowheads="1"/>
             <a:extLst>
               <a:ext uri="smNativeData">
-                <pr:smNativeData xmlns:pr="smNativeData" xmlns="smNativeData" val="SMDATA_15_FLquaRMAAAAlAAAAZAAAAA0AAAAAkAAAAEgAAACQAAAASAAAAAAAAAAAAAAAAAAAAAEAAABQAAAAAAAAAAAA4D8AAAAAAADgPwAAAAAAAOA/AAAAAAAA4D8AAAAAAADgPwAAAAAAAOA/AAAAAAAA4D8AAAAAAADgPwAAAAAAAOA/AAAAAAAA4D8CAAAAjAAAAAAAAAAAAAAAW5vVDP///wgAAAAAAAAAAAAAAAAAAAAAAAAAAAAAAAAAAAAAZAAAAAEAAABAAAAAAAAAAAAAAAAAAAAAAAAAAAAAAAAAAAAAAAAAAAAAAAAAAAAAAAAAAAAAAAAAAAAAAAAAAAAAAAAAAAAAAAAAAAAAAAAAAAAAAAAAAAAAAAAAAAAAFAAAADwAAAAAAAAAAAAAAAAAAAkUAAAAAQAAABQAAAAUAAAAFAAAAAEAAAAAAAAAZAAAAGQAAAAAAAAAZAAAAGQAAAAVAAAAYAAAAAAAAAAAAAAADwAAACADAAAAAAAAAAAAAAEAAACgMgAAVgcAAKr4//8BAAAAf39/AAEAAABkAAAAAAAAABQAAABAHwAAAAAAACYAAAAAAAAAwOD//wAAAAAmAAAAZAAAABYAAABMAAAAAAAAAAAAAAAEAAAAAAAAAAEAAADn5uYKAAAAACgAAAAoAAAAZAAAAGQAAAAAAAAAzMzMAAAAAABQAAAAUAAAAGQAAABkAAAAAAAAABcAAAAUAAAAAAAAAAAAAAD/fwAA/38AAAAAAAAJAAAABAAAAAAAAAAeAAAAaAAAAAAAAAAAAAAAAAAAAAAAAAAAAAAAECcAABAnAAAAAAAAAAAAAAAAAAAAAAAAAAAAAAAAAAAAAAAAAAAAABQAAAAAAAAAwMD/AAAAAABkAAAAMgAAAAAAAABkAAAAAAAAAH9/fwAKAAAAIgAAABgAAAAAAAAAAAAAAAAAAAAAAAAAAAAAAAAAAAAkAAAAJAAAAAAAAAAHAAAAAAAAAAAAAAAAAAAAAAAAAAAAAAAAAAAAf39/ACUAAABYAAAAAAAAAAAAAAAAAAAAAAAAAAAAAAAAAAAAAAAAAAAAAAAAAAAAAAAAAAAAAAA/AAAAAAAAAKCGAQAAAAAAAAAAAAAAAAAMAAAAAQAAAAAAAAAAAAAAAAAAAB8AAABUAAAAAAAABQAAAAEAAAAAAAAAAAAAAAAAAAAAAAAAAAAAAAAAAAAAAAAAAAAAAAJ/f38AAAAAA8zMzADAwP8Af39/AAAAAAAAAAAAAAAAAAAAAAAAAAAAIQAAABgAAAAUAAAA+CUAADsLAADYRQAAACYAABAAAAAmAAAACAAAAAEAAAAAAAAA"/>
+                <pr:smNativeData xmlns="smNativeData" xmlns:pr="smNativeData" xmlns:p15="http://schemas.microsoft.com/office/powerpoint/2012/main" xmlns:p14="http://schemas.microsoft.com/office/powerpoint/2010/main" xmlns:mc="http://schemas.openxmlformats.org/markup-compatibility/2006" val="SMDATA_15_FLquaRMAAAAlAAAAZAAAAA0AAAAAkAAAAEgAAACQAAAASAAAAAAAAAAAAAAAAAAAAAEAAABQAAAAAAAAAAAA4D8AAAAAAADgPwAAAAAAAOA/AAAAAAAA4D8AAAAAAADgPwAAAAAAAOA/AAAAAAAA4D8AAAAAAADgPwAAAAAAAOA/AAAAAAAA4D8CAAAAjAAAAAAAAAAAAAAAW5vVDP///wgAAAAAAAAAAAAAAAAAAAAAAAAAAAAAAAAAAAAAZAAAAAEAAABAAAAAAAAAAAAAAAAAAAAAAAAAAAAAAAAAAAAAAAAAAAAAAAAAAAAAAAAAAAAAAAAAAAAAAAAAAAAAAAAAAAAAAAAAAAAAAAAAAAAAAAAAAAAAAAAAAAAAFAAAADwAAAAAAAAAAAAAAAAAAAkUAAAAAQAAABQAAAAUAAAAFAAAAAEAAAAAAAAAZAAAAGQAAAAAAAAAZAAAAGQAAAAVAAAAYAAAAAAAAAAAAAAADwAAACADAAAAAAAAAAAAAAEAAACgMgAAVgcAAKr4//8BAAAAf39/AAEAAABkAAAAAAAAABQAAABAHwAAAAAAACYAAAAAAAAAwOD//wAAAAAmAAAAZAAAABYAAABMAAAAAAAAAAAAAAAEAAAAAAAAAAEAAADn5uYKAAAAACgAAAAoAAAAZAAAAGQAAAAAAAAAzMzMAAAAAABQAAAAUAAAAGQAAABkAAAAAAAAABcAAAAUAAAAAAAAAAAAAAD/fwAA/38AAAAAAAAJAAAABAAAAAAAAAAeAAAAaAAAAAAAAAAAAAAAAAAAAAAAAAAAAAAAECcAABAnAAAAAAAAAAAAAAAAAAAAAAAAAAAAAAAAAAAAAAAAAAAAABQAAAAAAAAAwMD/AAAAAABkAAAAMgAAAAAAAABkAAAAAAAAAH9/fwAKAAAAIgAAABgAAAAAAAAAAAAAAAAAAAAAAAAAAAAAAAAAAAAkAAAAJAAAAAAAAAAHAAAAAAAAAAAAAAAAAAAAAAAAAAAAAAAAAAAAf39/ACUAAABYAAAAAAAAAAAAAAAAAAAAAAAAAAAAAAAAAAAAAAAAAAAAAAAAAAAAAAAAAAAAAAA/AAAAAAAAAKCGAQAAAAAAAAAAAAAAAAAMAAAAAQAAAAAAAAAAAAAAAAAAAB8AAABUAAAAAAAABQAAAAEAAAAAAAAAAAAAAAAAAAAAAAAAAAAAAAAAAAAAAAAAAAAAAAJ/f38AAAAAA8zMzADAwP8Af39/AAAAAAAAAAAAAAAAAAAAAAAAAAAAIQAAABgAAAAUAAAA+CUAADsLAADYRQAAACYAABAAAAAmAAAACAAAAAEAAAAAAAAA"/>
               </a:ext>
             </a:extLst>
           </p:cNvSpPr>
@@ -1516,7 +1540,7 @@
           <a:lstStyle/>
           <a:p>
             <a:pPr>
-              <a:defRPr lang="en-us"/>
+              <a:defRPr lang="en-US"/>
             </a:pPr>
             <a:r>
               <a:t>Click to edit Master text styles</a:t>
@@ -1524,7 +1548,7 @@
           </a:p>
           <a:p>
             <a:pPr lvl="1">
-              <a:defRPr lang="en-us"/>
+              <a:defRPr lang="en-US"/>
             </a:pPr>
             <a:r>
               <a:t>Second level</a:t>
@@ -1532,7 +1556,7 @@
           </a:p>
           <a:p>
             <a:pPr lvl="2">
-              <a:defRPr lang="en-us"/>
+              <a:defRPr lang="en-US"/>
             </a:pPr>
             <a:r>
               <a:t>Third level</a:t>
@@ -1540,7 +1564,7 @@
           </a:p>
           <a:p>
             <a:pPr lvl="3">
-              <a:defRPr lang="en-us"/>
+              <a:defRPr lang="en-US"/>
             </a:pPr>
             <a:r>
               <a:t>Fourth level</a:t>
@@ -1548,7 +1572,7 @@
           </a:p>
           <a:p>
             <a:pPr lvl="4">
-              <a:defRPr lang="en-us"/>
+              <a:defRPr lang="en-US"/>
             </a:pPr>
             <a:r>
               <a:t>Fifth level</a:t>
@@ -1563,7 +1587,7 @@
             <a:spLocks noGrp="1" noChangeArrowheads="1"/>
             <a:extLst>
               <a:ext uri="smNativeData">
-                <pr:smNativeData xmlns:pr="smNativeData" xmlns="smNativeData" val="SMDATA_15_FLquaRMAAAAlAAAAZAAAAA0AAAAAkAAAAEgAAACQAAAASAAAAAAAAAABAAAAAAAAAAEAAABQAAAAAAAAAAAA4D8AAAAAAADgPwAAAAAAAOA/AAAAAAAA4D8AAAAAAADgPwAAAAAAAOA/AAAAAAAA4D8AAAAAAADgPwAAAAAAAOA/AAAAAAAA4D8CAAAAjAAAAAAAAAAAAAAAW5vVDP///wgAAAAAAAAAAAAAAAAAAAAAAAAAAAAAAAAAAAAAZAAAAAEAAABAAAAAAAAAAAAAAAAAAAAAAAAAAAAAAAAAAAAAAAAAAAAAAAAAAAAAAAAAAAAAAAAAAAAAAAAAAAAAAAAAAAAAAAAAAAAAAAAAAAAAAAAAAAAAAAAAAAAAFAAAADwAAAAAAAAAAAAAAAAAAAkUAAAAAQAAABQAAAAUAAAAFAAAAAEAAAAAAAAAZAAAAGQAAAAAAAAAZAAAAGQAAAAVAAAAYAAAAAAAAAAAAAAADwAAACADAAAAAAAAAAAAAAEAAACgMgAAVgcAAKr4//8BAAAAf39/AAEAAABkAAAAAAAAABQAAABAHwAAAAAAACYAAAAAAAAAwOD//wAAAAAmAAAAZAAAABYAAABMAAAAAAAAAAAAAAAEAAAAAAAAAAEAAADn5uYKAAAAACgAAAAoAAAAZAAAAGQAAAAAAAAAzMzMAAAAAABQAAAAUAAAAGQAAABkAAAAAAAAABcAAAAUAAAAAAAAAAAAAAD/fwAA/38AAAAAAAAJAAAABAAAANiNzA0eAAAAaAAAAAAAAAAAAAAAAAAAAAAAAAAAAAAAECcAABAnAAAAAAAAAAAAAAAAAAAAAAAAAAAAAAAAAAAAAAAAAAAAABQAAAAAAAAAwMD/AAAAAABkAAAAMgAAAAAAAABkAAAAAAAAAH9/fwAKAAAAIgAAABgAAAAAAAAAAAAAAAAAAAAAAAAAAAAAAAAAAAAkAAAAJAAAAAAAAAAHAAAAAAAAAAAAAAAAAAAAAAAAAAAAAAAAAAAAf39/ACUAAABYAAAAAAAAAAAAAAAAAAAAAAAAAAAAAAAAAAAAAAAAAAAAAAAAAAAAAAAAAAAAAAA/AAAAAAAAAKCGAQAAAAAAAAAAAAAAAAAMAAAAAQAAAAAAAAAAAAAAAAAAAB8AAABUAAAAAAAABQAAAAEAAAAAAAAAAAAAAAAAAAAAAAAAAAAAAAAAAAAAAAAAAAAAAAJ/f38AAAAAA8zMzADAwP8Af39/AAAAAAAAAAAAAAAAAAAAAAAAAAAAIQAAABgAAAAUAAAAKAUAABonAAAIFgAAWSkAABAAAAAmAAAACAAAAAAAAAAAAAAA"/>
+                <pr:smNativeData xmlns="smNativeData" xmlns:pr="smNativeData" xmlns:p15="http://schemas.microsoft.com/office/powerpoint/2012/main" xmlns:p14="http://schemas.microsoft.com/office/powerpoint/2010/main" xmlns:mc="http://schemas.openxmlformats.org/markup-compatibility/2006" val="SMDATA_15_FLquaRMAAAAlAAAAZAAAAA0AAAAAkAAAAEgAAACQAAAASAAAAAAAAAABAAAAAAAAAAEAAABQAAAAAAAAAAAA4D8AAAAAAADgPwAAAAAAAOA/AAAAAAAA4D8AAAAAAADgPwAAAAAAAOA/AAAAAAAA4D8AAAAAAADgPwAAAAAAAOA/AAAAAAAA4D8CAAAAjAAAAAAAAAAAAAAAW5vVDP///wgAAAAAAAAAAAAAAAAAAAAAAAAAAAAAAAAAAAAAZAAAAAEAAABAAAAAAAAAAAAAAAAAAAAAAAAAAAAAAAAAAAAAAAAAAAAAAAAAAAAAAAAAAAAAAAAAAAAAAAAAAAAAAAAAAAAAAAAAAAAAAAAAAAAAAAAAAAAAAAAAAAAAFAAAADwAAAAAAAAAAAAAAAAAAAkUAAAAAQAAABQAAAAUAAAAFAAAAAEAAAAAAAAAZAAAAGQAAAAAAAAAZAAAAGQAAAAVAAAAYAAAAAAAAAAAAAAADwAAACADAAAAAAAAAAAAAAEAAACgMgAAVgcAAKr4//8BAAAAf39/AAEAAABkAAAAAAAAABQAAABAHwAAAAAAACYAAAAAAAAAwOD//wAAAAAmAAAAZAAAABYAAABMAAAAAAAAAAAAAAAEAAAAAAAAAAEAAADn5uYKAAAAACgAAAAoAAAAZAAAAGQAAAAAAAAAzMzMAAAAAABQAAAAUAAAAGQAAABkAAAAAAAAABcAAAAUAAAAAAAAAAAAAAD/fwAA/38AAAAAAAAJAAAABAAAANiNzA0eAAAAaAAAAAAAAAAAAAAAAAAAAAAAAAAAAAAAECcAABAnAAAAAAAAAAAAAAAAAAAAAAAAAAAAAAAAAAAAAAAAAAAAABQAAAAAAAAAwMD/AAAAAABkAAAAMgAAAAAAAABkAAAAAAAAAH9/fwAKAAAAIgAAABgAAAAAAAAAAAAAAAAAAAAAAAAAAAAAAAAAAAAkAAAAJAAAAAAAAAAHAAAAAAAAAAAAAAAAAAAAAAAAAAAAAAAAAAAAf39/ACUAAABYAAAAAAAAAAAAAAAAAAAAAAAAAAAAAAAAAAAAAAAAAAAAAAAAAAAAAAAAAAAAAAA/AAAAAAAAAKCGAQAAAAAAAAAAAAAAAAAMAAAAAQAAAAAAAAAAAAAAAAAAAB8AAABUAAAAAAAABQAAAAEAAAAAAAAAAAAAAAAAAAAAAAAAAAAAAAAAAAAAAAAAAAAAAAJ/f38AAAAAA8zMzADAwP8Af39/AAAAAAAAAAAAAAAAAAAAAAAAAAAAIQAAABgAAAAUAAAAKAUAABonAAAIFgAAWSkAABAAAAAmAAAACAAAAAAAAAAAAAAA"/>
               </a:ext>
             </a:extLst>
           </p:cNvSpPr>
@@ -1577,11 +1601,12 @@
           <a:lstStyle/>
           <a:p>
             <a:pPr>
-              <a:defRPr lang="en-us"/>
+              <a:defRPr lang="en-US"/>
             </a:pPr>
             <a:fld id="{30AE893C-72DD-FB7F-9316-842AC75865D1}" type="datetime1">
-              <a:t>3/4/2026</a:t>
+              <a:t>4/21/2026</a:t>
             </a:fld>
+            <a:endParaRPr/>
           </a:p>
         </p:txBody>
       </p:sp>
@@ -1592,7 +1617,7 @@
             <a:spLocks noGrp="1" noChangeArrowheads="1"/>
             <a:extLst>
               <a:ext uri="smNativeData">
-                <pr:smNativeData xmlns:pr="smNativeData" xmlns="smNativeData" val="SMDATA_15_FLquaRMAAAAlAAAAZAAAAA0AAAAAkAAAAEgAAACQAAAASAAAAAAAAAABAAAAAAAAAAEAAABQAAAAAAAAAAAA4D8AAAAAAADgPwAAAAAAAOA/AAAAAAAA4D8AAAAAAADgPwAAAAAAAOA/AAAAAAAA4D8AAAAAAADgPwAAAAAAAOA/AAAAAAAA4D8CAAAAjAAAAAAAAAAAAAAAW5vVDP///wgAAAAAAAAAAAAAAAAAAAAAAAAAAAAAAAAAAAAAZAAAAAEAAABAAAAAAAAAAAAAAAAAAAAAAAAAAAAAAAAAAAAAAAAAAAAAAAAAAAAAAAAAAAAAAAAAAAAAAAAAAAAAAAAAAAAAAAAAAAAAAAAAAAAAAAAAAAAAAAAAAAAAFAAAADwAAAAAAAAAAAAAAAAAAAkUAAAAAQAAABQAAAAUAAAAFAAAAAEAAAAAAAAAZAAAAGQAAAAAAAAAZAAAAGQAAAAVAAAAYAAAAAAAAAAAAAAADwAAACADAAAAAAAAAAAAAAEAAACgMgAAVgcAAKr4//8BAAAAf39/AAEAAABkAAAAAAAAABQAAABAHwAAAAAAACYAAAAAAAAAwOD//wAAAAAmAAAAZAAAABYAAABMAAAAAAAAAAAAAAAEAAAAAAAAAAEAAADn5uYKAAAAACgAAAAoAAAAZAAAAGQAAAAAAAAAzMzMAAAAAABQAAAAUAAAAGQAAABkAAAAAAAAABcAAAAUAAAAAAAAAAAAAAD/fwAA/38AAAAAAAAJAAAABAAAAAAAAAAeAAAAaAAAAAAAAAAAAAAAAAAAAAAAAAAAAAAAECcAABAnAAAAAAAAAAAAAAAAAAAAAAAAAAAAAAAAAAAAAAAAAAAAABQAAAAAAAAAwMD/AAAAAABkAAAAMgAAAAAAAABkAAAAAAAAAH9/fwAKAAAAIgAAABgAAAAAAAAAAAAAAAAAAAAAAAAAAAAAAAAAAAAkAAAAJAAAAAAAAAAHAAAAAAAAAAAAAAAAAAAAAAAAAAAAAAAAAAAAf39/ACUAAABYAAAAAAAAAAAAAAAAAAAAAAAAAAAAAAAAAAAAAAAAAAAAAAAAAAAAAAAAAAAAAAA/AAAAAAAAAKCGAQAAAAAAAAAAAAAAAAAMAAAAAQAAAAAAAAAAAAAAAAAAAB8AAABUAAAAAAAABQAAAAEAAAAAAAAAAAAAAAAAAAAAAAAAAAAAAAAAAAAAAAAAAAAAAAJ/f38AAAAAA8zMzADAwP8Af39/AAAAAAAAAAAAAAAAAAAAAAAAAAAAIQAAABgAAAAUAAAA2BgAABonAAAoMgAAWSkAABAAAAAmAAAACAAAAAAAAAAAAAAA"/>
+                <pr:smNativeData xmlns="smNativeData" xmlns:pr="smNativeData" xmlns:p15="http://schemas.microsoft.com/office/powerpoint/2012/main" xmlns:p14="http://schemas.microsoft.com/office/powerpoint/2010/main" xmlns:mc="http://schemas.openxmlformats.org/markup-compatibility/2006" val="SMDATA_15_FLquaRMAAAAlAAAAZAAAAA0AAAAAkAAAAEgAAACQAAAASAAAAAAAAAABAAAAAAAAAAEAAABQAAAAAAAAAAAA4D8AAAAAAADgPwAAAAAAAOA/AAAAAAAA4D8AAAAAAADgPwAAAAAAAOA/AAAAAAAA4D8AAAAAAADgPwAAAAAAAOA/AAAAAAAA4D8CAAAAjAAAAAAAAAAAAAAAW5vVDP///wgAAAAAAAAAAAAAAAAAAAAAAAAAAAAAAAAAAAAAZAAAAAEAAABAAAAAAAAAAAAAAAAAAAAAAAAAAAAAAAAAAAAAAAAAAAAAAAAAAAAAAAAAAAAAAAAAAAAAAAAAAAAAAAAAAAAAAAAAAAAAAAAAAAAAAAAAAAAAAAAAAAAAFAAAADwAAAAAAAAAAAAAAAAAAAkUAAAAAQAAABQAAAAUAAAAFAAAAAEAAAAAAAAAZAAAAGQAAAAAAAAAZAAAAGQAAAAVAAAAYAAAAAAAAAAAAAAADwAAACADAAAAAAAAAAAAAAEAAACgMgAAVgcAAKr4//8BAAAAf39/AAEAAABkAAAAAAAAABQAAABAHwAAAAAAACYAAAAAAAAAwOD//wAAAAAmAAAAZAAAABYAAABMAAAAAAAAAAAAAAAEAAAAAAAAAAEAAADn5uYKAAAAACgAAAAoAAAAZAAAAGQAAAAAAAAAzMzMAAAAAABQAAAAUAAAAGQAAABkAAAAAAAAABcAAAAUAAAAAAAAAAAAAAD/fwAA/38AAAAAAAAJAAAABAAAAAAAAAAeAAAAaAAAAAAAAAAAAAAAAAAAAAAAAAAAAAAAECcAABAnAAAAAAAAAAAAAAAAAAAAAAAAAAAAAAAAAAAAAAAAAAAAABQAAAAAAAAAwMD/AAAAAABkAAAAMgAAAAAAAABkAAAAAAAAAH9/fwAKAAAAIgAAABgAAAAAAAAAAAAAAAAAAAAAAAAAAAAAAAAAAAAkAAAAJAAAAAAAAAAHAAAAAAAAAAAAAAAAAAAAAAAAAAAAAAAAAAAAf39/ACUAAABYAAAAAAAAAAAAAAAAAAAAAAAAAAAAAAAAAAAAAAAAAAAAAAAAAAAAAAAAAAAAAAA/AAAAAAAAAKCGAQAAAAAAAAAAAAAAAAAMAAAAAQAAAAAAAAAAAAAAAAAAAB8AAABUAAAAAAAABQAAAAEAAAAAAAAAAAAAAAAAAAAAAAAAAAAAAAAAAAAAAAAAAAAAAAJ/f38AAAAAA8zMzADAwP8Af39/AAAAAAAAAAAAAAAAAAAAAAAAAAAAIQAAABgAAAAUAAAA2BgAABonAAAoMgAAWSkAABAAAAAmAAAACAAAAAAAAAAAAAAA"/>
               </a:ext>
             </a:extLst>
           </p:cNvSpPr>
@@ -1606,8 +1631,9 @@
           <a:lstStyle/>
           <a:p>
             <a:pPr>
-              <a:defRPr lang="en-us"/>
-            </a:pPr>
+              <a:defRPr lang="en-US"/>
+            </a:pPr>
+            <a:endParaRPr/>
           </a:p>
         </p:txBody>
       </p:sp>
@@ -1618,7 +1644,7 @@
             <a:spLocks noGrp="1" noChangeArrowheads="1"/>
             <a:extLst>
               <a:ext uri="smNativeData">
-                <pr:smNativeData xmlns:pr="smNativeData" xmlns="smNativeData" val="SMDATA_15_FLquaRMAAAAlAAAAZAAAAA0AAAAAkAAAAEgAAACQAAAASAAAAAAAAAABAAAAAAAAAAEAAABQAAAAAAAAAAAA4D8AAAAAAADgPwAAAAAAAOA/AAAAAAAA4D8AAAAAAADgPwAAAAAAAOA/AAAAAAAA4D8AAAAAAADgPwAAAAAAAOA/AAAAAAAA4D8CAAAAjAAAAAAAAAAAAAAAW5vVDP///wgAAAAAAAAAAAAAAAAAAAAAAAAAAAAAAAAAAAAAZAAAAAEAAABAAAAAAAAAAAAAAAAAAAAAAAAAAAAAAAAAAAAAAAAAAAAAAAAAAAAAAAAAAAAAAAAAAAAAAAAAAAAAAAAAAAAAAAAAAAAAAAAAAAAAAAAAAAAAAAAAAAAAFAAAADwAAAAAAAAAAAAAAAAAAAkUAAAAAQAAABQAAAAUAAAAFAAAAAEAAAAAAAAAZAAAAGQAAAAAAAAAZAAAAGQAAAAVAAAAYAAAAAAAAAAAAAAADwAAACADAAAAAAAAAAAAAAEAAACgMgAAVgcAAKr4//8BAAAAf39/AAEAAABkAAAAAAAAABQAAABAHwAAAAAAACYAAAAAAAAAwOD//wAAAAAmAAAAZAAAABYAAABMAAAAAAAAAAAAAAAEAAAAAAAAAAEAAADn5uYKAAAAACgAAAAoAAAAZAAAAGQAAAAAAAAAzMzMAAAAAABQAAAAUAAAAGQAAABkAAAAAAAAABcAAAAUAAAAAAAAAAAAAAD/fwAA/38AAAAAAAAJAAAABAAAAAAAAAAeAAAAaAAAAAAAAAAAAAAAAAAAAAAAAAAAAAAAECcAABAnAAAAAAAAAAAAAAAAAAAAAAAAAAAAAAAAAAAAAAAAAAAAABQAAAAAAAAAwMD/AAAAAABkAAAAMgAAAAAAAABkAAAAAAAAAH9/fwAKAAAAIgAAABgAAAAAAAAAAAAAAAAAAAAAAAAAAAAAAAAAAAAkAAAAJAAAAAAAAAAHAAAAAAAAAAAAAAAAAAAAAAAAAAAAAAAAAAAAf39/ACUAAABYAAAAAAAAAAAAAAAAAAAAAAAAAAAAAAAAAAAAAAAAAAAAAAAAAAAAAAAAAAAAAAA/AAAAAAAAAKCGAQAAAAAAAAAAAAAAAAAMAAAAAQAAAAAAAAAAAAAAAAAAAB8AAABUAAAAAAAABQAAAAEAAAAAAAAAAAAAAAAAAAAAAAAAAAAAAAAAAAAAAAAAAAAAAAJ/f38AAAAAA8zMzADAwP8Af39/AAAAAAAAAAAAAAAAAAAAAAAAAAAAIQAAABgAAAAUAAAA+DQAABonAADYRQAAWSkAABAAAAAmAAAACAAAAAAAAAAAAAAA"/>
+                <pr:smNativeData xmlns="smNativeData" xmlns:pr="smNativeData" xmlns:p15="http://schemas.microsoft.com/office/powerpoint/2012/main" xmlns:p14="http://schemas.microsoft.com/office/powerpoint/2010/main" xmlns:mc="http://schemas.openxmlformats.org/markup-compatibility/2006" val="SMDATA_15_FLquaRMAAAAlAAAAZAAAAA0AAAAAkAAAAEgAAACQAAAASAAAAAAAAAABAAAAAAAAAAEAAABQAAAAAAAAAAAA4D8AAAAAAADgPwAAAAAAAOA/AAAAAAAA4D8AAAAAAADgPwAAAAAAAOA/AAAAAAAA4D8AAAAAAADgPwAAAAAAAOA/AAAAAAAA4D8CAAAAjAAAAAAAAAAAAAAAW5vVDP///wgAAAAAAAAAAAAAAAAAAAAAAAAAAAAAAAAAAAAAZAAAAAEAAABAAAAAAAAAAAAAAAAAAAAAAAAAAAAAAAAAAAAAAAAAAAAAAAAAAAAAAAAAAAAAAAAAAAAAAAAAAAAAAAAAAAAAAAAAAAAAAAAAAAAAAAAAAAAAAAAAAAAAFAAAADwAAAAAAAAAAAAAAAAAAAkUAAAAAQAAABQAAAAUAAAAFAAAAAEAAAAAAAAAZAAAAGQAAAAAAAAAZAAAAGQAAAAVAAAAYAAAAAAAAAAAAAAADwAAACADAAAAAAAAAAAAAAEAAACgMgAAVgcAAKr4//8BAAAAf39/AAEAAABkAAAAAAAAABQAAABAHwAAAAAAACYAAAAAAAAAwOD//wAAAAAmAAAAZAAAABYAAABMAAAAAAAAAAAAAAAEAAAAAAAAAAEAAADn5uYKAAAAACgAAAAoAAAAZAAAAGQAAAAAAAAAzMzMAAAAAABQAAAAUAAAAGQAAABkAAAAAAAAABcAAAAUAAAAAAAAAAAAAAD/fwAA/38AAAAAAAAJAAAABAAAAAAAAAAeAAAAaAAAAAAAAAAAAAAAAAAAAAAAAAAAAAAAECcAABAnAAAAAAAAAAAAAAAAAAAAAAAAAAAAAAAAAAAAAAAAAAAAABQAAAAAAAAAwMD/AAAAAABkAAAAMgAAAAAAAABkAAAAAAAAAH9/fwAKAAAAIgAAABgAAAAAAAAAAAAAAAAAAAAAAAAAAAAAAAAAAAAkAAAAJAAAAAAAAAAHAAAAAAAAAAAAAAAAAAAAAAAAAAAAAAAAAAAAf39/ACUAAABYAAAAAAAAAAAAAAAAAAAAAAAAAAAAAAAAAAAAAAAAAAAAAAAAAAAAAAAAAAAAAAA/AAAAAAAAAKCGAQAAAAAAAAAAAAAAAAAMAAAAAQAAAAAAAAAAAAAAAAAAAB8AAABUAAAAAAAABQAAAAEAAAAAAAAAAAAAAAAAAAAAAAAAAAAAAAAAAAAAAAAAAAAAAAJ/f38AAAAAA8zMzADAwP8Af39/AAAAAAAAAAAAAAAAAAAAAAAAAAAAIQAAABgAAAAUAAAA+DQAABonAADYRQAAWSkAABAAAAAmAAAACAAAAAAAAAAAAAAA"/>
               </a:ext>
             </a:extLst>
           </p:cNvSpPr>
@@ -1632,11 +1658,12 @@
           <a:lstStyle/>
           <a:p>
             <a:pPr>
-              <a:defRPr lang="en-us"/>
+              <a:defRPr lang="en-US"/>
             </a:pPr>
             <a:fld id="{30AEC90A-44DD-FB3F-9316-B26A875865E7}" type="slidenum">
               <a:t>‹#›</a:t>
             </a:fld>
+            <a:endParaRPr/>
           </a:p>
         </p:txBody>
       </p:sp>
@@ -1650,7 +1677,7 @@
 </file>
 
 <file path=ppt/slideLayouts/slideLayout5.xml><?xml version="1.0" encoding="utf-8"?>
-<p:sldLayout xmlns:p="http://schemas.openxmlformats.org/presentationml/2006/main" xmlns:mc="http://schemas.openxmlformats.org/markup-compatibility/2006" xmlns:p14="http://schemas.microsoft.com/office/powerpoint/2010/main" xmlns:p15="http://schemas.microsoft.com/office/powerpoint/2012/main" xmlns:r="http://schemas.openxmlformats.org/officeDocument/2006/relationships" xmlns:a="http://schemas.openxmlformats.org/drawingml/2006/main" type="twoTxTwoObj" preserve="1">
+<p:sldLayout xmlns:a="http://schemas.openxmlformats.org/drawingml/2006/main" xmlns:r="http://schemas.openxmlformats.org/officeDocument/2006/relationships" xmlns:p="http://schemas.openxmlformats.org/presentationml/2006/main" type="twoTxTwoObj" preserve="1">
   <p:cSld name="Comparison">
     <p:spTree>
       <p:nvGrpSpPr>
@@ -1673,7 +1700,7 @@
             <a:spLocks noGrp="1" noChangeArrowheads="1"/>
             <a:extLst>
               <a:ext uri="smNativeData">
-                <pr:smNativeData xmlns:pr="smNativeData" xmlns="smNativeData" val="SMDATA_15_FLquaRMAAAAlAAAAZAAAAA0AAAAAkAAAAEgAAACQAAAASAAAAAAAAAABAAAAAAAAAAEAAABQAAAAAAAAAAAA4D8AAAAAAADgPwAAAAAAAOA/AAAAAAAA4D8AAAAAAADgPwAAAAAAAOA/AAAAAAAA4D8AAAAAAADgPwAAAAAAAOA/AAAAAAAA4D8CAAAAjAAAAAAAAAAAAAAAW5vVDP///wgAAAAAAAAAAAAAAAAAAAAAAAAAAAAAAAAAAAAAZAAAAAEAAABAAAAAAAAAAAAAAAAAAAAAAAAAAAAAAAAAAAAAAAAAAAAAAAAAAAAAAAAAAAAAAAAAAAAAAAAAAAAAAAAAAAAAAAAAAAAAAAAAAAAAAAAAAAAAAAAAAAAAFAAAADwAAAAAAAAAAAAAAAAAAAkUAAAAAQAAABQAAAAUAAAAFAAAAAEAAAAAAAAAZAAAAGQAAAAAAAAAZAAAAGQAAAAVAAAAYAAAAAAAAAAAAAAADwAAACADAAAAAAAAAAAAAAEAAACgMgAAVgcAAKr4//8BAAAAf39/AAEAAABkAAAAAAAAABQAAABAHwAAAAAAACYAAAAAAAAAwOD//wAAAAAmAAAAZAAAABYAAABMAAAAAAAAAAAAAAAEAAAAAAAAAAEAAADn5uYKAAAAACgAAAAoAAAAZAAAAGQAAAAAAAAAzMzMAAAAAABQAAAAUAAAAGQAAABkAAAAAAAAABcAAAAUAAAAAAAAAAAAAAD/fwAA/38AAAAAAAAJAAAABAAAAPL1+v8eAAAAaAAAAAAAAAAAAAAAAAAAAAAAAAAAAAAAECcAABAnAAAAAAAAAAAAAAAAAAAAAAAAAAAAAAAAAAAAAAAAAAAAABQAAAAAAAAAwMD/AAAAAABkAAAAMgAAAAAAAABkAAAAAAAAAH9/fwAKAAAAIgAAABgAAAAAAAAAAAAAAAAAAAAAAAAAAAAAAAAAAAAkAAAAJAAAAAAAAAAHAAAAAAAAAAAAAAAAAAAAAAAAAAAAAAAAAAAAf39/ACUAAABYAAAAAAAAAAAAAAAAAAAAAAAAAAAAAAAAAAAAAAAAAAAAAAAAAAAAAAAAAAAAAAA/AAAAAAAAAKCGAQAAAAAAAAAAAAAAAAAMAAAAAQAAAAAAAAAAAAAAAAAAAB8AAABUAAAAAAAABQAAAAEAAAAAAAAAAAAAAAAAAAAAAAAAAAAAAAAAAAAAAAAAAAAAAAJ/f38AAAAAA8zMzADAwP8Af39/AAAAAAAAAAAAAAAAAAAAAAAAAAAAIQAAABgAAAAUAAAAKwUAAD8CAADbRQAAZwoAABAAAAAmAAAACAAAAAEAAAAAAAAA"/>
+                <pr:smNativeData xmlns="smNativeData" xmlns:pr="smNativeData" xmlns:p15="http://schemas.microsoft.com/office/powerpoint/2012/main" xmlns:p14="http://schemas.microsoft.com/office/powerpoint/2010/main" xmlns:mc="http://schemas.openxmlformats.org/markup-compatibility/2006" val="SMDATA_15_FLquaRMAAAAlAAAAZAAAAA0AAAAAkAAAAEgAAACQAAAASAAAAAAAAAABAAAAAAAAAAEAAABQAAAAAAAAAAAA4D8AAAAAAADgPwAAAAAAAOA/AAAAAAAA4D8AAAAAAADgPwAAAAAAAOA/AAAAAAAA4D8AAAAAAADgPwAAAAAAAOA/AAAAAAAA4D8CAAAAjAAAAAAAAAAAAAAAW5vVDP///wgAAAAAAAAAAAAAAAAAAAAAAAAAAAAAAAAAAAAAZAAAAAEAAABAAAAAAAAAAAAAAAAAAAAAAAAAAAAAAAAAAAAAAAAAAAAAAAAAAAAAAAAAAAAAAAAAAAAAAAAAAAAAAAAAAAAAAAAAAAAAAAAAAAAAAAAAAAAAAAAAAAAAFAAAADwAAAAAAAAAAAAAAAAAAAkUAAAAAQAAABQAAAAUAAAAFAAAAAEAAAAAAAAAZAAAAGQAAAAAAAAAZAAAAGQAAAAVAAAAYAAAAAAAAAAAAAAADwAAACADAAAAAAAAAAAAAAEAAACgMgAAVgcAAKr4//8BAAAAf39/AAEAAABkAAAAAAAAABQAAABAHwAAAAAAACYAAAAAAAAAwOD//wAAAAAmAAAAZAAAABYAAABMAAAAAAAAAAAAAAAEAAAAAAAAAAEAAADn5uYKAAAAACgAAAAoAAAAZAAAAGQAAAAAAAAAzMzMAAAAAABQAAAAUAAAAGQAAABkAAAAAAAAABcAAAAUAAAAAAAAAAAAAAD/fwAA/38AAAAAAAAJAAAABAAAAPL1+v8eAAAAaAAAAAAAAAAAAAAAAAAAAAAAAAAAAAAAECcAABAnAAAAAAAAAAAAAAAAAAAAAAAAAAAAAAAAAAAAAAAAAAAAABQAAAAAAAAAwMD/AAAAAABkAAAAMgAAAAAAAABkAAAAAAAAAH9/fwAKAAAAIgAAABgAAAAAAAAAAAAAAAAAAAAAAAAAAAAAAAAAAAAkAAAAJAAAAAAAAAAHAAAAAAAAAAAAAAAAAAAAAAAAAAAAAAAAAAAAf39/ACUAAABYAAAAAAAAAAAAAAAAAAAAAAAAAAAAAAAAAAAAAAAAAAAAAAAAAAAAAAAAAAAAAAA/AAAAAAAAAKCGAQAAAAAAAAAAAAAAAAAMAAAAAQAAAAAAAAAAAAAAAAAAAB8AAABUAAAAAAAABQAAAAEAAAAAAAAAAAAAAAAAAAAAAAAAAAAAAAAAAAAAAAAAAAAAAAJ/f38AAAAAA8zMzADAwP8Af39/AAAAAAAAAAAAAAAAAAAAAAAAAAAAIQAAABgAAAAUAAAAKwUAAD8CAADbRQAAZwoAABAAAAAmAAAACAAAAAEAAAAAAAAA"/>
               </a:ext>
             </a:extLst>
           </p:cNvSpPr>
@@ -1692,7 +1719,7 @@
           <a:lstStyle/>
           <a:p>
             <a:pPr>
-              <a:defRPr lang="en-us"/>
+              <a:defRPr lang="en-US"/>
             </a:pPr>
             <a:r>
               <a:t>Click to edit Master title style</a:t>
@@ -1707,7 +1734,7 @@
             <a:spLocks noGrp="1" noChangeArrowheads="1"/>
             <a:extLst>
               <a:ext uri="smNativeData">
-                <pr:smNativeData xmlns:pr="smNativeData" xmlns="smNativeData" val="SMDATA_15_FLquaRMAAAAlAAAAZAAAAA0AAAAAkAAAAEgAAACQAAAASAAAAAAAAAACAAAAAAAAAAEAAABQAAAAAAAAAAAA4D8AAAAAAADgPwAAAAAAAOA/AAAAAAAA4D8AAAAAAADgPwAAAAAAAOA/AAAAAAAA4D8AAAAAAADgPwAAAAAAAOA/AAAAAAAA4D8CAAAAjAAAAAAAAAAAAAAAW5vVDP///wgAAAAAAAAAAAAAAAAAAAAAAAAAAAAAAAAAAAAAZAAAAAEAAABAAAAAAAAAAAAAAAAAAAAAAAAAAAAAAAAAAAAAAAAAAAAAAAAAAAAAAAAAAAAAAAAAAAAAAAAAAAAAAAAAAAAAAAAAAAAAAAAAAAAAAAAAAAAAAAAAAAAAFAAAADwAAAAAAAAAAAAAAAAAAAkUAAAAAQAAABQAAAAUAAAAFAAAAAEAAAAAAAAAZAAAAGQAAAAAAAAAZAAAAGQAAAAVAAAAYAAAAAAAAAAAAAAADwAAACADAAAAAAAAAAAAAAEAAACgMgAAVgcAAKr4//8BAAAAf39/AAEAAABkAAAAAAAAABQAAABAHwAAAAAAACYAAAAAAAAAwOD//wAAAAAmAAAAZAAAABYAAABMAAAAAAAAAAAAAAAEAAAAAAAAAAEAAADn5uYKAAAAACgAAAAoAAAAZAAAAGQAAAAAAAAAzMzMAAAAAABQAAAAUAAAAGQAAABkAAAAAAAAABcAAAAUAAAAAAAAAAAAAAD/fwAA/38AAAAAAAAJAAAABAAAAAAAAAAeAAAAaAAAAAAAAAAAAAAAAAAAAAAAAAAAAAAAECcAABAnAAAAAAAAAAAAAAAAAAAAAAAAAAAAAAAAAAAAAAAAAAAAABQAAAAAAAAAwMD/AAAAAABkAAAAMgAAAAAAAABkAAAAAAAAAH9/fwAKAAAAIgAAABgAAAAAAAAAAAAAAAAAAAAAAAAAAAAAAAAAAAAkAAAAJAAAAAAAAAAHAAAAAAAAAAAAAAAAAAAAAAAAAAAAAAAAAAAAf39/ACUAAABYAAAAAAAAAAAAAAAAAAAAAAAAAAAAAAAAAAAAAAAAAAAAAAAAAAAAAAAAAAAAAAA/AAAAAAAAAKCGAQAAAAAAAAAAAAAAAAAMAAAAAQAAAAAAAAAAAAAAAAAAAB8AAABUAAAAAAAABQAAAAEAAAAAAAAAAAAAAAAAAAAAAAAAAAAAAAAAAAAAAAAAAAAAAAJ/f38AAAAAA8zMzADAwP8Af39/AAAAAAAAAAAAAAAAAAAAAAAAAAAAIQAAABgAAAAUAAAAKwUAAFgKAADlJAAAaQ8AABAAAAAmAAAACAAAAIGAAAAAAAAA"/>
+                <pr:smNativeData xmlns="smNativeData" xmlns:pr="smNativeData" xmlns:p15="http://schemas.microsoft.com/office/powerpoint/2012/main" xmlns:p14="http://schemas.microsoft.com/office/powerpoint/2010/main" xmlns:mc="http://schemas.openxmlformats.org/markup-compatibility/2006" val="SMDATA_15_FLquaRMAAAAlAAAAZAAAAA0AAAAAkAAAAEgAAACQAAAASAAAAAAAAAACAAAAAAAAAAEAAABQAAAAAAAAAAAA4D8AAAAAAADgPwAAAAAAAOA/AAAAAAAA4D8AAAAAAADgPwAAAAAAAOA/AAAAAAAA4D8AAAAAAADgPwAAAAAAAOA/AAAAAAAA4D8CAAAAjAAAAAAAAAAAAAAAW5vVDP///wgAAAAAAAAAAAAAAAAAAAAAAAAAAAAAAAAAAAAAZAAAAAEAAABAAAAAAAAAAAAAAAAAAAAAAAAAAAAAAAAAAAAAAAAAAAAAAAAAAAAAAAAAAAAAAAAAAAAAAAAAAAAAAAAAAAAAAAAAAAAAAAAAAAAAAAAAAAAAAAAAAAAAFAAAADwAAAAAAAAAAAAAAAAAAAkUAAAAAQAAABQAAAAUAAAAFAAAAAEAAAAAAAAAZAAAAGQAAAAAAAAAZAAAAGQAAAAVAAAAYAAAAAAAAAAAAAAADwAAACADAAAAAAAAAAAAAAEAAACgMgAAVgcAAKr4//8BAAAAf39/AAEAAABkAAAAAAAAABQAAABAHwAAAAAAACYAAAAAAAAAwOD//wAAAAAmAAAAZAAAABYAAABMAAAAAAAAAAAAAAAEAAAAAAAAAAEAAADn5uYKAAAAACgAAAAoAAAAZAAAAGQAAAAAAAAAzMzMAAAAAABQAAAAUAAAAGQAAABkAAAAAAAAABcAAAAUAAAAAAAAAAAAAAD/fwAA/38AAAAAAAAJAAAABAAAAAAAAAAeAAAAaAAAAAAAAAAAAAAAAAAAAAAAAAAAAAAAECcAABAnAAAAAAAAAAAAAAAAAAAAAAAAAAAAAAAAAAAAAAAAAAAAABQAAAAAAAAAwMD/AAAAAABkAAAAMgAAAAAAAABkAAAAAAAAAH9/fwAKAAAAIgAAABgAAAAAAAAAAAAAAAAAAAAAAAAAAAAAAAAAAAAkAAAAJAAAAAAAAAAHAAAAAAAAAAAAAAAAAAAAAAAAAAAAAAAAAAAAf39/ACUAAABYAAAAAAAAAAAAAAAAAAAAAAAAAAAAAAAAAAAAAAAAAAAAAAAAAAAAAAAAAAAAAAA/AAAAAAAAAKCGAQAAAAAAAAAAAAAAAAAMAAAAAQAAAAAAAAAAAAAAAAAAAB8AAABUAAAAAAAABQAAAAEAAAAAAAAAAAAAAAAAAAAAAAAAAAAAAAAAAAAAAAAAAAAAAAJ/f38AAAAAA8zMzADAwP8Af39/AAAAAAAAAAAAAAAAAAAAAAAAAAAAIQAAABgAAAAUAAAAKwUAAFgKAADlJAAAaQ8AABAAAAAmAAAACAAAAIGAAAAAAAAA"/>
               </a:ext>
             </a:extLst>
           </p:cNvSpPr>
@@ -1730,44 +1757,44 @@
           <a:lstStyle>
             <a:lvl1pPr marL="0" indent="0">
               <a:buNone/>
-              <a:defRPr lang="en-us" sz="2400" b="1" cap="none"/>
+              <a:defRPr lang="en-US" sz="2400" b="1" cap="none"/>
             </a:lvl1pPr>
             <a:lvl2pPr marL="457200" indent="0">
               <a:buNone/>
-              <a:defRPr lang="en-us" sz="2000" b="1" cap="none"/>
+              <a:defRPr lang="en-US" sz="2000" b="1" cap="none"/>
             </a:lvl2pPr>
             <a:lvl3pPr marL="914400" indent="0">
               <a:buNone/>
-              <a:defRPr lang="en-us" sz="1800" b="1" cap="none"/>
+              <a:defRPr lang="en-US" sz="1800" b="1" cap="none"/>
             </a:lvl3pPr>
             <a:lvl4pPr marL="1371600" indent="0">
               <a:buNone/>
-              <a:defRPr lang="en-us" sz="1600" b="1" cap="none"/>
+              <a:defRPr lang="en-US" sz="1600" b="1" cap="none"/>
             </a:lvl4pPr>
             <a:lvl5pPr marL="1828800" indent="0">
               <a:buNone/>
-              <a:defRPr lang="en-us" sz="1600" b="1" cap="none"/>
+              <a:defRPr lang="en-US" sz="1600" b="1" cap="none"/>
             </a:lvl5pPr>
             <a:lvl6pPr marL="2286000" indent="0">
               <a:buNone/>
-              <a:defRPr lang="en-us" sz="1600" b="1" cap="none"/>
+              <a:defRPr lang="en-US" sz="1600" b="1" cap="none"/>
             </a:lvl6pPr>
             <a:lvl7pPr marL="2743200" indent="0">
               <a:buNone/>
-              <a:defRPr lang="en-us" sz="1600" b="1" cap="none"/>
+              <a:defRPr lang="en-US" sz="1600" b="1" cap="none"/>
             </a:lvl7pPr>
             <a:lvl8pPr marL="3200400" indent="0">
               <a:buNone/>
-              <a:defRPr lang="en-us" sz="1600" b="1" cap="none"/>
+              <a:defRPr lang="en-US" sz="1600" b="1" cap="none"/>
             </a:lvl8pPr>
             <a:lvl9pPr marL="3657600" indent="0">
               <a:buNone/>
-              <a:defRPr lang="en-us" sz="1600" b="1" cap="none"/>
+              <a:defRPr lang="en-US" sz="1600" b="1" cap="none"/>
             </a:lvl9pPr>
           </a:lstStyle>
           <a:p>
             <a:pPr>
-              <a:defRPr lang="en-us"/>
+              <a:defRPr lang="en-US"/>
             </a:pPr>
             <a:r>
               <a:t>Click to edit Master text styles</a:t>
@@ -1782,7 +1809,7 @@
             <a:spLocks noGrp="1" noChangeArrowheads="1"/>
             <a:extLst>
               <a:ext uri="smNativeData">
-                <pr:smNativeData xmlns:pr="smNativeData" xmlns="smNativeData" val="SMDATA_15_FLquaRMAAAAlAAAAZAAAAA0AAAAAkAAAAEgAAACQAAAASAAAAAAAAAAAAAAAAAAAAAEAAABQAAAAAAAAAAAA4D8AAAAAAADgPwAAAAAAAOA/AAAAAAAA4D8AAAAAAADgPwAAAAAAAOA/AAAAAAAA4D8AAAAAAADgPwAAAAAAAOA/AAAAAAAA4D8CAAAAjAAAAAAAAAAAAAAAW5vVDP///wgAAAAAAAAAAAAAAAAAAAAAAAAAAAAAAAAAAAAAZAAAAAEAAABAAAAAAAAAAAAAAAAAAAAAAAAAAAAAAAAAAAAAAAAAAAAAAAAAAAAAAAAAAAAAAAAAAAAAAAAAAAAAAAAAAAAAAAAAAAAAAAAAAAAAAAAAAAAAAAAAAAAAFAAAADwAAAAAAAAAAAAAAAAAAAkUAAAAAQAAABQAAAAUAAAAFAAAAAEAAAAAAAAAZAAAAGQAAAAAAAAAZAAAAGQAAAAVAAAAYAAAAAAAAAAAAAAADwAAACADAAAAAAAAAAAAAAEAAACgMgAAVgcAAKr4//8BAAAAf39/AAEAAABkAAAAAAAAABQAAABAHwAAAAAAACYAAAAAAAAAwOD//wAAAAAmAAAAZAAAABYAAABMAAAAAAAAAAAAAAAEAAAAAAAAAAEAAADn5uYKAAAAACgAAAAoAAAAZAAAAGQAAAAAAAAAzMzMAAAAAABQAAAAUAAAAGQAAABkAAAAAAAAABcAAAAUAAAAAAAAAAAAAAD/fwAA/38AAAAAAAAJAAAABAAAAAAAAAAeAAAAaAAAAAAAAAAAAAAAAAAAAAAAAAAAAAAAECcAABAnAAAAAAAAAAAAAAAAAAAAAAAAAAAAAAAAAAAAAAAAAAAAABQAAAAAAAAAwMD/AAAAAABkAAAAMgAAAAAAAABkAAAAAAAAAH9/fwAKAAAAIgAAABgAAAAAAAAAAAAAAAAAAAAAAAAAAAAAAAAAAAAkAAAAJAAAAAAAAAAHAAAAAAAAAAAAAAAAAAAAAAAAAAAAAAAAAAAAf39/ACUAAABYAAAAAAAAAAAAAAAAAAAAAAAAAAAAAAAAAAAAAAAAAAAAAAAAAAAAAAAAAAAAAAA/AAAAAAAAAKCGAQAAAAAAAAAAAAAAAAAMAAAAAQAAAAAAAAAAAAAAAAAAAB8AAABUAAAAAAAABQAAAAEAAAAAAAAAAAAAAAAAAAAAAAAAAAAAAAAAAAAAAAAAAAAAAAJ/f38AAAAAA8zMzADAwP8Af39/AAAAAAAAAAAAAAAAAAAAAAAAAAAAIQAAABgAAAAUAAAAKwUAAGkPAADlJAAAFCYAABAAAAAmAAAACAAAAAEAAAAAAAAA"/>
+                <pr:smNativeData xmlns="smNativeData" xmlns:pr="smNativeData" xmlns:p15="http://schemas.microsoft.com/office/powerpoint/2012/main" xmlns:p14="http://schemas.microsoft.com/office/powerpoint/2010/main" xmlns:mc="http://schemas.openxmlformats.org/markup-compatibility/2006" val="SMDATA_15_FLquaRMAAAAlAAAAZAAAAA0AAAAAkAAAAEgAAACQAAAASAAAAAAAAAAAAAAAAAAAAAEAAABQAAAAAAAAAAAA4D8AAAAAAADgPwAAAAAAAOA/AAAAAAAA4D8AAAAAAADgPwAAAAAAAOA/AAAAAAAA4D8AAAAAAADgPwAAAAAAAOA/AAAAAAAA4D8CAAAAjAAAAAAAAAAAAAAAW5vVDP///wgAAAAAAAAAAAAAAAAAAAAAAAAAAAAAAAAAAAAAZAAAAAEAAABAAAAAAAAAAAAAAAAAAAAAAAAAAAAAAAAAAAAAAAAAAAAAAAAAAAAAAAAAAAAAAAAAAAAAAAAAAAAAAAAAAAAAAAAAAAAAAAAAAAAAAAAAAAAAAAAAAAAAFAAAADwAAAAAAAAAAAAAAAAAAAkUAAAAAQAAABQAAAAUAAAAFAAAAAEAAAAAAAAAZAAAAGQAAAAAAAAAZAAAAGQAAAAVAAAAYAAAAAAAAAAAAAAADwAAACADAAAAAAAAAAAAAAEAAACgMgAAVgcAAKr4//8BAAAAf39/AAEAAABkAAAAAAAAABQAAABAHwAAAAAAACYAAAAAAAAAwOD//wAAAAAmAAAAZAAAABYAAABMAAAAAAAAAAAAAAAEAAAAAAAAAAEAAADn5uYKAAAAACgAAAAoAAAAZAAAAGQAAAAAAAAAzMzMAAAAAABQAAAAUAAAAGQAAABkAAAAAAAAABcAAAAUAAAAAAAAAAAAAAD/fwAA/38AAAAAAAAJAAAABAAAAAAAAAAeAAAAaAAAAAAAAAAAAAAAAAAAAAAAAAAAAAAAECcAABAnAAAAAAAAAAAAAAAAAAAAAAAAAAAAAAAAAAAAAAAAAAAAABQAAAAAAAAAwMD/AAAAAABkAAAAMgAAAAAAAABkAAAAAAAAAH9/fwAKAAAAIgAAABgAAAAAAAAAAAAAAAAAAAAAAAAAAAAAAAAAAAAkAAAAJAAAAAAAAAAHAAAAAAAAAAAAAAAAAAAAAAAAAAAAAAAAAAAAf39/ACUAAABYAAAAAAAAAAAAAAAAAAAAAAAAAAAAAAAAAAAAAAAAAAAAAAAAAAAAAAAAAAAAAAA/AAAAAAAAAKCGAQAAAAAAAAAAAAAAAAAMAAAAAQAAAAAAAAAAAAAAAAAAAB8AAABUAAAAAAAABQAAAAEAAAAAAAAAAAAAAAAAAAAAAAAAAAAAAAAAAAAAAAAAAAAAAAJ/f38AAAAAA8zMzADAwP8Af39/AAAAAAAAAAAAAAAAAAAAAAAAAAAAIQAAABgAAAAUAAAAKwUAAGkPAADlJAAAFCYAABAAAAAmAAAACAAAAAEAAAAAAAAA"/>
               </a:ext>
             </a:extLst>
           </p:cNvSpPr>
@@ -1801,7 +1828,7 @@
           <a:lstStyle/>
           <a:p>
             <a:pPr>
-              <a:defRPr lang="en-us"/>
+              <a:defRPr lang="en-US"/>
             </a:pPr>
             <a:r>
               <a:t>Click to edit Master text styles</a:t>
@@ -1809,7 +1836,7 @@
           </a:p>
           <a:p>
             <a:pPr lvl="1">
-              <a:defRPr lang="en-us"/>
+              <a:defRPr lang="en-US"/>
             </a:pPr>
             <a:r>
               <a:t>Second level</a:t>
@@ -1817,7 +1844,7 @@
           </a:p>
           <a:p>
             <a:pPr lvl="2">
-              <a:defRPr lang="en-us"/>
+              <a:defRPr lang="en-US"/>
             </a:pPr>
             <a:r>
               <a:t>Third level</a:t>
@@ -1825,7 +1852,7 @@
           </a:p>
           <a:p>
             <a:pPr lvl="3">
-              <a:defRPr lang="en-us"/>
+              <a:defRPr lang="en-US"/>
             </a:pPr>
             <a:r>
               <a:t>Fourth level</a:t>
@@ -1833,7 +1860,7 @@
           </a:p>
           <a:p>
             <a:pPr lvl="4">
-              <a:defRPr lang="en-us"/>
+              <a:defRPr lang="en-US"/>
             </a:pPr>
             <a:r>
               <a:t>Fifth level</a:t>
@@ -1848,7 +1875,7 @@
             <a:spLocks noGrp="1" noChangeArrowheads="1"/>
             <a:extLst>
               <a:ext uri="smNativeData">
-                <pr:smNativeData xmlns:pr="smNativeData" xmlns="smNativeData" val="SMDATA_15_FLquaRMAAAAlAAAAZAAAAA0AAAAAkAAAAEgAAACQAAAASAAAAAAAAAACAAAAAAAAAAEAAABQAAAAAAAAAAAA4D8AAAAAAADgPwAAAAAAAOA/AAAAAAAA4D8AAAAAAADgPwAAAAAAAOA/AAAAAAAA4D8AAAAAAADgPwAAAAAAAOA/AAAAAAAA4D8CAAAAjAAAAAAAAAAAAAAAW5vVDP///wgAAAAAAAAAAAAAAAAAAAAAAAAAAAAAAAAAAAAAZAAAAAEAAABAAAAAAAAAAAAAAAAAAAAAAAAAAAAAAAAAAAAAAAAAAAAAAAAAAAAAAAAAAAAAAAAAAAAAAAAAAAAAAAAAAAAAAAAAAAAAAAAAAAAAAAAAAAAAAAAAAAAAFAAAADwAAAAAAAAAAAAAAAAAAAkUAAAAAQAAABQAAAAUAAAAFAAAAAEAAAAAAAAAZAAAAGQAAAAAAAAAZAAAAGQAAAAVAAAAYAAAAAAAAAAAAAAADwAAACADAAAAAAAAAAAAAAEAAACgMgAAVgcAAKr4//8BAAAAf39/AAEAAABkAAAAAAAAABQAAABAHwAAAAAAACYAAAAAAAAAwOD//wAAAAAmAAAAZAAAABYAAABMAAAAAAAAAAAAAAAEAAAAAAAAAAEAAADn5uYKAAAAACgAAAAoAAAAZAAAAGQAAAAAAAAAzMzMAAAAAABQAAAAUAAAAGQAAABkAAAAAAAAABcAAAAUAAAAAAAAAAAAAAD/fwAA/38AAAAAAAAJAAAABAAAAJLC8BQeAAAAaAAAAAAAAAAAAAAAAAAAAAAAAAAAAAAAECcAABAnAAAAAAAAAAAAAAAAAAAAAAAAAAAAAAAAAAAAAAAAAAAAABQAAAAAAAAAwMD/AAAAAABkAAAAMgAAAAAAAABkAAAAAAAAAH9/fwAKAAAAIgAAABgAAAAAAAAAAAAAAAAAAAAAAAAAAAAAAAAAAAAkAAAAJAAAAAAAAAAHAAAAAAAAAAAAAAAAAAAAAAAAAAAAAAAAAAAAf39/ACUAAABYAAAAAAAAAAAAAAAAAAAAAAAAAAAAAAAAAAAAAAAAAAAAAAAAAAAAAAAAAAAAAAA/AAAAAAAAAKCGAQAAAAAAAAAAAAAAAAAMAAAAAQAAAAAAAAAAAAAAAAAAAB8AAABUAAAAAAAABQAAAAEAAAAAAAAAAAAAAAAAAAAAAAAAAAAAAAAAAAAAAAAAAAAAAAJ/f38AAAAAA8zMzADAwP8Af39/AAAAAAAAAAAAAAAAAAAAAAAAAAAAIQAAABgAAAAUAAAA+CUAAFgKAADbRQAAaQ8AABAAAAAmAAAACAAAAIGAAAAAAAAA"/>
+                <pr:smNativeData xmlns="smNativeData" xmlns:pr="smNativeData" xmlns:p15="http://schemas.microsoft.com/office/powerpoint/2012/main" xmlns:p14="http://schemas.microsoft.com/office/powerpoint/2010/main" xmlns:mc="http://schemas.openxmlformats.org/markup-compatibility/2006" val="SMDATA_15_FLquaRMAAAAlAAAAZAAAAA0AAAAAkAAAAEgAAACQAAAASAAAAAAAAAACAAAAAAAAAAEAAABQAAAAAAAAAAAA4D8AAAAAAADgPwAAAAAAAOA/AAAAAAAA4D8AAAAAAADgPwAAAAAAAOA/AAAAAAAA4D8AAAAAAADgPwAAAAAAAOA/AAAAAAAA4D8CAAAAjAAAAAAAAAAAAAAAW5vVDP///wgAAAAAAAAAAAAAAAAAAAAAAAAAAAAAAAAAAAAAZAAAAAEAAABAAAAAAAAAAAAAAAAAAAAAAAAAAAAAAAAAAAAAAAAAAAAAAAAAAAAAAAAAAAAAAAAAAAAAAAAAAAAAAAAAAAAAAAAAAAAAAAAAAAAAAAAAAAAAAAAAAAAAFAAAADwAAAAAAAAAAAAAAAAAAAkUAAAAAQAAABQAAAAUAAAAFAAAAAEAAAAAAAAAZAAAAGQAAAAAAAAAZAAAAGQAAAAVAAAAYAAAAAAAAAAAAAAADwAAACADAAAAAAAAAAAAAAEAAACgMgAAVgcAAKr4//8BAAAAf39/AAEAAABkAAAAAAAAABQAAABAHwAAAAAAACYAAAAAAAAAwOD//wAAAAAmAAAAZAAAABYAAABMAAAAAAAAAAAAAAAEAAAAAAAAAAEAAADn5uYKAAAAACgAAAAoAAAAZAAAAGQAAAAAAAAAzMzMAAAAAABQAAAAUAAAAGQAAABkAAAAAAAAABcAAAAUAAAAAAAAAAAAAAD/fwAA/38AAAAAAAAJAAAABAAAAJLC8BQeAAAAaAAAAAAAAAAAAAAAAAAAAAAAAAAAAAAAECcAABAnAAAAAAAAAAAAAAAAAAAAAAAAAAAAAAAAAAAAAAAAAAAAABQAAAAAAAAAwMD/AAAAAABkAAAAMgAAAAAAAABkAAAAAAAAAH9/fwAKAAAAIgAAABgAAAAAAAAAAAAAAAAAAAAAAAAAAAAAAAAAAAAkAAAAJAAAAAAAAAAHAAAAAAAAAAAAAAAAAAAAAAAAAAAAAAAAAAAAf39/ACUAAABYAAAAAAAAAAAAAAAAAAAAAAAAAAAAAAAAAAAAAAAAAAAAAAAAAAAAAAAAAAAAAAA/AAAAAAAAAKCGAQAAAAAAAAAAAAAAAAAMAAAAAQAAAAAAAAAAAAAAAAAAAB8AAABUAAAAAAAABQAAAAEAAAAAAAAAAAAAAAAAAAAAAAAAAAAAAAAAAAAAAAAAAAAAAAJ/f38AAAAAA8zMzADAwP8Af39/AAAAAAAAAAAAAAAAAAAAAAAAAAAAIQAAABgAAAAUAAAA+CUAAFgKAADbRQAAaQ8AABAAAAAmAAAACAAAAIGAAAAAAAAA"/>
               </a:ext>
             </a:extLst>
           </p:cNvSpPr>
@@ -1871,44 +1898,44 @@
           <a:lstStyle>
             <a:lvl1pPr marL="0" indent="0">
               <a:buNone/>
-              <a:defRPr lang="en-us" sz="2400" b="1" cap="none"/>
+              <a:defRPr lang="en-US" sz="2400" b="1" cap="none"/>
             </a:lvl1pPr>
             <a:lvl2pPr marL="457200" indent="0">
               <a:buNone/>
-              <a:defRPr lang="en-us" sz="2000" b="1" cap="none"/>
+              <a:defRPr lang="en-US" sz="2000" b="1" cap="none"/>
             </a:lvl2pPr>
             <a:lvl3pPr marL="914400" indent="0">
               <a:buNone/>
-              <a:defRPr lang="en-us" sz="1800" b="1" cap="none"/>
+              <a:defRPr lang="en-US" sz="1800" b="1" cap="none"/>
             </a:lvl3pPr>
             <a:lvl4pPr marL="1371600" indent="0">
               <a:buNone/>
-              <a:defRPr lang="en-us" sz="1600" b="1" cap="none"/>
+              <a:defRPr lang="en-US" sz="1600" b="1" cap="none"/>
             </a:lvl4pPr>
             <a:lvl5pPr marL="1828800" indent="0">
               <a:buNone/>
-              <a:defRPr lang="en-us" sz="1600" b="1" cap="none"/>
+              <a:defRPr lang="en-US" sz="1600" b="1" cap="none"/>
             </a:lvl5pPr>
             <a:lvl6pPr marL="2286000" indent="0">
               <a:buNone/>
-              <a:defRPr lang="en-us" sz="1600" b="1" cap="none"/>
+              <a:defRPr lang="en-US" sz="1600" b="1" cap="none"/>
             </a:lvl6pPr>
             <a:lvl7pPr marL="2743200" indent="0">
               <a:buNone/>
-              <a:defRPr lang="en-us" sz="1600" b="1" cap="none"/>
+              <a:defRPr lang="en-US" sz="1600" b="1" cap="none"/>
             </a:lvl7pPr>
             <a:lvl8pPr marL="3200400" indent="0">
               <a:buNone/>
-              <a:defRPr lang="en-us" sz="1600" b="1" cap="none"/>
+              <a:defRPr lang="en-US" sz="1600" b="1" cap="none"/>
             </a:lvl8pPr>
             <a:lvl9pPr marL="3657600" indent="0">
               <a:buNone/>
-              <a:defRPr lang="en-us" sz="1600" b="1" cap="none"/>
+              <a:defRPr lang="en-US" sz="1600" b="1" cap="none"/>
             </a:lvl9pPr>
           </a:lstStyle>
           <a:p>
             <a:pPr>
-              <a:defRPr lang="en-us"/>
+              <a:defRPr lang="en-US"/>
             </a:pPr>
             <a:r>
               <a:t>Click to edit Master text styles</a:t>
@@ -1923,7 +1950,7 @@
             <a:spLocks noGrp="1" noChangeArrowheads="1"/>
             <a:extLst>
               <a:ext uri="smNativeData">
-                <pr:smNativeData xmlns:pr="smNativeData" xmlns="smNativeData" val="SMDATA_15_FLquaRMAAAAlAAAAZAAAAA0AAAAAkAAAAEgAAACQAAAASAAAAAAAAAAAAAAAAAAAAAEAAABQAAAAAAAAAAAA4D8AAAAAAADgPwAAAAAAAOA/AAAAAAAA4D8AAAAAAADgPwAAAAAAAOA/AAAAAAAA4D8AAAAAAADgPwAAAAAAAOA/AAAAAAAA4D8CAAAAjAAAAAAAAAAAAAAAW5vVDP///wgAAAAAAAAAAAAAAAAAAAAAAAAAAAAAAAAAAAAAZAAAAAEAAABAAAAAAAAAAAAAAAAAAAAAAAAAAAAAAAAAAAAAAAAAAAAAAAAAAAAAAAAAAAAAAAAAAAAAAAAAAAAAAAAAAAAAAAAAAAAAAAAAAAAAAAAAAAAAAAAAAAAAFAAAADwAAAAAAAAAAAAAAAAAAAkUAAAAAQAAABQAAAAUAAAAFAAAAAEAAAAAAAAAZAAAAGQAAAAAAAAAZAAAAGQAAAAVAAAAYAAAAAAAAAAAAAAADwAAACADAAAAAAAAAAAAAAEAAACgMgAAVgcAAKr4//8BAAAAf39/AAEAAABkAAAAAAAAABQAAABAHwAAAAAAACYAAAAAAAAAwOD//wAAAAAmAAAAZAAAABYAAABMAAAAAAAAAAAAAAAEAAAAAAAAAAEAAADn5uYKAAAAACgAAAAoAAAAZAAAAGQAAAAAAAAAzMzMAAAAAABQAAAAUAAAAGQAAABkAAAAAAAAABcAAAAUAAAAAAAAAAAAAAD/fwAA/38AAAAAAAAJAAAABAAAAPL1+v8eAAAAaAAAAAAAAAAAAAAAAAAAAAAAAAAAAAAAECcAABAnAAAAAAAAAAAAAAAAAAAAAAAAAAAAAAAAAAAAAAAAAAAAABQAAAAAAAAAwMD/AAAAAABkAAAAMgAAAAAAAABkAAAAAAAAAH9/fwAKAAAAIgAAABgAAAAAAAAAAAAAAAAAAAAAAAAAAAAAAAAAAAAkAAAAJAAAAAAAAAAHAAAAAAAAAAAAAAAAAAAAAAAAAAAAAAAAAAAAf39/ACUAAABYAAAAAAAAAAAAAAAAAAAAAAAAAAAAAAAAAAAAAAAAAAAAAAAAAAAAAAAAAAAAAAA/AAAAAAAAAKCGAQAAAAAAAAAAAAAAAAAMAAAAAQAAAAAAAAAAAAAAAAAAAB8AAABUAAAAAAAABQAAAAEAAAAAAAAAAAAAAAAAAAAAAAAAAAAAAAAAAAAAAAAAAAAAAAJ/f38AAAAAA8zMzADAwP8Af39/AAAAAAAAAAAAAAAAAAAAAAAAAAAAIQAAABgAAAAUAAAA+CUAAGkPAADbRQAAFCYAABAAAAAmAAAACAAAAAEAAAAAAAAA"/>
+                <pr:smNativeData xmlns="smNativeData" xmlns:pr="smNativeData" xmlns:p15="http://schemas.microsoft.com/office/powerpoint/2012/main" xmlns:p14="http://schemas.microsoft.com/office/powerpoint/2010/main" xmlns:mc="http://schemas.openxmlformats.org/markup-compatibility/2006" val="SMDATA_15_FLquaRMAAAAlAAAAZAAAAA0AAAAAkAAAAEgAAACQAAAASAAAAAAAAAAAAAAAAAAAAAEAAABQAAAAAAAAAAAA4D8AAAAAAADgPwAAAAAAAOA/AAAAAAAA4D8AAAAAAADgPwAAAAAAAOA/AAAAAAAA4D8AAAAAAADgPwAAAAAAAOA/AAAAAAAA4D8CAAAAjAAAAAAAAAAAAAAAW5vVDP///wgAAAAAAAAAAAAAAAAAAAAAAAAAAAAAAAAAAAAAZAAAAAEAAABAAAAAAAAAAAAAAAAAAAAAAAAAAAAAAAAAAAAAAAAAAAAAAAAAAAAAAAAAAAAAAAAAAAAAAAAAAAAAAAAAAAAAAAAAAAAAAAAAAAAAAAAAAAAAAAAAAAAAFAAAADwAAAAAAAAAAAAAAAAAAAkUAAAAAQAAABQAAAAUAAAAFAAAAAEAAAAAAAAAZAAAAGQAAAAAAAAAZAAAAGQAAAAVAAAAYAAAAAAAAAAAAAAADwAAACADAAAAAAAAAAAAAAEAAACgMgAAVgcAAKr4//8BAAAAf39/AAEAAABkAAAAAAAAABQAAABAHwAAAAAAACYAAAAAAAAAwOD//wAAAAAmAAAAZAAAABYAAABMAAAAAAAAAAAAAAAEAAAAAAAAAAEAAADn5uYKAAAAACgAAAAoAAAAZAAAAGQAAAAAAAAAzMzMAAAAAABQAAAAUAAAAGQAAABkAAAAAAAAABcAAAAUAAAAAAAAAAAAAAD/fwAA/38AAAAAAAAJAAAABAAAAPL1+v8eAAAAaAAAAAAAAAAAAAAAAAAAAAAAAAAAAAAAECcAABAnAAAAAAAAAAAAAAAAAAAAAAAAAAAAAAAAAAAAAAAAAAAAABQAAAAAAAAAwMD/AAAAAABkAAAAMgAAAAAAAABkAAAAAAAAAH9/fwAKAAAAIgAAABgAAAAAAAAAAAAAAAAAAAAAAAAAAAAAAAAAAAAkAAAAJAAAAAAAAAAHAAAAAAAAAAAAAAAAAAAAAAAAAAAAAAAAAAAAf39/ACUAAABYAAAAAAAAAAAAAAAAAAAAAAAAAAAAAAAAAAAAAAAAAAAAAAAAAAAAAAAAAAAAAAA/AAAAAAAAAKCGAQAAAAAAAAAAAAAAAAAMAAAAAQAAAAAAAAAAAAAAAAAAAB8AAABUAAAAAAAABQAAAAEAAAAAAAAAAAAAAAAAAAAAAAAAAAAAAAAAAAAAAAAAAAAAAAJ/f38AAAAAA8zMzADAwP8Af39/AAAAAAAAAAAAAAAAAAAAAAAAAAAAIQAAABgAAAAUAAAA+CUAAGkPAADbRQAAFCYAABAAAAAmAAAACAAAAAEAAAAAAAAA"/>
               </a:ext>
             </a:extLst>
           </p:cNvSpPr>
@@ -1942,7 +1969,7 @@
           <a:lstStyle/>
           <a:p>
             <a:pPr>
-              <a:defRPr lang="en-us"/>
+              <a:defRPr lang="en-US"/>
             </a:pPr>
             <a:r>
               <a:t>Click to edit Master text styles</a:t>
@@ -1950,7 +1977,7 @@
           </a:p>
           <a:p>
             <a:pPr lvl="1">
-              <a:defRPr lang="en-us"/>
+              <a:defRPr lang="en-US"/>
             </a:pPr>
             <a:r>
               <a:t>Second level</a:t>
@@ -1958,7 +1985,7 @@
           </a:p>
           <a:p>
             <a:pPr lvl="2">
-              <a:defRPr lang="en-us"/>
+              <a:defRPr lang="en-US"/>
             </a:pPr>
             <a:r>
               <a:t>Third level</a:t>
@@ -1966,7 +1993,7 @@
           </a:p>
           <a:p>
             <a:pPr lvl="3">
-              <a:defRPr lang="en-us"/>
+              <a:defRPr lang="en-US"/>
             </a:pPr>
             <a:r>
               <a:t>Fourth level</a:t>
@@ -1974,7 +2001,7 @@
           </a:p>
           <a:p>
             <a:pPr lvl="4">
-              <a:defRPr lang="en-us"/>
+              <a:defRPr lang="en-US"/>
             </a:pPr>
             <a:r>
               <a:t>Fifth level</a:t>
@@ -1989,7 +2016,7 @@
             <a:spLocks noGrp="1" noChangeArrowheads="1"/>
             <a:extLst>
               <a:ext uri="smNativeData">
-                <pr:smNativeData xmlns:pr="smNativeData" xmlns="smNativeData" val="SMDATA_15_FLquaRMAAAAlAAAAZAAAAA0AAAAAkAAAAEgAAACQAAAASAAAAAAAAAABAAAAAAAAAAEAAABQAAAAAAAAAAAA4D8AAAAAAADgPwAAAAAAAOA/AAAAAAAA4D8AAAAAAADgPwAAAAAAAOA/AAAAAAAA4D8AAAAAAADgPwAAAAAAAOA/AAAAAAAA4D8CAAAAjAAAAAAAAAAAAAAAW5vVDP///wgAAAAAAAAAAAAAAAAAAAAAAAAAAAAAAAAAAAAAZAAAAAEAAABAAAAAAAAAAAAAAAAAAAAAAAAAAAAAAAAAAAAAAAAAAAAAAAAAAAAAAAAAAAAAAAAAAAAAAAAAAAAAAAAAAAAAAAAAAAAAAAAAAAAAAAAAAAAAAAAAAAAAFAAAADwAAAAAAAAAAAAAAAAAAAkUAAAAAQAAABQAAAAUAAAAFAAAAAEAAAAAAAAAZAAAAGQAAAAAAAAAZAAAAGQAAAAVAAAAYAAAAAAAAAAAAAAADwAAACADAAAAAAAAAAAAAAEAAACgMgAAVgcAAKr4//8BAAAAf39/AAEAAABkAAAAAAAAABQAAABAHwAAAAAAACYAAAAAAAAAwOD//wAAAAAmAAAAZAAAABYAAABMAAAAAAAAAAAAAAAEAAAAAAAAAAEAAADn5uYKAAAAACgAAAAoAAAAZAAAAGQAAAAAAAAAzMzMAAAAAABQAAAAUAAAAGQAAABkAAAAAAAAABcAAAAUAAAAAAAAAAAAAAD/fwAA/38AAAAAAAAJAAAABAAAAOrv9v8eAAAAaAAAAAAAAAAAAAAAAAAAAAAAAAAAAAAAECcAABAnAAAAAAAAAAAAAAAAAAAAAAAAAAAAAAAAAAAAAAAAAAAAABQAAAAAAAAAwMD/AAAAAABkAAAAMgAAAAAAAABkAAAAAAAAAH9/fwAKAAAAIgAAABgAAAAAAAAAAAAAAAAAAAAAAAAAAAAAAAAAAAAkAAAAJAAAAAAAAAAHAAAAAAAAAAAAAAAAAAAAAAAAAAAAAAAAAAAAf39/ACUAAABYAAAAAAAAAAAAAAAAAAAAAAAAAAAAAAAAAAAAAAAAAAAAAAAAAAAAAAAAAAAAAAA/AAAAAAAAAKCGAQAAAAAAAAAAAAAAAAAMAAAAAQAAAAAAAAAAAAAAAAAAAB8AAABUAAAAAAAABQAAAAEAAAAAAAAAAAAAAAAAAAAAAAAAAAAAAAAAAAAAAAAAAAAAAAJ/f38AAAAAA8zMzADAwP8Af39/AAAAAAAAAAAAAAAAAAAAAAAAAAAAIQAAABgAAAAUAAAAKAUAABonAAAIFgAAWSkAABAAAAAmAAAACAAAAAAAAAAAAAAA"/>
+                <pr:smNativeData xmlns="smNativeData" xmlns:pr="smNativeData" xmlns:p15="http://schemas.microsoft.com/office/powerpoint/2012/main" xmlns:p14="http://schemas.microsoft.com/office/powerpoint/2010/main" xmlns:mc="http://schemas.openxmlformats.org/markup-compatibility/2006" val="SMDATA_15_FLquaRMAAAAlAAAAZAAAAA0AAAAAkAAAAEgAAACQAAAASAAAAAAAAAABAAAAAAAAAAEAAABQAAAAAAAAAAAA4D8AAAAAAADgPwAAAAAAAOA/AAAAAAAA4D8AAAAAAADgPwAAAAAAAOA/AAAAAAAA4D8AAAAAAADgPwAAAAAAAOA/AAAAAAAA4D8CAAAAjAAAAAAAAAAAAAAAW5vVDP///wgAAAAAAAAAAAAAAAAAAAAAAAAAAAAAAAAAAAAAZAAAAAEAAABAAAAAAAAAAAAAAAAAAAAAAAAAAAAAAAAAAAAAAAAAAAAAAAAAAAAAAAAAAAAAAAAAAAAAAAAAAAAAAAAAAAAAAAAAAAAAAAAAAAAAAAAAAAAAAAAAAAAAFAAAADwAAAAAAAAAAAAAAAAAAAkUAAAAAQAAABQAAAAUAAAAFAAAAAEAAAAAAAAAZAAAAGQAAAAAAAAAZAAAAGQAAAAVAAAAYAAAAAAAAAAAAAAADwAAACADAAAAAAAAAAAAAAEAAACgMgAAVgcAAKr4//8BAAAAf39/AAEAAABkAAAAAAAAABQAAABAHwAAAAAAACYAAAAAAAAAwOD//wAAAAAmAAAAZAAAABYAAABMAAAAAAAAAAAAAAAEAAAAAAAAAAEAAADn5uYKAAAAACgAAAAoAAAAZAAAAGQAAAAAAAAAzMzMAAAAAABQAAAAUAAAAGQAAABkAAAAAAAAABcAAAAUAAAAAAAAAAAAAAD/fwAA/38AAAAAAAAJAAAABAAAAOrv9v8eAAAAaAAAAAAAAAAAAAAAAAAAAAAAAAAAAAAAECcAABAnAAAAAAAAAAAAAAAAAAAAAAAAAAAAAAAAAAAAAAAAAAAAABQAAAAAAAAAwMD/AAAAAABkAAAAMgAAAAAAAABkAAAAAAAAAH9/fwAKAAAAIgAAABgAAAAAAAAAAAAAAAAAAAAAAAAAAAAAAAAAAAAkAAAAJAAAAAAAAAAHAAAAAAAAAAAAAAAAAAAAAAAAAAAAAAAAAAAAf39/ACUAAABYAAAAAAAAAAAAAAAAAAAAAAAAAAAAAAAAAAAAAAAAAAAAAAAAAAAAAAAAAAAAAAA/AAAAAAAAAKCGAQAAAAAAAAAAAAAAAAAMAAAAAQAAAAAAAAAAAAAAAAAAAB8AAABUAAAAAAAABQAAAAEAAAAAAAAAAAAAAAAAAAAAAAAAAAAAAAAAAAAAAAAAAAAAAAJ/f38AAAAAA8zMzADAwP8Af39/AAAAAAAAAAAAAAAAAAAAAAAAAAAAIQAAABgAAAAUAAAAKAUAABonAAAIFgAAWSkAABAAAAAmAAAACAAAAAAAAAAAAAAA"/>
               </a:ext>
             </a:extLst>
           </p:cNvSpPr>
@@ -2003,11 +2030,12 @@
           <a:lstStyle/>
           <a:p>
             <a:pPr>
-              <a:defRPr lang="en-us"/>
+              <a:defRPr lang="en-US"/>
             </a:pPr>
             <a:fld id="{30AED2C2-8CDD-FB24-9316-7A719C58652F}" type="datetime1">
-              <a:t>3/4/2026</a:t>
+              <a:t>4/21/2026</a:t>
             </a:fld>
+            <a:endParaRPr/>
           </a:p>
         </p:txBody>
       </p:sp>
@@ -2018,7 +2046,7 @@
             <a:spLocks noGrp="1" noChangeArrowheads="1"/>
             <a:extLst>
               <a:ext uri="smNativeData">
-                <pr:smNativeData xmlns:pr="smNativeData" xmlns="smNativeData" val="SMDATA_15_FLquaRMAAAAlAAAAZAAAAA0AAAAAkAAAAEgAAACQAAAASAAAAAAAAAABAAAAAAAAAAEAAABQAAAAAAAAAAAA4D8AAAAAAADgPwAAAAAAAOA/AAAAAAAA4D8AAAAAAADgPwAAAAAAAOA/AAAAAAAA4D8AAAAAAADgPwAAAAAAAOA/AAAAAAAA4D8CAAAAjAAAAAAAAAAAAAAAW5vVDP///wgAAAAAAAAAAAAAAAAAAAAAAAAAAAAAAAAAAAAAZAAAAAEAAABAAAAAAAAAAAAAAAAAAAAAAAAAAAAAAAAAAAAAAAAAAAAAAAAAAAAAAAAAAAAAAAAAAAAAAAAAAAAAAAAAAAAAAAAAAAAAAAAAAAAAAAAAAAAAAAAAAAAAFAAAADwAAAAAAAAAAAAAAAAAAAkUAAAAAQAAABQAAAAUAAAAFAAAAAEAAAAAAAAAZAAAAGQAAAAAAAAAZAAAAGQAAAAVAAAAYAAAAAAAAAAAAAAADwAAACADAAAAAAAAAAAAAAEAAACgMgAAVgcAAKr4//8BAAAAf39/AAEAAABkAAAAAAAAABQAAABAHwAAAAAAACYAAAAAAAAAwOD//wAAAAAmAAAAZAAAABYAAABMAAAAAAAAAAAAAAAEAAAAAAAAAAEAAADn5uYKAAAAACgAAAAoAAAAZAAAAGQAAAAAAAAAzMzMAAAAAABQAAAAUAAAAGQAAABkAAAAAAAAABcAAAAUAAAAAAAAAAAAAAD/fwAA/38AAAAAAAAJAAAABAAAAOrv9v8eAAAAaAAAAAAAAAAAAAAAAAAAAAAAAAAAAAAAECcAABAnAAAAAAAAAAAAAAAAAAAAAAAAAAAAAAAAAAAAAAAAAAAAABQAAAAAAAAAwMD/AAAAAABkAAAAMgAAAAAAAABkAAAAAAAAAH9/fwAKAAAAIgAAABgAAAAAAAAAAAAAAAAAAAAAAAAAAAAAAAAAAAAkAAAAJAAAAAAAAAAHAAAAAAAAAAAAAAAAAAAAAAAAAAAAAAAAAAAAf39/ACUAAABYAAAAAAAAAAAAAAAAAAAAAAAAAAAAAAAAAAAAAAAAAAAAAAAAAAAAAAAAAAAAAAA/AAAAAAAAAKCGAQAAAAAAAAAAAAAAAAAMAAAAAQAAAAAAAAAAAAAAAAAAAB8AAABUAAAAAAAABQAAAAEAAAAAAAAAAAAAAAAAAAAAAAAAAAAAAAAAAAAAAAAAAAAAAAJ/f38AAAAAA8zMzADAwP8Af39/AAAAAAAAAAAAAAAAAAAAAAAAAAAAIQAAABgAAAAUAAAA2BgAABonAAAoMgAAWSkAABAAAAAmAAAACAAAAAAAAAAAAAAA"/>
+                <pr:smNativeData xmlns="smNativeData" xmlns:pr="smNativeData" xmlns:p15="http://schemas.microsoft.com/office/powerpoint/2012/main" xmlns:p14="http://schemas.microsoft.com/office/powerpoint/2010/main" xmlns:mc="http://schemas.openxmlformats.org/markup-compatibility/2006" val="SMDATA_15_FLquaRMAAAAlAAAAZAAAAA0AAAAAkAAAAEgAAACQAAAASAAAAAAAAAABAAAAAAAAAAEAAABQAAAAAAAAAAAA4D8AAAAAAADgPwAAAAAAAOA/AAAAAAAA4D8AAAAAAADgPwAAAAAAAOA/AAAAAAAA4D8AAAAAAADgPwAAAAAAAOA/AAAAAAAA4D8CAAAAjAAAAAAAAAAAAAAAW5vVDP///wgAAAAAAAAAAAAAAAAAAAAAAAAAAAAAAAAAAAAAZAAAAAEAAABAAAAAAAAAAAAAAAAAAAAAAAAAAAAAAAAAAAAAAAAAAAAAAAAAAAAAAAAAAAAAAAAAAAAAAAAAAAAAAAAAAAAAAAAAAAAAAAAAAAAAAAAAAAAAAAAAAAAAFAAAADwAAAAAAAAAAAAAAAAAAAkUAAAAAQAAABQAAAAUAAAAFAAAAAEAAAAAAAAAZAAAAGQAAAAAAAAAZAAAAGQAAAAVAAAAYAAAAAAAAAAAAAAADwAAACADAAAAAAAAAAAAAAEAAACgMgAAVgcAAKr4//8BAAAAf39/AAEAAABkAAAAAAAAABQAAABAHwAAAAAAACYAAAAAAAAAwOD//wAAAAAmAAAAZAAAABYAAABMAAAAAAAAAAAAAAAEAAAAAAAAAAEAAADn5uYKAAAAACgAAAAoAAAAZAAAAGQAAAAAAAAAzMzMAAAAAABQAAAAUAAAAGQAAABkAAAAAAAAABcAAAAUAAAAAAAAAAAAAAD/fwAA/38AAAAAAAAJAAAABAAAAOrv9v8eAAAAaAAAAAAAAAAAAAAAAAAAAAAAAAAAAAAAECcAABAnAAAAAAAAAAAAAAAAAAAAAAAAAAAAAAAAAAAAAAAAAAAAABQAAAAAAAAAwMD/AAAAAABkAAAAMgAAAAAAAABkAAAAAAAAAH9/fwAKAAAAIgAAABgAAAAAAAAAAAAAAAAAAAAAAAAAAAAAAAAAAAAkAAAAJAAAAAAAAAAHAAAAAAAAAAAAAAAAAAAAAAAAAAAAAAAAAAAAf39/ACUAAABYAAAAAAAAAAAAAAAAAAAAAAAAAAAAAAAAAAAAAAAAAAAAAAAAAAAAAAAAAAAAAAA/AAAAAAAAAKCGAQAAAAAAAAAAAAAAAAAMAAAAAQAAAAAAAAAAAAAAAAAAAB8AAABUAAAAAAAABQAAAAEAAAAAAAAAAAAAAAAAAAAAAAAAAAAAAAAAAAAAAAAAAAAAAAJ/f38AAAAAA8zMzADAwP8Af39/AAAAAAAAAAAAAAAAAAAAAAAAAAAAIQAAABgAAAAUAAAA2BgAABonAAAoMgAAWSkAABAAAAAmAAAACAAAAAAAAAAAAAAA"/>
               </a:ext>
             </a:extLst>
           </p:cNvSpPr>
@@ -2032,8 +2060,9 @@
           <a:lstStyle/>
           <a:p>
             <a:pPr>
-              <a:defRPr lang="en-us"/>
-            </a:pPr>
+              <a:defRPr lang="en-US"/>
+            </a:pPr>
+            <a:endParaRPr/>
           </a:p>
         </p:txBody>
       </p:sp>
@@ -2044,7 +2073,7 @@
             <a:spLocks noGrp="1" noChangeArrowheads="1"/>
             <a:extLst>
               <a:ext uri="smNativeData">
-                <pr:smNativeData xmlns:pr="smNativeData" xmlns="smNativeData" val="SMDATA_15_FLquaRMAAAAlAAAAZAAAAA0AAAAAkAAAAEgAAACQAAAASAAAAAAAAAABAAAAAAAAAAEAAABQAAAAAAAAAAAA4D8AAAAAAADgPwAAAAAAAOA/AAAAAAAA4D8AAAAAAADgPwAAAAAAAOA/AAAAAAAA4D8AAAAAAADgPwAAAAAAAOA/AAAAAAAA4D8CAAAAjAAAAAAAAAAAAAAAW5vVDP///wgAAAAAAAAAAAAAAAAAAAAAAAAAAAAAAAAAAAAAZAAAAAEAAABAAAAAAAAAAAAAAAAAAAAAAAAAAAAAAAAAAAAAAAAAAAAAAAAAAAAAAAAAAAAAAAAAAAAAAAAAAAAAAAAAAAAAAAAAAAAAAAAAAAAAAAAAAAAAAAAAAAAAFAAAADwAAAAAAAAAAAAAAAAAAAkUAAAAAQAAABQAAAAUAAAAFAAAAAEAAAAAAAAAZAAAAGQAAAAAAAAAZAAAAGQAAAAVAAAAYAAAAAAAAAAAAAAADwAAACADAAAAAAAAAAAAAAEAAACgMgAAVgcAAKr4//8BAAAAf39/AAEAAABkAAAAAAAAABQAAABAHwAAAAAAACYAAAAAAAAAwOD//wAAAAAmAAAAZAAAABYAAABMAAAAAAAAAAAAAAAEAAAAAAAAAAEAAADn5uYKAAAAACgAAAAoAAAAZAAAAGQAAAAAAAAAzMzMAAAAAABQAAAAUAAAAGQAAABkAAAAAAAAABcAAAAUAAAAAAAAAAAAAAD/fwAA/38AAAAAAAAJAAAABAAAAPL1+v8eAAAAaAAAAAAAAAAAAAAAAAAAAAAAAAAAAAAAECcAABAnAAAAAAAAAAAAAAAAAAAAAAAAAAAAAAAAAAAAAAAAAAAAABQAAAAAAAAAwMD/AAAAAABkAAAAMgAAAAAAAABkAAAAAAAAAH9/fwAKAAAAIgAAABgAAAAAAAAAAAAAAAAAAAAAAAAAAAAAAAAAAAAkAAAAJAAAAAAAAAAHAAAAAAAAAAAAAAAAAAAAAAAAAAAAAAAAAAAAf39/ACUAAABYAAAAAAAAAAAAAAAAAAAAAAAAAAAAAAAAAAAAAAAAAAAAAAAAAAAAAAAAAAAAAAA/AAAAAAAAAKCGAQAAAAAAAAAAAAAAAAAMAAAAAQAAAAAAAAAAAAAAAAAAAB8AAABUAAAAAAAABQAAAAEAAAAAAAAAAAAAAAAAAAAAAAAAAAAAAAAAAAAAAAAAAAAAAAJ/f38AAAAAA8zMzADAwP8Af39/AAAAAAAAAAAAAAAAAAAAAAAAAAAAIQAAABgAAAAUAAAA+DQAABonAADYRQAAWSkAABAAAAAmAAAACAAAAAAAAAAAAAAA"/>
+                <pr:smNativeData xmlns="smNativeData" xmlns:pr="smNativeData" xmlns:p15="http://schemas.microsoft.com/office/powerpoint/2012/main" xmlns:p14="http://schemas.microsoft.com/office/powerpoint/2010/main" xmlns:mc="http://schemas.openxmlformats.org/markup-compatibility/2006" val="SMDATA_15_FLquaRMAAAAlAAAAZAAAAA0AAAAAkAAAAEgAAACQAAAASAAAAAAAAAABAAAAAAAAAAEAAABQAAAAAAAAAAAA4D8AAAAAAADgPwAAAAAAAOA/AAAAAAAA4D8AAAAAAADgPwAAAAAAAOA/AAAAAAAA4D8AAAAAAADgPwAAAAAAAOA/AAAAAAAA4D8CAAAAjAAAAAAAAAAAAAAAW5vVDP///wgAAAAAAAAAAAAAAAAAAAAAAAAAAAAAAAAAAAAAZAAAAAEAAABAAAAAAAAAAAAAAAAAAAAAAAAAAAAAAAAAAAAAAAAAAAAAAAAAAAAAAAAAAAAAAAAAAAAAAAAAAAAAAAAAAAAAAAAAAAAAAAAAAAAAAAAAAAAAAAAAAAAAFAAAADwAAAAAAAAAAAAAAAAAAAkUAAAAAQAAABQAAAAUAAAAFAAAAAEAAAAAAAAAZAAAAGQAAAAAAAAAZAAAAGQAAAAVAAAAYAAAAAAAAAAAAAAADwAAACADAAAAAAAAAAAAAAEAAACgMgAAVgcAAKr4//8BAAAAf39/AAEAAABkAAAAAAAAABQAAABAHwAAAAAAACYAAAAAAAAAwOD//wAAAAAmAAAAZAAAABYAAABMAAAAAAAAAAAAAAAEAAAAAAAAAAEAAADn5uYKAAAAACgAAAAoAAAAZAAAAGQAAAAAAAAAzMzMAAAAAABQAAAAUAAAAGQAAABkAAAAAAAAABcAAAAUAAAAAAAAAAAAAAD/fwAA/38AAAAAAAAJAAAABAAAAPL1+v8eAAAAaAAAAAAAAAAAAAAAAAAAAAAAAAAAAAAAECcAABAnAAAAAAAAAAAAAAAAAAAAAAAAAAAAAAAAAAAAAAAAAAAAABQAAAAAAAAAwMD/AAAAAABkAAAAMgAAAAAAAABkAAAAAAAAAH9/fwAKAAAAIgAAABgAAAAAAAAAAAAAAAAAAAAAAAAAAAAAAAAAAAAkAAAAJAAAAAAAAAAHAAAAAAAAAAAAAAAAAAAAAAAAAAAAAAAAAAAAf39/ACUAAABYAAAAAAAAAAAAAAAAAAAAAAAAAAAAAAAAAAAAAAAAAAAAAAAAAAAAAAAAAAAAAAA/AAAAAAAAAKCGAQAAAAAAAAAAAAAAAAAMAAAAAQAAAAAAAAAAAAAAAAAAAB8AAABUAAAAAAAABQAAAAEAAAAAAAAAAAAAAAAAAAAAAAAAAAAAAAAAAAAAAAAAAAAAAAJ/f38AAAAAA8zMzADAwP8Af39/AAAAAAAAAAAAAAAAAAAAAAAAAAAAIQAAABgAAAAUAAAA+DQAABonAADYRQAAWSkAABAAAAAmAAAACAAAAAAAAAAAAAAA"/>
               </a:ext>
             </a:extLst>
           </p:cNvSpPr>
@@ -2058,11 +2087,12 @@
           <a:lstStyle/>
           <a:p>
             <a:pPr>
-              <a:defRPr lang="en-us"/>
+              <a:defRPr lang="en-US"/>
             </a:pPr>
             <a:fld id="{30AEABA2-ECDD-FB5D-9316-1A08E558654F}" type="slidenum">
               <a:t>‹#›</a:t>
             </a:fld>
+            <a:endParaRPr/>
           </a:p>
         </p:txBody>
       </p:sp>
@@ -2076,7 +2106,7 @@
 </file>
 
 <file path=ppt/slideLayouts/slideLayout6.xml><?xml version="1.0" encoding="utf-8"?>
-<p:sldLayout xmlns:p="http://schemas.openxmlformats.org/presentationml/2006/main" xmlns:mc="http://schemas.openxmlformats.org/markup-compatibility/2006" xmlns:p14="http://schemas.microsoft.com/office/powerpoint/2010/main" xmlns:p15="http://schemas.microsoft.com/office/powerpoint/2012/main" xmlns:r="http://schemas.openxmlformats.org/officeDocument/2006/relationships" xmlns:a="http://schemas.openxmlformats.org/drawingml/2006/main" type="titleOnly" preserve="1">
+<p:sldLayout xmlns:a="http://schemas.openxmlformats.org/drawingml/2006/main" xmlns:r="http://schemas.openxmlformats.org/officeDocument/2006/relationships" xmlns:p="http://schemas.openxmlformats.org/presentationml/2006/main" type="titleOnly" preserve="1">
   <p:cSld name="Title Only">
     <p:spTree>
       <p:nvGrpSpPr>
@@ -2099,7 +2129,7 @@
             <a:spLocks noGrp="1" noChangeArrowheads="1"/>
             <a:extLst>
               <a:ext uri="smNativeData">
-                <pr:smNativeData xmlns:pr="smNativeData" xmlns="smNativeData" val="SMDATA_15_FLquaRMAAAAlAAAAZAAAAA0AAAAAkAAAAEgAAACQAAAASAAAAAAAAAABAAAAAAAAAAEAAABQAAAAAAAAAAAA4D8AAAAAAADgPwAAAAAAAOA/AAAAAAAA4D8AAAAAAADgPwAAAAAAAOA/AAAAAAAA4D8AAAAAAADgPwAAAAAAAOA/AAAAAAAA4D8CAAAAjAAAAAAAAAAAAAAAW5vVDP///wgAAAAAAAAAAAAAAAAAAAAAAAAAAAAAAAAAAAAAZAAAAAEAAABAAAAAAAAAAAAAAAAAAAAAAAAAAAAAAAAAAAAAAAAAAAAAAAAAAAAAAAAAAAAAAAAAAAAAAAAAAAAAAAAAAAAAAAAAAAAAAAAAAAAAAAAAAAAAAAAAAAAAFAAAADwAAAAAAAAAAAAAAAAAAAkUAAAAAQAAABQAAAAUAAAAFAAAAAEAAAAAAAAAZAAAAGQAAAAAAAAAZAAAAGQAAAAVAAAAYAAAAAAAAAAAAAAADwAAACADAAAAAAAAAAAAAAEAAACgMgAAVgcAAKr4//8BAAAAf39/AAEAAABkAAAAAAAAABQAAABAHwAAAAAAACYAAAAAAAAAwOD//wAAAAAmAAAAZAAAABYAAABMAAAAAAAAAAAAAAAEAAAAAAAAAAEAAADn5uYKAAAAACgAAAAoAAAAZAAAAGQAAAAAAAAAzMzMAAAAAABQAAAAUAAAAGQAAABkAAAAAAAAABcAAAAUAAAAAAAAAAAAAAD/fwAA/38AAAAAAAAJAAAABAAAAAAAAAAeAAAAaAAAAAAAAAAAAAAAAAAAAAAAAAAAAAAAECcAABAnAAAAAAAAAAAAAAAAAAAAAAAAAAAAAAAAAAAAAAAAAAAAABQAAAAAAAAAwMD/AAAAAABkAAAAMgAAAAAAAABkAAAAAAAAAH9/fwAKAAAAIgAAABgAAAAAAAAAAAAAAAAAAAAAAAAAAAAAAAAAAAAkAAAAJAAAAAAAAAAHAAAAAAAAAAAAAAAAAAAAAAAAAAAAAAAAAAAAf39/ACUAAABYAAAAAAAAAAAAAAAAAAAAAAAAAAAAAAAAAAAAAAAAAAAAAAAAAAAAAAAAAAAAAAA/AAAAAAAAAKCGAQAAAAAAAAAAAAAAAAAMAAAAAQAAAAAAAAAAAAAAAAAAAB8AAABUAAAAAAAABQAAAAEAAAAAAAAAAAAAAAAAAAAAAAAAAAAAAAAAAAAAAAAAAAAAAAJ/f38AAAAAA8zMzADAwP8Af39/AAAAAAAAAAAAAAAAAAAAAAAAAAAAIQAAABgAAAAUAAAAKAUAAD8CAADYRQAAZwoAABAAAAAmAAAACAAAAAAAAAAAAAAA"/>
+                <pr:smNativeData xmlns="smNativeData" xmlns:pr="smNativeData" xmlns:p15="http://schemas.microsoft.com/office/powerpoint/2012/main" xmlns:p14="http://schemas.microsoft.com/office/powerpoint/2010/main" xmlns:mc="http://schemas.openxmlformats.org/markup-compatibility/2006" val="SMDATA_15_FLquaRMAAAAlAAAAZAAAAA0AAAAAkAAAAEgAAACQAAAASAAAAAAAAAABAAAAAAAAAAEAAABQAAAAAAAAAAAA4D8AAAAAAADgPwAAAAAAAOA/AAAAAAAA4D8AAAAAAADgPwAAAAAAAOA/AAAAAAAA4D8AAAAAAADgPwAAAAAAAOA/AAAAAAAA4D8CAAAAjAAAAAAAAAAAAAAAW5vVDP///wgAAAAAAAAAAAAAAAAAAAAAAAAAAAAAAAAAAAAAZAAAAAEAAABAAAAAAAAAAAAAAAAAAAAAAAAAAAAAAAAAAAAAAAAAAAAAAAAAAAAAAAAAAAAAAAAAAAAAAAAAAAAAAAAAAAAAAAAAAAAAAAAAAAAAAAAAAAAAAAAAAAAAFAAAADwAAAAAAAAAAAAAAAAAAAkUAAAAAQAAABQAAAAUAAAAFAAAAAEAAAAAAAAAZAAAAGQAAAAAAAAAZAAAAGQAAAAVAAAAYAAAAAAAAAAAAAAADwAAACADAAAAAAAAAAAAAAEAAACgMgAAVgcAAKr4//8BAAAAf39/AAEAAABkAAAAAAAAABQAAABAHwAAAAAAACYAAAAAAAAAwOD//wAAAAAmAAAAZAAAABYAAABMAAAAAAAAAAAAAAAEAAAAAAAAAAEAAADn5uYKAAAAACgAAAAoAAAAZAAAAGQAAAAAAAAAzMzMAAAAAABQAAAAUAAAAGQAAABkAAAAAAAAABcAAAAUAAAAAAAAAAAAAAD/fwAA/38AAAAAAAAJAAAABAAAAAAAAAAeAAAAaAAAAAAAAAAAAAAAAAAAAAAAAAAAAAAAECcAABAnAAAAAAAAAAAAAAAAAAAAAAAAAAAAAAAAAAAAAAAAAAAAABQAAAAAAAAAwMD/AAAAAABkAAAAMgAAAAAAAABkAAAAAAAAAH9/fwAKAAAAIgAAABgAAAAAAAAAAAAAAAAAAAAAAAAAAAAAAAAAAAAkAAAAJAAAAAAAAAAHAAAAAAAAAAAAAAAAAAAAAAAAAAAAAAAAAAAAf39/ACUAAABYAAAAAAAAAAAAAAAAAAAAAAAAAAAAAAAAAAAAAAAAAAAAAAAAAAAAAAAAAAAAAAA/AAAAAAAAAKCGAQAAAAAAAAAAAAAAAAAMAAAAAQAAAAAAAAAAAAAAAAAAAB8AAABUAAAAAAAABQAAAAEAAAAAAAAAAAAAAAAAAAAAAAAAAAAAAAAAAAAAAAAAAAAAAAJ/f38AAAAAA8zMzADAwP8Af39/AAAAAAAAAAAAAAAAAAAAAAAAAAAAIQAAABgAAAAUAAAAKAUAAD8CAADYRQAAZwoAABAAAAAmAAAACAAAAAAAAAAAAAAA"/>
               </a:ext>
             </a:extLst>
           </p:cNvSpPr>
@@ -2113,7 +2143,7 @@
           <a:lstStyle/>
           <a:p>
             <a:pPr>
-              <a:defRPr lang="en-us"/>
+              <a:defRPr lang="en-US"/>
             </a:pPr>
             <a:r>
               <a:t>Click to edit Master title style</a:t>
@@ -2128,7 +2158,7 @@
             <a:spLocks noGrp="1" noChangeArrowheads="1"/>
             <a:extLst>
               <a:ext uri="smNativeData">
-                <pr:smNativeData xmlns:pr="smNativeData" xmlns="smNativeData" val="SMDATA_15_FLquaRMAAAAlAAAAZAAAAA0AAAAAkAAAAEgAAACQAAAASAAAAAAAAAABAAAAAAAAAAEAAABQAAAAAAAAAAAA4D8AAAAAAADgPwAAAAAAAOA/AAAAAAAA4D8AAAAAAADgPwAAAAAAAOA/AAAAAAAA4D8AAAAAAADgPwAAAAAAAOA/AAAAAAAA4D8CAAAAjAAAAAAAAAAAAAAAW5vVDP///wgAAAAAAAAAAAAAAAAAAAAAAAAAAAAAAAAAAAAAZAAAAAEAAABAAAAAAAAAAAAAAAAAAAAAAAAAAAAAAAAAAAAAAAAAAAAAAAAAAAAAAAAAAAAAAAAAAAAAAAAAAAAAAAAAAAAAAAAAAAAAAAAAAAAAAAAAAAAAAAAAAAAAFAAAADwAAAAAAAAAAAAAAAAAAAkUAAAAAQAAABQAAAAUAAAAFAAAAAEAAAAAAAAAZAAAAGQAAAAAAAAAZAAAAGQAAAAVAAAAYAAAAAAAAAAAAAAADwAAACADAAAAAAAAAAAAAAEAAACgMgAAVgcAAKr4//8BAAAAf39/AAEAAABkAAAAAAAAABQAAABAHwAAAAAAACYAAAAAAAAAwOD//wAAAAAmAAAAZAAAABYAAABMAAAAAAAAAAAAAAAEAAAAAAAAAAEAAADn5uYKAAAAACgAAAAoAAAAZAAAAGQAAAAAAAAAzMzMAAAAAABQAAAAUAAAAGQAAABkAAAAAAAAABcAAAAUAAAAAAAAAAAAAAD/fwAA/38AAAAAAAAJAAAABAAAAAAAAAAeAAAAaAAAAAAAAAAAAAAAAAAAAAAAAAAAAAAAECcAABAnAAAAAAAAAAAAAAAAAAAAAAAAAAAAAAAAAAAAAAAAAAAAABQAAAAAAAAAwMD/AAAAAABkAAAAMgAAAAAAAABkAAAAAAAAAH9/fwAKAAAAIgAAABgAAAAAAAAAAAAAAAAAAAAAAAAAAAAAAAAAAAAkAAAAJAAAAAAAAAAHAAAAAAAAAAAAAAAAAAAAAAAAAAAAAAAAAAAAf39/ACUAAABYAAAAAAAAAAAAAAAAAAAAAAAAAAAAAAAAAAAAAAAAAAAAAAAAAAAAAAAAAAAAAAA/AAAAAAAAAKCGAQAAAAAAAAAAAAAAAAAMAAAAAQAAAAAAAAAAAAAAAAAAAB8AAABUAAAAAAAABQAAAAEAAAAAAAAAAAAAAAAAAAAAAAAAAAAAAAAAAAAAAAAAAAAAAAJ/f38AAAAAA8zMzADAwP8Af39/AAAAAAAAAAAAAAAAAAAAAAAAAAAAIQAAABgAAAAUAAAAKAUAABonAAAIFgAAWSkAABAAAAAmAAAACAAAAAAAAAAAAAAA"/>
+                <pr:smNativeData xmlns="smNativeData" xmlns:pr="smNativeData" xmlns:p15="http://schemas.microsoft.com/office/powerpoint/2012/main" xmlns:p14="http://schemas.microsoft.com/office/powerpoint/2010/main" xmlns:mc="http://schemas.openxmlformats.org/markup-compatibility/2006" val="SMDATA_15_FLquaRMAAAAlAAAAZAAAAA0AAAAAkAAAAEgAAACQAAAASAAAAAAAAAABAAAAAAAAAAEAAABQAAAAAAAAAAAA4D8AAAAAAADgPwAAAAAAAOA/AAAAAAAA4D8AAAAAAADgPwAAAAAAAOA/AAAAAAAA4D8AAAAAAADgPwAAAAAAAOA/AAAAAAAA4D8CAAAAjAAAAAAAAAAAAAAAW5vVDP///wgAAAAAAAAAAAAAAAAAAAAAAAAAAAAAAAAAAAAAZAAAAAEAAABAAAAAAAAAAAAAAAAAAAAAAAAAAAAAAAAAAAAAAAAAAAAAAAAAAAAAAAAAAAAAAAAAAAAAAAAAAAAAAAAAAAAAAAAAAAAAAAAAAAAAAAAAAAAAAAAAAAAAFAAAADwAAAAAAAAAAAAAAAAAAAkUAAAAAQAAABQAAAAUAAAAFAAAAAEAAAAAAAAAZAAAAGQAAAAAAAAAZAAAAGQAAAAVAAAAYAAAAAAAAAAAAAAADwAAACADAAAAAAAAAAAAAAEAAACgMgAAVgcAAKr4//8BAAAAf39/AAEAAABkAAAAAAAAABQAAABAHwAAAAAAACYAAAAAAAAAwOD//wAAAAAmAAAAZAAAABYAAABMAAAAAAAAAAAAAAAEAAAAAAAAAAEAAADn5uYKAAAAACgAAAAoAAAAZAAAAGQAAAAAAAAAzMzMAAAAAABQAAAAUAAAAGQAAABkAAAAAAAAABcAAAAUAAAAAAAAAAAAAAD/fwAA/38AAAAAAAAJAAAABAAAAAAAAAAeAAAAaAAAAAAAAAAAAAAAAAAAAAAAAAAAAAAAECcAABAnAAAAAAAAAAAAAAAAAAAAAAAAAAAAAAAAAAAAAAAAAAAAABQAAAAAAAAAwMD/AAAAAABkAAAAMgAAAAAAAABkAAAAAAAAAH9/fwAKAAAAIgAAABgAAAAAAAAAAAAAAAAAAAAAAAAAAAAAAAAAAAAkAAAAJAAAAAAAAAAHAAAAAAAAAAAAAAAAAAAAAAAAAAAAAAAAAAAAf39/ACUAAABYAAAAAAAAAAAAAAAAAAAAAAAAAAAAAAAAAAAAAAAAAAAAAAAAAAAAAAAAAAAAAAA/AAAAAAAAAKCGAQAAAAAAAAAAAAAAAAAMAAAAAQAAAAAAAAAAAAAAAAAAAB8AAABUAAAAAAAABQAAAAEAAAAAAAAAAAAAAAAAAAAAAAAAAAAAAAAAAAAAAAAAAAAAAAJ/f38AAAAAA8zMzADAwP8Af39/AAAAAAAAAAAAAAAAAAAAAAAAAAAAIQAAABgAAAAUAAAAKAUAABonAAAIFgAAWSkAABAAAAAmAAAACAAAAAAAAAAAAAAA"/>
               </a:ext>
             </a:extLst>
           </p:cNvSpPr>
@@ -2142,11 +2172,12 @@
           <a:lstStyle/>
           <a:p>
             <a:pPr>
-              <a:defRPr lang="en-us"/>
+              <a:defRPr lang="en-US"/>
             </a:pPr>
             <a:fld id="{30AEA598-D6DD-FB53-9316-2006EB586575}" type="datetime1">
-              <a:t>3/4/2026</a:t>
+              <a:t>4/21/2026</a:t>
             </a:fld>
+            <a:endParaRPr/>
           </a:p>
         </p:txBody>
       </p:sp>
@@ -2157,7 +2188,7 @@
             <a:spLocks noGrp="1" noChangeArrowheads="1"/>
             <a:extLst>
               <a:ext uri="smNativeData">
-                <pr:smNativeData xmlns:pr="smNativeData" xmlns="smNativeData" val="SMDATA_15_FLquaRMAAAAlAAAAZAAAAA0AAAAAkAAAAEgAAACQAAAASAAAAAAAAAABAAAAAAAAAAEAAABQAAAAAAAAAAAA4D8AAAAAAADgPwAAAAAAAOA/AAAAAAAA4D8AAAAAAADgPwAAAAAAAOA/AAAAAAAA4D8AAAAAAADgPwAAAAAAAOA/AAAAAAAA4D8CAAAAjAAAAAAAAAAAAAAAW5vVDP///wgAAAAAAAAAAAAAAAAAAAAAAAAAAAAAAAAAAAAAZAAAAAEAAABAAAAAAAAAAAAAAAAAAAAAAAAAAAAAAAAAAAAAAAAAAAAAAAAAAAAAAAAAAAAAAAAAAAAAAAAAAAAAAAAAAAAAAAAAAAAAAAAAAAAAAAAAAAAAAAAAAAAAFAAAADwAAAAAAAAAAAAAAAAAAAkUAAAAAQAAABQAAAAUAAAAFAAAAAEAAAAAAAAAZAAAAGQAAAAAAAAAZAAAAGQAAAAVAAAAYAAAAAAAAAAAAAAADwAAACADAAAAAAAAAAAAAAEAAACgMgAAVgcAAKr4//8BAAAAf39/AAEAAABkAAAAAAAAABQAAABAHwAAAAAAACYAAAAAAAAAwOD//wAAAAAmAAAAZAAAABYAAABMAAAAAAAAAAAAAAAEAAAAAAAAAAEAAADn5uYKAAAAACgAAAAoAAAAZAAAAGQAAAAAAAAAzMzMAAAAAABQAAAAUAAAAGQAAABkAAAAAAAAABcAAAAUAAAAAAAAAAAAAAD/fwAA/38AAAAAAAAJAAAABAAAAPL1+v8eAAAAaAAAAAAAAAAAAAAAAAAAAAAAAAAAAAAAECcAABAnAAAAAAAAAAAAAAAAAAAAAAAAAAAAAAAAAAAAAAAAAAAAABQAAAAAAAAAwMD/AAAAAABkAAAAMgAAAAAAAABkAAAAAAAAAH9/fwAKAAAAIgAAABgAAAAAAAAAAAAAAAAAAAAAAAAAAAAAAAAAAAAkAAAAJAAAAAAAAAAHAAAAAAAAAAAAAAAAAAAAAAAAAAAAAAAAAAAAf39/ACUAAABYAAAAAAAAAAAAAAAAAAAAAAAAAAAAAAAAAAAAAAAAAAAAAAAAAAAAAAAAAAAAAAA/AAAAAAAAAKCGAQAAAAAAAAAAAAAAAAAMAAAAAQAAAAAAAAAAAAAAAAAAAB8AAABUAAAAAAAABQAAAAEAAAAAAAAAAAAAAAAAAAAAAAAAAAAAAAAAAAAAAAAAAAAAAAJ/f38AAAAAA8zMzADAwP8Af39/AAAAAAAAAAAAAAAAAAAAAAAAAAAAIQAAABgAAAAUAAAA2BgAABonAAAoMgAAWSkAABAAAAAmAAAACAAAAAAAAAAAAAAA"/>
+                <pr:smNativeData xmlns="smNativeData" xmlns:pr="smNativeData" xmlns:p15="http://schemas.microsoft.com/office/powerpoint/2012/main" xmlns:p14="http://schemas.microsoft.com/office/powerpoint/2010/main" xmlns:mc="http://schemas.openxmlformats.org/markup-compatibility/2006" val="SMDATA_15_FLquaRMAAAAlAAAAZAAAAA0AAAAAkAAAAEgAAACQAAAASAAAAAAAAAABAAAAAAAAAAEAAABQAAAAAAAAAAAA4D8AAAAAAADgPwAAAAAAAOA/AAAAAAAA4D8AAAAAAADgPwAAAAAAAOA/AAAAAAAA4D8AAAAAAADgPwAAAAAAAOA/AAAAAAAA4D8CAAAAjAAAAAAAAAAAAAAAW5vVDP///wgAAAAAAAAAAAAAAAAAAAAAAAAAAAAAAAAAAAAAZAAAAAEAAABAAAAAAAAAAAAAAAAAAAAAAAAAAAAAAAAAAAAAAAAAAAAAAAAAAAAAAAAAAAAAAAAAAAAAAAAAAAAAAAAAAAAAAAAAAAAAAAAAAAAAAAAAAAAAAAAAAAAAFAAAADwAAAAAAAAAAAAAAAAAAAkUAAAAAQAAABQAAAAUAAAAFAAAAAEAAAAAAAAAZAAAAGQAAAAAAAAAZAAAAGQAAAAVAAAAYAAAAAAAAAAAAAAADwAAACADAAAAAAAAAAAAAAEAAACgMgAAVgcAAKr4//8BAAAAf39/AAEAAABkAAAAAAAAABQAAABAHwAAAAAAACYAAAAAAAAAwOD//wAAAAAmAAAAZAAAABYAAABMAAAAAAAAAAAAAAAEAAAAAAAAAAEAAADn5uYKAAAAACgAAAAoAAAAZAAAAGQAAAAAAAAAzMzMAAAAAABQAAAAUAAAAGQAAABkAAAAAAAAABcAAAAUAAAAAAAAAAAAAAD/fwAA/38AAAAAAAAJAAAABAAAAPL1+v8eAAAAaAAAAAAAAAAAAAAAAAAAAAAAAAAAAAAAECcAABAnAAAAAAAAAAAAAAAAAAAAAAAAAAAAAAAAAAAAAAAAAAAAABQAAAAAAAAAwMD/AAAAAABkAAAAMgAAAAAAAABkAAAAAAAAAH9/fwAKAAAAIgAAABgAAAAAAAAAAAAAAAAAAAAAAAAAAAAAAAAAAAAkAAAAJAAAAAAAAAAHAAAAAAAAAAAAAAAAAAAAAAAAAAAAAAAAAAAAf39/ACUAAABYAAAAAAAAAAAAAAAAAAAAAAAAAAAAAAAAAAAAAAAAAAAAAAAAAAAAAAAAAAAAAAA/AAAAAAAAAKCGAQAAAAAAAAAAAAAAAAAMAAAAAQAAAAAAAAAAAAAAAAAAAB8AAABUAAAAAAAABQAAAAEAAAAAAAAAAAAAAAAAAAAAAAAAAAAAAAAAAAAAAAAAAAAAAAJ/f38AAAAAA8zMzADAwP8Af39/AAAAAAAAAAAAAAAAAAAAAAAAAAAAIQAAABgAAAAUAAAA2BgAABonAAAoMgAAWSkAABAAAAAmAAAACAAAAAAAAAAAAAAA"/>
               </a:ext>
             </a:extLst>
           </p:cNvSpPr>
@@ -2171,8 +2202,9 @@
           <a:lstStyle/>
           <a:p>
             <a:pPr>
-              <a:defRPr lang="en-us"/>
-            </a:pPr>
+              <a:defRPr lang="en-US"/>
+            </a:pPr>
+            <a:endParaRPr/>
           </a:p>
         </p:txBody>
       </p:sp>
@@ -2183,7 +2215,7 @@
             <a:spLocks noGrp="1" noChangeArrowheads="1"/>
             <a:extLst>
               <a:ext uri="smNativeData">
-                <pr:smNativeData xmlns:pr="smNativeData" xmlns="smNativeData" val="SMDATA_15_FLquaRMAAAAlAAAAZAAAAA0AAAAAkAAAAEgAAACQAAAASAAAAAAAAAABAAAAAAAAAAEAAABQAAAAAAAAAAAA4D8AAAAAAADgPwAAAAAAAOA/AAAAAAAA4D8AAAAAAADgPwAAAAAAAOA/AAAAAAAA4D8AAAAAAADgPwAAAAAAAOA/AAAAAAAA4D8CAAAAjAAAAAAAAAAAAAAAW5vVDP///wgAAAAAAAAAAAAAAAAAAAAAAAAAAAAAAAAAAAAAZAAAAAEAAABAAAAAAAAAAAAAAAAAAAAAAAAAAAAAAAAAAAAAAAAAAAAAAAAAAAAAAAAAAAAAAAAAAAAAAAAAAAAAAAAAAAAAAAAAAAAAAAAAAAAAAAAAAAAAAAAAAAAAFAAAADwAAAAAAAAAAAAAAAAAAAkUAAAAAQAAABQAAAAUAAAAFAAAAAEAAAAAAAAAZAAAAGQAAAAAAAAAZAAAAGQAAAAVAAAAYAAAAAAAAAAAAAAADwAAACADAAAAAAAAAAAAAAEAAACgMgAAVgcAAKr4//8BAAAAf39/AAEAAABkAAAAAAAAABQAAABAHwAAAAAAACYAAAAAAAAAwOD//wAAAAAmAAAAZAAAABYAAABMAAAAAAAAAAAAAAAEAAAAAAAAAAEAAADn5uYKAAAAACgAAAAoAAAAZAAAAGQAAAAAAAAAzMzMAAAAAABQAAAAUAAAAGQAAABkAAAAAAAAABcAAAAUAAAAAAAAAAAAAAD/fwAA/38AAAAAAAAJAAAABAAAAJ/J8f8eAAAAaAAAAAAAAAAAAAAAAAAAAAAAAAAAAAAAECcAABAnAAAAAAAAAAAAAAAAAAAAAAAAAAAAAAAAAAAAAAAAAAAAABQAAAAAAAAAwMD/AAAAAABkAAAAMgAAAAAAAABkAAAAAAAAAH9/fwAKAAAAIgAAABgAAAAAAAAAAAAAAAAAAAAAAAAAAAAAAAAAAAAkAAAAJAAAAAAAAAAHAAAAAAAAAAAAAAAAAAAAAAAAAAAAAAAAAAAAf39/ACUAAABYAAAAAAAAAAAAAAAAAAAAAAAAAAAAAAAAAAAAAAAAAAAAAAAAAAAAAAAAAAAAAAA/AAAAAAAAAKCGAQAAAAAAAAAAAAAAAAAMAAAAAQAAAAAAAAAAAAAAAAAAAB8AAABUAAAAAAAABQAAAAEAAAAAAAAAAAAAAAAAAAAAAAAAAAAAAAAAAAAAAAAAAAAAAAJ/f38AAAAAA8zMzADAwP8Af39/AAAAAAAAAAAAAAAAAAAAAAAAAAAAIQAAABgAAAAUAAAA+DQAABonAADYRQAAWSkAABAAAAAmAAAACAAAAAAAAAAAAAAA"/>
+                <pr:smNativeData xmlns="smNativeData" xmlns:pr="smNativeData" xmlns:p15="http://schemas.microsoft.com/office/powerpoint/2012/main" xmlns:p14="http://schemas.microsoft.com/office/powerpoint/2010/main" xmlns:mc="http://schemas.openxmlformats.org/markup-compatibility/2006" val="SMDATA_15_FLquaRMAAAAlAAAAZAAAAA0AAAAAkAAAAEgAAACQAAAASAAAAAAAAAABAAAAAAAAAAEAAABQAAAAAAAAAAAA4D8AAAAAAADgPwAAAAAAAOA/AAAAAAAA4D8AAAAAAADgPwAAAAAAAOA/AAAAAAAA4D8AAAAAAADgPwAAAAAAAOA/AAAAAAAA4D8CAAAAjAAAAAAAAAAAAAAAW5vVDP///wgAAAAAAAAAAAAAAAAAAAAAAAAAAAAAAAAAAAAAZAAAAAEAAABAAAAAAAAAAAAAAAAAAAAAAAAAAAAAAAAAAAAAAAAAAAAAAAAAAAAAAAAAAAAAAAAAAAAAAAAAAAAAAAAAAAAAAAAAAAAAAAAAAAAAAAAAAAAAAAAAAAAAFAAAADwAAAAAAAAAAAAAAAAAAAkUAAAAAQAAABQAAAAUAAAAFAAAAAEAAAAAAAAAZAAAAGQAAAAAAAAAZAAAAGQAAAAVAAAAYAAAAAAAAAAAAAAADwAAACADAAAAAAAAAAAAAAEAAACgMgAAVgcAAKr4//8BAAAAf39/AAEAAABkAAAAAAAAABQAAABAHwAAAAAAACYAAAAAAAAAwOD//wAAAAAmAAAAZAAAABYAAABMAAAAAAAAAAAAAAAEAAAAAAAAAAEAAADn5uYKAAAAACgAAAAoAAAAZAAAAGQAAAAAAAAAzMzMAAAAAABQAAAAUAAAAGQAAABkAAAAAAAAABcAAAAUAAAAAAAAAAAAAAD/fwAA/38AAAAAAAAJAAAABAAAAJ/J8f8eAAAAaAAAAAAAAAAAAAAAAAAAAAAAAAAAAAAAECcAABAnAAAAAAAAAAAAAAAAAAAAAAAAAAAAAAAAAAAAAAAAAAAAABQAAAAAAAAAwMD/AAAAAABkAAAAMgAAAAAAAABkAAAAAAAAAH9/fwAKAAAAIgAAABgAAAAAAAAAAAAAAAAAAAAAAAAAAAAAAAAAAAAkAAAAJAAAAAAAAAAHAAAAAAAAAAAAAAAAAAAAAAAAAAAAAAAAAAAAf39/ACUAAABYAAAAAAAAAAAAAAAAAAAAAAAAAAAAAAAAAAAAAAAAAAAAAAAAAAAAAAAAAAAAAAA/AAAAAAAAAKCGAQAAAAAAAAAAAAAAAAAMAAAAAQAAAAAAAAAAAAAAAAAAAB8AAABUAAAAAAAABQAAAAEAAAAAAAAAAAAAAAAAAAAAAAAAAAAAAAAAAAAAAAAAAAAAAAJ/f38AAAAAA8zMzADAwP8Af39/AAAAAAAAAAAAAAAAAAAAAAAAAAAAIQAAABgAAAAUAAAA+DQAABonAADYRQAAWSkAABAAAAAmAAAACAAAAAAAAAAAAAAA"/>
               </a:ext>
             </a:extLst>
           </p:cNvSpPr>
@@ -2197,11 +2229,12 @@
           <a:lstStyle/>
           <a:p>
             <a:pPr>
-              <a:defRPr lang="en-us"/>
+              <a:defRPr lang="en-US"/>
             </a:pPr>
             <a:fld id="{30AE9EA6-E8DD-FB68-9316-1E3DD058654B}" type="slidenum">
               <a:t>‹#›</a:t>
             </a:fld>
+            <a:endParaRPr/>
           </a:p>
         </p:txBody>
       </p:sp>
@@ -2215,7 +2248,7 @@
 </file>
 
 <file path=ppt/slideLayouts/slideLayout7.xml><?xml version="1.0" encoding="utf-8"?>
-<p:sldLayout xmlns:p="http://schemas.openxmlformats.org/presentationml/2006/main" xmlns:mc="http://schemas.openxmlformats.org/markup-compatibility/2006" xmlns:p14="http://schemas.microsoft.com/office/powerpoint/2010/main" xmlns:p15="http://schemas.microsoft.com/office/powerpoint/2012/main" xmlns:r="http://schemas.openxmlformats.org/officeDocument/2006/relationships" xmlns:a="http://schemas.openxmlformats.org/drawingml/2006/main" type="blank" preserve="1">
+<p:sldLayout xmlns:a="http://schemas.openxmlformats.org/drawingml/2006/main" xmlns:r="http://schemas.openxmlformats.org/officeDocument/2006/relationships" xmlns:p="http://schemas.openxmlformats.org/presentationml/2006/main" type="blank" preserve="1">
   <p:cSld name="Blank">
     <p:spTree>
       <p:nvGrpSpPr>
@@ -2238,7 +2271,7 @@
             <a:spLocks noGrp="1" noChangeArrowheads="1"/>
             <a:extLst>
               <a:ext uri="smNativeData">
-                <pr:smNativeData xmlns:pr="smNativeData" xmlns="smNativeData" val="SMDATA_15_FLquaRMAAAAlAAAAZAAAAA0AAAAAkAAAAEgAAACQAAAASAAAAAAAAAABAAAAAAAAAAEAAABQAAAAAAAAAAAA4D8AAAAAAADgPwAAAAAAAOA/AAAAAAAA4D8AAAAAAADgPwAAAAAAAOA/AAAAAAAA4D8AAAAAAADgPwAAAAAAAOA/AAAAAAAA4D8CAAAAjAAAAAAAAAAAAAAAW5vVDP///wgAAAAAAAAAAAAAAAAAAAAAAAAAAAAAAAAAAAAAZAAAAAEAAABAAAAAAAAAAAAAAAAAAAAAAAAAAAAAAAAAAAAAAAAAAAAAAAAAAAAAAAAAAAAAAAAAAAAAAAAAAAAAAAAAAAAAAAAAAAAAAAAAAAAAAAAAAAAAAAAAAAAAFAAAADwAAAAAAAAAAAAAAAAAAAkUAAAAAQAAABQAAAAUAAAAFAAAAAEAAAAAAAAAZAAAAGQAAAAAAAAAZAAAAGQAAAAVAAAAYAAAAAAAAAAAAAAADwAAACADAAAAAAAAAAAAAAEAAACgMgAAVgcAAKr4//8BAAAAf39/AAEAAABkAAAAAAAAABQAAABAHwAAAAAAACYAAAAAAAAAwOD//wAAAAAmAAAAZAAAABYAAABMAAAAAAAAAAAAAAAEAAAAAAAAAAEAAADn5uYKAAAAACgAAAAoAAAAZAAAAGQAAAAAAAAAzMzMAAAAAABQAAAAUAAAAGQAAABkAAAAAAAAABcAAAAUAAAAAAAAAAAAAAD/fwAA/38AAAAAAAAJAAAABAAAAAAAAAAeAAAAaAAAAAAAAAAAAAAAAAAAAAAAAAAAAAAAECcAABAnAAAAAAAAAAAAAAAAAAAAAAAAAAAAAAAAAAAAAAAAAAAAABQAAAAAAAAAwMD/AAAAAABkAAAAMgAAAAAAAABkAAAAAAAAAH9/fwAKAAAAIgAAABgAAAAAAAAAAAAAAAAAAAAAAAAAAAAAAAAAAAAkAAAAJAAAAAAAAAAHAAAAAAAAAAAAAAAAAAAAAAAAAAAAAAAAAAAAf39/ACUAAABYAAAAAAAAAAAAAAAAAAAAAAAAAAAAAAAAAAAAAAAAAAAAAAAAAAAAAAAAAAAAAAA/AAAAAAAAAKCGAQAAAAAAAAAAAAAAAAAMAAAAAQAAAAAAAAAAAAAAAAAAAB8AAABUAAAAAAAABQAAAAEAAAAAAAAAAAAAAAAAAAAAAAAAAAAAAAAAAAAAAAAAAAAAAAJ/f38AAAAAA8zMzADAwP8Af39/AAAAAAAAAAAAAAAAAAAAAAAAAAAAIQAAABgAAAAUAAAAKAUAABonAAAIFgAAWSkAABAAAAAmAAAACAAAAAAAAAAAAAAA"/>
+                <pr:smNativeData xmlns="smNativeData" xmlns:pr="smNativeData" xmlns:p15="http://schemas.microsoft.com/office/powerpoint/2012/main" xmlns:p14="http://schemas.microsoft.com/office/powerpoint/2010/main" xmlns:mc="http://schemas.openxmlformats.org/markup-compatibility/2006" val="SMDATA_15_FLquaRMAAAAlAAAAZAAAAA0AAAAAkAAAAEgAAACQAAAASAAAAAAAAAABAAAAAAAAAAEAAABQAAAAAAAAAAAA4D8AAAAAAADgPwAAAAAAAOA/AAAAAAAA4D8AAAAAAADgPwAAAAAAAOA/AAAAAAAA4D8AAAAAAADgPwAAAAAAAOA/AAAAAAAA4D8CAAAAjAAAAAAAAAAAAAAAW5vVDP///wgAAAAAAAAAAAAAAAAAAAAAAAAAAAAAAAAAAAAAZAAAAAEAAABAAAAAAAAAAAAAAAAAAAAAAAAAAAAAAAAAAAAAAAAAAAAAAAAAAAAAAAAAAAAAAAAAAAAAAAAAAAAAAAAAAAAAAAAAAAAAAAAAAAAAAAAAAAAAAAAAAAAAFAAAADwAAAAAAAAAAAAAAAAAAAkUAAAAAQAAABQAAAAUAAAAFAAAAAEAAAAAAAAAZAAAAGQAAAAAAAAAZAAAAGQAAAAVAAAAYAAAAAAAAAAAAAAADwAAACADAAAAAAAAAAAAAAEAAACgMgAAVgcAAKr4//8BAAAAf39/AAEAAABkAAAAAAAAABQAAABAHwAAAAAAACYAAAAAAAAAwOD//wAAAAAmAAAAZAAAABYAAABMAAAAAAAAAAAAAAAEAAAAAAAAAAEAAADn5uYKAAAAACgAAAAoAAAAZAAAAGQAAAAAAAAAzMzMAAAAAABQAAAAUAAAAGQAAABkAAAAAAAAABcAAAAUAAAAAAAAAAAAAAD/fwAA/38AAAAAAAAJAAAABAAAAAAAAAAeAAAAaAAAAAAAAAAAAAAAAAAAAAAAAAAAAAAAECcAABAnAAAAAAAAAAAAAAAAAAAAAAAAAAAAAAAAAAAAAAAAAAAAABQAAAAAAAAAwMD/AAAAAABkAAAAMgAAAAAAAABkAAAAAAAAAH9/fwAKAAAAIgAAABgAAAAAAAAAAAAAAAAAAAAAAAAAAAAAAAAAAAAkAAAAJAAAAAAAAAAHAAAAAAAAAAAAAAAAAAAAAAAAAAAAAAAAAAAAf39/ACUAAABYAAAAAAAAAAAAAAAAAAAAAAAAAAAAAAAAAAAAAAAAAAAAAAAAAAAAAAAAAAAAAAA/AAAAAAAAAKCGAQAAAAAAAAAAAAAAAAAMAAAAAQAAAAAAAAAAAAAAAAAAAB8AAABUAAAAAAAABQAAAAEAAAAAAAAAAAAAAAAAAAAAAAAAAAAAAAAAAAAAAAAAAAAAAAJ/f38AAAAAA8zMzADAwP8Af39/AAAAAAAAAAAAAAAAAAAAAAAAAAAAIQAAABgAAAAUAAAAKAUAABonAAAIFgAAWSkAABAAAAAmAAAACAAAAAAAAAAAAAAA"/>
               </a:ext>
             </a:extLst>
           </p:cNvSpPr>
@@ -2252,11 +2285,12 @@
           <a:lstStyle/>
           <a:p>
             <a:pPr>
-              <a:defRPr lang="en-us"/>
+              <a:defRPr lang="en-US"/>
             </a:pPr>
             <a:fld id="{30AEBC3F-71DD-FB4A-9316-871FF25865D2}" type="datetime1">
-              <a:t>3/4/2026</a:t>
+              <a:t>4/21/2026</a:t>
             </a:fld>
+            <a:endParaRPr/>
           </a:p>
         </p:txBody>
       </p:sp>
@@ -2267,7 +2301,7 @@
             <a:spLocks noGrp="1" noChangeArrowheads="1"/>
             <a:extLst>
               <a:ext uri="smNativeData">
-                <pr:smNativeData xmlns:pr="smNativeData" xmlns="smNativeData" val="SMDATA_15_FLquaRMAAAAlAAAAZAAAAA0AAAAAkAAAAEgAAACQAAAASAAAAAAAAAABAAAAAAAAAAEAAABQAAAAAAAAAAAA4D8AAAAAAADgPwAAAAAAAOA/AAAAAAAA4D8AAAAAAADgPwAAAAAAAOA/AAAAAAAA4D8AAAAAAADgPwAAAAAAAOA/AAAAAAAA4D8CAAAAjAAAAAAAAAAAAAAAW5vVDP///wgAAAAAAAAAAAAAAAAAAAAAAAAAAAAAAAAAAAAAZAAAAAEAAABAAAAAAAAAAAAAAAAAAAAAAAAAAAAAAAAAAAAAAAAAAAAAAAAAAAAAAAAAAAAAAAAAAAAAAAAAAAAAAAAAAAAAAAAAAAAAAAAAAAAAAAAAAAAAAAAAAAAAFAAAADwAAAAAAAAAAAAAAAAAAAkUAAAAAQAAABQAAAAUAAAAFAAAAAEAAAAAAAAAZAAAAGQAAAAAAAAAZAAAAGQAAAAVAAAAYAAAAAAAAAAAAAAADwAAACADAAAAAAAAAAAAAAEAAACgMgAAVgcAAKr4//8BAAAAf39/AAEAAABkAAAAAAAAABQAAABAHwAAAAAAACYAAAAAAAAAwOD//wAAAAAmAAAAZAAAABYAAABMAAAAAAAAAAAAAAAEAAAAAAAAAAEAAADn5uYKAAAAACgAAAAoAAAAZAAAAGQAAAAAAAAAzMzMAAAAAABQAAAAUAAAAGQAAABkAAAAAAAAABcAAAAUAAAAAAAAAAAAAAD/fwAA/38AAAAAAAAJAAAABAAAAJ/J8f8eAAAAaAAAAAAAAAAAAAAAAAAAAAAAAAAAAAAAECcAABAnAAAAAAAAAAAAAAAAAAAAAAAAAAAAAAAAAAAAAAAAAAAAABQAAAAAAAAAwMD/AAAAAABkAAAAMgAAAAAAAABkAAAAAAAAAH9/fwAKAAAAIgAAABgAAAAAAAAAAAAAAAAAAAAAAAAAAAAAAAAAAAAkAAAAJAAAAAAAAAAHAAAAAAAAAAAAAAAAAAAAAAAAAAAAAAAAAAAAf39/ACUAAABYAAAAAAAAAAAAAAAAAAAAAAAAAAAAAAAAAAAAAAAAAAAAAAAAAAAAAAAAAAAAAAA/AAAAAAAAAKCGAQAAAAAAAAAAAAAAAAAMAAAAAQAAAAAAAAAAAAAAAAAAAB8AAABUAAAAAAAABQAAAAEAAAAAAAAAAAAAAAAAAAAAAAAAAAAAAAAAAAAAAAAAAAAAAAJ/f38AAAAAA8zMzADAwP8Af39/AAAAAAAAAAAAAAAAAAAAAAAAAAAAIQAAABgAAAAUAAAA2BgAABonAAAoMgAAWSkAABAAAAAmAAAACAAAAAAAAAAAAAAA"/>
+                <pr:smNativeData xmlns="smNativeData" xmlns:pr="smNativeData" xmlns:p15="http://schemas.microsoft.com/office/powerpoint/2012/main" xmlns:p14="http://schemas.microsoft.com/office/powerpoint/2010/main" xmlns:mc="http://schemas.openxmlformats.org/markup-compatibility/2006" val="SMDATA_15_FLquaRMAAAAlAAAAZAAAAA0AAAAAkAAAAEgAAACQAAAASAAAAAAAAAABAAAAAAAAAAEAAABQAAAAAAAAAAAA4D8AAAAAAADgPwAAAAAAAOA/AAAAAAAA4D8AAAAAAADgPwAAAAAAAOA/AAAAAAAA4D8AAAAAAADgPwAAAAAAAOA/AAAAAAAA4D8CAAAAjAAAAAAAAAAAAAAAW5vVDP///wgAAAAAAAAAAAAAAAAAAAAAAAAAAAAAAAAAAAAAZAAAAAEAAABAAAAAAAAAAAAAAAAAAAAAAAAAAAAAAAAAAAAAAAAAAAAAAAAAAAAAAAAAAAAAAAAAAAAAAAAAAAAAAAAAAAAAAAAAAAAAAAAAAAAAAAAAAAAAAAAAAAAAFAAAADwAAAAAAAAAAAAAAAAAAAkUAAAAAQAAABQAAAAUAAAAFAAAAAEAAAAAAAAAZAAAAGQAAAAAAAAAZAAAAGQAAAAVAAAAYAAAAAAAAAAAAAAADwAAACADAAAAAAAAAAAAAAEAAACgMgAAVgcAAKr4//8BAAAAf39/AAEAAABkAAAAAAAAABQAAABAHwAAAAAAACYAAAAAAAAAwOD//wAAAAAmAAAAZAAAABYAAABMAAAAAAAAAAAAAAAEAAAAAAAAAAEAAADn5uYKAAAAACgAAAAoAAAAZAAAAGQAAAAAAAAAzMzMAAAAAABQAAAAUAAAAGQAAABkAAAAAAAAABcAAAAUAAAAAAAAAAAAAAD/fwAA/38AAAAAAAAJAAAABAAAAJ/J8f8eAAAAaAAAAAAAAAAAAAAAAAAAAAAAAAAAAAAAECcAABAnAAAAAAAAAAAAAAAAAAAAAAAAAAAAAAAAAAAAAAAAAAAAABQAAAAAAAAAwMD/AAAAAABkAAAAMgAAAAAAAABkAAAAAAAAAH9/fwAKAAAAIgAAABgAAAAAAAAAAAAAAAAAAAAAAAAAAAAAAAAAAAAkAAAAJAAAAAAAAAAHAAAAAAAAAAAAAAAAAAAAAAAAAAAAAAAAAAAAf39/ACUAAABYAAAAAAAAAAAAAAAAAAAAAAAAAAAAAAAAAAAAAAAAAAAAAAAAAAAAAAAAAAAAAAA/AAAAAAAAAKCGAQAAAAAAAAAAAAAAAAAMAAAAAQAAAAAAAAAAAAAAAAAAAB8AAABUAAAAAAAABQAAAAEAAAAAAAAAAAAAAAAAAAAAAAAAAAAAAAAAAAAAAAAAAAAAAAJ/f38AAAAAA8zMzADAwP8Af39/AAAAAAAAAAAAAAAAAAAAAAAAAAAAIQAAABgAAAAUAAAA2BgAABonAAAoMgAAWSkAABAAAAAmAAAACAAAAAAAAAAAAAAA"/>
               </a:ext>
             </a:extLst>
           </p:cNvSpPr>
@@ -2281,8 +2315,9 @@
           <a:lstStyle/>
           <a:p>
             <a:pPr>
-              <a:defRPr lang="en-us"/>
-            </a:pPr>
+              <a:defRPr lang="en-US"/>
+            </a:pPr>
+            <a:endParaRPr/>
           </a:p>
         </p:txBody>
       </p:sp>
@@ -2293,7 +2328,7 @@
             <a:spLocks noGrp="1" noChangeArrowheads="1"/>
             <a:extLst>
               <a:ext uri="smNativeData">
-                <pr:smNativeData xmlns:pr="smNativeData" xmlns="smNativeData" val="SMDATA_15_FLquaRMAAAAlAAAAZAAAAA0AAAAAkAAAAEgAAACQAAAASAAAAAAAAAABAAAAAAAAAAEAAABQAAAAAAAAAAAA4D8AAAAAAADgPwAAAAAAAOA/AAAAAAAA4D8AAAAAAADgPwAAAAAAAOA/AAAAAAAA4D8AAAAAAADgPwAAAAAAAOA/AAAAAAAA4D8CAAAAjAAAAAAAAAAAAAAAW5vVDP///wgAAAAAAAAAAAAAAAAAAAAAAAAAAAAAAAAAAAAAZAAAAAEAAABAAAAAAAAAAAAAAAAAAAAAAAAAAAAAAAAAAAAAAAAAAAAAAAAAAAAAAAAAAAAAAAAAAAAAAAAAAAAAAAAAAAAAAAAAAAAAAAAAAAAAAAAAAAAAAAAAAAAAFAAAADwAAAAAAAAAAAAAAAAAAAkUAAAAAQAAABQAAAAUAAAAFAAAAAEAAAAAAAAAZAAAAGQAAAAAAAAAZAAAAGQAAAAVAAAAYAAAAAAAAAAAAAAADwAAACADAAAAAAAAAAAAAAEAAACgMgAAVgcAAKr4//8BAAAAf39/AAEAAABkAAAAAAAAABQAAABAHwAAAAAAACYAAAAAAAAAwOD//wAAAAAmAAAAZAAAABYAAABMAAAAAAAAAAAAAAAEAAAAAAAAAAEAAADn5uYKAAAAACgAAAAoAAAAZAAAAGQAAAAAAAAAzMzMAAAAAABQAAAAUAAAAGQAAABkAAAAAAAAABcAAAAUAAAAAAAAAAAAAAD/fwAA/38AAAAAAAAJAAAABAAAAAAAAAAeAAAAaAAAAAAAAAAAAAAAAAAAAAAAAAAAAAAAECcAABAnAAAAAAAAAAAAAAAAAAAAAAAAAAAAAAAAAAAAAAAAAAAAABQAAAAAAAAAwMD/AAAAAABkAAAAMgAAAAAAAABkAAAAAAAAAH9/fwAKAAAAIgAAABgAAAAAAAAAAAAAAAAAAAAAAAAAAAAAAAAAAAAkAAAAJAAAAAAAAAAHAAAAAAAAAAAAAAAAAAAAAAAAAAAAAAAAAAAAf39/ACUAAABYAAAAAAAAAAAAAAAAAAAAAAAAAAAAAAAAAAAAAAAAAAAAAAAAAAAAAAAAAAAAAAA/AAAAAAAAAKCGAQAAAAAAAAAAAAAAAAAMAAAAAQAAAAAAAAAAAAAAAAAAAB8AAABUAAAAAAAABQAAAAEAAAAAAAAAAAAAAAAAAAAAAAAAAAAAAAAAAAAAAAAAAAAAAAJ/f38AAAAAA8zMzADAwP8Af39/AAAAAAAAAAAAAAAAAAAAAAAAAAAAIQAAABgAAAAUAAAA+DQAABonAADYRQAAWSkAABAAAAAmAAAACAAAAAAAAAAAAAAA"/>
+                <pr:smNativeData xmlns="smNativeData" xmlns:pr="smNativeData" xmlns:p15="http://schemas.microsoft.com/office/powerpoint/2012/main" xmlns:p14="http://schemas.microsoft.com/office/powerpoint/2010/main" xmlns:mc="http://schemas.openxmlformats.org/markup-compatibility/2006" val="SMDATA_15_FLquaRMAAAAlAAAAZAAAAA0AAAAAkAAAAEgAAACQAAAASAAAAAAAAAABAAAAAAAAAAEAAABQAAAAAAAAAAAA4D8AAAAAAADgPwAAAAAAAOA/AAAAAAAA4D8AAAAAAADgPwAAAAAAAOA/AAAAAAAA4D8AAAAAAADgPwAAAAAAAOA/AAAAAAAA4D8CAAAAjAAAAAAAAAAAAAAAW5vVDP///wgAAAAAAAAAAAAAAAAAAAAAAAAAAAAAAAAAAAAAZAAAAAEAAABAAAAAAAAAAAAAAAAAAAAAAAAAAAAAAAAAAAAAAAAAAAAAAAAAAAAAAAAAAAAAAAAAAAAAAAAAAAAAAAAAAAAAAAAAAAAAAAAAAAAAAAAAAAAAAAAAAAAAFAAAADwAAAAAAAAAAAAAAAAAAAkUAAAAAQAAABQAAAAUAAAAFAAAAAEAAAAAAAAAZAAAAGQAAAAAAAAAZAAAAGQAAAAVAAAAYAAAAAAAAAAAAAAADwAAACADAAAAAAAAAAAAAAEAAACgMgAAVgcAAKr4//8BAAAAf39/AAEAAABkAAAAAAAAABQAAABAHwAAAAAAACYAAAAAAAAAwOD//wAAAAAmAAAAZAAAABYAAABMAAAAAAAAAAAAAAAEAAAAAAAAAAEAAADn5uYKAAAAACgAAAAoAAAAZAAAAGQAAAAAAAAAzMzMAAAAAABQAAAAUAAAAGQAAABkAAAAAAAAABcAAAAUAAAAAAAAAAAAAAD/fwAA/38AAAAAAAAJAAAABAAAAAAAAAAeAAAAaAAAAAAAAAAAAAAAAAAAAAAAAAAAAAAAECcAABAnAAAAAAAAAAAAAAAAAAAAAAAAAAAAAAAAAAAAAAAAAAAAABQAAAAAAAAAwMD/AAAAAABkAAAAMgAAAAAAAABkAAAAAAAAAH9/fwAKAAAAIgAAABgAAAAAAAAAAAAAAAAAAAAAAAAAAAAAAAAAAAAkAAAAJAAAAAAAAAAHAAAAAAAAAAAAAAAAAAAAAAAAAAAAAAAAAAAAf39/ACUAAABYAAAAAAAAAAAAAAAAAAAAAAAAAAAAAAAAAAAAAAAAAAAAAAAAAAAAAAAAAAAAAAA/AAAAAAAAAKCGAQAAAAAAAAAAAAAAAAAMAAAAAQAAAAAAAAAAAAAAAAAAAB8AAABUAAAAAAAABQAAAAEAAAAAAAAAAAAAAAAAAAAAAAAAAAAAAAAAAAAAAAAAAAAAAAJ/f38AAAAAA8zMzADAwP8Af39/AAAAAAAAAAAAAAAAAAAAAAAAAAAAIQAAABgAAAAUAAAA+DQAABonAADYRQAAWSkAABAAAAAmAAAACAAAAAAAAAAAAAAA"/>
               </a:ext>
             </a:extLst>
           </p:cNvSpPr>
@@ -2307,11 +2342,12 @@
           <a:lstStyle/>
           <a:p>
             <a:pPr>
-              <a:defRPr lang="en-us"/>
+              <a:defRPr lang="en-US"/>
             </a:pPr>
             <a:fld id="{30AE985E-10DD-FB6E-9316-E63BD65865B3}" type="slidenum">
               <a:t>‹#›</a:t>
             </a:fld>
+            <a:endParaRPr/>
           </a:p>
         </p:txBody>
       </p:sp>
@@ -2325,7 +2361,7 @@
 </file>
 
 <file path=ppt/slideLayouts/slideLayout8.xml><?xml version="1.0" encoding="utf-8"?>
-<p:sldLayout xmlns:p="http://schemas.openxmlformats.org/presentationml/2006/main" xmlns:mc="http://schemas.openxmlformats.org/markup-compatibility/2006" xmlns:p14="http://schemas.microsoft.com/office/powerpoint/2010/main" xmlns:p15="http://schemas.microsoft.com/office/powerpoint/2012/main" xmlns:r="http://schemas.openxmlformats.org/officeDocument/2006/relationships" xmlns:a="http://schemas.openxmlformats.org/drawingml/2006/main" type="objTx" preserve="1">
+<p:sldLayout xmlns:a="http://schemas.openxmlformats.org/drawingml/2006/main" xmlns:r="http://schemas.openxmlformats.org/officeDocument/2006/relationships" xmlns:p="http://schemas.openxmlformats.org/presentationml/2006/main" type="objTx" preserve="1">
   <p:cSld name="Content with Caption">
     <p:spTree>
       <p:nvGrpSpPr>
@@ -2348,7 +2384,7 @@
             <a:spLocks noGrp="1" noChangeArrowheads="1"/>
             <a:extLst>
               <a:ext uri="smNativeData">
-                <pr:smNativeData xmlns:pr="smNativeData" xmlns="smNativeData" val="SMDATA_15_FLquaRMAAAAlAAAAZAAAAA0AAAAAkAAAAEgAAACQAAAASAAAAAAAAAACAAAAAAAAAAEAAABQAAAAAAAAAAAA4D8AAAAAAADgPwAAAAAAAOA/AAAAAAAA4D8AAAAAAADgPwAAAAAAAOA/AAAAAAAA4D8AAAAAAADgPwAAAAAAAOA/AAAAAAAA4D8CAAAAjAAAAAAAAAAAAAAAW5vVDP///wgAAAAAAAAAAAAAAAAAAAAAAAAAAAAAAAAAAAAAZAAAAAEAAABAAAAAAAAAAAAAAAAAAAAAAAAAAAAAAAAAAAAAAAAAAAAAAAAAAAAAAAAAAAAAAAAAAAAAAAAAAAAAAAAAAAAAAAAAAAAAAAAAAAAAAAAAAAAAAAAAAAAAFAAAADwAAAAAAAAAAAAAAAAAAAkUAAAAAQAAABQAAAAUAAAAFAAAAAEAAAAAAAAAZAAAAGQAAAAAAAAAZAAAAGQAAAAVAAAAYAAAAAAAAAAAAAAADwAAACADAAAAAAAAAAAAAAEAAACgMgAAVgcAAKr4//8BAAAAf39/AAEAAABkAAAAAAAAABQAAABAHwAAAAAAACYAAAAAAAAAwOD//wAAAAAmAAAAZAAAABYAAABMAAAAAAAAAAAAAAAEAAAAAAAAAAEAAADn5uYKAAAAACgAAAAoAAAAZAAAAGQAAAAAAAAAzMzMAAAAAABQAAAAUAAAAGQAAABkAAAAAAAAABcAAAAUAAAAAAAAAAAAAAD/fwAA/38AAAAAAAAJAAAABAAAAAAAAAAeAAAAaAAAAAAAAAAAAAAAAAAAAAAAAAAAAAAAECcAABAnAAAAAAAAAAAAAAAAAAAAAAAAAAAAAAAAAAAAAAAAAAAAABQAAAAAAAAAwMD/AAAAAABkAAAAMgAAAAAAAABkAAAAAAAAAH9/fwAKAAAAIgAAABgAAAAAAAAAAAAAAAAAAAAAAAAAAAAAAAAAAAAkAAAAJAAAAAAAAAAHAAAAAAAAAAAAAAAAAAAAAAAAAAAAAAAAAAAAf39/ACUAAABYAAAAAAAAAAAAAAAAAAAAAAAAAAAAAAAAAAAAAAAAAAAAAAAAAAAAAAAAAAAAAAA/AAAAAAAAAKCGAQAAAAAAAAAAAAAAAAAMAAAAAQAAAAAAAAAAAAAAAAAAAB8AAABUAAAAAAAABQAAAAEAAAAAAAAAAAAAAAAAAAAAAAAAAAAAAAAAAAAAAAAAAAAAAAJ/f38AAAAAA8zMzADAwP8Af39/AAAAAAAAAAAAAAAAAAAAAAAAAAAAIQAAABgAAAAUAAAAKwUAANACAABbHQAAqAwAABAAAAAmAAAACAAAAIGAAAAAAAAA"/>
+                <pr:smNativeData xmlns="smNativeData" xmlns:pr="smNativeData" xmlns:p15="http://schemas.microsoft.com/office/powerpoint/2012/main" xmlns:p14="http://schemas.microsoft.com/office/powerpoint/2010/main" xmlns:mc="http://schemas.openxmlformats.org/markup-compatibility/2006" val="SMDATA_15_FLquaRMAAAAlAAAAZAAAAA0AAAAAkAAAAEgAAACQAAAASAAAAAAAAAACAAAAAAAAAAEAAABQAAAAAAAAAAAA4D8AAAAAAADgPwAAAAAAAOA/AAAAAAAA4D8AAAAAAADgPwAAAAAAAOA/AAAAAAAA4D8AAAAAAADgPwAAAAAAAOA/AAAAAAAA4D8CAAAAjAAAAAAAAAAAAAAAW5vVDP///wgAAAAAAAAAAAAAAAAAAAAAAAAAAAAAAAAAAAAAZAAAAAEAAABAAAAAAAAAAAAAAAAAAAAAAAAAAAAAAAAAAAAAAAAAAAAAAAAAAAAAAAAAAAAAAAAAAAAAAAAAAAAAAAAAAAAAAAAAAAAAAAAAAAAAAAAAAAAAAAAAAAAAFAAAADwAAAAAAAAAAAAAAAAAAAkUAAAAAQAAABQAAAAUAAAAFAAAAAEAAAAAAAAAZAAAAGQAAAAAAAAAZAAAAGQAAAAVAAAAYAAAAAAAAAAAAAAADwAAACADAAAAAAAAAAAAAAEAAACgMgAAVgcAAKr4//8BAAAAf39/AAEAAABkAAAAAAAAABQAAABAHwAAAAAAACYAAAAAAAAAwOD//wAAAAAmAAAAZAAAABYAAABMAAAAAAAAAAAAAAAEAAAAAAAAAAEAAADn5uYKAAAAACgAAAAoAAAAZAAAAGQAAAAAAAAAzMzMAAAAAABQAAAAUAAAAGQAAABkAAAAAAAAABcAAAAUAAAAAAAAAAAAAAD/fwAA/38AAAAAAAAJAAAABAAAAAAAAAAeAAAAaAAAAAAAAAAAAAAAAAAAAAAAAAAAAAAAECcAABAnAAAAAAAAAAAAAAAAAAAAAAAAAAAAAAAAAAAAAAAAAAAAABQAAAAAAAAAwMD/AAAAAABkAAAAMgAAAAAAAABkAAAAAAAAAH9/fwAKAAAAIgAAABgAAAAAAAAAAAAAAAAAAAAAAAAAAAAAAAAAAAAkAAAAJAAAAAAAAAAHAAAAAAAAAAAAAAAAAAAAAAAAAAAAAAAAAAAAf39/ACUAAABYAAAAAAAAAAAAAAAAAAAAAAAAAAAAAAAAAAAAAAAAAAAAAAAAAAAAAAAAAAAAAAA/AAAAAAAAAKCGAQAAAAAAAAAAAAAAAAAMAAAAAQAAAAAAAAAAAAAAAAAAAB8AAABUAAAAAAAABQAAAAEAAAAAAAAAAAAAAAAAAAAAAAAAAAAAAAAAAAAAAAAAAAAAAAJ/f38AAAAAA8zMzADAwP8Af39/AAAAAAAAAAAAAAAAAAAAAAAAAAAAIQAAABgAAAAUAAAAKwUAANACAABbHQAAqAwAABAAAAAmAAAACAAAAIGAAAAAAAAA"/>
               </a:ext>
             </a:extLst>
           </p:cNvSpPr>
@@ -2370,36 +2406,36 @@
           </a:bodyPr>
           <a:lstStyle>
             <a:lvl1pPr>
-              <a:defRPr lang="en-us" sz="3200" cap="none"/>
+              <a:defRPr lang="en-US" sz="3200" cap="none"/>
             </a:lvl1pPr>
             <a:lvl2pPr>
-              <a:defRPr lang="en-us"/>
+              <a:defRPr lang="en-US"/>
             </a:lvl2pPr>
             <a:lvl3pPr>
-              <a:defRPr lang="en-us"/>
+              <a:defRPr lang="en-US"/>
             </a:lvl3pPr>
             <a:lvl4pPr>
-              <a:defRPr lang="en-us"/>
+              <a:defRPr lang="en-US"/>
             </a:lvl4pPr>
             <a:lvl5pPr>
-              <a:defRPr lang="en-us"/>
+              <a:defRPr lang="en-US"/>
             </a:lvl5pPr>
             <a:lvl6pPr>
-              <a:defRPr lang="en-us"/>
+              <a:defRPr lang="en-US"/>
             </a:lvl6pPr>
             <a:lvl7pPr>
-              <a:defRPr lang="en-us"/>
+              <a:defRPr lang="en-US"/>
             </a:lvl7pPr>
             <a:lvl8pPr>
-              <a:defRPr lang="en-us"/>
+              <a:defRPr lang="en-US"/>
             </a:lvl8pPr>
             <a:lvl9pPr>
-              <a:defRPr lang="en-us"/>
+              <a:defRPr lang="en-US"/>
             </a:lvl9pPr>
           </a:lstStyle>
           <a:p>
             <a:pPr>
-              <a:defRPr lang="en-us"/>
+              <a:defRPr lang="en-US"/>
             </a:pPr>
             <a:r>
               <a:t>Click to edit Master title style</a:t>
@@ -2414,7 +2450,7 @@
             <a:spLocks noGrp="1" noChangeArrowheads="1"/>
             <a:extLst>
               <a:ext uri="smNativeData">
-                <pr:smNativeData xmlns:pr="smNativeData" xmlns="smNativeData" val="SMDATA_15_FLquaRMAAAAlAAAAZAAAAA0AAAAAkAAAAEgAAACQAAAASAAAAAAAAAAAAAAAAAAAAAEAAABQAAAAAAAAAAAA4D8AAAAAAADgPwAAAAAAAOA/AAAAAAAA4D8AAAAAAADgPwAAAAAAAOA/AAAAAAAA4D8AAAAAAADgPwAAAAAAAOA/AAAAAAAA4D8CAAAAjAAAAAAAAAAAAAAAW5vVDP///wgAAAAAAAAAAAAAAAAAAAAAAAAAAAAAAAAAAAAAZAAAAAEAAABAAAAAAAAAAAAAAAAAAAAAAAAAAAAAAAAAAAAAAAAAAAAAAAAAAAAAAAAAAAAAAAAAAAAAAAAAAAAAAAAAAAAAAAAAAAAAAAAAAAAAAAAAAAAAAAAAAAAAFAAAADwAAAAAAAAAAAAAAAAAAAkUAAAAAQAAABQAAAAUAAAAFAAAAAEAAAAAAAAAZAAAAGQAAAAAAAAAZAAAAGQAAAAVAAAAYAAAAAAAAAAAAAAADwAAACADAAAAAAAAAAAAAAEAAACgMgAAVgcAAKr4//8BAAAAf39/AAEAAABkAAAAAAAAABQAAABAHwAAAAAAACYAAAAAAAAAwOD//wAAAAAmAAAAZAAAABYAAABMAAAAAAAAAAAAAAAEAAAAAAAAAAEAAADn5uYKAAAAACgAAAAoAAAAZAAAAGQAAAAAAAAAzMzMAAAAAABQAAAAUAAAAGQAAABkAAAAAAAAABcAAAAUAAAAAAAAAAAAAAD/fwAA/38AAAAAAAAJAAAABAAAAAAAAAAeAAAAaAAAAAAAAAAAAAAAAAAAAAAAAAAAAAAAECcAABAnAAAAAAAAAAAAAAAAAAAAAAAAAAAAAAAAAAAAAAAAAAAAABQAAAAAAAAAwMD/AAAAAABkAAAAMgAAAAAAAABkAAAAAAAAAH9/fwAKAAAAIgAAABgAAAAAAAAAAAAAAAAAAAAAAAAAAAAAAAAAAAAkAAAAJAAAAAAAAAAHAAAAAAAAAAAAAAAAAAAAAAAAAAAAAAAAAAAAf39/ACUAAABYAAAAAAAAAAAAAAAAAAAAAAAAAAAAAAAAAAAAAAAAAAAAAAAAAAAAAAAAAAAAAAA/AAAAAAAAAKCGAQAAAAAAAAAAAAAAAAAMAAAAAQAAAAAAAAAAAAAAAAAAAB8AAABUAAAAAAAABQAAAAEAAAAAAAAAAAAAAAAAAAAAAAAAAAAAAAAAAAAAAAAAAAAAAAJ/f38AAAAAA8zMzADAwP8Af39/AAAAAAAAAAAAAAAAAAAAAAAAAAAAIQAAABgAAAAUAAAA4x8AABMGAADbRQAADiQAABAAAAAmAAAACAAAAAGAAAAAAAAA"/>
+                <pr:smNativeData xmlns="smNativeData" xmlns:pr="smNativeData" xmlns:p15="http://schemas.microsoft.com/office/powerpoint/2012/main" xmlns:p14="http://schemas.microsoft.com/office/powerpoint/2010/main" xmlns:mc="http://schemas.openxmlformats.org/markup-compatibility/2006" val="SMDATA_15_FLquaRMAAAAlAAAAZAAAAA0AAAAAkAAAAEgAAACQAAAASAAAAAAAAAAAAAAAAAAAAAEAAABQAAAAAAAAAAAA4D8AAAAAAADgPwAAAAAAAOA/AAAAAAAA4D8AAAAAAADgPwAAAAAAAOA/AAAAAAAA4D8AAAAAAADgPwAAAAAAAOA/AAAAAAAA4D8CAAAAjAAAAAAAAAAAAAAAW5vVDP///wgAAAAAAAAAAAAAAAAAAAAAAAAAAAAAAAAAAAAAZAAAAAEAAABAAAAAAAAAAAAAAAAAAAAAAAAAAAAAAAAAAAAAAAAAAAAAAAAAAAAAAAAAAAAAAAAAAAAAAAAAAAAAAAAAAAAAAAAAAAAAAAAAAAAAAAAAAAAAAAAAAAAAFAAAADwAAAAAAAAAAAAAAAAAAAkUAAAAAQAAABQAAAAUAAAAFAAAAAEAAAAAAAAAZAAAAGQAAAAAAAAAZAAAAGQAAAAVAAAAYAAAAAAAAAAAAAAADwAAACADAAAAAAAAAAAAAAEAAACgMgAAVgcAAKr4//8BAAAAf39/AAEAAABkAAAAAAAAABQAAABAHwAAAAAAACYAAAAAAAAAwOD//wAAAAAmAAAAZAAAABYAAABMAAAAAAAAAAAAAAAEAAAAAAAAAAEAAADn5uYKAAAAACgAAAAoAAAAZAAAAGQAAAAAAAAAzMzMAAAAAABQAAAAUAAAAGQAAABkAAAAAAAAABcAAAAUAAAAAAAAAAAAAAD/fwAA/38AAAAAAAAJAAAABAAAAAAAAAAeAAAAaAAAAAAAAAAAAAAAAAAAAAAAAAAAAAAAECcAABAnAAAAAAAAAAAAAAAAAAAAAAAAAAAAAAAAAAAAAAAAAAAAABQAAAAAAAAAwMD/AAAAAABkAAAAMgAAAAAAAABkAAAAAAAAAH9/fwAKAAAAIgAAABgAAAAAAAAAAAAAAAAAAAAAAAAAAAAAAAAAAAAkAAAAJAAAAAAAAAAHAAAAAAAAAAAAAAAAAAAAAAAAAAAAAAAAAAAAf39/ACUAAABYAAAAAAAAAAAAAAAAAAAAAAAAAAAAAAAAAAAAAAAAAAAAAAAAAAAAAAAAAAAAAAA/AAAAAAAAAKCGAQAAAAAAAAAAAAAAAAAMAAAAAQAAAAAAAAAAAAAAAAAAAB8AAABUAAAAAAAABQAAAAEAAAAAAAAAAAAAAAAAAAAAAAAAAAAAAAAAAAAAAAAAAAAAAAJ/f38AAAAAA8zMzADAwP8Af39/AAAAAAAAAAAAAAAAAAAAAAAAAAAAIQAAABgAAAAUAAAA4x8AABMGAADbRQAADiQAABAAAAAmAAAACAAAAAGAAAAAAAAA"/>
               </a:ext>
             </a:extLst>
           </p:cNvSpPr>
@@ -2432,36 +2468,36 @@
           <a:bodyPr/>
           <a:lstStyle>
             <a:lvl1pPr>
-              <a:defRPr lang="en-us" sz="3200" cap="none"/>
+              <a:defRPr lang="en-US" sz="3200" cap="none"/>
             </a:lvl1pPr>
             <a:lvl2pPr>
-              <a:defRPr lang="en-us" sz="2800" cap="none"/>
+              <a:defRPr lang="en-US" sz="2800" cap="none"/>
             </a:lvl2pPr>
             <a:lvl3pPr>
-              <a:defRPr lang="en-us" sz="2400" cap="none"/>
+              <a:defRPr lang="en-US" sz="2400" cap="none"/>
             </a:lvl3pPr>
             <a:lvl4pPr>
-              <a:defRPr lang="en-us" sz="2000" cap="none"/>
+              <a:defRPr lang="en-US" sz="2000" cap="none"/>
             </a:lvl4pPr>
             <a:lvl5pPr>
-              <a:defRPr lang="en-us" sz="2000" cap="none"/>
+              <a:defRPr lang="en-US" sz="2000" cap="none"/>
             </a:lvl5pPr>
             <a:lvl6pPr>
-              <a:defRPr lang="en-us" sz="2000" cap="none"/>
+              <a:defRPr lang="en-US" sz="2000" cap="none"/>
             </a:lvl6pPr>
             <a:lvl7pPr>
-              <a:defRPr lang="en-us" sz="2000" cap="none"/>
+              <a:defRPr lang="en-US" sz="2000" cap="none"/>
             </a:lvl7pPr>
             <a:lvl8pPr>
-              <a:defRPr lang="en-us" sz="2000" cap="none"/>
+              <a:defRPr lang="en-US" sz="2000" cap="none"/>
             </a:lvl8pPr>
             <a:lvl9pPr>
-              <a:defRPr lang="en-us" sz="2000" cap="none"/>
+              <a:defRPr lang="en-US" sz="2000" cap="none"/>
             </a:lvl9pPr>
           </a:lstStyle>
           <a:p>
             <a:pPr>
-              <a:defRPr lang="en-us"/>
+              <a:defRPr lang="en-US"/>
             </a:pPr>
             <a:r>
               <a:t>Click to edit Master text styles</a:t>
@@ -2469,7 +2505,7 @@
           </a:p>
           <a:p>
             <a:pPr lvl="1">
-              <a:defRPr lang="en-us"/>
+              <a:defRPr lang="en-US"/>
             </a:pPr>
             <a:r>
               <a:t>Second level</a:t>
@@ -2477,7 +2513,7 @@
           </a:p>
           <a:p>
             <a:pPr lvl="2">
-              <a:defRPr lang="en-us"/>
+              <a:defRPr lang="en-US"/>
             </a:pPr>
             <a:r>
               <a:t>Third level</a:t>
@@ -2485,7 +2521,7 @@
           </a:p>
           <a:p>
             <a:pPr lvl="3">
-              <a:defRPr lang="en-us"/>
+              <a:defRPr lang="en-US"/>
             </a:pPr>
             <a:r>
               <a:t>Fourth level</a:t>
@@ -2493,7 +2529,7 @@
           </a:p>
           <a:p>
             <a:pPr lvl="4">
-              <a:defRPr lang="en-us"/>
+              <a:defRPr lang="en-US"/>
             </a:pPr>
             <a:r>
               <a:t>Fifth level</a:t>
@@ -2508,7 +2544,7 @@
             <a:spLocks noGrp="1" noChangeArrowheads="1"/>
             <a:extLst>
               <a:ext uri="smNativeData">
-                <pr:smNativeData xmlns:pr="smNativeData" xmlns="smNativeData" val="SMDATA_15_FLquaRMAAAAlAAAAZAAAAA0AAAAAkAAAAEgAAACQAAAASAAAAAAAAAAAAAAAAAAAAAEAAABQAAAAAAAAAAAA4D8AAAAAAADgPwAAAAAAAOA/AAAAAAAA4D8AAAAAAADgPwAAAAAAAOA/AAAAAAAA4D8AAAAAAADgPwAAAAAAAOA/AAAAAAAA4D8CAAAAjAAAAAAAAAAAAAAAW5vVDP///wgAAAAAAAAAAAAAAAAAAAAAAAAAAAAAAAAAAAAAZAAAAAEAAABAAAAAAAAAAAAAAAAAAAAAAAAAAAAAAAAAAAAAAAAAAAAAAAAAAAAAAAAAAAAAAAAAAAAAAAAAAAAAAAAAAAAAAAAAAAAAAAAAAAAAAAAAAAAAAAAAAAAAFAAAADwAAAAAAAAAAAAAAAAAAAkUAAAAAQAAABQAAAAUAAAAFAAAAAEAAAAAAAAAZAAAAGQAAAAAAAAAZAAAAGQAAAAVAAAAYAAAAAAAAAAAAAAADwAAACADAAAAAAAAAAAAAAEAAACgMgAAVgcAAKr4//8BAAAAf39/AAEAAABkAAAAAAAAABQAAABAHwAAAAAAACYAAAAAAAAAwOD//wAAAAAmAAAAZAAAABYAAABMAAAAAAAAAAAAAAAEAAAAAAAAAAEAAADn5uYKAAAAACgAAAAoAAAAZAAAAGQAAAAAAAAAzMzMAAAAAABQAAAAUAAAAGQAAABkAAAAAAAAABcAAAAUAAAAAAAAAAAAAAD/fwAA/38AAAAAAAAJAAAABAAAAAAAAAAeAAAAaAAAAAAAAAAAAAAAAAAAAAAAAAAAAAAAECcAABAnAAAAAAAAAAAAAAAAAAAAAAAAAAAAAAAAAAAAAAAAAAAAABQAAAAAAAAAwMD/AAAAAABkAAAAMgAAAAAAAABkAAAAAAAAAH9/fwAKAAAAIgAAABgAAAAAAAAAAAAAAAAAAAAAAAAAAAAAAAAAAAAkAAAAJAAAAAAAAAAHAAAAAAAAAAAAAAAAAAAAAAAAAAAAAAAAAAAAf39/ACUAAABYAAAAAAAAAAAAAAAAAAAAAAAAAAAAAAAAAAAAAAAAAAAAAAAAAAAAAAAAAAAAAAA/AAAAAAAAAKCGAQAAAAAAAAAAAAAAAAAMAAAAAQAAAAAAAAAAAAAAAAAAAB8AAABUAAAAAAAABQAAAAEAAAAAAAAAAAAAAAAAAAAAAAAAAAAAAAAAAAAAAAAAAAAAAAJ/f38AAAAAA8zMzADAwP8Af39/AAAAAAAAAAAAAAAAAAAAAAAAAAAAIQAAABgAAAAUAAAAKwUAAKgMAABbHQAAGyQAABAAAAAmAAAACAAAAAGAAAAAAAAA"/>
+                <pr:smNativeData xmlns="smNativeData" xmlns:pr="smNativeData" xmlns:p15="http://schemas.microsoft.com/office/powerpoint/2012/main" xmlns:p14="http://schemas.microsoft.com/office/powerpoint/2010/main" xmlns:mc="http://schemas.openxmlformats.org/markup-compatibility/2006" val="SMDATA_15_FLquaRMAAAAlAAAAZAAAAA0AAAAAkAAAAEgAAACQAAAASAAAAAAAAAAAAAAAAAAAAAEAAABQAAAAAAAAAAAA4D8AAAAAAADgPwAAAAAAAOA/AAAAAAAA4D8AAAAAAADgPwAAAAAAAOA/AAAAAAAA4D8AAAAAAADgPwAAAAAAAOA/AAAAAAAA4D8CAAAAjAAAAAAAAAAAAAAAW5vVDP///wgAAAAAAAAAAAAAAAAAAAAAAAAAAAAAAAAAAAAAZAAAAAEAAABAAAAAAAAAAAAAAAAAAAAAAAAAAAAAAAAAAAAAAAAAAAAAAAAAAAAAAAAAAAAAAAAAAAAAAAAAAAAAAAAAAAAAAAAAAAAAAAAAAAAAAAAAAAAAAAAAAAAAFAAAADwAAAAAAAAAAAAAAAAAAAkUAAAAAQAAABQAAAAUAAAAFAAAAAEAAAAAAAAAZAAAAGQAAAAAAAAAZAAAAGQAAAAVAAAAYAAAAAAAAAAAAAAADwAAACADAAAAAAAAAAAAAAEAAACgMgAAVgcAAKr4//8BAAAAf39/AAEAAABkAAAAAAAAABQAAABAHwAAAAAAACYAAAAAAAAAwOD//wAAAAAmAAAAZAAAABYAAABMAAAAAAAAAAAAAAAEAAAAAAAAAAEAAADn5uYKAAAAACgAAAAoAAAAZAAAAGQAAAAAAAAAzMzMAAAAAABQAAAAUAAAAGQAAABkAAAAAAAAABcAAAAUAAAAAAAAAAAAAAD/fwAA/38AAAAAAAAJAAAABAAAAAAAAAAeAAAAaAAAAAAAAAAAAAAAAAAAAAAAAAAAAAAAECcAABAnAAAAAAAAAAAAAAAAAAAAAAAAAAAAAAAAAAAAAAAAAAAAABQAAAAAAAAAwMD/AAAAAABkAAAAMgAAAAAAAABkAAAAAAAAAH9/fwAKAAAAIgAAABgAAAAAAAAAAAAAAAAAAAAAAAAAAAAAAAAAAAAkAAAAJAAAAAAAAAAHAAAAAAAAAAAAAAAAAAAAAAAAAAAAAAAAAAAAf39/ACUAAABYAAAAAAAAAAAAAAAAAAAAAAAAAAAAAAAAAAAAAAAAAAAAAAAAAAAAAAAAAAAAAAA/AAAAAAAAAKCGAQAAAAAAAAAAAAAAAAAMAAAAAQAAAAAAAAAAAAAAAAAAAB8AAABUAAAAAAAABQAAAAEAAAAAAAAAAAAAAAAAAAAAAAAAAAAAAAAAAAAAAAAAAAAAAAJ/f38AAAAAA8zMzADAwP8Af39/AAAAAAAAAAAAAAAAAAAAAAAAAAAAIQAAABgAAAAUAAAAKwUAAKgMAABbHQAAGyQAABAAAAAmAAAACAAAAAGAAAAAAAAA"/>
               </a:ext>
             </a:extLst>
           </p:cNvSpPr>
@@ -2527,44 +2563,44 @@
           <a:lstStyle>
             <a:lvl1pPr marL="0" indent="0">
               <a:buNone/>
-              <a:defRPr lang="en-us" sz="1600" cap="none"/>
+              <a:defRPr lang="en-US" sz="1600" cap="none"/>
             </a:lvl1pPr>
             <a:lvl2pPr marL="457200" indent="0">
               <a:buNone/>
-              <a:defRPr lang="en-us" sz="1400" cap="none"/>
+              <a:defRPr lang="en-US" sz="1400" cap="none"/>
             </a:lvl2pPr>
             <a:lvl3pPr marL="914400" indent="0">
               <a:buNone/>
-              <a:defRPr lang="en-us" sz="1200" cap="none"/>
+              <a:defRPr lang="en-US" sz="1200" cap="none"/>
             </a:lvl3pPr>
             <a:lvl4pPr marL="1371600" indent="0">
               <a:buNone/>
-              <a:defRPr lang="en-us" sz="1000" cap="none"/>
+              <a:defRPr lang="en-US" sz="1000" cap="none"/>
             </a:lvl4pPr>
             <a:lvl5pPr marL="1828800" indent="0">
               <a:buNone/>
-              <a:defRPr lang="en-us" sz="1000" cap="none"/>
+              <a:defRPr lang="en-US" sz="1000" cap="none"/>
             </a:lvl5pPr>
             <a:lvl6pPr marL="2286000" indent="0">
               <a:buNone/>
-              <a:defRPr lang="en-us" sz="1000" cap="none"/>
+              <a:defRPr lang="en-US" sz="1000" cap="none"/>
             </a:lvl6pPr>
             <a:lvl7pPr marL="2743200" indent="0">
               <a:buNone/>
-              <a:defRPr lang="en-us" sz="1000" cap="none"/>
+              <a:defRPr lang="en-US" sz="1000" cap="none"/>
             </a:lvl7pPr>
             <a:lvl8pPr marL="3200400" indent="0">
               <a:buNone/>
-              <a:defRPr lang="en-us" sz="1000" cap="none"/>
+              <a:defRPr lang="en-US" sz="1000" cap="none"/>
             </a:lvl8pPr>
             <a:lvl9pPr marL="3657600" indent="0">
               <a:buNone/>
-              <a:defRPr lang="en-us" sz="1000" cap="none"/>
+              <a:defRPr lang="en-US" sz="1000" cap="none"/>
             </a:lvl9pPr>
           </a:lstStyle>
           <a:p>
             <a:pPr>
-              <a:defRPr lang="en-us"/>
+              <a:defRPr lang="en-US"/>
             </a:pPr>
             <a:r>
               <a:t>Click to edit Master text styles</a:t>
@@ -2579,7 +2615,7 @@
             <a:spLocks noGrp="1" noChangeArrowheads="1"/>
             <a:extLst>
               <a:ext uri="smNativeData">
-                <pr:smNativeData xmlns:pr="smNativeData" xmlns="smNativeData" val="SMDATA_15_FLquaRMAAAAlAAAAZAAAAA0AAAAAkAAAAEgAAACQAAAASAAAAAAAAAABAAAAAAAAAAEAAABQAAAAAAAAAAAA4D8AAAAAAADgPwAAAAAAAOA/AAAAAAAA4D8AAAAAAADgPwAAAAAAAOA/AAAAAAAA4D8AAAAAAADgPwAAAAAAAOA/AAAAAAAA4D8CAAAAjAAAAAAAAAAAAAAAW5vVDP///wgAAAAAAAAAAAAAAAAAAAAAAAAAAAAAAAAAAAAAZAAAAAEAAABAAAAAAAAAAAAAAAAAAAAAAAAAAAAAAAAAAAAAAAAAAAAAAAAAAAAAAAAAAAAAAAAAAAAAAAAAAAAAAAAAAAAAAAAAAAAAAAAAAAAAAAAAAAAAAAAAAAAAFAAAADwAAAAAAAAAAAAAAAAAAAkUAAAAAQAAABQAAAAUAAAAFAAAAAEAAAAAAAAAZAAAAGQAAAAAAAAAZAAAAGQAAAAVAAAAYAAAAAAAAAAAAAAADwAAACADAAAAAAAAAAAAAAEAAACgMgAAVgcAAKr4//8BAAAAf39/AAEAAABkAAAAAAAAABQAAABAHwAAAAAAACYAAAAAAAAAwOD//wAAAAAmAAAAZAAAABYAAABMAAAAAAAAAAAAAAAEAAAAAAAAAAEAAADn5uYKAAAAACgAAAAoAAAAZAAAAGQAAAAAAAAAzMzMAAAAAABQAAAAUAAAAGQAAABkAAAAAAAAABcAAAAUAAAAAAAAAAAAAAD/fwAA/38AAAAAAAAJAAAABAAAAAAAAAAeAAAAaAAAAAAAAAAAAAAAAAAAAAAAAAAAAAAAECcAABAnAAAAAAAAAAAAAAAAAAAAAAAAAAAAAAAAAAAAAAAAAAAAABQAAAAAAAAAwMD/AAAAAABkAAAAMgAAAAAAAABkAAAAAAAAAH9/fwAKAAAAIgAAABgAAAAAAAAAAAAAAAAAAAAAAAAAAAAAAAAAAAAkAAAAJAAAAAAAAAAHAAAAAAAAAAAAAAAAAAAAAAAAAAAAAAAAAAAAf39/ACUAAABYAAAAAAAAAAAAAAAAAAAAAAAAAAAAAAAAAAAAAAAAAAAAAAAAAAAAAAAAAAAAAAA/AAAAAAAAAKCGAQAAAAAAAAAAAAAAAAAMAAAAAQAAAAAAAAAAAAAAAAAAAB8AAABUAAAAAAAABQAAAAEAAAAAAAAAAAAAAAAAAAAAAAAAAAAAAAAAAAAAAAAAAAAAAAJ/f38AAAAAA8zMzADAwP8Af39/AAAAAAAAAAAAAAAAAAAAAAAAAAAAIQAAABgAAAAUAAAAKAUAABonAAAIFgAAWSkAABAAAAAmAAAACAAAAAAAAAAAAAAA"/>
+                <pr:smNativeData xmlns="smNativeData" xmlns:pr="smNativeData" xmlns:p15="http://schemas.microsoft.com/office/powerpoint/2012/main" xmlns:p14="http://schemas.microsoft.com/office/powerpoint/2010/main" xmlns:mc="http://schemas.openxmlformats.org/markup-compatibility/2006" val="SMDATA_15_FLquaRMAAAAlAAAAZAAAAA0AAAAAkAAAAEgAAACQAAAASAAAAAAAAAABAAAAAAAAAAEAAABQAAAAAAAAAAAA4D8AAAAAAADgPwAAAAAAAOA/AAAAAAAA4D8AAAAAAADgPwAAAAAAAOA/AAAAAAAA4D8AAAAAAADgPwAAAAAAAOA/AAAAAAAA4D8CAAAAjAAAAAAAAAAAAAAAW5vVDP///wgAAAAAAAAAAAAAAAAAAAAAAAAAAAAAAAAAAAAAZAAAAAEAAABAAAAAAAAAAAAAAAAAAAAAAAAAAAAAAAAAAAAAAAAAAAAAAAAAAAAAAAAAAAAAAAAAAAAAAAAAAAAAAAAAAAAAAAAAAAAAAAAAAAAAAAAAAAAAAAAAAAAAFAAAADwAAAAAAAAAAAAAAAAAAAkUAAAAAQAAABQAAAAUAAAAFAAAAAEAAAAAAAAAZAAAAGQAAAAAAAAAZAAAAGQAAAAVAAAAYAAAAAAAAAAAAAAADwAAACADAAAAAAAAAAAAAAEAAACgMgAAVgcAAKr4//8BAAAAf39/AAEAAABkAAAAAAAAABQAAABAHwAAAAAAACYAAAAAAAAAwOD//wAAAAAmAAAAZAAAABYAAABMAAAAAAAAAAAAAAAEAAAAAAAAAAEAAADn5uYKAAAAACgAAAAoAAAAZAAAAGQAAAAAAAAAzMzMAAAAAABQAAAAUAAAAGQAAABkAAAAAAAAABcAAAAUAAAAAAAAAAAAAAD/fwAA/38AAAAAAAAJAAAABAAAAAAAAAAeAAAAaAAAAAAAAAAAAAAAAAAAAAAAAAAAAAAAECcAABAnAAAAAAAAAAAAAAAAAAAAAAAAAAAAAAAAAAAAAAAAAAAAABQAAAAAAAAAwMD/AAAAAABkAAAAMgAAAAAAAABkAAAAAAAAAH9/fwAKAAAAIgAAABgAAAAAAAAAAAAAAAAAAAAAAAAAAAAAAAAAAAAkAAAAJAAAAAAAAAAHAAAAAAAAAAAAAAAAAAAAAAAAAAAAAAAAAAAAf39/ACUAAABYAAAAAAAAAAAAAAAAAAAAAAAAAAAAAAAAAAAAAAAAAAAAAAAAAAAAAAAAAAAAAAA/AAAAAAAAAKCGAQAAAAAAAAAAAAAAAAAMAAAAAQAAAAAAAAAAAAAAAAAAAB8AAABUAAAAAAAABQAAAAEAAAAAAAAAAAAAAAAAAAAAAAAAAAAAAAAAAAAAAAAAAAAAAAJ/f38AAAAAA8zMzADAwP8Af39/AAAAAAAAAAAAAAAAAAAAAAAAAAAAIQAAABgAAAAUAAAAKAUAABonAAAIFgAAWSkAABAAAAAmAAAACAAAAAAAAAAAAAAA"/>
               </a:ext>
             </a:extLst>
           </p:cNvSpPr>
@@ -2593,11 +2629,12 @@
           <a:lstStyle/>
           <a:p>
             <a:pPr>
-              <a:defRPr lang="en-us"/>
+              <a:defRPr lang="en-US"/>
             </a:pPr>
             <a:fld id="{30AED90E-40DD-FB2F-9316-B67A975865E3}" type="datetime1">
-              <a:t>3/4/2026</a:t>
+              <a:t>4/21/2026</a:t>
             </a:fld>
+            <a:endParaRPr/>
           </a:p>
         </p:txBody>
       </p:sp>
@@ -2608,7 +2645,7 @@
             <a:spLocks noGrp="1" noChangeArrowheads="1"/>
             <a:extLst>
               <a:ext uri="smNativeData">
-                <pr:smNativeData xmlns:pr="smNativeData" xmlns="smNativeData" val="SMDATA_15_FLquaRMAAAAlAAAAZAAAAA0AAAAAkAAAAEgAAACQAAAASAAAAAAAAAABAAAAAAAAAAEAAABQAAAAAAAAAAAA4D8AAAAAAADgPwAAAAAAAOA/AAAAAAAA4D8AAAAAAADgPwAAAAAAAOA/AAAAAAAA4D8AAAAAAADgPwAAAAAAAOA/AAAAAAAA4D8CAAAAjAAAAAAAAAAAAAAAW5vVDP///wgAAAAAAAAAAAAAAAAAAAAAAAAAAAAAAAAAAAAAZAAAAAEAAABAAAAAAAAAAAAAAAAAAAAAAAAAAAAAAAAAAAAAAAAAAAAAAAAAAAAAAAAAAAAAAAAAAAAAAAAAAAAAAAAAAAAAAAAAAAAAAAAAAAAAAAAAAAAAAAAAAAAAFAAAADwAAAAAAAAAAAAAAAAAAAkUAAAAAQAAABQAAAAUAAAAFAAAAAEAAAAAAAAAZAAAAGQAAAAAAAAAZAAAAGQAAAAVAAAAYAAAAAAAAAAAAAAADwAAACADAAAAAAAAAAAAAAEAAACgMgAAVgcAAKr4//8BAAAAf39/AAEAAABkAAAAAAAAABQAAABAHwAAAAAAACYAAAAAAAAAwOD//wAAAAAmAAAAZAAAABYAAABMAAAAAAAAAAAAAAAEAAAAAAAAAAEAAADn5uYKAAAAACgAAAAoAAAAZAAAAGQAAAAAAAAAzMzMAAAAAABQAAAAUAAAAGQAAABkAAAAAAAAABcAAAAUAAAAAAAAAAAAAAD/fwAA/38AAAAAAAAJAAAABAAAAAAAAAAeAAAAaAAAAAAAAAAAAAAAAAAAAAAAAAAAAAAAECcAABAnAAAAAAAAAAAAAAAAAAAAAAAAAAAAAAAAAAAAAAAAAAAAABQAAAAAAAAAwMD/AAAAAABkAAAAMgAAAAAAAABkAAAAAAAAAH9/fwAKAAAAIgAAABgAAAAAAAAAAAAAAAAAAAAAAAAAAAAAAAAAAAAkAAAAJAAAAAAAAAAHAAAAAAAAAAAAAAAAAAAAAAAAAAAAAAAAAAAAf39/ACUAAABYAAAAAAAAAAAAAAAAAAAAAAAAAAAAAAAAAAAAAAAAAAAAAAAAAAAAAAAAAAAAAAA/AAAAAAAAAKCGAQAAAAAAAAAAAAAAAAAMAAAAAQAAAAAAAAAAAAAAAAAAAB8AAABUAAAAAAAABQAAAAEAAAAAAAAAAAAAAAAAAAAAAAAAAAAAAAAAAAAAAAAAAAAAAAJ/f38AAAAAA8zMzADAwP8Af39/AAAAAAAAAAAAAAAAAAAAAAAAAAAAIQAAABgAAAAUAAAA2BgAABonAAAoMgAAWSkAABAAAAAmAAAACAAAAAAAAAAAAAAA"/>
+                <pr:smNativeData xmlns="smNativeData" xmlns:pr="smNativeData" xmlns:p15="http://schemas.microsoft.com/office/powerpoint/2012/main" xmlns:p14="http://schemas.microsoft.com/office/powerpoint/2010/main" xmlns:mc="http://schemas.openxmlformats.org/markup-compatibility/2006" val="SMDATA_15_FLquaRMAAAAlAAAAZAAAAA0AAAAAkAAAAEgAAACQAAAASAAAAAAAAAABAAAAAAAAAAEAAABQAAAAAAAAAAAA4D8AAAAAAADgPwAAAAAAAOA/AAAAAAAA4D8AAAAAAADgPwAAAAAAAOA/AAAAAAAA4D8AAAAAAADgPwAAAAAAAOA/AAAAAAAA4D8CAAAAjAAAAAAAAAAAAAAAW5vVDP///wgAAAAAAAAAAAAAAAAAAAAAAAAAAAAAAAAAAAAAZAAAAAEAAABAAAAAAAAAAAAAAAAAAAAAAAAAAAAAAAAAAAAAAAAAAAAAAAAAAAAAAAAAAAAAAAAAAAAAAAAAAAAAAAAAAAAAAAAAAAAAAAAAAAAAAAAAAAAAAAAAAAAAFAAAADwAAAAAAAAAAAAAAAAAAAkUAAAAAQAAABQAAAAUAAAAFAAAAAEAAAAAAAAAZAAAAGQAAAAAAAAAZAAAAGQAAAAVAAAAYAAAAAAAAAAAAAAADwAAACADAAAAAAAAAAAAAAEAAACgMgAAVgcAAKr4//8BAAAAf39/AAEAAABkAAAAAAAAABQAAABAHwAAAAAAACYAAAAAAAAAwOD//wAAAAAmAAAAZAAAABYAAABMAAAAAAAAAAAAAAAEAAAAAAAAAAEAAADn5uYKAAAAACgAAAAoAAAAZAAAAGQAAAAAAAAAzMzMAAAAAABQAAAAUAAAAGQAAABkAAAAAAAAABcAAAAUAAAAAAAAAAAAAAD/fwAA/38AAAAAAAAJAAAABAAAAAAAAAAeAAAAaAAAAAAAAAAAAAAAAAAAAAAAAAAAAAAAECcAABAnAAAAAAAAAAAAAAAAAAAAAAAAAAAAAAAAAAAAAAAAAAAAABQAAAAAAAAAwMD/AAAAAABkAAAAMgAAAAAAAABkAAAAAAAAAH9/fwAKAAAAIgAAABgAAAAAAAAAAAAAAAAAAAAAAAAAAAAAAAAAAAAkAAAAJAAAAAAAAAAHAAAAAAAAAAAAAAAAAAAAAAAAAAAAAAAAAAAAf39/ACUAAABYAAAAAAAAAAAAAAAAAAAAAAAAAAAAAAAAAAAAAAAAAAAAAAAAAAAAAAAAAAAAAAA/AAAAAAAAAKCGAQAAAAAAAAAAAAAAAAAMAAAAAQAAAAAAAAAAAAAAAAAAAB8AAABUAAAAAAAABQAAAAEAAAAAAAAAAAAAAAAAAAAAAAAAAAAAAAAAAAAAAAAAAAAAAAJ/f38AAAAAA8zMzADAwP8Af39/AAAAAAAAAAAAAAAAAAAAAAAAAAAAIQAAABgAAAAUAAAA2BgAABonAAAoMgAAWSkAABAAAAAmAAAACAAAAAAAAAAAAAAA"/>
               </a:ext>
             </a:extLst>
           </p:cNvSpPr>
@@ -2622,8 +2659,9 @@
           <a:lstStyle/>
           <a:p>
             <a:pPr>
-              <a:defRPr lang="en-us"/>
-            </a:pPr>
+              <a:defRPr lang="en-US"/>
+            </a:pPr>
+            <a:endParaRPr/>
           </a:p>
         </p:txBody>
       </p:sp>
@@ -2634,7 +2672,7 @@
             <a:spLocks noGrp="1" noChangeArrowheads="1"/>
             <a:extLst>
               <a:ext uri="smNativeData">
-                <pr:smNativeData xmlns:pr="smNativeData" xmlns="smNativeData" val="SMDATA_15_FLquaRMAAAAlAAAAZAAAAA0AAAAAkAAAAEgAAACQAAAASAAAAAAAAAABAAAAAAAAAAEAAABQAAAAAAAAAAAA4D8AAAAAAADgPwAAAAAAAOA/AAAAAAAA4D8AAAAAAADgPwAAAAAAAOA/AAAAAAAA4D8AAAAAAADgPwAAAAAAAOA/AAAAAAAA4D8CAAAAjAAAAAAAAAAAAAAAW5vVDP///wgAAAAAAAAAAAAAAAAAAAAAAAAAAAAAAAAAAAAAZAAAAAEAAABAAAAAAAAAAAAAAAAAAAAAAAAAAAAAAAAAAAAAAAAAAAAAAAAAAAAAAAAAAAAAAAAAAAAAAAAAAAAAAAAAAAAAAAAAAAAAAAAAAAAAAAAAAAAAAAAAAAAAFAAAADwAAAAAAAAAAAAAAAAAAAkUAAAAAQAAABQAAAAUAAAAFAAAAAEAAAAAAAAAZAAAAGQAAAAAAAAAZAAAAGQAAAAVAAAAYAAAAAAAAAAAAAAADwAAACADAAAAAAAAAAAAAAEAAACgMgAAVgcAAKr4//8BAAAAf39/AAEAAABkAAAAAAAAABQAAABAHwAAAAAAACYAAAAAAAAAwOD//wAAAAAmAAAAZAAAABYAAABMAAAAAAAAAAAAAAAEAAAAAAAAAAEAAADn5uYKAAAAACgAAAAoAAAAZAAAAGQAAAAAAAAAzMzMAAAAAABQAAAAUAAAAGQAAABkAAAAAAAAABcAAAAUAAAAAAAAAAAAAAD/fwAA/38AAAAAAAAJAAAABAAAAAAAAAAeAAAAaAAAAAAAAAAAAAAAAAAAAAAAAAAAAAAAECcAABAnAAAAAAAAAAAAAAAAAAAAAAAAAAAAAAAAAAAAAAAAAAAAABQAAAAAAAAAwMD/AAAAAABkAAAAMgAAAAAAAABkAAAAAAAAAH9/fwAKAAAAIgAAABgAAAAAAAAAAAAAAAAAAAAAAAAAAAAAAAAAAAAkAAAAJAAAAAAAAAAHAAAAAAAAAAAAAAAAAAAAAAAAAAAAAAAAAAAAf39/ACUAAABYAAAAAAAAAAAAAAAAAAAAAAAAAAAAAAAAAAAAAAAAAAAAAAAAAAAAAAAAAAAAAAA/AAAAAAAAAKCGAQAAAAAAAAAAAAAAAAAMAAAAAQAAAAAAAAAAAAAAAAAAAB8AAABUAAAAAAAABQAAAAEAAAAAAAAAAAAAAAAAAAAAAAAAAAAAAAAAAAAAAAAAAAAAAAJ/f38AAAAAA8zMzADAwP8Af39/AAAAAAAAAAAAAAAAAAAAAAAAAAAAIQAAABgAAAAUAAAA+DQAABonAADYRQAAWSkAABAAAAAmAAAACAAAAAAAAAAAAAAA"/>
+                <pr:smNativeData xmlns="smNativeData" xmlns:pr="smNativeData" xmlns:p15="http://schemas.microsoft.com/office/powerpoint/2012/main" xmlns:p14="http://schemas.microsoft.com/office/powerpoint/2010/main" xmlns:mc="http://schemas.openxmlformats.org/markup-compatibility/2006" val="SMDATA_15_FLquaRMAAAAlAAAAZAAAAA0AAAAAkAAAAEgAAACQAAAASAAAAAAAAAABAAAAAAAAAAEAAABQAAAAAAAAAAAA4D8AAAAAAADgPwAAAAAAAOA/AAAAAAAA4D8AAAAAAADgPwAAAAAAAOA/AAAAAAAA4D8AAAAAAADgPwAAAAAAAOA/AAAAAAAA4D8CAAAAjAAAAAAAAAAAAAAAW5vVDP///wgAAAAAAAAAAAAAAAAAAAAAAAAAAAAAAAAAAAAAZAAAAAEAAABAAAAAAAAAAAAAAAAAAAAAAAAAAAAAAAAAAAAAAAAAAAAAAAAAAAAAAAAAAAAAAAAAAAAAAAAAAAAAAAAAAAAAAAAAAAAAAAAAAAAAAAAAAAAAAAAAAAAAFAAAADwAAAAAAAAAAAAAAAAAAAkUAAAAAQAAABQAAAAUAAAAFAAAAAEAAAAAAAAAZAAAAGQAAAAAAAAAZAAAAGQAAAAVAAAAYAAAAAAAAAAAAAAADwAAACADAAAAAAAAAAAAAAEAAACgMgAAVgcAAKr4//8BAAAAf39/AAEAAABkAAAAAAAAABQAAABAHwAAAAAAACYAAAAAAAAAwOD//wAAAAAmAAAAZAAAABYAAABMAAAAAAAAAAAAAAAEAAAAAAAAAAEAAADn5uYKAAAAACgAAAAoAAAAZAAAAGQAAAAAAAAAzMzMAAAAAABQAAAAUAAAAGQAAABkAAAAAAAAABcAAAAUAAAAAAAAAAAAAAD/fwAA/38AAAAAAAAJAAAABAAAAAAAAAAeAAAAaAAAAAAAAAAAAAAAAAAAAAAAAAAAAAAAECcAABAnAAAAAAAAAAAAAAAAAAAAAAAAAAAAAAAAAAAAAAAAAAAAABQAAAAAAAAAwMD/AAAAAABkAAAAMgAAAAAAAABkAAAAAAAAAH9/fwAKAAAAIgAAABgAAAAAAAAAAAAAAAAAAAAAAAAAAAAAAAAAAAAkAAAAJAAAAAAAAAAHAAAAAAAAAAAAAAAAAAAAAAAAAAAAAAAAAAAAf39/ACUAAABYAAAAAAAAAAAAAAAAAAAAAAAAAAAAAAAAAAAAAAAAAAAAAAAAAAAAAAAAAAAAAAA/AAAAAAAAAKCGAQAAAAAAAAAAAAAAAAAMAAAAAQAAAAAAAAAAAAAAAAAAAB8AAABUAAAAAAAABQAAAAEAAAAAAAAAAAAAAAAAAAAAAAAAAAAAAAAAAAAAAAAAAAAAAAJ/f38AAAAAA8zMzADAwP8Af39/AAAAAAAAAAAAAAAAAAAAAAAAAAAAIQAAABgAAAAUAAAA+DQAABonAADYRQAAWSkAABAAAAAmAAAACAAAAAAAAAAAAAAA"/>
               </a:ext>
             </a:extLst>
           </p:cNvSpPr>
@@ -2648,11 +2686,12 @@
           <a:lstStyle/>
           <a:p>
             <a:pPr>
-              <a:defRPr lang="en-us"/>
+              <a:defRPr lang="en-US"/>
             </a:pPr>
             <a:fld id="{30AE8D22-6CDD-FB7B-9316-9A2EC35865CF}" type="slidenum">
               <a:t>‹#›</a:t>
             </a:fld>
+            <a:endParaRPr/>
           </a:p>
         </p:txBody>
       </p:sp>
@@ -2666,7 +2705,7 @@
 </file>
 
 <file path=ppt/slideLayouts/slideLayout9.xml><?xml version="1.0" encoding="utf-8"?>
-<p:sldLayout xmlns:p="http://schemas.openxmlformats.org/presentationml/2006/main" xmlns:mc="http://schemas.openxmlformats.org/markup-compatibility/2006" xmlns:p14="http://schemas.microsoft.com/office/powerpoint/2010/main" xmlns:p15="http://schemas.microsoft.com/office/powerpoint/2012/main" xmlns:r="http://schemas.openxmlformats.org/officeDocument/2006/relationships" xmlns:a="http://schemas.openxmlformats.org/drawingml/2006/main" type="picTx" preserve="1">
+<p:sldLayout xmlns:a="http://schemas.openxmlformats.org/drawingml/2006/main" xmlns:r="http://schemas.openxmlformats.org/officeDocument/2006/relationships" xmlns:p="http://schemas.openxmlformats.org/presentationml/2006/main" type="picTx" preserve="1">
   <p:cSld name="Picture with Caption">
     <p:spTree>
       <p:nvGrpSpPr>
@@ -2689,7 +2728,7 @@
             <a:spLocks noGrp="1" noChangeArrowheads="1"/>
             <a:extLst>
               <a:ext uri="smNativeData">
-                <pr:smNativeData xmlns:pr="smNativeData" xmlns="smNativeData" val="SMDATA_15_FLquaRMAAAAlAAAAZAAAAA0AAAAAkAAAAEgAAACQAAAASAAAAAAAAAACAAAAAAAAAAEAAABQAAAAAAAAAAAA4D8AAAAAAADgPwAAAAAAAOA/AAAAAAAA4D8AAAAAAADgPwAAAAAAAOA/AAAAAAAA4D8AAAAAAADgPwAAAAAAAOA/AAAAAAAA4D8CAAAAjAAAAAAAAAAAAAAAW5vVDP///wgAAAAAAAAAAAAAAAAAAAAAAAAAAAAAAAAAAAAAZAAAAAEAAABAAAAAAAAAAAAAAAAAAAAAAAAAAAAAAAAAAAAAAAAAAAAAAAAAAAAAAAAAAAAAAAAAAAAAAAAAAAAAAAAAAAAAAAAAAAAAAAAAAAAAAAAAAAAAAAAAAAAAFAAAADwAAAAAAAAAAAAAAAAAAAkUAAAAAQAAABQAAAAUAAAAFAAAAAEAAAAAAAAAZAAAAGQAAAAAAAAAZAAAAGQAAAAVAAAAYAAAAAAAAAAAAAAADwAAACADAAAAAAAAAAAAAAEAAACgMgAAVgcAAKr4//8BAAAAf39/AAEAAABkAAAAAAAAABQAAABAHwAAAAAAACYAAAAAAAAAwOD//wAAAAAmAAAAZAAAABYAAABMAAAAAAAAAAAAAAAEAAAAAAAAAAEAAADn5uYKAAAAACgAAAAoAAAAZAAAAGQAAAAAAAAAzMzMAAAAAABQAAAAUAAAAGQAAABkAAAAAAAAABcAAAAUAAAAAAAAAAAAAAD/fwAA/38AAAAAAAAJAAAABAAAAAAAAAAeAAAAaAAAAAAAAAAAAAAAAAAAAAAAAAAAAAAAECcAABAnAAAAAAAAAAAAAAAAAAAAAAAAAAAAAAAAAAAAAAAAAAAAABQAAAAAAAAAwMD/AAAAAABkAAAAMgAAAAAAAABkAAAAAAAAAH9/fwAKAAAAIgAAABgAAAAAAAAAAAAAAAAAAAAAAAAAAAAAAAAAAAAkAAAAJAAAAAAAAAAHAAAAAAAAAAAAAAAAAAAAAAAAAAAAAAAAAAAAf39/ACUAAABYAAAAAAAAAAAAAAAAAAAAAAAAAAAAAAAAAAAAAAAAAAAAAAAAAAAAAAAAAAAAAAA/AAAAAAAAAKCGAQAAAAAAAAAAAAAAAAAMAAAAAQAAAAAAAAAAAAAAAAAAAB8AAABUAAAAAAAABQAAAAEAAAAAAAAAAAAAAAAAAAAAAAAAAAAAAAAAAAAAAAAAAAAAAAJ/f38AAAAAA8zMzADAwP8Af39/AAAAAAAAAAAAAAAAAAAAAAAAAAAAIQAAABgAAAAUAAAAKwUAANACAABbHQAAqAwAABAAAAAmAAAACAAAAIGAAAAAAAAA"/>
+                <pr:smNativeData xmlns="smNativeData" xmlns:pr="smNativeData" xmlns:p15="http://schemas.microsoft.com/office/powerpoint/2012/main" xmlns:p14="http://schemas.microsoft.com/office/powerpoint/2010/main" xmlns:mc="http://schemas.openxmlformats.org/markup-compatibility/2006" val="SMDATA_15_FLquaRMAAAAlAAAAZAAAAA0AAAAAkAAAAEgAAACQAAAASAAAAAAAAAACAAAAAAAAAAEAAABQAAAAAAAAAAAA4D8AAAAAAADgPwAAAAAAAOA/AAAAAAAA4D8AAAAAAADgPwAAAAAAAOA/AAAAAAAA4D8AAAAAAADgPwAAAAAAAOA/AAAAAAAA4D8CAAAAjAAAAAAAAAAAAAAAW5vVDP///wgAAAAAAAAAAAAAAAAAAAAAAAAAAAAAAAAAAAAAZAAAAAEAAABAAAAAAAAAAAAAAAAAAAAAAAAAAAAAAAAAAAAAAAAAAAAAAAAAAAAAAAAAAAAAAAAAAAAAAAAAAAAAAAAAAAAAAAAAAAAAAAAAAAAAAAAAAAAAAAAAAAAAFAAAADwAAAAAAAAAAAAAAAAAAAkUAAAAAQAAABQAAAAUAAAAFAAAAAEAAAAAAAAAZAAAAGQAAAAAAAAAZAAAAGQAAAAVAAAAYAAAAAAAAAAAAAAADwAAACADAAAAAAAAAAAAAAEAAACgMgAAVgcAAKr4//8BAAAAf39/AAEAAABkAAAAAAAAABQAAABAHwAAAAAAACYAAAAAAAAAwOD//wAAAAAmAAAAZAAAABYAAABMAAAAAAAAAAAAAAAEAAAAAAAAAAEAAADn5uYKAAAAACgAAAAoAAAAZAAAAGQAAAAAAAAAzMzMAAAAAABQAAAAUAAAAGQAAABkAAAAAAAAABcAAAAUAAAAAAAAAAAAAAD/fwAA/38AAAAAAAAJAAAABAAAAAAAAAAeAAAAaAAAAAAAAAAAAAAAAAAAAAAAAAAAAAAAECcAABAnAAAAAAAAAAAAAAAAAAAAAAAAAAAAAAAAAAAAAAAAAAAAABQAAAAAAAAAwMD/AAAAAABkAAAAMgAAAAAAAABkAAAAAAAAAH9/fwAKAAAAIgAAABgAAAAAAAAAAAAAAAAAAAAAAAAAAAAAAAAAAAAkAAAAJAAAAAAAAAAHAAAAAAAAAAAAAAAAAAAAAAAAAAAAAAAAAAAAf39/ACUAAABYAAAAAAAAAAAAAAAAAAAAAAAAAAAAAAAAAAAAAAAAAAAAAAAAAAAAAAAAAAAAAAA/AAAAAAAAAKCGAQAAAAAAAAAAAAAAAAAMAAAAAQAAAAAAAAAAAAAAAAAAAB8AAABUAAAAAAAABQAAAAEAAAAAAAAAAAAAAAAAAAAAAAAAAAAAAAAAAAAAAAAAAAAAAAJ/f38AAAAAA8zMzADAwP8Af39/AAAAAAAAAAAAAAAAAAAAAAAAAAAAIQAAABgAAAAUAAAAKwUAANACAABbHQAAqAwAABAAAAAmAAAACAAAAIGAAAAAAAAA"/>
               </a:ext>
             </a:extLst>
           </p:cNvSpPr>
@@ -2711,36 +2750,36 @@
           </a:bodyPr>
           <a:lstStyle>
             <a:lvl1pPr>
-              <a:defRPr lang="en-us" sz="3200" cap="none"/>
+              <a:defRPr lang="en-US" sz="3200" cap="none"/>
             </a:lvl1pPr>
             <a:lvl2pPr>
-              <a:defRPr lang="en-us"/>
+              <a:defRPr lang="en-US"/>
             </a:lvl2pPr>
             <a:lvl3pPr>
-              <a:defRPr lang="en-us"/>
+              <a:defRPr lang="en-US"/>
             </a:lvl3pPr>
             <a:lvl4pPr>
-              <a:defRPr lang="en-us"/>
+              <a:defRPr lang="en-US"/>
             </a:lvl4pPr>
             <a:lvl5pPr>
-              <a:defRPr lang="en-us"/>
+              <a:defRPr lang="en-US"/>
             </a:lvl5pPr>
             <a:lvl6pPr>
-              <a:defRPr lang="en-us"/>
+              <a:defRPr lang="en-US"/>
             </a:lvl6pPr>
             <a:lvl7pPr>
-              <a:defRPr lang="en-us"/>
+              <a:defRPr lang="en-US"/>
             </a:lvl7pPr>
             <a:lvl8pPr>
-              <a:defRPr lang="en-us"/>
+              <a:defRPr lang="en-US"/>
             </a:lvl8pPr>
             <a:lvl9pPr>
-              <a:defRPr lang="en-us"/>
+              <a:defRPr lang="en-US"/>
             </a:lvl9pPr>
           </a:lstStyle>
           <a:p>
             <a:pPr>
-              <a:defRPr lang="en-us"/>
+              <a:defRPr lang="en-US"/>
             </a:pPr>
             <a:r>
               <a:t>Click to edit Master title style</a:t>
@@ -2755,7 +2794,7 @@
             <a:spLocks noGrp="1" noChangeArrowheads="1"/>
             <a:extLst>
               <a:ext uri="smNativeData">
-                <pr:smNativeData xmlns:pr="smNativeData" xmlns="smNativeData" val="SMDATA_15_FLquaRMAAAAlAAAAZAAAAA0AAAAAkAAAAEgAAACQAAAASAAAAAAAAAAAAAAAAAAAAAEAAABQAAAAAAAAAAAA4D8AAAAAAADgPwAAAAAAAOA/AAAAAAAA4D8AAAAAAADgPwAAAAAAAOA/AAAAAAAA4D8AAAAAAADgPwAAAAAAAOA/AAAAAAAA4D8CAAAAjAAAAAAAAAAAAAAAW5vVDP///wgAAAAAAAAAAAAAAAAAAAAAAAAAAAAAAAAAAAAAZAAAAAEAAABAAAAAAAAAAAAAAAAAAAAAAAAAAAAAAAAAAAAAAAAAAAAAAAAAAAAAAAAAAAAAAAAAAAAAAAAAAAAAAAAAAAAAAAAAAAAAAAAAAAAAAAAAAAAAAAAAAAAAFAAAADwAAAAAAAAAAAAAAAAAAAkUAAAAAQAAABQAAAAUAAAAFAAAAAEAAAAAAAAAZAAAAGQAAAAAAAAAZAAAAGQAAAAVAAAAYAAAAAAAAAAAAAAADwAAACADAAAAAAAAAAAAAAEAAACgMgAAVgcAAKr4//8BAAAAf39/AAEAAABkAAAAAAAAABQAAABAHwAAAAAAACYAAAAAAAAAwOD//wAAAAAmAAAAZAAAABYAAABMAAAAAAAAAAAAAAAEAAAAAAAAAAEAAADn5uYKAAAAACgAAAAoAAAAZAAAAGQAAAAAAAAAzMzMAAAAAABQAAAAUAAAAGQAAABkAAAAAAAAABcAAAAUAAAAAAAAAAAAAAD/fwAA/38AAAAAAAAJAAAABAAAAAAAAAAeAAAAaAAAAAAAAAAAAAAAAAAAAAAAAAAAAAAAECcAABAnAAAAAAAAAAAAAAAAAAAAAAAAAAAAAAAAAAAAAAAAAAAAABQAAAAAAAAAwMD/AAAAAABkAAAAMgAAAAAAAABkAAAAAAAAAH9/fwAKAAAAIgAAABgAAAAAAAAAAAAAAAAAAAAAAAAAAAAAAAAAAAAkAAAAJAAAAAAAAAAHAAAAAAAAAAAAAAAAAAAAAAAAAAAAAAAAAAAAf39/ACUAAABYAAAAAAAAAAAAAAAAAAAAAAAAAAAAAAAAAAAAAAAAAAAAAAAAAAAAAAAAAAAAAAA/AAAAAAAAAKCGAQAAAAAAAAAAAAAAAAAMAAAAAQAAAAAAAAAAAAAAAAAAAB8AAABUAAAAAAAABQAAAAEAAAAAAAAAAAAAAAAAAAAAAAAAAAAAAAAAAAAAAAAAAAAAAAJ/f38AAAAAA8zMzADAwP8Af39/AAAAAAAAAAAAAAAAAAAAAAAAAAAAIQAAABgAAAAUAAAA4x8AABMGAADbRQAADiQAABAAAAAmAAAACAAAAAGAAAAAAAAA"/>
+                <pr:smNativeData xmlns="smNativeData" xmlns:pr="smNativeData" xmlns:p15="http://schemas.microsoft.com/office/powerpoint/2012/main" xmlns:p14="http://schemas.microsoft.com/office/powerpoint/2010/main" xmlns:mc="http://schemas.openxmlformats.org/markup-compatibility/2006" val="SMDATA_15_FLquaRMAAAAlAAAAZAAAAA0AAAAAkAAAAEgAAACQAAAASAAAAAAAAAAAAAAAAAAAAAEAAABQAAAAAAAAAAAA4D8AAAAAAADgPwAAAAAAAOA/AAAAAAAA4D8AAAAAAADgPwAAAAAAAOA/AAAAAAAA4D8AAAAAAADgPwAAAAAAAOA/AAAAAAAA4D8CAAAAjAAAAAAAAAAAAAAAW5vVDP///wgAAAAAAAAAAAAAAAAAAAAAAAAAAAAAAAAAAAAAZAAAAAEAAABAAAAAAAAAAAAAAAAAAAAAAAAAAAAAAAAAAAAAAAAAAAAAAAAAAAAAAAAAAAAAAAAAAAAAAAAAAAAAAAAAAAAAAAAAAAAAAAAAAAAAAAAAAAAAAAAAAAAAFAAAADwAAAAAAAAAAAAAAAAAAAkUAAAAAQAAABQAAAAUAAAAFAAAAAEAAAAAAAAAZAAAAGQAAAAAAAAAZAAAAGQAAAAVAAAAYAAAAAAAAAAAAAAADwAAACADAAAAAAAAAAAAAAEAAACgMgAAVgcAAKr4//8BAAAAf39/AAEAAABkAAAAAAAAABQAAABAHwAAAAAAACYAAAAAAAAAwOD//wAAAAAmAAAAZAAAABYAAABMAAAAAAAAAAAAAAAEAAAAAAAAAAEAAADn5uYKAAAAACgAAAAoAAAAZAAAAGQAAAAAAAAAzMzMAAAAAABQAAAAUAAAAGQAAABkAAAAAAAAABcAAAAUAAAAAAAAAAAAAAD/fwAA/38AAAAAAAAJAAAABAAAAAAAAAAeAAAAaAAAAAAAAAAAAAAAAAAAAAAAAAAAAAAAECcAABAnAAAAAAAAAAAAAAAAAAAAAAAAAAAAAAAAAAAAAAAAAAAAABQAAAAAAAAAwMD/AAAAAABkAAAAMgAAAAAAAABkAAAAAAAAAH9/fwAKAAAAIgAAABgAAAAAAAAAAAAAAAAAAAAAAAAAAAAAAAAAAAAkAAAAJAAAAAAAAAAHAAAAAAAAAAAAAAAAAAAAAAAAAAAAAAAAAAAAf39/ACUAAABYAAAAAAAAAAAAAAAAAAAAAAAAAAAAAAAAAAAAAAAAAAAAAAAAAAAAAAAAAAAAAAA/AAAAAAAAAKCGAQAAAAAAAAAAAAAAAAAMAAAAAQAAAAAAAAAAAAAAAAAAAB8AAABUAAAAAAAABQAAAAEAAAAAAAAAAAAAAAAAAAAAAAAAAAAAAAAAAAAAAAAAAAAAAAJ/f38AAAAAA8zMzADAwP8Af39/AAAAAAAAAAAAAAAAAAAAAAAAAAAAIQAAABgAAAAUAAAA4x8AABMGAADbRQAADiQAABAAAAAmAAAACAAAAAGAAAAAAAAA"/>
               </a:ext>
             </a:extLst>
           </p:cNvSpPr>
@@ -2774,45 +2813,46 @@
           <a:lstStyle>
             <a:lvl1pPr marL="0" indent="0">
               <a:buNone/>
-              <a:defRPr lang="en-us" sz="3200" cap="none"/>
+              <a:defRPr lang="en-US" sz="3200" cap="none"/>
             </a:lvl1pPr>
             <a:lvl2pPr marL="457200" indent="0">
               <a:buNone/>
-              <a:defRPr lang="en-us" sz="2800" cap="none"/>
+              <a:defRPr lang="en-US" sz="2800" cap="none"/>
             </a:lvl2pPr>
             <a:lvl3pPr marL="914400" indent="0">
               <a:buNone/>
-              <a:defRPr lang="en-us" sz="2400" cap="none"/>
+              <a:defRPr lang="en-US" sz="2400" cap="none"/>
             </a:lvl3pPr>
             <a:lvl4pPr marL="1371600" indent="0">
               <a:buNone/>
-              <a:defRPr lang="en-us" sz="2000" cap="none"/>
+              <a:defRPr lang="en-US" sz="2000" cap="none"/>
             </a:lvl4pPr>
             <a:lvl5pPr marL="1828800" indent="0">
               <a:buNone/>
-              <a:defRPr lang="en-us" sz="2000" cap="none"/>
+              <a:defRPr lang="en-US" sz="2000" cap="none"/>
             </a:lvl5pPr>
             <a:lvl6pPr marL="2286000" indent="0">
               <a:buNone/>
-              <a:defRPr lang="en-us" sz="2000" cap="none"/>
+              <a:defRPr lang="en-US" sz="2000" cap="none"/>
             </a:lvl6pPr>
             <a:lvl7pPr marL="2743200" indent="0">
               <a:buNone/>
-              <a:defRPr lang="en-us" sz="2000" cap="none"/>
+              <a:defRPr lang="en-US" sz="2000" cap="none"/>
             </a:lvl7pPr>
             <a:lvl8pPr marL="3200400" indent="0">
               <a:buNone/>
-              <a:defRPr lang="en-us" sz="2000" cap="none"/>
+              <a:defRPr lang="en-US" sz="2000" cap="none"/>
             </a:lvl8pPr>
             <a:lvl9pPr marL="3657600" indent="0">
               <a:buNone/>
-              <a:defRPr lang="en-us" sz="2000" cap="none"/>
+              <a:defRPr lang="en-US" sz="2000" cap="none"/>
             </a:lvl9pPr>
           </a:lstStyle>
           <a:p>
             <a:pPr>
-              <a:defRPr lang="en-us"/>
-            </a:pPr>
+              <a:defRPr lang="en-US"/>
+            </a:pPr>
+            <a:endParaRPr/>
           </a:p>
         </p:txBody>
       </p:sp>
@@ -2823,7 +2863,7 @@
             <a:spLocks noGrp="1" noChangeArrowheads="1"/>
             <a:extLst>
               <a:ext uri="smNativeData">
-                <pr:smNativeData xmlns:pr="smNativeData" xmlns="smNativeData" val="SMDATA_15_FLquaRMAAAAlAAAAZAAAAA0AAAAAkAAAAEgAAACQAAAASAAAAAAAAAAAAAAAAAAAAAEAAABQAAAAAAAAAAAA4D8AAAAAAADgPwAAAAAAAOA/AAAAAAAA4D8AAAAAAADgPwAAAAAAAOA/AAAAAAAA4D8AAAAAAADgPwAAAAAAAOA/AAAAAAAA4D8CAAAAjAAAAAAAAAAAAAAAW5vVDP///wgAAAAAAAAAAAAAAAAAAAAAAAAAAAAAAAAAAAAAZAAAAAEAAABAAAAAAAAAAAAAAAAAAAAAAAAAAAAAAAAAAAAAAAAAAAAAAAAAAAAAAAAAAAAAAAAAAAAAAAAAAAAAAAAAAAAAAAAAAAAAAAAAAAAAAAAAAAAAAAAAAAAAFAAAADwAAAAAAAAAAAAAAAAAAAkUAAAAAQAAABQAAAAUAAAAFAAAAAEAAAAAAAAAZAAAAGQAAAAAAAAAZAAAAGQAAAAVAAAAYAAAAAAAAAAAAAAADwAAACADAAAAAAAAAAAAAAEAAACgMgAAVgcAAKr4//8BAAAAf39/AAEAAABkAAAAAAAAABQAAABAHwAAAAAAACYAAAAAAAAAwOD//wAAAAAmAAAAZAAAABYAAABMAAAAAAAAAAAAAAAEAAAAAAAAAAEAAADn5uYKAAAAACgAAAAoAAAAZAAAAGQAAAAAAAAAzMzMAAAAAABQAAAAUAAAAGQAAABkAAAAAAAAABcAAAAUAAAAAAAAAAAAAAD/fwAA/38AAAAAAAAJAAAABAAAAAAAAAAeAAAAaAAAAAAAAAAAAAAAAAAAAAAAAAAAAAAAECcAABAnAAAAAAAAAAAAAAAAAAAAAAAAAAAAAAAAAAAAAAAAAAAAABQAAAAAAAAAwMD/AAAAAABkAAAAMgAAAAAAAABkAAAAAAAAAH9/fwAKAAAAIgAAABgAAAAAAAAAAAAAAAAAAAAAAAAAAAAAAAAAAAAkAAAAJAAAAAAAAAAHAAAAAAAAAAAAAAAAAAAAAAAAAAAAAAAAAAAAf39/ACUAAABYAAAAAAAAAAAAAAAAAAAAAAAAAAAAAAAAAAAAAAAAAAAAAAAAAAAAAAAAAAAAAAA/AAAAAAAAAKCGAQAAAAAAAAAAAAAAAAAMAAAAAQAAAAAAAAAAAAAAAAAAAB8AAABUAAAAAAAABQAAAAEAAAAAAAAAAAAAAAAAAAAAAAAAAAAAAAAAAAAAAAAAAAAAAAJ/f38AAAAAA8zMzADAwP8Af39/AAAAAAAAAAAAAAAAAAAAAAAAAAAAIQAAABgAAAAUAAAAKwUAAKgMAABbHQAAGyQAABAAAAAmAAAACAAAAAGAAAAAAAAA"/>
+                <pr:smNativeData xmlns="smNativeData" xmlns:pr="smNativeData" xmlns:p15="http://schemas.microsoft.com/office/powerpoint/2012/main" xmlns:p14="http://schemas.microsoft.com/office/powerpoint/2010/main" xmlns:mc="http://schemas.openxmlformats.org/markup-compatibility/2006" val="SMDATA_15_FLquaRMAAAAlAAAAZAAAAA0AAAAAkAAAAEgAAACQAAAASAAAAAAAAAAAAAAAAAAAAAEAAABQAAAAAAAAAAAA4D8AAAAAAADgPwAAAAAAAOA/AAAAAAAA4D8AAAAAAADgPwAAAAAAAOA/AAAAAAAA4D8AAAAAAADgPwAAAAAAAOA/AAAAAAAA4D8CAAAAjAAAAAAAAAAAAAAAW5vVDP///wgAAAAAAAAAAAAAAAAAAAAAAAAAAAAAAAAAAAAAZAAAAAEAAABAAAAAAAAAAAAAAAAAAAAAAAAAAAAAAAAAAAAAAAAAAAAAAAAAAAAAAAAAAAAAAAAAAAAAAAAAAAAAAAAAAAAAAAAAAAAAAAAAAAAAAAAAAAAAAAAAAAAAFAAAADwAAAAAAAAAAAAAAAAAAAkUAAAAAQAAABQAAAAUAAAAFAAAAAEAAAAAAAAAZAAAAGQAAAAAAAAAZAAAAGQAAAAVAAAAYAAAAAAAAAAAAAAADwAAACADAAAAAAAAAAAAAAEAAACgMgAAVgcAAKr4//8BAAAAf39/AAEAAABkAAAAAAAAABQAAABAHwAAAAAAACYAAAAAAAAAwOD//wAAAAAmAAAAZAAAABYAAABMAAAAAAAAAAAAAAAEAAAAAAAAAAEAAADn5uYKAAAAACgAAAAoAAAAZAAAAGQAAAAAAAAAzMzMAAAAAABQAAAAUAAAAGQAAABkAAAAAAAAABcAAAAUAAAAAAAAAAAAAAD/fwAA/38AAAAAAAAJAAAABAAAAAAAAAAeAAAAaAAAAAAAAAAAAAAAAAAAAAAAAAAAAAAAECcAABAnAAAAAAAAAAAAAAAAAAAAAAAAAAAAAAAAAAAAAAAAAAAAABQAAAAAAAAAwMD/AAAAAABkAAAAMgAAAAAAAABkAAAAAAAAAH9/fwAKAAAAIgAAABgAAAAAAAAAAAAAAAAAAAAAAAAAAAAAAAAAAAAkAAAAJAAAAAAAAAAHAAAAAAAAAAAAAAAAAAAAAAAAAAAAAAAAAAAAf39/ACUAAABYAAAAAAAAAAAAAAAAAAAAAAAAAAAAAAAAAAAAAAAAAAAAAAAAAAAAAAAAAAAAAAA/AAAAAAAAAKCGAQAAAAAAAAAAAAAAAAAMAAAAAQAAAAAAAAAAAAAAAAAAAB8AAABUAAAAAAAABQAAAAEAAAAAAAAAAAAAAAAAAAAAAAAAAAAAAAAAAAAAAAAAAAAAAAJ/f38AAAAAA8zMzADAwP8Af39/AAAAAAAAAAAAAAAAAAAAAAAAAAAAIQAAABgAAAAUAAAAKwUAAKgMAABbHQAAGyQAABAAAAAmAAAACAAAAAGAAAAAAAAA"/>
               </a:ext>
             </a:extLst>
           </p:cNvSpPr>
@@ -2842,44 +2882,44 @@
           <a:lstStyle>
             <a:lvl1pPr marL="0" indent="0">
               <a:buNone/>
-              <a:defRPr lang="en-us" sz="1600" cap="none"/>
+              <a:defRPr lang="en-US" sz="1600" cap="none"/>
             </a:lvl1pPr>
             <a:lvl2pPr marL="457200" indent="0">
               <a:buNone/>
-              <a:defRPr lang="en-us" sz="1400" cap="none"/>
+              <a:defRPr lang="en-US" sz="1400" cap="none"/>
             </a:lvl2pPr>
             <a:lvl3pPr marL="914400" indent="0">
               <a:buNone/>
-              <a:defRPr lang="en-us" sz="1200" cap="none"/>
+              <a:defRPr lang="en-US" sz="1200" cap="none"/>
             </a:lvl3pPr>
             <a:lvl4pPr marL="1371600" indent="0">
               <a:buNone/>
-              <a:defRPr lang="en-us" sz="1000" cap="none"/>
+              <a:defRPr lang="en-US" sz="1000" cap="none"/>
             </a:lvl4pPr>
             <a:lvl5pPr marL="1828800" indent="0">
               <a:buNone/>
-              <a:defRPr lang="en-us" sz="1000" cap="none"/>
+              <a:defRPr lang="en-US" sz="1000" cap="none"/>
             </a:lvl5pPr>
             <a:lvl6pPr marL="2286000" indent="0">
               <a:buNone/>
-              <a:defRPr lang="en-us" sz="1000" cap="none"/>
+              <a:defRPr lang="en-US" sz="1000" cap="none"/>
             </a:lvl6pPr>
             <a:lvl7pPr marL="2743200" indent="0">
               <a:buNone/>
-              <a:defRPr lang="en-us" sz="1000" cap="none"/>
+              <a:defRPr lang="en-US" sz="1000" cap="none"/>
             </a:lvl7pPr>
             <a:lvl8pPr marL="3200400" indent="0">
               <a:buNone/>
-              <a:defRPr lang="en-us" sz="1000" cap="none"/>
+              <a:defRPr lang="en-US" sz="1000" cap="none"/>
             </a:lvl8pPr>
             <a:lvl9pPr marL="3657600" indent="0">
               <a:buNone/>
-              <a:defRPr lang="en-us" sz="1000" cap="none"/>
+              <a:defRPr lang="en-US" sz="1000" cap="none"/>
             </a:lvl9pPr>
           </a:lstStyle>
           <a:p>
             <a:pPr>
-              <a:defRPr lang="en-us"/>
+              <a:defRPr lang="en-US"/>
             </a:pPr>
             <a:r>
               <a:t>Click to edit Master text styles</a:t>
@@ -2894,7 +2934,7 @@
             <a:spLocks noGrp="1" noChangeArrowheads="1"/>
             <a:extLst>
               <a:ext uri="smNativeData">
-                <pr:smNativeData xmlns:pr="smNativeData" xmlns="smNativeData" val="SMDATA_15_FLquaRMAAAAlAAAAZAAAAA0AAAAAkAAAAEgAAACQAAAASAAAAAAAAAABAAAAAAAAAAEAAABQAAAAAAAAAAAA4D8AAAAAAADgPwAAAAAAAOA/AAAAAAAA4D8AAAAAAADgPwAAAAAAAOA/AAAAAAAA4D8AAAAAAADgPwAAAAAAAOA/AAAAAAAA4D8CAAAAjAAAAAAAAAAAAAAAW5vVDP///wgAAAAAAAAAAAAAAAAAAAAAAAAAAAAAAAAAAAAAZAAAAAEAAABAAAAAAAAAAAAAAAAAAAAAAAAAAAAAAAAAAAAAAAAAAAAAAAAAAAAAAAAAAAAAAAAAAAAAAAAAAAAAAAAAAAAAAAAAAAAAAAAAAAAAAAAAAAAAAAAAAAAAFAAAADwAAAAAAAAAAAAAAAAAAAkUAAAAAQAAABQAAAAUAAAAFAAAAAEAAAAAAAAAZAAAAGQAAAAAAAAAZAAAAGQAAAAVAAAAYAAAAAAAAAAAAAAADwAAACADAAAAAAAAAAAAAAEAAACgMgAAVgcAAKr4//8BAAAAf39/AAEAAABkAAAAAAAAABQAAABAHwAAAAAAACYAAAAAAAAAwOD//wAAAAAmAAAAZAAAABYAAABMAAAAAAAAAAAAAAAEAAAAAAAAAAEAAADn5uYKAAAAACgAAAAoAAAAZAAAAGQAAAAAAAAAzMzMAAAAAABQAAAAUAAAAGQAAABkAAAAAAAAABcAAAAUAAAAAAAAAAAAAAD/fwAA/38AAAAAAAAJAAAABAAAAAAAAAAeAAAAaAAAAAAAAAAAAAAAAAAAAAAAAAAAAAAAECcAABAnAAAAAAAAAAAAAAAAAAAAAAAAAAAAAAAAAAAAAAAAAAAAABQAAAAAAAAAwMD/AAAAAABkAAAAMgAAAAAAAABkAAAAAAAAAH9/fwAKAAAAIgAAABgAAAAAAAAAAAAAAAAAAAAAAAAAAAAAAAAAAAAkAAAAJAAAAAAAAAAHAAAAAAAAAAAAAAAAAAAAAAAAAAAAAAAAAAAAf39/ACUAAABYAAAAAAAAAAAAAAAAAAAAAAAAAAAAAAAAAAAAAAAAAAAAAAAAAAAAAAAAAAAAAAA/AAAAAAAAAKCGAQAAAAAAAAAAAAAAAAAMAAAAAQAAAAAAAAAAAAAAAAAAAB8AAABUAAAAAAAABQAAAAEAAAAAAAAAAAAAAAAAAAAAAAAAAAAAAAAAAAAAAAAAAAAAAAJ/f38AAAAAA8zMzADAwP8Af39/AAAAAAAAAAAAAAAAAAAAAAAAAAAAIQAAABgAAAAUAAAAKAUAABonAAAIFgAAWSkAABAAAAAmAAAACAAAAAAAAAAAAAAA"/>
+                <pr:smNativeData xmlns="smNativeData" xmlns:pr="smNativeData" xmlns:p15="http://schemas.microsoft.com/office/powerpoint/2012/main" xmlns:p14="http://schemas.microsoft.com/office/powerpoint/2010/main" xmlns:mc="http://schemas.openxmlformats.org/markup-compatibility/2006" val="SMDATA_15_FLquaRMAAAAlAAAAZAAAAA0AAAAAkAAAAEgAAACQAAAASAAAAAAAAAABAAAAAAAAAAEAAABQAAAAAAAAAAAA4D8AAAAAAADgPwAAAAAAAOA/AAAAAAAA4D8AAAAAAADgPwAAAAAAAOA/AAAAAAAA4D8AAAAAAADgPwAAAAAAAOA/AAAAAAAA4D8CAAAAjAAAAAAAAAAAAAAAW5vVDP///wgAAAAAAAAAAAAAAAAAAAAAAAAAAAAAAAAAAAAAZAAAAAEAAABAAAAAAAAAAAAAAAAAAAAAAAAAAAAAAAAAAAAAAAAAAAAAAAAAAAAAAAAAAAAAAAAAAAAAAAAAAAAAAAAAAAAAAAAAAAAAAAAAAAAAAAAAAAAAAAAAAAAAFAAAADwAAAAAAAAAAAAAAAAAAAkUAAAAAQAAABQAAAAUAAAAFAAAAAEAAAAAAAAAZAAAAGQAAAAAAAAAZAAAAGQAAAAVAAAAYAAAAAAAAAAAAAAADwAAACADAAAAAAAAAAAAAAEAAACgMgAAVgcAAKr4//8BAAAAf39/AAEAAABkAAAAAAAAABQAAABAHwAAAAAAACYAAAAAAAAAwOD//wAAAAAmAAAAZAAAABYAAABMAAAAAAAAAAAAAAAEAAAAAAAAAAEAAADn5uYKAAAAACgAAAAoAAAAZAAAAGQAAAAAAAAAzMzMAAAAAABQAAAAUAAAAGQAAABkAAAAAAAAABcAAAAUAAAAAAAAAAAAAAD/fwAA/38AAAAAAAAJAAAABAAAAAAAAAAeAAAAaAAAAAAAAAAAAAAAAAAAAAAAAAAAAAAAECcAABAnAAAAAAAAAAAAAAAAAAAAAAAAAAAAAAAAAAAAAAAAAAAAABQAAAAAAAAAwMD/AAAAAABkAAAAMgAAAAAAAABkAAAAAAAAAH9/fwAKAAAAIgAAABgAAAAAAAAAAAAAAAAAAAAAAAAAAAAAAAAAAAAkAAAAJAAAAAAAAAAHAAAAAAAAAAAAAAAAAAAAAAAAAAAAAAAAAAAAf39/ACUAAABYAAAAAAAAAAAAAAAAAAAAAAAAAAAAAAAAAAAAAAAAAAAAAAAAAAAAAAAAAAAAAAA/AAAAAAAAAKCGAQAAAAAAAAAAAAAAAAAMAAAAAQAAAAAAAAAAAAAAAAAAAB8AAABUAAAAAAAABQAAAAEAAAAAAAAAAAAAAAAAAAAAAAAAAAAAAAAAAAAAAAAAAAAAAAJ/f38AAAAAA8zMzADAwP8Af39/AAAAAAAAAAAAAAAAAAAAAAAAAAAAIQAAABgAAAAUAAAAKAUAABonAAAIFgAAWSkAABAAAAAmAAAACAAAAAAAAAAAAAAA"/>
               </a:ext>
             </a:extLst>
           </p:cNvSpPr>
@@ -2908,11 +2948,12 @@
           <a:lstStyle/>
           <a:p>
             <a:pPr>
-              <a:defRPr lang="en-us"/>
+              <a:defRPr lang="en-US"/>
             </a:pPr>
             <a:fld id="{30AED7AD-E3DD-FB21-9316-157499586540}" type="datetime1">
-              <a:t>3/4/2026</a:t>
+              <a:t>4/21/2026</a:t>
             </a:fld>
+            <a:endParaRPr/>
           </a:p>
         </p:txBody>
       </p:sp>
@@ -2923,7 +2964,7 @@
             <a:spLocks noGrp="1" noChangeArrowheads="1"/>
             <a:extLst>
               <a:ext uri="smNativeData">
-                <pr:smNativeData xmlns:pr="smNativeData" xmlns="smNativeData" val="SMDATA_15_FLquaRMAAAAlAAAAZAAAAA0AAAAAkAAAAEgAAACQAAAASAAAAAAAAAABAAAAAAAAAAEAAABQAAAAAAAAAAAA4D8AAAAAAADgPwAAAAAAAOA/AAAAAAAA4D8AAAAAAADgPwAAAAAAAOA/AAAAAAAA4D8AAAAAAADgPwAAAAAAAOA/AAAAAAAA4D8CAAAAjAAAAAAAAAAAAAAAW5vVDP///wgAAAAAAAAAAAAAAAAAAAAAAAAAAAAAAAAAAAAAZAAAAAEAAABAAAAAAAAAAAAAAAAAAAAAAAAAAAAAAAAAAAAAAAAAAAAAAAAAAAAAAAAAAAAAAAAAAAAAAAAAAAAAAAAAAAAAAAAAAAAAAAAAAAAAAAAAAAAAAAAAAAAAFAAAADwAAAAAAAAAAAAAAAAAAAkUAAAAAQAAABQAAAAUAAAAFAAAAAEAAAAAAAAAZAAAAGQAAAAAAAAAZAAAAGQAAAAVAAAAYAAAAAAAAAAAAAAADwAAACADAAAAAAAAAAAAAAEAAACgMgAAVgcAAKr4//8BAAAAf39/AAEAAABkAAAAAAAAABQAAABAHwAAAAAAACYAAAAAAAAAwOD//wAAAAAmAAAAZAAAABYAAABMAAAAAAAAAAAAAAAEAAAAAAAAAAEAAADn5uYKAAAAACgAAAAoAAAAZAAAAGQAAAAAAAAAzMzMAAAAAABQAAAAUAAAAGQAAABkAAAAAAAAABcAAAAUAAAAAAAAAAAAAAD/fwAA/38AAAAAAAAJAAAABAAAAAAAAAAeAAAAaAAAAAAAAAAAAAAAAAAAAAAAAAAAAAAAECcAABAnAAAAAAAAAAAAAAAAAAAAAAAAAAAAAAAAAAAAAAAAAAAAABQAAAAAAAAAwMD/AAAAAABkAAAAMgAAAAAAAABkAAAAAAAAAH9/fwAKAAAAIgAAABgAAAAAAAAAAAAAAAAAAAAAAAAAAAAAAAAAAAAkAAAAJAAAAAAAAAAHAAAAAAAAAAAAAAAAAAAAAAAAAAAAAAAAAAAAf39/ACUAAABYAAAAAAAAAAAAAAAAAAAAAAAAAAAAAAAAAAAAAAAAAAAAAAAAAAAAAAAAAAAAAAA/AAAAAAAAAKCGAQAAAAAAAAAAAAAAAAAMAAAAAQAAAAAAAAAAAAAAAAAAAB8AAABUAAAAAAAABQAAAAEAAAAAAAAAAAAAAAAAAAAAAAAAAAAAAAAAAAAAAAAAAAAAAAJ/f38AAAAAA8zMzADAwP8Af39/AAAAAAAAAAAAAAAAAAAAAAAAAAAAIQAAABgAAAAUAAAA2BgAABonAAAoMgAAWSkAABAAAAAmAAAACAAAAAAAAAAAAAAA"/>
+                <pr:smNativeData xmlns="smNativeData" xmlns:pr="smNativeData" xmlns:p15="http://schemas.microsoft.com/office/powerpoint/2012/main" xmlns:p14="http://schemas.microsoft.com/office/powerpoint/2010/main" xmlns:mc="http://schemas.openxmlformats.org/markup-compatibility/2006" val="SMDATA_15_FLquaRMAAAAlAAAAZAAAAA0AAAAAkAAAAEgAAACQAAAASAAAAAAAAAABAAAAAAAAAAEAAABQAAAAAAAAAAAA4D8AAAAAAADgPwAAAAAAAOA/AAAAAAAA4D8AAAAAAADgPwAAAAAAAOA/AAAAAAAA4D8AAAAAAADgPwAAAAAAAOA/AAAAAAAA4D8CAAAAjAAAAAAAAAAAAAAAW5vVDP///wgAAAAAAAAAAAAAAAAAAAAAAAAAAAAAAAAAAAAAZAAAAAEAAABAAAAAAAAAAAAAAAAAAAAAAAAAAAAAAAAAAAAAAAAAAAAAAAAAAAAAAAAAAAAAAAAAAAAAAAAAAAAAAAAAAAAAAAAAAAAAAAAAAAAAAAAAAAAAAAAAAAAAFAAAADwAAAAAAAAAAAAAAAAAAAkUAAAAAQAAABQAAAAUAAAAFAAAAAEAAAAAAAAAZAAAAGQAAAAAAAAAZAAAAGQAAAAVAAAAYAAAAAAAAAAAAAAADwAAACADAAAAAAAAAAAAAAEAAACgMgAAVgcAAKr4//8BAAAAf39/AAEAAABkAAAAAAAAABQAAABAHwAAAAAAACYAAAAAAAAAwOD//wAAAAAmAAAAZAAAABYAAABMAAAAAAAAAAAAAAAEAAAAAAAAAAEAAADn5uYKAAAAACgAAAAoAAAAZAAAAGQAAAAAAAAAzMzMAAAAAABQAAAAUAAAAGQAAABkAAAAAAAAABcAAAAUAAAAAAAAAAAAAAD/fwAA/38AAAAAAAAJAAAABAAAAAAAAAAeAAAAaAAAAAAAAAAAAAAAAAAAAAAAAAAAAAAAECcAABAnAAAAAAAAAAAAAAAAAAAAAAAAAAAAAAAAAAAAAAAAAAAAABQAAAAAAAAAwMD/AAAAAABkAAAAMgAAAAAAAABkAAAAAAAAAH9/fwAKAAAAIgAAABgAAAAAAAAAAAAAAAAAAAAAAAAAAAAAAAAAAAAkAAAAJAAAAAAAAAAHAAAAAAAAAAAAAAAAAAAAAAAAAAAAAAAAAAAAf39/ACUAAABYAAAAAAAAAAAAAAAAAAAAAAAAAAAAAAAAAAAAAAAAAAAAAAAAAAAAAAAAAAAAAAA/AAAAAAAAAKCGAQAAAAAAAAAAAAAAAAAMAAAAAQAAAAAAAAAAAAAAAAAAAB8AAABUAAAAAAAABQAAAAEAAAAAAAAAAAAAAAAAAAAAAAAAAAAAAAAAAAAAAAAAAAAAAAJ/f38AAAAAA8zMzADAwP8Af39/AAAAAAAAAAAAAAAAAAAAAAAAAAAAIQAAABgAAAAUAAAA2BgAABonAAAoMgAAWSkAABAAAAAmAAAACAAAAAAAAAAAAAAA"/>
               </a:ext>
             </a:extLst>
           </p:cNvSpPr>
@@ -2937,8 +2978,9 @@
           <a:lstStyle/>
           <a:p>
             <a:pPr>
-              <a:defRPr lang="en-us"/>
-            </a:pPr>
+              <a:defRPr lang="en-US"/>
+            </a:pPr>
+            <a:endParaRPr/>
           </a:p>
         </p:txBody>
       </p:sp>
@@ -2949,7 +2991,7 @@
             <a:spLocks noGrp="1" noChangeArrowheads="1"/>
             <a:extLst>
               <a:ext uri="smNativeData">
-                <pr:smNativeData xmlns:pr="smNativeData" xmlns="smNativeData" val="SMDATA_15_FLquaRMAAAAlAAAAZAAAAA0AAAAAkAAAAEgAAACQAAAASAAAAAAAAAABAAAAAAAAAAEAAABQAAAAAAAAAAAA4D8AAAAAAADgPwAAAAAAAOA/AAAAAAAA4D8AAAAAAADgPwAAAAAAAOA/AAAAAAAA4D8AAAAAAADgPwAAAAAAAOA/AAAAAAAA4D8CAAAAjAAAAAAAAAAAAAAAW5vVDP///wgAAAAAAAAAAAAAAAAAAAAAAAAAAAAAAAAAAAAAZAAAAAEAAABAAAAAAAAAAAAAAAAAAAAAAAAAAAAAAAAAAAAAAAAAAAAAAAAAAAAAAAAAAAAAAAAAAAAAAAAAAAAAAAAAAAAAAAAAAAAAAAAAAAAAAAAAAAAAAAAAAAAAFAAAADwAAAAAAAAAAAAAAAAAAAkUAAAAAQAAABQAAAAUAAAAFAAAAAEAAAAAAAAAZAAAAGQAAAAAAAAAZAAAAGQAAAAVAAAAYAAAAAAAAAAAAAAADwAAACADAAAAAAAAAAAAAAEAAACgMgAAVgcAAKr4//8BAAAAf39/AAEAAABkAAAAAAAAABQAAABAHwAAAAAAACYAAAAAAAAAwOD//wAAAAAmAAAAZAAAABYAAABMAAAAAAAAAAAAAAAEAAAAAAAAAAEAAADn5uYKAAAAACgAAAAoAAAAZAAAAGQAAAAAAAAAzMzMAAAAAABQAAAAUAAAAGQAAABkAAAAAAAAABcAAAAUAAAAAAAAAAAAAAD/fwAA/38AAAAAAAAJAAAABAAAAAAAAAAeAAAAaAAAAAAAAAAAAAAAAAAAAAAAAAAAAAAAECcAABAnAAAAAAAAAAAAAAAAAAAAAAAAAAAAAAAAAAAAAAAAAAAAABQAAAAAAAAAwMD/AAAAAABkAAAAMgAAAAAAAABkAAAAAAAAAH9/fwAKAAAAIgAAABgAAAAAAAAAAAAAAAAAAAAAAAAAAAAAAAAAAAAkAAAAJAAAAAAAAAAHAAAAAAAAAAAAAAAAAAAAAAAAAAAAAAAAAAAAf39/ACUAAABYAAAAAAAAAAAAAAAAAAAAAAAAAAAAAAAAAAAAAAAAAAAAAAAAAAAAAAAAAAAAAAA/AAAAAAAAAKCGAQAAAAAAAAAAAAAAAAAMAAAAAQAAAAAAAAAAAAAAAAAAAB8AAABUAAAAAAAABQAAAAEAAAAAAAAAAAAAAAAAAAAAAAAAAAAAAAAAAAAAAAAAAAAAAAJ/f38AAAAAA8zMzADAwP8Af39/AAAAAAAAAAAAAAAAAAAAAAAAAAAAIQAAABgAAAAUAAAA+DQAABonAADYRQAAWSkAABAAAAAmAAAACAAAAAAAAAAAAAAA"/>
+                <pr:smNativeData xmlns="smNativeData" xmlns:pr="smNativeData" xmlns:p15="http://schemas.microsoft.com/office/powerpoint/2012/main" xmlns:p14="http://schemas.microsoft.com/office/powerpoint/2010/main" xmlns:mc="http://schemas.openxmlformats.org/markup-compatibility/2006" val="SMDATA_15_FLquaRMAAAAlAAAAZAAAAA0AAAAAkAAAAEgAAACQAAAASAAAAAAAAAABAAAAAAAAAAEAAABQAAAAAAAAAAAA4D8AAAAAAADgPwAAAAAAAOA/AAAAAAAA4D8AAAAAAADgPwAAAAAAAOA/AAAAAAAA4D8AAAAAAADgPwAAAAAAAOA/AAAAAAAA4D8CAAAAjAAAAAAAAAAAAAAAW5vVDP///wgAAAAAAAAAAAAAAAAAAAAAAAAAAAAAAAAAAAAAZAAAAAEAAABAAAAAAAAAAAAAAAAAAAAAAAAAAAAAAAAAAAAAAAAAAAAAAAAAAAAAAAAAAAAAAAAAAAAAAAAAAAAAAAAAAAAAAAAAAAAAAAAAAAAAAAAAAAAAAAAAAAAAFAAAADwAAAAAAAAAAAAAAAAAAAkUAAAAAQAAABQAAAAUAAAAFAAAAAEAAAAAAAAAZAAAAGQAAAAAAAAAZAAAAGQAAAAVAAAAYAAAAAAAAAAAAAAADwAAACADAAAAAAAAAAAAAAEAAACgMgAAVgcAAKr4//8BAAAAf39/AAEAAABkAAAAAAAAABQAAABAHwAAAAAAACYAAAAAAAAAwOD//wAAAAAmAAAAZAAAABYAAABMAAAAAAAAAAAAAAAEAAAAAAAAAAEAAADn5uYKAAAAACgAAAAoAAAAZAAAAGQAAAAAAAAAzMzMAAAAAABQAAAAUAAAAGQAAABkAAAAAAAAABcAAAAUAAAAAAAAAAAAAAD/fwAA/38AAAAAAAAJAAAABAAAAAAAAAAeAAAAaAAAAAAAAAAAAAAAAAAAAAAAAAAAAAAAECcAABAnAAAAAAAAAAAAAAAAAAAAAAAAAAAAAAAAAAAAAAAAAAAAABQAAAAAAAAAwMD/AAAAAABkAAAAMgAAAAAAAABkAAAAAAAAAH9/fwAKAAAAIgAAABgAAAAAAAAAAAAAAAAAAAAAAAAAAAAAAAAAAAAkAAAAJAAAAAAAAAAHAAAAAAAAAAAAAAAAAAAAAAAAAAAAAAAAAAAAf39/ACUAAABYAAAAAAAAAAAAAAAAAAAAAAAAAAAAAAAAAAAAAAAAAAAAAAAAAAAAAAAAAAAAAAA/AAAAAAAAAKCGAQAAAAAAAAAAAAAAAAAMAAAAAQAAAAAAAAAAAAAAAAAAAB8AAABUAAAAAAAABQAAAAEAAAAAAAAAAAAAAAAAAAAAAAAAAAAAAAAAAAAAAAAAAAAAAAJ/f38AAAAAA8zMzADAwP8Af39/AAAAAAAAAAAAAAAAAAAAAAAAAAAAIQAAABgAAAAUAAAA+DQAABonAADYRQAAWSkAABAAAAAmAAAACAAAAAAAAAAAAAAA"/>
               </a:ext>
             </a:extLst>
           </p:cNvSpPr>
@@ -2963,11 +3005,12 @@
           <a:lstStyle/>
           <a:p>
             <a:pPr>
-              <a:defRPr lang="en-us"/>
+              <a:defRPr lang="en-US"/>
             </a:pPr>
             <a:fld id="{30AE834C-02DD-FB75-9316-F420CD5865A1}" type="slidenum">
               <a:t>‹#›</a:t>
             </a:fld>
+            <a:endParaRPr/>
           </a:p>
         </p:txBody>
       </p:sp>
@@ -2981,7 +3024,7 @@
 </file>
 
 <file path=ppt/slideMasters/slideMaster1.xml><?xml version="1.0" encoding="utf-8"?>
-<p:sldMaster xmlns:p="http://schemas.openxmlformats.org/presentationml/2006/main" xmlns:mc="http://schemas.openxmlformats.org/markup-compatibility/2006" xmlns:p14="http://schemas.microsoft.com/office/powerpoint/2010/main" xmlns:p15="http://schemas.microsoft.com/office/powerpoint/2012/main" xmlns:r="http://schemas.openxmlformats.org/officeDocument/2006/relationships" xmlns:a="http://schemas.openxmlformats.org/drawingml/2006/main">
+<p:sldMaster xmlns:a="http://schemas.openxmlformats.org/drawingml/2006/main" xmlns:r="http://schemas.openxmlformats.org/officeDocument/2006/relationships" xmlns:p="http://schemas.openxmlformats.org/presentationml/2006/main">
   <p:cSld>
     <p:bg>
       <p:bgPr>
@@ -3012,7 +3055,7 @@
             <a:spLocks noGrp="1" noChangeArrowheads="1"/>
             <a:extLst>
               <a:ext uri="smNativeData">
-                <pr:smNativeData xmlns:pr="smNativeData" xmlns="smNativeData" val="SMDATA_15_FLquaRMAAAAlAAAAZAAAAA0AAAAAkAAAAEgAAACQAAAASAAAAAAAAAABAAAAAAAAAAEAAABQAAAAAAAAAAAA4D8AAAAAAADgPwAAAAAAAOA/AAAAAAAA4D8AAAAAAADgPwAAAAAAAOA/AAAAAAAA4D8AAAAAAADgPwAAAAAAAOA/AAAAAAAA4D8CAAAAjAAAAAAAAAAAAAAA////AP///wgAAAAAAAAAAAAAAAAAAAAAAAAAAAAAAAAAAAAAeAAAAAEAAABAAAAAAAAAAAAAAABaAAAAAAAAAAAAAAAAAAAAAAAAAAAAAAAAAAAAAAAAAAAAAAAAAAAAAAAAAAAAAAAAAAAAAAAAAAAAAAAAAAAAAAAAAAAAAAAAAAAAFAAAADwAAAAAAAAAAAAAAAAAAAAPAAAAAQAAACMAAAAjAAAAIwAAAB4AAAAAAAAAZAAAAGQAAAAAAAAAZAAAAGQAAAAVAAAAYAAAAAAAAAAAAAAADwAAACADAAAAAAAAAAAAAAEAAACgMgAAVgcAAKr4//8BAAAAf39/AAEAAABkAAAAAAAAABQAAABAHwAAAAAAACYAAAAAAAAAwOD//wAAAAAmAAAAZAAAABYAAABMAAAAAAAAAAAAAAAEAAAAAAAAAAEAAADn5uYKAAAAACgAAAAoAAAAZAAAAGQAAAAAAAAAzMzMAAAAAABQAAAAUAAAAGQAAABkAAAAAAAAABcAAAAUAAAAAAAAAAAAAAD/fwAA/38AAAAAAAAJAAAABAAAAC9zbGkeAAAAaAAAAAAAAAAAAAAAAAAAAAAAAAAAAAAAECcAABAnAAAAAAAAAAAAAAAAAAAAAAAAAAAAAAAAAAAAAAAAAAAAABQAAAAAAAAAwMD/AAAAAABkAAAAMgAAAAAAAABkAAAAAAAAAH9/fwAKAAAAIgAAABgAAAAAAAAAAAAAAAAAAAAAAAAAAAAAAAAAAAAkAAAAJAAAAAAAAAAHAAAAAAAAAAAAAAAAAAAAAAAAAAAAAAAAAAAAf39/ACUAAABYAAAAAAAAAAAAAAAAAAAAAAAAAAAAAAAAAAAAAAAAAAAAAAAAAAAAAAAAAAAAAAA/AAAAAAAAAKCGAQAAAAAAAAAAAAAAAAAMAAAAAQAAAAAAAAAAAAAAAAAAAB8AAABUAAAA////AAAAAAEAAAAAAAAAAAAAAAAAAAAAAAAAAAAAAAAAAAAAAAAAAAAAAAB/f38AAAAAA8zMzADAwP8Af39/AAAAAAAAAAAAAAAAAAAAAAAAAAAAIQAAABgAAAAUAAAAKAUAAD8CAADYRQAAZwoAABAAAAAmAAAACAAAAL8vAAAAAAAA"/>
+                <pr:smNativeData xmlns="smNativeData" xmlns:pr="smNativeData" xmlns:p15="http://schemas.microsoft.com/office/powerpoint/2012/main" xmlns:p14="http://schemas.microsoft.com/office/powerpoint/2010/main" xmlns:mc="http://schemas.openxmlformats.org/markup-compatibility/2006" val="SMDATA_15_FLquaRMAAAAlAAAAZAAAAA0AAAAAkAAAAEgAAACQAAAASAAAAAAAAAABAAAAAAAAAAEAAABQAAAAAAAAAAAA4D8AAAAAAADgPwAAAAAAAOA/AAAAAAAA4D8AAAAAAADgPwAAAAAAAOA/AAAAAAAA4D8AAAAAAADgPwAAAAAAAOA/AAAAAAAA4D8CAAAAjAAAAAAAAAAAAAAA////AP///wgAAAAAAAAAAAAAAAAAAAAAAAAAAAAAAAAAAAAAeAAAAAEAAABAAAAAAAAAAAAAAABaAAAAAAAAAAAAAAAAAAAAAAAAAAAAAAAAAAAAAAAAAAAAAAAAAAAAAAAAAAAAAAAAAAAAAAAAAAAAAAAAAAAAAAAAAAAAAAAAAAAAFAAAADwAAAAAAAAAAAAAAAAAAAAPAAAAAQAAACMAAAAjAAAAIwAAAB4AAAAAAAAAZAAAAGQAAAAAAAAAZAAAAGQAAAAVAAAAYAAAAAAAAAAAAAAADwAAACADAAAAAAAAAAAAAAEAAACgMgAAVgcAAKr4//8BAAAAf39/AAEAAABkAAAAAAAAABQAAABAHwAAAAAAACYAAAAAAAAAwOD//wAAAAAmAAAAZAAAABYAAABMAAAAAAAAAAAAAAAEAAAAAAAAAAEAAADn5uYKAAAAACgAAAAoAAAAZAAAAGQAAAAAAAAAzMzMAAAAAABQAAAAUAAAAGQAAABkAAAAAAAAABcAAAAUAAAAAAAAAAAAAAD/fwAA/38AAAAAAAAJAAAABAAAAC9zbGkeAAAAaAAAAAAAAAAAAAAAAAAAAAAAAAAAAAAAECcAABAnAAAAAAAAAAAAAAAAAAAAAAAAAAAAAAAAAAAAAAAAAAAAABQAAAAAAAAAwMD/AAAAAABkAAAAMgAAAAAAAABkAAAAAAAAAH9/fwAKAAAAIgAAABgAAAAAAAAAAAAAAAAAAAAAAAAAAAAAAAAAAAAkAAAAJAAAAAAAAAAHAAAAAAAAAAAAAAAAAAAAAAAAAAAAAAAAAAAAf39/ACUAAABYAAAAAAAAAAAAAAAAAAAAAAAAAAAAAAAAAAAAAAAAAAAAAAAAAAAAAAAAAAAAAAA/AAAAAAAAAKCGAQAAAAAAAAAAAAAAAAAMAAAAAQAAAAAAAAAAAAAAAAAAAB8AAABUAAAA////AAAAAAEAAAAAAAAAAAAAAAAAAAAAAAAAAAAAAAAAAAAAAAAAAAAAAAB/f38AAAAAA8zMzADAwP8Af39/AAAAAAAAAAAAAAAAAAAAAAAAAAAAIQAAABgAAAAUAAAAKAUAAD8CAADYRQAAZwoAABAAAAAmAAAACAAAAL8vAAAAAAAA"/>
               </a:ext>
             </a:extLst>
           </p:cNvSpPr>
@@ -3038,7 +3081,7 @@
           <a:lstStyle/>
           <a:p>
             <a:pPr>
-              <a:defRPr lang="en-us"/>
+              <a:defRPr lang="en-US"/>
             </a:pPr>
             <a:r>
               <a:t>Click to edit Master title style</a:t>
@@ -3053,7 +3096,7 @@
             <a:spLocks noGrp="1" noChangeArrowheads="1"/>
             <a:extLst>
               <a:ext uri="smNativeData">
-                <pr:smNativeData xmlns:pr="smNativeData" xmlns="smNativeData" val="SMDATA_15_FLquaRMAAAAlAAAAZAAAAA0AAAAAkAAAAEgAAACQAAAASAAAAAAAAAAAAAAAAAAAAAEAAABQAAAAAAAAAAAA4D8AAAAAAADgPwAAAAAAAOA/AAAAAAAA4D8AAAAAAADgPwAAAAAAAOA/AAAAAAAA4D8AAAAAAADgPwAAAAAAAOA/AAAAAAAA4D8CAAAAjAAAAAAAAAAAAAAA////AP///wgAAAAAAAAAAAAAAAAAAAAAAAAAAAAAAAAAAAAAeAAAAAEAAABAAAAAAAAAAAAAAABaAAAAAAAAAAAAAAAAAAAAAAAAAAAAAAAAAAAAAAAAAAAAAAAAAAAAAAAAAAAAAAAAAAAAAAAAAAAAAAAAAAAAAAAAAAAAAAAAAAAAFAAAADwAAAAAAAAAAAAAAAAAAAAPAAAAAQAAACMAAAAjAAAAIwAAAB4AAAAAAAAAZAAAAGQAAAAAAAAAZAAAAGQAAAAVAAAAYAAAAAAAAAAAAAAADwAAACADAAAAAAAAAAAAAAEAAACgMgAAVgcAAKr4//8BAAAAf39/AAEAAABkAAAAAAAAABQAAABAHwAAAAAAACYAAAAAAAAAwOD//wAAAAAmAAAAZAAAABYAAABMAAAAAAAAAAAAAAAEAAAAAAAAAAEAAADn5uYKAAAAACgAAAAoAAAAZAAAAGQAAAAAAAAAzMzMAAAAAABQAAAAUAAAAGQAAABkAAAAAAAAABcAAAAUAAAAAAAAAAAAAAD/fwAA/38AAAAAAAAJAAAABAAAAPz///8eAAAAaAAAAAAAAAAAAAAAAAAAAAAAAAAAAAAAECcAABAnAAAAAAAAAAAAAAAAAAAAAAAAAAAAAAAAAAAAAAAAAAAAABQAAAAAAAAAwMD/AAAAAABkAAAAMgAAAAAAAABkAAAAAAAAAH9/fwAKAAAAIgAAABgAAAAAAAAAAAAAAAAAAAAAAAAAAAAAAAAAAAAkAAAAJAAAAAAAAAAHAAAAAAAAAAAAAAAAAAAAAAAAAAAAAAAAAAAAf39/ACUAAABYAAAAAAAAAAAAAAAAAAAAAAAAAAAAAAAAAAAAAAAAAAAAAAAAAAAAAAAAAAAAAAA/AAAAAAAAAKCGAQAAAAAAAAAAAAAAAAAMAAAAAQAAAAAAAAAAAAAAAAAAAB8AAABUAAAA////AAAAAAEAAAAAAAAAAAAAAAAAAAAAAAAAAAAAAAAAAAAAAAAAAAAAAAB/f38AAAAAA8zMzADAwP8Af39/AAAAAAAAAAAAAAAAAAAAAAAAAAAAIQAAABgAAAAUAAAAKAUAADsLAADYRQAAACYAABAAAAAmAAAACAAAAD8vAAAAAAAA"/>
+                <pr:smNativeData xmlns="smNativeData" xmlns:pr="smNativeData" xmlns:p15="http://schemas.microsoft.com/office/powerpoint/2012/main" xmlns:p14="http://schemas.microsoft.com/office/powerpoint/2010/main" xmlns:mc="http://schemas.openxmlformats.org/markup-compatibility/2006" val="SMDATA_15_FLquaRMAAAAlAAAAZAAAAA0AAAAAkAAAAEgAAACQAAAASAAAAAAAAAAAAAAAAAAAAAEAAABQAAAAAAAAAAAA4D8AAAAAAADgPwAAAAAAAOA/AAAAAAAA4D8AAAAAAADgPwAAAAAAAOA/AAAAAAAA4D8AAAAAAADgPwAAAAAAAOA/AAAAAAAA4D8CAAAAjAAAAAAAAAAAAAAA////AP///wgAAAAAAAAAAAAAAAAAAAAAAAAAAAAAAAAAAAAAeAAAAAEAAABAAAAAAAAAAAAAAABaAAAAAAAAAAAAAAAAAAAAAAAAAAAAAAAAAAAAAAAAAAAAAAAAAAAAAAAAAAAAAAAAAAAAAAAAAAAAAAAAAAAAAAAAAAAAAAAAAAAAFAAAADwAAAAAAAAAAAAAAAAAAAAPAAAAAQAAACMAAAAjAAAAIwAAAB4AAAAAAAAAZAAAAGQAAAAAAAAAZAAAAGQAAAAVAAAAYAAAAAAAAAAAAAAADwAAACADAAAAAAAAAAAAAAEAAACgMgAAVgcAAKr4//8BAAAAf39/AAEAAABkAAAAAAAAABQAAABAHwAAAAAAACYAAAAAAAAAwOD//wAAAAAmAAAAZAAAABYAAABMAAAAAAAAAAAAAAAEAAAAAAAAAAEAAADn5uYKAAAAACgAAAAoAAAAZAAAAGQAAAAAAAAAzMzMAAAAAABQAAAAUAAAAGQAAABkAAAAAAAAABcAAAAUAAAAAAAAAAAAAAD/fwAA/38AAAAAAAAJAAAABAAAAPz///8eAAAAaAAAAAAAAAAAAAAAAAAAAAAAAAAAAAAAECcAABAnAAAAAAAAAAAAAAAAAAAAAAAAAAAAAAAAAAAAAAAAAAAAABQAAAAAAAAAwMD/AAAAAABkAAAAMgAAAAAAAABkAAAAAAAAAH9/fwAKAAAAIgAAABgAAAAAAAAAAAAAAAAAAAAAAAAAAAAAAAAAAAAkAAAAJAAAAAAAAAAHAAAAAAAAAAAAAAAAAAAAAAAAAAAAAAAAAAAAf39/ACUAAABYAAAAAAAAAAAAAAAAAAAAAAAAAAAAAAAAAAAAAAAAAAAAAAAAAAAAAAAAAAAAAAA/AAAAAAAAAKCGAQAAAAAAAAAAAAAAAAAMAAAAAQAAAAAAAAAAAAAAAAAAAB8AAABUAAAA////AAAAAAEAAAAAAAAAAAAAAAAAAAAAAAAAAAAAAAAAAAAAAAAAAAAAAAB/f38AAAAAA8zMzADAwP8Af39/AAAAAAAAAAAAAAAAAAAAAAAAAAAAIQAAABgAAAAUAAAAKAUAADsLAADYRQAAACYAABAAAAAmAAAACAAAAD8vAAAAAAAA"/>
               </a:ext>
             </a:extLst>
           </p:cNvSpPr>
@@ -3079,7 +3122,7 @@
           <a:lstStyle/>
           <a:p>
             <a:pPr>
-              <a:defRPr lang="en-us"/>
+              <a:defRPr lang="en-US"/>
             </a:pPr>
             <a:r>
               <a:t>Click to edit Master text styles</a:t>
@@ -3087,7 +3130,7 @@
           </a:p>
           <a:p>
             <a:pPr lvl="1">
-              <a:defRPr lang="en-us"/>
+              <a:defRPr lang="en-US"/>
             </a:pPr>
             <a:r>
               <a:t>Second level</a:t>
@@ -3095,7 +3138,7 @@
           </a:p>
           <a:p>
             <a:pPr lvl="2">
-              <a:defRPr lang="en-us"/>
+              <a:defRPr lang="en-US"/>
             </a:pPr>
             <a:r>
               <a:t>Third level</a:t>
@@ -3103,7 +3146,7 @@
           </a:p>
           <a:p>
             <a:pPr lvl="3">
-              <a:defRPr lang="en-us"/>
+              <a:defRPr lang="en-US"/>
             </a:pPr>
             <a:r>
               <a:t>Fourth level</a:t>
@@ -3111,7 +3154,7 @@
           </a:p>
           <a:p>
             <a:pPr lvl="4">
-              <a:defRPr lang="en-us"/>
+              <a:defRPr lang="en-US"/>
             </a:pPr>
             <a:r>
               <a:t>Fifth level</a:t>
@@ -3126,7 +3169,7 @@
             <a:spLocks noGrp="1" noChangeArrowheads="1"/>
             <a:extLst>
               <a:ext uri="smNativeData">
-                <pr:smNativeData xmlns:pr="smNativeData" xmlns="smNativeData" val="SMDATA_15_FLquaRMAAAAlAAAAZAAAAA0AAAAAkAAAAEgAAACQAAAASAAAAAAAAAABAAAAAAAAAAEAAABQAAAAAAAAAAAA4D8AAAAAAADgPwAAAAAAAOA/AAAAAAAA4D8AAAAAAADgPwAAAAAAAOA/AAAAAAAA4D8AAAAAAADgPwAAAAAAAOA/AAAAAAAA4D8CAAAAjAAAAAAAAAAAAAAA////AP///wgAAAAAAAAAAAAAAAAAAAAAAAAAAAAAAAAAAAAAeAAAAAEAAABAAAAAAAAAAAAAAABaAAAAAAAAAAAAAAAAAAAAAAAAAAAAAAAAAAAAAAAAAAAAAAAAAAAAAAAAAAAAAAAAAAAAAAAAAAAAAAAAAAAAAAAAAAAAAAAAAAAAFAAAADwAAAAAAAAAAAAAAAAAAAAPAAAAAQAAACMAAAAjAAAAIwAAAB4AAAAAAAAAZAAAAGQAAAAAAAAAZAAAAGQAAAAVAAAAYAAAAAAAAAAAAAAADwAAACADAAAAAAAAAAAAAAEAAACgMgAAVgcAAKr4//8BAAAAf39/AAEAAABkAAAAAAAAABQAAABAHwAAAAAAACYAAAAAAAAAwOD//wAAAAAmAAAAZAAAABYAAABMAAAAAAAAAAAAAAAEAAAAAAAAAAEAAADn5uYKAAAAACgAAAAoAAAAZAAAAGQAAAAAAAAAzMzMAAAAAABQAAAAUAAAAGQAAABkAAAAAAAAABcAAAAUAAAAAAAAAAAAAAD/fwAA/38AAAAAAAAJAAAABAAAAPz///8eAAAAaAAAAAAAAAAAAAAAAAAAAAAAAAAAAAAAECcAABAnAAAAAAAAAAAAAAAAAAAAAAAAAAAAAAAAAAAAAAAAAAAAABQAAAAAAAAAwMD/AAAAAABkAAAAMgAAAAAAAABkAAAAAAAAAH9/fwAKAAAAIgAAABgAAAAAAAAAAAAAAAAAAAAAAAAAAAAAAAAAAAAkAAAAJAAAAAAAAAAHAAAAAAAAAAAAAAAAAAAAAAAAAAAAAAAAAAAAf39/ACUAAABYAAAAAAAAAAAAAAAAAAAAAAAAAAAAAAAAAAAAAAAAAAAAAAAAAAAAAAAAAAAAAAA/AAAAAAAAAKCGAQAAAAAAAAAAAAAAAAAMAAAAAQAAAAAAAAAAAAAAAAAAAB8AAABUAAAA////AAAAAAEAAAAAAAAAAAAAAAAAAAAAAAAAAAAAAAAAAAAAAAAAAAAAAAB/f38AAAAAA8zMzADAwP8Af39/AAAAAAAAAAAAAAAAAAAAAAAAAAAAIQAAABgAAAAUAAAAKAUAABonAAAIFgAAWSkAABAAAAAmAAAACAAAAL+PAAAAAAAA"/>
+                <pr:smNativeData xmlns="smNativeData" xmlns:pr="smNativeData" xmlns:p15="http://schemas.microsoft.com/office/powerpoint/2012/main" xmlns:p14="http://schemas.microsoft.com/office/powerpoint/2010/main" xmlns:mc="http://schemas.openxmlformats.org/markup-compatibility/2006" val="SMDATA_15_FLquaRMAAAAlAAAAZAAAAA0AAAAAkAAAAEgAAACQAAAASAAAAAAAAAABAAAAAAAAAAEAAABQAAAAAAAAAAAA4D8AAAAAAADgPwAAAAAAAOA/AAAAAAAA4D8AAAAAAADgPwAAAAAAAOA/AAAAAAAA4D8AAAAAAADgPwAAAAAAAOA/AAAAAAAA4D8CAAAAjAAAAAAAAAAAAAAA////AP///wgAAAAAAAAAAAAAAAAAAAAAAAAAAAAAAAAAAAAAeAAAAAEAAABAAAAAAAAAAAAAAABaAAAAAAAAAAAAAAAAAAAAAAAAAAAAAAAAAAAAAAAAAAAAAAAAAAAAAAAAAAAAAAAAAAAAAAAAAAAAAAAAAAAAAAAAAAAAAAAAAAAAFAAAADwAAAAAAAAAAAAAAAAAAAAPAAAAAQAAACMAAAAjAAAAIwAAAB4AAAAAAAAAZAAAAGQAAAAAAAAAZAAAAGQAAAAVAAAAYAAAAAAAAAAAAAAADwAAACADAAAAAAAAAAAAAAEAAACgMgAAVgcAAKr4//8BAAAAf39/AAEAAABkAAAAAAAAABQAAABAHwAAAAAAACYAAAAAAAAAwOD//wAAAAAmAAAAZAAAABYAAABMAAAAAAAAAAAAAAAEAAAAAAAAAAEAAADn5uYKAAAAACgAAAAoAAAAZAAAAGQAAAAAAAAAzMzMAAAAAABQAAAAUAAAAGQAAABkAAAAAAAAABcAAAAUAAAAAAAAAAAAAAD/fwAA/38AAAAAAAAJAAAABAAAAPz///8eAAAAaAAAAAAAAAAAAAAAAAAAAAAAAAAAAAAAECcAABAnAAAAAAAAAAAAAAAAAAAAAAAAAAAAAAAAAAAAAAAAAAAAABQAAAAAAAAAwMD/AAAAAABkAAAAMgAAAAAAAABkAAAAAAAAAH9/fwAKAAAAIgAAABgAAAAAAAAAAAAAAAAAAAAAAAAAAAAAAAAAAAAkAAAAJAAAAAAAAAAHAAAAAAAAAAAAAAAAAAAAAAAAAAAAAAAAAAAAf39/ACUAAABYAAAAAAAAAAAAAAAAAAAAAAAAAAAAAAAAAAAAAAAAAAAAAAAAAAAAAAAAAAAAAAA/AAAAAAAAAKCGAQAAAAAAAAAAAAAAAAAMAAAAAQAAAAAAAAAAAAAAAAAAAB8AAABUAAAA////AAAAAAEAAAAAAAAAAAAAAAAAAAAAAAAAAAAAAAAAAAAAAAAAAAAAAAB/f38AAAAAA8zMzADAwP8Af39/AAAAAAAAAAAAAAAAAAAAAAAAAAAAIQAAABgAAAAUAAAAKAUAABonAAAIFgAAWSkAABAAAAAmAAAACAAAAL+PAAAAAAAA"/>
               </a:ext>
             </a:extLst>
           </p:cNvSpPr>
@@ -3151,44 +3194,45 @@
           </a:bodyPr>
           <a:lstStyle>
             <a:lvl1pPr algn="l">
-              <a:defRPr lang="en-us" sz="1200" cap="none">
+              <a:defRPr lang="en-US" sz="1200" cap="none">
                 <a:solidFill>
                   <a:srgbClr val="8C8C8C"/>
                 </a:solidFill>
               </a:defRPr>
             </a:lvl1pPr>
             <a:lvl2pPr>
-              <a:defRPr lang="en-us"/>
+              <a:defRPr lang="en-US"/>
             </a:lvl2pPr>
             <a:lvl3pPr>
-              <a:defRPr lang="en-us"/>
+              <a:defRPr lang="en-US"/>
             </a:lvl3pPr>
             <a:lvl4pPr>
-              <a:defRPr lang="en-us"/>
+              <a:defRPr lang="en-US"/>
             </a:lvl4pPr>
             <a:lvl5pPr>
-              <a:defRPr lang="en-us"/>
+              <a:defRPr lang="en-US"/>
             </a:lvl5pPr>
             <a:lvl6pPr>
-              <a:defRPr lang="en-us"/>
+              <a:defRPr lang="en-US"/>
             </a:lvl6pPr>
             <a:lvl7pPr>
-              <a:defRPr lang="en-us"/>
+              <a:defRPr lang="en-US"/>
             </a:lvl7pPr>
             <a:lvl8pPr>
-              <a:defRPr lang="en-us"/>
+              <a:defRPr lang="en-US"/>
             </a:lvl8pPr>
             <a:lvl9pPr>
-              <a:defRPr lang="en-us"/>
+              <a:defRPr lang="en-US"/>
             </a:lvl9pPr>
           </a:lstStyle>
           <a:p>
             <a:pPr>
-              <a:defRPr lang="en-us"/>
+              <a:defRPr lang="en-US"/>
             </a:pPr>
             <a:fld id="{30AEB9DD-93DD-FB4F-9316-651AF7586530}" type="datetime1">
-              <a:t/>
+              <a:t>4/21/2026</a:t>
             </a:fld>
+            <a:endParaRPr/>
           </a:p>
         </p:txBody>
       </p:sp>
@@ -3199,7 +3243,7 @@
             <a:spLocks noGrp="1" noChangeArrowheads="1"/>
             <a:extLst>
               <a:ext uri="smNativeData">
-                <pr:smNativeData xmlns:pr="smNativeData" xmlns="smNativeData" val="SMDATA_15_FLquaRMAAAAlAAAAZAAAAA0AAAAAkAAAAEgAAACQAAAASAAAAAAAAAABAAAAAAAAAAEAAABQAAAAAAAAAAAA4D8AAAAAAADgPwAAAAAAAOA/AAAAAAAA4D8AAAAAAADgPwAAAAAAAOA/AAAAAAAA4D8AAAAAAADgPwAAAAAAAOA/AAAAAAAA4D8CAAAAjAAAAAAAAAAAAAAA////AP///wgAAAAAAAAAAAAAAAAAAAAAAAAAAAAAAAAAAAAAeAAAAAEAAABAAAAAAAAAAAAAAABaAAAAAAAAAAAAAAAAAAAAAAAAAAAAAAAAAAAAAAAAAAAAAAAAAAAAAAAAAAAAAAAAAAAAAAAAAAAAAAAAAAAAAAAAAAAAAAAAAAAAFAAAADwAAAAAAAAAAAAAAAAAAAAPAAAAAQAAACMAAAAjAAAAIwAAAB4AAAAAAAAAZAAAAGQAAAAAAAAAZAAAAGQAAAAVAAAAYAAAAAAAAAAAAAAADwAAACADAAAAAAAAAAAAAAEAAACgMgAAVgcAAKr4//8BAAAAf39/AAEAAABkAAAAAAAAABQAAABAHwAAAAAAACYAAAAAAAAAwOD//wAAAAAmAAAAZAAAABYAAABMAAAAAAAAAAAAAAAEAAAAAAAAAAEAAADn5uYKAAAAACgAAAAoAAAAZAAAAGQAAAAAAAAAzMzMAAAAAABQAAAAUAAAAGQAAABkAAAAAAAAABcAAAAUAAAAAAAAAAAAAAD/fwAA/38AAAAAAAAJAAAABAAAAGxpY2keAAAAaAAAAAAAAAAAAAAAAAAAAAAAAAAAAAAAECcAABAnAAAAAAAAAAAAAAAAAAAAAAAAAAAAAAAAAAAAAAAAAAAAABQAAAAAAAAAwMD/AAAAAABkAAAAMgAAAAAAAABkAAAAAAAAAH9/fwAKAAAAIgAAABgAAAAAAAAAAAAAAAAAAAAAAAAAAAAAAAAAAAAkAAAAJAAAAAAAAAAHAAAAAAAAAAAAAAAAAAAAAAAAAAAAAAAAAAAAf39/ACUAAABYAAAAAAAAAAAAAAAAAAAAAAAAAAAAAAAAAAAAAAAAAAAAAAAAAAAAAAAAAAAAAAA/AAAAAAAAAKCGAQAAAAAAAAAAAAAAAAAMAAAAAQAAAAAAAAAAAAAAAAAAAB8AAABUAAAA////AAAAAAEAAAAAAAAAAAAAAAAAAAAAAAAAAAAAAAAAAAAAAAAAAAAAAAB/f38AAAAAA8zMzADAwP8Af39/AAAAAAAAAAAAAAAAAAAAAAAAAAAAIQAAABgAAAAUAAAA2BgAABonAAAoMgAAWSkAABAAAAAmAAAACAAAAL+PAAAAAAAA"/>
+                <pr:smNativeData xmlns="smNativeData" xmlns:pr="smNativeData" xmlns:p15="http://schemas.microsoft.com/office/powerpoint/2012/main" xmlns:p14="http://schemas.microsoft.com/office/powerpoint/2010/main" xmlns:mc="http://schemas.openxmlformats.org/markup-compatibility/2006" val="SMDATA_15_FLquaRMAAAAlAAAAZAAAAA0AAAAAkAAAAEgAAACQAAAASAAAAAAAAAABAAAAAAAAAAEAAABQAAAAAAAAAAAA4D8AAAAAAADgPwAAAAAAAOA/AAAAAAAA4D8AAAAAAADgPwAAAAAAAOA/AAAAAAAA4D8AAAAAAADgPwAAAAAAAOA/AAAAAAAA4D8CAAAAjAAAAAAAAAAAAAAA////AP///wgAAAAAAAAAAAAAAAAAAAAAAAAAAAAAAAAAAAAAeAAAAAEAAABAAAAAAAAAAAAAAABaAAAAAAAAAAAAAAAAAAAAAAAAAAAAAAAAAAAAAAAAAAAAAAAAAAAAAAAAAAAAAAAAAAAAAAAAAAAAAAAAAAAAAAAAAAAAAAAAAAAAFAAAADwAAAAAAAAAAAAAAAAAAAAPAAAAAQAAACMAAAAjAAAAIwAAAB4AAAAAAAAAZAAAAGQAAAAAAAAAZAAAAGQAAAAVAAAAYAAAAAAAAAAAAAAADwAAACADAAAAAAAAAAAAAAEAAACgMgAAVgcAAKr4//8BAAAAf39/AAEAAABkAAAAAAAAABQAAABAHwAAAAAAACYAAAAAAAAAwOD//wAAAAAmAAAAZAAAABYAAABMAAAAAAAAAAAAAAAEAAAAAAAAAAEAAADn5uYKAAAAACgAAAAoAAAAZAAAAGQAAAAAAAAAzMzMAAAAAABQAAAAUAAAAGQAAABkAAAAAAAAABcAAAAUAAAAAAAAAAAAAAD/fwAA/38AAAAAAAAJAAAABAAAAGxpY2keAAAAaAAAAAAAAAAAAAAAAAAAAAAAAAAAAAAAECcAABAnAAAAAAAAAAAAAAAAAAAAAAAAAAAAAAAAAAAAAAAAAAAAABQAAAAAAAAAwMD/AAAAAABkAAAAMgAAAAAAAABkAAAAAAAAAH9/fwAKAAAAIgAAABgAAAAAAAAAAAAAAAAAAAAAAAAAAAAAAAAAAAAkAAAAJAAAAAAAAAAHAAAAAAAAAAAAAAAAAAAAAAAAAAAAAAAAAAAAf39/ACUAAABYAAAAAAAAAAAAAAAAAAAAAAAAAAAAAAAAAAAAAAAAAAAAAAAAAAAAAAAAAAAAAAA/AAAAAAAAAKCGAQAAAAAAAAAAAAAAAAAMAAAAAQAAAAAAAAAAAAAAAAAAAB8AAABUAAAA////AAAAAAEAAAAAAAAAAAAAAAAAAAAAAAAAAAAAAAAAAAAAAAAAAAAAAAB/f38AAAAAA8zMzADAwP8Af39/AAAAAAAAAAAAAAAAAAAAAAAAAAAAIQAAABgAAAAUAAAA2BgAABonAAAoMgAAWSkAABAAAAAmAAAACAAAAL+PAAAAAAAA"/>
               </a:ext>
             </a:extLst>
           </p:cNvSpPr>
@@ -3224,41 +3268,42 @@
           </a:bodyPr>
           <a:lstStyle>
             <a:lvl1pPr algn="ctr">
-              <a:defRPr lang="en-us" sz="1200" cap="none">
+              <a:defRPr lang="en-US" sz="1200" cap="none">
                 <a:solidFill>
                   <a:srgbClr val="8C8C8C"/>
                 </a:solidFill>
               </a:defRPr>
             </a:lvl1pPr>
             <a:lvl2pPr>
-              <a:defRPr lang="en-us"/>
+              <a:defRPr lang="en-US"/>
             </a:lvl2pPr>
             <a:lvl3pPr>
-              <a:defRPr lang="en-us"/>
+              <a:defRPr lang="en-US"/>
             </a:lvl3pPr>
             <a:lvl4pPr>
-              <a:defRPr lang="en-us"/>
+              <a:defRPr lang="en-US"/>
             </a:lvl4pPr>
             <a:lvl5pPr>
-              <a:defRPr lang="en-us"/>
+              <a:defRPr lang="en-US"/>
             </a:lvl5pPr>
             <a:lvl6pPr>
-              <a:defRPr lang="en-us"/>
+              <a:defRPr lang="en-US"/>
             </a:lvl6pPr>
             <a:lvl7pPr>
-              <a:defRPr lang="en-us"/>
+              <a:defRPr lang="en-US"/>
             </a:lvl7pPr>
             <a:lvl8pPr>
-              <a:defRPr lang="en-us"/>
+              <a:defRPr lang="en-US"/>
             </a:lvl8pPr>
             <a:lvl9pPr>
-              <a:defRPr lang="en-us"/>
+              <a:defRPr lang="en-US"/>
             </a:lvl9pPr>
           </a:lstStyle>
           <a:p>
             <a:pPr>
-              <a:defRPr lang="en-us"/>
-            </a:pPr>
+              <a:defRPr lang="en-US"/>
+            </a:pPr>
+            <a:endParaRPr/>
           </a:p>
         </p:txBody>
       </p:sp>
@@ -3269,7 +3314,7 @@
             <a:spLocks noGrp="1" noChangeArrowheads="1"/>
             <a:extLst>
               <a:ext uri="smNativeData">
-                <pr:smNativeData xmlns:pr="smNativeData" xmlns="smNativeData" val="SMDATA_15_FLquaRMAAAAlAAAAZAAAAA0AAAAAkAAAAEgAAACQAAAASAAAAAAAAAABAAAAAAAAAAEAAABQAAAAAAAAAAAA4D8AAAAAAADgPwAAAAAAAOA/AAAAAAAA4D8AAAAAAADgPwAAAAAAAOA/AAAAAAAA4D8AAAAAAADgPwAAAAAAAOA/AAAAAAAA4D8CAAAAjAAAAAAAAAAAAAAA////AP///wgAAAAAAAAAAAAAAAAAAAAAAAAAAAAAAAAAAAAAeAAAAAEAAABAAAAAAAAAAAAAAABaAAAAAAAAAAAAAAAAAAAAAAAAAAAAAAAAAAAAAAAAAAAAAAAAAAAAAAAAAAAAAAAAAAAAAAAAAAAAAAAAAAAAAAAAAAAAAAAAAAAAFAAAADwAAAAAAAAAAAAAAAAAAAAPAAAAAQAAACMAAAAjAAAAIwAAAB4AAAAAAAAAZAAAAGQAAAAAAAAAZAAAAGQAAAAVAAAAYAAAAAAAAAAAAAAADwAAACADAAAAAAAAAAAAAAEAAACgMgAAVgcAAKr4//8BAAAAf39/AAEAAABkAAAAAAAAABQAAABAHwAAAAAAACYAAAAAAAAAwOD//wAAAAAmAAAAZAAAABYAAABMAAAAAAAAAAAAAAAEAAAAAAAAAAEAAADn5uYKAAAAACgAAAAoAAAAZAAAAGQAAAAAAAAAzMzMAAAAAABQAAAAUAAAAGQAAABkAAAAAAAAABcAAAAUAAAAAAAAAAAAAAD/fwAA/38AAAAAAAAJAAAABAAAAPz///8eAAAAaAAAAAAAAAAAAAAAAAAAAAAAAAAAAAAAECcAABAnAAAAAAAAAAAAAAAAAAAAAAAAAAAAAAAAAAAAAAAAAAAAABQAAAAAAAAAwMD/AAAAAABkAAAAMgAAAAAAAABkAAAAAAAAAH9/fwAKAAAAIgAAABgAAAAAAAAAAAAAAAAAAAAAAAAAAAAAAAAAAAAkAAAAJAAAAAAAAAAHAAAAAAAAAAAAAAAAAAAAAAAAAAAAAAAAAAAAf39/ACUAAABYAAAAAAAAAAAAAAAAAAAAAAAAAAAAAAAAAAAAAAAAAAAAAAAAAAAAAAAAAAAAAAA/AAAAAAAAAKCGAQAAAAAAAAAAAAAAAAAMAAAAAQAAAAAAAAAAAAAAAAAAAB8AAABUAAAA////AAAAAAEAAAAAAAAAAAAAAAAAAAAAAAAAAAAAAAAAAAAAAAAAAAAAAAB/f38AAAAAA8zMzADAwP8Af39/AAAAAAAAAAAAAAAAAAAAAAAAAAAAIQAAABgAAAAUAAAA+DQAABonAADYRQAAWSkAABAAAAAmAAAACAAAAL+PAAAAAAAA"/>
+                <pr:smNativeData xmlns="smNativeData" xmlns:pr="smNativeData" xmlns:p15="http://schemas.microsoft.com/office/powerpoint/2012/main" xmlns:p14="http://schemas.microsoft.com/office/powerpoint/2010/main" xmlns:mc="http://schemas.openxmlformats.org/markup-compatibility/2006" val="SMDATA_15_FLquaRMAAAAlAAAAZAAAAA0AAAAAkAAAAEgAAACQAAAASAAAAAAAAAABAAAAAAAAAAEAAABQAAAAAAAAAAAA4D8AAAAAAADgPwAAAAAAAOA/AAAAAAAA4D8AAAAAAADgPwAAAAAAAOA/AAAAAAAA4D8AAAAAAADgPwAAAAAAAOA/AAAAAAAA4D8CAAAAjAAAAAAAAAAAAAAA////AP///wgAAAAAAAAAAAAAAAAAAAAAAAAAAAAAAAAAAAAAeAAAAAEAAABAAAAAAAAAAAAAAABaAAAAAAAAAAAAAAAAAAAAAAAAAAAAAAAAAAAAAAAAAAAAAAAAAAAAAAAAAAAAAAAAAAAAAAAAAAAAAAAAAAAAAAAAAAAAAAAAAAAAFAAAADwAAAAAAAAAAAAAAAAAAAAPAAAAAQAAACMAAAAjAAAAIwAAAB4AAAAAAAAAZAAAAGQAAAAAAAAAZAAAAGQAAAAVAAAAYAAAAAAAAAAAAAAADwAAACADAAAAAAAAAAAAAAEAAACgMgAAVgcAAKr4//8BAAAAf39/AAEAAABkAAAAAAAAABQAAABAHwAAAAAAACYAAAAAAAAAwOD//wAAAAAmAAAAZAAAABYAAABMAAAAAAAAAAAAAAAEAAAAAAAAAAEAAADn5uYKAAAAACgAAAAoAAAAZAAAAGQAAAAAAAAAzMzMAAAAAABQAAAAUAAAAGQAAABkAAAAAAAAABcAAAAUAAAAAAAAAAAAAAD/fwAA/38AAAAAAAAJAAAABAAAAPz///8eAAAAaAAAAAAAAAAAAAAAAAAAAAAAAAAAAAAAECcAABAnAAAAAAAAAAAAAAAAAAAAAAAAAAAAAAAAAAAAAAAAAAAAABQAAAAAAAAAwMD/AAAAAABkAAAAMgAAAAAAAABkAAAAAAAAAH9/fwAKAAAAIgAAABgAAAAAAAAAAAAAAAAAAAAAAAAAAAAAAAAAAAAkAAAAJAAAAAAAAAAHAAAAAAAAAAAAAAAAAAAAAAAAAAAAAAAAAAAAf39/ACUAAABYAAAAAAAAAAAAAAAAAAAAAAAAAAAAAAAAAAAAAAAAAAAAAAAAAAAAAAAAAAAAAAA/AAAAAAAAAKCGAQAAAAAAAAAAAAAAAAAMAAAAAQAAAAAAAAAAAAAAAAAAAB8AAABUAAAA////AAAAAAEAAAAAAAAAAAAAAAAAAAAAAAAAAAAAAAAAAAAAAAAAAAAAAAB/f38AAAAAA8zMzADAwP8Af39/AAAAAAAAAAAAAAAAAAAAAAAAAAAAIQAAABgAAAAUAAAA+DQAABonAADYRQAAWSkAABAAAAAmAAAACAAAAL+PAAAAAAAA"/>
               </a:ext>
             </a:extLst>
           </p:cNvSpPr>
@@ -3294,44 +3339,45 @@
           </a:bodyPr>
           <a:lstStyle>
             <a:lvl1pPr algn="r">
-              <a:defRPr lang="en-us" sz="1200" cap="none">
+              <a:defRPr lang="en-US" sz="1200" cap="none">
                 <a:solidFill>
                   <a:srgbClr val="8C8C8C"/>
                 </a:solidFill>
               </a:defRPr>
             </a:lvl1pPr>
             <a:lvl2pPr>
-              <a:defRPr lang="en-us"/>
+              <a:defRPr lang="en-US"/>
             </a:lvl2pPr>
             <a:lvl3pPr>
-              <a:defRPr lang="en-us"/>
+              <a:defRPr lang="en-US"/>
             </a:lvl3pPr>
             <a:lvl4pPr>
-              <a:defRPr lang="en-us"/>
+              <a:defRPr lang="en-US"/>
             </a:lvl4pPr>
             <a:lvl5pPr>
-              <a:defRPr lang="en-us"/>
+              <a:defRPr lang="en-US"/>
             </a:lvl5pPr>
             <a:lvl6pPr>
-              <a:defRPr lang="en-us"/>
+              <a:defRPr lang="en-US"/>
             </a:lvl6pPr>
             <a:lvl7pPr>
-              <a:defRPr lang="en-us"/>
+              <a:defRPr lang="en-US"/>
             </a:lvl7pPr>
             <a:lvl8pPr>
-              <a:defRPr lang="en-us"/>
+              <a:defRPr lang="en-US"/>
             </a:lvl8pPr>
             <a:lvl9pPr>
-              <a:defRPr lang="en-us"/>
+              <a:defRPr lang="en-US"/>
             </a:lvl9pPr>
           </a:lstStyle>
           <a:p>
             <a:pPr>
-              <a:defRPr lang="en-us"/>
+              <a:defRPr lang="en-US"/>
             </a:pPr>
             <a:fld id="{30AEED52-1CDD-FB1B-9316-EA4EA35865BF}" type="slidenum">
-              <a:t/>
+              <a:t>‹#›</a:t>
             </a:fld>
+            <a:endParaRPr/>
           </a:p>
         </p:txBody>
       </p:sp>
@@ -3366,7 +3412,7 @@
         </a:spcAft>
         <a:buNone/>
         <a:tabLst/>
-        <a:defRPr lang="en-us" sz="4400" b="0" i="0" u="none" strike="noStrike" kern="1" cap="none" spc="0" baseline="0">
+        <a:defRPr lang="en-US" sz="4400" b="0" i="0" u="none" strike="noStrike" kern="1" cap="none" spc="0" baseline="0">
           <a:solidFill>
             <a:schemeClr val="tx1"/>
           </a:solidFill>
@@ -3388,7 +3434,7 @@
         </a:spcAft>
         <a:buNone/>
         <a:tabLst/>
-        <a:defRPr lang="en-us" sz="1800" b="0" i="0" u="none" strike="noStrike" kern="1" cap="none" spc="0" baseline="0">
+        <a:defRPr lang="en-US" sz="1800" b="0" i="0" u="none" strike="noStrike" kern="1" cap="none" spc="0" baseline="0">
           <a:solidFill>
             <a:schemeClr val="tx1"/>
           </a:solidFill>
@@ -3410,7 +3456,7 @@
         </a:spcAft>
         <a:buNone/>
         <a:tabLst/>
-        <a:defRPr lang="en-us" sz="1800" b="0" i="0" u="none" strike="noStrike" kern="1" cap="none" spc="0" baseline="0">
+        <a:defRPr lang="en-US" sz="1800" b="0" i="0" u="none" strike="noStrike" kern="1" cap="none" spc="0" baseline="0">
           <a:solidFill>
             <a:schemeClr val="tx1"/>
           </a:solidFill>
@@ -3432,7 +3478,7 @@
         </a:spcAft>
         <a:buNone/>
         <a:tabLst/>
-        <a:defRPr lang="en-us" sz="1800" b="0" i="0" u="none" strike="noStrike" kern="1" cap="none" spc="0" baseline="0">
+        <a:defRPr lang="en-US" sz="1800" b="0" i="0" u="none" strike="noStrike" kern="1" cap="none" spc="0" baseline="0">
           <a:solidFill>
             <a:schemeClr val="tx1"/>
           </a:solidFill>
@@ -3454,7 +3500,7 @@
         </a:spcAft>
         <a:buNone/>
         <a:tabLst/>
-        <a:defRPr lang="en-us" sz="1800" b="0" i="0" u="none" strike="noStrike" kern="1" cap="none" spc="0" baseline="0">
+        <a:defRPr lang="en-US" sz="1800" b="0" i="0" u="none" strike="noStrike" kern="1" cap="none" spc="0" baseline="0">
           <a:solidFill>
             <a:schemeClr val="tx1"/>
           </a:solidFill>
@@ -3476,7 +3522,7 @@
         </a:spcAft>
         <a:buNone/>
         <a:tabLst/>
-        <a:defRPr lang="en-us" sz="1800" b="0" i="0" u="none" strike="noStrike" kern="1" cap="none" spc="0" baseline="0">
+        <a:defRPr lang="en-US" sz="1800" b="0" i="0" u="none" strike="noStrike" kern="1" cap="none" spc="0" baseline="0">
           <a:solidFill>
             <a:schemeClr val="tx1"/>
           </a:solidFill>
@@ -3498,7 +3544,7 @@
         </a:spcAft>
         <a:buNone/>
         <a:tabLst/>
-        <a:defRPr lang="en-us" sz="1800" b="0" i="0" u="none" strike="noStrike" kern="1" cap="none" spc="0" baseline="0">
+        <a:defRPr lang="en-US" sz="1800" b="0" i="0" u="none" strike="noStrike" kern="1" cap="none" spc="0" baseline="0">
           <a:solidFill>
             <a:schemeClr val="tx1"/>
           </a:solidFill>
@@ -3520,7 +3566,7 @@
         </a:spcAft>
         <a:buNone/>
         <a:tabLst/>
-        <a:defRPr lang="en-us" sz="1800" b="0" i="0" u="none" strike="noStrike" kern="1" cap="none" spc="0" baseline="0">
+        <a:defRPr lang="en-US" sz="1800" b="0" i="0" u="none" strike="noStrike" kern="1" cap="none" spc="0" baseline="0">
           <a:solidFill>
             <a:schemeClr val="tx1"/>
           </a:solidFill>
@@ -3542,7 +3588,7 @@
         </a:spcAft>
         <a:buNone/>
         <a:tabLst/>
-        <a:defRPr lang="en-us" sz="1800" b="0" i="0" u="none" strike="noStrike" kern="1" cap="none" spc="0" baseline="0">
+        <a:defRPr lang="en-US" sz="1800" b="0" i="0" u="none" strike="noStrike" kern="1" cap="none" spc="0" baseline="0">
           <a:solidFill>
             <a:schemeClr val="tx1"/>
           </a:solidFill>
@@ -3569,7 +3615,7 @@
         <a:buFont typeface="Arial" pitchFamily="2" charset="0"/>
         <a:buChar char="•"/>
         <a:tabLst/>
-        <a:defRPr lang="en-us" sz="2800" b="0" i="0" u="none" strike="noStrike" kern="1" cap="none" spc="0" baseline="0">
+        <a:defRPr lang="en-US" sz="2800" b="0" i="0" u="none" strike="noStrike" kern="1" cap="none" spc="0" baseline="0">
           <a:solidFill>
             <a:schemeClr val="tx1"/>
           </a:solidFill>
@@ -3594,7 +3640,7 @@
         <a:buFont typeface="Arial" pitchFamily="2" charset="0"/>
         <a:buChar char="•"/>
         <a:tabLst/>
-        <a:defRPr lang="en-us" sz="2400" b="0" i="0" u="none" strike="noStrike" kern="1" cap="none" spc="0" baseline="0">
+        <a:defRPr lang="en-US" sz="2400" b="0" i="0" u="none" strike="noStrike" kern="1" cap="none" spc="0" baseline="0">
           <a:solidFill>
             <a:schemeClr val="tx1"/>
           </a:solidFill>
@@ -3619,7 +3665,7 @@
         <a:buFont typeface="Arial" pitchFamily="2" charset="0"/>
         <a:buChar char="•"/>
         <a:tabLst/>
-        <a:defRPr lang="en-us" sz="2000" b="0" i="0" u="none" strike="noStrike" kern="1" cap="none" spc="0" baseline="0">
+        <a:defRPr lang="en-US" sz="2000" b="0" i="0" u="none" strike="noStrike" kern="1" cap="none" spc="0" baseline="0">
           <a:solidFill>
             <a:schemeClr val="tx1"/>
           </a:solidFill>
@@ -3644,7 +3690,7 @@
         <a:buFont typeface="Arial" pitchFamily="2" charset="0"/>
         <a:buChar char="•"/>
         <a:tabLst/>
-        <a:defRPr lang="en-us" sz="1800" b="0" i="0" u="none" strike="noStrike" kern="1" cap="none" spc="0" baseline="0">
+        <a:defRPr lang="en-US" sz="1800" b="0" i="0" u="none" strike="noStrike" kern="1" cap="none" spc="0" baseline="0">
           <a:solidFill>
             <a:schemeClr val="tx1"/>
           </a:solidFill>
@@ -3669,7 +3715,7 @@
         <a:buFont typeface="Arial" pitchFamily="2" charset="0"/>
         <a:buChar char="•"/>
         <a:tabLst/>
-        <a:defRPr lang="en-us" sz="1800" b="0" i="0" u="none" strike="noStrike" kern="1" cap="none" spc="0" baseline="0">
+        <a:defRPr lang="en-US" sz="1800" b="0" i="0" u="none" strike="noStrike" kern="1" cap="none" spc="0" baseline="0">
           <a:solidFill>
             <a:schemeClr val="tx1"/>
           </a:solidFill>
@@ -3694,7 +3740,7 @@
         <a:buFont typeface="Arial" pitchFamily="2" charset="0"/>
         <a:buChar char="•"/>
         <a:tabLst/>
-        <a:defRPr lang="en-us" sz="1800" b="0" i="0" u="none" strike="noStrike" kern="1" cap="none" spc="0" baseline="0">
+        <a:defRPr lang="en-US" sz="1800" b="0" i="0" u="none" strike="noStrike" kern="1" cap="none" spc="0" baseline="0">
           <a:solidFill>
             <a:schemeClr val="tx1"/>
           </a:solidFill>
@@ -3719,7 +3765,7 @@
         <a:buFont typeface="Arial" pitchFamily="2" charset="0"/>
         <a:buChar char="•"/>
         <a:tabLst/>
-        <a:defRPr lang="en-us" sz="1800" b="0" i="0" u="none" strike="noStrike" kern="1" cap="none" spc="0" baseline="0">
+        <a:defRPr lang="en-US" sz="1800" b="0" i="0" u="none" strike="noStrike" kern="1" cap="none" spc="0" baseline="0">
           <a:solidFill>
             <a:schemeClr val="tx1"/>
           </a:solidFill>
@@ -3744,7 +3790,7 @@
         <a:buFont typeface="Arial" pitchFamily="2" charset="0"/>
         <a:buChar char="•"/>
         <a:tabLst/>
-        <a:defRPr lang="en-us" sz="1800" b="0" i="0" u="none" strike="noStrike" kern="1" cap="none" spc="0" baseline="0">
+        <a:defRPr lang="en-US" sz="1800" b="0" i="0" u="none" strike="noStrike" kern="1" cap="none" spc="0" baseline="0">
           <a:solidFill>
             <a:schemeClr val="tx1"/>
           </a:solidFill>
@@ -3769,7 +3815,7 @@
         <a:buFont typeface="Arial" pitchFamily="2" charset="0"/>
         <a:buChar char="•"/>
         <a:tabLst/>
-        <a:defRPr lang="en-us" sz="1800" b="0" i="0" u="none" strike="noStrike" kern="1" cap="none" spc="0" baseline="0">
+        <a:defRPr lang="en-US" sz="1800" b="0" i="0" u="none" strike="noStrike" kern="1" cap="none" spc="0" baseline="0">
           <a:solidFill>
             <a:schemeClr val="tx1"/>
           </a:solidFill>
@@ -3793,7 +3839,7 @@
         </a:spcAft>
         <a:buNone/>
         <a:tabLst/>
-        <a:defRPr lang="en-us" sz="1800" b="0" i="0" u="none" strike="noStrike" kern="1" cap="none" spc="0" baseline="0">
+        <a:defRPr lang="en-US" sz="1800" b="0" i="0" u="none" strike="noStrike" kern="1" cap="none" spc="0" baseline="0">
           <a:solidFill>
             <a:schemeClr val="tx1"/>
           </a:solidFill>
@@ -3815,7 +3861,7 @@
         </a:spcAft>
         <a:buNone/>
         <a:tabLst/>
-        <a:defRPr lang="en-us" sz="1800" b="0" i="0" u="none" strike="noStrike" kern="1" cap="none" spc="0" baseline="0">
+        <a:defRPr lang="en-US" sz="1800" b="0" i="0" u="none" strike="noStrike" kern="1" cap="none" spc="0" baseline="0">
           <a:solidFill>
             <a:schemeClr val="tx1"/>
           </a:solidFill>
@@ -3837,7 +3883,7 @@
         </a:spcAft>
         <a:buNone/>
         <a:tabLst/>
-        <a:defRPr lang="en-us" sz="1800" b="0" i="0" u="none" strike="noStrike" kern="1" cap="none" spc="0" baseline="0">
+        <a:defRPr lang="en-US" sz="1800" b="0" i="0" u="none" strike="noStrike" kern="1" cap="none" spc="0" baseline="0">
           <a:solidFill>
             <a:schemeClr val="tx1"/>
           </a:solidFill>
@@ -3859,7 +3905,7 @@
         </a:spcAft>
         <a:buNone/>
         <a:tabLst/>
-        <a:defRPr lang="en-us" sz="1800" b="0" i="0" u="none" strike="noStrike" kern="1" cap="none" spc="0" baseline="0">
+        <a:defRPr lang="en-US" sz="1800" b="0" i="0" u="none" strike="noStrike" kern="1" cap="none" spc="0" baseline="0">
           <a:solidFill>
             <a:schemeClr val="tx1"/>
           </a:solidFill>
@@ -3881,7 +3927,7 @@
         </a:spcAft>
         <a:buNone/>
         <a:tabLst/>
-        <a:defRPr lang="en-us" sz="1800" b="0" i="0" u="none" strike="noStrike" kern="1" cap="none" spc="0" baseline="0">
+        <a:defRPr lang="en-US" sz="1800" b="0" i="0" u="none" strike="noStrike" kern="1" cap="none" spc="0" baseline="0">
           <a:solidFill>
             <a:schemeClr val="tx1"/>
           </a:solidFill>
@@ -3903,7 +3949,7 @@
         </a:spcAft>
         <a:buNone/>
         <a:tabLst/>
-        <a:defRPr lang="en-us" sz="1800" b="0" i="0" u="none" strike="noStrike" kern="1" cap="none" spc="0" baseline="0">
+        <a:defRPr lang="en-US" sz="1800" b="0" i="0" u="none" strike="noStrike" kern="1" cap="none" spc="0" baseline="0">
           <a:solidFill>
             <a:schemeClr val="tx1"/>
           </a:solidFill>
@@ -3925,7 +3971,7 @@
         </a:spcAft>
         <a:buNone/>
         <a:tabLst/>
-        <a:defRPr lang="en-us" sz="1800" b="0" i="0" u="none" strike="noStrike" kern="1" cap="none" spc="0" baseline="0">
+        <a:defRPr lang="en-US" sz="1800" b="0" i="0" u="none" strike="noStrike" kern="1" cap="none" spc="0" baseline="0">
           <a:solidFill>
             <a:schemeClr val="tx1"/>
           </a:solidFill>
@@ -3947,7 +3993,7 @@
         </a:spcAft>
         <a:buNone/>
         <a:tabLst/>
-        <a:defRPr lang="en-us" sz="1800" b="0" i="0" u="none" strike="noStrike" kern="1" cap="none" spc="0" baseline="0">
+        <a:defRPr lang="en-US" sz="1800" b="0" i="0" u="none" strike="noStrike" kern="1" cap="none" spc="0" baseline="0">
           <a:solidFill>
             <a:schemeClr val="tx1"/>
           </a:solidFill>
@@ -3969,7 +4015,7 @@
         </a:spcAft>
         <a:buNone/>
         <a:tabLst/>
-        <a:defRPr lang="en-us" sz="1800" b="0" i="0" u="none" strike="noStrike" kern="1" cap="none" spc="0" baseline="0">
+        <a:defRPr lang="en-US" sz="1800" b="0" i="0" u="none" strike="noStrike" kern="1" cap="none" spc="0" baseline="0">
           <a:solidFill>
             <a:schemeClr val="tx1"/>
           </a:solidFill>
@@ -3985,7 +4031,7 @@
 </file>
 
 <file path=ppt/slides/slide1.xml><?xml version="1.0" encoding="utf-8"?>
-<p:sld xmlns:p="http://schemas.openxmlformats.org/presentationml/2006/main" xmlns:mc="http://schemas.openxmlformats.org/markup-compatibility/2006" xmlns:p14="http://schemas.microsoft.com/office/powerpoint/2010/main" xmlns:p15="http://schemas.microsoft.com/office/powerpoint/2012/main" xmlns:r="http://schemas.openxmlformats.org/officeDocument/2006/relationships" xmlns:a="http://schemas.openxmlformats.org/drawingml/2006/main" mc:Ignorable="p14">
+<p:sld xmlns:a="http://schemas.openxmlformats.org/drawingml/2006/main" xmlns:r="http://schemas.openxmlformats.org/officeDocument/2006/relationships" xmlns:p="http://schemas.openxmlformats.org/presentationml/2006/main">
   <p:cSld>
     <p:spTree>
       <p:nvGrpSpPr>
@@ -4008,7 +4054,7 @@
             <a:spLocks noGrp="1" noChangeArrowheads="1"/>
             <a:extLst>
               <a:ext uri="smNativeData">
-                <pr:smNativeData xmlns:pr="smNativeData" xmlns="smNativeData" val="SMDATA_15_FLquaRMAAAAlAAAAZAAAAA0AAAAAkAAAAEgAAACQAAAASAAAAAAAAAACAAAAAAAAAAEAAABQAAAAAAAAAAAA4D8AAAAAAADgPwAAAAAAAOA/AAAAAAAA4D8AAAAAAADgPwAAAAAAAOA/AAAAAAAA4D8AAAAAAADgPwAAAAAAAOA/AAAAAAAA4D8CAAAAjAAAAAAAAAAAAAAAW5vVDP///wgAAAAAAAAAAAAAAAAAAAAAAAAAAAAAAAAAAAAAZAAAAAEAAABAAAAAAAAAAAAAAAAAAAAAAAAAAAAAAAAAAAAAAAAAAAAAAAAAAAAAAAAAAAAAAAAAAAAAAAAAAAAAAAAAAAAAAAAAAAAAAAAAAAAAAAAAAAAAAAAAAAAAFAAAADwAAAAAAAAAAAAAAAAAAAkUAAAAAQAAABQAAAAUAAAAFAAAAAEAAAAAAAAAZAAAAGQAAAAAAAAAZAAAAGQAAAAVAAAAYAAAAAAAAAAAAAAADwAAACADAAAAAAAAAAAAAAEAAACgMgAAVgcAAKr4//8BAAAAf39/AAEAAABkAAAAAAAAABQAAABAHwAAAAAAACYAAAAAAAAAwOD//wAAAAAmAAAAZAAAABYAAABMAAAAAAAAAAAAAAAEAAAAAAAAAAEAAADn5uYKAAAAACgAAAAoAAAAZAAAAGQAAAAAAAAAzMzMAAAAAABQAAAAUAAAAGQAAABkAAAAAAAAABcAAAAUAAAAAAAAAAAAAAD/fwAA/38AAAAAAAAJAAAABAAAAAAAAAAeAAAAaAAAAAAAAAAAAAAAAAAAAAAAAAAAAAAAECcAABAnAAAAAAAAAAAAAAAAAAAAAAAAAAAAAAAAAAAAAAAAAAAAABQAAAAAAAAAwMD/AAAAAABkAAAAMgAAAAAAAABkAAAAAAAAAH9/fwAKAAAAIgAAABgAAAAAAAAAAAAAAAAAAAAAAAAAAAAAAAAAAAAkAAAAJAAAAAAAAAAHAAAAAAAAAAAAAAAAAAAAAAAAAAAAAAAAAAAAf39/ACUAAABYAAAAAAAAAAAAAAAAAAAAAAAAAAAAAAAAAAAAAAAAAAAAAAAAAAAAAAAAAAAAAAA/AAAAAAAAAKCGAQAAAAAAAAAAAAAAAAAMAAAAAQAAAAAAAAAAAAAAAAAAAB8AAABUAAAAW5vVBf///wEAAAAAAAAAAAAAAAAAAAAAAAAAAAAAAAAAAAAAAAAAAAAAAAJ/f38A5+bmA8zMzADAwP8Af39/AAAAAAAAAAAAAAAAAAAAAAAAAAAAIQAAABgAAAAUAAAAYAkAAOgGAACgQQAAmBUAABAAAAAmAAAACAAAAAAAAAAAAAAA"/>
+                <pr:smNativeData xmlns="smNativeData" xmlns:pr="smNativeData" xmlns:p15="http://schemas.microsoft.com/office/powerpoint/2012/main" xmlns:p14="http://schemas.microsoft.com/office/powerpoint/2010/main" xmlns:mc="http://schemas.openxmlformats.org/markup-compatibility/2006" val="SMDATA_15_FLquaRMAAAAlAAAAZAAAAA0AAAAAkAAAAEgAAACQAAAASAAAAAAAAAACAAAAAAAAAAEAAABQAAAAAAAAAAAA4D8AAAAAAADgPwAAAAAAAOA/AAAAAAAA4D8AAAAAAADgPwAAAAAAAOA/AAAAAAAA4D8AAAAAAADgPwAAAAAAAOA/AAAAAAAA4D8CAAAAjAAAAAAAAAAAAAAAW5vVDP///wgAAAAAAAAAAAAAAAAAAAAAAAAAAAAAAAAAAAAAZAAAAAEAAABAAAAAAAAAAAAAAAAAAAAAAAAAAAAAAAAAAAAAAAAAAAAAAAAAAAAAAAAAAAAAAAAAAAAAAAAAAAAAAAAAAAAAAAAAAAAAAAAAAAAAAAAAAAAAAAAAAAAAFAAAADwAAAAAAAAAAAAAAAAAAAkUAAAAAQAAABQAAAAUAAAAFAAAAAEAAAAAAAAAZAAAAGQAAAAAAAAAZAAAAGQAAAAVAAAAYAAAAAAAAAAAAAAADwAAACADAAAAAAAAAAAAAAEAAACgMgAAVgcAAKr4//8BAAAAf39/AAEAAABkAAAAAAAAABQAAABAHwAAAAAAACYAAAAAAAAAwOD//wAAAAAmAAAAZAAAABYAAABMAAAAAAAAAAAAAAAEAAAAAAAAAAEAAADn5uYKAAAAACgAAAAoAAAAZAAAAGQAAAAAAAAAzMzMAAAAAABQAAAAUAAAAGQAAABkAAAAAAAAABcAAAAUAAAAAAAAAAAAAAD/fwAA/38AAAAAAAAJAAAABAAAAAAAAAAeAAAAaAAAAAAAAAAAAAAAAAAAAAAAAAAAAAAAECcAABAnAAAAAAAAAAAAAAAAAAAAAAAAAAAAAAAAAAAAAAAAAAAAABQAAAAAAAAAwMD/AAAAAABkAAAAMgAAAAAAAABkAAAAAAAAAH9/fwAKAAAAIgAAABgAAAAAAAAAAAAAAAAAAAAAAAAAAAAAAAAAAAAkAAAAJAAAAAAAAAAHAAAAAAAAAAAAAAAAAAAAAAAAAAAAAAAAAAAAf39/ACUAAABYAAAAAAAAAAAAAAAAAAAAAAAAAAAAAAAAAAAAAAAAAAAAAAAAAAAAAAAAAAAAAAA/AAAAAAAAAKCGAQAAAAAAAAAAAAAAAAAMAAAAAQAAAAAAAAAAAAAAAAAAAB8AAABUAAAAW5vVBf///wEAAAAAAAAAAAAAAAAAAAAAAAAAAAAAAAAAAAAAAAAAAAAAAAJ/f38A5+bmA8zMzADAwP8Af39/AAAAAAAAAAAAAAAAAAAAAAAAAAAAIQAAABgAAAAUAAAAYAkAAOgGAACgQQAAmBUAABAAAAAmAAAACAAAAAAAAAAAAAAA"/>
               </a:ext>
             </a:extLst>
           </p:cNvSpPr>
@@ -4022,7 +4068,7 @@
           <a:lstStyle/>
           <a:p>
             <a:pPr>
-              <a:defRPr lang="en-us"/>
+              <a:defRPr lang="en-US"/>
             </a:pPr>
             <a:r>
               <a:t>BeagleBone Blue</a:t>
@@ -4037,7 +4083,7 @@
             <a:spLocks noGrp="1" noChangeArrowheads="1"/>
             <a:extLst>
               <a:ext uri="smNativeData">
-                <pr:smNativeData xmlns:pr="smNativeData" xmlns="smNativeData" val="SMDATA_15_FLquaRMAAAAlAAAAZAAAAA0AAAAAkAAAAEgAAACQAAAASAAAAAAAAAAAAAAAAAAAAAEAAABQAAAAAAAAAAAA4D8AAAAAAADgPwAAAAAAAOA/AAAAAAAA4D8AAAAAAADgPwAAAAAAAOA/AAAAAAAA4D8AAAAAAADgPwAAAAAAAOA/AAAAAAAA4D8CAAAAjAAAAAAAAAAAAAAAW5vVDP///wgAAAAAAAAAAAAAAAAAAAAAAAAAAAAAAAAAAAAAZAAAAAEAAABAAAAAAAAAAAAAAAAAAAAAAAAAAAAAAAAAAAAAAAAAAAAAAAAAAAAAAAAAAAAAAAAAAAAAAAAAAAAAAAAAAAAAAAAAAAAAAAAAAAAAAAAAAAAAAAAAAAAAFAAAADwAAAAAAAAAAAAAAAAAAAkUAAAAAQAAABQAAAAUAAAAFAAAAAEAAAAAAAAAZAAAAGQAAAAAAAAAZAAAAGQAAAAVAAAAYAAAAAAAAAAAAAAADwAAACADAAAAAAAAAAAAAAEAAACgMgAAVgcAAKr4//8BAAAAf39/AAEAAABkAAAAAAAAABQAAABAHwAAAAAAACYAAAAAAAAAwOD//wAAAAAmAAAAZAAAABYAAABMAAAAAAAAAAAAAAAEAAAAAAAAAAEAAADn5uYKAAAAACgAAAAoAAAAZAAAAGQAAAAAAAAAzMzMAAAAAABQAAAAUAAAAGQAAABkAAAAAAAAABcAAAAUAAAAAAAAAAAAAAD/fwAA/38AAAAAAAAJAAAABAAAAAAAAAAeAAAAaAAAAAAAAAAAAAAAAAAAAAAAAAAAAAAAECcAABAnAAAAAAAAAAAAAAAAAAAAAAAAAAAAAAAAAAAAAAAAAAAAABQAAAAAAAAAwMD/AAAAAABkAAAAMgAAAAAAAABkAAAAAAAAAH9/fwAKAAAAIgAAABgAAAAAAAAAAAAAAAAAAAAAAAAAAAAAAAAAAAAkAAAAJAAAAAAAAAAHAAAAAAAAAAAAAAAAAAAAAAAAAAAAAAAAAAAAf39/ACUAAABYAAAAAAAAAAAAAAAAAAAAAAAAAAAAAAAAAAAAAAAAAAAAAAAAAAAAAAAAAAAAAAA/AAAAAAAAAKCGAQAAAAAAAAAAAAAAAAAMAAAAAQAAAAAAAAAAAAAAAAAAAB8AAABUAAAAW5vVBf///wEAAAAAAAAAAAAAAAAAAAAAAAAAAAAAAAAAAAAAAAAAAAAAAAJ/f38A5+bmA8zMzADAwP8Af39/AAAAAAAAAAAAAAAAAAAAAAAAAAAAIQAAABgAAAAUAAAAYAkAACkWAACgQQAAWCAAABAAAAAmAAAACAAAAAAAAAAAAAAA"/>
+                <pr:smNativeData xmlns="smNativeData" xmlns:pr="smNativeData" xmlns:p15="http://schemas.microsoft.com/office/powerpoint/2012/main" xmlns:p14="http://schemas.microsoft.com/office/powerpoint/2010/main" xmlns:mc="http://schemas.openxmlformats.org/markup-compatibility/2006" val="SMDATA_15_FLquaRMAAAAlAAAAZAAAAA0AAAAAkAAAAEgAAACQAAAASAAAAAAAAAAAAAAAAAAAAAEAAABQAAAAAAAAAAAA4D8AAAAAAADgPwAAAAAAAOA/AAAAAAAA4D8AAAAAAADgPwAAAAAAAOA/AAAAAAAA4D8AAAAAAADgPwAAAAAAAOA/AAAAAAAA4D8CAAAAjAAAAAAAAAAAAAAAW5vVDP///wgAAAAAAAAAAAAAAAAAAAAAAAAAAAAAAAAAAAAAZAAAAAEAAABAAAAAAAAAAAAAAAAAAAAAAAAAAAAAAAAAAAAAAAAAAAAAAAAAAAAAAAAAAAAAAAAAAAAAAAAAAAAAAAAAAAAAAAAAAAAAAAAAAAAAAAAAAAAAAAAAAAAAFAAAADwAAAAAAAAAAAAAAAAAAAkUAAAAAQAAABQAAAAUAAAAFAAAAAEAAAAAAAAAZAAAAGQAAAAAAAAAZAAAAGQAAAAVAAAAYAAAAAAAAAAAAAAADwAAACADAAAAAAAAAAAAAAEAAACgMgAAVgcAAKr4//8BAAAAf39/AAEAAABkAAAAAAAAABQAAABAHwAAAAAAACYAAAAAAAAAwOD//wAAAAAmAAAAZAAAABYAAABMAAAAAAAAAAAAAAAEAAAAAAAAAAEAAADn5uYKAAAAACgAAAAoAAAAZAAAAGQAAAAAAAAAzMzMAAAAAABQAAAAUAAAAGQAAABkAAAAAAAAABcAAAAUAAAAAAAAAAAAAAD/fwAA/38AAAAAAAAJAAAABAAAAAAAAAAeAAAAaAAAAAAAAAAAAAAAAAAAAAAAAAAAAAAAECcAABAnAAAAAAAAAAAAAAAAAAAAAAAAAAAAAAAAAAAAAAAAAAAAABQAAAAAAAAAwMD/AAAAAABkAAAAMgAAAAAAAABkAAAAAAAAAH9/fwAKAAAAIgAAABgAAAAAAAAAAAAAAAAAAAAAAAAAAAAAAAAAAAAkAAAAJAAAAAAAAAAHAAAAAAAAAAAAAAAAAAAAAAAAAAAAAAAAAAAAf39/ACUAAABYAAAAAAAAAAAAAAAAAAAAAAAAAAAAAAAAAAAAAAAAAAAAAAAAAAAAAAAAAAAAAAA/AAAAAAAAAKCGAQAAAAAAAAAAAAAAAAAMAAAAAQAAAAAAAAAAAAAAAAAAAB8AAABUAAAAW5vVBf///wEAAAAAAAAAAAAAAAAAAAAAAAAAAAAAAAAAAAAAAAAAAAAAAAJ/f38A5+bmA8zMzADAwP8Af39/AAAAAAAAAAAAAAAAAAAAAAAAAAAAIQAAABgAAAAUAAAAYAkAACkWAACgQQAAWCAAABAAAAAmAAAACAAAAAAAAAAAAAAA"/>
               </a:ext>
             </a:extLst>
           </p:cNvSpPr>
@@ -4051,8 +4097,9 @@
           <a:lstStyle/>
           <a:p>
             <a:pPr>
-              <a:defRPr lang="en-us"/>
-            </a:pPr>
+              <a:defRPr lang="en-US"/>
+            </a:pPr>
+            <a:endParaRPr/>
           </a:p>
         </p:txBody>
       </p:sp>
@@ -4072,7 +4119,7 @@
 </file>
 
 <file path=ppt/slides/slide10.xml><?xml version="1.0" encoding="utf-8"?>
-<p:sld xmlns:p="http://schemas.openxmlformats.org/presentationml/2006/main" xmlns:mc="http://schemas.openxmlformats.org/markup-compatibility/2006" xmlns:p14="http://schemas.microsoft.com/office/powerpoint/2010/main" xmlns:p15="http://schemas.microsoft.com/office/powerpoint/2012/main" xmlns:r="http://schemas.openxmlformats.org/officeDocument/2006/relationships" xmlns:a="http://schemas.openxmlformats.org/drawingml/2006/main" mc:Ignorable="p14">
+<p:sld xmlns:a="http://schemas.openxmlformats.org/drawingml/2006/main" xmlns:r="http://schemas.openxmlformats.org/officeDocument/2006/relationships" xmlns:p="http://schemas.openxmlformats.org/presentationml/2006/main">
   <p:cSld>
     <p:spTree>
       <p:nvGrpSpPr>
@@ -4092,12 +4139,7 @@
         <p:nvSpPr>
           <p:cNvPr id="2" name="Title 1"/>
           <p:cNvSpPr>
-            <a:spLocks noGrp="1" noChangeArrowheads="1"/>
-            <a:extLst>
-              <a:ext uri="smNativeData">
-                <pr:smNativeData xmlns:pr="smNativeData" xmlns="smNativeData" val="SMDATA_15_FLquaRMAAAAlAAAAZAAAAA0AAAAAkAAAAEgAAACQAAAASAAAAAAAAAABAAAAAAAAAAEAAABQAAAAAAAAAAAA4D8AAAAAAADgPwAAAAAAAOA/AAAAAAAA4D8AAAAAAADgPwAAAAAAAOA/AAAAAAAA4D8AAAAAAADgPwAAAAAAAOA/AAAAAAAA4D8CAAAAjAAAAAAAAAAAAAAAW5vVDP///wgAAAAAAAAAAAAAAAAAAAAAAAAAAAAAAAAAAAAAZAAAAAEAAABAAAAAAAAAAAAAAAAAAAAAAAAAAAAAAAAAAAAAAAAAAAAAAAAAAAAAAAAAAAAAAAAAAAAAAAAAAAAAAAAAAAAAAAAAAAAAAAAAAAAAAAAAAAAAAAAAAAAAFAAAADwAAAAAAAAAAAAAAAAAAAkUAAAAAQAAABQAAAAUAAAAFAAAAAEAAAAAAAAAZAAAAGQAAAAAAAAAZAAAAGQAAAAVAAAAYAAAAAAAAAAAAAAADwAAACADAAAAAAAAAAAAAAEAAACgMgAAVgcAAKr4//8BAAAAf39/AAEAAABkAAAAAAAAABQAAABAHwAAAAAAACYAAAAAAAAAwOD//wAAAAAmAAAAZAAAABYAAABMAAAAAAAAAAAAAAAEAAAAAAAAAAEAAADn5uYKAAAAACgAAAAoAAAAZAAAAGQAAAAAAAAAzMzMAAAAAABQAAAAUAAAAGQAAABkAAAAAAAAABcAAAAUAAAAAAAAAAAAAAD/fwAA/38AAAAAAAAJAAAABAAAAAAAAAAeAAAAaAAAAAAAAAAAAAAAAAAAAAAAAAAAAAAAECcAABAnAAAAAAAAAAAAAAAAAAAAAAAAAAAAAAAAAAAAAAAAAAAAABQAAAAAAAAAwMD/AAAAAABkAAAAMgAAAAAAAABkAAAAAAAAAH9/fwAKAAAAIgAAABgAAAAAAAAAAAAAAAAAAAAAAAAAAAAAAAAAAAAkAAAAJAAAAAAAAAAHAAAAAAAAAAAAAAAAAAAAAAAAAAAAAAAAAAAAf39/ACUAAABYAAAAAAAAAAAAAAAAAAAAAAAAAAAAAAAAAAAAAAAAAAAAAAAAAAAAAAAAAAAAAAA/AAAAAAAAAKCGAQAAAAAAAAAAAAAAAAAMAAAAAQAAAAAAAAAAAAAAAAAAAB8AAABUAAAAW5vVBf///wEAAAAAAAAAAAAAAAAAAAAAAAAAAAAAAAAAAAAAAAAAAAAAAAJ/f38A5+bmA8zMzADAwP8Af39/AAAAAAAAAAAAAAAAAAAAAAAAAAAAIQAAABgAAAAUAAAAKAUAAD8CAADYRQAAZwoAABAAAAAmAAAACAAAAAAAAAAAAAAA"/>
-              </a:ext>
-            </a:extLst>
+            <a:spLocks noGrp="1"/>
           </p:cNvSpPr>
           <p:nvPr>
             <p:ph type="title"/>
@@ -4108,12 +4150,11 @@
           <a:bodyPr/>
           <a:lstStyle/>
           <a:p>
-            <a:pPr algn="ctr">
-              <a:defRPr lang="en-us"/>
-            </a:pPr>
-            <a:r>
-              <a:t>Updating the OS</a:t>
-            </a:r>
+            <a:r>
+              <a:rPr lang="en-US" dirty="0" err="1" smtClean="0"/>
+              <a:t>joes_robot_control</a:t>
+            </a:r>
+            <a:endParaRPr lang="en-US" dirty="0"/>
           </a:p>
         </p:txBody>
       </p:sp>
@@ -4121,122 +4162,172 @@
         <p:nvSpPr>
           <p:cNvPr id="3" name="Content Placeholder 2"/>
           <p:cNvSpPr>
-            <a:spLocks noGrp="1" noChangeArrowheads="1"/>
-            <a:extLst>
-              <a:ext uri="smNativeData">
-                <pr:smNativeData xmlns:pr="smNativeData" xmlns="smNativeData" val="SMDATA_15_FLquaRMAAAAlAAAAZAAAAA0AAAAAkAAAAEgAAACQAAAASAAAAAAAAAAAAAAAAAAAAAEAAABQAAAAAAAAAAAA4D8AAAAAAADgPwAAAAAAAOA/AAAAAAAA4D8AAAAAAADgPwAAAAAAAOA/AAAAAAAA4D8AAAAAAADgPwAAAAAAAOA/AAAAAAAA4D8CAAAAjAAAAAAAAAAAAAAAW5vVDP///wgAAAAAAAAAAAAAAAAAAAAAAAAAAAAAAAAAAAAAZAAAAAEAAABAAAAAAAAAAAAAAAAAAAAAAAAAAAAAAAAAAAAAAAAAAAAAAAAAAAAAAAAAAAAAAAAAAAAAAAAAAAAAAAAAAAAAAAAAAAAAAAAAAAAAAAAAAAAAAAAAAAAAFAAAADwAAAAAAAAAAAAAAAAAAAkUAAAAAQAAABQAAAAUAAAAFAAAAAEAAAAAAAAAZAAAAGQAAAAAAAAAZAAAAGQAAAAVAAAAYAAAAAAAAAAAAAAADwAAACADAAAAAAAAAAAAAAEAAACgMgAAVgcAAKr4//8BAAAAf39/AAEAAABkAAAAAAAAABQAAABAHwAAAAAAACYAAAAAAAAAwOD//wAAAAAmAAAAZAAAABYAAABMAAAAAAAAAAAAAAAEAAAAAAAAAAEAAADn5uYKAAAAACgAAAAoAAAAZAAAAGQAAAAAAAAAzMzMAAAAAABQAAAAUAAAAGQAAABkAAAAAAAAABcAAAAUAAAAAAAAAAAAAAD/fwAA/38AAAAAAAAJAAAABAAAAGUAAAAeAAAAaAAAAAAAAAAAAAAAAAAAAAAAAAAAAAAAECcAABAnAAAAAAAAAAAAAAAAAAAAAAAAAAAAAAAAAAAAAAAAAAAAABQAAAAAAAAAwMD/AAAAAABkAAAAMgAAAAAAAABkAAAAAAAAAH9/fwAKAAAAIgAAABgAAAAAAAAAAAAAAAAAAAAAAAAAAAAAAAAAAAAkAAAAJAAAAAAAAAAHAAAAAAAAAAAAAAAAAAAAAAAAAAAAAAAAAAAAf39/ACUAAABYAAAAAAAAAAAAAAAAAAAAAAAAAAAAAAAAAAAAAAAAAAAAAAAAAAAAAAAAAAAAAAA/AAAAAAAAAKCGAQAAAAAAAAAAAAAAAAAMAAAAAQAAAAAAAAAAAAAAAAAAAB8AAABUAAAAW5vVBf///wEAAAAAAAAAAAAAAAAAAAAAAAAAAAAAAAAAAAAAAAAAAAAAAAJ/f38A5+bmA8zMzADAwP8Af39/AAAAAAAAAAAAAAAAAAAAAAAAAAAAIQAAABgAAAAUAAAAKAUAADsLAADYRQAAACYAABAAAAAmAAAACAAAAAAgAAAAAAAA"/>
-              </a:ext>
-            </a:extLst>
-          </p:cNvSpPr>
-          <p:nvPr>
-            <p:ph type="body" idx="1"/>
+            <a:spLocks noGrp="1"/>
+          </p:cNvSpPr>
+          <p:nvPr>
+            <p:ph idx="1"/>
           </p:nvPr>
         </p:nvSpPr>
         <p:spPr/>
         <p:txBody>
-          <a:bodyPr vert="horz" wrap="square" lIns="91440" tIns="45720" rIns="91440" bIns="45720" numCol="1" spcCol="215900" anchor="t">
-            <a:prstTxWarp prst="textNoShape">
-              <a:avLst/>
-            </a:prstTxWarp>
-          </a:bodyPr>
-          <a:lstStyle/>
-          <a:p>
-            <a:pPr>
-              <a:defRPr lang="en-us"/>
-            </a:pPr>
-            <a:r>
-              <a:t>BeagleBone Blue has 4GB eMMC (and 512MB DDR3 memory)</a:t>
-            </a:r>
-          </a:p>
-          <a:p>
-            <a:pPr>
-              <a:defRPr lang="en-us"/>
-            </a:pPr>
-            <a:r>
-              <a:t>The SD Card can be used to flash/replace the eMMC</a:t>
-            </a:r>
-          </a:p>
-          <a:p>
-            <a:pPr lvl="1">
-              <a:defRPr lang="en-us"/>
-            </a:pPr>
-            <a:r>
-              <a:t>Use EduMIP version on blue Lexar SD Card</a:t>
-            </a:r>
-          </a:p>
-          <a:p>
-            <a:pPr lvl="1">
-              <a:defRPr lang="en-us"/>
-            </a:pPr>
-            <a:r>
-              <a:t>If the SD Card is a ‘flasher’ version you don’t even need to hold down the flash button.</a:t>
-            </a:r>
-          </a:p>
-          <a:p>
-            <a:pPr lvl="1">
-              <a:defRPr lang="en-us"/>
-            </a:pPr>
-            <a:r>
-              <a:t>If it’s flashing it will cycle LEDs in a cyclon fashion back and forth.</a:t>
-            </a:r>
-          </a:p>
-          <a:p>
-            <a:pPr lvl="2">
-              <a:defRPr lang="en-us"/>
-            </a:pPr>
-            <a:r>
-              <a:t>Once’s it done it will auto-shut itself down (and no more LEDs cycling).</a:t>
-            </a:r>
-          </a:p>
-          <a:p>
-            <a:pPr lvl="1">
-              <a:defRPr lang="en-us"/>
-            </a:pPr>
-            <a:r>
-              <a:t>Take the SD card out (so it doesn’t do it again) and reboot.</a:t>
-            </a:r>
-          </a:p>
-          <a:p>
-            <a:pPr>
-              <a:defRPr lang="en-us"/>
-            </a:pPr>
-            <a:r>
-              <a:t>To create a new flasher SD Card from the current eMMC:</a:t>
-            </a:r>
-          </a:p>
-          <a:p>
-            <a:pPr lvl="1">
-              <a:defRPr lang="en-us"/>
-            </a:pPr>
-            <a:r>
-              <a:rPr lang="en-us" sz="2000" cap="none"/>
-              <a:t>/opt/scripts/tools/eMMC/beaglebone-black-make-microSD-flasher-from-eMMC.sh</a:t>
-            </a:r>
-          </a:p>
-          <a:p>
-            <a:pPr lvl="1">
-              <a:defRPr lang="en-us"/>
-            </a:pPr>
+          <a:bodyPr/>
+          <a:lstStyle/>
+          <a:p>
+            <a:r>
+              <a:rPr lang="en-US" dirty="0" smtClean="0"/>
+              <a:t>The </a:t>
+            </a:r>
+            <a:r>
+              <a:rPr lang="en-US" dirty="0" err="1" smtClean="0"/>
+              <a:t>joes_robot_control</a:t>
+            </a:r>
+            <a:r>
+              <a:rPr lang="en-US" dirty="0" smtClean="0"/>
+              <a:t> will set individual motor speeds and servo positions taking direction from the /</a:t>
+            </a:r>
+            <a:r>
+              <a:rPr lang="en-US" dirty="0" err="1" smtClean="0"/>
+              <a:t>tmp</a:t>
+            </a:r>
+            <a:r>
+              <a:rPr lang="en-US" dirty="0" smtClean="0"/>
+              <a:t>/robot.txt file</a:t>
+            </a:r>
+          </a:p>
+          <a:p>
+            <a:r>
+              <a:rPr lang="en-US" dirty="0" smtClean="0"/>
+              <a:t>Best to set a range of motion with a semicolon between values because just one single value might not register.</a:t>
+            </a:r>
+          </a:p>
+          <a:p>
+            <a:pPr lvl="1"/>
+            <a:r>
+              <a:rPr lang="en-US" dirty="0" smtClean="0"/>
+              <a:t>This makes servo #1 sweep from 0.0 to 0.5 position</a:t>
+            </a:r>
+          </a:p>
+          <a:p>
+            <a:pPr lvl="1"/>
+            <a:r>
+              <a:rPr lang="en-US" dirty="0" smtClean="0"/>
+              <a:t>echo '0.0;0.0,0.0;0.0,0.0;0.0,0.0;0.0,0.0;0.5,-1000.0,-1000.0,-1000.0,-1000.0,-1000.0,-1000.0,-1000.0' &gt; /</a:t>
+            </a:r>
+            <a:r>
+              <a:rPr lang="en-US" dirty="0" err="1" smtClean="0"/>
+              <a:t>tmp</a:t>
+            </a:r>
+            <a:r>
+              <a:rPr lang="en-US" dirty="0" smtClean="0"/>
+              <a:t>/robot.txt</a:t>
+            </a:r>
+          </a:p>
+          <a:p>
+            <a:pPr lvl="1"/>
+            <a:r>
+              <a:rPr lang="en-US" dirty="0" smtClean="0"/>
+              <a:t>Servo changes of just 0.2 change might not even register</a:t>
+            </a:r>
+          </a:p>
+          <a:p>
+            <a:r>
+              <a:rPr lang="en-US" dirty="0" err="1" smtClean="0"/>
+              <a:t>rc_test_servos</a:t>
+            </a:r>
+            <a:r>
+              <a:rPr lang="en-US" dirty="0" smtClean="0"/>
+              <a:t> continually sends out the same position over and over, which is why it works well</a:t>
+            </a:r>
+          </a:p>
+          <a:p>
+            <a:pPr lvl="1"/>
+            <a:r>
+              <a:rPr lang="en-US" dirty="0" smtClean="0"/>
+              <a:t>*change </a:t>
+            </a:r>
+            <a:r>
+              <a:rPr lang="en-US" dirty="0" err="1" smtClean="0"/>
+              <a:t>joes_robot_control</a:t>
+            </a:r>
+            <a:r>
+              <a:rPr lang="en-US" dirty="0" smtClean="0"/>
+              <a:t> to ‘reinforce’ the position over a second if no new values are </a:t>
+            </a:r>
+            <a:r>
+              <a:rPr lang="en-US" smtClean="0"/>
+              <a:t>coming in!</a:t>
+            </a:r>
+            <a:endParaRPr lang="en-US" dirty="0"/>
+          </a:p>
+        </p:txBody>
+      </p:sp>
+      <p:sp>
+        <p:nvSpPr>
+          <p:cNvPr id="4" name="Date Placeholder 3"/>
+          <p:cNvSpPr>
+            <a:spLocks noGrp="1"/>
+          </p:cNvSpPr>
+          <p:nvPr>
+            <p:ph type="dt" sz="half" idx="10"/>
+          </p:nvPr>
+        </p:nvSpPr>
+        <p:spPr/>
+        <p:txBody>
+          <a:bodyPr/>
+          <a:lstStyle/>
+          <a:p>
+            <a:pPr>
+              <a:defRPr lang="en-US"/>
+            </a:pPr>
+            <a:fld id="{30AE8A82-CCDD-FB7C-9316-3A29C458656F}" type="datetime1">
+              <a:rPr lang="en-US" smtClean="0"/>
+              <a:t>4/21/2026</a:t>
+            </a:fld>
+            <a:endParaRPr lang="en-US"/>
+          </a:p>
+        </p:txBody>
+      </p:sp>
+      <p:sp>
+        <p:nvSpPr>
+          <p:cNvPr id="5" name="Slide Number Placeholder 4"/>
+          <p:cNvSpPr>
+            <a:spLocks noGrp="1"/>
+          </p:cNvSpPr>
+          <p:nvPr>
+            <p:ph type="sldNum" sz="quarter" idx="12"/>
+          </p:nvPr>
+        </p:nvSpPr>
+        <p:spPr/>
+        <p:txBody>
+          <a:bodyPr/>
+          <a:lstStyle/>
+          <a:p>
+            <a:pPr>
+              <a:defRPr lang="en-US"/>
+            </a:pPr>
+            <a:fld id="{30AE9046-08DD-FB66-9316-FE33DE5865AB}" type="slidenum">
+              <a:rPr lang="en-US" smtClean="0"/>
+              <a:t>10</a:t>
+            </a:fld>
+            <a:endParaRPr lang="en-US"/>
           </a:p>
         </p:txBody>
       </p:sp>
     </p:spTree>
+    <p:extLst>
+      <p:ext uri="{BB962C8B-B14F-4D97-AF65-F5344CB8AC3E}">
+        <p14:creationId xmlns:p14="http://schemas.microsoft.com/office/powerpoint/2010/main" val="2581125950"/>
+      </p:ext>
+    </p:extLst>
   </p:cSld>
   <p:clrMapOvr>
     <a:masterClrMapping/>
   </p:clrMapOvr>
-  <p:timing>
-    <p:tnLst>
-      <p:par>
-        <p:cTn id="1" dur="indefinite" restart="never" nodeType="tmRoot"/>
-      </p:par>
-    </p:tnLst>
-  </p:timing>
 </p:sld>
 </file>
 
 <file path=ppt/slides/slide11.xml><?xml version="1.0" encoding="utf-8"?>
-<p:sld xmlns:p="http://schemas.openxmlformats.org/presentationml/2006/main" xmlns:mc="http://schemas.openxmlformats.org/markup-compatibility/2006" xmlns:p14="http://schemas.microsoft.com/office/powerpoint/2010/main" xmlns:p15="http://schemas.microsoft.com/office/powerpoint/2012/main" xmlns:r="http://schemas.openxmlformats.org/officeDocument/2006/relationships" xmlns:a="http://schemas.openxmlformats.org/drawingml/2006/main" mc:Ignorable="p14">
+<p:sld xmlns:a="http://schemas.openxmlformats.org/drawingml/2006/main" xmlns:r="http://schemas.openxmlformats.org/officeDocument/2006/relationships" xmlns:p="http://schemas.openxmlformats.org/presentationml/2006/main">
   <p:cSld>
     <p:spTree>
       <p:nvGrpSpPr>
@@ -4259,7 +4350,7 @@
             <a:spLocks noGrp="1" noChangeArrowheads="1"/>
             <a:extLst>
               <a:ext uri="smNativeData">
-                <pr:smNativeData xmlns:pr="smNativeData" xmlns="smNativeData" val="SMDATA_15_FLquaRMAAAAlAAAAZAAAAA0AAAAAkAAAAEgAAACQAAAASAAAAAAAAAABAAAAAAAAAAEAAABQAAAAAAAAAAAA4D8AAAAAAADgPwAAAAAAAOA/AAAAAAAA4D8AAAAAAADgPwAAAAAAAOA/AAAAAAAA4D8AAAAAAADgPwAAAAAAAOA/AAAAAAAA4D8CAAAAjAAAAAAAAAAAAAAAW5vVDP///wgAAAAAAAAAAAAAAAAAAAAAAAAAAAAAAAAAAAAAZAAAAAEAAABAAAAAAAAAAAAAAAAAAAAAAAAAAAAAAAAAAAAAAAAAAAAAAAAAAAAAAAAAAAAAAAAAAAAAAAAAAAAAAAAAAAAAAAAAAAAAAAAAAAAAAAAAAAAAAAAAAAAAFAAAADwAAAAAAAAAAAAAAAAAAAkUAAAAAQAAABQAAAAUAAAAFAAAAAEAAAAAAAAAZAAAAGQAAAAAAAAAZAAAAGQAAAAVAAAAYAAAAAAAAAAAAAAADwAAACADAAAAAAAAAAAAAAEAAACgMgAAVgcAAKr4//8BAAAAf39/AAEAAABkAAAAAAAAABQAAABAHwAAAAAAACYAAAAAAAAAwOD//wAAAAAmAAAAZAAAABYAAABMAAAAAAAAAAAAAAAEAAAAAAAAAAEAAADn5uYKAAAAACgAAAAoAAAAZAAAAGQAAAAAAAAAzMzMAAAAAABQAAAAUAAAAGQAAABkAAAAAAAAABcAAAAUAAAAAAAAAAAAAAD/fwAA/38AAAAAAAAJAAAABAAAAF8AYAAeAAAAaAAAAAAAAAAAAAAAAAAAAAAAAAAAAAAAECcAABAnAAAAAAAAAAAAAAAAAAAAAAAAAAAAAAAAAAAAAAAAAAAAABQAAAAAAAAAwMD/AAAAAABkAAAAMgAAAAAAAABkAAAAAAAAAH9/fwAKAAAAIgAAABgAAAAAAAAAAAAAAAAAAAAAAAAAAAAAAAAAAAAkAAAAJAAAAAAAAAAHAAAAAAAAAAAAAAAAAAAAAAAAAAAAAAAAAAAAf39/ACUAAABYAAAAAAAAAAAAAAAAAAAAAAAAAAAAAAAAAAAAAAAAAAAAAAAAAAAAAAAAAAAAAAA/AAAAAAAAAKCGAQAAAAAAAAAAAAAAAAAMAAAAAQAAAAAAAAAAAAAAAAAAAB8AAABUAAAAW5vVBf///wEAAAAAAAAAAAAAAAAAAAAAAAAAAAAAAAAAAAAAAAAAAAAAAAJ/f38A5+bmA8zMzADAwP8Af39/AAAAAAAAAAAAAAAAAAAAAAAAAAAAIQAAABgAAAAUAAAAKAUAAD8CAADYRQAAZwoAABAAAAAmAAAACAAAAAAAAAAAAAAA"/>
+                <pr:smNativeData xmlns="smNativeData" xmlns:pr="smNativeData" xmlns:p15="http://schemas.microsoft.com/office/powerpoint/2012/main" xmlns:p14="http://schemas.microsoft.com/office/powerpoint/2010/main" xmlns:mc="http://schemas.openxmlformats.org/markup-compatibility/2006" val="SMDATA_15_FLquaRMAAAAlAAAAZAAAAA0AAAAAkAAAAEgAAACQAAAASAAAAAAAAAABAAAAAAAAAAEAAABQAAAAAAAAAAAA4D8AAAAAAADgPwAAAAAAAOA/AAAAAAAA4D8AAAAAAADgPwAAAAAAAOA/AAAAAAAA4D8AAAAAAADgPwAAAAAAAOA/AAAAAAAA4D8CAAAAjAAAAAAAAAAAAAAAW5vVDP///wgAAAAAAAAAAAAAAAAAAAAAAAAAAAAAAAAAAAAAZAAAAAEAAABAAAAAAAAAAAAAAAAAAAAAAAAAAAAAAAAAAAAAAAAAAAAAAAAAAAAAAAAAAAAAAAAAAAAAAAAAAAAAAAAAAAAAAAAAAAAAAAAAAAAAAAAAAAAAAAAAAAAAFAAAADwAAAAAAAAAAAAAAAAAAAkUAAAAAQAAABQAAAAUAAAAFAAAAAEAAAAAAAAAZAAAAGQAAAAAAAAAZAAAAGQAAAAVAAAAYAAAAAAAAAAAAAAADwAAACADAAAAAAAAAAAAAAEAAACgMgAAVgcAAKr4//8BAAAAf39/AAEAAABkAAAAAAAAABQAAABAHwAAAAAAACYAAAAAAAAAwOD//wAAAAAmAAAAZAAAABYAAABMAAAAAAAAAAAAAAAEAAAAAAAAAAEAAADn5uYKAAAAACgAAAAoAAAAZAAAAGQAAAAAAAAAzMzMAAAAAABQAAAAUAAAAGQAAABkAAAAAAAAABcAAAAUAAAAAAAAAAAAAAD/fwAA/38AAAAAAAAJAAAABAAAAAAAAAAeAAAAaAAAAAAAAAAAAAAAAAAAAAAAAAAAAAAAECcAABAnAAAAAAAAAAAAAAAAAAAAAAAAAAAAAAAAAAAAAAAAAAAAABQAAAAAAAAAwMD/AAAAAABkAAAAMgAAAAAAAABkAAAAAAAAAH9/fwAKAAAAIgAAABgAAAAAAAAAAAAAAAAAAAAAAAAAAAAAAAAAAAAkAAAAJAAAAAAAAAAHAAAAAAAAAAAAAAAAAAAAAAAAAAAAAAAAAAAAf39/ACUAAABYAAAAAAAAAAAAAAAAAAAAAAAAAAAAAAAAAAAAAAAAAAAAAAAAAAAAAAAAAAAAAAA/AAAAAAAAAKCGAQAAAAAAAAAAAAAAAAAMAAAAAQAAAAAAAAAAAAAAAAAAAB8AAABUAAAAW5vVBf///wEAAAAAAAAAAAAAAAAAAAAAAAAAAAAAAAAAAAAAAAAAAAAAAAJ/f38A5+bmA8zMzADAwP8Af39/AAAAAAAAAAAAAAAAAAAAAAAAAAAAIQAAABgAAAAUAAAAKAUAAD8CAADYRQAAZwoAABAAAAAmAAAACAAAAAAAAAAAAAAA"/>
               </a:ext>
             </a:extLst>
           </p:cNvSpPr>
@@ -4272,12 +4363,22 @@
           <a:bodyPr/>
           <a:lstStyle/>
           <a:p>
-            <a:pPr>
-              <a:defRPr lang="en-us"/>
-            </a:pPr>
-            <a:r>
-              <a:t>Setup OS onto internal Flash memory</a:t>
-            </a:r>
+            <a:pPr algn="ctr">
+              <a:defRPr lang="en-US"/>
+            </a:pPr>
+            <a:r>
+              <a:rPr dirty="0" smtClean="0"/>
+              <a:t>Flashing </a:t>
+            </a:r>
+            <a:r>
+              <a:rPr dirty="0"/>
+              <a:t>the </a:t>
+            </a:r>
+            <a:r>
+              <a:rPr dirty="0" smtClean="0"/>
+              <a:t>OS from an SD card</a:t>
+            </a:r>
+            <a:endParaRPr dirty="0"/>
           </a:p>
         </p:txBody>
       </p:sp>
@@ -4288,7 +4389,7 @@
             <a:spLocks noGrp="1" noChangeArrowheads="1"/>
             <a:extLst>
               <a:ext uri="smNativeData">
-                <pr:smNativeData xmlns:pr="smNativeData" xmlns="smNativeData" val="SMDATA_15_FLquaRMAAAAlAAAAZAAAAA0AAAAAkAAAAEgAAACQAAAASAAAAAAAAAAAAAAAAAAAAAEAAABQAAAAAAAAAAAA4D8AAAAAAADgPwAAAAAAAOA/AAAAAAAA4D8AAAAAAADgPwAAAAAAAOA/AAAAAAAA4D8AAAAAAADgPwAAAAAAAOA/AAAAAAAA4D8CAAAAjAAAAAAAAAAAAAAAW5vVDP///wgAAAAAAAAAAAAAAAAAAAAAAAAAAAAAAAAAAAAAZAAAAAEAAABAAAAAAAAAAAAAAAAAAAAAAAAAAAAAAAAAAAAAAAAAAAAAAAAAAAAAAAAAAAAAAAAAAAAAAAAAAAAAAAAAAAAAAAAAAAAAAAAAAAAAAAAAAAAAAAAAAAAAFAAAADwAAAAAAAAAAAAAAAAAAAkUAAAAAQAAABQAAAAUAAAAFAAAAAEAAAAAAAAAZAAAAGQAAAAAAAAAZAAAAGQAAAAVAAAAYAAAAAAAAAAAAAAADwAAACADAAAAAAAAAAAAAAEAAACgMgAAVgcAAKr4//8BAAAAf39/AAEAAABkAAAAAAAAABQAAABAHwAAAAAAACYAAAAAAAAAwOD//wAAAAAmAAAAZAAAABYAAABMAAAAAAAAAAAAAAAEAAAAAAAAAAEAAADn5uYKAAAAACgAAAAoAAAAZAAAAGQAAAAAAAAAzMzMAAAAAABQAAAAUAAAAGQAAABkAAAAAAAAABcAAAAUAAAAAAAAAAAAAAD/fwAA/38AAAAAAAAJAAAABAAAAAAAAAAeAAAAaAAAAAAAAAAAAAAAAAAAAAAAAAAAAAAAECcAABAnAAAAAAAAAAAAAAAAAAAAAAAAAAAAAAAAAAAAAAAAAAAAABQAAAAAAAAAwMD/AAAAAABkAAAAMgAAAAAAAABkAAAAAAAAAH9/fwAKAAAAIgAAABgAAAAAAAAAAAAAAAAAAAAAAAAAAAAAAAAAAAAkAAAAJAAAAAAAAAAHAAAAAAAAAAAAAAAAAAAAAAAAAAAAAAAAAAAAf39/ACUAAABYAAAAAAAAAAAAAAAAAAAAAAAAAAAAAAAAAAAAAAAAAAAAAAAAAAAAAAAAAAAAAAA/AAAAAAAAAKCGAQAAAAAAAAAAAAAAAAAMAAAAAQAAAAAAAAAAAAAAAAAAAB8AAABUAAAAW5vVBf///wEAAAAAAAAAAAAAAAAAAAAAAAAAAAAAAAAAAAAAAAAAAAAAAAJ/f38A5+bmA8zMzADAwP8Af39/AAAAAAAAAAAAAAAAAAAAAAAAAAAAIQAAABgAAAAUAAAAKAUAADsLAADYRQAAACYAABAAAAAmAAAACAAAAAAAAAAAAAAA"/>
+                <pr:smNativeData xmlns="smNativeData" xmlns:pr="smNativeData" xmlns:p15="http://schemas.microsoft.com/office/powerpoint/2012/main" xmlns:p14="http://schemas.microsoft.com/office/powerpoint/2010/main" xmlns:mc="http://schemas.openxmlformats.org/markup-compatibility/2006" val="SMDATA_15_FLquaRMAAAAlAAAAZAAAAA0AAAAAkAAAAEgAAACQAAAASAAAAAAAAAAAAAAAAAAAAAEAAABQAAAAAAAAAAAA4D8AAAAAAADgPwAAAAAAAOA/AAAAAAAA4D8AAAAAAADgPwAAAAAAAOA/AAAAAAAA4D8AAAAAAADgPwAAAAAAAOA/AAAAAAAA4D8CAAAAjAAAAAAAAAAAAAAAW5vVDP///wgAAAAAAAAAAAAAAAAAAAAAAAAAAAAAAAAAAAAAZAAAAAEAAABAAAAAAAAAAAAAAAAAAAAAAAAAAAAAAAAAAAAAAAAAAAAAAAAAAAAAAAAAAAAAAAAAAAAAAAAAAAAAAAAAAAAAAAAAAAAAAAAAAAAAAAAAAAAAAAAAAAAAFAAAADwAAAAAAAAAAAAAAAAAAAkUAAAAAQAAABQAAAAUAAAAFAAAAAEAAAAAAAAAZAAAAGQAAAAAAAAAZAAAAGQAAAAVAAAAYAAAAAAAAAAAAAAADwAAACADAAAAAAAAAAAAAAEAAACgMgAAVgcAAKr4//8BAAAAf39/AAEAAABkAAAAAAAAABQAAABAHwAAAAAAACYAAAAAAAAAwOD//wAAAAAmAAAAZAAAABYAAABMAAAAAAAAAAAAAAAEAAAAAAAAAAEAAADn5uYKAAAAACgAAAAoAAAAZAAAAGQAAAAAAAAAzMzMAAAAAABQAAAAUAAAAGQAAABkAAAAAAAAABcAAAAUAAAAAAAAAAAAAAD/fwAA/38AAAAAAAAJAAAABAAAAGUAAAAeAAAAaAAAAAAAAAAAAAAAAAAAAAAAAAAAAAAAECcAABAnAAAAAAAAAAAAAAAAAAAAAAAAAAAAAAAAAAAAAAAAAAAAABQAAAAAAAAAwMD/AAAAAABkAAAAMgAAAAAAAABkAAAAAAAAAH9/fwAKAAAAIgAAABgAAAAAAAAAAAAAAAAAAAAAAAAAAAAAAAAAAAAkAAAAJAAAAAAAAAAHAAAAAAAAAAAAAAAAAAAAAAAAAAAAAAAAAAAAf39/ACUAAABYAAAAAAAAAAAAAAAAAAAAAAAAAAAAAAAAAAAAAAAAAAAAAAAAAAAAAAAAAAAAAAA/AAAAAAAAAKCGAQAAAAAAAAAAAAAAAAAMAAAAAQAAAAAAAAAAAAAAAAAAAB8AAABUAAAAW5vVBf///wEAAAAAAAAAAAAAAAAAAAAAAAAAAAAAAAAAAAAAAAAAAAAAAAJ/f38A5+bmA8zMzADAwP8Af39/AAAAAAAAAAAAAAAAAAAAAAAAAAAAIQAAABgAAAAUAAAAKAUAADsLAADYRQAAACYAABAAAAAmAAAACAAAAAAgAAAAAAAA"/>
               </a:ext>
             </a:extLst>
           </p:cNvSpPr>
@@ -4298,39 +4399,143 @@
         </p:nvSpPr>
         <p:spPr/>
         <p:txBody>
-          <a:bodyPr/>
-          <a:lstStyle/>
-          <a:p>
-            <a:pPr>
-              <a:defRPr lang="en-us"/>
-            </a:pPr>
-            <a:r>
-              <a:t>Burn ‘flasher’ image onto SD card</a:t>
-            </a:r>
+          <a:bodyPr vert="horz" wrap="square" lIns="91440" tIns="45720" rIns="91440" bIns="45720" numCol="1" spcCol="215900" anchor="t">
+            <a:prstTxWarp prst="textNoShape">
+              <a:avLst/>
+            </a:prstTxWarp>
+          </a:bodyPr>
+          <a:lstStyle/>
+          <a:p>
+            <a:pPr>
+              <a:defRPr lang="en-US"/>
+            </a:pPr>
+            <a:r>
+              <a:rPr dirty="0" err="1"/>
+              <a:t>BeagleBone</a:t>
+            </a:r>
+            <a:r>
+              <a:rPr dirty="0"/>
+              <a:t> Blue has 4GB </a:t>
+            </a:r>
+            <a:r>
+              <a:rPr dirty="0" err="1"/>
+              <a:t>eMMC</a:t>
+            </a:r>
+            <a:r>
+              <a:rPr dirty="0"/>
+              <a:t> (and 512MB DDR3 memory)</a:t>
+            </a:r>
+          </a:p>
+          <a:p>
+            <a:pPr>
+              <a:defRPr lang="en-US"/>
+            </a:pPr>
+            <a:r>
+              <a:rPr dirty="0"/>
+              <a:t>The SD Card can be used to flash/replace the </a:t>
+            </a:r>
+            <a:r>
+              <a:rPr dirty="0" err="1"/>
+              <a:t>eMMC</a:t>
+            </a:r>
+            <a:endParaRPr dirty="0"/>
           </a:p>
           <a:p>
             <a:pPr lvl="1">
-              <a:defRPr lang="en-us"/>
-            </a:pPr>
-            <a:r>
-              <a:t>Use EduMIP flasher image to get the ‘libcontrol’ installed correctly.</a:t>
+              <a:defRPr lang="en-US"/>
+            </a:pPr>
+            <a:r>
+              <a:rPr dirty="0"/>
+              <a:t>Use </a:t>
+            </a:r>
+            <a:r>
+              <a:rPr dirty="0" err="1"/>
+              <a:t>EduMIP</a:t>
+            </a:r>
+            <a:r>
+              <a:rPr dirty="0"/>
+              <a:t> version on blue Lexar SD Card</a:t>
+            </a:r>
+          </a:p>
+          <a:p>
+            <a:pPr lvl="1">
+              <a:defRPr lang="en-US"/>
+            </a:pPr>
+            <a:r>
+              <a:rPr dirty="0"/>
+              <a:t>If the SD Card is a ‘flasher’ version you don’t even need to hold down the flash button.</a:t>
+            </a:r>
+          </a:p>
+          <a:p>
+            <a:pPr lvl="1">
+              <a:defRPr lang="en-US"/>
+            </a:pPr>
+            <a:r>
+              <a:rPr dirty="0"/>
+              <a:t>If it’s flashing it will cycle LEDs in a </a:t>
+            </a:r>
+            <a:r>
+              <a:rPr dirty="0" err="1"/>
+              <a:t>cyclon</a:t>
+            </a:r>
+            <a:r>
+              <a:rPr dirty="0"/>
+              <a:t> fashion back and forth.</a:t>
             </a:r>
           </a:p>
           <a:p>
             <a:pPr lvl="2">
-              <a:defRPr lang="en-us"/>
-            </a:pPr>
-            <a:r>
-              <a:rPr lang="en-us" cap="none">
-                <a:hlinkClick r:id="rId2"/>
-              </a:rPr>
-              <a:t>https://www.renaissancerobotics.com/BeagleboneBlue.html</a:t>
-            </a:r>
-          </a:p>
-          <a:p>
-            <a:pPr>
-              <a:defRPr lang="en-us"/>
-            </a:pPr>
+              <a:defRPr lang="en-US"/>
+            </a:pPr>
+            <a:r>
+              <a:rPr dirty="0" err="1"/>
+              <a:t>Once’s</a:t>
+            </a:r>
+            <a:r>
+              <a:rPr dirty="0"/>
+              <a:t> it done it will auto-shut itself down (and no more LEDs cycling).</a:t>
+            </a:r>
+          </a:p>
+          <a:p>
+            <a:pPr lvl="1">
+              <a:defRPr lang="en-US"/>
+            </a:pPr>
+            <a:r>
+              <a:rPr dirty="0"/>
+              <a:t>Take the SD card out (so it doesn’t do it again) and reboot.</a:t>
+            </a:r>
+          </a:p>
+          <a:p>
+            <a:pPr>
+              <a:defRPr lang="en-US"/>
+            </a:pPr>
+            <a:r>
+              <a:rPr dirty="0"/>
+              <a:t>To create a new flasher SD Card from the current </a:t>
+            </a:r>
+            <a:r>
+              <a:rPr dirty="0" err="1"/>
+              <a:t>eMMC</a:t>
+            </a:r>
+            <a:r>
+              <a:rPr dirty="0"/>
+              <a:t>:</a:t>
+            </a:r>
+          </a:p>
+          <a:p>
+            <a:pPr lvl="1">
+              <a:defRPr lang="en-US"/>
+            </a:pPr>
+            <a:r>
+              <a:rPr lang="en-US" sz="2000" cap="none" dirty="0"/>
+              <a:t>/opt/scripts/tools/eMMC/beaglebone-black-make-microSD-flasher-from-eMMC.sh</a:t>
+            </a:r>
+          </a:p>
+          <a:p>
+            <a:pPr lvl="1">
+              <a:defRPr lang="en-US"/>
+            </a:pPr>
+            <a:endParaRPr lang="en-US" sz="2000" cap="none" dirty="0"/>
           </a:p>
         </p:txBody>
       </p:sp>
@@ -4350,7 +4555,7 @@
 </file>
 
 <file path=ppt/slides/slide12.xml><?xml version="1.0" encoding="utf-8"?>
-<p:sld xmlns:p="http://schemas.openxmlformats.org/presentationml/2006/main" xmlns:mc="http://schemas.openxmlformats.org/markup-compatibility/2006" xmlns:p14="http://schemas.microsoft.com/office/powerpoint/2010/main" xmlns:p15="http://schemas.microsoft.com/office/powerpoint/2012/main" xmlns:r="http://schemas.openxmlformats.org/officeDocument/2006/relationships" xmlns:a="http://schemas.openxmlformats.org/drawingml/2006/main" mc:Ignorable="p14">
+<p:sld xmlns:a="http://schemas.openxmlformats.org/drawingml/2006/main" xmlns:r="http://schemas.openxmlformats.org/officeDocument/2006/relationships" xmlns:p="http://schemas.openxmlformats.org/presentationml/2006/main">
   <p:cSld>
     <p:spTree>
       <p:nvGrpSpPr>
@@ -4373,7 +4578,7 @@
             <a:spLocks noGrp="1" noChangeArrowheads="1"/>
             <a:extLst>
               <a:ext uri="smNativeData">
-                <pr:smNativeData xmlns:pr="smNativeData" xmlns="smNativeData" val="SMDATA_15_FLquaRMAAAAlAAAAZAAAAA0AAAAAkAAAAEgAAACQAAAASAAAAAAAAAABAAAAAAAAAAEAAABQAAAAAAAAAAAA4D8AAAAAAADgPwAAAAAAAOA/AAAAAAAA4D8AAAAAAADgPwAAAAAAAOA/AAAAAAAA4D8AAAAAAADgPwAAAAAAAOA/AAAAAAAA4D8CAAAAjAAAAAAAAAAAAAAAW5vVDP///wgAAAAAAAAAAAAAAAAAAAAAAAAAAAAAAAAAAAAAZAAAAAEAAABAAAAAAAAAAAAAAAAAAAAAAAAAAAAAAAAAAAAAAAAAAAAAAAAAAAAAAAAAAAAAAAAAAAAAAAAAAAAAAAAAAAAAAAAAAAAAAAAAAAAAAAAAAAAAAAAAAAAAFAAAADwAAAAAAAAAAAAAAAAAAAkUAAAAAQAAABQAAAAUAAAAFAAAAAEAAAAAAAAAZAAAAGQAAAAAAAAAZAAAAGQAAAAVAAAAYAAAAAAAAAAAAAAADwAAACADAAAAAAAAAAAAAAEAAACgMgAAVgcAAKr4//8BAAAAf39/AAEAAABkAAAAAAAAABQAAABAHwAAAAAAACYAAAAAAAAAwOD//wAAAAAmAAAAZAAAABYAAABMAAAAAAAAAAAAAAAEAAAAAAAAAAEAAADn5uYKAAAAACgAAAAoAAAAZAAAAGQAAAAAAAAAzMzMAAAAAABQAAAAUAAAAGQAAABkAAAAAAAAABcAAAAUAAAAAAAAAAAAAAD/fwAA/38AAAAAAAAJAAAABAAAAAAAAAAeAAAAaAAAAAAAAAAAAAAAAAAAAAAAAAAAAAAAECcAABAnAAAAAAAAAAAAAAAAAAAAAAAAAAAAAAAAAAAAAAAAAAAAABQAAAAAAAAAwMD/AAAAAABkAAAAMgAAAAAAAABkAAAAAAAAAH9/fwAKAAAAIgAAABgAAAAAAAAAAAAAAAAAAAAAAAAAAAAAAAAAAAAkAAAAJAAAAAAAAAAHAAAAAAAAAAAAAAAAAAAAAAAAAAAAAAAAAAAAf39/ACUAAABYAAAAAAAAAAAAAAAAAAAAAAAAAAAAAAAAAAAAAAAAAAAAAAAAAAAAAAAAAAAAAAA/AAAAAAAAAKCGAQAAAAAAAAAAAAAAAAAMAAAAAQAAAAAAAAAAAAAAAAAAAB8AAABUAAAAW5vVBf///wEAAAAAAAAAAAAAAAAAAAAAAAAAAAAAAAAAAAAAAAAAAAAAAAJ/f38A5+bmA8zMzADAwP8Af39/AAAAAAAAAAAAAAAAAAAAAAAAAAAAIQAAABgAAAAUAAAAKAUAAD8CAADYRQAAZwoAABAAAAAmAAAACAAAAAAAAAAAAAAA"/>
+                <pr:smNativeData xmlns="smNativeData" xmlns:pr="smNativeData" xmlns:p15="http://schemas.microsoft.com/office/powerpoint/2012/main" xmlns:p14="http://schemas.microsoft.com/office/powerpoint/2010/main" xmlns:mc="http://schemas.openxmlformats.org/markup-compatibility/2006" val="SMDATA_15_FLquaRMAAAAlAAAAZAAAAA0AAAAAkAAAAEgAAACQAAAASAAAAAAAAAABAAAAAAAAAAEAAABQAAAAAAAAAAAA4D8AAAAAAADgPwAAAAAAAOA/AAAAAAAA4D8AAAAAAADgPwAAAAAAAOA/AAAAAAAA4D8AAAAAAADgPwAAAAAAAOA/AAAAAAAA4D8CAAAAjAAAAAAAAAAAAAAAW5vVDP///wgAAAAAAAAAAAAAAAAAAAAAAAAAAAAAAAAAAAAAZAAAAAEAAABAAAAAAAAAAAAAAAAAAAAAAAAAAAAAAAAAAAAAAAAAAAAAAAAAAAAAAAAAAAAAAAAAAAAAAAAAAAAAAAAAAAAAAAAAAAAAAAAAAAAAAAAAAAAAAAAAAAAAFAAAADwAAAAAAAAAAAAAAAAAAAkUAAAAAQAAABQAAAAUAAAAFAAAAAEAAAAAAAAAZAAAAGQAAAAAAAAAZAAAAGQAAAAVAAAAYAAAAAAAAAAAAAAADwAAACADAAAAAAAAAAAAAAEAAACgMgAAVgcAAKr4//8BAAAAf39/AAEAAABkAAAAAAAAABQAAABAHwAAAAAAACYAAAAAAAAAwOD//wAAAAAmAAAAZAAAABYAAABMAAAAAAAAAAAAAAAEAAAAAAAAAAEAAADn5uYKAAAAACgAAAAoAAAAZAAAAGQAAAAAAAAAzMzMAAAAAABQAAAAUAAAAGQAAABkAAAAAAAAABcAAAAUAAAAAAAAAAAAAAD/fwAA/38AAAAAAAAJAAAABAAAAF8AYAAeAAAAaAAAAAAAAAAAAAAAAAAAAAAAAAAAAAAAECcAABAnAAAAAAAAAAAAAAAAAAAAAAAAAAAAAAAAAAAAAAAAAAAAABQAAAAAAAAAwMD/AAAAAABkAAAAMgAAAAAAAABkAAAAAAAAAH9/fwAKAAAAIgAAABgAAAAAAAAAAAAAAAAAAAAAAAAAAAAAAAAAAAAkAAAAJAAAAAAAAAAHAAAAAAAAAAAAAAAAAAAAAAAAAAAAAAAAAAAAf39/ACUAAABYAAAAAAAAAAAAAAAAAAAAAAAAAAAAAAAAAAAAAAAAAAAAAAAAAAAAAAAAAAAAAAA/AAAAAAAAAKCGAQAAAAAAAAAAAAAAAAAMAAAAAQAAAAAAAAAAAAAAAAAAAB8AAABUAAAAW5vVBf///wEAAAAAAAAAAAAAAAAAAAAAAAAAAAAAAAAAAAAAAAAAAAAAAAJ/f38A5+bmA8zMzADAwP8Af39/AAAAAAAAAAAAAAAAAAAAAAAAAAAAIQAAABgAAAAUAAAAKAUAAD8CAADYRQAAZwoAABAAAAAmAAAACAAAAAAAAAAAAAAA"/>
               </a:ext>
             </a:extLst>
           </p:cNvSpPr>
@@ -4386,11 +4591,11 @@
           <a:bodyPr/>
           <a:lstStyle/>
           <a:p>
-            <a:pPr algn="ctr">
-              <a:defRPr lang="en-us"/>
-            </a:pPr>
-            <a:r>
-              <a:t>USB Camera</a:t>
+            <a:pPr>
+              <a:defRPr lang="en-US"/>
+            </a:pPr>
+            <a:r>
+              <a:t>Setup OS onto internal Flash memory</a:t>
             </a:r>
           </a:p>
         </p:txBody>
@@ -4402,7 +4607,7 @@
             <a:spLocks noGrp="1" noChangeArrowheads="1"/>
             <a:extLst>
               <a:ext uri="smNativeData">
-                <pr:smNativeData xmlns:pr="smNativeData" xmlns="smNativeData" val="SMDATA_15_FLquaRMAAAAlAAAAZAAAAA0AAAAAkAAAAEgAAACQAAAASAAAAAAAAAAAAAAAAAAAAAEAAABQAAAAAAAAAAAA4D8AAAAAAADgPwAAAAAAAOA/AAAAAAAA4D8AAAAAAADgPwAAAAAAAOA/AAAAAAAA4D8AAAAAAADgPwAAAAAAAOA/AAAAAAAA4D8CAAAAjAAAAAAAAAAAAAAAW5vVDP///wgAAAAAAAAAAAAAAAAAAAAAAAAAAAAAAAAAAAAAZAAAAAEAAABAAAAAAAAAAAAAAAAAAAAAAAAAAAAAAAAAAAAAAAAAAAAAAAAAAAAAAAAAAAAAAAAAAAAAAAAAAAAAAAAAAAAAAAAAAAAAAAAAAAAAAAAAAAAAAAAAAAAAFAAAADwAAAAAAAAAAAAAAAAAAAkUAAAAAQAAABQAAAAUAAAAFAAAAAEAAAAAAAAAZAAAAGQAAAAAAAAAZAAAAGQAAAAVAAAAYAAAAAAAAAAAAAAADwAAACADAAAAAAAAAAAAAAEAAACgMgAAVgcAAKr4//8BAAAAf39/AAEAAABkAAAAAAAAABQAAABAHwAAAAAAACYAAAAAAAAAwOD//wAAAAAmAAAAZAAAABYAAABMAAAAAAAAAAAAAAAEAAAAAAAAAAEAAADn5uYKAAAAACgAAAAoAAAAZAAAAGQAAAAAAAAAzMzMAAAAAABQAAAAUAAAAGQAAABkAAAAAAAAABcAAAAUAAAAAAAAAAAAAAD/fwAA/38AAAAAAAAJAAAABAAAAGOVQsIeAAAAaAAAAAAAAAAAAAAAAAAAAAAAAAAAAAAAECcAABAnAAAAAAAAAAAAAAAAAAAAAAAAAAAAAAAAAAAAAAAAAAAAABQAAAAAAAAAwMD/AAAAAABkAAAAMgAAAAAAAABkAAAAAAAAAH9/fwAKAAAAIgAAABgAAAAAAAAAAAAAAAAAAAAAAAAAAAAAAAAAAAAkAAAAJAAAAAAAAAAHAAAAAAAAAAAAAAAAAAAAAAAAAAAAAAAAAAAAf39/ACUAAABYAAAAAAAAAAAAAAAAAAAAAAAAAAAAAAAAAAAAAAAAAAAAAAAAAAAAAAAAAAAAAAA/AAAAAAAAAKCGAQAAAAAAAAAAAAAAAAAMAAAAAQAAAAAAAAAAAAAAAAAAAB8AAABUAAAAW5vVBf///wEAAAAAAAAAAAAAAAAAAAAAAAAAAAAAAAAAAAAAAAAAAAAAAAJ/f38A5+bmA8zMzADAwP8Af39/AAAAAAAAAAAAAAAAAAAAAAAAAAAAIQAAABgAAAAUAAAAKAUAADsLAADYRQAAACYAABAAAAAmAAAACAAAAAAAAAAAAAAA"/>
+                <pr:smNativeData xmlns="smNativeData" xmlns:pr="smNativeData" xmlns:p15="http://schemas.microsoft.com/office/powerpoint/2012/main" xmlns:p14="http://schemas.microsoft.com/office/powerpoint/2010/main" xmlns:mc="http://schemas.openxmlformats.org/markup-compatibility/2006" val="SMDATA_15_FLquaRMAAAAlAAAAZAAAAA0AAAAAkAAAAEgAAACQAAAASAAAAAAAAAAAAAAAAAAAAAEAAABQAAAAAAAAAAAA4D8AAAAAAADgPwAAAAAAAOA/AAAAAAAA4D8AAAAAAADgPwAAAAAAAOA/AAAAAAAA4D8AAAAAAADgPwAAAAAAAOA/AAAAAAAA4D8CAAAAjAAAAAAAAAAAAAAAW5vVDP///wgAAAAAAAAAAAAAAAAAAAAAAAAAAAAAAAAAAAAAZAAAAAEAAABAAAAAAAAAAAAAAAAAAAAAAAAAAAAAAAAAAAAAAAAAAAAAAAAAAAAAAAAAAAAAAAAAAAAAAAAAAAAAAAAAAAAAAAAAAAAAAAAAAAAAAAAAAAAAAAAAAAAAFAAAADwAAAAAAAAAAAAAAAAAAAkUAAAAAQAAABQAAAAUAAAAFAAAAAEAAAAAAAAAZAAAAGQAAAAAAAAAZAAAAGQAAAAVAAAAYAAAAAAAAAAAAAAADwAAACADAAAAAAAAAAAAAAEAAACgMgAAVgcAAKr4//8BAAAAf39/AAEAAABkAAAAAAAAABQAAABAHwAAAAAAACYAAAAAAAAAwOD//wAAAAAmAAAAZAAAABYAAABMAAAAAAAAAAAAAAAEAAAAAAAAAAEAAADn5uYKAAAAACgAAAAoAAAAZAAAAGQAAAAAAAAAzMzMAAAAAABQAAAAUAAAAGQAAABkAAAAAAAAABcAAAAUAAAAAAAAAAAAAAD/fwAA/38AAAAAAAAJAAAABAAAAAAAAAAeAAAAaAAAAAAAAAAAAAAAAAAAAAAAAAAAAAAAECcAABAnAAAAAAAAAAAAAAAAAAAAAAAAAAAAAAAAAAAAAAAAAAAAABQAAAAAAAAAwMD/AAAAAABkAAAAMgAAAAAAAABkAAAAAAAAAH9/fwAKAAAAIgAAABgAAAAAAAAAAAAAAAAAAAAAAAAAAAAAAAAAAAAkAAAAJAAAAAAAAAAHAAAAAAAAAAAAAAAAAAAAAAAAAAAAAAAAAAAAf39/ACUAAABYAAAAAAAAAAAAAAAAAAAAAAAAAAAAAAAAAAAAAAAAAAAAAAAAAAAAAAAAAAAAAAA/AAAAAAAAAKCGAQAAAAAAAAAAAAAAAAAMAAAAAQAAAAAAAAAAAAAAAAAAAB8AAABUAAAAW5vVBf///wEAAAAAAAAAAAAAAAAAAAAAAAAAAAAAAAAAAAAAAAAAAAAAAAJ/f38A5+bmA8zMzADAwP8Af39/AAAAAAAAAAAAAAAAAAAAAAAAAAAAIQAAABgAAAAUAAAAKAUAADsLAADYRQAAACYAABAAAAAmAAAACAAAAAAAAAAAAAAA"/>
               </a:ext>
             </a:extLst>
           </p:cNvSpPr>
@@ -4416,75 +4621,38 @@
           <a:lstStyle/>
           <a:p>
             <a:pPr>
-              <a:defRPr lang="en-us"/>
-            </a:pPr>
-            <a:r>
-              <a:rPr lang="en-us" cap="none">
+              <a:defRPr lang="en-US"/>
+            </a:pPr>
+            <a:r>
+              <a:t>Burn ‘flasher’ image onto SD card</a:t>
+            </a:r>
+          </a:p>
+          <a:p>
+            <a:pPr lvl="1">
+              <a:defRPr lang="en-US"/>
+            </a:pPr>
+            <a:r>
+              <a:t>Use EduMIP flasher image to get the ‘libcontrol’ installed correctly.</a:t>
+            </a:r>
+          </a:p>
+          <a:p>
+            <a:pPr lvl="2">
+              <a:defRPr lang="en-US"/>
+            </a:pPr>
+            <a:r>
+              <a:rPr lang="en-US" cap="none">
                 <a:hlinkClick r:id="rId2"/>
               </a:rPr>
-              <a:t>https://subscription.packtpub.com/book/hardware-and-creative/9781788293136/5/05lvl1sec28/connecting-your-usb-camera-to-your-beaglebone-blue-and-viewing-the-images</a:t>
-            </a:r>
-          </a:p>
-          <a:p>
-            <a:pPr>
-              <a:defRPr lang="en-us"/>
-            </a:pPr>
-            <a:r>
-              <a:t>Check if camera is present:</a:t>
-            </a:r>
-          </a:p>
-          <a:p>
-            <a:pPr lvl="1">
-              <a:defRPr lang="en-us"/>
-            </a:pPr>
-            <a:r>
-              <a:t>lsusb</a:t>
-            </a:r>
-          </a:p>
-          <a:p>
-            <a:pPr lvl="1">
-              <a:defRPr lang="en-us"/>
-            </a:pPr>
-            <a:r>
-              <a:t>cd /dev; ls video*</a:t>
-            </a:r>
-          </a:p>
-          <a:p>
-            <a:pPr lvl="2">
-              <a:defRPr lang="en-us"/>
-            </a:pPr>
-            <a:r>
-              <a:t>It should show up as video0 or similar</a:t>
-            </a:r>
-          </a:p>
-          <a:p>
-            <a:pPr>
-              <a:defRPr lang="en-us"/>
-            </a:pPr>
-            <a:r>
-              <a:t>Compatible cameras:</a:t>
-            </a:r>
-          </a:p>
-          <a:p>
-            <a:pPr lvl="1">
-              <a:defRPr lang="en-us"/>
-            </a:pPr>
-            <a:r>
-              <a:t>Logitech C270: 720p</a:t>
-            </a:r>
-          </a:p>
-          <a:p>
-            <a:pPr lvl="1">
-              <a:defRPr lang="en-us"/>
-            </a:pPr>
-            <a:r>
-              <a:t>Logitech C310: 720p</a:t>
-            </a:r>
-          </a:p>
-          <a:p>
-            <a:pPr lvl="1">
-              <a:defRPr lang="en-us"/>
-            </a:pPr>
+              <a:t>https://www.renaissancerobotics.com/BeagleboneBlue.html</a:t>
+            </a:r>
+          </a:p>
+          <a:p>
+            <a:pPr>
+              <a:defRPr lang="en-US"/>
+            </a:pPr>
+            <a:endParaRPr lang="en-US" cap="none">
+              <a:hlinkClick r:id="rId2"/>
+            </a:endParaRPr>
           </a:p>
         </p:txBody>
       </p:sp>
@@ -4504,7 +4672,7 @@
 </file>
 
 <file path=ppt/slides/slide13.xml><?xml version="1.0" encoding="utf-8"?>
-<p:sld xmlns:p="http://schemas.openxmlformats.org/presentationml/2006/main" xmlns:mc="http://schemas.openxmlformats.org/markup-compatibility/2006" xmlns:p14="http://schemas.microsoft.com/office/powerpoint/2010/main" xmlns:p15="http://schemas.microsoft.com/office/powerpoint/2012/main" xmlns:r="http://schemas.openxmlformats.org/officeDocument/2006/relationships" xmlns:a="http://schemas.openxmlformats.org/drawingml/2006/main" mc:Ignorable="p14">
+<p:sld xmlns:a="http://schemas.openxmlformats.org/drawingml/2006/main" xmlns:r="http://schemas.openxmlformats.org/officeDocument/2006/relationships" xmlns:p="http://schemas.openxmlformats.org/presentationml/2006/main">
   <p:cSld>
     <p:spTree>
       <p:nvGrpSpPr>
@@ -4527,7 +4695,7 @@
             <a:spLocks noGrp="1" noChangeArrowheads="1"/>
             <a:extLst>
               <a:ext uri="smNativeData">
-                <pr:smNativeData xmlns:pr="smNativeData" xmlns="smNativeData" val="SMDATA_15_FLquaRMAAAAlAAAAZAAAAA0AAAAAkAAAAEgAAACQAAAASAAAAAAAAAABAAAAAAAAAAEAAABQAAAAAAAAAAAA4D8AAAAAAADgPwAAAAAAAOA/AAAAAAAA4D8AAAAAAADgPwAAAAAAAOA/AAAAAAAA4D8AAAAAAADgPwAAAAAAAOA/AAAAAAAA4D8CAAAAjAAAAAAAAAAAAAAAW5vVDP///wgAAAAAAAAAAAAAAAAAAAAAAAAAAAAAAAAAAAAAZAAAAAEAAABAAAAAAAAAAAAAAAAAAAAAAAAAAAAAAAAAAAAAAAAAAAAAAAAAAAAAAAAAAAAAAAAAAAAAAAAAAAAAAAAAAAAAAAAAAAAAAAAAAAAAAAAAAAAAAAAAAAAAFAAAADwAAAAAAAAAAAAAAAAAAAkUAAAAAQAAABQAAAAUAAAAFAAAAAEAAAAAAAAAZAAAAGQAAAAAAAAAZAAAAGQAAAAVAAAAYAAAAAAAAAAAAAAADwAAACADAAAAAAAAAAAAAAEAAACgMgAAVgcAAKr4//8BAAAAf39/AAEAAABkAAAAAAAAABQAAABAHwAAAAAAACYAAAAAAAAAwOD//wAAAAAmAAAAZAAAABYAAABMAAAAAAAAAAAAAAAEAAAAAAAAAAEAAADn5uYKAAAAACgAAAAoAAAAZAAAAGQAAAAAAAAAzMzMAAAAAABQAAAAUAAAAGQAAABkAAAAAAAAABcAAAAUAAAAAAAAAAAAAAD/fwAA/38AAAAAAAAJAAAABAAAAF8AYAAeAAAAaAAAAAAAAAAAAAAAAAAAAAAAAAAAAAAAECcAABAnAAAAAAAAAAAAAAAAAAAAAAAAAAAAAAAAAAAAAAAAAAAAABQAAAAAAAAAwMD/AAAAAABkAAAAMgAAAAAAAABkAAAAAAAAAH9/fwAKAAAAIgAAABgAAAAAAAAAAAAAAAAAAAAAAAAAAAAAAAAAAAAkAAAAJAAAAAAAAAAHAAAAAAAAAAAAAAAAAAAAAAAAAAAAAAAAAAAAf39/ACUAAABYAAAAAAAAAAAAAAAAAAAAAAAAAAAAAAAAAAAAAAAAAAAAAAAAAAAAAAAAAAAAAAA/AAAAAAAAAKCGAQAAAAAAAAAAAAAAAAAMAAAAAQAAAAAAAAAAAAAAAAAAAB8AAABUAAAAW5vVBf///wEAAAAAAAAAAAAAAAAAAAAAAAAAAAAAAAAAAAAAAAAAAAAAAAJ/f38A5+bmA8zMzADAwP8Af39/AAAAAAAAAAAAAAAAAAAAAAAAAAAAIQAAABgAAAAUAAAAKAUAAD8CAADYRQAAZwoAABAAAAAmAAAACAAAAAAAAAAAAAAA"/>
+                <pr:smNativeData xmlns="smNativeData" xmlns:pr="smNativeData" xmlns:p15="http://schemas.microsoft.com/office/powerpoint/2012/main" xmlns:p14="http://schemas.microsoft.com/office/powerpoint/2010/main" xmlns:mc="http://schemas.openxmlformats.org/markup-compatibility/2006" val="SMDATA_15_FLquaRMAAAAlAAAAZAAAAA0AAAAAkAAAAEgAAACQAAAASAAAAAAAAAABAAAAAAAAAAEAAABQAAAAAAAAAAAA4D8AAAAAAADgPwAAAAAAAOA/AAAAAAAA4D8AAAAAAADgPwAAAAAAAOA/AAAAAAAA4D8AAAAAAADgPwAAAAAAAOA/AAAAAAAA4D8CAAAAjAAAAAAAAAAAAAAAW5vVDP///wgAAAAAAAAAAAAAAAAAAAAAAAAAAAAAAAAAAAAAZAAAAAEAAABAAAAAAAAAAAAAAAAAAAAAAAAAAAAAAAAAAAAAAAAAAAAAAAAAAAAAAAAAAAAAAAAAAAAAAAAAAAAAAAAAAAAAAAAAAAAAAAAAAAAAAAAAAAAAAAAAAAAAFAAAADwAAAAAAAAAAAAAAAAAAAkUAAAAAQAAABQAAAAUAAAAFAAAAAEAAAAAAAAAZAAAAGQAAAAAAAAAZAAAAGQAAAAVAAAAYAAAAAAAAAAAAAAADwAAACADAAAAAAAAAAAAAAEAAACgMgAAVgcAAKr4//8BAAAAf39/AAEAAABkAAAAAAAAABQAAABAHwAAAAAAACYAAAAAAAAAwOD//wAAAAAmAAAAZAAAABYAAABMAAAAAAAAAAAAAAAEAAAAAAAAAAEAAADn5uYKAAAAACgAAAAoAAAAZAAAAGQAAAAAAAAAzMzMAAAAAABQAAAAUAAAAGQAAABkAAAAAAAAABcAAAAUAAAAAAAAAAAAAAD/fwAA/38AAAAAAAAJAAAABAAAAAAAAAAeAAAAaAAAAAAAAAAAAAAAAAAAAAAAAAAAAAAAECcAABAnAAAAAAAAAAAAAAAAAAAAAAAAAAAAAAAAAAAAAAAAAAAAABQAAAAAAAAAwMD/AAAAAABkAAAAMgAAAAAAAABkAAAAAAAAAH9/fwAKAAAAIgAAABgAAAAAAAAAAAAAAAAAAAAAAAAAAAAAAAAAAAAkAAAAJAAAAAAAAAAHAAAAAAAAAAAAAAAAAAAAAAAAAAAAAAAAAAAAf39/ACUAAABYAAAAAAAAAAAAAAAAAAAAAAAAAAAAAAAAAAAAAAAAAAAAAAAAAAAAAAAAAAAAAAA/AAAAAAAAAKCGAQAAAAAAAAAAAAAAAAAMAAAAAQAAAAAAAAAAAAAAAAAAAB8AAABUAAAAW5vVBf///wEAAAAAAAAAAAAAAAAAAAAAAAAAAAAAAAAAAAAAAAAAAAAAAAJ/f38A5+bmA8zMzADAwP8Af39/AAAAAAAAAAAAAAAAAAAAAAAAAAAAIQAAABgAAAAUAAAAKAUAAD8CAADYRQAAZwoAABAAAAAmAAAACAAAAAAAAAAAAAAA"/>
               </a:ext>
             </a:extLst>
           </p:cNvSpPr>
@@ -4541,7 +4709,162 @@
           <a:lstStyle/>
           <a:p>
             <a:pPr algn="ctr">
-              <a:defRPr lang="en-us"/>
+              <a:defRPr lang="en-US"/>
+            </a:pPr>
+            <a:r>
+              <a:t>USB Camera</a:t>
+            </a:r>
+          </a:p>
+        </p:txBody>
+      </p:sp>
+      <p:sp>
+        <p:nvSpPr>
+          <p:cNvPr id="3" name="Content Placeholder 2"/>
+          <p:cNvSpPr>
+            <a:spLocks noGrp="1" noChangeArrowheads="1"/>
+            <a:extLst>
+              <a:ext uri="smNativeData">
+                <pr:smNativeData xmlns="smNativeData" xmlns:pr="smNativeData" xmlns:p15="http://schemas.microsoft.com/office/powerpoint/2012/main" xmlns:p14="http://schemas.microsoft.com/office/powerpoint/2010/main" xmlns:mc="http://schemas.openxmlformats.org/markup-compatibility/2006" val="SMDATA_15_FLquaRMAAAAlAAAAZAAAAA0AAAAAkAAAAEgAAACQAAAASAAAAAAAAAAAAAAAAAAAAAEAAABQAAAAAAAAAAAA4D8AAAAAAADgPwAAAAAAAOA/AAAAAAAA4D8AAAAAAADgPwAAAAAAAOA/AAAAAAAA4D8AAAAAAADgPwAAAAAAAOA/AAAAAAAA4D8CAAAAjAAAAAAAAAAAAAAAW5vVDP///wgAAAAAAAAAAAAAAAAAAAAAAAAAAAAAAAAAAAAAZAAAAAEAAABAAAAAAAAAAAAAAAAAAAAAAAAAAAAAAAAAAAAAAAAAAAAAAAAAAAAAAAAAAAAAAAAAAAAAAAAAAAAAAAAAAAAAAAAAAAAAAAAAAAAAAAAAAAAAAAAAAAAAFAAAADwAAAAAAAAAAAAAAAAAAAkUAAAAAQAAABQAAAAUAAAAFAAAAAEAAAAAAAAAZAAAAGQAAAAAAAAAZAAAAGQAAAAVAAAAYAAAAAAAAAAAAAAADwAAACADAAAAAAAAAAAAAAEAAACgMgAAVgcAAKr4//8BAAAAf39/AAEAAABkAAAAAAAAABQAAABAHwAAAAAAACYAAAAAAAAAwOD//wAAAAAmAAAAZAAAABYAAABMAAAAAAAAAAAAAAAEAAAAAAAAAAEAAADn5uYKAAAAACgAAAAoAAAAZAAAAGQAAAAAAAAAzMzMAAAAAABQAAAAUAAAAGQAAABkAAAAAAAAABcAAAAUAAAAAAAAAAAAAAD/fwAA/38AAAAAAAAJAAAABAAAAGOVQsIeAAAAaAAAAAAAAAAAAAAAAAAAAAAAAAAAAAAAECcAABAnAAAAAAAAAAAAAAAAAAAAAAAAAAAAAAAAAAAAAAAAAAAAABQAAAAAAAAAwMD/AAAAAABkAAAAMgAAAAAAAABkAAAAAAAAAH9/fwAKAAAAIgAAABgAAAAAAAAAAAAAAAAAAAAAAAAAAAAAAAAAAAAkAAAAJAAAAAAAAAAHAAAAAAAAAAAAAAAAAAAAAAAAAAAAAAAAAAAAf39/ACUAAABYAAAAAAAAAAAAAAAAAAAAAAAAAAAAAAAAAAAAAAAAAAAAAAAAAAAAAAAAAAAAAAA/AAAAAAAAAKCGAQAAAAAAAAAAAAAAAAAMAAAAAQAAAAAAAAAAAAAAAAAAAB8AAABUAAAAW5vVBf///wEAAAAAAAAAAAAAAAAAAAAAAAAAAAAAAAAAAAAAAAAAAAAAAAJ/f38A5+bmA8zMzADAwP8Af39/AAAAAAAAAAAAAAAAAAAAAAAAAAAAIQAAABgAAAAUAAAAKAUAADsLAADYRQAAACYAABAAAAAmAAAACAAAAAAAAAAAAAAA"/>
+              </a:ext>
+            </a:extLst>
+          </p:cNvSpPr>
+          <p:nvPr>
+            <p:ph type="body" idx="1"/>
+          </p:nvPr>
+        </p:nvSpPr>
+        <p:spPr/>
+        <p:txBody>
+          <a:bodyPr/>
+          <a:lstStyle/>
+          <a:p>
+            <a:pPr>
+              <a:defRPr lang="en-US"/>
+            </a:pPr>
+            <a:r>
+              <a:rPr lang="en-US" cap="none">
+                <a:hlinkClick r:id="rId2"/>
+              </a:rPr>
+              <a:t>https://subscription.packtpub.com/book/hardware-and-creative/9781788293136/5/05lvl1sec28/connecting-your-usb-camera-to-your-beaglebone-blue-and-viewing-the-images</a:t>
+            </a:r>
+          </a:p>
+          <a:p>
+            <a:pPr>
+              <a:defRPr lang="en-US"/>
+            </a:pPr>
+            <a:r>
+              <a:t>Check if camera is present:</a:t>
+            </a:r>
+          </a:p>
+          <a:p>
+            <a:pPr lvl="1">
+              <a:defRPr lang="en-US"/>
+            </a:pPr>
+            <a:r>
+              <a:t>lsusb</a:t>
+            </a:r>
+          </a:p>
+          <a:p>
+            <a:pPr lvl="1">
+              <a:defRPr lang="en-US"/>
+            </a:pPr>
+            <a:r>
+              <a:t>cd /dev; ls video*</a:t>
+            </a:r>
+          </a:p>
+          <a:p>
+            <a:pPr lvl="2">
+              <a:defRPr lang="en-US"/>
+            </a:pPr>
+            <a:r>
+              <a:t>It should show up as video0 or similar</a:t>
+            </a:r>
+          </a:p>
+          <a:p>
+            <a:pPr>
+              <a:defRPr lang="en-US"/>
+            </a:pPr>
+            <a:r>
+              <a:t>Compatible cameras:</a:t>
+            </a:r>
+          </a:p>
+          <a:p>
+            <a:pPr lvl="1">
+              <a:defRPr lang="en-US"/>
+            </a:pPr>
+            <a:r>
+              <a:t>Logitech C270: 720p</a:t>
+            </a:r>
+          </a:p>
+          <a:p>
+            <a:pPr lvl="1">
+              <a:defRPr lang="en-US"/>
+            </a:pPr>
+            <a:r>
+              <a:t>Logitech C310: 720p</a:t>
+            </a:r>
+          </a:p>
+          <a:p>
+            <a:pPr lvl="1">
+              <a:defRPr lang="en-US"/>
+            </a:pPr>
+            <a:endParaRPr/>
+          </a:p>
+        </p:txBody>
+      </p:sp>
+    </p:spTree>
+  </p:cSld>
+  <p:clrMapOvr>
+    <a:masterClrMapping/>
+  </p:clrMapOvr>
+  <p:timing>
+    <p:tnLst>
+      <p:par>
+        <p:cTn id="1" dur="indefinite" restart="never" nodeType="tmRoot"/>
+      </p:par>
+    </p:tnLst>
+  </p:timing>
+</p:sld>
+</file>
+
+<file path=ppt/slides/slide14.xml><?xml version="1.0" encoding="utf-8"?>
+<p:sld xmlns:a="http://schemas.openxmlformats.org/drawingml/2006/main" xmlns:r="http://schemas.openxmlformats.org/officeDocument/2006/relationships" xmlns:p="http://schemas.openxmlformats.org/presentationml/2006/main">
+  <p:cSld>
+    <p:spTree>
+      <p:nvGrpSpPr>
+        <p:cNvPr id="1" name=""/>
+        <p:cNvGrpSpPr/>
+        <p:nvPr/>
+      </p:nvGrpSpPr>
+      <p:grpSpPr>
+        <a:xfrm>
+          <a:off x="0" y="0"/>
+          <a:ext cx="0" cy="0"/>
+          <a:chOff x="0" y="0"/>
+          <a:chExt cx="0" cy="0"/>
+        </a:xfrm>
+      </p:grpSpPr>
+      <p:sp>
+        <p:nvSpPr>
+          <p:cNvPr id="2" name="Title 1"/>
+          <p:cNvSpPr>
+            <a:spLocks noGrp="1" noChangeArrowheads="1"/>
+            <a:extLst>
+              <a:ext uri="smNativeData">
+                <pr:smNativeData xmlns="smNativeData" xmlns:pr="smNativeData" xmlns:p15="http://schemas.microsoft.com/office/powerpoint/2012/main" xmlns:p14="http://schemas.microsoft.com/office/powerpoint/2010/main" xmlns:mc="http://schemas.openxmlformats.org/markup-compatibility/2006" val="SMDATA_15_FLquaRMAAAAlAAAAZAAAAA0AAAAAkAAAAEgAAACQAAAASAAAAAAAAAABAAAAAAAAAAEAAABQAAAAAAAAAAAA4D8AAAAAAADgPwAAAAAAAOA/AAAAAAAA4D8AAAAAAADgPwAAAAAAAOA/AAAAAAAA4D8AAAAAAADgPwAAAAAAAOA/AAAAAAAA4D8CAAAAjAAAAAAAAAAAAAAAW5vVDP///wgAAAAAAAAAAAAAAAAAAAAAAAAAAAAAAAAAAAAAZAAAAAEAAABAAAAAAAAAAAAAAAAAAAAAAAAAAAAAAAAAAAAAAAAAAAAAAAAAAAAAAAAAAAAAAAAAAAAAAAAAAAAAAAAAAAAAAAAAAAAAAAAAAAAAAAAAAAAAAAAAAAAAFAAAADwAAAAAAAAAAAAAAAAAAAkUAAAAAQAAABQAAAAUAAAAFAAAAAEAAAAAAAAAZAAAAGQAAAAAAAAAZAAAAGQAAAAVAAAAYAAAAAAAAAAAAAAADwAAACADAAAAAAAAAAAAAAEAAACgMgAAVgcAAKr4//8BAAAAf39/AAEAAABkAAAAAAAAABQAAABAHwAAAAAAACYAAAAAAAAAwOD//wAAAAAmAAAAZAAAABYAAABMAAAAAAAAAAAAAAAEAAAAAAAAAAEAAADn5uYKAAAAACgAAAAoAAAAZAAAAGQAAAAAAAAAzMzMAAAAAABQAAAAUAAAAGQAAABkAAAAAAAAABcAAAAUAAAAAAAAAAAAAAD/fwAA/38AAAAAAAAJAAAABAAAAF8AYAAeAAAAaAAAAAAAAAAAAAAAAAAAAAAAAAAAAAAAECcAABAnAAAAAAAAAAAAAAAAAAAAAAAAAAAAAAAAAAAAAAAAAAAAABQAAAAAAAAAwMD/AAAAAABkAAAAMgAAAAAAAABkAAAAAAAAAH9/fwAKAAAAIgAAABgAAAAAAAAAAAAAAAAAAAAAAAAAAAAAAAAAAAAkAAAAJAAAAAAAAAAHAAAAAAAAAAAAAAAAAAAAAAAAAAAAAAAAAAAAf39/ACUAAABYAAAAAAAAAAAAAAAAAAAAAAAAAAAAAAAAAAAAAAAAAAAAAAAAAAAAAAAAAAAAAAA/AAAAAAAAAKCGAQAAAAAAAAAAAAAAAAAMAAAAAQAAAAAAAAAAAAAAAAAAAB8AAABUAAAAW5vVBf///wEAAAAAAAAAAAAAAAAAAAAAAAAAAAAAAAAAAAAAAAAAAAAAAAJ/f38A5+bmA8zMzADAwP8Af39/AAAAAAAAAAAAAAAAAAAAAAAAAAAAIQAAABgAAAAUAAAAKAUAAD8CAADYRQAAZwoAABAAAAAmAAAACAAAAAAAAAAAAAAA"/>
+              </a:ext>
+            </a:extLst>
+          </p:cNvSpPr>
+          <p:nvPr>
+            <p:ph type="title"/>
+          </p:nvPr>
+        </p:nvSpPr>
+        <p:spPr/>
+        <p:txBody>
+          <a:bodyPr/>
+          <a:lstStyle/>
+          <a:p>
+            <a:pPr algn="ctr">
+              <a:defRPr lang="en-US"/>
             </a:pPr>
             <a:r>
               <a:t>Wireless Controller</a:t>
@@ -4556,7 +4879,7 @@
             <a:spLocks noGrp="1" noChangeArrowheads="1"/>
             <a:extLst>
               <a:ext uri="smNativeData">
-                <pr:smNativeData xmlns:pr="smNativeData" xmlns="smNativeData" val="SMDATA_15_FLquaRMAAAAlAAAAZAAAAA0AAAAAkAAAAEgAAACQAAAASAAAAAAAAAAAAAAAAAAAAAEAAABQAAAAAAAAAAAA4D8AAAAAAADgPwAAAAAAAOA/AAAAAAAA4D8AAAAAAADgPwAAAAAAAOA/AAAAAAAA4D8AAAAAAADgPwAAAAAAAOA/AAAAAAAA4D8CAAAAjAAAAAAAAAAAAAAAW5vVDP///wgAAAAAAAAAAAAAAAAAAAAAAAAAAAAAAAAAAAAAZAAAAAEAAABAAAAAAAAAAAAAAAAAAAAAAAAAAAAAAAAAAAAAAAAAAAAAAAAAAAAAAAAAAAAAAAAAAAAAAAAAAAAAAAAAAAAAAAAAAAAAAAAAAAAAAAAAAAAAAAAAAAAAFAAAADwAAAAAAAAAAAAAAAAAAAkUAAAAAQAAABQAAAAUAAAAFAAAAAEAAAAAAAAAZAAAAGQAAAAAAAAAZAAAAGQAAAAVAAAAYAAAAAAAAAAAAAAADwAAACADAAAAAAAAAAAAAAEAAACgMgAAVgcAAKr4//8BAAAAf39/AAEAAABkAAAAAAAAABQAAABAHwAAAAAAACYAAAAAAAAAwOD//wAAAAAmAAAAZAAAABYAAABMAAAAAAAAAAAAAAAEAAAAAAAAAAEAAADn5uYKAAAAACgAAAAoAAAAZAAAAGQAAAAAAAAAzMzMAAAAAABQAAAAUAAAAGQAAABkAAAAAAAAABcAAAAUAAAAAAAAAAAAAAD/fwAA/38AAAAAAAAJAAAABAAAAAEAAAAeAAAAaAAAAAAAAAAAAAAAAAAAAAAAAAAAAAAAECcAABAnAAAAAAAAAAAAAAAAAAAAAAAAAAAAAAAAAAAAAAAAAAAAABQAAAAAAAAAwMD/AAAAAABkAAAAMgAAAAAAAABkAAAAAAAAAH9/fwAKAAAAIgAAABgAAAAAAAAAAAAAAAAAAAAAAAAAAAAAAAAAAAAkAAAAJAAAAAAAAAAHAAAAAAAAAAAAAAAAAAAAAAAAAAAAAAAAAAAAf39/ACUAAABYAAAAAAAAAAAAAAAAAAAAAAAAAAAAAAAAAAAAAAAAAAAAAAAAAAAAAAAAAAAAAAA/AAAAAAAAAKCGAQAAAAAAAAAAAAAAAAAMAAAAAQAAAAAAAAAAAAAAAAAAAB8AAABUAAAAW5vVBf///wEAAAAAAAAAAAAAAAAAAAAAAAAAAAAAAAAAAAAAAAAAAAAAAAJ/f38A5+bmA8zMzADAwP8Af39/AAAAAAAAAAAAAAAAAAAAAAAAAAAAIQAAABgAAAAUAAAAKAUAAE8QAADYRQAA/yUAABAAAAAmAAAACAAAAAEgAAAAAAAA"/>
+                <pr:smNativeData xmlns="smNativeData" xmlns:pr="smNativeData" xmlns:p15="http://schemas.microsoft.com/office/powerpoint/2012/main" xmlns:p14="http://schemas.microsoft.com/office/powerpoint/2010/main" xmlns:mc="http://schemas.openxmlformats.org/markup-compatibility/2006" val="SMDATA_15_FLquaRMAAAAlAAAAZAAAAA0AAAAAkAAAAEgAAACQAAAASAAAAAAAAAAAAAAAAAAAAAEAAABQAAAAAAAAAAAA4D8AAAAAAADgPwAAAAAAAOA/AAAAAAAA4D8AAAAAAADgPwAAAAAAAOA/AAAAAAAA4D8AAAAAAADgPwAAAAAAAOA/AAAAAAAA4D8CAAAAjAAAAAAAAAAAAAAAW5vVDP///wgAAAAAAAAAAAAAAAAAAAAAAAAAAAAAAAAAAAAAZAAAAAEAAABAAAAAAAAAAAAAAAAAAAAAAAAAAAAAAAAAAAAAAAAAAAAAAAAAAAAAAAAAAAAAAAAAAAAAAAAAAAAAAAAAAAAAAAAAAAAAAAAAAAAAAAAAAAAAAAAAAAAAFAAAADwAAAAAAAAAAAAAAAAAAAkUAAAAAQAAABQAAAAUAAAAFAAAAAEAAAAAAAAAZAAAAGQAAAAAAAAAZAAAAGQAAAAVAAAAYAAAAAAAAAAAAAAADwAAACADAAAAAAAAAAAAAAEAAACgMgAAVgcAAKr4//8BAAAAf39/AAEAAABkAAAAAAAAABQAAABAHwAAAAAAACYAAAAAAAAAwOD//wAAAAAmAAAAZAAAABYAAABMAAAAAAAAAAAAAAAEAAAAAAAAAAEAAADn5uYKAAAAACgAAAAoAAAAZAAAAGQAAAAAAAAAzMzMAAAAAABQAAAAUAAAAGQAAABkAAAAAAAAABcAAAAUAAAAAAAAAAAAAAD/fwAA/38AAAAAAAAJAAAABAAAAAEAAAAeAAAAaAAAAAAAAAAAAAAAAAAAAAAAAAAAAAAAECcAABAnAAAAAAAAAAAAAAAAAAAAAAAAAAAAAAAAAAAAAAAAAAAAABQAAAAAAAAAwMD/AAAAAABkAAAAMgAAAAAAAABkAAAAAAAAAH9/fwAKAAAAIgAAABgAAAAAAAAAAAAAAAAAAAAAAAAAAAAAAAAAAAAkAAAAJAAAAAAAAAAHAAAAAAAAAAAAAAAAAAAAAAAAAAAAAAAAAAAAf39/ACUAAABYAAAAAAAAAAAAAAAAAAAAAAAAAAAAAAAAAAAAAAAAAAAAAAAAAAAAAAAAAAAAAAA/AAAAAAAAAKCGAQAAAAAAAAAAAAAAAAAMAAAAAQAAAAAAAAAAAAAAAAAAAB8AAABUAAAAW5vVBf///wEAAAAAAAAAAAAAAAAAAAAAAAAAAAAAAAAAAAAAAAAAAAAAAAJ/f38A5+bmA8zMzADAwP8Af39/AAAAAAAAAAAAAAAAAAAAAAAAAAAAIQAAABgAAAAUAAAAKAUAAE8QAADYRQAA/yUAABAAAAAmAAAACAAAAAEgAAAAAAAA"/>
               </a:ext>
             </a:extLst>
           </p:cNvSpPr>
@@ -4582,7 +4905,7 @@
               <a:spcBef>
                 <a:spcPts val="920"/>
               </a:spcBef>
-              <a:defRPr lang="en-us" sz="2575" cap="none"/>
+              <a:defRPr lang="en-US" sz="2575" cap="none"/>
             </a:pPr>
             <a:r>
               <a:t>Works with embedded\librobotcontrol_arm\joes_robot_control\JoystickToRobotTmp.py</a:t>
@@ -4593,7 +4916,7 @@
               <a:spcBef>
                 <a:spcPts val="920"/>
               </a:spcBef>
-              <a:defRPr lang="en-us" sz="2575" cap="none"/>
+              <a:defRPr lang="en-US" sz="2575" cap="none"/>
             </a:pPr>
             <a:r>
               <a:t>To install driver:</a:t>
@@ -4604,7 +4927,7 @@
               <a:spcBef>
                 <a:spcPts val="460"/>
               </a:spcBef>
-              <a:defRPr lang="en-us" sz="2210" cap="none"/>
+              <a:defRPr lang="en-US" sz="2210" cap="none"/>
             </a:pPr>
             <a:r>
               <a:t>pip3 install evdev</a:t>
@@ -4615,7 +4938,7 @@
               <a:spcBef>
                 <a:spcPts val="460"/>
               </a:spcBef>
-              <a:defRPr lang="en-us" sz="1840" cap="none"/>
+              <a:defRPr lang="en-US" sz="1840" cap="none"/>
             </a:pPr>
             <a:r>
               <a:t>Really need sudo pip3 install evdev  - it requires sudo anyways to access /dev/input/event1</a:t>
@@ -4626,7 +4949,7 @@
               <a:spcBef>
                 <a:spcPts val="920"/>
               </a:spcBef>
-              <a:defRPr lang="en-us" sz="2575" cap="none"/>
+              <a:defRPr lang="en-US" sz="2575" cap="none"/>
             </a:pPr>
             <a:r>
               <a:t>Controller has NO BATTERY, needs to be plugged into microUSB!</a:t>
@@ -4637,7 +4960,7 @@
               <a:spcBef>
                 <a:spcPts val="460"/>
               </a:spcBef>
-              <a:defRPr lang="en-us" sz="2210" cap="none"/>
+              <a:defRPr lang="en-US" sz="2210" cap="none"/>
             </a:pPr>
             <a:r>
               <a:t>ALSO do NOT plug controller into computer USB port, because then controller gives input to the PC (and not wirelessly).</a:t>
@@ -4652,7 +4975,7 @@
             <a:picLocks noChangeAspect="1"/>
             <a:extLst>
               <a:ext uri="smNativeData">
-                <pr:smNativeData xmlns:pr="smNativeData" xmlns="smNativeData" val="SMDATA_17_FLquaRMAAAAlAAAAEQAAAC0AAAAAkAAAAEgAAACQAAAASAAAAAAAAAAAAAAAAAAAAAEAAABQAAAAAAAAAAAA4D8AAAAAAADgPwAAAAAAAOA/AAAAAAAA4D8AAAAAAADgPwAAAAAAAOA/AAAAAAAA4D8AAAAAAADgPwAAAAAAAOA/AAAAAAAA4D8CAAAAjAAAAAAAAAAAAAAAW5vVDP///wgAAAAAAAAAAAAAAAAAAAAAAAAAAAAAAAAAAAAAZAAAAAEAAABAAAAAAAAAAAAAAAAAAAAAAAAAAAAAAAAAAAAAAAAAAAAAAAAAAAAAAAAAAAAAAAAAAAAAAAAAAAAAAAAAAAAAAAAAAAAAAAAAAAAAAAAAAAAAAAAAAAAAFAAAADwAAAAAAAAAAAAAAAAAAAkUAAAAAQAAABQAAAAUAAAAFAAAAAEAAAAAAAAAZAAAAGQAAAAAAAAAZAAAAGQAAAAVAAAAYAAAAAAAAAAAAAAADwAAACADAAAAAAAAAAAAAAEAAACgMgAAVgcAAKr4//8BAAAAf39/AAEAAABkAAAAAAAAABQAAABAHwAAAAAAACYAAAAAAAAAwOD//wAAAAAmAAAAZAAAABYAAABMAAAAAAAAAAAAAAAEAAAAAAAAAAEAAADn5uYKAAAAACgAAAAoAAAAZAAAAGQAAAAAAAAAzMzMAAAAAABQAAAAUAAAAGQAAABkAAAAAAAAAAcAAAA4AAAAAAAAAAAAAAAAAAAA////AAAAAAAAAAAAAAAAAAAAAAAAAAAAAAAAAAAAAABkAAAAZAAAAAAAAAAjAAAABAAAAGQAAAAXAAAAFAAAAAAAAAAAAAAA/38AAP9/AAAAAAAACQAAAAQAAAAKAAAAHgAAAGgAAAAAAAAAAAAAAAAAAAAAAAAAAAAAABAnAAAQJwAAAAAAAAAAAAAAAAAAAAAAAAAAAAAAAAAAAAAAAAAAAAAUAAAAAAAAAMDA/wAAAAAAZAAAADIAAAAAAAAAZAAAAAAAAAB/f38ACgAAACIAAAAYAAAAAAAAAAAAAAAAAAAAAAAAAAAAAAAAAAAAJAAAACQAAAAAAAAABwAAAAAAAAAAAAAAAAAAAAAAAAAAAAAAAAAAAH9/fwAlAAAAWAAAAAAAAAAAAAAAAAAAAAAAAAAAAAAAAAAAAAAAAAAAAAAAAAAAAAAAAAAAAAAAPwAAAAAAAACghgEAAAAAAAAAAAAAAAAADAAAAAEAAAAAAAAAAAAAAAAAAAAfAAAAVAAAAFub1QX///8BAAAAAAAAAAAAAAAAAAAAAAAAAAAAAAAAAAAAAAAAAAAAAAACf39/AOfm5gPMzMwAwMD/AH9/fwAAAAAAAAAAAAAAAAD///8AAAAAACEAAAAYAAAAFAAAADsfAAAaCQAAqigAAE8QAAAQAAAAJgAAAAgAAAD//////////w=="/>
+                <pr:smNativeData xmlns="smNativeData" xmlns:pr="smNativeData" xmlns:p15="http://schemas.microsoft.com/office/powerpoint/2012/main" xmlns:p14="http://schemas.microsoft.com/office/powerpoint/2010/main" xmlns:mc="http://schemas.openxmlformats.org/markup-compatibility/2006" val="SMDATA_17_FLquaRMAAAAlAAAAEQAAAC0AAAAAkAAAAEgAAACQAAAASAAAAAAAAAAAAAAAAAAAAAEAAABQAAAAAAAAAAAA4D8AAAAAAADgPwAAAAAAAOA/AAAAAAAA4D8AAAAAAADgPwAAAAAAAOA/AAAAAAAA4D8AAAAAAADgPwAAAAAAAOA/AAAAAAAA4D8CAAAAjAAAAAAAAAAAAAAAW5vVDP///wgAAAAAAAAAAAAAAAAAAAAAAAAAAAAAAAAAAAAAZAAAAAEAAABAAAAAAAAAAAAAAAAAAAAAAAAAAAAAAAAAAAAAAAAAAAAAAAAAAAAAAAAAAAAAAAAAAAAAAAAAAAAAAAAAAAAAAAAAAAAAAAAAAAAAAAAAAAAAAAAAAAAAFAAAADwAAAAAAAAAAAAAAAAAAAkUAAAAAQAAABQAAAAUAAAAFAAAAAEAAAAAAAAAZAAAAGQAAAAAAAAAZAAAAGQAAAAVAAAAYAAAAAAAAAAAAAAADwAAACADAAAAAAAAAAAAAAEAAACgMgAAVgcAAKr4//8BAAAAf39/AAEAAABkAAAAAAAAABQAAABAHwAAAAAAACYAAAAAAAAAwOD//wAAAAAmAAAAZAAAABYAAABMAAAAAAAAAAAAAAAEAAAAAAAAAAEAAADn5uYKAAAAACgAAAAoAAAAZAAAAGQAAAAAAAAAzMzMAAAAAABQAAAAUAAAAGQAAABkAAAAAAAAAAcAAAA4AAAAAAAAAAAAAAAAAAAA////AAAAAAAAAAAAAAAAAAAAAAAAAAAAAAAAAAAAAABkAAAAZAAAAAAAAAAjAAAABAAAAGQAAAAXAAAAFAAAAAAAAAAAAAAA/38AAP9/AAAAAAAACQAAAAQAAAAKAAAAHgAAAGgAAAAAAAAAAAAAAAAAAAAAAAAAAAAAABAnAAAQJwAAAAAAAAAAAAAAAAAAAAAAAAAAAAAAAAAAAAAAAAAAAAAUAAAAAAAAAMDA/wAAAAAAZAAAADIAAAAAAAAAZAAAAAAAAAB/f38ACgAAACIAAAAYAAAAAAAAAAAAAAAAAAAAAAAAAAAAAAAAAAAAJAAAACQAAAAAAAAABwAAAAAAAAAAAAAAAAAAAAAAAAAAAAAAAAAAAH9/fwAlAAAAWAAAAAAAAAAAAAAAAAAAAAAAAAAAAAAAAAAAAAAAAAAAAAAAAAAAAAAAAAAAAAAAPwAAAAAAAACghgEAAAAAAAAAAAAAAAAADAAAAAEAAAAAAAAAAAAAAAAAAAAfAAAAVAAAAFub1QX///8BAAAAAAAAAAAAAAAAAAAAAAAAAAAAAAAAAAAAAAAAAAAAAAACf39/AOfm5gPMzMwAwMD/AH9/fwAAAAAAAAAAAAAAAAD///8AAAAAACEAAAAYAAAAFAAAADsfAAAaCQAAqigAAE8QAAAQAAAAJgAAAAgAAAD//////////w=="/>
               </a:ext>
             </a:extLst>
           </p:cNvPicPr>
@@ -4694,8 +5017,8 @@
 </p:sld>
 </file>
 
-<file path=ppt/slides/slide14.xml><?xml version="1.0" encoding="utf-8"?>
-<p:sld xmlns:p="http://schemas.openxmlformats.org/presentationml/2006/main" xmlns:mc="http://schemas.openxmlformats.org/markup-compatibility/2006" xmlns:p14="http://schemas.microsoft.com/office/powerpoint/2010/main" xmlns:p15="http://schemas.microsoft.com/office/powerpoint/2012/main" xmlns:r="http://schemas.openxmlformats.org/officeDocument/2006/relationships" xmlns:a="http://schemas.openxmlformats.org/drawingml/2006/main" mc:Ignorable="p14">
+<file path=ppt/slides/slide15.xml><?xml version="1.0" encoding="utf-8"?>
+<p:sld xmlns:a="http://schemas.openxmlformats.org/drawingml/2006/main" xmlns:r="http://schemas.openxmlformats.org/officeDocument/2006/relationships" xmlns:p="http://schemas.openxmlformats.org/presentationml/2006/main">
   <p:cSld>
     <p:spTree>
       <p:nvGrpSpPr>
@@ -4718,7 +5041,7 @@
             <a:spLocks noGrp="1" noChangeArrowheads="1"/>
             <a:extLst>
               <a:ext uri="smNativeData">
-                <pr:smNativeData xmlns:pr="smNativeData" xmlns="smNativeData" val="SMDATA_15_FLquaRMAAAAlAAAAZAAAAA0AAAAAkAAAAEgAAACQAAAASAAAAAAAAAABAAAAAAAAAAEAAABQAAAAAAAAAAAA4D8AAAAAAADgPwAAAAAAAOA/AAAAAAAA4D8AAAAAAADgPwAAAAAAAOA/AAAAAAAA4D8AAAAAAADgPwAAAAAAAOA/AAAAAAAA4D8CAAAAjAAAAAAAAAAAAAAAW5vVDP///wgAAAAAAAAAAAAAAAAAAAAAAAAAAAAAAAAAAAAAZAAAAAEAAABAAAAAAAAAAAAAAAAAAAAAAAAAAAAAAAAAAAAAAAAAAAAAAAAAAAAAAAAAAAAAAAAAAAAAAAAAAAAAAAAAAAAAAAAAAAAAAAAAAAAAAAAAAAAAAAAAAAAAFAAAADwAAAAAAAAAAAAAAAAAAAkUAAAAAQAAABQAAAAUAAAAFAAAAAEAAAAAAAAAZAAAAGQAAAAAAAAAZAAAAGQAAAAVAAAAYAAAAAAAAAAAAAAADwAAACADAAAAAAAAAAAAAAEAAACgMgAAVgcAAKr4//8BAAAAf39/AAEAAABkAAAAAAAAABQAAABAHwAAAAAAACYAAAAAAAAAwOD//wAAAAAmAAAAZAAAABYAAABMAAAAAAAAAAAAAAAEAAAAAAAAAAEAAADn5uYKAAAAACgAAAAoAAAAZAAAAGQAAAAAAAAAzMzMAAAAAABQAAAAUAAAAGQAAABkAAAAAAAAABcAAAAUAAAAAAAAAAAAAAD/fwAA/38AAAAAAAAJAAAABAAAAAAAAAAeAAAAaAAAAAAAAAAAAAAAAAAAAAAAAAAAAAAAECcAABAnAAAAAAAAAAAAAAAAAAAAAAAAAAAAAAAAAAAAAAAAAAAAABQAAAAAAAAAwMD/AAAAAABkAAAAMgAAAAAAAABkAAAAAAAAAH9/fwAKAAAAIgAAABgAAAAAAAAAAAAAAAAAAAAAAAAAAAAAAAAAAAAkAAAAJAAAAAAAAAAHAAAAAAAAAAAAAAAAAAAAAAAAAAAAAAAAAAAAf39/ACUAAABYAAAAAAAAAAAAAAAAAAAAAAAAAAAAAAAAAAAAAAAAAAAAAAAAAAAAAAAAAAAAAAA/AAAAAAAAAKCGAQAAAAAAAAAAAAAAAAAMAAAAAQAAAAAAAAAAAAAAAAAAAB8AAABUAAAAW5vVBf///wEAAAAAAAAAAAAAAAAAAAAAAAAAAAAAAAAAAAAAAAAAAAAAAAJ/f38A5+bmA8zMzADAwP8Af39/AAAAAAAAAAAAAAAAAAAAAAAAAAAAIQAAABgAAAAUAAAAKAUAAD8CAADYRQAAZwoAABAAAAAmAAAACAAAAAAAAAAAAAAA"/>
+                <pr:smNativeData xmlns="smNativeData" xmlns:pr="smNativeData" xmlns:p15="http://schemas.microsoft.com/office/powerpoint/2012/main" xmlns:p14="http://schemas.microsoft.com/office/powerpoint/2010/main" xmlns:mc="http://schemas.openxmlformats.org/markup-compatibility/2006" val="SMDATA_15_FLquaRMAAAAlAAAAZAAAAA0AAAAAkAAAAEgAAACQAAAASAAAAAAAAAABAAAAAAAAAAEAAABQAAAAAAAAAAAA4D8AAAAAAADgPwAAAAAAAOA/AAAAAAAA4D8AAAAAAADgPwAAAAAAAOA/AAAAAAAA4D8AAAAAAADgPwAAAAAAAOA/AAAAAAAA4D8CAAAAjAAAAAAAAAAAAAAAW5vVDP///wgAAAAAAAAAAAAAAAAAAAAAAAAAAAAAAAAAAAAAZAAAAAEAAABAAAAAAAAAAAAAAAAAAAAAAAAAAAAAAAAAAAAAAAAAAAAAAAAAAAAAAAAAAAAAAAAAAAAAAAAAAAAAAAAAAAAAAAAAAAAAAAAAAAAAAAAAAAAAAAAAAAAAFAAAADwAAAAAAAAAAAAAAAAAAAkUAAAAAQAAABQAAAAUAAAAFAAAAAEAAAAAAAAAZAAAAGQAAAAAAAAAZAAAAGQAAAAVAAAAYAAAAAAAAAAAAAAADwAAACADAAAAAAAAAAAAAAEAAACgMgAAVgcAAKr4//8BAAAAf39/AAEAAABkAAAAAAAAABQAAABAHwAAAAAAACYAAAAAAAAAwOD//wAAAAAmAAAAZAAAABYAAABMAAAAAAAAAAAAAAAEAAAAAAAAAAEAAADn5uYKAAAAACgAAAAoAAAAZAAAAGQAAAAAAAAAzMzMAAAAAABQAAAAUAAAAGQAAABkAAAAAAAAABcAAAAUAAAAAAAAAAAAAAD/fwAA/38AAAAAAAAJAAAABAAAAAAAAAAeAAAAaAAAAAAAAAAAAAAAAAAAAAAAAAAAAAAAECcAABAnAAAAAAAAAAAAAAAAAAAAAAAAAAAAAAAAAAAAAAAAAAAAABQAAAAAAAAAwMD/AAAAAABkAAAAMgAAAAAAAABkAAAAAAAAAH9/fwAKAAAAIgAAABgAAAAAAAAAAAAAAAAAAAAAAAAAAAAAAAAAAAAkAAAAJAAAAAAAAAAHAAAAAAAAAAAAAAAAAAAAAAAAAAAAAAAAAAAAf39/ACUAAABYAAAAAAAAAAAAAAAAAAAAAAAAAAAAAAAAAAAAAAAAAAAAAAAAAAAAAAAAAAAAAAA/AAAAAAAAAKCGAQAAAAAAAAAAAAAAAAAMAAAAAQAAAAAAAAAAAAAAAAAAAB8AAABUAAAAW5vVBf///wEAAAAAAAAAAAAAAAAAAAAAAAAAAAAAAAAAAAAAAAAAAAAAAAJ/f38A5+bmA8zMzADAwP8Af39/AAAAAAAAAAAAAAAAAAAAAAAAAAAAIQAAABgAAAAUAAAAKAUAAD8CAADYRQAAZwoAABAAAAAmAAAACAAAAAAAAAAAAAAA"/>
               </a:ext>
             </a:extLst>
           </p:cNvSpPr>
@@ -4732,7 +5055,7 @@
           <a:lstStyle/>
           <a:p>
             <a:pPr>
-              <a:defRPr lang="en-us"/>
+              <a:defRPr lang="en-US"/>
             </a:pPr>
             <a:r>
               <a:t>Using Bluetooth controller</a:t>
@@ -4747,7 +5070,7 @@
             <a:spLocks noGrp="1" noChangeArrowheads="1"/>
             <a:extLst>
               <a:ext uri="smNativeData">
-                <pr:smNativeData xmlns:pr="smNativeData" xmlns="smNativeData" val="SMDATA_15_FLquaRMAAAAlAAAAZAAAAA0AAAAAkAAAAEgAAACQAAAASAAAAAAAAAAAAAAAAAAAAAEAAABQAAAAAAAAAAAA4D8AAAAAAADgPwAAAAAAAOA/AAAAAAAA4D8AAAAAAADgPwAAAAAAAOA/AAAAAAAA4D8AAAAAAADgPwAAAAAAAOA/AAAAAAAA4D8CAAAAjAAAAAAAAAAAAAAAW5vVDP///wgAAAAAAAAAAAAAAAAAAAAAAAAAAAAAAAAAAAAAZAAAAAEAAABAAAAAAAAAAAAAAAAAAAAAAAAAAAAAAAAAAAAAAAAAAAAAAAAAAAAAAAAAAAAAAAAAAAAAAAAAAAAAAAAAAAAAAAAAAAAAAAAAAAAAAAAAAAAAAAAAAAAAFAAAADwAAAAAAAAAAAAAAAAAAAkUAAAAAQAAABQAAAAUAAAAFAAAAAEAAAAAAAAAZAAAAGQAAAAAAAAAZAAAAGQAAAAVAAAAYAAAAAAAAAAAAAAADwAAACADAAAAAAAAAAAAAAEAAACgMgAAVgcAAKr4//8BAAAAf39/AAEAAABkAAAAAAAAABQAAABAHwAAAAAAACYAAAAAAAAAwOD//wAAAAAmAAAAZAAAABYAAABMAAAAAAAAAAAAAAAEAAAAAAAAAAEAAADn5uYKAAAAACgAAAAoAAAAZAAAAGQAAAAAAAAAzMzMAAAAAABQAAAAUAAAAGQAAABkAAAAAAAAABcAAAAUAAAAAAAAAAAAAAD/fwAA/38AAAAAAAAJAAAABAAAAA+TLsAeAAAAaAAAAAAAAAAAAAAAAAAAAAAAAAAAAAAAECcAABAnAAAAAAAAAAAAAAAAAAAAAAAAAAAAAAAAAAAAAAAAAAAAABQAAAAAAAAAwMD/AAAAAABkAAAAMgAAAAAAAABkAAAAAAAAAH9/fwAKAAAAIgAAABgAAAAAAAAAAAAAAAAAAAAAAAAAAAAAAAAAAAAkAAAAJAAAAAAAAAAHAAAAAAAAAAAAAAAAAAAAAAAAAAAAAAAAAAAAf39/ACUAAABYAAAAAAAAAAAAAAAAAAAAAAAAAAAAAAAAAAAAAAAAAAAAAAAAAAAAAAAAAAAAAAA/AAAAAAAAAKCGAQAAAAAAAAAAAAAAAAAMAAAAAQAAAAAAAAAAAAAAAAAAAB8AAABUAAAAW5vVBf///wEAAAAAAAAAAAAAAAAAAAAAAAAAAAAAAAAAAAAAAAAAAAAAAAJ/f38A5+bmA8zMzADAwP8Af39/AAAAAAAAAAAAAAAAAAAAAAAAAAAAIQAAABgAAAAUAAAAKAUAADsLAADYRQAAACYAABAAAAAmAAAACAAAAAAgAAAAAAAA"/>
+                <pr:smNativeData xmlns="smNativeData" xmlns:pr="smNativeData" xmlns:p15="http://schemas.microsoft.com/office/powerpoint/2012/main" xmlns:p14="http://schemas.microsoft.com/office/powerpoint/2010/main" xmlns:mc="http://schemas.openxmlformats.org/markup-compatibility/2006" val="SMDATA_15_FLquaRMAAAAlAAAAZAAAAA0AAAAAkAAAAEgAAACQAAAASAAAAAAAAAAAAAAAAAAAAAEAAABQAAAAAAAAAAAA4D8AAAAAAADgPwAAAAAAAOA/AAAAAAAA4D8AAAAAAADgPwAAAAAAAOA/AAAAAAAA4D8AAAAAAADgPwAAAAAAAOA/AAAAAAAA4D8CAAAAjAAAAAAAAAAAAAAAW5vVDP///wgAAAAAAAAAAAAAAAAAAAAAAAAAAAAAAAAAAAAAZAAAAAEAAABAAAAAAAAAAAAAAAAAAAAAAAAAAAAAAAAAAAAAAAAAAAAAAAAAAAAAAAAAAAAAAAAAAAAAAAAAAAAAAAAAAAAAAAAAAAAAAAAAAAAAAAAAAAAAAAAAAAAAFAAAADwAAAAAAAAAAAAAAAAAAAkUAAAAAQAAABQAAAAUAAAAFAAAAAEAAAAAAAAAZAAAAGQAAAAAAAAAZAAAAGQAAAAVAAAAYAAAAAAAAAAAAAAADwAAACADAAAAAAAAAAAAAAEAAACgMgAAVgcAAKr4//8BAAAAf39/AAEAAABkAAAAAAAAABQAAABAHwAAAAAAACYAAAAAAAAAwOD//wAAAAAmAAAAZAAAABYAAABMAAAAAAAAAAAAAAAEAAAAAAAAAAEAAADn5uYKAAAAACgAAAAoAAAAZAAAAGQAAAAAAAAAzMzMAAAAAABQAAAAUAAAAGQAAABkAAAAAAAAABcAAAAUAAAAAAAAAAAAAAD/fwAA/38AAAAAAAAJAAAABAAAAA+TLsAeAAAAaAAAAAAAAAAAAAAAAAAAAAAAAAAAAAAAECcAABAnAAAAAAAAAAAAAAAAAAAAAAAAAAAAAAAAAAAAAAAAAAAAABQAAAAAAAAAwMD/AAAAAABkAAAAMgAAAAAAAABkAAAAAAAAAH9/fwAKAAAAIgAAABgAAAAAAAAAAAAAAAAAAAAAAAAAAAAAAAAAAAAkAAAAJAAAAAAAAAAHAAAAAAAAAAAAAAAAAAAAAAAAAAAAAAAAAAAAf39/ACUAAABYAAAAAAAAAAAAAAAAAAAAAAAAAAAAAAAAAAAAAAAAAAAAAAAAAAAAAAAAAAAAAAA/AAAAAAAAAKCGAQAAAAAAAAAAAAAAAAAMAAAAAQAAAAAAAAAAAAAAAAAAAB8AAABUAAAAW5vVBf///wEAAAAAAAAAAAAAAAAAAAAAAAAAAAAAAAAAAAAAAAAAAAAAAAJ/f38A5+bmA8zMzADAwP8Af39/AAAAAAAAAAAAAAAAAAAAAAAAAAAAIQAAABgAAAAUAAAAKAUAADsLAADYRQAAACYAABAAAAAmAAAACAAAAAAgAAAAAAAA"/>
               </a:ext>
             </a:extLst>
           </p:cNvSpPr>
@@ -4771,7 +5094,7 @@
               <a:spcBef>
                 <a:spcPts val="920"/>
               </a:spcBef>
-              <a:defRPr lang="en-us" sz="2575" cap="none"/>
+              <a:defRPr lang="en-US" sz="2575" cap="none"/>
             </a:pPr>
             <a:r>
               <a:t>sudo bluetoothctl</a:t>
@@ -4785,7 +5108,7 @@
               <a:spcBef>
                 <a:spcPts val="460"/>
               </a:spcBef>
-              <a:defRPr lang="en-us" sz="2210" cap="none"/>
+              <a:defRPr lang="en-US" sz="2210" cap="none"/>
             </a:pPr>
             <a:r>
               <a:t>power on</a:t>
@@ -4799,7 +5122,7 @@
               <a:spcBef>
                 <a:spcPts val="460"/>
               </a:spcBef>
-              <a:defRPr lang="en-us" sz="2210" cap="none"/>
+              <a:defRPr lang="en-US" sz="2210" cap="none"/>
             </a:pPr>
             <a:r>
               <a:t>agent on</a:t>
@@ -4813,7 +5136,7 @@
               <a:spcBef>
                 <a:spcPts val="460"/>
               </a:spcBef>
-              <a:defRPr lang="en-us" sz="2210" cap="none"/>
+              <a:defRPr lang="en-US" sz="2210" cap="none"/>
             </a:pPr>
             <a:r>
               <a:t>default-agent</a:t>
@@ -4827,7 +5150,7 @@
               <a:spcBef>
                 <a:spcPts val="460"/>
               </a:spcBef>
-              <a:defRPr lang="en-us" sz="2210" cap="none"/>
+              <a:defRPr lang="en-US" sz="2210" cap="none"/>
             </a:pPr>
             <a:r>
               <a:t>scan on</a:t>
@@ -4841,7 +5164,7 @@
               <a:spcBef>
                 <a:spcPts val="460"/>
               </a:spcBef>
-              <a:defRPr lang="en-us" sz="2210" cap="none"/>
+              <a:defRPr lang="en-US" sz="2210" cap="none"/>
             </a:pPr>
             <a:r>
               <a:t>pair XX:XX:XX:XX:XX:XX</a:t>
@@ -4855,7 +5178,7 @@
               <a:spcBef>
                 <a:spcPts val="460"/>
               </a:spcBef>
-              <a:defRPr lang="en-us" sz="2210" cap="none"/>
+              <a:defRPr lang="en-US" sz="2210" cap="none"/>
             </a:pPr>
             <a:r>
               <a:t>trust XX:XX:XX:XX:XX:XX</a:t>
@@ -4869,7 +5192,7 @@
               <a:spcBef>
                 <a:spcPts val="460"/>
               </a:spcBef>
-              <a:defRPr lang="en-us" sz="2210" cap="none"/>
+              <a:defRPr lang="en-US" sz="2210" cap="none"/>
             </a:pPr>
             <a:r>
               <a:t>connect</a:t>
@@ -4883,7 +5206,7 @@
               <a:spcBef>
                 <a:spcPts val="460"/>
               </a:spcBef>
-              <a:defRPr lang="en-us" sz="2210" cap="none"/>
+              <a:defRPr lang="en-US" sz="2210" cap="none"/>
             </a:pPr>
             <a:r>
               <a:t>quit</a:t>
@@ -4897,7 +5220,7 @@
               <a:spcBef>
                 <a:spcPts val="920"/>
               </a:spcBef>
-              <a:defRPr lang="en-us" sz="2575" cap="none"/>
+              <a:defRPr lang="en-US" sz="2575" cap="none"/>
             </a:pPr>
             <a:r>
               <a:t>*Difficult to find which device is which, never got this to work</a:t>
@@ -4911,7 +5234,7 @@
               <a:spcBef>
                 <a:spcPts val="920"/>
               </a:spcBef>
-              <a:defRPr lang="en-us" sz="2575" cap="none"/>
+              <a:defRPr lang="en-US" sz="2575" cap="none"/>
             </a:pPr>
             <a:r>
               <a:t>It does work on Pi, though: \embedded\RaspberryPi\GameControllerRobot\8bitdo_controller\</a:t>
@@ -4934,8 +5257,8 @@
 </p:sld>
 </file>
 
-<file path=ppt/slides/slide15.xml><?xml version="1.0" encoding="utf-8"?>
-<p:sld xmlns:p="http://schemas.openxmlformats.org/presentationml/2006/main" xmlns:mc="http://schemas.openxmlformats.org/markup-compatibility/2006" xmlns:p14="http://schemas.microsoft.com/office/powerpoint/2010/main" xmlns:p15="http://schemas.microsoft.com/office/powerpoint/2012/main" xmlns:r="http://schemas.openxmlformats.org/officeDocument/2006/relationships" xmlns:a="http://schemas.openxmlformats.org/drawingml/2006/main" mc:Ignorable="p14">
+<file path=ppt/slides/slide16.xml><?xml version="1.0" encoding="utf-8"?>
+<p:sld xmlns:a="http://schemas.openxmlformats.org/drawingml/2006/main" xmlns:r="http://schemas.openxmlformats.org/officeDocument/2006/relationships" xmlns:p="http://schemas.openxmlformats.org/presentationml/2006/main">
   <p:cSld>
     <p:spTree>
       <p:nvGrpSpPr>
@@ -4958,7 +5281,7 @@
             <a:spLocks noGrp="1" noChangeArrowheads="1"/>
             <a:extLst>
               <a:ext uri="smNativeData">
-                <pr:smNativeData xmlns:pr="smNativeData" xmlns="smNativeData" val="SMDATA_15_FLquaRMAAAAlAAAAZAAAAA0AAAAAkAAAAEgAAACQAAAASAAAAAAAAAABAAAAAAAAAAEAAABQAAAAAAAAAAAA4D8AAAAAAADgPwAAAAAAAOA/AAAAAAAA4D8AAAAAAADgPwAAAAAAAOA/AAAAAAAA4D8AAAAAAADgPwAAAAAAAOA/AAAAAAAA4D8CAAAAjAAAAAAAAAAAAAAAW5vVDP///wgAAAAAAAAAAAAAAAAAAAAAAAAAAAAAAAAAAAAAZAAAAAEAAABAAAAAAAAAAAAAAAAAAAAAAAAAAAAAAAAAAAAAAAAAAAAAAAAAAAAAAAAAAAAAAAAAAAAAAAAAAAAAAAAAAAAAAAAAAAAAAAAAAAAAAAAAAAAAAAAAAAAAFAAAADwAAAAAAAAAAAAAAAAAAAkUAAAAAQAAABQAAAAUAAAAFAAAAAEAAAAAAAAAZAAAAGQAAAAAAAAAZAAAAGQAAAAVAAAAYAAAAAAAAAAAAAAADwAAACADAAAAAAAAAAAAAAEAAACgMgAAVgcAAKr4//8BAAAAf39/AAEAAABkAAAAAAAAABQAAABAHwAAAAAAACYAAAAAAAAAwOD//wAAAAAmAAAAZAAAABYAAABMAAAAAAAAAAAAAAAEAAAAAAAAAAEAAADn5uYKAAAAACgAAAAoAAAAZAAAAGQAAAAAAAAAzMzMAAAAAABQAAAAUAAAAGQAAABkAAAAAAAAABcAAAAUAAAAAAAAAAAAAAD/fwAA/38AAAAAAAAJAAAABAAAAAAAAAAeAAAAaAAAAAAAAAAAAAAAAAAAAAAAAAAAAAAAECcAABAnAAAAAAAAAAAAAAAAAAAAAAAAAAAAAAAAAAAAAAAAAAAAABQAAAAAAAAAwMD/AAAAAABkAAAAMgAAAAAAAABkAAAAAAAAAH9/fwAKAAAAIgAAABgAAAAAAAAAAAAAAAAAAAAAAAAAAAAAAAAAAAAkAAAAJAAAAAAAAAAHAAAAAAAAAAAAAAAAAAAAAAAAAAAAAAAAAAAAf39/ACUAAABYAAAAAAAAAAAAAAAAAAAAAAAAAAAAAAAAAAAAAAAAAAAAAAAAAAAAAAAAAAAAAAA/AAAAAAAAAKCGAQAAAAAAAAAAAAAAAAAMAAAAAQAAAAAAAAAAAAAAAAAAAB8AAABUAAAAW5vVBf///wEAAAAAAAAAAAAAAAAAAAAAAAAAAAAAAAAAAAAAAAAAAAAAAAJ/f38A5+bmA8zMzADAwP8Af39/AAAAAAAAAAAAAAAAAAAAAAAAAAAAIQAAABgAAAAUAAAAKAUAAD8CAADYRQAAZwoAAAAAAAAmAAAACAAAAAEAAAAAAAAA"/>
+                <pr:smNativeData xmlns="smNativeData" xmlns:pr="smNativeData" xmlns:p15="http://schemas.microsoft.com/office/powerpoint/2012/main" xmlns:p14="http://schemas.microsoft.com/office/powerpoint/2010/main" xmlns:mc="http://schemas.openxmlformats.org/markup-compatibility/2006" val="SMDATA_15_FLquaRMAAAAlAAAAZAAAAA0AAAAAkAAAAEgAAACQAAAASAAAAAAAAAABAAAAAAAAAAEAAABQAAAAAAAAAAAA4D8AAAAAAADgPwAAAAAAAOA/AAAAAAAA4D8AAAAAAADgPwAAAAAAAOA/AAAAAAAA4D8AAAAAAADgPwAAAAAAAOA/AAAAAAAA4D8CAAAAjAAAAAAAAAAAAAAAW5vVDP///wgAAAAAAAAAAAAAAAAAAAAAAAAAAAAAAAAAAAAAZAAAAAEAAABAAAAAAAAAAAAAAAAAAAAAAAAAAAAAAAAAAAAAAAAAAAAAAAAAAAAAAAAAAAAAAAAAAAAAAAAAAAAAAAAAAAAAAAAAAAAAAAAAAAAAAAAAAAAAAAAAAAAAFAAAADwAAAAAAAAAAAAAAAAAAAkUAAAAAQAAABQAAAAUAAAAFAAAAAEAAAAAAAAAZAAAAGQAAAAAAAAAZAAAAGQAAAAVAAAAYAAAAAAAAAAAAAAADwAAACADAAAAAAAAAAAAAAEAAACgMgAAVgcAAKr4//8BAAAAf39/AAEAAABkAAAAAAAAABQAAABAHwAAAAAAACYAAAAAAAAAwOD//wAAAAAmAAAAZAAAABYAAABMAAAAAAAAAAAAAAAEAAAAAAAAAAEAAADn5uYKAAAAACgAAAAoAAAAZAAAAGQAAAAAAAAAzMzMAAAAAABQAAAAUAAAAGQAAABkAAAAAAAAABcAAAAUAAAAAAAAAAAAAAD/fwAA/38AAAAAAAAJAAAABAAAAAAAAAAeAAAAaAAAAAAAAAAAAAAAAAAAAAAAAAAAAAAAECcAABAnAAAAAAAAAAAAAAAAAAAAAAAAAAAAAAAAAAAAAAAAAAAAABQAAAAAAAAAwMD/AAAAAABkAAAAMgAAAAAAAABkAAAAAAAAAH9/fwAKAAAAIgAAABgAAAAAAAAAAAAAAAAAAAAAAAAAAAAAAAAAAAAkAAAAJAAAAAAAAAAHAAAAAAAAAAAAAAAAAAAAAAAAAAAAAAAAAAAAf39/ACUAAABYAAAAAAAAAAAAAAAAAAAAAAAAAAAAAAAAAAAAAAAAAAAAAAAAAAAAAAAAAAAAAAA/AAAAAAAAAKCGAQAAAAAAAAAAAAAAAAAMAAAAAQAAAAAAAAAAAAAAAAAAAB8AAABUAAAAW5vVBf///wEAAAAAAAAAAAAAAAAAAAAAAAAAAAAAAAAAAAAAAAAAAAAAAAJ/f38A5+bmA8zMzADAwP8Af39/AAAAAAAAAAAAAAAAAAAAAAAAAAAAIQAAABgAAAAUAAAAKAUAAD8CAADYRQAAZwoAAAAAAAAmAAAACAAAAAEAAAAAAAAA"/>
               </a:ext>
             </a:extLst>
           </p:cNvSpPr>
@@ -4977,7 +5300,7 @@
           <a:lstStyle/>
           <a:p>
             <a:pPr algn="ctr">
-              <a:defRPr lang="en-us"/>
+              <a:defRPr lang="en-US"/>
             </a:pPr>
             <a:r>
               <a:t>Mecanum Wheel Control Principle</a:t>
@@ -4985,7 +5308,7 @@
           </a:p>
           <a:p>
             <a:pPr algn="ctr">
-              <a:defRPr lang="en-us"/>
+              <a:defRPr lang="en-US"/>
             </a:pPr>
             <a:r>
               <a:t>wheels should be in an 'X' from above</a:t>
@@ -5000,7 +5323,7 @@
             <a:picLocks noChangeAspect="1"/>
             <a:extLst>
               <a:ext uri="smNativeData">
-                <pr:smNativeData xmlns:pr="smNativeData" xmlns="smNativeData" val="SMDATA_17_FLquaRMAAAAlAAAAEQAAAC8BAAAAkAAAAEgAAACQAAAASAAAAAAAAAAAAAAAAAAAAAEAAABQAAAAAAAAAAAA4D8AAAAAAADgPwAAAAAAAOA/AAAAAAAA4D8AAAAAAADgPwAAAAAAAOA/AAAAAAAA4D8AAAAAAADgPwAAAAAAAOA/AAAAAAAA4D8CAAAAjAAAAAAAAAAAAAAAW5vVDP///wgAAAAAAAAAAAAAAAAAAAAAAAAAAAAAAAAAAAAAZAAAAAEAAABAAAAAAAAAAAAAAAAAAAAAAAAAAAAAAAAAAAAAAAAAAAAAAAAAAAAAAAAAAAAAAAAAAAAAAAAAAAAAAAAAAAAAAAAAAAAAAAAAAAAAAAAAAAAAAAAAAAAAFAAAADwAAAAAAAAAAAAAAAAAAAkUAAAAAQAAABQAAAAUAAAAFAAAAAEAAAAAAAAAZAAAAGQAAAAAAAAAZAAAAGQAAAAVAAAAYAAAAAAAAAAAAAAADwAAACADAAAAAAAAAAAAAAEAAACgMgAAVgcAAKr4//8BAAAAf39/AAEAAABkAAAAAAAAABQAAABAHwAAAAAAACYAAAAAAAAAwOD//wAAAAAmAAAAZAAAABYAAABMAAAAAAAAAAAAAAAEAAAAAAAAAAEAAADn5uYKAAAAACgAAAAoAAAAZAAAAGQAAAAAAAAAzMzMAAAAAABQAAAAUAAAAGQAAABkAAAAAAAAAAcAAAA4AAAAAAAAAAAAAAAAAAAA////AAAAAAAAAAAAAAAAAAAAAAAAAAAAAAAAAAAAAABkAAAAZAAAAAAAAAAjAAAABAAAAGQAAAAXAAAAFAAAAAAAAAAAAAAA/38AAP9/AAAAAAAACQAAAAQAAADuAAAAHgAAAGgAAAAAAAAAAAAAAAAAAAAAAAAAAAAAABAnAAAQJwAAAAAAAAAAAAAAAAAAAAAAAAAAAAAAAAAAAAAAAAAAAAAUAAAAAAAAAMDA/wAAAAAAZAAAADIAAAAAAAAAZAAAAAAAAAB/f38ACgAAACIAAAAYAAAAAAAAAAAAAAAAAAAAAAAAAAAAAAAAAAAAJAAAACQAAAAAAAAABwAAAAAAAAAAAAAAAAAAAAAAAAAAAAAAAAAAAH9/fwAlAAAAWAAAAAAAAAAAAAAAAAAAAAAAAAAAAAAAAAAAAAAAAAAAAAAAAAAAAAAAAAAAAAAAPwAAAAAAAACghgEAAAAAAAAAAAAAAAAADAAAAAEAAAAAAAAAAAAAAAAAAAAfAAAAVAAAAFub1QX///8BAAAAAAAAAAAAAAAAAAAAAAAAAAAAAAAAAAAAAAAAAAAAAAACf39/AOfm5gPMzMwAwMD/AH9/fwAAAAAAAAAAAAAAAAD///8AAAAAACEAAAAYAAAAFAAAAIEQAAByCgAAzToAAF8pAAAAAAAAJgAAAAgAAAD//////////w=="/>
+                <pr:smNativeData xmlns="smNativeData" xmlns:pr="smNativeData" xmlns:p15="http://schemas.microsoft.com/office/powerpoint/2012/main" xmlns:p14="http://schemas.microsoft.com/office/powerpoint/2010/main" xmlns:mc="http://schemas.openxmlformats.org/markup-compatibility/2006" val="SMDATA_17_FLquaRMAAAAlAAAAEQAAAC8BAAAAkAAAAEgAAACQAAAASAAAAAAAAAAAAAAAAAAAAAEAAABQAAAAAAAAAAAA4D8AAAAAAADgPwAAAAAAAOA/AAAAAAAA4D8AAAAAAADgPwAAAAAAAOA/AAAAAAAA4D8AAAAAAADgPwAAAAAAAOA/AAAAAAAA4D8CAAAAjAAAAAAAAAAAAAAAW5vVDP///wgAAAAAAAAAAAAAAAAAAAAAAAAAAAAAAAAAAAAAZAAAAAEAAABAAAAAAAAAAAAAAAAAAAAAAAAAAAAAAAAAAAAAAAAAAAAAAAAAAAAAAAAAAAAAAAAAAAAAAAAAAAAAAAAAAAAAAAAAAAAAAAAAAAAAAAAAAAAAAAAAAAAAFAAAADwAAAAAAAAAAAAAAAAAAAkUAAAAAQAAABQAAAAUAAAAFAAAAAEAAAAAAAAAZAAAAGQAAAAAAAAAZAAAAGQAAAAVAAAAYAAAAAAAAAAAAAAADwAAACADAAAAAAAAAAAAAAEAAACgMgAAVgcAAKr4//8BAAAAf39/AAEAAABkAAAAAAAAABQAAABAHwAAAAAAACYAAAAAAAAAwOD//wAAAAAmAAAAZAAAABYAAABMAAAAAAAAAAAAAAAEAAAAAAAAAAEAAADn5uYKAAAAACgAAAAoAAAAZAAAAGQAAAAAAAAAzMzMAAAAAABQAAAAUAAAAGQAAABkAAAAAAAAAAcAAAA4AAAAAAAAAAAAAAAAAAAA////AAAAAAAAAAAAAAAAAAAAAAAAAAAAAAAAAAAAAABkAAAAZAAAAAAAAAAjAAAABAAAAGQAAAAXAAAAFAAAAAAAAAAAAAAA/38AAP9/AAAAAAAACQAAAAQAAADuAAAAHgAAAGgAAAAAAAAAAAAAAAAAAAAAAAAAAAAAABAnAAAQJwAAAAAAAAAAAAAAAAAAAAAAAAAAAAAAAAAAAAAAAAAAAAAUAAAAAAAAAMDA/wAAAAAAZAAAADIAAAAAAAAAZAAAAAAAAAB/f38ACgAAACIAAAAYAAAAAAAAAAAAAAAAAAAAAAAAAAAAAAAAAAAAJAAAACQAAAAAAAAABwAAAAAAAAAAAAAAAAAAAAAAAAAAAAAAAAAAAH9/fwAlAAAAWAAAAAAAAAAAAAAAAAAAAAAAAAAAAAAAAAAAAAAAAAAAAAAAAAAAAAAAAAAAAAAAPwAAAAAAAACghgEAAAAAAAAAAAAAAAAADAAAAAEAAAAAAAAAAAAAAAAAAAAfAAAAVAAAAFub1QX///8BAAAAAAAAAAAAAAAAAAAAAAAAAAAAAAAAAAAAAAAAAAAAAAACf39/AOfm5gPMzMwAwMD/AH9/fwAAAAAAAAAAAAAAAAD///8AAAAAACEAAAAYAAAAFAAAAIEQAAByCgAAzToAAF8pAAAAAAAAJgAAAAgAAAD//////////w=="/>
               </a:ext>
             </a:extLst>
           </p:cNvPicPr>
@@ -5043,7 +5366,7 @@
 </file>
 
 <file path=ppt/slides/slide2.xml><?xml version="1.0" encoding="utf-8"?>
-<p:sld xmlns:p="http://schemas.openxmlformats.org/presentationml/2006/main" xmlns:mc="http://schemas.openxmlformats.org/markup-compatibility/2006" xmlns:p14="http://schemas.microsoft.com/office/powerpoint/2010/main" xmlns:p15="http://schemas.microsoft.com/office/powerpoint/2012/main" xmlns:r="http://schemas.openxmlformats.org/officeDocument/2006/relationships" xmlns:a="http://schemas.openxmlformats.org/drawingml/2006/main" mc:Ignorable="p14">
+<p:sld xmlns:a="http://schemas.openxmlformats.org/drawingml/2006/main" xmlns:r="http://schemas.openxmlformats.org/officeDocument/2006/relationships" xmlns:p="http://schemas.openxmlformats.org/presentationml/2006/main">
   <p:cSld>
     <p:spTree>
       <p:nvGrpSpPr>
@@ -5066,7 +5389,7 @@
             <a:picLocks noChangeAspect="1"/>
             <a:extLst>
               <a:ext uri="smNativeData">
-                <pr:smNativeData xmlns:pr="smNativeData" xmlns="smNativeData" val="SMDATA_17_FLquaRMAAAAlAAAAEQAAAC0AAAAAkAAAAEgAAACQAAAASAAAAAAAAAAAAAAAAAAAAAEAAABQAAAAAAAAAAAA4D8AAAAAAADgPwAAAAAAAOA/AAAAAAAA4D8AAAAAAADgPwAAAAAAAOA/AAAAAAAA4D8AAAAAAADgPwAAAAAAAOA/AAAAAAAA4D8CAAAAjAAAAAAAAAAAAAAAW5vVDP///wgAAAAAAAAAAAAAAAAAAAAAAAAAAAAAAAAAAAAAZAAAAAEAAABAAAAAAAAAAAAAAAAAAAAAAAAAAAAAAAAAAAAAAAAAAAAAAAAAAAAAAAAAAAAAAAAAAAAAAAAAAAAAAAAAAAAAAAAAAAAAAAAAAAAAAAAAAAAAAAAAAAAAFAAAADwAAAAAAAAAAAAAAAAAAAkUAAAAAQAAABQAAAAUAAAAFAAAAAEAAAAAAAAAZAAAAGQAAAAAAAAAZAAAAGQAAAAVAAAAYAAAAAAAAAAAAAAADwAAACADAAAAAAAAAAAAAAEAAACgMgAAVgcAAKr4//8BAAAAf39/AAEAAABkAAAAAAAAABQAAABAHwAAAAAAACYAAAAAAAAAwOD//wAAAAAmAAAAZAAAABYAAABMAAAAAAAAAAAAAAAEAAAAAAAAAAEAAADn5uYKAAAAACgAAAAoAAAAZAAAAGQAAAAAAAAAzMzMAAAAAABQAAAAUAAAAGQAAABkAAAAAAAAAAcAAAA4AAAAAAAAAAAAAAAAAAAA////AAAAAAAAAAAAAAAAAAAAAAAAAAAAAAAAAAAAAABkAAAAZAAAAAAAAAAjAAAABAAAAGQAAAAXAAAAFAAAAAAAAAAAAAAA/38AAP9/AAAAAAAACQAAAAQAAAD///8AHgAAAGgAAAAAAAAAAAAAAAAAAAAAAAAAAAAAABAnAAAQJwAAAAAAAAAAAAAAAAAAAAAAAAAAAAAAAAAAAAAAAAAAAAAUAAAAAAAAAMDA/wAAAAAAZAAAADIAAAAAAAAAZAAAAAAAAAB/f38ACgAAACIAAAAYAAAAAAAAAAAAAAAAAAAAAAAAAAAAAAAAAAAAJAAAACQAAAAAAAAABwAAAAAAAAAAAAAAAAAAAAAAAAAAAAAAAAAAAH9/fwAlAAAAWAAAAAAAAAAAAAAAAAAAAAAAAAAAAAAAAAAAAAAAAAAAAAAAAAAAAAAAAAAAAAAAPwAAAAAAAACghgEAAAAAAAAAAAAAAAAADAAAAAEAAAAAAAAAAAAAAAAAAAAfAAAAVAAAAFub1QX///8BAAAAAAAAAAAAAAAAAAAAAAAAAAAAAAAAAAAAAAAAAAAAAAACf39/AOfm5gPMzMwAwMD/AH9/fwAAAAAAAAAAAAAAAAD///8AAAAAACEAAAAYAAAAFAAAAB0IAAB9AAAAQUAAAOIpAAAQAAAAJgAAAAgAAAD//////////w=="/>
+                <pr:smNativeData xmlns="smNativeData" xmlns:pr="smNativeData" xmlns:p15="http://schemas.microsoft.com/office/powerpoint/2012/main" xmlns:p14="http://schemas.microsoft.com/office/powerpoint/2010/main" xmlns:mc="http://schemas.openxmlformats.org/markup-compatibility/2006" val="SMDATA_17_FLquaRMAAAAlAAAAEQAAAC0AAAAAkAAAAEgAAACQAAAASAAAAAAAAAAAAAAAAAAAAAEAAABQAAAAAAAAAAAA4D8AAAAAAADgPwAAAAAAAOA/AAAAAAAA4D8AAAAAAADgPwAAAAAAAOA/AAAAAAAA4D8AAAAAAADgPwAAAAAAAOA/AAAAAAAA4D8CAAAAjAAAAAAAAAAAAAAAW5vVDP///wgAAAAAAAAAAAAAAAAAAAAAAAAAAAAAAAAAAAAAZAAAAAEAAABAAAAAAAAAAAAAAAAAAAAAAAAAAAAAAAAAAAAAAAAAAAAAAAAAAAAAAAAAAAAAAAAAAAAAAAAAAAAAAAAAAAAAAAAAAAAAAAAAAAAAAAAAAAAAAAAAAAAAFAAAADwAAAAAAAAAAAAAAAAAAAkUAAAAAQAAABQAAAAUAAAAFAAAAAEAAAAAAAAAZAAAAGQAAAAAAAAAZAAAAGQAAAAVAAAAYAAAAAAAAAAAAAAADwAAACADAAAAAAAAAAAAAAEAAACgMgAAVgcAAKr4//8BAAAAf39/AAEAAABkAAAAAAAAABQAAABAHwAAAAAAACYAAAAAAAAAwOD//wAAAAAmAAAAZAAAABYAAABMAAAAAAAAAAAAAAAEAAAAAAAAAAEAAADn5uYKAAAAACgAAAAoAAAAZAAAAGQAAAAAAAAAzMzMAAAAAABQAAAAUAAAAGQAAABkAAAAAAAAAAcAAAA4AAAAAAAAAAAAAAAAAAAA////AAAAAAAAAAAAAAAAAAAAAAAAAAAAAAAAAAAAAABkAAAAZAAAAAAAAAAjAAAABAAAAGQAAAAXAAAAFAAAAAAAAAAAAAAA/38AAP9/AAAAAAAACQAAAAQAAAD///8AHgAAAGgAAAAAAAAAAAAAAAAAAAAAAAAAAAAAABAnAAAQJwAAAAAAAAAAAAAAAAAAAAAAAAAAAAAAAAAAAAAAAAAAAAAUAAAAAAAAAMDA/wAAAAAAZAAAADIAAAAAAAAAZAAAAAAAAAB/f38ACgAAACIAAAAYAAAAAAAAAAAAAAAAAAAAAAAAAAAAAAAAAAAAJAAAACQAAAAAAAAABwAAAAAAAAAAAAAAAAAAAAAAAAAAAAAAAAAAAH9/fwAlAAAAWAAAAAAAAAAAAAAAAAAAAAAAAAAAAAAAAAAAAAAAAAAAAAAAAAAAAAAAAAAAAAAAPwAAAAAAAACghgEAAAAAAAAAAAAAAAAADAAAAAEAAAAAAAAAAAAAAAAAAAAfAAAAVAAAAFub1QX///8BAAAAAAAAAAAAAAAAAAAAAAAAAAAAAAAAAAAAAAAAAAAAAAACf39/AOfm5gPMzMwAwMD/AH9/fwAAAAAAAAAAAAAAAAD///8AAAAAACEAAAAYAAAAFAAAAB0IAAB9AAAAQUAAAOIpAAAQAAAAJgAAAAgAAAD//////////w=="/>
               </a:ext>
             </a:extLst>
           </p:cNvPicPr>
@@ -5109,7 +5432,7 @@
 </file>
 
 <file path=ppt/slides/slide3.xml><?xml version="1.0" encoding="utf-8"?>
-<p:sld xmlns:p="http://schemas.openxmlformats.org/presentationml/2006/main" xmlns:mc="http://schemas.openxmlformats.org/markup-compatibility/2006" xmlns:p14="http://schemas.microsoft.com/office/powerpoint/2010/main" xmlns:p15="http://schemas.microsoft.com/office/powerpoint/2012/main" xmlns:r="http://schemas.openxmlformats.org/officeDocument/2006/relationships" xmlns:a="http://schemas.openxmlformats.org/drawingml/2006/main" mc:Ignorable="p14">
+<p:sld xmlns:a="http://schemas.openxmlformats.org/drawingml/2006/main" xmlns:r="http://schemas.openxmlformats.org/officeDocument/2006/relationships" xmlns:p="http://schemas.openxmlformats.org/presentationml/2006/main">
   <p:cSld>
     <p:spTree>
       <p:nvGrpSpPr>
@@ -5132,7 +5455,7 @@
             <a:spLocks noGrp="1" noChangeArrowheads="1"/>
             <a:extLst>
               <a:ext uri="smNativeData">
-                <pr:smNativeData xmlns:pr="smNativeData" xmlns="smNativeData" val="SMDATA_15_FLquaRMAAAAlAAAAZAAAAA0AAAAAkAAAAEgAAACQAAAASAAAAAAAAAABAAAAAAAAAAEAAABQAAAAAAAAAAAA4D8AAAAAAADgPwAAAAAAAOA/AAAAAAAA4D8AAAAAAADgPwAAAAAAAOA/AAAAAAAA4D8AAAAAAADgPwAAAAAAAOA/AAAAAAAA4D8CAAAAjAAAAAAAAAAAAAAAW5vVDP///wgAAAAAAAAAAAAAAAAAAAAAAAAAAAAAAAAAAAAAZAAAAAEAAABAAAAAAAAAAAAAAAAAAAAAAAAAAAAAAAAAAAAAAAAAAAAAAAAAAAAAAAAAAAAAAAAAAAAAAAAAAAAAAAAAAAAAAAAAAAAAAAAAAAAAAAAAAAAAAAAAAAAAFAAAADwAAAAAAAAAAAAAAAAAAAkUAAAAAQAAABQAAAAUAAAAFAAAAAEAAAAAAAAAZAAAAGQAAAAAAAAAZAAAAGQAAAAVAAAAYAAAAAAAAAAAAAAADwAAACADAAAAAAAAAAAAAAEAAACgMgAAVgcAAKr4//8BAAAAf39/AAEAAABkAAAAAAAAABQAAABAHwAAAAAAACYAAAAAAAAAwOD//wAAAAAmAAAAZAAAABYAAABMAAAAAAAAAAAAAAAEAAAAAAAAAAEAAADn5uYKAAAAACgAAAAoAAAAZAAAAGQAAAAAAAAAzMzMAAAAAABQAAAAUAAAAGQAAABkAAAAAAAAABcAAAAUAAAAAAAAAAAAAAD/fwAA/38AAAAAAAAJAAAABAAAAF8AYAAeAAAAaAAAAAAAAAAAAAAAAAAAAAAAAAAAAAAAECcAABAnAAAAAAAAAAAAAAAAAAAAAAAAAAAAAAAAAAAAAAAAAAAAABQAAAAAAAAAwMD/AAAAAABkAAAAMgAAAAAAAABkAAAAAAAAAH9/fwAKAAAAIgAAABgAAAAAAAAAAAAAAAAAAAAAAAAAAAAAAAAAAAAkAAAAJAAAAAAAAAAHAAAAAAAAAAAAAAAAAAAAAAAAAAAAAAAAAAAAf39/ACUAAABYAAAAAAAAAAAAAAAAAAAAAAAAAAAAAAAAAAAAAAAAAAAAAAAAAAAAAAAAAAAAAAA/AAAAAAAAAKCGAQAAAAAAAAAAAAAAAAAMAAAAAQAAAAAAAAAAAAAAAAAAAB8AAABUAAAAW5vVBf///wEAAAAAAAAAAAAAAAAAAAAAAAAAAAAAAAAAAAAAAAAAAAAAAAJ/f38A5+bmA8zMzADAwP8Af39/AAAAAAAAAAAAAAAAAAAAAAAAAAAAIQAAABgAAAAUAAAAKAUAAD8CAADYRQAAZwoAABAAAAAmAAAACAAAAAAAAAAAAAAA"/>
+                <pr:smNativeData xmlns="smNativeData" xmlns:pr="smNativeData" xmlns:p15="http://schemas.microsoft.com/office/powerpoint/2012/main" xmlns:p14="http://schemas.microsoft.com/office/powerpoint/2010/main" xmlns:mc="http://schemas.openxmlformats.org/markup-compatibility/2006" val="SMDATA_15_FLquaRMAAAAlAAAAZAAAAA0AAAAAkAAAAEgAAACQAAAASAAAAAAAAAABAAAAAAAAAAEAAABQAAAAAAAAAAAA4D8AAAAAAADgPwAAAAAAAOA/AAAAAAAA4D8AAAAAAADgPwAAAAAAAOA/AAAAAAAA4D8AAAAAAADgPwAAAAAAAOA/AAAAAAAA4D8CAAAAjAAAAAAAAAAAAAAAW5vVDP///wgAAAAAAAAAAAAAAAAAAAAAAAAAAAAAAAAAAAAAZAAAAAEAAABAAAAAAAAAAAAAAAAAAAAAAAAAAAAAAAAAAAAAAAAAAAAAAAAAAAAAAAAAAAAAAAAAAAAAAAAAAAAAAAAAAAAAAAAAAAAAAAAAAAAAAAAAAAAAAAAAAAAAFAAAADwAAAAAAAAAAAAAAAAAAAkUAAAAAQAAABQAAAAUAAAAFAAAAAEAAAAAAAAAZAAAAGQAAAAAAAAAZAAAAGQAAAAVAAAAYAAAAAAAAAAAAAAADwAAACADAAAAAAAAAAAAAAEAAACgMgAAVgcAAKr4//8BAAAAf39/AAEAAABkAAAAAAAAABQAAABAHwAAAAAAACYAAAAAAAAAwOD//wAAAAAmAAAAZAAAABYAAABMAAAAAAAAAAAAAAAEAAAAAAAAAAEAAADn5uYKAAAAACgAAAAoAAAAZAAAAGQAAAAAAAAAzMzMAAAAAABQAAAAUAAAAGQAAABkAAAAAAAAABcAAAAUAAAAAAAAAAAAAAD/fwAA/38AAAAAAAAJAAAABAAAAF8AYAAeAAAAaAAAAAAAAAAAAAAAAAAAAAAAAAAAAAAAECcAABAnAAAAAAAAAAAAAAAAAAAAAAAAAAAAAAAAAAAAAAAAAAAAABQAAAAAAAAAwMD/AAAAAABkAAAAMgAAAAAAAABkAAAAAAAAAH9/fwAKAAAAIgAAABgAAAAAAAAAAAAAAAAAAAAAAAAAAAAAAAAAAAAkAAAAJAAAAAAAAAAHAAAAAAAAAAAAAAAAAAAAAAAAAAAAAAAAAAAAf39/ACUAAABYAAAAAAAAAAAAAAAAAAAAAAAAAAAAAAAAAAAAAAAAAAAAAAAAAAAAAAAAAAAAAAA/AAAAAAAAAKCGAQAAAAAAAAAAAAAAAAAMAAAAAQAAAAAAAAAAAAAAAAAAAB8AAABUAAAAW5vVBf///wEAAAAAAAAAAAAAAAAAAAAAAAAAAAAAAAAAAAAAAAAAAAAAAAJ/f38A5+bmA8zMzADAwP8Af39/AAAAAAAAAAAAAAAAAAAAAAAAAAAAIQAAABgAAAAUAAAAKAUAAD8CAADYRQAAZwoAABAAAAAmAAAACAAAAAAAAAAAAAAA"/>
               </a:ext>
             </a:extLst>
           </p:cNvSpPr>
@@ -5146,7 +5469,7 @@
           <a:lstStyle/>
           <a:p>
             <a:pPr algn="ctr">
-              <a:defRPr lang="en-us"/>
+              <a:defRPr lang="en-US"/>
             </a:pPr>
             <a:r>
               <a:t>Power</a:t>
@@ -5161,7 +5484,7 @@
             <a:spLocks noGrp="1" noChangeArrowheads="1"/>
             <a:extLst>
               <a:ext uri="smNativeData">
-                <pr:smNativeData xmlns:pr="smNativeData" xmlns="smNativeData" val="SMDATA_15_FLquaRMAAAAlAAAAZAAAAA0AAAAAkAAAAEgAAACQAAAASAAAAAAAAAAAAAAAAAAAAAEAAABQAAAAAAAAAAAA4D8AAAAAAADgPwAAAAAAAOA/AAAAAAAA4D8AAAAAAADgPwAAAAAAAOA/AAAAAAAA4D8AAAAAAADgPwAAAAAAAOA/AAAAAAAA4D8CAAAAjAAAAAAAAAAAAAAAW5vVDP///wgAAAAAAAAAAAAAAAAAAAAAAAAAAAAAAAAAAAAAZAAAAAEAAABAAAAAAAAAAAAAAAAAAAAAAAAAAAAAAAAAAAAAAAAAAAAAAAAAAAAAAAAAAAAAAAAAAAAAAAAAAAAAAAAAAAAAAAAAAAAAAAAAAAAAAAAAAAAAAAAAAAAAFAAAADwAAAAAAAAAAAAAAAAAAAkUAAAAAQAAABQAAAAUAAAAFAAAAAEAAAAAAAAAZAAAAGQAAAAAAAAAZAAAAGQAAAAVAAAAYAAAAAAAAAAAAAAADwAAACADAAAAAAAAAAAAAAEAAACgMgAAVgcAAKr4//8BAAAAf39/AAEAAABkAAAAAAAAABQAAABAHwAAAAAAACYAAAAAAAAAwOD//wAAAAAmAAAAZAAAABYAAABMAAAAAAAAAAAAAAAEAAAAAAAAAAEAAADn5uYKAAAAACgAAAAoAAAAZAAAAGQAAAAAAAAAzMzMAAAAAABQAAAAUAAAAGQAAABkAAAAAAAAABcAAAAUAAAAAAAAAAAAAAD/fwAA/38AAAAAAAAJAAAABAAAAF8AYAAeAAAAaAAAAAAAAAAAAAAAAAAAAAAAAAAAAAAAECcAABAnAAAAAAAAAAAAAAAAAAAAAAAAAAAAAAAAAAAAAAAAAAAAABQAAAAAAAAAwMD/AAAAAABkAAAAMgAAAAAAAABkAAAAAAAAAH9/fwAKAAAAIgAAABgAAAAAAAAAAAAAAAAAAAAAAAAAAAAAAAAAAAAkAAAAJAAAAAAAAAAHAAAAAAAAAAAAAAAAAAAAAAAAAAAAAAAAAAAAf39/ACUAAABYAAAAAAAAAAAAAAAAAAAAAAAAAAAAAAAAAAAAAAAAAAAAAAAAAAAAAAAAAAAAAAA/AAAAAAAAAKCGAQAAAAAAAAAAAAAAAAAMAAAAAQAAAAAAAAAAAAAAAAAAAB8AAABUAAAAW5vVBf///wEAAAAAAAAAAAAAAAAAAAAAAAAAAAAAAAAAAAAAAAAAAAAAAAJ/f38A5+bmA8zMzADAwP8Af39/AAAAAAAAAAAAAAAAAAAAAAAAAAAAIQAAABgAAAAUAAAAKAUAADsLAADYRQAAACYAABAAAAAmAAAACAAAAAAAAAAAAAAA"/>
+                <pr:smNativeData xmlns="smNativeData" xmlns:pr="smNativeData" xmlns:p15="http://schemas.microsoft.com/office/powerpoint/2012/main" xmlns:p14="http://schemas.microsoft.com/office/powerpoint/2010/main" xmlns:mc="http://schemas.openxmlformats.org/markup-compatibility/2006" val="SMDATA_15_FLquaRMAAAAlAAAAZAAAAA0AAAAAkAAAAEgAAACQAAAASAAAAAAAAAAAAAAAAAAAAAEAAABQAAAAAAAAAAAA4D8AAAAAAADgPwAAAAAAAOA/AAAAAAAA4D8AAAAAAADgPwAAAAAAAOA/AAAAAAAA4D8AAAAAAADgPwAAAAAAAOA/AAAAAAAA4D8CAAAAjAAAAAAAAAAAAAAAW5vVDP///wgAAAAAAAAAAAAAAAAAAAAAAAAAAAAAAAAAAAAAZAAAAAEAAABAAAAAAAAAAAAAAAAAAAAAAAAAAAAAAAAAAAAAAAAAAAAAAAAAAAAAAAAAAAAAAAAAAAAAAAAAAAAAAAAAAAAAAAAAAAAAAAAAAAAAAAAAAAAAAAAAAAAAFAAAADwAAAAAAAAAAAAAAAAAAAkUAAAAAQAAABQAAAAUAAAAFAAAAAEAAAAAAAAAZAAAAGQAAAAAAAAAZAAAAGQAAAAVAAAAYAAAAAAAAAAAAAAADwAAACADAAAAAAAAAAAAAAEAAACgMgAAVgcAAKr4//8BAAAAf39/AAEAAABkAAAAAAAAABQAAABAHwAAAAAAACYAAAAAAAAAwOD//wAAAAAmAAAAZAAAABYAAABMAAAAAAAAAAAAAAAEAAAAAAAAAAEAAADn5uYKAAAAACgAAAAoAAAAZAAAAGQAAAAAAAAAzMzMAAAAAABQAAAAUAAAAGQAAABkAAAAAAAAABcAAAAUAAAAAAAAAAAAAAD/fwAA/38AAAAAAAAJAAAABAAAAF8AYAAeAAAAaAAAAAAAAAAAAAAAAAAAAAAAAAAAAAAAECcAABAnAAAAAAAAAAAAAAAAAAAAAAAAAAAAAAAAAAAAAAAAAAAAABQAAAAAAAAAwMD/AAAAAABkAAAAMgAAAAAAAABkAAAAAAAAAH9/fwAKAAAAIgAAABgAAAAAAAAAAAAAAAAAAAAAAAAAAAAAAAAAAAAkAAAAJAAAAAAAAAAHAAAAAAAAAAAAAAAAAAAAAAAAAAAAAAAAAAAAf39/ACUAAABYAAAAAAAAAAAAAAAAAAAAAAAAAAAAAAAAAAAAAAAAAAAAAAAAAAAAAAAAAAAAAAA/AAAAAAAAAKCGAQAAAAAAAAAAAAAAAAAMAAAAAQAAAAAAAAAAAAAAAAAAAB8AAABUAAAAW5vVBf///wEAAAAAAAAAAAAAAAAAAAAAAAAAAAAAAAAAAAAAAAAAAAAAAAJ/f38A5+bmA8zMzADAwP8Af39/AAAAAAAAAAAAAAAAAAAAAAAAAAAAIQAAABgAAAAUAAAAKAUAADsLAADYRQAAACYAABAAAAAmAAAACAAAAAAAAAAAAAAA"/>
               </a:ext>
             </a:extLst>
           </p:cNvSpPr>
@@ -5175,7 +5498,7 @@
           <a:lstStyle/>
           <a:p>
             <a:pPr>
-              <a:defRPr lang="en-us"/>
+              <a:defRPr lang="en-US"/>
             </a:pPr>
             <a:r>
               <a:t>A/C outler power: 12V supply **BUT motors will be weak and servos will barely move if at all!!</a:t>
@@ -5183,17 +5506,16 @@
           </a:p>
           <a:p>
             <a:pPr lvl="1">
-              <a:defRPr lang="en-us"/>
-            </a:pPr>
-            <a:r>
-              <a:rPr lang="en-us" sz="2000" cap="none"/>
+              <a:defRPr lang="en-US"/>
+            </a:pPr>
+            <a:r>
+              <a:rPr lang="en-US" sz="2000" cap="none"/>
               <a:t>but good for installing packages (usually takes a long time, battery could run out)</a:t>
             </a:r>
-            <a:endParaRPr lang="en-us" sz="2000" cap="none"/>
-          </a:p>
-          <a:p>
-            <a:pPr>
-              <a:defRPr lang="en-us"/>
+          </a:p>
+          <a:p>
+            <a:pPr>
+              <a:defRPr lang="en-US"/>
             </a:pPr>
             <a:r>
               <a:t>Can also power w/microUSB port hidden on bottom of board</a:t>
@@ -5201,7 +5523,7 @@
           </a:p>
           <a:p>
             <a:pPr lvl="1">
-              <a:defRPr lang="en-us"/>
+              <a:defRPr lang="en-US"/>
             </a:pPr>
             <a:r>
               <a:t>But, again, not enough power.</a:t>
@@ -5209,7 +5531,7 @@
           </a:p>
           <a:p>
             <a:pPr>
-              <a:defRPr lang="en-us"/>
+              <a:defRPr lang="en-US"/>
             </a:pPr>
             <a:r>
               <a:t>Better connection: to 2S 7.4V battery using this connector:</a:t>
@@ -5217,13 +5539,15 @@
           </a:p>
           <a:p>
             <a:pPr>
-              <a:defRPr lang="en-us"/>
-            </a:pPr>
-          </a:p>
-          <a:p>
-            <a:pPr>
-              <a:defRPr lang="en-us"/>
-            </a:pPr>
+              <a:defRPr lang="en-US"/>
+            </a:pPr>
+            <a:endParaRPr/>
+          </a:p>
+          <a:p>
+            <a:pPr>
+              <a:defRPr lang="en-US"/>
+            </a:pPr>
+            <a:endParaRPr/>
           </a:p>
         </p:txBody>
       </p:sp>
@@ -5234,7 +5558,7 @@
             <a:picLocks noChangeAspect="1"/>
             <a:extLst>
               <a:ext uri="smNativeData">
-                <pr:smNativeData xmlns:pr="smNativeData" xmlns="smNativeData" val="SMDATA_17_FLquaRMAAAAlAAAAEQAAAC0AAAAAkAAAAEgAAACQAAAASAAAAAAAAAAAAAAAAAAAAAEAAABQAAAAAAAAAAAA4D8AAAAAAADgPwAAAAAAAOA/AAAAAAAA4D8AAAAAAADgPwAAAAAAAOA/AAAAAAAA4D8AAAAAAADgPwAAAAAAAOA/AAAAAAAA4D8CAAAAjAAAAAAAAAAAAAAAW5vVDP///wgAAAAAAAAAAAAAAAAAAAAAAAAAAAAAAAAAAAAAZAAAAAEAAABAAAAAAAAAAAAAAAAAAAAAAAAAAAAAAAAAAAAAAAAAAAAAAAAAAAAAAAAAAAAAAAAAAAAAAAAAAAAAAAAAAAAAAAAAAAAAAAAAAAAAAAAAAAAAAAAAAAAAFAAAADwAAAAAAAAAAAAAAAAAAAkUAAAAAQAAABQAAAAUAAAAFAAAAAEAAAAAAAAAZAAAAGQAAAAAAAAAZAAAAGQAAAAVAAAAYAAAAAAAAAAAAAAADwAAACADAAAAAAAAAAAAAAEAAACgMgAAVgcAAKr4//8BAAAAf39/AAEAAABkAAAAAAAAABQAAABAHwAAAAAAACYAAAAAAAAAwOD//wAAAAAmAAAAZAAAABYAAABMAAAAAAAAAAAAAAAEAAAAAAAAAAEAAADn5uYKAAAAACgAAAAoAAAAZAAAAGQAAAAAAAAAzMzMAAAAAABQAAAAUAAAAGQAAABkAAAAAAAAAAcAAAA4AAAAAAAAAAAAAAAAAAAA////AAAAAAAAAAAAAAAAAAAAAAAAAAAAAAAAAAAAAABkAAAAZAAAAAAAAAAjAAAABAAAAGQAAAAXAAAAFAAAAAAAAAAAAAAA/38AAP9/AAAAAAAACQAAAAQAAAAAAAAAHgAAAGgAAAAAAAAAAAAAAAAAAAAAAAAAAAAAABAnAAAQJwAAAAAAAAAAAAAAAAAAAAAAAAAAAAAAAAAAAAAAAAAAAAAUAAAAAAAAAMDA/wAAAAAAZAAAADIAAAAAAAAAZAAAAAAAAAB/f38ACgAAACIAAAAYAAAAAAAAAAAAAAAAAAAAAAAAAAAAAAAAAAAAJAAAACQAAAAAAAAABwAAAAAAAAAAAAAAAAAAAAAAAAAAAAAAAAAAAH9/fwAlAAAAWAAAAAAAAAAAAAAAAAAAAAAAAAAAAAAAAAAAAAAAAAAAAAAAAAAAAAAAAAAAAAAAPwAAAAAAAACghgEAAAAAAAAAAAAAAAAADAAAAAEAAAAAAAAAAAAAAAAAAAAfAAAAVAAAAFub1QX///8BAAAAAAAAAAAAAAAAAAAAAAAAAAAAAAAAAAAAAAAAAAAAAAACf39/AOfm5gPMzMwAwMD/AH9/fwAAAAAAAAAAAAAAAAD///8AAAAAACEAAAAYAAAAFAAAAA0QAADTGgAA0iIAAHsdAAAQAAAAJgAAAAgAAAD//////////w=="/>
+                <pr:smNativeData xmlns="smNativeData" xmlns:pr="smNativeData" xmlns:p15="http://schemas.microsoft.com/office/powerpoint/2012/main" xmlns:p14="http://schemas.microsoft.com/office/powerpoint/2010/main" xmlns:mc="http://schemas.openxmlformats.org/markup-compatibility/2006" val="SMDATA_17_FLquaRMAAAAlAAAAEQAAAC0AAAAAkAAAAEgAAACQAAAASAAAAAAAAAAAAAAAAAAAAAEAAABQAAAAAAAAAAAA4D8AAAAAAADgPwAAAAAAAOA/AAAAAAAA4D8AAAAAAADgPwAAAAAAAOA/AAAAAAAA4D8AAAAAAADgPwAAAAAAAOA/AAAAAAAA4D8CAAAAjAAAAAAAAAAAAAAAW5vVDP///wgAAAAAAAAAAAAAAAAAAAAAAAAAAAAAAAAAAAAAZAAAAAEAAABAAAAAAAAAAAAAAAAAAAAAAAAAAAAAAAAAAAAAAAAAAAAAAAAAAAAAAAAAAAAAAAAAAAAAAAAAAAAAAAAAAAAAAAAAAAAAAAAAAAAAAAAAAAAAAAAAAAAAFAAAADwAAAAAAAAAAAAAAAAAAAkUAAAAAQAAABQAAAAUAAAAFAAAAAEAAAAAAAAAZAAAAGQAAAAAAAAAZAAAAGQAAAAVAAAAYAAAAAAAAAAAAAAADwAAACADAAAAAAAAAAAAAAEAAACgMgAAVgcAAKr4//8BAAAAf39/AAEAAABkAAAAAAAAABQAAABAHwAAAAAAACYAAAAAAAAAwOD//wAAAAAmAAAAZAAAABYAAABMAAAAAAAAAAAAAAAEAAAAAAAAAAEAAADn5uYKAAAAACgAAAAoAAAAZAAAAGQAAAAAAAAAzMzMAAAAAABQAAAAUAAAAGQAAABkAAAAAAAAAAcAAAA4AAAAAAAAAAAAAAAAAAAA////AAAAAAAAAAAAAAAAAAAAAAAAAAAAAAAAAAAAAABkAAAAZAAAAAAAAAAjAAAABAAAAGQAAAAXAAAAFAAAAAAAAAAAAAAA/38AAP9/AAAAAAAACQAAAAQAAAAAAAAAHgAAAGgAAAAAAAAAAAAAAAAAAAAAAAAAAAAAABAnAAAQJwAAAAAAAAAAAAAAAAAAAAAAAAAAAAAAAAAAAAAAAAAAAAAUAAAAAAAAAMDA/wAAAAAAZAAAADIAAAAAAAAAZAAAAAAAAAB/f38ACgAAACIAAAAYAAAAAAAAAAAAAAAAAAAAAAAAAAAAAAAAAAAAJAAAACQAAAAAAAAABwAAAAAAAAAAAAAAAAAAAAAAAAAAAAAAAAAAAH9/fwAlAAAAWAAAAAAAAAAAAAAAAAAAAAAAAAAAAAAAAAAAAAAAAAAAAAAAAAAAAAAAAAAAAAAAPwAAAAAAAACghgEAAAAAAAAAAAAAAAAADAAAAAEAAAAAAAAAAAAAAAAAAAAfAAAAVAAAAFub1QX///8BAAAAAAAAAAAAAAAAAAAAAAAAAAAAAAAAAAAAAAAAAAAAAAACf39/AOfm5gPMzMwAwMD/AH9/fwAAAAAAAAAAAAAAAAD///8AAAAAACEAAAAYAAAAFAAAAA0QAADTGgAA0iIAAHsdAAAQAAAAJgAAAAgAAAD//////////w=="/>
               </a:ext>
             </a:extLst>
           </p:cNvPicPr>
@@ -5277,7 +5601,7 @@
 </file>
 
 <file path=ppt/slides/slide4.xml><?xml version="1.0" encoding="utf-8"?>
-<p:sld xmlns:p="http://schemas.openxmlformats.org/presentationml/2006/main" xmlns:mc="http://schemas.openxmlformats.org/markup-compatibility/2006" xmlns:p14="http://schemas.microsoft.com/office/powerpoint/2010/main" xmlns:p15="http://schemas.microsoft.com/office/powerpoint/2012/main" xmlns:r="http://schemas.openxmlformats.org/officeDocument/2006/relationships" xmlns:a="http://schemas.openxmlformats.org/drawingml/2006/main" mc:Ignorable="p14">
+<p:sld xmlns:a="http://schemas.openxmlformats.org/drawingml/2006/main" xmlns:r="http://schemas.openxmlformats.org/officeDocument/2006/relationships" xmlns:p="http://schemas.openxmlformats.org/presentationml/2006/main">
   <p:cSld>
     <p:spTree>
       <p:nvGrpSpPr>
@@ -5300,7 +5624,7 @@
             <a:spLocks noGrp="1" noChangeArrowheads="1"/>
             <a:extLst>
               <a:ext uri="smNativeData">
-                <pr:smNativeData xmlns:pr="smNativeData" xmlns="smNativeData" val="SMDATA_15_FLquaRMAAAAlAAAAZAAAAA0AAAAAkAAAAEgAAACQAAAASAAAAAAAAAABAAAAAAAAAAEAAABQAAAAAAAAAAAA4D8AAAAAAADgPwAAAAAAAOA/AAAAAAAA4D8AAAAAAADgPwAAAAAAAOA/AAAAAAAA4D8AAAAAAADgPwAAAAAAAOA/AAAAAAAA4D8CAAAAjAAAAAAAAAAAAAAAW5vVDP///wgAAAAAAAAAAAAAAAAAAAAAAAAAAAAAAAAAAAAAZAAAAAEAAABAAAAAAAAAAAAAAAAAAAAAAAAAAAAAAAAAAAAAAAAAAAAAAAAAAAAAAAAAAAAAAAAAAAAAAAAAAAAAAAAAAAAAAAAAAAAAAAAAAAAAAAAAAAAAAAAAAAAAFAAAADwAAAAAAAAAAAAAAAAAAAkUAAAAAQAAABQAAAAUAAAAFAAAAAEAAAAAAAAAZAAAAGQAAAAAAAAAZAAAAGQAAAAVAAAAYAAAAAAAAAAAAAAADwAAACADAAAAAAAAAAAAAAEAAACgMgAAVgcAAKr4//8BAAAAf39/AAEAAABkAAAAAAAAABQAAABAHwAAAAAAACYAAAAAAAAAwOD//wAAAAAmAAAAZAAAABYAAABMAAAAAAAAAAAAAAAEAAAAAAAAAAEAAADn5uYKAAAAACgAAAAoAAAAZAAAAGQAAAAAAAAAzMzMAAAAAABQAAAAUAAAAGQAAABkAAAAAAAAABcAAAAUAAAAAAAAAAAAAAD/fwAA/38AAAAAAAAJAAAABAAAAF8AYAAeAAAAaAAAAAAAAAAAAAAAAAAAAAAAAAAAAAAAECcAABAnAAAAAAAAAAAAAAAAAAAAAAAAAAAAAAAAAAAAAAAAAAAAABQAAAAAAAAAwMD/AAAAAABkAAAAMgAAAAAAAABkAAAAAAAAAH9/fwAKAAAAIgAAABgAAAAAAAAAAAAAAAAAAAAAAAAAAAAAAAAAAAAkAAAAJAAAAAAAAAAHAAAAAAAAAAAAAAAAAAAAAAAAAAAAAAAAAAAAf39/ACUAAABYAAAAAAAAAAAAAAAAAAAAAAAAAAAAAAAAAAAAAAAAAAAAAAAAAAAAAAAAAAAAAAA/AAAAAAAAAKCGAQAAAAAAAAAAAAAAAAAMAAAAAQAAAAAAAAAAAAAAAAAAAB8AAABUAAAAW5vVBf///wEAAAAAAAAAAAAAAAAAAAAAAAAAAAAAAAAAAAAAAAAAAAAAAAJ/f38A5+bmA8zMzADAwP8Af39/AAAAAAAAAAAAAAAAAAAAAAAAAAAAIQAAABgAAAAUAAAAKAUAAD8CAADYRQAAZwoAABAAAAAmAAAACAAAAAAAAAAAAAAA"/>
+                <pr:smNativeData xmlns="smNativeData" xmlns:pr="smNativeData" xmlns:p15="http://schemas.microsoft.com/office/powerpoint/2012/main" xmlns:p14="http://schemas.microsoft.com/office/powerpoint/2010/main" xmlns:mc="http://schemas.openxmlformats.org/markup-compatibility/2006" val="SMDATA_15_FLquaRMAAAAlAAAAZAAAAA0AAAAAkAAAAEgAAACQAAAASAAAAAAAAAABAAAAAAAAAAEAAABQAAAAAAAAAAAA4D8AAAAAAADgPwAAAAAAAOA/AAAAAAAA4D8AAAAAAADgPwAAAAAAAOA/AAAAAAAA4D8AAAAAAADgPwAAAAAAAOA/AAAAAAAA4D8CAAAAjAAAAAAAAAAAAAAAW5vVDP///wgAAAAAAAAAAAAAAAAAAAAAAAAAAAAAAAAAAAAAZAAAAAEAAABAAAAAAAAAAAAAAAAAAAAAAAAAAAAAAAAAAAAAAAAAAAAAAAAAAAAAAAAAAAAAAAAAAAAAAAAAAAAAAAAAAAAAAAAAAAAAAAAAAAAAAAAAAAAAAAAAAAAAFAAAADwAAAAAAAAAAAAAAAAAAAkUAAAAAQAAABQAAAAUAAAAFAAAAAEAAAAAAAAAZAAAAGQAAAAAAAAAZAAAAGQAAAAVAAAAYAAAAAAAAAAAAAAADwAAACADAAAAAAAAAAAAAAEAAACgMgAAVgcAAKr4//8BAAAAf39/AAEAAABkAAAAAAAAABQAAABAHwAAAAAAACYAAAAAAAAAwOD//wAAAAAmAAAAZAAAABYAAABMAAAAAAAAAAAAAAAEAAAAAAAAAAEAAADn5uYKAAAAACgAAAAoAAAAZAAAAGQAAAAAAAAAzMzMAAAAAABQAAAAUAAAAGQAAABkAAAAAAAAABcAAAAUAAAAAAAAAAAAAAD/fwAA/38AAAAAAAAJAAAABAAAAF8AYAAeAAAAaAAAAAAAAAAAAAAAAAAAAAAAAAAAAAAAECcAABAnAAAAAAAAAAAAAAAAAAAAAAAAAAAAAAAAAAAAAAAAAAAAABQAAAAAAAAAwMD/AAAAAABkAAAAMgAAAAAAAABkAAAAAAAAAH9/fwAKAAAAIgAAABgAAAAAAAAAAAAAAAAAAAAAAAAAAAAAAAAAAAAkAAAAJAAAAAAAAAAHAAAAAAAAAAAAAAAAAAAAAAAAAAAAAAAAAAAAf39/ACUAAABYAAAAAAAAAAAAAAAAAAAAAAAAAAAAAAAAAAAAAAAAAAAAAAAAAAAAAAAAAAAAAAA/AAAAAAAAAKCGAQAAAAAAAAAAAAAAAAAMAAAAAQAAAAAAAAAAAAAAAAAAAB8AAABUAAAAW5vVBf///wEAAAAAAAAAAAAAAAAAAAAAAAAAAAAAAAAAAAAAAAAAAAAAAAJ/f38A5+bmA8zMzADAwP8Af39/AAAAAAAAAAAAAAAAAAAAAAAAAAAAIQAAABgAAAAUAAAAKAUAAD8CAADYRQAAZwoAABAAAAAmAAAACAAAAAAAAAAAAAAA"/>
               </a:ext>
             </a:extLst>
           </p:cNvSpPr>
@@ -5314,7 +5638,7 @@
           <a:lstStyle/>
           <a:p>
             <a:pPr>
-              <a:defRPr lang="en-us"/>
+              <a:defRPr lang="en-US"/>
             </a:pPr>
             <a:r>
               <a:t>microUSB port on bottom of board</a:t>
@@ -5324,12 +5648,12 @@
       </p:sp>
       <p:pic>
         <p:nvPicPr>
-          <p:cNvPr id="3" name="Picture 2" descr="https://static4.arrow.com/-/media/arrow/images/1200-x-675/0/0417-beaglebone-blue-main.jpg"/>
+          <p:cNvPr id="3" name="Picture Placeholder 2" descr="https://static4.arrow.com/-/media/arrow/images/1200-x-675/0/0417-beaglebone-blue-main.jpg"/>
           <p:cNvPicPr>
-            <a:picLocks noGrp="1" noChangeArrowheads="1" noChangeAspect="1"/>
-            <a:extLst>
-              <a:ext uri="smNativeData">
-                <pr:smNativeData xmlns:pr="smNativeData" xmlns="smNativeData" val="SMDATA_17_FLquaRMAAAAlAAAAEQAAAC0AAAAAkAAAAEgAAACQAAAASAAAAAAAAAAAAAAAAAAAAAEAAABQAAAAAAAAAAAA4D8AAAAAAADgPwAAAAAAAOA/AAAAAAAA4D8AAAAAAADgPwAAAAAAAOA/AAAAAAAA4D8AAAAAAADgPwAAAAAAAOA/AAAAAAAA4D8CAAAAjAAAAAAAAAAAAAAAW5vVDP///wgAAAAAAAAAAAAAAAAAAAAAAAAAAAAAAAAAAAAAZAAAAAEAAABAAAAAAAAAAAAAAAAAAAAAAAAAAAAAAAAAAAAAAAAAAAAAAAAAAAAAAAAAAAAAAAAAAAAAAAAAAAAAAAAAAAAAAAAAAAAAAAAAAAAAAAAAAAAAAAAAAAAAFAAAADwAAAAAAAAAAAAAAAAAAAkUAAAAAQAAABQAAAAUAAAAFAAAAAEAAAAAAAAAZAAAAGQAAAAAAAAAZAAAAGQAAAAVAAAAYAAAAAAAAAAAAAAADwAAACADAAAAAAAAAAAAAAEAAACgMgAAVgcAAKr4//8BAAAAf39/AAEAAABkAAAAAAAAABQAAABAHwAAAAAAACYAAAAAAAAAwOD//wAAAAAmAAAAZAAAABYAAABMAAAAAAAAAAAAAAAEAAAAAAAAAAEAAADn5uYKAAAAACgAAAAoAAAAZAAAAGQAAAAAAAAAzMzMAAAAAABQAAAAUAAAAGQAAABkAAAAAAAAAAcAAAA4AAAAAAAAAAAAAAAAAAAA////AAAAAAAAAAAAAAAAAAAAAAAAAAAAAAAAAAAAAABkAAAAZAAAAAAAAAAjAAAABAAAAGQAAAAXAAAAFAAAAAAAAAAAAAAA/38AAP9/AAAAAAAACQAAAAQAAADz////HgAAAGgAAAAAAAAAAAAAAAAAAAAAAAAAAAAAABAnAAAQJwAAAAAAAAAAAAAAAAAAAAAAAAAAAAAAAAAAAAAAAAAAAAAUAAAAAAAAAMDA/wAAAAAAZAAAADIAAAAAAAAAZAAAAAAAAAB/f38ACgAAACIAAAAYAAAAAAAAAAAAAAAAAAAAAAAAAAAAAAAAAAAAJAAAACQAAAAAAAAABwAAAAAAAAAAAAAAAAAAAAAAAAAAAAAAAAAAAH9/fwAlAAAAWAAAAAAAAAAAAAAAAAAAAAAAAAAAAAAAAAAAAAAAAAAAAAAAAAAAAAAAAAAAAAAAPwAAAAAAAACghgEAAAAAAAAAAAAAAAAADAAAAAEAAAAAAAAAAAAAAAAAAAAfAAAAVAAAAFub1QX///8BAAAAAAAAAAAAAAAAAAAAAAAAAAAAAAAAAAAAAAAAAAAAAAACf39/AOfm5gPMzMwAwMD/AH9/fwAAAAAAAAAAAAAAAAD///8AAAAAACEAAAAYAAAAFAAAALUNAAA7CwAASz0AAAAmAAAQAAAAJgAAAAgAAAABgQAAfwAAAA=="/>
+            <a:picLocks noGrp="1" noChangeAspect="1" noChangeArrowheads="1"/>
+            <a:extLst>
+              <a:ext uri="smNativeData">
+                <pr:smNativeData xmlns="smNativeData" xmlns:pr="smNativeData" xmlns:p15="http://schemas.microsoft.com/office/powerpoint/2012/main" xmlns:p14="http://schemas.microsoft.com/office/powerpoint/2010/main" xmlns:mc="http://schemas.openxmlformats.org/markup-compatibility/2006" val="SMDATA_17_FLquaRMAAAAlAAAAEQAAAC0AAAAAkAAAAEgAAACQAAAASAAAAAAAAAAAAAAAAAAAAAEAAABQAAAAAAAAAAAA4D8AAAAAAADgPwAAAAAAAOA/AAAAAAAA4D8AAAAAAADgPwAAAAAAAOA/AAAAAAAA4D8AAAAAAADgPwAAAAAAAOA/AAAAAAAA4D8CAAAAjAAAAAAAAAAAAAAAW5vVDP///wgAAAAAAAAAAAAAAAAAAAAAAAAAAAAAAAAAAAAAZAAAAAEAAABAAAAAAAAAAAAAAAAAAAAAAAAAAAAAAAAAAAAAAAAAAAAAAAAAAAAAAAAAAAAAAAAAAAAAAAAAAAAAAAAAAAAAAAAAAAAAAAAAAAAAAAAAAAAAAAAAAAAAFAAAADwAAAAAAAAAAAAAAAAAAAkUAAAAAQAAABQAAAAUAAAAFAAAAAEAAAAAAAAAZAAAAGQAAAAAAAAAZAAAAGQAAAAVAAAAYAAAAAAAAAAAAAAADwAAACADAAAAAAAAAAAAAAEAAACgMgAAVgcAAKr4//8BAAAAf39/AAEAAABkAAAAAAAAABQAAABAHwAAAAAAACYAAAAAAAAAwOD//wAAAAAmAAAAZAAAABYAAABMAAAAAAAAAAAAAAAEAAAAAAAAAAEAAADn5uYKAAAAACgAAAAoAAAAZAAAAGQAAAAAAAAAzMzMAAAAAABQAAAAUAAAAGQAAABkAAAAAAAAAAcAAAA4AAAAAAAAAAAAAAAAAAAA////AAAAAAAAAAAAAAAAAAAAAAAAAAAAAAAAAAAAAABkAAAAZAAAAAAAAAAjAAAABAAAAGQAAAAXAAAAFAAAAAAAAAAAAAAA/38AAP9/AAAAAAAACQAAAAQAAADz////HgAAAGgAAAAAAAAAAAAAAAAAAAAAAAAAAAAAABAnAAAQJwAAAAAAAAAAAAAAAAAAAAAAAAAAAAAAAAAAAAAAAAAAAAAUAAAAAAAAAMDA/wAAAAAAZAAAADIAAAAAAAAAZAAAAAAAAAB/f38ACgAAACIAAAAYAAAAAAAAAAAAAAAAAAAAAAAAAAAAAAAAAAAAJAAAACQAAAAAAAAABwAAAAAAAAAAAAAAAAAAAAAAAAAAAAAAAAAAAH9/fwAlAAAAWAAAAAAAAAAAAAAAAAAAAAAAAAAAAAAAAAAAAAAAAAAAAAAAAAAAAAAAAAAAAAAAPwAAAAAAAACghgEAAAAAAAAAAAAAAAAADAAAAAEAAAAAAAAAAAAAAAAAAAAfAAAAVAAAAFub1QX///8BAAAAAAAAAAAAAAAAAAAAAAAAAAAAAAAAAAAAAAAAAAAAAAACf39/AOfm5gPMzMwAwMD/AH9/fwAAAAAAAAAAAAAAAAD///8AAAAAACEAAAAYAAAAFAAAALUNAAA7CwAASz0AAAAmAAAQAAAAJgAAAAgAAAABgQAAfwAAAA=="/>
               </a:ext>
             </a:extLst>
           </p:cNvPicPr>
@@ -5370,7 +5694,7 @@
 </file>
 
 <file path=ppt/slides/slide5.xml><?xml version="1.0" encoding="utf-8"?>
-<p:sld xmlns:p="http://schemas.openxmlformats.org/presentationml/2006/main" xmlns:mc="http://schemas.openxmlformats.org/markup-compatibility/2006" xmlns:p14="http://schemas.microsoft.com/office/powerpoint/2010/main" xmlns:p15="http://schemas.microsoft.com/office/powerpoint/2012/main" xmlns:r="http://schemas.openxmlformats.org/officeDocument/2006/relationships" xmlns:a="http://schemas.openxmlformats.org/drawingml/2006/main" mc:Ignorable="p14">
+<p:sld xmlns:a="http://schemas.openxmlformats.org/drawingml/2006/main" xmlns:r="http://schemas.openxmlformats.org/officeDocument/2006/relationships" xmlns:p="http://schemas.openxmlformats.org/presentationml/2006/main">
   <p:cSld>
     <p:spTree>
       <p:nvGrpSpPr>
@@ -5390,10 +5714,10 @@
         <p:nvPicPr>
           <p:cNvPr id="2" name="Picture 2" descr="https://www.mathworks.com/help/examples/beagleboneblue/win64/xxbeagleboneblue_spi.png"/>
           <p:cNvPicPr>
-            <a:picLocks noGrp="1" noChangeArrowheads="1" noChangeAspect="1"/>
-            <a:extLst>
-              <a:ext uri="smNativeData">
-                <pr:smNativeData xmlns:pr="smNativeData" xmlns="smNativeData" val="SMDATA_17_FLquaRMAAAAlAAAAEQAAAC0AAAAAkAAAAEgAAACQAAAASAAAAAAAAAAAAAAAAAAAAAEAAABQAAAAAAAAAAAA4D8AAAAAAADgPwAAAAAAAOA/AAAAAAAA4D8AAAAAAADgPwAAAAAAAOA/AAAAAAAA4D8AAAAAAADgPwAAAAAAAOA/AAAAAAAA4D8CAAAAjAAAAAAAAAAAAAAAW5vVDP///wgAAAAAAAAAAAAAAAAAAAAAAAAAAAAAAAAAAAAAZAAAAAEAAABAAAAAAAAAAAAAAAAAAAAAAAAAAAAAAAAAAAAAAAAAAAAAAAAAAAAAAAAAAAAAAAAAAAAAAAAAAAAAAAAAAAAAAAAAAAAAAAAAAAAAAAAAAAAAAAAAAAAAFAAAADwAAAAAAAAAAAAAAAAAAAkUAAAAAQAAABQAAAAUAAAAFAAAAAEAAAAAAAAAZAAAAGQAAAAAAAAAZAAAAGQAAAAVAAAAYAAAAAAAAAAAAAAADwAAACADAAAAAAAAAAAAAAEAAACgMgAAVgcAAKr4//8BAAAAf39/AAEAAABkAAAAAAAAABQAAABAHwAAAAAAACYAAAAAAAAAwOD//wAAAAAmAAAAZAAAABYAAABMAAAAAAAAAAAAAAAEAAAAAAAAAAEAAADn5uYKAAAAACgAAAAoAAAAZAAAAGQAAAAAAAAAzMzMAAAAAABQAAAAUAAAAGQAAABkAAAAAAAAAAcAAAA4AAAAAAAAAAAAAAAAAAAA////AAAAAAAAAAAAAAAAAAAAAAAAAAAAAAAAAAAAAABkAAAAZAAAAAAAAAAjAAAABAAAAGQAAAAXAAAAFAAAAAAAAAAAAAAA/38AAP9/AAAAAAAACQAAAAQAAADgqGkCHgAAAGgAAAAAAAAAAAAAAAAAAAAAAAAAAAAAABAnAAAQJwAAAAAAAAAAAAAAAAAAAAAAAAAAAAAAAAAAAAAAAAAAAAAUAAAAAAAAAMDA/wAAAAAAZAAAADIAAAAAAAAAZAAAAAAAAAB/f38ACgAAACIAAAAYAAAAAAAAAAAAAAAAAAAAAAAAAAAAAAAAAAAAJAAAACQAAAAAAAAABwAAAAAAAAAAAAAAAAAAAAAAAAAAAAAAAAAAAH9/fwAlAAAAWAAAAAAAAAAAAAAAAAAAAAAAAAAAAAAAAAAAAAAAAAAAAAAAAAAAAAAAAAAAAAAAPwAAAAAAAACghgEAAAAAAAAAAAAAAAAADAAAAAEAAAAAAAAAAAAAAAAAAAAfAAAAVAAAAFub1QX///8BAAAAAAAAAAAAAAAAAAAAAAAAAAAAAAAAAAAAAAAAAAAAAAACf39/AOfm5gPMzMwAwMD/AH9/fwAAAAAAAAAAAAAAAAD///8AAAAAACEAAAAYAAAAFAAAABAQAABpBQAAZz8AAPcqAAAQAAAAJgAAAAgAAAABgQAAfwAAAA=="/>
+            <a:picLocks noGrp="1" noChangeAspect="1" noChangeArrowheads="1"/>
+            <a:extLst>
+              <a:ext uri="smNativeData">
+                <pr:smNativeData xmlns="smNativeData" xmlns:pr="smNativeData" xmlns:p15="http://schemas.microsoft.com/office/powerpoint/2012/main" xmlns:p14="http://schemas.microsoft.com/office/powerpoint/2010/main" xmlns:mc="http://schemas.openxmlformats.org/markup-compatibility/2006" val="SMDATA_17_FLquaRMAAAAlAAAAEQAAAC0AAAAAkAAAAEgAAACQAAAASAAAAAAAAAAAAAAAAAAAAAEAAABQAAAAAAAAAAAA4D8AAAAAAADgPwAAAAAAAOA/AAAAAAAA4D8AAAAAAADgPwAAAAAAAOA/AAAAAAAA4D8AAAAAAADgPwAAAAAAAOA/AAAAAAAA4D8CAAAAjAAAAAAAAAAAAAAAW5vVDP///wgAAAAAAAAAAAAAAAAAAAAAAAAAAAAAAAAAAAAAZAAAAAEAAABAAAAAAAAAAAAAAAAAAAAAAAAAAAAAAAAAAAAAAAAAAAAAAAAAAAAAAAAAAAAAAAAAAAAAAAAAAAAAAAAAAAAAAAAAAAAAAAAAAAAAAAAAAAAAAAAAAAAAFAAAADwAAAAAAAAAAAAAAAAAAAkUAAAAAQAAABQAAAAUAAAAFAAAAAEAAAAAAAAAZAAAAGQAAAAAAAAAZAAAAGQAAAAVAAAAYAAAAAAAAAAAAAAADwAAACADAAAAAAAAAAAAAAEAAACgMgAAVgcAAKr4//8BAAAAf39/AAEAAABkAAAAAAAAABQAAABAHwAAAAAAACYAAAAAAAAAwOD//wAAAAAmAAAAZAAAABYAAABMAAAAAAAAAAAAAAAEAAAAAAAAAAEAAADn5uYKAAAAACgAAAAoAAAAZAAAAGQAAAAAAAAAzMzMAAAAAABQAAAAUAAAAGQAAABkAAAAAAAAAAcAAAA4AAAAAAAAAAAAAAAAAAAA////AAAAAAAAAAAAAAAAAAAAAAAAAAAAAAAAAAAAAABkAAAAZAAAAAAAAAAjAAAABAAAAGQAAAAXAAAAFAAAAAAAAAAAAAAA/38AAP9/AAAAAAAACQAAAAQAAADgqGkCHgAAAGgAAAAAAAAAAAAAAAAAAAAAAAAAAAAAABAnAAAQJwAAAAAAAAAAAAAAAAAAAAAAAAAAAAAAAAAAAAAAAAAAAAAUAAAAAAAAAMDA/wAAAAAAZAAAADIAAAAAAAAAZAAAAAAAAAB/f38ACgAAACIAAAAYAAAAAAAAAAAAAAAAAAAAAAAAAAAAAAAAAAAAJAAAACQAAAAAAAAABwAAAAAAAAAAAAAAAAAAAAAAAAAAAAAAAAAAAH9/fwAlAAAAWAAAAAAAAAAAAAAAAAAAAAAAAAAAAAAAAAAAAAAAAAAAAAAAAAAAAAAAAAAAAAAAPwAAAAAAAACghgEAAAAAAAAAAAAAAAAADAAAAAEAAAAAAAAAAAAAAAAAAAAfAAAAVAAAAFub1QX///8BAAAAAAAAAAAAAAAAAAAAAAAAAAAAAAAAAAAAAAAAAAAAAAACf39/AOfm5gPMzMwAwMD/AH9/fwAAAAAAAAAAAAAAAAD///8AAAAAACEAAAAYAAAAFAAAABAQAABpBQAAZz8AAPcqAAAQAAAAJgAAAAgAAAABgQAAfwAAAA=="/>
               </a:ext>
             </a:extLst>
           </p:cNvPicPr>
@@ -5425,7 +5749,7 @@
             <a:spLocks noGrp="1" noChangeArrowheads="1"/>
             <a:extLst>
               <a:ext uri="smNativeData">
-                <pr:smNativeData xmlns:pr="smNativeData" xmlns="smNativeData" val="SMDATA_15_FLquaRMAAAAlAAAAZAAAAA0AAAAAkAAAAEgAAACQAAAASAAAAAAAAAABAAAAAAAAAAEAAABQAAAAAAAAAAAA4D8AAAAAAADgPwAAAAAAAOA/AAAAAAAA4D8AAAAAAADgPwAAAAAAAOA/AAAAAAAA4D8AAAAAAADgPwAAAAAAAOA/AAAAAAAA4D8CAAAAjAAAAAAAAAAAAAAAW5vVDP///wgAAAAAAAAAAAAAAAAAAAAAAAAAAAAAAAAAAAAAZAAAAAEAAABAAAAAAAAAAAAAAAAAAAAAAAAAAAAAAAAAAAAAAAAAAAAAAAAAAAAAAAAAAAAAAAAAAAAAAAAAAAAAAAAAAAAAAAAAAAAAAAAAAAAAAAAAAAAAAAAAAAAAFAAAADwAAAAAAAAAAAAAAAAAAAkUAAAAAQAAABQAAAAUAAAAFAAAAAEAAAAAAAAAZAAAAGQAAAAAAAAAZAAAAGQAAAAVAAAAYAAAAAAAAAAAAAAADwAAACADAAAAAAAAAAAAAAEAAACgMgAAVgcAAKr4//8BAAAAf39/AAEAAABkAAAAAAAAABQAAABAHwAAAAAAACYAAAAAAAAAwOD//wAAAAAmAAAAZAAAABYAAABMAAAAAAAAAAAAAAAEAAAAAAAAAAEAAADn5uYKAAAAACgAAAAoAAAAZAAAAGQAAAAAAAAAzMzMAAAAAABQAAAAUAAAAGQAAABkAAAAAAAAABcAAAAUAAAAAAAAAAAAAAD/fwAA/38AAAAAAAAJAAAABAAAAF8AYAAeAAAAaAAAAAAAAAAAAAAAAAAAAAAAAAAAAAAAECcAABAnAAAAAAAAAAAAAAAAAAAAAAAAAAAAAAAAAAAAAAAAAAAAABQAAAAAAAAAwMD/AAAAAABkAAAAMgAAAAAAAABkAAAAAAAAAH9/fwAKAAAAIgAAABgAAAAAAAAAAAAAAAAAAAAAAAAAAAAAAAAAAAAkAAAAJAAAAAAAAAAHAAAAAAAAAAAAAAAAAAAAAAAAAAAAAAAAAAAAf39/ACUAAABYAAAAAAAAAAAAAAAAAAAAAAAAAAAAAAAAAAAAAAAAAAAAAAAAAAAAAAAAAAAAAAA/AAAAAAAAAKCGAQAAAAAAAAAAAAAAAAAMAAAAAQAAAAAAAAAAAAAAAAAAAB8AAABUAAAAW5vVBf///wEAAAAAAAAAAAAAAAAAAAAAAAAAAAAAAAAAAAAAAAAAAAAAAAJ/f38A5+bmA8zMzADAwP8Af39/AAAAAAAAAAAAAAAAAAAAAAAAAAAAIQAAABgAAAAUAAAAKAUAAD8CAADYRQAAZwoAABAAAAAmAAAACAAAAAAAAAAAAAAA"/>
+                <pr:smNativeData xmlns="smNativeData" xmlns:pr="smNativeData" xmlns:p15="http://schemas.microsoft.com/office/powerpoint/2012/main" xmlns:p14="http://schemas.microsoft.com/office/powerpoint/2010/main" xmlns:mc="http://schemas.openxmlformats.org/markup-compatibility/2006" val="SMDATA_15_FLquaRMAAAAlAAAAZAAAAA0AAAAAkAAAAEgAAACQAAAASAAAAAAAAAABAAAAAAAAAAEAAABQAAAAAAAAAAAA4D8AAAAAAADgPwAAAAAAAOA/AAAAAAAA4D8AAAAAAADgPwAAAAAAAOA/AAAAAAAA4D8AAAAAAADgPwAAAAAAAOA/AAAAAAAA4D8CAAAAjAAAAAAAAAAAAAAAW5vVDP///wgAAAAAAAAAAAAAAAAAAAAAAAAAAAAAAAAAAAAAZAAAAAEAAABAAAAAAAAAAAAAAAAAAAAAAAAAAAAAAAAAAAAAAAAAAAAAAAAAAAAAAAAAAAAAAAAAAAAAAAAAAAAAAAAAAAAAAAAAAAAAAAAAAAAAAAAAAAAAAAAAAAAAFAAAADwAAAAAAAAAAAAAAAAAAAkUAAAAAQAAABQAAAAUAAAAFAAAAAEAAAAAAAAAZAAAAGQAAAAAAAAAZAAAAGQAAAAVAAAAYAAAAAAAAAAAAAAADwAAACADAAAAAAAAAAAAAAEAAACgMgAAVgcAAKr4//8BAAAAf39/AAEAAABkAAAAAAAAABQAAABAHwAAAAAAACYAAAAAAAAAwOD//wAAAAAmAAAAZAAAABYAAABMAAAAAAAAAAAAAAAEAAAAAAAAAAEAAADn5uYKAAAAACgAAAAoAAAAZAAAAGQAAAAAAAAAzMzMAAAAAABQAAAAUAAAAGQAAABkAAAAAAAAABcAAAAUAAAAAAAAAAAAAAD/fwAA/38AAAAAAAAJAAAABAAAAF8AYAAeAAAAaAAAAAAAAAAAAAAAAAAAAAAAAAAAAAAAECcAABAnAAAAAAAAAAAAAAAAAAAAAAAAAAAAAAAAAAAAAAAAAAAAABQAAAAAAAAAwMD/AAAAAABkAAAAMgAAAAAAAABkAAAAAAAAAH9/fwAKAAAAIgAAABgAAAAAAAAAAAAAAAAAAAAAAAAAAAAAAAAAAAAkAAAAJAAAAAAAAAAHAAAAAAAAAAAAAAAAAAAAAAAAAAAAAAAAAAAAf39/ACUAAABYAAAAAAAAAAAAAAAAAAAAAAAAAAAAAAAAAAAAAAAAAAAAAAAAAAAAAAAAAAAAAAA/AAAAAAAAAKCGAQAAAAAAAAAAAAAAAAAMAAAAAQAAAAAAAAAAAAAAAAAAAB8AAABUAAAAW5vVBf///wEAAAAAAAAAAAAAAAAAAAAAAAAAAAAAAAAAAAAAAAAAAAAAAAJ/f38A5+bmA8zMzADAwP8Af39/AAAAAAAAAAAAAAAAAAAAAAAAAAAAIQAAABgAAAAUAAAAKAUAAD8CAADYRQAAZwoAABAAAAAmAAAACAAAAAAAAAAAAAAA"/>
               </a:ext>
             </a:extLst>
           </p:cNvSpPr>
@@ -5439,7 +5763,7 @@
           <a:lstStyle/>
           <a:p>
             <a:pPr>
-              <a:defRPr lang="en-us"/>
+              <a:defRPr lang="en-US"/>
             </a:pPr>
             <a:r>
               <a:t>Connector pins</a:t>
@@ -5463,7 +5787,7 @@
 </file>
 
 <file path=ppt/slides/slide6.xml><?xml version="1.0" encoding="utf-8"?>
-<p:sld xmlns:p="http://schemas.openxmlformats.org/presentationml/2006/main" xmlns:mc="http://schemas.openxmlformats.org/markup-compatibility/2006" xmlns:p14="http://schemas.microsoft.com/office/powerpoint/2010/main" xmlns:p15="http://schemas.microsoft.com/office/powerpoint/2012/main" xmlns:r="http://schemas.openxmlformats.org/officeDocument/2006/relationships" xmlns:a="http://schemas.openxmlformats.org/drawingml/2006/main" mc:Ignorable="p14">
+<p:sld xmlns:a="http://schemas.openxmlformats.org/drawingml/2006/main" xmlns:r="http://schemas.openxmlformats.org/officeDocument/2006/relationships" xmlns:p="http://schemas.openxmlformats.org/presentationml/2006/main">
   <p:cSld>
     <p:spTree>
       <p:nvGrpSpPr>
@@ -5486,7 +5810,7 @@
             <a:spLocks noGrp="1" noChangeArrowheads="1"/>
             <a:extLst>
               <a:ext uri="smNativeData">
-                <pr:smNativeData xmlns:pr="smNativeData" xmlns="smNativeData" val="SMDATA_15_FLquaRMAAAAlAAAAZAAAAA0AAAAAkAAAAEgAAACQAAAASAAAAAAAAAABAAAAAAAAAAEAAABQAAAAAAAAAAAA4D8AAAAAAADgPwAAAAAAAOA/AAAAAAAA4D8AAAAAAADgPwAAAAAAAOA/AAAAAAAA4D8AAAAAAADgPwAAAAAAAOA/AAAAAAAA4D8CAAAAjAAAAAAAAAAAAAAAW5vVDP///wgAAAAAAAAAAAAAAAAAAAAAAAAAAAAAAAAAAAAAZAAAAAEAAABAAAAAAAAAAAAAAAAAAAAAAAAAAAAAAAAAAAAAAAAAAAAAAAAAAAAAAAAAAAAAAAAAAAAAAAAAAAAAAAAAAAAAAAAAAAAAAAAAAAAAAAAAAAAAAAAAAAAAFAAAADwAAAAAAAAAAAAAAAAAAAkUAAAAAQAAABQAAAAUAAAAFAAAAAEAAAAAAAAAZAAAAGQAAAAAAAAAZAAAAGQAAAAVAAAAYAAAAAAAAAAAAAAADwAAACADAAAAAAAAAAAAAAEAAACgMgAAVgcAAKr4//8BAAAAf39/AAEAAABkAAAAAAAAABQAAABAHwAAAAAAACYAAAAAAAAAwOD//wAAAAAmAAAAZAAAABYAAABMAAAAAAAAAAAAAAAEAAAAAAAAAAEAAADn5uYKAAAAACgAAAAoAAAAZAAAAGQAAAAAAAAAzMzMAAAAAABQAAAAUAAAAGQAAABkAAAAAAAAABcAAAAUAAAAAAAAAAAAAAD/fwAA/38AAAAAAAAJAAAABAAAAF8AYAAeAAAAaAAAAAAAAAAAAAAAAAAAAAAAAAAAAAAAECcAABAnAAAAAAAAAAAAAAAAAAAAAAAAAAAAAAAAAAAAAAAAAAAAABQAAAAAAAAAwMD/AAAAAABkAAAAMgAAAAAAAABkAAAAAAAAAH9/fwAKAAAAIgAAABgAAAAAAAAAAAAAAAAAAAAAAAAAAAAAAAAAAAAkAAAAJAAAAAAAAAAHAAAAAAAAAAAAAAAAAAAAAAAAAAAAAAAAAAAAf39/ACUAAABYAAAAAAAAAAAAAAAAAAAAAAAAAAAAAAAAAAAAAAAAAAAAAAAAAAAAAAAAAAAAAAA/AAAAAAAAAKCGAQAAAAAAAAAAAAAAAAAMAAAAAQAAAAAAAAAAAAAAAAAAAB8AAABUAAAAW5vVBf///wEAAAAAAAAAAAAAAAAAAAAAAAAAAAAAAAAAAAAAAAAAAAAAAAJ/f38A5+bmA8zMzADAwP8Af39/AAAAAAAAAAAAAAAAAAAAAAAAAAAAIQAAABgAAAAUAAAAKAUAAD8CAADYRQAAZwoAABAAAAAmAAAACAAAAAAAAAAAAAAA"/>
+                <pr:smNativeData xmlns="smNativeData" xmlns:pr="smNativeData" xmlns:p15="http://schemas.microsoft.com/office/powerpoint/2012/main" xmlns:p14="http://schemas.microsoft.com/office/powerpoint/2010/main" xmlns:mc="http://schemas.openxmlformats.org/markup-compatibility/2006" val="SMDATA_15_FLquaRMAAAAlAAAAZAAAAA0AAAAAkAAAAEgAAACQAAAASAAAAAAAAAABAAAAAAAAAAEAAABQAAAAAAAAAAAA4D8AAAAAAADgPwAAAAAAAOA/AAAAAAAA4D8AAAAAAADgPwAAAAAAAOA/AAAAAAAA4D8AAAAAAADgPwAAAAAAAOA/AAAAAAAA4D8CAAAAjAAAAAAAAAAAAAAAW5vVDP///wgAAAAAAAAAAAAAAAAAAAAAAAAAAAAAAAAAAAAAZAAAAAEAAABAAAAAAAAAAAAAAAAAAAAAAAAAAAAAAAAAAAAAAAAAAAAAAAAAAAAAAAAAAAAAAAAAAAAAAAAAAAAAAAAAAAAAAAAAAAAAAAAAAAAAAAAAAAAAAAAAAAAAFAAAADwAAAAAAAAAAAAAAAAAAAkUAAAAAQAAABQAAAAUAAAAFAAAAAEAAAAAAAAAZAAAAGQAAAAAAAAAZAAAAGQAAAAVAAAAYAAAAAAAAAAAAAAADwAAACADAAAAAAAAAAAAAAEAAACgMgAAVgcAAKr4//8BAAAAf39/AAEAAABkAAAAAAAAABQAAABAHwAAAAAAACYAAAAAAAAAwOD//wAAAAAmAAAAZAAAABYAAABMAAAAAAAAAAAAAAAEAAAAAAAAAAEAAADn5uYKAAAAACgAAAAoAAAAZAAAAGQAAAAAAAAAzMzMAAAAAABQAAAAUAAAAGQAAABkAAAAAAAAABcAAAAUAAAAAAAAAAAAAAD/fwAA/38AAAAAAAAJAAAABAAAAF8AYAAeAAAAaAAAAAAAAAAAAAAAAAAAAAAAAAAAAAAAECcAABAnAAAAAAAAAAAAAAAAAAAAAAAAAAAAAAAAAAAAAAAAAAAAABQAAAAAAAAAwMD/AAAAAABkAAAAMgAAAAAAAABkAAAAAAAAAH9/fwAKAAAAIgAAABgAAAAAAAAAAAAAAAAAAAAAAAAAAAAAAAAAAAAkAAAAJAAAAAAAAAAHAAAAAAAAAAAAAAAAAAAAAAAAAAAAAAAAAAAAf39/ACUAAABYAAAAAAAAAAAAAAAAAAAAAAAAAAAAAAAAAAAAAAAAAAAAAAAAAAAAAAAAAAAAAAA/AAAAAAAAAKCGAQAAAAAAAAAAAAAAAAAMAAAAAQAAAAAAAAAAAAAAAAAAAB8AAABUAAAAW5vVBf///wEAAAAAAAAAAAAAAAAAAAAAAAAAAAAAAAAAAAAAAAAAAAAAAAJ/f38A5+bmA8zMzADAwP8Af39/AAAAAAAAAAAAAAAAAAAAAAAAAAAAIQAAABgAAAAUAAAAKAUAAD8CAADYRQAAZwoAABAAAAAmAAAACAAAAAAAAAAAAAAA"/>
               </a:ext>
             </a:extLst>
           </p:cNvSpPr>
@@ -5500,7 +5824,7 @@
           <a:lstStyle/>
           <a:p>
             <a:pPr>
-              <a:defRPr lang="en-us"/>
+              <a:defRPr lang="en-US"/>
             </a:pPr>
             <a:r>
               <a:t>Connecting to BeagleBone terminal</a:t>
@@ -5515,7 +5839,7 @@
             <a:spLocks noGrp="1" noChangeArrowheads="1"/>
             <a:extLst>
               <a:ext uri="smNativeData">
-                <pr:smNativeData xmlns:pr="smNativeData" xmlns="smNativeData" val="SMDATA_15_FLquaRMAAAAlAAAAZAAAAA0AAAAAkAAAAEgAAACQAAAASAAAAAAAAAAAAAAAAAAAAAEAAABQAAAAAAAAAAAA4D8AAAAAAADgPwAAAAAAAOA/AAAAAAAA4D8AAAAAAADgPwAAAAAAAOA/AAAAAAAA4D8AAAAAAADgPwAAAAAAAOA/AAAAAAAA4D8CAAAAjAAAAAAAAAAAAAAAW5vVDP///wgAAAAAAAAAAAAAAAAAAAAAAAAAAAAAAAAAAAAAZAAAAAEAAABAAAAAAAAAAAAAAAAAAAAAAAAAAAAAAAAAAAAAAAAAAAAAAAAAAAAAAAAAAAAAAAAAAAAAAAAAAAAAAAAAAAAAAAAAAAAAAAAAAAAAAAAAAAAAAAAAAAAAFAAAADwAAAAAAAAAAAAAAAAAAAkUAAAAAQAAABQAAAAUAAAAFAAAAAEAAAAAAAAAZAAAAGQAAAAAAAAAZAAAAGQAAAAVAAAAYAAAAAAAAAAAAAAADwAAACADAAAAAAAAAAAAAAEAAACgMgAAVgcAAKr4//8BAAAAf39/AAEAAABkAAAAAAAAABQAAABAHwAAAAAAACYAAAAAAAAAwOD//wAAAAAmAAAAZAAAABYAAABMAAAAAAAAAAAAAAAEAAAAAAAAAAEAAADn5uYKAAAAACgAAAAoAAAAZAAAAGQAAAAAAAAAzMzMAAAAAABQAAAAUAAAAGQAAABkAAAAAAAAABcAAAAUAAAAAAAAAAAAAAD/fwAA/38AAAAAAAAJAAAABAAAAF8AYAAeAAAAaAAAAAAAAAAAAAAAAAAAAAAAAAAAAAAAECcAABAnAAAAAAAAAAAAAAAAAAAAAAAAAAAAAAAAAAAAAAAAAAAAABQAAAAAAAAAwMD/AAAAAABkAAAAMgAAAAAAAABkAAAAAAAAAH9/fwAKAAAAIgAAABgAAAAAAAAAAAAAAAAAAAAAAAAAAAAAAAAAAAAkAAAAJAAAAAAAAAAHAAAAAAAAAAAAAAAAAAAAAAAAAAAAAAAAAAAAf39/ACUAAABYAAAAAAAAAAAAAAAAAAAAAAAAAAAAAAAAAAAAAAAAAAAAAAAAAAAAAAAAAAAAAAA/AAAAAAAAAKCGAQAAAAAAAAAAAAAAAAAMAAAAAQAAAAAAAAAAAAAAAAAAAB8AAABUAAAAW5vVBf///wEAAAAAAAAAAAAAAAAAAAAAAAAAAAAAAAAAAAAAAAAAAAAAAAJ/f38A5+bmA8zMzADAwP8Af39/AAAAAAAAAAAAAAAAAAAAAAAAAAAAIQAAABgAAAAUAAAAKAUAADsLAADYRQAAACYAABAAAAAmAAAACAAAAAAAAAAAAAAA"/>
+                <pr:smNativeData xmlns="smNativeData" xmlns:pr="smNativeData" xmlns:p15="http://schemas.microsoft.com/office/powerpoint/2012/main" xmlns:p14="http://schemas.microsoft.com/office/powerpoint/2010/main" xmlns:mc="http://schemas.openxmlformats.org/markup-compatibility/2006" val="SMDATA_15_FLquaRMAAAAlAAAAZAAAAA0AAAAAkAAAAEgAAACQAAAASAAAAAAAAAAAAAAAAAAAAAEAAABQAAAAAAAAAAAA4D8AAAAAAADgPwAAAAAAAOA/AAAAAAAA4D8AAAAAAADgPwAAAAAAAOA/AAAAAAAA4D8AAAAAAADgPwAAAAAAAOA/AAAAAAAA4D8CAAAAjAAAAAAAAAAAAAAAW5vVDP///wgAAAAAAAAAAAAAAAAAAAAAAAAAAAAAAAAAAAAAZAAAAAEAAABAAAAAAAAAAAAAAAAAAAAAAAAAAAAAAAAAAAAAAAAAAAAAAAAAAAAAAAAAAAAAAAAAAAAAAAAAAAAAAAAAAAAAAAAAAAAAAAAAAAAAAAAAAAAAAAAAAAAAFAAAADwAAAAAAAAAAAAAAAAAAAkUAAAAAQAAABQAAAAUAAAAFAAAAAEAAAAAAAAAZAAAAGQAAAAAAAAAZAAAAGQAAAAVAAAAYAAAAAAAAAAAAAAADwAAACADAAAAAAAAAAAAAAEAAACgMgAAVgcAAKr4//8BAAAAf39/AAEAAABkAAAAAAAAABQAAABAHwAAAAAAACYAAAAAAAAAwOD//wAAAAAmAAAAZAAAABYAAABMAAAAAAAAAAAAAAAEAAAAAAAAAAEAAADn5uYKAAAAACgAAAAoAAAAZAAAAGQAAAAAAAAAzMzMAAAAAABQAAAAUAAAAGQAAABkAAAAAAAAABcAAAAUAAAAAAAAAAAAAAD/fwAA/38AAAAAAAAJAAAABAAAAF8AYAAeAAAAaAAAAAAAAAAAAAAAAAAAAAAAAAAAAAAAECcAABAnAAAAAAAAAAAAAAAAAAAAAAAAAAAAAAAAAAAAAAAAAAAAABQAAAAAAAAAwMD/AAAAAABkAAAAMgAAAAAAAABkAAAAAAAAAH9/fwAKAAAAIgAAABgAAAAAAAAAAAAAAAAAAAAAAAAAAAAAAAAAAAAkAAAAJAAAAAAAAAAHAAAAAAAAAAAAAAAAAAAAAAAAAAAAAAAAAAAAf39/ACUAAABYAAAAAAAAAAAAAAAAAAAAAAAAAAAAAAAAAAAAAAAAAAAAAAAAAAAAAAAAAAAAAAA/AAAAAAAAAKCGAQAAAAAAAAAAAAAAAAAMAAAAAQAAAAAAAAAAAAAAAAAAAB8AAABUAAAAW5vVBf///wEAAAAAAAAAAAAAAAAAAAAAAAAAAAAAAAAAAAAAAAAAAAAAAAJ/f38A5+bmA8zMzADAwP8Af39/AAAAAAAAAAAAAAAAAAAAAAAAAAAAIQAAABgAAAAUAAAAKAUAADsLAADYRQAAACYAABAAAAAmAAAACAAAAAAAAAAAAAAA"/>
               </a:ext>
             </a:extLst>
           </p:cNvSpPr>
@@ -5529,7 +5853,7 @@
           <a:lstStyle/>
           <a:p>
             <a:pPr>
-              <a:defRPr lang="en-us"/>
+              <a:defRPr lang="en-US"/>
             </a:pPr>
             <a:r>
               <a:t>Connect to the BeagleBone’s WiFi service</a:t>
@@ -5537,7 +5861,7 @@
           </a:p>
           <a:p>
             <a:pPr lvl="1">
-              <a:defRPr lang="en-us"/>
+              <a:defRPr lang="en-US"/>
             </a:pPr>
             <a:r>
               <a:t>Password: BeagleBone</a:t>
@@ -5545,7 +5869,7 @@
           </a:p>
           <a:p>
             <a:pPr lvl="1">
-              <a:defRPr lang="en-us"/>
+              <a:defRPr lang="en-US"/>
             </a:pPr>
             <a:r>
               <a:t>SSH into 192.168.8.1</a:t>
@@ -5553,7 +5877,7 @@
           </a:p>
           <a:p>
             <a:pPr lvl="2">
-              <a:defRPr lang="en-us"/>
+              <a:defRPr lang="en-US"/>
             </a:pPr>
             <a:r>
               <a:t>ssh debian@192.168.8.1  pass blick77  (or use Putty)</a:t>
@@ -5561,7 +5885,7 @@
           </a:p>
           <a:p>
             <a:pPr lvl="2">
-              <a:defRPr lang="en-us"/>
+              <a:defRPr lang="en-US"/>
             </a:pPr>
             <a:r>
               <a:t>If connecting thru serial cable it’s 192.168.7.2</a:t>
@@ -5569,7 +5893,7 @@
           </a:p>
           <a:p>
             <a:pPr lvl="2">
-              <a:defRPr lang="en-us"/>
+              <a:defRPr lang="en-US"/>
             </a:pPr>
             <a:r>
               <a:t>If connecting from Linux/Mac it’s 192.168.6.2</a:t>
@@ -5577,7 +5901,7 @@
           </a:p>
           <a:p>
             <a:pPr lvl="1">
-              <a:defRPr lang="en-us"/>
+              <a:defRPr lang="en-US"/>
             </a:pPr>
             <a:r>
               <a:t>If in browser, can also go to 192.168.8.1 to bring up UI terminal thru HTTP</a:t>
@@ -5585,7 +5909,7 @@
           </a:p>
           <a:p>
             <a:pPr>
-              <a:defRPr lang="en-us"/>
+              <a:defRPr lang="en-US"/>
             </a:pPr>
             <a:r>
               <a:t>If you connect to two different BeagleBones it gives ‘Remote Host Identification has changed’ error. To fix:</a:t>
@@ -5593,7 +5917,7 @@
           </a:p>
           <a:p>
             <a:pPr lvl="1">
-              <a:defRPr lang="en-us"/>
+              <a:defRPr lang="en-US"/>
             </a:pPr>
             <a:r>
               <a:t>ssh-keygen -R 192.168.8.1</a:t>
@@ -5601,8 +5925,9 @@
           </a:p>
           <a:p>
             <a:pPr>
-              <a:defRPr lang="en-us"/>
-            </a:pPr>
+              <a:defRPr lang="en-US"/>
+            </a:pPr>
+            <a:endParaRPr/>
           </a:p>
         </p:txBody>
       </p:sp>
@@ -5622,7 +5947,7 @@
 </file>
 
 <file path=ppt/slides/slide7.xml><?xml version="1.0" encoding="utf-8"?>
-<p:sld xmlns:p="http://schemas.openxmlformats.org/presentationml/2006/main" xmlns:mc="http://schemas.openxmlformats.org/markup-compatibility/2006" xmlns:p14="http://schemas.microsoft.com/office/powerpoint/2010/main" xmlns:p15="http://schemas.microsoft.com/office/powerpoint/2012/main" xmlns:r="http://schemas.openxmlformats.org/officeDocument/2006/relationships" xmlns:a="http://schemas.openxmlformats.org/drawingml/2006/main" mc:Ignorable="p14">
+<p:sld xmlns:a="http://schemas.openxmlformats.org/drawingml/2006/main" xmlns:r="http://schemas.openxmlformats.org/officeDocument/2006/relationships" xmlns:p="http://schemas.openxmlformats.org/presentationml/2006/main">
   <p:cSld>
     <p:spTree>
       <p:nvGrpSpPr>
@@ -5645,7 +5970,7 @@
             <a:spLocks noGrp="1" noChangeArrowheads="1"/>
             <a:extLst>
               <a:ext uri="smNativeData">
-                <pr:smNativeData xmlns:pr="smNativeData" xmlns="smNativeData" val="SMDATA_15_FLquaRMAAAAlAAAAZAAAAA0AAAAAkAAAAEgAAACQAAAASAAAAAAAAAABAAAAAAAAAAEAAABQAAAAAAAAAAAA4D8AAAAAAADgPwAAAAAAAOA/AAAAAAAA4D8AAAAAAADgPwAAAAAAAOA/AAAAAAAA4D8AAAAAAADgPwAAAAAAAOA/AAAAAAAA4D8CAAAAjAAAAAAAAAAAAAAAW5vVDP///wgAAAAAAAAAAAAAAAAAAAAAAAAAAAAAAAAAAAAAZAAAAAEAAABAAAAAAAAAAAAAAAAAAAAAAAAAAAAAAAAAAAAAAAAAAAAAAAAAAAAAAAAAAAAAAAAAAAAAAAAAAAAAAAAAAAAAAAAAAAAAAAAAAAAAAAAAAAAAAAAAAAAAFAAAADwAAAAAAAAAAAAAAAAAAAkUAAAAAQAAABQAAAAUAAAAFAAAAAEAAAAAAAAAZAAAAGQAAAAAAAAAZAAAAGQAAAAVAAAAYAAAAAAAAAAAAAAADwAAACADAAAAAAAAAAAAAAEAAACgMgAAVgcAAKr4//8BAAAAf39/AAEAAABkAAAAAAAAABQAAABAHwAAAAAAACYAAAAAAAAAwOD//wAAAAAmAAAAZAAAABYAAABMAAAAAAAAAAAAAAAEAAAAAAAAAAEAAADn5uYKAAAAACgAAAAoAAAAZAAAAGQAAAAAAAAAzMzMAAAAAABQAAAAUAAAAGQAAABkAAAAAAAAABcAAAAUAAAAAAAAAAAAAAD/fwAA/38AAAAAAAAJAAAABAAAAF8AYAAeAAAAaAAAAAAAAAAAAAAAAAAAAAAAAAAAAAAAECcAABAnAAAAAAAAAAAAAAAAAAAAAAAAAAAAAAAAAAAAAAAAAAAAABQAAAAAAAAAwMD/AAAAAABkAAAAMgAAAAAAAABkAAAAAAAAAH9/fwAKAAAAIgAAABgAAAAAAAAAAAAAAAAAAAAAAAAAAAAAAAAAAAAkAAAAJAAAAAAAAAAHAAAAAAAAAAAAAAAAAAAAAAAAAAAAAAAAAAAAf39/ACUAAABYAAAAAAAAAAAAAAAAAAAAAAAAAAAAAAAAAAAAAAAAAAAAAAAAAAAAAAAAAAAAAAA/AAAAAAAAAKCGAQAAAAAAAAAAAAAAAAAMAAAAAQAAAAAAAAAAAAAAAAAAAB8AAABUAAAAW5vVBf///wEAAAAAAAAAAAAAAAAAAAAAAAAAAAAAAAAAAAAAAAAAAAAAAAJ/f38A5+bmA8zMzADAwP8Af39/AAAAAAAAAAAAAAAAAAAAAAAAAAAAIQAAABgAAAAUAAAAKAUAAD8CAADYRQAAZwoAABAAAAAmAAAACAAAAAAAAAAAAAAA"/>
+                <pr:smNativeData xmlns="smNativeData" xmlns:pr="smNativeData" xmlns:p15="http://schemas.microsoft.com/office/powerpoint/2012/main" xmlns:p14="http://schemas.microsoft.com/office/powerpoint/2010/main" xmlns:mc="http://schemas.openxmlformats.org/markup-compatibility/2006" val="SMDATA_15_FLquaRMAAAAlAAAAZAAAAA0AAAAAkAAAAEgAAACQAAAASAAAAAAAAAABAAAAAAAAAAEAAABQAAAAAAAAAAAA4D8AAAAAAADgPwAAAAAAAOA/AAAAAAAA4D8AAAAAAADgPwAAAAAAAOA/AAAAAAAA4D8AAAAAAADgPwAAAAAAAOA/AAAAAAAA4D8CAAAAjAAAAAAAAAAAAAAAW5vVDP///wgAAAAAAAAAAAAAAAAAAAAAAAAAAAAAAAAAAAAAZAAAAAEAAABAAAAAAAAAAAAAAAAAAAAAAAAAAAAAAAAAAAAAAAAAAAAAAAAAAAAAAAAAAAAAAAAAAAAAAAAAAAAAAAAAAAAAAAAAAAAAAAAAAAAAAAAAAAAAAAAAAAAAFAAAADwAAAAAAAAAAAAAAAAAAAkUAAAAAQAAABQAAAAUAAAAFAAAAAEAAAAAAAAAZAAAAGQAAAAAAAAAZAAAAGQAAAAVAAAAYAAAAAAAAAAAAAAADwAAACADAAAAAAAAAAAAAAEAAACgMgAAVgcAAKr4//8BAAAAf39/AAEAAABkAAAAAAAAABQAAABAHwAAAAAAACYAAAAAAAAAwOD//wAAAAAmAAAAZAAAABYAAABMAAAAAAAAAAAAAAAEAAAAAAAAAAEAAADn5uYKAAAAACgAAAAoAAAAZAAAAGQAAAAAAAAAzMzMAAAAAABQAAAAUAAAAGQAAABkAAAAAAAAABcAAAAUAAAAAAAAAAAAAAD/fwAA/38AAAAAAAAJAAAABAAAAF8AYAAeAAAAaAAAAAAAAAAAAAAAAAAAAAAAAAAAAAAAECcAABAnAAAAAAAAAAAAAAAAAAAAAAAAAAAAAAAAAAAAAAAAAAAAABQAAAAAAAAAwMD/AAAAAABkAAAAMgAAAAAAAABkAAAAAAAAAH9/fwAKAAAAIgAAABgAAAAAAAAAAAAAAAAAAAAAAAAAAAAAAAAAAAAkAAAAJAAAAAAAAAAHAAAAAAAAAAAAAAAAAAAAAAAAAAAAAAAAAAAAf39/ACUAAABYAAAAAAAAAAAAAAAAAAAAAAAAAAAAAAAAAAAAAAAAAAAAAAAAAAAAAAAAAAAAAAA/AAAAAAAAAKCGAQAAAAAAAAAAAAAAAAAMAAAAAQAAAAAAAAAAAAAAAAAAAB8AAABUAAAAW5vVBf///wEAAAAAAAAAAAAAAAAAAAAAAAAAAAAAAAAAAAAAAAAAAAAAAAJ/f38A5+bmA8zMzADAwP8Af39/AAAAAAAAAAAAAAAAAAAAAAAAAAAAIQAAABgAAAAUAAAAKAUAAD8CAADYRQAAZwoAABAAAAAmAAAACAAAAAAAAAAAAAAA"/>
               </a:ext>
             </a:extLst>
           </p:cNvSpPr>
@@ -5659,7 +5984,7 @@
           <a:lstStyle/>
           <a:p>
             <a:pPr algn="ctr">
-              <a:defRPr lang="en-us"/>
+              <a:defRPr lang="en-US"/>
             </a:pPr>
             <a:r>
               <a:t>Connecting</a:t>
@@ -5674,7 +5999,7 @@
             <a:spLocks noGrp="1" noChangeArrowheads="1"/>
             <a:extLst>
               <a:ext uri="smNativeData">
-                <pr:smNativeData xmlns:pr="smNativeData" xmlns="smNativeData" val="SMDATA_15_FLquaRMAAAAlAAAAZAAAAA0AAAAAkAAAAEgAAACQAAAASAAAAAAAAAAAAAAAAAAAAAEAAABQAAAAAAAAAAAA4D8AAAAAAADgPwAAAAAAAOA/AAAAAAAA4D8AAAAAAADgPwAAAAAAAOA/AAAAAAAA4D8AAAAAAADgPwAAAAAAAOA/AAAAAAAA4D8CAAAAjAAAAAAAAAAAAAAAW5vVDP///wgAAAAAAAAAAAAAAAAAAAAAAAAAAAAAAAAAAAAAZAAAAAEAAABAAAAAAAAAAAAAAAAAAAAAAAAAAAAAAAAAAAAAAAAAAAAAAAAAAAAAAAAAAAAAAAAAAAAAAAAAAAAAAAAAAAAAAAAAAAAAAAAAAAAAAAAAAAAAAAAAAAAAFAAAADwAAAAAAAAAAAAAAAAAAAkUAAAAAQAAABQAAAAUAAAAFAAAAAEAAAAAAAAAZAAAAGQAAAAAAAAAZAAAAGQAAAAVAAAAYAAAAAAAAAAAAAAADwAAACADAAAAAAAAAAAAAAEAAACgMgAAVgcAAKr4//8BAAAAf39/AAEAAABkAAAAAAAAABQAAABAHwAAAAAAACYAAAAAAAAAwOD//wAAAAAmAAAAZAAAABYAAABMAAAAAAAAAAAAAAAEAAAAAAAAAAEAAADn5uYKAAAAACgAAAAoAAAAZAAAAGQAAAAAAAAAzMzMAAAAAABQAAAAUAAAAGQAAABkAAAAAAAAABcAAAAUAAAAAAAAAAAAAAD/fwAA/38AAAAAAAAJAAAABAAAAF8AYAAeAAAAaAAAAAAAAAAAAAAAAAAAAAAAAAAAAAAAECcAABAnAAAAAAAAAAAAAAAAAAAAAAAAAAAAAAAAAAAAAAAAAAAAABQAAAAAAAAAwMD/AAAAAABkAAAAMgAAAAAAAABkAAAAAAAAAH9/fwAKAAAAIgAAABgAAAAAAAAAAAAAAAAAAAAAAAAAAAAAAAAAAAAkAAAAJAAAAAAAAAAHAAAAAAAAAAAAAAAAAAAAAAAAAAAAAAAAAAAAf39/ACUAAABYAAAAAAAAAAAAAAAAAAAAAAAAAAAAAAAAAAAAAAAAAAAAAAAAAAAAAAAAAAAAAAA/AAAAAAAAAKCGAQAAAAAAAAAAAAAAAAAMAAAAAQAAAAAAAAAAAAAAAAAAAB8AAABUAAAAW5vVBf///wEAAAAAAAAAAAAAAAAAAAAAAAAAAAAAAAAAAAAAAAAAAAAAAAJ/f38A5+bmA8zMzADAwP8Af39/AAAAAAAAAAAAAAAAAAAAAAAAAAAAIQAAABgAAAAUAAAAKAUAADsLAADYRQAAACYAABAAAAAmAAAACAAAAAAAAAAAAAAA"/>
+                <pr:smNativeData xmlns="smNativeData" xmlns:pr="smNativeData" xmlns:p15="http://schemas.microsoft.com/office/powerpoint/2012/main" xmlns:p14="http://schemas.microsoft.com/office/powerpoint/2010/main" xmlns:mc="http://schemas.openxmlformats.org/markup-compatibility/2006" val="SMDATA_15_FLquaRMAAAAlAAAAZAAAAA0AAAAAkAAAAEgAAACQAAAASAAAAAAAAAAAAAAAAAAAAAEAAABQAAAAAAAAAAAA4D8AAAAAAADgPwAAAAAAAOA/AAAAAAAA4D8AAAAAAADgPwAAAAAAAOA/AAAAAAAA4D8AAAAAAADgPwAAAAAAAOA/AAAAAAAA4D8CAAAAjAAAAAAAAAAAAAAAW5vVDP///wgAAAAAAAAAAAAAAAAAAAAAAAAAAAAAAAAAAAAAZAAAAAEAAABAAAAAAAAAAAAAAAAAAAAAAAAAAAAAAAAAAAAAAAAAAAAAAAAAAAAAAAAAAAAAAAAAAAAAAAAAAAAAAAAAAAAAAAAAAAAAAAAAAAAAAAAAAAAAAAAAAAAAFAAAADwAAAAAAAAAAAAAAAAAAAkUAAAAAQAAABQAAAAUAAAAFAAAAAEAAAAAAAAAZAAAAGQAAAAAAAAAZAAAAGQAAAAVAAAAYAAAAAAAAAAAAAAADwAAACADAAAAAAAAAAAAAAEAAACgMgAAVgcAAKr4//8BAAAAf39/AAEAAABkAAAAAAAAABQAAABAHwAAAAAAACYAAAAAAAAAwOD//wAAAAAmAAAAZAAAABYAAABMAAAAAAAAAAAAAAAEAAAAAAAAAAEAAADn5uYKAAAAACgAAAAoAAAAZAAAAGQAAAAAAAAAzMzMAAAAAABQAAAAUAAAAGQAAABkAAAAAAAAABcAAAAUAAAAAAAAAAAAAAD/fwAA/38AAAAAAAAJAAAABAAAAF8AYAAeAAAAaAAAAAAAAAAAAAAAAAAAAAAAAAAAAAAAECcAABAnAAAAAAAAAAAAAAAAAAAAAAAAAAAAAAAAAAAAAAAAAAAAABQAAAAAAAAAwMD/AAAAAABkAAAAMgAAAAAAAABkAAAAAAAAAH9/fwAKAAAAIgAAABgAAAAAAAAAAAAAAAAAAAAAAAAAAAAAAAAAAAAkAAAAJAAAAAAAAAAHAAAAAAAAAAAAAAAAAAAAAAAAAAAAAAAAAAAAf39/ACUAAABYAAAAAAAAAAAAAAAAAAAAAAAAAAAAAAAAAAAAAAAAAAAAAAAAAAAAAAAAAAAAAAA/AAAAAAAAAKCGAQAAAAAAAAAAAAAAAAAMAAAAAQAAAAAAAAAAAAAAAAAAAB8AAABUAAAAW5vVBf///wEAAAAAAAAAAAAAAAAAAAAAAAAAAAAAAAAAAAAAAAAAAAAAAAJ/f38A5+bmA8zMzADAwP8Af39/AAAAAAAAAAAAAAAAAAAAAAAAAAAAIQAAABgAAAAUAAAAKAUAADsLAADYRQAAACYAABAAAAAmAAAACAAAAAAAAAAAAAAA"/>
               </a:ext>
             </a:extLst>
           </p:cNvSpPr>
@@ -5688,7 +6013,7 @@
           <a:lstStyle/>
           <a:p>
             <a:pPr>
-              <a:defRPr lang="en-us"/>
+              <a:defRPr lang="en-US"/>
             </a:pPr>
             <a:r>
               <a:t> BeagleBone has two Wifi adapters, one is used as WiFi server named something like BeagleBone-CB0B</a:t>
@@ -5696,7 +6021,7 @@
           </a:p>
           <a:p>
             <a:pPr lvl="1">
-              <a:defRPr lang="en-us"/>
+              <a:defRPr lang="en-US"/>
             </a:pPr>
             <a:r>
               <a:t>SSH into 192.168.8.1  username: debian  password: temppwd / blick77</a:t>
@@ -5704,7 +6029,7 @@
           </a:p>
           <a:p>
             <a:pPr lvl="2">
-              <a:defRPr lang="en-us"/>
+              <a:defRPr lang="en-US"/>
             </a:pPr>
             <a:r>
               <a:t>Thru serial cable: 192.168.7.2 (on Mac 192.168.6.2)</a:t>
@@ -5712,7 +6037,7 @@
           </a:p>
           <a:p>
             <a:pPr lvl="2">
-              <a:defRPr lang="en-us"/>
+              <a:defRPr lang="en-US"/>
             </a:pPr>
             <a:r>
               <a:t>You can open AS MANY SSH connections as you want!</a:t>
@@ -5720,7 +6045,7 @@
           </a:p>
           <a:p>
             <a:pPr>
-              <a:defRPr lang="en-us"/>
+              <a:defRPr lang="en-US"/>
             </a:pPr>
             <a:r>
               <a:t>Copy files using SCP: scp 192.168.8.1:/home/debian/etc…</a:t>
@@ -5728,7 +6053,7 @@
           </a:p>
           <a:p>
             <a:pPr lvl="1">
-              <a:defRPr lang="en-us"/>
+              <a:defRPr lang="en-US"/>
             </a:pPr>
             <a:r>
               <a:t>'Remote Host Identification has changed' error - delete old key and try again (caused by multiple BeagleBones with same ID):</a:t>
@@ -5736,28 +6061,23 @@
           </a:p>
           <a:p>
             <a:pPr lvl="2">
-              <a:defRPr lang="en-us"/>
-            </a:pPr>
-            <a:r>
-              <a:rPr lang="en-us" cap="none">
+              <a:defRPr lang="en-US"/>
+            </a:pPr>
+            <a:r>
+              <a:rPr lang="en-US" cap="none">
                 <a:solidFill>
                   <a:srgbClr val="FF0000"/>
                 </a:solidFill>
               </a:rPr>
               <a:t>ssh-keygen -R 192.168.8.1</a:t>
             </a:r>
-            <a:endParaRPr lang="en-us" cap="none">
-              <a:solidFill>
-                <a:srgbClr val="FF0000"/>
-              </a:solidFill>
-            </a:endParaRPr>
-          </a:p>
-          <a:p>
-            <a:pPr>
-              <a:defRPr lang="en-us"/>
-            </a:pPr>
-            <a:r>
-              <a:rPr lang="en-us" cap="none">
+          </a:p>
+          <a:p>
+            <a:pPr>
+              <a:defRPr lang="en-US"/>
+            </a:pPr>
+            <a:r>
+              <a:rPr lang="en-US" cap="none">
                 <a:hlinkClick r:id="rId2"/>
               </a:rPr>
               <a:t>http://192.168.8.1</a:t>
@@ -5768,18 +6088,21 @@
           </a:p>
           <a:p>
             <a:pPr>
-              <a:defRPr lang="en-us"/>
-            </a:pPr>
-          </a:p>
-          <a:p>
-            <a:pPr>
-              <a:defRPr lang="en-us"/>
-            </a:pPr>
+              <a:defRPr lang="en-US"/>
+            </a:pPr>
+            <a:endParaRPr/>
+          </a:p>
+          <a:p>
+            <a:pPr>
+              <a:defRPr lang="en-US"/>
+            </a:pPr>
+            <a:endParaRPr/>
           </a:p>
           <a:p>
             <a:pPr lvl="2">
-              <a:defRPr lang="en-us"/>
-            </a:pPr>
+              <a:defRPr lang="en-US"/>
+            </a:pPr>
+            <a:endParaRPr/>
           </a:p>
         </p:txBody>
       </p:sp>
@@ -5799,7 +6122,7 @@
 </file>
 
 <file path=ppt/slides/slide8.xml><?xml version="1.0" encoding="utf-8"?>
-<p:sld xmlns:p="http://schemas.openxmlformats.org/presentationml/2006/main" xmlns:mc="http://schemas.openxmlformats.org/markup-compatibility/2006" xmlns:p14="http://schemas.microsoft.com/office/powerpoint/2010/main" xmlns:p15="http://schemas.microsoft.com/office/powerpoint/2012/main" xmlns:r="http://schemas.openxmlformats.org/officeDocument/2006/relationships" xmlns:a="http://schemas.openxmlformats.org/drawingml/2006/main" mc:Ignorable="p14">
+<p:sld xmlns:a="http://schemas.openxmlformats.org/drawingml/2006/main" xmlns:r="http://schemas.openxmlformats.org/officeDocument/2006/relationships" xmlns:p="http://schemas.openxmlformats.org/presentationml/2006/main">
   <p:cSld>
     <p:spTree>
       <p:nvGrpSpPr>
@@ -5822,7 +6145,7 @@
             <a:spLocks noGrp="1" noChangeArrowheads="1"/>
             <a:extLst>
               <a:ext uri="smNativeData">
-                <pr:smNativeData xmlns:pr="smNativeData" xmlns="smNativeData" val="SMDATA_15_FLquaRMAAAAlAAAAZAAAAA0AAAAAkAAAAEgAAACQAAAASAAAAAAAAAABAAAAAAAAAAEAAABQAAAAAAAAAAAA4D8AAAAAAADgPwAAAAAAAOA/AAAAAAAA4D8AAAAAAADgPwAAAAAAAOA/AAAAAAAA4D8AAAAAAADgPwAAAAAAAOA/AAAAAAAA4D8CAAAAjAAAAAAAAAAAAAAAW5vVDP///wgAAAAAAAAAAAAAAAAAAAAAAAAAAAAAAAAAAAAAZAAAAAEAAABAAAAAAAAAAAAAAAAAAAAAAAAAAAAAAAAAAAAAAAAAAAAAAAAAAAAAAAAAAAAAAAAAAAAAAAAAAAAAAAAAAAAAAAAAAAAAAAAAAAAAAAAAAAAAAAAAAAAAFAAAADwAAAAAAAAAAAAAAAAAAAkUAAAAAQAAABQAAAAUAAAAFAAAAAEAAAAAAAAAZAAAAGQAAAAAAAAAZAAAAGQAAAAVAAAAYAAAAAAAAAAAAAAADwAAACADAAAAAAAAAAAAAAEAAACgMgAAVgcAAKr4//8BAAAAf39/AAEAAABkAAAAAAAAABQAAABAHwAAAAAAACYAAAAAAAAAwOD//wAAAAAmAAAAZAAAABYAAABMAAAAAAAAAAAAAAAEAAAAAAAAAAEAAADn5uYKAAAAACgAAAAoAAAAZAAAAGQAAAAAAAAAzMzMAAAAAABQAAAAUAAAAGQAAABkAAAAAAAAABcAAAAUAAAAAAAAAAAAAAD/fwAA/38AAAAAAAAJAAAABAAAAF8AYAAeAAAAaAAAAAAAAAAAAAAAAAAAAAAAAAAAAAAAECcAABAnAAAAAAAAAAAAAAAAAAAAAAAAAAAAAAAAAAAAAAAAAAAAABQAAAAAAAAAwMD/AAAAAABkAAAAMgAAAAAAAABkAAAAAAAAAH9/fwAKAAAAIgAAABgAAAAAAAAAAAAAAAAAAAAAAAAAAAAAAAAAAAAkAAAAJAAAAAAAAAAHAAAAAAAAAAAAAAAAAAAAAAAAAAAAAAAAAAAAf39/ACUAAABYAAAAAAAAAAAAAAAAAAAAAAAAAAAAAAAAAAAAAAAAAAAAAAAAAAAAAAAAAAAAAAA/AAAAAAAAAKCGAQAAAAAAAAAAAAAAAAAMAAAAAQAAAAAAAAAAAAAAAAAAAB8AAABUAAAAW5vVBf///wEAAAAAAAAAAAAAAAAAAAAAAAAAAAAAAAAAAAAAAAAAAAAAAAJ/f38A5+bmA8zMzADAwP8Af39/AAAAAAAAAAAAAAAAAAAAAAAAAAAAIQAAABgAAAAUAAAAKAUAAD8CAADYRQAAZwoAABAAAAAmAAAACAAAAAAAAAAAAAAA"/>
+                <pr:smNativeData xmlns="smNativeData" xmlns:pr="smNativeData" xmlns:p15="http://schemas.microsoft.com/office/powerpoint/2012/main" xmlns:p14="http://schemas.microsoft.com/office/powerpoint/2010/main" xmlns:mc="http://schemas.openxmlformats.org/markup-compatibility/2006" val="SMDATA_15_FLquaRMAAAAlAAAAZAAAAA0AAAAAkAAAAEgAAACQAAAASAAAAAAAAAABAAAAAAAAAAEAAABQAAAAAAAAAAAA4D8AAAAAAADgPwAAAAAAAOA/AAAAAAAA4D8AAAAAAADgPwAAAAAAAOA/AAAAAAAA4D8AAAAAAADgPwAAAAAAAOA/AAAAAAAA4D8CAAAAjAAAAAAAAAAAAAAAW5vVDP///wgAAAAAAAAAAAAAAAAAAAAAAAAAAAAAAAAAAAAAZAAAAAEAAABAAAAAAAAAAAAAAAAAAAAAAAAAAAAAAAAAAAAAAAAAAAAAAAAAAAAAAAAAAAAAAAAAAAAAAAAAAAAAAAAAAAAAAAAAAAAAAAAAAAAAAAAAAAAAAAAAAAAAFAAAADwAAAAAAAAAAAAAAAAAAAkUAAAAAQAAABQAAAAUAAAAFAAAAAEAAAAAAAAAZAAAAGQAAAAAAAAAZAAAAGQAAAAVAAAAYAAAAAAAAAAAAAAADwAAACADAAAAAAAAAAAAAAEAAACgMgAAVgcAAKr4//8BAAAAf39/AAEAAABkAAAAAAAAABQAAABAHwAAAAAAACYAAAAAAAAAwOD//wAAAAAmAAAAZAAAABYAAABMAAAAAAAAAAAAAAAEAAAAAAAAAAEAAADn5uYKAAAAACgAAAAoAAAAZAAAAGQAAAAAAAAAzMzMAAAAAABQAAAAUAAAAGQAAABkAAAAAAAAABcAAAAUAAAAAAAAAAAAAAD/fwAA/38AAAAAAAAJAAAABAAAAF8AYAAeAAAAaAAAAAAAAAAAAAAAAAAAAAAAAAAAAAAAECcAABAnAAAAAAAAAAAAAAAAAAAAAAAAAAAAAAAAAAAAAAAAAAAAABQAAAAAAAAAwMD/AAAAAABkAAAAMgAAAAAAAABkAAAAAAAAAH9/fwAKAAAAIgAAABgAAAAAAAAAAAAAAAAAAAAAAAAAAAAAAAAAAAAkAAAAJAAAAAAAAAAHAAAAAAAAAAAAAAAAAAAAAAAAAAAAAAAAAAAAf39/ACUAAABYAAAAAAAAAAAAAAAAAAAAAAAAAAAAAAAAAAAAAAAAAAAAAAAAAAAAAAAAAAAAAAA/AAAAAAAAAKCGAQAAAAAAAAAAAAAAAAAMAAAAAQAAAAAAAAAAAAAAAAAAAB8AAABUAAAAW5vVBf///wEAAAAAAAAAAAAAAAAAAAAAAAAAAAAAAAAAAAAAAAAAAAAAAAJ/f38A5+bmA8zMzADAwP8Af39/AAAAAAAAAAAAAAAAAAAAAAAAAAAAIQAAABgAAAAUAAAAKAUAAD8CAADYRQAAZwoAABAAAAAmAAAACAAAAAAAAAAAAAAA"/>
               </a:ext>
             </a:extLst>
           </p:cNvSpPr>
@@ -5836,7 +6159,7 @@
           <a:lstStyle/>
           <a:p>
             <a:pPr algn="ctr">
-              <a:defRPr lang="en-us"/>
+              <a:defRPr lang="en-US"/>
             </a:pPr>
             <a:r>
               <a:t>Dual WiFi adapters: connect one to internet</a:t>
@@ -5851,7 +6174,7 @@
             <a:spLocks noGrp="1" noChangeArrowheads="1"/>
             <a:extLst>
               <a:ext uri="smNativeData">
-                <pr:smNativeData xmlns:pr="smNativeData" xmlns="smNativeData" val="SMDATA_15_FLquaRMAAAAlAAAAZAAAAA0AAAAAkAAAAEgAAACQAAAASAAAAAAAAAAAAAAAAAAAAAEAAABQAAAAAAAAAAAA4D8AAAAAAADgPwAAAAAAAOA/AAAAAAAA4D8AAAAAAADgPwAAAAAAAOA/AAAAAAAA4D8AAAAAAADgPwAAAAAAAOA/AAAAAAAA4D8CAAAAjAAAAAAAAAAAAAAAW5vVDP///wgAAAAAAAAAAAAAAAAAAAAAAAAAAAAAAAAAAAAAZAAAAAEAAABAAAAAAAAAAAAAAAAAAAAAAAAAAAAAAAAAAAAAAAAAAAAAAAAAAAAAAAAAAAAAAAAAAAAAAAAAAAAAAAAAAAAAAAAAAAAAAAAAAAAAAAAAAAAAAAAAAAAAFAAAADwAAAAAAAAAAAAAAAAAAAkUAAAAAQAAABQAAAAUAAAAFAAAAAEAAAAAAAAAZAAAAGQAAAAAAAAAZAAAAGQAAAAVAAAAYAAAAAAAAAAAAAAADwAAACADAAAAAAAAAAAAAAEAAACgMgAAVgcAAKr4//8BAAAAf39/AAEAAABkAAAAAAAAABQAAABAHwAAAAAAACYAAAAAAAAAwOD//wAAAAAmAAAAZAAAABYAAABMAAAAAAAAAAAAAAAEAAAAAAAAAAEAAADn5uYKAAAAACgAAAAoAAAAZAAAAGQAAAAAAAAAzMzMAAAAAABQAAAAUAAAAGQAAABkAAAAAAAAABcAAAAUAAAAAAAAAAAAAAD/fwAA/38AAAAAAAAJAAAABAAAAAAAAAAeAAAAaAAAAAAAAAAAAAAAAAAAAAAAAAAAAAAAECcAABAnAAAAAAAAAAAAAAAAAAAAAAAAAAAAAAAAAAAAAAAAAAAAABQAAAAAAAAAwMD/AAAAAABkAAAAMgAAAAAAAABkAAAAAAAAAH9/fwAKAAAAIgAAABgAAAAAAAAAAAAAAAAAAAAAAAAAAAAAAAAAAAAkAAAAJAAAAAAAAAAHAAAAAAAAAAAAAAAAAAAAAAAAAAAAAAAAAAAAf39/ACUAAABYAAAAAAAAAAAAAAAAAAAAAAAAAAAAAAAAAAAAAAAAAAAAAAAAAAAAAAAAAAAAAAA/AAAAAAAAAKCGAQAAAAAAAAAAAAAAAAAMAAAAAQAAAAAAAAAAAAAAAAAAAB8AAABUAAAAW5vVBf///wEAAAAAAAAAAAAAAAAAAAAAAAAAAAAAAAAAAAAAAAAAAAAAAAJ/f38A5+bmA8zMzADAwP8Af39/AAAAAAAAAAAAAAAAAAAAAAAAAAAAIQAAABgAAAAUAAAAKAUAADsLAADYRQAAACYAABAAAAAmAAAACAAAAAAgAAAAAAAA"/>
+                <pr:smNativeData xmlns="smNativeData" xmlns:pr="smNativeData" xmlns:p15="http://schemas.microsoft.com/office/powerpoint/2012/main" xmlns:p14="http://schemas.microsoft.com/office/powerpoint/2010/main" xmlns:mc="http://schemas.openxmlformats.org/markup-compatibility/2006" val="SMDATA_15_FLquaRMAAAAlAAAAZAAAAA0AAAAAkAAAAEgAAACQAAAASAAAAAAAAAAAAAAAAAAAAAEAAABQAAAAAAAAAAAA4D8AAAAAAADgPwAAAAAAAOA/AAAAAAAA4D8AAAAAAADgPwAAAAAAAOA/AAAAAAAA4D8AAAAAAADgPwAAAAAAAOA/AAAAAAAA4D8CAAAAjAAAAAAAAAAAAAAAW5vVDP///wgAAAAAAAAAAAAAAAAAAAAAAAAAAAAAAAAAAAAAZAAAAAEAAABAAAAAAAAAAAAAAAAAAAAAAAAAAAAAAAAAAAAAAAAAAAAAAAAAAAAAAAAAAAAAAAAAAAAAAAAAAAAAAAAAAAAAAAAAAAAAAAAAAAAAAAAAAAAAAAAAAAAAFAAAADwAAAAAAAAAAAAAAAAAAAkUAAAAAQAAABQAAAAUAAAAFAAAAAEAAAAAAAAAZAAAAGQAAAAAAAAAZAAAAGQAAAAVAAAAYAAAAAAAAAAAAAAADwAAACADAAAAAAAAAAAAAAEAAACgMgAAVgcAAKr4//8BAAAAf39/AAEAAABkAAAAAAAAABQAAABAHwAAAAAAACYAAAAAAAAAwOD//wAAAAAmAAAAZAAAABYAAABMAAAAAAAAAAAAAAAEAAAAAAAAAAEAAADn5uYKAAAAACgAAAAoAAAAZAAAAGQAAAAAAAAAzMzMAAAAAABQAAAAUAAAAGQAAABkAAAAAAAAABcAAAAUAAAAAAAAAAAAAAD/fwAA/38AAAAAAAAJAAAABAAAAAAAAAAeAAAAaAAAAAAAAAAAAAAAAAAAAAAAAAAAAAAAECcAABAnAAAAAAAAAAAAAAAAAAAAAAAAAAAAAAAAAAAAAAAAAAAAABQAAAAAAAAAwMD/AAAAAABkAAAAMgAAAAAAAABkAAAAAAAAAH9/fwAKAAAAIgAAABgAAAAAAAAAAAAAAAAAAAAAAAAAAAAAAAAAAAAkAAAAJAAAAAAAAAAHAAAAAAAAAAAAAAAAAAAAAAAAAAAAAAAAAAAAf39/ACUAAABYAAAAAAAAAAAAAAAAAAAAAAAAAAAAAAAAAAAAAAAAAAAAAAAAAAAAAAAAAAAAAAA/AAAAAAAAAKCGAQAAAAAAAAAAAAAAAAAMAAAAAQAAAAAAAAAAAAAAAAAAAB8AAABUAAAAW5vVBf///wEAAAAAAAAAAAAAAAAAAAAAAAAAAAAAAAAAAAAAAAAAAAAAAAJ/f38A5+bmA8zMzADAwP8Af39/AAAAAAAAAAAAAAAAAAAAAAAAAAAAIQAAABgAAAAUAAAAKAUAADsLAADYRQAAACYAABAAAAAmAAAACAAAAAAgAAAAAAAA"/>
               </a:ext>
             </a:extLst>
           </p:cNvSpPr>
@@ -5872,7 +6195,7 @@
               <a:lnSpc>
                 <a:spcPct val="80000"/>
               </a:lnSpc>
-              <a:defRPr lang="en-us"/>
+              <a:defRPr lang="en-US"/>
             </a:pPr>
             <a:r>
               <a:t>Acts as WiFi server as well as can connect to internet</a:t>
@@ -5883,7 +6206,7 @@
               <a:lnSpc>
                 <a:spcPct val="80000"/>
               </a:lnSpc>
-              <a:defRPr lang="en-us"/>
+              <a:defRPr lang="en-US"/>
             </a:pPr>
             <a:r>
               <a:t>Use connmanctl to setup WiFi, in console type these commands:</a:t>
@@ -5894,7 +6217,7 @@
               <a:lnSpc>
                 <a:spcPct val="80000"/>
               </a:lnSpc>
-              <a:defRPr lang="en-us"/>
+              <a:defRPr lang="en-US"/>
             </a:pPr>
             <a:r>
               <a:t>enable wifi</a:t>
@@ -5905,7 +6228,7 @@
               <a:lnSpc>
                 <a:spcPct val="80000"/>
               </a:lnSpc>
-              <a:defRPr lang="en-us"/>
+              <a:defRPr lang="en-US"/>
             </a:pPr>
             <a:r>
               <a:t>tether wifi disable</a:t>
@@ -5916,7 +6239,7 @@
               <a:lnSpc>
                 <a:spcPct val="80000"/>
               </a:lnSpc>
-              <a:defRPr lang="en-us"/>
+              <a:defRPr lang="en-US"/>
             </a:pPr>
             <a:r>
               <a:t>agent on</a:t>
@@ -5927,7 +6250,7 @@
               <a:lnSpc>
                 <a:spcPct val="80000"/>
               </a:lnSpc>
-              <a:defRPr lang="en-us"/>
+              <a:defRPr lang="en-US"/>
             </a:pPr>
             <a:r>
               <a:t>scan wifi   (*need to wait until these come back with response)</a:t>
@@ -5938,7 +6261,7 @@
               <a:lnSpc>
                 <a:spcPct val="80000"/>
               </a:lnSpc>
-              <a:defRPr lang="en-us"/>
+              <a:defRPr lang="en-US"/>
             </a:pPr>
             <a:r>
               <a:t>services</a:t>
@@ -5949,7 +6272,7 @@
               <a:lnSpc>
                 <a:spcPct val="80000"/>
               </a:lnSpc>
-              <a:defRPr lang="en-us"/>
+              <a:defRPr lang="en-US"/>
             </a:pPr>
             <a:r>
               <a:t>connect wifi_XXX</a:t>
@@ -5960,7 +6283,7 @@
               <a:lnSpc>
                 <a:spcPct val="80000"/>
               </a:lnSpc>
-              <a:defRPr lang="en-us"/>
+              <a:defRPr lang="en-US"/>
             </a:pPr>
             <a:r>
               <a:t>exit</a:t>
@@ -5971,7 +6294,7 @@
               <a:lnSpc>
                 <a:spcPct val="80000"/>
               </a:lnSpc>
-              <a:defRPr lang="en-us"/>
+              <a:defRPr lang="en-US"/>
             </a:pPr>
             <a:r>
               <a:t>*might take some seconds to actually connect. ping doesn’t work, so just try sudo apt update.</a:t>
@@ -5982,16 +6305,18 @@
               <a:lnSpc>
                 <a:spcPct val="80000"/>
               </a:lnSpc>
-              <a:defRPr lang="en-us"/>
-            </a:pPr>
+              <a:defRPr lang="en-US"/>
+            </a:pPr>
+            <a:endParaRPr/>
           </a:p>
           <a:p>
             <a:pPr>
               <a:lnSpc>
                 <a:spcPct val="80000"/>
               </a:lnSpc>
-              <a:defRPr lang="en-us"/>
-            </a:pPr>
+              <a:defRPr lang="en-US"/>
+            </a:pPr>
+            <a:endParaRPr/>
           </a:p>
         </p:txBody>
       </p:sp>
@@ -6011,7 +6336,7 @@
 </file>
 
 <file path=ppt/slides/slide9.xml><?xml version="1.0" encoding="utf-8"?>
-<p:sld xmlns:p="http://schemas.openxmlformats.org/presentationml/2006/main" xmlns:mc="http://schemas.openxmlformats.org/markup-compatibility/2006" xmlns:p14="http://schemas.microsoft.com/office/powerpoint/2010/main" xmlns:p15="http://schemas.microsoft.com/office/powerpoint/2012/main" xmlns:r="http://schemas.openxmlformats.org/officeDocument/2006/relationships" xmlns:a="http://schemas.openxmlformats.org/drawingml/2006/main" mc:Ignorable="p14">
+<p:sld xmlns:a="http://schemas.openxmlformats.org/drawingml/2006/main" xmlns:r="http://schemas.openxmlformats.org/officeDocument/2006/relationships" xmlns:p="http://schemas.openxmlformats.org/presentationml/2006/main">
   <p:cSld>
     <p:spTree>
       <p:nvGrpSpPr>
@@ -6034,7 +6359,7 @@
             <a:spLocks noGrp="1" noChangeArrowheads="1"/>
             <a:extLst>
               <a:ext uri="smNativeData">
-                <pr:smNativeData xmlns:pr="smNativeData" xmlns="smNativeData" val="SMDATA_15_FLquaRMAAAAlAAAAZAAAAA0AAAAAkAAAAEgAAACQAAAASAAAAAAAAAABAAAAAAAAAAEAAABQAAAAAAAAAAAA4D8AAAAAAADgPwAAAAAAAOA/AAAAAAAA4D8AAAAAAADgPwAAAAAAAOA/AAAAAAAA4D8AAAAAAADgPwAAAAAAAOA/AAAAAAAA4D8CAAAAjAAAAAAAAAAAAAAAW5vVDP///wgAAAAAAAAAAAAAAAAAAAAAAAAAAAAAAAAAAAAAZAAAAAEAAABAAAAAAAAAAAAAAAAAAAAAAAAAAAAAAAAAAAAAAAAAAAAAAAAAAAAAAAAAAAAAAAAAAAAAAAAAAAAAAAAAAAAAAAAAAAAAAAAAAAAAAAAAAAAAAAAAAAAAFAAAADwAAAAAAAAAAAAAAAAAAAkUAAAAAQAAABQAAAAUAAAAFAAAAAEAAAAAAAAAZAAAAGQAAAAAAAAAZAAAAGQAAAAVAAAAYAAAAAAAAAAAAAAADwAAACADAAAAAAAAAAAAAAEAAACgMgAAVgcAAKr4//8BAAAAf39/AAEAAABkAAAAAAAAABQAAABAHwAAAAAAACYAAAAAAAAAwOD//wAAAAAmAAAAZAAAABYAAABMAAAAAAAAAAAAAAAEAAAAAAAAAAEAAADn5uYKAAAAACgAAAAoAAAAZAAAAGQAAAAAAAAAzMzMAAAAAABQAAAAUAAAAGQAAABkAAAAAAAAABcAAAAUAAAAAAAAAAAAAAD/fwAA/38AAAAAAAAJAAAABAAAAF8AYAAeAAAAaAAAAAAAAAAAAAAAAAAAAAAAAAAAAAAAECcAABAnAAAAAAAAAAAAAAAAAAAAAAAAAAAAAAAAAAAAAAAAAAAAABQAAAAAAAAAwMD/AAAAAABkAAAAMgAAAAAAAABkAAAAAAAAAH9/fwAKAAAAIgAAABgAAAAAAAAAAAAAAAAAAAAAAAAAAAAAAAAAAAAkAAAAJAAAAAAAAAAHAAAAAAAAAAAAAAAAAAAAAAAAAAAAAAAAAAAAf39/ACUAAABYAAAAAAAAAAAAAAAAAAAAAAAAAAAAAAAAAAAAAAAAAAAAAAAAAAAAAAAAAAAAAAA/AAAAAAAAAKCGAQAAAAAAAAAAAAAAAAAMAAAAAQAAAAAAAAAAAAAAAAAAAB8AAABUAAAAW5vVBf///wEAAAAAAAAAAAAAAAAAAAAAAAAAAAAAAAAAAAAAAAAAAAAAAAJ/f38A5+bmA8zMzADAwP8Af39/AAAAAAAAAAAAAAAAAAAAAAAAAAAAIQAAABgAAAAUAAAAKAUAAD8CAADYRQAAZwoAABAAAAAmAAAACAAAAAAgAAAAAAAA"/>
+                <pr:smNativeData xmlns="smNativeData" xmlns:pr="smNativeData" xmlns:p15="http://schemas.microsoft.com/office/powerpoint/2012/main" xmlns:p14="http://schemas.microsoft.com/office/powerpoint/2010/main" xmlns:mc="http://schemas.openxmlformats.org/markup-compatibility/2006" val="SMDATA_15_FLquaRMAAAAlAAAAZAAAAA0AAAAAkAAAAEgAAACQAAAASAAAAAAAAAABAAAAAAAAAAEAAABQAAAAAAAAAAAA4D8AAAAAAADgPwAAAAAAAOA/AAAAAAAA4D8AAAAAAADgPwAAAAAAAOA/AAAAAAAA4D8AAAAAAADgPwAAAAAAAOA/AAAAAAAA4D8CAAAAjAAAAAAAAAAAAAAAW5vVDP///wgAAAAAAAAAAAAAAAAAAAAAAAAAAAAAAAAAAAAAZAAAAAEAAABAAAAAAAAAAAAAAAAAAAAAAAAAAAAAAAAAAAAAAAAAAAAAAAAAAAAAAAAAAAAAAAAAAAAAAAAAAAAAAAAAAAAAAAAAAAAAAAAAAAAAAAAAAAAAAAAAAAAAFAAAADwAAAAAAAAAAAAAAAAAAAkUAAAAAQAAABQAAAAUAAAAFAAAAAEAAAAAAAAAZAAAAGQAAAAAAAAAZAAAAGQAAAAVAAAAYAAAAAAAAAAAAAAADwAAACADAAAAAAAAAAAAAAEAAACgMgAAVgcAAKr4//8BAAAAf39/AAEAAABkAAAAAAAAABQAAABAHwAAAAAAACYAAAAAAAAAwOD//wAAAAAmAAAAZAAAABYAAABMAAAAAAAAAAAAAAAEAAAAAAAAAAEAAADn5uYKAAAAACgAAAAoAAAAZAAAAGQAAAAAAAAAzMzMAAAAAABQAAAAUAAAAGQAAABkAAAAAAAAABcAAAAUAAAAAAAAAAAAAAD/fwAA/38AAAAAAAAJAAAABAAAAF8AYAAeAAAAaAAAAAAAAAAAAAAAAAAAAAAAAAAAAAAAECcAABAnAAAAAAAAAAAAAAAAAAAAAAAAAAAAAAAAAAAAAAAAAAAAABQAAAAAAAAAwMD/AAAAAABkAAAAMgAAAAAAAABkAAAAAAAAAH9/fwAKAAAAIgAAABgAAAAAAAAAAAAAAAAAAAAAAAAAAAAAAAAAAAAkAAAAJAAAAAAAAAAHAAAAAAAAAAAAAAAAAAAAAAAAAAAAAAAAAAAAf39/ACUAAABYAAAAAAAAAAAAAAAAAAAAAAAAAAAAAAAAAAAAAAAAAAAAAAAAAAAAAAAAAAAAAAA/AAAAAAAAAKCGAQAAAAAAAAAAAAAAAAAMAAAAAQAAAAAAAAAAAAAAAAAAAB8AAABUAAAAW5vVBf///wEAAAAAAAAAAAAAAAAAAAAAAAAAAAAAAAAAAAAAAAAAAAAAAAJ/f38A5+bmA8zMzADAwP8Af39/AAAAAAAAAAAAAAAAAAAAAAAAAAAAIQAAABgAAAAUAAAAKAUAAD8CAADYRQAAZwoAABAAAAAmAAAACAAAAAAgAAAAAAAA"/>
               </a:ext>
             </a:extLst>
           </p:cNvSpPr>
@@ -6052,14 +6377,14 @@
           <a:lstStyle/>
           <a:p>
             <a:pPr>
-              <a:defRPr lang="en-us"/>
+              <a:defRPr lang="en-US"/>
             </a:pPr>
             <a:r>
               <a:t>Testing motors and servos</a:t>
             </a:r>
             <a:br/>
             <a:r>
-              <a:rPr lang="en-us" sz="3200" cap="none"/>
+              <a:rPr lang="en-US" sz="3200" cap="none"/>
               <a:t>https://old.beagleboard.org/static/librobotcontrol/</a:t>
             </a:r>
           </a:p>
@@ -6072,7 +6397,7 @@
             <a:spLocks noGrp="1" noChangeArrowheads="1"/>
             <a:extLst>
               <a:ext uri="smNativeData">
-                <pr:smNativeData xmlns:pr="smNativeData" xmlns="smNativeData" val="SMDATA_15_FLquaRMAAAAlAAAAZAAAAA0AAAAAkAAAAEgAAACQAAAASAAAAAAAAAAAAAAAAAAAAAEAAABQAAAAAAAAAAAA4D8AAAAAAADgPwAAAAAAAOA/AAAAAAAA4D8AAAAAAADgPwAAAAAAAOA/AAAAAAAA4D8AAAAAAADgPwAAAAAAAOA/AAAAAAAA4D8CAAAAjAAAAAAAAAAAAAAAW5vVDP///wgAAAAAAAAAAAAAAAAAAAAAAAAAAAAAAAAAAAAAZAAAAAEAAABAAAAAAAAAAAAAAAAAAAAAAAAAAAAAAAAAAAAAAAAAAAAAAAAAAAAAAAAAAAAAAAAAAAAAAAAAAAAAAAAAAAAAAAAAAAAAAAAAAAAAAAAAAAAAAAAAAAAAFAAAADwAAAAAAAAAAAAAAAAAAAkUAAAAAQAAABQAAAAUAAAAFAAAAAEAAAAAAAAAZAAAAGQAAAAAAAAAZAAAAGQAAAAVAAAAYAAAAAAAAAAAAAAADwAAACADAAAAAAAAAAAAAAEAAACgMgAAVgcAAKr4//8BAAAAf39/AAEAAABkAAAAAAAAABQAAABAHwAAAAAAACYAAAAAAAAAwOD//wAAAAAmAAAAZAAAABYAAABMAAAAAAAAAAAAAAAEAAAAAAAAAAEAAADn5uYKAAAAACgAAAAoAAAAZAAAAGQAAAAAAAAAzMzMAAAAAABQAAAAUAAAAGQAAABkAAAAAAAAABcAAAAUAAAAAAAAAAAAAAD/fwAA/38AAAAAAAAJAAAABAAAAAAAAAAeAAAAaAAAAAAAAAAAAAAAAAAAAAAAAAAAAAAAECcAABAnAAAAAAAAAAAAAAAAAAAAAAAAAAAAAAAAAAAAAAAAAAAAABQAAAAAAAAAwMD/AAAAAABkAAAAMgAAAAAAAABkAAAAAAAAAH9/fwAKAAAAIgAAABgAAAAAAAAAAAAAAAAAAAAAAAAAAAAAAAAAAAAkAAAAJAAAAAAAAAAHAAAAAAAAAAAAAAAAAAAAAAAAAAAAAAAAAAAAf39/ACUAAABYAAAAAAAAAAAAAAAAAAAAAAAAAAAAAAAAAAAAAAAAAAAAAAAAAAAAAAAAAAAAAAA/AAAAAAAAAKCGAQAAAAAAAAAAAAAAAAAMAAAAAQAAAAAAAAAAAAAAAAAAAB8AAABUAAAAW5vVBf///wEAAAAAAAAAAAAAAAAAAAAAAAAAAAAAAAAAAAAAAAAAAAAAAAJ/f38A5+bmA8zMzADAwP8Af39/AAAAAAAAAAAAAAAAAAAAAAAAAAAAIQAAABgAAAAUAAAAKAUAADsLAADYRQAAACYAABAAAAAmAAAACAAAAAAgAAAAAAAA"/>
+                <pr:smNativeData xmlns="smNativeData" xmlns:pr="smNativeData" xmlns:p15="http://schemas.microsoft.com/office/powerpoint/2012/main" xmlns:p14="http://schemas.microsoft.com/office/powerpoint/2010/main" xmlns:mc="http://schemas.openxmlformats.org/markup-compatibility/2006" val="SMDATA_15_FLquaRMAAAAlAAAAZAAAAA0AAAAAkAAAAEgAAACQAAAASAAAAAAAAAAAAAAAAAAAAAEAAABQAAAAAAAAAAAA4D8AAAAAAADgPwAAAAAAAOA/AAAAAAAA4D8AAAAAAADgPwAAAAAAAOA/AAAAAAAA4D8AAAAAAADgPwAAAAAAAOA/AAAAAAAA4D8CAAAAjAAAAAAAAAAAAAAAW5vVDP///wgAAAAAAAAAAAAAAAAAAAAAAAAAAAAAAAAAAAAAZAAAAAEAAABAAAAAAAAAAAAAAAAAAAAAAAAAAAAAAAAAAAAAAAAAAAAAAAAAAAAAAAAAAAAAAAAAAAAAAAAAAAAAAAAAAAAAAAAAAAAAAAAAAAAAAAAAAAAAAAAAAAAAFAAAADwAAAAAAAAAAAAAAAAAAAkUAAAAAQAAABQAAAAUAAAAFAAAAAEAAAAAAAAAZAAAAGQAAAAAAAAAZAAAAGQAAAAVAAAAYAAAAAAAAAAAAAAADwAAACADAAAAAAAAAAAAAAEAAACgMgAAVgcAAKr4//8BAAAAf39/AAEAAABkAAAAAAAAABQAAABAHwAAAAAAACYAAAAAAAAAwOD//wAAAAAmAAAAZAAAABYAAABMAAAAAAAAAAAAAAAEAAAAAAAAAAEAAADn5uYKAAAAACgAAAAoAAAAZAAAAGQAAAAAAAAAzMzMAAAAAABQAAAAUAAAAGQAAABkAAAAAAAAABcAAAAUAAAAAAAAAAAAAAD/fwAA/38AAAAAAAAJAAAABAAAAAAAAAAeAAAAaAAAAAAAAAAAAAAAAAAAAAAAAAAAAAAAECcAABAnAAAAAAAAAAAAAAAAAAAAAAAAAAAAAAAAAAAAAAAAAAAAABQAAAAAAAAAwMD/AAAAAABkAAAAMgAAAAAAAABkAAAAAAAAAH9/fwAKAAAAIgAAABgAAAAAAAAAAAAAAAAAAAAAAAAAAAAAAAAAAAAkAAAAJAAAAAAAAAAHAAAAAAAAAAAAAAAAAAAAAAAAAAAAAAAAAAAAf39/ACUAAABYAAAAAAAAAAAAAAAAAAAAAAAAAAAAAAAAAAAAAAAAAAAAAAAAAAAAAAAAAAAAAAA/AAAAAAAAAKCGAQAAAAAAAAAAAAAAAAAMAAAAAQAAAAAAAAAAAAAAAAAAAB8AAABUAAAAW5vVBf///wEAAAAAAAAAAAAAAAAAAAAAAAAAAAAAAAAAAAAAAAAAAAAAAAJ/f38A5+bmA8zMzADAwP8Af39/AAAAAAAAAAAAAAAAAAAAAAAAAAAAIQAAABgAAAAUAAAAKAUAADsLAADYRQAAACYAABAAAAAmAAAACAAAAAAgAAAAAAAA"/>
               </a:ext>
             </a:extLst>
           </p:cNvSpPr>
@@ -6096,7 +6421,7 @@
               <a:spcBef>
                 <a:spcPts val="850"/>
               </a:spcBef>
-              <a:defRPr lang="en-us" sz="2380" cap="none"/>
+              <a:defRPr lang="en-US" sz="2380" cap="none"/>
             </a:pPr>
             <a:r>
               <a:t>rc_test_motors</a:t>
@@ -6110,7 +6435,7 @@
               <a:spcBef>
                 <a:spcPts val="425"/>
               </a:spcBef>
-              <a:defRPr lang="en-us" sz="2040" cap="none"/>
+              <a:defRPr lang="en-US" sz="2040" cap="none"/>
             </a:pPr>
             <a:r>
               <a:t>-d 0.0 to 1.0  duty cycle</a:t>
@@ -6124,7 +6449,7 @@
               <a:spcBef>
                 <a:spcPts val="425"/>
               </a:spcBef>
-              <a:defRPr lang="en-us" sz="2040" cap="none"/>
+              <a:defRPr lang="en-US" sz="2040" cap="none"/>
             </a:pPr>
             <a:r>
               <a:t>-m 1 to 4 to specify motor (otherwise all 4 motors)</a:t>
@@ -6138,7 +6463,7 @@
               <a:spcBef>
                 <a:spcPts val="425"/>
               </a:spcBef>
-              <a:defRPr lang="en-us" sz="2040" cap="none"/>
+              <a:defRPr lang="en-US" sz="2040" cap="none"/>
             </a:pPr>
             <a:r>
               <a:t>-s  sweep motors back and forth at duty cycle to better test them</a:t>
@@ -6152,7 +6477,7 @@
               <a:spcBef>
                 <a:spcPts val="425"/>
               </a:spcBef>
-              <a:defRPr lang="en-us" sz="2040" cap="none"/>
+              <a:defRPr lang="en-US" sz="2040" cap="none"/>
             </a:pPr>
             <a:r>
               <a:t>-b  enable motor break</a:t>
@@ -6166,7 +6491,7 @@
               <a:spcBef>
                 <a:spcPts val="425"/>
               </a:spcBef>
-              <a:defRPr lang="en-us" sz="2040" cap="none"/>
+              <a:defRPr lang="en-US" sz="2040" cap="none"/>
             </a:pPr>
             <a:r>
               <a:t>-F  custom frequency</a:t>
@@ -6180,7 +6505,7 @@
               <a:spcBef>
                 <a:spcPts val="425"/>
               </a:spcBef>
-              <a:defRPr lang="en-us" sz="2040" cap="none"/>
+              <a:defRPr lang="en-US" sz="2040" cap="none"/>
             </a:pPr>
             <a:r>
               <a:t>-f  enable free spin function</a:t>
@@ -6194,7 +6519,7 @@
               <a:spcBef>
                 <a:spcPts val="850"/>
               </a:spcBef>
-              <a:defRPr lang="en-us" sz="2380" cap="none"/>
+              <a:defRPr lang="en-US" sz="2380" cap="none"/>
             </a:pPr>
             <a:r>
               <a:t>rc_test_servos</a:t>
@@ -6208,7 +6533,7 @@
               <a:spcBef>
                 <a:spcPts val="425"/>
               </a:spcBef>
-              <a:defRPr lang="en-us" sz="2040" cap="none"/>
+              <a:defRPr lang="en-US" sz="2040" cap="none"/>
             </a:pPr>
             <a:r>
               <a:t>-c 1 to 8 to specify which servo</a:t>
@@ -6222,7 +6547,7 @@
               <a:spcBef>
                 <a:spcPts val="425"/>
               </a:spcBef>
-              <a:defRPr lang="en-us" sz="2040" cap="none"/>
+              <a:defRPr lang="en-US" sz="2040" cap="none"/>
             </a:pPr>
             <a:r>
               <a:t>-p -1.5 to 1.5  specify position</a:t>
@@ -6236,7 +6561,7 @@
               <a:spcBef>
                 <a:spcPts val="425"/>
               </a:spcBef>
-              <a:defRPr lang="en-us" sz="2040" cap="none"/>
+              <a:defRPr lang="en-US" sz="2040" cap="none"/>
             </a:pPr>
             <a:r>
               <a:t>-s 0.0 to 1.5  sweep servo back and forth to test</a:t>
@@ -6250,7 +6575,7 @@
               <a:spcBef>
                 <a:spcPts val="425"/>
               </a:spcBef>
-              <a:defRPr lang="en-us" sz="2040" cap="none"/>
+              <a:defRPr lang="en-US" sz="2040" cap="none"/>
             </a:pPr>
             <a:r>
               <a:t>-r  use DSM radio channel to control servo  *How to hookup DSM radio??</a:t>
@@ -6264,7 +6589,7 @@
               <a:spcBef>
                 <a:spcPts val="425"/>
               </a:spcBef>
-              <a:defRPr lang="en-us" sz="2040" cap="none"/>
+              <a:defRPr lang="en-US" sz="2040" cap="none"/>
             </a:pPr>
             <a:r>
               <a:t>-f  specify pulse frequency</a:t>
@@ -6278,7 +6603,7 @@
               <a:spcBef>
                 <a:spcPts val="425"/>
               </a:spcBef>
-              <a:defRPr lang="en-us" sz="2040" cap="none"/>
+              <a:defRPr lang="en-US" sz="2040" cap="none"/>
             </a:pPr>
             <a:r>
               <a:t>-s  send pulse width in microseconds</a:t>
@@ -6292,8 +6617,9 @@
               <a:spcBef>
                 <a:spcPts val="425"/>
               </a:spcBef>
-              <a:defRPr lang="en-us" sz="2040" cap="none"/>
-            </a:pPr>
+              <a:defRPr lang="en-US" sz="2040" cap="none"/>
+            </a:pPr>
+            <a:endParaRPr/>
           </a:p>
           <a:p>
             <a:pPr lvl="1">
@@ -6303,8 +6629,9 @@
               <a:spcBef>
                 <a:spcPts val="425"/>
               </a:spcBef>
-              <a:defRPr lang="en-us" sz="2040" cap="none"/>
-            </a:pPr>
+              <a:defRPr lang="en-US" sz="2040" cap="none"/>
+            </a:pPr>
+            <a:endParaRPr/>
           </a:p>
         </p:txBody>
       </p:sp>

--- a/embedded/BeagleBone/BeagleBoneBlue.pptx
+++ b/embedded/BeagleBone/BeagleBoneBlue.pptx
@@ -4251,11 +4251,7 @@
             </a:r>
             <a:r>
               <a:rPr lang="en-US" dirty="0" smtClean="0"/>
-              <a:t> to ‘reinforce’ the position over a second if no new values are </a:t>
-            </a:r>
-            <a:r>
-              <a:rPr lang="en-US" smtClean="0"/>
-              <a:t>coming in!</a:t>
+              <a:t> to ‘reinforce’ the position over a second if no new values are coming in!</a:t>
             </a:r>
             <a:endParaRPr lang="en-US" dirty="0"/>
           </a:p>

--- a/embedded/BeagleBone/BeagleBoneBlue.pptx
+++ b/embedded/BeagleBone/BeagleBoneBlue.pptx
@@ -259,7 +259,7 @@
             <a:spLocks noGrp="1" noChangeArrowheads="1"/>
             <a:extLst>
               <a:ext uri="smNativeData">
-                <pr:smNativeData xmlns="smNativeData" xmlns:pr="smNativeData" xmlns:p15="http://schemas.microsoft.com/office/powerpoint/2012/main" xmlns:p14="http://schemas.microsoft.com/office/powerpoint/2010/main" xmlns:mc="http://schemas.openxmlformats.org/markup-compatibility/2006" val="SMDATA_15_FLquaRMAAAAlAAAAZAAAAA0AAAAAkAAAAEgAAACQAAAASAAAAAAAAAACAAAAAAAAAAEAAABQAAAAAAAAAAAA4D8AAAAAAADgPwAAAAAAAOA/AAAAAAAA4D8AAAAAAADgPwAAAAAAAOA/AAAAAAAA4D8AAAAAAADgPwAAAAAAAOA/AAAAAAAA4D8CAAAAjAAAAAAAAAAAAAAAW5vVDP///wgAAAAAAAAAAAAAAAAAAAAAAAAAAAAAAAAAAAAAZAAAAAEAAABAAAAAAAAAAAAAAAAAAAAAAAAAAAAAAAAAAAAAAAAAAAAAAAAAAAAAAAAAAAAAAAAAAAAAAAAAAAAAAAAAAAAAAAAAAAAAAAAAAAAAAAAAAAAAAAAAAAAAFAAAADwAAAAAAAAAAAAAAAAAAAkUAAAAAQAAABQAAAAUAAAAFAAAAAEAAAAAAAAAZAAAAGQAAAAAAAAAZAAAAGQAAAAVAAAAYAAAAAAAAAAAAAAADwAAACADAAAAAAAAAAAAAAEAAACgMgAAVgcAAKr4//8BAAAAf39/AAEAAABkAAAAAAAAABQAAABAHwAAAAAAACYAAAAAAAAAwOD//wAAAAAmAAAAZAAAABYAAABMAAAAAAAAAAAAAAAEAAAAAAAAAAEAAADn5uYKAAAAACgAAAAoAAAAZAAAAGQAAAAAAAAAzMzMAAAAAABQAAAAUAAAAGQAAABkAAAAAAAAABcAAAAUAAAAAAAAAAAAAAD/fwAA/38AAAAAAAAJAAAABAAAAF8AYAAeAAAAaAAAAAAAAAAAAAAAAAAAAAAAAAAAAAAAECcAABAnAAAAAAAAAAAAAAAAAAAAAAAAAAAAAAAAAAAAAAAAAAAAABQAAAAAAAAAwMD/AAAAAABkAAAAMgAAAAAAAABkAAAAAAAAAH9/fwAKAAAAIgAAABgAAAAAAAAAAAAAAAAAAAAAAAAAAAAAAAAAAAAkAAAAJAAAAAAAAAAHAAAAAAAAAAAAAAAAAAAAAAAAAAAAAAAAAAAAf39/ACUAAABYAAAAAAAAAAAAAAAAAAAAAAAAAAAAAAAAAAAAAAAAAAAAAAAAAAAAAAAAAAAAAAA/AAAAAAAAAKCGAQAAAAAAAAAAAAAAAAAMAAAAAQAAAAAAAAAAAAAAAAAAAB8AAABUAAAAAAAABQAAAAEAAAAAAAAAAAAAAAAAAAAAAAAAAAAAAAAAAAAAAAAAAAAAAAJ/f38AAAAAA8zMzADAwP8Af39/AAAAAAAAAAAAAAAAAAAAAAAAAAAAIQAAABgAAAAUAAAAYAkAAOgGAACgQQAAmBUAABAAAAAmAAAACAAAAIGAAAAAAAAA"/>
+                <pr:smNativeData xmlns:mc="http://schemas.openxmlformats.org/markup-compatibility/2006" xmlns:p14="http://schemas.microsoft.com/office/powerpoint/2010/main" xmlns:p15="http://schemas.microsoft.com/office/powerpoint/2012/main" xmlns:pr="smNativeData" xmlns="smNativeData" val="SMDATA_15_FLquaRMAAAAlAAAAZAAAAA0AAAAAkAAAAEgAAACQAAAASAAAAAAAAAACAAAAAAAAAAEAAABQAAAAAAAAAAAA4D8AAAAAAADgPwAAAAAAAOA/AAAAAAAA4D8AAAAAAADgPwAAAAAAAOA/AAAAAAAA4D8AAAAAAADgPwAAAAAAAOA/AAAAAAAA4D8CAAAAjAAAAAAAAAAAAAAAW5vVDP///wgAAAAAAAAAAAAAAAAAAAAAAAAAAAAAAAAAAAAAZAAAAAEAAABAAAAAAAAAAAAAAAAAAAAAAAAAAAAAAAAAAAAAAAAAAAAAAAAAAAAAAAAAAAAAAAAAAAAAAAAAAAAAAAAAAAAAAAAAAAAAAAAAAAAAAAAAAAAAAAAAAAAAFAAAADwAAAAAAAAAAAAAAAAAAAkUAAAAAQAAABQAAAAUAAAAFAAAAAEAAAAAAAAAZAAAAGQAAAAAAAAAZAAAAGQAAAAVAAAAYAAAAAAAAAAAAAAADwAAACADAAAAAAAAAAAAAAEAAACgMgAAVgcAAKr4//8BAAAAf39/AAEAAABkAAAAAAAAABQAAABAHwAAAAAAACYAAAAAAAAAwOD//wAAAAAmAAAAZAAAABYAAABMAAAAAAAAAAAAAAAEAAAAAAAAAAEAAADn5uYKAAAAACgAAAAoAAAAZAAAAGQAAAAAAAAAzMzMAAAAAABQAAAAUAAAAGQAAABkAAAAAAAAABcAAAAUAAAAAAAAAAAAAAD/fwAA/38AAAAAAAAJAAAABAAAAF8AYAAeAAAAaAAAAAAAAAAAAAAAAAAAAAAAAAAAAAAAECcAABAnAAAAAAAAAAAAAAAAAAAAAAAAAAAAAAAAAAAAAAAAAAAAABQAAAAAAAAAwMD/AAAAAABkAAAAMgAAAAAAAABkAAAAAAAAAH9/fwAKAAAAIgAAABgAAAAAAAAAAAAAAAAAAAAAAAAAAAAAAAAAAAAkAAAAJAAAAAAAAAAHAAAAAAAAAAAAAAAAAAAAAAAAAAAAAAAAAAAAf39/ACUAAABYAAAAAAAAAAAAAAAAAAAAAAAAAAAAAAAAAAAAAAAAAAAAAAAAAAAAAAAAAAAAAAA/AAAAAAAAAKCGAQAAAAAAAAAAAAAAAAAMAAAAAQAAAAAAAAAAAAAAAAAAAB8AAABUAAAAAAAABQAAAAEAAAAAAAAAAAAAAAAAAAAAAAAAAAAAAAAAAAAAAAAAAAAAAAJ/f38AAAAAA8zMzADAwP8Af39/AAAAAAAAAAAAAAAAAAAAAAAAAAAAIQAAABgAAAAUAAAAYAkAAOgGAACgQQAAmBUAABAAAAAmAAAACAAAAIGAAAAAAAAA"/>
               </a:ext>
             </a:extLst>
           </p:cNvSpPr>
@@ -325,7 +325,7 @@
             <a:spLocks noGrp="1" noChangeArrowheads="1"/>
             <a:extLst>
               <a:ext uri="smNativeData">
-                <pr:smNativeData xmlns="smNativeData" xmlns:pr="smNativeData" xmlns:p15="http://schemas.microsoft.com/office/powerpoint/2012/main" xmlns:p14="http://schemas.microsoft.com/office/powerpoint/2010/main" xmlns:mc="http://schemas.openxmlformats.org/markup-compatibility/2006" val="SMDATA_15_FLquaRMAAAAlAAAAZAAAAA0AAAAAkAAAAEgAAACQAAAASAAAAAAAAAAAAAAAAAAAAAEAAABQAAAAAAAAAAAA4D8AAAAAAADgPwAAAAAAAOA/AAAAAAAA4D8AAAAAAADgPwAAAAAAAOA/AAAAAAAA4D8AAAAAAADgPwAAAAAAAOA/AAAAAAAA4D8CAAAAjAAAAAAAAAAAAAAAW5vVDP///wgAAAAAAAAAAAAAAAAAAAAAAAAAAAAAAAAAAAAAZAAAAAEAAABAAAAAAAAAAAAAAAAAAAAAAAAAAAAAAAAAAAAAAAAAAAAAAAAAAAAAAAAAAAAAAAAAAAAAAAAAAAAAAAAAAAAAAAAAAAAAAAAAAAAAAAAAAAAAAAAAAAAAFAAAADwAAAAAAAAAAAAAAAAAAAkUAAAAAQAAABQAAAAUAAAAFAAAAAEAAAAAAAAAZAAAAGQAAAAAAAAAZAAAAGQAAAAVAAAAYAAAAAAAAAAAAAAADwAAACADAAAAAAAAAAAAAAEAAACgMgAAVgcAAKr4//8BAAAAf39/AAEAAABkAAAAAAAAABQAAABAHwAAAAAAACYAAAAAAAAAwOD//wAAAAAmAAAAZAAAABYAAABMAAAAAAAAAAAAAAAEAAAAAAAAAAEAAADn5uYKAAAAACgAAAAoAAAAZAAAAGQAAAAAAAAAzMzMAAAAAABQAAAAUAAAAGQAAABkAAAAAAAAABcAAAAUAAAAAAAAAAAAAAD/fwAA/38AAAAAAAAJAAAABAAAAGxpY2keAAAAaAAAAAAAAAAAAAAAAAAAAAAAAAAAAAAAECcAABAnAAAAAAAAAAAAAAAAAAAAAAAAAAAAAAAAAAAAAAAAAAAAABQAAAAAAAAAwMD/AAAAAABkAAAAMgAAAAAAAABkAAAAAAAAAH9/fwAKAAAAIgAAABgAAAAAAAAAAAAAAAAAAAAAAAAAAAAAAAAAAAAkAAAAJAAAAAAAAAAHAAAAAAAAAAAAAAAAAAAAAAAAAAAAAAAAAAAAf39/ACUAAABYAAAAAAAAAAAAAAAAAAAAAAAAAAAAAAAAAAAAAAAAAAAAAAAAAAAAAAAAAAAAAAA/AAAAAAAAAKCGAQAAAAAAAAAAAAAAAAAMAAAAAQAAAAAAAAAAAAAAAAAAAB8AAABUAAAAAAAABQAAAAEAAAAAAAAAAAAAAAAAAAAAAAAAAAAAAAAAAAAAAAAAAAAAAAJ/f38AAAAAA8zMzADAwP8Af39/AAAAAAAAAAAAAAAAAAAAAAAAAAAAIQAAABgAAAAUAAAAYAkAACkWAACgQQAAWCAAABAAAAAmAAAACAAAAAGAAAAAAAAA"/>
+                <pr:smNativeData xmlns:mc="http://schemas.openxmlformats.org/markup-compatibility/2006" xmlns:p14="http://schemas.microsoft.com/office/powerpoint/2010/main" xmlns:p15="http://schemas.microsoft.com/office/powerpoint/2012/main" xmlns:pr="smNativeData" xmlns="smNativeData" val="SMDATA_15_FLquaRMAAAAlAAAAZAAAAA0AAAAAkAAAAEgAAACQAAAASAAAAAAAAAAAAAAAAAAAAAEAAABQAAAAAAAAAAAA4D8AAAAAAADgPwAAAAAAAOA/AAAAAAAA4D8AAAAAAADgPwAAAAAAAOA/AAAAAAAA4D8AAAAAAADgPwAAAAAAAOA/AAAAAAAA4D8CAAAAjAAAAAAAAAAAAAAAW5vVDP///wgAAAAAAAAAAAAAAAAAAAAAAAAAAAAAAAAAAAAAZAAAAAEAAABAAAAAAAAAAAAAAAAAAAAAAAAAAAAAAAAAAAAAAAAAAAAAAAAAAAAAAAAAAAAAAAAAAAAAAAAAAAAAAAAAAAAAAAAAAAAAAAAAAAAAAAAAAAAAAAAAAAAAFAAAADwAAAAAAAAAAAAAAAAAAAkUAAAAAQAAABQAAAAUAAAAFAAAAAEAAAAAAAAAZAAAAGQAAAAAAAAAZAAAAGQAAAAVAAAAYAAAAAAAAAAAAAAADwAAACADAAAAAAAAAAAAAAEAAACgMgAAVgcAAKr4//8BAAAAf39/AAEAAABkAAAAAAAAABQAAABAHwAAAAAAACYAAAAAAAAAwOD//wAAAAAmAAAAZAAAABYAAABMAAAAAAAAAAAAAAAEAAAAAAAAAAEAAADn5uYKAAAAACgAAAAoAAAAZAAAAGQAAAAAAAAAzMzMAAAAAABQAAAAUAAAAGQAAABkAAAAAAAAABcAAAAUAAAAAAAAAAAAAAD/fwAA/38AAAAAAAAJAAAABAAAAGxpY2keAAAAaAAAAAAAAAAAAAAAAAAAAAAAAAAAAAAAECcAABAnAAAAAAAAAAAAAAAAAAAAAAAAAAAAAAAAAAAAAAAAAAAAABQAAAAAAAAAwMD/AAAAAABkAAAAMgAAAAAAAABkAAAAAAAAAH9/fwAKAAAAIgAAABgAAAAAAAAAAAAAAAAAAAAAAAAAAAAAAAAAAAAkAAAAJAAAAAAAAAAHAAAAAAAAAAAAAAAAAAAAAAAAAAAAAAAAAAAAf39/ACUAAABYAAAAAAAAAAAAAAAAAAAAAAAAAAAAAAAAAAAAAAAAAAAAAAAAAAAAAAAAAAAAAAA/AAAAAAAAAKCGAQAAAAAAAAAAAAAAAAAMAAAAAQAAAAAAAAAAAAAAAAAAAB8AAABUAAAAAAAABQAAAAEAAAAAAAAAAAAAAAAAAAAAAAAAAAAAAAAAAAAAAAAAAAAAAAJ/f38AAAAAA8zMzADAwP8Af39/AAAAAAAAAAAAAAAAAAAAAAAAAAAAIQAAABgAAAAUAAAAYAkAACkWAACgQQAAWCAAABAAAAAmAAAACAAAAAGAAAAAAAAA"/>
               </a:ext>
             </a:extLst>
           </p:cNvSpPr>
@@ -396,7 +396,7 @@
             <a:spLocks noGrp="1" noChangeArrowheads="1"/>
             <a:extLst>
               <a:ext uri="smNativeData">
-                <pr:smNativeData xmlns="smNativeData" xmlns:pr="smNativeData" xmlns:p15="http://schemas.microsoft.com/office/powerpoint/2012/main" xmlns:p14="http://schemas.microsoft.com/office/powerpoint/2010/main" xmlns:mc="http://schemas.openxmlformats.org/markup-compatibility/2006" val="SMDATA_15_FLquaRMAAAAlAAAAZAAAAA0AAAAAkAAAAEgAAACQAAAASAAAAAAAAAABAAAAAAAAAAEAAABQAAAAAAAAAAAA4D8AAAAAAADgPwAAAAAAAOA/AAAAAAAA4D8AAAAAAADgPwAAAAAAAOA/AAAAAAAA4D8AAAAAAADgPwAAAAAAAOA/AAAAAAAA4D8CAAAAjAAAAAAAAAAAAAAAW5vVDP///wgAAAAAAAAAAAAAAAAAAAAAAAAAAAAAAAAAAAAAZAAAAAEAAABAAAAAAAAAAAAAAAAAAAAAAAAAAAAAAAAAAAAAAAAAAAAAAAAAAAAAAAAAAAAAAAAAAAAAAAAAAAAAAAAAAAAAAAAAAAAAAAAAAAAAAAAAAAAAAAAAAAAAFAAAADwAAAAAAAAAAAAAAAAAAAkUAAAAAQAAABQAAAAUAAAAFAAAAAEAAAAAAAAAZAAAAGQAAAAAAAAAZAAAAGQAAAAVAAAAYAAAAAAAAAAAAAAADwAAACADAAAAAAAAAAAAAAEAAACgMgAAVgcAAKr4//8BAAAAf39/AAEAAABkAAAAAAAAABQAAABAHwAAAAAAACYAAAAAAAAAwOD//wAAAAAmAAAAZAAAABYAAABMAAAAAAAAAAAAAAAEAAAAAAAAAAEAAADn5uYKAAAAACgAAAAoAAAAZAAAAGQAAAAAAAAAzMzMAAAAAABQAAAAUAAAAGQAAABkAAAAAAAAABcAAAAUAAAAAAAAAAAAAAD/fwAA/38AAAAAAAAJAAAABAAAAF8AYAAeAAAAaAAAAAAAAAAAAAAAAAAAAAAAAAAAAAAAECcAABAnAAAAAAAAAAAAAAAAAAAAAAAAAAAAAAAAAAAAAAAAAAAAABQAAAAAAAAAwMD/AAAAAABkAAAAMgAAAAAAAABkAAAAAAAAAH9/fwAKAAAAIgAAABgAAAAAAAAAAAAAAAAAAAAAAAAAAAAAAAAAAAAkAAAAJAAAAAAAAAAHAAAAAAAAAAAAAAAAAAAAAAAAAAAAAAAAAAAAf39/ACUAAABYAAAAAAAAAAAAAAAAAAAAAAAAAAAAAAAAAAAAAAAAAAAAAAAAAAAAAAAAAAAAAAA/AAAAAAAAAKCGAQAAAAAAAAAAAAAAAAAMAAAAAQAAAAAAAAAAAAAAAAAAAB8AAABUAAAAAAAABQAAAAEAAAAAAAAAAAAAAAAAAAAAAAAAAAAAAAAAAAAAAAAAAAAAAAJ/f38AAAAAA8zMzADAwP8Af39/AAAAAAAAAAAAAAAAAAAAAAAAAAAAIQAAABgAAAAUAAAAKAUAABonAAAIFgAAWSkAABAAAAAmAAAACAAAAAAAAAAAAAAA"/>
+                <pr:smNativeData xmlns:mc="http://schemas.openxmlformats.org/markup-compatibility/2006" xmlns:p14="http://schemas.microsoft.com/office/powerpoint/2010/main" xmlns:p15="http://schemas.microsoft.com/office/powerpoint/2012/main" xmlns:pr="smNativeData" xmlns="smNativeData" val="SMDATA_15_FLquaRMAAAAlAAAAZAAAAA0AAAAAkAAAAEgAAACQAAAASAAAAAAAAAABAAAAAAAAAAEAAABQAAAAAAAAAAAA4D8AAAAAAADgPwAAAAAAAOA/AAAAAAAA4D8AAAAAAADgPwAAAAAAAOA/AAAAAAAA4D8AAAAAAADgPwAAAAAAAOA/AAAAAAAA4D8CAAAAjAAAAAAAAAAAAAAAW5vVDP///wgAAAAAAAAAAAAAAAAAAAAAAAAAAAAAAAAAAAAAZAAAAAEAAABAAAAAAAAAAAAAAAAAAAAAAAAAAAAAAAAAAAAAAAAAAAAAAAAAAAAAAAAAAAAAAAAAAAAAAAAAAAAAAAAAAAAAAAAAAAAAAAAAAAAAAAAAAAAAAAAAAAAAFAAAADwAAAAAAAAAAAAAAAAAAAkUAAAAAQAAABQAAAAUAAAAFAAAAAEAAAAAAAAAZAAAAGQAAAAAAAAAZAAAAGQAAAAVAAAAYAAAAAAAAAAAAAAADwAAACADAAAAAAAAAAAAAAEAAACgMgAAVgcAAKr4//8BAAAAf39/AAEAAABkAAAAAAAAABQAAABAHwAAAAAAACYAAAAAAAAAwOD//wAAAAAmAAAAZAAAABYAAABMAAAAAAAAAAAAAAAEAAAAAAAAAAEAAADn5uYKAAAAACgAAAAoAAAAZAAAAGQAAAAAAAAAzMzMAAAAAABQAAAAUAAAAGQAAABkAAAAAAAAABcAAAAUAAAAAAAAAAAAAAD/fwAA/38AAAAAAAAJAAAABAAAAF8AYAAeAAAAaAAAAAAAAAAAAAAAAAAAAAAAAAAAAAAAECcAABAnAAAAAAAAAAAAAAAAAAAAAAAAAAAAAAAAAAAAAAAAAAAAABQAAAAAAAAAwMD/AAAAAABkAAAAMgAAAAAAAABkAAAAAAAAAH9/fwAKAAAAIgAAABgAAAAAAAAAAAAAAAAAAAAAAAAAAAAAAAAAAAAkAAAAJAAAAAAAAAAHAAAAAAAAAAAAAAAAAAAAAAAAAAAAAAAAAAAAf39/ACUAAABYAAAAAAAAAAAAAAAAAAAAAAAAAAAAAAAAAAAAAAAAAAAAAAAAAAAAAAAAAAAAAAA/AAAAAAAAAKCGAQAAAAAAAAAAAAAAAAAMAAAAAQAAAAAAAAAAAAAAAAAAAB8AAABUAAAAAAAABQAAAAEAAAAAAAAAAAAAAAAAAAAAAAAAAAAAAAAAAAAAAAAAAAAAAAJ/f38AAAAAA8zMzADAwP8Af39/AAAAAAAAAAAAAAAAAAAAAAAAAAAAIQAAABgAAAAUAAAAKAUAABonAAAIFgAAWSkAABAAAAAmAAAACAAAAAAAAAAAAAAA"/>
               </a:ext>
             </a:extLst>
           </p:cNvSpPr>
@@ -413,7 +413,7 @@
               <a:defRPr lang="en-US"/>
             </a:pPr>
             <a:fld id="{30AEBC93-DDDD-FB4A-9316-2B1FF258657E}" type="datetime1">
-              <a:t>4/21/2026</a:t>
+              <a:t>6/3/2026</a:t>
             </a:fld>
             <a:endParaRPr/>
           </a:p>
@@ -426,7 +426,7 @@
             <a:spLocks noGrp="1" noChangeArrowheads="1"/>
             <a:extLst>
               <a:ext uri="smNativeData">
-                <pr:smNativeData xmlns="smNativeData" xmlns:pr="smNativeData" xmlns:p15="http://schemas.microsoft.com/office/powerpoint/2012/main" xmlns:p14="http://schemas.microsoft.com/office/powerpoint/2010/main" xmlns:mc="http://schemas.openxmlformats.org/markup-compatibility/2006" val="SMDATA_15_FLquaRMAAAAlAAAAZAAAAA0AAAAAkAAAAEgAAACQAAAASAAAAAAAAAABAAAAAAAAAAEAAABQAAAAAAAAAAAA4D8AAAAAAADgPwAAAAAAAOA/AAAAAAAA4D8AAAAAAADgPwAAAAAAAOA/AAAAAAAA4D8AAAAAAADgPwAAAAAAAOA/AAAAAAAA4D8CAAAAjAAAAAAAAAAAAAAAW5vVDP///wgAAAAAAAAAAAAAAAAAAAAAAAAAAAAAAAAAAAAAZAAAAAEAAABAAAAAAAAAAAAAAAAAAAAAAAAAAAAAAAAAAAAAAAAAAAAAAAAAAAAAAAAAAAAAAAAAAAAAAAAAAAAAAAAAAAAAAAAAAAAAAAAAAAAAAAAAAAAAAAAAAAAAFAAAADwAAAAAAAAAAAAAAAAAAAkUAAAAAQAAABQAAAAUAAAAFAAAAAEAAAAAAAAAZAAAAGQAAAAAAAAAZAAAAGQAAAAVAAAAYAAAAAAAAAAAAAAADwAAACADAAAAAAAAAAAAAAEAAACgMgAAVgcAAKr4//8BAAAAf39/AAEAAABkAAAAAAAAABQAAABAHwAAAAAAACYAAAAAAAAAwOD//wAAAAAmAAAAZAAAABYAAABMAAAAAAAAAAAAAAAEAAAAAAAAAAEAAADn5uYKAAAAACgAAAAoAAAAZAAAAGQAAAAAAAAAzMzMAAAAAABQAAAAUAAAAGQAAABkAAAAAAAAABcAAAAUAAAAAAAAAAAAAAD/fwAA/38AAAAAAAAJAAAABAAAAKS+1QseAAAAaAAAAAAAAAAAAAAAAAAAAAAAAAAAAAAAECcAABAnAAAAAAAAAAAAAAAAAAAAAAAAAAAAAAAAAAAAAAAAAAAAABQAAAAAAAAAwMD/AAAAAABkAAAAMgAAAAAAAABkAAAAAAAAAH9/fwAKAAAAIgAAABgAAAAAAAAAAAAAAAAAAAAAAAAAAAAAAAAAAAAkAAAAJAAAAAAAAAAHAAAAAAAAAAAAAAAAAAAAAAAAAAAAAAAAAAAAf39/ACUAAABYAAAAAAAAAAAAAAAAAAAAAAAAAAAAAAAAAAAAAAAAAAAAAAAAAAAAAAAAAAAAAAA/AAAAAAAAAKCGAQAAAAAAAAAAAAAAAAAMAAAAAQAAAAAAAAAAAAAAAAAAAB8AAABUAAAAAAAABQAAAAEAAAAAAAAAAAAAAAAAAAAAAAAAAAAAAAAAAAAAAAAAAAAAAAJ/f38AAAAAA8zMzADAwP8Af39/AAAAAAAAAAAAAAAAAAAAAAAAAAAAIQAAABgAAAAUAAAA2BgAABonAAAoMgAAWSkAABAAAAAmAAAACAAAAAAAAAAAAAAA"/>
+                <pr:smNativeData xmlns:mc="http://schemas.openxmlformats.org/markup-compatibility/2006" xmlns:p14="http://schemas.microsoft.com/office/powerpoint/2010/main" xmlns:p15="http://schemas.microsoft.com/office/powerpoint/2012/main" xmlns:pr="smNativeData" xmlns="smNativeData" val="SMDATA_15_FLquaRMAAAAlAAAAZAAAAA0AAAAAkAAAAEgAAACQAAAASAAAAAAAAAABAAAAAAAAAAEAAABQAAAAAAAAAAAA4D8AAAAAAADgPwAAAAAAAOA/AAAAAAAA4D8AAAAAAADgPwAAAAAAAOA/AAAAAAAA4D8AAAAAAADgPwAAAAAAAOA/AAAAAAAA4D8CAAAAjAAAAAAAAAAAAAAAW5vVDP///wgAAAAAAAAAAAAAAAAAAAAAAAAAAAAAAAAAAAAAZAAAAAEAAABAAAAAAAAAAAAAAAAAAAAAAAAAAAAAAAAAAAAAAAAAAAAAAAAAAAAAAAAAAAAAAAAAAAAAAAAAAAAAAAAAAAAAAAAAAAAAAAAAAAAAAAAAAAAAAAAAAAAAFAAAADwAAAAAAAAAAAAAAAAAAAkUAAAAAQAAABQAAAAUAAAAFAAAAAEAAAAAAAAAZAAAAGQAAAAAAAAAZAAAAGQAAAAVAAAAYAAAAAAAAAAAAAAADwAAACADAAAAAAAAAAAAAAEAAACgMgAAVgcAAKr4//8BAAAAf39/AAEAAABkAAAAAAAAABQAAABAHwAAAAAAACYAAAAAAAAAwOD//wAAAAAmAAAAZAAAABYAAABMAAAAAAAAAAAAAAAEAAAAAAAAAAEAAADn5uYKAAAAACgAAAAoAAAAZAAAAGQAAAAAAAAAzMzMAAAAAABQAAAAUAAAAGQAAABkAAAAAAAAABcAAAAUAAAAAAAAAAAAAAD/fwAA/38AAAAAAAAJAAAABAAAAKS+1QseAAAAaAAAAAAAAAAAAAAAAAAAAAAAAAAAAAAAECcAABAnAAAAAAAAAAAAAAAAAAAAAAAAAAAAAAAAAAAAAAAAAAAAABQAAAAAAAAAwMD/AAAAAABkAAAAMgAAAAAAAABkAAAAAAAAAH9/fwAKAAAAIgAAABgAAAAAAAAAAAAAAAAAAAAAAAAAAAAAAAAAAAAkAAAAJAAAAAAAAAAHAAAAAAAAAAAAAAAAAAAAAAAAAAAAAAAAAAAAf39/ACUAAABYAAAAAAAAAAAAAAAAAAAAAAAAAAAAAAAAAAAAAAAAAAAAAAAAAAAAAAAAAAAAAAA/AAAAAAAAAKCGAQAAAAAAAAAAAAAAAAAMAAAAAQAAAAAAAAAAAAAAAAAAAB8AAABUAAAAAAAABQAAAAEAAAAAAAAAAAAAAAAAAAAAAAAAAAAAAAAAAAAAAAAAAAAAAAJ/f38AAAAAA8zMzADAwP8Af39/AAAAAAAAAAAAAAAAAAAAAAAAAAAAIQAAABgAAAAUAAAA2BgAABonAAAoMgAAWSkAABAAAAAmAAAACAAAAAAAAAAAAAAA"/>
               </a:ext>
             </a:extLst>
           </p:cNvSpPr>
@@ -453,7 +453,7 @@
             <a:spLocks noGrp="1" noChangeArrowheads="1"/>
             <a:extLst>
               <a:ext uri="smNativeData">
-                <pr:smNativeData xmlns="smNativeData" xmlns:pr="smNativeData" xmlns:p15="http://schemas.microsoft.com/office/powerpoint/2012/main" xmlns:p14="http://schemas.microsoft.com/office/powerpoint/2010/main" xmlns:mc="http://schemas.openxmlformats.org/markup-compatibility/2006" val="SMDATA_15_FLquaRMAAAAlAAAAZAAAAA0AAAAAkAAAAEgAAACQAAAASAAAAAAAAAABAAAAAAAAAAEAAABQAAAAAAAAAAAA4D8AAAAAAADgPwAAAAAAAOA/AAAAAAAA4D8AAAAAAADgPwAAAAAAAOA/AAAAAAAA4D8AAAAAAADgPwAAAAAAAOA/AAAAAAAA4D8CAAAAjAAAAAAAAAAAAAAAW5vVDP///wgAAAAAAAAAAAAAAAAAAAAAAAAAAAAAAAAAAAAAZAAAAAEAAABAAAAAAAAAAAAAAAAAAAAAAAAAAAAAAAAAAAAAAAAAAAAAAAAAAAAAAAAAAAAAAAAAAAAAAAAAAAAAAAAAAAAAAAAAAAAAAAAAAAAAAAAAAAAAAAAAAAAAFAAAADwAAAAAAAAAAAAAAAAAAAkUAAAAAQAAABQAAAAUAAAAFAAAAAEAAAAAAAAAZAAAAGQAAAAAAAAAZAAAAGQAAAAVAAAAYAAAAAAAAAAAAAAADwAAACADAAAAAAAAAAAAAAEAAACgMgAAVgcAAKr4//8BAAAAf39/AAEAAABkAAAAAAAAABQAAABAHwAAAAAAACYAAAAAAAAAwOD//wAAAAAmAAAAZAAAABYAAABMAAAAAAAAAAAAAAAEAAAAAAAAAAEAAADn5uYKAAAAACgAAAAoAAAAZAAAAGQAAAAAAAAAzMzMAAAAAABQAAAAUAAAAGQAAABkAAAAAAAAABcAAAAUAAAAAAAAAAAAAAD/fwAA/38AAAAAAAAJAAAABAAAAEwPxw0eAAAAaAAAAAAAAAAAAAAAAAAAAAAAAAAAAAAAECcAABAnAAAAAAAAAAAAAAAAAAAAAAAAAAAAAAAAAAAAAAAAAAAAABQAAAAAAAAAwMD/AAAAAABkAAAAMgAAAAAAAABkAAAAAAAAAH9/fwAKAAAAIgAAABgAAAAAAAAAAAAAAAAAAAAAAAAAAAAAAAAAAAAkAAAAJAAAAAAAAAAHAAAAAAAAAAAAAAAAAAAAAAAAAAAAAAAAAAAAf39/ACUAAABYAAAAAAAAAAAAAAAAAAAAAAAAAAAAAAAAAAAAAAAAAAAAAAAAAAAAAAAAAAAAAAA/AAAAAAAAAKCGAQAAAAAAAAAAAAAAAAAMAAAAAQAAAAAAAAAAAAAAAAAAAB8AAABUAAAAAAAABQAAAAEAAAAAAAAAAAAAAAAAAAAAAAAAAAAAAAAAAAAAAAAAAAAAAAJ/f38AAAAAA8zMzADAwP8Af39/AAAAAAAAAAAAAAAAAAAAAAAAAAAAIQAAABgAAAAUAAAA+DQAABonAADYRQAAWSkAABAAAAAmAAAACAAAAAAAAAAAAAAA"/>
+                <pr:smNativeData xmlns:mc="http://schemas.openxmlformats.org/markup-compatibility/2006" xmlns:p14="http://schemas.microsoft.com/office/powerpoint/2010/main" xmlns:p15="http://schemas.microsoft.com/office/powerpoint/2012/main" xmlns:pr="smNativeData" xmlns="smNativeData" val="SMDATA_15_FLquaRMAAAAlAAAAZAAAAA0AAAAAkAAAAEgAAACQAAAASAAAAAAAAAABAAAAAAAAAAEAAABQAAAAAAAAAAAA4D8AAAAAAADgPwAAAAAAAOA/AAAAAAAA4D8AAAAAAADgPwAAAAAAAOA/AAAAAAAA4D8AAAAAAADgPwAAAAAAAOA/AAAAAAAA4D8CAAAAjAAAAAAAAAAAAAAAW5vVDP///wgAAAAAAAAAAAAAAAAAAAAAAAAAAAAAAAAAAAAAZAAAAAEAAABAAAAAAAAAAAAAAAAAAAAAAAAAAAAAAAAAAAAAAAAAAAAAAAAAAAAAAAAAAAAAAAAAAAAAAAAAAAAAAAAAAAAAAAAAAAAAAAAAAAAAAAAAAAAAAAAAAAAAFAAAADwAAAAAAAAAAAAAAAAAAAkUAAAAAQAAABQAAAAUAAAAFAAAAAEAAAAAAAAAZAAAAGQAAAAAAAAAZAAAAGQAAAAVAAAAYAAAAAAAAAAAAAAADwAAACADAAAAAAAAAAAAAAEAAACgMgAAVgcAAKr4//8BAAAAf39/AAEAAABkAAAAAAAAABQAAABAHwAAAAAAACYAAAAAAAAAwOD//wAAAAAmAAAAZAAAABYAAABMAAAAAAAAAAAAAAAEAAAAAAAAAAEAAADn5uYKAAAAACgAAAAoAAAAZAAAAGQAAAAAAAAAzMzMAAAAAABQAAAAUAAAAGQAAABkAAAAAAAAABcAAAAUAAAAAAAAAAAAAAD/fwAA/38AAAAAAAAJAAAABAAAAEwPxw0eAAAAaAAAAAAAAAAAAAAAAAAAAAAAAAAAAAAAECcAABAnAAAAAAAAAAAAAAAAAAAAAAAAAAAAAAAAAAAAAAAAAAAAABQAAAAAAAAAwMD/AAAAAABkAAAAMgAAAAAAAABkAAAAAAAAAH9/fwAKAAAAIgAAABgAAAAAAAAAAAAAAAAAAAAAAAAAAAAAAAAAAAAkAAAAJAAAAAAAAAAHAAAAAAAAAAAAAAAAAAAAAAAAAAAAAAAAAAAAf39/ACUAAABYAAAAAAAAAAAAAAAAAAAAAAAAAAAAAAAAAAAAAAAAAAAAAAAAAAAAAAAAAAAAAAA/AAAAAAAAAKCGAQAAAAAAAAAAAAAAAAAMAAAAAQAAAAAAAAAAAAAAAAAAAB8AAABUAAAAAAAABQAAAAEAAAAAAAAAAAAAAAAAAAAAAAAAAAAAAAAAAAAAAAAAAAAAAAJ/f38AAAAAA8zMzADAwP8Af39/AAAAAAAAAAAAAAAAAAAAAAAAAAAAIQAAABgAAAAUAAAA+DQAABonAADYRQAAWSkAABAAAAAmAAAACAAAAAAAAAAAAAAA"/>
               </a:ext>
             </a:extLst>
           </p:cNvSpPr>
@@ -509,7 +509,7 @@
             <a:spLocks noGrp="1" noChangeArrowheads="1"/>
             <a:extLst>
               <a:ext uri="smNativeData">
-                <pr:smNativeData xmlns="smNativeData" xmlns:pr="smNativeData" xmlns:p15="http://schemas.microsoft.com/office/powerpoint/2012/main" xmlns:p14="http://schemas.microsoft.com/office/powerpoint/2010/main" xmlns:mc="http://schemas.openxmlformats.org/markup-compatibility/2006" val="SMDATA_15_FLquaRMAAAAlAAAAZAAAAA0AAAAAkAAAAEgAAACQAAAASAAAAAAAAAABAAAAAAAAAAEAAABQAAAAAAAAAAAA4D8AAAAAAADgPwAAAAAAAOA/AAAAAAAA4D8AAAAAAADgPwAAAAAAAOA/AAAAAAAA4D8AAAAAAADgPwAAAAAAAOA/AAAAAAAA4D8CAAAAjAAAAAAAAAAAAAAAW5vVDP///wgAAAAAAAAAAAAAAAAAAAAAAAAAAAAAAAAAAAAAZAAAAAEAAABAAAAAAAAAAAAAAAAAAAAAAAAAAAAAAAAAAAAAAAAAAAAAAAAAAAAAAAAAAAAAAAAAAAAAAAAAAAAAAAAAAAAAAAAAAAAAAAAAAAAAAAAAAAAAAAAAAAAAFAAAADwAAAAAAAAAAAAAAAAAAAkUAAAAAQAAABQAAAAUAAAAFAAAAAEAAAAAAAAAZAAAAGQAAAAAAAAAZAAAAGQAAAAVAAAAYAAAAAAAAAAAAAAADwAAACADAAAAAAAAAAAAAAEAAACgMgAAVgcAAKr4//8BAAAAf39/AAEAAABkAAAAAAAAABQAAABAHwAAAAAAACYAAAAAAAAAwOD//wAAAAAmAAAAZAAAABYAAABMAAAAAAAAAAAAAAAEAAAAAAAAAAEAAADn5uYKAAAAACgAAAAoAAAAZAAAAGQAAAAAAAAAzMzMAAAAAABQAAAAUAAAAGQAAABkAAAAAAAAABcAAAAUAAAAAAAAAAAAAAD/fwAA/38AAAAAAAAJAAAABAAAAAAAAAAeAAAAaAAAAAAAAAAAAAAAAAAAAAAAAAAAAAAAECcAABAnAAAAAAAAAAAAAAAAAAAAAAAAAAAAAAAAAAAAAAAAAAAAABQAAAAAAAAAwMD/AAAAAABkAAAAMgAAAAAAAABkAAAAAAAAAH9/fwAKAAAAIgAAABgAAAAAAAAAAAAAAAAAAAAAAAAAAAAAAAAAAAAkAAAAJAAAAAAAAAAHAAAAAAAAAAAAAAAAAAAAAAAAAAAAAAAAAAAAf39/ACUAAABYAAAAAAAAAAAAAAAAAAAAAAAAAAAAAAAAAAAAAAAAAAAAAAAAAAAAAAAAAAAAAAA/AAAAAAAAAKCGAQAAAAAAAAAAAAAAAAAMAAAAAQAAAAAAAAAAAAAAAAAAAB8AAABUAAAAAAAABQAAAAEAAAAAAAAAAAAAAAAAAAAAAAAAAAAAAAAAAAAAAAAAAAAAAAJ/f38AAAAAA8zMzADAwP8Af39/AAAAAAAAAAAAAAAAAAAAAAAAAAAAIQAAABgAAAAUAAAAKAUAAD8CAADYRQAAZwoAABAAAAAmAAAACAAAAAAAAAAAAAAA"/>
+                <pr:smNativeData xmlns:mc="http://schemas.openxmlformats.org/markup-compatibility/2006" xmlns:p14="http://schemas.microsoft.com/office/powerpoint/2010/main" xmlns:p15="http://schemas.microsoft.com/office/powerpoint/2012/main" xmlns:pr="smNativeData" xmlns="smNativeData" val="SMDATA_15_FLquaRMAAAAlAAAAZAAAAA0AAAAAkAAAAEgAAACQAAAASAAAAAAAAAABAAAAAAAAAAEAAABQAAAAAAAAAAAA4D8AAAAAAADgPwAAAAAAAOA/AAAAAAAA4D8AAAAAAADgPwAAAAAAAOA/AAAAAAAA4D8AAAAAAADgPwAAAAAAAOA/AAAAAAAA4D8CAAAAjAAAAAAAAAAAAAAAW5vVDP///wgAAAAAAAAAAAAAAAAAAAAAAAAAAAAAAAAAAAAAZAAAAAEAAABAAAAAAAAAAAAAAAAAAAAAAAAAAAAAAAAAAAAAAAAAAAAAAAAAAAAAAAAAAAAAAAAAAAAAAAAAAAAAAAAAAAAAAAAAAAAAAAAAAAAAAAAAAAAAAAAAAAAAFAAAADwAAAAAAAAAAAAAAAAAAAkUAAAAAQAAABQAAAAUAAAAFAAAAAEAAAAAAAAAZAAAAGQAAAAAAAAAZAAAAGQAAAAVAAAAYAAAAAAAAAAAAAAADwAAACADAAAAAAAAAAAAAAEAAACgMgAAVgcAAKr4//8BAAAAf39/AAEAAABkAAAAAAAAABQAAABAHwAAAAAAACYAAAAAAAAAwOD//wAAAAAmAAAAZAAAABYAAABMAAAAAAAAAAAAAAAEAAAAAAAAAAEAAADn5uYKAAAAACgAAAAoAAAAZAAAAGQAAAAAAAAAzMzMAAAAAABQAAAAUAAAAGQAAABkAAAAAAAAABcAAAAUAAAAAAAAAAAAAAD/fwAA/38AAAAAAAAJAAAABAAAAAAAAAAeAAAAaAAAAAAAAAAAAAAAAAAAAAAAAAAAAAAAECcAABAnAAAAAAAAAAAAAAAAAAAAAAAAAAAAAAAAAAAAAAAAAAAAABQAAAAAAAAAwMD/AAAAAABkAAAAMgAAAAAAAABkAAAAAAAAAH9/fwAKAAAAIgAAABgAAAAAAAAAAAAAAAAAAAAAAAAAAAAAAAAAAAAkAAAAJAAAAAAAAAAHAAAAAAAAAAAAAAAAAAAAAAAAAAAAAAAAAAAAf39/ACUAAABYAAAAAAAAAAAAAAAAAAAAAAAAAAAAAAAAAAAAAAAAAAAAAAAAAAAAAAAAAAAAAAA/AAAAAAAAAKCGAQAAAAAAAAAAAAAAAAAMAAAAAQAAAAAAAAAAAAAAAAAAAB8AAABUAAAAAAAABQAAAAEAAAAAAAAAAAAAAAAAAAAAAAAAAAAAAAAAAAAAAAAAAAAAAAJ/f38AAAAAA8zMzADAwP8Af39/AAAAAAAAAAAAAAAAAAAAAAAAAAAAIQAAABgAAAAUAAAAKAUAAD8CAADYRQAAZwoAABAAAAAmAAAACAAAAAAAAAAAAAAA"/>
               </a:ext>
             </a:extLst>
           </p:cNvSpPr>
@@ -538,7 +538,7 @@
             <a:spLocks noGrp="1" noChangeArrowheads="1"/>
             <a:extLst>
               <a:ext uri="smNativeData">
-                <pr:smNativeData xmlns="smNativeData" xmlns:pr="smNativeData" xmlns:p15="http://schemas.microsoft.com/office/powerpoint/2012/main" xmlns:p14="http://schemas.microsoft.com/office/powerpoint/2010/main" xmlns:mc="http://schemas.openxmlformats.org/markup-compatibility/2006" val="SMDATA_15_FLquaRMAAAAlAAAAZAAAAA0AAAAAkAAAAEgAAACQAAAASAAAAAAAAAAAAAAAAQAAAAEAAABQAAAAAAAAAAAA4D8AAAAAAADgPwAAAAAAAOA/AAAAAAAA4D8AAAAAAADgPwAAAAAAAOA/AAAAAAAA4D8AAAAAAADgPwAAAAAAAOA/AAAAAAAA4D8CAAAAjAAAAAAAAAAAAAAAW5vVDP///wgAAAAAAAAAAAAAAAAAAAAAAAAAAAAAAAAAAAAAZAAAAAEAAABAAAAAAAAAAAAAAAAAAAAAAAAAAAAAAAAAAAAAAAAAAAAAAAAAAAAAAAAAAAAAAAAAAAAAAAAAAAAAAAAAAAAAAAAAAAAAAAAAAAAAAAAAAAAAAAAAAAAAFAAAADwAAAAAAAAAAAAAAAAAAAkUAAAAAQAAABQAAAAUAAAAFAAAAAEAAAAAAAAAZAAAAGQAAAAAAAAAZAAAAGQAAAAVAAAAYAAAAAAAAAAAAAAADwAAACADAAAAAAAAAAAAAAEAAACgMgAAVgcAAKr4//8BAAAAf39/AAEAAABkAAAAAAAAABQAAABAHwAAAAAAACYAAAAAAAAAwOD//wAAAAAmAAAAZAAAABYAAABMAAAAAAAAAAAAAAAEAAAAAAAAAAEAAADn5uYKAAAAACgAAAAoAAAAZAAAAGQAAAAAAAAAzMzMAAAAAABQAAAAUAAAAGQAAABkAAAAAAAAABcAAAAUAAAAAAAAAAAAAAD/fwAA/38AAAAAAAAJAAAABAAAAAAAAAAeAAAAaAAAAAAAAAAAAAAAAAAAAAAAAAAAAAAAECcAABAnAAAAAAAAAAAAAAAAAAAAAAAAAAAAAAAAAAAAAAAAAAAAABQAAAAAAAAAwMD/AAAAAABkAAAAMgAAAAAAAABkAAAAAAAAAH9/fwAKAAAAIgAAABgAAAAAAAAAAAAAAAAAAAAAAAAAAAAAAAAAAAAkAAAAJAAAAAAAAAAHAAAAAAAAAAAAAAAAAAAAAAAAAAAAAAAAAAAAf39/ACUAAABYAAAAAAAAAAAAAAAAAAAAAAAAAAAAAAAAAAAAAAAAAAAAAAAAAAAAAAAAAAAAAAA/AAAAAAAAAKCGAQAAAAAAAAAAAAAAAAAMAAAAAQAAAAAAAAAAAAAAAAAAAB8AAABUAAAAAAAABQAAAAEAAAAAAAAAAAAAAAAAAAAAAAAAAAAAAAAAAAAAAAAAAAAAAAJ/f38AAAAAA8zMzADAwP8Af39/AAAAAAAAAAAAAAAAAAAAAAAAAAAAIQAAABgAAAAUAAAAKAUAADsLAADYRQAAACYAABAAAAAmAAAACAAAAAIAAAAAAAAA"/>
+                <pr:smNativeData xmlns:mc="http://schemas.openxmlformats.org/markup-compatibility/2006" xmlns:p14="http://schemas.microsoft.com/office/powerpoint/2010/main" xmlns:p15="http://schemas.microsoft.com/office/powerpoint/2012/main" xmlns:pr="smNativeData" xmlns="smNativeData" val="SMDATA_15_FLquaRMAAAAlAAAAZAAAAA0AAAAAkAAAAEgAAACQAAAASAAAAAAAAAAAAAAAAQAAAAEAAABQAAAAAAAAAAAA4D8AAAAAAADgPwAAAAAAAOA/AAAAAAAA4D8AAAAAAADgPwAAAAAAAOA/AAAAAAAA4D8AAAAAAADgPwAAAAAAAOA/AAAAAAAA4D8CAAAAjAAAAAAAAAAAAAAAW5vVDP///wgAAAAAAAAAAAAAAAAAAAAAAAAAAAAAAAAAAAAAZAAAAAEAAABAAAAAAAAAAAAAAAAAAAAAAAAAAAAAAAAAAAAAAAAAAAAAAAAAAAAAAAAAAAAAAAAAAAAAAAAAAAAAAAAAAAAAAAAAAAAAAAAAAAAAAAAAAAAAAAAAAAAAFAAAADwAAAAAAAAAAAAAAAAAAAkUAAAAAQAAABQAAAAUAAAAFAAAAAEAAAAAAAAAZAAAAGQAAAAAAAAAZAAAAGQAAAAVAAAAYAAAAAAAAAAAAAAADwAAACADAAAAAAAAAAAAAAEAAACgMgAAVgcAAKr4//8BAAAAf39/AAEAAABkAAAAAAAAABQAAABAHwAAAAAAACYAAAAAAAAAwOD//wAAAAAmAAAAZAAAABYAAABMAAAAAAAAAAAAAAAEAAAAAAAAAAEAAADn5uYKAAAAACgAAAAoAAAAZAAAAGQAAAAAAAAAzMzMAAAAAABQAAAAUAAAAGQAAABkAAAAAAAAABcAAAAUAAAAAAAAAAAAAAD/fwAA/38AAAAAAAAJAAAABAAAAAAAAAAeAAAAaAAAAAAAAAAAAAAAAAAAAAAAAAAAAAAAECcAABAnAAAAAAAAAAAAAAAAAAAAAAAAAAAAAAAAAAAAAAAAAAAAABQAAAAAAAAAwMD/AAAAAABkAAAAMgAAAAAAAABkAAAAAAAAAH9/fwAKAAAAIgAAABgAAAAAAAAAAAAAAAAAAAAAAAAAAAAAAAAAAAAkAAAAJAAAAAAAAAAHAAAAAAAAAAAAAAAAAAAAAAAAAAAAAAAAAAAAf39/ACUAAABYAAAAAAAAAAAAAAAAAAAAAAAAAAAAAAAAAAAAAAAAAAAAAAAAAAAAAAAAAAAAAAA/AAAAAAAAAKCGAQAAAAAAAAAAAAAAAAAMAAAAAQAAAAAAAAAAAAAAAAAAAB8AAABUAAAAAAAABQAAAAEAAAAAAAAAAAAAAAAAAAAAAAAAAAAAAAAAAAAAAAAAAAAAAAJ/f38AAAAAA8zMzADAwP8Af39/AAAAAAAAAAAAAAAAAAAAAAAAAAAAIQAAABgAAAAUAAAAKAUAADsLAADYRQAAACYAABAAAAAmAAAACAAAAAIAAAAAAAAA"/>
               </a:ext>
             </a:extLst>
           </p:cNvSpPr>
@@ -603,7 +603,7 @@
             <a:spLocks noGrp="1" noChangeArrowheads="1"/>
             <a:extLst>
               <a:ext uri="smNativeData">
-                <pr:smNativeData xmlns="smNativeData" xmlns:pr="smNativeData" xmlns:p15="http://schemas.microsoft.com/office/powerpoint/2012/main" xmlns:p14="http://schemas.microsoft.com/office/powerpoint/2010/main" xmlns:mc="http://schemas.openxmlformats.org/markup-compatibility/2006" val="SMDATA_15_FLquaRMAAAAlAAAAZAAAAA0AAAAAkAAAAEgAAACQAAAASAAAAAAAAAABAAAAAAAAAAEAAABQAAAAAAAAAAAA4D8AAAAAAADgPwAAAAAAAOA/AAAAAAAA4D8AAAAAAADgPwAAAAAAAOA/AAAAAAAA4D8AAAAAAADgPwAAAAAAAOA/AAAAAAAA4D8CAAAAjAAAAAAAAAAAAAAAW5vVDP///wgAAAAAAAAAAAAAAAAAAAAAAAAAAAAAAAAAAAAAZAAAAAEAAABAAAAAAAAAAAAAAAAAAAAAAAAAAAAAAAAAAAAAAAAAAAAAAAAAAAAAAAAAAAAAAAAAAAAAAAAAAAAAAAAAAAAAAAAAAAAAAAAAAAAAAAAAAAAAAAAAAAAAFAAAADwAAAAAAAAAAAAAAAAAAAkUAAAAAQAAABQAAAAUAAAAFAAAAAEAAAAAAAAAZAAAAGQAAAAAAAAAZAAAAGQAAAAVAAAAYAAAAAAAAAAAAAAADwAAACADAAAAAAAAAAAAAAEAAACgMgAAVgcAAKr4//8BAAAAf39/AAEAAABkAAAAAAAAABQAAABAHwAAAAAAACYAAAAAAAAAwOD//wAAAAAmAAAAZAAAABYAAABMAAAAAAAAAAAAAAAEAAAAAAAAAAEAAADn5uYKAAAAACgAAAAoAAAAZAAAAGQAAAAAAAAAzMzMAAAAAABQAAAAUAAAAGQAAABkAAAAAAAAABcAAAAUAAAAAAAAAAAAAAD/fwAA/38AAAAAAAAJAAAABAAAAAAAAAAeAAAAaAAAAAAAAAAAAAAAAAAAAAAAAAAAAAAAECcAABAnAAAAAAAAAAAAAAAAAAAAAAAAAAAAAAAAAAAAAAAAAAAAABQAAAAAAAAAwMD/AAAAAABkAAAAMgAAAAAAAABkAAAAAAAAAH9/fwAKAAAAIgAAABgAAAAAAAAAAAAAAAAAAAAAAAAAAAAAAAAAAAAkAAAAJAAAAAAAAAAHAAAAAAAAAAAAAAAAAAAAAAAAAAAAAAAAAAAAf39/ACUAAABYAAAAAAAAAAAAAAAAAAAAAAAAAAAAAAAAAAAAAAAAAAAAAAAAAAAAAAAAAAAAAAA/AAAAAAAAAKCGAQAAAAAAAAAAAAAAAAAMAAAAAQAAAAAAAAAAAAAAAAAAAB8AAABUAAAAAAAABQAAAAEAAAAAAAAAAAAAAAAAAAAAAAAAAAAAAAAAAAAAAAAAAAAAAAJ/f38AAAAAA8zMzADAwP8Af39/AAAAAAAAAAAAAAAAAAAAAAAAAAAAIQAAABgAAAAUAAAAKAUAABonAAAIFgAAWSkAABAAAAAmAAAACAAAAAAAAAAAAAAA"/>
+                <pr:smNativeData xmlns:mc="http://schemas.openxmlformats.org/markup-compatibility/2006" xmlns:p14="http://schemas.microsoft.com/office/powerpoint/2010/main" xmlns:p15="http://schemas.microsoft.com/office/powerpoint/2012/main" xmlns:pr="smNativeData" xmlns="smNativeData" val="SMDATA_15_FLquaRMAAAAlAAAAZAAAAA0AAAAAkAAAAEgAAACQAAAASAAAAAAAAAABAAAAAAAAAAEAAABQAAAAAAAAAAAA4D8AAAAAAADgPwAAAAAAAOA/AAAAAAAA4D8AAAAAAADgPwAAAAAAAOA/AAAAAAAA4D8AAAAAAADgPwAAAAAAAOA/AAAAAAAA4D8CAAAAjAAAAAAAAAAAAAAAW5vVDP///wgAAAAAAAAAAAAAAAAAAAAAAAAAAAAAAAAAAAAAZAAAAAEAAABAAAAAAAAAAAAAAAAAAAAAAAAAAAAAAAAAAAAAAAAAAAAAAAAAAAAAAAAAAAAAAAAAAAAAAAAAAAAAAAAAAAAAAAAAAAAAAAAAAAAAAAAAAAAAAAAAAAAAFAAAADwAAAAAAAAAAAAAAAAAAAkUAAAAAQAAABQAAAAUAAAAFAAAAAEAAAAAAAAAZAAAAGQAAAAAAAAAZAAAAGQAAAAVAAAAYAAAAAAAAAAAAAAADwAAACADAAAAAAAAAAAAAAEAAACgMgAAVgcAAKr4//8BAAAAf39/AAEAAABkAAAAAAAAABQAAABAHwAAAAAAACYAAAAAAAAAwOD//wAAAAAmAAAAZAAAABYAAABMAAAAAAAAAAAAAAAEAAAAAAAAAAEAAADn5uYKAAAAACgAAAAoAAAAZAAAAGQAAAAAAAAAzMzMAAAAAABQAAAAUAAAAGQAAABkAAAAAAAAABcAAAAUAAAAAAAAAAAAAAD/fwAA/38AAAAAAAAJAAAABAAAAAAAAAAeAAAAaAAAAAAAAAAAAAAAAAAAAAAAAAAAAAAAECcAABAnAAAAAAAAAAAAAAAAAAAAAAAAAAAAAAAAAAAAAAAAAAAAABQAAAAAAAAAwMD/AAAAAABkAAAAMgAAAAAAAABkAAAAAAAAAH9/fwAKAAAAIgAAABgAAAAAAAAAAAAAAAAAAAAAAAAAAAAAAAAAAAAkAAAAJAAAAAAAAAAHAAAAAAAAAAAAAAAAAAAAAAAAAAAAAAAAAAAAf39/ACUAAABYAAAAAAAAAAAAAAAAAAAAAAAAAAAAAAAAAAAAAAAAAAAAAAAAAAAAAAAAAAAAAAA/AAAAAAAAAKCGAQAAAAAAAAAAAAAAAAAMAAAAAQAAAAAAAAAAAAAAAAAAAB8AAABUAAAAAAAABQAAAAEAAAAAAAAAAAAAAAAAAAAAAAAAAAAAAAAAAAAAAAAAAAAAAAJ/f38AAAAAA8zMzADAwP8Af39/AAAAAAAAAAAAAAAAAAAAAAAAAAAAIQAAABgAAAAUAAAAKAUAABonAAAIFgAAWSkAABAAAAAmAAAACAAAAAAAAAAAAAAA"/>
               </a:ext>
             </a:extLst>
           </p:cNvSpPr>
@@ -620,7 +620,7 @@
               <a:defRPr lang="en-US"/>
             </a:pPr>
             <a:fld id="{30AE8F9D-D3DD-FB79-9316-252CC1586570}" type="datetime1">
-              <a:t>4/21/2026</a:t>
+              <a:t>6/3/2026</a:t>
             </a:fld>
             <a:endParaRPr/>
           </a:p>
@@ -633,7 +633,7 @@
             <a:spLocks noGrp="1" noChangeArrowheads="1"/>
             <a:extLst>
               <a:ext uri="smNativeData">
-                <pr:smNativeData xmlns="smNativeData" xmlns:pr="smNativeData" xmlns:p15="http://schemas.microsoft.com/office/powerpoint/2012/main" xmlns:p14="http://schemas.microsoft.com/office/powerpoint/2010/main" xmlns:mc="http://schemas.openxmlformats.org/markup-compatibility/2006" val="SMDATA_15_FLquaRMAAAAlAAAAZAAAAA0AAAAAkAAAAEgAAACQAAAASAAAAAAAAAABAAAAAAAAAAEAAABQAAAAAAAAAAAA4D8AAAAAAADgPwAAAAAAAOA/AAAAAAAA4D8AAAAAAADgPwAAAAAAAOA/AAAAAAAA4D8AAAAAAADgPwAAAAAAAOA/AAAAAAAA4D8CAAAAjAAAAAAAAAAAAAAAW5vVDP///wgAAAAAAAAAAAAAAAAAAAAAAAAAAAAAAAAAAAAAZAAAAAEAAABAAAAAAAAAAAAAAAAAAAAAAAAAAAAAAAAAAAAAAAAAAAAAAAAAAAAAAAAAAAAAAAAAAAAAAAAAAAAAAAAAAAAAAAAAAAAAAAAAAAAAAAAAAAAAAAAAAAAAFAAAADwAAAAAAAAAAAAAAAAAAAkUAAAAAQAAABQAAAAUAAAAFAAAAAEAAAAAAAAAZAAAAGQAAAAAAAAAZAAAAGQAAAAVAAAAYAAAAAAAAAAAAAAADwAAACADAAAAAAAAAAAAAAEAAACgMgAAVgcAAKr4//8BAAAAf39/AAEAAABkAAAAAAAAABQAAABAHwAAAAAAACYAAAAAAAAAwOD//wAAAAAmAAAAZAAAABYAAABMAAAAAAAAAAAAAAAEAAAAAAAAAAEAAADn5uYKAAAAACgAAAAoAAAAZAAAAGQAAAAAAAAAzMzMAAAAAABQAAAAUAAAAGQAAABkAAAAAAAAABcAAAAUAAAAAAAAAAAAAAD/fwAA/38AAAAAAAAJAAAABAAAAAAAAAAeAAAAaAAAAAAAAAAAAAAAAAAAAAAAAAAAAAAAECcAABAnAAAAAAAAAAAAAAAAAAAAAAAAAAAAAAAAAAAAAAAAAAAAABQAAAAAAAAAwMD/AAAAAABkAAAAMgAAAAAAAABkAAAAAAAAAH9/fwAKAAAAIgAAABgAAAAAAAAAAAAAAAAAAAAAAAAAAAAAAAAAAAAkAAAAJAAAAAAAAAAHAAAAAAAAAAAAAAAAAAAAAAAAAAAAAAAAAAAAf39/ACUAAABYAAAAAAAAAAAAAAAAAAAAAAAAAAAAAAAAAAAAAAAAAAAAAAAAAAAAAAAAAAAAAAA/AAAAAAAAAKCGAQAAAAAAAAAAAAAAAAAMAAAAAQAAAAAAAAAAAAAAAAAAAB8AAABUAAAAAAAABQAAAAEAAAAAAAAAAAAAAAAAAAAAAAAAAAAAAAAAAAAAAAAAAAAAAAJ/f38AAAAAA8zMzADAwP8Af39/AAAAAAAAAAAAAAAAAAAAAAAAAAAAIQAAABgAAAAUAAAA2BgAABonAAAoMgAAWSkAABAAAAAmAAAACAAAAAAAAAAAAAAA"/>
+                <pr:smNativeData xmlns:mc="http://schemas.openxmlformats.org/markup-compatibility/2006" xmlns:p14="http://schemas.microsoft.com/office/powerpoint/2010/main" xmlns:p15="http://schemas.microsoft.com/office/powerpoint/2012/main" xmlns:pr="smNativeData" xmlns="smNativeData" val="SMDATA_15_FLquaRMAAAAlAAAAZAAAAA0AAAAAkAAAAEgAAACQAAAASAAAAAAAAAABAAAAAAAAAAEAAABQAAAAAAAAAAAA4D8AAAAAAADgPwAAAAAAAOA/AAAAAAAA4D8AAAAAAADgPwAAAAAAAOA/AAAAAAAA4D8AAAAAAADgPwAAAAAAAOA/AAAAAAAA4D8CAAAAjAAAAAAAAAAAAAAAW5vVDP///wgAAAAAAAAAAAAAAAAAAAAAAAAAAAAAAAAAAAAAZAAAAAEAAABAAAAAAAAAAAAAAAAAAAAAAAAAAAAAAAAAAAAAAAAAAAAAAAAAAAAAAAAAAAAAAAAAAAAAAAAAAAAAAAAAAAAAAAAAAAAAAAAAAAAAAAAAAAAAAAAAAAAAFAAAADwAAAAAAAAAAAAAAAAAAAkUAAAAAQAAABQAAAAUAAAAFAAAAAEAAAAAAAAAZAAAAGQAAAAAAAAAZAAAAGQAAAAVAAAAYAAAAAAAAAAAAAAADwAAACADAAAAAAAAAAAAAAEAAACgMgAAVgcAAKr4//8BAAAAf39/AAEAAABkAAAAAAAAABQAAABAHwAAAAAAACYAAAAAAAAAwOD//wAAAAAmAAAAZAAAABYAAABMAAAAAAAAAAAAAAAEAAAAAAAAAAEAAADn5uYKAAAAACgAAAAoAAAAZAAAAGQAAAAAAAAAzMzMAAAAAABQAAAAUAAAAGQAAABkAAAAAAAAABcAAAAUAAAAAAAAAAAAAAD/fwAA/38AAAAAAAAJAAAABAAAAAAAAAAeAAAAaAAAAAAAAAAAAAAAAAAAAAAAAAAAAAAAECcAABAnAAAAAAAAAAAAAAAAAAAAAAAAAAAAAAAAAAAAAAAAAAAAABQAAAAAAAAAwMD/AAAAAABkAAAAMgAAAAAAAABkAAAAAAAAAH9/fwAKAAAAIgAAABgAAAAAAAAAAAAAAAAAAAAAAAAAAAAAAAAAAAAkAAAAJAAAAAAAAAAHAAAAAAAAAAAAAAAAAAAAAAAAAAAAAAAAAAAAf39/ACUAAABYAAAAAAAAAAAAAAAAAAAAAAAAAAAAAAAAAAAAAAAAAAAAAAAAAAAAAAAAAAAAAAA/AAAAAAAAAKCGAQAAAAAAAAAAAAAAAAAMAAAAAQAAAAAAAAAAAAAAAAAAAB8AAABUAAAAAAAABQAAAAEAAAAAAAAAAAAAAAAAAAAAAAAAAAAAAAAAAAAAAAAAAAAAAAJ/f38AAAAAA8zMzADAwP8Af39/AAAAAAAAAAAAAAAAAAAAAAAAAAAAIQAAABgAAAAUAAAA2BgAABonAAAoMgAAWSkAABAAAAAmAAAACAAAAAAAAAAAAAAA"/>
               </a:ext>
             </a:extLst>
           </p:cNvSpPr>
@@ -660,7 +660,7 @@
             <a:spLocks noGrp="1" noChangeArrowheads="1"/>
             <a:extLst>
               <a:ext uri="smNativeData">
-                <pr:smNativeData xmlns="smNativeData" xmlns:pr="smNativeData" xmlns:p15="http://schemas.microsoft.com/office/powerpoint/2012/main" xmlns:p14="http://schemas.microsoft.com/office/powerpoint/2010/main" xmlns:mc="http://schemas.openxmlformats.org/markup-compatibility/2006" val="SMDATA_15_FLquaRMAAAAlAAAAZAAAAA0AAAAAkAAAAEgAAACQAAAASAAAAAAAAAABAAAAAAAAAAEAAABQAAAAAAAAAAAA4D8AAAAAAADgPwAAAAAAAOA/AAAAAAAA4D8AAAAAAADgPwAAAAAAAOA/AAAAAAAA4D8AAAAAAADgPwAAAAAAAOA/AAAAAAAA4D8CAAAAjAAAAAAAAAAAAAAAW5vVDP///wgAAAAAAAAAAAAAAAAAAAAAAAAAAAAAAAAAAAAAZAAAAAEAAABAAAAAAAAAAAAAAAAAAAAAAAAAAAAAAAAAAAAAAAAAAAAAAAAAAAAAAAAAAAAAAAAAAAAAAAAAAAAAAAAAAAAAAAAAAAAAAAAAAAAAAAAAAAAAAAAAAAAAFAAAADwAAAAAAAAAAAAAAAAAAAkUAAAAAQAAABQAAAAUAAAAFAAAAAEAAAAAAAAAZAAAAGQAAAAAAAAAZAAAAGQAAAAVAAAAYAAAAAAAAAAAAAAADwAAACADAAAAAAAAAAAAAAEAAACgMgAAVgcAAKr4//8BAAAAf39/AAEAAABkAAAAAAAAABQAAABAHwAAAAAAACYAAAAAAAAAwOD//wAAAAAmAAAAZAAAABYAAABMAAAAAAAAAAAAAAAEAAAAAAAAAAEAAADn5uYKAAAAACgAAAAoAAAAZAAAAGQAAAAAAAAAzMzMAAAAAABQAAAAUAAAAGQAAABkAAAAAAAAABcAAAAUAAAAAAAAAAAAAAD/fwAA/38AAAAAAAAJAAAABAAAAAAAAAAeAAAAaAAAAAAAAAAAAAAAAAAAAAAAAAAAAAAAECcAABAnAAAAAAAAAAAAAAAAAAAAAAAAAAAAAAAAAAAAAAAAAAAAABQAAAAAAAAAwMD/AAAAAABkAAAAMgAAAAAAAABkAAAAAAAAAH9/fwAKAAAAIgAAABgAAAAAAAAAAAAAAAAAAAAAAAAAAAAAAAAAAAAkAAAAJAAAAAAAAAAHAAAAAAAAAAAAAAAAAAAAAAAAAAAAAAAAAAAAf39/ACUAAABYAAAAAAAAAAAAAAAAAAAAAAAAAAAAAAAAAAAAAAAAAAAAAAAAAAAAAAAAAAAAAAA/AAAAAAAAAKCGAQAAAAAAAAAAAAAAAAAMAAAAAQAAAAAAAAAAAAAAAAAAAB8AAABUAAAAAAAABQAAAAEAAAAAAAAAAAAAAAAAAAAAAAAAAAAAAAAAAAAAAAAAAAAAAAJ/f38AAAAAA8zMzADAwP8Af39/AAAAAAAAAAAAAAAAAAAAAAAAAAAAIQAAABgAAAAUAAAA+DQAABonAADYRQAAWSkAABAAAAAmAAAACAAAAAAAAAAAAAAA"/>
+                <pr:smNativeData xmlns:mc="http://schemas.openxmlformats.org/markup-compatibility/2006" xmlns:p14="http://schemas.microsoft.com/office/powerpoint/2010/main" xmlns:p15="http://schemas.microsoft.com/office/powerpoint/2012/main" xmlns:pr="smNativeData" xmlns="smNativeData" val="SMDATA_15_FLquaRMAAAAlAAAAZAAAAA0AAAAAkAAAAEgAAACQAAAASAAAAAAAAAABAAAAAAAAAAEAAABQAAAAAAAAAAAA4D8AAAAAAADgPwAAAAAAAOA/AAAAAAAA4D8AAAAAAADgPwAAAAAAAOA/AAAAAAAA4D8AAAAAAADgPwAAAAAAAOA/AAAAAAAA4D8CAAAAjAAAAAAAAAAAAAAAW5vVDP///wgAAAAAAAAAAAAAAAAAAAAAAAAAAAAAAAAAAAAAZAAAAAEAAABAAAAAAAAAAAAAAAAAAAAAAAAAAAAAAAAAAAAAAAAAAAAAAAAAAAAAAAAAAAAAAAAAAAAAAAAAAAAAAAAAAAAAAAAAAAAAAAAAAAAAAAAAAAAAAAAAAAAAFAAAADwAAAAAAAAAAAAAAAAAAAkUAAAAAQAAABQAAAAUAAAAFAAAAAEAAAAAAAAAZAAAAGQAAAAAAAAAZAAAAGQAAAAVAAAAYAAAAAAAAAAAAAAADwAAACADAAAAAAAAAAAAAAEAAACgMgAAVgcAAKr4//8BAAAAf39/AAEAAABkAAAAAAAAABQAAABAHwAAAAAAACYAAAAAAAAAwOD//wAAAAAmAAAAZAAAABYAAABMAAAAAAAAAAAAAAAEAAAAAAAAAAEAAADn5uYKAAAAACgAAAAoAAAAZAAAAGQAAAAAAAAAzMzMAAAAAABQAAAAUAAAAGQAAABkAAAAAAAAABcAAAAUAAAAAAAAAAAAAAD/fwAA/38AAAAAAAAJAAAABAAAAAAAAAAeAAAAaAAAAAAAAAAAAAAAAAAAAAAAAAAAAAAAECcAABAnAAAAAAAAAAAAAAAAAAAAAAAAAAAAAAAAAAAAAAAAAAAAABQAAAAAAAAAwMD/AAAAAABkAAAAMgAAAAAAAABkAAAAAAAAAH9/fwAKAAAAIgAAABgAAAAAAAAAAAAAAAAAAAAAAAAAAAAAAAAAAAAkAAAAJAAAAAAAAAAHAAAAAAAAAAAAAAAAAAAAAAAAAAAAAAAAAAAAf39/ACUAAABYAAAAAAAAAAAAAAAAAAAAAAAAAAAAAAAAAAAAAAAAAAAAAAAAAAAAAAAAAAAAAAA/AAAAAAAAAKCGAQAAAAAAAAAAAAAAAAAMAAAAAQAAAAAAAAAAAAAAAAAAAB8AAABUAAAAAAAABQAAAAEAAAAAAAAAAAAAAAAAAAAAAAAAAAAAAAAAAAAAAAAAAAAAAAJ/f38AAAAAA8zMzADAwP8Af39/AAAAAAAAAAAAAAAAAAAAAAAAAAAAIQAAABgAAAAUAAAA+DQAABonAADYRQAAWSkAABAAAAAmAAAACAAAAAAAAAAAAAAA"/>
               </a:ext>
             </a:extLst>
           </p:cNvSpPr>
@@ -716,7 +716,7 @@
             <a:spLocks noGrp="1" noChangeArrowheads="1"/>
             <a:extLst>
               <a:ext uri="smNativeData">
-                <pr:smNativeData xmlns="smNativeData" xmlns:pr="smNativeData" xmlns:p15="http://schemas.microsoft.com/office/powerpoint/2012/main" xmlns:p14="http://schemas.microsoft.com/office/powerpoint/2010/main" xmlns:mc="http://schemas.openxmlformats.org/markup-compatibility/2006" val="SMDATA_15_FLquaRMAAAAlAAAAZAAAAA0AAAAAkAAAAEgAAACQAAAASAAAAAAAAAABAAAAAQAAAAEAAABQAAAAAAAAAAAA4D8AAAAAAADgPwAAAAAAAOA/AAAAAAAA4D8AAAAAAADgPwAAAAAAAOA/AAAAAAAA4D8AAAAAAADgPwAAAAAAAOA/AAAAAAAA4D8CAAAAjAAAAAAAAAAAAAAAW5vVDP///wgAAAAAAAAAAAAAAAAAAAAAAAAAAAAAAAAAAAAAZAAAAAEAAABAAAAAAAAAAAAAAAAAAAAAAAAAAAAAAAAAAAAAAAAAAAAAAAAAAAAAAAAAAAAAAAAAAAAAAAAAAAAAAAAAAAAAAAAAAAAAAAAAAAAAAAAAAAAAAAAAAAAAFAAAADwAAAAAAAAAAAAAAAAAAAkUAAAAAQAAABQAAAAUAAAAFAAAAAEAAAAAAAAAZAAAAGQAAAAAAAAAZAAAAGQAAAAVAAAAYAAAAAAAAAAAAAAADwAAACADAAAAAAAAAAAAAAEAAACgMgAAVgcAAKr4//8BAAAAf39/AAEAAABkAAAAAAAAABQAAABAHwAAAAAAACYAAAAAAAAAwOD//wAAAAAmAAAAZAAAABYAAABMAAAAAAAAAAAAAAAEAAAAAAAAAAEAAADn5uYKAAAAACgAAAAoAAAAZAAAAGQAAAAAAAAAzMzMAAAAAABQAAAAUAAAAGQAAABkAAAAAAAAABcAAAAUAAAAAAAAAAAAAAD/fwAA/38AAAAAAAAJAAAABAAAAAAAAAAeAAAAaAAAAAAAAAAAAAAAAAAAAAAAAAAAAAAAECcAABAnAAAAAAAAAAAAAAAAAAAAAAAAAAAAAAAAAAAAAAAAAAAAABQAAAAAAAAAwMD/AAAAAABkAAAAMgAAAAAAAABkAAAAAAAAAH9/fwAKAAAAIgAAABgAAAAAAAAAAAAAAAAAAAAAAAAAAAAAAAAAAAAkAAAAJAAAAAAAAAAHAAAAAAAAAAAAAAAAAAAAAAAAAAAAAAAAAAAAf39/ACUAAABYAAAAAAAAAAAAAAAAAAAAAAAAAAAAAAAAAAAAAAAAAAAAAAAAAAAAAAAAAAAAAAA/AAAAAAAAAKCGAQAAAAAAAAAAAAAAAAAMAAAAAQAAAAAAAAAAAAAAAAAAAB8AAABUAAAAAAAABQAAAAEAAAAAAAAAAAAAAAAAAAAAAAAAAAAAAAAAAAAAAAAAAAAAAAJ/f38AAAAAA8zMzADAwP8Af39/AAAAAAAAAAAAAAAAAAAAAAAAAAAAIQAAABgAAAAUAAAArDUAAD8CAADYRQAAACYAABAAAAAmAAAACAAAAAMAAAAAAAAA"/>
+                <pr:smNativeData xmlns:mc="http://schemas.openxmlformats.org/markup-compatibility/2006" xmlns:p14="http://schemas.microsoft.com/office/powerpoint/2010/main" xmlns:p15="http://schemas.microsoft.com/office/powerpoint/2012/main" xmlns:pr="smNativeData" xmlns="smNativeData" val="SMDATA_15_FLquaRMAAAAlAAAAZAAAAA0AAAAAkAAAAEgAAACQAAAASAAAAAAAAAABAAAAAQAAAAEAAABQAAAAAAAAAAAA4D8AAAAAAADgPwAAAAAAAOA/AAAAAAAA4D8AAAAAAADgPwAAAAAAAOA/AAAAAAAA4D8AAAAAAADgPwAAAAAAAOA/AAAAAAAA4D8CAAAAjAAAAAAAAAAAAAAAW5vVDP///wgAAAAAAAAAAAAAAAAAAAAAAAAAAAAAAAAAAAAAZAAAAAEAAABAAAAAAAAAAAAAAAAAAAAAAAAAAAAAAAAAAAAAAAAAAAAAAAAAAAAAAAAAAAAAAAAAAAAAAAAAAAAAAAAAAAAAAAAAAAAAAAAAAAAAAAAAAAAAAAAAAAAAFAAAADwAAAAAAAAAAAAAAAAAAAkUAAAAAQAAABQAAAAUAAAAFAAAAAEAAAAAAAAAZAAAAGQAAAAAAAAAZAAAAGQAAAAVAAAAYAAAAAAAAAAAAAAADwAAACADAAAAAAAAAAAAAAEAAACgMgAAVgcAAKr4//8BAAAAf39/AAEAAABkAAAAAAAAABQAAABAHwAAAAAAACYAAAAAAAAAwOD//wAAAAAmAAAAZAAAABYAAABMAAAAAAAAAAAAAAAEAAAAAAAAAAEAAADn5uYKAAAAACgAAAAoAAAAZAAAAGQAAAAAAAAAzMzMAAAAAABQAAAAUAAAAGQAAABkAAAAAAAAABcAAAAUAAAAAAAAAAAAAAD/fwAA/38AAAAAAAAJAAAABAAAAAAAAAAeAAAAaAAAAAAAAAAAAAAAAAAAAAAAAAAAAAAAECcAABAnAAAAAAAAAAAAAAAAAAAAAAAAAAAAAAAAAAAAAAAAAAAAABQAAAAAAAAAwMD/AAAAAABkAAAAMgAAAAAAAABkAAAAAAAAAH9/fwAKAAAAIgAAABgAAAAAAAAAAAAAAAAAAAAAAAAAAAAAAAAAAAAkAAAAJAAAAAAAAAAHAAAAAAAAAAAAAAAAAAAAAAAAAAAAAAAAAAAAf39/ACUAAABYAAAAAAAAAAAAAAAAAAAAAAAAAAAAAAAAAAAAAAAAAAAAAAAAAAAAAAAAAAAAAAA/AAAAAAAAAKCGAQAAAAAAAAAAAAAAAAAMAAAAAQAAAAAAAAAAAAAAAAAAAB8AAABUAAAAAAAABQAAAAEAAAAAAAAAAAAAAAAAAAAAAAAAAAAAAAAAAAAAAAAAAAAAAAJ/f38AAAAAA8zMzADAwP8Af39/AAAAAAAAAAAAAAAAAAAAAAAAAAAAIQAAABgAAAAUAAAArDUAAD8CAADYRQAAACYAABAAAAAmAAAACAAAAAMAAAAAAAAA"/>
               </a:ext>
             </a:extLst>
           </p:cNvSpPr>
@@ -754,7 +754,7 @@
             <a:spLocks noGrp="1" noChangeArrowheads="1"/>
             <a:extLst>
               <a:ext uri="smNativeData">
-                <pr:smNativeData xmlns="smNativeData" xmlns:pr="smNativeData" xmlns:p15="http://schemas.microsoft.com/office/powerpoint/2012/main" xmlns:p14="http://schemas.microsoft.com/office/powerpoint/2010/main" xmlns:mc="http://schemas.openxmlformats.org/markup-compatibility/2006" val="SMDATA_15_FLquaRMAAAAlAAAAZAAAAA0AAAAAkAAAAEgAAACQAAAASAAAAAAAAAAAAAAAAQAAAAEAAABQAAAAAAAAAAAA4D8AAAAAAADgPwAAAAAAAOA/AAAAAAAA4D8AAAAAAADgPwAAAAAAAOA/AAAAAAAA4D8AAAAAAADgPwAAAAAAAOA/AAAAAAAA4D8CAAAAjAAAAAAAAAAAAAAAW5vVDP///wgAAAAAAAAAAAAAAAAAAAAAAAAAAAAAAAAAAAAAZAAAAAEAAABAAAAAAAAAAAAAAAAAAAAAAAAAAAAAAAAAAAAAAAAAAAAAAAAAAAAAAAAAAAAAAAAAAAAAAAAAAAAAAAAAAAAAAAAAAAAAAAAAAAAAAAAAAAAAAAAAAAAAFAAAADwAAAAAAAAAAAAAAAAAAAkUAAAAAQAAABQAAAAUAAAAFAAAAAEAAAAAAAAAZAAAAGQAAAAAAAAAZAAAAGQAAAAVAAAAYAAAAAAAAAAAAAAADwAAACADAAAAAAAAAAAAAAEAAACgMgAAVgcAAKr4//8BAAAAf39/AAEAAABkAAAAAAAAABQAAABAHwAAAAAAACYAAAAAAAAAwOD//wAAAAAmAAAAZAAAABYAAABMAAAAAAAAAAAAAAAEAAAAAAAAAAEAAADn5uYKAAAAACgAAAAoAAAAZAAAAGQAAAAAAAAAzMzMAAAAAABQAAAAUAAAAGQAAABkAAAAAAAAABcAAAAUAAAAAAAAAAAAAAD/fwAA/38AAAAAAAAJAAAABAAAAAAAAAAeAAAAaAAAAAAAAAAAAAAAAAAAAAAAAAAAAAAAECcAABAnAAAAAAAAAAAAAAAAAAAAAAAAAAAAAAAAAAAAAAAAAAAAABQAAAAAAAAAwMD/AAAAAABkAAAAMgAAAAAAAABkAAAAAAAAAH9/fwAKAAAAIgAAABgAAAAAAAAAAAAAAAAAAAAAAAAAAAAAAAAAAAAkAAAAJAAAAAAAAAAHAAAAAAAAAAAAAAAAAAAAAAAAAAAAAAAAAAAAf39/ACUAAABYAAAAAAAAAAAAAAAAAAAAAAAAAAAAAAAAAAAAAAAAAAAAAAAAAAAAAAAAAAAAAAA/AAAAAAAAAKCGAQAAAAAAAAAAAAAAAAAMAAAAAQAAAAAAAAAAAAAAAAAAAB8AAABUAAAAAAAABQAAAAEAAAAAAAAAAAAAAAAAAAAAAAAAAAAAAAAAAAAAAAAAAAAAAAJ/f38AAAAAA8zMzADAwP8Af39/AAAAAAAAAAAAAAAAAAAAAAAAAAAAIQAAABgAAAAUAAAAKAUAAD8CAAC8NAAAACYAABAAAAAmAAAACAAAAAMAAAAAAAAA"/>
+                <pr:smNativeData xmlns:mc="http://schemas.openxmlformats.org/markup-compatibility/2006" xmlns:p14="http://schemas.microsoft.com/office/powerpoint/2010/main" xmlns:p15="http://schemas.microsoft.com/office/powerpoint/2012/main" xmlns:pr="smNativeData" xmlns="smNativeData" val="SMDATA_15_FLquaRMAAAAlAAAAZAAAAA0AAAAAkAAAAEgAAACQAAAASAAAAAAAAAAAAAAAAQAAAAEAAABQAAAAAAAAAAAA4D8AAAAAAADgPwAAAAAAAOA/AAAAAAAA4D8AAAAAAADgPwAAAAAAAOA/AAAAAAAA4D8AAAAAAADgPwAAAAAAAOA/AAAAAAAA4D8CAAAAjAAAAAAAAAAAAAAAW5vVDP///wgAAAAAAAAAAAAAAAAAAAAAAAAAAAAAAAAAAAAAZAAAAAEAAABAAAAAAAAAAAAAAAAAAAAAAAAAAAAAAAAAAAAAAAAAAAAAAAAAAAAAAAAAAAAAAAAAAAAAAAAAAAAAAAAAAAAAAAAAAAAAAAAAAAAAAAAAAAAAAAAAAAAAFAAAADwAAAAAAAAAAAAAAAAAAAkUAAAAAQAAABQAAAAUAAAAFAAAAAEAAAAAAAAAZAAAAGQAAAAAAAAAZAAAAGQAAAAVAAAAYAAAAAAAAAAAAAAADwAAACADAAAAAAAAAAAAAAEAAACgMgAAVgcAAKr4//8BAAAAf39/AAEAAABkAAAAAAAAABQAAABAHwAAAAAAACYAAAAAAAAAwOD//wAAAAAmAAAAZAAAABYAAABMAAAAAAAAAAAAAAAEAAAAAAAAAAEAAADn5uYKAAAAACgAAAAoAAAAZAAAAGQAAAAAAAAAzMzMAAAAAABQAAAAUAAAAGQAAABkAAAAAAAAABcAAAAUAAAAAAAAAAAAAAD/fwAA/38AAAAAAAAJAAAABAAAAAAAAAAeAAAAaAAAAAAAAAAAAAAAAAAAAAAAAAAAAAAAECcAABAnAAAAAAAAAAAAAAAAAAAAAAAAAAAAAAAAAAAAAAAAAAAAABQAAAAAAAAAwMD/AAAAAABkAAAAMgAAAAAAAABkAAAAAAAAAH9/fwAKAAAAIgAAABgAAAAAAAAAAAAAAAAAAAAAAAAAAAAAAAAAAAAkAAAAJAAAAAAAAAAHAAAAAAAAAAAAAAAAAAAAAAAAAAAAAAAAAAAAf39/ACUAAABYAAAAAAAAAAAAAAAAAAAAAAAAAAAAAAAAAAAAAAAAAAAAAAAAAAAAAAAAAAAAAAA/AAAAAAAAAKCGAQAAAAAAAAAAAAAAAAAMAAAAAQAAAAAAAAAAAAAAAAAAAB8AAABUAAAAAAAABQAAAAEAAAAAAAAAAAAAAAAAAAAAAAAAAAAAAAAAAAAAAAAAAAAAAAJ/f38AAAAAA8zMzADAwP8Af39/AAAAAAAAAAAAAAAAAAAAAAAAAAAAIQAAABgAAAAUAAAAKAUAAD8CAAC8NAAAACYAABAAAAAmAAAACAAAAAMAAAAAAAAA"/>
               </a:ext>
             </a:extLst>
           </p:cNvSpPr>
@@ -824,7 +824,7 @@
             <a:spLocks noGrp="1" noChangeArrowheads="1"/>
             <a:extLst>
               <a:ext uri="smNativeData">
-                <pr:smNativeData xmlns="smNativeData" xmlns:pr="smNativeData" xmlns:p15="http://schemas.microsoft.com/office/powerpoint/2012/main" xmlns:p14="http://schemas.microsoft.com/office/powerpoint/2010/main" xmlns:mc="http://schemas.openxmlformats.org/markup-compatibility/2006" val="SMDATA_15_FLquaRMAAAAlAAAAZAAAAA0AAAAAkAAAAEgAAACQAAAASAAAAAAAAAABAAAAAAAAAAEAAABQAAAAAAAAAAAA4D8AAAAAAADgPwAAAAAAAOA/AAAAAAAA4D8AAAAAAADgPwAAAAAAAOA/AAAAAAAA4D8AAAAAAADgPwAAAAAAAOA/AAAAAAAA4D8CAAAAjAAAAAAAAAAAAAAAW5vVDP///wgAAAAAAAAAAAAAAAAAAAAAAAAAAAAAAAAAAAAAZAAAAAEAAABAAAAAAAAAAAAAAAAAAAAAAAAAAAAAAAAAAAAAAAAAAAAAAAAAAAAAAAAAAAAAAAAAAAAAAAAAAAAAAAAAAAAAAAAAAAAAAAAAAAAAAAAAAAAAAAAAAAAAFAAAADwAAAAAAAAAAAAAAAAAAAkUAAAAAQAAABQAAAAUAAAAFAAAAAEAAAAAAAAAZAAAAGQAAAAAAAAAZAAAAGQAAAAVAAAAYAAAAAAAAAAAAAAADwAAACADAAAAAAAAAAAAAAEAAACgMgAAVgcAAKr4//8BAAAAf39/AAEAAABkAAAAAAAAABQAAABAHwAAAAAAACYAAAAAAAAAwOD//wAAAAAmAAAAZAAAABYAAABMAAAAAAAAAAAAAAAEAAAAAAAAAAEAAADn5uYKAAAAACgAAAAoAAAAZAAAAGQAAAAAAAAAzMzMAAAAAABQAAAAUAAAAGQAAABkAAAAAAAAABcAAAAUAAAAAAAAAAAAAAD/fwAA/38AAAAAAAAJAAAABAAAAAAAAAAeAAAAaAAAAAAAAAAAAAAAAAAAAAAAAAAAAAAAECcAABAnAAAAAAAAAAAAAAAAAAAAAAAAAAAAAAAAAAAAAAAAAAAAABQAAAAAAAAAwMD/AAAAAABkAAAAMgAAAAAAAABkAAAAAAAAAH9/fwAKAAAAIgAAABgAAAAAAAAAAAAAAAAAAAAAAAAAAAAAAAAAAAAkAAAAJAAAAAAAAAAHAAAAAAAAAAAAAAAAAAAAAAAAAAAAAAAAAAAAf39/ACUAAABYAAAAAAAAAAAAAAAAAAAAAAAAAAAAAAAAAAAAAAAAAAAAAAAAAAAAAAAAAAAAAAA/AAAAAAAAAKCGAQAAAAAAAAAAAAAAAAAMAAAAAQAAAAAAAAAAAAAAAAAAAB8AAABUAAAAAAAABQAAAAEAAAAAAAAAAAAAAAAAAAAAAAAAAAAAAAAAAAAAAAAAAAAAAAJ/f38AAAAAA8zMzADAwP8Af39/AAAAAAAAAAAAAAAAAAAAAAAAAAAAIQAAABgAAAAUAAAAKAUAABonAAAIFgAAWSkAABAAAAAmAAAACAAAAAAAAAAAAAAA"/>
+                <pr:smNativeData xmlns:mc="http://schemas.openxmlformats.org/markup-compatibility/2006" xmlns:p14="http://schemas.microsoft.com/office/powerpoint/2010/main" xmlns:p15="http://schemas.microsoft.com/office/powerpoint/2012/main" xmlns:pr="smNativeData" xmlns="smNativeData" val="SMDATA_15_FLquaRMAAAAlAAAAZAAAAA0AAAAAkAAAAEgAAACQAAAASAAAAAAAAAABAAAAAAAAAAEAAABQAAAAAAAAAAAA4D8AAAAAAADgPwAAAAAAAOA/AAAAAAAA4D8AAAAAAADgPwAAAAAAAOA/AAAAAAAA4D8AAAAAAADgPwAAAAAAAOA/AAAAAAAA4D8CAAAAjAAAAAAAAAAAAAAAW5vVDP///wgAAAAAAAAAAAAAAAAAAAAAAAAAAAAAAAAAAAAAZAAAAAEAAABAAAAAAAAAAAAAAAAAAAAAAAAAAAAAAAAAAAAAAAAAAAAAAAAAAAAAAAAAAAAAAAAAAAAAAAAAAAAAAAAAAAAAAAAAAAAAAAAAAAAAAAAAAAAAAAAAAAAAFAAAADwAAAAAAAAAAAAAAAAAAAkUAAAAAQAAABQAAAAUAAAAFAAAAAEAAAAAAAAAZAAAAGQAAAAAAAAAZAAAAGQAAAAVAAAAYAAAAAAAAAAAAAAADwAAACADAAAAAAAAAAAAAAEAAACgMgAAVgcAAKr4//8BAAAAf39/AAEAAABkAAAAAAAAABQAAABAHwAAAAAAACYAAAAAAAAAwOD//wAAAAAmAAAAZAAAABYAAABMAAAAAAAAAAAAAAAEAAAAAAAAAAEAAADn5uYKAAAAACgAAAAoAAAAZAAAAGQAAAAAAAAAzMzMAAAAAABQAAAAUAAAAGQAAABkAAAAAAAAABcAAAAUAAAAAAAAAAAAAAD/fwAA/38AAAAAAAAJAAAABAAAAAAAAAAeAAAAaAAAAAAAAAAAAAAAAAAAAAAAAAAAAAAAECcAABAnAAAAAAAAAAAAAAAAAAAAAAAAAAAAAAAAAAAAAAAAAAAAABQAAAAAAAAAwMD/AAAAAABkAAAAMgAAAAAAAABkAAAAAAAAAH9/fwAKAAAAIgAAABgAAAAAAAAAAAAAAAAAAAAAAAAAAAAAAAAAAAAkAAAAJAAAAAAAAAAHAAAAAAAAAAAAAAAAAAAAAAAAAAAAAAAAAAAAf39/ACUAAABYAAAAAAAAAAAAAAAAAAAAAAAAAAAAAAAAAAAAAAAAAAAAAAAAAAAAAAAAAAAAAAA/AAAAAAAAAKCGAQAAAAAAAAAAAAAAAAAMAAAAAQAAAAAAAAAAAAAAAAAAAB8AAABUAAAAAAAABQAAAAEAAAAAAAAAAAAAAAAAAAAAAAAAAAAAAAAAAAAAAAAAAAAAAAJ/f38AAAAAA8zMzADAwP8Af39/AAAAAAAAAAAAAAAAAAAAAAAAAAAAIQAAABgAAAAUAAAAKAUAABonAAAIFgAAWSkAABAAAAAmAAAACAAAAAAAAAAAAAAA"/>
               </a:ext>
             </a:extLst>
           </p:cNvSpPr>
@@ -841,7 +841,7 @@
               <a:defRPr lang="en-US"/>
             </a:pPr>
             <a:fld id="{30AEF476-38DD-FB02-9316-CE57BA58659B}" type="datetime1">
-              <a:t>4/21/2026</a:t>
+              <a:t>6/3/2026</a:t>
             </a:fld>
             <a:endParaRPr/>
           </a:p>
@@ -854,7 +854,7 @@
             <a:spLocks noGrp="1" noChangeArrowheads="1"/>
             <a:extLst>
               <a:ext uri="smNativeData">
-                <pr:smNativeData xmlns="smNativeData" xmlns:pr="smNativeData" xmlns:p15="http://schemas.microsoft.com/office/powerpoint/2012/main" xmlns:p14="http://schemas.microsoft.com/office/powerpoint/2010/main" xmlns:mc="http://schemas.openxmlformats.org/markup-compatibility/2006" val="SMDATA_15_FLquaRMAAAAlAAAAZAAAAA0AAAAAkAAAAEgAAACQAAAASAAAAAAAAAABAAAAAAAAAAEAAABQAAAAAAAAAAAA4D8AAAAAAADgPwAAAAAAAOA/AAAAAAAA4D8AAAAAAADgPwAAAAAAAOA/AAAAAAAA4D8AAAAAAADgPwAAAAAAAOA/AAAAAAAA4D8CAAAAjAAAAAAAAAAAAAAAW5vVDP///wgAAAAAAAAAAAAAAAAAAAAAAAAAAAAAAAAAAAAAZAAAAAEAAABAAAAAAAAAAAAAAAAAAAAAAAAAAAAAAAAAAAAAAAAAAAAAAAAAAAAAAAAAAAAAAAAAAAAAAAAAAAAAAAAAAAAAAAAAAAAAAAAAAAAAAAAAAAAAAAAAAAAAFAAAADwAAAAAAAAAAAAAAAAAAAkUAAAAAQAAABQAAAAUAAAAFAAAAAEAAAAAAAAAZAAAAGQAAAAAAAAAZAAAAGQAAAAVAAAAYAAAAAAAAAAAAAAADwAAACADAAAAAAAAAAAAAAEAAACgMgAAVgcAAKr4//8BAAAAf39/AAEAAABkAAAAAAAAABQAAABAHwAAAAAAACYAAAAAAAAAwOD//wAAAAAmAAAAZAAAABYAAABMAAAAAAAAAAAAAAAEAAAAAAAAAAEAAADn5uYKAAAAACgAAAAoAAAAZAAAAGQAAAAAAAAAzMzMAAAAAABQAAAAUAAAAGQAAABkAAAAAAAAABcAAAAUAAAAAAAAAAAAAAD/fwAA/38AAAAAAAAJAAAABAAAAAAAAAAeAAAAaAAAAAAAAAAAAAAAAAAAAAAAAAAAAAAAECcAABAnAAAAAAAAAAAAAAAAAAAAAAAAAAAAAAAAAAAAAAAAAAAAABQAAAAAAAAAwMD/AAAAAABkAAAAMgAAAAAAAABkAAAAAAAAAH9/fwAKAAAAIgAAABgAAAAAAAAAAAAAAAAAAAAAAAAAAAAAAAAAAAAkAAAAJAAAAAAAAAAHAAAAAAAAAAAAAAAAAAAAAAAAAAAAAAAAAAAAf39/ACUAAABYAAAAAAAAAAAAAAAAAAAAAAAAAAAAAAAAAAAAAAAAAAAAAAAAAAAAAAAAAAAAAAA/AAAAAAAAAKCGAQAAAAAAAAAAAAAAAAAMAAAAAQAAAAAAAAAAAAAAAAAAAB8AAABUAAAAAAAABQAAAAEAAAAAAAAAAAAAAAAAAAAAAAAAAAAAAAAAAAAAAAAAAAAAAAJ/f38AAAAAA8zMzADAwP8Af39/AAAAAAAAAAAAAAAAAAAAAAAAAAAAIQAAABgAAAAUAAAA2BgAABonAAAoMgAAWSkAABAAAAAmAAAACAAAAAAAAAAAAAAA"/>
+                <pr:smNativeData xmlns:mc="http://schemas.openxmlformats.org/markup-compatibility/2006" xmlns:p14="http://schemas.microsoft.com/office/powerpoint/2010/main" xmlns:p15="http://schemas.microsoft.com/office/powerpoint/2012/main" xmlns:pr="smNativeData" xmlns="smNativeData" val="SMDATA_15_FLquaRMAAAAlAAAAZAAAAA0AAAAAkAAAAEgAAACQAAAASAAAAAAAAAABAAAAAAAAAAEAAABQAAAAAAAAAAAA4D8AAAAAAADgPwAAAAAAAOA/AAAAAAAA4D8AAAAAAADgPwAAAAAAAOA/AAAAAAAA4D8AAAAAAADgPwAAAAAAAOA/AAAAAAAA4D8CAAAAjAAAAAAAAAAAAAAAW5vVDP///wgAAAAAAAAAAAAAAAAAAAAAAAAAAAAAAAAAAAAAZAAAAAEAAABAAAAAAAAAAAAAAAAAAAAAAAAAAAAAAAAAAAAAAAAAAAAAAAAAAAAAAAAAAAAAAAAAAAAAAAAAAAAAAAAAAAAAAAAAAAAAAAAAAAAAAAAAAAAAAAAAAAAAFAAAADwAAAAAAAAAAAAAAAAAAAkUAAAAAQAAABQAAAAUAAAAFAAAAAEAAAAAAAAAZAAAAGQAAAAAAAAAZAAAAGQAAAAVAAAAYAAAAAAAAAAAAAAADwAAACADAAAAAAAAAAAAAAEAAACgMgAAVgcAAKr4//8BAAAAf39/AAEAAABkAAAAAAAAABQAAABAHwAAAAAAACYAAAAAAAAAwOD//wAAAAAmAAAAZAAAABYAAABMAAAAAAAAAAAAAAAEAAAAAAAAAAEAAADn5uYKAAAAACgAAAAoAAAAZAAAAGQAAAAAAAAAzMzMAAAAAABQAAAAUAAAAGQAAABkAAAAAAAAABcAAAAUAAAAAAAAAAAAAAD/fwAA/38AAAAAAAAJAAAABAAAAAAAAAAeAAAAaAAAAAAAAAAAAAAAAAAAAAAAAAAAAAAAECcAABAnAAAAAAAAAAAAAAAAAAAAAAAAAAAAAAAAAAAAAAAAAAAAABQAAAAAAAAAwMD/AAAAAABkAAAAMgAAAAAAAABkAAAAAAAAAH9/fwAKAAAAIgAAABgAAAAAAAAAAAAAAAAAAAAAAAAAAAAAAAAAAAAkAAAAJAAAAAAAAAAHAAAAAAAAAAAAAAAAAAAAAAAAAAAAAAAAAAAAf39/ACUAAABYAAAAAAAAAAAAAAAAAAAAAAAAAAAAAAAAAAAAAAAAAAAAAAAAAAAAAAAAAAAAAAA/AAAAAAAAAKCGAQAAAAAAAAAAAAAAAAAMAAAAAQAAAAAAAAAAAAAAAAAAAB8AAABUAAAAAAAABQAAAAEAAAAAAAAAAAAAAAAAAAAAAAAAAAAAAAAAAAAAAAAAAAAAAAJ/f38AAAAAA8zMzADAwP8Af39/AAAAAAAAAAAAAAAAAAAAAAAAAAAAIQAAABgAAAAUAAAA2BgAABonAAAoMgAAWSkAABAAAAAmAAAACAAAAAAAAAAAAAAA"/>
               </a:ext>
             </a:extLst>
           </p:cNvSpPr>
@@ -881,7 +881,7 @@
             <a:spLocks noGrp="1" noChangeArrowheads="1"/>
             <a:extLst>
               <a:ext uri="smNativeData">
-                <pr:smNativeData xmlns="smNativeData" xmlns:pr="smNativeData" xmlns:p15="http://schemas.microsoft.com/office/powerpoint/2012/main" xmlns:p14="http://schemas.microsoft.com/office/powerpoint/2010/main" xmlns:mc="http://schemas.openxmlformats.org/markup-compatibility/2006" val="SMDATA_15_FLquaRMAAAAlAAAAZAAAAA0AAAAAkAAAAEgAAACQAAAASAAAAAAAAAABAAAAAAAAAAEAAABQAAAAAAAAAAAA4D8AAAAAAADgPwAAAAAAAOA/AAAAAAAA4D8AAAAAAADgPwAAAAAAAOA/AAAAAAAA4D8AAAAAAADgPwAAAAAAAOA/AAAAAAAA4D8CAAAAjAAAAAAAAAAAAAAAW5vVDP///wgAAAAAAAAAAAAAAAAAAAAAAAAAAAAAAAAAAAAAZAAAAAEAAABAAAAAAAAAAAAAAAAAAAAAAAAAAAAAAAAAAAAAAAAAAAAAAAAAAAAAAAAAAAAAAAAAAAAAAAAAAAAAAAAAAAAAAAAAAAAAAAAAAAAAAAAAAAAAAAAAAAAAFAAAADwAAAAAAAAAAAAAAAAAAAkUAAAAAQAAABQAAAAUAAAAFAAAAAEAAAAAAAAAZAAAAGQAAAAAAAAAZAAAAGQAAAAVAAAAYAAAAAAAAAAAAAAADwAAACADAAAAAAAAAAAAAAEAAACgMgAAVgcAAKr4//8BAAAAf39/AAEAAABkAAAAAAAAABQAAABAHwAAAAAAACYAAAAAAAAAwOD//wAAAAAmAAAAZAAAABYAAABMAAAAAAAAAAAAAAAEAAAAAAAAAAEAAADn5uYKAAAAACgAAAAoAAAAZAAAAGQAAAAAAAAAzMzMAAAAAABQAAAAUAAAAGQAAABkAAAAAAAAABcAAAAUAAAAAAAAAAAAAAD/fwAA/38AAAAAAAAJAAAABAAAAAAAAAAeAAAAaAAAAAAAAAAAAAAAAAAAAAAAAAAAAAAAECcAABAnAAAAAAAAAAAAAAAAAAAAAAAAAAAAAAAAAAAAAAAAAAAAABQAAAAAAAAAwMD/AAAAAABkAAAAMgAAAAAAAABkAAAAAAAAAH9/fwAKAAAAIgAAABgAAAAAAAAAAAAAAAAAAAAAAAAAAAAAAAAAAAAkAAAAJAAAAAAAAAAHAAAAAAAAAAAAAAAAAAAAAAAAAAAAAAAAAAAAf39/ACUAAABYAAAAAAAAAAAAAAAAAAAAAAAAAAAAAAAAAAAAAAAAAAAAAAAAAAAAAAAAAAAAAAA/AAAAAAAAAKCGAQAAAAAAAAAAAAAAAAAMAAAAAQAAAAAAAAAAAAAAAAAAAB8AAABUAAAAAAAABQAAAAEAAAAAAAAAAAAAAAAAAAAAAAAAAAAAAAAAAAAAAAAAAAAAAAJ/f38AAAAAA8zMzADAwP8Af39/AAAAAAAAAAAAAAAAAAAAAAAAAAAAIQAAABgAAAAUAAAA+DQAABonAADYRQAAWSkAABAAAAAmAAAACAAAAAAAAAAAAAAA"/>
+                <pr:smNativeData xmlns:mc="http://schemas.openxmlformats.org/markup-compatibility/2006" xmlns:p14="http://schemas.microsoft.com/office/powerpoint/2010/main" xmlns:p15="http://schemas.microsoft.com/office/powerpoint/2012/main" xmlns:pr="smNativeData" xmlns="smNativeData" val="SMDATA_15_FLquaRMAAAAlAAAAZAAAAA0AAAAAkAAAAEgAAACQAAAASAAAAAAAAAABAAAAAAAAAAEAAABQAAAAAAAAAAAA4D8AAAAAAADgPwAAAAAAAOA/AAAAAAAA4D8AAAAAAADgPwAAAAAAAOA/AAAAAAAA4D8AAAAAAADgPwAAAAAAAOA/AAAAAAAA4D8CAAAAjAAAAAAAAAAAAAAAW5vVDP///wgAAAAAAAAAAAAAAAAAAAAAAAAAAAAAAAAAAAAAZAAAAAEAAABAAAAAAAAAAAAAAAAAAAAAAAAAAAAAAAAAAAAAAAAAAAAAAAAAAAAAAAAAAAAAAAAAAAAAAAAAAAAAAAAAAAAAAAAAAAAAAAAAAAAAAAAAAAAAAAAAAAAAFAAAADwAAAAAAAAAAAAAAAAAAAkUAAAAAQAAABQAAAAUAAAAFAAAAAEAAAAAAAAAZAAAAGQAAAAAAAAAZAAAAGQAAAAVAAAAYAAAAAAAAAAAAAAADwAAACADAAAAAAAAAAAAAAEAAACgMgAAVgcAAKr4//8BAAAAf39/AAEAAABkAAAAAAAAABQAAABAHwAAAAAAACYAAAAAAAAAwOD//wAAAAAmAAAAZAAAABYAAABMAAAAAAAAAAAAAAAEAAAAAAAAAAEAAADn5uYKAAAAACgAAAAoAAAAZAAAAGQAAAAAAAAAzMzMAAAAAABQAAAAUAAAAGQAAABkAAAAAAAAABcAAAAUAAAAAAAAAAAAAAD/fwAA/38AAAAAAAAJAAAABAAAAAAAAAAeAAAAaAAAAAAAAAAAAAAAAAAAAAAAAAAAAAAAECcAABAnAAAAAAAAAAAAAAAAAAAAAAAAAAAAAAAAAAAAAAAAAAAAABQAAAAAAAAAwMD/AAAAAABkAAAAMgAAAAAAAABkAAAAAAAAAH9/fwAKAAAAIgAAABgAAAAAAAAAAAAAAAAAAAAAAAAAAAAAAAAAAAAkAAAAJAAAAAAAAAAHAAAAAAAAAAAAAAAAAAAAAAAAAAAAAAAAAAAAf39/ACUAAABYAAAAAAAAAAAAAAAAAAAAAAAAAAAAAAAAAAAAAAAAAAAAAAAAAAAAAAAAAAAAAAA/AAAAAAAAAKCGAQAAAAAAAAAAAAAAAAAMAAAAAQAAAAAAAAAAAAAAAAAAAB8AAABUAAAAAAAABQAAAAEAAAAAAAAAAAAAAAAAAAAAAAAAAAAAAAAAAAAAAAAAAAAAAAJ/f38AAAAAA8zMzADAwP8Af39/AAAAAAAAAAAAAAAAAAAAAAAAAAAAIQAAABgAAAAUAAAA+DQAABonAADYRQAAWSkAABAAAAAmAAAACAAAAAAAAAAAAAAA"/>
               </a:ext>
             </a:extLst>
           </p:cNvSpPr>
@@ -937,7 +937,7 @@
             <a:spLocks noGrp="1" noChangeArrowheads="1"/>
             <a:extLst>
               <a:ext uri="smNativeData">
-                <pr:smNativeData xmlns="smNativeData" xmlns:pr="smNativeData" xmlns:p15="http://schemas.microsoft.com/office/powerpoint/2012/main" xmlns:p14="http://schemas.microsoft.com/office/powerpoint/2010/main" xmlns:mc="http://schemas.openxmlformats.org/markup-compatibility/2006" val="SMDATA_15_FLquaRMAAAAlAAAAZAAAAA0AAAAAkAAAAEgAAACQAAAASAAAAAAAAAABAAAAAAAAAAEAAABQAAAAAAAAAAAA4D8AAAAAAADgPwAAAAAAAOA/AAAAAAAA4D8AAAAAAADgPwAAAAAAAOA/AAAAAAAA4D8AAAAAAADgPwAAAAAAAOA/AAAAAAAA4D8CAAAAjAAAAAAAAAAAAAAAW5vVDP///wgAAAAAAAAAAAAAAAAAAAAAAAAAAAAAAAAAAAAAZAAAAAEAAABAAAAAAAAAAAAAAAAAAAAAAAAAAAAAAAAAAAAAAAAAAAAAAAAAAAAAAAAAAAAAAAAAAAAAAAAAAAAAAAAAAAAAAAAAAAAAAAAAAAAAAAAAAAAAAAAAAAAAFAAAADwAAAAAAAAAAAAAAAAAAAkUAAAAAQAAABQAAAAUAAAAFAAAAAEAAAAAAAAAZAAAAGQAAAAAAAAAZAAAAGQAAAAVAAAAYAAAAAAAAAAAAAAADwAAACADAAAAAAAAAAAAAAEAAACgMgAAVgcAAKr4//8BAAAAf39/AAEAAABkAAAAAAAAABQAAABAHwAAAAAAACYAAAAAAAAAwOD//wAAAAAmAAAAZAAAABYAAABMAAAAAAAAAAAAAAAEAAAAAAAAAAEAAADn5uYKAAAAACgAAAAoAAAAZAAAAGQAAAAAAAAAzMzMAAAAAABQAAAAUAAAAGQAAABkAAAAAAAAABcAAAAUAAAAAAAAAAAAAAD/fwAA/38AAAAAAAAJAAAABAAAAGxpY2keAAAAaAAAAAAAAAAAAAAAAAAAAAAAAAAAAAAAECcAABAnAAAAAAAAAAAAAAAAAAAAAAAAAAAAAAAAAAAAAAAAAAAAABQAAAAAAAAAwMD/AAAAAABkAAAAMgAAAAAAAABkAAAAAAAAAH9/fwAKAAAAIgAAABgAAAAAAAAAAAAAAAAAAAAAAAAAAAAAAAAAAAAkAAAAJAAAAAAAAAAHAAAAAAAAAAAAAAAAAAAAAAAAAAAAAAAAAAAAf39/ACUAAABYAAAAAAAAAAAAAAAAAAAAAAAAAAAAAAAAAAAAAAAAAAAAAAAAAAAAAAAAAAAAAAA/AAAAAAAAAKCGAQAAAAAAAAAAAAAAAAAMAAAAAQAAAAAAAAAAAAAAAAAAAB8AAABUAAAAAAAABQAAAAEAAAAAAAAAAAAAAAAAAAAAAAAAAAAAAAAAAAAAAAAAAAAAAAJ/f38AAAAAA8zMzADAwP8Af39/AAAAAAAAAAAAAAAAAAAAAAAAAAAAIQAAABgAAAAUAAAAKAUAAD8CAADYRQAAZwoAABAAAAAmAAAACAAAAAAAAAAAAAAA"/>
+                <pr:smNativeData xmlns:mc="http://schemas.openxmlformats.org/markup-compatibility/2006" xmlns:p14="http://schemas.microsoft.com/office/powerpoint/2010/main" xmlns:p15="http://schemas.microsoft.com/office/powerpoint/2012/main" xmlns:pr="smNativeData" xmlns="smNativeData" val="SMDATA_15_FLquaRMAAAAlAAAAZAAAAA0AAAAAkAAAAEgAAACQAAAASAAAAAAAAAABAAAAAAAAAAEAAABQAAAAAAAAAAAA4D8AAAAAAADgPwAAAAAAAOA/AAAAAAAA4D8AAAAAAADgPwAAAAAAAOA/AAAAAAAA4D8AAAAAAADgPwAAAAAAAOA/AAAAAAAA4D8CAAAAjAAAAAAAAAAAAAAAW5vVDP///wgAAAAAAAAAAAAAAAAAAAAAAAAAAAAAAAAAAAAAZAAAAAEAAABAAAAAAAAAAAAAAAAAAAAAAAAAAAAAAAAAAAAAAAAAAAAAAAAAAAAAAAAAAAAAAAAAAAAAAAAAAAAAAAAAAAAAAAAAAAAAAAAAAAAAAAAAAAAAAAAAAAAAFAAAADwAAAAAAAAAAAAAAAAAAAkUAAAAAQAAABQAAAAUAAAAFAAAAAEAAAAAAAAAZAAAAGQAAAAAAAAAZAAAAGQAAAAVAAAAYAAAAAAAAAAAAAAADwAAACADAAAAAAAAAAAAAAEAAACgMgAAVgcAAKr4//8BAAAAf39/AAEAAABkAAAAAAAAABQAAABAHwAAAAAAACYAAAAAAAAAwOD//wAAAAAmAAAAZAAAABYAAABMAAAAAAAAAAAAAAAEAAAAAAAAAAEAAADn5uYKAAAAACgAAAAoAAAAZAAAAGQAAAAAAAAAzMzMAAAAAABQAAAAUAAAAGQAAABkAAAAAAAAABcAAAAUAAAAAAAAAAAAAAD/fwAA/38AAAAAAAAJAAAABAAAAGxpY2keAAAAaAAAAAAAAAAAAAAAAAAAAAAAAAAAAAAAECcAABAnAAAAAAAAAAAAAAAAAAAAAAAAAAAAAAAAAAAAAAAAAAAAABQAAAAAAAAAwMD/AAAAAABkAAAAMgAAAAAAAABkAAAAAAAAAH9/fwAKAAAAIgAAABgAAAAAAAAAAAAAAAAAAAAAAAAAAAAAAAAAAAAkAAAAJAAAAAAAAAAHAAAAAAAAAAAAAAAAAAAAAAAAAAAAAAAAAAAAf39/ACUAAABYAAAAAAAAAAAAAAAAAAAAAAAAAAAAAAAAAAAAAAAAAAAAAAAAAAAAAAAAAAAAAAA/AAAAAAAAAKCGAQAAAAAAAAAAAAAAAAAMAAAAAQAAAAAAAAAAAAAAAAAAAB8AAABUAAAAAAAABQAAAAEAAAAAAAAAAAAAAAAAAAAAAAAAAAAAAAAAAAAAAAAAAAAAAAJ/f38AAAAAA8zMzADAwP8Af39/AAAAAAAAAAAAAAAAAAAAAAAAAAAAIQAAABgAAAAUAAAAKAUAAD8CAADYRQAAZwoAABAAAAAmAAAACAAAAAAAAAAAAAAA"/>
               </a:ext>
             </a:extLst>
           </p:cNvSpPr>
@@ -966,7 +966,7 @@
             <a:spLocks noGrp="1" noChangeArrowheads="1"/>
             <a:extLst>
               <a:ext uri="smNativeData">
-                <pr:smNativeData xmlns="smNativeData" xmlns:pr="smNativeData" xmlns:p15="http://schemas.microsoft.com/office/powerpoint/2012/main" xmlns:p14="http://schemas.microsoft.com/office/powerpoint/2010/main" xmlns:mc="http://schemas.openxmlformats.org/markup-compatibility/2006" val="SMDATA_15_FLquaRMAAAAlAAAAZAAAAA0AAAAAkAAAAEgAAACQAAAASAAAAAAAAAAAAAAAAAAAAAEAAABQAAAAAAAAAAAA4D8AAAAAAADgPwAAAAAAAOA/AAAAAAAA4D8AAAAAAADgPwAAAAAAAOA/AAAAAAAA4D8AAAAAAADgPwAAAAAAAOA/AAAAAAAA4D8CAAAAjAAAAAAAAAAAAAAAW5vVDP///wgAAAAAAAAAAAAAAAAAAAAAAAAAAAAAAAAAAAAAZAAAAAEAAABAAAAAAAAAAAAAAAAAAAAAAAAAAAAAAAAAAAAAAAAAAAAAAAAAAAAAAAAAAAAAAAAAAAAAAAAAAAAAAAAAAAAAAAAAAAAAAAAAAAAAAAAAAAAAAAAAAAAAFAAAADwAAAAAAAAAAAAAAAAAAAkUAAAAAQAAABQAAAAUAAAAFAAAAAEAAAAAAAAAZAAAAGQAAAAAAAAAZAAAAGQAAAAVAAAAYAAAAAAAAAAAAAAADwAAACADAAAAAAAAAAAAAAEAAACgMgAAVgcAAKr4//8BAAAAf39/AAEAAABkAAAAAAAAABQAAABAHwAAAAAAACYAAAAAAAAAwOD//wAAAAAmAAAAZAAAABYAAABMAAAAAAAAAAAAAAAEAAAAAAAAAAEAAADn5uYKAAAAACgAAAAoAAAAZAAAAGQAAAAAAAAAzMzMAAAAAABQAAAAUAAAAGQAAABkAAAAAAAAABcAAAAUAAAAAAAAAAAAAAD/fwAA/38AAAAAAAAJAAAABAAAAAAAAAAeAAAAaAAAAAAAAAAAAAAAAAAAAAAAAAAAAAAAECcAABAnAAAAAAAAAAAAAAAAAAAAAAAAAAAAAAAAAAAAAAAAAAAAABQAAAAAAAAAwMD/AAAAAABkAAAAMgAAAAAAAABkAAAAAAAAAH9/fwAKAAAAIgAAABgAAAAAAAAAAAAAAAAAAAAAAAAAAAAAAAAAAAAkAAAAJAAAAAAAAAAHAAAAAAAAAAAAAAAAAAAAAAAAAAAAAAAAAAAAf39/ACUAAABYAAAAAAAAAAAAAAAAAAAAAAAAAAAAAAAAAAAAAAAAAAAAAAAAAAAAAAAAAAAAAAA/AAAAAAAAAKCGAQAAAAAAAAAAAAAAAAAMAAAAAQAAAAAAAAAAAAAAAAAAAB8AAABUAAAAAAAABQAAAAEAAAAAAAAAAAAAAAAAAAAAAAAAAAAAAAAAAAAAAAAAAAAAAAJ/f38AAAAAA8zMzADAwP8Af39/AAAAAAAAAAAAAAAAAAAAAAAAAAAAIQAAABgAAAAUAAAAKAUAADsLAADYRQAAACYAABAAAAAmAAAACAAAAAAAAAAAAAAA"/>
+                <pr:smNativeData xmlns:mc="http://schemas.openxmlformats.org/markup-compatibility/2006" xmlns:p14="http://schemas.microsoft.com/office/powerpoint/2010/main" xmlns:p15="http://schemas.microsoft.com/office/powerpoint/2012/main" xmlns:pr="smNativeData" xmlns="smNativeData" val="SMDATA_15_FLquaRMAAAAlAAAAZAAAAA0AAAAAkAAAAEgAAACQAAAASAAAAAAAAAAAAAAAAAAAAAEAAABQAAAAAAAAAAAA4D8AAAAAAADgPwAAAAAAAOA/AAAAAAAA4D8AAAAAAADgPwAAAAAAAOA/AAAAAAAA4D8AAAAAAADgPwAAAAAAAOA/AAAAAAAA4D8CAAAAjAAAAAAAAAAAAAAAW5vVDP///wgAAAAAAAAAAAAAAAAAAAAAAAAAAAAAAAAAAAAAZAAAAAEAAABAAAAAAAAAAAAAAAAAAAAAAAAAAAAAAAAAAAAAAAAAAAAAAAAAAAAAAAAAAAAAAAAAAAAAAAAAAAAAAAAAAAAAAAAAAAAAAAAAAAAAAAAAAAAAAAAAAAAAFAAAADwAAAAAAAAAAAAAAAAAAAkUAAAAAQAAABQAAAAUAAAAFAAAAAEAAAAAAAAAZAAAAGQAAAAAAAAAZAAAAGQAAAAVAAAAYAAAAAAAAAAAAAAADwAAACADAAAAAAAAAAAAAAEAAACgMgAAVgcAAKr4//8BAAAAf39/AAEAAABkAAAAAAAAABQAAABAHwAAAAAAACYAAAAAAAAAwOD//wAAAAAmAAAAZAAAABYAAABMAAAAAAAAAAAAAAAEAAAAAAAAAAEAAADn5uYKAAAAACgAAAAoAAAAZAAAAGQAAAAAAAAAzMzMAAAAAABQAAAAUAAAAGQAAABkAAAAAAAAABcAAAAUAAAAAAAAAAAAAAD/fwAA/38AAAAAAAAJAAAABAAAAAAAAAAeAAAAaAAAAAAAAAAAAAAAAAAAAAAAAAAAAAAAECcAABAnAAAAAAAAAAAAAAAAAAAAAAAAAAAAAAAAAAAAAAAAAAAAABQAAAAAAAAAwMD/AAAAAABkAAAAMgAAAAAAAABkAAAAAAAAAH9/fwAKAAAAIgAAABgAAAAAAAAAAAAAAAAAAAAAAAAAAAAAAAAAAAAkAAAAJAAAAAAAAAAHAAAAAAAAAAAAAAAAAAAAAAAAAAAAAAAAAAAAf39/ACUAAABYAAAAAAAAAAAAAAAAAAAAAAAAAAAAAAAAAAAAAAAAAAAAAAAAAAAAAAAAAAAAAAA/AAAAAAAAAKCGAQAAAAAAAAAAAAAAAAAMAAAAAQAAAAAAAAAAAAAAAAAAAB8AAABUAAAAAAAABQAAAAEAAAAAAAAAAAAAAAAAAAAAAAAAAAAAAAAAAAAAAAAAAAAAAAJ/f38AAAAAA8zMzADAwP8Af39/AAAAAAAAAAAAAAAAAAAAAAAAAAAAIQAAABgAAAAUAAAAKAUAADsLAADYRQAAACYAABAAAAAmAAAACAAAAAAAAAAAAAAA"/>
               </a:ext>
             </a:extLst>
           </p:cNvSpPr>
@@ -1027,7 +1027,7 @@
             <a:spLocks noGrp="1" noChangeArrowheads="1"/>
             <a:extLst>
               <a:ext uri="smNativeData">
-                <pr:smNativeData xmlns="smNativeData" xmlns:pr="smNativeData" xmlns:p15="http://schemas.microsoft.com/office/powerpoint/2012/main" xmlns:p14="http://schemas.microsoft.com/office/powerpoint/2010/main" xmlns:mc="http://schemas.openxmlformats.org/markup-compatibility/2006" val="SMDATA_15_FLquaRMAAAAlAAAAZAAAAA0AAAAAkAAAAEgAAACQAAAASAAAAAAAAAABAAAAAAAAAAEAAABQAAAAAAAAAAAA4D8AAAAAAADgPwAAAAAAAOA/AAAAAAAA4D8AAAAAAADgPwAAAAAAAOA/AAAAAAAA4D8AAAAAAADgPwAAAAAAAOA/AAAAAAAA4D8CAAAAjAAAAAAAAAAAAAAAW5vVDP///wgAAAAAAAAAAAAAAAAAAAAAAAAAAAAAAAAAAAAAZAAAAAEAAABAAAAAAAAAAAAAAAAAAAAAAAAAAAAAAAAAAAAAAAAAAAAAAAAAAAAAAAAAAAAAAAAAAAAAAAAAAAAAAAAAAAAAAAAAAAAAAAAAAAAAAAAAAAAAAAAAAAAAFAAAADwAAAAAAAAAAAAAAAAAAAkUAAAAAQAAABQAAAAUAAAAFAAAAAEAAAAAAAAAZAAAAGQAAAAAAAAAZAAAAGQAAAAVAAAAYAAAAAAAAAAAAAAADwAAACADAAAAAAAAAAAAAAEAAACgMgAAVgcAAKr4//8BAAAAf39/AAEAAABkAAAAAAAAABQAAABAHwAAAAAAACYAAAAAAAAAwOD//wAAAAAmAAAAZAAAABYAAABMAAAAAAAAAAAAAAAEAAAAAAAAAAEAAADn5uYKAAAAACgAAAAoAAAAZAAAAGQAAAAAAAAAzMzMAAAAAABQAAAAUAAAAGQAAABkAAAAAAAAABcAAAAUAAAAAAAAAAAAAAD/fwAA/38AAAAAAAAJAAAABAAAAOBjngseAAAAaAAAAAAAAAAAAAAAAAAAAAAAAAAAAAAAECcAABAnAAAAAAAAAAAAAAAAAAAAAAAAAAAAAAAAAAAAAAAAAAAAABQAAAAAAAAAwMD/AAAAAABkAAAAMgAAAAAAAABkAAAAAAAAAH9/fwAKAAAAIgAAABgAAAAAAAAAAAAAAAAAAAAAAAAAAAAAAAAAAAAkAAAAJAAAAAAAAAAHAAAAAAAAAAAAAAAAAAAAAAAAAAAAAAAAAAAAf39/ACUAAABYAAAAAAAAAAAAAAAAAAAAAAAAAAAAAAAAAAAAAAAAAAAAAAAAAAAAAAAAAAAAAAA/AAAAAAAAAKCGAQAAAAAAAAAAAAAAAAAMAAAAAQAAAAAAAAAAAAAAAAAAAB8AAABUAAAAAAAABQAAAAEAAAAAAAAAAAAAAAAAAAAAAAAAAAAAAAAAAAAAAAAAAAAAAAJ/f38AAAAAA8zMzADAwP8Af39/AAAAAAAAAAAAAAAAAAAAAAAAAAAAIQAAABgAAAAUAAAAKAUAABonAAAIFgAAWSkAABAAAAAmAAAACAAAAAAAAAAAAAAA"/>
+                <pr:smNativeData xmlns:mc="http://schemas.openxmlformats.org/markup-compatibility/2006" xmlns:p14="http://schemas.microsoft.com/office/powerpoint/2010/main" xmlns:p15="http://schemas.microsoft.com/office/powerpoint/2012/main" xmlns:pr="smNativeData" xmlns="smNativeData" val="SMDATA_15_FLquaRMAAAAlAAAAZAAAAA0AAAAAkAAAAEgAAACQAAAASAAAAAAAAAABAAAAAAAAAAEAAABQAAAAAAAAAAAA4D8AAAAAAADgPwAAAAAAAOA/AAAAAAAA4D8AAAAAAADgPwAAAAAAAOA/AAAAAAAA4D8AAAAAAADgPwAAAAAAAOA/AAAAAAAA4D8CAAAAjAAAAAAAAAAAAAAAW5vVDP///wgAAAAAAAAAAAAAAAAAAAAAAAAAAAAAAAAAAAAAZAAAAAEAAABAAAAAAAAAAAAAAAAAAAAAAAAAAAAAAAAAAAAAAAAAAAAAAAAAAAAAAAAAAAAAAAAAAAAAAAAAAAAAAAAAAAAAAAAAAAAAAAAAAAAAAAAAAAAAAAAAAAAAFAAAADwAAAAAAAAAAAAAAAAAAAkUAAAAAQAAABQAAAAUAAAAFAAAAAEAAAAAAAAAZAAAAGQAAAAAAAAAZAAAAGQAAAAVAAAAYAAAAAAAAAAAAAAADwAAACADAAAAAAAAAAAAAAEAAACgMgAAVgcAAKr4//8BAAAAf39/AAEAAABkAAAAAAAAABQAAABAHwAAAAAAACYAAAAAAAAAwOD//wAAAAAmAAAAZAAAABYAAABMAAAAAAAAAAAAAAAEAAAAAAAAAAEAAADn5uYKAAAAACgAAAAoAAAAZAAAAGQAAAAAAAAAzMzMAAAAAABQAAAAUAAAAGQAAABkAAAAAAAAABcAAAAUAAAAAAAAAAAAAAD/fwAA/38AAAAAAAAJAAAABAAAAOBjngseAAAAaAAAAAAAAAAAAAAAAAAAAAAAAAAAAAAAECcAABAnAAAAAAAAAAAAAAAAAAAAAAAAAAAAAAAAAAAAAAAAAAAAABQAAAAAAAAAwMD/AAAAAABkAAAAMgAAAAAAAABkAAAAAAAAAH9/fwAKAAAAIgAAABgAAAAAAAAAAAAAAAAAAAAAAAAAAAAAAAAAAAAkAAAAJAAAAAAAAAAHAAAAAAAAAAAAAAAAAAAAAAAAAAAAAAAAAAAAf39/ACUAAABYAAAAAAAAAAAAAAAAAAAAAAAAAAAAAAAAAAAAAAAAAAAAAAAAAAAAAAAAAAAAAAA/AAAAAAAAAKCGAQAAAAAAAAAAAAAAAAAMAAAAAQAAAAAAAAAAAAAAAAAAAB8AAABUAAAAAAAABQAAAAEAAAAAAAAAAAAAAAAAAAAAAAAAAAAAAAAAAAAAAAAAAAAAAAJ/f38AAAAAA8zMzADAwP8Af39/AAAAAAAAAAAAAAAAAAAAAAAAAAAAIQAAABgAAAAUAAAAKAUAABonAAAIFgAAWSkAABAAAAAmAAAACAAAAAAAAAAAAAAA"/>
               </a:ext>
             </a:extLst>
           </p:cNvSpPr>
@@ -1044,7 +1044,7 @@
               <a:defRPr lang="en-US"/>
             </a:pPr>
             <a:fld id="{30AE8A82-CCDD-FB7C-9316-3A29C458656F}" type="datetime1">
-              <a:t>4/21/2026</a:t>
+              <a:t>6/3/2026</a:t>
             </a:fld>
             <a:endParaRPr/>
           </a:p>
@@ -1057,7 +1057,7 @@
             <a:spLocks noGrp="1" noChangeArrowheads="1"/>
             <a:extLst>
               <a:ext uri="smNativeData">
-                <pr:smNativeData xmlns="smNativeData" xmlns:pr="smNativeData" xmlns:p15="http://schemas.microsoft.com/office/powerpoint/2012/main" xmlns:p14="http://schemas.microsoft.com/office/powerpoint/2010/main" xmlns:mc="http://schemas.openxmlformats.org/markup-compatibility/2006" val="SMDATA_15_FLquaRMAAAAlAAAAZAAAAA0AAAAAkAAAAEgAAACQAAAASAAAAAAAAAABAAAAAAAAAAEAAABQAAAAAAAAAAAA4D8AAAAAAADgPwAAAAAAAOA/AAAAAAAA4D8AAAAAAADgPwAAAAAAAOA/AAAAAAAA4D8AAAAAAADgPwAAAAAAAOA/AAAAAAAA4D8CAAAAjAAAAAAAAAAAAAAAW5vVDP///wgAAAAAAAAAAAAAAAAAAAAAAAAAAAAAAAAAAAAAZAAAAAEAAABAAAAAAAAAAAAAAAAAAAAAAAAAAAAAAAAAAAAAAAAAAAAAAAAAAAAAAAAAAAAAAAAAAAAAAAAAAAAAAAAAAAAAAAAAAAAAAAAAAAAAAAAAAAAAAAAAAAAAFAAAADwAAAAAAAAAAAAAAAAAAAkUAAAAAQAAABQAAAAUAAAAFAAAAAEAAAAAAAAAZAAAAGQAAAAAAAAAZAAAAGQAAAAVAAAAYAAAAAAAAAAAAAAADwAAACADAAAAAAAAAAAAAAEAAACgMgAAVgcAAKr4//8BAAAAf39/AAEAAABkAAAAAAAAABQAAABAHwAAAAAAACYAAAAAAAAAwOD//wAAAAAmAAAAZAAAABYAAABMAAAAAAAAAAAAAAAEAAAAAAAAAAEAAADn5uYKAAAAACgAAAAoAAAAZAAAAGQAAAAAAAAAzMzMAAAAAABQAAAAUAAAAGQAAABkAAAAAAAAABcAAAAUAAAAAAAAAAAAAAD/fwAA/38AAAAAAAAJAAAABAAAAOrv9v8eAAAAaAAAAAAAAAAAAAAAAAAAAAAAAAAAAAAAECcAABAnAAAAAAAAAAAAAAAAAAAAAAAAAAAAAAAAAAAAAAAAAAAAABQAAAAAAAAAwMD/AAAAAABkAAAAMgAAAAAAAABkAAAAAAAAAH9/fwAKAAAAIgAAABgAAAAAAAAAAAAAAAAAAAAAAAAAAAAAAAAAAAAkAAAAJAAAAAAAAAAHAAAAAAAAAAAAAAAAAAAAAAAAAAAAAAAAAAAAf39/ACUAAABYAAAAAAAAAAAAAAAAAAAAAAAAAAAAAAAAAAAAAAAAAAAAAAAAAAAAAAAAAAAAAAA/AAAAAAAAAKCGAQAAAAAAAAAAAAAAAAAMAAAAAQAAAAAAAAAAAAAAAAAAAB8AAABUAAAAAAAABQAAAAEAAAAAAAAAAAAAAAAAAAAAAAAAAAAAAAAAAAAAAAAAAAAAAAJ/f38AAAAAA8zMzADAwP8Af39/AAAAAAAAAAAAAAAAAAAAAAAAAAAAIQAAABgAAAAUAAAA2BgAABonAAAoMgAAWSkAABAAAAAmAAAACAAAAAAAAAAAAAAA"/>
+                <pr:smNativeData xmlns:mc="http://schemas.openxmlformats.org/markup-compatibility/2006" xmlns:p14="http://schemas.microsoft.com/office/powerpoint/2010/main" xmlns:p15="http://schemas.microsoft.com/office/powerpoint/2012/main" xmlns:pr="smNativeData" xmlns="smNativeData" val="SMDATA_15_FLquaRMAAAAlAAAAZAAAAA0AAAAAkAAAAEgAAACQAAAASAAAAAAAAAABAAAAAAAAAAEAAABQAAAAAAAAAAAA4D8AAAAAAADgPwAAAAAAAOA/AAAAAAAA4D8AAAAAAADgPwAAAAAAAOA/AAAAAAAA4D8AAAAAAADgPwAAAAAAAOA/AAAAAAAA4D8CAAAAjAAAAAAAAAAAAAAAW5vVDP///wgAAAAAAAAAAAAAAAAAAAAAAAAAAAAAAAAAAAAAZAAAAAEAAABAAAAAAAAAAAAAAAAAAAAAAAAAAAAAAAAAAAAAAAAAAAAAAAAAAAAAAAAAAAAAAAAAAAAAAAAAAAAAAAAAAAAAAAAAAAAAAAAAAAAAAAAAAAAAAAAAAAAAFAAAADwAAAAAAAAAAAAAAAAAAAkUAAAAAQAAABQAAAAUAAAAFAAAAAEAAAAAAAAAZAAAAGQAAAAAAAAAZAAAAGQAAAAVAAAAYAAAAAAAAAAAAAAADwAAACADAAAAAAAAAAAAAAEAAACgMgAAVgcAAKr4//8BAAAAf39/AAEAAABkAAAAAAAAABQAAABAHwAAAAAAACYAAAAAAAAAwOD//wAAAAAmAAAAZAAAABYAAABMAAAAAAAAAAAAAAAEAAAAAAAAAAEAAADn5uYKAAAAACgAAAAoAAAAZAAAAGQAAAAAAAAAzMzMAAAAAABQAAAAUAAAAGQAAABkAAAAAAAAABcAAAAUAAAAAAAAAAAAAAD/fwAA/38AAAAAAAAJAAAABAAAAOrv9v8eAAAAaAAAAAAAAAAAAAAAAAAAAAAAAAAAAAAAECcAABAnAAAAAAAAAAAAAAAAAAAAAAAAAAAAAAAAAAAAAAAAAAAAABQAAAAAAAAAwMD/AAAAAABkAAAAMgAAAAAAAABkAAAAAAAAAH9/fwAKAAAAIgAAABgAAAAAAAAAAAAAAAAAAAAAAAAAAAAAAAAAAAAkAAAAJAAAAAAAAAAHAAAAAAAAAAAAAAAAAAAAAAAAAAAAAAAAAAAAf39/ACUAAABYAAAAAAAAAAAAAAAAAAAAAAAAAAAAAAAAAAAAAAAAAAAAAAAAAAAAAAAAAAAAAAA/AAAAAAAAAKCGAQAAAAAAAAAAAAAAAAAMAAAAAQAAAAAAAAAAAAAAAAAAAB8AAABUAAAAAAAABQAAAAEAAAAAAAAAAAAAAAAAAAAAAAAAAAAAAAAAAAAAAAAAAAAAAAJ/f38AAAAAA8zMzADAwP8Af39/AAAAAAAAAAAAAAAAAAAAAAAAAAAAIQAAABgAAAAUAAAA2BgAABonAAAoMgAAWSkAABAAAAAmAAAACAAAAAAAAAAAAAAA"/>
               </a:ext>
             </a:extLst>
           </p:cNvSpPr>
@@ -1084,7 +1084,7 @@
             <a:spLocks noGrp="1" noChangeArrowheads="1"/>
             <a:extLst>
               <a:ext uri="smNativeData">
-                <pr:smNativeData xmlns="smNativeData" xmlns:pr="smNativeData" xmlns:p15="http://schemas.microsoft.com/office/powerpoint/2012/main" xmlns:p14="http://schemas.microsoft.com/office/powerpoint/2010/main" xmlns:mc="http://schemas.openxmlformats.org/markup-compatibility/2006" val="SMDATA_15_FLquaRMAAAAlAAAAZAAAAA0AAAAAkAAAAEgAAACQAAAASAAAAAAAAAABAAAAAAAAAAEAAABQAAAAAAAAAAAA4D8AAAAAAADgPwAAAAAAAOA/AAAAAAAA4D8AAAAAAADgPwAAAAAAAOA/AAAAAAAA4D8AAAAAAADgPwAAAAAAAOA/AAAAAAAA4D8CAAAAjAAAAAAAAAAAAAAAW5vVDP///wgAAAAAAAAAAAAAAAAAAAAAAAAAAAAAAAAAAAAAZAAAAAEAAABAAAAAAAAAAAAAAAAAAAAAAAAAAAAAAAAAAAAAAAAAAAAAAAAAAAAAAAAAAAAAAAAAAAAAAAAAAAAAAAAAAAAAAAAAAAAAAAAAAAAAAAAAAAAAAAAAAAAAFAAAADwAAAAAAAAAAAAAAAAAAAkUAAAAAQAAABQAAAAUAAAAFAAAAAEAAAAAAAAAZAAAAGQAAAAAAAAAZAAAAGQAAAAVAAAAYAAAAAAAAAAAAAAADwAAACADAAAAAAAAAAAAAAEAAACgMgAAVgcAAKr4//8BAAAAf39/AAEAAABkAAAAAAAAABQAAABAHwAAAAAAACYAAAAAAAAAwOD//wAAAAAmAAAAZAAAABYAAABMAAAAAAAAAAAAAAAEAAAAAAAAAAEAAADn5uYKAAAAACgAAAAoAAAAZAAAAGQAAAAAAAAAzMzMAAAAAABQAAAAUAAAAGQAAABkAAAAAAAAABcAAAAUAAAAAAAAAAAAAAD/fwAA/38AAAAAAAAJAAAABAAAAKiVygEeAAAAaAAAAAAAAAAAAAAAAAAAAAAAAAAAAAAAECcAABAnAAAAAAAAAAAAAAAAAAAAAAAAAAAAAAAAAAAAAAAAAAAAABQAAAAAAAAAwMD/AAAAAABkAAAAMgAAAAAAAABkAAAAAAAAAH9/fwAKAAAAIgAAABgAAAAAAAAAAAAAAAAAAAAAAAAAAAAAAAAAAAAkAAAAJAAAAAAAAAAHAAAAAAAAAAAAAAAAAAAAAAAAAAAAAAAAAAAAf39/ACUAAABYAAAAAAAAAAAAAAAAAAAAAAAAAAAAAAAAAAAAAAAAAAAAAAAAAAAAAAAAAAAAAAA/AAAAAAAAAKCGAQAAAAAAAAAAAAAAAAAMAAAAAQAAAAAAAAAAAAAAAAAAAB8AAABUAAAAAAAABQAAAAEAAAAAAAAAAAAAAAAAAAAAAAAAAAAAAAAAAAAAAAAAAAAAAAJ/f38AAAAAA8zMzADAwP8Af39/AAAAAAAAAAAAAAAAAAAAAAAAAAAAIQAAABgAAAAUAAAA+DQAABonAADYRQAAWSkAABAAAAAmAAAACAAAAAAAAAAAAAAA"/>
+                <pr:smNativeData xmlns:mc="http://schemas.openxmlformats.org/markup-compatibility/2006" xmlns:p14="http://schemas.microsoft.com/office/powerpoint/2010/main" xmlns:p15="http://schemas.microsoft.com/office/powerpoint/2012/main" xmlns:pr="smNativeData" xmlns="smNativeData" val="SMDATA_15_FLquaRMAAAAlAAAAZAAAAA0AAAAAkAAAAEgAAACQAAAASAAAAAAAAAABAAAAAAAAAAEAAABQAAAAAAAAAAAA4D8AAAAAAADgPwAAAAAAAOA/AAAAAAAA4D8AAAAAAADgPwAAAAAAAOA/AAAAAAAA4D8AAAAAAADgPwAAAAAAAOA/AAAAAAAA4D8CAAAAjAAAAAAAAAAAAAAAW5vVDP///wgAAAAAAAAAAAAAAAAAAAAAAAAAAAAAAAAAAAAAZAAAAAEAAABAAAAAAAAAAAAAAAAAAAAAAAAAAAAAAAAAAAAAAAAAAAAAAAAAAAAAAAAAAAAAAAAAAAAAAAAAAAAAAAAAAAAAAAAAAAAAAAAAAAAAAAAAAAAAAAAAAAAAFAAAADwAAAAAAAAAAAAAAAAAAAkUAAAAAQAAABQAAAAUAAAAFAAAAAEAAAAAAAAAZAAAAGQAAAAAAAAAZAAAAGQAAAAVAAAAYAAAAAAAAAAAAAAADwAAACADAAAAAAAAAAAAAAEAAACgMgAAVgcAAKr4//8BAAAAf39/AAEAAABkAAAAAAAAABQAAABAHwAAAAAAACYAAAAAAAAAwOD//wAAAAAmAAAAZAAAABYAAABMAAAAAAAAAAAAAAAEAAAAAAAAAAEAAADn5uYKAAAAACgAAAAoAAAAZAAAAGQAAAAAAAAAzMzMAAAAAABQAAAAUAAAAGQAAABkAAAAAAAAABcAAAAUAAAAAAAAAAAAAAD/fwAA/38AAAAAAAAJAAAABAAAAKiVygEeAAAAaAAAAAAAAAAAAAAAAAAAAAAAAAAAAAAAECcAABAnAAAAAAAAAAAAAAAAAAAAAAAAAAAAAAAAAAAAAAAAAAAAABQAAAAAAAAAwMD/AAAAAABkAAAAMgAAAAAAAABkAAAAAAAAAH9/fwAKAAAAIgAAABgAAAAAAAAAAAAAAAAAAAAAAAAAAAAAAAAAAAAkAAAAJAAAAAAAAAAHAAAAAAAAAAAAAAAAAAAAAAAAAAAAAAAAAAAAf39/ACUAAABYAAAAAAAAAAAAAAAAAAAAAAAAAAAAAAAAAAAAAAAAAAAAAAAAAAAAAAAAAAAAAAA/AAAAAAAAAKCGAQAAAAAAAAAAAAAAAAAMAAAAAQAAAAAAAAAAAAAAAAAAAB8AAABUAAAAAAAABQAAAAEAAAAAAAAAAAAAAAAAAAAAAAAAAAAAAAAAAAAAAAAAAAAAAAJ/f38AAAAAA8zMzADAwP8Af39/AAAAAAAAAAAAAAAAAAAAAAAAAAAAIQAAABgAAAAUAAAA+DQAABonAADYRQAAWSkAABAAAAAmAAAACAAAAAAAAAAAAAAA"/>
               </a:ext>
             </a:extLst>
           </p:cNvSpPr>
@@ -1140,7 +1140,7 @@
             <a:spLocks noGrp="1" noChangeArrowheads="1"/>
             <a:extLst>
               <a:ext uri="smNativeData">
-                <pr:smNativeData xmlns="smNativeData" xmlns:pr="smNativeData" xmlns:p15="http://schemas.microsoft.com/office/powerpoint/2012/main" xmlns:p14="http://schemas.microsoft.com/office/powerpoint/2010/main" xmlns:mc="http://schemas.openxmlformats.org/markup-compatibility/2006" val="SMDATA_15_FLquaRMAAAAlAAAAZAAAAA0AAAAAkAAAAEgAAACQAAAASAAAAAAAAAACAAAAAAAAAAEAAABQAAAAAAAAAAAA4D8AAAAAAADgPwAAAAAAAOA/AAAAAAAA4D8AAAAAAADgPwAAAAAAAOA/AAAAAAAA4D8AAAAAAADgPwAAAAAAAOA/AAAAAAAA4D8CAAAAjAAAAAAAAAAAAAAAW5vVDP///wgAAAAAAAAAAAAAAAAAAAAAAAAAAAAAAAAAAAAAZAAAAAEAAABAAAAAAAAAAAAAAAAAAAAAAAAAAAAAAAAAAAAAAAAAAAAAAAAAAAAAAAAAAAAAAAAAAAAAAAAAAAAAAAAAAAAAAAAAAAAAAAAAAAAAAAAAAAAAAAAAAAAAFAAAADwAAAAAAAAAAAAAAAAAAAkUAAAAAQAAABQAAAAUAAAAFAAAAAEAAAAAAAAAZAAAAGQAAAAAAAAAZAAAAGQAAAAVAAAAYAAAAAAAAAAAAAAADwAAACADAAAAAAAAAAAAAAEAAACgMgAAVgcAAKr4//8BAAAAf39/AAEAAABkAAAAAAAAABQAAABAHwAAAAAAACYAAAAAAAAAwOD//wAAAAAmAAAAZAAAABYAAABMAAAAAAAAAAAAAAAEAAAAAAAAAAEAAADn5uYKAAAAACgAAAAoAAAAZAAAAGQAAAAAAAAAzMzMAAAAAABQAAAAUAAAAGQAAABkAAAAAAAAABcAAAAUAAAAAAAAAAAAAAD/fwAA/38AAAAAAAAJAAAABAAAANCtTwIeAAAAaAAAAAAAAAAAAAAAAAAAAAAAAAAAAAAAECcAABAnAAAAAAAAAAAAAAAAAAAAAAAAAAAAAAAAAAAAAAAAAAAAABQAAAAAAAAAwMD/AAAAAABkAAAAMgAAAAAAAABkAAAAAAAAAH9/fwAKAAAAIgAAABgAAAAAAAAAAAAAAAAAAAAAAAAAAAAAAAAAAAAkAAAAJAAAAAAAAAAHAAAAAAAAAAAAAAAAAAAAAAAAAAAAAAAAAAAAf39/ACUAAABYAAAAAAAAAAAAAAAAAAAAAAAAAAAAAAAAAAAAAAAAAAAAAAAAAAAAAAAAAAAAAAA/AAAAAAAAAKCGAQAAAAAAAAAAAAAAAAAMAAAAAQAAAAAAAAAAAAAAAAAAAB8AAABUAAAAAAAABQAAAAEAAAAAAAAAAAAAAAAAAAAAAAAAAAAAAAAAAAAAAAAAAAAAAAJ/f38AAAAAA8zMzADAwP8Af39/AAAAAAAAAAAAAAAAAAAAAAAAAAAAIQAAABgAAAAUAAAAHgUAAIUKAADORQAAERwAABAAAAAmAAAACAAAAIGAAAAAAAAA"/>
+                <pr:smNativeData xmlns:mc="http://schemas.openxmlformats.org/markup-compatibility/2006" xmlns:p14="http://schemas.microsoft.com/office/powerpoint/2010/main" xmlns:p15="http://schemas.microsoft.com/office/powerpoint/2012/main" xmlns:pr="smNativeData" xmlns="smNativeData" val="SMDATA_15_FLquaRMAAAAlAAAAZAAAAA0AAAAAkAAAAEgAAACQAAAASAAAAAAAAAACAAAAAAAAAAEAAABQAAAAAAAAAAAA4D8AAAAAAADgPwAAAAAAAOA/AAAAAAAA4D8AAAAAAADgPwAAAAAAAOA/AAAAAAAA4D8AAAAAAADgPwAAAAAAAOA/AAAAAAAA4D8CAAAAjAAAAAAAAAAAAAAAW5vVDP///wgAAAAAAAAAAAAAAAAAAAAAAAAAAAAAAAAAAAAAZAAAAAEAAABAAAAAAAAAAAAAAAAAAAAAAAAAAAAAAAAAAAAAAAAAAAAAAAAAAAAAAAAAAAAAAAAAAAAAAAAAAAAAAAAAAAAAAAAAAAAAAAAAAAAAAAAAAAAAAAAAAAAAFAAAADwAAAAAAAAAAAAAAAAAAAkUAAAAAQAAABQAAAAUAAAAFAAAAAEAAAAAAAAAZAAAAGQAAAAAAAAAZAAAAGQAAAAVAAAAYAAAAAAAAAAAAAAADwAAACADAAAAAAAAAAAAAAEAAACgMgAAVgcAAKr4//8BAAAAf39/AAEAAABkAAAAAAAAABQAAABAHwAAAAAAACYAAAAAAAAAwOD//wAAAAAmAAAAZAAAABYAAABMAAAAAAAAAAAAAAAEAAAAAAAAAAEAAADn5uYKAAAAACgAAAAoAAAAZAAAAGQAAAAAAAAAzMzMAAAAAABQAAAAUAAAAGQAAABkAAAAAAAAABcAAAAUAAAAAAAAAAAAAAD/fwAA/38AAAAAAAAJAAAABAAAANCtTwIeAAAAaAAAAAAAAAAAAAAAAAAAAAAAAAAAAAAAECcAABAnAAAAAAAAAAAAAAAAAAAAAAAAAAAAAAAAAAAAAAAAAAAAABQAAAAAAAAAwMD/AAAAAABkAAAAMgAAAAAAAABkAAAAAAAAAH9/fwAKAAAAIgAAABgAAAAAAAAAAAAAAAAAAAAAAAAAAAAAAAAAAAAkAAAAJAAAAAAAAAAHAAAAAAAAAAAAAAAAAAAAAAAAAAAAAAAAAAAAf39/ACUAAABYAAAAAAAAAAAAAAAAAAAAAAAAAAAAAAAAAAAAAAAAAAAAAAAAAAAAAAAAAAAAAAA/AAAAAAAAAKCGAQAAAAAAAAAAAAAAAAAMAAAAAQAAAAAAAAAAAAAAAAAAAB8AAABUAAAAAAAABQAAAAEAAAAAAAAAAAAAAAAAAAAAAAAAAAAAAAAAAAAAAAAAAAAAAAJ/f38AAAAAA8zMzADAwP8Af39/AAAAAAAAAAAAAAAAAAAAAAAAAAAAIQAAABgAAAAUAAAAHgUAAIUKAADORQAAERwAABAAAAAmAAAACAAAAIGAAAAAAAAA"/>
               </a:ext>
             </a:extLst>
           </p:cNvSpPr>
@@ -1206,7 +1206,7 @@
             <a:spLocks noGrp="1" noChangeArrowheads="1"/>
             <a:extLst>
               <a:ext uri="smNativeData">
-                <pr:smNativeData xmlns="smNativeData" xmlns:pr="smNativeData" xmlns:p15="http://schemas.microsoft.com/office/powerpoint/2012/main" xmlns:p14="http://schemas.microsoft.com/office/powerpoint/2010/main" xmlns:mc="http://schemas.openxmlformats.org/markup-compatibility/2006" val="SMDATA_15_FLquaRMAAAAlAAAAZAAAAA0AAAAAkAAAAEgAAACQAAAASAAAAAAAAAAAAAAAAAAAAAEAAABQAAAAAAAAAAAA4D8AAAAAAADgPwAAAAAAAOA/AAAAAAAA4D8AAAAAAADgPwAAAAAAAOA/AAAAAAAA4D8AAAAAAADgPwAAAAAAAOA/AAAAAAAA4D8CAAAAjAAAAAAAAAAAAAAAW5vVDP///wgAAAAAAAAAAAAAAAAAAAAAAAAAAAAAAAAAAAAAZAAAAAEAAABAAAAAAAAAAAAAAAAAAAAAAAAAAAAAAAAAAAAAAAAAAAAAAAAAAAAAAAAAAAAAAAAAAAAAAAAAAAAAAAAAAAAAAAAAAAAAAAAAAAAAAAAAAAAAAAAAAAAAFAAAADwAAAAAAAAAAAAAAAAAAAkUAAAAAQAAABQAAAAUAAAAFAAAAAEAAAAAAAAAZAAAAGQAAAAAAAAAZAAAAGQAAAAVAAAAYAAAAAAAAAAAAAAADwAAACADAAAAAAAAAAAAAAEAAACgMgAAVgcAAKr4//8BAAAAf39/AAEAAABkAAAAAAAAABQAAABAHwAAAAAAACYAAAAAAAAAwOD//wAAAAAmAAAAZAAAABYAAABMAAAAAAAAAAAAAAAEAAAAAAAAAAEAAADn5uYKAAAAACgAAAAoAAAAZAAAAGQAAAAAAAAAzMzMAAAAAABQAAAAUAAAAGQAAABkAAAAAAAAABcAAAAUAAAAAAAAAAAAAAD/fwAA/38AAAAAAAAJAAAABAAAAOrv9v8eAAAAaAAAAAAAAAAAAAAAAAAAAAAAAAAAAAAAECcAABAnAAAAAAAAAAAAAAAAAAAAAAAAAAAAAAAAAAAAAAAAAAAAABQAAAAAAAAAwMD/AAAAAABkAAAAMgAAAAAAAABkAAAAAAAAAH9/fwAKAAAAIgAAABgAAAAAAAAAAAAAAAAAAAAAAAAAAAAAAAAAAAAkAAAAJAAAAAAAAAAHAAAAAAAAAAAAAAAAAAAAAAAAAAAAAAAAAAAAf39/ACUAAABYAAAAAAAAAAAAAAAAAAAAAAAAAAAAAAAAAAAAAAAAAAAAAAAAAAAAAAAAAAAAAAA/AAAAAAAAAKCGAQAAAAAAAAAAAAAAAAAMAAAAAQAAAAAAAAAAAAAAAAAAAB8AAABUAAAAAAAABQAAAAEAAAAAAAAAAAAAAAAAAAAAAAAAAAAAAAAAAAAAAAAAAAAAAAJ/f38AAAAAA8zMzADAwP8Af39/AAAAAAAAAAAAAAAAAAAAAAAAAAAAIQAAABgAAAAUAAAAHgUAADwcAADORQAAdiUAABAAAAAmAAAACAAAAAGAAAAAAAAA"/>
+                <pr:smNativeData xmlns:mc="http://schemas.openxmlformats.org/markup-compatibility/2006" xmlns:p14="http://schemas.microsoft.com/office/powerpoint/2010/main" xmlns:p15="http://schemas.microsoft.com/office/powerpoint/2012/main" xmlns:pr="smNativeData" xmlns="smNativeData" val="SMDATA_15_FLquaRMAAAAlAAAAZAAAAA0AAAAAkAAAAEgAAACQAAAASAAAAAAAAAAAAAAAAAAAAAEAAABQAAAAAAAAAAAA4D8AAAAAAADgPwAAAAAAAOA/AAAAAAAA4D8AAAAAAADgPwAAAAAAAOA/AAAAAAAA4D8AAAAAAADgPwAAAAAAAOA/AAAAAAAA4D8CAAAAjAAAAAAAAAAAAAAAW5vVDP///wgAAAAAAAAAAAAAAAAAAAAAAAAAAAAAAAAAAAAAZAAAAAEAAABAAAAAAAAAAAAAAAAAAAAAAAAAAAAAAAAAAAAAAAAAAAAAAAAAAAAAAAAAAAAAAAAAAAAAAAAAAAAAAAAAAAAAAAAAAAAAAAAAAAAAAAAAAAAAAAAAAAAAFAAAADwAAAAAAAAAAAAAAAAAAAkUAAAAAQAAABQAAAAUAAAAFAAAAAEAAAAAAAAAZAAAAGQAAAAAAAAAZAAAAGQAAAAVAAAAYAAAAAAAAAAAAAAADwAAACADAAAAAAAAAAAAAAEAAACgMgAAVgcAAKr4//8BAAAAf39/AAEAAABkAAAAAAAAABQAAABAHwAAAAAAACYAAAAAAAAAwOD//wAAAAAmAAAAZAAAABYAAABMAAAAAAAAAAAAAAAEAAAAAAAAAAEAAADn5uYKAAAAACgAAAAoAAAAZAAAAGQAAAAAAAAAzMzMAAAAAABQAAAAUAAAAGQAAABkAAAAAAAAABcAAAAUAAAAAAAAAAAAAAD/fwAA/38AAAAAAAAJAAAABAAAAOrv9v8eAAAAaAAAAAAAAAAAAAAAAAAAAAAAAAAAAAAAECcAABAnAAAAAAAAAAAAAAAAAAAAAAAAAAAAAAAAAAAAAAAAAAAAABQAAAAAAAAAwMD/AAAAAABkAAAAMgAAAAAAAABkAAAAAAAAAH9/fwAKAAAAIgAAABgAAAAAAAAAAAAAAAAAAAAAAAAAAAAAAAAAAAAkAAAAJAAAAAAAAAAHAAAAAAAAAAAAAAAAAAAAAAAAAAAAAAAAAAAAf39/ACUAAABYAAAAAAAAAAAAAAAAAAAAAAAAAAAAAAAAAAAAAAAAAAAAAAAAAAAAAAAAAAAAAAA/AAAAAAAAAKCGAQAAAAAAAAAAAAAAAAAMAAAAAQAAAAAAAAAAAAAAAAAAAB8AAABUAAAAAAAABQAAAAEAAAAAAAAAAAAAAAAAAAAAAAAAAAAAAAAAAAAAAAAAAAAAAAJ/f38AAAAAA8zMzADAwP8Af39/AAAAAAAAAAAAAAAAAAAAAAAAAAAAIQAAABgAAAAUAAAAHgUAADwcAADORQAAdiUAABAAAAAmAAAACAAAAAGAAAAAAAAA"/>
               </a:ext>
             </a:extLst>
           </p:cNvSpPr>
@@ -1313,7 +1313,7 @@
             <a:spLocks noGrp="1" noChangeArrowheads="1"/>
             <a:extLst>
               <a:ext uri="smNativeData">
-                <pr:smNativeData xmlns="smNativeData" xmlns:pr="smNativeData" xmlns:p15="http://schemas.microsoft.com/office/powerpoint/2012/main" xmlns:p14="http://schemas.microsoft.com/office/powerpoint/2010/main" xmlns:mc="http://schemas.openxmlformats.org/markup-compatibility/2006" val="SMDATA_15_FLquaRMAAAAlAAAAZAAAAA0AAAAAkAAAAEgAAACQAAAASAAAAAAAAAABAAAAAAAAAAEAAABQAAAAAAAAAAAA4D8AAAAAAADgPwAAAAAAAOA/AAAAAAAA4D8AAAAAAADgPwAAAAAAAOA/AAAAAAAA4D8AAAAAAADgPwAAAAAAAOA/AAAAAAAA4D8CAAAAjAAAAAAAAAAAAAAAW5vVDP///wgAAAAAAAAAAAAAAAAAAAAAAAAAAAAAAAAAAAAAZAAAAAEAAABAAAAAAAAAAAAAAAAAAAAAAAAAAAAAAAAAAAAAAAAAAAAAAAAAAAAAAAAAAAAAAAAAAAAAAAAAAAAAAAAAAAAAAAAAAAAAAAAAAAAAAAAAAAAAAAAAAAAAFAAAADwAAAAAAAAAAAAAAAAAAAkUAAAAAQAAABQAAAAUAAAAFAAAAAEAAAAAAAAAZAAAAGQAAAAAAAAAZAAAAGQAAAAVAAAAYAAAAAAAAAAAAAAADwAAACADAAAAAAAAAAAAAAEAAACgMgAAVgcAAKr4//8BAAAAf39/AAEAAABkAAAAAAAAABQAAABAHwAAAAAAACYAAAAAAAAAwOD//wAAAAAmAAAAZAAAABYAAABMAAAAAAAAAAAAAAAEAAAAAAAAAAEAAADn5uYKAAAAACgAAAAoAAAAZAAAAGQAAAAAAAAAzMzMAAAAAABQAAAAUAAAAGQAAABkAAAAAAAAABcAAAAUAAAAAAAAAAAAAAD/fwAA/38AAAAAAAAJAAAABAAAAOrv9v8eAAAAaAAAAAAAAAAAAAAAAAAAAAAAAAAAAAAAECcAABAnAAAAAAAAAAAAAAAAAAAAAAAAAAAAAAAAAAAAAAAAAAAAABQAAAAAAAAAwMD/AAAAAABkAAAAMgAAAAAAAABkAAAAAAAAAH9/fwAKAAAAIgAAABgAAAAAAAAAAAAAAAAAAAAAAAAAAAAAAAAAAAAkAAAAJAAAAAAAAAAHAAAAAAAAAAAAAAAAAAAAAAAAAAAAAAAAAAAAf39/ACUAAABYAAAAAAAAAAAAAAAAAAAAAAAAAAAAAAAAAAAAAAAAAAAAAAAAAAAAAAAAAAAAAAA/AAAAAAAAAKCGAQAAAAAAAAAAAAAAAAAMAAAAAQAAAAAAAAAAAAAAAAAAAB8AAABUAAAAAAAABQAAAAEAAAAAAAAAAAAAAAAAAAAAAAAAAAAAAAAAAAAAAAAAAAAAAAJ/f38AAAAAA8zMzADAwP8Af39/AAAAAAAAAAAAAAAAAAAAAAAAAAAAIQAAABgAAAAUAAAAKAUAABonAAAIFgAAWSkAABAAAAAmAAAACAAAAAAAAAAAAAAA"/>
+                <pr:smNativeData xmlns:mc="http://schemas.openxmlformats.org/markup-compatibility/2006" xmlns:p14="http://schemas.microsoft.com/office/powerpoint/2010/main" xmlns:p15="http://schemas.microsoft.com/office/powerpoint/2012/main" xmlns:pr="smNativeData" xmlns="smNativeData" val="SMDATA_15_FLquaRMAAAAlAAAAZAAAAA0AAAAAkAAAAEgAAACQAAAASAAAAAAAAAABAAAAAAAAAAEAAABQAAAAAAAAAAAA4D8AAAAAAADgPwAAAAAAAOA/AAAAAAAA4D8AAAAAAADgPwAAAAAAAOA/AAAAAAAA4D8AAAAAAADgPwAAAAAAAOA/AAAAAAAA4D8CAAAAjAAAAAAAAAAAAAAAW5vVDP///wgAAAAAAAAAAAAAAAAAAAAAAAAAAAAAAAAAAAAAZAAAAAEAAABAAAAAAAAAAAAAAAAAAAAAAAAAAAAAAAAAAAAAAAAAAAAAAAAAAAAAAAAAAAAAAAAAAAAAAAAAAAAAAAAAAAAAAAAAAAAAAAAAAAAAAAAAAAAAAAAAAAAAFAAAADwAAAAAAAAAAAAAAAAAAAkUAAAAAQAAABQAAAAUAAAAFAAAAAEAAAAAAAAAZAAAAGQAAAAAAAAAZAAAAGQAAAAVAAAAYAAAAAAAAAAAAAAADwAAACADAAAAAAAAAAAAAAEAAACgMgAAVgcAAKr4//8BAAAAf39/AAEAAABkAAAAAAAAABQAAABAHwAAAAAAACYAAAAAAAAAwOD//wAAAAAmAAAAZAAAABYAAABMAAAAAAAAAAAAAAAEAAAAAAAAAAEAAADn5uYKAAAAACgAAAAoAAAAZAAAAGQAAAAAAAAAzMzMAAAAAABQAAAAUAAAAGQAAABkAAAAAAAAABcAAAAUAAAAAAAAAAAAAAD/fwAA/38AAAAAAAAJAAAABAAAAOrv9v8eAAAAaAAAAAAAAAAAAAAAAAAAAAAAAAAAAAAAECcAABAnAAAAAAAAAAAAAAAAAAAAAAAAAAAAAAAAAAAAAAAAAAAAABQAAAAAAAAAwMD/AAAAAABkAAAAMgAAAAAAAABkAAAAAAAAAH9/fwAKAAAAIgAAABgAAAAAAAAAAAAAAAAAAAAAAAAAAAAAAAAAAAAkAAAAJAAAAAAAAAAHAAAAAAAAAAAAAAAAAAAAAAAAAAAAAAAAAAAAf39/ACUAAABYAAAAAAAAAAAAAAAAAAAAAAAAAAAAAAAAAAAAAAAAAAAAAAAAAAAAAAAAAAAAAAA/AAAAAAAAAKCGAQAAAAAAAAAAAAAAAAAMAAAAAQAAAAAAAAAAAAAAAAAAAB8AAABUAAAAAAAABQAAAAEAAAAAAAAAAAAAAAAAAAAAAAAAAAAAAAAAAAAAAAAAAAAAAAJ/f38AAAAAA8zMzADAwP8Af39/AAAAAAAAAAAAAAAAAAAAAAAAAAAAIQAAABgAAAAUAAAAKAUAABonAAAIFgAAWSkAABAAAAAmAAAACAAAAAAAAAAAAAAA"/>
               </a:ext>
             </a:extLst>
           </p:cNvSpPr>
@@ -1330,7 +1330,7 @@
               <a:defRPr lang="en-US"/>
             </a:pPr>
             <a:fld id="{30AE80C3-8DDD-FB76-9316-7B23CE58652E}" type="datetime1">
-              <a:t>4/21/2026</a:t>
+              <a:t>6/3/2026</a:t>
             </a:fld>
             <a:endParaRPr/>
           </a:p>
@@ -1343,7 +1343,7 @@
             <a:spLocks noGrp="1" noChangeArrowheads="1"/>
             <a:extLst>
               <a:ext uri="smNativeData">
-                <pr:smNativeData xmlns="smNativeData" xmlns:pr="smNativeData" xmlns:p15="http://schemas.microsoft.com/office/powerpoint/2012/main" xmlns:p14="http://schemas.microsoft.com/office/powerpoint/2010/main" xmlns:mc="http://schemas.openxmlformats.org/markup-compatibility/2006" val="SMDATA_15_FLquaRMAAAAlAAAAZAAAAA0AAAAAkAAAAEgAAACQAAAASAAAAAAAAAABAAAAAAAAAAEAAABQAAAAAAAAAAAA4D8AAAAAAADgPwAAAAAAAOA/AAAAAAAA4D8AAAAAAADgPwAAAAAAAOA/AAAAAAAA4D8AAAAAAADgPwAAAAAAAOA/AAAAAAAA4D8CAAAAjAAAAAAAAAAAAAAAW5vVDP///wgAAAAAAAAAAAAAAAAAAAAAAAAAAAAAAAAAAAAAZAAAAAEAAABAAAAAAAAAAAAAAAAAAAAAAAAAAAAAAAAAAAAAAAAAAAAAAAAAAAAAAAAAAAAAAAAAAAAAAAAAAAAAAAAAAAAAAAAAAAAAAAAAAAAAAAAAAAAAAAAAAAAAFAAAADwAAAAAAAAAAAAAAAAAAAkUAAAAAQAAABQAAAAUAAAAFAAAAAEAAAAAAAAAZAAAAGQAAAAAAAAAZAAAAGQAAAAVAAAAYAAAAAAAAAAAAAAADwAAACADAAAAAAAAAAAAAAEAAACgMgAAVgcAAKr4//8BAAAAf39/AAEAAABkAAAAAAAAABQAAABAHwAAAAAAACYAAAAAAAAAwOD//wAAAAAmAAAAZAAAABYAAABMAAAAAAAAAAAAAAAEAAAAAAAAAAEAAADn5uYKAAAAACgAAAAoAAAAZAAAAGQAAAAAAAAAzMzMAAAAAABQAAAAUAAAAGQAAABkAAAAAAAAABcAAAAUAAAAAAAAAAAAAAD/fwAA/38AAAAAAAAJAAAABAAAAAAAAAAeAAAAaAAAAAAAAAAAAAAAAAAAAAAAAAAAAAAAECcAABAnAAAAAAAAAAAAAAAAAAAAAAAAAAAAAAAAAAAAAAAAAAAAABQAAAAAAAAAwMD/AAAAAABkAAAAMgAAAAAAAABkAAAAAAAAAH9/fwAKAAAAIgAAABgAAAAAAAAAAAAAAAAAAAAAAAAAAAAAAAAAAAAkAAAAJAAAAAAAAAAHAAAAAAAAAAAAAAAAAAAAAAAAAAAAAAAAAAAAf39/ACUAAABYAAAAAAAAAAAAAAAAAAAAAAAAAAAAAAAAAAAAAAAAAAAAAAAAAAAAAAAAAAAAAAA/AAAAAAAAAKCGAQAAAAAAAAAAAAAAAAAMAAAAAQAAAAAAAAAAAAAAAAAAAB8AAABUAAAAAAAABQAAAAEAAAAAAAAAAAAAAAAAAAAAAAAAAAAAAAAAAAAAAAAAAAAAAAJ/f38AAAAAA8zMzADAwP8Af39/AAAAAAAAAAAAAAAAAAAAAAAAAAAAIQAAABgAAAAUAAAA2BgAABonAAAoMgAAWSkAABAAAAAmAAAACAAAAAAAAAAAAAAA"/>
+                <pr:smNativeData xmlns:mc="http://schemas.openxmlformats.org/markup-compatibility/2006" xmlns:p14="http://schemas.microsoft.com/office/powerpoint/2010/main" xmlns:p15="http://schemas.microsoft.com/office/powerpoint/2012/main" xmlns:pr="smNativeData" xmlns="smNativeData" val="SMDATA_15_FLquaRMAAAAlAAAAZAAAAA0AAAAAkAAAAEgAAACQAAAASAAAAAAAAAABAAAAAAAAAAEAAABQAAAAAAAAAAAA4D8AAAAAAADgPwAAAAAAAOA/AAAAAAAA4D8AAAAAAADgPwAAAAAAAOA/AAAAAAAA4D8AAAAAAADgPwAAAAAAAOA/AAAAAAAA4D8CAAAAjAAAAAAAAAAAAAAAW5vVDP///wgAAAAAAAAAAAAAAAAAAAAAAAAAAAAAAAAAAAAAZAAAAAEAAABAAAAAAAAAAAAAAAAAAAAAAAAAAAAAAAAAAAAAAAAAAAAAAAAAAAAAAAAAAAAAAAAAAAAAAAAAAAAAAAAAAAAAAAAAAAAAAAAAAAAAAAAAAAAAAAAAAAAAFAAAADwAAAAAAAAAAAAAAAAAAAkUAAAAAQAAABQAAAAUAAAAFAAAAAEAAAAAAAAAZAAAAGQAAAAAAAAAZAAAAGQAAAAVAAAAYAAAAAAAAAAAAAAADwAAACADAAAAAAAAAAAAAAEAAACgMgAAVgcAAKr4//8BAAAAf39/AAEAAABkAAAAAAAAABQAAABAHwAAAAAAACYAAAAAAAAAwOD//wAAAAAmAAAAZAAAABYAAABMAAAAAAAAAAAAAAAEAAAAAAAAAAEAAADn5uYKAAAAACgAAAAoAAAAZAAAAGQAAAAAAAAAzMzMAAAAAABQAAAAUAAAAGQAAABkAAAAAAAAABcAAAAUAAAAAAAAAAAAAAD/fwAA/38AAAAAAAAJAAAABAAAAAAAAAAeAAAAaAAAAAAAAAAAAAAAAAAAAAAAAAAAAAAAECcAABAnAAAAAAAAAAAAAAAAAAAAAAAAAAAAAAAAAAAAAAAAAAAAABQAAAAAAAAAwMD/AAAAAABkAAAAMgAAAAAAAABkAAAAAAAAAH9/fwAKAAAAIgAAABgAAAAAAAAAAAAAAAAAAAAAAAAAAAAAAAAAAAAkAAAAJAAAAAAAAAAHAAAAAAAAAAAAAAAAAAAAAAAAAAAAAAAAAAAAf39/ACUAAABYAAAAAAAAAAAAAAAAAAAAAAAAAAAAAAAAAAAAAAAAAAAAAAAAAAAAAAAAAAAAAAA/AAAAAAAAAKCGAQAAAAAAAAAAAAAAAAAMAAAAAQAAAAAAAAAAAAAAAAAAAB8AAABUAAAAAAAABQAAAAEAAAAAAAAAAAAAAAAAAAAAAAAAAAAAAAAAAAAAAAAAAAAAAAJ/f38AAAAAA8zMzADAwP8Af39/AAAAAAAAAAAAAAAAAAAAAAAAAAAAIQAAABgAAAAUAAAA2BgAABonAAAoMgAAWSkAABAAAAAmAAAACAAAAAAAAAAAAAAA"/>
               </a:ext>
             </a:extLst>
           </p:cNvSpPr>
@@ -1370,7 +1370,7 @@
             <a:spLocks noGrp="1" noChangeArrowheads="1"/>
             <a:extLst>
               <a:ext uri="smNativeData">
-                <pr:smNativeData xmlns="smNativeData" xmlns:pr="smNativeData" xmlns:p15="http://schemas.microsoft.com/office/powerpoint/2012/main" xmlns:p14="http://schemas.microsoft.com/office/powerpoint/2010/main" xmlns:mc="http://schemas.openxmlformats.org/markup-compatibility/2006" val="SMDATA_15_FLquaRMAAAAlAAAAZAAAAA0AAAAAkAAAAEgAAACQAAAASAAAAAAAAAABAAAAAAAAAAEAAABQAAAAAAAAAAAA4D8AAAAAAADgPwAAAAAAAOA/AAAAAAAA4D8AAAAAAADgPwAAAAAAAOA/AAAAAAAA4D8AAAAAAADgPwAAAAAAAOA/AAAAAAAA4D8CAAAAjAAAAAAAAAAAAAAAW5vVDP///wgAAAAAAAAAAAAAAAAAAAAAAAAAAAAAAAAAAAAAZAAAAAEAAABAAAAAAAAAAAAAAAAAAAAAAAAAAAAAAAAAAAAAAAAAAAAAAAAAAAAAAAAAAAAAAAAAAAAAAAAAAAAAAAAAAAAAAAAAAAAAAAAAAAAAAAAAAAAAAAAAAAAAFAAAADwAAAAAAAAAAAAAAAAAAAkUAAAAAQAAABQAAAAUAAAAFAAAAAEAAAAAAAAAZAAAAGQAAAAAAAAAZAAAAGQAAAAVAAAAYAAAAAAAAAAAAAAADwAAACADAAAAAAAAAAAAAAEAAACgMgAAVgcAAKr4//8BAAAAf39/AAEAAABkAAAAAAAAABQAAABAHwAAAAAAACYAAAAAAAAAwOD//wAAAAAmAAAAZAAAABYAAABMAAAAAAAAAAAAAAAEAAAAAAAAAAEAAADn5uYKAAAAACgAAAAoAAAAZAAAAGQAAAAAAAAAzMzMAAAAAABQAAAAUAAAAGQAAABkAAAAAAAAABcAAAAUAAAAAAAAAAAAAAD/fwAA/38AAAAAAAAJAAAABAAAAAAAAAAeAAAAaAAAAAAAAAAAAAAAAAAAAAAAAAAAAAAAECcAABAnAAAAAAAAAAAAAAAAAAAAAAAAAAAAAAAAAAAAAAAAAAAAABQAAAAAAAAAwMD/AAAAAABkAAAAMgAAAAAAAABkAAAAAAAAAH9/fwAKAAAAIgAAABgAAAAAAAAAAAAAAAAAAAAAAAAAAAAAAAAAAAAkAAAAJAAAAAAAAAAHAAAAAAAAAAAAAAAAAAAAAAAAAAAAAAAAAAAAf39/ACUAAABYAAAAAAAAAAAAAAAAAAAAAAAAAAAAAAAAAAAAAAAAAAAAAAAAAAAAAAAAAAAAAAA/AAAAAAAAAKCGAQAAAAAAAAAAAAAAAAAMAAAAAQAAAAAAAAAAAAAAAAAAAB8AAABUAAAAAAAABQAAAAEAAAAAAAAAAAAAAAAAAAAAAAAAAAAAAAAAAAAAAAAAAAAAAAJ/f38AAAAAA8zMzADAwP8Af39/AAAAAAAAAAAAAAAAAAAAAAAAAAAAIQAAABgAAAAUAAAA+DQAABonAADYRQAAWSkAABAAAAAmAAAACAAAAAAAAAAAAAAA"/>
+                <pr:smNativeData xmlns:mc="http://schemas.openxmlformats.org/markup-compatibility/2006" xmlns:p14="http://schemas.microsoft.com/office/powerpoint/2010/main" xmlns:p15="http://schemas.microsoft.com/office/powerpoint/2012/main" xmlns:pr="smNativeData" xmlns="smNativeData" val="SMDATA_15_FLquaRMAAAAlAAAAZAAAAA0AAAAAkAAAAEgAAACQAAAASAAAAAAAAAABAAAAAAAAAAEAAABQAAAAAAAAAAAA4D8AAAAAAADgPwAAAAAAAOA/AAAAAAAA4D8AAAAAAADgPwAAAAAAAOA/AAAAAAAA4D8AAAAAAADgPwAAAAAAAOA/AAAAAAAA4D8CAAAAjAAAAAAAAAAAAAAAW5vVDP///wgAAAAAAAAAAAAAAAAAAAAAAAAAAAAAAAAAAAAAZAAAAAEAAABAAAAAAAAAAAAAAAAAAAAAAAAAAAAAAAAAAAAAAAAAAAAAAAAAAAAAAAAAAAAAAAAAAAAAAAAAAAAAAAAAAAAAAAAAAAAAAAAAAAAAAAAAAAAAAAAAAAAAFAAAADwAAAAAAAAAAAAAAAAAAAkUAAAAAQAAABQAAAAUAAAAFAAAAAEAAAAAAAAAZAAAAGQAAAAAAAAAZAAAAGQAAAAVAAAAYAAAAAAAAAAAAAAADwAAACADAAAAAAAAAAAAAAEAAACgMgAAVgcAAKr4//8BAAAAf39/AAEAAABkAAAAAAAAABQAAABAHwAAAAAAACYAAAAAAAAAwOD//wAAAAAmAAAAZAAAABYAAABMAAAAAAAAAAAAAAAEAAAAAAAAAAEAAADn5uYKAAAAACgAAAAoAAAAZAAAAGQAAAAAAAAAzMzMAAAAAABQAAAAUAAAAGQAAABkAAAAAAAAABcAAAAUAAAAAAAAAAAAAAD/fwAA/38AAAAAAAAJAAAABAAAAAAAAAAeAAAAaAAAAAAAAAAAAAAAAAAAAAAAAAAAAAAAECcAABAnAAAAAAAAAAAAAAAAAAAAAAAAAAAAAAAAAAAAAAAAAAAAABQAAAAAAAAAwMD/AAAAAABkAAAAMgAAAAAAAABkAAAAAAAAAH9/fwAKAAAAIgAAABgAAAAAAAAAAAAAAAAAAAAAAAAAAAAAAAAAAAAkAAAAJAAAAAAAAAAHAAAAAAAAAAAAAAAAAAAAAAAAAAAAAAAAAAAAf39/ACUAAABYAAAAAAAAAAAAAAAAAAAAAAAAAAAAAAAAAAAAAAAAAAAAAAAAAAAAAAAAAAAAAAA/AAAAAAAAAKCGAQAAAAAAAAAAAAAAAAAMAAAAAQAAAAAAAAAAAAAAAAAAAB8AAABUAAAAAAAABQAAAAEAAAAAAAAAAAAAAAAAAAAAAAAAAAAAAAAAAAAAAAAAAAAAAAJ/f38AAAAAA8zMzADAwP8Af39/AAAAAAAAAAAAAAAAAAAAAAAAAAAAIQAAABgAAAAUAAAA+DQAABonAADYRQAAWSkAABAAAAAmAAAACAAAAAAAAAAAAAAA"/>
               </a:ext>
             </a:extLst>
           </p:cNvSpPr>
@@ -1426,7 +1426,7 @@
             <a:spLocks noGrp="1" noChangeArrowheads="1"/>
             <a:extLst>
               <a:ext uri="smNativeData">
-                <pr:smNativeData xmlns="smNativeData" xmlns:pr="smNativeData" xmlns:p15="http://schemas.microsoft.com/office/powerpoint/2012/main" xmlns:p14="http://schemas.microsoft.com/office/powerpoint/2010/main" xmlns:mc="http://schemas.openxmlformats.org/markup-compatibility/2006" val="SMDATA_15_FLquaRMAAAAlAAAAZAAAAA0AAAAAkAAAAEgAAACQAAAASAAAAAAAAAABAAAAAAAAAAEAAABQAAAAAAAAAAAA4D8AAAAAAADgPwAAAAAAAOA/AAAAAAAA4D8AAAAAAADgPwAAAAAAAOA/AAAAAAAA4D8AAAAAAADgPwAAAAAAAOA/AAAAAAAA4D8CAAAAjAAAAAAAAAAAAAAAW5vVDP///wgAAAAAAAAAAAAAAAAAAAAAAAAAAAAAAAAAAAAAZAAAAAEAAABAAAAAAAAAAAAAAAAAAAAAAAAAAAAAAAAAAAAAAAAAAAAAAAAAAAAAAAAAAAAAAAAAAAAAAAAAAAAAAAAAAAAAAAAAAAAAAAAAAAAAAAAAAAAAAAAAAAAAFAAAADwAAAAAAAAAAAAAAAAAAAkUAAAAAQAAABQAAAAUAAAAFAAAAAEAAAAAAAAAZAAAAGQAAAAAAAAAZAAAAGQAAAAVAAAAYAAAAAAAAAAAAAAADwAAACADAAAAAAAAAAAAAAEAAACgMgAAVgcAAKr4//8BAAAAf39/AAEAAABkAAAAAAAAABQAAABAHwAAAAAAACYAAAAAAAAAwOD//wAAAAAmAAAAZAAAABYAAABMAAAAAAAAAAAAAAAEAAAAAAAAAAEAAADn5uYKAAAAACgAAAAoAAAAZAAAAGQAAAAAAAAAzMzMAAAAAABQAAAAUAAAAGQAAABkAAAAAAAAABcAAAAUAAAAAAAAAAAAAAD/fwAA/38AAAAAAAAJAAAABAAAAOrv9v8eAAAAaAAAAAAAAAAAAAAAAAAAAAAAAAAAAAAAECcAABAnAAAAAAAAAAAAAAAAAAAAAAAAAAAAAAAAAAAAAAAAAAAAABQAAAAAAAAAwMD/AAAAAABkAAAAMgAAAAAAAABkAAAAAAAAAH9/fwAKAAAAIgAAABgAAAAAAAAAAAAAAAAAAAAAAAAAAAAAAAAAAAAkAAAAJAAAAAAAAAAHAAAAAAAAAAAAAAAAAAAAAAAAAAAAAAAAAAAAf39/ACUAAABYAAAAAAAAAAAAAAAAAAAAAAAAAAAAAAAAAAAAAAAAAAAAAAAAAAAAAAAAAAAAAAA/AAAAAAAAAKCGAQAAAAAAAAAAAAAAAAAMAAAAAQAAAAAAAAAAAAAAAAAAAB8AAABUAAAAAAAABQAAAAEAAAAAAAAAAAAAAAAAAAAAAAAAAAAAAAAAAAAAAAAAAAAAAAJ/f38AAAAAA8zMzADAwP8Af39/AAAAAAAAAAAAAAAAAAAAAAAAAAAAIQAAABgAAAAUAAAAKAUAAD8CAADYRQAAZwoAABAAAAAmAAAACAAAAAAAAAAAAAAA"/>
+                <pr:smNativeData xmlns:mc="http://schemas.openxmlformats.org/markup-compatibility/2006" xmlns:p14="http://schemas.microsoft.com/office/powerpoint/2010/main" xmlns:p15="http://schemas.microsoft.com/office/powerpoint/2012/main" xmlns:pr="smNativeData" xmlns="smNativeData" val="SMDATA_15_FLquaRMAAAAlAAAAZAAAAA0AAAAAkAAAAEgAAACQAAAASAAAAAAAAAABAAAAAAAAAAEAAABQAAAAAAAAAAAA4D8AAAAAAADgPwAAAAAAAOA/AAAAAAAA4D8AAAAAAADgPwAAAAAAAOA/AAAAAAAA4D8AAAAAAADgPwAAAAAAAOA/AAAAAAAA4D8CAAAAjAAAAAAAAAAAAAAAW5vVDP///wgAAAAAAAAAAAAAAAAAAAAAAAAAAAAAAAAAAAAAZAAAAAEAAABAAAAAAAAAAAAAAAAAAAAAAAAAAAAAAAAAAAAAAAAAAAAAAAAAAAAAAAAAAAAAAAAAAAAAAAAAAAAAAAAAAAAAAAAAAAAAAAAAAAAAAAAAAAAAAAAAAAAAFAAAADwAAAAAAAAAAAAAAAAAAAkUAAAAAQAAABQAAAAUAAAAFAAAAAEAAAAAAAAAZAAAAGQAAAAAAAAAZAAAAGQAAAAVAAAAYAAAAAAAAAAAAAAADwAAACADAAAAAAAAAAAAAAEAAACgMgAAVgcAAKr4//8BAAAAf39/AAEAAABkAAAAAAAAABQAAABAHwAAAAAAACYAAAAAAAAAwOD//wAAAAAmAAAAZAAAABYAAABMAAAAAAAAAAAAAAAEAAAAAAAAAAEAAADn5uYKAAAAACgAAAAoAAAAZAAAAGQAAAAAAAAAzMzMAAAAAABQAAAAUAAAAGQAAABkAAAAAAAAABcAAAAUAAAAAAAAAAAAAAD/fwAA/38AAAAAAAAJAAAABAAAAOrv9v8eAAAAaAAAAAAAAAAAAAAAAAAAAAAAAAAAAAAAECcAABAnAAAAAAAAAAAAAAAAAAAAAAAAAAAAAAAAAAAAAAAAAAAAABQAAAAAAAAAwMD/AAAAAABkAAAAMgAAAAAAAABkAAAAAAAAAH9/fwAKAAAAIgAAABgAAAAAAAAAAAAAAAAAAAAAAAAAAAAAAAAAAAAkAAAAJAAAAAAAAAAHAAAAAAAAAAAAAAAAAAAAAAAAAAAAAAAAAAAAf39/ACUAAABYAAAAAAAAAAAAAAAAAAAAAAAAAAAAAAAAAAAAAAAAAAAAAAAAAAAAAAAAAAAAAAA/AAAAAAAAAKCGAQAAAAAAAAAAAAAAAAAMAAAAAQAAAAAAAAAAAAAAAAAAAB8AAABUAAAAAAAABQAAAAEAAAAAAAAAAAAAAAAAAAAAAAAAAAAAAAAAAAAAAAAAAAAAAAJ/f38AAAAAA8zMzADAwP8Af39/AAAAAAAAAAAAAAAAAAAAAAAAAAAAIQAAABgAAAAUAAAAKAUAAD8CAADYRQAAZwoAABAAAAAmAAAACAAAAAAAAAAAAAAA"/>
               </a:ext>
             </a:extLst>
           </p:cNvSpPr>
@@ -1455,7 +1455,7 @@
             <a:spLocks noGrp="1" noChangeArrowheads="1"/>
             <a:extLst>
               <a:ext uri="smNativeData">
-                <pr:smNativeData xmlns="smNativeData" xmlns:pr="smNativeData" xmlns:p15="http://schemas.microsoft.com/office/powerpoint/2012/main" xmlns:p14="http://schemas.microsoft.com/office/powerpoint/2010/main" xmlns:mc="http://schemas.openxmlformats.org/markup-compatibility/2006" val="SMDATA_15_FLquaRMAAAAlAAAAZAAAAA0AAAAAkAAAAEgAAACQAAAASAAAAAAAAAAAAAAAAAAAAAEAAABQAAAAAAAAAAAA4D8AAAAAAADgPwAAAAAAAOA/AAAAAAAA4D8AAAAAAADgPwAAAAAAAOA/AAAAAAAA4D8AAAAAAADgPwAAAAAAAOA/AAAAAAAA4D8CAAAAjAAAAAAAAAAAAAAAW5vVDP///wgAAAAAAAAAAAAAAAAAAAAAAAAAAAAAAAAAAAAAZAAAAAEAAABAAAAAAAAAAAAAAAAAAAAAAAAAAAAAAAAAAAAAAAAAAAAAAAAAAAAAAAAAAAAAAAAAAAAAAAAAAAAAAAAAAAAAAAAAAAAAAAAAAAAAAAAAAAAAAAAAAAAAFAAAADwAAAAAAAAAAAAAAAAAAAkUAAAAAQAAABQAAAAUAAAAFAAAAAEAAAAAAAAAZAAAAGQAAAAAAAAAZAAAAGQAAAAVAAAAYAAAAAAAAAAAAAAADwAAACADAAAAAAAAAAAAAAEAAACgMgAAVgcAAKr4//8BAAAAf39/AAEAAABkAAAAAAAAABQAAABAHwAAAAAAACYAAAAAAAAAwOD//wAAAAAmAAAAZAAAABYAAABMAAAAAAAAAAAAAAAEAAAAAAAAAAEAAADn5uYKAAAAACgAAAAoAAAAZAAAAGQAAAAAAAAAzMzMAAAAAABQAAAAUAAAAGQAAABkAAAAAAAAABcAAAAUAAAAAAAAAAAAAAD/fwAA/38AAAAAAAAJAAAABAAAAOrv9v8eAAAAaAAAAAAAAAAAAAAAAAAAAAAAAAAAAAAAECcAABAnAAAAAAAAAAAAAAAAAAAAAAAAAAAAAAAAAAAAAAAAAAAAABQAAAAAAAAAwMD/AAAAAABkAAAAMgAAAAAAAABkAAAAAAAAAH9/fwAKAAAAIgAAABgAAAAAAAAAAAAAAAAAAAAAAAAAAAAAAAAAAAAkAAAAJAAAAAAAAAAHAAAAAAAAAAAAAAAAAAAAAAAAAAAAAAAAAAAAf39/ACUAAABYAAAAAAAAAAAAAAAAAAAAAAAAAAAAAAAAAAAAAAAAAAAAAAAAAAAAAAAAAAAAAAA/AAAAAAAAAKCGAQAAAAAAAAAAAAAAAAAMAAAAAQAAAAAAAAAAAAAAAAAAAB8AAABUAAAAAAAABQAAAAEAAAAAAAAAAAAAAAAAAAAAAAAAAAAAAAAAAAAAAAAAAAAAAAJ/f38AAAAAA8zMzADAwP8Af39/AAAAAAAAAAAAAAAAAAAAAAAAAAAAIQAAABgAAAAUAAAAKAUAADsLAAAIJQAAACYAABAAAAAmAAAACAAAAAEAAAAAAAAA"/>
+                <pr:smNativeData xmlns:mc="http://schemas.openxmlformats.org/markup-compatibility/2006" xmlns:p14="http://schemas.microsoft.com/office/powerpoint/2010/main" xmlns:p15="http://schemas.microsoft.com/office/powerpoint/2012/main" xmlns:pr="smNativeData" xmlns="smNativeData" val="SMDATA_15_FLquaRMAAAAlAAAAZAAAAA0AAAAAkAAAAEgAAACQAAAASAAAAAAAAAAAAAAAAAAAAAEAAABQAAAAAAAAAAAA4D8AAAAAAADgPwAAAAAAAOA/AAAAAAAA4D8AAAAAAADgPwAAAAAAAOA/AAAAAAAA4D8AAAAAAADgPwAAAAAAAOA/AAAAAAAA4D8CAAAAjAAAAAAAAAAAAAAAW5vVDP///wgAAAAAAAAAAAAAAAAAAAAAAAAAAAAAAAAAAAAAZAAAAAEAAABAAAAAAAAAAAAAAAAAAAAAAAAAAAAAAAAAAAAAAAAAAAAAAAAAAAAAAAAAAAAAAAAAAAAAAAAAAAAAAAAAAAAAAAAAAAAAAAAAAAAAAAAAAAAAAAAAAAAAFAAAADwAAAAAAAAAAAAAAAAAAAkUAAAAAQAAABQAAAAUAAAAFAAAAAEAAAAAAAAAZAAAAGQAAAAAAAAAZAAAAGQAAAAVAAAAYAAAAAAAAAAAAAAADwAAACADAAAAAAAAAAAAAAEAAACgMgAAVgcAAKr4//8BAAAAf39/AAEAAABkAAAAAAAAABQAAABAHwAAAAAAACYAAAAAAAAAwOD//wAAAAAmAAAAZAAAABYAAABMAAAAAAAAAAAAAAAEAAAAAAAAAAEAAADn5uYKAAAAACgAAAAoAAAAZAAAAGQAAAAAAAAAzMzMAAAAAABQAAAAUAAAAGQAAABkAAAAAAAAABcAAAAUAAAAAAAAAAAAAAD/fwAA/38AAAAAAAAJAAAABAAAAOrv9v8eAAAAaAAAAAAAAAAAAAAAAAAAAAAAAAAAAAAAECcAABAnAAAAAAAAAAAAAAAAAAAAAAAAAAAAAAAAAAAAAAAAAAAAABQAAAAAAAAAwMD/AAAAAABkAAAAMgAAAAAAAABkAAAAAAAAAH9/fwAKAAAAIgAAABgAAAAAAAAAAAAAAAAAAAAAAAAAAAAAAAAAAAAkAAAAJAAAAAAAAAAHAAAAAAAAAAAAAAAAAAAAAAAAAAAAAAAAAAAAf39/ACUAAABYAAAAAAAAAAAAAAAAAAAAAAAAAAAAAAAAAAAAAAAAAAAAAAAAAAAAAAAAAAAAAAA/AAAAAAAAAKCGAQAAAAAAAAAAAAAAAAAMAAAAAQAAAAAAAAAAAAAAAAAAAB8AAABUAAAAAAAABQAAAAEAAAAAAAAAAAAAAAAAAAAAAAAAAAAAAAAAAAAAAAAAAAAAAAJ/f38AAAAAA8zMzADAwP8Af39/AAAAAAAAAAAAAAAAAAAAAAAAAAAAIQAAABgAAAAUAAAAKAUAADsLAAAIJQAAACYAABAAAAAmAAAACAAAAAEAAAAAAAAA"/>
               </a:ext>
             </a:extLst>
           </p:cNvSpPr>
@@ -1521,7 +1521,7 @@
             <a:spLocks noGrp="1" noChangeArrowheads="1"/>
             <a:extLst>
               <a:ext uri="smNativeData">
-                <pr:smNativeData xmlns="smNativeData" xmlns:pr="smNativeData" xmlns:p15="http://schemas.microsoft.com/office/powerpoint/2012/main" xmlns:p14="http://schemas.microsoft.com/office/powerpoint/2010/main" xmlns:mc="http://schemas.openxmlformats.org/markup-compatibility/2006" val="SMDATA_15_FLquaRMAAAAlAAAAZAAAAA0AAAAAkAAAAEgAAACQAAAASAAAAAAAAAAAAAAAAAAAAAEAAABQAAAAAAAAAAAA4D8AAAAAAADgPwAAAAAAAOA/AAAAAAAA4D8AAAAAAADgPwAAAAAAAOA/AAAAAAAA4D8AAAAAAADgPwAAAAAAAOA/AAAAAAAA4D8CAAAAjAAAAAAAAAAAAAAAW5vVDP///wgAAAAAAAAAAAAAAAAAAAAAAAAAAAAAAAAAAAAAZAAAAAEAAABAAAAAAAAAAAAAAAAAAAAAAAAAAAAAAAAAAAAAAAAAAAAAAAAAAAAAAAAAAAAAAAAAAAAAAAAAAAAAAAAAAAAAAAAAAAAAAAAAAAAAAAAAAAAAAAAAAAAAFAAAADwAAAAAAAAAAAAAAAAAAAkUAAAAAQAAABQAAAAUAAAAFAAAAAEAAAAAAAAAZAAAAGQAAAAAAAAAZAAAAGQAAAAVAAAAYAAAAAAAAAAAAAAADwAAACADAAAAAAAAAAAAAAEAAACgMgAAVgcAAKr4//8BAAAAf39/AAEAAABkAAAAAAAAABQAAABAHwAAAAAAACYAAAAAAAAAwOD//wAAAAAmAAAAZAAAABYAAABMAAAAAAAAAAAAAAAEAAAAAAAAAAEAAADn5uYKAAAAACgAAAAoAAAAZAAAAGQAAAAAAAAAzMzMAAAAAABQAAAAUAAAAGQAAABkAAAAAAAAABcAAAAUAAAAAAAAAAAAAAD/fwAA/38AAAAAAAAJAAAABAAAAAAAAAAeAAAAaAAAAAAAAAAAAAAAAAAAAAAAAAAAAAAAECcAABAnAAAAAAAAAAAAAAAAAAAAAAAAAAAAAAAAAAAAAAAAAAAAABQAAAAAAAAAwMD/AAAAAABkAAAAMgAAAAAAAABkAAAAAAAAAH9/fwAKAAAAIgAAABgAAAAAAAAAAAAAAAAAAAAAAAAAAAAAAAAAAAAkAAAAJAAAAAAAAAAHAAAAAAAAAAAAAAAAAAAAAAAAAAAAAAAAAAAAf39/ACUAAABYAAAAAAAAAAAAAAAAAAAAAAAAAAAAAAAAAAAAAAAAAAAAAAAAAAAAAAAAAAAAAAA/AAAAAAAAAKCGAQAAAAAAAAAAAAAAAAAMAAAAAQAAAAAAAAAAAAAAAAAAAB8AAABUAAAAAAAABQAAAAEAAAAAAAAAAAAAAAAAAAAAAAAAAAAAAAAAAAAAAAAAAAAAAAJ/f38AAAAAA8zMzADAwP8Af39/AAAAAAAAAAAAAAAAAAAAAAAAAAAAIQAAABgAAAAUAAAA+CUAADsLAADYRQAAACYAABAAAAAmAAAACAAAAAEAAAAAAAAA"/>
+                <pr:smNativeData xmlns:mc="http://schemas.openxmlformats.org/markup-compatibility/2006" xmlns:p14="http://schemas.microsoft.com/office/powerpoint/2010/main" xmlns:p15="http://schemas.microsoft.com/office/powerpoint/2012/main" xmlns:pr="smNativeData" xmlns="smNativeData" val="SMDATA_15_FLquaRMAAAAlAAAAZAAAAA0AAAAAkAAAAEgAAACQAAAASAAAAAAAAAAAAAAAAAAAAAEAAABQAAAAAAAAAAAA4D8AAAAAAADgPwAAAAAAAOA/AAAAAAAA4D8AAAAAAADgPwAAAAAAAOA/AAAAAAAA4D8AAAAAAADgPwAAAAAAAOA/AAAAAAAA4D8CAAAAjAAAAAAAAAAAAAAAW5vVDP///wgAAAAAAAAAAAAAAAAAAAAAAAAAAAAAAAAAAAAAZAAAAAEAAABAAAAAAAAAAAAAAAAAAAAAAAAAAAAAAAAAAAAAAAAAAAAAAAAAAAAAAAAAAAAAAAAAAAAAAAAAAAAAAAAAAAAAAAAAAAAAAAAAAAAAAAAAAAAAAAAAAAAAFAAAADwAAAAAAAAAAAAAAAAAAAkUAAAAAQAAABQAAAAUAAAAFAAAAAEAAAAAAAAAZAAAAGQAAAAAAAAAZAAAAGQAAAAVAAAAYAAAAAAAAAAAAAAADwAAACADAAAAAAAAAAAAAAEAAACgMgAAVgcAAKr4//8BAAAAf39/AAEAAABkAAAAAAAAABQAAABAHwAAAAAAACYAAAAAAAAAwOD//wAAAAAmAAAAZAAAABYAAABMAAAAAAAAAAAAAAAEAAAAAAAAAAEAAADn5uYKAAAAACgAAAAoAAAAZAAAAGQAAAAAAAAAzMzMAAAAAABQAAAAUAAAAGQAAABkAAAAAAAAABcAAAAUAAAAAAAAAAAAAAD/fwAA/38AAAAAAAAJAAAABAAAAAAAAAAeAAAAaAAAAAAAAAAAAAAAAAAAAAAAAAAAAAAAECcAABAnAAAAAAAAAAAAAAAAAAAAAAAAAAAAAAAAAAAAAAAAAAAAABQAAAAAAAAAwMD/AAAAAABkAAAAMgAAAAAAAABkAAAAAAAAAH9/fwAKAAAAIgAAABgAAAAAAAAAAAAAAAAAAAAAAAAAAAAAAAAAAAAkAAAAJAAAAAAAAAAHAAAAAAAAAAAAAAAAAAAAAAAAAAAAAAAAAAAAf39/ACUAAABYAAAAAAAAAAAAAAAAAAAAAAAAAAAAAAAAAAAAAAAAAAAAAAAAAAAAAAAAAAAAAAA/AAAAAAAAAKCGAQAAAAAAAAAAAAAAAAAMAAAAAQAAAAAAAAAAAAAAAAAAAB8AAABUAAAAAAAABQAAAAEAAAAAAAAAAAAAAAAAAAAAAAAAAAAAAAAAAAAAAAAAAAAAAAJ/f38AAAAAA8zMzADAwP8Af39/AAAAAAAAAAAAAAAAAAAAAAAAAAAAIQAAABgAAAAUAAAA+CUAADsLAADYRQAAACYAABAAAAAmAAAACAAAAAEAAAAAAAAA"/>
               </a:ext>
             </a:extLst>
           </p:cNvSpPr>
@@ -1587,7 +1587,7 @@
             <a:spLocks noGrp="1" noChangeArrowheads="1"/>
             <a:extLst>
               <a:ext uri="smNativeData">
-                <pr:smNativeData xmlns="smNativeData" xmlns:pr="smNativeData" xmlns:p15="http://schemas.microsoft.com/office/powerpoint/2012/main" xmlns:p14="http://schemas.microsoft.com/office/powerpoint/2010/main" xmlns:mc="http://schemas.openxmlformats.org/markup-compatibility/2006" val="SMDATA_15_FLquaRMAAAAlAAAAZAAAAA0AAAAAkAAAAEgAAACQAAAASAAAAAAAAAABAAAAAAAAAAEAAABQAAAAAAAAAAAA4D8AAAAAAADgPwAAAAAAAOA/AAAAAAAA4D8AAAAAAADgPwAAAAAAAOA/AAAAAAAA4D8AAAAAAADgPwAAAAAAAOA/AAAAAAAA4D8CAAAAjAAAAAAAAAAAAAAAW5vVDP///wgAAAAAAAAAAAAAAAAAAAAAAAAAAAAAAAAAAAAAZAAAAAEAAABAAAAAAAAAAAAAAAAAAAAAAAAAAAAAAAAAAAAAAAAAAAAAAAAAAAAAAAAAAAAAAAAAAAAAAAAAAAAAAAAAAAAAAAAAAAAAAAAAAAAAAAAAAAAAAAAAAAAAFAAAADwAAAAAAAAAAAAAAAAAAAkUAAAAAQAAABQAAAAUAAAAFAAAAAEAAAAAAAAAZAAAAGQAAAAAAAAAZAAAAGQAAAAVAAAAYAAAAAAAAAAAAAAADwAAACADAAAAAAAAAAAAAAEAAACgMgAAVgcAAKr4//8BAAAAf39/AAEAAABkAAAAAAAAABQAAABAHwAAAAAAACYAAAAAAAAAwOD//wAAAAAmAAAAZAAAABYAAABMAAAAAAAAAAAAAAAEAAAAAAAAAAEAAADn5uYKAAAAACgAAAAoAAAAZAAAAGQAAAAAAAAAzMzMAAAAAABQAAAAUAAAAGQAAABkAAAAAAAAABcAAAAUAAAAAAAAAAAAAAD/fwAA/38AAAAAAAAJAAAABAAAANiNzA0eAAAAaAAAAAAAAAAAAAAAAAAAAAAAAAAAAAAAECcAABAnAAAAAAAAAAAAAAAAAAAAAAAAAAAAAAAAAAAAAAAAAAAAABQAAAAAAAAAwMD/AAAAAABkAAAAMgAAAAAAAABkAAAAAAAAAH9/fwAKAAAAIgAAABgAAAAAAAAAAAAAAAAAAAAAAAAAAAAAAAAAAAAkAAAAJAAAAAAAAAAHAAAAAAAAAAAAAAAAAAAAAAAAAAAAAAAAAAAAf39/ACUAAABYAAAAAAAAAAAAAAAAAAAAAAAAAAAAAAAAAAAAAAAAAAAAAAAAAAAAAAAAAAAAAAA/AAAAAAAAAKCGAQAAAAAAAAAAAAAAAAAMAAAAAQAAAAAAAAAAAAAAAAAAAB8AAABUAAAAAAAABQAAAAEAAAAAAAAAAAAAAAAAAAAAAAAAAAAAAAAAAAAAAAAAAAAAAAJ/f38AAAAAA8zMzADAwP8Af39/AAAAAAAAAAAAAAAAAAAAAAAAAAAAIQAAABgAAAAUAAAAKAUAABonAAAIFgAAWSkAABAAAAAmAAAACAAAAAAAAAAAAAAA"/>
+                <pr:smNativeData xmlns:mc="http://schemas.openxmlformats.org/markup-compatibility/2006" xmlns:p14="http://schemas.microsoft.com/office/powerpoint/2010/main" xmlns:p15="http://schemas.microsoft.com/office/powerpoint/2012/main" xmlns:pr="smNativeData" xmlns="smNativeData" val="SMDATA_15_FLquaRMAAAAlAAAAZAAAAA0AAAAAkAAAAEgAAACQAAAASAAAAAAAAAABAAAAAAAAAAEAAABQAAAAAAAAAAAA4D8AAAAAAADgPwAAAAAAAOA/AAAAAAAA4D8AAAAAAADgPwAAAAAAAOA/AAAAAAAA4D8AAAAAAADgPwAAAAAAAOA/AAAAAAAA4D8CAAAAjAAAAAAAAAAAAAAAW5vVDP///wgAAAAAAAAAAAAAAAAAAAAAAAAAAAAAAAAAAAAAZAAAAAEAAABAAAAAAAAAAAAAAAAAAAAAAAAAAAAAAAAAAAAAAAAAAAAAAAAAAAAAAAAAAAAAAAAAAAAAAAAAAAAAAAAAAAAAAAAAAAAAAAAAAAAAAAAAAAAAAAAAAAAAFAAAADwAAAAAAAAAAAAAAAAAAAkUAAAAAQAAABQAAAAUAAAAFAAAAAEAAAAAAAAAZAAAAGQAAAAAAAAAZAAAAGQAAAAVAAAAYAAAAAAAAAAAAAAADwAAACADAAAAAAAAAAAAAAEAAACgMgAAVgcAAKr4//8BAAAAf39/AAEAAABkAAAAAAAAABQAAABAHwAAAAAAACYAAAAAAAAAwOD//wAAAAAmAAAAZAAAABYAAABMAAAAAAAAAAAAAAAEAAAAAAAAAAEAAADn5uYKAAAAACgAAAAoAAAAZAAAAGQAAAAAAAAAzMzMAAAAAABQAAAAUAAAAGQAAABkAAAAAAAAABcAAAAUAAAAAAAAAAAAAAD/fwAA/38AAAAAAAAJAAAABAAAANiNzA0eAAAAaAAAAAAAAAAAAAAAAAAAAAAAAAAAAAAAECcAABAnAAAAAAAAAAAAAAAAAAAAAAAAAAAAAAAAAAAAAAAAAAAAABQAAAAAAAAAwMD/AAAAAABkAAAAMgAAAAAAAABkAAAAAAAAAH9/fwAKAAAAIgAAABgAAAAAAAAAAAAAAAAAAAAAAAAAAAAAAAAAAAAkAAAAJAAAAAAAAAAHAAAAAAAAAAAAAAAAAAAAAAAAAAAAAAAAAAAAf39/ACUAAABYAAAAAAAAAAAAAAAAAAAAAAAAAAAAAAAAAAAAAAAAAAAAAAAAAAAAAAAAAAAAAAA/AAAAAAAAAKCGAQAAAAAAAAAAAAAAAAAMAAAAAQAAAAAAAAAAAAAAAAAAAB8AAABUAAAAAAAABQAAAAEAAAAAAAAAAAAAAAAAAAAAAAAAAAAAAAAAAAAAAAAAAAAAAAJ/f38AAAAAA8zMzADAwP8Af39/AAAAAAAAAAAAAAAAAAAAAAAAAAAAIQAAABgAAAAUAAAAKAUAABonAAAIFgAAWSkAABAAAAAmAAAACAAAAAAAAAAAAAAA"/>
               </a:ext>
             </a:extLst>
           </p:cNvSpPr>
@@ -1604,7 +1604,7 @@
               <a:defRPr lang="en-US"/>
             </a:pPr>
             <a:fld id="{30AE893C-72DD-FB7F-9316-842AC75865D1}" type="datetime1">
-              <a:t>4/21/2026</a:t>
+              <a:t>6/3/2026</a:t>
             </a:fld>
             <a:endParaRPr/>
           </a:p>
@@ -1617,7 +1617,7 @@
             <a:spLocks noGrp="1" noChangeArrowheads="1"/>
             <a:extLst>
               <a:ext uri="smNativeData">
-                <pr:smNativeData xmlns="smNativeData" xmlns:pr="smNativeData" xmlns:p15="http://schemas.microsoft.com/office/powerpoint/2012/main" xmlns:p14="http://schemas.microsoft.com/office/powerpoint/2010/main" xmlns:mc="http://schemas.openxmlformats.org/markup-compatibility/2006" val="SMDATA_15_FLquaRMAAAAlAAAAZAAAAA0AAAAAkAAAAEgAAACQAAAASAAAAAAAAAABAAAAAAAAAAEAAABQAAAAAAAAAAAA4D8AAAAAAADgPwAAAAAAAOA/AAAAAAAA4D8AAAAAAADgPwAAAAAAAOA/AAAAAAAA4D8AAAAAAADgPwAAAAAAAOA/AAAAAAAA4D8CAAAAjAAAAAAAAAAAAAAAW5vVDP///wgAAAAAAAAAAAAAAAAAAAAAAAAAAAAAAAAAAAAAZAAAAAEAAABAAAAAAAAAAAAAAAAAAAAAAAAAAAAAAAAAAAAAAAAAAAAAAAAAAAAAAAAAAAAAAAAAAAAAAAAAAAAAAAAAAAAAAAAAAAAAAAAAAAAAAAAAAAAAAAAAAAAAFAAAADwAAAAAAAAAAAAAAAAAAAkUAAAAAQAAABQAAAAUAAAAFAAAAAEAAAAAAAAAZAAAAGQAAAAAAAAAZAAAAGQAAAAVAAAAYAAAAAAAAAAAAAAADwAAACADAAAAAAAAAAAAAAEAAACgMgAAVgcAAKr4//8BAAAAf39/AAEAAABkAAAAAAAAABQAAABAHwAAAAAAACYAAAAAAAAAwOD//wAAAAAmAAAAZAAAABYAAABMAAAAAAAAAAAAAAAEAAAAAAAAAAEAAADn5uYKAAAAACgAAAAoAAAAZAAAAGQAAAAAAAAAzMzMAAAAAABQAAAAUAAAAGQAAABkAAAAAAAAABcAAAAUAAAAAAAAAAAAAAD/fwAA/38AAAAAAAAJAAAABAAAAAAAAAAeAAAAaAAAAAAAAAAAAAAAAAAAAAAAAAAAAAAAECcAABAnAAAAAAAAAAAAAAAAAAAAAAAAAAAAAAAAAAAAAAAAAAAAABQAAAAAAAAAwMD/AAAAAABkAAAAMgAAAAAAAABkAAAAAAAAAH9/fwAKAAAAIgAAABgAAAAAAAAAAAAAAAAAAAAAAAAAAAAAAAAAAAAkAAAAJAAAAAAAAAAHAAAAAAAAAAAAAAAAAAAAAAAAAAAAAAAAAAAAf39/ACUAAABYAAAAAAAAAAAAAAAAAAAAAAAAAAAAAAAAAAAAAAAAAAAAAAAAAAAAAAAAAAAAAAA/AAAAAAAAAKCGAQAAAAAAAAAAAAAAAAAMAAAAAQAAAAAAAAAAAAAAAAAAAB8AAABUAAAAAAAABQAAAAEAAAAAAAAAAAAAAAAAAAAAAAAAAAAAAAAAAAAAAAAAAAAAAAJ/f38AAAAAA8zMzADAwP8Af39/AAAAAAAAAAAAAAAAAAAAAAAAAAAAIQAAABgAAAAUAAAA2BgAABonAAAoMgAAWSkAABAAAAAmAAAACAAAAAAAAAAAAAAA"/>
+                <pr:smNativeData xmlns:mc="http://schemas.openxmlformats.org/markup-compatibility/2006" xmlns:p14="http://schemas.microsoft.com/office/powerpoint/2010/main" xmlns:p15="http://schemas.microsoft.com/office/powerpoint/2012/main" xmlns:pr="smNativeData" xmlns="smNativeData" val="SMDATA_15_FLquaRMAAAAlAAAAZAAAAA0AAAAAkAAAAEgAAACQAAAASAAAAAAAAAABAAAAAAAAAAEAAABQAAAAAAAAAAAA4D8AAAAAAADgPwAAAAAAAOA/AAAAAAAA4D8AAAAAAADgPwAAAAAAAOA/AAAAAAAA4D8AAAAAAADgPwAAAAAAAOA/AAAAAAAA4D8CAAAAjAAAAAAAAAAAAAAAW5vVDP///wgAAAAAAAAAAAAAAAAAAAAAAAAAAAAAAAAAAAAAZAAAAAEAAABAAAAAAAAAAAAAAAAAAAAAAAAAAAAAAAAAAAAAAAAAAAAAAAAAAAAAAAAAAAAAAAAAAAAAAAAAAAAAAAAAAAAAAAAAAAAAAAAAAAAAAAAAAAAAAAAAAAAAFAAAADwAAAAAAAAAAAAAAAAAAAkUAAAAAQAAABQAAAAUAAAAFAAAAAEAAAAAAAAAZAAAAGQAAAAAAAAAZAAAAGQAAAAVAAAAYAAAAAAAAAAAAAAADwAAACADAAAAAAAAAAAAAAEAAACgMgAAVgcAAKr4//8BAAAAf39/AAEAAABkAAAAAAAAABQAAABAHwAAAAAAACYAAAAAAAAAwOD//wAAAAAmAAAAZAAAABYAAABMAAAAAAAAAAAAAAAEAAAAAAAAAAEAAADn5uYKAAAAACgAAAAoAAAAZAAAAGQAAAAAAAAAzMzMAAAAAABQAAAAUAAAAGQAAABkAAAAAAAAABcAAAAUAAAAAAAAAAAAAAD/fwAA/38AAAAAAAAJAAAABAAAAAAAAAAeAAAAaAAAAAAAAAAAAAAAAAAAAAAAAAAAAAAAECcAABAnAAAAAAAAAAAAAAAAAAAAAAAAAAAAAAAAAAAAAAAAAAAAABQAAAAAAAAAwMD/AAAAAABkAAAAMgAAAAAAAABkAAAAAAAAAH9/fwAKAAAAIgAAABgAAAAAAAAAAAAAAAAAAAAAAAAAAAAAAAAAAAAkAAAAJAAAAAAAAAAHAAAAAAAAAAAAAAAAAAAAAAAAAAAAAAAAAAAAf39/ACUAAABYAAAAAAAAAAAAAAAAAAAAAAAAAAAAAAAAAAAAAAAAAAAAAAAAAAAAAAAAAAAAAAA/AAAAAAAAAKCGAQAAAAAAAAAAAAAAAAAMAAAAAQAAAAAAAAAAAAAAAAAAAB8AAABUAAAAAAAABQAAAAEAAAAAAAAAAAAAAAAAAAAAAAAAAAAAAAAAAAAAAAAAAAAAAAJ/f38AAAAAA8zMzADAwP8Af39/AAAAAAAAAAAAAAAAAAAAAAAAAAAAIQAAABgAAAAUAAAA2BgAABonAAAoMgAAWSkAABAAAAAmAAAACAAAAAAAAAAAAAAA"/>
               </a:ext>
             </a:extLst>
           </p:cNvSpPr>
@@ -1644,7 +1644,7 @@
             <a:spLocks noGrp="1" noChangeArrowheads="1"/>
             <a:extLst>
               <a:ext uri="smNativeData">
-                <pr:smNativeData xmlns="smNativeData" xmlns:pr="smNativeData" xmlns:p15="http://schemas.microsoft.com/office/powerpoint/2012/main" xmlns:p14="http://schemas.microsoft.com/office/powerpoint/2010/main" xmlns:mc="http://schemas.openxmlformats.org/markup-compatibility/2006" val="SMDATA_15_FLquaRMAAAAlAAAAZAAAAA0AAAAAkAAAAEgAAACQAAAASAAAAAAAAAABAAAAAAAAAAEAAABQAAAAAAAAAAAA4D8AAAAAAADgPwAAAAAAAOA/AAAAAAAA4D8AAAAAAADgPwAAAAAAAOA/AAAAAAAA4D8AAAAAAADgPwAAAAAAAOA/AAAAAAAA4D8CAAAAjAAAAAAAAAAAAAAAW5vVDP///wgAAAAAAAAAAAAAAAAAAAAAAAAAAAAAAAAAAAAAZAAAAAEAAABAAAAAAAAAAAAAAAAAAAAAAAAAAAAAAAAAAAAAAAAAAAAAAAAAAAAAAAAAAAAAAAAAAAAAAAAAAAAAAAAAAAAAAAAAAAAAAAAAAAAAAAAAAAAAAAAAAAAAFAAAADwAAAAAAAAAAAAAAAAAAAkUAAAAAQAAABQAAAAUAAAAFAAAAAEAAAAAAAAAZAAAAGQAAAAAAAAAZAAAAGQAAAAVAAAAYAAAAAAAAAAAAAAADwAAACADAAAAAAAAAAAAAAEAAACgMgAAVgcAAKr4//8BAAAAf39/AAEAAABkAAAAAAAAABQAAABAHwAAAAAAACYAAAAAAAAAwOD//wAAAAAmAAAAZAAAABYAAABMAAAAAAAAAAAAAAAEAAAAAAAAAAEAAADn5uYKAAAAACgAAAAoAAAAZAAAAGQAAAAAAAAAzMzMAAAAAABQAAAAUAAAAGQAAABkAAAAAAAAABcAAAAUAAAAAAAAAAAAAAD/fwAA/38AAAAAAAAJAAAABAAAAAAAAAAeAAAAaAAAAAAAAAAAAAAAAAAAAAAAAAAAAAAAECcAABAnAAAAAAAAAAAAAAAAAAAAAAAAAAAAAAAAAAAAAAAAAAAAABQAAAAAAAAAwMD/AAAAAABkAAAAMgAAAAAAAABkAAAAAAAAAH9/fwAKAAAAIgAAABgAAAAAAAAAAAAAAAAAAAAAAAAAAAAAAAAAAAAkAAAAJAAAAAAAAAAHAAAAAAAAAAAAAAAAAAAAAAAAAAAAAAAAAAAAf39/ACUAAABYAAAAAAAAAAAAAAAAAAAAAAAAAAAAAAAAAAAAAAAAAAAAAAAAAAAAAAAAAAAAAAA/AAAAAAAAAKCGAQAAAAAAAAAAAAAAAAAMAAAAAQAAAAAAAAAAAAAAAAAAAB8AAABUAAAAAAAABQAAAAEAAAAAAAAAAAAAAAAAAAAAAAAAAAAAAAAAAAAAAAAAAAAAAAJ/f38AAAAAA8zMzADAwP8Af39/AAAAAAAAAAAAAAAAAAAAAAAAAAAAIQAAABgAAAAUAAAA+DQAABonAADYRQAAWSkAABAAAAAmAAAACAAAAAAAAAAAAAAA"/>
+                <pr:smNativeData xmlns:mc="http://schemas.openxmlformats.org/markup-compatibility/2006" xmlns:p14="http://schemas.microsoft.com/office/powerpoint/2010/main" xmlns:p15="http://schemas.microsoft.com/office/powerpoint/2012/main" xmlns:pr="smNativeData" xmlns="smNativeData" val="SMDATA_15_FLquaRMAAAAlAAAAZAAAAA0AAAAAkAAAAEgAAACQAAAASAAAAAAAAAABAAAAAAAAAAEAAABQAAAAAAAAAAAA4D8AAAAAAADgPwAAAAAAAOA/AAAAAAAA4D8AAAAAAADgPwAAAAAAAOA/AAAAAAAA4D8AAAAAAADgPwAAAAAAAOA/AAAAAAAA4D8CAAAAjAAAAAAAAAAAAAAAW5vVDP///wgAAAAAAAAAAAAAAAAAAAAAAAAAAAAAAAAAAAAAZAAAAAEAAABAAAAAAAAAAAAAAAAAAAAAAAAAAAAAAAAAAAAAAAAAAAAAAAAAAAAAAAAAAAAAAAAAAAAAAAAAAAAAAAAAAAAAAAAAAAAAAAAAAAAAAAAAAAAAAAAAAAAAFAAAADwAAAAAAAAAAAAAAAAAAAkUAAAAAQAAABQAAAAUAAAAFAAAAAEAAAAAAAAAZAAAAGQAAAAAAAAAZAAAAGQAAAAVAAAAYAAAAAAAAAAAAAAADwAAACADAAAAAAAAAAAAAAEAAACgMgAAVgcAAKr4//8BAAAAf39/AAEAAABkAAAAAAAAABQAAABAHwAAAAAAACYAAAAAAAAAwOD//wAAAAAmAAAAZAAAABYAAABMAAAAAAAAAAAAAAAEAAAAAAAAAAEAAADn5uYKAAAAACgAAAAoAAAAZAAAAGQAAAAAAAAAzMzMAAAAAABQAAAAUAAAAGQAAABkAAAAAAAAABcAAAAUAAAAAAAAAAAAAAD/fwAA/38AAAAAAAAJAAAABAAAAAAAAAAeAAAAaAAAAAAAAAAAAAAAAAAAAAAAAAAAAAAAECcAABAnAAAAAAAAAAAAAAAAAAAAAAAAAAAAAAAAAAAAAAAAAAAAABQAAAAAAAAAwMD/AAAAAABkAAAAMgAAAAAAAABkAAAAAAAAAH9/fwAKAAAAIgAAABgAAAAAAAAAAAAAAAAAAAAAAAAAAAAAAAAAAAAkAAAAJAAAAAAAAAAHAAAAAAAAAAAAAAAAAAAAAAAAAAAAAAAAAAAAf39/ACUAAABYAAAAAAAAAAAAAAAAAAAAAAAAAAAAAAAAAAAAAAAAAAAAAAAAAAAAAAAAAAAAAAA/AAAAAAAAAKCGAQAAAAAAAAAAAAAAAAAMAAAAAQAAAAAAAAAAAAAAAAAAAB8AAABUAAAAAAAABQAAAAEAAAAAAAAAAAAAAAAAAAAAAAAAAAAAAAAAAAAAAAAAAAAAAAJ/f38AAAAAA8zMzADAwP8Af39/AAAAAAAAAAAAAAAAAAAAAAAAAAAAIQAAABgAAAAUAAAA+DQAABonAADYRQAAWSkAABAAAAAmAAAACAAAAAAAAAAAAAAA"/>
               </a:ext>
             </a:extLst>
           </p:cNvSpPr>
@@ -1700,7 +1700,7 @@
             <a:spLocks noGrp="1" noChangeArrowheads="1"/>
             <a:extLst>
               <a:ext uri="smNativeData">
-                <pr:smNativeData xmlns="smNativeData" xmlns:pr="smNativeData" xmlns:p15="http://schemas.microsoft.com/office/powerpoint/2012/main" xmlns:p14="http://schemas.microsoft.com/office/powerpoint/2010/main" xmlns:mc="http://schemas.openxmlformats.org/markup-compatibility/2006" val="SMDATA_15_FLquaRMAAAAlAAAAZAAAAA0AAAAAkAAAAEgAAACQAAAASAAAAAAAAAABAAAAAAAAAAEAAABQAAAAAAAAAAAA4D8AAAAAAADgPwAAAAAAAOA/AAAAAAAA4D8AAAAAAADgPwAAAAAAAOA/AAAAAAAA4D8AAAAAAADgPwAAAAAAAOA/AAAAAAAA4D8CAAAAjAAAAAAAAAAAAAAAW5vVDP///wgAAAAAAAAAAAAAAAAAAAAAAAAAAAAAAAAAAAAAZAAAAAEAAABAAAAAAAAAAAAAAAAAAAAAAAAAAAAAAAAAAAAAAAAAAAAAAAAAAAAAAAAAAAAAAAAAAAAAAAAAAAAAAAAAAAAAAAAAAAAAAAAAAAAAAAAAAAAAAAAAAAAAFAAAADwAAAAAAAAAAAAAAAAAAAkUAAAAAQAAABQAAAAUAAAAFAAAAAEAAAAAAAAAZAAAAGQAAAAAAAAAZAAAAGQAAAAVAAAAYAAAAAAAAAAAAAAADwAAACADAAAAAAAAAAAAAAEAAACgMgAAVgcAAKr4//8BAAAAf39/AAEAAABkAAAAAAAAABQAAABAHwAAAAAAACYAAAAAAAAAwOD//wAAAAAmAAAAZAAAABYAAABMAAAAAAAAAAAAAAAEAAAAAAAAAAEAAADn5uYKAAAAACgAAAAoAAAAZAAAAGQAAAAAAAAAzMzMAAAAAABQAAAAUAAAAGQAAABkAAAAAAAAABcAAAAUAAAAAAAAAAAAAAD/fwAA/38AAAAAAAAJAAAABAAAAPL1+v8eAAAAaAAAAAAAAAAAAAAAAAAAAAAAAAAAAAAAECcAABAnAAAAAAAAAAAAAAAAAAAAAAAAAAAAAAAAAAAAAAAAAAAAABQAAAAAAAAAwMD/AAAAAABkAAAAMgAAAAAAAABkAAAAAAAAAH9/fwAKAAAAIgAAABgAAAAAAAAAAAAAAAAAAAAAAAAAAAAAAAAAAAAkAAAAJAAAAAAAAAAHAAAAAAAAAAAAAAAAAAAAAAAAAAAAAAAAAAAAf39/ACUAAABYAAAAAAAAAAAAAAAAAAAAAAAAAAAAAAAAAAAAAAAAAAAAAAAAAAAAAAAAAAAAAAA/AAAAAAAAAKCGAQAAAAAAAAAAAAAAAAAMAAAAAQAAAAAAAAAAAAAAAAAAAB8AAABUAAAAAAAABQAAAAEAAAAAAAAAAAAAAAAAAAAAAAAAAAAAAAAAAAAAAAAAAAAAAAJ/f38AAAAAA8zMzADAwP8Af39/AAAAAAAAAAAAAAAAAAAAAAAAAAAAIQAAABgAAAAUAAAAKwUAAD8CAADbRQAAZwoAABAAAAAmAAAACAAAAAEAAAAAAAAA"/>
+                <pr:smNativeData xmlns:mc="http://schemas.openxmlformats.org/markup-compatibility/2006" xmlns:p14="http://schemas.microsoft.com/office/powerpoint/2010/main" xmlns:p15="http://schemas.microsoft.com/office/powerpoint/2012/main" xmlns:pr="smNativeData" xmlns="smNativeData" val="SMDATA_15_FLquaRMAAAAlAAAAZAAAAA0AAAAAkAAAAEgAAACQAAAASAAAAAAAAAABAAAAAAAAAAEAAABQAAAAAAAAAAAA4D8AAAAAAADgPwAAAAAAAOA/AAAAAAAA4D8AAAAAAADgPwAAAAAAAOA/AAAAAAAA4D8AAAAAAADgPwAAAAAAAOA/AAAAAAAA4D8CAAAAjAAAAAAAAAAAAAAAW5vVDP///wgAAAAAAAAAAAAAAAAAAAAAAAAAAAAAAAAAAAAAZAAAAAEAAABAAAAAAAAAAAAAAAAAAAAAAAAAAAAAAAAAAAAAAAAAAAAAAAAAAAAAAAAAAAAAAAAAAAAAAAAAAAAAAAAAAAAAAAAAAAAAAAAAAAAAAAAAAAAAAAAAAAAAFAAAADwAAAAAAAAAAAAAAAAAAAkUAAAAAQAAABQAAAAUAAAAFAAAAAEAAAAAAAAAZAAAAGQAAAAAAAAAZAAAAGQAAAAVAAAAYAAAAAAAAAAAAAAADwAAACADAAAAAAAAAAAAAAEAAACgMgAAVgcAAKr4//8BAAAAf39/AAEAAABkAAAAAAAAABQAAABAHwAAAAAAACYAAAAAAAAAwOD//wAAAAAmAAAAZAAAABYAAABMAAAAAAAAAAAAAAAEAAAAAAAAAAEAAADn5uYKAAAAACgAAAAoAAAAZAAAAGQAAAAAAAAAzMzMAAAAAABQAAAAUAAAAGQAAABkAAAAAAAAABcAAAAUAAAAAAAAAAAAAAD/fwAA/38AAAAAAAAJAAAABAAAAPL1+v8eAAAAaAAAAAAAAAAAAAAAAAAAAAAAAAAAAAAAECcAABAnAAAAAAAAAAAAAAAAAAAAAAAAAAAAAAAAAAAAAAAAAAAAABQAAAAAAAAAwMD/AAAAAABkAAAAMgAAAAAAAABkAAAAAAAAAH9/fwAKAAAAIgAAABgAAAAAAAAAAAAAAAAAAAAAAAAAAAAAAAAAAAAkAAAAJAAAAAAAAAAHAAAAAAAAAAAAAAAAAAAAAAAAAAAAAAAAAAAAf39/ACUAAABYAAAAAAAAAAAAAAAAAAAAAAAAAAAAAAAAAAAAAAAAAAAAAAAAAAAAAAAAAAAAAAA/AAAAAAAAAKCGAQAAAAAAAAAAAAAAAAAMAAAAAQAAAAAAAAAAAAAAAAAAAB8AAABUAAAAAAAABQAAAAEAAAAAAAAAAAAAAAAAAAAAAAAAAAAAAAAAAAAAAAAAAAAAAAJ/f38AAAAAA8zMzADAwP8Af39/AAAAAAAAAAAAAAAAAAAAAAAAAAAAIQAAABgAAAAUAAAAKwUAAD8CAADbRQAAZwoAABAAAAAmAAAACAAAAAEAAAAAAAAA"/>
               </a:ext>
             </a:extLst>
           </p:cNvSpPr>
@@ -1734,7 +1734,7 @@
             <a:spLocks noGrp="1" noChangeArrowheads="1"/>
             <a:extLst>
               <a:ext uri="smNativeData">
-                <pr:smNativeData xmlns="smNativeData" xmlns:pr="smNativeData" xmlns:p15="http://schemas.microsoft.com/office/powerpoint/2012/main" xmlns:p14="http://schemas.microsoft.com/office/powerpoint/2010/main" xmlns:mc="http://schemas.openxmlformats.org/markup-compatibility/2006" val="SMDATA_15_FLquaRMAAAAlAAAAZAAAAA0AAAAAkAAAAEgAAACQAAAASAAAAAAAAAACAAAAAAAAAAEAAABQAAAAAAAAAAAA4D8AAAAAAADgPwAAAAAAAOA/AAAAAAAA4D8AAAAAAADgPwAAAAAAAOA/AAAAAAAA4D8AAAAAAADgPwAAAAAAAOA/AAAAAAAA4D8CAAAAjAAAAAAAAAAAAAAAW5vVDP///wgAAAAAAAAAAAAAAAAAAAAAAAAAAAAAAAAAAAAAZAAAAAEAAABAAAAAAAAAAAAAAAAAAAAAAAAAAAAAAAAAAAAAAAAAAAAAAAAAAAAAAAAAAAAAAAAAAAAAAAAAAAAAAAAAAAAAAAAAAAAAAAAAAAAAAAAAAAAAAAAAAAAAFAAAADwAAAAAAAAAAAAAAAAAAAkUAAAAAQAAABQAAAAUAAAAFAAAAAEAAAAAAAAAZAAAAGQAAAAAAAAAZAAAAGQAAAAVAAAAYAAAAAAAAAAAAAAADwAAACADAAAAAAAAAAAAAAEAAACgMgAAVgcAAKr4//8BAAAAf39/AAEAAABkAAAAAAAAABQAAABAHwAAAAAAACYAAAAAAAAAwOD//wAAAAAmAAAAZAAAABYAAABMAAAAAAAAAAAAAAAEAAAAAAAAAAEAAADn5uYKAAAAACgAAAAoAAAAZAAAAGQAAAAAAAAAzMzMAAAAAABQAAAAUAAAAGQAAABkAAAAAAAAABcAAAAUAAAAAAAAAAAAAAD/fwAA/38AAAAAAAAJAAAABAAAAAAAAAAeAAAAaAAAAAAAAAAAAAAAAAAAAAAAAAAAAAAAECcAABAnAAAAAAAAAAAAAAAAAAAAAAAAAAAAAAAAAAAAAAAAAAAAABQAAAAAAAAAwMD/AAAAAABkAAAAMgAAAAAAAABkAAAAAAAAAH9/fwAKAAAAIgAAABgAAAAAAAAAAAAAAAAAAAAAAAAAAAAAAAAAAAAkAAAAJAAAAAAAAAAHAAAAAAAAAAAAAAAAAAAAAAAAAAAAAAAAAAAAf39/ACUAAABYAAAAAAAAAAAAAAAAAAAAAAAAAAAAAAAAAAAAAAAAAAAAAAAAAAAAAAAAAAAAAAA/AAAAAAAAAKCGAQAAAAAAAAAAAAAAAAAMAAAAAQAAAAAAAAAAAAAAAAAAAB8AAABUAAAAAAAABQAAAAEAAAAAAAAAAAAAAAAAAAAAAAAAAAAAAAAAAAAAAAAAAAAAAAJ/f38AAAAAA8zMzADAwP8Af39/AAAAAAAAAAAAAAAAAAAAAAAAAAAAIQAAABgAAAAUAAAAKwUAAFgKAADlJAAAaQ8AABAAAAAmAAAACAAAAIGAAAAAAAAA"/>
+                <pr:smNativeData xmlns:mc="http://schemas.openxmlformats.org/markup-compatibility/2006" xmlns:p14="http://schemas.microsoft.com/office/powerpoint/2010/main" xmlns:p15="http://schemas.microsoft.com/office/powerpoint/2012/main" xmlns:pr="smNativeData" xmlns="smNativeData" val="SMDATA_15_FLquaRMAAAAlAAAAZAAAAA0AAAAAkAAAAEgAAACQAAAASAAAAAAAAAACAAAAAAAAAAEAAABQAAAAAAAAAAAA4D8AAAAAAADgPwAAAAAAAOA/AAAAAAAA4D8AAAAAAADgPwAAAAAAAOA/AAAAAAAA4D8AAAAAAADgPwAAAAAAAOA/AAAAAAAA4D8CAAAAjAAAAAAAAAAAAAAAW5vVDP///wgAAAAAAAAAAAAAAAAAAAAAAAAAAAAAAAAAAAAAZAAAAAEAAABAAAAAAAAAAAAAAAAAAAAAAAAAAAAAAAAAAAAAAAAAAAAAAAAAAAAAAAAAAAAAAAAAAAAAAAAAAAAAAAAAAAAAAAAAAAAAAAAAAAAAAAAAAAAAAAAAAAAAFAAAADwAAAAAAAAAAAAAAAAAAAkUAAAAAQAAABQAAAAUAAAAFAAAAAEAAAAAAAAAZAAAAGQAAAAAAAAAZAAAAGQAAAAVAAAAYAAAAAAAAAAAAAAADwAAACADAAAAAAAAAAAAAAEAAACgMgAAVgcAAKr4//8BAAAAf39/AAEAAABkAAAAAAAAABQAAABAHwAAAAAAACYAAAAAAAAAwOD//wAAAAAmAAAAZAAAABYAAABMAAAAAAAAAAAAAAAEAAAAAAAAAAEAAADn5uYKAAAAACgAAAAoAAAAZAAAAGQAAAAAAAAAzMzMAAAAAABQAAAAUAAAAGQAAABkAAAAAAAAABcAAAAUAAAAAAAAAAAAAAD/fwAA/38AAAAAAAAJAAAABAAAAAAAAAAeAAAAaAAAAAAAAAAAAAAAAAAAAAAAAAAAAAAAECcAABAnAAAAAAAAAAAAAAAAAAAAAAAAAAAAAAAAAAAAAAAAAAAAABQAAAAAAAAAwMD/AAAAAABkAAAAMgAAAAAAAABkAAAAAAAAAH9/fwAKAAAAIgAAABgAAAAAAAAAAAAAAAAAAAAAAAAAAAAAAAAAAAAkAAAAJAAAAAAAAAAHAAAAAAAAAAAAAAAAAAAAAAAAAAAAAAAAAAAAf39/ACUAAABYAAAAAAAAAAAAAAAAAAAAAAAAAAAAAAAAAAAAAAAAAAAAAAAAAAAAAAAAAAAAAAA/AAAAAAAAAKCGAQAAAAAAAAAAAAAAAAAMAAAAAQAAAAAAAAAAAAAAAAAAAB8AAABUAAAAAAAABQAAAAEAAAAAAAAAAAAAAAAAAAAAAAAAAAAAAAAAAAAAAAAAAAAAAAJ/f38AAAAAA8zMzADAwP8Af39/AAAAAAAAAAAAAAAAAAAAAAAAAAAAIQAAABgAAAAUAAAAKwUAAFgKAADlJAAAaQ8AABAAAAAmAAAACAAAAIGAAAAAAAAA"/>
               </a:ext>
             </a:extLst>
           </p:cNvSpPr>
@@ -1809,7 +1809,7 @@
             <a:spLocks noGrp="1" noChangeArrowheads="1"/>
             <a:extLst>
               <a:ext uri="smNativeData">
-                <pr:smNativeData xmlns="smNativeData" xmlns:pr="smNativeData" xmlns:p15="http://schemas.microsoft.com/office/powerpoint/2012/main" xmlns:p14="http://schemas.microsoft.com/office/powerpoint/2010/main" xmlns:mc="http://schemas.openxmlformats.org/markup-compatibility/2006" val="SMDATA_15_FLquaRMAAAAlAAAAZAAAAA0AAAAAkAAAAEgAAACQAAAASAAAAAAAAAAAAAAAAAAAAAEAAABQAAAAAAAAAAAA4D8AAAAAAADgPwAAAAAAAOA/AAAAAAAA4D8AAAAAAADgPwAAAAAAAOA/AAAAAAAA4D8AAAAAAADgPwAAAAAAAOA/AAAAAAAA4D8CAAAAjAAAAAAAAAAAAAAAW5vVDP///wgAAAAAAAAAAAAAAAAAAAAAAAAAAAAAAAAAAAAAZAAAAAEAAABAAAAAAAAAAAAAAAAAAAAAAAAAAAAAAAAAAAAAAAAAAAAAAAAAAAAAAAAAAAAAAAAAAAAAAAAAAAAAAAAAAAAAAAAAAAAAAAAAAAAAAAAAAAAAAAAAAAAAFAAAADwAAAAAAAAAAAAAAAAAAAkUAAAAAQAAABQAAAAUAAAAFAAAAAEAAAAAAAAAZAAAAGQAAAAAAAAAZAAAAGQAAAAVAAAAYAAAAAAAAAAAAAAADwAAACADAAAAAAAAAAAAAAEAAACgMgAAVgcAAKr4//8BAAAAf39/AAEAAABkAAAAAAAAABQAAABAHwAAAAAAACYAAAAAAAAAwOD//wAAAAAmAAAAZAAAABYAAABMAAAAAAAAAAAAAAAEAAAAAAAAAAEAAADn5uYKAAAAACgAAAAoAAAAZAAAAGQAAAAAAAAAzMzMAAAAAABQAAAAUAAAAGQAAABkAAAAAAAAABcAAAAUAAAAAAAAAAAAAAD/fwAA/38AAAAAAAAJAAAABAAAAAAAAAAeAAAAaAAAAAAAAAAAAAAAAAAAAAAAAAAAAAAAECcAABAnAAAAAAAAAAAAAAAAAAAAAAAAAAAAAAAAAAAAAAAAAAAAABQAAAAAAAAAwMD/AAAAAABkAAAAMgAAAAAAAABkAAAAAAAAAH9/fwAKAAAAIgAAABgAAAAAAAAAAAAAAAAAAAAAAAAAAAAAAAAAAAAkAAAAJAAAAAAAAAAHAAAAAAAAAAAAAAAAAAAAAAAAAAAAAAAAAAAAf39/ACUAAABYAAAAAAAAAAAAAAAAAAAAAAAAAAAAAAAAAAAAAAAAAAAAAAAAAAAAAAAAAAAAAAA/AAAAAAAAAKCGAQAAAAAAAAAAAAAAAAAMAAAAAQAAAAAAAAAAAAAAAAAAAB8AAABUAAAAAAAABQAAAAEAAAAAAAAAAAAAAAAAAAAAAAAAAAAAAAAAAAAAAAAAAAAAAAJ/f38AAAAAA8zMzADAwP8Af39/AAAAAAAAAAAAAAAAAAAAAAAAAAAAIQAAABgAAAAUAAAAKwUAAGkPAADlJAAAFCYAABAAAAAmAAAACAAAAAEAAAAAAAAA"/>
+                <pr:smNativeData xmlns:mc="http://schemas.openxmlformats.org/markup-compatibility/2006" xmlns:p14="http://schemas.microsoft.com/office/powerpoint/2010/main" xmlns:p15="http://schemas.microsoft.com/office/powerpoint/2012/main" xmlns:pr="smNativeData" xmlns="smNativeData" val="SMDATA_15_FLquaRMAAAAlAAAAZAAAAA0AAAAAkAAAAEgAAACQAAAASAAAAAAAAAAAAAAAAAAAAAEAAABQAAAAAAAAAAAA4D8AAAAAAADgPwAAAAAAAOA/AAAAAAAA4D8AAAAAAADgPwAAAAAAAOA/AAAAAAAA4D8AAAAAAADgPwAAAAAAAOA/AAAAAAAA4D8CAAAAjAAAAAAAAAAAAAAAW5vVDP///wgAAAAAAAAAAAAAAAAAAAAAAAAAAAAAAAAAAAAAZAAAAAEAAABAAAAAAAAAAAAAAAAAAAAAAAAAAAAAAAAAAAAAAAAAAAAAAAAAAAAAAAAAAAAAAAAAAAAAAAAAAAAAAAAAAAAAAAAAAAAAAAAAAAAAAAAAAAAAAAAAAAAAFAAAADwAAAAAAAAAAAAAAAAAAAkUAAAAAQAAABQAAAAUAAAAFAAAAAEAAAAAAAAAZAAAAGQAAAAAAAAAZAAAAGQAAAAVAAAAYAAAAAAAAAAAAAAADwAAACADAAAAAAAAAAAAAAEAAACgMgAAVgcAAKr4//8BAAAAf39/AAEAAABkAAAAAAAAABQAAABAHwAAAAAAACYAAAAAAAAAwOD//wAAAAAmAAAAZAAAABYAAABMAAAAAAAAAAAAAAAEAAAAAAAAAAEAAADn5uYKAAAAACgAAAAoAAAAZAAAAGQAAAAAAAAAzMzMAAAAAABQAAAAUAAAAGQAAABkAAAAAAAAABcAAAAUAAAAAAAAAAAAAAD/fwAA/38AAAAAAAAJAAAABAAAAAAAAAAeAAAAaAAAAAAAAAAAAAAAAAAAAAAAAAAAAAAAECcAABAnAAAAAAAAAAAAAAAAAAAAAAAAAAAAAAAAAAAAAAAAAAAAABQAAAAAAAAAwMD/AAAAAABkAAAAMgAAAAAAAABkAAAAAAAAAH9/fwAKAAAAIgAAABgAAAAAAAAAAAAAAAAAAAAAAAAAAAAAAAAAAAAkAAAAJAAAAAAAAAAHAAAAAAAAAAAAAAAAAAAAAAAAAAAAAAAAAAAAf39/ACUAAABYAAAAAAAAAAAAAAAAAAAAAAAAAAAAAAAAAAAAAAAAAAAAAAAAAAAAAAAAAAAAAAA/AAAAAAAAAKCGAQAAAAAAAAAAAAAAAAAMAAAAAQAAAAAAAAAAAAAAAAAAAB8AAABUAAAAAAAABQAAAAEAAAAAAAAAAAAAAAAAAAAAAAAAAAAAAAAAAAAAAAAAAAAAAAJ/f38AAAAAA8zMzADAwP8Af39/AAAAAAAAAAAAAAAAAAAAAAAAAAAAIQAAABgAAAAUAAAAKwUAAGkPAADlJAAAFCYAABAAAAAmAAAACAAAAAEAAAAAAAAA"/>
               </a:ext>
             </a:extLst>
           </p:cNvSpPr>
@@ -1875,7 +1875,7 @@
             <a:spLocks noGrp="1" noChangeArrowheads="1"/>
             <a:extLst>
               <a:ext uri="smNativeData">
-                <pr:smNativeData xmlns="smNativeData" xmlns:pr="smNativeData" xmlns:p15="http://schemas.microsoft.com/office/powerpoint/2012/main" xmlns:p14="http://schemas.microsoft.com/office/powerpoint/2010/main" xmlns:mc="http://schemas.openxmlformats.org/markup-compatibility/2006" val="SMDATA_15_FLquaRMAAAAlAAAAZAAAAA0AAAAAkAAAAEgAAACQAAAASAAAAAAAAAACAAAAAAAAAAEAAABQAAAAAAAAAAAA4D8AAAAAAADgPwAAAAAAAOA/AAAAAAAA4D8AAAAAAADgPwAAAAAAAOA/AAAAAAAA4D8AAAAAAADgPwAAAAAAAOA/AAAAAAAA4D8CAAAAjAAAAAAAAAAAAAAAW5vVDP///wgAAAAAAAAAAAAAAAAAAAAAAAAAAAAAAAAAAAAAZAAAAAEAAABAAAAAAAAAAAAAAAAAAAAAAAAAAAAAAAAAAAAAAAAAAAAAAAAAAAAAAAAAAAAAAAAAAAAAAAAAAAAAAAAAAAAAAAAAAAAAAAAAAAAAAAAAAAAAAAAAAAAAFAAAADwAAAAAAAAAAAAAAAAAAAkUAAAAAQAAABQAAAAUAAAAFAAAAAEAAAAAAAAAZAAAAGQAAAAAAAAAZAAAAGQAAAAVAAAAYAAAAAAAAAAAAAAADwAAACADAAAAAAAAAAAAAAEAAACgMgAAVgcAAKr4//8BAAAAf39/AAEAAABkAAAAAAAAABQAAABAHwAAAAAAACYAAAAAAAAAwOD//wAAAAAmAAAAZAAAABYAAABMAAAAAAAAAAAAAAAEAAAAAAAAAAEAAADn5uYKAAAAACgAAAAoAAAAZAAAAGQAAAAAAAAAzMzMAAAAAABQAAAAUAAAAGQAAABkAAAAAAAAABcAAAAUAAAAAAAAAAAAAAD/fwAA/38AAAAAAAAJAAAABAAAAJLC8BQeAAAAaAAAAAAAAAAAAAAAAAAAAAAAAAAAAAAAECcAABAnAAAAAAAAAAAAAAAAAAAAAAAAAAAAAAAAAAAAAAAAAAAAABQAAAAAAAAAwMD/AAAAAABkAAAAMgAAAAAAAABkAAAAAAAAAH9/fwAKAAAAIgAAABgAAAAAAAAAAAAAAAAAAAAAAAAAAAAAAAAAAAAkAAAAJAAAAAAAAAAHAAAAAAAAAAAAAAAAAAAAAAAAAAAAAAAAAAAAf39/ACUAAABYAAAAAAAAAAAAAAAAAAAAAAAAAAAAAAAAAAAAAAAAAAAAAAAAAAAAAAAAAAAAAAA/AAAAAAAAAKCGAQAAAAAAAAAAAAAAAAAMAAAAAQAAAAAAAAAAAAAAAAAAAB8AAABUAAAAAAAABQAAAAEAAAAAAAAAAAAAAAAAAAAAAAAAAAAAAAAAAAAAAAAAAAAAAAJ/f38AAAAAA8zMzADAwP8Af39/AAAAAAAAAAAAAAAAAAAAAAAAAAAAIQAAABgAAAAUAAAA+CUAAFgKAADbRQAAaQ8AABAAAAAmAAAACAAAAIGAAAAAAAAA"/>
+                <pr:smNativeData xmlns:mc="http://schemas.openxmlformats.org/markup-compatibility/2006" xmlns:p14="http://schemas.microsoft.com/office/powerpoint/2010/main" xmlns:p15="http://schemas.microsoft.com/office/powerpoint/2012/main" xmlns:pr="smNativeData" xmlns="smNativeData" val="SMDATA_15_FLquaRMAAAAlAAAAZAAAAA0AAAAAkAAAAEgAAACQAAAASAAAAAAAAAACAAAAAAAAAAEAAABQAAAAAAAAAAAA4D8AAAAAAADgPwAAAAAAAOA/AAAAAAAA4D8AAAAAAADgPwAAAAAAAOA/AAAAAAAA4D8AAAAAAADgPwAAAAAAAOA/AAAAAAAA4D8CAAAAjAAAAAAAAAAAAAAAW5vVDP///wgAAAAAAAAAAAAAAAAAAAAAAAAAAAAAAAAAAAAAZAAAAAEAAABAAAAAAAAAAAAAAAAAAAAAAAAAAAAAAAAAAAAAAAAAAAAAAAAAAAAAAAAAAAAAAAAAAAAAAAAAAAAAAAAAAAAAAAAAAAAAAAAAAAAAAAAAAAAAAAAAAAAAFAAAADwAAAAAAAAAAAAAAAAAAAkUAAAAAQAAABQAAAAUAAAAFAAAAAEAAAAAAAAAZAAAAGQAAAAAAAAAZAAAAGQAAAAVAAAAYAAAAAAAAAAAAAAADwAAACADAAAAAAAAAAAAAAEAAACgMgAAVgcAAKr4//8BAAAAf39/AAEAAABkAAAAAAAAABQAAABAHwAAAAAAACYAAAAAAAAAwOD//wAAAAAmAAAAZAAAABYAAABMAAAAAAAAAAAAAAAEAAAAAAAAAAEAAADn5uYKAAAAACgAAAAoAAAAZAAAAGQAAAAAAAAAzMzMAAAAAABQAAAAUAAAAGQAAABkAAAAAAAAABcAAAAUAAAAAAAAAAAAAAD/fwAA/38AAAAAAAAJAAAABAAAAJLC8BQeAAAAaAAAAAAAAAAAAAAAAAAAAAAAAAAAAAAAECcAABAnAAAAAAAAAAAAAAAAAAAAAAAAAAAAAAAAAAAAAAAAAAAAABQAAAAAAAAAwMD/AAAAAABkAAAAMgAAAAAAAABkAAAAAAAAAH9/fwAKAAAAIgAAABgAAAAAAAAAAAAAAAAAAAAAAAAAAAAAAAAAAAAkAAAAJAAAAAAAAAAHAAAAAAAAAAAAAAAAAAAAAAAAAAAAAAAAAAAAf39/ACUAAABYAAAAAAAAAAAAAAAAAAAAAAAAAAAAAAAAAAAAAAAAAAAAAAAAAAAAAAAAAAAAAAA/AAAAAAAAAKCGAQAAAAAAAAAAAAAAAAAMAAAAAQAAAAAAAAAAAAAAAAAAAB8AAABUAAAAAAAABQAAAAEAAAAAAAAAAAAAAAAAAAAAAAAAAAAAAAAAAAAAAAAAAAAAAAJ/f38AAAAAA8zMzADAwP8Af39/AAAAAAAAAAAAAAAAAAAAAAAAAAAAIQAAABgAAAAUAAAA+CUAAFgKAADbRQAAaQ8AABAAAAAmAAAACAAAAIGAAAAAAAAA"/>
               </a:ext>
             </a:extLst>
           </p:cNvSpPr>
@@ -1950,7 +1950,7 @@
             <a:spLocks noGrp="1" noChangeArrowheads="1"/>
             <a:extLst>
               <a:ext uri="smNativeData">
-                <pr:smNativeData xmlns="smNativeData" xmlns:pr="smNativeData" xmlns:p15="http://schemas.microsoft.com/office/powerpoint/2012/main" xmlns:p14="http://schemas.microsoft.com/office/powerpoint/2010/main" xmlns:mc="http://schemas.openxmlformats.org/markup-compatibility/2006" val="SMDATA_15_FLquaRMAAAAlAAAAZAAAAA0AAAAAkAAAAEgAAACQAAAASAAAAAAAAAAAAAAAAAAAAAEAAABQAAAAAAAAAAAA4D8AAAAAAADgPwAAAAAAAOA/AAAAAAAA4D8AAAAAAADgPwAAAAAAAOA/AAAAAAAA4D8AAAAAAADgPwAAAAAAAOA/AAAAAAAA4D8CAAAAjAAAAAAAAAAAAAAAW5vVDP///wgAAAAAAAAAAAAAAAAAAAAAAAAAAAAAAAAAAAAAZAAAAAEAAABAAAAAAAAAAAAAAAAAAAAAAAAAAAAAAAAAAAAAAAAAAAAAAAAAAAAAAAAAAAAAAAAAAAAAAAAAAAAAAAAAAAAAAAAAAAAAAAAAAAAAAAAAAAAAAAAAAAAAFAAAADwAAAAAAAAAAAAAAAAAAAkUAAAAAQAAABQAAAAUAAAAFAAAAAEAAAAAAAAAZAAAAGQAAAAAAAAAZAAAAGQAAAAVAAAAYAAAAAAAAAAAAAAADwAAACADAAAAAAAAAAAAAAEAAACgMgAAVgcAAKr4//8BAAAAf39/AAEAAABkAAAAAAAAABQAAABAHwAAAAAAACYAAAAAAAAAwOD//wAAAAAmAAAAZAAAABYAAABMAAAAAAAAAAAAAAAEAAAAAAAAAAEAAADn5uYKAAAAACgAAAAoAAAAZAAAAGQAAAAAAAAAzMzMAAAAAABQAAAAUAAAAGQAAABkAAAAAAAAABcAAAAUAAAAAAAAAAAAAAD/fwAA/38AAAAAAAAJAAAABAAAAPL1+v8eAAAAaAAAAAAAAAAAAAAAAAAAAAAAAAAAAAAAECcAABAnAAAAAAAAAAAAAAAAAAAAAAAAAAAAAAAAAAAAAAAAAAAAABQAAAAAAAAAwMD/AAAAAABkAAAAMgAAAAAAAABkAAAAAAAAAH9/fwAKAAAAIgAAABgAAAAAAAAAAAAAAAAAAAAAAAAAAAAAAAAAAAAkAAAAJAAAAAAAAAAHAAAAAAAAAAAAAAAAAAAAAAAAAAAAAAAAAAAAf39/ACUAAABYAAAAAAAAAAAAAAAAAAAAAAAAAAAAAAAAAAAAAAAAAAAAAAAAAAAAAAAAAAAAAAA/AAAAAAAAAKCGAQAAAAAAAAAAAAAAAAAMAAAAAQAAAAAAAAAAAAAAAAAAAB8AAABUAAAAAAAABQAAAAEAAAAAAAAAAAAAAAAAAAAAAAAAAAAAAAAAAAAAAAAAAAAAAAJ/f38AAAAAA8zMzADAwP8Af39/AAAAAAAAAAAAAAAAAAAAAAAAAAAAIQAAABgAAAAUAAAA+CUAAGkPAADbRQAAFCYAABAAAAAmAAAACAAAAAEAAAAAAAAA"/>
+                <pr:smNativeData xmlns:mc="http://schemas.openxmlformats.org/markup-compatibility/2006" xmlns:p14="http://schemas.microsoft.com/office/powerpoint/2010/main" xmlns:p15="http://schemas.microsoft.com/office/powerpoint/2012/main" xmlns:pr="smNativeData" xmlns="smNativeData" val="SMDATA_15_FLquaRMAAAAlAAAAZAAAAA0AAAAAkAAAAEgAAACQAAAASAAAAAAAAAAAAAAAAAAAAAEAAABQAAAAAAAAAAAA4D8AAAAAAADgPwAAAAAAAOA/AAAAAAAA4D8AAAAAAADgPwAAAAAAAOA/AAAAAAAA4D8AAAAAAADgPwAAAAAAAOA/AAAAAAAA4D8CAAAAjAAAAAAAAAAAAAAAW5vVDP///wgAAAAAAAAAAAAAAAAAAAAAAAAAAAAAAAAAAAAAZAAAAAEAAABAAAAAAAAAAAAAAAAAAAAAAAAAAAAAAAAAAAAAAAAAAAAAAAAAAAAAAAAAAAAAAAAAAAAAAAAAAAAAAAAAAAAAAAAAAAAAAAAAAAAAAAAAAAAAAAAAAAAAFAAAADwAAAAAAAAAAAAAAAAAAAkUAAAAAQAAABQAAAAUAAAAFAAAAAEAAAAAAAAAZAAAAGQAAAAAAAAAZAAAAGQAAAAVAAAAYAAAAAAAAAAAAAAADwAAACADAAAAAAAAAAAAAAEAAACgMgAAVgcAAKr4//8BAAAAf39/AAEAAABkAAAAAAAAABQAAABAHwAAAAAAACYAAAAAAAAAwOD//wAAAAAmAAAAZAAAABYAAABMAAAAAAAAAAAAAAAEAAAAAAAAAAEAAADn5uYKAAAAACgAAAAoAAAAZAAAAGQAAAAAAAAAzMzMAAAAAABQAAAAUAAAAGQAAABkAAAAAAAAABcAAAAUAAAAAAAAAAAAAAD/fwAA/38AAAAAAAAJAAAABAAAAPL1+v8eAAAAaAAAAAAAAAAAAAAAAAAAAAAAAAAAAAAAECcAABAnAAAAAAAAAAAAAAAAAAAAAAAAAAAAAAAAAAAAAAAAAAAAABQAAAAAAAAAwMD/AAAAAABkAAAAMgAAAAAAAABkAAAAAAAAAH9/fwAKAAAAIgAAABgAAAAAAAAAAAAAAAAAAAAAAAAAAAAAAAAAAAAkAAAAJAAAAAAAAAAHAAAAAAAAAAAAAAAAAAAAAAAAAAAAAAAAAAAAf39/ACUAAABYAAAAAAAAAAAAAAAAAAAAAAAAAAAAAAAAAAAAAAAAAAAAAAAAAAAAAAAAAAAAAAA/AAAAAAAAAKCGAQAAAAAAAAAAAAAAAAAMAAAAAQAAAAAAAAAAAAAAAAAAAB8AAABUAAAAAAAABQAAAAEAAAAAAAAAAAAAAAAAAAAAAAAAAAAAAAAAAAAAAAAAAAAAAAJ/f38AAAAAA8zMzADAwP8Af39/AAAAAAAAAAAAAAAAAAAAAAAAAAAAIQAAABgAAAAUAAAA+CUAAGkPAADbRQAAFCYAABAAAAAmAAAACAAAAAEAAAAAAAAA"/>
               </a:ext>
             </a:extLst>
           </p:cNvSpPr>
@@ -2016,7 +2016,7 @@
             <a:spLocks noGrp="1" noChangeArrowheads="1"/>
             <a:extLst>
               <a:ext uri="smNativeData">
-                <pr:smNativeData xmlns="smNativeData" xmlns:pr="smNativeData" xmlns:p15="http://schemas.microsoft.com/office/powerpoint/2012/main" xmlns:p14="http://schemas.microsoft.com/office/powerpoint/2010/main" xmlns:mc="http://schemas.openxmlformats.org/markup-compatibility/2006" val="SMDATA_15_FLquaRMAAAAlAAAAZAAAAA0AAAAAkAAAAEgAAACQAAAASAAAAAAAAAABAAAAAAAAAAEAAABQAAAAAAAAAAAA4D8AAAAAAADgPwAAAAAAAOA/AAAAAAAA4D8AAAAAAADgPwAAAAAAAOA/AAAAAAAA4D8AAAAAAADgPwAAAAAAAOA/AAAAAAAA4D8CAAAAjAAAAAAAAAAAAAAAW5vVDP///wgAAAAAAAAAAAAAAAAAAAAAAAAAAAAAAAAAAAAAZAAAAAEAAABAAAAAAAAAAAAAAAAAAAAAAAAAAAAAAAAAAAAAAAAAAAAAAAAAAAAAAAAAAAAAAAAAAAAAAAAAAAAAAAAAAAAAAAAAAAAAAAAAAAAAAAAAAAAAAAAAAAAAFAAAADwAAAAAAAAAAAAAAAAAAAkUAAAAAQAAABQAAAAUAAAAFAAAAAEAAAAAAAAAZAAAAGQAAAAAAAAAZAAAAGQAAAAVAAAAYAAAAAAAAAAAAAAADwAAACADAAAAAAAAAAAAAAEAAACgMgAAVgcAAKr4//8BAAAAf39/AAEAAABkAAAAAAAAABQAAABAHwAAAAAAACYAAAAAAAAAwOD//wAAAAAmAAAAZAAAABYAAABMAAAAAAAAAAAAAAAEAAAAAAAAAAEAAADn5uYKAAAAACgAAAAoAAAAZAAAAGQAAAAAAAAAzMzMAAAAAABQAAAAUAAAAGQAAABkAAAAAAAAABcAAAAUAAAAAAAAAAAAAAD/fwAA/38AAAAAAAAJAAAABAAAAOrv9v8eAAAAaAAAAAAAAAAAAAAAAAAAAAAAAAAAAAAAECcAABAnAAAAAAAAAAAAAAAAAAAAAAAAAAAAAAAAAAAAAAAAAAAAABQAAAAAAAAAwMD/AAAAAABkAAAAMgAAAAAAAABkAAAAAAAAAH9/fwAKAAAAIgAAABgAAAAAAAAAAAAAAAAAAAAAAAAAAAAAAAAAAAAkAAAAJAAAAAAAAAAHAAAAAAAAAAAAAAAAAAAAAAAAAAAAAAAAAAAAf39/ACUAAABYAAAAAAAAAAAAAAAAAAAAAAAAAAAAAAAAAAAAAAAAAAAAAAAAAAAAAAAAAAAAAAA/AAAAAAAAAKCGAQAAAAAAAAAAAAAAAAAMAAAAAQAAAAAAAAAAAAAAAAAAAB8AAABUAAAAAAAABQAAAAEAAAAAAAAAAAAAAAAAAAAAAAAAAAAAAAAAAAAAAAAAAAAAAAJ/f38AAAAAA8zMzADAwP8Af39/AAAAAAAAAAAAAAAAAAAAAAAAAAAAIQAAABgAAAAUAAAAKAUAABonAAAIFgAAWSkAABAAAAAmAAAACAAAAAAAAAAAAAAA"/>
+                <pr:smNativeData xmlns:mc="http://schemas.openxmlformats.org/markup-compatibility/2006" xmlns:p14="http://schemas.microsoft.com/office/powerpoint/2010/main" xmlns:p15="http://schemas.microsoft.com/office/powerpoint/2012/main" xmlns:pr="smNativeData" xmlns="smNativeData" val="SMDATA_15_FLquaRMAAAAlAAAAZAAAAA0AAAAAkAAAAEgAAACQAAAASAAAAAAAAAABAAAAAAAAAAEAAABQAAAAAAAAAAAA4D8AAAAAAADgPwAAAAAAAOA/AAAAAAAA4D8AAAAAAADgPwAAAAAAAOA/AAAAAAAA4D8AAAAAAADgPwAAAAAAAOA/AAAAAAAA4D8CAAAAjAAAAAAAAAAAAAAAW5vVDP///wgAAAAAAAAAAAAAAAAAAAAAAAAAAAAAAAAAAAAAZAAAAAEAAABAAAAAAAAAAAAAAAAAAAAAAAAAAAAAAAAAAAAAAAAAAAAAAAAAAAAAAAAAAAAAAAAAAAAAAAAAAAAAAAAAAAAAAAAAAAAAAAAAAAAAAAAAAAAAAAAAAAAAFAAAADwAAAAAAAAAAAAAAAAAAAkUAAAAAQAAABQAAAAUAAAAFAAAAAEAAAAAAAAAZAAAAGQAAAAAAAAAZAAAAGQAAAAVAAAAYAAAAAAAAAAAAAAADwAAACADAAAAAAAAAAAAAAEAAACgMgAAVgcAAKr4//8BAAAAf39/AAEAAABkAAAAAAAAABQAAABAHwAAAAAAACYAAAAAAAAAwOD//wAAAAAmAAAAZAAAABYAAABMAAAAAAAAAAAAAAAEAAAAAAAAAAEAAADn5uYKAAAAACgAAAAoAAAAZAAAAGQAAAAAAAAAzMzMAAAAAABQAAAAUAAAAGQAAABkAAAAAAAAABcAAAAUAAAAAAAAAAAAAAD/fwAA/38AAAAAAAAJAAAABAAAAOrv9v8eAAAAaAAAAAAAAAAAAAAAAAAAAAAAAAAAAAAAECcAABAnAAAAAAAAAAAAAAAAAAAAAAAAAAAAAAAAAAAAAAAAAAAAABQAAAAAAAAAwMD/AAAAAABkAAAAMgAAAAAAAABkAAAAAAAAAH9/fwAKAAAAIgAAABgAAAAAAAAAAAAAAAAAAAAAAAAAAAAAAAAAAAAkAAAAJAAAAAAAAAAHAAAAAAAAAAAAAAAAAAAAAAAAAAAAAAAAAAAAf39/ACUAAABYAAAAAAAAAAAAAAAAAAAAAAAAAAAAAAAAAAAAAAAAAAAAAAAAAAAAAAAAAAAAAAA/AAAAAAAAAKCGAQAAAAAAAAAAAAAAAAAMAAAAAQAAAAAAAAAAAAAAAAAAAB8AAABUAAAAAAAABQAAAAEAAAAAAAAAAAAAAAAAAAAAAAAAAAAAAAAAAAAAAAAAAAAAAAJ/f38AAAAAA8zMzADAwP8Af39/AAAAAAAAAAAAAAAAAAAAAAAAAAAAIQAAABgAAAAUAAAAKAUAABonAAAIFgAAWSkAABAAAAAmAAAACAAAAAAAAAAAAAAA"/>
               </a:ext>
             </a:extLst>
           </p:cNvSpPr>
@@ -2033,7 +2033,7 @@
               <a:defRPr lang="en-US"/>
             </a:pPr>
             <a:fld id="{30AED2C2-8CDD-FB24-9316-7A719C58652F}" type="datetime1">
-              <a:t>4/21/2026</a:t>
+              <a:t>6/3/2026</a:t>
             </a:fld>
             <a:endParaRPr/>
           </a:p>
@@ -2046,7 +2046,7 @@
             <a:spLocks noGrp="1" noChangeArrowheads="1"/>
             <a:extLst>
               <a:ext uri="smNativeData">
-                <pr:smNativeData xmlns="smNativeData" xmlns:pr="smNativeData" xmlns:p15="http://schemas.microsoft.com/office/powerpoint/2012/main" xmlns:p14="http://schemas.microsoft.com/office/powerpoint/2010/main" xmlns:mc="http://schemas.openxmlformats.org/markup-compatibility/2006" val="SMDATA_15_FLquaRMAAAAlAAAAZAAAAA0AAAAAkAAAAEgAAACQAAAASAAAAAAAAAABAAAAAAAAAAEAAABQAAAAAAAAAAAA4D8AAAAAAADgPwAAAAAAAOA/AAAAAAAA4D8AAAAAAADgPwAAAAAAAOA/AAAAAAAA4D8AAAAAAADgPwAAAAAAAOA/AAAAAAAA4D8CAAAAjAAAAAAAAAAAAAAAW5vVDP///wgAAAAAAAAAAAAAAAAAAAAAAAAAAAAAAAAAAAAAZAAAAAEAAABAAAAAAAAAAAAAAAAAAAAAAAAAAAAAAAAAAAAAAAAAAAAAAAAAAAAAAAAAAAAAAAAAAAAAAAAAAAAAAAAAAAAAAAAAAAAAAAAAAAAAAAAAAAAAAAAAAAAAFAAAADwAAAAAAAAAAAAAAAAAAAkUAAAAAQAAABQAAAAUAAAAFAAAAAEAAAAAAAAAZAAAAGQAAAAAAAAAZAAAAGQAAAAVAAAAYAAAAAAAAAAAAAAADwAAACADAAAAAAAAAAAAAAEAAACgMgAAVgcAAKr4//8BAAAAf39/AAEAAABkAAAAAAAAABQAAABAHwAAAAAAACYAAAAAAAAAwOD//wAAAAAmAAAAZAAAABYAAABMAAAAAAAAAAAAAAAEAAAAAAAAAAEAAADn5uYKAAAAACgAAAAoAAAAZAAAAGQAAAAAAAAAzMzMAAAAAABQAAAAUAAAAGQAAABkAAAAAAAAABcAAAAUAAAAAAAAAAAAAAD/fwAA/38AAAAAAAAJAAAABAAAAOrv9v8eAAAAaAAAAAAAAAAAAAAAAAAAAAAAAAAAAAAAECcAABAnAAAAAAAAAAAAAAAAAAAAAAAAAAAAAAAAAAAAAAAAAAAAABQAAAAAAAAAwMD/AAAAAABkAAAAMgAAAAAAAABkAAAAAAAAAH9/fwAKAAAAIgAAABgAAAAAAAAAAAAAAAAAAAAAAAAAAAAAAAAAAAAkAAAAJAAAAAAAAAAHAAAAAAAAAAAAAAAAAAAAAAAAAAAAAAAAAAAAf39/ACUAAABYAAAAAAAAAAAAAAAAAAAAAAAAAAAAAAAAAAAAAAAAAAAAAAAAAAAAAAAAAAAAAAA/AAAAAAAAAKCGAQAAAAAAAAAAAAAAAAAMAAAAAQAAAAAAAAAAAAAAAAAAAB8AAABUAAAAAAAABQAAAAEAAAAAAAAAAAAAAAAAAAAAAAAAAAAAAAAAAAAAAAAAAAAAAAJ/f38AAAAAA8zMzADAwP8Af39/AAAAAAAAAAAAAAAAAAAAAAAAAAAAIQAAABgAAAAUAAAA2BgAABonAAAoMgAAWSkAABAAAAAmAAAACAAAAAAAAAAAAAAA"/>
+                <pr:smNativeData xmlns:mc="http://schemas.openxmlformats.org/markup-compatibility/2006" xmlns:p14="http://schemas.microsoft.com/office/powerpoint/2010/main" xmlns:p15="http://schemas.microsoft.com/office/powerpoint/2012/main" xmlns:pr="smNativeData" xmlns="smNativeData" val="SMDATA_15_FLquaRMAAAAlAAAAZAAAAA0AAAAAkAAAAEgAAACQAAAASAAAAAAAAAABAAAAAAAAAAEAAABQAAAAAAAAAAAA4D8AAAAAAADgPwAAAAAAAOA/AAAAAAAA4D8AAAAAAADgPwAAAAAAAOA/AAAAAAAA4D8AAAAAAADgPwAAAAAAAOA/AAAAAAAA4D8CAAAAjAAAAAAAAAAAAAAAW5vVDP///wgAAAAAAAAAAAAAAAAAAAAAAAAAAAAAAAAAAAAAZAAAAAEAAABAAAAAAAAAAAAAAAAAAAAAAAAAAAAAAAAAAAAAAAAAAAAAAAAAAAAAAAAAAAAAAAAAAAAAAAAAAAAAAAAAAAAAAAAAAAAAAAAAAAAAAAAAAAAAAAAAAAAAFAAAADwAAAAAAAAAAAAAAAAAAAkUAAAAAQAAABQAAAAUAAAAFAAAAAEAAAAAAAAAZAAAAGQAAAAAAAAAZAAAAGQAAAAVAAAAYAAAAAAAAAAAAAAADwAAACADAAAAAAAAAAAAAAEAAACgMgAAVgcAAKr4//8BAAAAf39/AAEAAABkAAAAAAAAABQAAABAHwAAAAAAACYAAAAAAAAAwOD//wAAAAAmAAAAZAAAABYAAABMAAAAAAAAAAAAAAAEAAAAAAAAAAEAAADn5uYKAAAAACgAAAAoAAAAZAAAAGQAAAAAAAAAzMzMAAAAAABQAAAAUAAAAGQAAABkAAAAAAAAABcAAAAUAAAAAAAAAAAAAAD/fwAA/38AAAAAAAAJAAAABAAAAOrv9v8eAAAAaAAAAAAAAAAAAAAAAAAAAAAAAAAAAAAAECcAABAnAAAAAAAAAAAAAAAAAAAAAAAAAAAAAAAAAAAAAAAAAAAAABQAAAAAAAAAwMD/AAAAAABkAAAAMgAAAAAAAABkAAAAAAAAAH9/fwAKAAAAIgAAABgAAAAAAAAAAAAAAAAAAAAAAAAAAAAAAAAAAAAkAAAAJAAAAAAAAAAHAAAAAAAAAAAAAAAAAAAAAAAAAAAAAAAAAAAAf39/ACUAAABYAAAAAAAAAAAAAAAAAAAAAAAAAAAAAAAAAAAAAAAAAAAAAAAAAAAAAAAAAAAAAAA/AAAAAAAAAKCGAQAAAAAAAAAAAAAAAAAMAAAAAQAAAAAAAAAAAAAAAAAAAB8AAABUAAAAAAAABQAAAAEAAAAAAAAAAAAAAAAAAAAAAAAAAAAAAAAAAAAAAAAAAAAAAAJ/f38AAAAAA8zMzADAwP8Af39/AAAAAAAAAAAAAAAAAAAAAAAAAAAAIQAAABgAAAAUAAAA2BgAABonAAAoMgAAWSkAABAAAAAmAAAACAAAAAAAAAAAAAAA"/>
               </a:ext>
             </a:extLst>
           </p:cNvSpPr>
@@ -2073,7 +2073,7 @@
             <a:spLocks noGrp="1" noChangeArrowheads="1"/>
             <a:extLst>
               <a:ext uri="smNativeData">
-                <pr:smNativeData xmlns="smNativeData" xmlns:pr="smNativeData" xmlns:p15="http://schemas.microsoft.com/office/powerpoint/2012/main" xmlns:p14="http://schemas.microsoft.com/office/powerpoint/2010/main" xmlns:mc="http://schemas.openxmlformats.org/markup-compatibility/2006" val="SMDATA_15_FLquaRMAAAAlAAAAZAAAAA0AAAAAkAAAAEgAAACQAAAASAAAAAAAAAABAAAAAAAAAAEAAABQAAAAAAAAAAAA4D8AAAAAAADgPwAAAAAAAOA/AAAAAAAA4D8AAAAAAADgPwAAAAAAAOA/AAAAAAAA4D8AAAAAAADgPwAAAAAAAOA/AAAAAAAA4D8CAAAAjAAAAAAAAAAAAAAAW5vVDP///wgAAAAAAAAAAAAAAAAAAAAAAAAAAAAAAAAAAAAAZAAAAAEAAABAAAAAAAAAAAAAAAAAAAAAAAAAAAAAAAAAAAAAAAAAAAAAAAAAAAAAAAAAAAAAAAAAAAAAAAAAAAAAAAAAAAAAAAAAAAAAAAAAAAAAAAAAAAAAAAAAAAAAFAAAADwAAAAAAAAAAAAAAAAAAAkUAAAAAQAAABQAAAAUAAAAFAAAAAEAAAAAAAAAZAAAAGQAAAAAAAAAZAAAAGQAAAAVAAAAYAAAAAAAAAAAAAAADwAAACADAAAAAAAAAAAAAAEAAACgMgAAVgcAAKr4//8BAAAAf39/AAEAAABkAAAAAAAAABQAAABAHwAAAAAAACYAAAAAAAAAwOD//wAAAAAmAAAAZAAAABYAAABMAAAAAAAAAAAAAAAEAAAAAAAAAAEAAADn5uYKAAAAACgAAAAoAAAAZAAAAGQAAAAAAAAAzMzMAAAAAABQAAAAUAAAAGQAAABkAAAAAAAAABcAAAAUAAAAAAAAAAAAAAD/fwAA/38AAAAAAAAJAAAABAAAAPL1+v8eAAAAaAAAAAAAAAAAAAAAAAAAAAAAAAAAAAAAECcAABAnAAAAAAAAAAAAAAAAAAAAAAAAAAAAAAAAAAAAAAAAAAAAABQAAAAAAAAAwMD/AAAAAABkAAAAMgAAAAAAAABkAAAAAAAAAH9/fwAKAAAAIgAAABgAAAAAAAAAAAAAAAAAAAAAAAAAAAAAAAAAAAAkAAAAJAAAAAAAAAAHAAAAAAAAAAAAAAAAAAAAAAAAAAAAAAAAAAAAf39/ACUAAABYAAAAAAAAAAAAAAAAAAAAAAAAAAAAAAAAAAAAAAAAAAAAAAAAAAAAAAAAAAAAAAA/AAAAAAAAAKCGAQAAAAAAAAAAAAAAAAAMAAAAAQAAAAAAAAAAAAAAAAAAAB8AAABUAAAAAAAABQAAAAEAAAAAAAAAAAAAAAAAAAAAAAAAAAAAAAAAAAAAAAAAAAAAAAJ/f38AAAAAA8zMzADAwP8Af39/AAAAAAAAAAAAAAAAAAAAAAAAAAAAIQAAABgAAAAUAAAA+DQAABonAADYRQAAWSkAABAAAAAmAAAACAAAAAAAAAAAAAAA"/>
+                <pr:smNativeData xmlns:mc="http://schemas.openxmlformats.org/markup-compatibility/2006" xmlns:p14="http://schemas.microsoft.com/office/powerpoint/2010/main" xmlns:p15="http://schemas.microsoft.com/office/powerpoint/2012/main" xmlns:pr="smNativeData" xmlns="smNativeData" val="SMDATA_15_FLquaRMAAAAlAAAAZAAAAA0AAAAAkAAAAEgAAACQAAAASAAAAAAAAAABAAAAAAAAAAEAAABQAAAAAAAAAAAA4D8AAAAAAADgPwAAAAAAAOA/AAAAAAAA4D8AAAAAAADgPwAAAAAAAOA/AAAAAAAA4D8AAAAAAADgPwAAAAAAAOA/AAAAAAAA4D8CAAAAjAAAAAAAAAAAAAAAW5vVDP///wgAAAAAAAAAAAAAAAAAAAAAAAAAAAAAAAAAAAAAZAAAAAEAAABAAAAAAAAAAAAAAAAAAAAAAAAAAAAAAAAAAAAAAAAAAAAAAAAAAAAAAAAAAAAAAAAAAAAAAAAAAAAAAAAAAAAAAAAAAAAAAAAAAAAAAAAAAAAAAAAAAAAAFAAAADwAAAAAAAAAAAAAAAAAAAkUAAAAAQAAABQAAAAUAAAAFAAAAAEAAAAAAAAAZAAAAGQAAAAAAAAAZAAAAGQAAAAVAAAAYAAAAAAAAAAAAAAADwAAACADAAAAAAAAAAAAAAEAAACgMgAAVgcAAKr4//8BAAAAf39/AAEAAABkAAAAAAAAABQAAABAHwAAAAAAACYAAAAAAAAAwOD//wAAAAAmAAAAZAAAABYAAABMAAAAAAAAAAAAAAAEAAAAAAAAAAEAAADn5uYKAAAAACgAAAAoAAAAZAAAAGQAAAAAAAAAzMzMAAAAAABQAAAAUAAAAGQAAABkAAAAAAAAABcAAAAUAAAAAAAAAAAAAAD/fwAA/38AAAAAAAAJAAAABAAAAPL1+v8eAAAAaAAAAAAAAAAAAAAAAAAAAAAAAAAAAAAAECcAABAnAAAAAAAAAAAAAAAAAAAAAAAAAAAAAAAAAAAAAAAAAAAAABQAAAAAAAAAwMD/AAAAAABkAAAAMgAAAAAAAABkAAAAAAAAAH9/fwAKAAAAIgAAABgAAAAAAAAAAAAAAAAAAAAAAAAAAAAAAAAAAAAkAAAAJAAAAAAAAAAHAAAAAAAAAAAAAAAAAAAAAAAAAAAAAAAAAAAAf39/ACUAAABYAAAAAAAAAAAAAAAAAAAAAAAAAAAAAAAAAAAAAAAAAAAAAAAAAAAAAAAAAAAAAAA/AAAAAAAAAKCGAQAAAAAAAAAAAAAAAAAMAAAAAQAAAAAAAAAAAAAAAAAAAB8AAABUAAAAAAAABQAAAAEAAAAAAAAAAAAAAAAAAAAAAAAAAAAAAAAAAAAAAAAAAAAAAAJ/f38AAAAAA8zMzADAwP8Af39/AAAAAAAAAAAAAAAAAAAAAAAAAAAAIQAAABgAAAAUAAAA+DQAABonAADYRQAAWSkAABAAAAAmAAAACAAAAAAAAAAAAAAA"/>
               </a:ext>
             </a:extLst>
           </p:cNvSpPr>
@@ -2129,7 +2129,7 @@
             <a:spLocks noGrp="1" noChangeArrowheads="1"/>
             <a:extLst>
               <a:ext uri="smNativeData">
-                <pr:smNativeData xmlns="smNativeData" xmlns:pr="smNativeData" xmlns:p15="http://schemas.microsoft.com/office/powerpoint/2012/main" xmlns:p14="http://schemas.microsoft.com/office/powerpoint/2010/main" xmlns:mc="http://schemas.openxmlformats.org/markup-compatibility/2006" val="SMDATA_15_FLquaRMAAAAlAAAAZAAAAA0AAAAAkAAAAEgAAACQAAAASAAAAAAAAAABAAAAAAAAAAEAAABQAAAAAAAAAAAA4D8AAAAAAADgPwAAAAAAAOA/AAAAAAAA4D8AAAAAAADgPwAAAAAAAOA/AAAAAAAA4D8AAAAAAADgPwAAAAAAAOA/AAAAAAAA4D8CAAAAjAAAAAAAAAAAAAAAW5vVDP///wgAAAAAAAAAAAAAAAAAAAAAAAAAAAAAAAAAAAAAZAAAAAEAAABAAAAAAAAAAAAAAAAAAAAAAAAAAAAAAAAAAAAAAAAAAAAAAAAAAAAAAAAAAAAAAAAAAAAAAAAAAAAAAAAAAAAAAAAAAAAAAAAAAAAAAAAAAAAAAAAAAAAAFAAAADwAAAAAAAAAAAAAAAAAAAkUAAAAAQAAABQAAAAUAAAAFAAAAAEAAAAAAAAAZAAAAGQAAAAAAAAAZAAAAGQAAAAVAAAAYAAAAAAAAAAAAAAADwAAACADAAAAAAAAAAAAAAEAAACgMgAAVgcAAKr4//8BAAAAf39/AAEAAABkAAAAAAAAABQAAABAHwAAAAAAACYAAAAAAAAAwOD//wAAAAAmAAAAZAAAABYAAABMAAAAAAAAAAAAAAAEAAAAAAAAAAEAAADn5uYKAAAAACgAAAAoAAAAZAAAAGQAAAAAAAAAzMzMAAAAAABQAAAAUAAAAGQAAABkAAAAAAAAABcAAAAUAAAAAAAAAAAAAAD/fwAA/38AAAAAAAAJAAAABAAAAAAAAAAeAAAAaAAAAAAAAAAAAAAAAAAAAAAAAAAAAAAAECcAABAnAAAAAAAAAAAAAAAAAAAAAAAAAAAAAAAAAAAAAAAAAAAAABQAAAAAAAAAwMD/AAAAAABkAAAAMgAAAAAAAABkAAAAAAAAAH9/fwAKAAAAIgAAABgAAAAAAAAAAAAAAAAAAAAAAAAAAAAAAAAAAAAkAAAAJAAAAAAAAAAHAAAAAAAAAAAAAAAAAAAAAAAAAAAAAAAAAAAAf39/ACUAAABYAAAAAAAAAAAAAAAAAAAAAAAAAAAAAAAAAAAAAAAAAAAAAAAAAAAAAAAAAAAAAAA/AAAAAAAAAKCGAQAAAAAAAAAAAAAAAAAMAAAAAQAAAAAAAAAAAAAAAAAAAB8AAABUAAAAAAAABQAAAAEAAAAAAAAAAAAAAAAAAAAAAAAAAAAAAAAAAAAAAAAAAAAAAAJ/f38AAAAAA8zMzADAwP8Af39/AAAAAAAAAAAAAAAAAAAAAAAAAAAAIQAAABgAAAAUAAAAKAUAAD8CAADYRQAAZwoAABAAAAAmAAAACAAAAAAAAAAAAAAA"/>
+                <pr:smNativeData xmlns:mc="http://schemas.openxmlformats.org/markup-compatibility/2006" xmlns:p14="http://schemas.microsoft.com/office/powerpoint/2010/main" xmlns:p15="http://schemas.microsoft.com/office/powerpoint/2012/main" xmlns:pr="smNativeData" xmlns="smNativeData" val="SMDATA_15_FLquaRMAAAAlAAAAZAAAAA0AAAAAkAAAAEgAAACQAAAASAAAAAAAAAABAAAAAAAAAAEAAABQAAAAAAAAAAAA4D8AAAAAAADgPwAAAAAAAOA/AAAAAAAA4D8AAAAAAADgPwAAAAAAAOA/AAAAAAAA4D8AAAAAAADgPwAAAAAAAOA/AAAAAAAA4D8CAAAAjAAAAAAAAAAAAAAAW5vVDP///wgAAAAAAAAAAAAAAAAAAAAAAAAAAAAAAAAAAAAAZAAAAAEAAABAAAAAAAAAAAAAAAAAAAAAAAAAAAAAAAAAAAAAAAAAAAAAAAAAAAAAAAAAAAAAAAAAAAAAAAAAAAAAAAAAAAAAAAAAAAAAAAAAAAAAAAAAAAAAAAAAAAAAFAAAADwAAAAAAAAAAAAAAAAAAAkUAAAAAQAAABQAAAAUAAAAFAAAAAEAAAAAAAAAZAAAAGQAAAAAAAAAZAAAAGQAAAAVAAAAYAAAAAAAAAAAAAAADwAAACADAAAAAAAAAAAAAAEAAACgMgAAVgcAAKr4//8BAAAAf39/AAEAAABkAAAAAAAAABQAAABAHwAAAAAAACYAAAAAAAAAwOD//wAAAAAmAAAAZAAAABYAAABMAAAAAAAAAAAAAAAEAAAAAAAAAAEAAADn5uYKAAAAACgAAAAoAAAAZAAAAGQAAAAAAAAAzMzMAAAAAABQAAAAUAAAAGQAAABkAAAAAAAAABcAAAAUAAAAAAAAAAAAAAD/fwAA/38AAAAAAAAJAAAABAAAAAAAAAAeAAAAaAAAAAAAAAAAAAAAAAAAAAAAAAAAAAAAECcAABAnAAAAAAAAAAAAAAAAAAAAAAAAAAAAAAAAAAAAAAAAAAAAABQAAAAAAAAAwMD/AAAAAABkAAAAMgAAAAAAAABkAAAAAAAAAH9/fwAKAAAAIgAAABgAAAAAAAAAAAAAAAAAAAAAAAAAAAAAAAAAAAAkAAAAJAAAAAAAAAAHAAAAAAAAAAAAAAAAAAAAAAAAAAAAAAAAAAAAf39/ACUAAABYAAAAAAAAAAAAAAAAAAAAAAAAAAAAAAAAAAAAAAAAAAAAAAAAAAAAAAAAAAAAAAA/AAAAAAAAAKCGAQAAAAAAAAAAAAAAAAAMAAAAAQAAAAAAAAAAAAAAAAAAAB8AAABUAAAAAAAABQAAAAEAAAAAAAAAAAAAAAAAAAAAAAAAAAAAAAAAAAAAAAAAAAAAAAJ/f38AAAAAA8zMzADAwP8Af39/AAAAAAAAAAAAAAAAAAAAAAAAAAAAIQAAABgAAAAUAAAAKAUAAD8CAADYRQAAZwoAABAAAAAmAAAACAAAAAAAAAAAAAAA"/>
               </a:ext>
             </a:extLst>
           </p:cNvSpPr>
@@ -2158,7 +2158,7 @@
             <a:spLocks noGrp="1" noChangeArrowheads="1"/>
             <a:extLst>
               <a:ext uri="smNativeData">
-                <pr:smNativeData xmlns="smNativeData" xmlns:pr="smNativeData" xmlns:p15="http://schemas.microsoft.com/office/powerpoint/2012/main" xmlns:p14="http://schemas.microsoft.com/office/powerpoint/2010/main" xmlns:mc="http://schemas.openxmlformats.org/markup-compatibility/2006" val="SMDATA_15_FLquaRMAAAAlAAAAZAAAAA0AAAAAkAAAAEgAAACQAAAASAAAAAAAAAABAAAAAAAAAAEAAABQAAAAAAAAAAAA4D8AAAAAAADgPwAAAAAAAOA/AAAAAAAA4D8AAAAAAADgPwAAAAAAAOA/AAAAAAAA4D8AAAAAAADgPwAAAAAAAOA/AAAAAAAA4D8CAAAAjAAAAAAAAAAAAAAAW5vVDP///wgAAAAAAAAAAAAAAAAAAAAAAAAAAAAAAAAAAAAAZAAAAAEAAABAAAAAAAAAAAAAAAAAAAAAAAAAAAAAAAAAAAAAAAAAAAAAAAAAAAAAAAAAAAAAAAAAAAAAAAAAAAAAAAAAAAAAAAAAAAAAAAAAAAAAAAAAAAAAAAAAAAAAFAAAADwAAAAAAAAAAAAAAAAAAAkUAAAAAQAAABQAAAAUAAAAFAAAAAEAAAAAAAAAZAAAAGQAAAAAAAAAZAAAAGQAAAAVAAAAYAAAAAAAAAAAAAAADwAAACADAAAAAAAAAAAAAAEAAACgMgAAVgcAAKr4//8BAAAAf39/AAEAAABkAAAAAAAAABQAAABAHwAAAAAAACYAAAAAAAAAwOD//wAAAAAmAAAAZAAAABYAAABMAAAAAAAAAAAAAAAEAAAAAAAAAAEAAADn5uYKAAAAACgAAAAoAAAAZAAAAGQAAAAAAAAAzMzMAAAAAABQAAAAUAAAAGQAAABkAAAAAAAAABcAAAAUAAAAAAAAAAAAAAD/fwAA/38AAAAAAAAJAAAABAAAAAAAAAAeAAAAaAAAAAAAAAAAAAAAAAAAAAAAAAAAAAAAECcAABAnAAAAAAAAAAAAAAAAAAAAAAAAAAAAAAAAAAAAAAAAAAAAABQAAAAAAAAAwMD/AAAAAABkAAAAMgAAAAAAAABkAAAAAAAAAH9/fwAKAAAAIgAAABgAAAAAAAAAAAAAAAAAAAAAAAAAAAAAAAAAAAAkAAAAJAAAAAAAAAAHAAAAAAAAAAAAAAAAAAAAAAAAAAAAAAAAAAAAf39/ACUAAABYAAAAAAAAAAAAAAAAAAAAAAAAAAAAAAAAAAAAAAAAAAAAAAAAAAAAAAAAAAAAAAA/AAAAAAAAAKCGAQAAAAAAAAAAAAAAAAAMAAAAAQAAAAAAAAAAAAAAAAAAAB8AAABUAAAAAAAABQAAAAEAAAAAAAAAAAAAAAAAAAAAAAAAAAAAAAAAAAAAAAAAAAAAAAJ/f38AAAAAA8zMzADAwP8Af39/AAAAAAAAAAAAAAAAAAAAAAAAAAAAIQAAABgAAAAUAAAAKAUAABonAAAIFgAAWSkAABAAAAAmAAAACAAAAAAAAAAAAAAA"/>
+                <pr:smNativeData xmlns:mc="http://schemas.openxmlformats.org/markup-compatibility/2006" xmlns:p14="http://schemas.microsoft.com/office/powerpoint/2010/main" xmlns:p15="http://schemas.microsoft.com/office/powerpoint/2012/main" xmlns:pr="smNativeData" xmlns="smNativeData" val="SMDATA_15_FLquaRMAAAAlAAAAZAAAAA0AAAAAkAAAAEgAAACQAAAASAAAAAAAAAABAAAAAAAAAAEAAABQAAAAAAAAAAAA4D8AAAAAAADgPwAAAAAAAOA/AAAAAAAA4D8AAAAAAADgPwAAAAAAAOA/AAAAAAAA4D8AAAAAAADgPwAAAAAAAOA/AAAAAAAA4D8CAAAAjAAAAAAAAAAAAAAAW5vVDP///wgAAAAAAAAAAAAAAAAAAAAAAAAAAAAAAAAAAAAAZAAAAAEAAABAAAAAAAAAAAAAAAAAAAAAAAAAAAAAAAAAAAAAAAAAAAAAAAAAAAAAAAAAAAAAAAAAAAAAAAAAAAAAAAAAAAAAAAAAAAAAAAAAAAAAAAAAAAAAAAAAAAAAFAAAADwAAAAAAAAAAAAAAAAAAAkUAAAAAQAAABQAAAAUAAAAFAAAAAEAAAAAAAAAZAAAAGQAAAAAAAAAZAAAAGQAAAAVAAAAYAAAAAAAAAAAAAAADwAAACADAAAAAAAAAAAAAAEAAACgMgAAVgcAAKr4//8BAAAAf39/AAEAAABkAAAAAAAAABQAAABAHwAAAAAAACYAAAAAAAAAwOD//wAAAAAmAAAAZAAAABYAAABMAAAAAAAAAAAAAAAEAAAAAAAAAAEAAADn5uYKAAAAACgAAAAoAAAAZAAAAGQAAAAAAAAAzMzMAAAAAABQAAAAUAAAAGQAAABkAAAAAAAAABcAAAAUAAAAAAAAAAAAAAD/fwAA/38AAAAAAAAJAAAABAAAAAAAAAAeAAAAaAAAAAAAAAAAAAAAAAAAAAAAAAAAAAAAECcAABAnAAAAAAAAAAAAAAAAAAAAAAAAAAAAAAAAAAAAAAAAAAAAABQAAAAAAAAAwMD/AAAAAABkAAAAMgAAAAAAAABkAAAAAAAAAH9/fwAKAAAAIgAAABgAAAAAAAAAAAAAAAAAAAAAAAAAAAAAAAAAAAAkAAAAJAAAAAAAAAAHAAAAAAAAAAAAAAAAAAAAAAAAAAAAAAAAAAAAf39/ACUAAABYAAAAAAAAAAAAAAAAAAAAAAAAAAAAAAAAAAAAAAAAAAAAAAAAAAAAAAAAAAAAAAA/AAAAAAAAAKCGAQAAAAAAAAAAAAAAAAAMAAAAAQAAAAAAAAAAAAAAAAAAAB8AAABUAAAAAAAABQAAAAEAAAAAAAAAAAAAAAAAAAAAAAAAAAAAAAAAAAAAAAAAAAAAAAJ/f38AAAAAA8zMzADAwP8Af39/AAAAAAAAAAAAAAAAAAAAAAAAAAAAIQAAABgAAAAUAAAAKAUAABonAAAIFgAAWSkAABAAAAAmAAAACAAAAAAAAAAAAAAA"/>
               </a:ext>
             </a:extLst>
           </p:cNvSpPr>
@@ -2175,7 +2175,7 @@
               <a:defRPr lang="en-US"/>
             </a:pPr>
             <a:fld id="{30AEA598-D6DD-FB53-9316-2006EB586575}" type="datetime1">
-              <a:t>4/21/2026</a:t>
+              <a:t>6/3/2026</a:t>
             </a:fld>
             <a:endParaRPr/>
           </a:p>
@@ -2188,7 +2188,7 @@
             <a:spLocks noGrp="1" noChangeArrowheads="1"/>
             <a:extLst>
               <a:ext uri="smNativeData">
-                <pr:smNativeData xmlns="smNativeData" xmlns:pr="smNativeData" xmlns:p15="http://schemas.microsoft.com/office/powerpoint/2012/main" xmlns:p14="http://schemas.microsoft.com/office/powerpoint/2010/main" xmlns:mc="http://schemas.openxmlformats.org/markup-compatibility/2006" val="SMDATA_15_FLquaRMAAAAlAAAAZAAAAA0AAAAAkAAAAEgAAACQAAAASAAAAAAAAAABAAAAAAAAAAEAAABQAAAAAAAAAAAA4D8AAAAAAADgPwAAAAAAAOA/AAAAAAAA4D8AAAAAAADgPwAAAAAAAOA/AAAAAAAA4D8AAAAAAADgPwAAAAAAAOA/AAAAAAAA4D8CAAAAjAAAAAAAAAAAAAAAW5vVDP///wgAAAAAAAAAAAAAAAAAAAAAAAAAAAAAAAAAAAAAZAAAAAEAAABAAAAAAAAAAAAAAAAAAAAAAAAAAAAAAAAAAAAAAAAAAAAAAAAAAAAAAAAAAAAAAAAAAAAAAAAAAAAAAAAAAAAAAAAAAAAAAAAAAAAAAAAAAAAAAAAAAAAAFAAAADwAAAAAAAAAAAAAAAAAAAkUAAAAAQAAABQAAAAUAAAAFAAAAAEAAAAAAAAAZAAAAGQAAAAAAAAAZAAAAGQAAAAVAAAAYAAAAAAAAAAAAAAADwAAACADAAAAAAAAAAAAAAEAAACgMgAAVgcAAKr4//8BAAAAf39/AAEAAABkAAAAAAAAABQAAABAHwAAAAAAACYAAAAAAAAAwOD//wAAAAAmAAAAZAAAABYAAABMAAAAAAAAAAAAAAAEAAAAAAAAAAEAAADn5uYKAAAAACgAAAAoAAAAZAAAAGQAAAAAAAAAzMzMAAAAAABQAAAAUAAAAGQAAABkAAAAAAAAABcAAAAUAAAAAAAAAAAAAAD/fwAA/38AAAAAAAAJAAAABAAAAPL1+v8eAAAAaAAAAAAAAAAAAAAAAAAAAAAAAAAAAAAAECcAABAnAAAAAAAAAAAAAAAAAAAAAAAAAAAAAAAAAAAAAAAAAAAAABQAAAAAAAAAwMD/AAAAAABkAAAAMgAAAAAAAABkAAAAAAAAAH9/fwAKAAAAIgAAABgAAAAAAAAAAAAAAAAAAAAAAAAAAAAAAAAAAAAkAAAAJAAAAAAAAAAHAAAAAAAAAAAAAAAAAAAAAAAAAAAAAAAAAAAAf39/ACUAAABYAAAAAAAAAAAAAAAAAAAAAAAAAAAAAAAAAAAAAAAAAAAAAAAAAAAAAAAAAAAAAAA/AAAAAAAAAKCGAQAAAAAAAAAAAAAAAAAMAAAAAQAAAAAAAAAAAAAAAAAAAB8AAABUAAAAAAAABQAAAAEAAAAAAAAAAAAAAAAAAAAAAAAAAAAAAAAAAAAAAAAAAAAAAAJ/f38AAAAAA8zMzADAwP8Af39/AAAAAAAAAAAAAAAAAAAAAAAAAAAAIQAAABgAAAAUAAAA2BgAABonAAAoMgAAWSkAABAAAAAmAAAACAAAAAAAAAAAAAAA"/>
+                <pr:smNativeData xmlns:mc="http://schemas.openxmlformats.org/markup-compatibility/2006" xmlns:p14="http://schemas.microsoft.com/office/powerpoint/2010/main" xmlns:p15="http://schemas.microsoft.com/office/powerpoint/2012/main" xmlns:pr="smNativeData" xmlns="smNativeData" val="SMDATA_15_FLquaRMAAAAlAAAAZAAAAA0AAAAAkAAAAEgAAACQAAAASAAAAAAAAAABAAAAAAAAAAEAAABQAAAAAAAAAAAA4D8AAAAAAADgPwAAAAAAAOA/AAAAAAAA4D8AAAAAAADgPwAAAAAAAOA/AAAAAAAA4D8AAAAAAADgPwAAAAAAAOA/AAAAAAAA4D8CAAAAjAAAAAAAAAAAAAAAW5vVDP///wgAAAAAAAAAAAAAAAAAAAAAAAAAAAAAAAAAAAAAZAAAAAEAAABAAAAAAAAAAAAAAAAAAAAAAAAAAAAAAAAAAAAAAAAAAAAAAAAAAAAAAAAAAAAAAAAAAAAAAAAAAAAAAAAAAAAAAAAAAAAAAAAAAAAAAAAAAAAAAAAAAAAAFAAAADwAAAAAAAAAAAAAAAAAAAkUAAAAAQAAABQAAAAUAAAAFAAAAAEAAAAAAAAAZAAAAGQAAAAAAAAAZAAAAGQAAAAVAAAAYAAAAAAAAAAAAAAADwAAACADAAAAAAAAAAAAAAEAAACgMgAAVgcAAKr4//8BAAAAf39/AAEAAABkAAAAAAAAABQAAABAHwAAAAAAACYAAAAAAAAAwOD//wAAAAAmAAAAZAAAABYAAABMAAAAAAAAAAAAAAAEAAAAAAAAAAEAAADn5uYKAAAAACgAAAAoAAAAZAAAAGQAAAAAAAAAzMzMAAAAAABQAAAAUAAAAGQAAABkAAAAAAAAABcAAAAUAAAAAAAAAAAAAAD/fwAA/38AAAAAAAAJAAAABAAAAPL1+v8eAAAAaAAAAAAAAAAAAAAAAAAAAAAAAAAAAAAAECcAABAnAAAAAAAAAAAAAAAAAAAAAAAAAAAAAAAAAAAAAAAAAAAAABQAAAAAAAAAwMD/AAAAAABkAAAAMgAAAAAAAABkAAAAAAAAAH9/fwAKAAAAIgAAABgAAAAAAAAAAAAAAAAAAAAAAAAAAAAAAAAAAAAkAAAAJAAAAAAAAAAHAAAAAAAAAAAAAAAAAAAAAAAAAAAAAAAAAAAAf39/ACUAAABYAAAAAAAAAAAAAAAAAAAAAAAAAAAAAAAAAAAAAAAAAAAAAAAAAAAAAAAAAAAAAAA/AAAAAAAAAKCGAQAAAAAAAAAAAAAAAAAMAAAAAQAAAAAAAAAAAAAAAAAAAB8AAABUAAAAAAAABQAAAAEAAAAAAAAAAAAAAAAAAAAAAAAAAAAAAAAAAAAAAAAAAAAAAAJ/f38AAAAAA8zMzADAwP8Af39/AAAAAAAAAAAAAAAAAAAAAAAAAAAAIQAAABgAAAAUAAAA2BgAABonAAAoMgAAWSkAABAAAAAmAAAACAAAAAAAAAAAAAAA"/>
               </a:ext>
             </a:extLst>
           </p:cNvSpPr>
@@ -2215,7 +2215,7 @@
             <a:spLocks noGrp="1" noChangeArrowheads="1"/>
             <a:extLst>
               <a:ext uri="smNativeData">
-                <pr:smNativeData xmlns="smNativeData" xmlns:pr="smNativeData" xmlns:p15="http://schemas.microsoft.com/office/powerpoint/2012/main" xmlns:p14="http://schemas.microsoft.com/office/powerpoint/2010/main" xmlns:mc="http://schemas.openxmlformats.org/markup-compatibility/2006" val="SMDATA_15_FLquaRMAAAAlAAAAZAAAAA0AAAAAkAAAAEgAAACQAAAASAAAAAAAAAABAAAAAAAAAAEAAABQAAAAAAAAAAAA4D8AAAAAAADgPwAAAAAAAOA/AAAAAAAA4D8AAAAAAADgPwAAAAAAAOA/AAAAAAAA4D8AAAAAAADgPwAAAAAAAOA/AAAAAAAA4D8CAAAAjAAAAAAAAAAAAAAAW5vVDP///wgAAAAAAAAAAAAAAAAAAAAAAAAAAAAAAAAAAAAAZAAAAAEAAABAAAAAAAAAAAAAAAAAAAAAAAAAAAAAAAAAAAAAAAAAAAAAAAAAAAAAAAAAAAAAAAAAAAAAAAAAAAAAAAAAAAAAAAAAAAAAAAAAAAAAAAAAAAAAAAAAAAAAFAAAADwAAAAAAAAAAAAAAAAAAAkUAAAAAQAAABQAAAAUAAAAFAAAAAEAAAAAAAAAZAAAAGQAAAAAAAAAZAAAAGQAAAAVAAAAYAAAAAAAAAAAAAAADwAAACADAAAAAAAAAAAAAAEAAACgMgAAVgcAAKr4//8BAAAAf39/AAEAAABkAAAAAAAAABQAAABAHwAAAAAAACYAAAAAAAAAwOD//wAAAAAmAAAAZAAAABYAAABMAAAAAAAAAAAAAAAEAAAAAAAAAAEAAADn5uYKAAAAACgAAAAoAAAAZAAAAGQAAAAAAAAAzMzMAAAAAABQAAAAUAAAAGQAAABkAAAAAAAAABcAAAAUAAAAAAAAAAAAAAD/fwAA/38AAAAAAAAJAAAABAAAAJ/J8f8eAAAAaAAAAAAAAAAAAAAAAAAAAAAAAAAAAAAAECcAABAnAAAAAAAAAAAAAAAAAAAAAAAAAAAAAAAAAAAAAAAAAAAAABQAAAAAAAAAwMD/AAAAAABkAAAAMgAAAAAAAABkAAAAAAAAAH9/fwAKAAAAIgAAABgAAAAAAAAAAAAAAAAAAAAAAAAAAAAAAAAAAAAkAAAAJAAAAAAAAAAHAAAAAAAAAAAAAAAAAAAAAAAAAAAAAAAAAAAAf39/ACUAAABYAAAAAAAAAAAAAAAAAAAAAAAAAAAAAAAAAAAAAAAAAAAAAAAAAAAAAAAAAAAAAAA/AAAAAAAAAKCGAQAAAAAAAAAAAAAAAAAMAAAAAQAAAAAAAAAAAAAAAAAAAB8AAABUAAAAAAAABQAAAAEAAAAAAAAAAAAAAAAAAAAAAAAAAAAAAAAAAAAAAAAAAAAAAAJ/f38AAAAAA8zMzADAwP8Af39/AAAAAAAAAAAAAAAAAAAAAAAAAAAAIQAAABgAAAAUAAAA+DQAABonAADYRQAAWSkAABAAAAAmAAAACAAAAAAAAAAAAAAA"/>
+                <pr:smNativeData xmlns:mc="http://schemas.openxmlformats.org/markup-compatibility/2006" xmlns:p14="http://schemas.microsoft.com/office/powerpoint/2010/main" xmlns:p15="http://schemas.microsoft.com/office/powerpoint/2012/main" xmlns:pr="smNativeData" xmlns="smNativeData" val="SMDATA_15_FLquaRMAAAAlAAAAZAAAAA0AAAAAkAAAAEgAAACQAAAASAAAAAAAAAABAAAAAAAAAAEAAABQAAAAAAAAAAAA4D8AAAAAAADgPwAAAAAAAOA/AAAAAAAA4D8AAAAAAADgPwAAAAAAAOA/AAAAAAAA4D8AAAAAAADgPwAAAAAAAOA/AAAAAAAA4D8CAAAAjAAAAAAAAAAAAAAAW5vVDP///wgAAAAAAAAAAAAAAAAAAAAAAAAAAAAAAAAAAAAAZAAAAAEAAABAAAAAAAAAAAAAAAAAAAAAAAAAAAAAAAAAAAAAAAAAAAAAAAAAAAAAAAAAAAAAAAAAAAAAAAAAAAAAAAAAAAAAAAAAAAAAAAAAAAAAAAAAAAAAAAAAAAAAFAAAADwAAAAAAAAAAAAAAAAAAAkUAAAAAQAAABQAAAAUAAAAFAAAAAEAAAAAAAAAZAAAAGQAAAAAAAAAZAAAAGQAAAAVAAAAYAAAAAAAAAAAAAAADwAAACADAAAAAAAAAAAAAAEAAACgMgAAVgcAAKr4//8BAAAAf39/AAEAAABkAAAAAAAAABQAAABAHwAAAAAAACYAAAAAAAAAwOD//wAAAAAmAAAAZAAAABYAAABMAAAAAAAAAAAAAAAEAAAAAAAAAAEAAADn5uYKAAAAACgAAAAoAAAAZAAAAGQAAAAAAAAAzMzMAAAAAABQAAAAUAAAAGQAAABkAAAAAAAAABcAAAAUAAAAAAAAAAAAAAD/fwAA/38AAAAAAAAJAAAABAAAAJ/J8f8eAAAAaAAAAAAAAAAAAAAAAAAAAAAAAAAAAAAAECcAABAnAAAAAAAAAAAAAAAAAAAAAAAAAAAAAAAAAAAAAAAAAAAAABQAAAAAAAAAwMD/AAAAAABkAAAAMgAAAAAAAABkAAAAAAAAAH9/fwAKAAAAIgAAABgAAAAAAAAAAAAAAAAAAAAAAAAAAAAAAAAAAAAkAAAAJAAAAAAAAAAHAAAAAAAAAAAAAAAAAAAAAAAAAAAAAAAAAAAAf39/ACUAAABYAAAAAAAAAAAAAAAAAAAAAAAAAAAAAAAAAAAAAAAAAAAAAAAAAAAAAAAAAAAAAAA/AAAAAAAAAKCGAQAAAAAAAAAAAAAAAAAMAAAAAQAAAAAAAAAAAAAAAAAAAB8AAABUAAAAAAAABQAAAAEAAAAAAAAAAAAAAAAAAAAAAAAAAAAAAAAAAAAAAAAAAAAAAAJ/f38AAAAAA8zMzADAwP8Af39/AAAAAAAAAAAAAAAAAAAAAAAAAAAAIQAAABgAAAAUAAAA+DQAABonAADYRQAAWSkAABAAAAAmAAAACAAAAAAAAAAAAAAA"/>
               </a:ext>
             </a:extLst>
           </p:cNvSpPr>
@@ -2271,7 +2271,7 @@
             <a:spLocks noGrp="1" noChangeArrowheads="1"/>
             <a:extLst>
               <a:ext uri="smNativeData">
-                <pr:smNativeData xmlns="smNativeData" xmlns:pr="smNativeData" xmlns:p15="http://schemas.microsoft.com/office/powerpoint/2012/main" xmlns:p14="http://schemas.microsoft.com/office/powerpoint/2010/main" xmlns:mc="http://schemas.openxmlformats.org/markup-compatibility/2006" val="SMDATA_15_FLquaRMAAAAlAAAAZAAAAA0AAAAAkAAAAEgAAACQAAAASAAAAAAAAAABAAAAAAAAAAEAAABQAAAAAAAAAAAA4D8AAAAAAADgPwAAAAAAAOA/AAAAAAAA4D8AAAAAAADgPwAAAAAAAOA/AAAAAAAA4D8AAAAAAADgPwAAAAAAAOA/AAAAAAAA4D8CAAAAjAAAAAAAAAAAAAAAW5vVDP///wgAAAAAAAAAAAAAAAAAAAAAAAAAAAAAAAAAAAAAZAAAAAEAAABAAAAAAAAAAAAAAAAAAAAAAAAAAAAAAAAAAAAAAAAAAAAAAAAAAAAAAAAAAAAAAAAAAAAAAAAAAAAAAAAAAAAAAAAAAAAAAAAAAAAAAAAAAAAAAAAAAAAAFAAAADwAAAAAAAAAAAAAAAAAAAkUAAAAAQAAABQAAAAUAAAAFAAAAAEAAAAAAAAAZAAAAGQAAAAAAAAAZAAAAGQAAAAVAAAAYAAAAAAAAAAAAAAADwAAACADAAAAAAAAAAAAAAEAAACgMgAAVgcAAKr4//8BAAAAf39/AAEAAABkAAAAAAAAABQAAABAHwAAAAAAACYAAAAAAAAAwOD//wAAAAAmAAAAZAAAABYAAABMAAAAAAAAAAAAAAAEAAAAAAAAAAEAAADn5uYKAAAAACgAAAAoAAAAZAAAAGQAAAAAAAAAzMzMAAAAAABQAAAAUAAAAGQAAABkAAAAAAAAABcAAAAUAAAAAAAAAAAAAAD/fwAA/38AAAAAAAAJAAAABAAAAAAAAAAeAAAAaAAAAAAAAAAAAAAAAAAAAAAAAAAAAAAAECcAABAnAAAAAAAAAAAAAAAAAAAAAAAAAAAAAAAAAAAAAAAAAAAAABQAAAAAAAAAwMD/AAAAAABkAAAAMgAAAAAAAABkAAAAAAAAAH9/fwAKAAAAIgAAABgAAAAAAAAAAAAAAAAAAAAAAAAAAAAAAAAAAAAkAAAAJAAAAAAAAAAHAAAAAAAAAAAAAAAAAAAAAAAAAAAAAAAAAAAAf39/ACUAAABYAAAAAAAAAAAAAAAAAAAAAAAAAAAAAAAAAAAAAAAAAAAAAAAAAAAAAAAAAAAAAAA/AAAAAAAAAKCGAQAAAAAAAAAAAAAAAAAMAAAAAQAAAAAAAAAAAAAAAAAAAB8AAABUAAAAAAAABQAAAAEAAAAAAAAAAAAAAAAAAAAAAAAAAAAAAAAAAAAAAAAAAAAAAAJ/f38AAAAAA8zMzADAwP8Af39/AAAAAAAAAAAAAAAAAAAAAAAAAAAAIQAAABgAAAAUAAAAKAUAABonAAAIFgAAWSkAABAAAAAmAAAACAAAAAAAAAAAAAAA"/>
+                <pr:smNativeData xmlns:mc="http://schemas.openxmlformats.org/markup-compatibility/2006" xmlns:p14="http://schemas.microsoft.com/office/powerpoint/2010/main" xmlns:p15="http://schemas.microsoft.com/office/powerpoint/2012/main" xmlns:pr="smNativeData" xmlns="smNativeData" val="SMDATA_15_FLquaRMAAAAlAAAAZAAAAA0AAAAAkAAAAEgAAACQAAAASAAAAAAAAAABAAAAAAAAAAEAAABQAAAAAAAAAAAA4D8AAAAAAADgPwAAAAAAAOA/AAAAAAAA4D8AAAAAAADgPwAAAAAAAOA/AAAAAAAA4D8AAAAAAADgPwAAAAAAAOA/AAAAAAAA4D8CAAAAjAAAAAAAAAAAAAAAW5vVDP///wgAAAAAAAAAAAAAAAAAAAAAAAAAAAAAAAAAAAAAZAAAAAEAAABAAAAAAAAAAAAAAAAAAAAAAAAAAAAAAAAAAAAAAAAAAAAAAAAAAAAAAAAAAAAAAAAAAAAAAAAAAAAAAAAAAAAAAAAAAAAAAAAAAAAAAAAAAAAAAAAAAAAAFAAAADwAAAAAAAAAAAAAAAAAAAkUAAAAAQAAABQAAAAUAAAAFAAAAAEAAAAAAAAAZAAAAGQAAAAAAAAAZAAAAGQAAAAVAAAAYAAAAAAAAAAAAAAADwAAACADAAAAAAAAAAAAAAEAAACgMgAAVgcAAKr4//8BAAAAf39/AAEAAABkAAAAAAAAABQAAABAHwAAAAAAACYAAAAAAAAAwOD//wAAAAAmAAAAZAAAABYAAABMAAAAAAAAAAAAAAAEAAAAAAAAAAEAAADn5uYKAAAAACgAAAAoAAAAZAAAAGQAAAAAAAAAzMzMAAAAAABQAAAAUAAAAGQAAABkAAAAAAAAABcAAAAUAAAAAAAAAAAAAAD/fwAA/38AAAAAAAAJAAAABAAAAAAAAAAeAAAAaAAAAAAAAAAAAAAAAAAAAAAAAAAAAAAAECcAABAnAAAAAAAAAAAAAAAAAAAAAAAAAAAAAAAAAAAAAAAAAAAAABQAAAAAAAAAwMD/AAAAAABkAAAAMgAAAAAAAABkAAAAAAAAAH9/fwAKAAAAIgAAABgAAAAAAAAAAAAAAAAAAAAAAAAAAAAAAAAAAAAkAAAAJAAAAAAAAAAHAAAAAAAAAAAAAAAAAAAAAAAAAAAAAAAAAAAAf39/ACUAAABYAAAAAAAAAAAAAAAAAAAAAAAAAAAAAAAAAAAAAAAAAAAAAAAAAAAAAAAAAAAAAAA/AAAAAAAAAKCGAQAAAAAAAAAAAAAAAAAMAAAAAQAAAAAAAAAAAAAAAAAAAB8AAABUAAAAAAAABQAAAAEAAAAAAAAAAAAAAAAAAAAAAAAAAAAAAAAAAAAAAAAAAAAAAAJ/f38AAAAAA8zMzADAwP8Af39/AAAAAAAAAAAAAAAAAAAAAAAAAAAAIQAAABgAAAAUAAAAKAUAABonAAAIFgAAWSkAABAAAAAmAAAACAAAAAAAAAAAAAAA"/>
               </a:ext>
             </a:extLst>
           </p:cNvSpPr>
@@ -2288,7 +2288,7 @@
               <a:defRPr lang="en-US"/>
             </a:pPr>
             <a:fld id="{30AEBC3F-71DD-FB4A-9316-871FF25865D2}" type="datetime1">
-              <a:t>4/21/2026</a:t>
+              <a:t>6/3/2026</a:t>
             </a:fld>
             <a:endParaRPr/>
           </a:p>
@@ -2301,7 +2301,7 @@
             <a:spLocks noGrp="1" noChangeArrowheads="1"/>
             <a:extLst>
               <a:ext uri="smNativeData">
-                <pr:smNativeData xmlns="smNativeData" xmlns:pr="smNativeData" xmlns:p15="http://schemas.microsoft.com/office/powerpoint/2012/main" xmlns:p14="http://schemas.microsoft.com/office/powerpoint/2010/main" xmlns:mc="http://schemas.openxmlformats.org/markup-compatibility/2006" val="SMDATA_15_FLquaRMAAAAlAAAAZAAAAA0AAAAAkAAAAEgAAACQAAAASAAAAAAAAAABAAAAAAAAAAEAAABQAAAAAAAAAAAA4D8AAAAAAADgPwAAAAAAAOA/AAAAAAAA4D8AAAAAAADgPwAAAAAAAOA/AAAAAAAA4D8AAAAAAADgPwAAAAAAAOA/AAAAAAAA4D8CAAAAjAAAAAAAAAAAAAAAW5vVDP///wgAAAAAAAAAAAAAAAAAAAAAAAAAAAAAAAAAAAAAZAAAAAEAAABAAAAAAAAAAAAAAAAAAAAAAAAAAAAAAAAAAAAAAAAAAAAAAAAAAAAAAAAAAAAAAAAAAAAAAAAAAAAAAAAAAAAAAAAAAAAAAAAAAAAAAAAAAAAAAAAAAAAAFAAAADwAAAAAAAAAAAAAAAAAAAkUAAAAAQAAABQAAAAUAAAAFAAAAAEAAAAAAAAAZAAAAGQAAAAAAAAAZAAAAGQAAAAVAAAAYAAAAAAAAAAAAAAADwAAACADAAAAAAAAAAAAAAEAAACgMgAAVgcAAKr4//8BAAAAf39/AAEAAABkAAAAAAAAABQAAABAHwAAAAAAACYAAAAAAAAAwOD//wAAAAAmAAAAZAAAABYAAABMAAAAAAAAAAAAAAAEAAAAAAAAAAEAAADn5uYKAAAAACgAAAAoAAAAZAAAAGQAAAAAAAAAzMzMAAAAAABQAAAAUAAAAGQAAABkAAAAAAAAABcAAAAUAAAAAAAAAAAAAAD/fwAA/38AAAAAAAAJAAAABAAAAJ/J8f8eAAAAaAAAAAAAAAAAAAAAAAAAAAAAAAAAAAAAECcAABAnAAAAAAAAAAAAAAAAAAAAAAAAAAAAAAAAAAAAAAAAAAAAABQAAAAAAAAAwMD/AAAAAABkAAAAMgAAAAAAAABkAAAAAAAAAH9/fwAKAAAAIgAAABgAAAAAAAAAAAAAAAAAAAAAAAAAAAAAAAAAAAAkAAAAJAAAAAAAAAAHAAAAAAAAAAAAAAAAAAAAAAAAAAAAAAAAAAAAf39/ACUAAABYAAAAAAAAAAAAAAAAAAAAAAAAAAAAAAAAAAAAAAAAAAAAAAAAAAAAAAAAAAAAAAA/AAAAAAAAAKCGAQAAAAAAAAAAAAAAAAAMAAAAAQAAAAAAAAAAAAAAAAAAAB8AAABUAAAAAAAABQAAAAEAAAAAAAAAAAAAAAAAAAAAAAAAAAAAAAAAAAAAAAAAAAAAAAJ/f38AAAAAA8zMzADAwP8Af39/AAAAAAAAAAAAAAAAAAAAAAAAAAAAIQAAABgAAAAUAAAA2BgAABonAAAoMgAAWSkAABAAAAAmAAAACAAAAAAAAAAAAAAA"/>
+                <pr:smNativeData xmlns:mc="http://schemas.openxmlformats.org/markup-compatibility/2006" xmlns:p14="http://schemas.microsoft.com/office/powerpoint/2010/main" xmlns:p15="http://schemas.microsoft.com/office/powerpoint/2012/main" xmlns:pr="smNativeData" xmlns="smNativeData" val="SMDATA_15_FLquaRMAAAAlAAAAZAAAAA0AAAAAkAAAAEgAAACQAAAASAAAAAAAAAABAAAAAAAAAAEAAABQAAAAAAAAAAAA4D8AAAAAAADgPwAAAAAAAOA/AAAAAAAA4D8AAAAAAADgPwAAAAAAAOA/AAAAAAAA4D8AAAAAAADgPwAAAAAAAOA/AAAAAAAA4D8CAAAAjAAAAAAAAAAAAAAAW5vVDP///wgAAAAAAAAAAAAAAAAAAAAAAAAAAAAAAAAAAAAAZAAAAAEAAABAAAAAAAAAAAAAAAAAAAAAAAAAAAAAAAAAAAAAAAAAAAAAAAAAAAAAAAAAAAAAAAAAAAAAAAAAAAAAAAAAAAAAAAAAAAAAAAAAAAAAAAAAAAAAAAAAAAAAFAAAADwAAAAAAAAAAAAAAAAAAAkUAAAAAQAAABQAAAAUAAAAFAAAAAEAAAAAAAAAZAAAAGQAAAAAAAAAZAAAAGQAAAAVAAAAYAAAAAAAAAAAAAAADwAAACADAAAAAAAAAAAAAAEAAACgMgAAVgcAAKr4//8BAAAAf39/AAEAAABkAAAAAAAAABQAAABAHwAAAAAAACYAAAAAAAAAwOD//wAAAAAmAAAAZAAAABYAAABMAAAAAAAAAAAAAAAEAAAAAAAAAAEAAADn5uYKAAAAACgAAAAoAAAAZAAAAGQAAAAAAAAAzMzMAAAAAABQAAAAUAAAAGQAAABkAAAAAAAAABcAAAAUAAAAAAAAAAAAAAD/fwAA/38AAAAAAAAJAAAABAAAAJ/J8f8eAAAAaAAAAAAAAAAAAAAAAAAAAAAAAAAAAAAAECcAABAnAAAAAAAAAAAAAAAAAAAAAAAAAAAAAAAAAAAAAAAAAAAAABQAAAAAAAAAwMD/AAAAAABkAAAAMgAAAAAAAABkAAAAAAAAAH9/fwAKAAAAIgAAABgAAAAAAAAAAAAAAAAAAAAAAAAAAAAAAAAAAAAkAAAAJAAAAAAAAAAHAAAAAAAAAAAAAAAAAAAAAAAAAAAAAAAAAAAAf39/ACUAAABYAAAAAAAAAAAAAAAAAAAAAAAAAAAAAAAAAAAAAAAAAAAAAAAAAAAAAAAAAAAAAAA/AAAAAAAAAKCGAQAAAAAAAAAAAAAAAAAMAAAAAQAAAAAAAAAAAAAAAAAAAB8AAABUAAAAAAAABQAAAAEAAAAAAAAAAAAAAAAAAAAAAAAAAAAAAAAAAAAAAAAAAAAAAAJ/f38AAAAAA8zMzADAwP8Af39/AAAAAAAAAAAAAAAAAAAAAAAAAAAAIQAAABgAAAAUAAAA2BgAABonAAAoMgAAWSkAABAAAAAmAAAACAAAAAAAAAAAAAAA"/>
               </a:ext>
             </a:extLst>
           </p:cNvSpPr>
@@ -2328,7 +2328,7 @@
             <a:spLocks noGrp="1" noChangeArrowheads="1"/>
             <a:extLst>
               <a:ext uri="smNativeData">
-                <pr:smNativeData xmlns="smNativeData" xmlns:pr="smNativeData" xmlns:p15="http://schemas.microsoft.com/office/powerpoint/2012/main" xmlns:p14="http://schemas.microsoft.com/office/powerpoint/2010/main" xmlns:mc="http://schemas.openxmlformats.org/markup-compatibility/2006" val="SMDATA_15_FLquaRMAAAAlAAAAZAAAAA0AAAAAkAAAAEgAAACQAAAASAAAAAAAAAABAAAAAAAAAAEAAABQAAAAAAAAAAAA4D8AAAAAAADgPwAAAAAAAOA/AAAAAAAA4D8AAAAAAADgPwAAAAAAAOA/AAAAAAAA4D8AAAAAAADgPwAAAAAAAOA/AAAAAAAA4D8CAAAAjAAAAAAAAAAAAAAAW5vVDP///wgAAAAAAAAAAAAAAAAAAAAAAAAAAAAAAAAAAAAAZAAAAAEAAABAAAAAAAAAAAAAAAAAAAAAAAAAAAAAAAAAAAAAAAAAAAAAAAAAAAAAAAAAAAAAAAAAAAAAAAAAAAAAAAAAAAAAAAAAAAAAAAAAAAAAAAAAAAAAAAAAAAAAFAAAADwAAAAAAAAAAAAAAAAAAAkUAAAAAQAAABQAAAAUAAAAFAAAAAEAAAAAAAAAZAAAAGQAAAAAAAAAZAAAAGQAAAAVAAAAYAAAAAAAAAAAAAAADwAAACADAAAAAAAAAAAAAAEAAACgMgAAVgcAAKr4//8BAAAAf39/AAEAAABkAAAAAAAAABQAAABAHwAAAAAAACYAAAAAAAAAwOD//wAAAAAmAAAAZAAAABYAAABMAAAAAAAAAAAAAAAEAAAAAAAAAAEAAADn5uYKAAAAACgAAAAoAAAAZAAAAGQAAAAAAAAAzMzMAAAAAABQAAAAUAAAAGQAAABkAAAAAAAAABcAAAAUAAAAAAAAAAAAAAD/fwAA/38AAAAAAAAJAAAABAAAAAAAAAAeAAAAaAAAAAAAAAAAAAAAAAAAAAAAAAAAAAAAECcAABAnAAAAAAAAAAAAAAAAAAAAAAAAAAAAAAAAAAAAAAAAAAAAABQAAAAAAAAAwMD/AAAAAABkAAAAMgAAAAAAAABkAAAAAAAAAH9/fwAKAAAAIgAAABgAAAAAAAAAAAAAAAAAAAAAAAAAAAAAAAAAAAAkAAAAJAAAAAAAAAAHAAAAAAAAAAAAAAAAAAAAAAAAAAAAAAAAAAAAf39/ACUAAABYAAAAAAAAAAAAAAAAAAAAAAAAAAAAAAAAAAAAAAAAAAAAAAAAAAAAAAAAAAAAAAA/AAAAAAAAAKCGAQAAAAAAAAAAAAAAAAAMAAAAAQAAAAAAAAAAAAAAAAAAAB8AAABUAAAAAAAABQAAAAEAAAAAAAAAAAAAAAAAAAAAAAAAAAAAAAAAAAAAAAAAAAAAAAJ/f38AAAAAA8zMzADAwP8Af39/AAAAAAAAAAAAAAAAAAAAAAAAAAAAIQAAABgAAAAUAAAA+DQAABonAADYRQAAWSkAABAAAAAmAAAACAAAAAAAAAAAAAAA"/>
+                <pr:smNativeData xmlns:mc="http://schemas.openxmlformats.org/markup-compatibility/2006" xmlns:p14="http://schemas.microsoft.com/office/powerpoint/2010/main" xmlns:p15="http://schemas.microsoft.com/office/powerpoint/2012/main" xmlns:pr="smNativeData" xmlns="smNativeData" val="SMDATA_15_FLquaRMAAAAlAAAAZAAAAA0AAAAAkAAAAEgAAACQAAAASAAAAAAAAAABAAAAAAAAAAEAAABQAAAAAAAAAAAA4D8AAAAAAADgPwAAAAAAAOA/AAAAAAAA4D8AAAAAAADgPwAAAAAAAOA/AAAAAAAA4D8AAAAAAADgPwAAAAAAAOA/AAAAAAAA4D8CAAAAjAAAAAAAAAAAAAAAW5vVDP///wgAAAAAAAAAAAAAAAAAAAAAAAAAAAAAAAAAAAAAZAAAAAEAAABAAAAAAAAAAAAAAAAAAAAAAAAAAAAAAAAAAAAAAAAAAAAAAAAAAAAAAAAAAAAAAAAAAAAAAAAAAAAAAAAAAAAAAAAAAAAAAAAAAAAAAAAAAAAAAAAAAAAAFAAAADwAAAAAAAAAAAAAAAAAAAkUAAAAAQAAABQAAAAUAAAAFAAAAAEAAAAAAAAAZAAAAGQAAAAAAAAAZAAAAGQAAAAVAAAAYAAAAAAAAAAAAAAADwAAACADAAAAAAAAAAAAAAEAAACgMgAAVgcAAKr4//8BAAAAf39/AAEAAABkAAAAAAAAABQAAABAHwAAAAAAACYAAAAAAAAAwOD//wAAAAAmAAAAZAAAABYAAABMAAAAAAAAAAAAAAAEAAAAAAAAAAEAAADn5uYKAAAAACgAAAAoAAAAZAAAAGQAAAAAAAAAzMzMAAAAAABQAAAAUAAAAGQAAABkAAAAAAAAABcAAAAUAAAAAAAAAAAAAAD/fwAA/38AAAAAAAAJAAAABAAAAAAAAAAeAAAAaAAAAAAAAAAAAAAAAAAAAAAAAAAAAAAAECcAABAnAAAAAAAAAAAAAAAAAAAAAAAAAAAAAAAAAAAAAAAAAAAAABQAAAAAAAAAwMD/AAAAAABkAAAAMgAAAAAAAABkAAAAAAAAAH9/fwAKAAAAIgAAABgAAAAAAAAAAAAAAAAAAAAAAAAAAAAAAAAAAAAkAAAAJAAAAAAAAAAHAAAAAAAAAAAAAAAAAAAAAAAAAAAAAAAAAAAAf39/ACUAAABYAAAAAAAAAAAAAAAAAAAAAAAAAAAAAAAAAAAAAAAAAAAAAAAAAAAAAAAAAAAAAAA/AAAAAAAAAKCGAQAAAAAAAAAAAAAAAAAMAAAAAQAAAAAAAAAAAAAAAAAAAB8AAABUAAAAAAAABQAAAAEAAAAAAAAAAAAAAAAAAAAAAAAAAAAAAAAAAAAAAAAAAAAAAAJ/f38AAAAAA8zMzADAwP8Af39/AAAAAAAAAAAAAAAAAAAAAAAAAAAAIQAAABgAAAAUAAAA+DQAABonAADYRQAAWSkAABAAAAAmAAAACAAAAAAAAAAAAAAA"/>
               </a:ext>
             </a:extLst>
           </p:cNvSpPr>
@@ -2384,7 +2384,7 @@
             <a:spLocks noGrp="1" noChangeArrowheads="1"/>
             <a:extLst>
               <a:ext uri="smNativeData">
-                <pr:smNativeData xmlns="smNativeData" xmlns:pr="smNativeData" xmlns:p15="http://schemas.microsoft.com/office/powerpoint/2012/main" xmlns:p14="http://schemas.microsoft.com/office/powerpoint/2010/main" xmlns:mc="http://schemas.openxmlformats.org/markup-compatibility/2006" val="SMDATA_15_FLquaRMAAAAlAAAAZAAAAA0AAAAAkAAAAEgAAACQAAAASAAAAAAAAAACAAAAAAAAAAEAAABQAAAAAAAAAAAA4D8AAAAAAADgPwAAAAAAAOA/AAAAAAAA4D8AAAAAAADgPwAAAAAAAOA/AAAAAAAA4D8AAAAAAADgPwAAAAAAAOA/AAAAAAAA4D8CAAAAjAAAAAAAAAAAAAAAW5vVDP///wgAAAAAAAAAAAAAAAAAAAAAAAAAAAAAAAAAAAAAZAAAAAEAAABAAAAAAAAAAAAAAAAAAAAAAAAAAAAAAAAAAAAAAAAAAAAAAAAAAAAAAAAAAAAAAAAAAAAAAAAAAAAAAAAAAAAAAAAAAAAAAAAAAAAAAAAAAAAAAAAAAAAAFAAAADwAAAAAAAAAAAAAAAAAAAkUAAAAAQAAABQAAAAUAAAAFAAAAAEAAAAAAAAAZAAAAGQAAAAAAAAAZAAAAGQAAAAVAAAAYAAAAAAAAAAAAAAADwAAACADAAAAAAAAAAAAAAEAAACgMgAAVgcAAKr4//8BAAAAf39/AAEAAABkAAAAAAAAABQAAABAHwAAAAAAACYAAAAAAAAAwOD//wAAAAAmAAAAZAAAABYAAABMAAAAAAAAAAAAAAAEAAAAAAAAAAEAAADn5uYKAAAAACgAAAAoAAAAZAAAAGQAAAAAAAAAzMzMAAAAAABQAAAAUAAAAGQAAABkAAAAAAAAABcAAAAUAAAAAAAAAAAAAAD/fwAA/38AAAAAAAAJAAAABAAAAAAAAAAeAAAAaAAAAAAAAAAAAAAAAAAAAAAAAAAAAAAAECcAABAnAAAAAAAAAAAAAAAAAAAAAAAAAAAAAAAAAAAAAAAAAAAAABQAAAAAAAAAwMD/AAAAAABkAAAAMgAAAAAAAABkAAAAAAAAAH9/fwAKAAAAIgAAABgAAAAAAAAAAAAAAAAAAAAAAAAAAAAAAAAAAAAkAAAAJAAAAAAAAAAHAAAAAAAAAAAAAAAAAAAAAAAAAAAAAAAAAAAAf39/ACUAAABYAAAAAAAAAAAAAAAAAAAAAAAAAAAAAAAAAAAAAAAAAAAAAAAAAAAAAAAAAAAAAAA/AAAAAAAAAKCGAQAAAAAAAAAAAAAAAAAMAAAAAQAAAAAAAAAAAAAAAAAAAB8AAABUAAAAAAAABQAAAAEAAAAAAAAAAAAAAAAAAAAAAAAAAAAAAAAAAAAAAAAAAAAAAAJ/f38AAAAAA8zMzADAwP8Af39/AAAAAAAAAAAAAAAAAAAAAAAAAAAAIQAAABgAAAAUAAAAKwUAANACAABbHQAAqAwAABAAAAAmAAAACAAAAIGAAAAAAAAA"/>
+                <pr:smNativeData xmlns:mc="http://schemas.openxmlformats.org/markup-compatibility/2006" xmlns:p14="http://schemas.microsoft.com/office/powerpoint/2010/main" xmlns:p15="http://schemas.microsoft.com/office/powerpoint/2012/main" xmlns:pr="smNativeData" xmlns="smNativeData" val="SMDATA_15_FLquaRMAAAAlAAAAZAAAAA0AAAAAkAAAAEgAAACQAAAASAAAAAAAAAACAAAAAAAAAAEAAABQAAAAAAAAAAAA4D8AAAAAAADgPwAAAAAAAOA/AAAAAAAA4D8AAAAAAADgPwAAAAAAAOA/AAAAAAAA4D8AAAAAAADgPwAAAAAAAOA/AAAAAAAA4D8CAAAAjAAAAAAAAAAAAAAAW5vVDP///wgAAAAAAAAAAAAAAAAAAAAAAAAAAAAAAAAAAAAAZAAAAAEAAABAAAAAAAAAAAAAAAAAAAAAAAAAAAAAAAAAAAAAAAAAAAAAAAAAAAAAAAAAAAAAAAAAAAAAAAAAAAAAAAAAAAAAAAAAAAAAAAAAAAAAAAAAAAAAAAAAAAAAFAAAADwAAAAAAAAAAAAAAAAAAAkUAAAAAQAAABQAAAAUAAAAFAAAAAEAAAAAAAAAZAAAAGQAAAAAAAAAZAAAAGQAAAAVAAAAYAAAAAAAAAAAAAAADwAAACADAAAAAAAAAAAAAAEAAACgMgAAVgcAAKr4//8BAAAAf39/AAEAAABkAAAAAAAAABQAAABAHwAAAAAAACYAAAAAAAAAwOD//wAAAAAmAAAAZAAAABYAAABMAAAAAAAAAAAAAAAEAAAAAAAAAAEAAADn5uYKAAAAACgAAAAoAAAAZAAAAGQAAAAAAAAAzMzMAAAAAABQAAAAUAAAAGQAAABkAAAAAAAAABcAAAAUAAAAAAAAAAAAAAD/fwAA/38AAAAAAAAJAAAABAAAAAAAAAAeAAAAaAAAAAAAAAAAAAAAAAAAAAAAAAAAAAAAECcAABAnAAAAAAAAAAAAAAAAAAAAAAAAAAAAAAAAAAAAAAAAAAAAABQAAAAAAAAAwMD/AAAAAABkAAAAMgAAAAAAAABkAAAAAAAAAH9/fwAKAAAAIgAAABgAAAAAAAAAAAAAAAAAAAAAAAAAAAAAAAAAAAAkAAAAJAAAAAAAAAAHAAAAAAAAAAAAAAAAAAAAAAAAAAAAAAAAAAAAf39/ACUAAABYAAAAAAAAAAAAAAAAAAAAAAAAAAAAAAAAAAAAAAAAAAAAAAAAAAAAAAAAAAAAAAA/AAAAAAAAAKCGAQAAAAAAAAAAAAAAAAAMAAAAAQAAAAAAAAAAAAAAAAAAAB8AAABUAAAAAAAABQAAAAEAAAAAAAAAAAAAAAAAAAAAAAAAAAAAAAAAAAAAAAAAAAAAAAJ/f38AAAAAA8zMzADAwP8Af39/AAAAAAAAAAAAAAAAAAAAAAAAAAAAIQAAABgAAAAUAAAAKwUAANACAABbHQAAqAwAABAAAAAmAAAACAAAAIGAAAAAAAAA"/>
               </a:ext>
             </a:extLst>
           </p:cNvSpPr>
@@ -2450,7 +2450,7 @@
             <a:spLocks noGrp="1" noChangeArrowheads="1"/>
             <a:extLst>
               <a:ext uri="smNativeData">
-                <pr:smNativeData xmlns="smNativeData" xmlns:pr="smNativeData" xmlns:p15="http://schemas.microsoft.com/office/powerpoint/2012/main" xmlns:p14="http://schemas.microsoft.com/office/powerpoint/2010/main" xmlns:mc="http://schemas.openxmlformats.org/markup-compatibility/2006" val="SMDATA_15_FLquaRMAAAAlAAAAZAAAAA0AAAAAkAAAAEgAAACQAAAASAAAAAAAAAAAAAAAAAAAAAEAAABQAAAAAAAAAAAA4D8AAAAAAADgPwAAAAAAAOA/AAAAAAAA4D8AAAAAAADgPwAAAAAAAOA/AAAAAAAA4D8AAAAAAADgPwAAAAAAAOA/AAAAAAAA4D8CAAAAjAAAAAAAAAAAAAAAW5vVDP///wgAAAAAAAAAAAAAAAAAAAAAAAAAAAAAAAAAAAAAZAAAAAEAAABAAAAAAAAAAAAAAAAAAAAAAAAAAAAAAAAAAAAAAAAAAAAAAAAAAAAAAAAAAAAAAAAAAAAAAAAAAAAAAAAAAAAAAAAAAAAAAAAAAAAAAAAAAAAAAAAAAAAAFAAAADwAAAAAAAAAAAAAAAAAAAkUAAAAAQAAABQAAAAUAAAAFAAAAAEAAAAAAAAAZAAAAGQAAAAAAAAAZAAAAGQAAAAVAAAAYAAAAAAAAAAAAAAADwAAACADAAAAAAAAAAAAAAEAAACgMgAAVgcAAKr4//8BAAAAf39/AAEAAABkAAAAAAAAABQAAABAHwAAAAAAACYAAAAAAAAAwOD//wAAAAAmAAAAZAAAABYAAABMAAAAAAAAAAAAAAAEAAAAAAAAAAEAAADn5uYKAAAAACgAAAAoAAAAZAAAAGQAAAAAAAAAzMzMAAAAAABQAAAAUAAAAGQAAABkAAAAAAAAABcAAAAUAAAAAAAAAAAAAAD/fwAA/38AAAAAAAAJAAAABAAAAAAAAAAeAAAAaAAAAAAAAAAAAAAAAAAAAAAAAAAAAAAAECcAABAnAAAAAAAAAAAAAAAAAAAAAAAAAAAAAAAAAAAAAAAAAAAAABQAAAAAAAAAwMD/AAAAAABkAAAAMgAAAAAAAABkAAAAAAAAAH9/fwAKAAAAIgAAABgAAAAAAAAAAAAAAAAAAAAAAAAAAAAAAAAAAAAkAAAAJAAAAAAAAAAHAAAAAAAAAAAAAAAAAAAAAAAAAAAAAAAAAAAAf39/ACUAAABYAAAAAAAAAAAAAAAAAAAAAAAAAAAAAAAAAAAAAAAAAAAAAAAAAAAAAAAAAAAAAAA/AAAAAAAAAKCGAQAAAAAAAAAAAAAAAAAMAAAAAQAAAAAAAAAAAAAAAAAAAB8AAABUAAAAAAAABQAAAAEAAAAAAAAAAAAAAAAAAAAAAAAAAAAAAAAAAAAAAAAAAAAAAAJ/f38AAAAAA8zMzADAwP8Af39/AAAAAAAAAAAAAAAAAAAAAAAAAAAAIQAAABgAAAAUAAAA4x8AABMGAADbRQAADiQAABAAAAAmAAAACAAAAAGAAAAAAAAA"/>
+                <pr:smNativeData xmlns:mc="http://schemas.openxmlformats.org/markup-compatibility/2006" xmlns:p14="http://schemas.microsoft.com/office/powerpoint/2010/main" xmlns:p15="http://schemas.microsoft.com/office/powerpoint/2012/main" xmlns:pr="smNativeData" xmlns="smNativeData" val="SMDATA_15_FLquaRMAAAAlAAAAZAAAAA0AAAAAkAAAAEgAAACQAAAASAAAAAAAAAAAAAAAAAAAAAEAAABQAAAAAAAAAAAA4D8AAAAAAADgPwAAAAAAAOA/AAAAAAAA4D8AAAAAAADgPwAAAAAAAOA/AAAAAAAA4D8AAAAAAADgPwAAAAAAAOA/AAAAAAAA4D8CAAAAjAAAAAAAAAAAAAAAW5vVDP///wgAAAAAAAAAAAAAAAAAAAAAAAAAAAAAAAAAAAAAZAAAAAEAAABAAAAAAAAAAAAAAAAAAAAAAAAAAAAAAAAAAAAAAAAAAAAAAAAAAAAAAAAAAAAAAAAAAAAAAAAAAAAAAAAAAAAAAAAAAAAAAAAAAAAAAAAAAAAAAAAAAAAAFAAAADwAAAAAAAAAAAAAAAAAAAkUAAAAAQAAABQAAAAUAAAAFAAAAAEAAAAAAAAAZAAAAGQAAAAAAAAAZAAAAGQAAAAVAAAAYAAAAAAAAAAAAAAADwAAACADAAAAAAAAAAAAAAEAAACgMgAAVgcAAKr4//8BAAAAf39/AAEAAABkAAAAAAAAABQAAABAHwAAAAAAACYAAAAAAAAAwOD//wAAAAAmAAAAZAAAABYAAABMAAAAAAAAAAAAAAAEAAAAAAAAAAEAAADn5uYKAAAAACgAAAAoAAAAZAAAAGQAAAAAAAAAzMzMAAAAAABQAAAAUAAAAGQAAABkAAAAAAAAABcAAAAUAAAAAAAAAAAAAAD/fwAA/38AAAAAAAAJAAAABAAAAAAAAAAeAAAAaAAAAAAAAAAAAAAAAAAAAAAAAAAAAAAAECcAABAnAAAAAAAAAAAAAAAAAAAAAAAAAAAAAAAAAAAAAAAAAAAAABQAAAAAAAAAwMD/AAAAAABkAAAAMgAAAAAAAABkAAAAAAAAAH9/fwAKAAAAIgAAABgAAAAAAAAAAAAAAAAAAAAAAAAAAAAAAAAAAAAkAAAAJAAAAAAAAAAHAAAAAAAAAAAAAAAAAAAAAAAAAAAAAAAAAAAAf39/ACUAAABYAAAAAAAAAAAAAAAAAAAAAAAAAAAAAAAAAAAAAAAAAAAAAAAAAAAAAAAAAAAAAAA/AAAAAAAAAKCGAQAAAAAAAAAAAAAAAAAMAAAAAQAAAAAAAAAAAAAAAAAAAB8AAABUAAAAAAAABQAAAAEAAAAAAAAAAAAAAAAAAAAAAAAAAAAAAAAAAAAAAAAAAAAAAAJ/f38AAAAAA8zMzADAwP8Af39/AAAAAAAAAAAAAAAAAAAAAAAAAAAAIQAAABgAAAAUAAAA4x8AABMGAADbRQAADiQAABAAAAAmAAAACAAAAAGAAAAAAAAA"/>
               </a:ext>
             </a:extLst>
           </p:cNvSpPr>
@@ -2544,7 +2544,7 @@
             <a:spLocks noGrp="1" noChangeArrowheads="1"/>
             <a:extLst>
               <a:ext uri="smNativeData">
-                <pr:smNativeData xmlns="smNativeData" xmlns:pr="smNativeData" xmlns:p15="http://schemas.microsoft.com/office/powerpoint/2012/main" xmlns:p14="http://schemas.microsoft.com/office/powerpoint/2010/main" xmlns:mc="http://schemas.openxmlformats.org/markup-compatibility/2006" val="SMDATA_15_FLquaRMAAAAlAAAAZAAAAA0AAAAAkAAAAEgAAACQAAAASAAAAAAAAAAAAAAAAAAAAAEAAABQAAAAAAAAAAAA4D8AAAAAAADgPwAAAAAAAOA/AAAAAAAA4D8AAAAAAADgPwAAAAAAAOA/AAAAAAAA4D8AAAAAAADgPwAAAAAAAOA/AAAAAAAA4D8CAAAAjAAAAAAAAAAAAAAAW5vVDP///wgAAAAAAAAAAAAAAAAAAAAAAAAAAAAAAAAAAAAAZAAAAAEAAABAAAAAAAAAAAAAAAAAAAAAAAAAAAAAAAAAAAAAAAAAAAAAAAAAAAAAAAAAAAAAAAAAAAAAAAAAAAAAAAAAAAAAAAAAAAAAAAAAAAAAAAAAAAAAAAAAAAAAFAAAADwAAAAAAAAAAAAAAAAAAAkUAAAAAQAAABQAAAAUAAAAFAAAAAEAAAAAAAAAZAAAAGQAAAAAAAAAZAAAAGQAAAAVAAAAYAAAAAAAAAAAAAAADwAAACADAAAAAAAAAAAAAAEAAACgMgAAVgcAAKr4//8BAAAAf39/AAEAAABkAAAAAAAAABQAAABAHwAAAAAAACYAAAAAAAAAwOD//wAAAAAmAAAAZAAAABYAAABMAAAAAAAAAAAAAAAEAAAAAAAAAAEAAADn5uYKAAAAACgAAAAoAAAAZAAAAGQAAAAAAAAAzMzMAAAAAABQAAAAUAAAAGQAAABkAAAAAAAAABcAAAAUAAAAAAAAAAAAAAD/fwAA/38AAAAAAAAJAAAABAAAAAAAAAAeAAAAaAAAAAAAAAAAAAAAAAAAAAAAAAAAAAAAECcAABAnAAAAAAAAAAAAAAAAAAAAAAAAAAAAAAAAAAAAAAAAAAAAABQAAAAAAAAAwMD/AAAAAABkAAAAMgAAAAAAAABkAAAAAAAAAH9/fwAKAAAAIgAAABgAAAAAAAAAAAAAAAAAAAAAAAAAAAAAAAAAAAAkAAAAJAAAAAAAAAAHAAAAAAAAAAAAAAAAAAAAAAAAAAAAAAAAAAAAf39/ACUAAABYAAAAAAAAAAAAAAAAAAAAAAAAAAAAAAAAAAAAAAAAAAAAAAAAAAAAAAAAAAAAAAA/AAAAAAAAAKCGAQAAAAAAAAAAAAAAAAAMAAAAAQAAAAAAAAAAAAAAAAAAAB8AAABUAAAAAAAABQAAAAEAAAAAAAAAAAAAAAAAAAAAAAAAAAAAAAAAAAAAAAAAAAAAAAJ/f38AAAAAA8zMzADAwP8Af39/AAAAAAAAAAAAAAAAAAAAAAAAAAAAIQAAABgAAAAUAAAAKwUAAKgMAABbHQAAGyQAABAAAAAmAAAACAAAAAGAAAAAAAAA"/>
+                <pr:smNativeData xmlns:mc="http://schemas.openxmlformats.org/markup-compatibility/2006" xmlns:p14="http://schemas.microsoft.com/office/powerpoint/2010/main" xmlns:p15="http://schemas.microsoft.com/office/powerpoint/2012/main" xmlns:pr="smNativeData" xmlns="smNativeData" val="SMDATA_15_FLquaRMAAAAlAAAAZAAAAA0AAAAAkAAAAEgAAACQAAAASAAAAAAAAAAAAAAAAAAAAAEAAABQAAAAAAAAAAAA4D8AAAAAAADgPwAAAAAAAOA/AAAAAAAA4D8AAAAAAADgPwAAAAAAAOA/AAAAAAAA4D8AAAAAAADgPwAAAAAAAOA/AAAAAAAA4D8CAAAAjAAAAAAAAAAAAAAAW5vVDP///wgAAAAAAAAAAAAAAAAAAAAAAAAAAAAAAAAAAAAAZAAAAAEAAABAAAAAAAAAAAAAAAAAAAAAAAAAAAAAAAAAAAAAAAAAAAAAAAAAAAAAAAAAAAAAAAAAAAAAAAAAAAAAAAAAAAAAAAAAAAAAAAAAAAAAAAAAAAAAAAAAAAAAFAAAADwAAAAAAAAAAAAAAAAAAAkUAAAAAQAAABQAAAAUAAAAFAAAAAEAAAAAAAAAZAAAAGQAAAAAAAAAZAAAAGQAAAAVAAAAYAAAAAAAAAAAAAAADwAAACADAAAAAAAAAAAAAAEAAACgMgAAVgcAAKr4//8BAAAAf39/AAEAAABkAAAAAAAAABQAAABAHwAAAAAAACYAAAAAAAAAwOD//wAAAAAmAAAAZAAAABYAAABMAAAAAAAAAAAAAAAEAAAAAAAAAAEAAADn5uYKAAAAACgAAAAoAAAAZAAAAGQAAAAAAAAAzMzMAAAAAABQAAAAUAAAAGQAAABkAAAAAAAAABcAAAAUAAAAAAAAAAAAAAD/fwAA/38AAAAAAAAJAAAABAAAAAAAAAAeAAAAaAAAAAAAAAAAAAAAAAAAAAAAAAAAAAAAECcAABAnAAAAAAAAAAAAAAAAAAAAAAAAAAAAAAAAAAAAAAAAAAAAABQAAAAAAAAAwMD/AAAAAABkAAAAMgAAAAAAAABkAAAAAAAAAH9/fwAKAAAAIgAAABgAAAAAAAAAAAAAAAAAAAAAAAAAAAAAAAAAAAAkAAAAJAAAAAAAAAAHAAAAAAAAAAAAAAAAAAAAAAAAAAAAAAAAAAAAf39/ACUAAABYAAAAAAAAAAAAAAAAAAAAAAAAAAAAAAAAAAAAAAAAAAAAAAAAAAAAAAAAAAAAAAA/AAAAAAAAAKCGAQAAAAAAAAAAAAAAAAAMAAAAAQAAAAAAAAAAAAAAAAAAAB8AAABUAAAAAAAABQAAAAEAAAAAAAAAAAAAAAAAAAAAAAAAAAAAAAAAAAAAAAAAAAAAAAJ/f38AAAAAA8zMzADAwP8Af39/AAAAAAAAAAAAAAAAAAAAAAAAAAAAIQAAABgAAAAUAAAAKwUAAKgMAABbHQAAGyQAABAAAAAmAAAACAAAAAGAAAAAAAAA"/>
               </a:ext>
             </a:extLst>
           </p:cNvSpPr>
@@ -2615,7 +2615,7 @@
             <a:spLocks noGrp="1" noChangeArrowheads="1"/>
             <a:extLst>
               <a:ext uri="smNativeData">
-                <pr:smNativeData xmlns="smNativeData" xmlns:pr="smNativeData" xmlns:p15="http://schemas.microsoft.com/office/powerpoint/2012/main" xmlns:p14="http://schemas.microsoft.com/office/powerpoint/2010/main" xmlns:mc="http://schemas.openxmlformats.org/markup-compatibility/2006" val="SMDATA_15_FLquaRMAAAAlAAAAZAAAAA0AAAAAkAAAAEgAAACQAAAASAAAAAAAAAABAAAAAAAAAAEAAABQAAAAAAAAAAAA4D8AAAAAAADgPwAAAAAAAOA/AAAAAAAA4D8AAAAAAADgPwAAAAAAAOA/AAAAAAAA4D8AAAAAAADgPwAAAAAAAOA/AAAAAAAA4D8CAAAAjAAAAAAAAAAAAAAAW5vVDP///wgAAAAAAAAAAAAAAAAAAAAAAAAAAAAAAAAAAAAAZAAAAAEAAABAAAAAAAAAAAAAAAAAAAAAAAAAAAAAAAAAAAAAAAAAAAAAAAAAAAAAAAAAAAAAAAAAAAAAAAAAAAAAAAAAAAAAAAAAAAAAAAAAAAAAAAAAAAAAAAAAAAAAFAAAADwAAAAAAAAAAAAAAAAAAAkUAAAAAQAAABQAAAAUAAAAFAAAAAEAAAAAAAAAZAAAAGQAAAAAAAAAZAAAAGQAAAAVAAAAYAAAAAAAAAAAAAAADwAAACADAAAAAAAAAAAAAAEAAACgMgAAVgcAAKr4//8BAAAAf39/AAEAAABkAAAAAAAAABQAAABAHwAAAAAAACYAAAAAAAAAwOD//wAAAAAmAAAAZAAAABYAAABMAAAAAAAAAAAAAAAEAAAAAAAAAAEAAADn5uYKAAAAACgAAAAoAAAAZAAAAGQAAAAAAAAAzMzMAAAAAABQAAAAUAAAAGQAAABkAAAAAAAAABcAAAAUAAAAAAAAAAAAAAD/fwAA/38AAAAAAAAJAAAABAAAAAAAAAAeAAAAaAAAAAAAAAAAAAAAAAAAAAAAAAAAAAAAECcAABAnAAAAAAAAAAAAAAAAAAAAAAAAAAAAAAAAAAAAAAAAAAAAABQAAAAAAAAAwMD/AAAAAABkAAAAMgAAAAAAAABkAAAAAAAAAH9/fwAKAAAAIgAAABgAAAAAAAAAAAAAAAAAAAAAAAAAAAAAAAAAAAAkAAAAJAAAAAAAAAAHAAAAAAAAAAAAAAAAAAAAAAAAAAAAAAAAAAAAf39/ACUAAABYAAAAAAAAAAAAAAAAAAAAAAAAAAAAAAAAAAAAAAAAAAAAAAAAAAAAAAAAAAAAAAA/AAAAAAAAAKCGAQAAAAAAAAAAAAAAAAAMAAAAAQAAAAAAAAAAAAAAAAAAAB8AAABUAAAAAAAABQAAAAEAAAAAAAAAAAAAAAAAAAAAAAAAAAAAAAAAAAAAAAAAAAAAAAJ/f38AAAAAA8zMzADAwP8Af39/AAAAAAAAAAAAAAAAAAAAAAAAAAAAIQAAABgAAAAUAAAAKAUAABonAAAIFgAAWSkAABAAAAAmAAAACAAAAAAAAAAAAAAA"/>
+                <pr:smNativeData xmlns:mc="http://schemas.openxmlformats.org/markup-compatibility/2006" xmlns:p14="http://schemas.microsoft.com/office/powerpoint/2010/main" xmlns:p15="http://schemas.microsoft.com/office/powerpoint/2012/main" xmlns:pr="smNativeData" xmlns="smNativeData" val="SMDATA_15_FLquaRMAAAAlAAAAZAAAAA0AAAAAkAAAAEgAAACQAAAASAAAAAAAAAABAAAAAAAAAAEAAABQAAAAAAAAAAAA4D8AAAAAAADgPwAAAAAAAOA/AAAAAAAA4D8AAAAAAADgPwAAAAAAAOA/AAAAAAAA4D8AAAAAAADgPwAAAAAAAOA/AAAAAAAA4D8CAAAAjAAAAAAAAAAAAAAAW5vVDP///wgAAAAAAAAAAAAAAAAAAAAAAAAAAAAAAAAAAAAAZAAAAAEAAABAAAAAAAAAAAAAAAAAAAAAAAAAAAAAAAAAAAAAAAAAAAAAAAAAAAAAAAAAAAAAAAAAAAAAAAAAAAAAAAAAAAAAAAAAAAAAAAAAAAAAAAAAAAAAAAAAAAAAFAAAADwAAAAAAAAAAAAAAAAAAAkUAAAAAQAAABQAAAAUAAAAFAAAAAEAAAAAAAAAZAAAAGQAAAAAAAAAZAAAAGQAAAAVAAAAYAAAAAAAAAAAAAAADwAAACADAAAAAAAAAAAAAAEAAACgMgAAVgcAAKr4//8BAAAAf39/AAEAAABkAAAAAAAAABQAAABAHwAAAAAAACYAAAAAAAAAwOD//wAAAAAmAAAAZAAAABYAAABMAAAAAAAAAAAAAAAEAAAAAAAAAAEAAADn5uYKAAAAACgAAAAoAAAAZAAAAGQAAAAAAAAAzMzMAAAAAABQAAAAUAAAAGQAAABkAAAAAAAAABcAAAAUAAAAAAAAAAAAAAD/fwAA/38AAAAAAAAJAAAABAAAAAAAAAAeAAAAaAAAAAAAAAAAAAAAAAAAAAAAAAAAAAAAECcAABAnAAAAAAAAAAAAAAAAAAAAAAAAAAAAAAAAAAAAAAAAAAAAABQAAAAAAAAAwMD/AAAAAABkAAAAMgAAAAAAAABkAAAAAAAAAH9/fwAKAAAAIgAAABgAAAAAAAAAAAAAAAAAAAAAAAAAAAAAAAAAAAAkAAAAJAAAAAAAAAAHAAAAAAAAAAAAAAAAAAAAAAAAAAAAAAAAAAAAf39/ACUAAABYAAAAAAAAAAAAAAAAAAAAAAAAAAAAAAAAAAAAAAAAAAAAAAAAAAAAAAAAAAAAAAA/AAAAAAAAAKCGAQAAAAAAAAAAAAAAAAAMAAAAAQAAAAAAAAAAAAAAAAAAAB8AAABUAAAAAAAABQAAAAEAAAAAAAAAAAAAAAAAAAAAAAAAAAAAAAAAAAAAAAAAAAAAAAJ/f38AAAAAA8zMzADAwP8Af39/AAAAAAAAAAAAAAAAAAAAAAAAAAAAIQAAABgAAAAUAAAAKAUAABonAAAIFgAAWSkAABAAAAAmAAAACAAAAAAAAAAAAAAA"/>
               </a:ext>
             </a:extLst>
           </p:cNvSpPr>
@@ -2632,7 +2632,7 @@
               <a:defRPr lang="en-US"/>
             </a:pPr>
             <a:fld id="{30AED90E-40DD-FB2F-9316-B67A975865E3}" type="datetime1">
-              <a:t>4/21/2026</a:t>
+              <a:t>6/3/2026</a:t>
             </a:fld>
             <a:endParaRPr/>
           </a:p>
@@ -2645,7 +2645,7 @@
             <a:spLocks noGrp="1" noChangeArrowheads="1"/>
             <a:extLst>
               <a:ext uri="smNativeData">
-                <pr:smNativeData xmlns="smNativeData" xmlns:pr="smNativeData" xmlns:p15="http://schemas.microsoft.com/office/powerpoint/2012/main" xmlns:p14="http://schemas.microsoft.com/office/powerpoint/2010/main" xmlns:mc="http://schemas.openxmlformats.org/markup-compatibility/2006" val="SMDATA_15_FLquaRMAAAAlAAAAZAAAAA0AAAAAkAAAAEgAAACQAAAASAAAAAAAAAABAAAAAAAAAAEAAABQAAAAAAAAAAAA4D8AAAAAAADgPwAAAAAAAOA/AAAAAAAA4D8AAAAAAADgPwAAAAAAAOA/AAAAAAAA4D8AAAAAAADgPwAAAAAAAOA/AAAAAAAA4D8CAAAAjAAAAAAAAAAAAAAAW5vVDP///wgAAAAAAAAAAAAAAAAAAAAAAAAAAAAAAAAAAAAAZAAAAAEAAABAAAAAAAAAAAAAAAAAAAAAAAAAAAAAAAAAAAAAAAAAAAAAAAAAAAAAAAAAAAAAAAAAAAAAAAAAAAAAAAAAAAAAAAAAAAAAAAAAAAAAAAAAAAAAAAAAAAAAFAAAADwAAAAAAAAAAAAAAAAAAAkUAAAAAQAAABQAAAAUAAAAFAAAAAEAAAAAAAAAZAAAAGQAAAAAAAAAZAAAAGQAAAAVAAAAYAAAAAAAAAAAAAAADwAAACADAAAAAAAAAAAAAAEAAACgMgAAVgcAAKr4//8BAAAAf39/AAEAAABkAAAAAAAAABQAAABAHwAAAAAAACYAAAAAAAAAwOD//wAAAAAmAAAAZAAAABYAAABMAAAAAAAAAAAAAAAEAAAAAAAAAAEAAADn5uYKAAAAACgAAAAoAAAAZAAAAGQAAAAAAAAAzMzMAAAAAABQAAAAUAAAAGQAAABkAAAAAAAAABcAAAAUAAAAAAAAAAAAAAD/fwAA/38AAAAAAAAJAAAABAAAAAAAAAAeAAAAaAAAAAAAAAAAAAAAAAAAAAAAAAAAAAAAECcAABAnAAAAAAAAAAAAAAAAAAAAAAAAAAAAAAAAAAAAAAAAAAAAABQAAAAAAAAAwMD/AAAAAABkAAAAMgAAAAAAAABkAAAAAAAAAH9/fwAKAAAAIgAAABgAAAAAAAAAAAAAAAAAAAAAAAAAAAAAAAAAAAAkAAAAJAAAAAAAAAAHAAAAAAAAAAAAAAAAAAAAAAAAAAAAAAAAAAAAf39/ACUAAABYAAAAAAAAAAAAAAAAAAAAAAAAAAAAAAAAAAAAAAAAAAAAAAAAAAAAAAAAAAAAAAA/AAAAAAAAAKCGAQAAAAAAAAAAAAAAAAAMAAAAAQAAAAAAAAAAAAAAAAAAAB8AAABUAAAAAAAABQAAAAEAAAAAAAAAAAAAAAAAAAAAAAAAAAAAAAAAAAAAAAAAAAAAAAJ/f38AAAAAA8zMzADAwP8Af39/AAAAAAAAAAAAAAAAAAAAAAAAAAAAIQAAABgAAAAUAAAA2BgAABonAAAoMgAAWSkAABAAAAAmAAAACAAAAAAAAAAAAAAA"/>
+                <pr:smNativeData xmlns:mc="http://schemas.openxmlformats.org/markup-compatibility/2006" xmlns:p14="http://schemas.microsoft.com/office/powerpoint/2010/main" xmlns:p15="http://schemas.microsoft.com/office/powerpoint/2012/main" xmlns:pr="smNativeData" xmlns="smNativeData" val="SMDATA_15_FLquaRMAAAAlAAAAZAAAAA0AAAAAkAAAAEgAAACQAAAASAAAAAAAAAABAAAAAAAAAAEAAABQAAAAAAAAAAAA4D8AAAAAAADgPwAAAAAAAOA/AAAAAAAA4D8AAAAAAADgPwAAAAAAAOA/AAAAAAAA4D8AAAAAAADgPwAAAAAAAOA/AAAAAAAA4D8CAAAAjAAAAAAAAAAAAAAAW5vVDP///wgAAAAAAAAAAAAAAAAAAAAAAAAAAAAAAAAAAAAAZAAAAAEAAABAAAAAAAAAAAAAAAAAAAAAAAAAAAAAAAAAAAAAAAAAAAAAAAAAAAAAAAAAAAAAAAAAAAAAAAAAAAAAAAAAAAAAAAAAAAAAAAAAAAAAAAAAAAAAAAAAAAAAFAAAADwAAAAAAAAAAAAAAAAAAAkUAAAAAQAAABQAAAAUAAAAFAAAAAEAAAAAAAAAZAAAAGQAAAAAAAAAZAAAAGQAAAAVAAAAYAAAAAAAAAAAAAAADwAAACADAAAAAAAAAAAAAAEAAACgMgAAVgcAAKr4//8BAAAAf39/AAEAAABkAAAAAAAAABQAAABAHwAAAAAAACYAAAAAAAAAwOD//wAAAAAmAAAAZAAAABYAAABMAAAAAAAAAAAAAAAEAAAAAAAAAAEAAADn5uYKAAAAACgAAAAoAAAAZAAAAGQAAAAAAAAAzMzMAAAAAABQAAAAUAAAAGQAAABkAAAAAAAAABcAAAAUAAAAAAAAAAAAAAD/fwAA/38AAAAAAAAJAAAABAAAAAAAAAAeAAAAaAAAAAAAAAAAAAAAAAAAAAAAAAAAAAAAECcAABAnAAAAAAAAAAAAAAAAAAAAAAAAAAAAAAAAAAAAAAAAAAAAABQAAAAAAAAAwMD/AAAAAABkAAAAMgAAAAAAAABkAAAAAAAAAH9/fwAKAAAAIgAAABgAAAAAAAAAAAAAAAAAAAAAAAAAAAAAAAAAAAAkAAAAJAAAAAAAAAAHAAAAAAAAAAAAAAAAAAAAAAAAAAAAAAAAAAAAf39/ACUAAABYAAAAAAAAAAAAAAAAAAAAAAAAAAAAAAAAAAAAAAAAAAAAAAAAAAAAAAAAAAAAAAA/AAAAAAAAAKCGAQAAAAAAAAAAAAAAAAAMAAAAAQAAAAAAAAAAAAAAAAAAAB8AAABUAAAAAAAABQAAAAEAAAAAAAAAAAAAAAAAAAAAAAAAAAAAAAAAAAAAAAAAAAAAAAJ/f38AAAAAA8zMzADAwP8Af39/AAAAAAAAAAAAAAAAAAAAAAAAAAAAIQAAABgAAAAUAAAA2BgAABonAAAoMgAAWSkAABAAAAAmAAAACAAAAAAAAAAAAAAA"/>
               </a:ext>
             </a:extLst>
           </p:cNvSpPr>
@@ -2672,7 +2672,7 @@
             <a:spLocks noGrp="1" noChangeArrowheads="1"/>
             <a:extLst>
               <a:ext uri="smNativeData">
-                <pr:smNativeData xmlns="smNativeData" xmlns:pr="smNativeData" xmlns:p15="http://schemas.microsoft.com/office/powerpoint/2012/main" xmlns:p14="http://schemas.microsoft.com/office/powerpoint/2010/main" xmlns:mc="http://schemas.openxmlformats.org/markup-compatibility/2006" val="SMDATA_15_FLquaRMAAAAlAAAAZAAAAA0AAAAAkAAAAEgAAACQAAAASAAAAAAAAAABAAAAAAAAAAEAAABQAAAAAAAAAAAA4D8AAAAAAADgPwAAAAAAAOA/AAAAAAAA4D8AAAAAAADgPwAAAAAAAOA/AAAAAAAA4D8AAAAAAADgPwAAAAAAAOA/AAAAAAAA4D8CAAAAjAAAAAAAAAAAAAAAW5vVDP///wgAAAAAAAAAAAAAAAAAAAAAAAAAAAAAAAAAAAAAZAAAAAEAAABAAAAAAAAAAAAAAAAAAAAAAAAAAAAAAAAAAAAAAAAAAAAAAAAAAAAAAAAAAAAAAAAAAAAAAAAAAAAAAAAAAAAAAAAAAAAAAAAAAAAAAAAAAAAAAAAAAAAAFAAAADwAAAAAAAAAAAAAAAAAAAkUAAAAAQAAABQAAAAUAAAAFAAAAAEAAAAAAAAAZAAAAGQAAAAAAAAAZAAAAGQAAAAVAAAAYAAAAAAAAAAAAAAADwAAACADAAAAAAAAAAAAAAEAAACgMgAAVgcAAKr4//8BAAAAf39/AAEAAABkAAAAAAAAABQAAABAHwAAAAAAACYAAAAAAAAAwOD//wAAAAAmAAAAZAAAABYAAABMAAAAAAAAAAAAAAAEAAAAAAAAAAEAAADn5uYKAAAAACgAAAAoAAAAZAAAAGQAAAAAAAAAzMzMAAAAAABQAAAAUAAAAGQAAABkAAAAAAAAABcAAAAUAAAAAAAAAAAAAAD/fwAA/38AAAAAAAAJAAAABAAAAAAAAAAeAAAAaAAAAAAAAAAAAAAAAAAAAAAAAAAAAAAAECcAABAnAAAAAAAAAAAAAAAAAAAAAAAAAAAAAAAAAAAAAAAAAAAAABQAAAAAAAAAwMD/AAAAAABkAAAAMgAAAAAAAABkAAAAAAAAAH9/fwAKAAAAIgAAABgAAAAAAAAAAAAAAAAAAAAAAAAAAAAAAAAAAAAkAAAAJAAAAAAAAAAHAAAAAAAAAAAAAAAAAAAAAAAAAAAAAAAAAAAAf39/ACUAAABYAAAAAAAAAAAAAAAAAAAAAAAAAAAAAAAAAAAAAAAAAAAAAAAAAAAAAAAAAAAAAAA/AAAAAAAAAKCGAQAAAAAAAAAAAAAAAAAMAAAAAQAAAAAAAAAAAAAAAAAAAB8AAABUAAAAAAAABQAAAAEAAAAAAAAAAAAAAAAAAAAAAAAAAAAAAAAAAAAAAAAAAAAAAAJ/f38AAAAAA8zMzADAwP8Af39/AAAAAAAAAAAAAAAAAAAAAAAAAAAAIQAAABgAAAAUAAAA+DQAABonAADYRQAAWSkAABAAAAAmAAAACAAAAAAAAAAAAAAA"/>
+                <pr:smNativeData xmlns:mc="http://schemas.openxmlformats.org/markup-compatibility/2006" xmlns:p14="http://schemas.microsoft.com/office/powerpoint/2010/main" xmlns:p15="http://schemas.microsoft.com/office/powerpoint/2012/main" xmlns:pr="smNativeData" xmlns="smNativeData" val="SMDATA_15_FLquaRMAAAAlAAAAZAAAAA0AAAAAkAAAAEgAAACQAAAASAAAAAAAAAABAAAAAAAAAAEAAABQAAAAAAAAAAAA4D8AAAAAAADgPwAAAAAAAOA/AAAAAAAA4D8AAAAAAADgPwAAAAAAAOA/AAAAAAAA4D8AAAAAAADgPwAAAAAAAOA/AAAAAAAA4D8CAAAAjAAAAAAAAAAAAAAAW5vVDP///wgAAAAAAAAAAAAAAAAAAAAAAAAAAAAAAAAAAAAAZAAAAAEAAABAAAAAAAAAAAAAAAAAAAAAAAAAAAAAAAAAAAAAAAAAAAAAAAAAAAAAAAAAAAAAAAAAAAAAAAAAAAAAAAAAAAAAAAAAAAAAAAAAAAAAAAAAAAAAAAAAAAAAFAAAADwAAAAAAAAAAAAAAAAAAAkUAAAAAQAAABQAAAAUAAAAFAAAAAEAAAAAAAAAZAAAAGQAAAAAAAAAZAAAAGQAAAAVAAAAYAAAAAAAAAAAAAAADwAAACADAAAAAAAAAAAAAAEAAACgMgAAVgcAAKr4//8BAAAAf39/AAEAAABkAAAAAAAAABQAAABAHwAAAAAAACYAAAAAAAAAwOD//wAAAAAmAAAAZAAAABYAAABMAAAAAAAAAAAAAAAEAAAAAAAAAAEAAADn5uYKAAAAACgAAAAoAAAAZAAAAGQAAAAAAAAAzMzMAAAAAABQAAAAUAAAAGQAAABkAAAAAAAAABcAAAAUAAAAAAAAAAAAAAD/fwAA/38AAAAAAAAJAAAABAAAAAAAAAAeAAAAaAAAAAAAAAAAAAAAAAAAAAAAAAAAAAAAECcAABAnAAAAAAAAAAAAAAAAAAAAAAAAAAAAAAAAAAAAAAAAAAAAABQAAAAAAAAAwMD/AAAAAABkAAAAMgAAAAAAAABkAAAAAAAAAH9/fwAKAAAAIgAAABgAAAAAAAAAAAAAAAAAAAAAAAAAAAAAAAAAAAAkAAAAJAAAAAAAAAAHAAAAAAAAAAAAAAAAAAAAAAAAAAAAAAAAAAAAf39/ACUAAABYAAAAAAAAAAAAAAAAAAAAAAAAAAAAAAAAAAAAAAAAAAAAAAAAAAAAAAAAAAAAAAA/AAAAAAAAAKCGAQAAAAAAAAAAAAAAAAAMAAAAAQAAAAAAAAAAAAAAAAAAAB8AAABUAAAAAAAABQAAAAEAAAAAAAAAAAAAAAAAAAAAAAAAAAAAAAAAAAAAAAAAAAAAAAJ/f38AAAAAA8zMzADAwP8Af39/AAAAAAAAAAAAAAAAAAAAAAAAAAAAIQAAABgAAAAUAAAA+DQAABonAADYRQAAWSkAABAAAAAmAAAACAAAAAAAAAAAAAAA"/>
               </a:ext>
             </a:extLst>
           </p:cNvSpPr>
@@ -2728,7 +2728,7 @@
             <a:spLocks noGrp="1" noChangeArrowheads="1"/>
             <a:extLst>
               <a:ext uri="smNativeData">
-                <pr:smNativeData xmlns="smNativeData" xmlns:pr="smNativeData" xmlns:p15="http://schemas.microsoft.com/office/powerpoint/2012/main" xmlns:p14="http://schemas.microsoft.com/office/powerpoint/2010/main" xmlns:mc="http://schemas.openxmlformats.org/markup-compatibility/2006" val="SMDATA_15_FLquaRMAAAAlAAAAZAAAAA0AAAAAkAAAAEgAAACQAAAASAAAAAAAAAACAAAAAAAAAAEAAABQAAAAAAAAAAAA4D8AAAAAAADgPwAAAAAAAOA/AAAAAAAA4D8AAAAAAADgPwAAAAAAAOA/AAAAAAAA4D8AAAAAAADgPwAAAAAAAOA/AAAAAAAA4D8CAAAAjAAAAAAAAAAAAAAAW5vVDP///wgAAAAAAAAAAAAAAAAAAAAAAAAAAAAAAAAAAAAAZAAAAAEAAABAAAAAAAAAAAAAAAAAAAAAAAAAAAAAAAAAAAAAAAAAAAAAAAAAAAAAAAAAAAAAAAAAAAAAAAAAAAAAAAAAAAAAAAAAAAAAAAAAAAAAAAAAAAAAAAAAAAAAFAAAADwAAAAAAAAAAAAAAAAAAAkUAAAAAQAAABQAAAAUAAAAFAAAAAEAAAAAAAAAZAAAAGQAAAAAAAAAZAAAAGQAAAAVAAAAYAAAAAAAAAAAAAAADwAAACADAAAAAAAAAAAAAAEAAACgMgAAVgcAAKr4//8BAAAAf39/AAEAAABkAAAAAAAAABQAAABAHwAAAAAAACYAAAAAAAAAwOD//wAAAAAmAAAAZAAAABYAAABMAAAAAAAAAAAAAAAEAAAAAAAAAAEAAADn5uYKAAAAACgAAAAoAAAAZAAAAGQAAAAAAAAAzMzMAAAAAABQAAAAUAAAAGQAAABkAAAAAAAAABcAAAAUAAAAAAAAAAAAAAD/fwAA/38AAAAAAAAJAAAABAAAAAAAAAAeAAAAaAAAAAAAAAAAAAAAAAAAAAAAAAAAAAAAECcAABAnAAAAAAAAAAAAAAAAAAAAAAAAAAAAAAAAAAAAAAAAAAAAABQAAAAAAAAAwMD/AAAAAABkAAAAMgAAAAAAAABkAAAAAAAAAH9/fwAKAAAAIgAAABgAAAAAAAAAAAAAAAAAAAAAAAAAAAAAAAAAAAAkAAAAJAAAAAAAAAAHAAAAAAAAAAAAAAAAAAAAAAAAAAAAAAAAAAAAf39/ACUAAABYAAAAAAAAAAAAAAAAAAAAAAAAAAAAAAAAAAAAAAAAAAAAAAAAAAAAAAAAAAAAAAA/AAAAAAAAAKCGAQAAAAAAAAAAAAAAAAAMAAAAAQAAAAAAAAAAAAAAAAAAAB8AAABUAAAAAAAABQAAAAEAAAAAAAAAAAAAAAAAAAAAAAAAAAAAAAAAAAAAAAAAAAAAAAJ/f38AAAAAA8zMzADAwP8Af39/AAAAAAAAAAAAAAAAAAAAAAAAAAAAIQAAABgAAAAUAAAAKwUAANACAABbHQAAqAwAABAAAAAmAAAACAAAAIGAAAAAAAAA"/>
+                <pr:smNativeData xmlns:mc="http://schemas.openxmlformats.org/markup-compatibility/2006" xmlns:p14="http://schemas.microsoft.com/office/powerpoint/2010/main" xmlns:p15="http://schemas.microsoft.com/office/powerpoint/2012/main" xmlns:pr="smNativeData" xmlns="smNativeData" val="SMDATA_15_FLquaRMAAAAlAAAAZAAAAA0AAAAAkAAAAEgAAACQAAAASAAAAAAAAAACAAAAAAAAAAEAAABQAAAAAAAAAAAA4D8AAAAAAADgPwAAAAAAAOA/AAAAAAAA4D8AAAAAAADgPwAAAAAAAOA/AAAAAAAA4D8AAAAAAADgPwAAAAAAAOA/AAAAAAAA4D8CAAAAjAAAAAAAAAAAAAAAW5vVDP///wgAAAAAAAAAAAAAAAAAAAAAAAAAAAAAAAAAAAAAZAAAAAEAAABAAAAAAAAAAAAAAAAAAAAAAAAAAAAAAAAAAAAAAAAAAAAAAAAAAAAAAAAAAAAAAAAAAAAAAAAAAAAAAAAAAAAAAAAAAAAAAAAAAAAAAAAAAAAAAAAAAAAAFAAAADwAAAAAAAAAAAAAAAAAAAkUAAAAAQAAABQAAAAUAAAAFAAAAAEAAAAAAAAAZAAAAGQAAAAAAAAAZAAAAGQAAAAVAAAAYAAAAAAAAAAAAAAADwAAACADAAAAAAAAAAAAAAEAAACgMgAAVgcAAKr4//8BAAAAf39/AAEAAABkAAAAAAAAABQAAABAHwAAAAAAACYAAAAAAAAAwOD//wAAAAAmAAAAZAAAABYAAABMAAAAAAAAAAAAAAAEAAAAAAAAAAEAAADn5uYKAAAAACgAAAAoAAAAZAAAAGQAAAAAAAAAzMzMAAAAAABQAAAAUAAAAGQAAABkAAAAAAAAABcAAAAUAAAAAAAAAAAAAAD/fwAA/38AAAAAAAAJAAAABAAAAAAAAAAeAAAAaAAAAAAAAAAAAAAAAAAAAAAAAAAAAAAAECcAABAnAAAAAAAAAAAAAAAAAAAAAAAAAAAAAAAAAAAAAAAAAAAAABQAAAAAAAAAwMD/AAAAAABkAAAAMgAAAAAAAABkAAAAAAAAAH9/fwAKAAAAIgAAABgAAAAAAAAAAAAAAAAAAAAAAAAAAAAAAAAAAAAkAAAAJAAAAAAAAAAHAAAAAAAAAAAAAAAAAAAAAAAAAAAAAAAAAAAAf39/ACUAAABYAAAAAAAAAAAAAAAAAAAAAAAAAAAAAAAAAAAAAAAAAAAAAAAAAAAAAAAAAAAAAAA/AAAAAAAAAKCGAQAAAAAAAAAAAAAAAAAMAAAAAQAAAAAAAAAAAAAAAAAAAB8AAABUAAAAAAAABQAAAAEAAAAAAAAAAAAAAAAAAAAAAAAAAAAAAAAAAAAAAAAAAAAAAAJ/f38AAAAAA8zMzADAwP8Af39/AAAAAAAAAAAAAAAAAAAAAAAAAAAAIQAAABgAAAAUAAAAKwUAANACAABbHQAAqAwAABAAAAAmAAAACAAAAIGAAAAAAAAA"/>
               </a:ext>
             </a:extLst>
           </p:cNvSpPr>
@@ -2794,7 +2794,7 @@
             <a:spLocks noGrp="1" noChangeArrowheads="1"/>
             <a:extLst>
               <a:ext uri="smNativeData">
-                <pr:smNativeData xmlns="smNativeData" xmlns:pr="smNativeData" xmlns:p15="http://schemas.microsoft.com/office/powerpoint/2012/main" xmlns:p14="http://schemas.microsoft.com/office/powerpoint/2010/main" xmlns:mc="http://schemas.openxmlformats.org/markup-compatibility/2006" val="SMDATA_15_FLquaRMAAAAlAAAAZAAAAA0AAAAAkAAAAEgAAACQAAAASAAAAAAAAAAAAAAAAAAAAAEAAABQAAAAAAAAAAAA4D8AAAAAAADgPwAAAAAAAOA/AAAAAAAA4D8AAAAAAADgPwAAAAAAAOA/AAAAAAAA4D8AAAAAAADgPwAAAAAAAOA/AAAAAAAA4D8CAAAAjAAAAAAAAAAAAAAAW5vVDP///wgAAAAAAAAAAAAAAAAAAAAAAAAAAAAAAAAAAAAAZAAAAAEAAABAAAAAAAAAAAAAAAAAAAAAAAAAAAAAAAAAAAAAAAAAAAAAAAAAAAAAAAAAAAAAAAAAAAAAAAAAAAAAAAAAAAAAAAAAAAAAAAAAAAAAAAAAAAAAAAAAAAAAFAAAADwAAAAAAAAAAAAAAAAAAAkUAAAAAQAAABQAAAAUAAAAFAAAAAEAAAAAAAAAZAAAAGQAAAAAAAAAZAAAAGQAAAAVAAAAYAAAAAAAAAAAAAAADwAAACADAAAAAAAAAAAAAAEAAACgMgAAVgcAAKr4//8BAAAAf39/AAEAAABkAAAAAAAAABQAAABAHwAAAAAAACYAAAAAAAAAwOD//wAAAAAmAAAAZAAAABYAAABMAAAAAAAAAAAAAAAEAAAAAAAAAAEAAADn5uYKAAAAACgAAAAoAAAAZAAAAGQAAAAAAAAAzMzMAAAAAABQAAAAUAAAAGQAAABkAAAAAAAAABcAAAAUAAAAAAAAAAAAAAD/fwAA/38AAAAAAAAJAAAABAAAAAAAAAAeAAAAaAAAAAAAAAAAAAAAAAAAAAAAAAAAAAAAECcAABAnAAAAAAAAAAAAAAAAAAAAAAAAAAAAAAAAAAAAAAAAAAAAABQAAAAAAAAAwMD/AAAAAABkAAAAMgAAAAAAAABkAAAAAAAAAH9/fwAKAAAAIgAAABgAAAAAAAAAAAAAAAAAAAAAAAAAAAAAAAAAAAAkAAAAJAAAAAAAAAAHAAAAAAAAAAAAAAAAAAAAAAAAAAAAAAAAAAAAf39/ACUAAABYAAAAAAAAAAAAAAAAAAAAAAAAAAAAAAAAAAAAAAAAAAAAAAAAAAAAAAAAAAAAAAA/AAAAAAAAAKCGAQAAAAAAAAAAAAAAAAAMAAAAAQAAAAAAAAAAAAAAAAAAAB8AAABUAAAAAAAABQAAAAEAAAAAAAAAAAAAAAAAAAAAAAAAAAAAAAAAAAAAAAAAAAAAAAJ/f38AAAAAA8zMzADAwP8Af39/AAAAAAAAAAAAAAAAAAAAAAAAAAAAIQAAABgAAAAUAAAA4x8AABMGAADbRQAADiQAABAAAAAmAAAACAAAAAGAAAAAAAAA"/>
+                <pr:smNativeData xmlns:mc="http://schemas.openxmlformats.org/markup-compatibility/2006" xmlns:p14="http://schemas.microsoft.com/office/powerpoint/2010/main" xmlns:p15="http://schemas.microsoft.com/office/powerpoint/2012/main" xmlns:pr="smNativeData" xmlns="smNativeData" val="SMDATA_15_FLquaRMAAAAlAAAAZAAAAA0AAAAAkAAAAEgAAACQAAAASAAAAAAAAAAAAAAAAAAAAAEAAABQAAAAAAAAAAAA4D8AAAAAAADgPwAAAAAAAOA/AAAAAAAA4D8AAAAAAADgPwAAAAAAAOA/AAAAAAAA4D8AAAAAAADgPwAAAAAAAOA/AAAAAAAA4D8CAAAAjAAAAAAAAAAAAAAAW5vVDP///wgAAAAAAAAAAAAAAAAAAAAAAAAAAAAAAAAAAAAAZAAAAAEAAABAAAAAAAAAAAAAAAAAAAAAAAAAAAAAAAAAAAAAAAAAAAAAAAAAAAAAAAAAAAAAAAAAAAAAAAAAAAAAAAAAAAAAAAAAAAAAAAAAAAAAAAAAAAAAAAAAAAAAFAAAADwAAAAAAAAAAAAAAAAAAAkUAAAAAQAAABQAAAAUAAAAFAAAAAEAAAAAAAAAZAAAAGQAAAAAAAAAZAAAAGQAAAAVAAAAYAAAAAAAAAAAAAAADwAAACADAAAAAAAAAAAAAAEAAACgMgAAVgcAAKr4//8BAAAAf39/AAEAAABkAAAAAAAAABQAAABAHwAAAAAAACYAAAAAAAAAwOD//wAAAAAmAAAAZAAAABYAAABMAAAAAAAAAAAAAAAEAAAAAAAAAAEAAADn5uYKAAAAACgAAAAoAAAAZAAAAGQAAAAAAAAAzMzMAAAAAABQAAAAUAAAAGQAAABkAAAAAAAAABcAAAAUAAAAAAAAAAAAAAD/fwAA/38AAAAAAAAJAAAABAAAAAAAAAAeAAAAaAAAAAAAAAAAAAAAAAAAAAAAAAAAAAAAECcAABAnAAAAAAAAAAAAAAAAAAAAAAAAAAAAAAAAAAAAAAAAAAAAABQAAAAAAAAAwMD/AAAAAABkAAAAMgAAAAAAAABkAAAAAAAAAH9/fwAKAAAAIgAAABgAAAAAAAAAAAAAAAAAAAAAAAAAAAAAAAAAAAAkAAAAJAAAAAAAAAAHAAAAAAAAAAAAAAAAAAAAAAAAAAAAAAAAAAAAf39/ACUAAABYAAAAAAAAAAAAAAAAAAAAAAAAAAAAAAAAAAAAAAAAAAAAAAAAAAAAAAAAAAAAAAA/AAAAAAAAAKCGAQAAAAAAAAAAAAAAAAAMAAAAAQAAAAAAAAAAAAAAAAAAAB8AAABUAAAAAAAABQAAAAEAAAAAAAAAAAAAAAAAAAAAAAAAAAAAAAAAAAAAAAAAAAAAAAJ/f38AAAAAA8zMzADAwP8Af39/AAAAAAAAAAAAAAAAAAAAAAAAAAAAIQAAABgAAAAUAAAA4x8AABMGAADbRQAADiQAABAAAAAmAAAACAAAAAGAAAAAAAAA"/>
               </a:ext>
             </a:extLst>
           </p:cNvSpPr>
@@ -2863,7 +2863,7 @@
             <a:spLocks noGrp="1" noChangeArrowheads="1"/>
             <a:extLst>
               <a:ext uri="smNativeData">
-                <pr:smNativeData xmlns="smNativeData" xmlns:pr="smNativeData" xmlns:p15="http://schemas.microsoft.com/office/powerpoint/2012/main" xmlns:p14="http://schemas.microsoft.com/office/powerpoint/2010/main" xmlns:mc="http://schemas.openxmlformats.org/markup-compatibility/2006" val="SMDATA_15_FLquaRMAAAAlAAAAZAAAAA0AAAAAkAAAAEgAAACQAAAASAAAAAAAAAAAAAAAAAAAAAEAAABQAAAAAAAAAAAA4D8AAAAAAADgPwAAAAAAAOA/AAAAAAAA4D8AAAAAAADgPwAAAAAAAOA/AAAAAAAA4D8AAAAAAADgPwAAAAAAAOA/AAAAAAAA4D8CAAAAjAAAAAAAAAAAAAAAW5vVDP///wgAAAAAAAAAAAAAAAAAAAAAAAAAAAAAAAAAAAAAZAAAAAEAAABAAAAAAAAAAAAAAAAAAAAAAAAAAAAAAAAAAAAAAAAAAAAAAAAAAAAAAAAAAAAAAAAAAAAAAAAAAAAAAAAAAAAAAAAAAAAAAAAAAAAAAAAAAAAAAAAAAAAAFAAAADwAAAAAAAAAAAAAAAAAAAkUAAAAAQAAABQAAAAUAAAAFAAAAAEAAAAAAAAAZAAAAGQAAAAAAAAAZAAAAGQAAAAVAAAAYAAAAAAAAAAAAAAADwAAACADAAAAAAAAAAAAAAEAAACgMgAAVgcAAKr4//8BAAAAf39/AAEAAABkAAAAAAAAABQAAABAHwAAAAAAACYAAAAAAAAAwOD//wAAAAAmAAAAZAAAABYAAABMAAAAAAAAAAAAAAAEAAAAAAAAAAEAAADn5uYKAAAAACgAAAAoAAAAZAAAAGQAAAAAAAAAzMzMAAAAAABQAAAAUAAAAGQAAABkAAAAAAAAABcAAAAUAAAAAAAAAAAAAAD/fwAA/38AAAAAAAAJAAAABAAAAAAAAAAeAAAAaAAAAAAAAAAAAAAAAAAAAAAAAAAAAAAAECcAABAnAAAAAAAAAAAAAAAAAAAAAAAAAAAAAAAAAAAAAAAAAAAAABQAAAAAAAAAwMD/AAAAAABkAAAAMgAAAAAAAABkAAAAAAAAAH9/fwAKAAAAIgAAABgAAAAAAAAAAAAAAAAAAAAAAAAAAAAAAAAAAAAkAAAAJAAAAAAAAAAHAAAAAAAAAAAAAAAAAAAAAAAAAAAAAAAAAAAAf39/ACUAAABYAAAAAAAAAAAAAAAAAAAAAAAAAAAAAAAAAAAAAAAAAAAAAAAAAAAAAAAAAAAAAAA/AAAAAAAAAKCGAQAAAAAAAAAAAAAAAAAMAAAAAQAAAAAAAAAAAAAAAAAAAB8AAABUAAAAAAAABQAAAAEAAAAAAAAAAAAAAAAAAAAAAAAAAAAAAAAAAAAAAAAAAAAAAAJ/f38AAAAAA8zMzADAwP8Af39/AAAAAAAAAAAAAAAAAAAAAAAAAAAAIQAAABgAAAAUAAAAKwUAAKgMAABbHQAAGyQAABAAAAAmAAAACAAAAAGAAAAAAAAA"/>
+                <pr:smNativeData xmlns:mc="http://schemas.openxmlformats.org/markup-compatibility/2006" xmlns:p14="http://schemas.microsoft.com/office/powerpoint/2010/main" xmlns:p15="http://schemas.microsoft.com/office/powerpoint/2012/main" xmlns:pr="smNativeData" xmlns="smNativeData" val="SMDATA_15_FLquaRMAAAAlAAAAZAAAAA0AAAAAkAAAAEgAAACQAAAASAAAAAAAAAAAAAAAAAAAAAEAAABQAAAAAAAAAAAA4D8AAAAAAADgPwAAAAAAAOA/AAAAAAAA4D8AAAAAAADgPwAAAAAAAOA/AAAAAAAA4D8AAAAAAADgPwAAAAAAAOA/AAAAAAAA4D8CAAAAjAAAAAAAAAAAAAAAW5vVDP///wgAAAAAAAAAAAAAAAAAAAAAAAAAAAAAAAAAAAAAZAAAAAEAAABAAAAAAAAAAAAAAAAAAAAAAAAAAAAAAAAAAAAAAAAAAAAAAAAAAAAAAAAAAAAAAAAAAAAAAAAAAAAAAAAAAAAAAAAAAAAAAAAAAAAAAAAAAAAAAAAAAAAAFAAAADwAAAAAAAAAAAAAAAAAAAkUAAAAAQAAABQAAAAUAAAAFAAAAAEAAAAAAAAAZAAAAGQAAAAAAAAAZAAAAGQAAAAVAAAAYAAAAAAAAAAAAAAADwAAACADAAAAAAAAAAAAAAEAAACgMgAAVgcAAKr4//8BAAAAf39/AAEAAABkAAAAAAAAABQAAABAHwAAAAAAACYAAAAAAAAAwOD//wAAAAAmAAAAZAAAABYAAABMAAAAAAAAAAAAAAAEAAAAAAAAAAEAAADn5uYKAAAAACgAAAAoAAAAZAAAAGQAAAAAAAAAzMzMAAAAAABQAAAAUAAAAGQAAABkAAAAAAAAABcAAAAUAAAAAAAAAAAAAAD/fwAA/38AAAAAAAAJAAAABAAAAAAAAAAeAAAAaAAAAAAAAAAAAAAAAAAAAAAAAAAAAAAAECcAABAnAAAAAAAAAAAAAAAAAAAAAAAAAAAAAAAAAAAAAAAAAAAAABQAAAAAAAAAwMD/AAAAAABkAAAAMgAAAAAAAABkAAAAAAAAAH9/fwAKAAAAIgAAABgAAAAAAAAAAAAAAAAAAAAAAAAAAAAAAAAAAAAkAAAAJAAAAAAAAAAHAAAAAAAAAAAAAAAAAAAAAAAAAAAAAAAAAAAAf39/ACUAAABYAAAAAAAAAAAAAAAAAAAAAAAAAAAAAAAAAAAAAAAAAAAAAAAAAAAAAAAAAAAAAAA/AAAAAAAAAKCGAQAAAAAAAAAAAAAAAAAMAAAAAQAAAAAAAAAAAAAAAAAAAB8AAABUAAAAAAAABQAAAAEAAAAAAAAAAAAAAAAAAAAAAAAAAAAAAAAAAAAAAAAAAAAAAAJ/f38AAAAAA8zMzADAwP8Af39/AAAAAAAAAAAAAAAAAAAAAAAAAAAAIQAAABgAAAAUAAAAKwUAAKgMAABbHQAAGyQAABAAAAAmAAAACAAAAAGAAAAAAAAA"/>
               </a:ext>
             </a:extLst>
           </p:cNvSpPr>
@@ -2934,7 +2934,7 @@
             <a:spLocks noGrp="1" noChangeArrowheads="1"/>
             <a:extLst>
               <a:ext uri="smNativeData">
-                <pr:smNativeData xmlns="smNativeData" xmlns:pr="smNativeData" xmlns:p15="http://schemas.microsoft.com/office/powerpoint/2012/main" xmlns:p14="http://schemas.microsoft.com/office/powerpoint/2010/main" xmlns:mc="http://schemas.openxmlformats.org/markup-compatibility/2006" val="SMDATA_15_FLquaRMAAAAlAAAAZAAAAA0AAAAAkAAAAEgAAACQAAAASAAAAAAAAAABAAAAAAAAAAEAAABQAAAAAAAAAAAA4D8AAAAAAADgPwAAAAAAAOA/AAAAAAAA4D8AAAAAAADgPwAAAAAAAOA/AAAAAAAA4D8AAAAAAADgPwAAAAAAAOA/AAAAAAAA4D8CAAAAjAAAAAAAAAAAAAAAW5vVDP///wgAAAAAAAAAAAAAAAAAAAAAAAAAAAAAAAAAAAAAZAAAAAEAAABAAAAAAAAAAAAAAAAAAAAAAAAAAAAAAAAAAAAAAAAAAAAAAAAAAAAAAAAAAAAAAAAAAAAAAAAAAAAAAAAAAAAAAAAAAAAAAAAAAAAAAAAAAAAAAAAAAAAAFAAAADwAAAAAAAAAAAAAAAAAAAkUAAAAAQAAABQAAAAUAAAAFAAAAAEAAAAAAAAAZAAAAGQAAAAAAAAAZAAAAGQAAAAVAAAAYAAAAAAAAAAAAAAADwAAACADAAAAAAAAAAAAAAEAAACgMgAAVgcAAKr4//8BAAAAf39/AAEAAABkAAAAAAAAABQAAABAHwAAAAAAACYAAAAAAAAAwOD//wAAAAAmAAAAZAAAABYAAABMAAAAAAAAAAAAAAAEAAAAAAAAAAEAAADn5uYKAAAAACgAAAAoAAAAZAAAAGQAAAAAAAAAzMzMAAAAAABQAAAAUAAAAGQAAABkAAAAAAAAABcAAAAUAAAAAAAAAAAAAAD/fwAA/38AAAAAAAAJAAAABAAAAAAAAAAeAAAAaAAAAAAAAAAAAAAAAAAAAAAAAAAAAAAAECcAABAnAAAAAAAAAAAAAAAAAAAAAAAAAAAAAAAAAAAAAAAAAAAAABQAAAAAAAAAwMD/AAAAAABkAAAAMgAAAAAAAABkAAAAAAAAAH9/fwAKAAAAIgAAABgAAAAAAAAAAAAAAAAAAAAAAAAAAAAAAAAAAAAkAAAAJAAAAAAAAAAHAAAAAAAAAAAAAAAAAAAAAAAAAAAAAAAAAAAAf39/ACUAAABYAAAAAAAAAAAAAAAAAAAAAAAAAAAAAAAAAAAAAAAAAAAAAAAAAAAAAAAAAAAAAAA/AAAAAAAAAKCGAQAAAAAAAAAAAAAAAAAMAAAAAQAAAAAAAAAAAAAAAAAAAB8AAABUAAAAAAAABQAAAAEAAAAAAAAAAAAAAAAAAAAAAAAAAAAAAAAAAAAAAAAAAAAAAAJ/f38AAAAAA8zMzADAwP8Af39/AAAAAAAAAAAAAAAAAAAAAAAAAAAAIQAAABgAAAAUAAAAKAUAABonAAAIFgAAWSkAABAAAAAmAAAACAAAAAAAAAAAAAAA"/>
+                <pr:smNativeData xmlns:mc="http://schemas.openxmlformats.org/markup-compatibility/2006" xmlns:p14="http://schemas.microsoft.com/office/powerpoint/2010/main" xmlns:p15="http://schemas.microsoft.com/office/powerpoint/2012/main" xmlns:pr="smNativeData" xmlns="smNativeData" val="SMDATA_15_FLquaRMAAAAlAAAAZAAAAA0AAAAAkAAAAEgAAACQAAAASAAAAAAAAAABAAAAAAAAAAEAAABQAAAAAAAAAAAA4D8AAAAAAADgPwAAAAAAAOA/AAAAAAAA4D8AAAAAAADgPwAAAAAAAOA/AAAAAAAA4D8AAAAAAADgPwAAAAAAAOA/AAAAAAAA4D8CAAAAjAAAAAAAAAAAAAAAW5vVDP///wgAAAAAAAAAAAAAAAAAAAAAAAAAAAAAAAAAAAAAZAAAAAEAAABAAAAAAAAAAAAAAAAAAAAAAAAAAAAAAAAAAAAAAAAAAAAAAAAAAAAAAAAAAAAAAAAAAAAAAAAAAAAAAAAAAAAAAAAAAAAAAAAAAAAAAAAAAAAAAAAAAAAAFAAAADwAAAAAAAAAAAAAAAAAAAkUAAAAAQAAABQAAAAUAAAAFAAAAAEAAAAAAAAAZAAAAGQAAAAAAAAAZAAAAGQAAAAVAAAAYAAAAAAAAAAAAAAADwAAACADAAAAAAAAAAAAAAEAAACgMgAAVgcAAKr4//8BAAAAf39/AAEAAABkAAAAAAAAABQAAABAHwAAAAAAACYAAAAAAAAAwOD//wAAAAAmAAAAZAAAABYAAABMAAAAAAAAAAAAAAAEAAAAAAAAAAEAAADn5uYKAAAAACgAAAAoAAAAZAAAAGQAAAAAAAAAzMzMAAAAAABQAAAAUAAAAGQAAABkAAAAAAAAABcAAAAUAAAAAAAAAAAAAAD/fwAA/38AAAAAAAAJAAAABAAAAAAAAAAeAAAAaAAAAAAAAAAAAAAAAAAAAAAAAAAAAAAAECcAABAnAAAAAAAAAAAAAAAAAAAAAAAAAAAAAAAAAAAAAAAAAAAAABQAAAAAAAAAwMD/AAAAAABkAAAAMgAAAAAAAABkAAAAAAAAAH9/fwAKAAAAIgAAABgAAAAAAAAAAAAAAAAAAAAAAAAAAAAAAAAAAAAkAAAAJAAAAAAAAAAHAAAAAAAAAAAAAAAAAAAAAAAAAAAAAAAAAAAAf39/ACUAAABYAAAAAAAAAAAAAAAAAAAAAAAAAAAAAAAAAAAAAAAAAAAAAAAAAAAAAAAAAAAAAAA/AAAAAAAAAKCGAQAAAAAAAAAAAAAAAAAMAAAAAQAAAAAAAAAAAAAAAAAAAB8AAABUAAAAAAAABQAAAAEAAAAAAAAAAAAAAAAAAAAAAAAAAAAAAAAAAAAAAAAAAAAAAAJ/f38AAAAAA8zMzADAwP8Af39/AAAAAAAAAAAAAAAAAAAAAAAAAAAAIQAAABgAAAAUAAAAKAUAABonAAAIFgAAWSkAABAAAAAmAAAACAAAAAAAAAAAAAAA"/>
               </a:ext>
             </a:extLst>
           </p:cNvSpPr>
@@ -2951,7 +2951,7 @@
               <a:defRPr lang="en-US"/>
             </a:pPr>
             <a:fld id="{30AED7AD-E3DD-FB21-9316-157499586540}" type="datetime1">
-              <a:t>4/21/2026</a:t>
+              <a:t>6/3/2026</a:t>
             </a:fld>
             <a:endParaRPr/>
           </a:p>
@@ -2964,7 +2964,7 @@
             <a:spLocks noGrp="1" noChangeArrowheads="1"/>
             <a:extLst>
               <a:ext uri="smNativeData">
-                <pr:smNativeData xmlns="smNativeData" xmlns:pr="smNativeData" xmlns:p15="http://schemas.microsoft.com/office/powerpoint/2012/main" xmlns:p14="http://schemas.microsoft.com/office/powerpoint/2010/main" xmlns:mc="http://schemas.openxmlformats.org/markup-compatibility/2006" val="SMDATA_15_FLquaRMAAAAlAAAAZAAAAA0AAAAAkAAAAEgAAACQAAAASAAAAAAAAAABAAAAAAAAAAEAAABQAAAAAAAAAAAA4D8AAAAAAADgPwAAAAAAAOA/AAAAAAAA4D8AAAAAAADgPwAAAAAAAOA/AAAAAAAA4D8AAAAAAADgPwAAAAAAAOA/AAAAAAAA4D8CAAAAjAAAAAAAAAAAAAAAW5vVDP///wgAAAAAAAAAAAAAAAAAAAAAAAAAAAAAAAAAAAAAZAAAAAEAAABAAAAAAAAAAAAAAAAAAAAAAAAAAAAAAAAAAAAAAAAAAAAAAAAAAAAAAAAAAAAAAAAAAAAAAAAAAAAAAAAAAAAAAAAAAAAAAAAAAAAAAAAAAAAAAAAAAAAAFAAAADwAAAAAAAAAAAAAAAAAAAkUAAAAAQAAABQAAAAUAAAAFAAAAAEAAAAAAAAAZAAAAGQAAAAAAAAAZAAAAGQAAAAVAAAAYAAAAAAAAAAAAAAADwAAACADAAAAAAAAAAAAAAEAAACgMgAAVgcAAKr4//8BAAAAf39/AAEAAABkAAAAAAAAABQAAABAHwAAAAAAACYAAAAAAAAAwOD//wAAAAAmAAAAZAAAABYAAABMAAAAAAAAAAAAAAAEAAAAAAAAAAEAAADn5uYKAAAAACgAAAAoAAAAZAAAAGQAAAAAAAAAzMzMAAAAAABQAAAAUAAAAGQAAABkAAAAAAAAABcAAAAUAAAAAAAAAAAAAAD/fwAA/38AAAAAAAAJAAAABAAAAAAAAAAeAAAAaAAAAAAAAAAAAAAAAAAAAAAAAAAAAAAAECcAABAnAAAAAAAAAAAAAAAAAAAAAAAAAAAAAAAAAAAAAAAAAAAAABQAAAAAAAAAwMD/AAAAAABkAAAAMgAAAAAAAABkAAAAAAAAAH9/fwAKAAAAIgAAABgAAAAAAAAAAAAAAAAAAAAAAAAAAAAAAAAAAAAkAAAAJAAAAAAAAAAHAAAAAAAAAAAAAAAAAAAAAAAAAAAAAAAAAAAAf39/ACUAAABYAAAAAAAAAAAAAAAAAAAAAAAAAAAAAAAAAAAAAAAAAAAAAAAAAAAAAAAAAAAAAAA/AAAAAAAAAKCGAQAAAAAAAAAAAAAAAAAMAAAAAQAAAAAAAAAAAAAAAAAAAB8AAABUAAAAAAAABQAAAAEAAAAAAAAAAAAAAAAAAAAAAAAAAAAAAAAAAAAAAAAAAAAAAAJ/f38AAAAAA8zMzADAwP8Af39/AAAAAAAAAAAAAAAAAAAAAAAAAAAAIQAAABgAAAAUAAAA2BgAABonAAAoMgAAWSkAABAAAAAmAAAACAAAAAAAAAAAAAAA"/>
+                <pr:smNativeData xmlns:mc="http://schemas.openxmlformats.org/markup-compatibility/2006" xmlns:p14="http://schemas.microsoft.com/office/powerpoint/2010/main" xmlns:p15="http://schemas.microsoft.com/office/powerpoint/2012/main" xmlns:pr="smNativeData" xmlns="smNativeData" val="SMDATA_15_FLquaRMAAAAlAAAAZAAAAA0AAAAAkAAAAEgAAACQAAAASAAAAAAAAAABAAAAAAAAAAEAAABQAAAAAAAAAAAA4D8AAAAAAADgPwAAAAAAAOA/AAAAAAAA4D8AAAAAAADgPwAAAAAAAOA/AAAAAAAA4D8AAAAAAADgPwAAAAAAAOA/AAAAAAAA4D8CAAAAjAAAAAAAAAAAAAAAW5vVDP///wgAAAAAAAAAAAAAAAAAAAAAAAAAAAAAAAAAAAAAZAAAAAEAAABAAAAAAAAAAAAAAAAAAAAAAAAAAAAAAAAAAAAAAAAAAAAAAAAAAAAAAAAAAAAAAAAAAAAAAAAAAAAAAAAAAAAAAAAAAAAAAAAAAAAAAAAAAAAAAAAAAAAAFAAAADwAAAAAAAAAAAAAAAAAAAkUAAAAAQAAABQAAAAUAAAAFAAAAAEAAAAAAAAAZAAAAGQAAAAAAAAAZAAAAGQAAAAVAAAAYAAAAAAAAAAAAAAADwAAACADAAAAAAAAAAAAAAEAAACgMgAAVgcAAKr4//8BAAAAf39/AAEAAABkAAAAAAAAABQAAABAHwAAAAAAACYAAAAAAAAAwOD//wAAAAAmAAAAZAAAABYAAABMAAAAAAAAAAAAAAAEAAAAAAAAAAEAAADn5uYKAAAAACgAAAAoAAAAZAAAAGQAAAAAAAAAzMzMAAAAAABQAAAAUAAAAGQAAABkAAAAAAAAABcAAAAUAAAAAAAAAAAAAAD/fwAA/38AAAAAAAAJAAAABAAAAAAAAAAeAAAAaAAAAAAAAAAAAAAAAAAAAAAAAAAAAAAAECcAABAnAAAAAAAAAAAAAAAAAAAAAAAAAAAAAAAAAAAAAAAAAAAAABQAAAAAAAAAwMD/AAAAAABkAAAAMgAAAAAAAABkAAAAAAAAAH9/fwAKAAAAIgAAABgAAAAAAAAAAAAAAAAAAAAAAAAAAAAAAAAAAAAkAAAAJAAAAAAAAAAHAAAAAAAAAAAAAAAAAAAAAAAAAAAAAAAAAAAAf39/ACUAAABYAAAAAAAAAAAAAAAAAAAAAAAAAAAAAAAAAAAAAAAAAAAAAAAAAAAAAAAAAAAAAAA/AAAAAAAAAKCGAQAAAAAAAAAAAAAAAAAMAAAAAQAAAAAAAAAAAAAAAAAAAB8AAABUAAAAAAAABQAAAAEAAAAAAAAAAAAAAAAAAAAAAAAAAAAAAAAAAAAAAAAAAAAAAAJ/f38AAAAAA8zMzADAwP8Af39/AAAAAAAAAAAAAAAAAAAAAAAAAAAAIQAAABgAAAAUAAAA2BgAABonAAAoMgAAWSkAABAAAAAmAAAACAAAAAAAAAAAAAAA"/>
               </a:ext>
             </a:extLst>
           </p:cNvSpPr>
@@ -2991,7 +2991,7 @@
             <a:spLocks noGrp="1" noChangeArrowheads="1"/>
             <a:extLst>
               <a:ext uri="smNativeData">
-                <pr:smNativeData xmlns="smNativeData" xmlns:pr="smNativeData" xmlns:p15="http://schemas.microsoft.com/office/powerpoint/2012/main" xmlns:p14="http://schemas.microsoft.com/office/powerpoint/2010/main" xmlns:mc="http://schemas.openxmlformats.org/markup-compatibility/2006" val="SMDATA_15_FLquaRMAAAAlAAAAZAAAAA0AAAAAkAAAAEgAAACQAAAASAAAAAAAAAABAAAAAAAAAAEAAABQAAAAAAAAAAAA4D8AAAAAAADgPwAAAAAAAOA/AAAAAAAA4D8AAAAAAADgPwAAAAAAAOA/AAAAAAAA4D8AAAAAAADgPwAAAAAAAOA/AAAAAAAA4D8CAAAAjAAAAAAAAAAAAAAAW5vVDP///wgAAAAAAAAAAAAAAAAAAAAAAAAAAAAAAAAAAAAAZAAAAAEAAABAAAAAAAAAAAAAAAAAAAAAAAAAAAAAAAAAAAAAAAAAAAAAAAAAAAAAAAAAAAAAAAAAAAAAAAAAAAAAAAAAAAAAAAAAAAAAAAAAAAAAAAAAAAAAAAAAAAAAFAAAADwAAAAAAAAAAAAAAAAAAAkUAAAAAQAAABQAAAAUAAAAFAAAAAEAAAAAAAAAZAAAAGQAAAAAAAAAZAAAAGQAAAAVAAAAYAAAAAAAAAAAAAAADwAAACADAAAAAAAAAAAAAAEAAACgMgAAVgcAAKr4//8BAAAAf39/AAEAAABkAAAAAAAAABQAAABAHwAAAAAAACYAAAAAAAAAwOD//wAAAAAmAAAAZAAAABYAAABMAAAAAAAAAAAAAAAEAAAAAAAAAAEAAADn5uYKAAAAACgAAAAoAAAAZAAAAGQAAAAAAAAAzMzMAAAAAABQAAAAUAAAAGQAAABkAAAAAAAAABcAAAAUAAAAAAAAAAAAAAD/fwAA/38AAAAAAAAJAAAABAAAAAAAAAAeAAAAaAAAAAAAAAAAAAAAAAAAAAAAAAAAAAAAECcAABAnAAAAAAAAAAAAAAAAAAAAAAAAAAAAAAAAAAAAAAAAAAAAABQAAAAAAAAAwMD/AAAAAABkAAAAMgAAAAAAAABkAAAAAAAAAH9/fwAKAAAAIgAAABgAAAAAAAAAAAAAAAAAAAAAAAAAAAAAAAAAAAAkAAAAJAAAAAAAAAAHAAAAAAAAAAAAAAAAAAAAAAAAAAAAAAAAAAAAf39/ACUAAABYAAAAAAAAAAAAAAAAAAAAAAAAAAAAAAAAAAAAAAAAAAAAAAAAAAAAAAAAAAAAAAA/AAAAAAAAAKCGAQAAAAAAAAAAAAAAAAAMAAAAAQAAAAAAAAAAAAAAAAAAAB8AAABUAAAAAAAABQAAAAEAAAAAAAAAAAAAAAAAAAAAAAAAAAAAAAAAAAAAAAAAAAAAAAJ/f38AAAAAA8zMzADAwP8Af39/AAAAAAAAAAAAAAAAAAAAAAAAAAAAIQAAABgAAAAUAAAA+DQAABonAADYRQAAWSkAABAAAAAmAAAACAAAAAAAAAAAAAAA"/>
+                <pr:smNativeData xmlns:mc="http://schemas.openxmlformats.org/markup-compatibility/2006" xmlns:p14="http://schemas.microsoft.com/office/powerpoint/2010/main" xmlns:p15="http://schemas.microsoft.com/office/powerpoint/2012/main" xmlns:pr="smNativeData" xmlns="smNativeData" val="SMDATA_15_FLquaRMAAAAlAAAAZAAAAA0AAAAAkAAAAEgAAACQAAAASAAAAAAAAAABAAAAAAAAAAEAAABQAAAAAAAAAAAA4D8AAAAAAADgPwAAAAAAAOA/AAAAAAAA4D8AAAAAAADgPwAAAAAAAOA/AAAAAAAA4D8AAAAAAADgPwAAAAAAAOA/AAAAAAAA4D8CAAAAjAAAAAAAAAAAAAAAW5vVDP///wgAAAAAAAAAAAAAAAAAAAAAAAAAAAAAAAAAAAAAZAAAAAEAAABAAAAAAAAAAAAAAAAAAAAAAAAAAAAAAAAAAAAAAAAAAAAAAAAAAAAAAAAAAAAAAAAAAAAAAAAAAAAAAAAAAAAAAAAAAAAAAAAAAAAAAAAAAAAAAAAAAAAAFAAAADwAAAAAAAAAAAAAAAAAAAkUAAAAAQAAABQAAAAUAAAAFAAAAAEAAAAAAAAAZAAAAGQAAAAAAAAAZAAAAGQAAAAVAAAAYAAAAAAAAAAAAAAADwAAACADAAAAAAAAAAAAAAEAAACgMgAAVgcAAKr4//8BAAAAf39/AAEAAABkAAAAAAAAABQAAABAHwAAAAAAACYAAAAAAAAAwOD//wAAAAAmAAAAZAAAABYAAABMAAAAAAAAAAAAAAAEAAAAAAAAAAEAAADn5uYKAAAAACgAAAAoAAAAZAAAAGQAAAAAAAAAzMzMAAAAAABQAAAAUAAAAGQAAABkAAAAAAAAABcAAAAUAAAAAAAAAAAAAAD/fwAA/38AAAAAAAAJAAAABAAAAAAAAAAeAAAAaAAAAAAAAAAAAAAAAAAAAAAAAAAAAAAAECcAABAnAAAAAAAAAAAAAAAAAAAAAAAAAAAAAAAAAAAAAAAAAAAAABQAAAAAAAAAwMD/AAAAAABkAAAAMgAAAAAAAABkAAAAAAAAAH9/fwAKAAAAIgAAABgAAAAAAAAAAAAAAAAAAAAAAAAAAAAAAAAAAAAkAAAAJAAAAAAAAAAHAAAAAAAAAAAAAAAAAAAAAAAAAAAAAAAAAAAAf39/ACUAAABYAAAAAAAAAAAAAAAAAAAAAAAAAAAAAAAAAAAAAAAAAAAAAAAAAAAAAAAAAAAAAAA/AAAAAAAAAKCGAQAAAAAAAAAAAAAAAAAMAAAAAQAAAAAAAAAAAAAAAAAAAB8AAABUAAAAAAAABQAAAAEAAAAAAAAAAAAAAAAAAAAAAAAAAAAAAAAAAAAAAAAAAAAAAAJ/f38AAAAAA8zMzADAwP8Af39/AAAAAAAAAAAAAAAAAAAAAAAAAAAAIQAAABgAAAAUAAAA+DQAABonAADYRQAAWSkAABAAAAAmAAAACAAAAAAAAAAAAAAA"/>
               </a:ext>
             </a:extLst>
           </p:cNvSpPr>
@@ -3055,7 +3055,7 @@
             <a:spLocks noGrp="1" noChangeArrowheads="1"/>
             <a:extLst>
               <a:ext uri="smNativeData">
-                <pr:smNativeData xmlns="smNativeData" xmlns:pr="smNativeData" xmlns:p15="http://schemas.microsoft.com/office/powerpoint/2012/main" xmlns:p14="http://schemas.microsoft.com/office/powerpoint/2010/main" xmlns:mc="http://schemas.openxmlformats.org/markup-compatibility/2006" val="SMDATA_15_FLquaRMAAAAlAAAAZAAAAA0AAAAAkAAAAEgAAACQAAAASAAAAAAAAAABAAAAAAAAAAEAAABQAAAAAAAAAAAA4D8AAAAAAADgPwAAAAAAAOA/AAAAAAAA4D8AAAAAAADgPwAAAAAAAOA/AAAAAAAA4D8AAAAAAADgPwAAAAAAAOA/AAAAAAAA4D8CAAAAjAAAAAAAAAAAAAAA////AP///wgAAAAAAAAAAAAAAAAAAAAAAAAAAAAAAAAAAAAAeAAAAAEAAABAAAAAAAAAAAAAAABaAAAAAAAAAAAAAAAAAAAAAAAAAAAAAAAAAAAAAAAAAAAAAAAAAAAAAAAAAAAAAAAAAAAAAAAAAAAAAAAAAAAAAAAAAAAAAAAAAAAAFAAAADwAAAAAAAAAAAAAAAAAAAAPAAAAAQAAACMAAAAjAAAAIwAAAB4AAAAAAAAAZAAAAGQAAAAAAAAAZAAAAGQAAAAVAAAAYAAAAAAAAAAAAAAADwAAACADAAAAAAAAAAAAAAEAAACgMgAAVgcAAKr4//8BAAAAf39/AAEAAABkAAAAAAAAABQAAABAHwAAAAAAACYAAAAAAAAAwOD//wAAAAAmAAAAZAAAABYAAABMAAAAAAAAAAAAAAAEAAAAAAAAAAEAAADn5uYKAAAAACgAAAAoAAAAZAAAAGQAAAAAAAAAzMzMAAAAAABQAAAAUAAAAGQAAABkAAAAAAAAABcAAAAUAAAAAAAAAAAAAAD/fwAA/38AAAAAAAAJAAAABAAAAC9zbGkeAAAAaAAAAAAAAAAAAAAAAAAAAAAAAAAAAAAAECcAABAnAAAAAAAAAAAAAAAAAAAAAAAAAAAAAAAAAAAAAAAAAAAAABQAAAAAAAAAwMD/AAAAAABkAAAAMgAAAAAAAABkAAAAAAAAAH9/fwAKAAAAIgAAABgAAAAAAAAAAAAAAAAAAAAAAAAAAAAAAAAAAAAkAAAAJAAAAAAAAAAHAAAAAAAAAAAAAAAAAAAAAAAAAAAAAAAAAAAAf39/ACUAAABYAAAAAAAAAAAAAAAAAAAAAAAAAAAAAAAAAAAAAAAAAAAAAAAAAAAAAAAAAAAAAAA/AAAAAAAAAKCGAQAAAAAAAAAAAAAAAAAMAAAAAQAAAAAAAAAAAAAAAAAAAB8AAABUAAAA////AAAAAAEAAAAAAAAAAAAAAAAAAAAAAAAAAAAAAAAAAAAAAAAAAAAAAAB/f38AAAAAA8zMzADAwP8Af39/AAAAAAAAAAAAAAAAAAAAAAAAAAAAIQAAABgAAAAUAAAAKAUAAD8CAADYRQAAZwoAABAAAAAmAAAACAAAAL8vAAAAAAAA"/>
+                <pr:smNativeData xmlns:mc="http://schemas.openxmlformats.org/markup-compatibility/2006" xmlns:p14="http://schemas.microsoft.com/office/powerpoint/2010/main" xmlns:p15="http://schemas.microsoft.com/office/powerpoint/2012/main" xmlns:pr="smNativeData" xmlns="smNativeData" val="SMDATA_15_FLquaRMAAAAlAAAAZAAAAA0AAAAAkAAAAEgAAACQAAAASAAAAAAAAAABAAAAAAAAAAEAAABQAAAAAAAAAAAA4D8AAAAAAADgPwAAAAAAAOA/AAAAAAAA4D8AAAAAAADgPwAAAAAAAOA/AAAAAAAA4D8AAAAAAADgPwAAAAAAAOA/AAAAAAAA4D8CAAAAjAAAAAAAAAAAAAAA////AP///wgAAAAAAAAAAAAAAAAAAAAAAAAAAAAAAAAAAAAAeAAAAAEAAABAAAAAAAAAAAAAAABaAAAAAAAAAAAAAAAAAAAAAAAAAAAAAAAAAAAAAAAAAAAAAAAAAAAAAAAAAAAAAAAAAAAAAAAAAAAAAAAAAAAAAAAAAAAAAAAAAAAAFAAAADwAAAAAAAAAAAAAAAAAAAAPAAAAAQAAACMAAAAjAAAAIwAAAB4AAAAAAAAAZAAAAGQAAAAAAAAAZAAAAGQAAAAVAAAAYAAAAAAAAAAAAAAADwAAACADAAAAAAAAAAAAAAEAAACgMgAAVgcAAKr4//8BAAAAf39/AAEAAABkAAAAAAAAABQAAABAHwAAAAAAACYAAAAAAAAAwOD//wAAAAAmAAAAZAAAABYAAABMAAAAAAAAAAAAAAAEAAAAAAAAAAEAAADn5uYKAAAAACgAAAAoAAAAZAAAAGQAAAAAAAAAzMzMAAAAAABQAAAAUAAAAGQAAABkAAAAAAAAABcAAAAUAAAAAAAAAAAAAAD/fwAA/38AAAAAAAAJAAAABAAAAC9zbGkeAAAAaAAAAAAAAAAAAAAAAAAAAAAAAAAAAAAAECcAABAnAAAAAAAAAAAAAAAAAAAAAAAAAAAAAAAAAAAAAAAAAAAAABQAAAAAAAAAwMD/AAAAAABkAAAAMgAAAAAAAABkAAAAAAAAAH9/fwAKAAAAIgAAABgAAAAAAAAAAAAAAAAAAAAAAAAAAAAAAAAAAAAkAAAAJAAAAAAAAAAHAAAAAAAAAAAAAAAAAAAAAAAAAAAAAAAAAAAAf39/ACUAAABYAAAAAAAAAAAAAAAAAAAAAAAAAAAAAAAAAAAAAAAAAAAAAAAAAAAAAAAAAAAAAAA/AAAAAAAAAKCGAQAAAAAAAAAAAAAAAAAMAAAAAQAAAAAAAAAAAAAAAAAAAB8AAABUAAAA////AAAAAAEAAAAAAAAAAAAAAAAAAAAAAAAAAAAAAAAAAAAAAAAAAAAAAAB/f38AAAAAA8zMzADAwP8Af39/AAAAAAAAAAAAAAAAAAAAAAAAAAAAIQAAABgAAAAUAAAAKAUAAD8CAADYRQAAZwoAABAAAAAmAAAACAAAAL8vAAAAAAAA"/>
               </a:ext>
             </a:extLst>
           </p:cNvSpPr>
@@ -3096,7 +3096,7 @@
             <a:spLocks noGrp="1" noChangeArrowheads="1"/>
             <a:extLst>
               <a:ext uri="smNativeData">
-                <pr:smNativeData xmlns="smNativeData" xmlns:pr="smNativeData" xmlns:p15="http://schemas.microsoft.com/office/powerpoint/2012/main" xmlns:p14="http://schemas.microsoft.com/office/powerpoint/2010/main" xmlns:mc="http://schemas.openxmlformats.org/markup-compatibility/2006" val="SMDATA_15_FLquaRMAAAAlAAAAZAAAAA0AAAAAkAAAAEgAAACQAAAASAAAAAAAAAAAAAAAAAAAAAEAAABQAAAAAAAAAAAA4D8AAAAAAADgPwAAAAAAAOA/AAAAAAAA4D8AAAAAAADgPwAAAAAAAOA/AAAAAAAA4D8AAAAAAADgPwAAAAAAAOA/AAAAAAAA4D8CAAAAjAAAAAAAAAAAAAAA////AP///wgAAAAAAAAAAAAAAAAAAAAAAAAAAAAAAAAAAAAAeAAAAAEAAABAAAAAAAAAAAAAAABaAAAAAAAAAAAAAAAAAAAAAAAAAAAAAAAAAAAAAAAAAAAAAAAAAAAAAAAAAAAAAAAAAAAAAAAAAAAAAAAAAAAAAAAAAAAAAAAAAAAAFAAAADwAAAAAAAAAAAAAAAAAAAAPAAAAAQAAACMAAAAjAAAAIwAAAB4AAAAAAAAAZAAAAGQAAAAAAAAAZAAAAGQAAAAVAAAAYAAAAAAAAAAAAAAADwAAACADAAAAAAAAAAAAAAEAAACgMgAAVgcAAKr4//8BAAAAf39/AAEAAABkAAAAAAAAABQAAABAHwAAAAAAACYAAAAAAAAAwOD//wAAAAAmAAAAZAAAABYAAABMAAAAAAAAAAAAAAAEAAAAAAAAAAEAAADn5uYKAAAAACgAAAAoAAAAZAAAAGQAAAAAAAAAzMzMAAAAAABQAAAAUAAAAGQAAABkAAAAAAAAABcAAAAUAAAAAAAAAAAAAAD/fwAA/38AAAAAAAAJAAAABAAAAPz///8eAAAAaAAAAAAAAAAAAAAAAAAAAAAAAAAAAAAAECcAABAnAAAAAAAAAAAAAAAAAAAAAAAAAAAAAAAAAAAAAAAAAAAAABQAAAAAAAAAwMD/AAAAAABkAAAAMgAAAAAAAABkAAAAAAAAAH9/fwAKAAAAIgAAABgAAAAAAAAAAAAAAAAAAAAAAAAAAAAAAAAAAAAkAAAAJAAAAAAAAAAHAAAAAAAAAAAAAAAAAAAAAAAAAAAAAAAAAAAAf39/ACUAAABYAAAAAAAAAAAAAAAAAAAAAAAAAAAAAAAAAAAAAAAAAAAAAAAAAAAAAAAAAAAAAAA/AAAAAAAAAKCGAQAAAAAAAAAAAAAAAAAMAAAAAQAAAAAAAAAAAAAAAAAAAB8AAABUAAAA////AAAAAAEAAAAAAAAAAAAAAAAAAAAAAAAAAAAAAAAAAAAAAAAAAAAAAAB/f38AAAAAA8zMzADAwP8Af39/AAAAAAAAAAAAAAAAAAAAAAAAAAAAIQAAABgAAAAUAAAAKAUAADsLAADYRQAAACYAABAAAAAmAAAACAAAAD8vAAAAAAAA"/>
+                <pr:smNativeData xmlns:mc="http://schemas.openxmlformats.org/markup-compatibility/2006" xmlns:p14="http://schemas.microsoft.com/office/powerpoint/2010/main" xmlns:p15="http://schemas.microsoft.com/office/powerpoint/2012/main" xmlns:pr="smNativeData" xmlns="smNativeData" val="SMDATA_15_FLquaRMAAAAlAAAAZAAAAA0AAAAAkAAAAEgAAACQAAAASAAAAAAAAAAAAAAAAAAAAAEAAABQAAAAAAAAAAAA4D8AAAAAAADgPwAAAAAAAOA/AAAAAAAA4D8AAAAAAADgPwAAAAAAAOA/AAAAAAAA4D8AAAAAAADgPwAAAAAAAOA/AAAAAAAA4D8CAAAAjAAAAAAAAAAAAAAA////AP///wgAAAAAAAAAAAAAAAAAAAAAAAAAAAAAAAAAAAAAeAAAAAEAAABAAAAAAAAAAAAAAABaAAAAAAAAAAAAAAAAAAAAAAAAAAAAAAAAAAAAAAAAAAAAAAAAAAAAAAAAAAAAAAAAAAAAAAAAAAAAAAAAAAAAAAAAAAAAAAAAAAAAFAAAADwAAAAAAAAAAAAAAAAAAAAPAAAAAQAAACMAAAAjAAAAIwAAAB4AAAAAAAAAZAAAAGQAAAAAAAAAZAAAAGQAAAAVAAAAYAAAAAAAAAAAAAAADwAAACADAAAAAAAAAAAAAAEAAACgMgAAVgcAAKr4//8BAAAAf39/AAEAAABkAAAAAAAAABQAAABAHwAAAAAAACYAAAAAAAAAwOD//wAAAAAmAAAAZAAAABYAAABMAAAAAAAAAAAAAAAEAAAAAAAAAAEAAADn5uYKAAAAACgAAAAoAAAAZAAAAGQAAAAAAAAAzMzMAAAAAABQAAAAUAAAAGQAAABkAAAAAAAAABcAAAAUAAAAAAAAAAAAAAD/fwAA/38AAAAAAAAJAAAABAAAAPz///8eAAAAaAAAAAAAAAAAAAAAAAAAAAAAAAAAAAAAECcAABAnAAAAAAAAAAAAAAAAAAAAAAAAAAAAAAAAAAAAAAAAAAAAABQAAAAAAAAAwMD/AAAAAABkAAAAMgAAAAAAAABkAAAAAAAAAH9/fwAKAAAAIgAAABgAAAAAAAAAAAAAAAAAAAAAAAAAAAAAAAAAAAAkAAAAJAAAAAAAAAAHAAAAAAAAAAAAAAAAAAAAAAAAAAAAAAAAAAAAf39/ACUAAABYAAAAAAAAAAAAAAAAAAAAAAAAAAAAAAAAAAAAAAAAAAAAAAAAAAAAAAAAAAAAAAA/AAAAAAAAAKCGAQAAAAAAAAAAAAAAAAAMAAAAAQAAAAAAAAAAAAAAAAAAAB8AAABUAAAA////AAAAAAEAAAAAAAAAAAAAAAAAAAAAAAAAAAAAAAAAAAAAAAAAAAAAAAB/f38AAAAAA8zMzADAwP8Af39/AAAAAAAAAAAAAAAAAAAAAAAAAAAAIQAAABgAAAAUAAAAKAUAADsLAADYRQAAACYAABAAAAAmAAAACAAAAD8vAAAAAAAA"/>
               </a:ext>
             </a:extLst>
           </p:cNvSpPr>
@@ -3169,7 +3169,7 @@
             <a:spLocks noGrp="1" noChangeArrowheads="1"/>
             <a:extLst>
               <a:ext uri="smNativeData">
-                <pr:smNativeData xmlns="smNativeData" xmlns:pr="smNativeData" xmlns:p15="http://schemas.microsoft.com/office/powerpoint/2012/main" xmlns:p14="http://schemas.microsoft.com/office/powerpoint/2010/main" xmlns:mc="http://schemas.openxmlformats.org/markup-compatibility/2006" val="SMDATA_15_FLquaRMAAAAlAAAAZAAAAA0AAAAAkAAAAEgAAACQAAAASAAAAAAAAAABAAAAAAAAAAEAAABQAAAAAAAAAAAA4D8AAAAAAADgPwAAAAAAAOA/AAAAAAAA4D8AAAAAAADgPwAAAAAAAOA/AAAAAAAA4D8AAAAAAADgPwAAAAAAAOA/AAAAAAAA4D8CAAAAjAAAAAAAAAAAAAAA////AP///wgAAAAAAAAAAAAAAAAAAAAAAAAAAAAAAAAAAAAAeAAAAAEAAABAAAAAAAAAAAAAAABaAAAAAAAAAAAAAAAAAAAAAAAAAAAAAAAAAAAAAAAAAAAAAAAAAAAAAAAAAAAAAAAAAAAAAAAAAAAAAAAAAAAAAAAAAAAAAAAAAAAAFAAAADwAAAAAAAAAAAAAAAAAAAAPAAAAAQAAACMAAAAjAAAAIwAAAB4AAAAAAAAAZAAAAGQAAAAAAAAAZAAAAGQAAAAVAAAAYAAAAAAAAAAAAAAADwAAACADAAAAAAAAAAAAAAEAAACgMgAAVgcAAKr4//8BAAAAf39/AAEAAABkAAAAAAAAABQAAABAHwAAAAAAACYAAAAAAAAAwOD//wAAAAAmAAAAZAAAABYAAABMAAAAAAAAAAAAAAAEAAAAAAAAAAEAAADn5uYKAAAAACgAAAAoAAAAZAAAAGQAAAAAAAAAzMzMAAAAAABQAAAAUAAAAGQAAABkAAAAAAAAABcAAAAUAAAAAAAAAAAAAAD/fwAA/38AAAAAAAAJAAAABAAAAPz///8eAAAAaAAAAAAAAAAAAAAAAAAAAAAAAAAAAAAAECcAABAnAAAAAAAAAAAAAAAAAAAAAAAAAAAAAAAAAAAAAAAAAAAAABQAAAAAAAAAwMD/AAAAAABkAAAAMgAAAAAAAABkAAAAAAAAAH9/fwAKAAAAIgAAABgAAAAAAAAAAAAAAAAAAAAAAAAAAAAAAAAAAAAkAAAAJAAAAAAAAAAHAAAAAAAAAAAAAAAAAAAAAAAAAAAAAAAAAAAAf39/ACUAAABYAAAAAAAAAAAAAAAAAAAAAAAAAAAAAAAAAAAAAAAAAAAAAAAAAAAAAAAAAAAAAAA/AAAAAAAAAKCGAQAAAAAAAAAAAAAAAAAMAAAAAQAAAAAAAAAAAAAAAAAAAB8AAABUAAAA////AAAAAAEAAAAAAAAAAAAAAAAAAAAAAAAAAAAAAAAAAAAAAAAAAAAAAAB/f38AAAAAA8zMzADAwP8Af39/AAAAAAAAAAAAAAAAAAAAAAAAAAAAIQAAABgAAAAUAAAAKAUAABonAAAIFgAAWSkAABAAAAAmAAAACAAAAL+PAAAAAAAA"/>
+                <pr:smNativeData xmlns:mc="http://schemas.openxmlformats.org/markup-compatibility/2006" xmlns:p14="http://schemas.microsoft.com/office/powerpoint/2010/main" xmlns:p15="http://schemas.microsoft.com/office/powerpoint/2012/main" xmlns:pr="smNativeData" xmlns="smNativeData" val="SMDATA_15_FLquaRMAAAAlAAAAZAAAAA0AAAAAkAAAAEgAAACQAAAASAAAAAAAAAABAAAAAAAAAAEAAABQAAAAAAAAAAAA4D8AAAAAAADgPwAAAAAAAOA/AAAAAAAA4D8AAAAAAADgPwAAAAAAAOA/AAAAAAAA4D8AAAAAAADgPwAAAAAAAOA/AAAAAAAA4D8CAAAAjAAAAAAAAAAAAAAA////AP///wgAAAAAAAAAAAAAAAAAAAAAAAAAAAAAAAAAAAAAeAAAAAEAAABAAAAAAAAAAAAAAABaAAAAAAAAAAAAAAAAAAAAAAAAAAAAAAAAAAAAAAAAAAAAAAAAAAAAAAAAAAAAAAAAAAAAAAAAAAAAAAAAAAAAAAAAAAAAAAAAAAAAFAAAADwAAAAAAAAAAAAAAAAAAAAPAAAAAQAAACMAAAAjAAAAIwAAAB4AAAAAAAAAZAAAAGQAAAAAAAAAZAAAAGQAAAAVAAAAYAAAAAAAAAAAAAAADwAAACADAAAAAAAAAAAAAAEAAACgMgAAVgcAAKr4//8BAAAAf39/AAEAAABkAAAAAAAAABQAAABAHwAAAAAAACYAAAAAAAAAwOD//wAAAAAmAAAAZAAAABYAAABMAAAAAAAAAAAAAAAEAAAAAAAAAAEAAADn5uYKAAAAACgAAAAoAAAAZAAAAGQAAAAAAAAAzMzMAAAAAABQAAAAUAAAAGQAAABkAAAAAAAAABcAAAAUAAAAAAAAAAAAAAD/fwAA/38AAAAAAAAJAAAABAAAAPz///8eAAAAaAAAAAAAAAAAAAAAAAAAAAAAAAAAAAAAECcAABAnAAAAAAAAAAAAAAAAAAAAAAAAAAAAAAAAAAAAAAAAAAAAABQAAAAAAAAAwMD/AAAAAABkAAAAMgAAAAAAAABkAAAAAAAAAH9/fwAKAAAAIgAAABgAAAAAAAAAAAAAAAAAAAAAAAAAAAAAAAAAAAAkAAAAJAAAAAAAAAAHAAAAAAAAAAAAAAAAAAAAAAAAAAAAAAAAAAAAf39/ACUAAABYAAAAAAAAAAAAAAAAAAAAAAAAAAAAAAAAAAAAAAAAAAAAAAAAAAAAAAAAAAAAAAA/AAAAAAAAAKCGAQAAAAAAAAAAAAAAAAAMAAAAAQAAAAAAAAAAAAAAAAAAAB8AAABUAAAA////AAAAAAEAAAAAAAAAAAAAAAAAAAAAAAAAAAAAAAAAAAAAAAAAAAAAAAB/f38AAAAAA8zMzADAwP8Af39/AAAAAAAAAAAAAAAAAAAAAAAAAAAAIQAAABgAAAAUAAAAKAUAABonAAAIFgAAWSkAABAAAAAmAAAACAAAAL+PAAAAAAAA"/>
               </a:ext>
             </a:extLst>
           </p:cNvSpPr>
@@ -3230,7 +3230,7 @@
               <a:defRPr lang="en-US"/>
             </a:pPr>
             <a:fld id="{30AEB9DD-93DD-FB4F-9316-651AF7586530}" type="datetime1">
-              <a:t>4/21/2026</a:t>
+              <a:t>6/3/2026</a:t>
             </a:fld>
             <a:endParaRPr/>
           </a:p>
@@ -3243,7 +3243,7 @@
             <a:spLocks noGrp="1" noChangeArrowheads="1"/>
             <a:extLst>
               <a:ext uri="smNativeData">
-                <pr:smNativeData xmlns="smNativeData" xmlns:pr="smNativeData" xmlns:p15="http://schemas.microsoft.com/office/powerpoint/2012/main" xmlns:p14="http://schemas.microsoft.com/office/powerpoint/2010/main" xmlns:mc="http://schemas.openxmlformats.org/markup-compatibility/2006" val="SMDATA_15_FLquaRMAAAAlAAAAZAAAAA0AAAAAkAAAAEgAAACQAAAASAAAAAAAAAABAAAAAAAAAAEAAABQAAAAAAAAAAAA4D8AAAAAAADgPwAAAAAAAOA/AAAAAAAA4D8AAAAAAADgPwAAAAAAAOA/AAAAAAAA4D8AAAAAAADgPwAAAAAAAOA/AAAAAAAA4D8CAAAAjAAAAAAAAAAAAAAA////AP///wgAAAAAAAAAAAAAAAAAAAAAAAAAAAAAAAAAAAAAeAAAAAEAAABAAAAAAAAAAAAAAABaAAAAAAAAAAAAAAAAAAAAAAAAAAAAAAAAAAAAAAAAAAAAAAAAAAAAAAAAAAAAAAAAAAAAAAAAAAAAAAAAAAAAAAAAAAAAAAAAAAAAFAAAADwAAAAAAAAAAAAAAAAAAAAPAAAAAQAAACMAAAAjAAAAIwAAAB4AAAAAAAAAZAAAAGQAAAAAAAAAZAAAAGQAAAAVAAAAYAAAAAAAAAAAAAAADwAAACADAAAAAAAAAAAAAAEAAACgMgAAVgcAAKr4//8BAAAAf39/AAEAAABkAAAAAAAAABQAAABAHwAAAAAAACYAAAAAAAAAwOD//wAAAAAmAAAAZAAAABYAAABMAAAAAAAAAAAAAAAEAAAAAAAAAAEAAADn5uYKAAAAACgAAAAoAAAAZAAAAGQAAAAAAAAAzMzMAAAAAABQAAAAUAAAAGQAAABkAAAAAAAAABcAAAAUAAAAAAAAAAAAAAD/fwAA/38AAAAAAAAJAAAABAAAAGxpY2keAAAAaAAAAAAAAAAAAAAAAAAAAAAAAAAAAAAAECcAABAnAAAAAAAAAAAAAAAAAAAAAAAAAAAAAAAAAAAAAAAAAAAAABQAAAAAAAAAwMD/AAAAAABkAAAAMgAAAAAAAABkAAAAAAAAAH9/fwAKAAAAIgAAABgAAAAAAAAAAAAAAAAAAAAAAAAAAAAAAAAAAAAkAAAAJAAAAAAAAAAHAAAAAAAAAAAAAAAAAAAAAAAAAAAAAAAAAAAAf39/ACUAAABYAAAAAAAAAAAAAAAAAAAAAAAAAAAAAAAAAAAAAAAAAAAAAAAAAAAAAAAAAAAAAAA/AAAAAAAAAKCGAQAAAAAAAAAAAAAAAAAMAAAAAQAAAAAAAAAAAAAAAAAAAB8AAABUAAAA////AAAAAAEAAAAAAAAAAAAAAAAAAAAAAAAAAAAAAAAAAAAAAAAAAAAAAAB/f38AAAAAA8zMzADAwP8Af39/AAAAAAAAAAAAAAAAAAAAAAAAAAAAIQAAABgAAAAUAAAA2BgAABonAAAoMgAAWSkAABAAAAAmAAAACAAAAL+PAAAAAAAA"/>
+                <pr:smNativeData xmlns:mc="http://schemas.openxmlformats.org/markup-compatibility/2006" xmlns:p14="http://schemas.microsoft.com/office/powerpoint/2010/main" xmlns:p15="http://schemas.microsoft.com/office/powerpoint/2012/main" xmlns:pr="smNativeData" xmlns="smNativeData" val="SMDATA_15_FLquaRMAAAAlAAAAZAAAAA0AAAAAkAAAAEgAAACQAAAASAAAAAAAAAABAAAAAAAAAAEAAABQAAAAAAAAAAAA4D8AAAAAAADgPwAAAAAAAOA/AAAAAAAA4D8AAAAAAADgPwAAAAAAAOA/AAAAAAAA4D8AAAAAAADgPwAAAAAAAOA/AAAAAAAA4D8CAAAAjAAAAAAAAAAAAAAA////AP///wgAAAAAAAAAAAAAAAAAAAAAAAAAAAAAAAAAAAAAeAAAAAEAAABAAAAAAAAAAAAAAABaAAAAAAAAAAAAAAAAAAAAAAAAAAAAAAAAAAAAAAAAAAAAAAAAAAAAAAAAAAAAAAAAAAAAAAAAAAAAAAAAAAAAAAAAAAAAAAAAAAAAFAAAADwAAAAAAAAAAAAAAAAAAAAPAAAAAQAAACMAAAAjAAAAIwAAAB4AAAAAAAAAZAAAAGQAAAAAAAAAZAAAAGQAAAAVAAAAYAAAAAAAAAAAAAAADwAAACADAAAAAAAAAAAAAAEAAACgMgAAVgcAAKr4//8BAAAAf39/AAEAAABkAAAAAAAAABQAAABAHwAAAAAAACYAAAAAAAAAwOD//wAAAAAmAAAAZAAAABYAAABMAAAAAAAAAAAAAAAEAAAAAAAAAAEAAADn5uYKAAAAACgAAAAoAAAAZAAAAGQAAAAAAAAAzMzMAAAAAABQAAAAUAAAAGQAAABkAAAAAAAAABcAAAAUAAAAAAAAAAAAAAD/fwAA/38AAAAAAAAJAAAABAAAAGxpY2keAAAAaAAAAAAAAAAAAAAAAAAAAAAAAAAAAAAAECcAABAnAAAAAAAAAAAAAAAAAAAAAAAAAAAAAAAAAAAAAAAAAAAAABQAAAAAAAAAwMD/AAAAAABkAAAAMgAAAAAAAABkAAAAAAAAAH9/fwAKAAAAIgAAABgAAAAAAAAAAAAAAAAAAAAAAAAAAAAAAAAAAAAkAAAAJAAAAAAAAAAHAAAAAAAAAAAAAAAAAAAAAAAAAAAAAAAAAAAAf39/ACUAAABYAAAAAAAAAAAAAAAAAAAAAAAAAAAAAAAAAAAAAAAAAAAAAAAAAAAAAAAAAAAAAAA/AAAAAAAAAKCGAQAAAAAAAAAAAAAAAAAMAAAAAQAAAAAAAAAAAAAAAAAAAB8AAABUAAAA////AAAAAAEAAAAAAAAAAAAAAAAAAAAAAAAAAAAAAAAAAAAAAAAAAAAAAAB/f38AAAAAA8zMzADAwP8Af39/AAAAAAAAAAAAAAAAAAAAAAAAAAAAIQAAABgAAAAUAAAA2BgAABonAAAoMgAAWSkAABAAAAAmAAAACAAAAL+PAAAAAAAA"/>
               </a:ext>
             </a:extLst>
           </p:cNvSpPr>
@@ -3314,7 +3314,7 @@
             <a:spLocks noGrp="1" noChangeArrowheads="1"/>
             <a:extLst>
               <a:ext uri="smNativeData">
-                <pr:smNativeData xmlns="smNativeData" xmlns:pr="smNativeData" xmlns:p15="http://schemas.microsoft.com/office/powerpoint/2012/main" xmlns:p14="http://schemas.microsoft.com/office/powerpoint/2010/main" xmlns:mc="http://schemas.openxmlformats.org/markup-compatibility/2006" val="SMDATA_15_FLquaRMAAAAlAAAAZAAAAA0AAAAAkAAAAEgAAACQAAAASAAAAAAAAAABAAAAAAAAAAEAAABQAAAAAAAAAAAA4D8AAAAAAADgPwAAAAAAAOA/AAAAAAAA4D8AAAAAAADgPwAAAAAAAOA/AAAAAAAA4D8AAAAAAADgPwAAAAAAAOA/AAAAAAAA4D8CAAAAjAAAAAAAAAAAAAAA////AP///wgAAAAAAAAAAAAAAAAAAAAAAAAAAAAAAAAAAAAAeAAAAAEAAABAAAAAAAAAAAAAAABaAAAAAAAAAAAAAAAAAAAAAAAAAAAAAAAAAAAAAAAAAAAAAAAAAAAAAAAAAAAAAAAAAAAAAAAAAAAAAAAAAAAAAAAAAAAAAAAAAAAAFAAAADwAAAAAAAAAAAAAAAAAAAAPAAAAAQAAACMAAAAjAAAAIwAAAB4AAAAAAAAAZAAAAGQAAAAAAAAAZAAAAGQAAAAVAAAAYAAAAAAAAAAAAAAADwAAACADAAAAAAAAAAAAAAEAAACgMgAAVgcAAKr4//8BAAAAf39/AAEAAABkAAAAAAAAABQAAABAHwAAAAAAACYAAAAAAAAAwOD//wAAAAAmAAAAZAAAABYAAABMAAAAAAAAAAAAAAAEAAAAAAAAAAEAAADn5uYKAAAAACgAAAAoAAAAZAAAAGQAAAAAAAAAzMzMAAAAAABQAAAAUAAAAGQAAABkAAAAAAAAABcAAAAUAAAAAAAAAAAAAAD/fwAA/38AAAAAAAAJAAAABAAAAPz///8eAAAAaAAAAAAAAAAAAAAAAAAAAAAAAAAAAAAAECcAABAnAAAAAAAAAAAAAAAAAAAAAAAAAAAAAAAAAAAAAAAAAAAAABQAAAAAAAAAwMD/AAAAAABkAAAAMgAAAAAAAABkAAAAAAAAAH9/fwAKAAAAIgAAABgAAAAAAAAAAAAAAAAAAAAAAAAAAAAAAAAAAAAkAAAAJAAAAAAAAAAHAAAAAAAAAAAAAAAAAAAAAAAAAAAAAAAAAAAAf39/ACUAAABYAAAAAAAAAAAAAAAAAAAAAAAAAAAAAAAAAAAAAAAAAAAAAAAAAAAAAAAAAAAAAAA/AAAAAAAAAKCGAQAAAAAAAAAAAAAAAAAMAAAAAQAAAAAAAAAAAAAAAAAAAB8AAABUAAAA////AAAAAAEAAAAAAAAAAAAAAAAAAAAAAAAAAAAAAAAAAAAAAAAAAAAAAAB/f38AAAAAA8zMzADAwP8Af39/AAAAAAAAAAAAAAAAAAAAAAAAAAAAIQAAABgAAAAUAAAA+DQAABonAADYRQAAWSkAABAAAAAmAAAACAAAAL+PAAAAAAAA"/>
+                <pr:smNativeData xmlns:mc="http://schemas.openxmlformats.org/markup-compatibility/2006" xmlns:p14="http://schemas.microsoft.com/office/powerpoint/2010/main" xmlns:p15="http://schemas.microsoft.com/office/powerpoint/2012/main" xmlns:pr="smNativeData" xmlns="smNativeData" val="SMDATA_15_FLquaRMAAAAlAAAAZAAAAA0AAAAAkAAAAEgAAACQAAAASAAAAAAAAAABAAAAAAAAAAEAAABQAAAAAAAAAAAA4D8AAAAAAADgPwAAAAAAAOA/AAAAAAAA4D8AAAAAAADgPwAAAAAAAOA/AAAAAAAA4D8AAAAAAADgPwAAAAAAAOA/AAAAAAAA4D8CAAAAjAAAAAAAAAAAAAAA////AP///wgAAAAAAAAAAAAAAAAAAAAAAAAAAAAAAAAAAAAAeAAAAAEAAABAAAAAAAAAAAAAAABaAAAAAAAAAAAAAAAAAAAAAAAAAAAAAAAAAAAAAAAAAAAAAAAAAAAAAAAAAAAAAAAAAAAAAAAAAAAAAAAAAAAAAAAAAAAAAAAAAAAAFAAAADwAAAAAAAAAAAAAAAAAAAAPAAAAAQAAACMAAAAjAAAAIwAAAB4AAAAAAAAAZAAAAGQAAAAAAAAAZAAAAGQAAAAVAAAAYAAAAAAAAAAAAAAADwAAACADAAAAAAAAAAAAAAEAAACgMgAAVgcAAKr4//8BAAAAf39/AAEAAABkAAAAAAAAABQAAABAHwAAAAAAACYAAAAAAAAAwOD//wAAAAAmAAAAZAAAABYAAABMAAAAAAAAAAAAAAAEAAAAAAAAAAEAAADn5uYKAAAAACgAAAAoAAAAZAAAAGQAAAAAAAAAzMzMAAAAAABQAAAAUAAAAGQAAABkAAAAAAAAABcAAAAUAAAAAAAAAAAAAAD/fwAA/38AAAAAAAAJAAAABAAAAPz///8eAAAAaAAAAAAAAAAAAAAAAAAAAAAAAAAAAAAAECcAABAnAAAAAAAAAAAAAAAAAAAAAAAAAAAAAAAAAAAAAAAAAAAAABQAAAAAAAAAwMD/AAAAAABkAAAAMgAAAAAAAABkAAAAAAAAAH9/fwAKAAAAIgAAABgAAAAAAAAAAAAAAAAAAAAAAAAAAAAAAAAAAAAkAAAAJAAAAAAAAAAHAAAAAAAAAAAAAAAAAAAAAAAAAAAAAAAAAAAAf39/ACUAAABYAAAAAAAAAAAAAAAAAAAAAAAAAAAAAAAAAAAAAAAAAAAAAAAAAAAAAAAAAAAAAAA/AAAAAAAAAKCGAQAAAAAAAAAAAAAAAAAMAAAAAQAAAAAAAAAAAAAAAAAAAB8AAABUAAAA////AAAAAAEAAAAAAAAAAAAAAAAAAAAAAAAAAAAAAAAAAAAAAAAAAAAAAAB/f38AAAAAA8zMzADAwP8Af39/AAAAAAAAAAAAAAAAAAAAAAAAAAAAIQAAABgAAAAUAAAA+DQAABonAADYRQAAWSkAABAAAAAmAAAACAAAAL+PAAAAAAAA"/>
               </a:ext>
             </a:extLst>
           </p:cNvSpPr>
@@ -4054,7 +4054,7 @@
             <a:spLocks noGrp="1" noChangeArrowheads="1"/>
             <a:extLst>
               <a:ext uri="smNativeData">
-                <pr:smNativeData xmlns="smNativeData" xmlns:pr="smNativeData" xmlns:p15="http://schemas.microsoft.com/office/powerpoint/2012/main" xmlns:p14="http://schemas.microsoft.com/office/powerpoint/2010/main" xmlns:mc="http://schemas.openxmlformats.org/markup-compatibility/2006" val="SMDATA_15_FLquaRMAAAAlAAAAZAAAAA0AAAAAkAAAAEgAAACQAAAASAAAAAAAAAACAAAAAAAAAAEAAABQAAAAAAAAAAAA4D8AAAAAAADgPwAAAAAAAOA/AAAAAAAA4D8AAAAAAADgPwAAAAAAAOA/AAAAAAAA4D8AAAAAAADgPwAAAAAAAOA/AAAAAAAA4D8CAAAAjAAAAAAAAAAAAAAAW5vVDP///wgAAAAAAAAAAAAAAAAAAAAAAAAAAAAAAAAAAAAAZAAAAAEAAABAAAAAAAAAAAAAAAAAAAAAAAAAAAAAAAAAAAAAAAAAAAAAAAAAAAAAAAAAAAAAAAAAAAAAAAAAAAAAAAAAAAAAAAAAAAAAAAAAAAAAAAAAAAAAAAAAAAAAFAAAADwAAAAAAAAAAAAAAAAAAAkUAAAAAQAAABQAAAAUAAAAFAAAAAEAAAAAAAAAZAAAAGQAAAAAAAAAZAAAAGQAAAAVAAAAYAAAAAAAAAAAAAAADwAAACADAAAAAAAAAAAAAAEAAACgMgAAVgcAAKr4//8BAAAAf39/AAEAAABkAAAAAAAAABQAAABAHwAAAAAAACYAAAAAAAAAwOD//wAAAAAmAAAAZAAAABYAAABMAAAAAAAAAAAAAAAEAAAAAAAAAAEAAADn5uYKAAAAACgAAAAoAAAAZAAAAGQAAAAAAAAAzMzMAAAAAABQAAAAUAAAAGQAAABkAAAAAAAAABcAAAAUAAAAAAAAAAAAAAD/fwAA/38AAAAAAAAJAAAABAAAAAAAAAAeAAAAaAAAAAAAAAAAAAAAAAAAAAAAAAAAAAAAECcAABAnAAAAAAAAAAAAAAAAAAAAAAAAAAAAAAAAAAAAAAAAAAAAABQAAAAAAAAAwMD/AAAAAABkAAAAMgAAAAAAAABkAAAAAAAAAH9/fwAKAAAAIgAAABgAAAAAAAAAAAAAAAAAAAAAAAAAAAAAAAAAAAAkAAAAJAAAAAAAAAAHAAAAAAAAAAAAAAAAAAAAAAAAAAAAAAAAAAAAf39/ACUAAABYAAAAAAAAAAAAAAAAAAAAAAAAAAAAAAAAAAAAAAAAAAAAAAAAAAAAAAAAAAAAAAA/AAAAAAAAAKCGAQAAAAAAAAAAAAAAAAAMAAAAAQAAAAAAAAAAAAAAAAAAAB8AAABUAAAAW5vVBf///wEAAAAAAAAAAAAAAAAAAAAAAAAAAAAAAAAAAAAAAAAAAAAAAAJ/f38A5+bmA8zMzADAwP8Af39/AAAAAAAAAAAAAAAAAAAAAAAAAAAAIQAAABgAAAAUAAAAYAkAAOgGAACgQQAAmBUAABAAAAAmAAAACAAAAAAAAAAAAAAA"/>
+                <pr:smNativeData xmlns:mc="http://schemas.openxmlformats.org/markup-compatibility/2006" xmlns:p14="http://schemas.microsoft.com/office/powerpoint/2010/main" xmlns:p15="http://schemas.microsoft.com/office/powerpoint/2012/main" xmlns:pr="smNativeData" xmlns="smNativeData" val="SMDATA_15_FLquaRMAAAAlAAAAZAAAAA0AAAAAkAAAAEgAAACQAAAASAAAAAAAAAACAAAAAAAAAAEAAABQAAAAAAAAAAAA4D8AAAAAAADgPwAAAAAAAOA/AAAAAAAA4D8AAAAAAADgPwAAAAAAAOA/AAAAAAAA4D8AAAAAAADgPwAAAAAAAOA/AAAAAAAA4D8CAAAAjAAAAAAAAAAAAAAAW5vVDP///wgAAAAAAAAAAAAAAAAAAAAAAAAAAAAAAAAAAAAAZAAAAAEAAABAAAAAAAAAAAAAAAAAAAAAAAAAAAAAAAAAAAAAAAAAAAAAAAAAAAAAAAAAAAAAAAAAAAAAAAAAAAAAAAAAAAAAAAAAAAAAAAAAAAAAAAAAAAAAAAAAAAAAFAAAADwAAAAAAAAAAAAAAAAAAAkUAAAAAQAAABQAAAAUAAAAFAAAAAEAAAAAAAAAZAAAAGQAAAAAAAAAZAAAAGQAAAAVAAAAYAAAAAAAAAAAAAAADwAAACADAAAAAAAAAAAAAAEAAACgMgAAVgcAAKr4//8BAAAAf39/AAEAAABkAAAAAAAAABQAAABAHwAAAAAAACYAAAAAAAAAwOD//wAAAAAmAAAAZAAAABYAAABMAAAAAAAAAAAAAAAEAAAAAAAAAAEAAADn5uYKAAAAACgAAAAoAAAAZAAAAGQAAAAAAAAAzMzMAAAAAABQAAAAUAAAAGQAAABkAAAAAAAAABcAAAAUAAAAAAAAAAAAAAD/fwAA/38AAAAAAAAJAAAABAAAAAAAAAAeAAAAaAAAAAAAAAAAAAAAAAAAAAAAAAAAAAAAECcAABAnAAAAAAAAAAAAAAAAAAAAAAAAAAAAAAAAAAAAAAAAAAAAABQAAAAAAAAAwMD/AAAAAABkAAAAMgAAAAAAAABkAAAAAAAAAH9/fwAKAAAAIgAAABgAAAAAAAAAAAAAAAAAAAAAAAAAAAAAAAAAAAAkAAAAJAAAAAAAAAAHAAAAAAAAAAAAAAAAAAAAAAAAAAAAAAAAAAAAf39/ACUAAABYAAAAAAAAAAAAAAAAAAAAAAAAAAAAAAAAAAAAAAAAAAAAAAAAAAAAAAAAAAAAAAA/AAAAAAAAAKCGAQAAAAAAAAAAAAAAAAAMAAAAAQAAAAAAAAAAAAAAAAAAAB8AAABUAAAAW5vVBf///wEAAAAAAAAAAAAAAAAAAAAAAAAAAAAAAAAAAAAAAAAAAAAAAAJ/f38A5+bmA8zMzADAwP8Af39/AAAAAAAAAAAAAAAAAAAAAAAAAAAAIQAAABgAAAAUAAAAYAkAAOgGAACgQQAAmBUAABAAAAAmAAAACAAAAAAAAAAAAAAA"/>
               </a:ext>
             </a:extLst>
           </p:cNvSpPr>
@@ -4083,7 +4083,7 @@
             <a:spLocks noGrp="1" noChangeArrowheads="1"/>
             <a:extLst>
               <a:ext uri="smNativeData">
-                <pr:smNativeData xmlns="smNativeData" xmlns:pr="smNativeData" xmlns:p15="http://schemas.microsoft.com/office/powerpoint/2012/main" xmlns:p14="http://schemas.microsoft.com/office/powerpoint/2010/main" xmlns:mc="http://schemas.openxmlformats.org/markup-compatibility/2006" val="SMDATA_15_FLquaRMAAAAlAAAAZAAAAA0AAAAAkAAAAEgAAACQAAAASAAAAAAAAAAAAAAAAAAAAAEAAABQAAAAAAAAAAAA4D8AAAAAAADgPwAAAAAAAOA/AAAAAAAA4D8AAAAAAADgPwAAAAAAAOA/AAAAAAAA4D8AAAAAAADgPwAAAAAAAOA/AAAAAAAA4D8CAAAAjAAAAAAAAAAAAAAAW5vVDP///wgAAAAAAAAAAAAAAAAAAAAAAAAAAAAAAAAAAAAAZAAAAAEAAABAAAAAAAAAAAAAAAAAAAAAAAAAAAAAAAAAAAAAAAAAAAAAAAAAAAAAAAAAAAAAAAAAAAAAAAAAAAAAAAAAAAAAAAAAAAAAAAAAAAAAAAAAAAAAAAAAAAAAFAAAADwAAAAAAAAAAAAAAAAAAAkUAAAAAQAAABQAAAAUAAAAFAAAAAEAAAAAAAAAZAAAAGQAAAAAAAAAZAAAAGQAAAAVAAAAYAAAAAAAAAAAAAAADwAAACADAAAAAAAAAAAAAAEAAACgMgAAVgcAAKr4//8BAAAAf39/AAEAAABkAAAAAAAAABQAAABAHwAAAAAAACYAAAAAAAAAwOD//wAAAAAmAAAAZAAAABYAAABMAAAAAAAAAAAAAAAEAAAAAAAAAAEAAADn5uYKAAAAACgAAAAoAAAAZAAAAGQAAAAAAAAAzMzMAAAAAABQAAAAUAAAAGQAAABkAAAAAAAAABcAAAAUAAAAAAAAAAAAAAD/fwAA/38AAAAAAAAJAAAABAAAAAAAAAAeAAAAaAAAAAAAAAAAAAAAAAAAAAAAAAAAAAAAECcAABAnAAAAAAAAAAAAAAAAAAAAAAAAAAAAAAAAAAAAAAAAAAAAABQAAAAAAAAAwMD/AAAAAABkAAAAMgAAAAAAAABkAAAAAAAAAH9/fwAKAAAAIgAAABgAAAAAAAAAAAAAAAAAAAAAAAAAAAAAAAAAAAAkAAAAJAAAAAAAAAAHAAAAAAAAAAAAAAAAAAAAAAAAAAAAAAAAAAAAf39/ACUAAABYAAAAAAAAAAAAAAAAAAAAAAAAAAAAAAAAAAAAAAAAAAAAAAAAAAAAAAAAAAAAAAA/AAAAAAAAAKCGAQAAAAAAAAAAAAAAAAAMAAAAAQAAAAAAAAAAAAAAAAAAAB8AAABUAAAAW5vVBf///wEAAAAAAAAAAAAAAAAAAAAAAAAAAAAAAAAAAAAAAAAAAAAAAAJ/f38A5+bmA8zMzADAwP8Af39/AAAAAAAAAAAAAAAAAAAAAAAAAAAAIQAAABgAAAAUAAAAYAkAACkWAACgQQAAWCAAABAAAAAmAAAACAAAAAAAAAAAAAAA"/>
+                <pr:smNativeData xmlns:mc="http://schemas.openxmlformats.org/markup-compatibility/2006" xmlns:p14="http://schemas.microsoft.com/office/powerpoint/2010/main" xmlns:p15="http://schemas.microsoft.com/office/powerpoint/2012/main" xmlns:pr="smNativeData" xmlns="smNativeData" val="SMDATA_15_FLquaRMAAAAlAAAAZAAAAA0AAAAAkAAAAEgAAACQAAAASAAAAAAAAAAAAAAAAAAAAAEAAABQAAAAAAAAAAAA4D8AAAAAAADgPwAAAAAAAOA/AAAAAAAA4D8AAAAAAADgPwAAAAAAAOA/AAAAAAAA4D8AAAAAAADgPwAAAAAAAOA/AAAAAAAA4D8CAAAAjAAAAAAAAAAAAAAAW5vVDP///wgAAAAAAAAAAAAAAAAAAAAAAAAAAAAAAAAAAAAAZAAAAAEAAABAAAAAAAAAAAAAAAAAAAAAAAAAAAAAAAAAAAAAAAAAAAAAAAAAAAAAAAAAAAAAAAAAAAAAAAAAAAAAAAAAAAAAAAAAAAAAAAAAAAAAAAAAAAAAAAAAAAAAFAAAADwAAAAAAAAAAAAAAAAAAAkUAAAAAQAAABQAAAAUAAAAFAAAAAEAAAAAAAAAZAAAAGQAAAAAAAAAZAAAAGQAAAAVAAAAYAAAAAAAAAAAAAAADwAAACADAAAAAAAAAAAAAAEAAACgMgAAVgcAAKr4//8BAAAAf39/AAEAAABkAAAAAAAAABQAAABAHwAAAAAAACYAAAAAAAAAwOD//wAAAAAmAAAAZAAAABYAAABMAAAAAAAAAAAAAAAEAAAAAAAAAAEAAADn5uYKAAAAACgAAAAoAAAAZAAAAGQAAAAAAAAAzMzMAAAAAABQAAAAUAAAAGQAAABkAAAAAAAAABcAAAAUAAAAAAAAAAAAAAD/fwAA/38AAAAAAAAJAAAABAAAAAAAAAAeAAAAaAAAAAAAAAAAAAAAAAAAAAAAAAAAAAAAECcAABAnAAAAAAAAAAAAAAAAAAAAAAAAAAAAAAAAAAAAAAAAAAAAABQAAAAAAAAAwMD/AAAAAABkAAAAMgAAAAAAAABkAAAAAAAAAH9/fwAKAAAAIgAAABgAAAAAAAAAAAAAAAAAAAAAAAAAAAAAAAAAAAAkAAAAJAAAAAAAAAAHAAAAAAAAAAAAAAAAAAAAAAAAAAAAAAAAAAAAf39/ACUAAABYAAAAAAAAAAAAAAAAAAAAAAAAAAAAAAAAAAAAAAAAAAAAAAAAAAAAAAAAAAAAAAA/AAAAAAAAAKCGAQAAAAAAAAAAAAAAAAAMAAAAAQAAAAAAAAAAAAAAAAAAAB8AAABUAAAAW5vVBf///wEAAAAAAAAAAAAAAAAAAAAAAAAAAAAAAAAAAAAAAAAAAAAAAAJ/f38A5+bmA8zMzADAwP8Af39/AAAAAAAAAAAAAAAAAAAAAAAAAAAAIQAAABgAAAAUAAAAYAkAACkWAACgQQAAWCAAABAAAAAmAAAACAAAAAAAAAAAAAAA"/>
               </a:ext>
             </a:extLst>
           </p:cNvSpPr>
@@ -4154,6 +4154,18 @@
               <a:rPr lang="en-US" dirty="0" err="1" smtClean="0"/>
               <a:t>joes_robot_control</a:t>
             </a:r>
+            <a:r>
+              <a:rPr lang="en-US" dirty="0" smtClean="0"/>
+              <a:t> – run w/</a:t>
+            </a:r>
+            <a:r>
+              <a:rPr lang="en-US" dirty="0" err="1" smtClean="0"/>
+              <a:t>sudo</a:t>
+            </a:r>
+            <a:r>
+              <a:rPr lang="en-US" dirty="0" smtClean="0"/>
+              <a:t>!</a:t>
+            </a:r>
             <a:endParaRPr lang="en-US" dirty="0"/>
           </a:p>
         </p:txBody>
@@ -4191,8 +4203,20 @@
             </a:r>
             <a:r>
               <a:rPr lang="en-US" dirty="0" smtClean="0"/>
-              <a:t>/robot.txt file</a:t>
-            </a:r>
+              <a:t>/robot.txt </a:t>
+            </a:r>
+            <a:r>
+              <a:rPr lang="en-US" dirty="0" smtClean="0"/>
+              <a:t>file</a:t>
+            </a:r>
+          </a:p>
+          <a:p>
+            <a:pPr lvl="1"/>
+            <a:r>
+              <a:rPr lang="en-US" dirty="0" smtClean="0"/>
+              <a:t>And now also robot0-9.txt files for multiple devices set individually.</a:t>
+            </a:r>
+            <a:endParaRPr lang="en-US" dirty="0" smtClean="0"/>
           </a:p>
           <a:p>
             <a:r>
@@ -4277,7 +4301,7 @@
             </a:pPr>
             <a:fld id="{30AE8A82-CCDD-FB7C-9316-3A29C458656F}" type="datetime1">
               <a:rPr lang="en-US" smtClean="0"/>
-              <a:t>4/21/2026</a:t>
+              <a:t>6/3/2026</a:t>
             </a:fld>
             <a:endParaRPr lang="en-US"/>
           </a:p>
@@ -4346,7 +4370,7 @@
             <a:spLocks noGrp="1" noChangeArrowheads="1"/>
             <a:extLst>
               <a:ext uri="smNativeData">
-                <pr:smNativeData xmlns="smNativeData" xmlns:pr="smNativeData" xmlns:p15="http://schemas.microsoft.com/office/powerpoint/2012/main" xmlns:p14="http://schemas.microsoft.com/office/powerpoint/2010/main" xmlns:mc="http://schemas.openxmlformats.org/markup-compatibility/2006" val="SMDATA_15_FLquaRMAAAAlAAAAZAAAAA0AAAAAkAAAAEgAAACQAAAASAAAAAAAAAABAAAAAAAAAAEAAABQAAAAAAAAAAAA4D8AAAAAAADgPwAAAAAAAOA/AAAAAAAA4D8AAAAAAADgPwAAAAAAAOA/AAAAAAAA4D8AAAAAAADgPwAAAAAAAOA/AAAAAAAA4D8CAAAAjAAAAAAAAAAAAAAAW5vVDP///wgAAAAAAAAAAAAAAAAAAAAAAAAAAAAAAAAAAAAAZAAAAAEAAABAAAAAAAAAAAAAAAAAAAAAAAAAAAAAAAAAAAAAAAAAAAAAAAAAAAAAAAAAAAAAAAAAAAAAAAAAAAAAAAAAAAAAAAAAAAAAAAAAAAAAAAAAAAAAAAAAAAAAFAAAADwAAAAAAAAAAAAAAAAAAAkUAAAAAQAAABQAAAAUAAAAFAAAAAEAAAAAAAAAZAAAAGQAAAAAAAAAZAAAAGQAAAAVAAAAYAAAAAAAAAAAAAAADwAAACADAAAAAAAAAAAAAAEAAACgMgAAVgcAAKr4//8BAAAAf39/AAEAAABkAAAAAAAAABQAAABAHwAAAAAAACYAAAAAAAAAwOD//wAAAAAmAAAAZAAAABYAAABMAAAAAAAAAAAAAAAEAAAAAAAAAAEAAADn5uYKAAAAACgAAAAoAAAAZAAAAGQAAAAAAAAAzMzMAAAAAABQAAAAUAAAAGQAAABkAAAAAAAAABcAAAAUAAAAAAAAAAAAAAD/fwAA/38AAAAAAAAJAAAABAAAAAAAAAAeAAAAaAAAAAAAAAAAAAAAAAAAAAAAAAAAAAAAECcAABAnAAAAAAAAAAAAAAAAAAAAAAAAAAAAAAAAAAAAAAAAAAAAABQAAAAAAAAAwMD/AAAAAABkAAAAMgAAAAAAAABkAAAAAAAAAH9/fwAKAAAAIgAAABgAAAAAAAAAAAAAAAAAAAAAAAAAAAAAAAAAAAAkAAAAJAAAAAAAAAAHAAAAAAAAAAAAAAAAAAAAAAAAAAAAAAAAAAAAf39/ACUAAABYAAAAAAAAAAAAAAAAAAAAAAAAAAAAAAAAAAAAAAAAAAAAAAAAAAAAAAAAAAAAAAA/AAAAAAAAAKCGAQAAAAAAAAAAAAAAAAAMAAAAAQAAAAAAAAAAAAAAAAAAAB8AAABUAAAAW5vVBf///wEAAAAAAAAAAAAAAAAAAAAAAAAAAAAAAAAAAAAAAAAAAAAAAAJ/f38A5+bmA8zMzADAwP8Af39/AAAAAAAAAAAAAAAAAAAAAAAAAAAAIQAAABgAAAAUAAAAKAUAAD8CAADYRQAAZwoAABAAAAAmAAAACAAAAAAAAAAAAAAA"/>
+                <pr:smNativeData xmlns:mc="http://schemas.openxmlformats.org/markup-compatibility/2006" xmlns:p14="http://schemas.microsoft.com/office/powerpoint/2010/main" xmlns:p15="http://schemas.microsoft.com/office/powerpoint/2012/main" xmlns:pr="smNativeData" xmlns="smNativeData" val="SMDATA_15_FLquaRMAAAAlAAAAZAAAAA0AAAAAkAAAAEgAAACQAAAASAAAAAAAAAABAAAAAAAAAAEAAABQAAAAAAAAAAAA4D8AAAAAAADgPwAAAAAAAOA/AAAAAAAA4D8AAAAAAADgPwAAAAAAAOA/AAAAAAAA4D8AAAAAAADgPwAAAAAAAOA/AAAAAAAA4D8CAAAAjAAAAAAAAAAAAAAAW5vVDP///wgAAAAAAAAAAAAAAAAAAAAAAAAAAAAAAAAAAAAAZAAAAAEAAABAAAAAAAAAAAAAAAAAAAAAAAAAAAAAAAAAAAAAAAAAAAAAAAAAAAAAAAAAAAAAAAAAAAAAAAAAAAAAAAAAAAAAAAAAAAAAAAAAAAAAAAAAAAAAAAAAAAAAFAAAADwAAAAAAAAAAAAAAAAAAAkUAAAAAQAAABQAAAAUAAAAFAAAAAEAAAAAAAAAZAAAAGQAAAAAAAAAZAAAAGQAAAAVAAAAYAAAAAAAAAAAAAAADwAAACADAAAAAAAAAAAAAAEAAACgMgAAVgcAAKr4//8BAAAAf39/AAEAAABkAAAAAAAAABQAAABAHwAAAAAAACYAAAAAAAAAwOD//wAAAAAmAAAAZAAAABYAAABMAAAAAAAAAAAAAAAEAAAAAAAAAAEAAADn5uYKAAAAACgAAAAoAAAAZAAAAGQAAAAAAAAAzMzMAAAAAABQAAAAUAAAAGQAAABkAAAAAAAAABcAAAAUAAAAAAAAAAAAAAD/fwAA/38AAAAAAAAJAAAABAAAAAAAAAAeAAAAaAAAAAAAAAAAAAAAAAAAAAAAAAAAAAAAECcAABAnAAAAAAAAAAAAAAAAAAAAAAAAAAAAAAAAAAAAAAAAAAAAABQAAAAAAAAAwMD/AAAAAABkAAAAMgAAAAAAAABkAAAAAAAAAH9/fwAKAAAAIgAAABgAAAAAAAAAAAAAAAAAAAAAAAAAAAAAAAAAAAAkAAAAJAAAAAAAAAAHAAAAAAAAAAAAAAAAAAAAAAAAAAAAAAAAAAAAf39/ACUAAABYAAAAAAAAAAAAAAAAAAAAAAAAAAAAAAAAAAAAAAAAAAAAAAAAAAAAAAAAAAAAAAA/AAAAAAAAAKCGAQAAAAAAAAAAAAAAAAAMAAAAAQAAAAAAAAAAAAAAAAAAAB8AAABUAAAAW5vVBf///wEAAAAAAAAAAAAAAAAAAAAAAAAAAAAAAAAAAAAAAAAAAAAAAAJ/f38A5+bmA8zMzADAwP8Af39/AAAAAAAAAAAAAAAAAAAAAAAAAAAAIQAAABgAAAAUAAAAKAUAAD8CAADYRQAAZwoAABAAAAAmAAAACAAAAAAAAAAAAAAA"/>
               </a:ext>
             </a:extLst>
           </p:cNvSpPr>
@@ -4385,7 +4409,7 @@
             <a:spLocks noGrp="1" noChangeArrowheads="1"/>
             <a:extLst>
               <a:ext uri="smNativeData">
-                <pr:smNativeData xmlns="smNativeData" xmlns:pr="smNativeData" xmlns:p15="http://schemas.microsoft.com/office/powerpoint/2012/main" xmlns:p14="http://schemas.microsoft.com/office/powerpoint/2010/main" xmlns:mc="http://schemas.openxmlformats.org/markup-compatibility/2006" val="SMDATA_15_FLquaRMAAAAlAAAAZAAAAA0AAAAAkAAAAEgAAACQAAAASAAAAAAAAAAAAAAAAAAAAAEAAABQAAAAAAAAAAAA4D8AAAAAAADgPwAAAAAAAOA/AAAAAAAA4D8AAAAAAADgPwAAAAAAAOA/AAAAAAAA4D8AAAAAAADgPwAAAAAAAOA/AAAAAAAA4D8CAAAAjAAAAAAAAAAAAAAAW5vVDP///wgAAAAAAAAAAAAAAAAAAAAAAAAAAAAAAAAAAAAAZAAAAAEAAABAAAAAAAAAAAAAAAAAAAAAAAAAAAAAAAAAAAAAAAAAAAAAAAAAAAAAAAAAAAAAAAAAAAAAAAAAAAAAAAAAAAAAAAAAAAAAAAAAAAAAAAAAAAAAAAAAAAAAFAAAADwAAAAAAAAAAAAAAAAAAAkUAAAAAQAAABQAAAAUAAAAFAAAAAEAAAAAAAAAZAAAAGQAAAAAAAAAZAAAAGQAAAAVAAAAYAAAAAAAAAAAAAAADwAAACADAAAAAAAAAAAAAAEAAACgMgAAVgcAAKr4//8BAAAAf39/AAEAAABkAAAAAAAAABQAAABAHwAAAAAAACYAAAAAAAAAwOD//wAAAAAmAAAAZAAAABYAAABMAAAAAAAAAAAAAAAEAAAAAAAAAAEAAADn5uYKAAAAACgAAAAoAAAAZAAAAGQAAAAAAAAAzMzMAAAAAABQAAAAUAAAAGQAAABkAAAAAAAAABcAAAAUAAAAAAAAAAAAAAD/fwAA/38AAAAAAAAJAAAABAAAAGUAAAAeAAAAaAAAAAAAAAAAAAAAAAAAAAAAAAAAAAAAECcAABAnAAAAAAAAAAAAAAAAAAAAAAAAAAAAAAAAAAAAAAAAAAAAABQAAAAAAAAAwMD/AAAAAABkAAAAMgAAAAAAAABkAAAAAAAAAH9/fwAKAAAAIgAAABgAAAAAAAAAAAAAAAAAAAAAAAAAAAAAAAAAAAAkAAAAJAAAAAAAAAAHAAAAAAAAAAAAAAAAAAAAAAAAAAAAAAAAAAAAf39/ACUAAABYAAAAAAAAAAAAAAAAAAAAAAAAAAAAAAAAAAAAAAAAAAAAAAAAAAAAAAAAAAAAAAA/AAAAAAAAAKCGAQAAAAAAAAAAAAAAAAAMAAAAAQAAAAAAAAAAAAAAAAAAAB8AAABUAAAAW5vVBf///wEAAAAAAAAAAAAAAAAAAAAAAAAAAAAAAAAAAAAAAAAAAAAAAAJ/f38A5+bmA8zMzADAwP8Af39/AAAAAAAAAAAAAAAAAAAAAAAAAAAAIQAAABgAAAAUAAAAKAUAADsLAADYRQAAACYAABAAAAAmAAAACAAAAAAgAAAAAAAA"/>
+                <pr:smNativeData xmlns:mc="http://schemas.openxmlformats.org/markup-compatibility/2006" xmlns:p14="http://schemas.microsoft.com/office/powerpoint/2010/main" xmlns:p15="http://schemas.microsoft.com/office/powerpoint/2012/main" xmlns:pr="smNativeData" xmlns="smNativeData" val="SMDATA_15_FLquaRMAAAAlAAAAZAAAAA0AAAAAkAAAAEgAAACQAAAASAAAAAAAAAAAAAAAAAAAAAEAAABQAAAAAAAAAAAA4D8AAAAAAADgPwAAAAAAAOA/AAAAAAAA4D8AAAAAAADgPwAAAAAAAOA/AAAAAAAA4D8AAAAAAADgPwAAAAAAAOA/AAAAAAAA4D8CAAAAjAAAAAAAAAAAAAAAW5vVDP///wgAAAAAAAAAAAAAAAAAAAAAAAAAAAAAAAAAAAAAZAAAAAEAAABAAAAAAAAAAAAAAAAAAAAAAAAAAAAAAAAAAAAAAAAAAAAAAAAAAAAAAAAAAAAAAAAAAAAAAAAAAAAAAAAAAAAAAAAAAAAAAAAAAAAAAAAAAAAAAAAAAAAAFAAAADwAAAAAAAAAAAAAAAAAAAkUAAAAAQAAABQAAAAUAAAAFAAAAAEAAAAAAAAAZAAAAGQAAAAAAAAAZAAAAGQAAAAVAAAAYAAAAAAAAAAAAAAADwAAACADAAAAAAAAAAAAAAEAAACgMgAAVgcAAKr4//8BAAAAf39/AAEAAABkAAAAAAAAABQAAABAHwAAAAAAACYAAAAAAAAAwOD//wAAAAAmAAAAZAAAABYAAABMAAAAAAAAAAAAAAAEAAAAAAAAAAEAAADn5uYKAAAAACgAAAAoAAAAZAAAAGQAAAAAAAAAzMzMAAAAAABQAAAAUAAAAGQAAABkAAAAAAAAABcAAAAUAAAAAAAAAAAAAAD/fwAA/38AAAAAAAAJAAAABAAAAGUAAAAeAAAAaAAAAAAAAAAAAAAAAAAAAAAAAAAAAAAAECcAABAnAAAAAAAAAAAAAAAAAAAAAAAAAAAAAAAAAAAAAAAAAAAAABQAAAAAAAAAwMD/AAAAAABkAAAAMgAAAAAAAABkAAAAAAAAAH9/fwAKAAAAIgAAABgAAAAAAAAAAAAAAAAAAAAAAAAAAAAAAAAAAAAkAAAAJAAAAAAAAAAHAAAAAAAAAAAAAAAAAAAAAAAAAAAAAAAAAAAAf39/ACUAAABYAAAAAAAAAAAAAAAAAAAAAAAAAAAAAAAAAAAAAAAAAAAAAAAAAAAAAAAAAAAAAAA/AAAAAAAAAKCGAQAAAAAAAAAAAAAAAAAMAAAAAQAAAAAAAAAAAAAAAAAAAB8AAABUAAAAW5vVBf///wEAAAAAAAAAAAAAAAAAAAAAAAAAAAAAAAAAAAAAAAAAAAAAAAJ/f38A5+bmA8zMzADAwP8Af39/AAAAAAAAAAAAAAAAAAAAAAAAAAAAIQAAABgAAAAUAAAAKAUAADsLAADYRQAAACYAABAAAAAmAAAACAAAAAAgAAAAAAAA"/>
               </a:ext>
             </a:extLst>
           </p:cNvSpPr>
@@ -4574,7 +4598,7 @@
             <a:spLocks noGrp="1" noChangeArrowheads="1"/>
             <a:extLst>
               <a:ext uri="smNativeData">
-                <pr:smNativeData xmlns="smNativeData" xmlns:pr="smNativeData" xmlns:p15="http://schemas.microsoft.com/office/powerpoint/2012/main" xmlns:p14="http://schemas.microsoft.com/office/powerpoint/2010/main" xmlns:mc="http://schemas.openxmlformats.org/markup-compatibility/2006" val="SMDATA_15_FLquaRMAAAAlAAAAZAAAAA0AAAAAkAAAAEgAAACQAAAASAAAAAAAAAABAAAAAAAAAAEAAABQAAAAAAAAAAAA4D8AAAAAAADgPwAAAAAAAOA/AAAAAAAA4D8AAAAAAADgPwAAAAAAAOA/AAAAAAAA4D8AAAAAAADgPwAAAAAAAOA/AAAAAAAA4D8CAAAAjAAAAAAAAAAAAAAAW5vVDP///wgAAAAAAAAAAAAAAAAAAAAAAAAAAAAAAAAAAAAAZAAAAAEAAABAAAAAAAAAAAAAAAAAAAAAAAAAAAAAAAAAAAAAAAAAAAAAAAAAAAAAAAAAAAAAAAAAAAAAAAAAAAAAAAAAAAAAAAAAAAAAAAAAAAAAAAAAAAAAAAAAAAAAFAAAADwAAAAAAAAAAAAAAAAAAAkUAAAAAQAAABQAAAAUAAAAFAAAAAEAAAAAAAAAZAAAAGQAAAAAAAAAZAAAAGQAAAAVAAAAYAAAAAAAAAAAAAAADwAAACADAAAAAAAAAAAAAAEAAACgMgAAVgcAAKr4//8BAAAAf39/AAEAAABkAAAAAAAAABQAAABAHwAAAAAAACYAAAAAAAAAwOD//wAAAAAmAAAAZAAAABYAAABMAAAAAAAAAAAAAAAEAAAAAAAAAAEAAADn5uYKAAAAACgAAAAoAAAAZAAAAGQAAAAAAAAAzMzMAAAAAABQAAAAUAAAAGQAAABkAAAAAAAAABcAAAAUAAAAAAAAAAAAAAD/fwAA/38AAAAAAAAJAAAABAAAAF8AYAAeAAAAaAAAAAAAAAAAAAAAAAAAAAAAAAAAAAAAECcAABAnAAAAAAAAAAAAAAAAAAAAAAAAAAAAAAAAAAAAAAAAAAAAABQAAAAAAAAAwMD/AAAAAABkAAAAMgAAAAAAAABkAAAAAAAAAH9/fwAKAAAAIgAAABgAAAAAAAAAAAAAAAAAAAAAAAAAAAAAAAAAAAAkAAAAJAAAAAAAAAAHAAAAAAAAAAAAAAAAAAAAAAAAAAAAAAAAAAAAf39/ACUAAABYAAAAAAAAAAAAAAAAAAAAAAAAAAAAAAAAAAAAAAAAAAAAAAAAAAAAAAAAAAAAAAA/AAAAAAAAAKCGAQAAAAAAAAAAAAAAAAAMAAAAAQAAAAAAAAAAAAAAAAAAAB8AAABUAAAAW5vVBf///wEAAAAAAAAAAAAAAAAAAAAAAAAAAAAAAAAAAAAAAAAAAAAAAAJ/f38A5+bmA8zMzADAwP8Af39/AAAAAAAAAAAAAAAAAAAAAAAAAAAAIQAAABgAAAAUAAAAKAUAAD8CAADYRQAAZwoAABAAAAAmAAAACAAAAAAAAAAAAAAA"/>
+                <pr:smNativeData xmlns:mc="http://schemas.openxmlformats.org/markup-compatibility/2006" xmlns:p14="http://schemas.microsoft.com/office/powerpoint/2010/main" xmlns:p15="http://schemas.microsoft.com/office/powerpoint/2012/main" xmlns:pr="smNativeData" xmlns="smNativeData" val="SMDATA_15_FLquaRMAAAAlAAAAZAAAAA0AAAAAkAAAAEgAAACQAAAASAAAAAAAAAABAAAAAAAAAAEAAABQAAAAAAAAAAAA4D8AAAAAAADgPwAAAAAAAOA/AAAAAAAA4D8AAAAAAADgPwAAAAAAAOA/AAAAAAAA4D8AAAAAAADgPwAAAAAAAOA/AAAAAAAA4D8CAAAAjAAAAAAAAAAAAAAAW5vVDP///wgAAAAAAAAAAAAAAAAAAAAAAAAAAAAAAAAAAAAAZAAAAAEAAABAAAAAAAAAAAAAAAAAAAAAAAAAAAAAAAAAAAAAAAAAAAAAAAAAAAAAAAAAAAAAAAAAAAAAAAAAAAAAAAAAAAAAAAAAAAAAAAAAAAAAAAAAAAAAAAAAAAAAFAAAADwAAAAAAAAAAAAAAAAAAAkUAAAAAQAAABQAAAAUAAAAFAAAAAEAAAAAAAAAZAAAAGQAAAAAAAAAZAAAAGQAAAAVAAAAYAAAAAAAAAAAAAAADwAAACADAAAAAAAAAAAAAAEAAACgMgAAVgcAAKr4//8BAAAAf39/AAEAAABkAAAAAAAAABQAAABAHwAAAAAAACYAAAAAAAAAwOD//wAAAAAmAAAAZAAAABYAAABMAAAAAAAAAAAAAAAEAAAAAAAAAAEAAADn5uYKAAAAACgAAAAoAAAAZAAAAGQAAAAAAAAAzMzMAAAAAABQAAAAUAAAAGQAAABkAAAAAAAAABcAAAAUAAAAAAAAAAAAAAD/fwAA/38AAAAAAAAJAAAABAAAAF8AYAAeAAAAaAAAAAAAAAAAAAAAAAAAAAAAAAAAAAAAECcAABAnAAAAAAAAAAAAAAAAAAAAAAAAAAAAAAAAAAAAAAAAAAAAABQAAAAAAAAAwMD/AAAAAABkAAAAMgAAAAAAAABkAAAAAAAAAH9/fwAKAAAAIgAAABgAAAAAAAAAAAAAAAAAAAAAAAAAAAAAAAAAAAAkAAAAJAAAAAAAAAAHAAAAAAAAAAAAAAAAAAAAAAAAAAAAAAAAAAAAf39/ACUAAABYAAAAAAAAAAAAAAAAAAAAAAAAAAAAAAAAAAAAAAAAAAAAAAAAAAAAAAAAAAAAAAA/AAAAAAAAAKCGAQAAAAAAAAAAAAAAAAAMAAAAAQAAAAAAAAAAAAAAAAAAAB8AAABUAAAAW5vVBf///wEAAAAAAAAAAAAAAAAAAAAAAAAAAAAAAAAAAAAAAAAAAAAAAAJ/f38A5+bmA8zMzADAwP8Af39/AAAAAAAAAAAAAAAAAAAAAAAAAAAAIQAAABgAAAAUAAAAKAUAAD8CAADYRQAAZwoAABAAAAAmAAAACAAAAAAAAAAAAAAA"/>
               </a:ext>
             </a:extLst>
           </p:cNvSpPr>
@@ -4603,7 +4627,7 @@
             <a:spLocks noGrp="1" noChangeArrowheads="1"/>
             <a:extLst>
               <a:ext uri="smNativeData">
-                <pr:smNativeData xmlns="smNativeData" xmlns:pr="smNativeData" xmlns:p15="http://schemas.microsoft.com/office/powerpoint/2012/main" xmlns:p14="http://schemas.microsoft.com/office/powerpoint/2010/main" xmlns:mc="http://schemas.openxmlformats.org/markup-compatibility/2006" val="SMDATA_15_FLquaRMAAAAlAAAAZAAAAA0AAAAAkAAAAEgAAACQAAAASAAAAAAAAAAAAAAAAAAAAAEAAABQAAAAAAAAAAAA4D8AAAAAAADgPwAAAAAAAOA/AAAAAAAA4D8AAAAAAADgPwAAAAAAAOA/AAAAAAAA4D8AAAAAAADgPwAAAAAAAOA/AAAAAAAA4D8CAAAAjAAAAAAAAAAAAAAAW5vVDP///wgAAAAAAAAAAAAAAAAAAAAAAAAAAAAAAAAAAAAAZAAAAAEAAABAAAAAAAAAAAAAAAAAAAAAAAAAAAAAAAAAAAAAAAAAAAAAAAAAAAAAAAAAAAAAAAAAAAAAAAAAAAAAAAAAAAAAAAAAAAAAAAAAAAAAAAAAAAAAAAAAAAAAFAAAADwAAAAAAAAAAAAAAAAAAAkUAAAAAQAAABQAAAAUAAAAFAAAAAEAAAAAAAAAZAAAAGQAAAAAAAAAZAAAAGQAAAAVAAAAYAAAAAAAAAAAAAAADwAAACADAAAAAAAAAAAAAAEAAACgMgAAVgcAAKr4//8BAAAAf39/AAEAAABkAAAAAAAAABQAAABAHwAAAAAAACYAAAAAAAAAwOD//wAAAAAmAAAAZAAAABYAAABMAAAAAAAAAAAAAAAEAAAAAAAAAAEAAADn5uYKAAAAACgAAAAoAAAAZAAAAGQAAAAAAAAAzMzMAAAAAABQAAAAUAAAAGQAAABkAAAAAAAAABcAAAAUAAAAAAAAAAAAAAD/fwAA/38AAAAAAAAJAAAABAAAAAAAAAAeAAAAaAAAAAAAAAAAAAAAAAAAAAAAAAAAAAAAECcAABAnAAAAAAAAAAAAAAAAAAAAAAAAAAAAAAAAAAAAAAAAAAAAABQAAAAAAAAAwMD/AAAAAABkAAAAMgAAAAAAAABkAAAAAAAAAH9/fwAKAAAAIgAAABgAAAAAAAAAAAAAAAAAAAAAAAAAAAAAAAAAAAAkAAAAJAAAAAAAAAAHAAAAAAAAAAAAAAAAAAAAAAAAAAAAAAAAAAAAf39/ACUAAABYAAAAAAAAAAAAAAAAAAAAAAAAAAAAAAAAAAAAAAAAAAAAAAAAAAAAAAAAAAAAAAA/AAAAAAAAAKCGAQAAAAAAAAAAAAAAAAAMAAAAAQAAAAAAAAAAAAAAAAAAAB8AAABUAAAAW5vVBf///wEAAAAAAAAAAAAAAAAAAAAAAAAAAAAAAAAAAAAAAAAAAAAAAAJ/f38A5+bmA8zMzADAwP8Af39/AAAAAAAAAAAAAAAAAAAAAAAAAAAAIQAAABgAAAAUAAAAKAUAADsLAADYRQAAACYAABAAAAAmAAAACAAAAAAAAAAAAAAA"/>
+                <pr:smNativeData xmlns:mc="http://schemas.openxmlformats.org/markup-compatibility/2006" xmlns:p14="http://schemas.microsoft.com/office/powerpoint/2010/main" xmlns:p15="http://schemas.microsoft.com/office/powerpoint/2012/main" xmlns:pr="smNativeData" xmlns="smNativeData" val="SMDATA_15_FLquaRMAAAAlAAAAZAAAAA0AAAAAkAAAAEgAAACQAAAASAAAAAAAAAAAAAAAAAAAAAEAAABQAAAAAAAAAAAA4D8AAAAAAADgPwAAAAAAAOA/AAAAAAAA4D8AAAAAAADgPwAAAAAAAOA/AAAAAAAA4D8AAAAAAADgPwAAAAAAAOA/AAAAAAAA4D8CAAAAjAAAAAAAAAAAAAAAW5vVDP///wgAAAAAAAAAAAAAAAAAAAAAAAAAAAAAAAAAAAAAZAAAAAEAAABAAAAAAAAAAAAAAAAAAAAAAAAAAAAAAAAAAAAAAAAAAAAAAAAAAAAAAAAAAAAAAAAAAAAAAAAAAAAAAAAAAAAAAAAAAAAAAAAAAAAAAAAAAAAAAAAAAAAAFAAAADwAAAAAAAAAAAAAAAAAAAkUAAAAAQAAABQAAAAUAAAAFAAAAAEAAAAAAAAAZAAAAGQAAAAAAAAAZAAAAGQAAAAVAAAAYAAAAAAAAAAAAAAADwAAACADAAAAAAAAAAAAAAEAAACgMgAAVgcAAKr4//8BAAAAf39/AAEAAABkAAAAAAAAABQAAABAHwAAAAAAACYAAAAAAAAAwOD//wAAAAAmAAAAZAAAABYAAABMAAAAAAAAAAAAAAAEAAAAAAAAAAEAAADn5uYKAAAAACgAAAAoAAAAZAAAAGQAAAAAAAAAzMzMAAAAAABQAAAAUAAAAGQAAABkAAAAAAAAABcAAAAUAAAAAAAAAAAAAAD/fwAA/38AAAAAAAAJAAAABAAAAAAAAAAeAAAAaAAAAAAAAAAAAAAAAAAAAAAAAAAAAAAAECcAABAnAAAAAAAAAAAAAAAAAAAAAAAAAAAAAAAAAAAAAAAAAAAAABQAAAAAAAAAwMD/AAAAAABkAAAAMgAAAAAAAABkAAAAAAAAAH9/fwAKAAAAIgAAABgAAAAAAAAAAAAAAAAAAAAAAAAAAAAAAAAAAAAkAAAAJAAAAAAAAAAHAAAAAAAAAAAAAAAAAAAAAAAAAAAAAAAAAAAAf39/ACUAAABYAAAAAAAAAAAAAAAAAAAAAAAAAAAAAAAAAAAAAAAAAAAAAAAAAAAAAAAAAAAAAAA/AAAAAAAAAKCGAQAAAAAAAAAAAAAAAAAMAAAAAQAAAAAAAAAAAAAAAAAAAB8AAABUAAAAW5vVBf///wEAAAAAAAAAAAAAAAAAAAAAAAAAAAAAAAAAAAAAAAAAAAAAAAJ/f38A5+bmA8zMzADAwP8Af39/AAAAAAAAAAAAAAAAAAAAAAAAAAAAIQAAABgAAAAUAAAAKAUAADsLAADYRQAAACYAABAAAAAmAAAACAAAAAAAAAAAAAAA"/>
               </a:ext>
             </a:extLst>
           </p:cNvSpPr>
@@ -4691,7 +4715,7 @@
             <a:spLocks noGrp="1" noChangeArrowheads="1"/>
             <a:extLst>
               <a:ext uri="smNativeData">
-                <pr:smNativeData xmlns="smNativeData" xmlns:pr="smNativeData" xmlns:p15="http://schemas.microsoft.com/office/powerpoint/2012/main" xmlns:p14="http://schemas.microsoft.com/office/powerpoint/2010/main" xmlns:mc="http://schemas.openxmlformats.org/markup-compatibility/2006" val="SMDATA_15_FLquaRMAAAAlAAAAZAAAAA0AAAAAkAAAAEgAAACQAAAASAAAAAAAAAABAAAAAAAAAAEAAABQAAAAAAAAAAAA4D8AAAAAAADgPwAAAAAAAOA/AAAAAAAA4D8AAAAAAADgPwAAAAAAAOA/AAAAAAAA4D8AAAAAAADgPwAAAAAAAOA/AAAAAAAA4D8CAAAAjAAAAAAAAAAAAAAAW5vVDP///wgAAAAAAAAAAAAAAAAAAAAAAAAAAAAAAAAAAAAAZAAAAAEAAABAAAAAAAAAAAAAAAAAAAAAAAAAAAAAAAAAAAAAAAAAAAAAAAAAAAAAAAAAAAAAAAAAAAAAAAAAAAAAAAAAAAAAAAAAAAAAAAAAAAAAAAAAAAAAAAAAAAAAFAAAADwAAAAAAAAAAAAAAAAAAAkUAAAAAQAAABQAAAAUAAAAFAAAAAEAAAAAAAAAZAAAAGQAAAAAAAAAZAAAAGQAAAAVAAAAYAAAAAAAAAAAAAAADwAAACADAAAAAAAAAAAAAAEAAACgMgAAVgcAAKr4//8BAAAAf39/AAEAAABkAAAAAAAAABQAAABAHwAAAAAAACYAAAAAAAAAwOD//wAAAAAmAAAAZAAAABYAAABMAAAAAAAAAAAAAAAEAAAAAAAAAAEAAADn5uYKAAAAACgAAAAoAAAAZAAAAGQAAAAAAAAAzMzMAAAAAABQAAAAUAAAAGQAAABkAAAAAAAAABcAAAAUAAAAAAAAAAAAAAD/fwAA/38AAAAAAAAJAAAABAAAAAAAAAAeAAAAaAAAAAAAAAAAAAAAAAAAAAAAAAAAAAAAECcAABAnAAAAAAAAAAAAAAAAAAAAAAAAAAAAAAAAAAAAAAAAAAAAABQAAAAAAAAAwMD/AAAAAABkAAAAMgAAAAAAAABkAAAAAAAAAH9/fwAKAAAAIgAAABgAAAAAAAAAAAAAAAAAAAAAAAAAAAAAAAAAAAAkAAAAJAAAAAAAAAAHAAAAAAAAAAAAAAAAAAAAAAAAAAAAAAAAAAAAf39/ACUAAABYAAAAAAAAAAAAAAAAAAAAAAAAAAAAAAAAAAAAAAAAAAAAAAAAAAAAAAAAAAAAAAA/AAAAAAAAAKCGAQAAAAAAAAAAAAAAAAAMAAAAAQAAAAAAAAAAAAAAAAAAAB8AAABUAAAAW5vVBf///wEAAAAAAAAAAAAAAAAAAAAAAAAAAAAAAAAAAAAAAAAAAAAAAAJ/f38A5+bmA8zMzADAwP8Af39/AAAAAAAAAAAAAAAAAAAAAAAAAAAAIQAAABgAAAAUAAAAKAUAAD8CAADYRQAAZwoAABAAAAAmAAAACAAAAAAAAAAAAAAA"/>
+                <pr:smNativeData xmlns:mc="http://schemas.openxmlformats.org/markup-compatibility/2006" xmlns:p14="http://schemas.microsoft.com/office/powerpoint/2010/main" xmlns:p15="http://schemas.microsoft.com/office/powerpoint/2012/main" xmlns:pr="smNativeData" xmlns="smNativeData" val="SMDATA_15_FLquaRMAAAAlAAAAZAAAAA0AAAAAkAAAAEgAAACQAAAASAAAAAAAAAABAAAAAAAAAAEAAABQAAAAAAAAAAAA4D8AAAAAAADgPwAAAAAAAOA/AAAAAAAA4D8AAAAAAADgPwAAAAAAAOA/AAAAAAAA4D8AAAAAAADgPwAAAAAAAOA/AAAAAAAA4D8CAAAAjAAAAAAAAAAAAAAAW5vVDP///wgAAAAAAAAAAAAAAAAAAAAAAAAAAAAAAAAAAAAAZAAAAAEAAABAAAAAAAAAAAAAAAAAAAAAAAAAAAAAAAAAAAAAAAAAAAAAAAAAAAAAAAAAAAAAAAAAAAAAAAAAAAAAAAAAAAAAAAAAAAAAAAAAAAAAAAAAAAAAAAAAAAAAFAAAADwAAAAAAAAAAAAAAAAAAAkUAAAAAQAAABQAAAAUAAAAFAAAAAEAAAAAAAAAZAAAAGQAAAAAAAAAZAAAAGQAAAAVAAAAYAAAAAAAAAAAAAAADwAAACADAAAAAAAAAAAAAAEAAACgMgAAVgcAAKr4//8BAAAAf39/AAEAAABkAAAAAAAAABQAAABAHwAAAAAAACYAAAAAAAAAwOD//wAAAAAmAAAAZAAAABYAAABMAAAAAAAAAAAAAAAEAAAAAAAAAAEAAADn5uYKAAAAACgAAAAoAAAAZAAAAGQAAAAAAAAAzMzMAAAAAABQAAAAUAAAAGQAAABkAAAAAAAAABcAAAAUAAAAAAAAAAAAAAD/fwAA/38AAAAAAAAJAAAABAAAAAAAAAAeAAAAaAAAAAAAAAAAAAAAAAAAAAAAAAAAAAAAECcAABAnAAAAAAAAAAAAAAAAAAAAAAAAAAAAAAAAAAAAAAAAAAAAABQAAAAAAAAAwMD/AAAAAABkAAAAMgAAAAAAAABkAAAAAAAAAH9/fwAKAAAAIgAAABgAAAAAAAAAAAAAAAAAAAAAAAAAAAAAAAAAAAAkAAAAJAAAAAAAAAAHAAAAAAAAAAAAAAAAAAAAAAAAAAAAAAAAAAAAf39/ACUAAABYAAAAAAAAAAAAAAAAAAAAAAAAAAAAAAAAAAAAAAAAAAAAAAAAAAAAAAAAAAAAAAA/AAAAAAAAAKCGAQAAAAAAAAAAAAAAAAAMAAAAAQAAAAAAAAAAAAAAAAAAAB8AAABUAAAAW5vVBf///wEAAAAAAAAAAAAAAAAAAAAAAAAAAAAAAAAAAAAAAAAAAAAAAAJ/f38A5+bmA8zMzADAwP8Af39/AAAAAAAAAAAAAAAAAAAAAAAAAAAAIQAAABgAAAAUAAAAKAUAAD8CAADYRQAAZwoAABAAAAAmAAAACAAAAAAAAAAAAAAA"/>
               </a:ext>
             </a:extLst>
           </p:cNvSpPr>
@@ -4720,7 +4744,7 @@
             <a:spLocks noGrp="1" noChangeArrowheads="1"/>
             <a:extLst>
               <a:ext uri="smNativeData">
-                <pr:smNativeData xmlns="smNativeData" xmlns:pr="smNativeData" xmlns:p15="http://schemas.microsoft.com/office/powerpoint/2012/main" xmlns:p14="http://schemas.microsoft.com/office/powerpoint/2010/main" xmlns:mc="http://schemas.openxmlformats.org/markup-compatibility/2006" val="SMDATA_15_FLquaRMAAAAlAAAAZAAAAA0AAAAAkAAAAEgAAACQAAAASAAAAAAAAAAAAAAAAAAAAAEAAABQAAAAAAAAAAAA4D8AAAAAAADgPwAAAAAAAOA/AAAAAAAA4D8AAAAAAADgPwAAAAAAAOA/AAAAAAAA4D8AAAAAAADgPwAAAAAAAOA/AAAAAAAA4D8CAAAAjAAAAAAAAAAAAAAAW5vVDP///wgAAAAAAAAAAAAAAAAAAAAAAAAAAAAAAAAAAAAAZAAAAAEAAABAAAAAAAAAAAAAAAAAAAAAAAAAAAAAAAAAAAAAAAAAAAAAAAAAAAAAAAAAAAAAAAAAAAAAAAAAAAAAAAAAAAAAAAAAAAAAAAAAAAAAAAAAAAAAAAAAAAAAFAAAADwAAAAAAAAAAAAAAAAAAAkUAAAAAQAAABQAAAAUAAAAFAAAAAEAAAAAAAAAZAAAAGQAAAAAAAAAZAAAAGQAAAAVAAAAYAAAAAAAAAAAAAAADwAAACADAAAAAAAAAAAAAAEAAACgMgAAVgcAAKr4//8BAAAAf39/AAEAAABkAAAAAAAAABQAAABAHwAAAAAAACYAAAAAAAAAwOD//wAAAAAmAAAAZAAAABYAAABMAAAAAAAAAAAAAAAEAAAAAAAAAAEAAADn5uYKAAAAACgAAAAoAAAAZAAAAGQAAAAAAAAAzMzMAAAAAABQAAAAUAAAAGQAAABkAAAAAAAAABcAAAAUAAAAAAAAAAAAAAD/fwAA/38AAAAAAAAJAAAABAAAAGOVQsIeAAAAaAAAAAAAAAAAAAAAAAAAAAAAAAAAAAAAECcAABAnAAAAAAAAAAAAAAAAAAAAAAAAAAAAAAAAAAAAAAAAAAAAABQAAAAAAAAAwMD/AAAAAABkAAAAMgAAAAAAAABkAAAAAAAAAH9/fwAKAAAAIgAAABgAAAAAAAAAAAAAAAAAAAAAAAAAAAAAAAAAAAAkAAAAJAAAAAAAAAAHAAAAAAAAAAAAAAAAAAAAAAAAAAAAAAAAAAAAf39/ACUAAABYAAAAAAAAAAAAAAAAAAAAAAAAAAAAAAAAAAAAAAAAAAAAAAAAAAAAAAAAAAAAAAA/AAAAAAAAAKCGAQAAAAAAAAAAAAAAAAAMAAAAAQAAAAAAAAAAAAAAAAAAAB8AAABUAAAAW5vVBf///wEAAAAAAAAAAAAAAAAAAAAAAAAAAAAAAAAAAAAAAAAAAAAAAAJ/f38A5+bmA8zMzADAwP8Af39/AAAAAAAAAAAAAAAAAAAAAAAAAAAAIQAAABgAAAAUAAAAKAUAADsLAADYRQAAACYAABAAAAAmAAAACAAAAAAAAAAAAAAA"/>
+                <pr:smNativeData xmlns:mc="http://schemas.openxmlformats.org/markup-compatibility/2006" xmlns:p14="http://schemas.microsoft.com/office/powerpoint/2010/main" xmlns:p15="http://schemas.microsoft.com/office/powerpoint/2012/main" xmlns:pr="smNativeData" xmlns="smNativeData" val="SMDATA_15_FLquaRMAAAAlAAAAZAAAAA0AAAAAkAAAAEgAAACQAAAASAAAAAAAAAAAAAAAAAAAAAEAAABQAAAAAAAAAAAA4D8AAAAAAADgPwAAAAAAAOA/AAAAAAAA4D8AAAAAAADgPwAAAAAAAOA/AAAAAAAA4D8AAAAAAADgPwAAAAAAAOA/AAAAAAAA4D8CAAAAjAAAAAAAAAAAAAAAW5vVDP///wgAAAAAAAAAAAAAAAAAAAAAAAAAAAAAAAAAAAAAZAAAAAEAAABAAAAAAAAAAAAAAAAAAAAAAAAAAAAAAAAAAAAAAAAAAAAAAAAAAAAAAAAAAAAAAAAAAAAAAAAAAAAAAAAAAAAAAAAAAAAAAAAAAAAAAAAAAAAAAAAAAAAAFAAAADwAAAAAAAAAAAAAAAAAAAkUAAAAAQAAABQAAAAUAAAAFAAAAAEAAAAAAAAAZAAAAGQAAAAAAAAAZAAAAGQAAAAVAAAAYAAAAAAAAAAAAAAADwAAACADAAAAAAAAAAAAAAEAAACgMgAAVgcAAKr4//8BAAAAf39/AAEAAABkAAAAAAAAABQAAABAHwAAAAAAACYAAAAAAAAAwOD//wAAAAAmAAAAZAAAABYAAABMAAAAAAAAAAAAAAAEAAAAAAAAAAEAAADn5uYKAAAAACgAAAAoAAAAZAAAAGQAAAAAAAAAzMzMAAAAAABQAAAAUAAAAGQAAABkAAAAAAAAABcAAAAUAAAAAAAAAAAAAAD/fwAA/38AAAAAAAAJAAAABAAAAGOVQsIeAAAAaAAAAAAAAAAAAAAAAAAAAAAAAAAAAAAAECcAABAnAAAAAAAAAAAAAAAAAAAAAAAAAAAAAAAAAAAAAAAAAAAAABQAAAAAAAAAwMD/AAAAAABkAAAAMgAAAAAAAABkAAAAAAAAAH9/fwAKAAAAIgAAABgAAAAAAAAAAAAAAAAAAAAAAAAAAAAAAAAAAAAkAAAAJAAAAAAAAAAHAAAAAAAAAAAAAAAAAAAAAAAAAAAAAAAAAAAAf39/ACUAAABYAAAAAAAAAAAAAAAAAAAAAAAAAAAAAAAAAAAAAAAAAAAAAAAAAAAAAAAAAAAAAAA/AAAAAAAAAKCGAQAAAAAAAAAAAAAAAAAMAAAAAQAAAAAAAAAAAAAAAAAAAB8AAABUAAAAW5vVBf///wEAAAAAAAAAAAAAAAAAAAAAAAAAAAAAAAAAAAAAAAAAAAAAAAJ/f38A5+bmA8zMzADAwP8Af39/AAAAAAAAAAAAAAAAAAAAAAAAAAAAIQAAABgAAAAUAAAAKAUAADsLAADYRQAAACYAABAAAAAmAAAACAAAAAAAAAAAAAAA"/>
               </a:ext>
             </a:extLst>
           </p:cNvSpPr>
@@ -4846,7 +4870,7 @@
             <a:spLocks noGrp="1" noChangeArrowheads="1"/>
             <a:extLst>
               <a:ext uri="smNativeData">
-                <pr:smNativeData xmlns="smNativeData" xmlns:pr="smNativeData" xmlns:p15="http://schemas.microsoft.com/office/powerpoint/2012/main" xmlns:p14="http://schemas.microsoft.com/office/powerpoint/2010/main" xmlns:mc="http://schemas.openxmlformats.org/markup-compatibility/2006" val="SMDATA_15_FLquaRMAAAAlAAAAZAAAAA0AAAAAkAAAAEgAAACQAAAASAAAAAAAAAABAAAAAAAAAAEAAABQAAAAAAAAAAAA4D8AAAAAAADgPwAAAAAAAOA/AAAAAAAA4D8AAAAAAADgPwAAAAAAAOA/AAAAAAAA4D8AAAAAAADgPwAAAAAAAOA/AAAAAAAA4D8CAAAAjAAAAAAAAAAAAAAAW5vVDP///wgAAAAAAAAAAAAAAAAAAAAAAAAAAAAAAAAAAAAAZAAAAAEAAABAAAAAAAAAAAAAAAAAAAAAAAAAAAAAAAAAAAAAAAAAAAAAAAAAAAAAAAAAAAAAAAAAAAAAAAAAAAAAAAAAAAAAAAAAAAAAAAAAAAAAAAAAAAAAAAAAAAAAFAAAADwAAAAAAAAAAAAAAAAAAAkUAAAAAQAAABQAAAAUAAAAFAAAAAEAAAAAAAAAZAAAAGQAAAAAAAAAZAAAAGQAAAAVAAAAYAAAAAAAAAAAAAAADwAAACADAAAAAAAAAAAAAAEAAACgMgAAVgcAAKr4//8BAAAAf39/AAEAAABkAAAAAAAAABQAAABAHwAAAAAAACYAAAAAAAAAwOD//wAAAAAmAAAAZAAAABYAAABMAAAAAAAAAAAAAAAEAAAAAAAAAAEAAADn5uYKAAAAACgAAAAoAAAAZAAAAGQAAAAAAAAAzMzMAAAAAABQAAAAUAAAAGQAAABkAAAAAAAAABcAAAAUAAAAAAAAAAAAAAD/fwAA/38AAAAAAAAJAAAABAAAAF8AYAAeAAAAaAAAAAAAAAAAAAAAAAAAAAAAAAAAAAAAECcAABAnAAAAAAAAAAAAAAAAAAAAAAAAAAAAAAAAAAAAAAAAAAAAABQAAAAAAAAAwMD/AAAAAABkAAAAMgAAAAAAAABkAAAAAAAAAH9/fwAKAAAAIgAAABgAAAAAAAAAAAAAAAAAAAAAAAAAAAAAAAAAAAAkAAAAJAAAAAAAAAAHAAAAAAAAAAAAAAAAAAAAAAAAAAAAAAAAAAAAf39/ACUAAABYAAAAAAAAAAAAAAAAAAAAAAAAAAAAAAAAAAAAAAAAAAAAAAAAAAAAAAAAAAAAAAA/AAAAAAAAAKCGAQAAAAAAAAAAAAAAAAAMAAAAAQAAAAAAAAAAAAAAAAAAAB8AAABUAAAAW5vVBf///wEAAAAAAAAAAAAAAAAAAAAAAAAAAAAAAAAAAAAAAAAAAAAAAAJ/f38A5+bmA8zMzADAwP8Af39/AAAAAAAAAAAAAAAAAAAAAAAAAAAAIQAAABgAAAAUAAAAKAUAAD8CAADYRQAAZwoAABAAAAAmAAAACAAAAAAAAAAAAAAA"/>
+                <pr:smNativeData xmlns:mc="http://schemas.openxmlformats.org/markup-compatibility/2006" xmlns:p14="http://schemas.microsoft.com/office/powerpoint/2010/main" xmlns:p15="http://schemas.microsoft.com/office/powerpoint/2012/main" xmlns:pr="smNativeData" xmlns="smNativeData" val="SMDATA_15_FLquaRMAAAAlAAAAZAAAAA0AAAAAkAAAAEgAAACQAAAASAAAAAAAAAABAAAAAAAAAAEAAABQAAAAAAAAAAAA4D8AAAAAAADgPwAAAAAAAOA/AAAAAAAA4D8AAAAAAADgPwAAAAAAAOA/AAAAAAAA4D8AAAAAAADgPwAAAAAAAOA/AAAAAAAA4D8CAAAAjAAAAAAAAAAAAAAAW5vVDP///wgAAAAAAAAAAAAAAAAAAAAAAAAAAAAAAAAAAAAAZAAAAAEAAABAAAAAAAAAAAAAAAAAAAAAAAAAAAAAAAAAAAAAAAAAAAAAAAAAAAAAAAAAAAAAAAAAAAAAAAAAAAAAAAAAAAAAAAAAAAAAAAAAAAAAAAAAAAAAAAAAAAAAFAAAADwAAAAAAAAAAAAAAAAAAAkUAAAAAQAAABQAAAAUAAAAFAAAAAEAAAAAAAAAZAAAAGQAAAAAAAAAZAAAAGQAAAAVAAAAYAAAAAAAAAAAAAAADwAAACADAAAAAAAAAAAAAAEAAACgMgAAVgcAAKr4//8BAAAAf39/AAEAAABkAAAAAAAAABQAAABAHwAAAAAAACYAAAAAAAAAwOD//wAAAAAmAAAAZAAAABYAAABMAAAAAAAAAAAAAAAEAAAAAAAAAAEAAADn5uYKAAAAACgAAAAoAAAAZAAAAGQAAAAAAAAAzMzMAAAAAABQAAAAUAAAAGQAAABkAAAAAAAAABcAAAAUAAAAAAAAAAAAAAD/fwAA/38AAAAAAAAJAAAABAAAAF8AYAAeAAAAaAAAAAAAAAAAAAAAAAAAAAAAAAAAAAAAECcAABAnAAAAAAAAAAAAAAAAAAAAAAAAAAAAAAAAAAAAAAAAAAAAABQAAAAAAAAAwMD/AAAAAABkAAAAMgAAAAAAAABkAAAAAAAAAH9/fwAKAAAAIgAAABgAAAAAAAAAAAAAAAAAAAAAAAAAAAAAAAAAAAAkAAAAJAAAAAAAAAAHAAAAAAAAAAAAAAAAAAAAAAAAAAAAAAAAAAAAf39/ACUAAABYAAAAAAAAAAAAAAAAAAAAAAAAAAAAAAAAAAAAAAAAAAAAAAAAAAAAAAAAAAAAAAA/AAAAAAAAAKCGAQAAAAAAAAAAAAAAAAAMAAAAAQAAAAAAAAAAAAAAAAAAAB8AAABUAAAAW5vVBf///wEAAAAAAAAAAAAAAAAAAAAAAAAAAAAAAAAAAAAAAAAAAAAAAAJ/f38A5+bmA8zMzADAwP8Af39/AAAAAAAAAAAAAAAAAAAAAAAAAAAAIQAAABgAAAAUAAAAKAUAAD8CAADYRQAAZwoAABAAAAAmAAAACAAAAAAAAAAAAAAA"/>
               </a:ext>
             </a:extLst>
           </p:cNvSpPr>
@@ -4875,7 +4899,7 @@
             <a:spLocks noGrp="1" noChangeArrowheads="1"/>
             <a:extLst>
               <a:ext uri="smNativeData">
-                <pr:smNativeData xmlns="smNativeData" xmlns:pr="smNativeData" xmlns:p15="http://schemas.microsoft.com/office/powerpoint/2012/main" xmlns:p14="http://schemas.microsoft.com/office/powerpoint/2010/main" xmlns:mc="http://schemas.openxmlformats.org/markup-compatibility/2006" val="SMDATA_15_FLquaRMAAAAlAAAAZAAAAA0AAAAAkAAAAEgAAACQAAAASAAAAAAAAAAAAAAAAAAAAAEAAABQAAAAAAAAAAAA4D8AAAAAAADgPwAAAAAAAOA/AAAAAAAA4D8AAAAAAADgPwAAAAAAAOA/AAAAAAAA4D8AAAAAAADgPwAAAAAAAOA/AAAAAAAA4D8CAAAAjAAAAAAAAAAAAAAAW5vVDP///wgAAAAAAAAAAAAAAAAAAAAAAAAAAAAAAAAAAAAAZAAAAAEAAABAAAAAAAAAAAAAAAAAAAAAAAAAAAAAAAAAAAAAAAAAAAAAAAAAAAAAAAAAAAAAAAAAAAAAAAAAAAAAAAAAAAAAAAAAAAAAAAAAAAAAAAAAAAAAAAAAAAAAFAAAADwAAAAAAAAAAAAAAAAAAAkUAAAAAQAAABQAAAAUAAAAFAAAAAEAAAAAAAAAZAAAAGQAAAAAAAAAZAAAAGQAAAAVAAAAYAAAAAAAAAAAAAAADwAAACADAAAAAAAAAAAAAAEAAACgMgAAVgcAAKr4//8BAAAAf39/AAEAAABkAAAAAAAAABQAAABAHwAAAAAAACYAAAAAAAAAwOD//wAAAAAmAAAAZAAAABYAAABMAAAAAAAAAAAAAAAEAAAAAAAAAAEAAADn5uYKAAAAACgAAAAoAAAAZAAAAGQAAAAAAAAAzMzMAAAAAABQAAAAUAAAAGQAAABkAAAAAAAAABcAAAAUAAAAAAAAAAAAAAD/fwAA/38AAAAAAAAJAAAABAAAAAEAAAAeAAAAaAAAAAAAAAAAAAAAAAAAAAAAAAAAAAAAECcAABAnAAAAAAAAAAAAAAAAAAAAAAAAAAAAAAAAAAAAAAAAAAAAABQAAAAAAAAAwMD/AAAAAABkAAAAMgAAAAAAAABkAAAAAAAAAH9/fwAKAAAAIgAAABgAAAAAAAAAAAAAAAAAAAAAAAAAAAAAAAAAAAAkAAAAJAAAAAAAAAAHAAAAAAAAAAAAAAAAAAAAAAAAAAAAAAAAAAAAf39/ACUAAABYAAAAAAAAAAAAAAAAAAAAAAAAAAAAAAAAAAAAAAAAAAAAAAAAAAAAAAAAAAAAAAA/AAAAAAAAAKCGAQAAAAAAAAAAAAAAAAAMAAAAAQAAAAAAAAAAAAAAAAAAAB8AAABUAAAAW5vVBf///wEAAAAAAAAAAAAAAAAAAAAAAAAAAAAAAAAAAAAAAAAAAAAAAAJ/f38A5+bmA8zMzADAwP8Af39/AAAAAAAAAAAAAAAAAAAAAAAAAAAAIQAAABgAAAAUAAAAKAUAAE8QAADYRQAA/yUAABAAAAAmAAAACAAAAAEgAAAAAAAA"/>
+                <pr:smNativeData xmlns:mc="http://schemas.openxmlformats.org/markup-compatibility/2006" xmlns:p14="http://schemas.microsoft.com/office/powerpoint/2010/main" xmlns:p15="http://schemas.microsoft.com/office/powerpoint/2012/main" xmlns:pr="smNativeData" xmlns="smNativeData" val="SMDATA_15_FLquaRMAAAAlAAAAZAAAAA0AAAAAkAAAAEgAAACQAAAASAAAAAAAAAAAAAAAAAAAAAEAAABQAAAAAAAAAAAA4D8AAAAAAADgPwAAAAAAAOA/AAAAAAAA4D8AAAAAAADgPwAAAAAAAOA/AAAAAAAA4D8AAAAAAADgPwAAAAAAAOA/AAAAAAAA4D8CAAAAjAAAAAAAAAAAAAAAW5vVDP///wgAAAAAAAAAAAAAAAAAAAAAAAAAAAAAAAAAAAAAZAAAAAEAAABAAAAAAAAAAAAAAAAAAAAAAAAAAAAAAAAAAAAAAAAAAAAAAAAAAAAAAAAAAAAAAAAAAAAAAAAAAAAAAAAAAAAAAAAAAAAAAAAAAAAAAAAAAAAAAAAAAAAAFAAAADwAAAAAAAAAAAAAAAAAAAkUAAAAAQAAABQAAAAUAAAAFAAAAAEAAAAAAAAAZAAAAGQAAAAAAAAAZAAAAGQAAAAVAAAAYAAAAAAAAAAAAAAADwAAACADAAAAAAAAAAAAAAEAAACgMgAAVgcAAKr4//8BAAAAf39/AAEAAABkAAAAAAAAABQAAABAHwAAAAAAACYAAAAAAAAAwOD//wAAAAAmAAAAZAAAABYAAABMAAAAAAAAAAAAAAAEAAAAAAAAAAEAAADn5uYKAAAAACgAAAAoAAAAZAAAAGQAAAAAAAAAzMzMAAAAAABQAAAAUAAAAGQAAABkAAAAAAAAABcAAAAUAAAAAAAAAAAAAAD/fwAA/38AAAAAAAAJAAAABAAAAAEAAAAeAAAAaAAAAAAAAAAAAAAAAAAAAAAAAAAAAAAAECcAABAnAAAAAAAAAAAAAAAAAAAAAAAAAAAAAAAAAAAAAAAAAAAAABQAAAAAAAAAwMD/AAAAAABkAAAAMgAAAAAAAABkAAAAAAAAAH9/fwAKAAAAIgAAABgAAAAAAAAAAAAAAAAAAAAAAAAAAAAAAAAAAAAkAAAAJAAAAAAAAAAHAAAAAAAAAAAAAAAAAAAAAAAAAAAAAAAAAAAAf39/ACUAAABYAAAAAAAAAAAAAAAAAAAAAAAAAAAAAAAAAAAAAAAAAAAAAAAAAAAAAAAAAAAAAAA/AAAAAAAAAKCGAQAAAAAAAAAAAAAAAAAMAAAAAQAAAAAAAAAAAAAAAAAAAB8AAABUAAAAW5vVBf///wEAAAAAAAAAAAAAAAAAAAAAAAAAAAAAAAAAAAAAAAAAAAAAAAJ/f38A5+bmA8zMzADAwP8Af39/AAAAAAAAAAAAAAAAAAAAAAAAAAAAIQAAABgAAAAUAAAAKAUAAE8QAADYRQAA/yUAABAAAAAmAAAACAAAAAEgAAAAAAAA"/>
               </a:ext>
             </a:extLst>
           </p:cNvSpPr>
@@ -4971,7 +4995,7 @@
             <a:picLocks noChangeAspect="1"/>
             <a:extLst>
               <a:ext uri="smNativeData">
-                <pr:smNativeData xmlns="smNativeData" xmlns:pr="smNativeData" xmlns:p15="http://schemas.microsoft.com/office/powerpoint/2012/main" xmlns:p14="http://schemas.microsoft.com/office/powerpoint/2010/main" xmlns:mc="http://schemas.openxmlformats.org/markup-compatibility/2006" val="SMDATA_17_FLquaRMAAAAlAAAAEQAAAC0AAAAAkAAAAEgAAACQAAAASAAAAAAAAAAAAAAAAAAAAAEAAABQAAAAAAAAAAAA4D8AAAAAAADgPwAAAAAAAOA/AAAAAAAA4D8AAAAAAADgPwAAAAAAAOA/AAAAAAAA4D8AAAAAAADgPwAAAAAAAOA/AAAAAAAA4D8CAAAAjAAAAAAAAAAAAAAAW5vVDP///wgAAAAAAAAAAAAAAAAAAAAAAAAAAAAAAAAAAAAAZAAAAAEAAABAAAAAAAAAAAAAAAAAAAAAAAAAAAAAAAAAAAAAAAAAAAAAAAAAAAAAAAAAAAAAAAAAAAAAAAAAAAAAAAAAAAAAAAAAAAAAAAAAAAAAAAAAAAAAAAAAAAAAFAAAADwAAAAAAAAAAAAAAAAAAAkUAAAAAQAAABQAAAAUAAAAFAAAAAEAAAAAAAAAZAAAAGQAAAAAAAAAZAAAAGQAAAAVAAAAYAAAAAAAAAAAAAAADwAAACADAAAAAAAAAAAAAAEAAACgMgAAVgcAAKr4//8BAAAAf39/AAEAAABkAAAAAAAAABQAAABAHwAAAAAAACYAAAAAAAAAwOD//wAAAAAmAAAAZAAAABYAAABMAAAAAAAAAAAAAAAEAAAAAAAAAAEAAADn5uYKAAAAACgAAAAoAAAAZAAAAGQAAAAAAAAAzMzMAAAAAABQAAAAUAAAAGQAAABkAAAAAAAAAAcAAAA4AAAAAAAAAAAAAAAAAAAA////AAAAAAAAAAAAAAAAAAAAAAAAAAAAAAAAAAAAAABkAAAAZAAAAAAAAAAjAAAABAAAAGQAAAAXAAAAFAAAAAAAAAAAAAAA/38AAP9/AAAAAAAACQAAAAQAAAAKAAAAHgAAAGgAAAAAAAAAAAAAAAAAAAAAAAAAAAAAABAnAAAQJwAAAAAAAAAAAAAAAAAAAAAAAAAAAAAAAAAAAAAAAAAAAAAUAAAAAAAAAMDA/wAAAAAAZAAAADIAAAAAAAAAZAAAAAAAAAB/f38ACgAAACIAAAAYAAAAAAAAAAAAAAAAAAAAAAAAAAAAAAAAAAAAJAAAACQAAAAAAAAABwAAAAAAAAAAAAAAAAAAAAAAAAAAAAAAAAAAAH9/fwAlAAAAWAAAAAAAAAAAAAAAAAAAAAAAAAAAAAAAAAAAAAAAAAAAAAAAAAAAAAAAAAAAAAAAPwAAAAAAAACghgEAAAAAAAAAAAAAAAAADAAAAAEAAAAAAAAAAAAAAAAAAAAfAAAAVAAAAFub1QX///8BAAAAAAAAAAAAAAAAAAAAAAAAAAAAAAAAAAAAAAAAAAAAAAACf39/AOfm5gPMzMwAwMD/AH9/fwAAAAAAAAAAAAAAAAD///8AAAAAACEAAAAYAAAAFAAAADsfAAAaCQAAqigAAE8QAAAQAAAAJgAAAAgAAAD//////////w=="/>
+                <pr:smNativeData xmlns:mc="http://schemas.openxmlformats.org/markup-compatibility/2006" xmlns:p14="http://schemas.microsoft.com/office/powerpoint/2010/main" xmlns:p15="http://schemas.microsoft.com/office/powerpoint/2012/main" xmlns:pr="smNativeData" xmlns="smNativeData" val="SMDATA_17_FLquaRMAAAAlAAAAEQAAAC0AAAAAkAAAAEgAAACQAAAASAAAAAAAAAAAAAAAAAAAAAEAAABQAAAAAAAAAAAA4D8AAAAAAADgPwAAAAAAAOA/AAAAAAAA4D8AAAAAAADgPwAAAAAAAOA/AAAAAAAA4D8AAAAAAADgPwAAAAAAAOA/AAAAAAAA4D8CAAAAjAAAAAAAAAAAAAAAW5vVDP///wgAAAAAAAAAAAAAAAAAAAAAAAAAAAAAAAAAAAAAZAAAAAEAAABAAAAAAAAAAAAAAAAAAAAAAAAAAAAAAAAAAAAAAAAAAAAAAAAAAAAAAAAAAAAAAAAAAAAAAAAAAAAAAAAAAAAAAAAAAAAAAAAAAAAAAAAAAAAAAAAAAAAAFAAAADwAAAAAAAAAAAAAAAAAAAkUAAAAAQAAABQAAAAUAAAAFAAAAAEAAAAAAAAAZAAAAGQAAAAAAAAAZAAAAGQAAAAVAAAAYAAAAAAAAAAAAAAADwAAACADAAAAAAAAAAAAAAEAAACgMgAAVgcAAKr4//8BAAAAf39/AAEAAABkAAAAAAAAABQAAABAHwAAAAAAACYAAAAAAAAAwOD//wAAAAAmAAAAZAAAABYAAABMAAAAAAAAAAAAAAAEAAAAAAAAAAEAAADn5uYKAAAAACgAAAAoAAAAZAAAAGQAAAAAAAAAzMzMAAAAAABQAAAAUAAAAGQAAABkAAAAAAAAAAcAAAA4AAAAAAAAAAAAAAAAAAAA////AAAAAAAAAAAAAAAAAAAAAAAAAAAAAAAAAAAAAABkAAAAZAAAAAAAAAAjAAAABAAAAGQAAAAXAAAAFAAAAAAAAAAAAAAA/38AAP9/AAAAAAAACQAAAAQAAAAKAAAAHgAAAGgAAAAAAAAAAAAAAAAAAAAAAAAAAAAAABAnAAAQJwAAAAAAAAAAAAAAAAAAAAAAAAAAAAAAAAAAAAAAAAAAAAAUAAAAAAAAAMDA/wAAAAAAZAAAADIAAAAAAAAAZAAAAAAAAAB/f38ACgAAACIAAAAYAAAAAAAAAAAAAAAAAAAAAAAAAAAAAAAAAAAAJAAAACQAAAAAAAAABwAAAAAAAAAAAAAAAAAAAAAAAAAAAAAAAAAAAH9/fwAlAAAAWAAAAAAAAAAAAAAAAAAAAAAAAAAAAAAAAAAAAAAAAAAAAAAAAAAAAAAAAAAAAAAAPwAAAAAAAACghgEAAAAAAAAAAAAAAAAADAAAAAEAAAAAAAAAAAAAAAAAAAAfAAAAVAAAAFub1QX///8BAAAAAAAAAAAAAAAAAAAAAAAAAAAAAAAAAAAAAAAAAAAAAAACf39/AOfm5gPMzMwAwMD/AH9/fwAAAAAAAAAAAAAAAAD///8AAAAAACEAAAAYAAAAFAAAADsfAAAaCQAAqigAAE8QAAAQAAAAJgAAAAgAAAD//////////w=="/>
               </a:ext>
             </a:extLst>
           </p:cNvPicPr>
@@ -5037,7 +5061,7 @@
             <a:spLocks noGrp="1" noChangeArrowheads="1"/>
             <a:extLst>
               <a:ext uri="smNativeData">
-                <pr:smNativeData xmlns="smNativeData" xmlns:pr="smNativeData" xmlns:p15="http://schemas.microsoft.com/office/powerpoint/2012/main" xmlns:p14="http://schemas.microsoft.com/office/powerpoint/2010/main" xmlns:mc="http://schemas.openxmlformats.org/markup-compatibility/2006" val="SMDATA_15_FLquaRMAAAAlAAAAZAAAAA0AAAAAkAAAAEgAAACQAAAASAAAAAAAAAABAAAAAAAAAAEAAABQAAAAAAAAAAAA4D8AAAAAAADgPwAAAAAAAOA/AAAAAAAA4D8AAAAAAADgPwAAAAAAAOA/AAAAAAAA4D8AAAAAAADgPwAAAAAAAOA/AAAAAAAA4D8CAAAAjAAAAAAAAAAAAAAAW5vVDP///wgAAAAAAAAAAAAAAAAAAAAAAAAAAAAAAAAAAAAAZAAAAAEAAABAAAAAAAAAAAAAAAAAAAAAAAAAAAAAAAAAAAAAAAAAAAAAAAAAAAAAAAAAAAAAAAAAAAAAAAAAAAAAAAAAAAAAAAAAAAAAAAAAAAAAAAAAAAAAAAAAAAAAFAAAADwAAAAAAAAAAAAAAAAAAAkUAAAAAQAAABQAAAAUAAAAFAAAAAEAAAAAAAAAZAAAAGQAAAAAAAAAZAAAAGQAAAAVAAAAYAAAAAAAAAAAAAAADwAAACADAAAAAAAAAAAAAAEAAACgMgAAVgcAAKr4//8BAAAAf39/AAEAAABkAAAAAAAAABQAAABAHwAAAAAAACYAAAAAAAAAwOD//wAAAAAmAAAAZAAAABYAAABMAAAAAAAAAAAAAAAEAAAAAAAAAAEAAADn5uYKAAAAACgAAAAoAAAAZAAAAGQAAAAAAAAAzMzMAAAAAABQAAAAUAAAAGQAAABkAAAAAAAAABcAAAAUAAAAAAAAAAAAAAD/fwAA/38AAAAAAAAJAAAABAAAAAAAAAAeAAAAaAAAAAAAAAAAAAAAAAAAAAAAAAAAAAAAECcAABAnAAAAAAAAAAAAAAAAAAAAAAAAAAAAAAAAAAAAAAAAAAAAABQAAAAAAAAAwMD/AAAAAABkAAAAMgAAAAAAAABkAAAAAAAAAH9/fwAKAAAAIgAAABgAAAAAAAAAAAAAAAAAAAAAAAAAAAAAAAAAAAAkAAAAJAAAAAAAAAAHAAAAAAAAAAAAAAAAAAAAAAAAAAAAAAAAAAAAf39/ACUAAABYAAAAAAAAAAAAAAAAAAAAAAAAAAAAAAAAAAAAAAAAAAAAAAAAAAAAAAAAAAAAAAA/AAAAAAAAAKCGAQAAAAAAAAAAAAAAAAAMAAAAAQAAAAAAAAAAAAAAAAAAAB8AAABUAAAAW5vVBf///wEAAAAAAAAAAAAAAAAAAAAAAAAAAAAAAAAAAAAAAAAAAAAAAAJ/f38A5+bmA8zMzADAwP8Af39/AAAAAAAAAAAAAAAAAAAAAAAAAAAAIQAAABgAAAAUAAAAKAUAAD8CAADYRQAAZwoAABAAAAAmAAAACAAAAAAAAAAAAAAA"/>
+                <pr:smNativeData xmlns:mc="http://schemas.openxmlformats.org/markup-compatibility/2006" xmlns:p14="http://schemas.microsoft.com/office/powerpoint/2010/main" xmlns:p15="http://schemas.microsoft.com/office/powerpoint/2012/main" xmlns:pr="smNativeData" xmlns="smNativeData" val="SMDATA_15_FLquaRMAAAAlAAAAZAAAAA0AAAAAkAAAAEgAAACQAAAASAAAAAAAAAABAAAAAAAAAAEAAABQAAAAAAAAAAAA4D8AAAAAAADgPwAAAAAAAOA/AAAAAAAA4D8AAAAAAADgPwAAAAAAAOA/AAAAAAAA4D8AAAAAAADgPwAAAAAAAOA/AAAAAAAA4D8CAAAAjAAAAAAAAAAAAAAAW5vVDP///wgAAAAAAAAAAAAAAAAAAAAAAAAAAAAAAAAAAAAAZAAAAAEAAABAAAAAAAAAAAAAAAAAAAAAAAAAAAAAAAAAAAAAAAAAAAAAAAAAAAAAAAAAAAAAAAAAAAAAAAAAAAAAAAAAAAAAAAAAAAAAAAAAAAAAAAAAAAAAAAAAAAAAFAAAADwAAAAAAAAAAAAAAAAAAAkUAAAAAQAAABQAAAAUAAAAFAAAAAEAAAAAAAAAZAAAAGQAAAAAAAAAZAAAAGQAAAAVAAAAYAAAAAAAAAAAAAAADwAAACADAAAAAAAAAAAAAAEAAACgMgAAVgcAAKr4//8BAAAAf39/AAEAAABkAAAAAAAAABQAAABAHwAAAAAAACYAAAAAAAAAwOD//wAAAAAmAAAAZAAAABYAAABMAAAAAAAAAAAAAAAEAAAAAAAAAAEAAADn5uYKAAAAACgAAAAoAAAAZAAAAGQAAAAAAAAAzMzMAAAAAABQAAAAUAAAAGQAAABkAAAAAAAAABcAAAAUAAAAAAAAAAAAAAD/fwAA/38AAAAAAAAJAAAABAAAAAAAAAAeAAAAaAAAAAAAAAAAAAAAAAAAAAAAAAAAAAAAECcAABAnAAAAAAAAAAAAAAAAAAAAAAAAAAAAAAAAAAAAAAAAAAAAABQAAAAAAAAAwMD/AAAAAABkAAAAMgAAAAAAAABkAAAAAAAAAH9/fwAKAAAAIgAAABgAAAAAAAAAAAAAAAAAAAAAAAAAAAAAAAAAAAAkAAAAJAAAAAAAAAAHAAAAAAAAAAAAAAAAAAAAAAAAAAAAAAAAAAAAf39/ACUAAABYAAAAAAAAAAAAAAAAAAAAAAAAAAAAAAAAAAAAAAAAAAAAAAAAAAAAAAAAAAAAAAA/AAAAAAAAAKCGAQAAAAAAAAAAAAAAAAAMAAAAAQAAAAAAAAAAAAAAAAAAAB8AAABUAAAAW5vVBf///wEAAAAAAAAAAAAAAAAAAAAAAAAAAAAAAAAAAAAAAAAAAAAAAAJ/f38A5+bmA8zMzADAwP8Af39/AAAAAAAAAAAAAAAAAAAAAAAAAAAAIQAAABgAAAAUAAAAKAUAAD8CAADYRQAAZwoAABAAAAAmAAAACAAAAAAAAAAAAAAA"/>
               </a:ext>
             </a:extLst>
           </p:cNvSpPr>
@@ -5066,7 +5090,7 @@
             <a:spLocks noGrp="1" noChangeArrowheads="1"/>
             <a:extLst>
               <a:ext uri="smNativeData">
-                <pr:smNativeData xmlns="smNativeData" xmlns:pr="smNativeData" xmlns:p15="http://schemas.microsoft.com/office/powerpoint/2012/main" xmlns:p14="http://schemas.microsoft.com/office/powerpoint/2010/main" xmlns:mc="http://schemas.openxmlformats.org/markup-compatibility/2006" val="SMDATA_15_FLquaRMAAAAlAAAAZAAAAA0AAAAAkAAAAEgAAACQAAAASAAAAAAAAAAAAAAAAAAAAAEAAABQAAAAAAAAAAAA4D8AAAAAAADgPwAAAAAAAOA/AAAAAAAA4D8AAAAAAADgPwAAAAAAAOA/AAAAAAAA4D8AAAAAAADgPwAAAAAAAOA/AAAAAAAA4D8CAAAAjAAAAAAAAAAAAAAAW5vVDP///wgAAAAAAAAAAAAAAAAAAAAAAAAAAAAAAAAAAAAAZAAAAAEAAABAAAAAAAAAAAAAAAAAAAAAAAAAAAAAAAAAAAAAAAAAAAAAAAAAAAAAAAAAAAAAAAAAAAAAAAAAAAAAAAAAAAAAAAAAAAAAAAAAAAAAAAAAAAAAAAAAAAAAFAAAADwAAAAAAAAAAAAAAAAAAAkUAAAAAQAAABQAAAAUAAAAFAAAAAEAAAAAAAAAZAAAAGQAAAAAAAAAZAAAAGQAAAAVAAAAYAAAAAAAAAAAAAAADwAAACADAAAAAAAAAAAAAAEAAACgMgAAVgcAAKr4//8BAAAAf39/AAEAAABkAAAAAAAAABQAAABAHwAAAAAAACYAAAAAAAAAwOD//wAAAAAmAAAAZAAAABYAAABMAAAAAAAAAAAAAAAEAAAAAAAAAAEAAADn5uYKAAAAACgAAAAoAAAAZAAAAGQAAAAAAAAAzMzMAAAAAABQAAAAUAAAAGQAAABkAAAAAAAAABcAAAAUAAAAAAAAAAAAAAD/fwAA/38AAAAAAAAJAAAABAAAAA+TLsAeAAAAaAAAAAAAAAAAAAAAAAAAAAAAAAAAAAAAECcAABAnAAAAAAAAAAAAAAAAAAAAAAAAAAAAAAAAAAAAAAAAAAAAABQAAAAAAAAAwMD/AAAAAABkAAAAMgAAAAAAAABkAAAAAAAAAH9/fwAKAAAAIgAAABgAAAAAAAAAAAAAAAAAAAAAAAAAAAAAAAAAAAAkAAAAJAAAAAAAAAAHAAAAAAAAAAAAAAAAAAAAAAAAAAAAAAAAAAAAf39/ACUAAABYAAAAAAAAAAAAAAAAAAAAAAAAAAAAAAAAAAAAAAAAAAAAAAAAAAAAAAAAAAAAAAA/AAAAAAAAAKCGAQAAAAAAAAAAAAAAAAAMAAAAAQAAAAAAAAAAAAAAAAAAAB8AAABUAAAAW5vVBf///wEAAAAAAAAAAAAAAAAAAAAAAAAAAAAAAAAAAAAAAAAAAAAAAAJ/f38A5+bmA8zMzADAwP8Af39/AAAAAAAAAAAAAAAAAAAAAAAAAAAAIQAAABgAAAAUAAAAKAUAADsLAADYRQAAACYAABAAAAAmAAAACAAAAAAgAAAAAAAA"/>
+                <pr:smNativeData xmlns:mc="http://schemas.openxmlformats.org/markup-compatibility/2006" xmlns:p14="http://schemas.microsoft.com/office/powerpoint/2010/main" xmlns:p15="http://schemas.microsoft.com/office/powerpoint/2012/main" xmlns:pr="smNativeData" xmlns="smNativeData" val="SMDATA_15_FLquaRMAAAAlAAAAZAAAAA0AAAAAkAAAAEgAAACQAAAASAAAAAAAAAAAAAAAAAAAAAEAAABQAAAAAAAAAAAA4D8AAAAAAADgPwAAAAAAAOA/AAAAAAAA4D8AAAAAAADgPwAAAAAAAOA/AAAAAAAA4D8AAAAAAADgPwAAAAAAAOA/AAAAAAAA4D8CAAAAjAAAAAAAAAAAAAAAW5vVDP///wgAAAAAAAAAAAAAAAAAAAAAAAAAAAAAAAAAAAAAZAAAAAEAAABAAAAAAAAAAAAAAAAAAAAAAAAAAAAAAAAAAAAAAAAAAAAAAAAAAAAAAAAAAAAAAAAAAAAAAAAAAAAAAAAAAAAAAAAAAAAAAAAAAAAAAAAAAAAAAAAAAAAAFAAAADwAAAAAAAAAAAAAAAAAAAkUAAAAAQAAABQAAAAUAAAAFAAAAAEAAAAAAAAAZAAAAGQAAAAAAAAAZAAAAGQAAAAVAAAAYAAAAAAAAAAAAAAADwAAACADAAAAAAAAAAAAAAEAAACgMgAAVgcAAKr4//8BAAAAf39/AAEAAABkAAAAAAAAABQAAABAHwAAAAAAACYAAAAAAAAAwOD//wAAAAAmAAAAZAAAABYAAABMAAAAAAAAAAAAAAAEAAAAAAAAAAEAAADn5uYKAAAAACgAAAAoAAAAZAAAAGQAAAAAAAAAzMzMAAAAAABQAAAAUAAAAGQAAABkAAAAAAAAABcAAAAUAAAAAAAAAAAAAAD/fwAA/38AAAAAAAAJAAAABAAAAA+TLsAeAAAAaAAAAAAAAAAAAAAAAAAAAAAAAAAAAAAAECcAABAnAAAAAAAAAAAAAAAAAAAAAAAAAAAAAAAAAAAAAAAAAAAAABQAAAAAAAAAwMD/AAAAAABkAAAAMgAAAAAAAABkAAAAAAAAAH9/fwAKAAAAIgAAABgAAAAAAAAAAAAAAAAAAAAAAAAAAAAAAAAAAAAkAAAAJAAAAAAAAAAHAAAAAAAAAAAAAAAAAAAAAAAAAAAAAAAAAAAAf39/ACUAAABYAAAAAAAAAAAAAAAAAAAAAAAAAAAAAAAAAAAAAAAAAAAAAAAAAAAAAAAAAAAAAAA/AAAAAAAAAKCGAQAAAAAAAAAAAAAAAAAMAAAAAQAAAAAAAAAAAAAAAAAAAB8AAABUAAAAW5vVBf///wEAAAAAAAAAAAAAAAAAAAAAAAAAAAAAAAAAAAAAAAAAAAAAAAJ/f38A5+bmA8zMzADAwP8Af39/AAAAAAAAAAAAAAAAAAAAAAAAAAAAIQAAABgAAAAUAAAAKAUAADsLAADYRQAAACYAABAAAAAmAAAACAAAAAAgAAAAAAAA"/>
               </a:ext>
             </a:extLst>
           </p:cNvSpPr>
@@ -5277,7 +5301,7 @@
             <a:spLocks noGrp="1" noChangeArrowheads="1"/>
             <a:extLst>
               <a:ext uri="smNativeData">
-                <pr:smNativeData xmlns="smNativeData" xmlns:pr="smNativeData" xmlns:p15="http://schemas.microsoft.com/office/powerpoint/2012/main" xmlns:p14="http://schemas.microsoft.com/office/powerpoint/2010/main" xmlns:mc="http://schemas.openxmlformats.org/markup-compatibility/2006" val="SMDATA_15_FLquaRMAAAAlAAAAZAAAAA0AAAAAkAAAAEgAAACQAAAASAAAAAAAAAABAAAAAAAAAAEAAABQAAAAAAAAAAAA4D8AAAAAAADgPwAAAAAAAOA/AAAAAAAA4D8AAAAAAADgPwAAAAAAAOA/AAAAAAAA4D8AAAAAAADgPwAAAAAAAOA/AAAAAAAA4D8CAAAAjAAAAAAAAAAAAAAAW5vVDP///wgAAAAAAAAAAAAAAAAAAAAAAAAAAAAAAAAAAAAAZAAAAAEAAABAAAAAAAAAAAAAAAAAAAAAAAAAAAAAAAAAAAAAAAAAAAAAAAAAAAAAAAAAAAAAAAAAAAAAAAAAAAAAAAAAAAAAAAAAAAAAAAAAAAAAAAAAAAAAAAAAAAAAFAAAADwAAAAAAAAAAAAAAAAAAAkUAAAAAQAAABQAAAAUAAAAFAAAAAEAAAAAAAAAZAAAAGQAAAAAAAAAZAAAAGQAAAAVAAAAYAAAAAAAAAAAAAAADwAAACADAAAAAAAAAAAAAAEAAACgMgAAVgcAAKr4//8BAAAAf39/AAEAAABkAAAAAAAAABQAAABAHwAAAAAAACYAAAAAAAAAwOD//wAAAAAmAAAAZAAAABYAAABMAAAAAAAAAAAAAAAEAAAAAAAAAAEAAADn5uYKAAAAACgAAAAoAAAAZAAAAGQAAAAAAAAAzMzMAAAAAABQAAAAUAAAAGQAAABkAAAAAAAAABcAAAAUAAAAAAAAAAAAAAD/fwAA/38AAAAAAAAJAAAABAAAAAAAAAAeAAAAaAAAAAAAAAAAAAAAAAAAAAAAAAAAAAAAECcAABAnAAAAAAAAAAAAAAAAAAAAAAAAAAAAAAAAAAAAAAAAAAAAABQAAAAAAAAAwMD/AAAAAABkAAAAMgAAAAAAAABkAAAAAAAAAH9/fwAKAAAAIgAAABgAAAAAAAAAAAAAAAAAAAAAAAAAAAAAAAAAAAAkAAAAJAAAAAAAAAAHAAAAAAAAAAAAAAAAAAAAAAAAAAAAAAAAAAAAf39/ACUAAABYAAAAAAAAAAAAAAAAAAAAAAAAAAAAAAAAAAAAAAAAAAAAAAAAAAAAAAAAAAAAAAA/AAAAAAAAAKCGAQAAAAAAAAAAAAAAAAAMAAAAAQAAAAAAAAAAAAAAAAAAAB8AAABUAAAAW5vVBf///wEAAAAAAAAAAAAAAAAAAAAAAAAAAAAAAAAAAAAAAAAAAAAAAAJ/f38A5+bmA8zMzADAwP8Af39/AAAAAAAAAAAAAAAAAAAAAAAAAAAAIQAAABgAAAAUAAAAKAUAAD8CAADYRQAAZwoAAAAAAAAmAAAACAAAAAEAAAAAAAAA"/>
+                <pr:smNativeData xmlns:mc="http://schemas.openxmlformats.org/markup-compatibility/2006" xmlns:p14="http://schemas.microsoft.com/office/powerpoint/2010/main" xmlns:p15="http://schemas.microsoft.com/office/powerpoint/2012/main" xmlns:pr="smNativeData" xmlns="smNativeData" val="SMDATA_15_FLquaRMAAAAlAAAAZAAAAA0AAAAAkAAAAEgAAACQAAAASAAAAAAAAAABAAAAAAAAAAEAAABQAAAAAAAAAAAA4D8AAAAAAADgPwAAAAAAAOA/AAAAAAAA4D8AAAAAAADgPwAAAAAAAOA/AAAAAAAA4D8AAAAAAADgPwAAAAAAAOA/AAAAAAAA4D8CAAAAjAAAAAAAAAAAAAAAW5vVDP///wgAAAAAAAAAAAAAAAAAAAAAAAAAAAAAAAAAAAAAZAAAAAEAAABAAAAAAAAAAAAAAAAAAAAAAAAAAAAAAAAAAAAAAAAAAAAAAAAAAAAAAAAAAAAAAAAAAAAAAAAAAAAAAAAAAAAAAAAAAAAAAAAAAAAAAAAAAAAAAAAAAAAAFAAAADwAAAAAAAAAAAAAAAAAAAkUAAAAAQAAABQAAAAUAAAAFAAAAAEAAAAAAAAAZAAAAGQAAAAAAAAAZAAAAGQAAAAVAAAAYAAAAAAAAAAAAAAADwAAACADAAAAAAAAAAAAAAEAAACgMgAAVgcAAKr4//8BAAAAf39/AAEAAABkAAAAAAAAABQAAABAHwAAAAAAACYAAAAAAAAAwOD//wAAAAAmAAAAZAAAABYAAABMAAAAAAAAAAAAAAAEAAAAAAAAAAEAAADn5uYKAAAAACgAAAAoAAAAZAAAAGQAAAAAAAAAzMzMAAAAAABQAAAAUAAAAGQAAABkAAAAAAAAABcAAAAUAAAAAAAAAAAAAAD/fwAA/38AAAAAAAAJAAAABAAAAAAAAAAeAAAAaAAAAAAAAAAAAAAAAAAAAAAAAAAAAAAAECcAABAnAAAAAAAAAAAAAAAAAAAAAAAAAAAAAAAAAAAAAAAAAAAAABQAAAAAAAAAwMD/AAAAAABkAAAAMgAAAAAAAABkAAAAAAAAAH9/fwAKAAAAIgAAABgAAAAAAAAAAAAAAAAAAAAAAAAAAAAAAAAAAAAkAAAAJAAAAAAAAAAHAAAAAAAAAAAAAAAAAAAAAAAAAAAAAAAAAAAAf39/ACUAAABYAAAAAAAAAAAAAAAAAAAAAAAAAAAAAAAAAAAAAAAAAAAAAAAAAAAAAAAAAAAAAAA/AAAAAAAAAKCGAQAAAAAAAAAAAAAAAAAMAAAAAQAAAAAAAAAAAAAAAAAAAB8AAABUAAAAW5vVBf///wEAAAAAAAAAAAAAAAAAAAAAAAAAAAAAAAAAAAAAAAAAAAAAAAJ/f38A5+bmA8zMzADAwP8Af39/AAAAAAAAAAAAAAAAAAAAAAAAAAAAIQAAABgAAAAUAAAAKAUAAD8CAADYRQAAZwoAAAAAAAAmAAAACAAAAAEAAAAAAAAA"/>
               </a:ext>
             </a:extLst>
           </p:cNvSpPr>
@@ -5319,7 +5343,7 @@
             <a:picLocks noChangeAspect="1"/>
             <a:extLst>
               <a:ext uri="smNativeData">
-                <pr:smNativeData xmlns="smNativeData" xmlns:pr="smNativeData" xmlns:p15="http://schemas.microsoft.com/office/powerpoint/2012/main" xmlns:p14="http://schemas.microsoft.com/office/powerpoint/2010/main" xmlns:mc="http://schemas.openxmlformats.org/markup-compatibility/2006" val="SMDATA_17_FLquaRMAAAAlAAAAEQAAAC8BAAAAkAAAAEgAAACQAAAASAAAAAAAAAAAAAAAAAAAAAEAAABQAAAAAAAAAAAA4D8AAAAAAADgPwAAAAAAAOA/AAAAAAAA4D8AAAAAAADgPwAAAAAAAOA/AAAAAAAA4D8AAAAAAADgPwAAAAAAAOA/AAAAAAAA4D8CAAAAjAAAAAAAAAAAAAAAW5vVDP///wgAAAAAAAAAAAAAAAAAAAAAAAAAAAAAAAAAAAAAZAAAAAEAAABAAAAAAAAAAAAAAAAAAAAAAAAAAAAAAAAAAAAAAAAAAAAAAAAAAAAAAAAAAAAAAAAAAAAAAAAAAAAAAAAAAAAAAAAAAAAAAAAAAAAAAAAAAAAAAAAAAAAAFAAAADwAAAAAAAAAAAAAAAAAAAkUAAAAAQAAABQAAAAUAAAAFAAAAAEAAAAAAAAAZAAAAGQAAAAAAAAAZAAAAGQAAAAVAAAAYAAAAAAAAAAAAAAADwAAACADAAAAAAAAAAAAAAEAAACgMgAAVgcAAKr4//8BAAAAf39/AAEAAABkAAAAAAAAABQAAABAHwAAAAAAACYAAAAAAAAAwOD//wAAAAAmAAAAZAAAABYAAABMAAAAAAAAAAAAAAAEAAAAAAAAAAEAAADn5uYKAAAAACgAAAAoAAAAZAAAAGQAAAAAAAAAzMzMAAAAAABQAAAAUAAAAGQAAABkAAAAAAAAAAcAAAA4AAAAAAAAAAAAAAAAAAAA////AAAAAAAAAAAAAAAAAAAAAAAAAAAAAAAAAAAAAABkAAAAZAAAAAAAAAAjAAAABAAAAGQAAAAXAAAAFAAAAAAAAAAAAAAA/38AAP9/AAAAAAAACQAAAAQAAADuAAAAHgAAAGgAAAAAAAAAAAAAAAAAAAAAAAAAAAAAABAnAAAQJwAAAAAAAAAAAAAAAAAAAAAAAAAAAAAAAAAAAAAAAAAAAAAUAAAAAAAAAMDA/wAAAAAAZAAAADIAAAAAAAAAZAAAAAAAAAB/f38ACgAAACIAAAAYAAAAAAAAAAAAAAAAAAAAAAAAAAAAAAAAAAAAJAAAACQAAAAAAAAABwAAAAAAAAAAAAAAAAAAAAAAAAAAAAAAAAAAAH9/fwAlAAAAWAAAAAAAAAAAAAAAAAAAAAAAAAAAAAAAAAAAAAAAAAAAAAAAAAAAAAAAAAAAAAAAPwAAAAAAAACghgEAAAAAAAAAAAAAAAAADAAAAAEAAAAAAAAAAAAAAAAAAAAfAAAAVAAAAFub1QX///8BAAAAAAAAAAAAAAAAAAAAAAAAAAAAAAAAAAAAAAAAAAAAAAACf39/AOfm5gPMzMwAwMD/AH9/fwAAAAAAAAAAAAAAAAD///8AAAAAACEAAAAYAAAAFAAAAIEQAAByCgAAzToAAF8pAAAAAAAAJgAAAAgAAAD//////////w=="/>
+                <pr:smNativeData xmlns:mc="http://schemas.openxmlformats.org/markup-compatibility/2006" xmlns:p14="http://schemas.microsoft.com/office/powerpoint/2010/main" xmlns:p15="http://schemas.microsoft.com/office/powerpoint/2012/main" xmlns:pr="smNativeData" xmlns="smNativeData" val="SMDATA_17_FLquaRMAAAAlAAAAEQAAAC8BAAAAkAAAAEgAAACQAAAASAAAAAAAAAAAAAAAAAAAAAEAAABQAAAAAAAAAAAA4D8AAAAAAADgPwAAAAAAAOA/AAAAAAAA4D8AAAAAAADgPwAAAAAAAOA/AAAAAAAA4D8AAAAAAADgPwAAAAAAAOA/AAAAAAAA4D8CAAAAjAAAAAAAAAAAAAAAW5vVDP///wgAAAAAAAAAAAAAAAAAAAAAAAAAAAAAAAAAAAAAZAAAAAEAAABAAAAAAAAAAAAAAAAAAAAAAAAAAAAAAAAAAAAAAAAAAAAAAAAAAAAAAAAAAAAAAAAAAAAAAAAAAAAAAAAAAAAAAAAAAAAAAAAAAAAAAAAAAAAAAAAAAAAAFAAAADwAAAAAAAAAAAAAAAAAAAkUAAAAAQAAABQAAAAUAAAAFAAAAAEAAAAAAAAAZAAAAGQAAAAAAAAAZAAAAGQAAAAVAAAAYAAAAAAAAAAAAAAADwAAACADAAAAAAAAAAAAAAEAAACgMgAAVgcAAKr4//8BAAAAf39/AAEAAABkAAAAAAAAABQAAABAHwAAAAAAACYAAAAAAAAAwOD//wAAAAAmAAAAZAAAABYAAABMAAAAAAAAAAAAAAAEAAAAAAAAAAEAAADn5uYKAAAAACgAAAAoAAAAZAAAAGQAAAAAAAAAzMzMAAAAAABQAAAAUAAAAGQAAABkAAAAAAAAAAcAAAA4AAAAAAAAAAAAAAAAAAAA////AAAAAAAAAAAAAAAAAAAAAAAAAAAAAAAAAAAAAABkAAAAZAAAAAAAAAAjAAAABAAAAGQAAAAXAAAAFAAAAAAAAAAAAAAA/38AAP9/AAAAAAAACQAAAAQAAADuAAAAHgAAAGgAAAAAAAAAAAAAAAAAAAAAAAAAAAAAABAnAAAQJwAAAAAAAAAAAAAAAAAAAAAAAAAAAAAAAAAAAAAAAAAAAAAUAAAAAAAAAMDA/wAAAAAAZAAAADIAAAAAAAAAZAAAAAAAAAB/f38ACgAAACIAAAAYAAAAAAAAAAAAAAAAAAAAAAAAAAAAAAAAAAAAJAAAACQAAAAAAAAABwAAAAAAAAAAAAAAAAAAAAAAAAAAAAAAAAAAAH9/fwAlAAAAWAAAAAAAAAAAAAAAAAAAAAAAAAAAAAAAAAAAAAAAAAAAAAAAAAAAAAAAAAAAAAAAPwAAAAAAAACghgEAAAAAAAAAAAAAAAAADAAAAAEAAAAAAAAAAAAAAAAAAAAfAAAAVAAAAFub1QX///8BAAAAAAAAAAAAAAAAAAAAAAAAAAAAAAAAAAAAAAAAAAAAAAACf39/AOfm5gPMzMwAwMD/AH9/fwAAAAAAAAAAAAAAAAD///8AAAAAACEAAAAYAAAAFAAAAIEQAAByCgAAzToAAF8pAAAAAAAAJgAAAAgAAAD//////////w=="/>
               </a:ext>
             </a:extLst>
           </p:cNvPicPr>
@@ -5385,7 +5409,7 @@
             <a:picLocks noChangeAspect="1"/>
             <a:extLst>
               <a:ext uri="smNativeData">
-                <pr:smNativeData xmlns="smNativeData" xmlns:pr="smNativeData" xmlns:p15="http://schemas.microsoft.com/office/powerpoint/2012/main" xmlns:p14="http://schemas.microsoft.com/office/powerpoint/2010/main" xmlns:mc="http://schemas.openxmlformats.org/markup-compatibility/2006" val="SMDATA_17_FLquaRMAAAAlAAAAEQAAAC0AAAAAkAAAAEgAAACQAAAASAAAAAAAAAAAAAAAAAAAAAEAAABQAAAAAAAAAAAA4D8AAAAAAADgPwAAAAAAAOA/AAAAAAAA4D8AAAAAAADgPwAAAAAAAOA/AAAAAAAA4D8AAAAAAADgPwAAAAAAAOA/AAAAAAAA4D8CAAAAjAAAAAAAAAAAAAAAW5vVDP///wgAAAAAAAAAAAAAAAAAAAAAAAAAAAAAAAAAAAAAZAAAAAEAAABAAAAAAAAAAAAAAAAAAAAAAAAAAAAAAAAAAAAAAAAAAAAAAAAAAAAAAAAAAAAAAAAAAAAAAAAAAAAAAAAAAAAAAAAAAAAAAAAAAAAAAAAAAAAAAAAAAAAAFAAAADwAAAAAAAAAAAAAAAAAAAkUAAAAAQAAABQAAAAUAAAAFAAAAAEAAAAAAAAAZAAAAGQAAAAAAAAAZAAAAGQAAAAVAAAAYAAAAAAAAAAAAAAADwAAACADAAAAAAAAAAAAAAEAAACgMgAAVgcAAKr4//8BAAAAf39/AAEAAABkAAAAAAAAABQAAABAHwAAAAAAACYAAAAAAAAAwOD//wAAAAAmAAAAZAAAABYAAABMAAAAAAAAAAAAAAAEAAAAAAAAAAEAAADn5uYKAAAAACgAAAAoAAAAZAAAAGQAAAAAAAAAzMzMAAAAAABQAAAAUAAAAGQAAABkAAAAAAAAAAcAAAA4AAAAAAAAAAAAAAAAAAAA////AAAAAAAAAAAAAAAAAAAAAAAAAAAAAAAAAAAAAABkAAAAZAAAAAAAAAAjAAAABAAAAGQAAAAXAAAAFAAAAAAAAAAAAAAA/38AAP9/AAAAAAAACQAAAAQAAAD///8AHgAAAGgAAAAAAAAAAAAAAAAAAAAAAAAAAAAAABAnAAAQJwAAAAAAAAAAAAAAAAAAAAAAAAAAAAAAAAAAAAAAAAAAAAAUAAAAAAAAAMDA/wAAAAAAZAAAADIAAAAAAAAAZAAAAAAAAAB/f38ACgAAACIAAAAYAAAAAAAAAAAAAAAAAAAAAAAAAAAAAAAAAAAAJAAAACQAAAAAAAAABwAAAAAAAAAAAAAAAAAAAAAAAAAAAAAAAAAAAH9/fwAlAAAAWAAAAAAAAAAAAAAAAAAAAAAAAAAAAAAAAAAAAAAAAAAAAAAAAAAAAAAAAAAAAAAAPwAAAAAAAACghgEAAAAAAAAAAAAAAAAADAAAAAEAAAAAAAAAAAAAAAAAAAAfAAAAVAAAAFub1QX///8BAAAAAAAAAAAAAAAAAAAAAAAAAAAAAAAAAAAAAAAAAAAAAAACf39/AOfm5gPMzMwAwMD/AH9/fwAAAAAAAAAAAAAAAAD///8AAAAAACEAAAAYAAAAFAAAAB0IAAB9AAAAQUAAAOIpAAAQAAAAJgAAAAgAAAD//////////w=="/>
+                <pr:smNativeData xmlns:mc="http://schemas.openxmlformats.org/markup-compatibility/2006" xmlns:p14="http://schemas.microsoft.com/office/powerpoint/2010/main" xmlns:p15="http://schemas.microsoft.com/office/powerpoint/2012/main" xmlns:pr="smNativeData" xmlns="smNativeData" val="SMDATA_17_FLquaRMAAAAlAAAAEQAAAC0AAAAAkAAAAEgAAACQAAAASAAAAAAAAAAAAAAAAAAAAAEAAABQAAAAAAAAAAAA4D8AAAAAAADgPwAAAAAAAOA/AAAAAAAA4D8AAAAAAADgPwAAAAAAAOA/AAAAAAAA4D8AAAAAAADgPwAAAAAAAOA/AAAAAAAA4D8CAAAAjAAAAAAAAAAAAAAAW5vVDP///wgAAAAAAAAAAAAAAAAAAAAAAAAAAAAAAAAAAAAAZAAAAAEAAABAAAAAAAAAAAAAAAAAAAAAAAAAAAAAAAAAAAAAAAAAAAAAAAAAAAAAAAAAAAAAAAAAAAAAAAAAAAAAAAAAAAAAAAAAAAAAAAAAAAAAAAAAAAAAAAAAAAAAFAAAADwAAAAAAAAAAAAAAAAAAAkUAAAAAQAAABQAAAAUAAAAFAAAAAEAAAAAAAAAZAAAAGQAAAAAAAAAZAAAAGQAAAAVAAAAYAAAAAAAAAAAAAAADwAAACADAAAAAAAAAAAAAAEAAACgMgAAVgcAAKr4//8BAAAAf39/AAEAAABkAAAAAAAAABQAAABAHwAAAAAAACYAAAAAAAAAwOD//wAAAAAmAAAAZAAAABYAAABMAAAAAAAAAAAAAAAEAAAAAAAAAAEAAADn5uYKAAAAACgAAAAoAAAAZAAAAGQAAAAAAAAAzMzMAAAAAABQAAAAUAAAAGQAAABkAAAAAAAAAAcAAAA4AAAAAAAAAAAAAAAAAAAA////AAAAAAAAAAAAAAAAAAAAAAAAAAAAAAAAAAAAAABkAAAAZAAAAAAAAAAjAAAABAAAAGQAAAAXAAAAFAAAAAAAAAAAAAAA/38AAP9/AAAAAAAACQAAAAQAAAD///8AHgAAAGgAAAAAAAAAAAAAAAAAAAAAAAAAAAAAABAnAAAQJwAAAAAAAAAAAAAAAAAAAAAAAAAAAAAAAAAAAAAAAAAAAAAUAAAAAAAAAMDA/wAAAAAAZAAAADIAAAAAAAAAZAAAAAAAAAB/f38ACgAAACIAAAAYAAAAAAAAAAAAAAAAAAAAAAAAAAAAAAAAAAAAJAAAACQAAAAAAAAABwAAAAAAAAAAAAAAAAAAAAAAAAAAAAAAAAAAAH9/fwAlAAAAWAAAAAAAAAAAAAAAAAAAAAAAAAAAAAAAAAAAAAAAAAAAAAAAAAAAAAAAAAAAAAAAPwAAAAAAAACghgEAAAAAAAAAAAAAAAAADAAAAAEAAAAAAAAAAAAAAAAAAAAfAAAAVAAAAFub1QX///8BAAAAAAAAAAAAAAAAAAAAAAAAAAAAAAAAAAAAAAAAAAAAAAACf39/AOfm5gPMzMwAwMD/AH9/fwAAAAAAAAAAAAAAAAD///8AAAAAACEAAAAYAAAAFAAAAB0IAAB9AAAAQUAAAOIpAAAQAAAAJgAAAAgAAAD//////////w=="/>
               </a:ext>
             </a:extLst>
           </p:cNvPicPr>
@@ -5451,7 +5475,7 @@
             <a:spLocks noGrp="1" noChangeArrowheads="1"/>
             <a:extLst>
               <a:ext uri="smNativeData">
-                <pr:smNativeData xmlns="smNativeData" xmlns:pr="smNativeData" xmlns:p15="http://schemas.microsoft.com/office/powerpoint/2012/main" xmlns:p14="http://schemas.microsoft.com/office/powerpoint/2010/main" xmlns:mc="http://schemas.openxmlformats.org/markup-compatibility/2006" val="SMDATA_15_FLquaRMAAAAlAAAAZAAAAA0AAAAAkAAAAEgAAACQAAAASAAAAAAAAAABAAAAAAAAAAEAAABQAAAAAAAAAAAA4D8AAAAAAADgPwAAAAAAAOA/AAAAAAAA4D8AAAAAAADgPwAAAAAAAOA/AAAAAAAA4D8AAAAAAADgPwAAAAAAAOA/AAAAAAAA4D8CAAAAjAAAAAAAAAAAAAAAW5vVDP///wgAAAAAAAAAAAAAAAAAAAAAAAAAAAAAAAAAAAAAZAAAAAEAAABAAAAAAAAAAAAAAAAAAAAAAAAAAAAAAAAAAAAAAAAAAAAAAAAAAAAAAAAAAAAAAAAAAAAAAAAAAAAAAAAAAAAAAAAAAAAAAAAAAAAAAAAAAAAAAAAAAAAAFAAAADwAAAAAAAAAAAAAAAAAAAkUAAAAAQAAABQAAAAUAAAAFAAAAAEAAAAAAAAAZAAAAGQAAAAAAAAAZAAAAGQAAAAVAAAAYAAAAAAAAAAAAAAADwAAACADAAAAAAAAAAAAAAEAAACgMgAAVgcAAKr4//8BAAAAf39/AAEAAABkAAAAAAAAABQAAABAHwAAAAAAACYAAAAAAAAAwOD//wAAAAAmAAAAZAAAABYAAABMAAAAAAAAAAAAAAAEAAAAAAAAAAEAAADn5uYKAAAAACgAAAAoAAAAZAAAAGQAAAAAAAAAzMzMAAAAAABQAAAAUAAAAGQAAABkAAAAAAAAABcAAAAUAAAAAAAAAAAAAAD/fwAA/38AAAAAAAAJAAAABAAAAF8AYAAeAAAAaAAAAAAAAAAAAAAAAAAAAAAAAAAAAAAAECcAABAnAAAAAAAAAAAAAAAAAAAAAAAAAAAAAAAAAAAAAAAAAAAAABQAAAAAAAAAwMD/AAAAAABkAAAAMgAAAAAAAABkAAAAAAAAAH9/fwAKAAAAIgAAABgAAAAAAAAAAAAAAAAAAAAAAAAAAAAAAAAAAAAkAAAAJAAAAAAAAAAHAAAAAAAAAAAAAAAAAAAAAAAAAAAAAAAAAAAAf39/ACUAAABYAAAAAAAAAAAAAAAAAAAAAAAAAAAAAAAAAAAAAAAAAAAAAAAAAAAAAAAAAAAAAAA/AAAAAAAAAKCGAQAAAAAAAAAAAAAAAAAMAAAAAQAAAAAAAAAAAAAAAAAAAB8AAABUAAAAW5vVBf///wEAAAAAAAAAAAAAAAAAAAAAAAAAAAAAAAAAAAAAAAAAAAAAAAJ/f38A5+bmA8zMzADAwP8Af39/AAAAAAAAAAAAAAAAAAAAAAAAAAAAIQAAABgAAAAUAAAAKAUAAD8CAADYRQAAZwoAABAAAAAmAAAACAAAAAAAAAAAAAAA"/>
+                <pr:smNativeData xmlns:mc="http://schemas.openxmlformats.org/markup-compatibility/2006" xmlns:p14="http://schemas.microsoft.com/office/powerpoint/2010/main" xmlns:p15="http://schemas.microsoft.com/office/powerpoint/2012/main" xmlns:pr="smNativeData" xmlns="smNativeData" val="SMDATA_15_FLquaRMAAAAlAAAAZAAAAA0AAAAAkAAAAEgAAACQAAAASAAAAAAAAAABAAAAAAAAAAEAAABQAAAAAAAAAAAA4D8AAAAAAADgPwAAAAAAAOA/AAAAAAAA4D8AAAAAAADgPwAAAAAAAOA/AAAAAAAA4D8AAAAAAADgPwAAAAAAAOA/AAAAAAAA4D8CAAAAjAAAAAAAAAAAAAAAW5vVDP///wgAAAAAAAAAAAAAAAAAAAAAAAAAAAAAAAAAAAAAZAAAAAEAAABAAAAAAAAAAAAAAAAAAAAAAAAAAAAAAAAAAAAAAAAAAAAAAAAAAAAAAAAAAAAAAAAAAAAAAAAAAAAAAAAAAAAAAAAAAAAAAAAAAAAAAAAAAAAAAAAAAAAAFAAAADwAAAAAAAAAAAAAAAAAAAkUAAAAAQAAABQAAAAUAAAAFAAAAAEAAAAAAAAAZAAAAGQAAAAAAAAAZAAAAGQAAAAVAAAAYAAAAAAAAAAAAAAADwAAACADAAAAAAAAAAAAAAEAAACgMgAAVgcAAKr4//8BAAAAf39/AAEAAABkAAAAAAAAABQAAABAHwAAAAAAACYAAAAAAAAAwOD//wAAAAAmAAAAZAAAABYAAABMAAAAAAAAAAAAAAAEAAAAAAAAAAEAAADn5uYKAAAAACgAAAAoAAAAZAAAAGQAAAAAAAAAzMzMAAAAAABQAAAAUAAAAGQAAABkAAAAAAAAABcAAAAUAAAAAAAAAAAAAAD/fwAA/38AAAAAAAAJAAAABAAAAF8AYAAeAAAAaAAAAAAAAAAAAAAAAAAAAAAAAAAAAAAAECcAABAnAAAAAAAAAAAAAAAAAAAAAAAAAAAAAAAAAAAAAAAAAAAAABQAAAAAAAAAwMD/AAAAAABkAAAAMgAAAAAAAABkAAAAAAAAAH9/fwAKAAAAIgAAABgAAAAAAAAAAAAAAAAAAAAAAAAAAAAAAAAAAAAkAAAAJAAAAAAAAAAHAAAAAAAAAAAAAAAAAAAAAAAAAAAAAAAAAAAAf39/ACUAAABYAAAAAAAAAAAAAAAAAAAAAAAAAAAAAAAAAAAAAAAAAAAAAAAAAAAAAAAAAAAAAAA/AAAAAAAAAKCGAQAAAAAAAAAAAAAAAAAMAAAAAQAAAAAAAAAAAAAAAAAAAB8AAABUAAAAW5vVBf///wEAAAAAAAAAAAAAAAAAAAAAAAAAAAAAAAAAAAAAAAAAAAAAAAJ/f38A5+bmA8zMzADAwP8Af39/AAAAAAAAAAAAAAAAAAAAAAAAAAAAIQAAABgAAAAUAAAAKAUAAD8CAADYRQAAZwoAABAAAAAmAAAACAAAAAAAAAAAAAAA"/>
               </a:ext>
             </a:extLst>
           </p:cNvSpPr>
@@ -5480,7 +5504,7 @@
             <a:spLocks noGrp="1" noChangeArrowheads="1"/>
             <a:extLst>
               <a:ext uri="smNativeData">
-                <pr:smNativeData xmlns="smNativeData" xmlns:pr="smNativeData" xmlns:p15="http://schemas.microsoft.com/office/powerpoint/2012/main" xmlns:p14="http://schemas.microsoft.com/office/powerpoint/2010/main" xmlns:mc="http://schemas.openxmlformats.org/markup-compatibility/2006" val="SMDATA_15_FLquaRMAAAAlAAAAZAAAAA0AAAAAkAAAAEgAAACQAAAASAAAAAAAAAAAAAAAAAAAAAEAAABQAAAAAAAAAAAA4D8AAAAAAADgPwAAAAAAAOA/AAAAAAAA4D8AAAAAAADgPwAAAAAAAOA/AAAAAAAA4D8AAAAAAADgPwAAAAAAAOA/AAAAAAAA4D8CAAAAjAAAAAAAAAAAAAAAW5vVDP///wgAAAAAAAAAAAAAAAAAAAAAAAAAAAAAAAAAAAAAZAAAAAEAAABAAAAAAAAAAAAAAAAAAAAAAAAAAAAAAAAAAAAAAAAAAAAAAAAAAAAAAAAAAAAAAAAAAAAAAAAAAAAAAAAAAAAAAAAAAAAAAAAAAAAAAAAAAAAAAAAAAAAAFAAAADwAAAAAAAAAAAAAAAAAAAkUAAAAAQAAABQAAAAUAAAAFAAAAAEAAAAAAAAAZAAAAGQAAAAAAAAAZAAAAGQAAAAVAAAAYAAAAAAAAAAAAAAADwAAACADAAAAAAAAAAAAAAEAAACgMgAAVgcAAKr4//8BAAAAf39/AAEAAABkAAAAAAAAABQAAABAHwAAAAAAACYAAAAAAAAAwOD//wAAAAAmAAAAZAAAABYAAABMAAAAAAAAAAAAAAAEAAAAAAAAAAEAAADn5uYKAAAAACgAAAAoAAAAZAAAAGQAAAAAAAAAzMzMAAAAAABQAAAAUAAAAGQAAABkAAAAAAAAABcAAAAUAAAAAAAAAAAAAAD/fwAA/38AAAAAAAAJAAAABAAAAF8AYAAeAAAAaAAAAAAAAAAAAAAAAAAAAAAAAAAAAAAAECcAABAnAAAAAAAAAAAAAAAAAAAAAAAAAAAAAAAAAAAAAAAAAAAAABQAAAAAAAAAwMD/AAAAAABkAAAAMgAAAAAAAABkAAAAAAAAAH9/fwAKAAAAIgAAABgAAAAAAAAAAAAAAAAAAAAAAAAAAAAAAAAAAAAkAAAAJAAAAAAAAAAHAAAAAAAAAAAAAAAAAAAAAAAAAAAAAAAAAAAAf39/ACUAAABYAAAAAAAAAAAAAAAAAAAAAAAAAAAAAAAAAAAAAAAAAAAAAAAAAAAAAAAAAAAAAAA/AAAAAAAAAKCGAQAAAAAAAAAAAAAAAAAMAAAAAQAAAAAAAAAAAAAAAAAAAB8AAABUAAAAW5vVBf///wEAAAAAAAAAAAAAAAAAAAAAAAAAAAAAAAAAAAAAAAAAAAAAAAJ/f38A5+bmA8zMzADAwP8Af39/AAAAAAAAAAAAAAAAAAAAAAAAAAAAIQAAABgAAAAUAAAAKAUAADsLAADYRQAAACYAABAAAAAmAAAACAAAAAAAAAAAAAAA"/>
+                <pr:smNativeData xmlns:mc="http://schemas.openxmlformats.org/markup-compatibility/2006" xmlns:p14="http://schemas.microsoft.com/office/powerpoint/2010/main" xmlns:p15="http://schemas.microsoft.com/office/powerpoint/2012/main" xmlns:pr="smNativeData" xmlns="smNativeData" val="SMDATA_15_FLquaRMAAAAlAAAAZAAAAA0AAAAAkAAAAEgAAACQAAAASAAAAAAAAAAAAAAAAAAAAAEAAABQAAAAAAAAAAAA4D8AAAAAAADgPwAAAAAAAOA/AAAAAAAA4D8AAAAAAADgPwAAAAAAAOA/AAAAAAAA4D8AAAAAAADgPwAAAAAAAOA/AAAAAAAA4D8CAAAAjAAAAAAAAAAAAAAAW5vVDP///wgAAAAAAAAAAAAAAAAAAAAAAAAAAAAAAAAAAAAAZAAAAAEAAABAAAAAAAAAAAAAAAAAAAAAAAAAAAAAAAAAAAAAAAAAAAAAAAAAAAAAAAAAAAAAAAAAAAAAAAAAAAAAAAAAAAAAAAAAAAAAAAAAAAAAAAAAAAAAAAAAAAAAFAAAADwAAAAAAAAAAAAAAAAAAAkUAAAAAQAAABQAAAAUAAAAFAAAAAEAAAAAAAAAZAAAAGQAAAAAAAAAZAAAAGQAAAAVAAAAYAAAAAAAAAAAAAAADwAAACADAAAAAAAAAAAAAAEAAACgMgAAVgcAAKr4//8BAAAAf39/AAEAAABkAAAAAAAAABQAAABAHwAAAAAAACYAAAAAAAAAwOD//wAAAAAmAAAAZAAAABYAAABMAAAAAAAAAAAAAAAEAAAAAAAAAAEAAADn5uYKAAAAACgAAAAoAAAAZAAAAGQAAAAAAAAAzMzMAAAAAABQAAAAUAAAAGQAAABkAAAAAAAAABcAAAAUAAAAAAAAAAAAAAD/fwAA/38AAAAAAAAJAAAABAAAAF8AYAAeAAAAaAAAAAAAAAAAAAAAAAAAAAAAAAAAAAAAECcAABAnAAAAAAAAAAAAAAAAAAAAAAAAAAAAAAAAAAAAAAAAAAAAABQAAAAAAAAAwMD/AAAAAABkAAAAMgAAAAAAAABkAAAAAAAAAH9/fwAKAAAAIgAAABgAAAAAAAAAAAAAAAAAAAAAAAAAAAAAAAAAAAAkAAAAJAAAAAAAAAAHAAAAAAAAAAAAAAAAAAAAAAAAAAAAAAAAAAAAf39/ACUAAABYAAAAAAAAAAAAAAAAAAAAAAAAAAAAAAAAAAAAAAAAAAAAAAAAAAAAAAAAAAAAAAA/AAAAAAAAAKCGAQAAAAAAAAAAAAAAAAAMAAAAAQAAAAAAAAAAAAAAAAAAAB8AAABUAAAAW5vVBf///wEAAAAAAAAAAAAAAAAAAAAAAAAAAAAAAAAAAAAAAAAAAAAAAAJ/f38A5+bmA8zMzADAwP8Af39/AAAAAAAAAAAAAAAAAAAAAAAAAAAAIQAAABgAAAAUAAAAKAUAADsLAADYRQAAACYAABAAAAAmAAAACAAAAAAAAAAAAAAA"/>
               </a:ext>
             </a:extLst>
           </p:cNvSpPr>
@@ -5554,7 +5578,7 @@
             <a:picLocks noChangeAspect="1"/>
             <a:extLst>
               <a:ext uri="smNativeData">
-                <pr:smNativeData xmlns="smNativeData" xmlns:pr="smNativeData" xmlns:p15="http://schemas.microsoft.com/office/powerpoint/2012/main" xmlns:p14="http://schemas.microsoft.com/office/powerpoint/2010/main" xmlns:mc="http://schemas.openxmlformats.org/markup-compatibility/2006" val="SMDATA_17_FLquaRMAAAAlAAAAEQAAAC0AAAAAkAAAAEgAAACQAAAASAAAAAAAAAAAAAAAAAAAAAEAAABQAAAAAAAAAAAA4D8AAAAAAADgPwAAAAAAAOA/AAAAAAAA4D8AAAAAAADgPwAAAAAAAOA/AAAAAAAA4D8AAAAAAADgPwAAAAAAAOA/AAAAAAAA4D8CAAAAjAAAAAAAAAAAAAAAW5vVDP///wgAAAAAAAAAAAAAAAAAAAAAAAAAAAAAAAAAAAAAZAAAAAEAAABAAAAAAAAAAAAAAAAAAAAAAAAAAAAAAAAAAAAAAAAAAAAAAAAAAAAAAAAAAAAAAAAAAAAAAAAAAAAAAAAAAAAAAAAAAAAAAAAAAAAAAAAAAAAAAAAAAAAAFAAAADwAAAAAAAAAAAAAAAAAAAkUAAAAAQAAABQAAAAUAAAAFAAAAAEAAAAAAAAAZAAAAGQAAAAAAAAAZAAAAGQAAAAVAAAAYAAAAAAAAAAAAAAADwAAACADAAAAAAAAAAAAAAEAAACgMgAAVgcAAKr4//8BAAAAf39/AAEAAABkAAAAAAAAABQAAABAHwAAAAAAACYAAAAAAAAAwOD//wAAAAAmAAAAZAAAABYAAABMAAAAAAAAAAAAAAAEAAAAAAAAAAEAAADn5uYKAAAAACgAAAAoAAAAZAAAAGQAAAAAAAAAzMzMAAAAAABQAAAAUAAAAGQAAABkAAAAAAAAAAcAAAA4AAAAAAAAAAAAAAAAAAAA////AAAAAAAAAAAAAAAAAAAAAAAAAAAAAAAAAAAAAABkAAAAZAAAAAAAAAAjAAAABAAAAGQAAAAXAAAAFAAAAAAAAAAAAAAA/38AAP9/AAAAAAAACQAAAAQAAAAAAAAAHgAAAGgAAAAAAAAAAAAAAAAAAAAAAAAAAAAAABAnAAAQJwAAAAAAAAAAAAAAAAAAAAAAAAAAAAAAAAAAAAAAAAAAAAAUAAAAAAAAAMDA/wAAAAAAZAAAADIAAAAAAAAAZAAAAAAAAAB/f38ACgAAACIAAAAYAAAAAAAAAAAAAAAAAAAAAAAAAAAAAAAAAAAAJAAAACQAAAAAAAAABwAAAAAAAAAAAAAAAAAAAAAAAAAAAAAAAAAAAH9/fwAlAAAAWAAAAAAAAAAAAAAAAAAAAAAAAAAAAAAAAAAAAAAAAAAAAAAAAAAAAAAAAAAAAAAAPwAAAAAAAACghgEAAAAAAAAAAAAAAAAADAAAAAEAAAAAAAAAAAAAAAAAAAAfAAAAVAAAAFub1QX///8BAAAAAAAAAAAAAAAAAAAAAAAAAAAAAAAAAAAAAAAAAAAAAAACf39/AOfm5gPMzMwAwMD/AH9/fwAAAAAAAAAAAAAAAAD///8AAAAAACEAAAAYAAAAFAAAAA0QAADTGgAA0iIAAHsdAAAQAAAAJgAAAAgAAAD//////////w=="/>
+                <pr:smNativeData xmlns:mc="http://schemas.openxmlformats.org/markup-compatibility/2006" xmlns:p14="http://schemas.microsoft.com/office/powerpoint/2010/main" xmlns:p15="http://schemas.microsoft.com/office/powerpoint/2012/main" xmlns:pr="smNativeData" xmlns="smNativeData" val="SMDATA_17_FLquaRMAAAAlAAAAEQAAAC0AAAAAkAAAAEgAAACQAAAASAAAAAAAAAAAAAAAAAAAAAEAAABQAAAAAAAAAAAA4D8AAAAAAADgPwAAAAAAAOA/AAAAAAAA4D8AAAAAAADgPwAAAAAAAOA/AAAAAAAA4D8AAAAAAADgPwAAAAAAAOA/AAAAAAAA4D8CAAAAjAAAAAAAAAAAAAAAW5vVDP///wgAAAAAAAAAAAAAAAAAAAAAAAAAAAAAAAAAAAAAZAAAAAEAAABAAAAAAAAAAAAAAAAAAAAAAAAAAAAAAAAAAAAAAAAAAAAAAAAAAAAAAAAAAAAAAAAAAAAAAAAAAAAAAAAAAAAAAAAAAAAAAAAAAAAAAAAAAAAAAAAAAAAAFAAAADwAAAAAAAAAAAAAAAAAAAkUAAAAAQAAABQAAAAUAAAAFAAAAAEAAAAAAAAAZAAAAGQAAAAAAAAAZAAAAGQAAAAVAAAAYAAAAAAAAAAAAAAADwAAACADAAAAAAAAAAAAAAEAAACgMgAAVgcAAKr4//8BAAAAf39/AAEAAABkAAAAAAAAABQAAABAHwAAAAAAACYAAAAAAAAAwOD//wAAAAAmAAAAZAAAABYAAABMAAAAAAAAAAAAAAAEAAAAAAAAAAEAAADn5uYKAAAAACgAAAAoAAAAZAAAAGQAAAAAAAAAzMzMAAAAAABQAAAAUAAAAGQAAABkAAAAAAAAAAcAAAA4AAAAAAAAAAAAAAAAAAAA////AAAAAAAAAAAAAAAAAAAAAAAAAAAAAAAAAAAAAABkAAAAZAAAAAAAAAAjAAAABAAAAGQAAAAXAAAAFAAAAAAAAAAAAAAA/38AAP9/AAAAAAAACQAAAAQAAAAAAAAAHgAAAGgAAAAAAAAAAAAAAAAAAAAAAAAAAAAAABAnAAAQJwAAAAAAAAAAAAAAAAAAAAAAAAAAAAAAAAAAAAAAAAAAAAAUAAAAAAAAAMDA/wAAAAAAZAAAADIAAAAAAAAAZAAAAAAAAAB/f38ACgAAACIAAAAYAAAAAAAAAAAAAAAAAAAAAAAAAAAAAAAAAAAAJAAAACQAAAAAAAAABwAAAAAAAAAAAAAAAAAAAAAAAAAAAAAAAAAAAH9/fwAlAAAAWAAAAAAAAAAAAAAAAAAAAAAAAAAAAAAAAAAAAAAAAAAAAAAAAAAAAAAAAAAAAAAAPwAAAAAAAACghgEAAAAAAAAAAAAAAAAADAAAAAEAAAAAAAAAAAAAAAAAAAAfAAAAVAAAAFub1QX///8BAAAAAAAAAAAAAAAAAAAAAAAAAAAAAAAAAAAAAAAAAAAAAAACf39/AOfm5gPMzMwAwMD/AH9/fwAAAAAAAAAAAAAAAAD///8AAAAAACEAAAAYAAAAFAAAAA0QAADTGgAA0iIAAHsdAAAQAAAAJgAAAAgAAAD//////////w=="/>
               </a:ext>
             </a:extLst>
           </p:cNvPicPr>
@@ -5620,7 +5644,7 @@
             <a:spLocks noGrp="1" noChangeArrowheads="1"/>
             <a:extLst>
               <a:ext uri="smNativeData">
-                <pr:smNativeData xmlns="smNativeData" xmlns:pr="smNativeData" xmlns:p15="http://schemas.microsoft.com/office/powerpoint/2012/main" xmlns:p14="http://schemas.microsoft.com/office/powerpoint/2010/main" xmlns:mc="http://schemas.openxmlformats.org/markup-compatibility/2006" val="SMDATA_15_FLquaRMAAAAlAAAAZAAAAA0AAAAAkAAAAEgAAACQAAAASAAAAAAAAAABAAAAAAAAAAEAAABQAAAAAAAAAAAA4D8AAAAAAADgPwAAAAAAAOA/AAAAAAAA4D8AAAAAAADgPwAAAAAAAOA/AAAAAAAA4D8AAAAAAADgPwAAAAAAAOA/AAAAAAAA4D8CAAAAjAAAAAAAAAAAAAAAW5vVDP///wgAAAAAAAAAAAAAAAAAAAAAAAAAAAAAAAAAAAAAZAAAAAEAAABAAAAAAAAAAAAAAAAAAAAAAAAAAAAAAAAAAAAAAAAAAAAAAAAAAAAAAAAAAAAAAAAAAAAAAAAAAAAAAAAAAAAAAAAAAAAAAAAAAAAAAAAAAAAAAAAAAAAAFAAAADwAAAAAAAAAAAAAAAAAAAkUAAAAAQAAABQAAAAUAAAAFAAAAAEAAAAAAAAAZAAAAGQAAAAAAAAAZAAAAGQAAAAVAAAAYAAAAAAAAAAAAAAADwAAACADAAAAAAAAAAAAAAEAAACgMgAAVgcAAKr4//8BAAAAf39/AAEAAABkAAAAAAAAABQAAABAHwAAAAAAACYAAAAAAAAAwOD//wAAAAAmAAAAZAAAABYAAABMAAAAAAAAAAAAAAAEAAAAAAAAAAEAAADn5uYKAAAAACgAAAAoAAAAZAAAAGQAAAAAAAAAzMzMAAAAAABQAAAAUAAAAGQAAABkAAAAAAAAABcAAAAUAAAAAAAAAAAAAAD/fwAA/38AAAAAAAAJAAAABAAAAF8AYAAeAAAAaAAAAAAAAAAAAAAAAAAAAAAAAAAAAAAAECcAABAnAAAAAAAAAAAAAAAAAAAAAAAAAAAAAAAAAAAAAAAAAAAAABQAAAAAAAAAwMD/AAAAAABkAAAAMgAAAAAAAABkAAAAAAAAAH9/fwAKAAAAIgAAABgAAAAAAAAAAAAAAAAAAAAAAAAAAAAAAAAAAAAkAAAAJAAAAAAAAAAHAAAAAAAAAAAAAAAAAAAAAAAAAAAAAAAAAAAAf39/ACUAAABYAAAAAAAAAAAAAAAAAAAAAAAAAAAAAAAAAAAAAAAAAAAAAAAAAAAAAAAAAAAAAAA/AAAAAAAAAKCGAQAAAAAAAAAAAAAAAAAMAAAAAQAAAAAAAAAAAAAAAAAAAB8AAABUAAAAW5vVBf///wEAAAAAAAAAAAAAAAAAAAAAAAAAAAAAAAAAAAAAAAAAAAAAAAJ/f38A5+bmA8zMzADAwP8Af39/AAAAAAAAAAAAAAAAAAAAAAAAAAAAIQAAABgAAAAUAAAAKAUAAD8CAADYRQAAZwoAABAAAAAmAAAACAAAAAAAAAAAAAAA"/>
+                <pr:smNativeData xmlns:mc="http://schemas.openxmlformats.org/markup-compatibility/2006" xmlns:p14="http://schemas.microsoft.com/office/powerpoint/2010/main" xmlns:p15="http://schemas.microsoft.com/office/powerpoint/2012/main" xmlns:pr="smNativeData" xmlns="smNativeData" val="SMDATA_15_FLquaRMAAAAlAAAAZAAAAA0AAAAAkAAAAEgAAACQAAAASAAAAAAAAAABAAAAAAAAAAEAAABQAAAAAAAAAAAA4D8AAAAAAADgPwAAAAAAAOA/AAAAAAAA4D8AAAAAAADgPwAAAAAAAOA/AAAAAAAA4D8AAAAAAADgPwAAAAAAAOA/AAAAAAAA4D8CAAAAjAAAAAAAAAAAAAAAW5vVDP///wgAAAAAAAAAAAAAAAAAAAAAAAAAAAAAAAAAAAAAZAAAAAEAAABAAAAAAAAAAAAAAAAAAAAAAAAAAAAAAAAAAAAAAAAAAAAAAAAAAAAAAAAAAAAAAAAAAAAAAAAAAAAAAAAAAAAAAAAAAAAAAAAAAAAAAAAAAAAAAAAAAAAAFAAAADwAAAAAAAAAAAAAAAAAAAkUAAAAAQAAABQAAAAUAAAAFAAAAAEAAAAAAAAAZAAAAGQAAAAAAAAAZAAAAGQAAAAVAAAAYAAAAAAAAAAAAAAADwAAACADAAAAAAAAAAAAAAEAAACgMgAAVgcAAKr4//8BAAAAf39/AAEAAABkAAAAAAAAABQAAABAHwAAAAAAACYAAAAAAAAAwOD//wAAAAAmAAAAZAAAABYAAABMAAAAAAAAAAAAAAAEAAAAAAAAAAEAAADn5uYKAAAAACgAAAAoAAAAZAAAAGQAAAAAAAAAzMzMAAAAAABQAAAAUAAAAGQAAABkAAAAAAAAABcAAAAUAAAAAAAAAAAAAAD/fwAA/38AAAAAAAAJAAAABAAAAF8AYAAeAAAAaAAAAAAAAAAAAAAAAAAAAAAAAAAAAAAAECcAABAnAAAAAAAAAAAAAAAAAAAAAAAAAAAAAAAAAAAAAAAAAAAAABQAAAAAAAAAwMD/AAAAAABkAAAAMgAAAAAAAABkAAAAAAAAAH9/fwAKAAAAIgAAABgAAAAAAAAAAAAAAAAAAAAAAAAAAAAAAAAAAAAkAAAAJAAAAAAAAAAHAAAAAAAAAAAAAAAAAAAAAAAAAAAAAAAAAAAAf39/ACUAAABYAAAAAAAAAAAAAAAAAAAAAAAAAAAAAAAAAAAAAAAAAAAAAAAAAAAAAAAAAAAAAAA/AAAAAAAAAKCGAQAAAAAAAAAAAAAAAAAMAAAAAQAAAAAAAAAAAAAAAAAAAB8AAABUAAAAW5vVBf///wEAAAAAAAAAAAAAAAAAAAAAAAAAAAAAAAAAAAAAAAAAAAAAAAJ/f38A5+bmA8zMzADAwP8Af39/AAAAAAAAAAAAAAAAAAAAAAAAAAAAIQAAABgAAAAUAAAAKAUAAD8CAADYRQAAZwoAABAAAAAmAAAACAAAAAAAAAAAAAAA"/>
               </a:ext>
             </a:extLst>
           </p:cNvSpPr>
@@ -5637,8 +5661,22 @@
               <a:defRPr lang="en-US"/>
             </a:pPr>
             <a:r>
-              <a:t>microUSB port on bottom of board</a:t>
-            </a:r>
+              <a:rPr sz="4000" dirty="0" smtClean="0"/>
+              <a:t>Can power w/</a:t>
+            </a:r>
+            <a:r>
+              <a:rPr sz="4000" dirty="0" err="1" smtClean="0"/>
+              <a:t>microUSB</a:t>
+            </a:r>
+            <a:r>
+              <a:rPr sz="4000" dirty="0" smtClean="0"/>
+              <a:t> </a:t>
+            </a:r>
+            <a:r>
+              <a:rPr sz="4000" dirty="0"/>
+              <a:t>port on bottom of board</a:t>
+            </a:r>
+            <a:endParaRPr dirty="0"/>
           </a:p>
         </p:txBody>
       </p:sp>
@@ -5649,7 +5687,7 @@
             <a:picLocks noGrp="1" noChangeAspect="1" noChangeArrowheads="1"/>
             <a:extLst>
               <a:ext uri="smNativeData">
-                <pr:smNativeData xmlns="smNativeData" xmlns:pr="smNativeData" xmlns:p15="http://schemas.microsoft.com/office/powerpoint/2012/main" xmlns:p14="http://schemas.microsoft.com/office/powerpoint/2010/main" xmlns:mc="http://schemas.openxmlformats.org/markup-compatibility/2006" val="SMDATA_17_FLquaRMAAAAlAAAAEQAAAC0AAAAAkAAAAEgAAACQAAAASAAAAAAAAAAAAAAAAAAAAAEAAABQAAAAAAAAAAAA4D8AAAAAAADgPwAAAAAAAOA/AAAAAAAA4D8AAAAAAADgPwAAAAAAAOA/AAAAAAAA4D8AAAAAAADgPwAAAAAAAOA/AAAAAAAA4D8CAAAAjAAAAAAAAAAAAAAAW5vVDP///wgAAAAAAAAAAAAAAAAAAAAAAAAAAAAAAAAAAAAAZAAAAAEAAABAAAAAAAAAAAAAAAAAAAAAAAAAAAAAAAAAAAAAAAAAAAAAAAAAAAAAAAAAAAAAAAAAAAAAAAAAAAAAAAAAAAAAAAAAAAAAAAAAAAAAAAAAAAAAAAAAAAAAFAAAADwAAAAAAAAAAAAAAAAAAAkUAAAAAQAAABQAAAAUAAAAFAAAAAEAAAAAAAAAZAAAAGQAAAAAAAAAZAAAAGQAAAAVAAAAYAAAAAAAAAAAAAAADwAAACADAAAAAAAAAAAAAAEAAACgMgAAVgcAAKr4//8BAAAAf39/AAEAAABkAAAAAAAAABQAAABAHwAAAAAAACYAAAAAAAAAwOD//wAAAAAmAAAAZAAAABYAAABMAAAAAAAAAAAAAAAEAAAAAAAAAAEAAADn5uYKAAAAACgAAAAoAAAAZAAAAGQAAAAAAAAAzMzMAAAAAABQAAAAUAAAAGQAAABkAAAAAAAAAAcAAAA4AAAAAAAAAAAAAAAAAAAA////AAAAAAAAAAAAAAAAAAAAAAAAAAAAAAAAAAAAAABkAAAAZAAAAAAAAAAjAAAABAAAAGQAAAAXAAAAFAAAAAAAAAAAAAAA/38AAP9/AAAAAAAACQAAAAQAAADz////HgAAAGgAAAAAAAAAAAAAAAAAAAAAAAAAAAAAABAnAAAQJwAAAAAAAAAAAAAAAAAAAAAAAAAAAAAAAAAAAAAAAAAAAAAUAAAAAAAAAMDA/wAAAAAAZAAAADIAAAAAAAAAZAAAAAAAAAB/f38ACgAAACIAAAAYAAAAAAAAAAAAAAAAAAAAAAAAAAAAAAAAAAAAJAAAACQAAAAAAAAABwAAAAAAAAAAAAAAAAAAAAAAAAAAAAAAAAAAAH9/fwAlAAAAWAAAAAAAAAAAAAAAAAAAAAAAAAAAAAAAAAAAAAAAAAAAAAAAAAAAAAAAAAAAAAAAPwAAAAAAAACghgEAAAAAAAAAAAAAAAAADAAAAAEAAAAAAAAAAAAAAAAAAAAfAAAAVAAAAFub1QX///8BAAAAAAAAAAAAAAAAAAAAAAAAAAAAAAAAAAAAAAAAAAAAAAACf39/AOfm5gPMzMwAwMD/AH9/fwAAAAAAAAAAAAAAAAD///8AAAAAACEAAAAYAAAAFAAAALUNAAA7CwAASz0AAAAmAAAQAAAAJgAAAAgAAAABgQAAfwAAAA=="/>
+                <pr:smNativeData xmlns:mc="http://schemas.openxmlformats.org/markup-compatibility/2006" xmlns:p14="http://schemas.microsoft.com/office/powerpoint/2010/main" xmlns:p15="http://schemas.microsoft.com/office/powerpoint/2012/main" xmlns:pr="smNativeData" xmlns="smNativeData" val="SMDATA_17_FLquaRMAAAAlAAAAEQAAAC0AAAAAkAAAAEgAAACQAAAASAAAAAAAAAAAAAAAAAAAAAEAAABQAAAAAAAAAAAA4D8AAAAAAADgPwAAAAAAAOA/AAAAAAAA4D8AAAAAAADgPwAAAAAAAOA/AAAAAAAA4D8AAAAAAADgPwAAAAAAAOA/AAAAAAAA4D8CAAAAjAAAAAAAAAAAAAAAW5vVDP///wgAAAAAAAAAAAAAAAAAAAAAAAAAAAAAAAAAAAAAZAAAAAEAAABAAAAAAAAAAAAAAAAAAAAAAAAAAAAAAAAAAAAAAAAAAAAAAAAAAAAAAAAAAAAAAAAAAAAAAAAAAAAAAAAAAAAAAAAAAAAAAAAAAAAAAAAAAAAAAAAAAAAAFAAAADwAAAAAAAAAAAAAAAAAAAkUAAAAAQAAABQAAAAUAAAAFAAAAAEAAAAAAAAAZAAAAGQAAAAAAAAAZAAAAGQAAAAVAAAAYAAAAAAAAAAAAAAADwAAACADAAAAAAAAAAAAAAEAAACgMgAAVgcAAKr4//8BAAAAf39/AAEAAABkAAAAAAAAABQAAABAHwAAAAAAACYAAAAAAAAAwOD//wAAAAAmAAAAZAAAABYAAABMAAAAAAAAAAAAAAAEAAAAAAAAAAEAAADn5uYKAAAAACgAAAAoAAAAZAAAAGQAAAAAAAAAzMzMAAAAAABQAAAAUAAAAGQAAABkAAAAAAAAAAcAAAA4AAAAAAAAAAAAAAAAAAAA////AAAAAAAAAAAAAAAAAAAAAAAAAAAAAAAAAAAAAABkAAAAZAAAAAAAAAAjAAAABAAAAGQAAAAXAAAAFAAAAAAAAAAAAAAA/38AAP9/AAAAAAAACQAAAAQAAADz////HgAAAGgAAAAAAAAAAAAAAAAAAAAAAAAAAAAAABAnAAAQJwAAAAAAAAAAAAAAAAAAAAAAAAAAAAAAAAAAAAAAAAAAAAAUAAAAAAAAAMDA/wAAAAAAZAAAADIAAAAAAAAAZAAAAAAAAAB/f38ACgAAACIAAAAYAAAAAAAAAAAAAAAAAAAAAAAAAAAAAAAAAAAAJAAAACQAAAAAAAAABwAAAAAAAAAAAAAAAAAAAAAAAAAAAAAAAAAAAH9/fwAlAAAAWAAAAAAAAAAAAAAAAAAAAAAAAAAAAAAAAAAAAAAAAAAAAAAAAAAAAAAAAAAAAAAAPwAAAAAAAACghgEAAAAAAAAAAAAAAAAADAAAAAEAAAAAAAAAAAAAAAAAAAAfAAAAVAAAAFub1QX///8BAAAAAAAAAAAAAAAAAAAAAAAAAAAAAAAAAAAAAAAAAAAAAAACf39/AOfm5gPMzMwAwMD/AH9/fwAAAAAAAAAAAAAAAAD///8AAAAAACEAAAAYAAAAFAAAALUNAAA7CwAASz0AAAAmAAAQAAAAJgAAAAgAAAABgQAAfwAAAA=="/>
               </a:ext>
             </a:extLst>
           </p:cNvPicPr>
@@ -5713,7 +5751,7 @@
             <a:picLocks noGrp="1" noChangeAspect="1" noChangeArrowheads="1"/>
             <a:extLst>
               <a:ext uri="smNativeData">
-                <pr:smNativeData xmlns="smNativeData" xmlns:pr="smNativeData" xmlns:p15="http://schemas.microsoft.com/office/powerpoint/2012/main" xmlns:p14="http://schemas.microsoft.com/office/powerpoint/2010/main" xmlns:mc="http://schemas.openxmlformats.org/markup-compatibility/2006" val="SMDATA_17_FLquaRMAAAAlAAAAEQAAAC0AAAAAkAAAAEgAAACQAAAASAAAAAAAAAAAAAAAAAAAAAEAAABQAAAAAAAAAAAA4D8AAAAAAADgPwAAAAAAAOA/AAAAAAAA4D8AAAAAAADgPwAAAAAAAOA/AAAAAAAA4D8AAAAAAADgPwAAAAAAAOA/AAAAAAAA4D8CAAAAjAAAAAAAAAAAAAAAW5vVDP///wgAAAAAAAAAAAAAAAAAAAAAAAAAAAAAAAAAAAAAZAAAAAEAAABAAAAAAAAAAAAAAAAAAAAAAAAAAAAAAAAAAAAAAAAAAAAAAAAAAAAAAAAAAAAAAAAAAAAAAAAAAAAAAAAAAAAAAAAAAAAAAAAAAAAAAAAAAAAAAAAAAAAAFAAAADwAAAAAAAAAAAAAAAAAAAkUAAAAAQAAABQAAAAUAAAAFAAAAAEAAAAAAAAAZAAAAGQAAAAAAAAAZAAAAGQAAAAVAAAAYAAAAAAAAAAAAAAADwAAACADAAAAAAAAAAAAAAEAAACgMgAAVgcAAKr4//8BAAAAf39/AAEAAABkAAAAAAAAABQAAABAHwAAAAAAACYAAAAAAAAAwOD//wAAAAAmAAAAZAAAABYAAABMAAAAAAAAAAAAAAAEAAAAAAAAAAEAAADn5uYKAAAAACgAAAAoAAAAZAAAAGQAAAAAAAAAzMzMAAAAAABQAAAAUAAAAGQAAABkAAAAAAAAAAcAAAA4AAAAAAAAAAAAAAAAAAAA////AAAAAAAAAAAAAAAAAAAAAAAAAAAAAAAAAAAAAABkAAAAZAAAAAAAAAAjAAAABAAAAGQAAAAXAAAAFAAAAAAAAAAAAAAA/38AAP9/AAAAAAAACQAAAAQAAADgqGkCHgAAAGgAAAAAAAAAAAAAAAAAAAAAAAAAAAAAABAnAAAQJwAAAAAAAAAAAAAAAAAAAAAAAAAAAAAAAAAAAAAAAAAAAAAUAAAAAAAAAMDA/wAAAAAAZAAAADIAAAAAAAAAZAAAAAAAAAB/f38ACgAAACIAAAAYAAAAAAAAAAAAAAAAAAAAAAAAAAAAAAAAAAAAJAAAACQAAAAAAAAABwAAAAAAAAAAAAAAAAAAAAAAAAAAAAAAAAAAAH9/fwAlAAAAWAAAAAAAAAAAAAAAAAAAAAAAAAAAAAAAAAAAAAAAAAAAAAAAAAAAAAAAAAAAAAAAPwAAAAAAAACghgEAAAAAAAAAAAAAAAAADAAAAAEAAAAAAAAAAAAAAAAAAAAfAAAAVAAAAFub1QX///8BAAAAAAAAAAAAAAAAAAAAAAAAAAAAAAAAAAAAAAAAAAAAAAACf39/AOfm5gPMzMwAwMD/AH9/fwAAAAAAAAAAAAAAAAD///8AAAAAACEAAAAYAAAAFAAAABAQAABpBQAAZz8AAPcqAAAQAAAAJgAAAAgAAAABgQAAfwAAAA=="/>
+                <pr:smNativeData xmlns:mc="http://schemas.openxmlformats.org/markup-compatibility/2006" xmlns:p14="http://schemas.microsoft.com/office/powerpoint/2010/main" xmlns:p15="http://schemas.microsoft.com/office/powerpoint/2012/main" xmlns:pr="smNativeData" xmlns="smNativeData" val="SMDATA_17_FLquaRMAAAAlAAAAEQAAAC0AAAAAkAAAAEgAAACQAAAASAAAAAAAAAAAAAAAAAAAAAEAAABQAAAAAAAAAAAA4D8AAAAAAADgPwAAAAAAAOA/AAAAAAAA4D8AAAAAAADgPwAAAAAAAOA/AAAAAAAA4D8AAAAAAADgPwAAAAAAAOA/AAAAAAAA4D8CAAAAjAAAAAAAAAAAAAAAW5vVDP///wgAAAAAAAAAAAAAAAAAAAAAAAAAAAAAAAAAAAAAZAAAAAEAAABAAAAAAAAAAAAAAAAAAAAAAAAAAAAAAAAAAAAAAAAAAAAAAAAAAAAAAAAAAAAAAAAAAAAAAAAAAAAAAAAAAAAAAAAAAAAAAAAAAAAAAAAAAAAAAAAAAAAAFAAAADwAAAAAAAAAAAAAAAAAAAkUAAAAAQAAABQAAAAUAAAAFAAAAAEAAAAAAAAAZAAAAGQAAAAAAAAAZAAAAGQAAAAVAAAAYAAAAAAAAAAAAAAADwAAACADAAAAAAAAAAAAAAEAAACgMgAAVgcAAKr4//8BAAAAf39/AAEAAABkAAAAAAAAABQAAABAHwAAAAAAACYAAAAAAAAAwOD//wAAAAAmAAAAZAAAABYAAABMAAAAAAAAAAAAAAAEAAAAAAAAAAEAAADn5uYKAAAAACgAAAAoAAAAZAAAAGQAAAAAAAAAzMzMAAAAAABQAAAAUAAAAGQAAABkAAAAAAAAAAcAAAA4AAAAAAAAAAAAAAAAAAAA////AAAAAAAAAAAAAAAAAAAAAAAAAAAAAAAAAAAAAABkAAAAZAAAAAAAAAAjAAAABAAAAGQAAAAXAAAAFAAAAAAAAAAAAAAA/38AAP9/AAAAAAAACQAAAAQAAADgqGkCHgAAAGgAAAAAAAAAAAAAAAAAAAAAAAAAAAAAABAnAAAQJwAAAAAAAAAAAAAAAAAAAAAAAAAAAAAAAAAAAAAAAAAAAAAUAAAAAAAAAMDA/wAAAAAAZAAAADIAAAAAAAAAZAAAAAAAAAB/f38ACgAAACIAAAAYAAAAAAAAAAAAAAAAAAAAAAAAAAAAAAAAAAAAJAAAACQAAAAAAAAABwAAAAAAAAAAAAAAAAAAAAAAAAAAAAAAAAAAAH9/fwAlAAAAWAAAAAAAAAAAAAAAAAAAAAAAAAAAAAAAAAAAAAAAAAAAAAAAAAAAAAAAAAAAAAAAPwAAAAAAAACghgEAAAAAAAAAAAAAAAAADAAAAAEAAAAAAAAAAAAAAAAAAAAfAAAAVAAAAFub1QX///8BAAAAAAAAAAAAAAAAAAAAAAAAAAAAAAAAAAAAAAAAAAAAAAACf39/AOfm5gPMzMwAwMD/AH9/fwAAAAAAAAAAAAAAAAD///8AAAAAACEAAAAYAAAAFAAAABAQAABpBQAAZz8AAPcqAAAQAAAAJgAAAAgAAAABgQAAfwAAAA=="/>
               </a:ext>
             </a:extLst>
           </p:cNvPicPr>
@@ -5745,7 +5783,7 @@
             <a:spLocks noGrp="1" noChangeArrowheads="1"/>
             <a:extLst>
               <a:ext uri="smNativeData">
-                <pr:smNativeData xmlns="smNativeData" xmlns:pr="smNativeData" xmlns:p15="http://schemas.microsoft.com/office/powerpoint/2012/main" xmlns:p14="http://schemas.microsoft.com/office/powerpoint/2010/main" xmlns:mc="http://schemas.openxmlformats.org/markup-compatibility/2006" val="SMDATA_15_FLquaRMAAAAlAAAAZAAAAA0AAAAAkAAAAEgAAACQAAAASAAAAAAAAAABAAAAAAAAAAEAAABQAAAAAAAAAAAA4D8AAAAAAADgPwAAAAAAAOA/AAAAAAAA4D8AAAAAAADgPwAAAAAAAOA/AAAAAAAA4D8AAAAAAADgPwAAAAAAAOA/AAAAAAAA4D8CAAAAjAAAAAAAAAAAAAAAW5vVDP///wgAAAAAAAAAAAAAAAAAAAAAAAAAAAAAAAAAAAAAZAAAAAEAAABAAAAAAAAAAAAAAAAAAAAAAAAAAAAAAAAAAAAAAAAAAAAAAAAAAAAAAAAAAAAAAAAAAAAAAAAAAAAAAAAAAAAAAAAAAAAAAAAAAAAAAAAAAAAAAAAAAAAAFAAAADwAAAAAAAAAAAAAAAAAAAkUAAAAAQAAABQAAAAUAAAAFAAAAAEAAAAAAAAAZAAAAGQAAAAAAAAAZAAAAGQAAAAVAAAAYAAAAAAAAAAAAAAADwAAACADAAAAAAAAAAAAAAEAAACgMgAAVgcAAKr4//8BAAAAf39/AAEAAABkAAAAAAAAABQAAABAHwAAAAAAACYAAAAAAAAAwOD//wAAAAAmAAAAZAAAABYAAABMAAAAAAAAAAAAAAAEAAAAAAAAAAEAAADn5uYKAAAAACgAAAAoAAAAZAAAAGQAAAAAAAAAzMzMAAAAAABQAAAAUAAAAGQAAABkAAAAAAAAABcAAAAUAAAAAAAAAAAAAAD/fwAA/38AAAAAAAAJAAAABAAAAF8AYAAeAAAAaAAAAAAAAAAAAAAAAAAAAAAAAAAAAAAAECcAABAnAAAAAAAAAAAAAAAAAAAAAAAAAAAAAAAAAAAAAAAAAAAAABQAAAAAAAAAwMD/AAAAAABkAAAAMgAAAAAAAABkAAAAAAAAAH9/fwAKAAAAIgAAABgAAAAAAAAAAAAAAAAAAAAAAAAAAAAAAAAAAAAkAAAAJAAAAAAAAAAHAAAAAAAAAAAAAAAAAAAAAAAAAAAAAAAAAAAAf39/ACUAAABYAAAAAAAAAAAAAAAAAAAAAAAAAAAAAAAAAAAAAAAAAAAAAAAAAAAAAAAAAAAAAAA/AAAAAAAAAKCGAQAAAAAAAAAAAAAAAAAMAAAAAQAAAAAAAAAAAAAAAAAAAB8AAABUAAAAW5vVBf///wEAAAAAAAAAAAAAAAAAAAAAAAAAAAAAAAAAAAAAAAAAAAAAAAJ/f38A5+bmA8zMzADAwP8Af39/AAAAAAAAAAAAAAAAAAAAAAAAAAAAIQAAABgAAAAUAAAAKAUAAD8CAADYRQAAZwoAABAAAAAmAAAACAAAAAAAAAAAAAAA"/>
+                <pr:smNativeData xmlns:mc="http://schemas.openxmlformats.org/markup-compatibility/2006" xmlns:p14="http://schemas.microsoft.com/office/powerpoint/2010/main" xmlns:p15="http://schemas.microsoft.com/office/powerpoint/2012/main" xmlns:pr="smNativeData" xmlns="smNativeData" val="SMDATA_15_FLquaRMAAAAlAAAAZAAAAA0AAAAAkAAAAEgAAACQAAAASAAAAAAAAAABAAAAAAAAAAEAAABQAAAAAAAAAAAA4D8AAAAAAADgPwAAAAAAAOA/AAAAAAAA4D8AAAAAAADgPwAAAAAAAOA/AAAAAAAA4D8AAAAAAADgPwAAAAAAAOA/AAAAAAAA4D8CAAAAjAAAAAAAAAAAAAAAW5vVDP///wgAAAAAAAAAAAAAAAAAAAAAAAAAAAAAAAAAAAAAZAAAAAEAAABAAAAAAAAAAAAAAAAAAAAAAAAAAAAAAAAAAAAAAAAAAAAAAAAAAAAAAAAAAAAAAAAAAAAAAAAAAAAAAAAAAAAAAAAAAAAAAAAAAAAAAAAAAAAAAAAAAAAAFAAAADwAAAAAAAAAAAAAAAAAAAkUAAAAAQAAABQAAAAUAAAAFAAAAAEAAAAAAAAAZAAAAGQAAAAAAAAAZAAAAGQAAAAVAAAAYAAAAAAAAAAAAAAADwAAACADAAAAAAAAAAAAAAEAAACgMgAAVgcAAKr4//8BAAAAf39/AAEAAABkAAAAAAAAABQAAABAHwAAAAAAACYAAAAAAAAAwOD//wAAAAAmAAAAZAAAABYAAABMAAAAAAAAAAAAAAAEAAAAAAAAAAEAAADn5uYKAAAAACgAAAAoAAAAZAAAAGQAAAAAAAAAzMzMAAAAAABQAAAAUAAAAGQAAABkAAAAAAAAABcAAAAUAAAAAAAAAAAAAAD/fwAA/38AAAAAAAAJAAAABAAAAF8AYAAeAAAAaAAAAAAAAAAAAAAAAAAAAAAAAAAAAAAAECcAABAnAAAAAAAAAAAAAAAAAAAAAAAAAAAAAAAAAAAAAAAAAAAAABQAAAAAAAAAwMD/AAAAAABkAAAAMgAAAAAAAABkAAAAAAAAAH9/fwAKAAAAIgAAABgAAAAAAAAAAAAAAAAAAAAAAAAAAAAAAAAAAAAkAAAAJAAAAAAAAAAHAAAAAAAAAAAAAAAAAAAAAAAAAAAAAAAAAAAAf39/ACUAAABYAAAAAAAAAAAAAAAAAAAAAAAAAAAAAAAAAAAAAAAAAAAAAAAAAAAAAAAAAAAAAAA/AAAAAAAAAKCGAQAAAAAAAAAAAAAAAAAMAAAAAQAAAAAAAAAAAAAAAAAAAB8AAABUAAAAW5vVBf///wEAAAAAAAAAAAAAAAAAAAAAAAAAAAAAAAAAAAAAAAAAAAAAAAJ/f38A5+bmA8zMzADAwP8Af39/AAAAAAAAAAAAAAAAAAAAAAAAAAAAIQAAABgAAAAUAAAAKAUAAD8CAADYRQAAZwoAABAAAAAmAAAACAAAAAAAAAAAAAAA"/>
               </a:ext>
             </a:extLst>
           </p:cNvSpPr>
@@ -5806,7 +5844,7 @@
             <a:spLocks noGrp="1" noChangeArrowheads="1"/>
             <a:extLst>
               <a:ext uri="smNativeData">
-                <pr:smNativeData xmlns="smNativeData" xmlns:pr="smNativeData" xmlns:p15="http://schemas.microsoft.com/office/powerpoint/2012/main" xmlns:p14="http://schemas.microsoft.com/office/powerpoint/2010/main" xmlns:mc="http://schemas.openxmlformats.org/markup-compatibility/2006" val="SMDATA_15_FLquaRMAAAAlAAAAZAAAAA0AAAAAkAAAAEgAAACQAAAASAAAAAAAAAABAAAAAAAAAAEAAABQAAAAAAAAAAAA4D8AAAAAAADgPwAAAAAAAOA/AAAAAAAA4D8AAAAAAADgPwAAAAAAAOA/AAAAAAAA4D8AAAAAAADgPwAAAAAAAOA/AAAAAAAA4D8CAAAAjAAAAAAAAAAAAAAAW5vVDP///wgAAAAAAAAAAAAAAAAAAAAAAAAAAAAAAAAAAAAAZAAAAAEAAABAAAAAAAAAAAAAAAAAAAAAAAAAAAAAAAAAAAAAAAAAAAAAAAAAAAAAAAAAAAAAAAAAAAAAAAAAAAAAAAAAAAAAAAAAAAAAAAAAAAAAAAAAAAAAAAAAAAAAFAAAADwAAAAAAAAAAAAAAAAAAAkUAAAAAQAAABQAAAAUAAAAFAAAAAEAAAAAAAAAZAAAAGQAAAAAAAAAZAAAAGQAAAAVAAAAYAAAAAAAAAAAAAAADwAAACADAAAAAAAAAAAAAAEAAACgMgAAVgcAAKr4//8BAAAAf39/AAEAAABkAAAAAAAAABQAAABAHwAAAAAAACYAAAAAAAAAwOD//wAAAAAmAAAAZAAAABYAAABMAAAAAAAAAAAAAAAEAAAAAAAAAAEAAADn5uYKAAAAACgAAAAoAAAAZAAAAGQAAAAAAAAAzMzMAAAAAABQAAAAUAAAAGQAAABkAAAAAAAAABcAAAAUAAAAAAAAAAAAAAD/fwAA/38AAAAAAAAJAAAABAAAAF8AYAAeAAAAaAAAAAAAAAAAAAAAAAAAAAAAAAAAAAAAECcAABAnAAAAAAAAAAAAAAAAAAAAAAAAAAAAAAAAAAAAAAAAAAAAABQAAAAAAAAAwMD/AAAAAABkAAAAMgAAAAAAAABkAAAAAAAAAH9/fwAKAAAAIgAAABgAAAAAAAAAAAAAAAAAAAAAAAAAAAAAAAAAAAAkAAAAJAAAAAAAAAAHAAAAAAAAAAAAAAAAAAAAAAAAAAAAAAAAAAAAf39/ACUAAABYAAAAAAAAAAAAAAAAAAAAAAAAAAAAAAAAAAAAAAAAAAAAAAAAAAAAAAAAAAAAAAA/AAAAAAAAAKCGAQAAAAAAAAAAAAAAAAAMAAAAAQAAAAAAAAAAAAAAAAAAAB8AAABUAAAAW5vVBf///wEAAAAAAAAAAAAAAAAAAAAAAAAAAAAAAAAAAAAAAAAAAAAAAAJ/f38A5+bmA8zMzADAwP8Af39/AAAAAAAAAAAAAAAAAAAAAAAAAAAAIQAAABgAAAAUAAAAKAUAAD8CAADYRQAAZwoAABAAAAAmAAAACAAAAAAAAAAAAAAA"/>
+                <pr:smNativeData xmlns:mc="http://schemas.openxmlformats.org/markup-compatibility/2006" xmlns:p14="http://schemas.microsoft.com/office/powerpoint/2010/main" xmlns:p15="http://schemas.microsoft.com/office/powerpoint/2012/main" xmlns:pr="smNativeData" xmlns="smNativeData" val="SMDATA_15_FLquaRMAAAAlAAAAZAAAAA0AAAAAkAAAAEgAAACQAAAASAAAAAAAAAABAAAAAAAAAAEAAABQAAAAAAAAAAAA4D8AAAAAAADgPwAAAAAAAOA/AAAAAAAA4D8AAAAAAADgPwAAAAAAAOA/AAAAAAAA4D8AAAAAAADgPwAAAAAAAOA/AAAAAAAA4D8CAAAAjAAAAAAAAAAAAAAAW5vVDP///wgAAAAAAAAAAAAAAAAAAAAAAAAAAAAAAAAAAAAAZAAAAAEAAABAAAAAAAAAAAAAAAAAAAAAAAAAAAAAAAAAAAAAAAAAAAAAAAAAAAAAAAAAAAAAAAAAAAAAAAAAAAAAAAAAAAAAAAAAAAAAAAAAAAAAAAAAAAAAAAAAAAAAFAAAADwAAAAAAAAAAAAAAAAAAAkUAAAAAQAAABQAAAAUAAAAFAAAAAEAAAAAAAAAZAAAAGQAAAAAAAAAZAAAAGQAAAAVAAAAYAAAAAAAAAAAAAAADwAAACADAAAAAAAAAAAAAAEAAACgMgAAVgcAAKr4//8BAAAAf39/AAEAAABkAAAAAAAAABQAAABAHwAAAAAAACYAAAAAAAAAwOD//wAAAAAmAAAAZAAAABYAAABMAAAAAAAAAAAAAAAEAAAAAAAAAAEAAADn5uYKAAAAACgAAAAoAAAAZAAAAGQAAAAAAAAAzMzMAAAAAABQAAAAUAAAAGQAAABkAAAAAAAAABcAAAAUAAAAAAAAAAAAAAD/fwAA/38AAAAAAAAJAAAABAAAAF8AYAAeAAAAaAAAAAAAAAAAAAAAAAAAAAAAAAAAAAAAECcAABAnAAAAAAAAAAAAAAAAAAAAAAAAAAAAAAAAAAAAAAAAAAAAABQAAAAAAAAAwMD/AAAAAABkAAAAMgAAAAAAAABkAAAAAAAAAH9/fwAKAAAAIgAAABgAAAAAAAAAAAAAAAAAAAAAAAAAAAAAAAAAAAAkAAAAJAAAAAAAAAAHAAAAAAAAAAAAAAAAAAAAAAAAAAAAAAAAAAAAf39/ACUAAABYAAAAAAAAAAAAAAAAAAAAAAAAAAAAAAAAAAAAAAAAAAAAAAAAAAAAAAAAAAAAAAA/AAAAAAAAAKCGAQAAAAAAAAAAAAAAAAAMAAAAAQAAAAAAAAAAAAAAAAAAAB8AAABUAAAAW5vVBf///wEAAAAAAAAAAAAAAAAAAAAAAAAAAAAAAAAAAAAAAAAAAAAAAAJ/f38A5+bmA8zMzADAwP8Af39/AAAAAAAAAAAAAAAAAAAAAAAAAAAAIQAAABgAAAAUAAAAKAUAAD8CAADYRQAAZwoAABAAAAAmAAAACAAAAAAAAAAAAAAA"/>
               </a:ext>
             </a:extLst>
           </p:cNvSpPr>
@@ -5835,7 +5873,7 @@
             <a:spLocks noGrp="1" noChangeArrowheads="1"/>
             <a:extLst>
               <a:ext uri="smNativeData">
-                <pr:smNativeData xmlns="smNativeData" xmlns:pr="smNativeData" xmlns:p15="http://schemas.microsoft.com/office/powerpoint/2012/main" xmlns:p14="http://schemas.microsoft.com/office/powerpoint/2010/main" xmlns:mc="http://schemas.openxmlformats.org/markup-compatibility/2006" val="SMDATA_15_FLquaRMAAAAlAAAAZAAAAA0AAAAAkAAAAEgAAACQAAAASAAAAAAAAAAAAAAAAAAAAAEAAABQAAAAAAAAAAAA4D8AAAAAAADgPwAAAAAAAOA/AAAAAAAA4D8AAAAAAADgPwAAAAAAAOA/AAAAAAAA4D8AAAAAAADgPwAAAAAAAOA/AAAAAAAA4D8CAAAAjAAAAAAAAAAAAAAAW5vVDP///wgAAAAAAAAAAAAAAAAAAAAAAAAAAAAAAAAAAAAAZAAAAAEAAABAAAAAAAAAAAAAAAAAAAAAAAAAAAAAAAAAAAAAAAAAAAAAAAAAAAAAAAAAAAAAAAAAAAAAAAAAAAAAAAAAAAAAAAAAAAAAAAAAAAAAAAAAAAAAAAAAAAAAFAAAADwAAAAAAAAAAAAAAAAAAAkUAAAAAQAAABQAAAAUAAAAFAAAAAEAAAAAAAAAZAAAAGQAAAAAAAAAZAAAAGQAAAAVAAAAYAAAAAAAAAAAAAAADwAAACADAAAAAAAAAAAAAAEAAACgMgAAVgcAAKr4//8BAAAAf39/AAEAAABkAAAAAAAAABQAAABAHwAAAAAAACYAAAAAAAAAwOD//wAAAAAmAAAAZAAAABYAAABMAAAAAAAAAAAAAAAEAAAAAAAAAAEAAADn5uYKAAAAACgAAAAoAAAAZAAAAGQAAAAAAAAAzMzMAAAAAABQAAAAUAAAAGQAAABkAAAAAAAAABcAAAAUAAAAAAAAAAAAAAD/fwAA/38AAAAAAAAJAAAABAAAAF8AYAAeAAAAaAAAAAAAAAAAAAAAAAAAAAAAAAAAAAAAECcAABAnAAAAAAAAAAAAAAAAAAAAAAAAAAAAAAAAAAAAAAAAAAAAABQAAAAAAAAAwMD/AAAAAABkAAAAMgAAAAAAAABkAAAAAAAAAH9/fwAKAAAAIgAAABgAAAAAAAAAAAAAAAAAAAAAAAAAAAAAAAAAAAAkAAAAJAAAAAAAAAAHAAAAAAAAAAAAAAAAAAAAAAAAAAAAAAAAAAAAf39/ACUAAABYAAAAAAAAAAAAAAAAAAAAAAAAAAAAAAAAAAAAAAAAAAAAAAAAAAAAAAAAAAAAAAA/AAAAAAAAAKCGAQAAAAAAAAAAAAAAAAAMAAAAAQAAAAAAAAAAAAAAAAAAAB8AAABUAAAAW5vVBf///wEAAAAAAAAAAAAAAAAAAAAAAAAAAAAAAAAAAAAAAAAAAAAAAAJ/f38A5+bmA8zMzADAwP8Af39/AAAAAAAAAAAAAAAAAAAAAAAAAAAAIQAAABgAAAAUAAAAKAUAADsLAADYRQAAACYAABAAAAAmAAAACAAAAAAAAAAAAAAA"/>
+                <pr:smNativeData xmlns:mc="http://schemas.openxmlformats.org/markup-compatibility/2006" xmlns:p14="http://schemas.microsoft.com/office/powerpoint/2010/main" xmlns:p15="http://schemas.microsoft.com/office/powerpoint/2012/main" xmlns:pr="smNativeData" xmlns="smNativeData" val="SMDATA_15_FLquaRMAAAAlAAAAZAAAAA0AAAAAkAAAAEgAAACQAAAASAAAAAAAAAAAAAAAAAAAAAEAAABQAAAAAAAAAAAA4D8AAAAAAADgPwAAAAAAAOA/AAAAAAAA4D8AAAAAAADgPwAAAAAAAOA/AAAAAAAA4D8AAAAAAADgPwAAAAAAAOA/AAAAAAAA4D8CAAAAjAAAAAAAAAAAAAAAW5vVDP///wgAAAAAAAAAAAAAAAAAAAAAAAAAAAAAAAAAAAAAZAAAAAEAAABAAAAAAAAAAAAAAAAAAAAAAAAAAAAAAAAAAAAAAAAAAAAAAAAAAAAAAAAAAAAAAAAAAAAAAAAAAAAAAAAAAAAAAAAAAAAAAAAAAAAAAAAAAAAAAAAAAAAAFAAAADwAAAAAAAAAAAAAAAAAAAkUAAAAAQAAABQAAAAUAAAAFAAAAAEAAAAAAAAAZAAAAGQAAAAAAAAAZAAAAGQAAAAVAAAAYAAAAAAAAAAAAAAADwAAACADAAAAAAAAAAAAAAEAAACgMgAAVgcAAKr4//8BAAAAf39/AAEAAABkAAAAAAAAABQAAABAHwAAAAAAACYAAAAAAAAAwOD//wAAAAAmAAAAZAAAABYAAABMAAAAAAAAAAAAAAAEAAAAAAAAAAEAAADn5uYKAAAAACgAAAAoAAAAZAAAAGQAAAAAAAAAzMzMAAAAAABQAAAAUAAAAGQAAABkAAAAAAAAABcAAAAUAAAAAAAAAAAAAAD/fwAA/38AAAAAAAAJAAAABAAAAF8AYAAeAAAAaAAAAAAAAAAAAAAAAAAAAAAAAAAAAAAAECcAABAnAAAAAAAAAAAAAAAAAAAAAAAAAAAAAAAAAAAAAAAAAAAAABQAAAAAAAAAwMD/AAAAAABkAAAAMgAAAAAAAABkAAAAAAAAAH9/fwAKAAAAIgAAABgAAAAAAAAAAAAAAAAAAAAAAAAAAAAAAAAAAAAkAAAAJAAAAAAAAAAHAAAAAAAAAAAAAAAAAAAAAAAAAAAAAAAAAAAAf39/ACUAAABYAAAAAAAAAAAAAAAAAAAAAAAAAAAAAAAAAAAAAAAAAAAAAAAAAAAAAAAAAAAAAAA/AAAAAAAAAKCGAQAAAAAAAAAAAAAAAAAMAAAAAQAAAAAAAAAAAAAAAAAAAB8AAABUAAAAW5vVBf///wEAAAAAAAAAAAAAAAAAAAAAAAAAAAAAAAAAAAAAAAAAAAAAAAJ/f38A5+bmA8zMzADAwP8Af39/AAAAAAAAAAAAAAAAAAAAAAAAAAAAIQAAABgAAAAUAAAAKAUAADsLAADYRQAAACYAABAAAAAmAAAACAAAAAAAAAAAAAAA"/>
               </a:ext>
             </a:extLst>
           </p:cNvSpPr>
@@ -5966,7 +6004,7 @@
             <a:spLocks noGrp="1" noChangeArrowheads="1"/>
             <a:extLst>
               <a:ext uri="smNativeData">
-                <pr:smNativeData xmlns="smNativeData" xmlns:pr="smNativeData" xmlns:p15="http://schemas.microsoft.com/office/powerpoint/2012/main" xmlns:p14="http://schemas.microsoft.com/office/powerpoint/2010/main" xmlns:mc="http://schemas.openxmlformats.org/markup-compatibility/2006" val="SMDATA_15_FLquaRMAAAAlAAAAZAAAAA0AAAAAkAAAAEgAAACQAAAASAAAAAAAAAABAAAAAAAAAAEAAABQAAAAAAAAAAAA4D8AAAAAAADgPwAAAAAAAOA/AAAAAAAA4D8AAAAAAADgPwAAAAAAAOA/AAAAAAAA4D8AAAAAAADgPwAAAAAAAOA/AAAAAAAA4D8CAAAAjAAAAAAAAAAAAAAAW5vVDP///wgAAAAAAAAAAAAAAAAAAAAAAAAAAAAAAAAAAAAAZAAAAAEAAABAAAAAAAAAAAAAAAAAAAAAAAAAAAAAAAAAAAAAAAAAAAAAAAAAAAAAAAAAAAAAAAAAAAAAAAAAAAAAAAAAAAAAAAAAAAAAAAAAAAAAAAAAAAAAAAAAAAAAFAAAADwAAAAAAAAAAAAAAAAAAAkUAAAAAQAAABQAAAAUAAAAFAAAAAEAAAAAAAAAZAAAAGQAAAAAAAAAZAAAAGQAAAAVAAAAYAAAAAAAAAAAAAAADwAAACADAAAAAAAAAAAAAAEAAACgMgAAVgcAAKr4//8BAAAAf39/AAEAAABkAAAAAAAAABQAAABAHwAAAAAAACYAAAAAAAAAwOD//wAAAAAmAAAAZAAAABYAAABMAAAAAAAAAAAAAAAEAAAAAAAAAAEAAADn5uYKAAAAACgAAAAoAAAAZAAAAGQAAAAAAAAAzMzMAAAAAABQAAAAUAAAAGQAAABkAAAAAAAAABcAAAAUAAAAAAAAAAAAAAD/fwAA/38AAAAAAAAJAAAABAAAAF8AYAAeAAAAaAAAAAAAAAAAAAAAAAAAAAAAAAAAAAAAECcAABAnAAAAAAAAAAAAAAAAAAAAAAAAAAAAAAAAAAAAAAAAAAAAABQAAAAAAAAAwMD/AAAAAABkAAAAMgAAAAAAAABkAAAAAAAAAH9/fwAKAAAAIgAAABgAAAAAAAAAAAAAAAAAAAAAAAAAAAAAAAAAAAAkAAAAJAAAAAAAAAAHAAAAAAAAAAAAAAAAAAAAAAAAAAAAAAAAAAAAf39/ACUAAABYAAAAAAAAAAAAAAAAAAAAAAAAAAAAAAAAAAAAAAAAAAAAAAAAAAAAAAAAAAAAAAA/AAAAAAAAAKCGAQAAAAAAAAAAAAAAAAAMAAAAAQAAAAAAAAAAAAAAAAAAAB8AAABUAAAAW5vVBf///wEAAAAAAAAAAAAAAAAAAAAAAAAAAAAAAAAAAAAAAAAAAAAAAAJ/f38A5+bmA8zMzADAwP8Af39/AAAAAAAAAAAAAAAAAAAAAAAAAAAAIQAAABgAAAAUAAAAKAUAAD8CAADYRQAAZwoAABAAAAAmAAAACAAAAAAAAAAAAAAA"/>
+                <pr:smNativeData xmlns:mc="http://schemas.openxmlformats.org/markup-compatibility/2006" xmlns:p14="http://schemas.microsoft.com/office/powerpoint/2010/main" xmlns:p15="http://schemas.microsoft.com/office/powerpoint/2012/main" xmlns:pr="smNativeData" xmlns="smNativeData" val="SMDATA_15_FLquaRMAAAAlAAAAZAAAAA0AAAAAkAAAAEgAAACQAAAASAAAAAAAAAABAAAAAAAAAAEAAABQAAAAAAAAAAAA4D8AAAAAAADgPwAAAAAAAOA/AAAAAAAA4D8AAAAAAADgPwAAAAAAAOA/AAAAAAAA4D8AAAAAAADgPwAAAAAAAOA/AAAAAAAA4D8CAAAAjAAAAAAAAAAAAAAAW5vVDP///wgAAAAAAAAAAAAAAAAAAAAAAAAAAAAAAAAAAAAAZAAAAAEAAABAAAAAAAAAAAAAAAAAAAAAAAAAAAAAAAAAAAAAAAAAAAAAAAAAAAAAAAAAAAAAAAAAAAAAAAAAAAAAAAAAAAAAAAAAAAAAAAAAAAAAAAAAAAAAAAAAAAAAFAAAADwAAAAAAAAAAAAAAAAAAAkUAAAAAQAAABQAAAAUAAAAFAAAAAEAAAAAAAAAZAAAAGQAAAAAAAAAZAAAAGQAAAAVAAAAYAAAAAAAAAAAAAAADwAAACADAAAAAAAAAAAAAAEAAACgMgAAVgcAAKr4//8BAAAAf39/AAEAAABkAAAAAAAAABQAAABAHwAAAAAAACYAAAAAAAAAwOD//wAAAAAmAAAAZAAAABYAAABMAAAAAAAAAAAAAAAEAAAAAAAAAAEAAADn5uYKAAAAACgAAAAoAAAAZAAAAGQAAAAAAAAAzMzMAAAAAABQAAAAUAAAAGQAAABkAAAAAAAAABcAAAAUAAAAAAAAAAAAAAD/fwAA/38AAAAAAAAJAAAABAAAAF8AYAAeAAAAaAAAAAAAAAAAAAAAAAAAAAAAAAAAAAAAECcAABAnAAAAAAAAAAAAAAAAAAAAAAAAAAAAAAAAAAAAAAAAAAAAABQAAAAAAAAAwMD/AAAAAABkAAAAMgAAAAAAAABkAAAAAAAAAH9/fwAKAAAAIgAAABgAAAAAAAAAAAAAAAAAAAAAAAAAAAAAAAAAAAAkAAAAJAAAAAAAAAAHAAAAAAAAAAAAAAAAAAAAAAAAAAAAAAAAAAAAf39/ACUAAABYAAAAAAAAAAAAAAAAAAAAAAAAAAAAAAAAAAAAAAAAAAAAAAAAAAAAAAAAAAAAAAA/AAAAAAAAAKCGAQAAAAAAAAAAAAAAAAAMAAAAAQAAAAAAAAAAAAAAAAAAAB8AAABUAAAAW5vVBf///wEAAAAAAAAAAAAAAAAAAAAAAAAAAAAAAAAAAAAAAAAAAAAAAAJ/f38A5+bmA8zMzADAwP8Af39/AAAAAAAAAAAAAAAAAAAAAAAAAAAAIQAAABgAAAAUAAAAKAUAAD8CAADYRQAAZwoAABAAAAAmAAAACAAAAAAAAAAAAAAA"/>
               </a:ext>
             </a:extLst>
           </p:cNvSpPr>
@@ -5995,7 +6033,7 @@
             <a:spLocks noGrp="1" noChangeArrowheads="1"/>
             <a:extLst>
               <a:ext uri="smNativeData">
-                <pr:smNativeData xmlns="smNativeData" xmlns:pr="smNativeData" xmlns:p15="http://schemas.microsoft.com/office/powerpoint/2012/main" xmlns:p14="http://schemas.microsoft.com/office/powerpoint/2010/main" xmlns:mc="http://schemas.openxmlformats.org/markup-compatibility/2006" val="SMDATA_15_FLquaRMAAAAlAAAAZAAAAA0AAAAAkAAAAEgAAACQAAAASAAAAAAAAAAAAAAAAAAAAAEAAABQAAAAAAAAAAAA4D8AAAAAAADgPwAAAAAAAOA/AAAAAAAA4D8AAAAAAADgPwAAAAAAAOA/AAAAAAAA4D8AAAAAAADgPwAAAAAAAOA/AAAAAAAA4D8CAAAAjAAAAAAAAAAAAAAAW5vVDP///wgAAAAAAAAAAAAAAAAAAAAAAAAAAAAAAAAAAAAAZAAAAAEAAABAAAAAAAAAAAAAAAAAAAAAAAAAAAAAAAAAAAAAAAAAAAAAAAAAAAAAAAAAAAAAAAAAAAAAAAAAAAAAAAAAAAAAAAAAAAAAAAAAAAAAAAAAAAAAAAAAAAAAFAAAADwAAAAAAAAAAAAAAAAAAAkUAAAAAQAAABQAAAAUAAAAFAAAAAEAAAAAAAAAZAAAAGQAAAAAAAAAZAAAAGQAAAAVAAAAYAAAAAAAAAAAAAAADwAAACADAAAAAAAAAAAAAAEAAACgMgAAVgcAAKr4//8BAAAAf39/AAEAAABkAAAAAAAAABQAAABAHwAAAAAAACYAAAAAAAAAwOD//wAAAAAmAAAAZAAAABYAAABMAAAAAAAAAAAAAAAEAAAAAAAAAAEAAADn5uYKAAAAACgAAAAoAAAAZAAAAGQAAAAAAAAAzMzMAAAAAABQAAAAUAAAAGQAAABkAAAAAAAAABcAAAAUAAAAAAAAAAAAAAD/fwAA/38AAAAAAAAJAAAABAAAAF8AYAAeAAAAaAAAAAAAAAAAAAAAAAAAAAAAAAAAAAAAECcAABAnAAAAAAAAAAAAAAAAAAAAAAAAAAAAAAAAAAAAAAAAAAAAABQAAAAAAAAAwMD/AAAAAABkAAAAMgAAAAAAAABkAAAAAAAAAH9/fwAKAAAAIgAAABgAAAAAAAAAAAAAAAAAAAAAAAAAAAAAAAAAAAAkAAAAJAAAAAAAAAAHAAAAAAAAAAAAAAAAAAAAAAAAAAAAAAAAAAAAf39/ACUAAABYAAAAAAAAAAAAAAAAAAAAAAAAAAAAAAAAAAAAAAAAAAAAAAAAAAAAAAAAAAAAAAA/AAAAAAAAAKCGAQAAAAAAAAAAAAAAAAAMAAAAAQAAAAAAAAAAAAAAAAAAAB8AAABUAAAAW5vVBf///wEAAAAAAAAAAAAAAAAAAAAAAAAAAAAAAAAAAAAAAAAAAAAAAAJ/f38A5+bmA8zMzADAwP8Af39/AAAAAAAAAAAAAAAAAAAAAAAAAAAAIQAAABgAAAAUAAAAKAUAADsLAADYRQAAACYAABAAAAAmAAAACAAAAAAAAAAAAAAA"/>
+                <pr:smNativeData xmlns:mc="http://schemas.openxmlformats.org/markup-compatibility/2006" xmlns:p14="http://schemas.microsoft.com/office/powerpoint/2010/main" xmlns:p15="http://schemas.microsoft.com/office/powerpoint/2012/main" xmlns:pr="smNativeData" xmlns="smNativeData" val="SMDATA_15_FLquaRMAAAAlAAAAZAAAAA0AAAAAkAAAAEgAAACQAAAASAAAAAAAAAAAAAAAAAAAAAEAAABQAAAAAAAAAAAA4D8AAAAAAADgPwAAAAAAAOA/AAAAAAAA4D8AAAAAAADgPwAAAAAAAOA/AAAAAAAA4D8AAAAAAADgPwAAAAAAAOA/AAAAAAAA4D8CAAAAjAAAAAAAAAAAAAAAW5vVDP///wgAAAAAAAAAAAAAAAAAAAAAAAAAAAAAAAAAAAAAZAAAAAEAAABAAAAAAAAAAAAAAAAAAAAAAAAAAAAAAAAAAAAAAAAAAAAAAAAAAAAAAAAAAAAAAAAAAAAAAAAAAAAAAAAAAAAAAAAAAAAAAAAAAAAAAAAAAAAAAAAAAAAAFAAAADwAAAAAAAAAAAAAAAAAAAkUAAAAAQAAABQAAAAUAAAAFAAAAAEAAAAAAAAAZAAAAGQAAAAAAAAAZAAAAGQAAAAVAAAAYAAAAAAAAAAAAAAADwAAACADAAAAAAAAAAAAAAEAAACgMgAAVgcAAKr4//8BAAAAf39/AAEAAABkAAAAAAAAABQAAABAHwAAAAAAACYAAAAAAAAAwOD//wAAAAAmAAAAZAAAABYAAABMAAAAAAAAAAAAAAAEAAAAAAAAAAEAAADn5uYKAAAAACgAAAAoAAAAZAAAAGQAAAAAAAAAzMzMAAAAAABQAAAAUAAAAGQAAABkAAAAAAAAABcAAAAUAAAAAAAAAAAAAAD/fwAA/38AAAAAAAAJAAAABAAAAF8AYAAeAAAAaAAAAAAAAAAAAAAAAAAAAAAAAAAAAAAAECcAABAnAAAAAAAAAAAAAAAAAAAAAAAAAAAAAAAAAAAAAAAAAAAAABQAAAAAAAAAwMD/AAAAAABkAAAAMgAAAAAAAABkAAAAAAAAAH9/fwAKAAAAIgAAABgAAAAAAAAAAAAAAAAAAAAAAAAAAAAAAAAAAAAkAAAAJAAAAAAAAAAHAAAAAAAAAAAAAAAAAAAAAAAAAAAAAAAAAAAAf39/ACUAAABYAAAAAAAAAAAAAAAAAAAAAAAAAAAAAAAAAAAAAAAAAAAAAAAAAAAAAAAAAAAAAAA/AAAAAAAAAKCGAQAAAAAAAAAAAAAAAAAMAAAAAQAAAAAAAAAAAAAAAAAAAB8AAABUAAAAW5vVBf///wEAAAAAAAAAAAAAAAAAAAAAAAAAAAAAAAAAAAAAAAAAAAAAAAJ/f38A5+bmA8zMzADAwP8Af39/AAAAAAAAAAAAAAAAAAAAAAAAAAAAIQAAABgAAAAUAAAAKAUAADsLAADYRQAAACYAABAAAAAmAAAACAAAAAAAAAAAAAAA"/>
               </a:ext>
             </a:extLst>
           </p:cNvSpPr>
@@ -6012,7 +6050,32 @@
               <a:defRPr lang="en-US"/>
             </a:pPr>
             <a:r>
-              <a:t> BeagleBone has two Wifi adapters, one is used as WiFi server named something like BeagleBone-CB0B</a:t>
+              <a:rPr dirty="0"/>
+              <a:t> </a:t>
+            </a:r>
+            <a:r>
+              <a:rPr dirty="0" err="1"/>
+              <a:t>BeagleBone</a:t>
+            </a:r>
+            <a:r>
+              <a:rPr dirty="0"/>
+              <a:t> has two </a:t>
+            </a:r>
+            <a:r>
+              <a:rPr dirty="0" err="1"/>
+              <a:t>Wifi</a:t>
+            </a:r>
+            <a:r>
+              <a:rPr dirty="0"/>
+              <a:t> adapters, one is used as </a:t>
+            </a:r>
+            <a:r>
+              <a:rPr dirty="0" err="1"/>
+              <a:t>WiFi</a:t>
+            </a:r>
+            <a:r>
+              <a:rPr dirty="0"/>
+              <a:t> server named something like BeagleBone-CB0B</a:t>
             </a:r>
           </a:p>
           <a:p>
@@ -6020,7 +6083,24 @@
               <a:defRPr lang="en-US"/>
             </a:pPr>
             <a:r>
-              <a:t>SSH into 192.168.8.1  username: debian  password: temppwd / blick77</a:t>
+              <a:rPr dirty="0"/>
+              <a:t>SSH into 192.168.8.1  username: </a:t>
+            </a:r>
+            <a:r>
+              <a:rPr dirty="0" err="1"/>
+              <a:t>debian</a:t>
+            </a:r>
+            <a:r>
+              <a:rPr dirty="0"/>
+              <a:t>  password: </a:t>
+            </a:r>
+            <a:r>
+              <a:rPr dirty="0" err="1"/>
+              <a:t>temppwd</a:t>
+            </a:r>
+            <a:r>
+              <a:rPr dirty="0"/>
+              <a:t> / blick77</a:t>
             </a:r>
           </a:p>
           <a:p>
@@ -6028,6 +6108,7 @@
               <a:defRPr lang="en-US"/>
             </a:pPr>
             <a:r>
+              <a:rPr dirty="0"/>
               <a:t>Thru serial cable: 192.168.7.2 (on Mac 192.168.6.2)</a:t>
             </a:r>
           </a:p>
@@ -6036,6 +6117,7 @@
               <a:defRPr lang="en-US"/>
             </a:pPr>
             <a:r>
+              <a:rPr dirty="0"/>
               <a:t>You can open AS MANY SSH connections as you want!</a:t>
             </a:r>
           </a:p>
@@ -6044,7 +6126,24 @@
               <a:defRPr lang="en-US"/>
             </a:pPr>
             <a:r>
-              <a:t>Copy files using SCP: scp 192.168.8.1:/home/debian/etc…</a:t>
+              <a:rPr dirty="0"/>
+              <a:t>Copy files using SCP: </a:t>
+            </a:r>
+            <a:r>
+              <a:rPr dirty="0" err="1"/>
+              <a:t>scp</a:t>
+            </a:r>
+            <a:r>
+              <a:rPr dirty="0"/>
+              <a:t> 192.168.8.1:/home/</a:t>
+            </a:r>
+            <a:r>
+              <a:rPr dirty="0" err="1"/>
+              <a:t>debian</a:t>
+            </a:r>
+            <a:r>
+              <a:rPr dirty="0"/>
+              <a:t>/etc…</a:t>
             </a:r>
           </a:p>
           <a:p>
@@ -6052,7 +6151,16 @@
               <a:defRPr lang="en-US"/>
             </a:pPr>
             <a:r>
-              <a:t>'Remote Host Identification has changed' error - delete old key and try again (caused by multiple BeagleBones with same ID):</a:t>
+              <a:rPr dirty="0"/>
+              <a:t>'Remote Host Identification has changed' error - delete old key and try again (caused by multiple </a:t>
+            </a:r>
+            <a:r>
+              <a:rPr dirty="0" err="1"/>
+              <a:t>BeagleBones</a:t>
+            </a:r>
+            <a:r>
+              <a:rPr dirty="0"/>
+              <a:t> with same ID):</a:t>
             </a:r>
           </a:p>
           <a:p>
@@ -6060,25 +6168,34 @@
               <a:defRPr lang="en-US"/>
             </a:pPr>
             <a:r>
-              <a:rPr lang="en-US" cap="none">
+              <a:rPr lang="en-US" cap="none" dirty="0" err="1">
                 <a:solidFill>
                   <a:srgbClr val="FF0000"/>
                 </a:solidFill>
               </a:rPr>
-              <a:t>ssh-keygen -R 192.168.8.1</a:t>
-            </a:r>
-          </a:p>
-          <a:p>
-            <a:pPr>
-              <a:defRPr lang="en-US"/>
-            </a:pPr>
-            <a:r>
-              <a:rPr lang="en-US" cap="none">
+              <a:t>ssh-keygen</a:t>
+            </a:r>
+            <a:r>
+              <a:rPr lang="en-US" cap="none" dirty="0">
+                <a:solidFill>
+                  <a:srgbClr val="FF0000"/>
+                </a:solidFill>
+              </a:rPr>
+              <a:t> -R 192.168.8.1</a:t>
+            </a:r>
+          </a:p>
+          <a:p>
+            <a:pPr>
+              <a:defRPr lang="en-US"/>
+            </a:pPr>
+            <a:r>
+              <a:rPr lang="en-US" cap="none" dirty="0">
                 <a:hlinkClick r:id="rId2"/>
               </a:rPr>
               <a:t>http://192.168.8.1</a:t>
             </a:r>
             <a:r>
+              <a:rPr dirty="0"/>
               <a:t> to use Cloud9 web interface</a:t>
             </a:r>
           </a:p>
@@ -6086,19 +6203,19 @@
             <a:pPr>
               <a:defRPr lang="en-US"/>
             </a:pPr>
-            <a:endParaRPr/>
-          </a:p>
-          <a:p>
-            <a:pPr>
-              <a:defRPr lang="en-US"/>
-            </a:pPr>
-            <a:endParaRPr/>
+            <a:endParaRPr dirty="0"/>
+          </a:p>
+          <a:p>
+            <a:pPr>
+              <a:defRPr lang="en-US"/>
+            </a:pPr>
+            <a:endParaRPr dirty="0"/>
           </a:p>
           <a:p>
             <a:pPr lvl="2">
               <a:defRPr lang="en-US"/>
             </a:pPr>
-            <a:endParaRPr/>
+            <a:endParaRPr dirty="0"/>
           </a:p>
         </p:txBody>
       </p:sp>
@@ -6141,7 +6258,7 @@
             <a:spLocks noGrp="1" noChangeArrowheads="1"/>
             <a:extLst>
               <a:ext uri="smNativeData">
-                <pr:smNativeData xmlns="smNativeData" xmlns:pr="smNativeData" xmlns:p15="http://schemas.microsoft.com/office/powerpoint/2012/main" xmlns:p14="http://schemas.microsoft.com/office/powerpoint/2010/main" xmlns:mc="http://schemas.openxmlformats.org/markup-compatibility/2006" val="SMDATA_15_FLquaRMAAAAlAAAAZAAAAA0AAAAAkAAAAEgAAACQAAAASAAAAAAAAAABAAAAAAAAAAEAAABQAAAAAAAAAAAA4D8AAAAAAADgPwAAAAAAAOA/AAAAAAAA4D8AAAAAAADgPwAAAAAAAOA/AAAAAAAA4D8AAAAAAADgPwAAAAAAAOA/AAAAAAAA4D8CAAAAjAAAAAAAAAAAAAAAW5vVDP///wgAAAAAAAAAAAAAAAAAAAAAAAAAAAAAAAAAAAAAZAAAAAEAAABAAAAAAAAAAAAAAAAAAAAAAAAAAAAAAAAAAAAAAAAAAAAAAAAAAAAAAAAAAAAAAAAAAAAAAAAAAAAAAAAAAAAAAAAAAAAAAAAAAAAAAAAAAAAAAAAAAAAAFAAAADwAAAAAAAAAAAAAAAAAAAkUAAAAAQAAABQAAAAUAAAAFAAAAAEAAAAAAAAAZAAAAGQAAAAAAAAAZAAAAGQAAAAVAAAAYAAAAAAAAAAAAAAADwAAACADAAAAAAAAAAAAAAEAAACgMgAAVgcAAKr4//8BAAAAf39/AAEAAABkAAAAAAAAABQAAABAHwAAAAAAACYAAAAAAAAAwOD//wAAAAAmAAAAZAAAABYAAABMAAAAAAAAAAAAAAAEAAAAAAAAAAEAAADn5uYKAAAAACgAAAAoAAAAZAAAAGQAAAAAAAAAzMzMAAAAAABQAAAAUAAAAGQAAABkAAAAAAAAABcAAAAUAAAAAAAAAAAAAAD/fwAA/38AAAAAAAAJAAAABAAAAF8AYAAeAAAAaAAAAAAAAAAAAAAAAAAAAAAAAAAAAAAAECcAABAnAAAAAAAAAAAAAAAAAAAAAAAAAAAAAAAAAAAAAAAAAAAAABQAAAAAAAAAwMD/AAAAAABkAAAAMgAAAAAAAABkAAAAAAAAAH9/fwAKAAAAIgAAABgAAAAAAAAAAAAAAAAAAAAAAAAAAAAAAAAAAAAkAAAAJAAAAAAAAAAHAAAAAAAAAAAAAAAAAAAAAAAAAAAAAAAAAAAAf39/ACUAAABYAAAAAAAAAAAAAAAAAAAAAAAAAAAAAAAAAAAAAAAAAAAAAAAAAAAAAAAAAAAAAAA/AAAAAAAAAKCGAQAAAAAAAAAAAAAAAAAMAAAAAQAAAAAAAAAAAAAAAAAAAB8AAABUAAAAW5vVBf///wEAAAAAAAAAAAAAAAAAAAAAAAAAAAAAAAAAAAAAAAAAAAAAAAJ/f38A5+bmA8zMzADAwP8Af39/AAAAAAAAAAAAAAAAAAAAAAAAAAAAIQAAABgAAAAUAAAAKAUAAD8CAADYRQAAZwoAABAAAAAmAAAACAAAAAAAAAAAAAAA"/>
+                <pr:smNativeData xmlns:mc="http://schemas.openxmlformats.org/markup-compatibility/2006" xmlns:p14="http://schemas.microsoft.com/office/powerpoint/2010/main" xmlns:p15="http://schemas.microsoft.com/office/powerpoint/2012/main" xmlns:pr="smNativeData" xmlns="smNativeData" val="SMDATA_15_FLquaRMAAAAlAAAAZAAAAA0AAAAAkAAAAEgAAACQAAAASAAAAAAAAAABAAAAAAAAAAEAAABQAAAAAAAAAAAA4D8AAAAAAADgPwAAAAAAAOA/AAAAAAAA4D8AAAAAAADgPwAAAAAAAOA/AAAAAAAA4D8AAAAAAADgPwAAAAAAAOA/AAAAAAAA4D8CAAAAjAAAAAAAAAAAAAAAW5vVDP///wgAAAAAAAAAAAAAAAAAAAAAAAAAAAAAAAAAAAAAZAAAAAEAAABAAAAAAAAAAAAAAAAAAAAAAAAAAAAAAAAAAAAAAAAAAAAAAAAAAAAAAAAAAAAAAAAAAAAAAAAAAAAAAAAAAAAAAAAAAAAAAAAAAAAAAAAAAAAAAAAAAAAAFAAAADwAAAAAAAAAAAAAAAAAAAkUAAAAAQAAABQAAAAUAAAAFAAAAAEAAAAAAAAAZAAAAGQAAAAAAAAAZAAAAGQAAAAVAAAAYAAAAAAAAAAAAAAADwAAACADAAAAAAAAAAAAAAEAAACgMgAAVgcAAKr4//8BAAAAf39/AAEAAABkAAAAAAAAABQAAABAHwAAAAAAACYAAAAAAAAAwOD//wAAAAAmAAAAZAAAABYAAABMAAAAAAAAAAAAAAAEAAAAAAAAAAEAAADn5uYKAAAAACgAAAAoAAAAZAAAAGQAAAAAAAAAzMzMAAAAAABQAAAAUAAAAGQAAABkAAAAAAAAABcAAAAUAAAAAAAAAAAAAAD/fwAA/38AAAAAAAAJAAAABAAAAF8AYAAeAAAAaAAAAAAAAAAAAAAAAAAAAAAAAAAAAAAAECcAABAnAAAAAAAAAAAAAAAAAAAAAAAAAAAAAAAAAAAAAAAAAAAAABQAAAAAAAAAwMD/AAAAAABkAAAAMgAAAAAAAABkAAAAAAAAAH9/fwAKAAAAIgAAABgAAAAAAAAAAAAAAAAAAAAAAAAAAAAAAAAAAAAkAAAAJAAAAAAAAAAHAAAAAAAAAAAAAAAAAAAAAAAAAAAAAAAAAAAAf39/ACUAAABYAAAAAAAAAAAAAAAAAAAAAAAAAAAAAAAAAAAAAAAAAAAAAAAAAAAAAAAAAAAAAAA/AAAAAAAAAKCGAQAAAAAAAAAAAAAAAAAMAAAAAQAAAAAAAAAAAAAAAAAAAB8AAABUAAAAW5vVBf///wEAAAAAAAAAAAAAAAAAAAAAAAAAAAAAAAAAAAAAAAAAAAAAAAJ/f38A5+bmA8zMzADAwP8Af39/AAAAAAAAAAAAAAAAAAAAAAAAAAAAIQAAABgAAAAUAAAAKAUAAD8CAADYRQAAZwoAABAAAAAmAAAACAAAAAAAAAAAAAAA"/>
               </a:ext>
             </a:extLst>
           </p:cNvSpPr>
@@ -6170,7 +6287,7 @@
             <a:spLocks noGrp="1" noChangeArrowheads="1"/>
             <a:extLst>
               <a:ext uri="smNativeData">
-                <pr:smNativeData xmlns="smNativeData" xmlns:pr="smNativeData" xmlns:p15="http://schemas.microsoft.com/office/powerpoint/2012/main" xmlns:p14="http://schemas.microsoft.com/office/powerpoint/2010/main" xmlns:mc="http://schemas.openxmlformats.org/markup-compatibility/2006" val="SMDATA_15_FLquaRMAAAAlAAAAZAAAAA0AAAAAkAAAAEgAAACQAAAASAAAAAAAAAAAAAAAAAAAAAEAAABQAAAAAAAAAAAA4D8AAAAAAADgPwAAAAAAAOA/AAAAAAAA4D8AAAAAAADgPwAAAAAAAOA/AAAAAAAA4D8AAAAAAADgPwAAAAAAAOA/AAAAAAAA4D8CAAAAjAAAAAAAAAAAAAAAW5vVDP///wgAAAAAAAAAAAAAAAAAAAAAAAAAAAAAAAAAAAAAZAAAAAEAAABAAAAAAAAAAAAAAAAAAAAAAAAAAAAAAAAAAAAAAAAAAAAAAAAAAAAAAAAAAAAAAAAAAAAAAAAAAAAAAAAAAAAAAAAAAAAAAAAAAAAAAAAAAAAAAAAAAAAAFAAAADwAAAAAAAAAAAAAAAAAAAkUAAAAAQAAABQAAAAUAAAAFAAAAAEAAAAAAAAAZAAAAGQAAAAAAAAAZAAAAGQAAAAVAAAAYAAAAAAAAAAAAAAADwAAACADAAAAAAAAAAAAAAEAAACgMgAAVgcAAKr4//8BAAAAf39/AAEAAABkAAAAAAAAABQAAABAHwAAAAAAACYAAAAAAAAAwOD//wAAAAAmAAAAZAAAABYAAABMAAAAAAAAAAAAAAAEAAAAAAAAAAEAAADn5uYKAAAAACgAAAAoAAAAZAAAAGQAAAAAAAAAzMzMAAAAAABQAAAAUAAAAGQAAABkAAAAAAAAABcAAAAUAAAAAAAAAAAAAAD/fwAA/38AAAAAAAAJAAAABAAAAAAAAAAeAAAAaAAAAAAAAAAAAAAAAAAAAAAAAAAAAAAAECcAABAnAAAAAAAAAAAAAAAAAAAAAAAAAAAAAAAAAAAAAAAAAAAAABQAAAAAAAAAwMD/AAAAAABkAAAAMgAAAAAAAABkAAAAAAAAAH9/fwAKAAAAIgAAABgAAAAAAAAAAAAAAAAAAAAAAAAAAAAAAAAAAAAkAAAAJAAAAAAAAAAHAAAAAAAAAAAAAAAAAAAAAAAAAAAAAAAAAAAAf39/ACUAAABYAAAAAAAAAAAAAAAAAAAAAAAAAAAAAAAAAAAAAAAAAAAAAAAAAAAAAAAAAAAAAAA/AAAAAAAAAKCGAQAAAAAAAAAAAAAAAAAMAAAAAQAAAAAAAAAAAAAAAAAAAB8AAABUAAAAW5vVBf///wEAAAAAAAAAAAAAAAAAAAAAAAAAAAAAAAAAAAAAAAAAAAAAAAJ/f38A5+bmA8zMzADAwP8Af39/AAAAAAAAAAAAAAAAAAAAAAAAAAAAIQAAABgAAAAUAAAAKAUAADsLAADYRQAAACYAABAAAAAmAAAACAAAAAAgAAAAAAAA"/>
+                <pr:smNativeData xmlns:mc="http://schemas.openxmlformats.org/markup-compatibility/2006" xmlns:p14="http://schemas.microsoft.com/office/powerpoint/2010/main" xmlns:p15="http://schemas.microsoft.com/office/powerpoint/2012/main" xmlns:pr="smNativeData" xmlns="smNativeData" val="SMDATA_15_FLquaRMAAAAlAAAAZAAAAA0AAAAAkAAAAEgAAACQAAAASAAAAAAAAAAAAAAAAAAAAAEAAABQAAAAAAAAAAAA4D8AAAAAAADgPwAAAAAAAOA/AAAAAAAA4D8AAAAAAADgPwAAAAAAAOA/AAAAAAAA4D8AAAAAAADgPwAAAAAAAOA/AAAAAAAA4D8CAAAAjAAAAAAAAAAAAAAAW5vVDP///wgAAAAAAAAAAAAAAAAAAAAAAAAAAAAAAAAAAAAAZAAAAAEAAABAAAAAAAAAAAAAAAAAAAAAAAAAAAAAAAAAAAAAAAAAAAAAAAAAAAAAAAAAAAAAAAAAAAAAAAAAAAAAAAAAAAAAAAAAAAAAAAAAAAAAAAAAAAAAAAAAAAAAFAAAADwAAAAAAAAAAAAAAAAAAAkUAAAAAQAAABQAAAAUAAAAFAAAAAEAAAAAAAAAZAAAAGQAAAAAAAAAZAAAAGQAAAAVAAAAYAAAAAAAAAAAAAAADwAAACADAAAAAAAAAAAAAAEAAACgMgAAVgcAAKr4//8BAAAAf39/AAEAAABkAAAAAAAAABQAAABAHwAAAAAAACYAAAAAAAAAwOD//wAAAAAmAAAAZAAAABYAAABMAAAAAAAAAAAAAAAEAAAAAAAAAAEAAADn5uYKAAAAACgAAAAoAAAAZAAAAGQAAAAAAAAAzMzMAAAAAABQAAAAUAAAAGQAAABkAAAAAAAAABcAAAAUAAAAAAAAAAAAAAD/fwAA/38AAAAAAAAJAAAABAAAAAAAAAAeAAAAaAAAAAAAAAAAAAAAAAAAAAAAAAAAAAAAECcAABAnAAAAAAAAAAAAAAAAAAAAAAAAAAAAAAAAAAAAAAAAAAAAABQAAAAAAAAAwMD/AAAAAABkAAAAMgAAAAAAAABkAAAAAAAAAH9/fwAKAAAAIgAAABgAAAAAAAAAAAAAAAAAAAAAAAAAAAAAAAAAAAAkAAAAJAAAAAAAAAAHAAAAAAAAAAAAAAAAAAAAAAAAAAAAAAAAAAAAf39/ACUAAABYAAAAAAAAAAAAAAAAAAAAAAAAAAAAAAAAAAAAAAAAAAAAAAAAAAAAAAAAAAAAAAA/AAAAAAAAAKCGAQAAAAAAAAAAAAAAAAAMAAAAAQAAAAAAAAAAAAAAAAAAAB8AAABUAAAAW5vVBf///wEAAAAAAAAAAAAAAAAAAAAAAAAAAAAAAAAAAAAAAAAAAAAAAAJ/f38A5+bmA8zMzADAwP8Af39/AAAAAAAAAAAAAAAAAAAAAAAAAAAAIQAAABgAAAAUAAAAKAUAADsLAADYRQAAACYAABAAAAAmAAAACAAAAAAgAAAAAAAA"/>
               </a:ext>
             </a:extLst>
           </p:cNvSpPr>
@@ -6355,7 +6472,7 @@
             <a:spLocks noGrp="1" noChangeArrowheads="1"/>
             <a:extLst>
               <a:ext uri="smNativeData">
-                <pr:smNativeData xmlns="smNativeData" xmlns:pr="smNativeData" xmlns:p15="http://schemas.microsoft.com/office/powerpoint/2012/main" xmlns:p14="http://schemas.microsoft.com/office/powerpoint/2010/main" xmlns:mc="http://schemas.openxmlformats.org/markup-compatibility/2006" val="SMDATA_15_FLquaRMAAAAlAAAAZAAAAA0AAAAAkAAAAEgAAACQAAAASAAAAAAAAAABAAAAAAAAAAEAAABQAAAAAAAAAAAA4D8AAAAAAADgPwAAAAAAAOA/AAAAAAAA4D8AAAAAAADgPwAAAAAAAOA/AAAAAAAA4D8AAAAAAADgPwAAAAAAAOA/AAAAAAAA4D8CAAAAjAAAAAAAAAAAAAAAW5vVDP///wgAAAAAAAAAAAAAAAAAAAAAAAAAAAAAAAAAAAAAZAAAAAEAAABAAAAAAAAAAAAAAAAAAAAAAAAAAAAAAAAAAAAAAAAAAAAAAAAAAAAAAAAAAAAAAAAAAAAAAAAAAAAAAAAAAAAAAAAAAAAAAAAAAAAAAAAAAAAAAAAAAAAAFAAAADwAAAAAAAAAAAAAAAAAAAkUAAAAAQAAABQAAAAUAAAAFAAAAAEAAAAAAAAAZAAAAGQAAAAAAAAAZAAAAGQAAAAVAAAAYAAAAAAAAAAAAAAADwAAACADAAAAAAAAAAAAAAEAAACgMgAAVgcAAKr4//8BAAAAf39/AAEAAABkAAAAAAAAABQAAABAHwAAAAAAACYAAAAAAAAAwOD//wAAAAAmAAAAZAAAABYAAABMAAAAAAAAAAAAAAAEAAAAAAAAAAEAAADn5uYKAAAAACgAAAAoAAAAZAAAAGQAAAAAAAAAzMzMAAAAAABQAAAAUAAAAGQAAABkAAAAAAAAABcAAAAUAAAAAAAAAAAAAAD/fwAA/38AAAAAAAAJAAAABAAAAF8AYAAeAAAAaAAAAAAAAAAAAAAAAAAAAAAAAAAAAAAAECcAABAnAAAAAAAAAAAAAAAAAAAAAAAAAAAAAAAAAAAAAAAAAAAAABQAAAAAAAAAwMD/AAAAAABkAAAAMgAAAAAAAABkAAAAAAAAAH9/fwAKAAAAIgAAABgAAAAAAAAAAAAAAAAAAAAAAAAAAAAAAAAAAAAkAAAAJAAAAAAAAAAHAAAAAAAAAAAAAAAAAAAAAAAAAAAAAAAAAAAAf39/ACUAAABYAAAAAAAAAAAAAAAAAAAAAAAAAAAAAAAAAAAAAAAAAAAAAAAAAAAAAAAAAAAAAAA/AAAAAAAAAKCGAQAAAAAAAAAAAAAAAAAMAAAAAQAAAAAAAAAAAAAAAAAAAB8AAABUAAAAW5vVBf///wEAAAAAAAAAAAAAAAAAAAAAAAAAAAAAAAAAAAAAAAAAAAAAAAJ/f38A5+bmA8zMzADAwP8Af39/AAAAAAAAAAAAAAAAAAAAAAAAAAAAIQAAABgAAAAUAAAAKAUAAD8CAADYRQAAZwoAABAAAAAmAAAACAAAAAAgAAAAAAAA"/>
+                <pr:smNativeData xmlns:mc="http://schemas.openxmlformats.org/markup-compatibility/2006" xmlns:p14="http://schemas.microsoft.com/office/powerpoint/2010/main" xmlns:p15="http://schemas.microsoft.com/office/powerpoint/2012/main" xmlns:pr="smNativeData" xmlns="smNativeData" val="SMDATA_15_FLquaRMAAAAlAAAAZAAAAA0AAAAAkAAAAEgAAACQAAAASAAAAAAAAAABAAAAAAAAAAEAAABQAAAAAAAAAAAA4D8AAAAAAADgPwAAAAAAAOA/AAAAAAAA4D8AAAAAAADgPwAAAAAAAOA/AAAAAAAA4D8AAAAAAADgPwAAAAAAAOA/AAAAAAAA4D8CAAAAjAAAAAAAAAAAAAAAW5vVDP///wgAAAAAAAAAAAAAAAAAAAAAAAAAAAAAAAAAAAAAZAAAAAEAAABAAAAAAAAAAAAAAAAAAAAAAAAAAAAAAAAAAAAAAAAAAAAAAAAAAAAAAAAAAAAAAAAAAAAAAAAAAAAAAAAAAAAAAAAAAAAAAAAAAAAAAAAAAAAAAAAAAAAAFAAAADwAAAAAAAAAAAAAAAAAAAkUAAAAAQAAABQAAAAUAAAAFAAAAAEAAAAAAAAAZAAAAGQAAAAAAAAAZAAAAGQAAAAVAAAAYAAAAAAAAAAAAAAADwAAACADAAAAAAAAAAAAAAEAAACgMgAAVgcAAKr4//8BAAAAf39/AAEAAABkAAAAAAAAABQAAABAHwAAAAAAACYAAAAAAAAAwOD//wAAAAAmAAAAZAAAABYAAABMAAAAAAAAAAAAAAAEAAAAAAAAAAEAAADn5uYKAAAAACgAAAAoAAAAZAAAAGQAAAAAAAAAzMzMAAAAAABQAAAAUAAAAGQAAABkAAAAAAAAABcAAAAUAAAAAAAAAAAAAAD/fwAA/38AAAAAAAAJAAAABAAAAF8AYAAeAAAAaAAAAAAAAAAAAAAAAAAAAAAAAAAAAAAAECcAABAnAAAAAAAAAAAAAAAAAAAAAAAAAAAAAAAAAAAAAAAAAAAAABQAAAAAAAAAwMD/AAAAAABkAAAAMgAAAAAAAABkAAAAAAAAAH9/fwAKAAAAIgAAABgAAAAAAAAAAAAAAAAAAAAAAAAAAAAAAAAAAAAkAAAAJAAAAAAAAAAHAAAAAAAAAAAAAAAAAAAAAAAAAAAAAAAAAAAAf39/ACUAAABYAAAAAAAAAAAAAAAAAAAAAAAAAAAAAAAAAAAAAAAAAAAAAAAAAAAAAAAAAAAAAAA/AAAAAAAAAKCGAQAAAAAAAAAAAAAAAAAMAAAAAQAAAAAAAAAAAAAAAAAAAB8AAABUAAAAW5vVBf///wEAAAAAAAAAAAAAAAAAAAAAAAAAAAAAAAAAAAAAAAAAAAAAAAJ/f38A5+bmA8zMzADAwP8Af39/AAAAAAAAAAAAAAAAAAAAAAAAAAAAIQAAABgAAAAUAAAAKAUAAD8CAADYRQAAZwoAABAAAAAmAAAACAAAAAAgAAAAAAAA"/>
               </a:ext>
             </a:extLst>
           </p:cNvSpPr>
@@ -6393,7 +6510,7 @@
             <a:spLocks noGrp="1" noChangeArrowheads="1"/>
             <a:extLst>
               <a:ext uri="smNativeData">
-                <pr:smNativeData xmlns="smNativeData" xmlns:pr="smNativeData" xmlns:p15="http://schemas.microsoft.com/office/powerpoint/2012/main" xmlns:p14="http://schemas.microsoft.com/office/powerpoint/2010/main" xmlns:mc="http://schemas.openxmlformats.org/markup-compatibility/2006" val="SMDATA_15_FLquaRMAAAAlAAAAZAAAAA0AAAAAkAAAAEgAAACQAAAASAAAAAAAAAAAAAAAAAAAAAEAAABQAAAAAAAAAAAA4D8AAAAAAADgPwAAAAAAAOA/AAAAAAAA4D8AAAAAAADgPwAAAAAAAOA/AAAAAAAA4D8AAAAAAADgPwAAAAAAAOA/AAAAAAAA4D8CAAAAjAAAAAAAAAAAAAAAW5vVDP///wgAAAAAAAAAAAAAAAAAAAAAAAAAAAAAAAAAAAAAZAAAAAEAAABAAAAAAAAAAAAAAAAAAAAAAAAAAAAAAAAAAAAAAAAAAAAAAAAAAAAAAAAAAAAAAAAAAAAAAAAAAAAAAAAAAAAAAAAAAAAAAAAAAAAAAAAAAAAAAAAAAAAAFAAAADwAAAAAAAAAAAAAAAAAAAkUAAAAAQAAABQAAAAUAAAAFAAAAAEAAAAAAAAAZAAAAGQAAAAAAAAAZAAAAGQAAAAVAAAAYAAAAAAAAAAAAAAADwAAACADAAAAAAAAAAAAAAEAAACgMgAAVgcAAKr4//8BAAAAf39/AAEAAABkAAAAAAAAABQAAABAHwAAAAAAACYAAAAAAAAAwOD//wAAAAAmAAAAZAAAABYAAABMAAAAAAAAAAAAAAAEAAAAAAAAAAEAAADn5uYKAAAAACgAAAAoAAAAZAAAAGQAAAAAAAAAzMzMAAAAAABQAAAAUAAAAGQAAABkAAAAAAAAABcAAAAUAAAAAAAAAAAAAAD/fwAA/38AAAAAAAAJAAAABAAAAAAAAAAeAAAAaAAAAAAAAAAAAAAAAAAAAAAAAAAAAAAAECcAABAnAAAAAAAAAAAAAAAAAAAAAAAAAAAAAAAAAAAAAAAAAAAAABQAAAAAAAAAwMD/AAAAAABkAAAAMgAAAAAAAABkAAAAAAAAAH9/fwAKAAAAIgAAABgAAAAAAAAAAAAAAAAAAAAAAAAAAAAAAAAAAAAkAAAAJAAAAAAAAAAHAAAAAAAAAAAAAAAAAAAAAAAAAAAAAAAAAAAAf39/ACUAAABYAAAAAAAAAAAAAAAAAAAAAAAAAAAAAAAAAAAAAAAAAAAAAAAAAAAAAAAAAAAAAAA/AAAAAAAAAKCGAQAAAAAAAAAAAAAAAAAMAAAAAQAAAAAAAAAAAAAAAAAAAB8AAABUAAAAW5vVBf///wEAAAAAAAAAAAAAAAAAAAAAAAAAAAAAAAAAAAAAAAAAAAAAAAJ/f38A5+bmA8zMzADAwP8Af39/AAAAAAAAAAAAAAAAAAAAAAAAAAAAIQAAABgAAAAUAAAAKAUAADsLAADYRQAAACYAABAAAAAmAAAACAAAAAAgAAAAAAAA"/>
+                <pr:smNativeData xmlns:mc="http://schemas.openxmlformats.org/markup-compatibility/2006" xmlns:p14="http://schemas.microsoft.com/office/powerpoint/2010/main" xmlns:p15="http://schemas.microsoft.com/office/powerpoint/2012/main" xmlns:pr="smNativeData" xmlns="smNativeData" val="SMDATA_15_FLquaRMAAAAlAAAAZAAAAA0AAAAAkAAAAEgAAACQAAAASAAAAAAAAAAAAAAAAAAAAAEAAABQAAAAAAAAAAAA4D8AAAAAAADgPwAAAAAAAOA/AAAAAAAA4D8AAAAAAADgPwAAAAAAAOA/AAAAAAAA4D8AAAAAAADgPwAAAAAAAOA/AAAAAAAA4D8CAAAAjAAAAAAAAAAAAAAAW5vVDP///wgAAAAAAAAAAAAAAAAAAAAAAAAAAAAAAAAAAAAAZAAAAAEAAABAAAAAAAAAAAAAAAAAAAAAAAAAAAAAAAAAAAAAAAAAAAAAAAAAAAAAAAAAAAAAAAAAAAAAAAAAAAAAAAAAAAAAAAAAAAAAAAAAAAAAAAAAAAAAAAAAAAAAFAAAADwAAAAAAAAAAAAAAAAAAAkUAAAAAQAAABQAAAAUAAAAFAAAAAEAAAAAAAAAZAAAAGQAAAAAAAAAZAAAAGQAAAAVAAAAYAAAAAAAAAAAAAAADwAAACADAAAAAAAAAAAAAAEAAACgMgAAVgcAAKr4//8BAAAAf39/AAEAAABkAAAAAAAAABQAAABAHwAAAAAAACYAAAAAAAAAwOD//wAAAAAmAAAAZAAAABYAAABMAAAAAAAAAAAAAAAEAAAAAAAAAAEAAADn5uYKAAAAACgAAAAoAAAAZAAAAGQAAAAAAAAAzMzMAAAAAABQAAAAUAAAAGQAAABkAAAAAAAAABcAAAAUAAAAAAAAAAAAAAD/fwAA/38AAAAAAAAJAAAABAAAAAAAAAAeAAAAaAAAAAAAAAAAAAAAAAAAAAAAAAAAAAAAECcAABAnAAAAAAAAAAAAAAAAAAAAAAAAAAAAAAAAAAAAAAAAAAAAABQAAAAAAAAAwMD/AAAAAABkAAAAMgAAAAAAAABkAAAAAAAAAH9/fwAKAAAAIgAAABgAAAAAAAAAAAAAAAAAAAAAAAAAAAAAAAAAAAAkAAAAJAAAAAAAAAAHAAAAAAAAAAAAAAAAAAAAAAAAAAAAAAAAAAAAf39/ACUAAABYAAAAAAAAAAAAAAAAAAAAAAAAAAAAAAAAAAAAAAAAAAAAAAAAAAAAAAAAAAAAAAA/AAAAAAAAAKCGAQAAAAAAAAAAAAAAAAAMAAAAAQAAAAAAAAAAAAAAAAAAAB8AAABUAAAAW5vVBf///wEAAAAAAAAAAAAAAAAAAAAAAAAAAAAAAAAAAAAAAAAAAAAAAAJ/f38A5+bmA8zMzADAwP8Af39/AAAAAAAAAAAAAAAAAAAAAAAAAAAAIQAAABgAAAAUAAAAKAUAADsLAADYRQAAACYAABAAAAAmAAAACAAAAAAgAAAAAAAA"/>
               </a:ext>
             </a:extLst>
           </p:cNvSpPr>
